--- a/汇报PPT/最终汇报成果.pptx
+++ b/汇报PPT/最终汇报成果.pptx
@@ -6377,7 +6377,7 @@
         <p:spPr>
           <a:xfrm>
             <a:off x="720000" y="1655999"/>
-            <a:ext cx="10728000" cy="511200"/>
+            <a:ext cx="10728000" cy="583200"/>
           </a:xfrm>
           <a:prstGeom prst="roundRect">
             <a:avLst>
@@ -6425,7 +6425,7 @@
         <p:spPr>
           <a:xfrm>
             <a:off x="720000" y="1655999"/>
-            <a:ext cx="79200" cy="511200"/>
+            <a:ext cx="79200" cy="583200"/>
           </a:xfrm>
           <a:prstGeom prst="rect">
             <a:avLst/>
@@ -6468,8 +6468,43 @@
         </p:nvSpPr>
         <p:spPr>
           <a:xfrm>
-            <a:off x="882000" y="1710000"/>
-            <a:ext cx="540000" cy="396000"/>
+            <a:off x="882000" y="1720799"/>
+            <a:ext cx="540000" cy="360000"/>
+          </a:xfrm>
+          <a:prstGeom prst="rect">
+            <a:avLst/>
+          </a:prstGeom>
+          <a:noFill/>
+        </p:spPr>
+        <p:txBody>
+          <a:bodyPr wrap="none">
+            <a:spAutoFit/>
+          </a:bodyPr>
+          <a:lstStyle/>
+          <a:p>
+            <a:pPr algn="l"/>
+            <a:r>
+              <a:rPr sz="1800" b="1">
+                <a:solidFill>
+                  <a:srgbClr val="2F6EBA"/>
+                </a:solidFill>
+                <a:latin typeface="Microsoft YaHei"/>
+              </a:rPr>
+              <a:t>01</a:t>
+            </a:r>
+          </a:p>
+        </p:txBody>
+      </p:sp>
+      <p:sp>
+        <p:nvSpPr>
+          <p:cNvPr id="9" name="TextBox 8"/>
+          <p:cNvSpPr txBox="1"/>
+          <p:nvPr/>
+        </p:nvSpPr>
+        <p:spPr>
+          <a:xfrm>
+            <a:off x="1296000" y="1710000"/>
+            <a:ext cx="9936000" cy="198000"/>
           </a:xfrm>
           <a:prstGeom prst="rect">
             <a:avLst/>
@@ -6484,27 +6519,27 @@
           <a:p>
             <a:pPr algn="l"/>
             <a:r>
-              <a:rPr sz="2000" b="1">
-                <a:solidFill>
-                  <a:srgbClr val="2F6EBA"/>
-                </a:solidFill>
-                <a:latin typeface="Microsoft YaHei"/>
-              </a:rPr>
-              <a:t>01</a:t>
-            </a:r>
-          </a:p>
-        </p:txBody>
-      </p:sp>
-      <p:sp>
-        <p:nvSpPr>
-          <p:cNvPr id="9" name="TextBox 8"/>
-          <p:cNvSpPr txBox="1"/>
-          <p:nvPr/>
-        </p:nvSpPr>
-        <p:spPr>
-          <a:xfrm>
-            <a:off x="1296000" y="1699200"/>
-            <a:ext cx="9936000" cy="216000"/>
+              <a:rPr sz="1250" b="1">
+                <a:solidFill>
+                  <a:srgbClr val="1F3A68"/>
+                </a:solidFill>
+                <a:latin typeface="Microsoft YaHei"/>
+              </a:rPr>
+              <a:t>ChatDB</a:t>
+            </a:r>
+          </a:p>
+        </p:txBody>
+      </p:sp>
+      <p:sp>
+        <p:nvSpPr>
+          <p:cNvPr id="10" name="TextBox 9"/>
+          <p:cNvSpPr txBox="1"/>
+          <p:nvPr/>
+        </p:nvSpPr>
+        <p:spPr>
+          <a:xfrm>
+            <a:off x="1296000" y="1915199"/>
+            <a:ext cx="9936000" cy="306000"/>
           </a:xfrm>
           <a:prstGeom prst="rect">
             <a:avLst/>
@@ -6519,42 +6554,7 @@
           <a:p>
             <a:pPr algn="l"/>
             <a:r>
-              <a:rPr sz="1300" b="1">
-                <a:solidFill>
-                  <a:srgbClr val="1F3A68"/>
-                </a:solidFill>
-                <a:latin typeface="Microsoft YaHei"/>
-              </a:rPr>
-              <a:t>ChatDB</a:t>
-            </a:r>
-          </a:p>
-        </p:txBody>
-      </p:sp>
-      <p:sp>
-        <p:nvSpPr>
-          <p:cNvPr id="10" name="TextBox 9"/>
-          <p:cNvSpPr txBox="1"/>
-          <p:nvPr/>
-        </p:nvSpPr>
-        <p:spPr>
-          <a:xfrm>
-            <a:off x="1296000" y="1900799"/>
-            <a:ext cx="9936000" cy="251999"/>
-          </a:xfrm>
-          <a:prstGeom prst="rect">
-            <a:avLst/>
-          </a:prstGeom>
-          <a:noFill/>
-        </p:spPr>
-        <p:txBody>
-          <a:bodyPr wrap="square">
-            <a:spAutoFit/>
-          </a:bodyPr>
-          <a:lstStyle/>
-          <a:p>
-            <a:pPr algn="l"/>
-            <a:r>
-              <a:rPr sz="1200" b="0">
+              <a:rPr sz="1150" b="0">
                 <a:solidFill>
                   <a:srgbClr val="555F6E"/>
                 </a:solidFill>
@@ -6573,8 +6573,8 @@
         </p:nvSpPr>
         <p:spPr>
           <a:xfrm>
-            <a:off x="720000" y="2210400"/>
-            <a:ext cx="10728000" cy="511200"/>
+            <a:off x="720000" y="2296800"/>
+            <a:ext cx="10728000" cy="583200"/>
           </a:xfrm>
           <a:prstGeom prst="roundRect">
             <a:avLst>
@@ -6621,8 +6621,8 @@
         </p:nvSpPr>
         <p:spPr>
           <a:xfrm>
-            <a:off x="720000" y="2210400"/>
-            <a:ext cx="79200" cy="511200"/>
+            <a:off x="720000" y="2296800"/>
+            <a:ext cx="79200" cy="583200"/>
           </a:xfrm>
           <a:prstGeom prst="rect">
             <a:avLst/>
@@ -6665,8 +6665,43 @@
         </p:nvSpPr>
         <p:spPr>
           <a:xfrm>
-            <a:off x="882000" y="2264400"/>
-            <a:ext cx="540000" cy="396000"/>
+            <a:off x="882000" y="2361600"/>
+            <a:ext cx="540000" cy="360000"/>
+          </a:xfrm>
+          <a:prstGeom prst="rect">
+            <a:avLst/>
+          </a:prstGeom>
+          <a:noFill/>
+        </p:spPr>
+        <p:txBody>
+          <a:bodyPr wrap="none">
+            <a:spAutoFit/>
+          </a:bodyPr>
+          <a:lstStyle/>
+          <a:p>
+            <a:pPr algn="l"/>
+            <a:r>
+              <a:rPr sz="1800" b="1">
+                <a:solidFill>
+                  <a:srgbClr val="2F6EBA"/>
+                </a:solidFill>
+                <a:latin typeface="Microsoft YaHei"/>
+              </a:rPr>
+              <a:t>02</a:t>
+            </a:r>
+          </a:p>
+        </p:txBody>
+      </p:sp>
+      <p:sp>
+        <p:nvSpPr>
+          <p:cNvPr id="14" name="TextBox 13"/>
+          <p:cNvSpPr txBox="1"/>
+          <p:nvPr/>
+        </p:nvSpPr>
+        <p:spPr>
+          <a:xfrm>
+            <a:off x="1296000" y="2350800"/>
+            <a:ext cx="9936000" cy="198000"/>
           </a:xfrm>
           <a:prstGeom prst="rect">
             <a:avLst/>
@@ -6681,27 +6716,27 @@
           <a:p>
             <a:pPr algn="l"/>
             <a:r>
-              <a:rPr sz="2000" b="1">
-                <a:solidFill>
-                  <a:srgbClr val="2F6EBA"/>
-                </a:solidFill>
-                <a:latin typeface="Microsoft YaHei"/>
-              </a:rPr>
-              <a:t>02</a:t>
-            </a:r>
-          </a:p>
-        </p:txBody>
-      </p:sp>
-      <p:sp>
-        <p:nvSpPr>
-          <p:cNvPr id="14" name="TextBox 13"/>
-          <p:cNvSpPr txBox="1"/>
-          <p:nvPr/>
-        </p:nvSpPr>
-        <p:spPr>
-          <a:xfrm>
-            <a:off x="1296000" y="2253600"/>
-            <a:ext cx="9936000" cy="216000"/>
+              <a:rPr sz="1250" b="1">
+                <a:solidFill>
+                  <a:srgbClr val="1F3A68"/>
+                </a:solidFill>
+                <a:latin typeface="Microsoft YaHei"/>
+              </a:rPr>
+              <a:t>ExpeL</a:t>
+            </a:r>
+          </a:p>
+        </p:txBody>
+      </p:sp>
+      <p:sp>
+        <p:nvSpPr>
+          <p:cNvPr id="15" name="TextBox 14"/>
+          <p:cNvSpPr txBox="1"/>
+          <p:nvPr/>
+        </p:nvSpPr>
+        <p:spPr>
+          <a:xfrm>
+            <a:off x="1296000" y="2556000"/>
+            <a:ext cx="9936000" cy="306000"/>
           </a:xfrm>
           <a:prstGeom prst="rect">
             <a:avLst/>
@@ -6716,42 +6751,7 @@
           <a:p>
             <a:pPr algn="l"/>
             <a:r>
-              <a:rPr sz="1300" b="1">
-                <a:solidFill>
-                  <a:srgbClr val="1F3A68"/>
-                </a:solidFill>
-                <a:latin typeface="Microsoft YaHei"/>
-              </a:rPr>
-              <a:t>ExpeL</a:t>
-            </a:r>
-          </a:p>
-        </p:txBody>
-      </p:sp>
-      <p:sp>
-        <p:nvSpPr>
-          <p:cNvPr id="15" name="TextBox 14"/>
-          <p:cNvSpPr txBox="1"/>
-          <p:nvPr/>
-        </p:nvSpPr>
-        <p:spPr>
-          <a:xfrm>
-            <a:off x="1296000" y="2455200"/>
-            <a:ext cx="9936000" cy="251999"/>
-          </a:xfrm>
-          <a:prstGeom prst="rect">
-            <a:avLst/>
-          </a:prstGeom>
-          <a:noFill/>
-        </p:spPr>
-        <p:txBody>
-          <a:bodyPr wrap="square">
-            <a:spAutoFit/>
-          </a:bodyPr>
-          <a:lstStyle/>
-          <a:p>
-            <a:pPr algn="l"/>
-            <a:r>
-              <a:rPr sz="1200" b="0">
+              <a:rPr sz="1150" b="0">
                 <a:solidFill>
                   <a:srgbClr val="555F6E"/>
                 </a:solidFill>
@@ -6770,8 +6770,8 @@
         </p:nvSpPr>
         <p:spPr>
           <a:xfrm>
-            <a:off x="720000" y="2764800"/>
-            <a:ext cx="10728000" cy="511200"/>
+            <a:off x="720000" y="2937600"/>
+            <a:ext cx="10728000" cy="583200"/>
           </a:xfrm>
           <a:prstGeom prst="roundRect">
             <a:avLst>
@@ -6818,8 +6818,8 @@
         </p:nvSpPr>
         <p:spPr>
           <a:xfrm>
-            <a:off x="720000" y="2764800"/>
-            <a:ext cx="79200" cy="511200"/>
+            <a:off x="720000" y="2937600"/>
+            <a:ext cx="79200" cy="583200"/>
           </a:xfrm>
           <a:prstGeom prst="rect">
             <a:avLst/>
@@ -6862,8 +6862,43 @@
         </p:nvSpPr>
         <p:spPr>
           <a:xfrm>
-            <a:off x="882000" y="2818800"/>
-            <a:ext cx="540000" cy="396000"/>
+            <a:off x="882000" y="3002400"/>
+            <a:ext cx="540000" cy="360000"/>
+          </a:xfrm>
+          <a:prstGeom prst="rect">
+            <a:avLst/>
+          </a:prstGeom>
+          <a:noFill/>
+        </p:spPr>
+        <p:txBody>
+          <a:bodyPr wrap="none">
+            <a:spAutoFit/>
+          </a:bodyPr>
+          <a:lstStyle/>
+          <a:p>
+            <a:pPr algn="l"/>
+            <a:r>
+              <a:rPr sz="1800" b="1">
+                <a:solidFill>
+                  <a:srgbClr val="2F6EBA"/>
+                </a:solidFill>
+                <a:latin typeface="Microsoft YaHei"/>
+              </a:rPr>
+              <a:t>03</a:t>
+            </a:r>
+          </a:p>
+        </p:txBody>
+      </p:sp>
+      <p:sp>
+        <p:nvSpPr>
+          <p:cNvPr id="19" name="TextBox 18"/>
+          <p:cNvSpPr txBox="1"/>
+          <p:nvPr/>
+        </p:nvSpPr>
+        <p:spPr>
+          <a:xfrm>
+            <a:off x="1296000" y="2991600"/>
+            <a:ext cx="9936000" cy="198000"/>
           </a:xfrm>
           <a:prstGeom prst="rect">
             <a:avLst/>
@@ -6878,27 +6913,27 @@
           <a:p>
             <a:pPr algn="l"/>
             <a:r>
-              <a:rPr sz="2000" b="1">
-                <a:solidFill>
-                  <a:srgbClr val="2F6EBA"/>
-                </a:solidFill>
-                <a:latin typeface="Microsoft YaHei"/>
-              </a:rPr>
-              <a:t>03</a:t>
-            </a:r>
-          </a:p>
-        </p:txBody>
-      </p:sp>
-      <p:sp>
-        <p:nvSpPr>
-          <p:cNvPr id="19" name="TextBox 18"/>
-          <p:cNvSpPr txBox="1"/>
-          <p:nvPr/>
-        </p:nvSpPr>
-        <p:spPr>
-          <a:xfrm>
-            <a:off x="1296000" y="2808000"/>
-            <a:ext cx="9936000" cy="216000"/>
+              <a:rPr sz="1250" b="1">
+                <a:solidFill>
+                  <a:srgbClr val="1F3A68"/>
+                </a:solidFill>
+                <a:latin typeface="Microsoft YaHei"/>
+              </a:rPr>
+              <a:t>Reflexion</a:t>
+            </a:r>
+          </a:p>
+        </p:txBody>
+      </p:sp>
+      <p:sp>
+        <p:nvSpPr>
+          <p:cNvPr id="20" name="TextBox 19"/>
+          <p:cNvSpPr txBox="1"/>
+          <p:nvPr/>
+        </p:nvSpPr>
+        <p:spPr>
+          <a:xfrm>
+            <a:off x="1296000" y="3196800"/>
+            <a:ext cx="9936000" cy="306000"/>
           </a:xfrm>
           <a:prstGeom prst="rect">
             <a:avLst/>
@@ -6913,42 +6948,7 @@
           <a:p>
             <a:pPr algn="l"/>
             <a:r>
-              <a:rPr sz="1300" b="1">
-                <a:solidFill>
-                  <a:srgbClr val="1F3A68"/>
-                </a:solidFill>
-                <a:latin typeface="Microsoft YaHei"/>
-              </a:rPr>
-              <a:t>Reflexion</a:t>
-            </a:r>
-          </a:p>
-        </p:txBody>
-      </p:sp>
-      <p:sp>
-        <p:nvSpPr>
-          <p:cNvPr id="20" name="TextBox 19"/>
-          <p:cNvSpPr txBox="1"/>
-          <p:nvPr/>
-        </p:nvSpPr>
-        <p:spPr>
-          <a:xfrm>
-            <a:off x="1296000" y="3009600"/>
-            <a:ext cx="9936000" cy="251999"/>
-          </a:xfrm>
-          <a:prstGeom prst="rect">
-            <a:avLst/>
-          </a:prstGeom>
-          <a:noFill/>
-        </p:spPr>
-        <p:txBody>
-          <a:bodyPr wrap="square">
-            <a:spAutoFit/>
-          </a:bodyPr>
-          <a:lstStyle/>
-          <a:p>
-            <a:pPr algn="l"/>
-            <a:r>
-              <a:rPr sz="1200" b="0">
+              <a:rPr sz="1150" b="0">
                 <a:solidFill>
                   <a:srgbClr val="555F6E"/>
                 </a:solidFill>
@@ -6967,8 +6967,8 @@
         </p:nvSpPr>
         <p:spPr>
           <a:xfrm>
-            <a:off x="720000" y="3319199"/>
-            <a:ext cx="10728000" cy="511200"/>
+            <a:off x="720000" y="3578400"/>
+            <a:ext cx="10728000" cy="583200"/>
           </a:xfrm>
           <a:prstGeom prst="roundRect">
             <a:avLst>
@@ -7015,8 +7015,8 @@
         </p:nvSpPr>
         <p:spPr>
           <a:xfrm>
-            <a:off x="720000" y="3319199"/>
-            <a:ext cx="79200" cy="511200"/>
+            <a:off x="720000" y="3578400"/>
+            <a:ext cx="79200" cy="583200"/>
           </a:xfrm>
           <a:prstGeom prst="rect">
             <a:avLst/>
@@ -7059,8 +7059,43 @@
         </p:nvSpPr>
         <p:spPr>
           <a:xfrm>
-            <a:off x="882000" y="3373199"/>
-            <a:ext cx="540000" cy="396000"/>
+            <a:off x="882000" y="3643199"/>
+            <a:ext cx="540000" cy="360000"/>
+          </a:xfrm>
+          <a:prstGeom prst="rect">
+            <a:avLst/>
+          </a:prstGeom>
+          <a:noFill/>
+        </p:spPr>
+        <p:txBody>
+          <a:bodyPr wrap="none">
+            <a:spAutoFit/>
+          </a:bodyPr>
+          <a:lstStyle/>
+          <a:p>
+            <a:pPr algn="l"/>
+            <a:r>
+              <a:rPr sz="1800" b="1">
+                <a:solidFill>
+                  <a:srgbClr val="2F6EBA"/>
+                </a:solidFill>
+                <a:latin typeface="Microsoft YaHei"/>
+              </a:rPr>
+              <a:t>04</a:t>
+            </a:r>
+          </a:p>
+        </p:txBody>
+      </p:sp>
+      <p:sp>
+        <p:nvSpPr>
+          <p:cNvPr id="24" name="TextBox 23"/>
+          <p:cNvSpPr txBox="1"/>
+          <p:nvPr/>
+        </p:nvSpPr>
+        <p:spPr>
+          <a:xfrm>
+            <a:off x="1296000" y="3632400"/>
+            <a:ext cx="9936000" cy="198000"/>
           </a:xfrm>
           <a:prstGeom prst="rect">
             <a:avLst/>
@@ -7075,27 +7110,27 @@
           <a:p>
             <a:pPr algn="l"/>
             <a:r>
-              <a:rPr sz="2000" b="1">
-                <a:solidFill>
-                  <a:srgbClr val="2F6EBA"/>
-                </a:solidFill>
-                <a:latin typeface="Microsoft YaHei"/>
-              </a:rPr>
-              <a:t>04</a:t>
-            </a:r>
-          </a:p>
-        </p:txBody>
-      </p:sp>
-      <p:sp>
-        <p:nvSpPr>
-          <p:cNvPr id="24" name="TextBox 23"/>
-          <p:cNvSpPr txBox="1"/>
-          <p:nvPr/>
-        </p:nvSpPr>
-        <p:spPr>
-          <a:xfrm>
-            <a:off x="1296000" y="3362399"/>
-            <a:ext cx="9936000" cy="216000"/>
+              <a:rPr sz="1250" b="1">
+                <a:solidFill>
+                  <a:srgbClr val="1F3A68"/>
+                </a:solidFill>
+                <a:latin typeface="Microsoft YaHei"/>
+              </a:rPr>
+              <a:t>MemoryBank</a:t>
+            </a:r>
+          </a:p>
+        </p:txBody>
+      </p:sp>
+      <p:sp>
+        <p:nvSpPr>
+          <p:cNvPr id="25" name="TextBox 24"/>
+          <p:cNvSpPr txBox="1"/>
+          <p:nvPr/>
+        </p:nvSpPr>
+        <p:spPr>
+          <a:xfrm>
+            <a:off x="1296000" y="3837600"/>
+            <a:ext cx="9936000" cy="306000"/>
           </a:xfrm>
           <a:prstGeom prst="rect">
             <a:avLst/>
@@ -7110,42 +7145,7 @@
           <a:p>
             <a:pPr algn="l"/>
             <a:r>
-              <a:rPr sz="1300" b="1">
-                <a:solidFill>
-                  <a:srgbClr val="1F3A68"/>
-                </a:solidFill>
-                <a:latin typeface="Microsoft YaHei"/>
-              </a:rPr>
-              <a:t>MemoryBank</a:t>
-            </a:r>
-          </a:p>
-        </p:txBody>
-      </p:sp>
-      <p:sp>
-        <p:nvSpPr>
-          <p:cNvPr id="25" name="TextBox 24"/>
-          <p:cNvSpPr txBox="1"/>
-          <p:nvPr/>
-        </p:nvSpPr>
-        <p:spPr>
-          <a:xfrm>
-            <a:off x="1296000" y="3563999"/>
-            <a:ext cx="9936000" cy="251999"/>
-          </a:xfrm>
-          <a:prstGeom prst="rect">
-            <a:avLst/>
-          </a:prstGeom>
-          <a:noFill/>
-        </p:spPr>
-        <p:txBody>
-          <a:bodyPr wrap="square">
-            <a:spAutoFit/>
-          </a:bodyPr>
-          <a:lstStyle/>
-          <a:p>
-            <a:pPr algn="l"/>
-            <a:r>
-              <a:rPr sz="1200" b="0">
+              <a:rPr sz="1150" b="0">
                 <a:solidFill>
                   <a:srgbClr val="555F6E"/>
                 </a:solidFill>
@@ -7164,8 +7164,8 @@
         </p:nvSpPr>
         <p:spPr>
           <a:xfrm>
-            <a:off x="720000" y="3873599"/>
-            <a:ext cx="10728000" cy="511200"/>
+            <a:off x="720000" y="4219200"/>
+            <a:ext cx="10728000" cy="583200"/>
           </a:xfrm>
           <a:prstGeom prst="roundRect">
             <a:avLst>
@@ -7212,8 +7212,8 @@
         </p:nvSpPr>
         <p:spPr>
           <a:xfrm>
-            <a:off x="720000" y="3873599"/>
-            <a:ext cx="79200" cy="511200"/>
+            <a:off x="720000" y="4219200"/>
+            <a:ext cx="79200" cy="583200"/>
           </a:xfrm>
           <a:prstGeom prst="rect">
             <a:avLst/>
@@ -7256,8 +7256,43 @@
         </p:nvSpPr>
         <p:spPr>
           <a:xfrm>
-            <a:off x="882000" y="3927599"/>
-            <a:ext cx="540000" cy="396000"/>
+            <a:off x="882000" y="4283999"/>
+            <a:ext cx="540000" cy="360000"/>
+          </a:xfrm>
+          <a:prstGeom prst="rect">
+            <a:avLst/>
+          </a:prstGeom>
+          <a:noFill/>
+        </p:spPr>
+        <p:txBody>
+          <a:bodyPr wrap="none">
+            <a:spAutoFit/>
+          </a:bodyPr>
+          <a:lstStyle/>
+          <a:p>
+            <a:pPr algn="l"/>
+            <a:r>
+              <a:rPr sz="1800" b="1">
+                <a:solidFill>
+                  <a:srgbClr val="2F6EBA"/>
+                </a:solidFill>
+                <a:latin typeface="Microsoft YaHei"/>
+              </a:rPr>
+              <a:t>05</a:t>
+            </a:r>
+          </a:p>
+        </p:txBody>
+      </p:sp>
+      <p:sp>
+        <p:nvSpPr>
+          <p:cNvPr id="29" name="TextBox 28"/>
+          <p:cNvSpPr txBox="1"/>
+          <p:nvPr/>
+        </p:nvSpPr>
+        <p:spPr>
+          <a:xfrm>
+            <a:off x="1296000" y="4273200"/>
+            <a:ext cx="9936000" cy="198000"/>
           </a:xfrm>
           <a:prstGeom prst="rect">
             <a:avLst/>
@@ -7272,27 +7307,27 @@
           <a:p>
             <a:pPr algn="l"/>
             <a:r>
-              <a:rPr sz="2000" b="1">
-                <a:solidFill>
-                  <a:srgbClr val="2F6EBA"/>
-                </a:solidFill>
-                <a:latin typeface="Microsoft YaHei"/>
-              </a:rPr>
-              <a:t>05</a:t>
-            </a:r>
-          </a:p>
-        </p:txBody>
-      </p:sp>
-      <p:sp>
-        <p:nvSpPr>
-          <p:cNvPr id="29" name="TextBox 28"/>
-          <p:cNvSpPr txBox="1"/>
-          <p:nvPr/>
-        </p:nvSpPr>
-        <p:spPr>
-          <a:xfrm>
-            <a:off x="1296000" y="3916799"/>
-            <a:ext cx="9936000" cy="216000"/>
+              <a:rPr sz="1250" b="1">
+                <a:solidFill>
+                  <a:srgbClr val="1F3A68"/>
+                </a:solidFill>
+                <a:latin typeface="Microsoft YaHei"/>
+              </a:rPr>
+              <a:t>Zep</a:t>
+            </a:r>
+          </a:p>
+        </p:txBody>
+      </p:sp>
+      <p:sp>
+        <p:nvSpPr>
+          <p:cNvPr id="30" name="TextBox 29"/>
+          <p:cNvSpPr txBox="1"/>
+          <p:nvPr/>
+        </p:nvSpPr>
+        <p:spPr>
+          <a:xfrm>
+            <a:off x="1296000" y="4478400"/>
+            <a:ext cx="9936000" cy="306000"/>
           </a:xfrm>
           <a:prstGeom prst="rect">
             <a:avLst/>
@@ -7307,42 +7342,7 @@
           <a:p>
             <a:pPr algn="l"/>
             <a:r>
-              <a:rPr sz="1300" b="1">
-                <a:solidFill>
-                  <a:srgbClr val="1F3A68"/>
-                </a:solidFill>
-                <a:latin typeface="Microsoft YaHei"/>
-              </a:rPr>
-              <a:t>Zep</a:t>
-            </a:r>
-          </a:p>
-        </p:txBody>
-      </p:sp>
-      <p:sp>
-        <p:nvSpPr>
-          <p:cNvPr id="30" name="TextBox 29"/>
-          <p:cNvSpPr txBox="1"/>
-          <p:nvPr/>
-        </p:nvSpPr>
-        <p:spPr>
-          <a:xfrm>
-            <a:off x="1296000" y="4118399"/>
-            <a:ext cx="9936000" cy="251999"/>
-          </a:xfrm>
-          <a:prstGeom prst="rect">
-            <a:avLst/>
-          </a:prstGeom>
-          <a:noFill/>
-        </p:spPr>
-        <p:txBody>
-          <a:bodyPr wrap="square">
-            <a:spAutoFit/>
-          </a:bodyPr>
-          <a:lstStyle/>
-          <a:p>
-            <a:pPr algn="l"/>
-            <a:r>
-              <a:rPr sz="1200" b="0">
+              <a:rPr sz="1150" b="0">
                 <a:solidFill>
                   <a:srgbClr val="555F6E"/>
                 </a:solidFill>
@@ -7361,8 +7361,8 @@
         </p:nvSpPr>
         <p:spPr>
           <a:xfrm>
-            <a:off x="720000" y="4427999"/>
-            <a:ext cx="10728000" cy="511200"/>
+            <a:off x="720000" y="4859999"/>
+            <a:ext cx="10728000" cy="583200"/>
           </a:xfrm>
           <a:prstGeom prst="roundRect">
             <a:avLst>
@@ -7409,8 +7409,8 @@
         </p:nvSpPr>
         <p:spPr>
           <a:xfrm>
-            <a:off x="720000" y="4427999"/>
-            <a:ext cx="79200" cy="511200"/>
+            <a:off x="720000" y="4859999"/>
+            <a:ext cx="79200" cy="583200"/>
           </a:xfrm>
           <a:prstGeom prst="rect">
             <a:avLst/>
@@ -7453,8 +7453,43 @@
         </p:nvSpPr>
         <p:spPr>
           <a:xfrm>
-            <a:off x="882000" y="4481999"/>
-            <a:ext cx="540000" cy="396000"/>
+            <a:off x="882000" y="4924799"/>
+            <a:ext cx="540000" cy="360000"/>
+          </a:xfrm>
+          <a:prstGeom prst="rect">
+            <a:avLst/>
+          </a:prstGeom>
+          <a:noFill/>
+        </p:spPr>
+        <p:txBody>
+          <a:bodyPr wrap="none">
+            <a:spAutoFit/>
+          </a:bodyPr>
+          <a:lstStyle/>
+          <a:p>
+            <a:pPr algn="l"/>
+            <a:r>
+              <a:rPr sz="1800" b="1">
+                <a:solidFill>
+                  <a:srgbClr val="2F6EBA"/>
+                </a:solidFill>
+                <a:latin typeface="Microsoft YaHei"/>
+              </a:rPr>
+              <a:t>06</a:t>
+            </a:r>
+          </a:p>
+        </p:txBody>
+      </p:sp>
+      <p:sp>
+        <p:nvSpPr>
+          <p:cNvPr id="34" name="TextBox 33"/>
+          <p:cNvSpPr txBox="1"/>
+          <p:nvPr/>
+        </p:nvSpPr>
+        <p:spPr>
+          <a:xfrm>
+            <a:off x="1296000" y="4913999"/>
+            <a:ext cx="9936000" cy="198000"/>
           </a:xfrm>
           <a:prstGeom prst="rect">
             <a:avLst/>
@@ -7469,27 +7504,27 @@
           <a:p>
             <a:pPr algn="l"/>
             <a:r>
-              <a:rPr sz="2000" b="1">
-                <a:solidFill>
-                  <a:srgbClr val="2F6EBA"/>
-                </a:solidFill>
-                <a:latin typeface="Microsoft YaHei"/>
-              </a:rPr>
-              <a:t>06</a:t>
-            </a:r>
-          </a:p>
-        </p:txBody>
-      </p:sp>
-      <p:sp>
-        <p:nvSpPr>
-          <p:cNvPr id="34" name="TextBox 33"/>
-          <p:cNvSpPr txBox="1"/>
-          <p:nvPr/>
-        </p:nvSpPr>
-        <p:spPr>
-          <a:xfrm>
-            <a:off x="1296000" y="4471199"/>
-            <a:ext cx="9936000" cy="216000"/>
+              <a:rPr sz="1250" b="1">
+                <a:solidFill>
+                  <a:srgbClr val="1F3A68"/>
+                </a:solidFill>
+                <a:latin typeface="Microsoft YaHei"/>
+              </a:rPr>
+              <a:t>MIRIX / TiM</a:t>
+            </a:r>
+          </a:p>
+        </p:txBody>
+      </p:sp>
+      <p:sp>
+        <p:nvSpPr>
+          <p:cNvPr id="35" name="TextBox 34"/>
+          <p:cNvSpPr txBox="1"/>
+          <p:nvPr/>
+        </p:nvSpPr>
+        <p:spPr>
+          <a:xfrm>
+            <a:off x="1296000" y="5119200"/>
+            <a:ext cx="9936000" cy="306000"/>
           </a:xfrm>
           <a:prstGeom prst="rect">
             <a:avLst/>
@@ -7504,42 +7539,7 @@
           <a:p>
             <a:pPr algn="l"/>
             <a:r>
-              <a:rPr sz="1300" b="1">
-                <a:solidFill>
-                  <a:srgbClr val="1F3A68"/>
-                </a:solidFill>
-                <a:latin typeface="Microsoft YaHei"/>
-              </a:rPr>
-              <a:t>MIRIX / TiM</a:t>
-            </a:r>
-          </a:p>
-        </p:txBody>
-      </p:sp>
-      <p:sp>
-        <p:nvSpPr>
-          <p:cNvPr id="35" name="TextBox 34"/>
-          <p:cNvSpPr txBox="1"/>
-          <p:nvPr/>
-        </p:nvSpPr>
-        <p:spPr>
-          <a:xfrm>
-            <a:off x="1296000" y="4672799"/>
-            <a:ext cx="9936000" cy="251999"/>
-          </a:xfrm>
-          <a:prstGeom prst="rect">
-            <a:avLst/>
-          </a:prstGeom>
-          <a:noFill/>
-        </p:spPr>
-        <p:txBody>
-          <a:bodyPr wrap="square">
-            <a:spAutoFit/>
-          </a:bodyPr>
-          <a:lstStyle/>
-          <a:p>
-            <a:pPr algn="l"/>
-            <a:r>
-              <a:rPr sz="1200" b="0">
+              <a:rPr sz="1150" b="0">
                 <a:solidFill>
                   <a:srgbClr val="555F6E"/>
                 </a:solidFill>
@@ -7927,7 +7927,7 @@
         </p:nvSpPr>
         <p:spPr>
           <a:xfrm>
-            <a:off x="792000" y="2095200"/>
+            <a:off x="792000" y="2167200"/>
             <a:ext cx="251999" cy="251999"/>
           </a:xfrm>
           <a:prstGeom prst="rect">
@@ -7943,7 +7943,7 @@
           <a:p>
             <a:pPr algn="l"/>
             <a:r>
-              <a:rPr sz="1500" b="1">
+              <a:rPr sz="1400" b="1">
                 <a:solidFill>
                   <a:srgbClr val="2F6EBA"/>
                 </a:solidFill>
@@ -7962,7 +7962,7 @@
         </p:nvSpPr>
         <p:spPr>
           <a:xfrm>
-            <a:off x="1080000" y="2070000"/>
+            <a:off x="1080000" y="2167200"/>
             <a:ext cx="4878000" cy="216000"/>
           </a:xfrm>
           <a:prstGeom prst="rect">
@@ -7978,7 +7978,7 @@
           <a:p>
             <a:pPr algn="l"/>
             <a:r>
-              <a:rPr sz="1350" b="1">
+              <a:rPr sz="1250" b="1">
                 <a:solidFill>
                   <a:srgbClr val="1F3A68"/>
                 </a:solidFill>
@@ -7997,8 +7997,8 @@
         </p:nvSpPr>
         <p:spPr>
           <a:xfrm>
-            <a:off x="1080000" y="2268000"/>
-            <a:ext cx="4878000" cy="251999"/>
+            <a:off x="1080000" y="2376000"/>
+            <a:ext cx="4878000" cy="288000"/>
           </a:xfrm>
           <a:prstGeom prst="rect">
             <a:avLst/>
@@ -8013,7 +8013,7 @@
           <a:p>
             <a:pPr algn="l"/>
             <a:r>
-              <a:rPr sz="1200" b="0">
+              <a:rPr sz="1150" b="0">
                 <a:solidFill>
                   <a:srgbClr val="555F6E"/>
                 </a:solidFill>
@@ -8032,7 +8032,7 @@
         </p:nvSpPr>
         <p:spPr>
           <a:xfrm>
-            <a:off x="792000" y="2527200"/>
+            <a:off x="792000" y="2797200"/>
             <a:ext cx="251999" cy="251999"/>
           </a:xfrm>
           <a:prstGeom prst="rect">
@@ -8048,7 +8048,7 @@
           <a:p>
             <a:pPr algn="l"/>
             <a:r>
-              <a:rPr sz="1500" b="1">
+              <a:rPr sz="1400" b="1">
                 <a:solidFill>
                   <a:srgbClr val="2F6EBA"/>
                 </a:solidFill>
@@ -8067,7 +8067,7 @@
         </p:nvSpPr>
         <p:spPr>
           <a:xfrm>
-            <a:off x="1080000" y="2502000"/>
+            <a:off x="1080000" y="2797200"/>
             <a:ext cx="4878000" cy="216000"/>
           </a:xfrm>
           <a:prstGeom prst="rect">
@@ -8083,7 +8083,7 @@
           <a:p>
             <a:pPr algn="l"/>
             <a:r>
-              <a:rPr sz="1350" b="1">
+              <a:rPr sz="1250" b="1">
                 <a:solidFill>
                   <a:srgbClr val="1F3A68"/>
                 </a:solidFill>
@@ -8102,8 +8102,8 @@
         </p:nvSpPr>
         <p:spPr>
           <a:xfrm>
-            <a:off x="1080000" y="2700000"/>
-            <a:ext cx="4878000" cy="251999"/>
+            <a:off x="1080000" y="3006000"/>
+            <a:ext cx="4878000" cy="288000"/>
           </a:xfrm>
           <a:prstGeom prst="rect">
             <a:avLst/>
@@ -8118,7 +8118,7 @@
           <a:p>
             <a:pPr algn="l"/>
             <a:r>
-              <a:rPr sz="1200" b="0">
+              <a:rPr sz="1150" b="0">
                 <a:solidFill>
                   <a:srgbClr val="555F6E"/>
                 </a:solidFill>
@@ -8137,7 +8137,7 @@
         </p:nvSpPr>
         <p:spPr>
           <a:xfrm>
-            <a:off x="792000" y="2959200"/>
+            <a:off x="792000" y="3427200"/>
             <a:ext cx="251999" cy="251999"/>
           </a:xfrm>
           <a:prstGeom prst="rect">
@@ -8153,7 +8153,7 @@
           <a:p>
             <a:pPr algn="l"/>
             <a:r>
-              <a:rPr sz="1500" b="1">
+              <a:rPr sz="1400" b="1">
                 <a:solidFill>
                   <a:srgbClr val="2F6EBA"/>
                 </a:solidFill>
@@ -8172,7 +8172,7 @@
         </p:nvSpPr>
         <p:spPr>
           <a:xfrm>
-            <a:off x="1080000" y="2934000"/>
+            <a:off x="1080000" y="3427200"/>
             <a:ext cx="4878000" cy="216000"/>
           </a:xfrm>
           <a:prstGeom prst="rect">
@@ -8188,7 +8188,7 @@
           <a:p>
             <a:pPr algn="l"/>
             <a:r>
-              <a:rPr sz="1350" b="1">
+              <a:rPr sz="1250" b="1">
                 <a:solidFill>
                   <a:srgbClr val="1F3A68"/>
                 </a:solidFill>
@@ -8207,8 +8207,8 @@
         </p:nvSpPr>
         <p:spPr>
           <a:xfrm>
-            <a:off x="1080000" y="3132000"/>
-            <a:ext cx="4878000" cy="251999"/>
+            <a:off x="1080000" y="3636000"/>
+            <a:ext cx="4878000" cy="288000"/>
           </a:xfrm>
           <a:prstGeom prst="rect">
             <a:avLst/>
@@ -8223,7 +8223,7 @@
           <a:p>
             <a:pPr algn="l"/>
             <a:r>
-              <a:rPr sz="1200" b="0">
+              <a:rPr sz="1150" b="0">
                 <a:solidFill>
                   <a:srgbClr val="555F6E"/>
                 </a:solidFill>
@@ -8242,7 +8242,7 @@
         </p:nvSpPr>
         <p:spPr>
           <a:xfrm>
-            <a:off x="792000" y="3438000"/>
+            <a:off x="792000" y="4086000"/>
             <a:ext cx="5310000" cy="7200"/>
           </a:xfrm>
           <a:prstGeom prst="rect">
@@ -8365,7 +8365,7 @@
         </p:nvSpPr>
         <p:spPr>
           <a:xfrm>
-            <a:off x="6678000" y="2095200"/>
+            <a:off x="6678000" y="2167200"/>
             <a:ext cx="251999" cy="251999"/>
           </a:xfrm>
           <a:prstGeom prst="rect">
@@ -8381,7 +8381,7 @@
           <a:p>
             <a:pPr algn="l"/>
             <a:r>
-              <a:rPr sz="1500" b="1">
+              <a:rPr sz="1400" b="1">
                 <a:solidFill>
                   <a:srgbClr val="2F6EBA"/>
                 </a:solidFill>
@@ -8400,7 +8400,7 @@
         </p:nvSpPr>
         <p:spPr>
           <a:xfrm>
-            <a:off x="6966000" y="2070000"/>
+            <a:off x="6966000" y="2167200"/>
             <a:ext cx="4878000" cy="216000"/>
           </a:xfrm>
           <a:prstGeom prst="rect">
@@ -8416,7 +8416,7 @@
           <a:p>
             <a:pPr algn="l"/>
             <a:r>
-              <a:rPr sz="1350" b="1">
+              <a:rPr sz="1250" b="1">
                 <a:solidFill>
                   <a:srgbClr val="1F3A68"/>
                 </a:solidFill>
@@ -8435,8 +8435,8 @@
         </p:nvSpPr>
         <p:spPr>
           <a:xfrm>
-            <a:off x="6966000" y="2268000"/>
-            <a:ext cx="4878000" cy="251999"/>
+            <a:off x="6966000" y="2376000"/>
+            <a:ext cx="4878000" cy="288000"/>
           </a:xfrm>
           <a:prstGeom prst="rect">
             <a:avLst/>
@@ -8451,7 +8451,7 @@
           <a:p>
             <a:pPr algn="l"/>
             <a:r>
-              <a:rPr sz="1200" b="0">
+              <a:rPr sz="1150" b="0">
                 <a:solidFill>
                   <a:srgbClr val="555F6E"/>
                 </a:solidFill>
@@ -8470,7 +8470,7 @@
         </p:nvSpPr>
         <p:spPr>
           <a:xfrm>
-            <a:off x="6678000" y="2527200"/>
+            <a:off x="6678000" y="2797200"/>
             <a:ext cx="251999" cy="251999"/>
           </a:xfrm>
           <a:prstGeom prst="rect">
@@ -8486,7 +8486,7 @@
           <a:p>
             <a:pPr algn="l"/>
             <a:r>
-              <a:rPr sz="1500" b="1">
+              <a:rPr sz="1400" b="1">
                 <a:solidFill>
                   <a:srgbClr val="2F6EBA"/>
                 </a:solidFill>
@@ -8505,7 +8505,7 @@
         </p:nvSpPr>
         <p:spPr>
           <a:xfrm>
-            <a:off x="6966000" y="2502000"/>
+            <a:off x="6966000" y="2797200"/>
             <a:ext cx="4878000" cy="216000"/>
           </a:xfrm>
           <a:prstGeom prst="rect">
@@ -8521,7 +8521,7 @@
           <a:p>
             <a:pPr algn="l"/>
             <a:r>
-              <a:rPr sz="1350" b="1">
+              <a:rPr sz="1250" b="1">
                 <a:solidFill>
                   <a:srgbClr val="1F3A68"/>
                 </a:solidFill>
@@ -8540,8 +8540,8 @@
         </p:nvSpPr>
         <p:spPr>
           <a:xfrm>
-            <a:off x="6966000" y="2700000"/>
-            <a:ext cx="4878000" cy="251999"/>
+            <a:off x="6966000" y="3006000"/>
+            <a:ext cx="4878000" cy="288000"/>
           </a:xfrm>
           <a:prstGeom prst="rect">
             <a:avLst/>
@@ -8556,7 +8556,7 @@
           <a:p>
             <a:pPr algn="l"/>
             <a:r>
-              <a:rPr sz="1200" b="0">
+              <a:rPr sz="1150" b="0">
                 <a:solidFill>
                   <a:srgbClr val="555F6E"/>
                 </a:solidFill>
@@ -8575,7 +8575,7 @@
         </p:nvSpPr>
         <p:spPr>
           <a:xfrm>
-            <a:off x="6678000" y="3006000"/>
+            <a:off x="6678000" y="3456000"/>
             <a:ext cx="5310000" cy="7200"/>
           </a:xfrm>
           <a:prstGeom prst="rect">
@@ -9256,8 +9256,43 @@
         </p:nvSpPr>
         <p:spPr>
           <a:xfrm>
-            <a:off x="882000" y="1710000"/>
-            <a:ext cx="540000" cy="396000"/>
+            <a:off x="882000" y="1720799"/>
+            <a:ext cx="540000" cy="360000"/>
+          </a:xfrm>
+          <a:prstGeom prst="rect">
+            <a:avLst/>
+          </a:prstGeom>
+          <a:noFill/>
+        </p:spPr>
+        <p:txBody>
+          <a:bodyPr wrap="none">
+            <a:spAutoFit/>
+          </a:bodyPr>
+          <a:lstStyle/>
+          <a:p>
+            <a:pPr algn="l"/>
+            <a:r>
+              <a:rPr sz="1800" b="1">
+                <a:solidFill>
+                  <a:srgbClr val="2F6EBA"/>
+                </a:solidFill>
+                <a:latin typeface="Microsoft YaHei"/>
+              </a:rPr>
+              <a:t>01</a:t>
+            </a:r>
+          </a:p>
+        </p:txBody>
+      </p:sp>
+      <p:sp>
+        <p:nvSpPr>
+          <p:cNvPr id="9" name="TextBox 8"/>
+          <p:cNvSpPr txBox="1"/>
+          <p:nvPr/>
+        </p:nvSpPr>
+        <p:spPr>
+          <a:xfrm>
+            <a:off x="1296000" y="1710000"/>
+            <a:ext cx="5616000" cy="198000"/>
           </a:xfrm>
           <a:prstGeom prst="rect">
             <a:avLst/>
@@ -9272,27 +9307,27 @@
           <a:p>
             <a:pPr algn="l"/>
             <a:r>
-              <a:rPr sz="2000" b="1">
-                <a:solidFill>
-                  <a:srgbClr val="2F6EBA"/>
-                </a:solidFill>
-                <a:latin typeface="Microsoft YaHei"/>
-              </a:rPr>
-              <a:t>01</a:t>
-            </a:r>
-          </a:p>
-        </p:txBody>
-      </p:sp>
-      <p:sp>
-        <p:nvSpPr>
-          <p:cNvPr id="9" name="TextBox 8"/>
-          <p:cNvSpPr txBox="1"/>
-          <p:nvPr/>
-        </p:nvSpPr>
-        <p:spPr>
-          <a:xfrm>
-            <a:off x="1296000" y="1699200"/>
-            <a:ext cx="5616000" cy="216000"/>
+              <a:rPr sz="1500" b="1">
+                <a:solidFill>
+                  <a:srgbClr val="1F3A68"/>
+                </a:solidFill>
+                <a:latin typeface="Microsoft YaHei"/>
+              </a:rPr>
+              <a:t>四层</a:t>
+            </a:r>
+          </a:p>
+        </p:txBody>
+      </p:sp>
+      <p:sp>
+        <p:nvSpPr>
+          <p:cNvPr id="10" name="TextBox 9"/>
+          <p:cNvSpPr txBox="1"/>
+          <p:nvPr/>
+        </p:nvSpPr>
+        <p:spPr>
+          <a:xfrm>
+            <a:off x="1296000" y="1915199"/>
+            <a:ext cx="5616000" cy="306000"/>
           </a:xfrm>
           <a:prstGeom prst="rect">
             <a:avLst/>
@@ -9307,42 +9342,7 @@
           <a:p>
             <a:pPr algn="l"/>
             <a:r>
-              <a:rPr sz="1600" b="1">
-                <a:solidFill>
-                  <a:srgbClr val="1F3A68"/>
-                </a:solidFill>
-                <a:latin typeface="Microsoft YaHei"/>
-              </a:rPr>
-              <a:t>四层</a:t>
-            </a:r>
-          </a:p>
-        </p:txBody>
-      </p:sp>
-      <p:sp>
-        <p:nvSpPr>
-          <p:cNvPr id="10" name="TextBox 9"/>
-          <p:cNvSpPr txBox="1"/>
-          <p:nvPr/>
-        </p:nvSpPr>
-        <p:spPr>
-          <a:xfrm>
-            <a:off x="1296000" y="1900799"/>
-            <a:ext cx="5616000" cy="251999"/>
-          </a:xfrm>
-          <a:prstGeom prst="rect">
-            <a:avLst/>
-          </a:prstGeom>
-          <a:noFill/>
-        </p:spPr>
-        <p:txBody>
-          <a:bodyPr wrap="square">
-            <a:spAutoFit/>
-          </a:bodyPr>
-          <a:lstStyle/>
-          <a:p>
-            <a:pPr algn="l"/>
-            <a:r>
-              <a:rPr sz="1350" b="0">
+              <a:rPr sz="1300" b="0">
                 <a:solidFill>
                   <a:srgbClr val="555F6E"/>
                 </a:solidFill>
@@ -9453,8 +9453,43 @@
         </p:nvSpPr>
         <p:spPr>
           <a:xfrm>
-            <a:off x="882000" y="2545200"/>
-            <a:ext cx="540000" cy="396000"/>
+            <a:off x="882000" y="2556000"/>
+            <a:ext cx="540000" cy="360000"/>
+          </a:xfrm>
+          <a:prstGeom prst="rect">
+            <a:avLst/>
+          </a:prstGeom>
+          <a:noFill/>
+        </p:spPr>
+        <p:txBody>
+          <a:bodyPr wrap="none">
+            <a:spAutoFit/>
+          </a:bodyPr>
+          <a:lstStyle/>
+          <a:p>
+            <a:pPr algn="l"/>
+            <a:r>
+              <a:rPr sz="1800" b="1">
+                <a:solidFill>
+                  <a:srgbClr val="2F6EBA"/>
+                </a:solidFill>
+                <a:latin typeface="Microsoft YaHei"/>
+              </a:rPr>
+              <a:t>02</a:t>
+            </a:r>
+          </a:p>
+        </p:txBody>
+      </p:sp>
+      <p:sp>
+        <p:nvSpPr>
+          <p:cNvPr id="14" name="TextBox 13"/>
+          <p:cNvSpPr txBox="1"/>
+          <p:nvPr/>
+        </p:nvSpPr>
+        <p:spPr>
+          <a:xfrm>
+            <a:off x="1296000" y="2545200"/>
+            <a:ext cx="5616000" cy="198000"/>
           </a:xfrm>
           <a:prstGeom prst="rect">
             <a:avLst/>
@@ -9469,27 +9504,27 @@
           <a:p>
             <a:pPr algn="l"/>
             <a:r>
-              <a:rPr sz="2000" b="1">
-                <a:solidFill>
-                  <a:srgbClr val="2F6EBA"/>
-                </a:solidFill>
-                <a:latin typeface="Microsoft YaHei"/>
-              </a:rPr>
-              <a:t>02</a:t>
-            </a:r>
-          </a:p>
-        </p:txBody>
-      </p:sp>
-      <p:sp>
-        <p:nvSpPr>
-          <p:cNvPr id="14" name="TextBox 13"/>
-          <p:cNvSpPr txBox="1"/>
-          <p:nvPr/>
-        </p:nvSpPr>
-        <p:spPr>
-          <a:xfrm>
-            <a:off x="1296000" y="2534400"/>
-            <a:ext cx="5616000" cy="216000"/>
+              <a:rPr sz="1500" b="1">
+                <a:solidFill>
+                  <a:srgbClr val="1F3A68"/>
+                </a:solidFill>
+                <a:latin typeface="Microsoft YaHei"/>
+              </a:rPr>
+              <a:t>能力层四模块互不依赖</a:t>
+            </a:r>
+          </a:p>
+        </p:txBody>
+      </p:sp>
+      <p:sp>
+        <p:nvSpPr>
+          <p:cNvPr id="15" name="TextBox 14"/>
+          <p:cNvSpPr txBox="1"/>
+          <p:nvPr/>
+        </p:nvSpPr>
+        <p:spPr>
+          <a:xfrm>
+            <a:off x="1296000" y="2750400"/>
+            <a:ext cx="5616000" cy="306000"/>
           </a:xfrm>
           <a:prstGeom prst="rect">
             <a:avLst/>
@@ -9504,42 +9539,7 @@
           <a:p>
             <a:pPr algn="l"/>
             <a:r>
-              <a:rPr sz="1600" b="1">
-                <a:solidFill>
-                  <a:srgbClr val="1F3A68"/>
-                </a:solidFill>
-                <a:latin typeface="Microsoft YaHei"/>
-              </a:rPr>
-              <a:t>能力层四模块互不依赖</a:t>
-            </a:r>
-          </a:p>
-        </p:txBody>
-      </p:sp>
-      <p:sp>
-        <p:nvSpPr>
-          <p:cNvPr id="15" name="TextBox 14"/>
-          <p:cNvSpPr txBox="1"/>
-          <p:nvPr/>
-        </p:nvSpPr>
-        <p:spPr>
-          <a:xfrm>
-            <a:off x="1296000" y="2736000"/>
-            <a:ext cx="5616000" cy="251999"/>
-          </a:xfrm>
-          <a:prstGeom prst="rect">
-            <a:avLst/>
-          </a:prstGeom>
-          <a:noFill/>
-        </p:spPr>
-        <p:txBody>
-          <a:bodyPr wrap="square">
-            <a:spAutoFit/>
-          </a:bodyPr>
-          <a:lstStyle/>
-          <a:p>
-            <a:pPr algn="l"/>
-            <a:r>
-              <a:rPr sz="1350" b="0">
+              <a:rPr sz="1300" b="0">
                 <a:solidFill>
                   <a:srgbClr val="555F6E"/>
                 </a:solidFill>
@@ -9650,8 +9650,43 @@
         </p:nvSpPr>
         <p:spPr>
           <a:xfrm>
-            <a:off x="882000" y="3380400"/>
-            <a:ext cx="540000" cy="396000"/>
+            <a:off x="882000" y="3391200"/>
+            <a:ext cx="540000" cy="360000"/>
+          </a:xfrm>
+          <a:prstGeom prst="rect">
+            <a:avLst/>
+          </a:prstGeom>
+          <a:noFill/>
+        </p:spPr>
+        <p:txBody>
+          <a:bodyPr wrap="none">
+            <a:spAutoFit/>
+          </a:bodyPr>
+          <a:lstStyle/>
+          <a:p>
+            <a:pPr algn="l"/>
+            <a:r>
+              <a:rPr sz="1800" b="1">
+                <a:solidFill>
+                  <a:srgbClr val="2F6EBA"/>
+                </a:solidFill>
+                <a:latin typeface="Microsoft YaHei"/>
+              </a:rPr>
+              <a:t>03</a:t>
+            </a:r>
+          </a:p>
+        </p:txBody>
+      </p:sp>
+      <p:sp>
+        <p:nvSpPr>
+          <p:cNvPr id="19" name="TextBox 18"/>
+          <p:cNvSpPr txBox="1"/>
+          <p:nvPr/>
+        </p:nvSpPr>
+        <p:spPr>
+          <a:xfrm>
+            <a:off x="1296000" y="3380400"/>
+            <a:ext cx="5616000" cy="198000"/>
           </a:xfrm>
           <a:prstGeom prst="rect">
             <a:avLst/>
@@ -9666,27 +9701,27 @@
           <a:p>
             <a:pPr algn="l"/>
             <a:r>
-              <a:rPr sz="2000" b="1">
-                <a:solidFill>
-                  <a:srgbClr val="2F6EBA"/>
-                </a:solidFill>
-                <a:latin typeface="Microsoft YaHei"/>
-              </a:rPr>
-              <a:t>03</a:t>
-            </a:r>
-          </a:p>
-        </p:txBody>
-      </p:sp>
-      <p:sp>
-        <p:nvSpPr>
-          <p:cNvPr id="19" name="TextBox 18"/>
-          <p:cNvSpPr txBox="1"/>
-          <p:nvPr/>
-        </p:nvSpPr>
-        <p:spPr>
-          <a:xfrm>
-            <a:off x="1296000" y="3369600"/>
-            <a:ext cx="5616000" cy="216000"/>
+              <a:rPr sz="1500" b="1">
+                <a:solidFill>
+                  <a:srgbClr val="1F3A68"/>
+                </a:solidFill>
+                <a:latin typeface="Microsoft YaHei"/>
+              </a:rPr>
+              <a:t>两层之间唯一写通道</a:t>
+            </a:r>
+          </a:p>
+        </p:txBody>
+      </p:sp>
+      <p:sp>
+        <p:nvSpPr>
+          <p:cNvPr id="20" name="TextBox 19"/>
+          <p:cNvSpPr txBox="1"/>
+          <p:nvPr/>
+        </p:nvSpPr>
+        <p:spPr>
+          <a:xfrm>
+            <a:off x="1296000" y="3585600"/>
+            <a:ext cx="5616000" cy="306000"/>
           </a:xfrm>
           <a:prstGeom prst="rect">
             <a:avLst/>
@@ -9701,42 +9736,7 @@
           <a:p>
             <a:pPr algn="l"/>
             <a:r>
-              <a:rPr sz="1600" b="1">
-                <a:solidFill>
-                  <a:srgbClr val="1F3A68"/>
-                </a:solidFill>
-                <a:latin typeface="Microsoft YaHei"/>
-              </a:rPr>
-              <a:t>两层之间唯一写通道</a:t>
-            </a:r>
-          </a:p>
-        </p:txBody>
-      </p:sp>
-      <p:sp>
-        <p:nvSpPr>
-          <p:cNvPr id="20" name="TextBox 19"/>
-          <p:cNvSpPr txBox="1"/>
-          <p:nvPr/>
-        </p:nvSpPr>
-        <p:spPr>
-          <a:xfrm>
-            <a:off x="1296000" y="3571200"/>
-            <a:ext cx="5616000" cy="251999"/>
-          </a:xfrm>
-          <a:prstGeom prst="rect">
-            <a:avLst/>
-          </a:prstGeom>
-          <a:noFill/>
-        </p:spPr>
-        <p:txBody>
-          <a:bodyPr wrap="square">
-            <a:spAutoFit/>
-          </a:bodyPr>
-          <a:lstStyle/>
-          <a:p>
-            <a:pPr algn="l"/>
-            <a:r>
-              <a:rPr sz="1350" b="0">
+              <a:rPr sz="1300" b="0">
                 <a:solidFill>
                   <a:srgbClr val="555F6E"/>
                 </a:solidFill>
@@ -9847,8 +9847,43 @@
         </p:nvSpPr>
         <p:spPr>
           <a:xfrm>
-            <a:off x="882000" y="4215600"/>
-            <a:ext cx="540000" cy="396000"/>
+            <a:off x="882000" y="4226400"/>
+            <a:ext cx="540000" cy="360000"/>
+          </a:xfrm>
+          <a:prstGeom prst="rect">
+            <a:avLst/>
+          </a:prstGeom>
+          <a:noFill/>
+        </p:spPr>
+        <p:txBody>
+          <a:bodyPr wrap="none">
+            <a:spAutoFit/>
+          </a:bodyPr>
+          <a:lstStyle/>
+          <a:p>
+            <a:pPr algn="l"/>
+            <a:r>
+              <a:rPr sz="1800" b="1">
+                <a:solidFill>
+                  <a:srgbClr val="2F6EBA"/>
+                </a:solidFill>
+                <a:latin typeface="Microsoft YaHei"/>
+              </a:rPr>
+              <a:t>04</a:t>
+            </a:r>
+          </a:p>
+        </p:txBody>
+      </p:sp>
+      <p:sp>
+        <p:nvSpPr>
+          <p:cNvPr id="24" name="TextBox 23"/>
+          <p:cNvSpPr txBox="1"/>
+          <p:nvPr/>
+        </p:nvSpPr>
+        <p:spPr>
+          <a:xfrm>
+            <a:off x="1296000" y="4215600"/>
+            <a:ext cx="5616000" cy="198000"/>
           </a:xfrm>
           <a:prstGeom prst="rect">
             <a:avLst/>
@@ -9863,27 +9898,27 @@
           <a:p>
             <a:pPr algn="l"/>
             <a:r>
-              <a:rPr sz="2000" b="1">
-                <a:solidFill>
-                  <a:srgbClr val="2F6EBA"/>
-                </a:solidFill>
-                <a:latin typeface="Microsoft YaHei"/>
-              </a:rPr>
-              <a:t>04</a:t>
-            </a:r>
-          </a:p>
-        </p:txBody>
-      </p:sp>
-      <p:sp>
-        <p:nvSpPr>
-          <p:cNvPr id="24" name="TextBox 23"/>
-          <p:cNvSpPr txBox="1"/>
-          <p:nvPr/>
-        </p:nvSpPr>
-        <p:spPr>
-          <a:xfrm>
-            <a:off x="1296000" y="4204800"/>
-            <a:ext cx="5616000" cy="216000"/>
+              <a:rPr sz="1500" b="1">
+                <a:solidFill>
+                  <a:srgbClr val="1F3A68"/>
+                </a:solidFill>
+                <a:latin typeface="Microsoft YaHei"/>
+              </a:rPr>
+              <a:t>可独立消融</a:t>
+            </a:r>
+          </a:p>
+        </p:txBody>
+      </p:sp>
+      <p:sp>
+        <p:nvSpPr>
+          <p:cNvPr id="25" name="TextBox 24"/>
+          <p:cNvSpPr txBox="1"/>
+          <p:nvPr/>
+        </p:nvSpPr>
+        <p:spPr>
+          <a:xfrm>
+            <a:off x="1296000" y="4420800"/>
+            <a:ext cx="5616000" cy="306000"/>
           </a:xfrm>
           <a:prstGeom prst="rect">
             <a:avLst/>
@@ -9898,42 +9933,7 @@
           <a:p>
             <a:pPr algn="l"/>
             <a:r>
-              <a:rPr sz="1600" b="1">
-                <a:solidFill>
-                  <a:srgbClr val="1F3A68"/>
-                </a:solidFill>
-                <a:latin typeface="Microsoft YaHei"/>
-              </a:rPr>
-              <a:t>可独立消融</a:t>
-            </a:r>
-          </a:p>
-        </p:txBody>
-      </p:sp>
-      <p:sp>
-        <p:nvSpPr>
-          <p:cNvPr id="25" name="TextBox 24"/>
-          <p:cNvSpPr txBox="1"/>
-          <p:nvPr/>
-        </p:nvSpPr>
-        <p:spPr>
-          <a:xfrm>
-            <a:off x="1296000" y="4406400"/>
-            <a:ext cx="5616000" cy="251999"/>
-          </a:xfrm>
-          <a:prstGeom prst="rect">
-            <a:avLst/>
-          </a:prstGeom>
-          <a:noFill/>
-        </p:spPr>
-        <p:txBody>
-          <a:bodyPr wrap="square">
-            <a:spAutoFit/>
-          </a:bodyPr>
-          <a:lstStyle/>
-          <a:p>
-            <a:pPr algn="l"/>
-            <a:r>
-              <a:rPr sz="1350" b="0">
+              <a:rPr sz="1300" b="0">
                 <a:solidFill>
                   <a:srgbClr val="555F6E"/>
                 </a:solidFill>
@@ -10380,8 +10380,8 @@
         </p:nvSpPr>
         <p:spPr>
           <a:xfrm>
-            <a:off x="900000" y="1728000"/>
-            <a:ext cx="9936000" cy="288000"/>
+            <a:off x="900000" y="1735200"/>
+            <a:ext cx="9936000" cy="342000"/>
           </a:xfrm>
           <a:prstGeom prst="rect">
             <a:avLst/>
@@ -10396,7 +10396,7 @@
           <a:p>
             <a:pPr algn="l"/>
             <a:r>
-              <a:rPr sz="1450" b="0">
+              <a:rPr sz="1400" b="0">
                 <a:solidFill>
                   <a:srgbClr val="222830"/>
                 </a:solidFill>
@@ -10507,8 +10507,8 @@
         </p:nvSpPr>
         <p:spPr>
           <a:xfrm>
-            <a:off x="900000" y="2340000"/>
-            <a:ext cx="9936000" cy="288000"/>
+            <a:off x="900000" y="2347200"/>
+            <a:ext cx="9936000" cy="342000"/>
           </a:xfrm>
           <a:prstGeom prst="rect">
             <a:avLst/>
@@ -10523,7 +10523,7 @@
           <a:p>
             <a:pPr algn="l"/>
             <a:r>
-              <a:rPr sz="1450" b="0">
+              <a:rPr sz="1400" b="0">
                 <a:solidFill>
                   <a:srgbClr val="222830"/>
                 </a:solidFill>
@@ -10634,8 +10634,8 @@
         </p:nvSpPr>
         <p:spPr>
           <a:xfrm>
-            <a:off x="900000" y="2851200"/>
-            <a:ext cx="9936000" cy="216000"/>
+            <a:off x="900000" y="2862000"/>
+            <a:ext cx="9936000" cy="198000"/>
           </a:xfrm>
           <a:prstGeom prst="rect">
             <a:avLst/>
@@ -10650,7 +10650,7 @@
           <a:p>
             <a:pPr algn="l"/>
             <a:r>
-              <a:rPr sz="1600" b="1">
+              <a:rPr sz="1500" b="1">
                 <a:solidFill>
                   <a:srgbClr val="1F3A68"/>
                 </a:solidFill>
@@ -10669,8 +10669,8 @@
         </p:nvSpPr>
         <p:spPr>
           <a:xfrm>
-            <a:off x="900000" y="3052800"/>
-            <a:ext cx="9936000" cy="251999"/>
+            <a:off x="900000" y="3067200"/>
+            <a:ext cx="9936000" cy="306000"/>
           </a:xfrm>
           <a:prstGeom prst="rect">
             <a:avLst/>
@@ -10685,7 +10685,7 @@
           <a:p>
             <a:pPr algn="l"/>
             <a:r>
-              <a:rPr sz="1350" b="0">
+              <a:rPr sz="1300" b="0">
                 <a:solidFill>
                   <a:srgbClr val="555F6E"/>
                 </a:solidFill>
@@ -11378,8 +11378,8 @@
         </p:nvSpPr>
         <p:spPr>
           <a:xfrm>
-            <a:off x="900000" y="1627200"/>
-            <a:ext cx="9936000" cy="216000"/>
+            <a:off x="900000" y="1638000"/>
+            <a:ext cx="9936000" cy="198000"/>
           </a:xfrm>
           <a:prstGeom prst="rect">
             <a:avLst/>
@@ -11394,7 +11394,7 @@
           <a:p>
             <a:pPr algn="l"/>
             <a:r>
-              <a:rPr sz="1600" b="1">
+              <a:rPr sz="1500" b="1">
                 <a:solidFill>
                   <a:srgbClr val="1F3A68"/>
                 </a:solidFill>
@@ -11413,8 +11413,8 @@
         </p:nvSpPr>
         <p:spPr>
           <a:xfrm>
-            <a:off x="900000" y="1828800"/>
-            <a:ext cx="9936000" cy="251999"/>
+            <a:off x="900000" y="1843200"/>
+            <a:ext cx="9936000" cy="306000"/>
           </a:xfrm>
           <a:prstGeom prst="rect">
             <a:avLst/>
@@ -11429,7 +11429,7 @@
           <a:p>
             <a:pPr algn="l"/>
             <a:r>
-              <a:rPr sz="1350" b="0">
+              <a:rPr sz="1300" b="0">
                 <a:solidFill>
                   <a:srgbClr val="555F6E"/>
                 </a:solidFill>
@@ -11540,8 +11540,8 @@
         </p:nvSpPr>
         <p:spPr>
           <a:xfrm>
-            <a:off x="900000" y="2340000"/>
-            <a:ext cx="9936000" cy="288000"/>
+            <a:off x="900000" y="2347200"/>
+            <a:ext cx="9936000" cy="342000"/>
           </a:xfrm>
           <a:prstGeom prst="rect">
             <a:avLst/>
@@ -11556,7 +11556,7 @@
           <a:p>
             <a:pPr algn="l"/>
             <a:r>
-              <a:rPr sz="1450" b="0">
+              <a:rPr sz="1400" b="0">
                 <a:solidFill>
                   <a:srgbClr val="222830"/>
                 </a:solidFill>
@@ -11667,8 +11667,8 @@
         </p:nvSpPr>
         <p:spPr>
           <a:xfrm>
-            <a:off x="900000" y="2851200"/>
-            <a:ext cx="9936000" cy="216000"/>
+            <a:off x="900000" y="2862000"/>
+            <a:ext cx="9936000" cy="198000"/>
           </a:xfrm>
           <a:prstGeom prst="rect">
             <a:avLst/>
@@ -11683,7 +11683,7 @@
           <a:p>
             <a:pPr algn="l"/>
             <a:r>
-              <a:rPr sz="1600" b="1">
+              <a:rPr sz="1500" b="1">
                 <a:solidFill>
                   <a:srgbClr val="1F3A68"/>
                 </a:solidFill>
@@ -11702,8 +11702,8 @@
         </p:nvSpPr>
         <p:spPr>
           <a:xfrm>
-            <a:off x="900000" y="3052800"/>
-            <a:ext cx="9936000" cy="251999"/>
+            <a:off x="900000" y="3067200"/>
+            <a:ext cx="9936000" cy="306000"/>
           </a:xfrm>
           <a:prstGeom prst="rect">
             <a:avLst/>
@@ -11718,7 +11718,7 @@
           <a:p>
             <a:pPr algn="l"/>
             <a:r>
-              <a:rPr sz="1350" b="0">
+              <a:rPr sz="1300" b="0">
                 <a:solidFill>
                   <a:srgbClr val="555F6E"/>
                 </a:solidFill>
@@ -12327,8 +12327,8 @@
         </p:nvSpPr>
         <p:spPr>
           <a:xfrm>
-            <a:off x="900000" y="1728000"/>
-            <a:ext cx="9936000" cy="288000"/>
+            <a:off x="900000" y="1735200"/>
+            <a:ext cx="9936000" cy="342000"/>
           </a:xfrm>
           <a:prstGeom prst="rect">
             <a:avLst/>
@@ -12343,7 +12343,7 @@
           <a:p>
             <a:pPr algn="l"/>
             <a:r>
-              <a:rPr sz="1450" b="0">
+              <a:rPr sz="1400" b="0">
                 <a:solidFill>
                   <a:srgbClr val="222830"/>
                 </a:solidFill>
@@ -12454,8 +12454,8 @@
         </p:nvSpPr>
         <p:spPr>
           <a:xfrm>
-            <a:off x="900000" y="2239200"/>
-            <a:ext cx="9936000" cy="216000"/>
+            <a:off x="900000" y="2250000"/>
+            <a:ext cx="9936000" cy="198000"/>
           </a:xfrm>
           <a:prstGeom prst="rect">
             <a:avLst/>
@@ -12470,7 +12470,7 @@
           <a:p>
             <a:pPr algn="l"/>
             <a:r>
-              <a:rPr sz="1600" b="1">
+              <a:rPr sz="1500" b="1">
                 <a:solidFill>
                   <a:srgbClr val="1F3A68"/>
                 </a:solidFill>
@@ -12489,8 +12489,8 @@
         </p:nvSpPr>
         <p:spPr>
           <a:xfrm>
-            <a:off x="900000" y="2440800"/>
-            <a:ext cx="9936000" cy="251999"/>
+            <a:off x="900000" y="2455200"/>
+            <a:ext cx="9936000" cy="306000"/>
           </a:xfrm>
           <a:prstGeom prst="rect">
             <a:avLst/>
@@ -12505,7 +12505,7 @@
           <a:p>
             <a:pPr algn="l"/>
             <a:r>
-              <a:rPr sz="1350" b="0">
+              <a:rPr sz="1300" b="0">
                 <a:solidFill>
                   <a:srgbClr val="555F6E"/>
                 </a:solidFill>
@@ -12616,8 +12616,8 @@
         </p:nvSpPr>
         <p:spPr>
           <a:xfrm>
-            <a:off x="900000" y="2851200"/>
-            <a:ext cx="9936000" cy="216000"/>
+            <a:off x="900000" y="2862000"/>
+            <a:ext cx="9936000" cy="198000"/>
           </a:xfrm>
           <a:prstGeom prst="rect">
             <a:avLst/>
@@ -12632,7 +12632,7 @@
           <a:p>
             <a:pPr algn="l"/>
             <a:r>
-              <a:rPr sz="1600" b="1">
+              <a:rPr sz="1500" b="1">
                 <a:solidFill>
                   <a:srgbClr val="1F3A68"/>
                 </a:solidFill>
@@ -12651,8 +12651,8 @@
         </p:nvSpPr>
         <p:spPr>
           <a:xfrm>
-            <a:off x="900000" y="3052800"/>
-            <a:ext cx="9936000" cy="251999"/>
+            <a:off x="900000" y="3067200"/>
+            <a:ext cx="9936000" cy="306000"/>
           </a:xfrm>
           <a:prstGeom prst="rect">
             <a:avLst/>
@@ -12667,7 +12667,7 @@
           <a:p>
             <a:pPr algn="l"/>
             <a:r>
-              <a:rPr sz="1350" b="0">
+              <a:rPr sz="1300" b="0">
                 <a:solidFill>
                   <a:srgbClr val="555F6E"/>
                 </a:solidFill>
@@ -13360,8 +13360,8 @@
         </p:nvSpPr>
         <p:spPr>
           <a:xfrm>
-            <a:off x="900000" y="1627200"/>
-            <a:ext cx="9936000" cy="216000"/>
+            <a:off x="900000" y="1638000"/>
+            <a:ext cx="9936000" cy="198000"/>
           </a:xfrm>
           <a:prstGeom prst="rect">
             <a:avLst/>
@@ -13376,7 +13376,7 @@
           <a:p>
             <a:pPr algn="l"/>
             <a:r>
-              <a:rPr sz="1600" b="1">
+              <a:rPr sz="1500" b="1">
                 <a:solidFill>
                   <a:srgbClr val="1F3A68"/>
                 </a:solidFill>
@@ -13395,8 +13395,8 @@
         </p:nvSpPr>
         <p:spPr>
           <a:xfrm>
-            <a:off x="900000" y="1828800"/>
-            <a:ext cx="9936000" cy="251999"/>
+            <a:off x="900000" y="1843200"/>
+            <a:ext cx="9936000" cy="306000"/>
           </a:xfrm>
           <a:prstGeom prst="rect">
             <a:avLst/>
@@ -13411,7 +13411,7 @@
           <a:p>
             <a:pPr algn="l"/>
             <a:r>
-              <a:rPr sz="1350" b="0">
+              <a:rPr sz="1300" b="0">
                 <a:solidFill>
                   <a:srgbClr val="555F6E"/>
                 </a:solidFill>
@@ -13522,8 +13522,8 @@
         </p:nvSpPr>
         <p:spPr>
           <a:xfrm>
-            <a:off x="900000" y="2239200"/>
-            <a:ext cx="9936000" cy="216000"/>
+            <a:off x="900000" y="2250000"/>
+            <a:ext cx="9936000" cy="198000"/>
           </a:xfrm>
           <a:prstGeom prst="rect">
             <a:avLst/>
@@ -13538,7 +13538,7 @@
           <a:p>
             <a:pPr algn="l"/>
             <a:r>
-              <a:rPr sz="1600" b="1">
+              <a:rPr sz="1500" b="1">
                 <a:solidFill>
                   <a:srgbClr val="1F3A68"/>
                 </a:solidFill>
@@ -13557,8 +13557,8 @@
         </p:nvSpPr>
         <p:spPr>
           <a:xfrm>
-            <a:off x="900000" y="2440800"/>
-            <a:ext cx="9936000" cy="251999"/>
+            <a:off x="900000" y="2455200"/>
+            <a:ext cx="9936000" cy="306000"/>
           </a:xfrm>
           <a:prstGeom prst="rect">
             <a:avLst/>
@@ -13573,7 +13573,7 @@
           <a:p>
             <a:pPr algn="l"/>
             <a:r>
-              <a:rPr sz="1350" b="0">
+              <a:rPr sz="1300" b="0">
                 <a:solidFill>
                   <a:srgbClr val="555F6E"/>
                 </a:solidFill>
@@ -13684,8 +13684,8 @@
         </p:nvSpPr>
         <p:spPr>
           <a:xfrm>
-            <a:off x="900000" y="2851200"/>
-            <a:ext cx="9936000" cy="216000"/>
+            <a:off x="900000" y="2862000"/>
+            <a:ext cx="9936000" cy="198000"/>
           </a:xfrm>
           <a:prstGeom prst="rect">
             <a:avLst/>
@@ -13700,7 +13700,7 @@
           <a:p>
             <a:pPr algn="l"/>
             <a:r>
-              <a:rPr sz="1600" b="1">
+              <a:rPr sz="1500" b="1">
                 <a:solidFill>
                   <a:srgbClr val="1F3A68"/>
                 </a:solidFill>
@@ -13719,8 +13719,8 @@
         </p:nvSpPr>
         <p:spPr>
           <a:xfrm>
-            <a:off x="900000" y="3052800"/>
-            <a:ext cx="9936000" cy="251999"/>
+            <a:off x="900000" y="3067200"/>
+            <a:ext cx="9936000" cy="306000"/>
           </a:xfrm>
           <a:prstGeom prst="rect">
             <a:avLst/>
@@ -13735,7 +13735,7 @@
           <a:p>
             <a:pPr algn="l"/>
             <a:r>
-              <a:rPr sz="1350" b="0">
+              <a:rPr sz="1300" b="0">
                 <a:solidFill>
                   <a:srgbClr val="555F6E"/>
                 </a:solidFill>
@@ -14428,8 +14428,43 @@
         </p:nvSpPr>
         <p:spPr>
           <a:xfrm>
-            <a:off x="882000" y="1710000"/>
-            <a:ext cx="540000" cy="396000"/>
+            <a:off x="882000" y="1720799"/>
+            <a:ext cx="540000" cy="360000"/>
+          </a:xfrm>
+          <a:prstGeom prst="rect">
+            <a:avLst/>
+          </a:prstGeom>
+          <a:noFill/>
+        </p:spPr>
+        <p:txBody>
+          <a:bodyPr wrap="none">
+            <a:spAutoFit/>
+          </a:bodyPr>
+          <a:lstStyle/>
+          <a:p>
+            <a:pPr algn="l"/>
+            <a:r>
+              <a:rPr sz="1800" b="1">
+                <a:solidFill>
+                  <a:srgbClr val="2F6EBA"/>
+                </a:solidFill>
+                <a:latin typeface="Microsoft YaHei"/>
+              </a:rPr>
+              <a:t>01</a:t>
+            </a:r>
+          </a:p>
+        </p:txBody>
+      </p:sp>
+      <p:sp>
+        <p:nvSpPr>
+          <p:cNvPr id="9" name="TextBox 8"/>
+          <p:cNvSpPr txBox="1"/>
+          <p:nvPr/>
+        </p:nvSpPr>
+        <p:spPr>
+          <a:xfrm>
+            <a:off x="1296000" y="1710000"/>
+            <a:ext cx="9936000" cy="198000"/>
           </a:xfrm>
           <a:prstGeom prst="rect">
             <a:avLst/>
@@ -14444,27 +14479,27 @@
           <a:p>
             <a:pPr algn="l"/>
             <a:r>
-              <a:rPr sz="2000" b="1">
-                <a:solidFill>
-                  <a:srgbClr val="2F6EBA"/>
-                </a:solidFill>
-                <a:latin typeface="Microsoft YaHei"/>
-              </a:rPr>
-              <a:t>01</a:t>
-            </a:r>
-          </a:p>
-        </p:txBody>
-      </p:sp>
-      <p:sp>
-        <p:nvSpPr>
-          <p:cNvPr id="9" name="TextBox 8"/>
-          <p:cNvSpPr txBox="1"/>
-          <p:nvPr/>
-        </p:nvSpPr>
-        <p:spPr>
-          <a:xfrm>
-            <a:off x="1296000" y="1699200"/>
-            <a:ext cx="9936000" cy="216000"/>
+              <a:rPr sz="1500" b="1">
+                <a:solidFill>
+                  <a:srgbClr val="1F3A68"/>
+                </a:solidFill>
+                <a:latin typeface="Microsoft YaHei"/>
+              </a:rPr>
+              <a:t>复盘晋升经三道门</a:t>
+            </a:r>
+          </a:p>
+        </p:txBody>
+      </p:sp>
+      <p:sp>
+        <p:nvSpPr>
+          <p:cNvPr id="10" name="TextBox 9"/>
+          <p:cNvSpPr txBox="1"/>
+          <p:nvPr/>
+        </p:nvSpPr>
+        <p:spPr>
+          <a:xfrm>
+            <a:off x="1296000" y="1915199"/>
+            <a:ext cx="9936000" cy="306000"/>
           </a:xfrm>
           <a:prstGeom prst="rect">
             <a:avLst/>
@@ -14479,42 +14514,7 @@
           <a:p>
             <a:pPr algn="l"/>
             <a:r>
-              <a:rPr sz="1600" b="1">
-                <a:solidFill>
-                  <a:srgbClr val="1F3A68"/>
-                </a:solidFill>
-                <a:latin typeface="Microsoft YaHei"/>
-              </a:rPr>
-              <a:t>复盘晋升经三道门</a:t>
-            </a:r>
-          </a:p>
-        </p:txBody>
-      </p:sp>
-      <p:sp>
-        <p:nvSpPr>
-          <p:cNvPr id="10" name="TextBox 9"/>
-          <p:cNvSpPr txBox="1"/>
-          <p:nvPr/>
-        </p:nvSpPr>
-        <p:spPr>
-          <a:xfrm>
-            <a:off x="1296000" y="1900799"/>
-            <a:ext cx="9936000" cy="251999"/>
-          </a:xfrm>
-          <a:prstGeom prst="rect">
-            <a:avLst/>
-          </a:prstGeom>
-          <a:noFill/>
-        </p:spPr>
-        <p:txBody>
-          <a:bodyPr wrap="square">
-            <a:spAutoFit/>
-          </a:bodyPr>
-          <a:lstStyle/>
-          <a:p>
-            <a:pPr algn="l"/>
-            <a:r>
-              <a:rPr sz="1350" b="0">
+              <a:rPr sz="1300" b="0">
                 <a:solidFill>
                   <a:srgbClr val="555F6E"/>
                 </a:solidFill>
@@ -14625,8 +14625,43 @@
         </p:nvSpPr>
         <p:spPr>
           <a:xfrm>
-            <a:off x="882000" y="2545200"/>
-            <a:ext cx="540000" cy="396000"/>
+            <a:off x="882000" y="2556000"/>
+            <a:ext cx="540000" cy="360000"/>
+          </a:xfrm>
+          <a:prstGeom prst="rect">
+            <a:avLst/>
+          </a:prstGeom>
+          <a:noFill/>
+        </p:spPr>
+        <p:txBody>
+          <a:bodyPr wrap="none">
+            <a:spAutoFit/>
+          </a:bodyPr>
+          <a:lstStyle/>
+          <a:p>
+            <a:pPr algn="l"/>
+            <a:r>
+              <a:rPr sz="1800" b="1">
+                <a:solidFill>
+                  <a:srgbClr val="2F6EBA"/>
+                </a:solidFill>
+                <a:latin typeface="Microsoft YaHei"/>
+              </a:rPr>
+              <a:t>02</a:t>
+            </a:r>
+          </a:p>
+        </p:txBody>
+      </p:sp>
+      <p:sp>
+        <p:nvSpPr>
+          <p:cNvPr id="14" name="TextBox 13"/>
+          <p:cNvSpPr txBox="1"/>
+          <p:nvPr/>
+        </p:nvSpPr>
+        <p:spPr>
+          <a:xfrm>
+            <a:off x="1296000" y="2642400"/>
+            <a:ext cx="9936000" cy="342000"/>
           </a:xfrm>
           <a:prstGeom prst="rect">
             <a:avLst/>
@@ -14641,42 +14676,7 @@
           <a:p>
             <a:pPr algn="l"/>
             <a:r>
-              <a:rPr sz="2000" b="1">
-                <a:solidFill>
-                  <a:srgbClr val="2F6EBA"/>
-                </a:solidFill>
-                <a:latin typeface="Microsoft YaHei"/>
-              </a:rPr>
-              <a:t>02</a:t>
-            </a:r>
-          </a:p>
-        </p:txBody>
-      </p:sp>
-      <p:sp>
-        <p:nvSpPr>
-          <p:cNvPr id="14" name="TextBox 13"/>
-          <p:cNvSpPr txBox="1"/>
-          <p:nvPr/>
-        </p:nvSpPr>
-        <p:spPr>
-          <a:xfrm>
-            <a:off x="1296000" y="2635200"/>
-            <a:ext cx="9936000" cy="288000"/>
-          </a:xfrm>
-          <a:prstGeom prst="rect">
-            <a:avLst/>
-          </a:prstGeom>
-          <a:noFill/>
-        </p:spPr>
-        <p:txBody>
-          <a:bodyPr wrap="square">
-            <a:spAutoFit/>
-          </a:bodyPr>
-          <a:lstStyle/>
-          <a:p>
-            <a:pPr algn="l"/>
-            <a:r>
-              <a:rPr sz="1450" b="0">
+              <a:rPr sz="1400" b="0">
                 <a:solidFill>
                   <a:srgbClr val="222830"/>
                 </a:solidFill>
@@ -14787,8 +14787,43 @@
         </p:nvSpPr>
         <p:spPr>
           <a:xfrm>
-            <a:off x="882000" y="3380400"/>
-            <a:ext cx="540000" cy="396000"/>
+            <a:off x="882000" y="3391200"/>
+            <a:ext cx="540000" cy="360000"/>
+          </a:xfrm>
+          <a:prstGeom prst="rect">
+            <a:avLst/>
+          </a:prstGeom>
+          <a:noFill/>
+        </p:spPr>
+        <p:txBody>
+          <a:bodyPr wrap="none">
+            <a:spAutoFit/>
+          </a:bodyPr>
+          <a:lstStyle/>
+          <a:p>
+            <a:pPr algn="l"/>
+            <a:r>
+              <a:rPr sz="1800" b="1">
+                <a:solidFill>
+                  <a:srgbClr val="2F6EBA"/>
+                </a:solidFill>
+                <a:latin typeface="Microsoft YaHei"/>
+              </a:rPr>
+              <a:t>03</a:t>
+            </a:r>
+          </a:p>
+        </p:txBody>
+      </p:sp>
+      <p:sp>
+        <p:nvSpPr>
+          <p:cNvPr id="18" name="TextBox 17"/>
+          <p:cNvSpPr txBox="1"/>
+          <p:nvPr/>
+        </p:nvSpPr>
+        <p:spPr>
+          <a:xfrm>
+            <a:off x="1296000" y="3477600"/>
+            <a:ext cx="9936000" cy="342000"/>
           </a:xfrm>
           <a:prstGeom prst="rect">
             <a:avLst/>
@@ -14803,42 +14838,7 @@
           <a:p>
             <a:pPr algn="l"/>
             <a:r>
-              <a:rPr sz="2000" b="1">
-                <a:solidFill>
-                  <a:srgbClr val="2F6EBA"/>
-                </a:solidFill>
-                <a:latin typeface="Microsoft YaHei"/>
-              </a:rPr>
-              <a:t>03</a:t>
-            </a:r>
-          </a:p>
-        </p:txBody>
-      </p:sp>
-      <p:sp>
-        <p:nvSpPr>
-          <p:cNvPr id="18" name="TextBox 17"/>
-          <p:cNvSpPr txBox="1"/>
-          <p:nvPr/>
-        </p:nvSpPr>
-        <p:spPr>
-          <a:xfrm>
-            <a:off x="1296000" y="3470400"/>
-            <a:ext cx="9936000" cy="288000"/>
-          </a:xfrm>
-          <a:prstGeom prst="rect">
-            <a:avLst/>
-          </a:prstGeom>
-          <a:noFill/>
-        </p:spPr>
-        <p:txBody>
-          <a:bodyPr wrap="square">
-            <a:spAutoFit/>
-          </a:bodyPr>
-          <a:lstStyle/>
-          <a:p>
-            <a:pPr algn="l"/>
-            <a:r>
-              <a:rPr sz="1450" b="0">
+              <a:rPr sz="1400" b="0">
                 <a:solidFill>
                   <a:srgbClr val="222830"/>
                 </a:solidFill>
@@ -14949,8 +14949,43 @@
         </p:nvSpPr>
         <p:spPr>
           <a:xfrm>
-            <a:off x="882000" y="4215600"/>
-            <a:ext cx="540000" cy="396000"/>
+            <a:off x="882000" y="4226400"/>
+            <a:ext cx="540000" cy="360000"/>
+          </a:xfrm>
+          <a:prstGeom prst="rect">
+            <a:avLst/>
+          </a:prstGeom>
+          <a:noFill/>
+        </p:spPr>
+        <p:txBody>
+          <a:bodyPr wrap="none">
+            <a:spAutoFit/>
+          </a:bodyPr>
+          <a:lstStyle/>
+          <a:p>
+            <a:pPr algn="l"/>
+            <a:r>
+              <a:rPr sz="1800" b="1">
+                <a:solidFill>
+                  <a:srgbClr val="2F6EBA"/>
+                </a:solidFill>
+                <a:latin typeface="Microsoft YaHei"/>
+              </a:rPr>
+              <a:t>04</a:t>
+            </a:r>
+          </a:p>
+        </p:txBody>
+      </p:sp>
+      <p:sp>
+        <p:nvSpPr>
+          <p:cNvPr id="22" name="TextBox 21"/>
+          <p:cNvSpPr txBox="1"/>
+          <p:nvPr/>
+        </p:nvSpPr>
+        <p:spPr>
+          <a:xfrm>
+            <a:off x="1296000" y="4312800"/>
+            <a:ext cx="9936000" cy="342000"/>
           </a:xfrm>
           <a:prstGeom prst="rect">
             <a:avLst/>
@@ -14965,42 +15000,7 @@
           <a:p>
             <a:pPr algn="l"/>
             <a:r>
-              <a:rPr sz="2000" b="1">
-                <a:solidFill>
-                  <a:srgbClr val="2F6EBA"/>
-                </a:solidFill>
-                <a:latin typeface="Microsoft YaHei"/>
-              </a:rPr>
-              <a:t>04</a:t>
-            </a:r>
-          </a:p>
-        </p:txBody>
-      </p:sp>
-      <p:sp>
-        <p:nvSpPr>
-          <p:cNvPr id="22" name="TextBox 21"/>
-          <p:cNvSpPr txBox="1"/>
-          <p:nvPr/>
-        </p:nvSpPr>
-        <p:spPr>
-          <a:xfrm>
-            <a:off x="1296000" y="4305600"/>
-            <a:ext cx="9936000" cy="288000"/>
-          </a:xfrm>
-          <a:prstGeom prst="rect">
-            <a:avLst/>
-          </a:prstGeom>
-          <a:noFill/>
-        </p:spPr>
-        <p:txBody>
-          <a:bodyPr wrap="square">
-            <a:spAutoFit/>
-          </a:bodyPr>
-          <a:lstStyle/>
-          <a:p>
-            <a:pPr algn="l"/>
-            <a:r>
-              <a:rPr sz="1450" b="0">
+              <a:rPr sz="1400" b="0">
                 <a:solidFill>
                   <a:srgbClr val="222830"/>
                 </a:solidFill>
@@ -15401,8 +15401,43 @@
         </p:nvSpPr>
         <p:spPr>
           <a:xfrm>
-            <a:off x="882000" y="1710000"/>
-            <a:ext cx="540000" cy="396000"/>
+            <a:off x="882000" y="1720799"/>
+            <a:ext cx="540000" cy="360000"/>
+          </a:xfrm>
+          <a:prstGeom prst="rect">
+            <a:avLst/>
+          </a:prstGeom>
+          <a:noFill/>
+        </p:spPr>
+        <p:txBody>
+          <a:bodyPr wrap="none">
+            <a:spAutoFit/>
+          </a:bodyPr>
+          <a:lstStyle/>
+          <a:p>
+            <a:pPr algn="l"/>
+            <a:r>
+              <a:rPr sz="1800" b="1">
+                <a:solidFill>
+                  <a:srgbClr val="2F6EBA"/>
+                </a:solidFill>
+                <a:latin typeface="Microsoft YaHei"/>
+              </a:rPr>
+              <a:t>01</a:t>
+            </a:r>
+          </a:p>
+        </p:txBody>
+      </p:sp>
+      <p:sp>
+        <p:nvSpPr>
+          <p:cNvPr id="9" name="TextBox 8"/>
+          <p:cNvSpPr txBox="1"/>
+          <p:nvPr/>
+        </p:nvSpPr>
+        <p:spPr>
+          <a:xfrm>
+            <a:off x="1296000" y="1807199"/>
+            <a:ext cx="5616000" cy="342000"/>
           </a:xfrm>
           <a:prstGeom prst="rect">
             <a:avLst/>
@@ -15417,42 +15452,7 @@
           <a:p>
             <a:pPr algn="l"/>
             <a:r>
-              <a:rPr sz="2000" b="1">
-                <a:solidFill>
-                  <a:srgbClr val="2F6EBA"/>
-                </a:solidFill>
-                <a:latin typeface="Microsoft YaHei"/>
-              </a:rPr>
-              <a:t>01</a:t>
-            </a:r>
-          </a:p>
-        </p:txBody>
-      </p:sp>
-      <p:sp>
-        <p:nvSpPr>
-          <p:cNvPr id="9" name="TextBox 8"/>
-          <p:cNvSpPr txBox="1"/>
-          <p:nvPr/>
-        </p:nvSpPr>
-        <p:spPr>
-          <a:xfrm>
-            <a:off x="1296000" y="1800000"/>
-            <a:ext cx="5616000" cy="288000"/>
-          </a:xfrm>
-          <a:prstGeom prst="rect">
-            <a:avLst/>
-          </a:prstGeom>
-          <a:noFill/>
-        </p:spPr>
-        <p:txBody>
-          <a:bodyPr wrap="square">
-            <a:spAutoFit/>
-          </a:bodyPr>
-          <a:lstStyle/>
-          <a:p>
-            <a:pPr algn="l"/>
-            <a:r>
-              <a:rPr sz="1450" b="0">
+              <a:rPr sz="1400" b="0">
                 <a:solidFill>
                   <a:srgbClr val="222830"/>
                 </a:solidFill>
@@ -15563,8 +15563,43 @@
         </p:nvSpPr>
         <p:spPr>
           <a:xfrm>
-            <a:off x="882000" y="2545200"/>
-            <a:ext cx="540000" cy="396000"/>
+            <a:off x="882000" y="2556000"/>
+            <a:ext cx="540000" cy="360000"/>
+          </a:xfrm>
+          <a:prstGeom prst="rect">
+            <a:avLst/>
+          </a:prstGeom>
+          <a:noFill/>
+        </p:spPr>
+        <p:txBody>
+          <a:bodyPr wrap="none">
+            <a:spAutoFit/>
+          </a:bodyPr>
+          <a:lstStyle/>
+          <a:p>
+            <a:pPr algn="l"/>
+            <a:r>
+              <a:rPr sz="1800" b="1">
+                <a:solidFill>
+                  <a:srgbClr val="2F6EBA"/>
+                </a:solidFill>
+                <a:latin typeface="Microsoft YaHei"/>
+              </a:rPr>
+              <a:t>02</a:t>
+            </a:r>
+          </a:p>
+        </p:txBody>
+      </p:sp>
+      <p:sp>
+        <p:nvSpPr>
+          <p:cNvPr id="13" name="TextBox 12"/>
+          <p:cNvSpPr txBox="1"/>
+          <p:nvPr/>
+        </p:nvSpPr>
+        <p:spPr>
+          <a:xfrm>
+            <a:off x="1296000" y="2545200"/>
+            <a:ext cx="5616000" cy="198000"/>
           </a:xfrm>
           <a:prstGeom prst="rect">
             <a:avLst/>
@@ -15579,27 +15614,27 @@
           <a:p>
             <a:pPr algn="l"/>
             <a:r>
-              <a:rPr sz="2000" b="1">
-                <a:solidFill>
-                  <a:srgbClr val="2F6EBA"/>
-                </a:solidFill>
-                <a:latin typeface="Microsoft YaHei"/>
-              </a:rPr>
-              <a:t>02</a:t>
-            </a:r>
-          </a:p>
-        </p:txBody>
-      </p:sp>
-      <p:sp>
-        <p:nvSpPr>
-          <p:cNvPr id="13" name="TextBox 12"/>
-          <p:cNvSpPr txBox="1"/>
-          <p:nvPr/>
-        </p:nvSpPr>
-        <p:spPr>
-          <a:xfrm>
-            <a:off x="1296000" y="2534400"/>
-            <a:ext cx="5616000" cy="216000"/>
+              <a:rPr sz="1500" b="1">
+                <a:solidFill>
+                  <a:srgbClr val="1F3A68"/>
+                </a:solidFill>
+                <a:latin typeface="Microsoft YaHei"/>
+              </a:rPr>
+              <a:t>记忆详情抽屉</a:t>
+            </a:r>
+          </a:p>
+        </p:txBody>
+      </p:sp>
+      <p:sp>
+        <p:nvSpPr>
+          <p:cNvPr id="14" name="TextBox 13"/>
+          <p:cNvSpPr txBox="1"/>
+          <p:nvPr/>
+        </p:nvSpPr>
+        <p:spPr>
+          <a:xfrm>
+            <a:off x="1296000" y="2750400"/>
+            <a:ext cx="5616000" cy="306000"/>
           </a:xfrm>
           <a:prstGeom prst="rect">
             <a:avLst/>
@@ -15614,42 +15649,7 @@
           <a:p>
             <a:pPr algn="l"/>
             <a:r>
-              <a:rPr sz="1600" b="1">
-                <a:solidFill>
-                  <a:srgbClr val="1F3A68"/>
-                </a:solidFill>
-                <a:latin typeface="Microsoft YaHei"/>
-              </a:rPr>
-              <a:t>记忆详情抽屉</a:t>
-            </a:r>
-          </a:p>
-        </p:txBody>
-      </p:sp>
-      <p:sp>
-        <p:nvSpPr>
-          <p:cNvPr id="14" name="TextBox 13"/>
-          <p:cNvSpPr txBox="1"/>
-          <p:nvPr/>
-        </p:nvSpPr>
-        <p:spPr>
-          <a:xfrm>
-            <a:off x="1296000" y="2736000"/>
-            <a:ext cx="5616000" cy="251999"/>
-          </a:xfrm>
-          <a:prstGeom prst="rect">
-            <a:avLst/>
-          </a:prstGeom>
-          <a:noFill/>
-        </p:spPr>
-        <p:txBody>
-          <a:bodyPr wrap="square">
-            <a:spAutoFit/>
-          </a:bodyPr>
-          <a:lstStyle/>
-          <a:p>
-            <a:pPr algn="l"/>
-            <a:r>
-              <a:rPr sz="1350" b="0">
+              <a:rPr sz="1300" b="0">
                 <a:solidFill>
                   <a:srgbClr val="555F6E"/>
                 </a:solidFill>
@@ -15760,8 +15760,43 @@
         </p:nvSpPr>
         <p:spPr>
           <a:xfrm>
-            <a:off x="882000" y="3380400"/>
-            <a:ext cx="540000" cy="396000"/>
+            <a:off x="882000" y="3391200"/>
+            <a:ext cx="540000" cy="360000"/>
+          </a:xfrm>
+          <a:prstGeom prst="rect">
+            <a:avLst/>
+          </a:prstGeom>
+          <a:noFill/>
+        </p:spPr>
+        <p:txBody>
+          <a:bodyPr wrap="none">
+            <a:spAutoFit/>
+          </a:bodyPr>
+          <a:lstStyle/>
+          <a:p>
+            <a:pPr algn="l"/>
+            <a:r>
+              <a:rPr sz="1800" b="1">
+                <a:solidFill>
+                  <a:srgbClr val="2F6EBA"/>
+                </a:solidFill>
+                <a:latin typeface="Microsoft YaHei"/>
+              </a:rPr>
+              <a:t>03</a:t>
+            </a:r>
+          </a:p>
+        </p:txBody>
+      </p:sp>
+      <p:sp>
+        <p:nvSpPr>
+          <p:cNvPr id="18" name="TextBox 17"/>
+          <p:cNvSpPr txBox="1"/>
+          <p:nvPr/>
+        </p:nvSpPr>
+        <p:spPr>
+          <a:xfrm>
+            <a:off x="1296000" y="3380400"/>
+            <a:ext cx="5616000" cy="198000"/>
           </a:xfrm>
           <a:prstGeom prst="rect">
             <a:avLst/>
@@ -15776,27 +15811,27 @@
           <a:p>
             <a:pPr algn="l"/>
             <a:r>
-              <a:rPr sz="2000" b="1">
-                <a:solidFill>
-                  <a:srgbClr val="2F6EBA"/>
-                </a:solidFill>
-                <a:latin typeface="Microsoft YaHei"/>
-              </a:rPr>
-              <a:t>03</a:t>
-            </a:r>
-          </a:p>
-        </p:txBody>
-      </p:sp>
-      <p:sp>
-        <p:nvSpPr>
-          <p:cNvPr id="18" name="TextBox 17"/>
-          <p:cNvSpPr txBox="1"/>
-          <p:nvPr/>
-        </p:nvSpPr>
-        <p:spPr>
-          <a:xfrm>
-            <a:off x="1296000" y="3369600"/>
-            <a:ext cx="5616000" cy="216000"/>
+              <a:rPr sz="1500" b="1">
+                <a:solidFill>
+                  <a:srgbClr val="1F3A68"/>
+                </a:solidFill>
+                <a:latin typeface="Microsoft YaHei"/>
+              </a:rPr>
+              <a:t>遗忘曲线</a:t>
+            </a:r>
+          </a:p>
+        </p:txBody>
+      </p:sp>
+      <p:sp>
+        <p:nvSpPr>
+          <p:cNvPr id="19" name="TextBox 18"/>
+          <p:cNvSpPr txBox="1"/>
+          <p:nvPr/>
+        </p:nvSpPr>
+        <p:spPr>
+          <a:xfrm>
+            <a:off x="1296000" y="3585600"/>
+            <a:ext cx="5616000" cy="306000"/>
           </a:xfrm>
           <a:prstGeom prst="rect">
             <a:avLst/>
@@ -15811,42 +15846,7 @@
           <a:p>
             <a:pPr algn="l"/>
             <a:r>
-              <a:rPr sz="1600" b="1">
-                <a:solidFill>
-                  <a:srgbClr val="1F3A68"/>
-                </a:solidFill>
-                <a:latin typeface="Microsoft YaHei"/>
-              </a:rPr>
-              <a:t>遗忘曲线</a:t>
-            </a:r>
-          </a:p>
-        </p:txBody>
-      </p:sp>
-      <p:sp>
-        <p:nvSpPr>
-          <p:cNvPr id="19" name="TextBox 18"/>
-          <p:cNvSpPr txBox="1"/>
-          <p:nvPr/>
-        </p:nvSpPr>
-        <p:spPr>
-          <a:xfrm>
-            <a:off x="1296000" y="3571200"/>
-            <a:ext cx="5616000" cy="251999"/>
-          </a:xfrm>
-          <a:prstGeom prst="rect">
-            <a:avLst/>
-          </a:prstGeom>
-          <a:noFill/>
-        </p:spPr>
-        <p:txBody>
-          <a:bodyPr wrap="square">
-            <a:spAutoFit/>
-          </a:bodyPr>
-          <a:lstStyle/>
-          <a:p>
-            <a:pPr algn="l"/>
-            <a:r>
-              <a:rPr sz="1350" b="0">
+              <a:rPr sz="1300" b="0">
                 <a:solidFill>
                   <a:srgbClr val="555F6E"/>
                 </a:solidFill>
@@ -15957,8 +15957,43 @@
         </p:nvSpPr>
         <p:spPr>
           <a:xfrm>
-            <a:off x="882000" y="4215600"/>
-            <a:ext cx="540000" cy="396000"/>
+            <a:off x="882000" y="4226400"/>
+            <a:ext cx="540000" cy="360000"/>
+          </a:xfrm>
+          <a:prstGeom prst="rect">
+            <a:avLst/>
+          </a:prstGeom>
+          <a:noFill/>
+        </p:spPr>
+        <p:txBody>
+          <a:bodyPr wrap="none">
+            <a:spAutoFit/>
+          </a:bodyPr>
+          <a:lstStyle/>
+          <a:p>
+            <a:pPr algn="l"/>
+            <a:r>
+              <a:rPr sz="1800" b="1">
+                <a:solidFill>
+                  <a:srgbClr val="2F6EBA"/>
+                </a:solidFill>
+                <a:latin typeface="Microsoft YaHei"/>
+              </a:rPr>
+              <a:t>04</a:t>
+            </a:r>
+          </a:p>
+        </p:txBody>
+      </p:sp>
+      <p:sp>
+        <p:nvSpPr>
+          <p:cNvPr id="23" name="TextBox 22"/>
+          <p:cNvSpPr txBox="1"/>
+          <p:nvPr/>
+        </p:nvSpPr>
+        <p:spPr>
+          <a:xfrm>
+            <a:off x="1296000" y="4312800"/>
+            <a:ext cx="5616000" cy="342000"/>
           </a:xfrm>
           <a:prstGeom prst="rect">
             <a:avLst/>
@@ -15973,42 +16008,7 @@
           <a:p>
             <a:pPr algn="l"/>
             <a:r>
-              <a:rPr sz="2000" b="1">
-                <a:solidFill>
-                  <a:srgbClr val="2F6EBA"/>
-                </a:solidFill>
-                <a:latin typeface="Microsoft YaHei"/>
-              </a:rPr>
-              <a:t>04</a:t>
-            </a:r>
-          </a:p>
-        </p:txBody>
-      </p:sp>
-      <p:sp>
-        <p:nvSpPr>
-          <p:cNvPr id="23" name="TextBox 22"/>
-          <p:cNvSpPr txBox="1"/>
-          <p:nvPr/>
-        </p:nvSpPr>
-        <p:spPr>
-          <a:xfrm>
-            <a:off x="1296000" y="4305600"/>
-            <a:ext cx="5616000" cy="288000"/>
-          </a:xfrm>
-          <a:prstGeom prst="rect">
-            <a:avLst/>
-          </a:prstGeom>
-          <a:noFill/>
-        </p:spPr>
-        <p:txBody>
-          <a:bodyPr wrap="square">
-            <a:spAutoFit/>
-          </a:bodyPr>
-          <a:lstStyle/>
-          <a:p>
-            <a:pPr algn="l"/>
-            <a:r>
-              <a:rPr sz="1450" b="0">
+              <a:rPr sz="1400" b="0">
                 <a:solidFill>
                   <a:srgbClr val="222830"/>
                 </a:solidFill>
@@ -17734,7 +17734,7 @@
           <a:p>
             <a:pPr algn="l"/>
             <a:r>
-              <a:rPr sz="2400" b="1">
+              <a:rPr sz="2200" b="1">
                 <a:solidFill>
                   <a:srgbClr val="2F6EBA"/>
                 </a:solidFill>
@@ -17753,7 +17753,7 @@
         </p:nvSpPr>
         <p:spPr>
           <a:xfrm>
-            <a:off x="1512000" y="1746000"/>
+            <a:off x="1512000" y="1771200"/>
             <a:ext cx="9828000" cy="360000"/>
           </a:xfrm>
           <a:prstGeom prst="rect">
@@ -17769,7 +17769,7 @@
           <a:p>
             <a:pPr algn="l"/>
             <a:r>
-              <a:rPr sz="1500" b="0">
+              <a:rPr sz="1400" b="0">
                 <a:solidFill>
                   <a:srgbClr val="222830"/>
                 </a:solidFill>
@@ -17788,7 +17788,7 @@
         </p:nvSpPr>
         <p:spPr>
           <a:xfrm>
-            <a:off x="792000" y="2052000"/>
+            <a:off x="792000" y="2178000"/>
             <a:ext cx="10620000" cy="10800"/>
           </a:xfrm>
           <a:prstGeom prst="rect">
@@ -17832,7 +17832,7 @@
         </p:nvSpPr>
         <p:spPr>
           <a:xfrm>
-            <a:off x="792000" y="2106000"/>
+            <a:off x="792000" y="2250000"/>
             <a:ext cx="648000" cy="432000"/>
           </a:xfrm>
           <a:prstGeom prst="rect">
@@ -17848,7 +17848,7 @@
           <a:p>
             <a:pPr algn="l"/>
             <a:r>
-              <a:rPr sz="2400" b="1">
+              <a:rPr sz="2200" b="1">
                 <a:solidFill>
                   <a:srgbClr val="2F6EBA"/>
                 </a:solidFill>
@@ -17867,7 +17867,7 @@
         </p:nvSpPr>
         <p:spPr>
           <a:xfrm>
-            <a:off x="1512000" y="2160000"/>
+            <a:off x="1512000" y="2329200"/>
             <a:ext cx="9828000" cy="360000"/>
           </a:xfrm>
           <a:prstGeom prst="rect">
@@ -17883,7 +17883,7 @@
           <a:p>
             <a:pPr algn="l"/>
             <a:r>
-              <a:rPr sz="1500" b="0">
+              <a:rPr sz="1400" b="0">
                 <a:solidFill>
                   <a:srgbClr val="222830"/>
                 </a:solidFill>
@@ -17902,7 +17902,7 @@
         </p:nvSpPr>
         <p:spPr>
           <a:xfrm>
-            <a:off x="792000" y="2466000"/>
+            <a:off x="792000" y="2736000"/>
             <a:ext cx="10620000" cy="10800"/>
           </a:xfrm>
           <a:prstGeom prst="rect">
@@ -17946,7 +17946,7 @@
         </p:nvSpPr>
         <p:spPr>
           <a:xfrm>
-            <a:off x="792000" y="2520000"/>
+            <a:off x="792000" y="2808000"/>
             <a:ext cx="648000" cy="432000"/>
           </a:xfrm>
           <a:prstGeom prst="rect">
@@ -17962,7 +17962,7 @@
           <a:p>
             <a:pPr algn="l"/>
             <a:r>
-              <a:rPr sz="2400" b="1">
+              <a:rPr sz="2200" b="1">
                 <a:solidFill>
                   <a:srgbClr val="2F6EBA"/>
                 </a:solidFill>
@@ -17981,8 +17981,8 @@
         </p:nvSpPr>
         <p:spPr>
           <a:xfrm>
-            <a:off x="1512000" y="2538000"/>
-            <a:ext cx="9828000" cy="251999"/>
+            <a:off x="1512000" y="2829600"/>
+            <a:ext cx="9828000" cy="216000"/>
           </a:xfrm>
           <a:prstGeom prst="rect">
             <a:avLst/>
@@ -17997,7 +17997,7 @@
           <a:p>
             <a:pPr algn="l"/>
             <a:r>
-              <a:rPr sz="1700" b="1">
+              <a:rPr sz="1600" b="1">
                 <a:solidFill>
                   <a:srgbClr val="1F3A68"/>
                 </a:solidFill>
@@ -18016,8 +18016,8 @@
         </p:nvSpPr>
         <p:spPr>
           <a:xfrm>
-            <a:off x="1512000" y="2779200"/>
-            <a:ext cx="9828000" cy="251999"/>
+            <a:off x="1512000" y="3067200"/>
+            <a:ext cx="9828000" cy="306000"/>
           </a:xfrm>
           <a:prstGeom prst="rect">
             <a:avLst/>
@@ -18032,7 +18032,7 @@
           <a:p>
             <a:pPr algn="l"/>
             <a:r>
-              <a:rPr sz="1350" b="0">
+              <a:rPr sz="1250" b="0">
                 <a:solidFill>
                   <a:srgbClr val="555F6E"/>
                 </a:solidFill>
@@ -18051,7 +18051,7 @@
         </p:nvSpPr>
         <p:spPr>
           <a:xfrm>
-            <a:off x="792000" y="2880000"/>
+            <a:off x="792000" y="3294000"/>
             <a:ext cx="10620000" cy="10800"/>
           </a:xfrm>
           <a:prstGeom prst="rect">
@@ -18095,7 +18095,7 @@
         </p:nvSpPr>
         <p:spPr>
           <a:xfrm>
-            <a:off x="792000" y="2934000"/>
+            <a:off x="792000" y="3366000"/>
             <a:ext cx="648000" cy="432000"/>
           </a:xfrm>
           <a:prstGeom prst="rect">
@@ -18111,7 +18111,7 @@
           <a:p>
             <a:pPr algn="l"/>
             <a:r>
-              <a:rPr sz="2400" b="1">
+              <a:rPr sz="2200" b="1">
                 <a:solidFill>
                   <a:srgbClr val="2F6EBA"/>
                 </a:solidFill>
@@ -18130,8 +18130,8 @@
         </p:nvSpPr>
         <p:spPr>
           <a:xfrm>
-            <a:off x="1512000" y="2952000"/>
-            <a:ext cx="9828000" cy="251999"/>
+            <a:off x="1512000" y="3387600"/>
+            <a:ext cx="9828000" cy="216000"/>
           </a:xfrm>
           <a:prstGeom prst="rect">
             <a:avLst/>
@@ -18146,7 +18146,7 @@
           <a:p>
             <a:pPr algn="l"/>
             <a:r>
-              <a:rPr sz="1700" b="1">
+              <a:rPr sz="1600" b="1">
                 <a:solidFill>
                   <a:srgbClr val="1F3A68"/>
                 </a:solidFill>
@@ -18165,8 +18165,8 @@
         </p:nvSpPr>
         <p:spPr>
           <a:xfrm>
-            <a:off x="1512000" y="3193200"/>
-            <a:ext cx="9828000" cy="251999"/>
+            <a:off x="1512000" y="3625200"/>
+            <a:ext cx="9828000" cy="306000"/>
           </a:xfrm>
           <a:prstGeom prst="rect">
             <a:avLst/>
@@ -18181,7 +18181,7 @@
           <a:p>
             <a:pPr algn="l"/>
             <a:r>
-              <a:rPr sz="1350" b="0">
+              <a:rPr sz="1250" b="0">
                 <a:solidFill>
                   <a:srgbClr val="555F6E"/>
                 </a:solidFill>
@@ -18200,7 +18200,7 @@
         </p:nvSpPr>
         <p:spPr>
           <a:xfrm>
-            <a:off x="792000" y="3294000"/>
+            <a:off x="792000" y="3851999"/>
             <a:ext cx="10620000" cy="10800"/>
           </a:xfrm>
           <a:prstGeom prst="rect">
@@ -18535,7 +18535,7 @@
         <p:spPr>
           <a:xfrm>
             <a:off x="720000" y="1728000"/>
-            <a:ext cx="2439000" cy="216000"/>
+            <a:ext cx="2439000" cy="198000"/>
           </a:xfrm>
           <a:prstGeom prst="rect">
             <a:avLst/>
@@ -18578,23 +18578,23 @@
         </p:nvSpPr>
         <p:spPr>
           <a:xfrm>
-            <a:off x="720000" y="2088000"/>
-            <a:ext cx="2439000" cy="503999"/>
-          </a:xfrm>
-          <a:prstGeom prst="rect">
-            <a:avLst/>
-          </a:prstGeom>
-          <a:noFill/>
-        </p:spPr>
-        <p:txBody>
-          <a:bodyPr wrap="none">
+            <a:off x="720000" y="2070000"/>
+            <a:ext cx="2439000" cy="540000"/>
+          </a:xfrm>
+          <a:prstGeom prst="rect">
+            <a:avLst/>
+          </a:prstGeom>
+          <a:noFill/>
+        </p:spPr>
+        <p:txBody>
+          <a:bodyPr wrap="square">
             <a:spAutoFit/>
           </a:bodyPr>
           <a:lstStyle/>
           <a:p>
             <a:pPr algn="ctr"/>
             <a:r>
-              <a:rPr sz="3000" b="1">
+              <a:rPr sz="2600" b="1">
                 <a:solidFill>
                   <a:srgbClr val="1F3A68"/>
                 </a:solidFill>
@@ -18613,8 +18613,8 @@
         </p:nvSpPr>
         <p:spPr>
           <a:xfrm>
-            <a:off x="827999" y="2736000"/>
-            <a:ext cx="2223000" cy="647999"/>
+            <a:off x="827999" y="2646000"/>
+            <a:ext cx="2223000" cy="737999"/>
           </a:xfrm>
           <a:prstGeom prst="rect">
             <a:avLst/>
@@ -18629,7 +18629,7 @@
           <a:p>
             <a:pPr algn="ctr"/>
             <a:r>
-              <a:rPr sz="1300" b="0">
+              <a:rPr sz="1250" b="0">
                 <a:solidFill>
                   <a:srgbClr val="555F6E"/>
                 </a:solidFill>
@@ -18649,7 +18649,7 @@
         <p:spPr>
           <a:xfrm>
             <a:off x="3483000" y="1728000"/>
-            <a:ext cx="2439000" cy="216000"/>
+            <a:ext cx="2439000" cy="198000"/>
           </a:xfrm>
           <a:prstGeom prst="rect">
             <a:avLst/>
@@ -18692,23 +18692,23 @@
         </p:nvSpPr>
         <p:spPr>
           <a:xfrm>
-            <a:off x="3483000" y="2088000"/>
-            <a:ext cx="2439000" cy="503999"/>
-          </a:xfrm>
-          <a:prstGeom prst="rect">
-            <a:avLst/>
-          </a:prstGeom>
-          <a:noFill/>
-        </p:spPr>
-        <p:txBody>
-          <a:bodyPr wrap="none">
+            <a:off x="3483000" y="2070000"/>
+            <a:ext cx="2439000" cy="540000"/>
+          </a:xfrm>
+          <a:prstGeom prst="rect">
+            <a:avLst/>
+          </a:prstGeom>
+          <a:noFill/>
+        </p:spPr>
+        <p:txBody>
+          <a:bodyPr wrap="square">
             <a:spAutoFit/>
           </a:bodyPr>
           <a:lstStyle/>
           <a:p>
             <a:pPr algn="ctr"/>
             <a:r>
-              <a:rPr sz="3000" b="1">
+              <a:rPr sz="2600" b="1">
                 <a:solidFill>
                   <a:srgbClr val="1F3A68"/>
                 </a:solidFill>
@@ -18727,8 +18727,8 @@
         </p:nvSpPr>
         <p:spPr>
           <a:xfrm>
-            <a:off x="3591000" y="2736000"/>
-            <a:ext cx="2223000" cy="647999"/>
+            <a:off x="3591000" y="2646000"/>
+            <a:ext cx="2223000" cy="737999"/>
           </a:xfrm>
           <a:prstGeom prst="rect">
             <a:avLst/>
@@ -18743,7 +18743,7 @@
           <a:p>
             <a:pPr algn="ctr"/>
             <a:r>
-              <a:rPr sz="1300" b="0">
+              <a:rPr sz="1250" b="0">
                 <a:solidFill>
                   <a:srgbClr val="555F6E"/>
                 </a:solidFill>
@@ -18763,7 +18763,7 @@
         <p:spPr>
           <a:xfrm>
             <a:off x="6246000" y="1728000"/>
-            <a:ext cx="2439000" cy="216000"/>
+            <a:ext cx="2439000" cy="198000"/>
           </a:xfrm>
           <a:prstGeom prst="rect">
             <a:avLst/>
@@ -18806,23 +18806,23 @@
         </p:nvSpPr>
         <p:spPr>
           <a:xfrm>
-            <a:off x="6246000" y="2088000"/>
-            <a:ext cx="2439000" cy="503999"/>
-          </a:xfrm>
-          <a:prstGeom prst="rect">
-            <a:avLst/>
-          </a:prstGeom>
-          <a:noFill/>
-        </p:spPr>
-        <p:txBody>
-          <a:bodyPr wrap="none">
+            <a:off x="6246000" y="2070000"/>
+            <a:ext cx="2439000" cy="540000"/>
+          </a:xfrm>
+          <a:prstGeom prst="rect">
+            <a:avLst/>
+          </a:prstGeom>
+          <a:noFill/>
+        </p:spPr>
+        <p:txBody>
+          <a:bodyPr wrap="square">
             <a:spAutoFit/>
           </a:bodyPr>
           <a:lstStyle/>
           <a:p>
             <a:pPr algn="ctr"/>
             <a:r>
-              <a:rPr sz="3000" b="1">
+              <a:rPr sz="2600" b="1">
                 <a:solidFill>
                   <a:srgbClr val="1F3A68"/>
                 </a:solidFill>
@@ -18841,8 +18841,8 @@
         </p:nvSpPr>
         <p:spPr>
           <a:xfrm>
-            <a:off x="6354000" y="2736000"/>
-            <a:ext cx="2223000" cy="647999"/>
+            <a:off x="6354000" y="2646000"/>
+            <a:ext cx="2223000" cy="737999"/>
           </a:xfrm>
           <a:prstGeom prst="rect">
             <a:avLst/>
@@ -18857,7 +18857,7 @@
           <a:p>
             <a:pPr algn="ctr"/>
             <a:r>
-              <a:rPr sz="1300" b="0">
+              <a:rPr sz="1250" b="0">
                 <a:solidFill>
                   <a:srgbClr val="555F6E"/>
                 </a:solidFill>
@@ -18877,7 +18877,7 @@
         <p:spPr>
           <a:xfrm>
             <a:off x="9009000" y="1728000"/>
-            <a:ext cx="2439000" cy="216000"/>
+            <a:ext cx="2439000" cy="198000"/>
           </a:xfrm>
           <a:prstGeom prst="rect">
             <a:avLst/>
@@ -18920,23 +18920,23 @@
         </p:nvSpPr>
         <p:spPr>
           <a:xfrm>
-            <a:off x="9009000" y="2088000"/>
-            <a:ext cx="2439000" cy="503999"/>
-          </a:xfrm>
-          <a:prstGeom prst="rect">
-            <a:avLst/>
-          </a:prstGeom>
-          <a:noFill/>
-        </p:spPr>
-        <p:txBody>
-          <a:bodyPr wrap="none">
+            <a:off x="9009000" y="2070000"/>
+            <a:ext cx="2439000" cy="540000"/>
+          </a:xfrm>
+          <a:prstGeom prst="rect">
+            <a:avLst/>
+          </a:prstGeom>
+          <a:noFill/>
+        </p:spPr>
+        <p:txBody>
+          <a:bodyPr wrap="square">
             <a:spAutoFit/>
           </a:bodyPr>
           <a:lstStyle/>
           <a:p>
             <a:pPr algn="ctr"/>
             <a:r>
-              <a:rPr sz="3000" b="1">
+              <a:rPr sz="2600" b="1">
                 <a:solidFill>
                   <a:srgbClr val="1F3A68"/>
                 </a:solidFill>
@@ -18955,8 +18955,8 @@
         </p:nvSpPr>
         <p:spPr>
           <a:xfrm>
-            <a:off x="9117000" y="2736000"/>
-            <a:ext cx="2223000" cy="647999"/>
+            <a:off x="9117000" y="2646000"/>
+            <a:ext cx="2223000" cy="737999"/>
           </a:xfrm>
           <a:prstGeom prst="rect">
             <a:avLst/>
@@ -18971,7 +18971,7 @@
           <a:p>
             <a:pPr algn="ctr"/>
             <a:r>
-              <a:rPr sz="1300" b="0">
+              <a:rPr sz="1250" b="0">
                 <a:solidFill>
                   <a:srgbClr val="555F6E"/>
                 </a:solidFill>
@@ -19296,7 +19296,7 @@
           <a:p>
             <a:pPr algn="l"/>
             <a:r>
-              <a:rPr sz="2400" b="1">
+              <a:rPr sz="2200" b="1">
                 <a:solidFill>
                   <a:srgbClr val="2F6EBA"/>
                 </a:solidFill>
@@ -19315,8 +19315,8 @@
         </p:nvSpPr>
         <p:spPr>
           <a:xfrm>
-            <a:off x="1512000" y="1710000"/>
-            <a:ext cx="9828000" cy="251999"/>
+            <a:off x="1512000" y="1713600"/>
+            <a:ext cx="9828000" cy="216000"/>
           </a:xfrm>
           <a:prstGeom prst="rect">
             <a:avLst/>
@@ -19331,7 +19331,7 @@
           <a:p>
             <a:pPr algn="l"/>
             <a:r>
-              <a:rPr sz="1700" b="1">
+              <a:rPr sz="1600" b="1">
                 <a:solidFill>
                   <a:srgbClr val="1F3A68"/>
                 </a:solidFill>
@@ -19351,7 +19351,7 @@
         <p:spPr>
           <a:xfrm>
             <a:off x="1512000" y="1951200"/>
-            <a:ext cx="9828000" cy="251999"/>
+            <a:ext cx="9828000" cy="306000"/>
           </a:xfrm>
           <a:prstGeom prst="rect">
             <a:avLst/>
@@ -19366,7 +19366,7 @@
           <a:p>
             <a:pPr algn="l"/>
             <a:r>
-              <a:rPr sz="1350" b="0">
+              <a:rPr sz="1250" b="0">
                 <a:solidFill>
                   <a:srgbClr val="555F6E"/>
                 </a:solidFill>
@@ -19385,7 +19385,7 @@
         </p:nvSpPr>
         <p:spPr>
           <a:xfrm>
-            <a:off x="792000" y="2052000"/>
+            <a:off x="792000" y="2178000"/>
             <a:ext cx="10620000" cy="10800"/>
           </a:xfrm>
           <a:prstGeom prst="rect">
@@ -19429,7 +19429,7 @@
         </p:nvSpPr>
         <p:spPr>
           <a:xfrm>
-            <a:off x="792000" y="2106000"/>
+            <a:off x="792000" y="2250000"/>
             <a:ext cx="648000" cy="432000"/>
           </a:xfrm>
           <a:prstGeom prst="rect">
@@ -19445,7 +19445,7 @@
           <a:p>
             <a:pPr algn="l"/>
             <a:r>
-              <a:rPr sz="2400" b="1">
+              <a:rPr sz="2200" b="1">
                 <a:solidFill>
                   <a:srgbClr val="2F6EBA"/>
                 </a:solidFill>
@@ -19464,7 +19464,7 @@
         </p:nvSpPr>
         <p:spPr>
           <a:xfrm>
-            <a:off x="1512000" y="2160000"/>
+            <a:off x="1512000" y="2329200"/>
             <a:ext cx="9828000" cy="360000"/>
           </a:xfrm>
           <a:prstGeom prst="rect">
@@ -19480,7 +19480,7 @@
           <a:p>
             <a:pPr algn="l"/>
             <a:r>
-              <a:rPr sz="1500" b="0">
+              <a:rPr sz="1400" b="0">
                 <a:solidFill>
                   <a:srgbClr val="222830"/>
                 </a:solidFill>
@@ -19499,7 +19499,7 @@
         </p:nvSpPr>
         <p:spPr>
           <a:xfrm>
-            <a:off x="792000" y="2466000"/>
+            <a:off x="792000" y="2736000"/>
             <a:ext cx="10620000" cy="10800"/>
           </a:xfrm>
           <a:prstGeom prst="rect">
@@ -19543,7 +19543,7 @@
         </p:nvSpPr>
         <p:spPr>
           <a:xfrm>
-            <a:off x="792000" y="2520000"/>
+            <a:off x="792000" y="2808000"/>
             <a:ext cx="648000" cy="432000"/>
           </a:xfrm>
           <a:prstGeom prst="rect">
@@ -19559,7 +19559,7 @@
           <a:p>
             <a:pPr algn="l"/>
             <a:r>
-              <a:rPr sz="2400" b="1">
+              <a:rPr sz="2200" b="1">
                 <a:solidFill>
                   <a:srgbClr val="2F6EBA"/>
                 </a:solidFill>
@@ -19578,8 +19578,8 @@
         </p:nvSpPr>
         <p:spPr>
           <a:xfrm>
-            <a:off x="1512000" y="2538000"/>
-            <a:ext cx="9828000" cy="251999"/>
+            <a:off x="1512000" y="2829600"/>
+            <a:ext cx="9828000" cy="216000"/>
           </a:xfrm>
           <a:prstGeom prst="rect">
             <a:avLst/>
@@ -19594,7 +19594,7 @@
           <a:p>
             <a:pPr algn="l"/>
             <a:r>
-              <a:rPr sz="1700" b="1">
+              <a:rPr sz="1600" b="1">
                 <a:solidFill>
                   <a:srgbClr val="1F3A68"/>
                 </a:solidFill>
@@ -19613,8 +19613,8 @@
         </p:nvSpPr>
         <p:spPr>
           <a:xfrm>
-            <a:off x="1512000" y="2779200"/>
-            <a:ext cx="9828000" cy="251999"/>
+            <a:off x="1512000" y="3067200"/>
+            <a:ext cx="9828000" cy="306000"/>
           </a:xfrm>
           <a:prstGeom prst="rect">
             <a:avLst/>
@@ -19629,7 +19629,7 @@
           <a:p>
             <a:pPr algn="l"/>
             <a:r>
-              <a:rPr sz="1350" b="0">
+              <a:rPr sz="1250" b="0">
                 <a:solidFill>
                   <a:srgbClr val="555F6E"/>
                 </a:solidFill>
@@ -19648,7 +19648,7 @@
         </p:nvSpPr>
         <p:spPr>
           <a:xfrm>
-            <a:off x="792000" y="2880000"/>
+            <a:off x="792000" y="3294000"/>
             <a:ext cx="10620000" cy="10800"/>
           </a:xfrm>
           <a:prstGeom prst="rect">
@@ -19692,7 +19692,7 @@
         </p:nvSpPr>
         <p:spPr>
           <a:xfrm>
-            <a:off x="792000" y="2934000"/>
+            <a:off x="792000" y="3366000"/>
             <a:ext cx="648000" cy="432000"/>
           </a:xfrm>
           <a:prstGeom prst="rect">
@@ -19708,7 +19708,7 @@
           <a:p>
             <a:pPr algn="l"/>
             <a:r>
-              <a:rPr sz="2400" b="1">
+              <a:rPr sz="2200" b="1">
                 <a:solidFill>
                   <a:srgbClr val="2F6EBA"/>
                 </a:solidFill>
@@ -19727,7 +19727,7 @@
         </p:nvSpPr>
         <p:spPr>
           <a:xfrm>
-            <a:off x="1512000" y="2988000"/>
+            <a:off x="1512000" y="3445200"/>
             <a:ext cx="9828000" cy="360000"/>
           </a:xfrm>
           <a:prstGeom prst="rect">
@@ -19743,7 +19743,7 @@
           <a:p>
             <a:pPr algn="l"/>
             <a:r>
-              <a:rPr sz="1500" b="0">
+              <a:rPr sz="1400" b="0">
                 <a:solidFill>
                   <a:srgbClr val="222830"/>
                 </a:solidFill>
@@ -19762,7 +19762,7 @@
         </p:nvSpPr>
         <p:spPr>
           <a:xfrm>
-            <a:off x="792000" y="3294000"/>
+            <a:off x="792000" y="3851999"/>
             <a:ext cx="10620000" cy="10800"/>
           </a:xfrm>
           <a:prstGeom prst="rect">
@@ -19806,7 +19806,7 @@
         </p:nvSpPr>
         <p:spPr>
           <a:xfrm>
-            <a:off x="792000" y="3348000"/>
+            <a:off x="792000" y="3924000"/>
             <a:ext cx="648000" cy="432000"/>
           </a:xfrm>
           <a:prstGeom prst="rect">
@@ -19822,7 +19822,7 @@
           <a:p>
             <a:pPr algn="l"/>
             <a:r>
-              <a:rPr sz="2400" b="1">
+              <a:rPr sz="2200" b="1">
                 <a:solidFill>
                   <a:srgbClr val="2F6EBA"/>
                 </a:solidFill>
@@ -19841,8 +19841,8 @@
         </p:nvSpPr>
         <p:spPr>
           <a:xfrm>
-            <a:off x="1512000" y="3366000"/>
-            <a:ext cx="9828000" cy="251999"/>
+            <a:off x="1512000" y="3945600"/>
+            <a:ext cx="9828000" cy="216000"/>
           </a:xfrm>
           <a:prstGeom prst="rect">
             <a:avLst/>
@@ -19857,7 +19857,7 @@
           <a:p>
             <a:pPr algn="l"/>
             <a:r>
-              <a:rPr sz="1700" b="1">
+              <a:rPr sz="1600" b="1">
                 <a:solidFill>
                   <a:srgbClr val="1F3A68"/>
                 </a:solidFill>
@@ -19876,8 +19876,8 @@
         </p:nvSpPr>
         <p:spPr>
           <a:xfrm>
-            <a:off x="1512000" y="3607200"/>
-            <a:ext cx="9828000" cy="251999"/>
+            <a:off x="1512000" y="4183200"/>
+            <a:ext cx="9828000" cy="306000"/>
           </a:xfrm>
           <a:prstGeom prst="rect">
             <a:avLst/>
@@ -19892,7 +19892,7 @@
           <a:p>
             <a:pPr algn="l"/>
             <a:r>
-              <a:rPr sz="1350" b="0">
+              <a:rPr sz="1250" b="0">
                 <a:solidFill>
                   <a:srgbClr val="555F6E"/>
                 </a:solidFill>
@@ -19911,7 +19911,7 @@
         </p:nvSpPr>
         <p:spPr>
           <a:xfrm>
-            <a:off x="792000" y="3708000"/>
+            <a:off x="792000" y="4410000"/>
             <a:ext cx="10620000" cy="10800"/>
           </a:xfrm>
           <a:prstGeom prst="rect">
@@ -20246,7 +20246,7 @@
         <p:spPr>
           <a:xfrm>
             <a:off x="720000" y="1728000"/>
-            <a:ext cx="2439000" cy="216000"/>
+            <a:ext cx="2439000" cy="198000"/>
           </a:xfrm>
           <a:prstGeom prst="rect">
             <a:avLst/>
@@ -20289,23 +20289,23 @@
         </p:nvSpPr>
         <p:spPr>
           <a:xfrm>
-            <a:off x="720000" y="2088000"/>
-            <a:ext cx="2439000" cy="503999"/>
-          </a:xfrm>
-          <a:prstGeom prst="rect">
-            <a:avLst/>
-          </a:prstGeom>
-          <a:noFill/>
-        </p:spPr>
-        <p:txBody>
-          <a:bodyPr wrap="none">
+            <a:off x="720000" y="2070000"/>
+            <a:ext cx="2439000" cy="540000"/>
+          </a:xfrm>
+          <a:prstGeom prst="rect">
+            <a:avLst/>
+          </a:prstGeom>
+          <a:noFill/>
+        </p:spPr>
+        <p:txBody>
+          <a:bodyPr wrap="square">
             <a:spAutoFit/>
           </a:bodyPr>
           <a:lstStyle/>
           <a:p>
             <a:pPr algn="ctr"/>
             <a:r>
-              <a:rPr sz="3000" b="1">
+              <a:rPr sz="2600" b="1">
                 <a:solidFill>
                   <a:srgbClr val="1F3A68"/>
                 </a:solidFill>
@@ -20324,8 +20324,8 @@
         </p:nvSpPr>
         <p:spPr>
           <a:xfrm>
-            <a:off x="827999" y="2736000"/>
-            <a:ext cx="2223000" cy="647999"/>
+            <a:off x="827999" y="2646000"/>
+            <a:ext cx="2223000" cy="737999"/>
           </a:xfrm>
           <a:prstGeom prst="rect">
             <a:avLst/>
@@ -20340,7 +20340,7 @@
           <a:p>
             <a:pPr algn="ctr"/>
             <a:r>
-              <a:rPr sz="1300" b="0">
+              <a:rPr sz="1250" b="0">
                 <a:solidFill>
                   <a:srgbClr val="555F6E"/>
                 </a:solidFill>
@@ -20360,7 +20360,7 @@
         <p:spPr>
           <a:xfrm>
             <a:off x="3483000" y="1728000"/>
-            <a:ext cx="2439000" cy="216000"/>
+            <a:ext cx="2439000" cy="198000"/>
           </a:xfrm>
           <a:prstGeom prst="rect">
             <a:avLst/>
@@ -20403,23 +20403,23 @@
         </p:nvSpPr>
         <p:spPr>
           <a:xfrm>
-            <a:off x="3483000" y="2088000"/>
-            <a:ext cx="2439000" cy="503999"/>
-          </a:xfrm>
-          <a:prstGeom prst="rect">
-            <a:avLst/>
-          </a:prstGeom>
-          <a:noFill/>
-        </p:spPr>
-        <p:txBody>
-          <a:bodyPr wrap="none">
+            <a:off x="3483000" y="2070000"/>
+            <a:ext cx="2439000" cy="540000"/>
+          </a:xfrm>
+          <a:prstGeom prst="rect">
+            <a:avLst/>
+          </a:prstGeom>
+          <a:noFill/>
+        </p:spPr>
+        <p:txBody>
+          <a:bodyPr wrap="square">
             <a:spAutoFit/>
           </a:bodyPr>
           <a:lstStyle/>
           <a:p>
             <a:pPr algn="ctr"/>
             <a:r>
-              <a:rPr sz="3000" b="1">
+              <a:rPr sz="2600" b="1">
                 <a:solidFill>
                   <a:srgbClr val="1F3A68"/>
                 </a:solidFill>
@@ -20438,8 +20438,8 @@
         </p:nvSpPr>
         <p:spPr>
           <a:xfrm>
-            <a:off x="3591000" y="2736000"/>
-            <a:ext cx="2223000" cy="647999"/>
+            <a:off x="3591000" y="2646000"/>
+            <a:ext cx="2223000" cy="737999"/>
           </a:xfrm>
           <a:prstGeom prst="rect">
             <a:avLst/>
@@ -20454,7 +20454,7 @@
           <a:p>
             <a:pPr algn="ctr"/>
             <a:r>
-              <a:rPr sz="1300" b="0">
+              <a:rPr sz="1250" b="0">
                 <a:solidFill>
                   <a:srgbClr val="555F6E"/>
                 </a:solidFill>
@@ -20474,7 +20474,7 @@
         <p:spPr>
           <a:xfrm>
             <a:off x="6246000" y="1728000"/>
-            <a:ext cx="2439000" cy="216000"/>
+            <a:ext cx="2439000" cy="198000"/>
           </a:xfrm>
           <a:prstGeom prst="rect">
             <a:avLst/>
@@ -20517,23 +20517,23 @@
         </p:nvSpPr>
         <p:spPr>
           <a:xfrm>
-            <a:off x="6246000" y="2088000"/>
-            <a:ext cx="2439000" cy="503999"/>
-          </a:xfrm>
-          <a:prstGeom prst="rect">
-            <a:avLst/>
-          </a:prstGeom>
-          <a:noFill/>
-        </p:spPr>
-        <p:txBody>
-          <a:bodyPr wrap="none">
+            <a:off x="6246000" y="2070000"/>
+            <a:ext cx="2439000" cy="540000"/>
+          </a:xfrm>
+          <a:prstGeom prst="rect">
+            <a:avLst/>
+          </a:prstGeom>
+          <a:noFill/>
+        </p:spPr>
+        <p:txBody>
+          <a:bodyPr wrap="square">
             <a:spAutoFit/>
           </a:bodyPr>
           <a:lstStyle/>
           <a:p>
             <a:pPr algn="ctr"/>
             <a:r>
-              <a:rPr sz="3000" b="1">
+              <a:rPr sz="2600" b="1">
                 <a:solidFill>
                   <a:srgbClr val="1F3A68"/>
                 </a:solidFill>
@@ -20552,8 +20552,8 @@
         </p:nvSpPr>
         <p:spPr>
           <a:xfrm>
-            <a:off x="6354000" y="2736000"/>
-            <a:ext cx="2223000" cy="647999"/>
+            <a:off x="6354000" y="2646000"/>
+            <a:ext cx="2223000" cy="737999"/>
           </a:xfrm>
           <a:prstGeom prst="rect">
             <a:avLst/>
@@ -20568,7 +20568,7 @@
           <a:p>
             <a:pPr algn="ctr"/>
             <a:r>
-              <a:rPr sz="1300" b="0">
+              <a:rPr sz="1250" b="0">
                 <a:solidFill>
                   <a:srgbClr val="555F6E"/>
                 </a:solidFill>
@@ -20588,7 +20588,7 @@
         <p:spPr>
           <a:xfrm>
             <a:off x="9009000" y="1728000"/>
-            <a:ext cx="2439000" cy="216000"/>
+            <a:ext cx="2439000" cy="198000"/>
           </a:xfrm>
           <a:prstGeom prst="rect">
             <a:avLst/>
@@ -20631,23 +20631,23 @@
         </p:nvSpPr>
         <p:spPr>
           <a:xfrm>
-            <a:off x="9009000" y="2088000"/>
-            <a:ext cx="2439000" cy="503999"/>
-          </a:xfrm>
-          <a:prstGeom prst="rect">
-            <a:avLst/>
-          </a:prstGeom>
-          <a:noFill/>
-        </p:spPr>
-        <p:txBody>
-          <a:bodyPr wrap="none">
+            <a:off x="9009000" y="2070000"/>
+            <a:ext cx="2439000" cy="540000"/>
+          </a:xfrm>
+          <a:prstGeom prst="rect">
+            <a:avLst/>
+          </a:prstGeom>
+          <a:noFill/>
+        </p:spPr>
+        <p:txBody>
+          <a:bodyPr wrap="square">
             <a:spAutoFit/>
           </a:bodyPr>
           <a:lstStyle/>
           <a:p>
             <a:pPr algn="ctr"/>
             <a:r>
-              <a:rPr sz="3000" b="1">
+              <a:rPr sz="2600" b="1">
                 <a:solidFill>
                   <a:srgbClr val="1F3A68"/>
                 </a:solidFill>
@@ -20666,8 +20666,8 @@
         </p:nvSpPr>
         <p:spPr>
           <a:xfrm>
-            <a:off x="9117000" y="2736000"/>
-            <a:ext cx="2223000" cy="647999"/>
+            <a:off x="9117000" y="2646000"/>
+            <a:ext cx="2223000" cy="737999"/>
           </a:xfrm>
           <a:prstGeom prst="rect">
             <a:avLst/>
@@ -20682,7 +20682,7 @@
           <a:p>
             <a:pPr algn="ctr"/>
             <a:r>
-              <a:rPr sz="1300" b="0">
+              <a:rPr sz="1250" b="0">
                 <a:solidFill>
                   <a:srgbClr val="555F6E"/>
                 </a:solidFill>
@@ -21338,8 +21338,43 @@
         </p:nvSpPr>
         <p:spPr>
           <a:xfrm>
-            <a:off x="882000" y="1710000"/>
-            <a:ext cx="540000" cy="396000"/>
+            <a:off x="882000" y="1720799"/>
+            <a:ext cx="540000" cy="360000"/>
+          </a:xfrm>
+          <a:prstGeom prst="rect">
+            <a:avLst/>
+          </a:prstGeom>
+          <a:noFill/>
+        </p:spPr>
+        <p:txBody>
+          <a:bodyPr wrap="none">
+            <a:spAutoFit/>
+          </a:bodyPr>
+          <a:lstStyle/>
+          <a:p>
+            <a:pPr algn="l"/>
+            <a:r>
+              <a:rPr sz="1800" b="1">
+                <a:solidFill>
+                  <a:srgbClr val="2F6EBA"/>
+                </a:solidFill>
+                <a:latin typeface="Microsoft YaHei"/>
+              </a:rPr>
+              <a:t>01</a:t>
+            </a:r>
+          </a:p>
+        </p:txBody>
+      </p:sp>
+      <p:sp>
+        <p:nvSpPr>
+          <p:cNvPr id="9" name="TextBox 8"/>
+          <p:cNvSpPr txBox="1"/>
+          <p:nvPr/>
+        </p:nvSpPr>
+        <p:spPr>
+          <a:xfrm>
+            <a:off x="1296000" y="1710000"/>
+            <a:ext cx="5616000" cy="198000"/>
           </a:xfrm>
           <a:prstGeom prst="rect">
             <a:avLst/>
@@ -21354,27 +21389,27 @@
           <a:p>
             <a:pPr algn="l"/>
             <a:r>
-              <a:rPr sz="2000" b="1">
-                <a:solidFill>
-                  <a:srgbClr val="2F6EBA"/>
-                </a:solidFill>
-                <a:latin typeface="Microsoft YaHei"/>
-              </a:rPr>
-              <a:t>01</a:t>
-            </a:r>
-          </a:p>
-        </p:txBody>
-      </p:sp>
-      <p:sp>
-        <p:nvSpPr>
-          <p:cNvPr id="9" name="TextBox 8"/>
-          <p:cNvSpPr txBox="1"/>
-          <p:nvPr/>
-        </p:nvSpPr>
-        <p:spPr>
-          <a:xfrm>
-            <a:off x="1296000" y="1699200"/>
-            <a:ext cx="5616000" cy="216000"/>
+              <a:rPr sz="1500" b="1">
+                <a:solidFill>
+                  <a:srgbClr val="1F3A68"/>
+                </a:solidFill>
+                <a:latin typeface="Microsoft YaHei"/>
+              </a:rPr>
+              <a:t>hook_evolve</a:t>
+            </a:r>
+          </a:p>
+        </p:txBody>
+      </p:sp>
+      <p:sp>
+        <p:nvSpPr>
+          <p:cNvPr id="10" name="TextBox 9"/>
+          <p:cNvSpPr txBox="1"/>
+          <p:nvPr/>
+        </p:nvSpPr>
+        <p:spPr>
+          <a:xfrm>
+            <a:off x="1296000" y="1915199"/>
+            <a:ext cx="5616000" cy="306000"/>
           </a:xfrm>
           <a:prstGeom prst="rect">
             <a:avLst/>
@@ -21389,42 +21424,7 @@
           <a:p>
             <a:pPr algn="l"/>
             <a:r>
-              <a:rPr sz="1600" b="1">
-                <a:solidFill>
-                  <a:srgbClr val="1F3A68"/>
-                </a:solidFill>
-                <a:latin typeface="Microsoft YaHei"/>
-              </a:rPr>
-              <a:t>hook_evolve</a:t>
-            </a:r>
-          </a:p>
-        </p:txBody>
-      </p:sp>
-      <p:sp>
-        <p:nvSpPr>
-          <p:cNvPr id="10" name="TextBox 9"/>
-          <p:cNvSpPr txBox="1"/>
-          <p:nvPr/>
-        </p:nvSpPr>
-        <p:spPr>
-          <a:xfrm>
-            <a:off x="1296000" y="1900799"/>
-            <a:ext cx="5616000" cy="251999"/>
-          </a:xfrm>
-          <a:prstGeom prst="rect">
-            <a:avLst/>
-          </a:prstGeom>
-          <a:noFill/>
-        </p:spPr>
-        <p:txBody>
-          <a:bodyPr wrap="square">
-            <a:spAutoFit/>
-          </a:bodyPr>
-          <a:lstStyle/>
-          <a:p>
-            <a:pPr algn="l"/>
-            <a:r>
-              <a:rPr sz="1350" b="0">
+              <a:rPr sz="1300" b="0">
                 <a:solidFill>
                   <a:srgbClr val="555F6E"/>
                 </a:solidFill>
@@ -21535,8 +21535,43 @@
         </p:nvSpPr>
         <p:spPr>
           <a:xfrm>
-            <a:off x="882000" y="2545200"/>
-            <a:ext cx="540000" cy="396000"/>
+            <a:off x="882000" y="2556000"/>
+            <a:ext cx="540000" cy="360000"/>
+          </a:xfrm>
+          <a:prstGeom prst="rect">
+            <a:avLst/>
+          </a:prstGeom>
+          <a:noFill/>
+        </p:spPr>
+        <p:txBody>
+          <a:bodyPr wrap="none">
+            <a:spAutoFit/>
+          </a:bodyPr>
+          <a:lstStyle/>
+          <a:p>
+            <a:pPr algn="l"/>
+            <a:r>
+              <a:rPr sz="1800" b="1">
+                <a:solidFill>
+                  <a:srgbClr val="2F6EBA"/>
+                </a:solidFill>
+                <a:latin typeface="Microsoft YaHei"/>
+              </a:rPr>
+              <a:t>02</a:t>
+            </a:r>
+          </a:p>
+        </p:txBody>
+      </p:sp>
+      <p:sp>
+        <p:nvSpPr>
+          <p:cNvPr id="14" name="TextBox 13"/>
+          <p:cNvSpPr txBox="1"/>
+          <p:nvPr/>
+        </p:nvSpPr>
+        <p:spPr>
+          <a:xfrm>
+            <a:off x="1296000" y="2545200"/>
+            <a:ext cx="5616000" cy="198000"/>
           </a:xfrm>
           <a:prstGeom prst="rect">
             <a:avLst/>
@@ -21551,27 +21586,27 @@
           <a:p>
             <a:pPr algn="l"/>
             <a:r>
-              <a:rPr sz="2000" b="1">
-                <a:solidFill>
-                  <a:srgbClr val="2F6EBA"/>
-                </a:solidFill>
-                <a:latin typeface="Microsoft YaHei"/>
-              </a:rPr>
-              <a:t>02</a:t>
-            </a:r>
-          </a:p>
-        </p:txBody>
-      </p:sp>
-      <p:sp>
-        <p:nvSpPr>
-          <p:cNvPr id="14" name="TextBox 13"/>
-          <p:cNvSpPr txBox="1"/>
-          <p:nvPr/>
-        </p:nvSpPr>
-        <p:spPr>
-          <a:xfrm>
-            <a:off x="1296000" y="2534400"/>
-            <a:ext cx="5616000" cy="216000"/>
+              <a:rPr sz="1500" b="1">
+                <a:solidFill>
+                  <a:srgbClr val="1F3A68"/>
+                </a:solidFill>
+                <a:latin typeface="Microsoft YaHei"/>
+              </a:rPr>
+              <a:t>结构化反馈</a:t>
+            </a:r>
+          </a:p>
+        </p:txBody>
+      </p:sp>
+      <p:sp>
+        <p:nvSpPr>
+          <p:cNvPr id="15" name="TextBox 14"/>
+          <p:cNvSpPr txBox="1"/>
+          <p:nvPr/>
+        </p:nvSpPr>
+        <p:spPr>
+          <a:xfrm>
+            <a:off x="1296000" y="2750400"/>
+            <a:ext cx="5616000" cy="306000"/>
           </a:xfrm>
           <a:prstGeom prst="rect">
             <a:avLst/>
@@ -21586,42 +21621,7 @@
           <a:p>
             <a:pPr algn="l"/>
             <a:r>
-              <a:rPr sz="1600" b="1">
-                <a:solidFill>
-                  <a:srgbClr val="1F3A68"/>
-                </a:solidFill>
-                <a:latin typeface="Microsoft YaHei"/>
-              </a:rPr>
-              <a:t>结构化反馈</a:t>
-            </a:r>
-          </a:p>
-        </p:txBody>
-      </p:sp>
-      <p:sp>
-        <p:nvSpPr>
-          <p:cNvPr id="15" name="TextBox 14"/>
-          <p:cNvSpPr txBox="1"/>
-          <p:nvPr/>
-        </p:nvSpPr>
-        <p:spPr>
-          <a:xfrm>
-            <a:off x="1296000" y="2736000"/>
-            <a:ext cx="5616000" cy="251999"/>
-          </a:xfrm>
-          <a:prstGeom prst="rect">
-            <a:avLst/>
-          </a:prstGeom>
-          <a:noFill/>
-        </p:spPr>
-        <p:txBody>
-          <a:bodyPr wrap="square">
-            <a:spAutoFit/>
-          </a:bodyPr>
-          <a:lstStyle/>
-          <a:p>
-            <a:pPr algn="l"/>
-            <a:r>
-              <a:rPr sz="1350" b="0">
+              <a:rPr sz="1300" b="0">
                 <a:solidFill>
                   <a:srgbClr val="555F6E"/>
                 </a:solidFill>
@@ -21732,8 +21732,43 @@
         </p:nvSpPr>
         <p:spPr>
           <a:xfrm>
-            <a:off x="882000" y="3380400"/>
-            <a:ext cx="540000" cy="396000"/>
+            <a:off x="882000" y="3391200"/>
+            <a:ext cx="540000" cy="360000"/>
+          </a:xfrm>
+          <a:prstGeom prst="rect">
+            <a:avLst/>
+          </a:prstGeom>
+          <a:noFill/>
+        </p:spPr>
+        <p:txBody>
+          <a:bodyPr wrap="none">
+            <a:spAutoFit/>
+          </a:bodyPr>
+          <a:lstStyle/>
+          <a:p>
+            <a:pPr algn="l"/>
+            <a:r>
+              <a:rPr sz="1800" b="1">
+                <a:solidFill>
+                  <a:srgbClr val="2F6EBA"/>
+                </a:solidFill>
+                <a:latin typeface="Microsoft YaHei"/>
+              </a:rPr>
+              <a:t>03</a:t>
+            </a:r>
+          </a:p>
+        </p:txBody>
+      </p:sp>
+      <p:sp>
+        <p:nvSpPr>
+          <p:cNvPr id="19" name="TextBox 18"/>
+          <p:cNvSpPr txBox="1"/>
+          <p:nvPr/>
+        </p:nvSpPr>
+        <p:spPr>
+          <a:xfrm>
+            <a:off x="1296000" y="3380400"/>
+            <a:ext cx="5616000" cy="198000"/>
           </a:xfrm>
           <a:prstGeom prst="rect">
             <a:avLst/>
@@ -21748,27 +21783,27 @@
           <a:p>
             <a:pPr algn="l"/>
             <a:r>
-              <a:rPr sz="2000" b="1">
-                <a:solidFill>
-                  <a:srgbClr val="2F6EBA"/>
-                </a:solidFill>
-                <a:latin typeface="Microsoft YaHei"/>
-              </a:rPr>
-              <a:t>03</a:t>
-            </a:r>
-          </a:p>
-        </p:txBody>
-      </p:sp>
-      <p:sp>
-        <p:nvSpPr>
-          <p:cNvPr id="19" name="TextBox 18"/>
-          <p:cNvSpPr txBox="1"/>
-          <p:nvPr/>
-        </p:nvSpPr>
-        <p:spPr>
-          <a:xfrm>
-            <a:off x="1296000" y="3369600"/>
-            <a:ext cx="5616000" cy="216000"/>
+              <a:rPr sz="1500" b="1">
+                <a:solidFill>
+                  <a:srgbClr val="1F3A68"/>
+                </a:solidFill>
+                <a:latin typeface="Microsoft YaHei"/>
+              </a:rPr>
+              <a:t>normalize_task</a:t>
+            </a:r>
+          </a:p>
+        </p:txBody>
+      </p:sp>
+      <p:sp>
+        <p:nvSpPr>
+          <p:cNvPr id="20" name="TextBox 19"/>
+          <p:cNvSpPr txBox="1"/>
+          <p:nvPr/>
+        </p:nvSpPr>
+        <p:spPr>
+          <a:xfrm>
+            <a:off x="1296000" y="3585600"/>
+            <a:ext cx="5616000" cy="306000"/>
           </a:xfrm>
           <a:prstGeom prst="rect">
             <a:avLst/>
@@ -21783,42 +21818,7 @@
           <a:p>
             <a:pPr algn="l"/>
             <a:r>
-              <a:rPr sz="1600" b="1">
-                <a:solidFill>
-                  <a:srgbClr val="1F3A68"/>
-                </a:solidFill>
-                <a:latin typeface="Microsoft YaHei"/>
-              </a:rPr>
-              <a:t>normalize_task</a:t>
-            </a:r>
-          </a:p>
-        </p:txBody>
-      </p:sp>
-      <p:sp>
-        <p:nvSpPr>
-          <p:cNvPr id="20" name="TextBox 19"/>
-          <p:cNvSpPr txBox="1"/>
-          <p:nvPr/>
-        </p:nvSpPr>
-        <p:spPr>
-          <a:xfrm>
-            <a:off x="1296000" y="3571200"/>
-            <a:ext cx="5616000" cy="251999"/>
-          </a:xfrm>
-          <a:prstGeom prst="rect">
-            <a:avLst/>
-          </a:prstGeom>
-          <a:noFill/>
-        </p:spPr>
-        <p:txBody>
-          <a:bodyPr wrap="square">
-            <a:spAutoFit/>
-          </a:bodyPr>
-          <a:lstStyle/>
-          <a:p>
-            <a:pPr algn="l"/>
-            <a:r>
-              <a:rPr sz="1350" b="0">
+              <a:rPr sz="1300" b="0">
                 <a:solidFill>
                   <a:srgbClr val="555F6E"/>
                 </a:solidFill>
@@ -21929,8 +21929,43 @@
         </p:nvSpPr>
         <p:spPr>
           <a:xfrm>
-            <a:off x="882000" y="4215600"/>
-            <a:ext cx="540000" cy="396000"/>
+            <a:off x="882000" y="4226400"/>
+            <a:ext cx="540000" cy="360000"/>
+          </a:xfrm>
+          <a:prstGeom prst="rect">
+            <a:avLst/>
+          </a:prstGeom>
+          <a:noFill/>
+        </p:spPr>
+        <p:txBody>
+          <a:bodyPr wrap="none">
+            <a:spAutoFit/>
+          </a:bodyPr>
+          <a:lstStyle/>
+          <a:p>
+            <a:pPr algn="l"/>
+            <a:r>
+              <a:rPr sz="1800" b="1">
+                <a:solidFill>
+                  <a:srgbClr val="2F6EBA"/>
+                </a:solidFill>
+                <a:latin typeface="Microsoft YaHei"/>
+              </a:rPr>
+              <a:t>04</a:t>
+            </a:r>
+          </a:p>
+        </p:txBody>
+      </p:sp>
+      <p:sp>
+        <p:nvSpPr>
+          <p:cNvPr id="24" name="TextBox 23"/>
+          <p:cNvSpPr txBox="1"/>
+          <p:nvPr/>
+        </p:nvSpPr>
+        <p:spPr>
+          <a:xfrm>
+            <a:off x="1296000" y="4215600"/>
+            <a:ext cx="5616000" cy="198000"/>
           </a:xfrm>
           <a:prstGeom prst="rect">
             <a:avLst/>
@@ -21945,27 +21980,27 @@
           <a:p>
             <a:pPr algn="l"/>
             <a:r>
-              <a:rPr sz="2000" b="1">
-                <a:solidFill>
-                  <a:srgbClr val="2F6EBA"/>
-                </a:solidFill>
-                <a:latin typeface="Microsoft YaHei"/>
-              </a:rPr>
-              <a:t>04</a:t>
-            </a:r>
-          </a:p>
-        </p:txBody>
-      </p:sp>
-      <p:sp>
-        <p:nvSpPr>
-          <p:cNvPr id="24" name="TextBox 23"/>
-          <p:cNvSpPr txBox="1"/>
-          <p:nvPr/>
-        </p:nvSpPr>
-        <p:spPr>
-          <a:xfrm>
-            <a:off x="1296000" y="4204800"/>
-            <a:ext cx="5616000" cy="216000"/>
+              <a:rPr sz="1500" b="1">
+                <a:solidFill>
+                  <a:srgbClr val="1F3A68"/>
+                </a:solidFill>
+                <a:latin typeface="Microsoft YaHei"/>
+              </a:rPr>
+              <a:t>domain_check</a:t>
+            </a:r>
+          </a:p>
+        </p:txBody>
+      </p:sp>
+      <p:sp>
+        <p:nvSpPr>
+          <p:cNvPr id="25" name="TextBox 24"/>
+          <p:cNvSpPr txBox="1"/>
+          <p:nvPr/>
+        </p:nvSpPr>
+        <p:spPr>
+          <a:xfrm>
+            <a:off x="1296000" y="4420800"/>
+            <a:ext cx="5616000" cy="306000"/>
           </a:xfrm>
           <a:prstGeom prst="rect">
             <a:avLst/>
@@ -21980,42 +22015,7 @@
           <a:p>
             <a:pPr algn="l"/>
             <a:r>
-              <a:rPr sz="1600" b="1">
-                <a:solidFill>
-                  <a:srgbClr val="1F3A68"/>
-                </a:solidFill>
-                <a:latin typeface="Microsoft YaHei"/>
-              </a:rPr>
-              <a:t>domain_check</a:t>
-            </a:r>
-          </a:p>
-        </p:txBody>
-      </p:sp>
-      <p:sp>
-        <p:nvSpPr>
-          <p:cNvPr id="25" name="TextBox 24"/>
-          <p:cNvSpPr txBox="1"/>
-          <p:nvPr/>
-        </p:nvSpPr>
-        <p:spPr>
-          <a:xfrm>
-            <a:off x="1296000" y="4406400"/>
-            <a:ext cx="5616000" cy="251999"/>
-          </a:xfrm>
-          <a:prstGeom prst="rect">
-            <a:avLst/>
-          </a:prstGeom>
-          <a:noFill/>
-        </p:spPr>
-        <p:txBody>
-          <a:bodyPr wrap="square">
-            <a:spAutoFit/>
-          </a:bodyPr>
-          <a:lstStyle/>
-          <a:p>
-            <a:pPr algn="l"/>
-            <a:r>
-              <a:rPr sz="1350" b="0">
+              <a:rPr sz="1300" b="0">
                 <a:solidFill>
                   <a:srgbClr val="555F6E"/>
                 </a:solidFill>
@@ -22462,8 +22462,43 @@
         </p:nvSpPr>
         <p:spPr>
           <a:xfrm>
-            <a:off x="882000" y="1710000"/>
-            <a:ext cx="540000" cy="396000"/>
+            <a:off x="882000" y="1720799"/>
+            <a:ext cx="540000" cy="360000"/>
+          </a:xfrm>
+          <a:prstGeom prst="rect">
+            <a:avLst/>
+          </a:prstGeom>
+          <a:noFill/>
+        </p:spPr>
+        <p:txBody>
+          <a:bodyPr wrap="none">
+            <a:spAutoFit/>
+          </a:bodyPr>
+          <a:lstStyle/>
+          <a:p>
+            <a:pPr algn="l"/>
+            <a:r>
+              <a:rPr sz="1800" b="1">
+                <a:solidFill>
+                  <a:srgbClr val="2F6EBA"/>
+                </a:solidFill>
+                <a:latin typeface="Microsoft YaHei"/>
+              </a:rPr>
+              <a:t>01</a:t>
+            </a:r>
+          </a:p>
+        </p:txBody>
+      </p:sp>
+      <p:sp>
+        <p:nvSpPr>
+          <p:cNvPr id="9" name="TextBox 8"/>
+          <p:cNvSpPr txBox="1"/>
+          <p:nvPr/>
+        </p:nvSpPr>
+        <p:spPr>
+          <a:xfrm>
+            <a:off x="1296000" y="1710000"/>
+            <a:ext cx="9936000" cy="198000"/>
           </a:xfrm>
           <a:prstGeom prst="rect">
             <a:avLst/>
@@ -22478,27 +22513,27 @@
           <a:p>
             <a:pPr algn="l"/>
             <a:r>
-              <a:rPr sz="2000" b="1">
-                <a:solidFill>
-                  <a:srgbClr val="2F6EBA"/>
-                </a:solidFill>
-                <a:latin typeface="Microsoft YaHei"/>
-              </a:rPr>
-              <a:t>01</a:t>
-            </a:r>
-          </a:p>
-        </p:txBody>
-      </p:sp>
-      <p:sp>
-        <p:nvSpPr>
-          <p:cNvPr id="9" name="TextBox 8"/>
-          <p:cNvSpPr txBox="1"/>
-          <p:nvPr/>
-        </p:nvSpPr>
-        <p:spPr>
-          <a:xfrm>
-            <a:off x="1296000" y="1699200"/>
-            <a:ext cx="9936000" cy="216000"/>
+              <a:rPr sz="1500" b="1">
+                <a:solidFill>
+                  <a:srgbClr val="1F3A68"/>
+                </a:solidFill>
+                <a:latin typeface="Microsoft YaHei"/>
+              </a:rPr>
+              <a:t>结论</a:t>
+            </a:r>
+          </a:p>
+        </p:txBody>
+      </p:sp>
+      <p:sp>
+        <p:nvSpPr>
+          <p:cNvPr id="10" name="TextBox 9"/>
+          <p:cNvSpPr txBox="1"/>
+          <p:nvPr/>
+        </p:nvSpPr>
+        <p:spPr>
+          <a:xfrm>
+            <a:off x="1296000" y="1915199"/>
+            <a:ext cx="9936000" cy="306000"/>
           </a:xfrm>
           <a:prstGeom prst="rect">
             <a:avLst/>
@@ -22513,42 +22548,7 @@
           <a:p>
             <a:pPr algn="l"/>
             <a:r>
-              <a:rPr sz="1600" b="1">
-                <a:solidFill>
-                  <a:srgbClr val="1F3A68"/>
-                </a:solidFill>
-                <a:latin typeface="Microsoft YaHei"/>
-              </a:rPr>
-              <a:t>结论</a:t>
-            </a:r>
-          </a:p>
-        </p:txBody>
-      </p:sp>
-      <p:sp>
-        <p:nvSpPr>
-          <p:cNvPr id="10" name="TextBox 9"/>
-          <p:cNvSpPr txBox="1"/>
-          <p:nvPr/>
-        </p:nvSpPr>
-        <p:spPr>
-          <a:xfrm>
-            <a:off x="1296000" y="1900799"/>
-            <a:ext cx="9936000" cy="251999"/>
-          </a:xfrm>
-          <a:prstGeom prst="rect">
-            <a:avLst/>
-          </a:prstGeom>
-          <a:noFill/>
-        </p:spPr>
-        <p:txBody>
-          <a:bodyPr wrap="square">
-            <a:spAutoFit/>
-          </a:bodyPr>
-          <a:lstStyle/>
-          <a:p>
-            <a:pPr algn="l"/>
-            <a:r>
-              <a:rPr sz="1350" b="0">
+              <a:rPr sz="1300" b="0">
                 <a:solidFill>
                   <a:srgbClr val="555F6E"/>
                 </a:solidFill>
@@ -22659,8 +22659,43 @@
         </p:nvSpPr>
         <p:spPr>
           <a:xfrm>
-            <a:off x="882000" y="2545200"/>
-            <a:ext cx="540000" cy="396000"/>
+            <a:off x="882000" y="2556000"/>
+            <a:ext cx="540000" cy="360000"/>
+          </a:xfrm>
+          <a:prstGeom prst="rect">
+            <a:avLst/>
+          </a:prstGeom>
+          <a:noFill/>
+        </p:spPr>
+        <p:txBody>
+          <a:bodyPr wrap="none">
+            <a:spAutoFit/>
+          </a:bodyPr>
+          <a:lstStyle/>
+          <a:p>
+            <a:pPr algn="l"/>
+            <a:r>
+              <a:rPr sz="1800" b="1">
+                <a:solidFill>
+                  <a:srgbClr val="2F6EBA"/>
+                </a:solidFill>
+                <a:latin typeface="Microsoft YaHei"/>
+              </a:rPr>
+              <a:t>02</a:t>
+            </a:r>
+          </a:p>
+        </p:txBody>
+      </p:sp>
+      <p:sp>
+        <p:nvSpPr>
+          <p:cNvPr id="14" name="TextBox 13"/>
+          <p:cNvSpPr txBox="1"/>
+          <p:nvPr/>
+        </p:nvSpPr>
+        <p:spPr>
+          <a:xfrm>
+            <a:off x="1296000" y="2642400"/>
+            <a:ext cx="9936000" cy="342000"/>
           </a:xfrm>
           <a:prstGeom prst="rect">
             <a:avLst/>
@@ -22675,42 +22710,7 @@
           <a:p>
             <a:pPr algn="l"/>
             <a:r>
-              <a:rPr sz="2000" b="1">
-                <a:solidFill>
-                  <a:srgbClr val="2F6EBA"/>
-                </a:solidFill>
-                <a:latin typeface="Microsoft YaHei"/>
-              </a:rPr>
-              <a:t>02</a:t>
-            </a:r>
-          </a:p>
-        </p:txBody>
-      </p:sp>
-      <p:sp>
-        <p:nvSpPr>
-          <p:cNvPr id="14" name="TextBox 13"/>
-          <p:cNvSpPr txBox="1"/>
-          <p:nvPr/>
-        </p:nvSpPr>
-        <p:spPr>
-          <a:xfrm>
-            <a:off x="1296000" y="2635200"/>
-            <a:ext cx="9936000" cy="288000"/>
-          </a:xfrm>
-          <a:prstGeom prst="rect">
-            <a:avLst/>
-          </a:prstGeom>
-          <a:noFill/>
-        </p:spPr>
-        <p:txBody>
-          <a:bodyPr wrap="square">
-            <a:spAutoFit/>
-          </a:bodyPr>
-          <a:lstStyle/>
-          <a:p>
-            <a:pPr algn="l"/>
-            <a:r>
-              <a:rPr sz="1450" b="0">
+              <a:rPr sz="1400" b="0">
                 <a:solidFill>
                   <a:srgbClr val="222830"/>
                 </a:solidFill>
@@ -22821,8 +22821,43 @@
         </p:nvSpPr>
         <p:spPr>
           <a:xfrm>
-            <a:off x="882000" y="3380400"/>
-            <a:ext cx="540000" cy="396000"/>
+            <a:off x="882000" y="3391200"/>
+            <a:ext cx="540000" cy="360000"/>
+          </a:xfrm>
+          <a:prstGeom prst="rect">
+            <a:avLst/>
+          </a:prstGeom>
+          <a:noFill/>
+        </p:spPr>
+        <p:txBody>
+          <a:bodyPr wrap="none">
+            <a:spAutoFit/>
+          </a:bodyPr>
+          <a:lstStyle/>
+          <a:p>
+            <a:pPr algn="l"/>
+            <a:r>
+              <a:rPr sz="1800" b="1">
+                <a:solidFill>
+                  <a:srgbClr val="2F6EBA"/>
+                </a:solidFill>
+                <a:latin typeface="Microsoft YaHei"/>
+              </a:rPr>
+              <a:t>03</a:t>
+            </a:r>
+          </a:p>
+        </p:txBody>
+      </p:sp>
+      <p:sp>
+        <p:nvSpPr>
+          <p:cNvPr id="18" name="TextBox 17"/>
+          <p:cNvSpPr txBox="1"/>
+          <p:nvPr/>
+        </p:nvSpPr>
+        <p:spPr>
+          <a:xfrm>
+            <a:off x="1296000" y="3380400"/>
+            <a:ext cx="9936000" cy="198000"/>
           </a:xfrm>
           <a:prstGeom prst="rect">
             <a:avLst/>
@@ -22837,27 +22872,27 @@
           <a:p>
             <a:pPr algn="l"/>
             <a:r>
-              <a:rPr sz="2000" b="1">
-                <a:solidFill>
-                  <a:srgbClr val="2F6EBA"/>
-                </a:solidFill>
-                <a:latin typeface="Microsoft YaHei"/>
-              </a:rPr>
-              <a:t>03</a:t>
-            </a:r>
-          </a:p>
-        </p:txBody>
-      </p:sp>
-      <p:sp>
-        <p:nvSpPr>
-          <p:cNvPr id="18" name="TextBox 17"/>
-          <p:cNvSpPr txBox="1"/>
-          <p:nvPr/>
-        </p:nvSpPr>
-        <p:spPr>
-          <a:xfrm>
-            <a:off x="1296000" y="3369600"/>
-            <a:ext cx="9936000" cy="216000"/>
+              <a:rPr sz="1500" b="1">
+                <a:solidFill>
+                  <a:srgbClr val="1F3A68"/>
+                </a:solidFill>
+                <a:latin typeface="Microsoft YaHei"/>
+              </a:rPr>
+              <a:t>下一步</a:t>
+            </a:r>
+          </a:p>
+        </p:txBody>
+      </p:sp>
+      <p:sp>
+        <p:nvSpPr>
+          <p:cNvPr id="19" name="TextBox 18"/>
+          <p:cNvSpPr txBox="1"/>
+          <p:nvPr/>
+        </p:nvSpPr>
+        <p:spPr>
+          <a:xfrm>
+            <a:off x="1296000" y="3585600"/>
+            <a:ext cx="9936000" cy="306000"/>
           </a:xfrm>
           <a:prstGeom prst="rect">
             <a:avLst/>
@@ -22872,42 +22907,7 @@
           <a:p>
             <a:pPr algn="l"/>
             <a:r>
-              <a:rPr sz="1600" b="1">
-                <a:solidFill>
-                  <a:srgbClr val="1F3A68"/>
-                </a:solidFill>
-                <a:latin typeface="Microsoft YaHei"/>
-              </a:rPr>
-              <a:t>下一步</a:t>
-            </a:r>
-          </a:p>
-        </p:txBody>
-      </p:sp>
-      <p:sp>
-        <p:nvSpPr>
-          <p:cNvPr id="19" name="TextBox 18"/>
-          <p:cNvSpPr txBox="1"/>
-          <p:nvPr/>
-        </p:nvSpPr>
-        <p:spPr>
-          <a:xfrm>
-            <a:off x="1296000" y="3571200"/>
-            <a:ext cx="9936000" cy="251999"/>
-          </a:xfrm>
-          <a:prstGeom prst="rect">
-            <a:avLst/>
-          </a:prstGeom>
-          <a:noFill/>
-        </p:spPr>
-        <p:txBody>
-          <a:bodyPr wrap="square">
-            <a:spAutoFit/>
-          </a:bodyPr>
-          <a:lstStyle/>
-          <a:p>
-            <a:pPr algn="l"/>
-            <a:r>
-              <a:rPr sz="1350" b="0">
+              <a:rPr sz="1300" b="0">
                 <a:solidFill>
                   <a:srgbClr val="555F6E"/>
                 </a:solidFill>
@@ -23018,8 +23018,43 @@
         </p:nvSpPr>
         <p:spPr>
           <a:xfrm>
-            <a:off x="882000" y="4215600"/>
-            <a:ext cx="540000" cy="396000"/>
+            <a:off x="882000" y="4226400"/>
+            <a:ext cx="540000" cy="360000"/>
+          </a:xfrm>
+          <a:prstGeom prst="rect">
+            <a:avLst/>
+          </a:prstGeom>
+          <a:noFill/>
+        </p:spPr>
+        <p:txBody>
+          <a:bodyPr wrap="none">
+            <a:spAutoFit/>
+          </a:bodyPr>
+          <a:lstStyle/>
+          <a:p>
+            <a:pPr algn="l"/>
+            <a:r>
+              <a:rPr sz="1800" b="1">
+                <a:solidFill>
+                  <a:srgbClr val="2F6EBA"/>
+                </a:solidFill>
+                <a:latin typeface="Microsoft YaHei"/>
+              </a:rPr>
+              <a:t>04</a:t>
+            </a:r>
+          </a:p>
+        </p:txBody>
+      </p:sp>
+      <p:sp>
+        <p:nvSpPr>
+          <p:cNvPr id="23" name="TextBox 22"/>
+          <p:cNvSpPr txBox="1"/>
+          <p:nvPr/>
+        </p:nvSpPr>
+        <p:spPr>
+          <a:xfrm>
+            <a:off x="1296000" y="4215600"/>
+            <a:ext cx="9936000" cy="198000"/>
           </a:xfrm>
           <a:prstGeom prst="rect">
             <a:avLst/>
@@ -23034,27 +23069,27 @@
           <a:p>
             <a:pPr algn="l"/>
             <a:r>
-              <a:rPr sz="2000" b="1">
-                <a:solidFill>
-                  <a:srgbClr val="2F6EBA"/>
-                </a:solidFill>
-                <a:latin typeface="Microsoft YaHei"/>
-              </a:rPr>
-              <a:t>04</a:t>
-            </a:r>
-          </a:p>
-        </p:txBody>
-      </p:sp>
-      <p:sp>
-        <p:nvSpPr>
-          <p:cNvPr id="23" name="TextBox 22"/>
-          <p:cNvSpPr txBox="1"/>
-          <p:nvPr/>
-        </p:nvSpPr>
-        <p:spPr>
-          <a:xfrm>
-            <a:off x="1296000" y="4204800"/>
-            <a:ext cx="9936000" cy="216000"/>
+              <a:rPr sz="1500" b="1">
+                <a:solidFill>
+                  <a:srgbClr val="1F3A68"/>
+                </a:solidFill>
+                <a:latin typeface="Microsoft YaHei"/>
+              </a:rPr>
+              <a:t>下一步</a:t>
+            </a:r>
+          </a:p>
+        </p:txBody>
+      </p:sp>
+      <p:sp>
+        <p:nvSpPr>
+          <p:cNvPr id="24" name="TextBox 23"/>
+          <p:cNvSpPr txBox="1"/>
+          <p:nvPr/>
+        </p:nvSpPr>
+        <p:spPr>
+          <a:xfrm>
+            <a:off x="1296000" y="4420800"/>
+            <a:ext cx="9936000" cy="306000"/>
           </a:xfrm>
           <a:prstGeom prst="rect">
             <a:avLst/>
@@ -23069,42 +23104,7 @@
           <a:p>
             <a:pPr algn="l"/>
             <a:r>
-              <a:rPr sz="1600" b="1">
-                <a:solidFill>
-                  <a:srgbClr val="1F3A68"/>
-                </a:solidFill>
-                <a:latin typeface="Microsoft YaHei"/>
-              </a:rPr>
-              <a:t>下一步</a:t>
-            </a:r>
-          </a:p>
-        </p:txBody>
-      </p:sp>
-      <p:sp>
-        <p:nvSpPr>
-          <p:cNvPr id="24" name="TextBox 23"/>
-          <p:cNvSpPr txBox="1"/>
-          <p:nvPr/>
-        </p:nvSpPr>
-        <p:spPr>
-          <a:xfrm>
-            <a:off x="1296000" y="4406400"/>
-            <a:ext cx="9936000" cy="251999"/>
-          </a:xfrm>
-          <a:prstGeom prst="rect">
-            <a:avLst/>
-          </a:prstGeom>
-          <a:noFill/>
-        </p:spPr>
-        <p:txBody>
-          <a:bodyPr wrap="square">
-            <a:spAutoFit/>
-          </a:bodyPr>
-          <a:lstStyle/>
-          <a:p>
-            <a:pPr algn="l"/>
-            <a:r>
-              <a:rPr sz="1350" b="0">
+              <a:rPr sz="1300" b="0">
                 <a:solidFill>
                   <a:srgbClr val="555F6E"/>
                 </a:solidFill>
@@ -23215,8 +23215,43 @@
         </p:nvSpPr>
         <p:spPr>
           <a:xfrm>
-            <a:off x="882000" y="5050800"/>
-            <a:ext cx="540000" cy="396000"/>
+            <a:off x="882000" y="5061600"/>
+            <a:ext cx="540000" cy="360000"/>
+          </a:xfrm>
+          <a:prstGeom prst="rect">
+            <a:avLst/>
+          </a:prstGeom>
+          <a:noFill/>
+        </p:spPr>
+        <p:txBody>
+          <a:bodyPr wrap="none">
+            <a:spAutoFit/>
+          </a:bodyPr>
+          <a:lstStyle/>
+          <a:p>
+            <a:pPr algn="l"/>
+            <a:r>
+              <a:rPr sz="1800" b="1">
+                <a:solidFill>
+                  <a:srgbClr val="2F6EBA"/>
+                </a:solidFill>
+                <a:latin typeface="Microsoft YaHei"/>
+              </a:rPr>
+              <a:t>05</a:t>
+            </a:r>
+          </a:p>
+        </p:txBody>
+      </p:sp>
+      <p:sp>
+        <p:nvSpPr>
+          <p:cNvPr id="28" name="TextBox 27"/>
+          <p:cNvSpPr txBox="1"/>
+          <p:nvPr/>
+        </p:nvSpPr>
+        <p:spPr>
+          <a:xfrm>
+            <a:off x="1296000" y="5050800"/>
+            <a:ext cx="9936000" cy="198000"/>
           </a:xfrm>
           <a:prstGeom prst="rect">
             <a:avLst/>
@@ -23231,27 +23266,27 @@
           <a:p>
             <a:pPr algn="l"/>
             <a:r>
-              <a:rPr sz="2000" b="1">
-                <a:solidFill>
-                  <a:srgbClr val="2F6EBA"/>
-                </a:solidFill>
-                <a:latin typeface="Microsoft YaHei"/>
-              </a:rPr>
-              <a:t>05</a:t>
-            </a:r>
-          </a:p>
-        </p:txBody>
-      </p:sp>
-      <p:sp>
-        <p:nvSpPr>
-          <p:cNvPr id="28" name="TextBox 27"/>
-          <p:cNvSpPr txBox="1"/>
-          <p:nvPr/>
-        </p:nvSpPr>
-        <p:spPr>
-          <a:xfrm>
-            <a:off x="1296000" y="5040000"/>
-            <a:ext cx="9936000" cy="216000"/>
+              <a:rPr sz="1500" b="1">
+                <a:solidFill>
+                  <a:srgbClr val="1F3A68"/>
+                </a:solidFill>
+                <a:latin typeface="Microsoft YaHei"/>
+              </a:rPr>
+              <a:t>下一步</a:t>
+            </a:r>
+          </a:p>
+        </p:txBody>
+      </p:sp>
+      <p:sp>
+        <p:nvSpPr>
+          <p:cNvPr id="29" name="TextBox 28"/>
+          <p:cNvSpPr txBox="1"/>
+          <p:nvPr/>
+        </p:nvSpPr>
+        <p:spPr>
+          <a:xfrm>
+            <a:off x="1296000" y="5256000"/>
+            <a:ext cx="9936000" cy="306000"/>
           </a:xfrm>
           <a:prstGeom prst="rect">
             <a:avLst/>
@@ -23266,42 +23301,7 @@
           <a:p>
             <a:pPr algn="l"/>
             <a:r>
-              <a:rPr sz="1600" b="1">
-                <a:solidFill>
-                  <a:srgbClr val="1F3A68"/>
-                </a:solidFill>
-                <a:latin typeface="Microsoft YaHei"/>
-              </a:rPr>
-              <a:t>下一步</a:t>
-            </a:r>
-          </a:p>
-        </p:txBody>
-      </p:sp>
-      <p:sp>
-        <p:nvSpPr>
-          <p:cNvPr id="29" name="TextBox 28"/>
-          <p:cNvSpPr txBox="1"/>
-          <p:nvPr/>
-        </p:nvSpPr>
-        <p:spPr>
-          <a:xfrm>
-            <a:off x="1296000" y="5241600"/>
-            <a:ext cx="9936000" cy="251999"/>
-          </a:xfrm>
-          <a:prstGeom prst="rect">
-            <a:avLst/>
-          </a:prstGeom>
-          <a:noFill/>
-        </p:spPr>
-        <p:txBody>
-          <a:bodyPr wrap="square">
-            <a:spAutoFit/>
-          </a:bodyPr>
-          <a:lstStyle/>
-          <a:p>
-            <a:pPr algn="l"/>
-            <a:r>
-              <a:rPr sz="1350" b="0">
+              <a:rPr sz="1300" b="0">
                 <a:solidFill>
                   <a:srgbClr val="555F6E"/>
                 </a:solidFill>
@@ -24441,8 +24441,43 @@
         </p:nvSpPr>
         <p:spPr>
           <a:xfrm>
-            <a:off x="882000" y="1710000"/>
-            <a:ext cx="540000" cy="396000"/>
+            <a:off x="882000" y="1720799"/>
+            <a:ext cx="540000" cy="360000"/>
+          </a:xfrm>
+          <a:prstGeom prst="rect">
+            <a:avLst/>
+          </a:prstGeom>
+          <a:noFill/>
+        </p:spPr>
+        <p:txBody>
+          <a:bodyPr wrap="none">
+            <a:spAutoFit/>
+          </a:bodyPr>
+          <a:lstStyle/>
+          <a:p>
+            <a:pPr algn="l"/>
+            <a:r>
+              <a:rPr sz="1800" b="1">
+                <a:solidFill>
+                  <a:srgbClr val="2F6EBA"/>
+                </a:solidFill>
+                <a:latin typeface="Microsoft YaHei"/>
+              </a:rPr>
+              <a:t>01</a:t>
+            </a:r>
+          </a:p>
+        </p:txBody>
+      </p:sp>
+      <p:sp>
+        <p:nvSpPr>
+          <p:cNvPr id="9" name="TextBox 8"/>
+          <p:cNvSpPr txBox="1"/>
+          <p:nvPr/>
+        </p:nvSpPr>
+        <p:spPr>
+          <a:xfrm>
+            <a:off x="1296000" y="1710000"/>
+            <a:ext cx="5616000" cy="198000"/>
           </a:xfrm>
           <a:prstGeom prst="rect">
             <a:avLst/>
@@ -24457,27 +24492,27 @@
           <a:p>
             <a:pPr algn="l"/>
             <a:r>
-              <a:rPr sz="2000" b="1">
-                <a:solidFill>
-                  <a:srgbClr val="2F6EBA"/>
-                </a:solidFill>
-                <a:latin typeface="Microsoft YaHei"/>
-              </a:rPr>
-              <a:t>01</a:t>
-            </a:r>
-          </a:p>
-        </p:txBody>
-      </p:sp>
-      <p:sp>
-        <p:nvSpPr>
-          <p:cNvPr id="9" name="TextBox 8"/>
-          <p:cNvSpPr txBox="1"/>
-          <p:nvPr/>
-        </p:nvSpPr>
-        <p:spPr>
-          <a:xfrm>
-            <a:off x="1296000" y="1699200"/>
-            <a:ext cx="5616000" cy="216000"/>
+              <a:rPr sz="1500" b="1">
+                <a:solidFill>
+                  <a:srgbClr val="1F3A68"/>
+                </a:solidFill>
+                <a:latin typeface="Microsoft YaHei"/>
+              </a:rPr>
+              <a:t>作战规划智能体以场次接任务</a:t>
+            </a:r>
+          </a:p>
+        </p:txBody>
+      </p:sp>
+      <p:sp>
+        <p:nvSpPr>
+          <p:cNvPr id="10" name="TextBox 9"/>
+          <p:cNvSpPr txBox="1"/>
+          <p:nvPr/>
+        </p:nvSpPr>
+        <p:spPr>
+          <a:xfrm>
+            <a:off x="1296000" y="1915199"/>
+            <a:ext cx="5616000" cy="306000"/>
           </a:xfrm>
           <a:prstGeom prst="rect">
             <a:avLst/>
@@ -24492,42 +24527,7 @@
           <a:p>
             <a:pPr algn="l"/>
             <a:r>
-              <a:rPr sz="1600" b="1">
-                <a:solidFill>
-                  <a:srgbClr val="1F3A68"/>
-                </a:solidFill>
-                <a:latin typeface="Microsoft YaHei"/>
-              </a:rPr>
-              <a:t>作战规划智能体以场次接任务</a:t>
-            </a:r>
-          </a:p>
-        </p:txBody>
-      </p:sp>
-      <p:sp>
-        <p:nvSpPr>
-          <p:cNvPr id="10" name="TextBox 9"/>
-          <p:cNvSpPr txBox="1"/>
-          <p:nvPr/>
-        </p:nvSpPr>
-        <p:spPr>
-          <a:xfrm>
-            <a:off x="1296000" y="1900799"/>
-            <a:ext cx="5616000" cy="251999"/>
-          </a:xfrm>
-          <a:prstGeom prst="rect">
-            <a:avLst/>
-          </a:prstGeom>
-          <a:noFill/>
-        </p:spPr>
-        <p:txBody>
-          <a:bodyPr wrap="square">
-            <a:spAutoFit/>
-          </a:bodyPr>
-          <a:lstStyle/>
-          <a:p>
-            <a:pPr algn="l"/>
-            <a:r>
-              <a:rPr sz="1350" b="0">
+              <a:rPr sz="1300" b="0">
                 <a:solidFill>
                   <a:srgbClr val="555F6E"/>
                 </a:solidFill>
@@ -24638,8 +24638,43 @@
         </p:nvSpPr>
         <p:spPr>
           <a:xfrm>
-            <a:off x="882000" y="2545200"/>
-            <a:ext cx="540000" cy="396000"/>
+            <a:off x="882000" y="2556000"/>
+            <a:ext cx="540000" cy="360000"/>
+          </a:xfrm>
+          <a:prstGeom prst="rect">
+            <a:avLst/>
+          </a:prstGeom>
+          <a:noFill/>
+        </p:spPr>
+        <p:txBody>
+          <a:bodyPr wrap="none">
+            <a:spAutoFit/>
+          </a:bodyPr>
+          <a:lstStyle/>
+          <a:p>
+            <a:pPr algn="l"/>
+            <a:r>
+              <a:rPr sz="1800" b="1">
+                <a:solidFill>
+                  <a:srgbClr val="2F6EBA"/>
+                </a:solidFill>
+                <a:latin typeface="Microsoft YaHei"/>
+              </a:rPr>
+              <a:t>02</a:t>
+            </a:r>
+          </a:p>
+        </p:txBody>
+      </p:sp>
+      <p:sp>
+        <p:nvSpPr>
+          <p:cNvPr id="14" name="TextBox 13"/>
+          <p:cNvSpPr txBox="1"/>
+          <p:nvPr/>
+        </p:nvSpPr>
+        <p:spPr>
+          <a:xfrm>
+            <a:off x="1296000" y="2642400"/>
+            <a:ext cx="5616000" cy="342000"/>
           </a:xfrm>
           <a:prstGeom prst="rect">
             <a:avLst/>
@@ -24654,42 +24689,7 @@
           <a:p>
             <a:pPr algn="l"/>
             <a:r>
-              <a:rPr sz="2000" b="1">
-                <a:solidFill>
-                  <a:srgbClr val="2F6EBA"/>
-                </a:solidFill>
-                <a:latin typeface="Microsoft YaHei"/>
-              </a:rPr>
-              <a:t>02</a:t>
-            </a:r>
-          </a:p>
-        </p:txBody>
-      </p:sp>
-      <p:sp>
-        <p:nvSpPr>
-          <p:cNvPr id="14" name="TextBox 13"/>
-          <p:cNvSpPr txBox="1"/>
-          <p:nvPr/>
-        </p:nvSpPr>
-        <p:spPr>
-          <a:xfrm>
-            <a:off x="1296000" y="2635200"/>
-            <a:ext cx="5616000" cy="288000"/>
-          </a:xfrm>
-          <a:prstGeom prst="rect">
-            <a:avLst/>
-          </a:prstGeom>
-          <a:noFill/>
-        </p:spPr>
-        <p:txBody>
-          <a:bodyPr wrap="square">
-            <a:spAutoFit/>
-          </a:bodyPr>
-          <a:lstStyle/>
-          <a:p>
-            <a:pPr algn="l"/>
-            <a:r>
-              <a:rPr sz="1450" b="0">
+              <a:rPr sz="1400" b="0">
                 <a:solidFill>
                   <a:srgbClr val="222830"/>
                 </a:solidFill>
@@ -24800,8 +24800,43 @@
         </p:nvSpPr>
         <p:spPr>
           <a:xfrm>
-            <a:off x="882000" y="3380400"/>
-            <a:ext cx="540000" cy="396000"/>
+            <a:off x="882000" y="3391200"/>
+            <a:ext cx="540000" cy="360000"/>
+          </a:xfrm>
+          <a:prstGeom prst="rect">
+            <a:avLst/>
+          </a:prstGeom>
+          <a:noFill/>
+        </p:spPr>
+        <p:txBody>
+          <a:bodyPr wrap="none">
+            <a:spAutoFit/>
+          </a:bodyPr>
+          <a:lstStyle/>
+          <a:p>
+            <a:pPr algn="l"/>
+            <a:r>
+              <a:rPr sz="1800" b="1">
+                <a:solidFill>
+                  <a:srgbClr val="2F6EBA"/>
+                </a:solidFill>
+                <a:latin typeface="Microsoft YaHei"/>
+              </a:rPr>
+              <a:t>03</a:t>
+            </a:r>
+          </a:p>
+        </p:txBody>
+      </p:sp>
+      <p:sp>
+        <p:nvSpPr>
+          <p:cNvPr id="18" name="TextBox 17"/>
+          <p:cNvSpPr txBox="1"/>
+          <p:nvPr/>
+        </p:nvSpPr>
+        <p:spPr>
+          <a:xfrm>
+            <a:off x="1296000" y="3477600"/>
+            <a:ext cx="5616000" cy="342000"/>
           </a:xfrm>
           <a:prstGeom prst="rect">
             <a:avLst/>
@@ -24816,42 +24851,7 @@
           <a:p>
             <a:pPr algn="l"/>
             <a:r>
-              <a:rPr sz="2000" b="1">
-                <a:solidFill>
-                  <a:srgbClr val="2F6EBA"/>
-                </a:solidFill>
-                <a:latin typeface="Microsoft YaHei"/>
-              </a:rPr>
-              <a:t>03</a:t>
-            </a:r>
-          </a:p>
-        </p:txBody>
-      </p:sp>
-      <p:sp>
-        <p:nvSpPr>
-          <p:cNvPr id="18" name="TextBox 17"/>
-          <p:cNvSpPr txBox="1"/>
-          <p:nvPr/>
-        </p:nvSpPr>
-        <p:spPr>
-          <a:xfrm>
-            <a:off x="1296000" y="3470400"/>
-            <a:ext cx="5616000" cy="288000"/>
-          </a:xfrm>
-          <a:prstGeom prst="rect">
-            <a:avLst/>
-          </a:prstGeom>
-          <a:noFill/>
-        </p:spPr>
-        <p:txBody>
-          <a:bodyPr wrap="square">
-            <a:spAutoFit/>
-          </a:bodyPr>
-          <a:lstStyle/>
-          <a:p>
-            <a:pPr algn="l"/>
-            <a:r>
-              <a:rPr sz="1450" b="0">
+              <a:rPr sz="1400" b="0">
                 <a:solidFill>
                   <a:srgbClr val="222830"/>
                 </a:solidFill>
@@ -24962,8 +24962,43 @@
         </p:nvSpPr>
         <p:spPr>
           <a:xfrm>
-            <a:off x="882000" y="4215600"/>
-            <a:ext cx="540000" cy="396000"/>
+            <a:off x="882000" y="4226400"/>
+            <a:ext cx="540000" cy="360000"/>
+          </a:xfrm>
+          <a:prstGeom prst="rect">
+            <a:avLst/>
+          </a:prstGeom>
+          <a:noFill/>
+        </p:spPr>
+        <p:txBody>
+          <a:bodyPr wrap="none">
+            <a:spAutoFit/>
+          </a:bodyPr>
+          <a:lstStyle/>
+          <a:p>
+            <a:pPr algn="l"/>
+            <a:r>
+              <a:rPr sz="1800" b="1">
+                <a:solidFill>
+                  <a:srgbClr val="2F6EBA"/>
+                </a:solidFill>
+                <a:latin typeface="Microsoft YaHei"/>
+              </a:rPr>
+              <a:t>04</a:t>
+            </a:r>
+          </a:p>
+        </p:txBody>
+      </p:sp>
+      <p:sp>
+        <p:nvSpPr>
+          <p:cNvPr id="22" name="TextBox 21"/>
+          <p:cNvSpPr txBox="1"/>
+          <p:nvPr/>
+        </p:nvSpPr>
+        <p:spPr>
+          <a:xfrm>
+            <a:off x="1296000" y="4215600"/>
+            <a:ext cx="5616000" cy="198000"/>
           </a:xfrm>
           <a:prstGeom prst="rect">
             <a:avLst/>
@@ -24978,27 +25013,27 @@
           <a:p>
             <a:pPr algn="l"/>
             <a:r>
-              <a:rPr sz="2000" b="1">
-                <a:solidFill>
-                  <a:srgbClr val="2F6EBA"/>
-                </a:solidFill>
-                <a:latin typeface="Microsoft YaHei"/>
-              </a:rPr>
-              <a:t>04</a:t>
-            </a:r>
-          </a:p>
-        </p:txBody>
-      </p:sp>
-      <p:sp>
-        <p:nvSpPr>
-          <p:cNvPr id="22" name="TextBox 21"/>
-          <p:cNvSpPr txBox="1"/>
-          <p:nvPr/>
-        </p:nvSpPr>
-        <p:spPr>
-          <a:xfrm>
-            <a:off x="1296000" y="4204800"/>
-            <a:ext cx="5616000" cy="216000"/>
+              <a:rPr sz="1500" b="1">
+                <a:solidFill>
+                  <a:srgbClr val="1F3A68"/>
+                </a:solidFill>
+                <a:latin typeface="Microsoft YaHei"/>
+              </a:rPr>
+              <a:t>目标</a:t>
+            </a:r>
+          </a:p>
+        </p:txBody>
+      </p:sp>
+      <p:sp>
+        <p:nvSpPr>
+          <p:cNvPr id="23" name="TextBox 22"/>
+          <p:cNvSpPr txBox="1"/>
+          <p:nvPr/>
+        </p:nvSpPr>
+        <p:spPr>
+          <a:xfrm>
+            <a:off x="1296000" y="4420800"/>
+            <a:ext cx="5616000" cy="306000"/>
           </a:xfrm>
           <a:prstGeom prst="rect">
             <a:avLst/>
@@ -25013,42 +25048,7 @@
           <a:p>
             <a:pPr algn="l"/>
             <a:r>
-              <a:rPr sz="1600" b="1">
-                <a:solidFill>
-                  <a:srgbClr val="1F3A68"/>
-                </a:solidFill>
-                <a:latin typeface="Microsoft YaHei"/>
-              </a:rPr>
-              <a:t>目标</a:t>
-            </a:r>
-          </a:p>
-        </p:txBody>
-      </p:sp>
-      <p:sp>
-        <p:nvSpPr>
-          <p:cNvPr id="23" name="TextBox 22"/>
-          <p:cNvSpPr txBox="1"/>
-          <p:nvPr/>
-        </p:nvSpPr>
-        <p:spPr>
-          <a:xfrm>
-            <a:off x="1296000" y="4406400"/>
-            <a:ext cx="5616000" cy="251999"/>
-          </a:xfrm>
-          <a:prstGeom prst="rect">
-            <a:avLst/>
-          </a:prstGeom>
-          <a:noFill/>
-        </p:spPr>
-        <p:txBody>
-          <a:bodyPr wrap="square">
-            <a:spAutoFit/>
-          </a:bodyPr>
-          <a:lstStyle/>
-          <a:p>
-            <a:pPr algn="l"/>
-            <a:r>
-              <a:rPr sz="1350" b="0">
+              <a:rPr sz="1300" b="0">
                 <a:solidFill>
                   <a:srgbClr val="555F6E"/>
                 </a:solidFill>
@@ -25419,7 +25419,7 @@
           <a:p>
             <a:pPr algn="l"/>
             <a:r>
-              <a:rPr sz="2400" b="1">
+              <a:rPr sz="2200" b="1">
                 <a:solidFill>
                   <a:srgbClr val="2F6EBA"/>
                 </a:solidFill>
@@ -25438,8 +25438,8 @@
         </p:nvSpPr>
         <p:spPr>
           <a:xfrm>
-            <a:off x="1512000" y="1710000"/>
-            <a:ext cx="9828000" cy="251999"/>
+            <a:off x="1512000" y="1713600"/>
+            <a:ext cx="9828000" cy="216000"/>
           </a:xfrm>
           <a:prstGeom prst="rect">
             <a:avLst/>
@@ -25454,7 +25454,7 @@
           <a:p>
             <a:pPr algn="l"/>
             <a:r>
-              <a:rPr sz="1700" b="1">
+              <a:rPr sz="1600" b="1">
                 <a:solidFill>
                   <a:srgbClr val="1F3A68"/>
                 </a:solidFill>
@@ -25474,7 +25474,7 @@
         <p:spPr>
           <a:xfrm>
             <a:off x="1512000" y="1951200"/>
-            <a:ext cx="9828000" cy="251999"/>
+            <a:ext cx="9828000" cy="306000"/>
           </a:xfrm>
           <a:prstGeom prst="rect">
             <a:avLst/>
@@ -25489,7 +25489,7 @@
           <a:p>
             <a:pPr algn="l"/>
             <a:r>
-              <a:rPr sz="1350" b="0">
+              <a:rPr sz="1250" b="0">
                 <a:solidFill>
                   <a:srgbClr val="555F6E"/>
                 </a:solidFill>
@@ -25508,7 +25508,7 @@
         </p:nvSpPr>
         <p:spPr>
           <a:xfrm>
-            <a:off x="792000" y="2052000"/>
+            <a:off x="792000" y="2178000"/>
             <a:ext cx="10620000" cy="10800"/>
           </a:xfrm>
           <a:prstGeom prst="rect">
@@ -25552,7 +25552,7 @@
         </p:nvSpPr>
         <p:spPr>
           <a:xfrm>
-            <a:off x="792000" y="2106000"/>
+            <a:off x="792000" y="2250000"/>
             <a:ext cx="648000" cy="432000"/>
           </a:xfrm>
           <a:prstGeom prst="rect">
@@ -25568,7 +25568,7 @@
           <a:p>
             <a:pPr algn="l"/>
             <a:r>
-              <a:rPr sz="2400" b="1">
+              <a:rPr sz="2200" b="1">
                 <a:solidFill>
                   <a:srgbClr val="2F6EBA"/>
                 </a:solidFill>
@@ -25587,8 +25587,8 @@
         </p:nvSpPr>
         <p:spPr>
           <a:xfrm>
-            <a:off x="1512000" y="2124000"/>
-            <a:ext cx="9828000" cy="251999"/>
+            <a:off x="1512000" y="2271600"/>
+            <a:ext cx="9828000" cy="216000"/>
           </a:xfrm>
           <a:prstGeom prst="rect">
             <a:avLst/>
@@ -25603,7 +25603,7 @@
           <a:p>
             <a:pPr algn="l"/>
             <a:r>
-              <a:rPr sz="1700" b="1">
+              <a:rPr sz="1600" b="1">
                 <a:solidFill>
                   <a:srgbClr val="1F3A68"/>
                 </a:solidFill>
@@ -25622,8 +25622,8 @@
         </p:nvSpPr>
         <p:spPr>
           <a:xfrm>
-            <a:off x="1512000" y="2365200"/>
-            <a:ext cx="9828000" cy="251999"/>
+            <a:off x="1512000" y="2509200"/>
+            <a:ext cx="9828000" cy="306000"/>
           </a:xfrm>
           <a:prstGeom prst="rect">
             <a:avLst/>
@@ -25638,7 +25638,7 @@
           <a:p>
             <a:pPr algn="l"/>
             <a:r>
-              <a:rPr sz="1350" b="0">
+              <a:rPr sz="1250" b="0">
                 <a:solidFill>
                   <a:srgbClr val="555F6E"/>
                 </a:solidFill>
@@ -25657,7 +25657,7 @@
         </p:nvSpPr>
         <p:spPr>
           <a:xfrm>
-            <a:off x="792000" y="2466000"/>
+            <a:off x="792000" y="2736000"/>
             <a:ext cx="10620000" cy="10800"/>
           </a:xfrm>
           <a:prstGeom prst="rect">
@@ -25701,7 +25701,7 @@
         </p:nvSpPr>
         <p:spPr>
           <a:xfrm>
-            <a:off x="792000" y="2520000"/>
+            <a:off x="792000" y="2808000"/>
             <a:ext cx="648000" cy="432000"/>
           </a:xfrm>
           <a:prstGeom prst="rect">
@@ -25717,7 +25717,7 @@
           <a:p>
             <a:pPr algn="l"/>
             <a:r>
-              <a:rPr sz="2400" b="1">
+              <a:rPr sz="2200" b="1">
                 <a:solidFill>
                   <a:srgbClr val="2F6EBA"/>
                 </a:solidFill>
@@ -25736,8 +25736,8 @@
         </p:nvSpPr>
         <p:spPr>
           <a:xfrm>
-            <a:off x="1512000" y="2538000"/>
-            <a:ext cx="9828000" cy="251999"/>
+            <a:off x="1512000" y="2829600"/>
+            <a:ext cx="9828000" cy="216000"/>
           </a:xfrm>
           <a:prstGeom prst="rect">
             <a:avLst/>
@@ -25752,7 +25752,7 @@
           <a:p>
             <a:pPr algn="l"/>
             <a:r>
-              <a:rPr sz="1700" b="1">
+              <a:rPr sz="1600" b="1">
                 <a:solidFill>
                   <a:srgbClr val="1F3A68"/>
                 </a:solidFill>
@@ -25771,8 +25771,8 @@
         </p:nvSpPr>
         <p:spPr>
           <a:xfrm>
-            <a:off x="1512000" y="2779200"/>
-            <a:ext cx="9828000" cy="251999"/>
+            <a:off x="1512000" y="3067200"/>
+            <a:ext cx="9828000" cy="306000"/>
           </a:xfrm>
           <a:prstGeom prst="rect">
             <a:avLst/>
@@ -25787,7 +25787,7 @@
           <a:p>
             <a:pPr algn="l"/>
             <a:r>
-              <a:rPr sz="1350" b="0">
+              <a:rPr sz="1250" b="0">
                 <a:solidFill>
                   <a:srgbClr val="555F6E"/>
                 </a:solidFill>
@@ -25806,7 +25806,7 @@
         </p:nvSpPr>
         <p:spPr>
           <a:xfrm>
-            <a:off x="792000" y="2880000"/>
+            <a:off x="792000" y="3294000"/>
             <a:ext cx="10620000" cy="10800"/>
           </a:xfrm>
           <a:prstGeom prst="rect">
@@ -25850,7 +25850,7 @@
         </p:nvSpPr>
         <p:spPr>
           <a:xfrm>
-            <a:off x="792000" y="2934000"/>
+            <a:off x="792000" y="3366000"/>
             <a:ext cx="648000" cy="432000"/>
           </a:xfrm>
           <a:prstGeom prst="rect">
@@ -25866,7 +25866,7 @@
           <a:p>
             <a:pPr algn="l"/>
             <a:r>
-              <a:rPr sz="2400" b="1">
+              <a:rPr sz="2200" b="1">
                 <a:solidFill>
                   <a:srgbClr val="2F6EBA"/>
                 </a:solidFill>
@@ -25885,8 +25885,8 @@
         </p:nvSpPr>
         <p:spPr>
           <a:xfrm>
-            <a:off x="1512000" y="2952000"/>
-            <a:ext cx="9828000" cy="251999"/>
+            <a:off x="1512000" y="3387600"/>
+            <a:ext cx="9828000" cy="216000"/>
           </a:xfrm>
           <a:prstGeom prst="rect">
             <a:avLst/>
@@ -25901,7 +25901,7 @@
           <a:p>
             <a:pPr algn="l"/>
             <a:r>
-              <a:rPr sz="1700" b="1">
+              <a:rPr sz="1600" b="1">
                 <a:solidFill>
                   <a:srgbClr val="1F3A68"/>
                 </a:solidFill>
@@ -25920,8 +25920,8 @@
         </p:nvSpPr>
         <p:spPr>
           <a:xfrm>
-            <a:off x="1512000" y="3193200"/>
-            <a:ext cx="9828000" cy="251999"/>
+            <a:off x="1512000" y="3625200"/>
+            <a:ext cx="9828000" cy="306000"/>
           </a:xfrm>
           <a:prstGeom prst="rect">
             <a:avLst/>
@@ -25936,7 +25936,7 @@
           <a:p>
             <a:pPr algn="l"/>
             <a:r>
-              <a:rPr sz="1350" b="0">
+              <a:rPr sz="1250" b="0">
                 <a:solidFill>
                   <a:srgbClr val="555F6E"/>
                 </a:solidFill>
@@ -25955,7 +25955,7 @@
         </p:nvSpPr>
         <p:spPr>
           <a:xfrm>
-            <a:off x="792000" y="3294000"/>
+            <a:off x="792000" y="3851999"/>
             <a:ext cx="10620000" cy="10800"/>
           </a:xfrm>
           <a:prstGeom prst="rect">
@@ -25999,7 +25999,7 @@
         </p:nvSpPr>
         <p:spPr>
           <a:xfrm>
-            <a:off x="792000" y="3348000"/>
+            <a:off x="792000" y="3924000"/>
             <a:ext cx="648000" cy="432000"/>
           </a:xfrm>
           <a:prstGeom prst="rect">
@@ -26015,7 +26015,7 @@
           <a:p>
             <a:pPr algn="l"/>
             <a:r>
-              <a:rPr sz="2400" b="1">
+              <a:rPr sz="2200" b="1">
                 <a:solidFill>
                   <a:srgbClr val="2F6EBA"/>
                 </a:solidFill>
@@ -26034,8 +26034,8 @@
         </p:nvSpPr>
         <p:spPr>
           <a:xfrm>
-            <a:off x="1512000" y="3366000"/>
-            <a:ext cx="9828000" cy="251999"/>
+            <a:off x="1512000" y="3945600"/>
+            <a:ext cx="9828000" cy="216000"/>
           </a:xfrm>
           <a:prstGeom prst="rect">
             <a:avLst/>
@@ -26050,7 +26050,7 @@
           <a:p>
             <a:pPr algn="l"/>
             <a:r>
-              <a:rPr sz="1700" b="1">
+              <a:rPr sz="1600" b="1">
                 <a:solidFill>
                   <a:srgbClr val="1F3A68"/>
                 </a:solidFill>
@@ -26069,8 +26069,8 @@
         </p:nvSpPr>
         <p:spPr>
           <a:xfrm>
-            <a:off x="1512000" y="3607200"/>
-            <a:ext cx="9828000" cy="251999"/>
+            <a:off x="1512000" y="4183200"/>
+            <a:ext cx="9828000" cy="306000"/>
           </a:xfrm>
           <a:prstGeom prst="rect">
             <a:avLst/>
@@ -26085,7 +26085,7 @@
           <a:p>
             <a:pPr algn="l"/>
             <a:r>
-              <a:rPr sz="1350" b="0">
+              <a:rPr sz="1250" b="0">
                 <a:solidFill>
                   <a:srgbClr val="555F6E"/>
                 </a:solidFill>
@@ -26104,7 +26104,7 @@
         </p:nvSpPr>
         <p:spPr>
           <a:xfrm>
-            <a:off x="792000" y="3708000"/>
+            <a:off x="792000" y="4410000"/>
             <a:ext cx="10620000" cy="10800"/>
           </a:xfrm>
           <a:prstGeom prst="rect">
@@ -26454,7 +26454,7 @@
           <a:p>
             <a:pPr algn="l"/>
             <a:r>
-              <a:rPr sz="2400" b="1">
+              <a:rPr sz="2200" b="1">
                 <a:solidFill>
                   <a:srgbClr val="2F6EBA"/>
                 </a:solidFill>
@@ -26473,8 +26473,8 @@
         </p:nvSpPr>
         <p:spPr>
           <a:xfrm>
-            <a:off x="1512000" y="1710000"/>
-            <a:ext cx="9828000" cy="251999"/>
+            <a:off x="1512000" y="1713600"/>
+            <a:ext cx="9828000" cy="216000"/>
           </a:xfrm>
           <a:prstGeom prst="rect">
             <a:avLst/>
@@ -26489,7 +26489,7 @@
           <a:p>
             <a:pPr algn="l"/>
             <a:r>
-              <a:rPr sz="1700" b="1">
+              <a:rPr sz="1600" b="1">
                 <a:solidFill>
                   <a:srgbClr val="1F3A68"/>
                 </a:solidFill>
@@ -26509,7 +26509,7 @@
         <p:spPr>
           <a:xfrm>
             <a:off x="1512000" y="1951200"/>
-            <a:ext cx="9828000" cy="251999"/>
+            <a:ext cx="9828000" cy="306000"/>
           </a:xfrm>
           <a:prstGeom prst="rect">
             <a:avLst/>
@@ -26524,7 +26524,7 @@
           <a:p>
             <a:pPr algn="l"/>
             <a:r>
-              <a:rPr sz="1350" b="0">
+              <a:rPr sz="1250" b="0">
                 <a:solidFill>
                   <a:srgbClr val="555F6E"/>
                 </a:solidFill>
@@ -26543,7 +26543,7 @@
         </p:nvSpPr>
         <p:spPr>
           <a:xfrm>
-            <a:off x="792000" y="2052000"/>
+            <a:off x="792000" y="2178000"/>
             <a:ext cx="10620000" cy="10800"/>
           </a:xfrm>
           <a:prstGeom prst="rect">
@@ -26587,7 +26587,7 @@
         </p:nvSpPr>
         <p:spPr>
           <a:xfrm>
-            <a:off x="792000" y="2106000"/>
+            <a:off x="792000" y="2250000"/>
             <a:ext cx="648000" cy="432000"/>
           </a:xfrm>
           <a:prstGeom prst="rect">
@@ -26603,7 +26603,7 @@
           <a:p>
             <a:pPr algn="l"/>
             <a:r>
-              <a:rPr sz="2400" b="1">
+              <a:rPr sz="2200" b="1">
                 <a:solidFill>
                   <a:srgbClr val="2F6EBA"/>
                 </a:solidFill>
@@ -26622,8 +26622,8 @@
         </p:nvSpPr>
         <p:spPr>
           <a:xfrm>
-            <a:off x="1512000" y="2124000"/>
-            <a:ext cx="9828000" cy="251999"/>
+            <a:off x="1512000" y="2271600"/>
+            <a:ext cx="9828000" cy="216000"/>
           </a:xfrm>
           <a:prstGeom prst="rect">
             <a:avLst/>
@@ -26638,7 +26638,7 @@
           <a:p>
             <a:pPr algn="l"/>
             <a:r>
-              <a:rPr sz="1700" b="1">
+              <a:rPr sz="1600" b="1">
                 <a:solidFill>
                   <a:srgbClr val="1F3A68"/>
                 </a:solidFill>
@@ -26657,8 +26657,8 @@
         </p:nvSpPr>
         <p:spPr>
           <a:xfrm>
-            <a:off x="1512000" y="2365200"/>
-            <a:ext cx="9828000" cy="251999"/>
+            <a:off x="1512000" y="2509200"/>
+            <a:ext cx="9828000" cy="306000"/>
           </a:xfrm>
           <a:prstGeom prst="rect">
             <a:avLst/>
@@ -26673,7 +26673,7 @@
           <a:p>
             <a:pPr algn="l"/>
             <a:r>
-              <a:rPr sz="1350" b="0">
+              <a:rPr sz="1250" b="0">
                 <a:solidFill>
                   <a:srgbClr val="555F6E"/>
                 </a:solidFill>
@@ -26692,7 +26692,7 @@
         </p:nvSpPr>
         <p:spPr>
           <a:xfrm>
-            <a:off x="792000" y="2466000"/>
+            <a:off x="792000" y="2736000"/>
             <a:ext cx="10620000" cy="10800"/>
           </a:xfrm>
           <a:prstGeom prst="rect">
@@ -26736,7 +26736,7 @@
         </p:nvSpPr>
         <p:spPr>
           <a:xfrm>
-            <a:off x="792000" y="2520000"/>
+            <a:off x="792000" y="2808000"/>
             <a:ext cx="648000" cy="432000"/>
           </a:xfrm>
           <a:prstGeom prst="rect">
@@ -26752,7 +26752,7 @@
           <a:p>
             <a:pPr algn="l"/>
             <a:r>
-              <a:rPr sz="2400" b="1">
+              <a:rPr sz="2200" b="1">
                 <a:solidFill>
                   <a:srgbClr val="2F6EBA"/>
                 </a:solidFill>
@@ -26771,8 +26771,8 @@
         </p:nvSpPr>
         <p:spPr>
           <a:xfrm>
-            <a:off x="1512000" y="2538000"/>
-            <a:ext cx="9828000" cy="251999"/>
+            <a:off x="1512000" y="2829600"/>
+            <a:ext cx="9828000" cy="216000"/>
           </a:xfrm>
           <a:prstGeom prst="rect">
             <a:avLst/>
@@ -26787,7 +26787,7 @@
           <a:p>
             <a:pPr algn="l"/>
             <a:r>
-              <a:rPr sz="1700" b="1">
+              <a:rPr sz="1600" b="1">
                 <a:solidFill>
                   <a:srgbClr val="1F3A68"/>
                 </a:solidFill>
@@ -26806,8 +26806,8 @@
         </p:nvSpPr>
         <p:spPr>
           <a:xfrm>
-            <a:off x="1512000" y="2779200"/>
-            <a:ext cx="9828000" cy="251999"/>
+            <a:off x="1512000" y="3067200"/>
+            <a:ext cx="9828000" cy="306000"/>
           </a:xfrm>
           <a:prstGeom prst="rect">
             <a:avLst/>
@@ -26822,7 +26822,7 @@
           <a:p>
             <a:pPr algn="l"/>
             <a:r>
-              <a:rPr sz="1350" b="0">
+              <a:rPr sz="1250" b="0">
                 <a:solidFill>
                   <a:srgbClr val="555F6E"/>
                 </a:solidFill>
@@ -26841,7 +26841,7 @@
         </p:nvSpPr>
         <p:spPr>
           <a:xfrm>
-            <a:off x="792000" y="2880000"/>
+            <a:off x="792000" y="3294000"/>
             <a:ext cx="10620000" cy="10800"/>
           </a:xfrm>
           <a:prstGeom prst="rect">
@@ -26885,7 +26885,7 @@
         </p:nvSpPr>
         <p:spPr>
           <a:xfrm>
-            <a:off x="792000" y="2934000"/>
+            <a:off x="792000" y="3366000"/>
             <a:ext cx="648000" cy="432000"/>
           </a:xfrm>
           <a:prstGeom prst="rect">
@@ -26901,7 +26901,7 @@
           <a:p>
             <a:pPr algn="l"/>
             <a:r>
-              <a:rPr sz="2400" b="1">
+              <a:rPr sz="2200" b="1">
                 <a:solidFill>
                   <a:srgbClr val="2F6EBA"/>
                 </a:solidFill>
@@ -26920,8 +26920,8 @@
         </p:nvSpPr>
         <p:spPr>
           <a:xfrm>
-            <a:off x="1512000" y="2952000"/>
-            <a:ext cx="9828000" cy="251999"/>
+            <a:off x="1512000" y="3387600"/>
+            <a:ext cx="9828000" cy="216000"/>
           </a:xfrm>
           <a:prstGeom prst="rect">
             <a:avLst/>
@@ -26936,7 +26936,7 @@
           <a:p>
             <a:pPr algn="l"/>
             <a:r>
-              <a:rPr sz="1700" b="1">
+              <a:rPr sz="1600" b="1">
                 <a:solidFill>
                   <a:srgbClr val="1F3A68"/>
                 </a:solidFill>
@@ -26955,8 +26955,8 @@
         </p:nvSpPr>
         <p:spPr>
           <a:xfrm>
-            <a:off x="1512000" y="3193200"/>
-            <a:ext cx="9828000" cy="251999"/>
+            <a:off x="1512000" y="3625200"/>
+            <a:ext cx="9828000" cy="306000"/>
           </a:xfrm>
           <a:prstGeom prst="rect">
             <a:avLst/>
@@ -26971,7 +26971,7 @@
           <a:p>
             <a:pPr algn="l"/>
             <a:r>
-              <a:rPr sz="1350" b="0">
+              <a:rPr sz="1250" b="0">
                 <a:solidFill>
                   <a:srgbClr val="555F6E"/>
                 </a:solidFill>
@@ -26990,7 +26990,7 @@
         </p:nvSpPr>
         <p:spPr>
           <a:xfrm>
-            <a:off x="792000" y="3294000"/>
+            <a:off x="792000" y="3851999"/>
             <a:ext cx="10620000" cy="10800"/>
           </a:xfrm>
           <a:prstGeom prst="rect">
@@ -27034,7 +27034,7 @@
         </p:nvSpPr>
         <p:spPr>
           <a:xfrm>
-            <a:off x="792000" y="3348000"/>
+            <a:off x="792000" y="3924000"/>
             <a:ext cx="648000" cy="432000"/>
           </a:xfrm>
           <a:prstGeom prst="rect">
@@ -27050,7 +27050,7 @@
           <a:p>
             <a:pPr algn="l"/>
             <a:r>
-              <a:rPr sz="2400" b="1">
+              <a:rPr sz="2200" b="1">
                 <a:solidFill>
                   <a:srgbClr val="2F6EBA"/>
                 </a:solidFill>
@@ -27069,8 +27069,8 @@
         </p:nvSpPr>
         <p:spPr>
           <a:xfrm>
-            <a:off x="1512000" y="3366000"/>
-            <a:ext cx="9828000" cy="251999"/>
+            <a:off x="1512000" y="3945600"/>
+            <a:ext cx="9828000" cy="216000"/>
           </a:xfrm>
           <a:prstGeom prst="rect">
             <a:avLst/>
@@ -27085,7 +27085,7 @@
           <a:p>
             <a:pPr algn="l"/>
             <a:r>
-              <a:rPr sz="1700" b="1">
+              <a:rPr sz="1600" b="1">
                 <a:solidFill>
                   <a:srgbClr val="1F3A68"/>
                 </a:solidFill>
@@ -27104,8 +27104,8 @@
         </p:nvSpPr>
         <p:spPr>
           <a:xfrm>
-            <a:off x="1512000" y="3607200"/>
-            <a:ext cx="9828000" cy="251999"/>
+            <a:off x="1512000" y="4183200"/>
+            <a:ext cx="9828000" cy="306000"/>
           </a:xfrm>
           <a:prstGeom prst="rect">
             <a:avLst/>
@@ -27120,7 +27120,7 @@
           <a:p>
             <a:pPr algn="l"/>
             <a:r>
-              <a:rPr sz="1350" b="0">
+              <a:rPr sz="1250" b="0">
                 <a:solidFill>
                   <a:srgbClr val="555F6E"/>
                 </a:solidFill>
@@ -27139,7 +27139,7 @@
         </p:nvSpPr>
         <p:spPr>
           <a:xfrm>
-            <a:off x="792000" y="3708000"/>
+            <a:off x="792000" y="4410000"/>
             <a:ext cx="10620000" cy="10800"/>
           </a:xfrm>
           <a:prstGeom prst="rect">
@@ -28898,8 +28898,43 @@
         </p:nvSpPr>
         <p:spPr>
           <a:xfrm>
-            <a:off x="882000" y="1710000"/>
-            <a:ext cx="540000" cy="396000"/>
+            <a:off x="882000" y="1720799"/>
+            <a:ext cx="540000" cy="360000"/>
+          </a:xfrm>
+          <a:prstGeom prst="rect">
+            <a:avLst/>
+          </a:prstGeom>
+          <a:noFill/>
+        </p:spPr>
+        <p:txBody>
+          <a:bodyPr wrap="none">
+            <a:spAutoFit/>
+          </a:bodyPr>
+          <a:lstStyle/>
+          <a:p>
+            <a:pPr algn="l"/>
+            <a:r>
+              <a:rPr sz="1800" b="1">
+                <a:solidFill>
+                  <a:srgbClr val="2F6EBA"/>
+                </a:solidFill>
+                <a:latin typeface="Microsoft YaHei"/>
+              </a:rPr>
+              <a:t>01</a:t>
+            </a:r>
+          </a:p>
+        </p:txBody>
+      </p:sp>
+      <p:sp>
+        <p:nvSpPr>
+          <p:cNvPr id="9" name="TextBox 8"/>
+          <p:cNvSpPr txBox="1"/>
+          <p:nvPr/>
+        </p:nvSpPr>
+        <p:spPr>
+          <a:xfrm>
+            <a:off x="1296000" y="1710000"/>
+            <a:ext cx="9936000" cy="198000"/>
           </a:xfrm>
           <a:prstGeom prst="rect">
             <a:avLst/>
@@ -28914,27 +28949,27 @@
           <a:p>
             <a:pPr algn="l"/>
             <a:r>
-              <a:rPr sz="2000" b="1">
-                <a:solidFill>
-                  <a:srgbClr val="2F6EBA"/>
-                </a:solidFill>
-                <a:latin typeface="Microsoft YaHei"/>
-              </a:rPr>
-              <a:t>01</a:t>
-            </a:r>
-          </a:p>
-        </p:txBody>
-      </p:sp>
-      <p:sp>
-        <p:nvSpPr>
-          <p:cNvPr id="9" name="TextBox 8"/>
-          <p:cNvSpPr txBox="1"/>
-          <p:nvPr/>
-        </p:nvSpPr>
-        <p:spPr>
-          <a:xfrm>
-            <a:off x="1296000" y="1699200"/>
-            <a:ext cx="9936000" cy="216000"/>
+              <a:rPr sz="1500" b="1">
+                <a:solidFill>
+                  <a:srgbClr val="1F3A68"/>
+                </a:solidFill>
+                <a:latin typeface="Microsoft YaHei"/>
+              </a:rPr>
+              <a:t>综述框架（Zhang 2024）</a:t>
+            </a:r>
+          </a:p>
+        </p:txBody>
+      </p:sp>
+      <p:sp>
+        <p:nvSpPr>
+          <p:cNvPr id="10" name="TextBox 9"/>
+          <p:cNvSpPr txBox="1"/>
+          <p:nvPr/>
+        </p:nvSpPr>
+        <p:spPr>
+          <a:xfrm>
+            <a:off x="1296000" y="1915199"/>
+            <a:ext cx="9936000" cy="306000"/>
           </a:xfrm>
           <a:prstGeom prst="rect">
             <a:avLst/>
@@ -28949,42 +28984,7 @@
           <a:p>
             <a:pPr algn="l"/>
             <a:r>
-              <a:rPr sz="1600" b="1">
-                <a:solidFill>
-                  <a:srgbClr val="1F3A68"/>
-                </a:solidFill>
-                <a:latin typeface="Microsoft YaHei"/>
-              </a:rPr>
-              <a:t>综述框架（Zhang 2024）</a:t>
-            </a:r>
-          </a:p>
-        </p:txBody>
-      </p:sp>
-      <p:sp>
-        <p:nvSpPr>
-          <p:cNvPr id="10" name="TextBox 9"/>
-          <p:cNvSpPr txBox="1"/>
-          <p:nvPr/>
-        </p:nvSpPr>
-        <p:spPr>
-          <a:xfrm>
-            <a:off x="1296000" y="1900799"/>
-            <a:ext cx="9936000" cy="251999"/>
-          </a:xfrm>
-          <a:prstGeom prst="rect">
-            <a:avLst/>
-          </a:prstGeom>
-          <a:noFill/>
-        </p:spPr>
-        <p:txBody>
-          <a:bodyPr wrap="square">
-            <a:spAutoFit/>
-          </a:bodyPr>
-          <a:lstStyle/>
-          <a:p>
-            <a:pPr algn="l"/>
-            <a:r>
-              <a:rPr sz="1350" b="0">
+              <a:rPr sz="1300" b="0">
                 <a:solidFill>
                   <a:srgbClr val="555F6E"/>
                 </a:solidFill>
@@ -29095,8 +29095,43 @@
         </p:nvSpPr>
         <p:spPr>
           <a:xfrm>
-            <a:off x="882000" y="2545200"/>
-            <a:ext cx="540000" cy="396000"/>
+            <a:off x="882000" y="2556000"/>
+            <a:ext cx="540000" cy="360000"/>
+          </a:xfrm>
+          <a:prstGeom prst="rect">
+            <a:avLst/>
+          </a:prstGeom>
+          <a:noFill/>
+        </p:spPr>
+        <p:txBody>
+          <a:bodyPr wrap="none">
+            <a:spAutoFit/>
+          </a:bodyPr>
+          <a:lstStyle/>
+          <a:p>
+            <a:pPr algn="l"/>
+            <a:r>
+              <a:rPr sz="1800" b="1">
+                <a:solidFill>
+                  <a:srgbClr val="2F6EBA"/>
+                </a:solidFill>
+                <a:latin typeface="Microsoft YaHei"/>
+              </a:rPr>
+              <a:t>02</a:t>
+            </a:r>
+          </a:p>
+        </p:txBody>
+      </p:sp>
+      <p:sp>
+        <p:nvSpPr>
+          <p:cNvPr id="14" name="TextBox 13"/>
+          <p:cNvSpPr txBox="1"/>
+          <p:nvPr/>
+        </p:nvSpPr>
+        <p:spPr>
+          <a:xfrm>
+            <a:off x="1296000" y="2545200"/>
+            <a:ext cx="9936000" cy="198000"/>
           </a:xfrm>
           <a:prstGeom prst="rect">
             <a:avLst/>
@@ -29111,27 +29146,27 @@
           <a:p>
             <a:pPr algn="l"/>
             <a:r>
-              <a:rPr sz="2000" b="1">
-                <a:solidFill>
-                  <a:srgbClr val="2F6EBA"/>
-                </a:solidFill>
-                <a:latin typeface="Microsoft YaHei"/>
-              </a:rPr>
-              <a:t>02</a:t>
-            </a:r>
-          </a:p>
-        </p:txBody>
-      </p:sp>
-      <p:sp>
-        <p:nvSpPr>
-          <p:cNvPr id="14" name="TextBox 13"/>
-          <p:cNvSpPr txBox="1"/>
-          <p:nvPr/>
-        </p:nvSpPr>
-        <p:spPr>
-          <a:xfrm>
-            <a:off x="1296000" y="2534400"/>
-            <a:ext cx="9936000" cy="216000"/>
+              <a:rPr sz="1500" b="1">
+                <a:solidFill>
+                  <a:srgbClr val="1F3A68"/>
+                </a:solidFill>
+                <a:latin typeface="Microsoft YaHei"/>
+              </a:rPr>
+              <a:t>MemGPT</a:t>
+            </a:r>
+          </a:p>
+        </p:txBody>
+      </p:sp>
+      <p:sp>
+        <p:nvSpPr>
+          <p:cNvPr id="15" name="TextBox 14"/>
+          <p:cNvSpPr txBox="1"/>
+          <p:nvPr/>
+        </p:nvSpPr>
+        <p:spPr>
+          <a:xfrm>
+            <a:off x="1296000" y="2750400"/>
+            <a:ext cx="9936000" cy="306000"/>
           </a:xfrm>
           <a:prstGeom prst="rect">
             <a:avLst/>
@@ -29146,42 +29181,7 @@
           <a:p>
             <a:pPr algn="l"/>
             <a:r>
-              <a:rPr sz="1600" b="1">
-                <a:solidFill>
-                  <a:srgbClr val="1F3A68"/>
-                </a:solidFill>
-                <a:latin typeface="Microsoft YaHei"/>
-              </a:rPr>
-              <a:t>MemGPT</a:t>
-            </a:r>
-          </a:p>
-        </p:txBody>
-      </p:sp>
-      <p:sp>
-        <p:nvSpPr>
-          <p:cNvPr id="15" name="TextBox 14"/>
-          <p:cNvSpPr txBox="1"/>
-          <p:nvPr/>
-        </p:nvSpPr>
-        <p:spPr>
-          <a:xfrm>
-            <a:off x="1296000" y="2736000"/>
-            <a:ext cx="9936000" cy="251999"/>
-          </a:xfrm>
-          <a:prstGeom prst="rect">
-            <a:avLst/>
-          </a:prstGeom>
-          <a:noFill/>
-        </p:spPr>
-        <p:txBody>
-          <a:bodyPr wrap="square">
-            <a:spAutoFit/>
-          </a:bodyPr>
-          <a:lstStyle/>
-          <a:p>
-            <a:pPr algn="l"/>
-            <a:r>
-              <a:rPr sz="1350" b="0">
+              <a:rPr sz="1300" b="0">
                 <a:solidFill>
                   <a:srgbClr val="555F6E"/>
                 </a:solidFill>
@@ -29292,8 +29292,43 @@
         </p:nvSpPr>
         <p:spPr>
           <a:xfrm>
-            <a:off x="882000" y="3380400"/>
-            <a:ext cx="540000" cy="396000"/>
+            <a:off x="882000" y="3391200"/>
+            <a:ext cx="540000" cy="360000"/>
+          </a:xfrm>
+          <a:prstGeom prst="rect">
+            <a:avLst/>
+          </a:prstGeom>
+          <a:noFill/>
+        </p:spPr>
+        <p:txBody>
+          <a:bodyPr wrap="none">
+            <a:spAutoFit/>
+          </a:bodyPr>
+          <a:lstStyle/>
+          <a:p>
+            <a:pPr algn="l"/>
+            <a:r>
+              <a:rPr sz="1800" b="1">
+                <a:solidFill>
+                  <a:srgbClr val="2F6EBA"/>
+                </a:solidFill>
+                <a:latin typeface="Microsoft YaHei"/>
+              </a:rPr>
+              <a:t>03</a:t>
+            </a:r>
+          </a:p>
+        </p:txBody>
+      </p:sp>
+      <p:sp>
+        <p:nvSpPr>
+          <p:cNvPr id="19" name="TextBox 18"/>
+          <p:cNvSpPr txBox="1"/>
+          <p:nvPr/>
+        </p:nvSpPr>
+        <p:spPr>
+          <a:xfrm>
+            <a:off x="1296000" y="3380400"/>
+            <a:ext cx="9936000" cy="198000"/>
           </a:xfrm>
           <a:prstGeom prst="rect">
             <a:avLst/>
@@ -29308,27 +29343,27 @@
           <a:p>
             <a:pPr algn="l"/>
             <a:r>
-              <a:rPr sz="2000" b="1">
-                <a:solidFill>
-                  <a:srgbClr val="2F6EBA"/>
-                </a:solidFill>
-                <a:latin typeface="Microsoft YaHei"/>
-              </a:rPr>
-              <a:t>03</a:t>
-            </a:r>
-          </a:p>
-        </p:txBody>
-      </p:sp>
-      <p:sp>
-        <p:nvSpPr>
-          <p:cNvPr id="19" name="TextBox 18"/>
-          <p:cNvSpPr txBox="1"/>
-          <p:nvPr/>
-        </p:nvSpPr>
-        <p:spPr>
-          <a:xfrm>
-            <a:off x="1296000" y="3369600"/>
-            <a:ext cx="9936000" cy="216000"/>
+              <a:rPr sz="1500" b="1">
+                <a:solidFill>
+                  <a:srgbClr val="1F3A68"/>
+                </a:solidFill>
+                <a:latin typeface="Microsoft YaHei"/>
+              </a:rPr>
+              <a:t>SCM</a:t>
+            </a:r>
+          </a:p>
+        </p:txBody>
+      </p:sp>
+      <p:sp>
+        <p:nvSpPr>
+          <p:cNvPr id="20" name="TextBox 19"/>
+          <p:cNvSpPr txBox="1"/>
+          <p:nvPr/>
+        </p:nvSpPr>
+        <p:spPr>
+          <a:xfrm>
+            <a:off x="1296000" y="3585600"/>
+            <a:ext cx="9936000" cy="306000"/>
           </a:xfrm>
           <a:prstGeom prst="rect">
             <a:avLst/>
@@ -29343,42 +29378,7 @@
           <a:p>
             <a:pPr algn="l"/>
             <a:r>
-              <a:rPr sz="1600" b="1">
-                <a:solidFill>
-                  <a:srgbClr val="1F3A68"/>
-                </a:solidFill>
-                <a:latin typeface="Microsoft YaHei"/>
-              </a:rPr>
-              <a:t>SCM</a:t>
-            </a:r>
-          </a:p>
-        </p:txBody>
-      </p:sp>
-      <p:sp>
-        <p:nvSpPr>
-          <p:cNvPr id="20" name="TextBox 19"/>
-          <p:cNvSpPr txBox="1"/>
-          <p:nvPr/>
-        </p:nvSpPr>
-        <p:spPr>
-          <a:xfrm>
-            <a:off x="1296000" y="3571200"/>
-            <a:ext cx="9936000" cy="251999"/>
-          </a:xfrm>
-          <a:prstGeom prst="rect">
-            <a:avLst/>
-          </a:prstGeom>
-          <a:noFill/>
-        </p:spPr>
-        <p:txBody>
-          <a:bodyPr wrap="square">
-            <a:spAutoFit/>
-          </a:bodyPr>
-          <a:lstStyle/>
-          <a:p>
-            <a:pPr algn="l"/>
-            <a:r>
-              <a:rPr sz="1350" b="0">
+              <a:rPr sz="1300" b="0">
                 <a:solidFill>
                   <a:srgbClr val="555F6E"/>
                 </a:solidFill>
@@ -29489,8 +29489,43 @@
         </p:nvSpPr>
         <p:spPr>
           <a:xfrm>
-            <a:off x="882000" y="4215600"/>
-            <a:ext cx="540000" cy="396000"/>
+            <a:off x="882000" y="4226400"/>
+            <a:ext cx="540000" cy="360000"/>
+          </a:xfrm>
+          <a:prstGeom prst="rect">
+            <a:avLst/>
+          </a:prstGeom>
+          <a:noFill/>
+        </p:spPr>
+        <p:txBody>
+          <a:bodyPr wrap="none">
+            <a:spAutoFit/>
+          </a:bodyPr>
+          <a:lstStyle/>
+          <a:p>
+            <a:pPr algn="l"/>
+            <a:r>
+              <a:rPr sz="1800" b="1">
+                <a:solidFill>
+                  <a:srgbClr val="2F6EBA"/>
+                </a:solidFill>
+                <a:latin typeface="Microsoft YaHei"/>
+              </a:rPr>
+              <a:t>04</a:t>
+            </a:r>
+          </a:p>
+        </p:txBody>
+      </p:sp>
+      <p:sp>
+        <p:nvSpPr>
+          <p:cNvPr id="24" name="TextBox 23"/>
+          <p:cNvSpPr txBox="1"/>
+          <p:nvPr/>
+        </p:nvSpPr>
+        <p:spPr>
+          <a:xfrm>
+            <a:off x="1296000" y="4215600"/>
+            <a:ext cx="9936000" cy="198000"/>
           </a:xfrm>
           <a:prstGeom prst="rect">
             <a:avLst/>
@@ -29505,27 +29540,27 @@
           <a:p>
             <a:pPr algn="l"/>
             <a:r>
-              <a:rPr sz="2000" b="1">
-                <a:solidFill>
-                  <a:srgbClr val="2F6EBA"/>
-                </a:solidFill>
-                <a:latin typeface="Microsoft YaHei"/>
-              </a:rPr>
-              <a:t>04</a:t>
-            </a:r>
-          </a:p>
-        </p:txBody>
-      </p:sp>
-      <p:sp>
-        <p:nvSpPr>
-          <p:cNvPr id="24" name="TextBox 23"/>
-          <p:cNvSpPr txBox="1"/>
-          <p:nvPr/>
-        </p:nvSpPr>
-        <p:spPr>
-          <a:xfrm>
-            <a:off x="1296000" y="4204800"/>
-            <a:ext cx="9936000" cy="216000"/>
+              <a:rPr sz="1500" b="1">
+                <a:solidFill>
+                  <a:srgbClr val="1F3A68"/>
+                </a:solidFill>
+                <a:latin typeface="Microsoft YaHei"/>
+              </a:rPr>
+              <a:t>LLMLingua/LongLLMLingua/ICAE</a:t>
+            </a:r>
+          </a:p>
+        </p:txBody>
+      </p:sp>
+      <p:sp>
+        <p:nvSpPr>
+          <p:cNvPr id="25" name="TextBox 24"/>
+          <p:cNvSpPr txBox="1"/>
+          <p:nvPr/>
+        </p:nvSpPr>
+        <p:spPr>
+          <a:xfrm>
+            <a:off x="1296000" y="4420800"/>
+            <a:ext cx="9936000" cy="306000"/>
           </a:xfrm>
           <a:prstGeom prst="rect">
             <a:avLst/>
@@ -29540,42 +29575,7 @@
           <a:p>
             <a:pPr algn="l"/>
             <a:r>
-              <a:rPr sz="1600" b="1">
-                <a:solidFill>
-                  <a:srgbClr val="1F3A68"/>
-                </a:solidFill>
-                <a:latin typeface="Microsoft YaHei"/>
-              </a:rPr>
-              <a:t>LLMLingua/LongLLMLingua/ICAE</a:t>
-            </a:r>
-          </a:p>
-        </p:txBody>
-      </p:sp>
-      <p:sp>
-        <p:nvSpPr>
-          <p:cNvPr id="25" name="TextBox 24"/>
-          <p:cNvSpPr txBox="1"/>
-          <p:nvPr/>
-        </p:nvSpPr>
-        <p:spPr>
-          <a:xfrm>
-            <a:off x="1296000" y="4406400"/>
-            <a:ext cx="9936000" cy="251999"/>
-          </a:xfrm>
-          <a:prstGeom prst="rect">
-            <a:avLst/>
-          </a:prstGeom>
-          <a:noFill/>
-        </p:spPr>
-        <p:txBody>
-          <a:bodyPr wrap="square">
-            <a:spAutoFit/>
-          </a:bodyPr>
-          <a:lstStyle/>
-          <a:p>
-            <a:pPr algn="l"/>
-            <a:r>
-              <a:rPr sz="1350" b="0">
+              <a:rPr sz="1300" b="0">
                 <a:solidFill>
                   <a:srgbClr val="555F6E"/>
                 </a:solidFill>

--- a/汇报PPT/最终汇报成果.pptx
+++ b/汇报PPT/最终汇报成果.pptx
@@ -604,12 +604,7 @@
           <a:lstStyle/>
           <a:p>
             <a:r>
-              <a:t>【配图】无。</a:t>
-            </a:r>
-          </a:p>
-          <a:p>
-            <a:r>
-              <a:t>【讲稿】这一段说明检索与存储不是凭空设计。</a:t>
+              <a:t>【讲稿】说明检索与存储不是凭空设计。</a:t>
             </a:r>
           </a:p>
         </p:txBody>
@@ -679,12 +674,7 @@
           <a:lstStyle/>
           <a:p>
             <a:r>
-              <a:t>【配图】无。</a:t>
-            </a:r>
-          </a:p>
-          <a:p>
-            <a:r>
-              <a:t>【讲稿】强调：机制都有原型，差异在组合与军事场景限定。</a:t>
+              <a:t>【讲稿】强调机制都有原型，差异在组合与军事场景限定。</a:t>
             </a:r>
           </a:p>
         </p:txBody>
@@ -2179,12 +2169,7 @@
           <a:lstStyle/>
           <a:p>
             <a:r>
-              <a:t>【配图】本页右侧图位：放 docs/figures/fig2_campaign_trajectory.png（多轮战役轨迹/七步闭环示意图）。</a:t>
-            </a:r>
-          </a:p>
-          <a:p>
-            <a:r>
-              <a:t>【讲稿】用‘同一夜间进攻任务，第一场隘口遇伏，第二场大概率再吃亏’举例。</a:t>
+              <a:t>【讲稿】用“同一夜间进攻任务，第一场隘口遇伏，第二场大概率再吃亏”开场。</a:t>
             </a:r>
           </a:p>
         </p:txBody>
@@ -2254,12 +2239,7 @@
           <a:lstStyle/>
           <a:p>
             <a:r>
-              <a:t>【配图】无。</a:t>
-            </a:r>
-          </a:p>
-          <a:p>
-            <a:r>
-              <a:t>【讲稿】P1-P4 来自初始问题拆解，P5 来自导师反馈。</a:t>
+              <a:t>【讲稿】P1-P4 来自初始拆解，P5 来自导师反馈；每行右侧为示意图占位。</a:t>
             </a:r>
           </a:p>
         </p:txBody>
@@ -2329,12 +2309,7 @@
           <a:lstStyle/>
           <a:p>
             <a:r>
-              <a:t>【配图】无。</a:t>
-            </a:r>
-          </a:p>
-          <a:p>
-            <a:r>
-              <a:t>【讲稿】实验章节会逐个回答。</a:t>
+              <a:t>【讲稿】强调 RQ 是从失败模式引申而来，实验章节逐一回答。</a:t>
             </a:r>
           </a:p>
         </p:txBody>
@@ -2404,12 +2379,7 @@
           <a:lstStyle/>
           <a:p>
             <a:r>
-              <a:t>【配图】无。</a:t>
-            </a:r>
-          </a:p>
-          <a:p>
-            <a:r>
-              <a:t>【讲稿】一句话：把跨场次知识做成可回放、可审计的外部系统。</a:t>
+              <a:t>【讲稿】四句话说清系统设计哲学。</a:t>
             </a:r>
           </a:p>
         </p:txBody>
@@ -2554,12 +2524,7 @@
           <a:lstStyle/>
           <a:p>
             <a:r>
-              <a:t>【配图】无。</a:t>
-            </a:r>
-          </a:p>
-          <a:p>
-            <a:r>
-              <a:t>【讲稿】每条都说明：借鉴什么、为什么不完整照搬。</a:t>
+              <a:t>【讲稿】每条讲“借鉴什么、为什么不完整照搬”。</a:t>
             </a:r>
           </a:p>
         </p:txBody>
@@ -6370,1196 +6335,119 @@
       </p:sp>
       <p:sp>
         <p:nvSpPr>
-          <p:cNvPr id="6" name="Rounded Rectangle 5"/>
+          <p:cNvPr id="6" name="TextBox 5"/>
+          <p:cNvSpPr txBox="1"/>
+          <p:nvPr/>
+        </p:nvSpPr>
+        <p:spPr>
+          <a:xfrm>
+            <a:off x="792000" y="1692000"/>
+            <a:ext cx="648000" cy="432000"/>
+          </a:xfrm>
+          <a:prstGeom prst="rect">
+            <a:avLst/>
+          </a:prstGeom>
+          <a:noFill/>
+        </p:spPr>
+        <p:txBody>
+          <a:bodyPr wrap="none">
+            <a:spAutoFit/>
+          </a:bodyPr>
+          <a:lstStyle/>
+          <a:p>
+            <a:pPr algn="l"/>
+            <a:r>
+              <a:rPr sz="2200" b="1">
+                <a:solidFill>
+                  <a:srgbClr val="2F6EBA"/>
+                </a:solidFill>
+                <a:latin typeface="Microsoft YaHei"/>
+              </a:rPr>
+              <a:t>01</a:t>
+            </a:r>
+          </a:p>
+        </p:txBody>
+      </p:sp>
+      <p:sp>
+        <p:nvSpPr>
+          <p:cNvPr id="7" name="TextBox 6"/>
+          <p:cNvSpPr txBox="1"/>
+          <p:nvPr/>
+        </p:nvSpPr>
+        <p:spPr>
+          <a:xfrm>
+            <a:off x="1512000" y="1713600"/>
+            <a:ext cx="9828000" cy="216000"/>
+          </a:xfrm>
+          <a:prstGeom prst="rect">
+            <a:avLst/>
+          </a:prstGeom>
+          <a:noFill/>
+        </p:spPr>
+        <p:txBody>
+          <a:bodyPr wrap="square">
+            <a:spAutoFit/>
+          </a:bodyPr>
+          <a:lstStyle/>
+          <a:p>
+            <a:pPr algn="l"/>
+            <a:r>
+              <a:rPr sz="1600" b="1">
+                <a:solidFill>
+                  <a:srgbClr val="1F3A68"/>
+                </a:solidFill>
+                <a:latin typeface="Microsoft YaHei"/>
+              </a:rPr>
+              <a:t>ChatDB</a:t>
+            </a:r>
+          </a:p>
+        </p:txBody>
+      </p:sp>
+      <p:sp>
+        <p:nvSpPr>
+          <p:cNvPr id="8" name="TextBox 7"/>
+          <p:cNvSpPr txBox="1"/>
+          <p:nvPr/>
+        </p:nvSpPr>
+        <p:spPr>
+          <a:xfrm>
+            <a:off x="1512000" y="1951200"/>
+            <a:ext cx="9828000" cy="306000"/>
+          </a:xfrm>
+          <a:prstGeom prst="rect">
+            <a:avLst/>
+          </a:prstGeom>
+          <a:noFill/>
+        </p:spPr>
+        <p:txBody>
+          <a:bodyPr wrap="square">
+            <a:spAutoFit/>
+          </a:bodyPr>
+          <a:lstStyle/>
+          <a:p>
+            <a:pPr algn="l"/>
+            <a:r>
+              <a:rPr sz="1250" b="0">
+                <a:solidFill>
+                  <a:srgbClr val="555F6E"/>
+                </a:solidFill>
+                <a:latin typeface="Microsoft YaHei"/>
+              </a:rPr>
+              <a:t>数据库即符号记忆 → 只保留属性精确过滤，不实现全量 NL→SQL。</a:t>
+            </a:r>
+          </a:p>
+        </p:txBody>
+      </p:sp>
+      <p:sp>
+        <p:nvSpPr>
+          <p:cNvPr id="9" name="Rectangle 8"/>
           <p:cNvSpPr/>
           <p:nvPr/>
         </p:nvSpPr>
         <p:spPr>
           <a:xfrm>
-            <a:off x="720000" y="1655999"/>
-            <a:ext cx="10728000" cy="583200"/>
-          </a:xfrm>
-          <a:prstGeom prst="roundRect">
-            <a:avLst>
-              <a:gd name="adj" fmla="val 8000"/>
-            </a:avLst>
-          </a:prstGeom>
-          <a:solidFill>
-            <a:srgbClr val="F2F4F8"/>
-          </a:solidFill>
-          <a:ln w="12700">
-            <a:solidFill>
-              <a:srgbClr val="C8D0DC"/>
-            </a:solidFill>
-          </a:ln>
-          <a:effectLst/>
-        </p:spPr>
-        <p:style>
-          <a:lnRef idx="1">
-            <a:schemeClr val="accent1"/>
-          </a:lnRef>
-          <a:fillRef idx="3">
-            <a:schemeClr val="accent1"/>
-          </a:fillRef>
-          <a:effectRef idx="2">
-            <a:schemeClr val="accent1"/>
-          </a:effectRef>
-          <a:fontRef idx="minor">
-            <a:schemeClr val="lt1"/>
-          </a:fontRef>
-        </p:style>
-        <p:txBody>
-          <a:bodyPr rtlCol="0" anchor="ctr"/>
-          <a:lstStyle/>
-          <a:p>
-            <a:pPr algn="ctr"/>
-          </a:p>
-        </p:txBody>
-      </p:sp>
-      <p:sp>
-        <p:nvSpPr>
-          <p:cNvPr id="7" name="Rectangle 6"/>
-          <p:cNvSpPr/>
-          <p:nvPr/>
-        </p:nvSpPr>
-        <p:spPr>
-          <a:xfrm>
-            <a:off x="720000" y="1655999"/>
-            <a:ext cx="79200" cy="583200"/>
-          </a:xfrm>
-          <a:prstGeom prst="rect">
-            <a:avLst/>
-          </a:prstGeom>
-          <a:solidFill>
-            <a:srgbClr val="2F6EBA"/>
-          </a:solidFill>
-          <a:ln>
-            <a:noFill/>
-          </a:ln>
-          <a:effectLst/>
-        </p:spPr>
-        <p:style>
-          <a:lnRef idx="1">
-            <a:schemeClr val="accent1"/>
-          </a:lnRef>
-          <a:fillRef idx="3">
-            <a:schemeClr val="accent1"/>
-          </a:fillRef>
-          <a:effectRef idx="2">
-            <a:schemeClr val="accent1"/>
-          </a:effectRef>
-          <a:fontRef idx="minor">
-            <a:schemeClr val="lt1"/>
-          </a:fontRef>
-        </p:style>
-        <p:txBody>
-          <a:bodyPr rtlCol="0" anchor="ctr"/>
-          <a:lstStyle/>
-          <a:p>
-            <a:pPr algn="ctr"/>
-          </a:p>
-        </p:txBody>
-      </p:sp>
-      <p:sp>
-        <p:nvSpPr>
-          <p:cNvPr id="8" name="TextBox 7"/>
-          <p:cNvSpPr txBox="1"/>
-          <p:nvPr/>
-        </p:nvSpPr>
-        <p:spPr>
-          <a:xfrm>
-            <a:off x="882000" y="1720799"/>
-            <a:ext cx="540000" cy="360000"/>
-          </a:xfrm>
-          <a:prstGeom prst="rect">
-            <a:avLst/>
-          </a:prstGeom>
-          <a:noFill/>
-        </p:spPr>
-        <p:txBody>
-          <a:bodyPr wrap="none">
-            <a:spAutoFit/>
-          </a:bodyPr>
-          <a:lstStyle/>
-          <a:p>
-            <a:pPr algn="l"/>
-            <a:r>
-              <a:rPr sz="1800" b="1">
-                <a:solidFill>
-                  <a:srgbClr val="2F6EBA"/>
-                </a:solidFill>
-                <a:latin typeface="Microsoft YaHei"/>
-              </a:rPr>
-              <a:t>01</a:t>
-            </a:r>
-          </a:p>
-        </p:txBody>
-      </p:sp>
-      <p:sp>
-        <p:nvSpPr>
-          <p:cNvPr id="9" name="TextBox 8"/>
-          <p:cNvSpPr txBox="1"/>
-          <p:nvPr/>
-        </p:nvSpPr>
-        <p:spPr>
-          <a:xfrm>
-            <a:off x="1296000" y="1710000"/>
-            <a:ext cx="9936000" cy="198000"/>
-          </a:xfrm>
-          <a:prstGeom prst="rect">
-            <a:avLst/>
-          </a:prstGeom>
-          <a:noFill/>
-        </p:spPr>
-        <p:txBody>
-          <a:bodyPr wrap="square">
-            <a:spAutoFit/>
-          </a:bodyPr>
-          <a:lstStyle/>
-          <a:p>
-            <a:pPr algn="l"/>
-            <a:r>
-              <a:rPr sz="1250" b="1">
-                <a:solidFill>
-                  <a:srgbClr val="1F3A68"/>
-                </a:solidFill>
-                <a:latin typeface="Microsoft YaHei"/>
-              </a:rPr>
-              <a:t>ChatDB</a:t>
-            </a:r>
-          </a:p>
-        </p:txBody>
-      </p:sp>
-      <p:sp>
-        <p:nvSpPr>
-          <p:cNvPr id="10" name="TextBox 9"/>
-          <p:cNvSpPr txBox="1"/>
-          <p:nvPr/>
-        </p:nvSpPr>
-        <p:spPr>
-          <a:xfrm>
-            <a:off x="1296000" y="1915199"/>
-            <a:ext cx="9936000" cy="306000"/>
-          </a:xfrm>
-          <a:prstGeom prst="rect">
-            <a:avLst/>
-          </a:prstGeom>
-          <a:noFill/>
-        </p:spPr>
-        <p:txBody>
-          <a:bodyPr wrap="square">
-            <a:spAutoFit/>
-          </a:bodyPr>
-          <a:lstStyle/>
-          <a:p>
-            <a:pPr algn="l"/>
-            <a:r>
-              <a:rPr sz="1150" b="0">
-                <a:solidFill>
-                  <a:srgbClr val="555F6E"/>
-                </a:solidFill>
-                <a:latin typeface="Microsoft YaHei"/>
-              </a:rPr>
-              <a:t>数据库即符号记忆 → 采用属性精确过滤</a:t>
-            </a:r>
-          </a:p>
-        </p:txBody>
-      </p:sp>
-      <p:sp>
-        <p:nvSpPr>
-          <p:cNvPr id="11" name="Rounded Rectangle 10"/>
-          <p:cNvSpPr/>
-          <p:nvPr/>
-        </p:nvSpPr>
-        <p:spPr>
-          <a:xfrm>
-            <a:off x="720000" y="2296800"/>
-            <a:ext cx="10728000" cy="583200"/>
-          </a:xfrm>
-          <a:prstGeom prst="roundRect">
-            <a:avLst>
-              <a:gd name="adj" fmla="val 8000"/>
-            </a:avLst>
-          </a:prstGeom>
-          <a:solidFill>
-            <a:srgbClr val="F2F4F8"/>
-          </a:solidFill>
-          <a:ln w="12700">
-            <a:solidFill>
-              <a:srgbClr val="C8D0DC"/>
-            </a:solidFill>
-          </a:ln>
-          <a:effectLst/>
-        </p:spPr>
-        <p:style>
-          <a:lnRef idx="1">
-            <a:schemeClr val="accent1"/>
-          </a:lnRef>
-          <a:fillRef idx="3">
-            <a:schemeClr val="accent1"/>
-          </a:fillRef>
-          <a:effectRef idx="2">
-            <a:schemeClr val="accent1"/>
-          </a:effectRef>
-          <a:fontRef idx="minor">
-            <a:schemeClr val="lt1"/>
-          </a:fontRef>
-        </p:style>
-        <p:txBody>
-          <a:bodyPr rtlCol="0" anchor="ctr"/>
-          <a:lstStyle/>
-          <a:p>
-            <a:pPr algn="ctr"/>
-          </a:p>
-        </p:txBody>
-      </p:sp>
-      <p:sp>
-        <p:nvSpPr>
-          <p:cNvPr id="12" name="Rectangle 11"/>
-          <p:cNvSpPr/>
-          <p:nvPr/>
-        </p:nvSpPr>
-        <p:spPr>
-          <a:xfrm>
-            <a:off x="720000" y="2296800"/>
-            <a:ext cx="79200" cy="583200"/>
-          </a:xfrm>
-          <a:prstGeom prst="rect">
-            <a:avLst/>
-          </a:prstGeom>
-          <a:solidFill>
-            <a:srgbClr val="2F6EBA"/>
-          </a:solidFill>
-          <a:ln>
-            <a:noFill/>
-          </a:ln>
-          <a:effectLst/>
-        </p:spPr>
-        <p:style>
-          <a:lnRef idx="1">
-            <a:schemeClr val="accent1"/>
-          </a:lnRef>
-          <a:fillRef idx="3">
-            <a:schemeClr val="accent1"/>
-          </a:fillRef>
-          <a:effectRef idx="2">
-            <a:schemeClr val="accent1"/>
-          </a:effectRef>
-          <a:fontRef idx="minor">
-            <a:schemeClr val="lt1"/>
-          </a:fontRef>
-        </p:style>
-        <p:txBody>
-          <a:bodyPr rtlCol="0" anchor="ctr"/>
-          <a:lstStyle/>
-          <a:p>
-            <a:pPr algn="ctr"/>
-          </a:p>
-        </p:txBody>
-      </p:sp>
-      <p:sp>
-        <p:nvSpPr>
-          <p:cNvPr id="13" name="TextBox 12"/>
-          <p:cNvSpPr txBox="1"/>
-          <p:nvPr/>
-        </p:nvSpPr>
-        <p:spPr>
-          <a:xfrm>
-            <a:off x="882000" y="2361600"/>
-            <a:ext cx="540000" cy="360000"/>
-          </a:xfrm>
-          <a:prstGeom prst="rect">
-            <a:avLst/>
-          </a:prstGeom>
-          <a:noFill/>
-        </p:spPr>
-        <p:txBody>
-          <a:bodyPr wrap="none">
-            <a:spAutoFit/>
-          </a:bodyPr>
-          <a:lstStyle/>
-          <a:p>
-            <a:pPr algn="l"/>
-            <a:r>
-              <a:rPr sz="1800" b="1">
-                <a:solidFill>
-                  <a:srgbClr val="2F6EBA"/>
-                </a:solidFill>
-                <a:latin typeface="Microsoft YaHei"/>
-              </a:rPr>
-              <a:t>02</a:t>
-            </a:r>
-          </a:p>
-        </p:txBody>
-      </p:sp>
-      <p:sp>
-        <p:nvSpPr>
-          <p:cNvPr id="14" name="TextBox 13"/>
-          <p:cNvSpPr txBox="1"/>
-          <p:nvPr/>
-        </p:nvSpPr>
-        <p:spPr>
-          <a:xfrm>
-            <a:off x="1296000" y="2350800"/>
-            <a:ext cx="9936000" cy="198000"/>
-          </a:xfrm>
-          <a:prstGeom prst="rect">
-            <a:avLst/>
-          </a:prstGeom>
-          <a:noFill/>
-        </p:spPr>
-        <p:txBody>
-          <a:bodyPr wrap="square">
-            <a:spAutoFit/>
-          </a:bodyPr>
-          <a:lstStyle/>
-          <a:p>
-            <a:pPr algn="l"/>
-            <a:r>
-              <a:rPr sz="1250" b="1">
-                <a:solidFill>
-                  <a:srgbClr val="1F3A68"/>
-                </a:solidFill>
-                <a:latin typeface="Microsoft YaHei"/>
-              </a:rPr>
-              <a:t>ExpeL</a:t>
-            </a:r>
-          </a:p>
-        </p:txBody>
-      </p:sp>
-      <p:sp>
-        <p:nvSpPr>
-          <p:cNvPr id="15" name="TextBox 14"/>
-          <p:cNvSpPr txBox="1"/>
-          <p:nvPr/>
-        </p:nvSpPr>
-        <p:spPr>
-          <a:xfrm>
-            <a:off x="1296000" y="2556000"/>
-            <a:ext cx="9936000" cy="306000"/>
-          </a:xfrm>
-          <a:prstGeom prst="rect">
-            <a:avLst/>
-          </a:prstGeom>
-          <a:noFill/>
-        </p:spPr>
-        <p:txBody>
-          <a:bodyPr wrap="square">
-            <a:spAutoFit/>
-          </a:bodyPr>
-          <a:lstStyle/>
-          <a:p>
-            <a:pPr algn="l"/>
-            <a:r>
-              <a:rPr sz="1150" b="0">
-                <a:solidFill>
-                  <a:srgbClr val="555F6E"/>
-                </a:solidFill>
-                <a:latin typeface="Microsoft YaHei"/>
-              </a:rPr>
-              <a:t>经验库+向量召回 → 补充重要性加权与持久化</a:t>
-            </a:r>
-          </a:p>
-        </p:txBody>
-      </p:sp>
-      <p:sp>
-        <p:nvSpPr>
-          <p:cNvPr id="16" name="Rounded Rectangle 15"/>
-          <p:cNvSpPr/>
-          <p:nvPr/>
-        </p:nvSpPr>
-        <p:spPr>
-          <a:xfrm>
-            <a:off x="720000" y="2937600"/>
-            <a:ext cx="10728000" cy="583200"/>
-          </a:xfrm>
-          <a:prstGeom prst="roundRect">
-            <a:avLst>
-              <a:gd name="adj" fmla="val 8000"/>
-            </a:avLst>
-          </a:prstGeom>
-          <a:solidFill>
-            <a:srgbClr val="F2F4F8"/>
-          </a:solidFill>
-          <a:ln w="12700">
-            <a:solidFill>
-              <a:srgbClr val="C8D0DC"/>
-            </a:solidFill>
-          </a:ln>
-          <a:effectLst/>
-        </p:spPr>
-        <p:style>
-          <a:lnRef idx="1">
-            <a:schemeClr val="accent1"/>
-          </a:lnRef>
-          <a:fillRef idx="3">
-            <a:schemeClr val="accent1"/>
-          </a:fillRef>
-          <a:effectRef idx="2">
-            <a:schemeClr val="accent1"/>
-          </a:effectRef>
-          <a:fontRef idx="minor">
-            <a:schemeClr val="lt1"/>
-          </a:fontRef>
-        </p:style>
-        <p:txBody>
-          <a:bodyPr rtlCol="0" anchor="ctr"/>
-          <a:lstStyle/>
-          <a:p>
-            <a:pPr algn="ctr"/>
-          </a:p>
-        </p:txBody>
-      </p:sp>
-      <p:sp>
-        <p:nvSpPr>
-          <p:cNvPr id="17" name="Rectangle 16"/>
-          <p:cNvSpPr/>
-          <p:nvPr/>
-        </p:nvSpPr>
-        <p:spPr>
-          <a:xfrm>
-            <a:off x="720000" y="2937600"/>
-            <a:ext cx="79200" cy="583200"/>
-          </a:xfrm>
-          <a:prstGeom prst="rect">
-            <a:avLst/>
-          </a:prstGeom>
-          <a:solidFill>
-            <a:srgbClr val="2F6EBA"/>
-          </a:solidFill>
-          <a:ln>
-            <a:noFill/>
-          </a:ln>
-          <a:effectLst/>
-        </p:spPr>
-        <p:style>
-          <a:lnRef idx="1">
-            <a:schemeClr val="accent1"/>
-          </a:lnRef>
-          <a:fillRef idx="3">
-            <a:schemeClr val="accent1"/>
-          </a:fillRef>
-          <a:effectRef idx="2">
-            <a:schemeClr val="accent1"/>
-          </a:effectRef>
-          <a:fontRef idx="minor">
-            <a:schemeClr val="lt1"/>
-          </a:fontRef>
-        </p:style>
-        <p:txBody>
-          <a:bodyPr rtlCol="0" anchor="ctr"/>
-          <a:lstStyle/>
-          <a:p>
-            <a:pPr algn="ctr"/>
-          </a:p>
-        </p:txBody>
-      </p:sp>
-      <p:sp>
-        <p:nvSpPr>
-          <p:cNvPr id="18" name="TextBox 17"/>
-          <p:cNvSpPr txBox="1"/>
-          <p:nvPr/>
-        </p:nvSpPr>
-        <p:spPr>
-          <a:xfrm>
-            <a:off x="882000" y="3002400"/>
-            <a:ext cx="540000" cy="360000"/>
-          </a:xfrm>
-          <a:prstGeom prst="rect">
-            <a:avLst/>
-          </a:prstGeom>
-          <a:noFill/>
-        </p:spPr>
-        <p:txBody>
-          <a:bodyPr wrap="none">
-            <a:spAutoFit/>
-          </a:bodyPr>
-          <a:lstStyle/>
-          <a:p>
-            <a:pPr algn="l"/>
-            <a:r>
-              <a:rPr sz="1800" b="1">
-                <a:solidFill>
-                  <a:srgbClr val="2F6EBA"/>
-                </a:solidFill>
-                <a:latin typeface="Microsoft YaHei"/>
-              </a:rPr>
-              <a:t>03</a:t>
-            </a:r>
-          </a:p>
-        </p:txBody>
-      </p:sp>
-      <p:sp>
-        <p:nvSpPr>
-          <p:cNvPr id="19" name="TextBox 18"/>
-          <p:cNvSpPr txBox="1"/>
-          <p:nvPr/>
-        </p:nvSpPr>
-        <p:spPr>
-          <a:xfrm>
-            <a:off x="1296000" y="2991600"/>
-            <a:ext cx="9936000" cy="198000"/>
-          </a:xfrm>
-          <a:prstGeom prst="rect">
-            <a:avLst/>
-          </a:prstGeom>
-          <a:noFill/>
-        </p:spPr>
-        <p:txBody>
-          <a:bodyPr wrap="square">
-            <a:spAutoFit/>
-          </a:bodyPr>
-          <a:lstStyle/>
-          <a:p>
-            <a:pPr algn="l"/>
-            <a:r>
-              <a:rPr sz="1250" b="1">
-                <a:solidFill>
-                  <a:srgbClr val="1F3A68"/>
-                </a:solidFill>
-                <a:latin typeface="Microsoft YaHei"/>
-              </a:rPr>
-              <a:t>Reflexion</a:t>
-            </a:r>
-          </a:p>
-        </p:txBody>
-      </p:sp>
-      <p:sp>
-        <p:nvSpPr>
-          <p:cNvPr id="20" name="TextBox 19"/>
-          <p:cNvSpPr txBox="1"/>
-          <p:nvPr/>
-        </p:nvSpPr>
-        <p:spPr>
-          <a:xfrm>
-            <a:off x="1296000" y="3196800"/>
-            <a:ext cx="9936000" cy="306000"/>
-          </a:xfrm>
-          <a:prstGeom prst="rect">
-            <a:avLst/>
-          </a:prstGeom>
-          <a:noFill/>
-        </p:spPr>
-        <p:txBody>
-          <a:bodyPr wrap="square">
-            <a:spAutoFit/>
-          </a:bodyPr>
-          <a:lstStyle/>
-          <a:p>
-            <a:pPr algn="l"/>
-            <a:r>
-              <a:rPr sz="1150" b="0">
-                <a:solidFill>
-                  <a:srgbClr val="555F6E"/>
-                </a:solidFill>
-                <a:latin typeface="Microsoft YaHei"/>
-              </a:rPr>
-              <a:t>语言反思 → 采用语言形式经验</a:t>
-            </a:r>
-          </a:p>
-        </p:txBody>
-      </p:sp>
-      <p:sp>
-        <p:nvSpPr>
-          <p:cNvPr id="21" name="Rounded Rectangle 20"/>
-          <p:cNvSpPr/>
-          <p:nvPr/>
-        </p:nvSpPr>
-        <p:spPr>
-          <a:xfrm>
-            <a:off x="720000" y="3578400"/>
-            <a:ext cx="10728000" cy="583200"/>
-          </a:xfrm>
-          <a:prstGeom prst="roundRect">
-            <a:avLst>
-              <a:gd name="adj" fmla="val 8000"/>
-            </a:avLst>
-          </a:prstGeom>
-          <a:solidFill>
-            <a:srgbClr val="F2F4F8"/>
-          </a:solidFill>
-          <a:ln w="12700">
-            <a:solidFill>
-              <a:srgbClr val="C8D0DC"/>
-            </a:solidFill>
-          </a:ln>
-          <a:effectLst/>
-        </p:spPr>
-        <p:style>
-          <a:lnRef idx="1">
-            <a:schemeClr val="accent1"/>
-          </a:lnRef>
-          <a:fillRef idx="3">
-            <a:schemeClr val="accent1"/>
-          </a:fillRef>
-          <a:effectRef idx="2">
-            <a:schemeClr val="accent1"/>
-          </a:effectRef>
-          <a:fontRef idx="minor">
-            <a:schemeClr val="lt1"/>
-          </a:fontRef>
-        </p:style>
-        <p:txBody>
-          <a:bodyPr rtlCol="0" anchor="ctr"/>
-          <a:lstStyle/>
-          <a:p>
-            <a:pPr algn="ctr"/>
-          </a:p>
-        </p:txBody>
-      </p:sp>
-      <p:sp>
-        <p:nvSpPr>
-          <p:cNvPr id="22" name="Rectangle 21"/>
-          <p:cNvSpPr/>
-          <p:nvPr/>
-        </p:nvSpPr>
-        <p:spPr>
-          <a:xfrm>
-            <a:off x="720000" y="3578400"/>
-            <a:ext cx="79200" cy="583200"/>
-          </a:xfrm>
-          <a:prstGeom prst="rect">
-            <a:avLst/>
-          </a:prstGeom>
-          <a:solidFill>
-            <a:srgbClr val="2F6EBA"/>
-          </a:solidFill>
-          <a:ln>
-            <a:noFill/>
-          </a:ln>
-          <a:effectLst/>
-        </p:spPr>
-        <p:style>
-          <a:lnRef idx="1">
-            <a:schemeClr val="accent1"/>
-          </a:lnRef>
-          <a:fillRef idx="3">
-            <a:schemeClr val="accent1"/>
-          </a:fillRef>
-          <a:effectRef idx="2">
-            <a:schemeClr val="accent1"/>
-          </a:effectRef>
-          <a:fontRef idx="minor">
-            <a:schemeClr val="lt1"/>
-          </a:fontRef>
-        </p:style>
-        <p:txBody>
-          <a:bodyPr rtlCol="0" anchor="ctr"/>
-          <a:lstStyle/>
-          <a:p>
-            <a:pPr algn="ctr"/>
-          </a:p>
-        </p:txBody>
-      </p:sp>
-      <p:sp>
-        <p:nvSpPr>
-          <p:cNvPr id="23" name="TextBox 22"/>
-          <p:cNvSpPr txBox="1"/>
-          <p:nvPr/>
-        </p:nvSpPr>
-        <p:spPr>
-          <a:xfrm>
-            <a:off x="882000" y="3643199"/>
-            <a:ext cx="540000" cy="360000"/>
-          </a:xfrm>
-          <a:prstGeom prst="rect">
-            <a:avLst/>
-          </a:prstGeom>
-          <a:noFill/>
-        </p:spPr>
-        <p:txBody>
-          <a:bodyPr wrap="none">
-            <a:spAutoFit/>
-          </a:bodyPr>
-          <a:lstStyle/>
-          <a:p>
-            <a:pPr algn="l"/>
-            <a:r>
-              <a:rPr sz="1800" b="1">
-                <a:solidFill>
-                  <a:srgbClr val="2F6EBA"/>
-                </a:solidFill>
-                <a:latin typeface="Microsoft YaHei"/>
-              </a:rPr>
-              <a:t>04</a:t>
-            </a:r>
-          </a:p>
-        </p:txBody>
-      </p:sp>
-      <p:sp>
-        <p:nvSpPr>
-          <p:cNvPr id="24" name="TextBox 23"/>
-          <p:cNvSpPr txBox="1"/>
-          <p:nvPr/>
-        </p:nvSpPr>
-        <p:spPr>
-          <a:xfrm>
-            <a:off x="1296000" y="3632400"/>
-            <a:ext cx="9936000" cy="198000"/>
-          </a:xfrm>
-          <a:prstGeom prst="rect">
-            <a:avLst/>
-          </a:prstGeom>
-          <a:noFill/>
-        </p:spPr>
-        <p:txBody>
-          <a:bodyPr wrap="square">
-            <a:spAutoFit/>
-          </a:bodyPr>
-          <a:lstStyle/>
-          <a:p>
-            <a:pPr algn="l"/>
-            <a:r>
-              <a:rPr sz="1250" b="1">
-                <a:solidFill>
-                  <a:srgbClr val="1F3A68"/>
-                </a:solidFill>
-                <a:latin typeface="Microsoft YaHei"/>
-              </a:rPr>
-              <a:t>MemoryBank</a:t>
-            </a:r>
-          </a:p>
-        </p:txBody>
-      </p:sp>
-      <p:sp>
-        <p:nvSpPr>
-          <p:cNvPr id="25" name="TextBox 24"/>
-          <p:cNvSpPr txBox="1"/>
-          <p:nvPr/>
-        </p:nvSpPr>
-        <p:spPr>
-          <a:xfrm>
-            <a:off x="1296000" y="3837600"/>
-            <a:ext cx="9936000" cy="306000"/>
-          </a:xfrm>
-          <a:prstGeom prst="rect">
-            <a:avLst/>
-          </a:prstGeom>
-          <a:noFill/>
-        </p:spPr>
-        <p:txBody>
-          <a:bodyPr wrap="square">
-            <a:spAutoFit/>
-          </a:bodyPr>
-          <a:lstStyle/>
-          <a:p>
-            <a:pPr algn="l"/>
-            <a:r>
-              <a:rPr sz="1150" b="0">
-                <a:solidFill>
-                  <a:srgbClr val="555F6E"/>
-                </a:solidFill>
-                <a:latin typeface="Microsoft YaHei"/>
-              </a:rPr>
-              <a:t>艾宾浩斯遗忘 → 加入 importance≥2 保护线</a:t>
-            </a:r>
-          </a:p>
-        </p:txBody>
-      </p:sp>
-      <p:sp>
-        <p:nvSpPr>
-          <p:cNvPr id="26" name="Rounded Rectangle 25"/>
-          <p:cNvSpPr/>
-          <p:nvPr/>
-        </p:nvSpPr>
-        <p:spPr>
-          <a:xfrm>
-            <a:off x="720000" y="4219200"/>
-            <a:ext cx="10728000" cy="583200"/>
-          </a:xfrm>
-          <a:prstGeom prst="roundRect">
-            <a:avLst>
-              <a:gd name="adj" fmla="val 8000"/>
-            </a:avLst>
-          </a:prstGeom>
-          <a:solidFill>
-            <a:srgbClr val="F2F4F8"/>
-          </a:solidFill>
-          <a:ln w="12700">
-            <a:solidFill>
-              <a:srgbClr val="C8D0DC"/>
-            </a:solidFill>
-          </a:ln>
-          <a:effectLst/>
-        </p:spPr>
-        <p:style>
-          <a:lnRef idx="1">
-            <a:schemeClr val="accent1"/>
-          </a:lnRef>
-          <a:fillRef idx="3">
-            <a:schemeClr val="accent1"/>
-          </a:fillRef>
-          <a:effectRef idx="2">
-            <a:schemeClr val="accent1"/>
-          </a:effectRef>
-          <a:fontRef idx="minor">
-            <a:schemeClr val="lt1"/>
-          </a:fontRef>
-        </p:style>
-        <p:txBody>
-          <a:bodyPr rtlCol="0" anchor="ctr"/>
-          <a:lstStyle/>
-          <a:p>
-            <a:pPr algn="ctr"/>
-          </a:p>
-        </p:txBody>
-      </p:sp>
-      <p:sp>
-        <p:nvSpPr>
-          <p:cNvPr id="27" name="Rectangle 26"/>
-          <p:cNvSpPr/>
-          <p:nvPr/>
-        </p:nvSpPr>
-        <p:spPr>
-          <a:xfrm>
-            <a:off x="720000" y="4219200"/>
-            <a:ext cx="79200" cy="583200"/>
-          </a:xfrm>
-          <a:prstGeom prst="rect">
-            <a:avLst/>
-          </a:prstGeom>
-          <a:solidFill>
-            <a:srgbClr val="2F6EBA"/>
-          </a:solidFill>
-          <a:ln>
-            <a:noFill/>
-          </a:ln>
-          <a:effectLst/>
-        </p:spPr>
-        <p:style>
-          <a:lnRef idx="1">
-            <a:schemeClr val="accent1"/>
-          </a:lnRef>
-          <a:fillRef idx="3">
-            <a:schemeClr val="accent1"/>
-          </a:fillRef>
-          <a:effectRef idx="2">
-            <a:schemeClr val="accent1"/>
-          </a:effectRef>
-          <a:fontRef idx="minor">
-            <a:schemeClr val="lt1"/>
-          </a:fontRef>
-        </p:style>
-        <p:txBody>
-          <a:bodyPr rtlCol="0" anchor="ctr"/>
-          <a:lstStyle/>
-          <a:p>
-            <a:pPr algn="ctr"/>
-          </a:p>
-        </p:txBody>
-      </p:sp>
-      <p:sp>
-        <p:nvSpPr>
-          <p:cNvPr id="28" name="TextBox 27"/>
-          <p:cNvSpPr txBox="1"/>
-          <p:nvPr/>
-        </p:nvSpPr>
-        <p:spPr>
-          <a:xfrm>
-            <a:off x="882000" y="4283999"/>
-            <a:ext cx="540000" cy="360000"/>
-          </a:xfrm>
-          <a:prstGeom prst="rect">
-            <a:avLst/>
-          </a:prstGeom>
-          <a:noFill/>
-        </p:spPr>
-        <p:txBody>
-          <a:bodyPr wrap="none">
-            <a:spAutoFit/>
-          </a:bodyPr>
-          <a:lstStyle/>
-          <a:p>
-            <a:pPr algn="l"/>
-            <a:r>
-              <a:rPr sz="1800" b="1">
-                <a:solidFill>
-                  <a:srgbClr val="2F6EBA"/>
-                </a:solidFill>
-                <a:latin typeface="Microsoft YaHei"/>
-              </a:rPr>
-              <a:t>05</a:t>
-            </a:r>
-          </a:p>
-        </p:txBody>
-      </p:sp>
-      <p:sp>
-        <p:nvSpPr>
-          <p:cNvPr id="29" name="TextBox 28"/>
-          <p:cNvSpPr txBox="1"/>
-          <p:nvPr/>
-        </p:nvSpPr>
-        <p:spPr>
-          <a:xfrm>
-            <a:off x="1296000" y="4273200"/>
-            <a:ext cx="9936000" cy="198000"/>
-          </a:xfrm>
-          <a:prstGeom prst="rect">
-            <a:avLst/>
-          </a:prstGeom>
-          <a:noFill/>
-        </p:spPr>
-        <p:txBody>
-          <a:bodyPr wrap="square">
-            <a:spAutoFit/>
-          </a:bodyPr>
-          <a:lstStyle/>
-          <a:p>
-            <a:pPr algn="l"/>
-            <a:r>
-              <a:rPr sz="1250" b="1">
-                <a:solidFill>
-                  <a:srgbClr val="1F3A68"/>
-                </a:solidFill>
-                <a:latin typeface="Microsoft YaHei"/>
-              </a:rPr>
-              <a:t>Zep</a:t>
-            </a:r>
-          </a:p>
-        </p:txBody>
-      </p:sp>
-      <p:sp>
-        <p:nvSpPr>
-          <p:cNvPr id="30" name="TextBox 29"/>
-          <p:cNvSpPr txBox="1"/>
-          <p:nvPr/>
-        </p:nvSpPr>
-        <p:spPr>
-          <a:xfrm>
-            <a:off x="1296000" y="4478400"/>
-            <a:ext cx="9936000" cy="306000"/>
-          </a:xfrm>
-          <a:prstGeom prst="rect">
-            <a:avLst/>
-          </a:prstGeom>
-          <a:noFill/>
-        </p:spPr>
-        <p:txBody>
-          <a:bodyPr wrap="square">
-            <a:spAutoFit/>
-          </a:bodyPr>
-          <a:lstStyle/>
-          <a:p>
-            <a:pPr algn="l"/>
-            <a:r>
-              <a:rPr sz="1150" b="0">
-                <a:solidFill>
-                  <a:srgbClr val="555F6E"/>
-                </a:solidFill>
-                <a:latin typeface="Microsoft YaHei"/>
-              </a:rPr>
-              <a:t>时间戳/溯源 → 采用溯源字段，不采用图存储</a:t>
-            </a:r>
-          </a:p>
-        </p:txBody>
-      </p:sp>
-      <p:sp>
-        <p:nvSpPr>
-          <p:cNvPr id="31" name="Rounded Rectangle 30"/>
-          <p:cNvSpPr/>
-          <p:nvPr/>
-        </p:nvSpPr>
-        <p:spPr>
-          <a:xfrm>
-            <a:off x="720000" y="4859999"/>
-            <a:ext cx="10728000" cy="583200"/>
-          </a:xfrm>
-          <a:prstGeom prst="roundRect">
-            <a:avLst>
-              <a:gd name="adj" fmla="val 8000"/>
-            </a:avLst>
-          </a:prstGeom>
-          <a:solidFill>
-            <a:srgbClr val="F2F4F8"/>
-          </a:solidFill>
-          <a:ln w="12700">
-            <a:solidFill>
-              <a:srgbClr val="C8D0DC"/>
-            </a:solidFill>
-          </a:ln>
-          <a:effectLst/>
-        </p:spPr>
-        <p:style>
-          <a:lnRef idx="1">
-            <a:schemeClr val="accent1"/>
-          </a:lnRef>
-          <a:fillRef idx="3">
-            <a:schemeClr val="accent1"/>
-          </a:fillRef>
-          <a:effectRef idx="2">
-            <a:schemeClr val="accent1"/>
-          </a:effectRef>
-          <a:fontRef idx="minor">
-            <a:schemeClr val="lt1"/>
-          </a:fontRef>
-        </p:style>
-        <p:txBody>
-          <a:bodyPr rtlCol="0" anchor="ctr"/>
-          <a:lstStyle/>
-          <a:p>
-            <a:pPr algn="ctr"/>
-          </a:p>
-        </p:txBody>
-      </p:sp>
-      <p:sp>
-        <p:nvSpPr>
-          <p:cNvPr id="32" name="Rectangle 31"/>
-          <p:cNvSpPr/>
-          <p:nvPr/>
-        </p:nvSpPr>
-        <p:spPr>
-          <a:xfrm>
-            <a:off x="720000" y="4859999"/>
-            <a:ext cx="79200" cy="583200"/>
-          </a:xfrm>
-          <a:prstGeom prst="rect">
-            <a:avLst/>
-          </a:prstGeom>
-          <a:solidFill>
-            <a:srgbClr val="2F6EBA"/>
-          </a:solidFill>
-          <a:ln>
-            <a:noFill/>
-          </a:ln>
-          <a:effectLst/>
-        </p:spPr>
-        <p:style>
-          <a:lnRef idx="1">
-            <a:schemeClr val="accent1"/>
-          </a:lnRef>
-          <a:fillRef idx="3">
-            <a:schemeClr val="accent1"/>
-          </a:fillRef>
-          <a:effectRef idx="2">
-            <a:schemeClr val="accent1"/>
-          </a:effectRef>
-          <a:fontRef idx="minor">
-            <a:schemeClr val="lt1"/>
-          </a:fontRef>
-        </p:style>
-        <p:txBody>
-          <a:bodyPr rtlCol="0" anchor="ctr"/>
-          <a:lstStyle/>
-          <a:p>
-            <a:pPr algn="ctr"/>
-          </a:p>
-        </p:txBody>
-      </p:sp>
-      <p:sp>
-        <p:nvSpPr>
-          <p:cNvPr id="33" name="TextBox 32"/>
-          <p:cNvSpPr txBox="1"/>
-          <p:nvPr/>
-        </p:nvSpPr>
-        <p:spPr>
-          <a:xfrm>
-            <a:off x="882000" y="4924799"/>
-            <a:ext cx="540000" cy="360000"/>
-          </a:xfrm>
-          <a:prstGeom prst="rect">
-            <a:avLst/>
-          </a:prstGeom>
-          <a:noFill/>
-        </p:spPr>
-        <p:txBody>
-          <a:bodyPr wrap="none">
-            <a:spAutoFit/>
-          </a:bodyPr>
-          <a:lstStyle/>
-          <a:p>
-            <a:pPr algn="l"/>
-            <a:r>
-              <a:rPr sz="1800" b="1">
-                <a:solidFill>
-                  <a:srgbClr val="2F6EBA"/>
-                </a:solidFill>
-                <a:latin typeface="Microsoft YaHei"/>
-              </a:rPr>
-              <a:t>06</a:t>
-            </a:r>
-          </a:p>
-        </p:txBody>
-      </p:sp>
-      <p:sp>
-        <p:nvSpPr>
-          <p:cNvPr id="34" name="TextBox 33"/>
-          <p:cNvSpPr txBox="1"/>
-          <p:nvPr/>
-        </p:nvSpPr>
-        <p:spPr>
-          <a:xfrm>
-            <a:off x="1296000" y="4913999"/>
-            <a:ext cx="9936000" cy="198000"/>
-          </a:xfrm>
-          <a:prstGeom prst="rect">
-            <a:avLst/>
-          </a:prstGeom>
-          <a:noFill/>
-        </p:spPr>
-        <p:txBody>
-          <a:bodyPr wrap="square">
-            <a:spAutoFit/>
-          </a:bodyPr>
-          <a:lstStyle/>
-          <a:p>
-            <a:pPr algn="l"/>
-            <a:r>
-              <a:rPr sz="1250" b="1">
-                <a:solidFill>
-                  <a:srgbClr val="1F3A68"/>
-                </a:solidFill>
-                <a:latin typeface="Microsoft YaHei"/>
-              </a:rPr>
-              <a:t>MIRIX / TiM</a:t>
-            </a:r>
-          </a:p>
-        </p:txBody>
-      </p:sp>
-      <p:sp>
-        <p:nvSpPr>
-          <p:cNvPr id="35" name="TextBox 34"/>
-          <p:cNvSpPr txBox="1"/>
-          <p:nvPr/>
-        </p:nvSpPr>
-        <p:spPr>
-          <a:xfrm>
-            <a:off x="1296000" y="5119200"/>
-            <a:ext cx="9936000" cy="306000"/>
-          </a:xfrm>
-          <a:prstGeom prst="rect">
-            <a:avLst/>
-          </a:prstGeom>
-          <a:noFill/>
-        </p:spPr>
-        <p:txBody>
-          <a:bodyPr wrap="square">
-            <a:spAutoFit/>
-          </a:bodyPr>
-          <a:lstStyle/>
-          <a:p>
-            <a:pPr algn="l"/>
-            <a:r>
-              <a:rPr sz="1150" b="0">
-                <a:solidFill>
-                  <a:srgbClr val="555F6E"/>
-                </a:solidFill>
-                <a:latin typeface="Microsoft YaHei"/>
-              </a:rPr>
-              <a:t>多路策略与显式检索计划 → 压缩为三路融合</a:t>
-            </a:r>
-          </a:p>
-        </p:txBody>
-      </p:sp>
-      <p:sp>
-        <p:nvSpPr>
-          <p:cNvPr id="36" name="Rectangle 35"/>
-          <p:cNvSpPr/>
-          <p:nvPr/>
-        </p:nvSpPr>
-        <p:spPr>
-          <a:xfrm>
-            <a:off x="0" y="6606000"/>
-            <a:ext cx="12193200" cy="10800"/>
+            <a:off x="792000" y="2178000"/>
+            <a:ext cx="10620000" cy="10800"/>
           </a:xfrm>
           <a:prstGeom prst="rect">
             <a:avLst/>
@@ -7596,7 +6484,796 @@
       </p:sp>
       <p:sp>
         <p:nvSpPr>
-          <p:cNvPr id="37" name="TextBox 36"/>
+          <p:cNvPr id="10" name="TextBox 9"/>
+          <p:cNvSpPr txBox="1"/>
+          <p:nvPr/>
+        </p:nvSpPr>
+        <p:spPr>
+          <a:xfrm>
+            <a:off x="792000" y="2250000"/>
+            <a:ext cx="648000" cy="432000"/>
+          </a:xfrm>
+          <a:prstGeom prst="rect">
+            <a:avLst/>
+          </a:prstGeom>
+          <a:noFill/>
+        </p:spPr>
+        <p:txBody>
+          <a:bodyPr wrap="none">
+            <a:spAutoFit/>
+          </a:bodyPr>
+          <a:lstStyle/>
+          <a:p>
+            <a:pPr algn="l"/>
+            <a:r>
+              <a:rPr sz="2200" b="1">
+                <a:solidFill>
+                  <a:srgbClr val="2F6EBA"/>
+                </a:solidFill>
+                <a:latin typeface="Microsoft YaHei"/>
+              </a:rPr>
+              <a:t>02</a:t>
+            </a:r>
+          </a:p>
+        </p:txBody>
+      </p:sp>
+      <p:sp>
+        <p:nvSpPr>
+          <p:cNvPr id="11" name="TextBox 10"/>
+          <p:cNvSpPr txBox="1"/>
+          <p:nvPr/>
+        </p:nvSpPr>
+        <p:spPr>
+          <a:xfrm>
+            <a:off x="1512000" y="2271600"/>
+            <a:ext cx="9828000" cy="216000"/>
+          </a:xfrm>
+          <a:prstGeom prst="rect">
+            <a:avLst/>
+          </a:prstGeom>
+          <a:noFill/>
+        </p:spPr>
+        <p:txBody>
+          <a:bodyPr wrap="square">
+            <a:spAutoFit/>
+          </a:bodyPr>
+          <a:lstStyle/>
+          <a:p>
+            <a:pPr algn="l"/>
+            <a:r>
+              <a:rPr sz="1600" b="1">
+                <a:solidFill>
+                  <a:srgbClr val="1F3A68"/>
+                </a:solidFill>
+                <a:latin typeface="Microsoft YaHei"/>
+              </a:rPr>
+              <a:t>ExpeL</a:t>
+            </a:r>
+          </a:p>
+        </p:txBody>
+      </p:sp>
+      <p:sp>
+        <p:nvSpPr>
+          <p:cNvPr id="12" name="TextBox 11"/>
+          <p:cNvSpPr txBox="1"/>
+          <p:nvPr/>
+        </p:nvSpPr>
+        <p:spPr>
+          <a:xfrm>
+            <a:off x="1512000" y="2509200"/>
+            <a:ext cx="9828000" cy="306000"/>
+          </a:xfrm>
+          <a:prstGeom prst="rect">
+            <a:avLst/>
+          </a:prstGeom>
+          <a:noFill/>
+        </p:spPr>
+        <p:txBody>
+          <a:bodyPr wrap="square">
+            <a:spAutoFit/>
+          </a:bodyPr>
+          <a:lstStyle/>
+          <a:p>
+            <a:pPr algn="l"/>
+            <a:r>
+              <a:rPr sz="1250" b="0">
+                <a:solidFill>
+                  <a:srgbClr val="555F6E"/>
+                </a:solidFill>
+                <a:latin typeface="Microsoft YaHei"/>
+              </a:rPr>
+              <a:t>经验库+向量召回 → 补齐重要性加权与 SQLite 持久化。</a:t>
+            </a:r>
+          </a:p>
+        </p:txBody>
+      </p:sp>
+      <p:sp>
+        <p:nvSpPr>
+          <p:cNvPr id="13" name="Rectangle 12"/>
+          <p:cNvSpPr/>
+          <p:nvPr/>
+        </p:nvSpPr>
+        <p:spPr>
+          <a:xfrm>
+            <a:off x="792000" y="2736000"/>
+            <a:ext cx="10620000" cy="10800"/>
+          </a:xfrm>
+          <a:prstGeom prst="rect">
+            <a:avLst/>
+          </a:prstGeom>
+          <a:solidFill>
+            <a:srgbClr val="C8D0DC"/>
+          </a:solidFill>
+          <a:ln>
+            <a:noFill/>
+          </a:ln>
+          <a:effectLst/>
+        </p:spPr>
+        <p:style>
+          <a:lnRef idx="1">
+            <a:schemeClr val="accent1"/>
+          </a:lnRef>
+          <a:fillRef idx="3">
+            <a:schemeClr val="accent1"/>
+          </a:fillRef>
+          <a:effectRef idx="2">
+            <a:schemeClr val="accent1"/>
+          </a:effectRef>
+          <a:fontRef idx="minor">
+            <a:schemeClr val="lt1"/>
+          </a:fontRef>
+        </p:style>
+        <p:txBody>
+          <a:bodyPr rtlCol="0" anchor="ctr"/>
+          <a:lstStyle/>
+          <a:p>
+            <a:pPr algn="ctr"/>
+          </a:p>
+        </p:txBody>
+      </p:sp>
+      <p:sp>
+        <p:nvSpPr>
+          <p:cNvPr id="14" name="TextBox 13"/>
+          <p:cNvSpPr txBox="1"/>
+          <p:nvPr/>
+        </p:nvSpPr>
+        <p:spPr>
+          <a:xfrm>
+            <a:off x="792000" y="2808000"/>
+            <a:ext cx="648000" cy="432000"/>
+          </a:xfrm>
+          <a:prstGeom prst="rect">
+            <a:avLst/>
+          </a:prstGeom>
+          <a:noFill/>
+        </p:spPr>
+        <p:txBody>
+          <a:bodyPr wrap="none">
+            <a:spAutoFit/>
+          </a:bodyPr>
+          <a:lstStyle/>
+          <a:p>
+            <a:pPr algn="l"/>
+            <a:r>
+              <a:rPr sz="2200" b="1">
+                <a:solidFill>
+                  <a:srgbClr val="2F6EBA"/>
+                </a:solidFill>
+                <a:latin typeface="Microsoft YaHei"/>
+              </a:rPr>
+              <a:t>03</a:t>
+            </a:r>
+          </a:p>
+        </p:txBody>
+      </p:sp>
+      <p:sp>
+        <p:nvSpPr>
+          <p:cNvPr id="15" name="TextBox 14"/>
+          <p:cNvSpPr txBox="1"/>
+          <p:nvPr/>
+        </p:nvSpPr>
+        <p:spPr>
+          <a:xfrm>
+            <a:off x="1512000" y="2829600"/>
+            <a:ext cx="9828000" cy="216000"/>
+          </a:xfrm>
+          <a:prstGeom prst="rect">
+            <a:avLst/>
+          </a:prstGeom>
+          <a:noFill/>
+        </p:spPr>
+        <p:txBody>
+          <a:bodyPr wrap="square">
+            <a:spAutoFit/>
+          </a:bodyPr>
+          <a:lstStyle/>
+          <a:p>
+            <a:pPr algn="l"/>
+            <a:r>
+              <a:rPr sz="1600" b="1">
+                <a:solidFill>
+                  <a:srgbClr val="1F3A68"/>
+                </a:solidFill>
+                <a:latin typeface="Microsoft YaHei"/>
+              </a:rPr>
+              <a:t>Reflexion</a:t>
+            </a:r>
+          </a:p>
+        </p:txBody>
+      </p:sp>
+      <p:sp>
+        <p:nvSpPr>
+          <p:cNvPr id="16" name="TextBox 15"/>
+          <p:cNvSpPr txBox="1"/>
+          <p:nvPr/>
+        </p:nvSpPr>
+        <p:spPr>
+          <a:xfrm>
+            <a:off x="1512000" y="3067200"/>
+            <a:ext cx="9828000" cy="306000"/>
+          </a:xfrm>
+          <a:prstGeom prst="rect">
+            <a:avLst/>
+          </a:prstGeom>
+          <a:noFill/>
+        </p:spPr>
+        <p:txBody>
+          <a:bodyPr wrap="square">
+            <a:spAutoFit/>
+          </a:bodyPr>
+          <a:lstStyle/>
+          <a:p>
+            <a:pPr algn="l"/>
+            <a:r>
+              <a:rPr sz="1250" b="0">
+                <a:solidFill>
+                  <a:srgbClr val="555F6E"/>
+                </a:solidFill>
+                <a:latin typeface="Microsoft YaHei"/>
+              </a:rPr>
+              <a:t>语言反思 → 采用语言形式经验，不采用在线强化。</a:t>
+            </a:r>
+          </a:p>
+        </p:txBody>
+      </p:sp>
+      <p:sp>
+        <p:nvSpPr>
+          <p:cNvPr id="17" name="Rectangle 16"/>
+          <p:cNvSpPr/>
+          <p:nvPr/>
+        </p:nvSpPr>
+        <p:spPr>
+          <a:xfrm>
+            <a:off x="792000" y="3294000"/>
+            <a:ext cx="10620000" cy="10800"/>
+          </a:xfrm>
+          <a:prstGeom prst="rect">
+            <a:avLst/>
+          </a:prstGeom>
+          <a:solidFill>
+            <a:srgbClr val="C8D0DC"/>
+          </a:solidFill>
+          <a:ln>
+            <a:noFill/>
+          </a:ln>
+          <a:effectLst/>
+        </p:spPr>
+        <p:style>
+          <a:lnRef idx="1">
+            <a:schemeClr val="accent1"/>
+          </a:lnRef>
+          <a:fillRef idx="3">
+            <a:schemeClr val="accent1"/>
+          </a:fillRef>
+          <a:effectRef idx="2">
+            <a:schemeClr val="accent1"/>
+          </a:effectRef>
+          <a:fontRef idx="minor">
+            <a:schemeClr val="lt1"/>
+          </a:fontRef>
+        </p:style>
+        <p:txBody>
+          <a:bodyPr rtlCol="0" anchor="ctr"/>
+          <a:lstStyle/>
+          <a:p>
+            <a:pPr algn="ctr"/>
+          </a:p>
+        </p:txBody>
+      </p:sp>
+      <p:sp>
+        <p:nvSpPr>
+          <p:cNvPr id="18" name="TextBox 17"/>
+          <p:cNvSpPr txBox="1"/>
+          <p:nvPr/>
+        </p:nvSpPr>
+        <p:spPr>
+          <a:xfrm>
+            <a:off x="792000" y="3366000"/>
+            <a:ext cx="648000" cy="432000"/>
+          </a:xfrm>
+          <a:prstGeom prst="rect">
+            <a:avLst/>
+          </a:prstGeom>
+          <a:noFill/>
+        </p:spPr>
+        <p:txBody>
+          <a:bodyPr wrap="none">
+            <a:spAutoFit/>
+          </a:bodyPr>
+          <a:lstStyle/>
+          <a:p>
+            <a:pPr algn="l"/>
+            <a:r>
+              <a:rPr sz="2200" b="1">
+                <a:solidFill>
+                  <a:srgbClr val="2F6EBA"/>
+                </a:solidFill>
+                <a:latin typeface="Microsoft YaHei"/>
+              </a:rPr>
+              <a:t>04</a:t>
+            </a:r>
+          </a:p>
+        </p:txBody>
+      </p:sp>
+      <p:sp>
+        <p:nvSpPr>
+          <p:cNvPr id="19" name="TextBox 18"/>
+          <p:cNvSpPr txBox="1"/>
+          <p:nvPr/>
+        </p:nvSpPr>
+        <p:spPr>
+          <a:xfrm>
+            <a:off x="1512000" y="3387600"/>
+            <a:ext cx="9828000" cy="216000"/>
+          </a:xfrm>
+          <a:prstGeom prst="rect">
+            <a:avLst/>
+          </a:prstGeom>
+          <a:noFill/>
+        </p:spPr>
+        <p:txBody>
+          <a:bodyPr wrap="square">
+            <a:spAutoFit/>
+          </a:bodyPr>
+          <a:lstStyle/>
+          <a:p>
+            <a:pPr algn="l"/>
+            <a:r>
+              <a:rPr sz="1600" b="1">
+                <a:solidFill>
+                  <a:srgbClr val="1F3A68"/>
+                </a:solidFill>
+                <a:latin typeface="Microsoft YaHei"/>
+              </a:rPr>
+              <a:t>MemoryBank</a:t>
+            </a:r>
+          </a:p>
+        </p:txBody>
+      </p:sp>
+      <p:sp>
+        <p:nvSpPr>
+          <p:cNvPr id="20" name="TextBox 19"/>
+          <p:cNvSpPr txBox="1"/>
+          <p:nvPr/>
+        </p:nvSpPr>
+        <p:spPr>
+          <a:xfrm>
+            <a:off x="1512000" y="3625200"/>
+            <a:ext cx="9828000" cy="306000"/>
+          </a:xfrm>
+          <a:prstGeom prst="rect">
+            <a:avLst/>
+          </a:prstGeom>
+          <a:noFill/>
+        </p:spPr>
+        <p:txBody>
+          <a:bodyPr wrap="square">
+            <a:spAutoFit/>
+          </a:bodyPr>
+          <a:lstStyle/>
+          <a:p>
+            <a:pPr algn="l"/>
+            <a:r>
+              <a:rPr sz="1250" b="0">
+                <a:solidFill>
+                  <a:srgbClr val="555F6E"/>
+                </a:solidFill>
+                <a:latin typeface="Microsoft YaHei"/>
+              </a:rPr>
+              <a:t>艾宾浩斯遗忘+召唤强化 → 增加 importance≥2 保护线。</a:t>
+            </a:r>
+          </a:p>
+        </p:txBody>
+      </p:sp>
+      <p:sp>
+        <p:nvSpPr>
+          <p:cNvPr id="21" name="Rectangle 20"/>
+          <p:cNvSpPr/>
+          <p:nvPr/>
+        </p:nvSpPr>
+        <p:spPr>
+          <a:xfrm>
+            <a:off x="792000" y="3851999"/>
+            <a:ext cx="10620000" cy="10800"/>
+          </a:xfrm>
+          <a:prstGeom prst="rect">
+            <a:avLst/>
+          </a:prstGeom>
+          <a:solidFill>
+            <a:srgbClr val="C8D0DC"/>
+          </a:solidFill>
+          <a:ln>
+            <a:noFill/>
+          </a:ln>
+          <a:effectLst/>
+        </p:spPr>
+        <p:style>
+          <a:lnRef idx="1">
+            <a:schemeClr val="accent1"/>
+          </a:lnRef>
+          <a:fillRef idx="3">
+            <a:schemeClr val="accent1"/>
+          </a:fillRef>
+          <a:effectRef idx="2">
+            <a:schemeClr val="accent1"/>
+          </a:effectRef>
+          <a:fontRef idx="minor">
+            <a:schemeClr val="lt1"/>
+          </a:fontRef>
+        </p:style>
+        <p:txBody>
+          <a:bodyPr rtlCol="0" anchor="ctr"/>
+          <a:lstStyle/>
+          <a:p>
+            <a:pPr algn="ctr"/>
+          </a:p>
+        </p:txBody>
+      </p:sp>
+      <p:sp>
+        <p:nvSpPr>
+          <p:cNvPr id="22" name="TextBox 21"/>
+          <p:cNvSpPr txBox="1"/>
+          <p:nvPr/>
+        </p:nvSpPr>
+        <p:spPr>
+          <a:xfrm>
+            <a:off x="792000" y="3924000"/>
+            <a:ext cx="648000" cy="432000"/>
+          </a:xfrm>
+          <a:prstGeom prst="rect">
+            <a:avLst/>
+          </a:prstGeom>
+          <a:noFill/>
+        </p:spPr>
+        <p:txBody>
+          <a:bodyPr wrap="none">
+            <a:spAutoFit/>
+          </a:bodyPr>
+          <a:lstStyle/>
+          <a:p>
+            <a:pPr algn="l"/>
+            <a:r>
+              <a:rPr sz="2200" b="1">
+                <a:solidFill>
+                  <a:srgbClr val="2F6EBA"/>
+                </a:solidFill>
+                <a:latin typeface="Microsoft YaHei"/>
+              </a:rPr>
+              <a:t>05</a:t>
+            </a:r>
+          </a:p>
+        </p:txBody>
+      </p:sp>
+      <p:sp>
+        <p:nvSpPr>
+          <p:cNvPr id="23" name="TextBox 22"/>
+          <p:cNvSpPr txBox="1"/>
+          <p:nvPr/>
+        </p:nvSpPr>
+        <p:spPr>
+          <a:xfrm>
+            <a:off x="1512000" y="3945600"/>
+            <a:ext cx="9828000" cy="216000"/>
+          </a:xfrm>
+          <a:prstGeom prst="rect">
+            <a:avLst/>
+          </a:prstGeom>
+          <a:noFill/>
+        </p:spPr>
+        <p:txBody>
+          <a:bodyPr wrap="square">
+            <a:spAutoFit/>
+          </a:bodyPr>
+          <a:lstStyle/>
+          <a:p>
+            <a:pPr algn="l"/>
+            <a:r>
+              <a:rPr sz="1600" b="1">
+                <a:solidFill>
+                  <a:srgbClr val="1F3A68"/>
+                </a:solidFill>
+                <a:latin typeface="Microsoft YaHei"/>
+              </a:rPr>
+              <a:t>Zep</a:t>
+            </a:r>
+          </a:p>
+        </p:txBody>
+      </p:sp>
+      <p:sp>
+        <p:nvSpPr>
+          <p:cNvPr id="24" name="TextBox 23"/>
+          <p:cNvSpPr txBox="1"/>
+          <p:nvPr/>
+        </p:nvSpPr>
+        <p:spPr>
+          <a:xfrm>
+            <a:off x="1512000" y="4183200"/>
+            <a:ext cx="9828000" cy="306000"/>
+          </a:xfrm>
+          <a:prstGeom prst="rect">
+            <a:avLst/>
+          </a:prstGeom>
+          <a:noFill/>
+        </p:spPr>
+        <p:txBody>
+          <a:bodyPr wrap="square">
+            <a:spAutoFit/>
+          </a:bodyPr>
+          <a:lstStyle/>
+          <a:p>
+            <a:pPr algn="l"/>
+            <a:r>
+              <a:rPr sz="1250" b="0">
+                <a:solidFill>
+                  <a:srgbClr val="555F6E"/>
+                </a:solidFill>
+                <a:latin typeface="Microsoft YaHei"/>
+              </a:rPr>
+              <a:t>时序知识图谱+溯源 → 采用溯源字段，不采用图存储。</a:t>
+            </a:r>
+          </a:p>
+        </p:txBody>
+      </p:sp>
+      <p:sp>
+        <p:nvSpPr>
+          <p:cNvPr id="25" name="Rectangle 24"/>
+          <p:cNvSpPr/>
+          <p:nvPr/>
+        </p:nvSpPr>
+        <p:spPr>
+          <a:xfrm>
+            <a:off x="792000" y="4410000"/>
+            <a:ext cx="10620000" cy="10800"/>
+          </a:xfrm>
+          <a:prstGeom prst="rect">
+            <a:avLst/>
+          </a:prstGeom>
+          <a:solidFill>
+            <a:srgbClr val="C8D0DC"/>
+          </a:solidFill>
+          <a:ln>
+            <a:noFill/>
+          </a:ln>
+          <a:effectLst/>
+        </p:spPr>
+        <p:style>
+          <a:lnRef idx="1">
+            <a:schemeClr val="accent1"/>
+          </a:lnRef>
+          <a:fillRef idx="3">
+            <a:schemeClr val="accent1"/>
+          </a:fillRef>
+          <a:effectRef idx="2">
+            <a:schemeClr val="accent1"/>
+          </a:effectRef>
+          <a:fontRef idx="minor">
+            <a:schemeClr val="lt1"/>
+          </a:fontRef>
+        </p:style>
+        <p:txBody>
+          <a:bodyPr rtlCol="0" anchor="ctr"/>
+          <a:lstStyle/>
+          <a:p>
+            <a:pPr algn="ctr"/>
+          </a:p>
+        </p:txBody>
+      </p:sp>
+      <p:sp>
+        <p:nvSpPr>
+          <p:cNvPr id="26" name="TextBox 25"/>
+          <p:cNvSpPr txBox="1"/>
+          <p:nvPr/>
+        </p:nvSpPr>
+        <p:spPr>
+          <a:xfrm>
+            <a:off x="792000" y="4482000"/>
+            <a:ext cx="648000" cy="432000"/>
+          </a:xfrm>
+          <a:prstGeom prst="rect">
+            <a:avLst/>
+          </a:prstGeom>
+          <a:noFill/>
+        </p:spPr>
+        <p:txBody>
+          <a:bodyPr wrap="none">
+            <a:spAutoFit/>
+          </a:bodyPr>
+          <a:lstStyle/>
+          <a:p>
+            <a:pPr algn="l"/>
+            <a:r>
+              <a:rPr sz="2200" b="1">
+                <a:solidFill>
+                  <a:srgbClr val="2F6EBA"/>
+                </a:solidFill>
+                <a:latin typeface="Microsoft YaHei"/>
+              </a:rPr>
+              <a:t>06</a:t>
+            </a:r>
+          </a:p>
+        </p:txBody>
+      </p:sp>
+      <p:sp>
+        <p:nvSpPr>
+          <p:cNvPr id="27" name="TextBox 26"/>
+          <p:cNvSpPr txBox="1"/>
+          <p:nvPr/>
+        </p:nvSpPr>
+        <p:spPr>
+          <a:xfrm>
+            <a:off x="1512000" y="4503600"/>
+            <a:ext cx="9828000" cy="216000"/>
+          </a:xfrm>
+          <a:prstGeom prst="rect">
+            <a:avLst/>
+          </a:prstGeom>
+          <a:noFill/>
+        </p:spPr>
+        <p:txBody>
+          <a:bodyPr wrap="square">
+            <a:spAutoFit/>
+          </a:bodyPr>
+          <a:lstStyle/>
+          <a:p>
+            <a:pPr algn="l"/>
+            <a:r>
+              <a:rPr sz="1600" b="1">
+                <a:solidFill>
+                  <a:srgbClr val="1F3A68"/>
+                </a:solidFill>
+                <a:latin typeface="Microsoft YaHei"/>
+              </a:rPr>
+              <a:t>MIRIX/TiM</a:t>
+            </a:r>
+          </a:p>
+        </p:txBody>
+      </p:sp>
+      <p:sp>
+        <p:nvSpPr>
+          <p:cNvPr id="28" name="TextBox 27"/>
+          <p:cNvSpPr txBox="1"/>
+          <p:nvPr/>
+        </p:nvSpPr>
+        <p:spPr>
+          <a:xfrm>
+            <a:off x="1512000" y="4741200"/>
+            <a:ext cx="9828000" cy="306000"/>
+          </a:xfrm>
+          <a:prstGeom prst="rect">
+            <a:avLst/>
+          </a:prstGeom>
+          <a:noFill/>
+        </p:spPr>
+        <p:txBody>
+          <a:bodyPr wrap="square">
+            <a:spAutoFit/>
+          </a:bodyPr>
+          <a:lstStyle/>
+          <a:p>
+            <a:pPr algn="l"/>
+            <a:r>
+              <a:rPr sz="1250" b="0">
+                <a:solidFill>
+                  <a:srgbClr val="555F6E"/>
+                </a:solidFill>
+                <a:latin typeface="Microsoft YaHei"/>
+              </a:rPr>
+              <a:t>多路策略与显式检索计划 → 压缩为三路融合。</a:t>
+            </a:r>
+          </a:p>
+        </p:txBody>
+      </p:sp>
+      <p:sp>
+        <p:nvSpPr>
+          <p:cNvPr id="29" name="Rectangle 28"/>
+          <p:cNvSpPr/>
+          <p:nvPr/>
+        </p:nvSpPr>
+        <p:spPr>
+          <a:xfrm>
+            <a:off x="792000" y="4968000"/>
+            <a:ext cx="10620000" cy="10800"/>
+          </a:xfrm>
+          <a:prstGeom prst="rect">
+            <a:avLst/>
+          </a:prstGeom>
+          <a:solidFill>
+            <a:srgbClr val="C8D0DC"/>
+          </a:solidFill>
+          <a:ln>
+            <a:noFill/>
+          </a:ln>
+          <a:effectLst/>
+        </p:spPr>
+        <p:style>
+          <a:lnRef idx="1">
+            <a:schemeClr val="accent1"/>
+          </a:lnRef>
+          <a:fillRef idx="3">
+            <a:schemeClr val="accent1"/>
+          </a:fillRef>
+          <a:effectRef idx="2">
+            <a:schemeClr val="accent1"/>
+          </a:effectRef>
+          <a:fontRef idx="minor">
+            <a:schemeClr val="lt1"/>
+          </a:fontRef>
+        </p:style>
+        <p:txBody>
+          <a:bodyPr rtlCol="0" anchor="ctr"/>
+          <a:lstStyle/>
+          <a:p>
+            <a:pPr algn="ctr"/>
+          </a:p>
+        </p:txBody>
+      </p:sp>
+      <p:sp>
+        <p:nvSpPr>
+          <p:cNvPr id="30" name="Rectangle 29"/>
+          <p:cNvSpPr/>
+          <p:nvPr/>
+        </p:nvSpPr>
+        <p:spPr>
+          <a:xfrm>
+            <a:off x="0" y="6606000"/>
+            <a:ext cx="12193200" cy="10800"/>
+          </a:xfrm>
+          <a:prstGeom prst="rect">
+            <a:avLst/>
+          </a:prstGeom>
+          <a:solidFill>
+            <a:srgbClr val="C8D0DC"/>
+          </a:solidFill>
+          <a:ln>
+            <a:noFill/>
+          </a:ln>
+          <a:effectLst/>
+        </p:spPr>
+        <p:style>
+          <a:lnRef idx="1">
+            <a:schemeClr val="accent1"/>
+          </a:lnRef>
+          <a:fillRef idx="3">
+            <a:schemeClr val="accent1"/>
+          </a:fillRef>
+          <a:effectRef idx="2">
+            <a:schemeClr val="accent1"/>
+          </a:effectRef>
+          <a:fontRef idx="minor">
+            <a:schemeClr val="lt1"/>
+          </a:fontRef>
+        </p:style>
+        <p:txBody>
+          <a:bodyPr rtlCol="0" anchor="ctr"/>
+          <a:lstStyle/>
+          <a:p>
+            <a:pPr algn="ctr"/>
+          </a:p>
+        </p:txBody>
+      </p:sp>
+      <p:sp>
+        <p:nvSpPr>
+          <p:cNvPr id="31" name="TextBox 30"/>
           <p:cNvSpPr txBox="1"/>
           <p:nvPr/>
         </p:nvSpPr>
@@ -7631,7 +7308,7 @@
       </p:sp>
       <p:sp>
         <p:nvSpPr>
-          <p:cNvPr id="38" name="TextBox 37"/>
+          <p:cNvPr id="32" name="TextBox 31"/>
           <p:cNvSpPr txBox="1"/>
           <p:nvPr/>
         </p:nvSpPr>
@@ -7914,7 +7591,7 @@
                 </a:solidFill>
                 <a:latin typeface="Microsoft YaHei"/>
               </a:rPr>
-              <a:t>要点</a:t>
+              <a:t>借鉴 / 启发</a:t>
             </a:r>
           </a:p>
         </p:txBody>
@@ -8019,7 +7696,7 @@
                 </a:solidFill>
                 <a:latin typeface="Microsoft YaHei"/>
               </a:rPr>
-              <a:t>预存储推理/θ查重 → 采用相似度去重</a:t>
+              <a:t>θ 相似度去重 → 写入前查重</a:t>
             </a:r>
           </a:p>
         </p:txBody>
@@ -8124,7 +7801,7 @@
                 </a:solidFill>
                 <a:latin typeface="Microsoft YaHei"/>
               </a:rPr>
-              <a:t>跨事件整合 → 演化为‘抽象’操作</a:t>
+              <a:t>跨事件整合 → “抽象”操作</a:t>
             </a:r>
           </a:p>
         </p:txBody>
@@ -8229,20 +7906,125 @@
                 </a:solidFill>
                 <a:latin typeface="Microsoft YaHei"/>
               </a:rPr>
-              <a:t>INSERT/UPDATE/DELETE/SKIP → 采用操作类型化</a:t>
-            </a:r>
-          </a:p>
-        </p:txBody>
-      </p:sp>
-      <p:sp>
-        <p:nvSpPr>
-          <p:cNvPr id="17" name="Rectangle 16"/>
+              <a:t>操作类型化 → MemoryOp 枚举</a:t>
+            </a:r>
+          </a:p>
+        </p:txBody>
+      </p:sp>
+      <p:sp>
+        <p:nvSpPr>
+          <p:cNvPr id="17" name="TextBox 16"/>
+          <p:cNvSpPr txBox="1"/>
+          <p:nvPr/>
+        </p:nvSpPr>
+        <p:spPr>
+          <a:xfrm>
+            <a:off x="792000" y="4057200"/>
+            <a:ext cx="251999" cy="251999"/>
+          </a:xfrm>
+          <a:prstGeom prst="rect">
+            <a:avLst/>
+          </a:prstGeom>
+          <a:noFill/>
+        </p:spPr>
+        <p:txBody>
+          <a:bodyPr wrap="none">
+            <a:spAutoFit/>
+          </a:bodyPr>
+          <a:lstStyle/>
+          <a:p>
+            <a:pPr algn="l"/>
+            <a:r>
+              <a:rPr sz="1400" b="1">
+                <a:solidFill>
+                  <a:srgbClr val="2F6EBA"/>
+                </a:solidFill>
+                <a:latin typeface="Microsoft YaHei"/>
+              </a:rPr>
+              <a:t>•</a:t>
+            </a:r>
+          </a:p>
+        </p:txBody>
+      </p:sp>
+      <p:sp>
+        <p:nvSpPr>
+          <p:cNvPr id="18" name="TextBox 17"/>
+          <p:cNvSpPr txBox="1"/>
+          <p:nvPr/>
+        </p:nvSpPr>
+        <p:spPr>
+          <a:xfrm>
+            <a:off x="1080000" y="4057200"/>
+            <a:ext cx="4878000" cy="216000"/>
+          </a:xfrm>
+          <a:prstGeom prst="rect">
+            <a:avLst/>
+          </a:prstGeom>
+          <a:noFill/>
+        </p:spPr>
+        <p:txBody>
+          <a:bodyPr wrap="square">
+            <a:spAutoFit/>
+          </a:bodyPr>
+          <a:lstStyle/>
+          <a:p>
+            <a:pPr algn="l"/>
+            <a:r>
+              <a:rPr sz="1250" b="1">
+                <a:solidFill>
+                  <a:srgbClr val="1F3A68"/>
+                </a:solidFill>
+                <a:latin typeface="Microsoft YaHei"/>
+              </a:rPr>
+              <a:t>Mem-α</a:t>
+            </a:r>
+          </a:p>
+        </p:txBody>
+      </p:sp>
+      <p:sp>
+        <p:nvSpPr>
+          <p:cNvPr id="19" name="TextBox 18"/>
+          <p:cNvSpPr txBox="1"/>
+          <p:nvPr/>
+        </p:nvSpPr>
+        <p:spPr>
+          <a:xfrm>
+            <a:off x="1080000" y="4266000"/>
+            <a:ext cx="4878000" cy="288000"/>
+          </a:xfrm>
+          <a:prstGeom prst="rect">
+            <a:avLst/>
+          </a:prstGeom>
+          <a:noFill/>
+        </p:spPr>
+        <p:txBody>
+          <a:bodyPr wrap="square">
+            <a:spAutoFit/>
+          </a:bodyPr>
+          <a:lstStyle/>
+          <a:p>
+            <a:pPr algn="l"/>
+            <a:r>
+              <a:rPr sz="1150" b="0">
+                <a:solidFill>
+                  <a:srgbClr val="555F6E"/>
+                </a:solidFill>
+                <a:latin typeface="Microsoft YaHei"/>
+              </a:rPr>
+              <a:t>建议-执行分离 → 核心架构</a:t>
+            </a:r>
+          </a:p>
+        </p:txBody>
+      </p:sp>
+      <p:sp>
+        <p:nvSpPr>
+          <p:cNvPr id="20" name="Rectangle 19"/>
           <p:cNvSpPr/>
           <p:nvPr/>
         </p:nvSpPr>
         <p:spPr>
           <a:xfrm>
-            <a:off x="792000" y="4086000"/>
+            <a:off x="792000" y="4716000"/>
             <a:ext cx="5310000" cy="7200"/>
           </a:xfrm>
           <a:prstGeom prst="rect">
@@ -8280,7 +8062,7 @@
       </p:sp>
       <p:sp>
         <p:nvSpPr>
-          <p:cNvPr id="18" name="Rectangle 17"/>
+          <p:cNvPr id="21" name="Rectangle 20"/>
           <p:cNvSpPr/>
           <p:nvPr/>
         </p:nvSpPr>
@@ -8324,7 +8106,7 @@
       </p:sp>
       <p:sp>
         <p:nvSpPr>
-          <p:cNvPr id="19" name="TextBox 18"/>
+          <p:cNvPr id="22" name="TextBox 21"/>
           <p:cNvSpPr txBox="1"/>
           <p:nvPr/>
         </p:nvSpPr>
@@ -8352,14 +8134,14 @@
                 </a:solidFill>
                 <a:latin typeface="Microsoft YaHei"/>
               </a:rPr>
-              <a:t>补充</a:t>
-            </a:r>
-          </a:p>
-        </p:txBody>
-      </p:sp>
-      <p:sp>
-        <p:nvSpPr>
-          <p:cNvPr id="20" name="TextBox 19"/>
+              <a:t>注意 / 边界</a:t>
+            </a:r>
+          </a:p>
+        </p:txBody>
+      </p:sp>
+      <p:sp>
+        <p:nvSpPr>
+          <p:cNvPr id="23" name="TextBox 22"/>
           <p:cNvSpPr txBox="1"/>
           <p:nvPr/>
         </p:nvSpPr>
@@ -8394,7 +8176,7 @@
       </p:sp>
       <p:sp>
         <p:nvSpPr>
-          <p:cNvPr id="21" name="TextBox 20"/>
+          <p:cNvPr id="24" name="TextBox 23"/>
           <p:cNvSpPr txBox="1"/>
           <p:nvPr/>
         </p:nvSpPr>
@@ -8422,14 +8204,14 @@
                 </a:solidFill>
                 <a:latin typeface="Microsoft YaHei"/>
               </a:rPr>
-              <a:t>Mem-α</a:t>
-            </a:r>
-          </a:p>
-        </p:txBody>
-      </p:sp>
-      <p:sp>
-        <p:nvSpPr>
-          <p:cNvPr id="22" name="TextBox 21"/>
+              <a:t>不采用完整聚类</a:t>
+            </a:r>
+          </a:p>
+        </p:txBody>
+      </p:sp>
+      <p:sp>
+        <p:nvSpPr>
+          <p:cNvPr id="25" name="TextBox 24"/>
           <p:cNvSpPr txBox="1"/>
           <p:nvPr/>
         </p:nvSpPr>
@@ -8457,14 +8239,14 @@
                 </a:solidFill>
                 <a:latin typeface="Microsoft YaHei"/>
               </a:rPr>
-              <a:t>建议-执行分离 → 本文核心架构</a:t>
-            </a:r>
-          </a:p>
-        </p:txBody>
-      </p:sp>
-      <p:sp>
-        <p:nvSpPr>
-          <p:cNvPr id="23" name="TextBox 22"/>
+              <a:t>50 条量级收益不明显</a:t>
+            </a:r>
+          </a:p>
+        </p:txBody>
+      </p:sp>
+      <p:sp>
+        <p:nvSpPr>
+          <p:cNvPr id="26" name="TextBox 25"/>
           <p:cNvSpPr txBox="1"/>
           <p:nvPr/>
         </p:nvSpPr>
@@ -8499,7 +8281,7 @@
       </p:sp>
       <p:sp>
         <p:nvSpPr>
-          <p:cNvPr id="24" name="TextBox 23"/>
+          <p:cNvPr id="27" name="TextBox 26"/>
           <p:cNvSpPr txBox="1"/>
           <p:nvPr/>
         </p:nvSpPr>
@@ -8527,14 +8309,14 @@
                 </a:solidFill>
                 <a:latin typeface="Microsoft YaHei"/>
               </a:rPr>
-              <a:t>小结</a:t>
-            </a:r>
-          </a:p>
-        </p:txBody>
-      </p:sp>
-      <p:sp>
-        <p:nvSpPr>
-          <p:cNvPr id="25" name="TextBox 24"/>
+              <a:t>不采用在线强化</a:t>
+            </a:r>
+          </a:p>
+        </p:txBody>
+      </p:sp>
+      <p:sp>
+        <p:nvSpPr>
+          <p:cNvPr id="28" name="TextBox 27"/>
           <p:cNvSpPr txBox="1"/>
           <p:nvPr/>
         </p:nvSpPr>
@@ -8562,20 +8344,230 @@
                 </a:solidFill>
                 <a:latin typeface="Microsoft YaHei"/>
               </a:rPr>
-              <a:t>组合层面+领域化（保护线/精确绕过阈值/阶段供给）</a:t>
-            </a:r>
-          </a:p>
-        </p:txBody>
-      </p:sp>
-      <p:sp>
-        <p:nvSpPr>
-          <p:cNvPr id="26" name="Rectangle 25"/>
+              <a:t>战场奖励信号不稳定</a:t>
+            </a:r>
+          </a:p>
+        </p:txBody>
+      </p:sp>
+      <p:sp>
+        <p:nvSpPr>
+          <p:cNvPr id="29" name="TextBox 28"/>
+          <p:cNvSpPr txBox="1"/>
+          <p:nvPr/>
+        </p:nvSpPr>
+        <p:spPr>
+          <a:xfrm>
+            <a:off x="6678000" y="3427200"/>
+            <a:ext cx="251999" cy="251999"/>
+          </a:xfrm>
+          <a:prstGeom prst="rect">
+            <a:avLst/>
+          </a:prstGeom>
+          <a:noFill/>
+        </p:spPr>
+        <p:txBody>
+          <a:bodyPr wrap="none">
+            <a:spAutoFit/>
+          </a:bodyPr>
+          <a:lstStyle/>
+          <a:p>
+            <a:pPr algn="l"/>
+            <a:r>
+              <a:rPr sz="1400" b="1">
+                <a:solidFill>
+                  <a:srgbClr val="2F6EBA"/>
+                </a:solidFill>
+                <a:latin typeface="Microsoft YaHei"/>
+              </a:rPr>
+              <a:t>•</a:t>
+            </a:r>
+          </a:p>
+        </p:txBody>
+      </p:sp>
+      <p:sp>
+        <p:nvSpPr>
+          <p:cNvPr id="30" name="TextBox 29"/>
+          <p:cNvSpPr txBox="1"/>
+          <p:nvPr/>
+        </p:nvSpPr>
+        <p:spPr>
+          <a:xfrm>
+            <a:off x="6966000" y="3427200"/>
+            <a:ext cx="4878000" cy="216000"/>
+          </a:xfrm>
+          <a:prstGeom prst="rect">
+            <a:avLst/>
+          </a:prstGeom>
+          <a:noFill/>
+        </p:spPr>
+        <p:txBody>
+          <a:bodyPr wrap="square">
+            <a:spAutoFit/>
+          </a:bodyPr>
+          <a:lstStyle/>
+          <a:p>
+            <a:pPr algn="l"/>
+            <a:r>
+              <a:rPr sz="1250" b="1">
+                <a:solidFill>
+                  <a:srgbClr val="1F3A68"/>
+                </a:solidFill>
+                <a:latin typeface="Microsoft YaHei"/>
+              </a:rPr>
+              <a:t>不采用图存储</a:t>
+            </a:r>
+          </a:p>
+        </p:txBody>
+      </p:sp>
+      <p:sp>
+        <p:nvSpPr>
+          <p:cNvPr id="31" name="TextBox 30"/>
+          <p:cNvSpPr txBox="1"/>
+          <p:nvPr/>
+        </p:nvSpPr>
+        <p:spPr>
+          <a:xfrm>
+            <a:off x="6966000" y="3636000"/>
+            <a:ext cx="4878000" cy="288000"/>
+          </a:xfrm>
+          <a:prstGeom prst="rect">
+            <a:avLst/>
+          </a:prstGeom>
+          <a:noFill/>
+        </p:spPr>
+        <p:txBody>
+          <a:bodyPr wrap="square">
+            <a:spAutoFit/>
+          </a:bodyPr>
+          <a:lstStyle/>
+          <a:p>
+            <a:pPr algn="l"/>
+            <a:r>
+              <a:rPr sz="1150" b="0">
+                <a:solidFill>
+                  <a:srgbClr val="555F6E"/>
+                </a:solidFill>
+                <a:latin typeface="Microsoft YaHei"/>
+              </a:rPr>
+              <a:t>构建纠错成本高</a:t>
+            </a:r>
+          </a:p>
+        </p:txBody>
+      </p:sp>
+      <p:sp>
+        <p:nvSpPr>
+          <p:cNvPr id="32" name="TextBox 31"/>
+          <p:cNvSpPr txBox="1"/>
+          <p:nvPr/>
+        </p:nvSpPr>
+        <p:spPr>
+          <a:xfrm>
+            <a:off x="6678000" y="4057200"/>
+            <a:ext cx="251999" cy="251999"/>
+          </a:xfrm>
+          <a:prstGeom prst="rect">
+            <a:avLst/>
+          </a:prstGeom>
+          <a:noFill/>
+        </p:spPr>
+        <p:txBody>
+          <a:bodyPr wrap="none">
+            <a:spAutoFit/>
+          </a:bodyPr>
+          <a:lstStyle/>
+          <a:p>
+            <a:pPr algn="l"/>
+            <a:r>
+              <a:rPr sz="1400" b="1">
+                <a:solidFill>
+                  <a:srgbClr val="2F6EBA"/>
+                </a:solidFill>
+                <a:latin typeface="Microsoft YaHei"/>
+              </a:rPr>
+              <a:t>•</a:t>
+            </a:r>
+          </a:p>
+        </p:txBody>
+      </p:sp>
+      <p:sp>
+        <p:nvSpPr>
+          <p:cNvPr id="33" name="TextBox 32"/>
+          <p:cNvSpPr txBox="1"/>
+          <p:nvPr/>
+        </p:nvSpPr>
+        <p:spPr>
+          <a:xfrm>
+            <a:off x="6966000" y="4057200"/>
+            <a:ext cx="4878000" cy="216000"/>
+          </a:xfrm>
+          <a:prstGeom prst="rect">
+            <a:avLst/>
+          </a:prstGeom>
+          <a:noFill/>
+        </p:spPr>
+        <p:txBody>
+          <a:bodyPr wrap="square">
+            <a:spAutoFit/>
+          </a:bodyPr>
+          <a:lstStyle/>
+          <a:p>
+            <a:pPr algn="l"/>
+            <a:r>
+              <a:rPr sz="1250" b="1">
+                <a:solidFill>
+                  <a:srgbClr val="1F3A68"/>
+                </a:solidFill>
+                <a:latin typeface="Microsoft YaHei"/>
+              </a:rPr>
+              <a:t>领域化</a:t>
+            </a:r>
+          </a:p>
+        </p:txBody>
+      </p:sp>
+      <p:sp>
+        <p:nvSpPr>
+          <p:cNvPr id="34" name="TextBox 33"/>
+          <p:cNvSpPr txBox="1"/>
+          <p:nvPr/>
+        </p:nvSpPr>
+        <p:spPr>
+          <a:xfrm>
+            <a:off x="6966000" y="4266000"/>
+            <a:ext cx="4878000" cy="288000"/>
+          </a:xfrm>
+          <a:prstGeom prst="rect">
+            <a:avLst/>
+          </a:prstGeom>
+          <a:noFill/>
+        </p:spPr>
+        <p:txBody>
+          <a:bodyPr wrap="square">
+            <a:spAutoFit/>
+          </a:bodyPr>
+          <a:lstStyle/>
+          <a:p>
+            <a:pPr algn="l"/>
+            <a:r>
+              <a:rPr sz="1150" b="0">
+                <a:solidFill>
+                  <a:srgbClr val="555F6E"/>
+                </a:solidFill>
+                <a:latin typeface="Microsoft YaHei"/>
+              </a:rPr>
+              <a:t>保护线、精确绕过阈值、阶段供给</a:t>
+            </a:r>
+          </a:p>
+        </p:txBody>
+      </p:sp>
+      <p:sp>
+        <p:nvSpPr>
+          <p:cNvPr id="35" name="Rectangle 34"/>
           <p:cNvSpPr/>
           <p:nvPr/>
         </p:nvSpPr>
         <p:spPr>
           <a:xfrm>
-            <a:off x="6678000" y="3456000"/>
+            <a:off x="6678000" y="4716000"/>
             <a:ext cx="5310000" cy="7200"/>
           </a:xfrm>
           <a:prstGeom prst="rect">
@@ -8613,7 +8605,7 @@
       </p:sp>
       <p:sp>
         <p:nvSpPr>
-          <p:cNvPr id="27" name="Rectangle 26"/>
+          <p:cNvPr id="36" name="Rectangle 35"/>
           <p:cNvSpPr/>
           <p:nvPr/>
         </p:nvSpPr>
@@ -8657,7 +8649,7 @@
       </p:sp>
       <p:sp>
         <p:nvSpPr>
-          <p:cNvPr id="28" name="TextBox 27"/>
+          <p:cNvPr id="37" name="TextBox 36"/>
           <p:cNvSpPr txBox="1"/>
           <p:nvPr/>
         </p:nvSpPr>
@@ -8692,7 +8684,7 @@
       </p:sp>
       <p:sp>
         <p:nvSpPr>
-          <p:cNvPr id="29" name="TextBox 28"/>
+          <p:cNvPr id="38" name="TextBox 37"/>
           <p:cNvSpPr txBox="1"/>
           <p:nvPr/>
         </p:nvSpPr>
@@ -24343,778 +24335,119 @@
       </p:sp>
       <p:sp>
         <p:nvSpPr>
-          <p:cNvPr id="6" name="Rounded Rectangle 5"/>
+          <p:cNvPr id="6" name="TextBox 5"/>
+          <p:cNvSpPr txBox="1"/>
+          <p:nvPr/>
+        </p:nvSpPr>
+        <p:spPr>
+          <a:xfrm>
+            <a:off x="792000" y="1828800"/>
+            <a:ext cx="648000" cy="432000"/>
+          </a:xfrm>
+          <a:prstGeom prst="rect">
+            <a:avLst/>
+          </a:prstGeom>
+          <a:noFill/>
+        </p:spPr>
+        <p:txBody>
+          <a:bodyPr wrap="none">
+            <a:spAutoFit/>
+          </a:bodyPr>
+          <a:lstStyle/>
+          <a:p>
+            <a:pPr algn="l"/>
+            <a:r>
+              <a:rPr sz="2600" b="1">
+                <a:solidFill>
+                  <a:srgbClr val="2F6EBA"/>
+                </a:solidFill>
+                <a:latin typeface="Microsoft YaHei"/>
+              </a:rPr>
+              <a:t>01</a:t>
+            </a:r>
+          </a:p>
+        </p:txBody>
+      </p:sp>
+      <p:sp>
+        <p:nvSpPr>
+          <p:cNvPr id="7" name="TextBox 6"/>
+          <p:cNvSpPr txBox="1"/>
+          <p:nvPr/>
+        </p:nvSpPr>
+        <p:spPr>
+          <a:xfrm>
+            <a:off x="1512000" y="1800000"/>
+            <a:ext cx="9828000" cy="324000"/>
+          </a:xfrm>
+          <a:prstGeom prst="rect">
+            <a:avLst/>
+          </a:prstGeom>
+          <a:noFill/>
+        </p:spPr>
+        <p:txBody>
+          <a:bodyPr wrap="square">
+            <a:spAutoFit/>
+          </a:bodyPr>
+          <a:lstStyle/>
+          <a:p>
+            <a:pPr algn="l"/>
+            <a:r>
+              <a:rPr sz="2000" b="1">
+                <a:solidFill>
+                  <a:srgbClr val="1F3A68"/>
+                </a:solidFill>
+                <a:latin typeface="Microsoft YaHei"/>
+              </a:rPr>
+              <a:t>从零开始的问题</a:t>
+            </a:r>
+          </a:p>
+        </p:txBody>
+      </p:sp>
+      <p:sp>
+        <p:nvSpPr>
+          <p:cNvPr id="8" name="TextBox 7"/>
+          <p:cNvSpPr txBox="1"/>
+          <p:nvPr/>
+        </p:nvSpPr>
+        <p:spPr>
+          <a:xfrm>
+            <a:off x="1512000" y="2106000"/>
+            <a:ext cx="9828000" cy="593999"/>
+          </a:xfrm>
+          <a:prstGeom prst="rect">
+            <a:avLst/>
+          </a:prstGeom>
+          <a:noFill/>
+        </p:spPr>
+        <p:txBody>
+          <a:bodyPr wrap="square">
+            <a:spAutoFit/>
+          </a:bodyPr>
+          <a:lstStyle/>
+          <a:p>
+            <a:pPr algn="l"/>
+            <a:r>
+              <a:rPr sz="1400" b="0">
+                <a:solidFill>
+                  <a:srgbClr val="555F6E"/>
+                </a:solidFill>
+                <a:latin typeface="Microsoft YaHei"/>
+              </a:rPr>
+              <a:t>作战规划智能体以场次接任务，目标→查询→检索→规划→推演→复盘→下一场；模型与上下文都不保留跨场次状态，同类错误会反复出现。</a:t>
+            </a:r>
+          </a:p>
+        </p:txBody>
+      </p:sp>
+      <p:sp>
+        <p:nvSpPr>
+          <p:cNvPr id="9" name="Rectangle 8"/>
           <p:cNvSpPr/>
           <p:nvPr/>
         </p:nvSpPr>
         <p:spPr>
           <a:xfrm>
-            <a:off x="720000" y="1655999"/>
-            <a:ext cx="6408000" cy="756000"/>
-          </a:xfrm>
-          <a:prstGeom prst="roundRect">
-            <a:avLst>
-              <a:gd name="adj" fmla="val 8000"/>
-            </a:avLst>
-          </a:prstGeom>
-          <a:solidFill>
-            <a:srgbClr val="F2F4F8"/>
-          </a:solidFill>
-          <a:ln w="12700">
-            <a:solidFill>
-              <a:srgbClr val="C8D0DC"/>
-            </a:solidFill>
-          </a:ln>
-          <a:effectLst/>
-        </p:spPr>
-        <p:style>
-          <a:lnRef idx="1">
-            <a:schemeClr val="accent1"/>
-          </a:lnRef>
-          <a:fillRef idx="3">
-            <a:schemeClr val="accent1"/>
-          </a:fillRef>
-          <a:effectRef idx="2">
-            <a:schemeClr val="accent1"/>
-          </a:effectRef>
-          <a:fontRef idx="minor">
-            <a:schemeClr val="lt1"/>
-          </a:fontRef>
-        </p:style>
-        <p:txBody>
-          <a:bodyPr rtlCol="0" anchor="ctr"/>
-          <a:lstStyle/>
-          <a:p>
-            <a:pPr algn="ctr"/>
-          </a:p>
-        </p:txBody>
-      </p:sp>
-      <p:sp>
-        <p:nvSpPr>
-          <p:cNvPr id="7" name="Rectangle 6"/>
-          <p:cNvSpPr/>
-          <p:nvPr/>
-        </p:nvSpPr>
-        <p:spPr>
-          <a:xfrm>
-            <a:off x="720000" y="1655999"/>
-            <a:ext cx="79200" cy="756000"/>
-          </a:xfrm>
-          <a:prstGeom prst="rect">
-            <a:avLst/>
-          </a:prstGeom>
-          <a:solidFill>
-            <a:srgbClr val="2F6EBA"/>
-          </a:solidFill>
-          <a:ln>
-            <a:noFill/>
-          </a:ln>
-          <a:effectLst/>
-        </p:spPr>
-        <p:style>
-          <a:lnRef idx="1">
-            <a:schemeClr val="accent1"/>
-          </a:lnRef>
-          <a:fillRef idx="3">
-            <a:schemeClr val="accent1"/>
-          </a:fillRef>
-          <a:effectRef idx="2">
-            <a:schemeClr val="accent1"/>
-          </a:effectRef>
-          <a:fontRef idx="minor">
-            <a:schemeClr val="lt1"/>
-          </a:fontRef>
-        </p:style>
-        <p:txBody>
-          <a:bodyPr rtlCol="0" anchor="ctr"/>
-          <a:lstStyle/>
-          <a:p>
-            <a:pPr algn="ctr"/>
-          </a:p>
-        </p:txBody>
-      </p:sp>
-      <p:sp>
-        <p:nvSpPr>
-          <p:cNvPr id="8" name="TextBox 7"/>
-          <p:cNvSpPr txBox="1"/>
-          <p:nvPr/>
-        </p:nvSpPr>
-        <p:spPr>
-          <a:xfrm>
-            <a:off x="882000" y="1720799"/>
-            <a:ext cx="540000" cy="360000"/>
-          </a:xfrm>
-          <a:prstGeom prst="rect">
-            <a:avLst/>
-          </a:prstGeom>
-          <a:noFill/>
-        </p:spPr>
-        <p:txBody>
-          <a:bodyPr wrap="none">
-            <a:spAutoFit/>
-          </a:bodyPr>
-          <a:lstStyle/>
-          <a:p>
-            <a:pPr algn="l"/>
-            <a:r>
-              <a:rPr sz="1800" b="1">
-                <a:solidFill>
-                  <a:srgbClr val="2F6EBA"/>
-                </a:solidFill>
-                <a:latin typeface="Microsoft YaHei"/>
-              </a:rPr>
-              <a:t>01</a:t>
-            </a:r>
-          </a:p>
-        </p:txBody>
-      </p:sp>
-      <p:sp>
-        <p:nvSpPr>
-          <p:cNvPr id="9" name="TextBox 8"/>
-          <p:cNvSpPr txBox="1"/>
-          <p:nvPr/>
-        </p:nvSpPr>
-        <p:spPr>
-          <a:xfrm>
-            <a:off x="1296000" y="1710000"/>
-            <a:ext cx="5616000" cy="198000"/>
-          </a:xfrm>
-          <a:prstGeom prst="rect">
-            <a:avLst/>
-          </a:prstGeom>
-          <a:noFill/>
-        </p:spPr>
-        <p:txBody>
-          <a:bodyPr wrap="square">
-            <a:spAutoFit/>
-          </a:bodyPr>
-          <a:lstStyle/>
-          <a:p>
-            <a:pPr algn="l"/>
-            <a:r>
-              <a:rPr sz="1500" b="1">
-                <a:solidFill>
-                  <a:srgbClr val="1F3A68"/>
-                </a:solidFill>
-                <a:latin typeface="Microsoft YaHei"/>
-              </a:rPr>
-              <a:t>作战规划智能体以场次接任务</a:t>
-            </a:r>
-          </a:p>
-        </p:txBody>
-      </p:sp>
-      <p:sp>
-        <p:nvSpPr>
-          <p:cNvPr id="10" name="TextBox 9"/>
-          <p:cNvSpPr txBox="1"/>
-          <p:nvPr/>
-        </p:nvSpPr>
-        <p:spPr>
-          <a:xfrm>
-            <a:off x="1296000" y="1915199"/>
-            <a:ext cx="5616000" cy="306000"/>
-          </a:xfrm>
-          <a:prstGeom prst="rect">
-            <a:avLst/>
-          </a:prstGeom>
-          <a:noFill/>
-        </p:spPr>
-        <p:txBody>
-          <a:bodyPr wrap="square">
-            <a:spAutoFit/>
-          </a:bodyPr>
-          <a:lstStyle/>
-          <a:p>
-            <a:pPr algn="l"/>
-            <a:r>
-              <a:rPr sz="1300" b="0">
-                <a:solidFill>
-                  <a:srgbClr val="555F6E"/>
-                </a:solidFill>
-                <a:latin typeface="Microsoft YaHei"/>
-              </a:rPr>
-              <a:t>目标→查询→检索→规划→推演→复盘→下一场</a:t>
-            </a:r>
-          </a:p>
-        </p:txBody>
-      </p:sp>
-      <p:sp>
-        <p:nvSpPr>
-          <p:cNvPr id="11" name="Rounded Rectangle 10"/>
-          <p:cNvSpPr/>
-          <p:nvPr/>
-        </p:nvSpPr>
-        <p:spPr>
-          <a:xfrm>
-            <a:off x="720000" y="2491200"/>
-            <a:ext cx="6408000" cy="756000"/>
-          </a:xfrm>
-          <a:prstGeom prst="roundRect">
-            <a:avLst>
-              <a:gd name="adj" fmla="val 8000"/>
-            </a:avLst>
-          </a:prstGeom>
-          <a:solidFill>
-            <a:srgbClr val="F2F4F8"/>
-          </a:solidFill>
-          <a:ln w="12700">
-            <a:solidFill>
-              <a:srgbClr val="C8D0DC"/>
-            </a:solidFill>
-          </a:ln>
-          <a:effectLst/>
-        </p:spPr>
-        <p:style>
-          <a:lnRef idx="1">
-            <a:schemeClr val="accent1"/>
-          </a:lnRef>
-          <a:fillRef idx="3">
-            <a:schemeClr val="accent1"/>
-          </a:fillRef>
-          <a:effectRef idx="2">
-            <a:schemeClr val="accent1"/>
-          </a:effectRef>
-          <a:fontRef idx="minor">
-            <a:schemeClr val="lt1"/>
-          </a:fontRef>
-        </p:style>
-        <p:txBody>
-          <a:bodyPr rtlCol="0" anchor="ctr"/>
-          <a:lstStyle/>
-          <a:p>
-            <a:pPr algn="ctr"/>
-          </a:p>
-        </p:txBody>
-      </p:sp>
-      <p:sp>
-        <p:nvSpPr>
-          <p:cNvPr id="12" name="Rectangle 11"/>
-          <p:cNvSpPr/>
-          <p:nvPr/>
-        </p:nvSpPr>
-        <p:spPr>
-          <a:xfrm>
-            <a:off x="720000" y="2491200"/>
-            <a:ext cx="79200" cy="756000"/>
-          </a:xfrm>
-          <a:prstGeom prst="rect">
-            <a:avLst/>
-          </a:prstGeom>
-          <a:solidFill>
-            <a:srgbClr val="2F6EBA"/>
-          </a:solidFill>
-          <a:ln>
-            <a:noFill/>
-          </a:ln>
-          <a:effectLst/>
-        </p:spPr>
-        <p:style>
-          <a:lnRef idx="1">
-            <a:schemeClr val="accent1"/>
-          </a:lnRef>
-          <a:fillRef idx="3">
-            <a:schemeClr val="accent1"/>
-          </a:fillRef>
-          <a:effectRef idx="2">
-            <a:schemeClr val="accent1"/>
-          </a:effectRef>
-          <a:fontRef idx="minor">
-            <a:schemeClr val="lt1"/>
-          </a:fontRef>
-        </p:style>
-        <p:txBody>
-          <a:bodyPr rtlCol="0" anchor="ctr"/>
-          <a:lstStyle/>
-          <a:p>
-            <a:pPr algn="ctr"/>
-          </a:p>
-        </p:txBody>
-      </p:sp>
-      <p:sp>
-        <p:nvSpPr>
-          <p:cNvPr id="13" name="TextBox 12"/>
-          <p:cNvSpPr txBox="1"/>
-          <p:nvPr/>
-        </p:nvSpPr>
-        <p:spPr>
-          <a:xfrm>
-            <a:off x="882000" y="2556000"/>
-            <a:ext cx="540000" cy="360000"/>
-          </a:xfrm>
-          <a:prstGeom prst="rect">
-            <a:avLst/>
-          </a:prstGeom>
-          <a:noFill/>
-        </p:spPr>
-        <p:txBody>
-          <a:bodyPr wrap="none">
-            <a:spAutoFit/>
-          </a:bodyPr>
-          <a:lstStyle/>
-          <a:p>
-            <a:pPr algn="l"/>
-            <a:r>
-              <a:rPr sz="1800" b="1">
-                <a:solidFill>
-                  <a:srgbClr val="2F6EBA"/>
-                </a:solidFill>
-                <a:latin typeface="Microsoft YaHei"/>
-              </a:rPr>
-              <a:t>02</a:t>
-            </a:r>
-          </a:p>
-        </p:txBody>
-      </p:sp>
-      <p:sp>
-        <p:nvSpPr>
-          <p:cNvPr id="14" name="TextBox 13"/>
-          <p:cNvSpPr txBox="1"/>
-          <p:nvPr/>
-        </p:nvSpPr>
-        <p:spPr>
-          <a:xfrm>
-            <a:off x="1296000" y="2642400"/>
-            <a:ext cx="5616000" cy="342000"/>
-          </a:xfrm>
-          <a:prstGeom prst="rect">
-            <a:avLst/>
-          </a:prstGeom>
-          <a:noFill/>
-        </p:spPr>
-        <p:txBody>
-          <a:bodyPr wrap="square">
-            <a:spAutoFit/>
-          </a:bodyPr>
-          <a:lstStyle/>
-          <a:p>
-            <a:pPr algn="l"/>
-            <a:r>
-              <a:rPr sz="1400" b="0">
-                <a:solidFill>
-                  <a:srgbClr val="222830"/>
-                </a:solidFill>
-                <a:latin typeface="Microsoft YaHei"/>
-              </a:rPr>
-              <a:t>模型与上下文都不保留跨场次状态，同类错误会反复出现</a:t>
-            </a:r>
-          </a:p>
-        </p:txBody>
-      </p:sp>
-      <p:sp>
-        <p:nvSpPr>
-          <p:cNvPr id="15" name="Rounded Rectangle 14"/>
-          <p:cNvSpPr/>
-          <p:nvPr/>
-        </p:nvSpPr>
-        <p:spPr>
-          <a:xfrm>
-            <a:off x="720000" y="3326400"/>
-            <a:ext cx="6408000" cy="756000"/>
-          </a:xfrm>
-          <a:prstGeom prst="roundRect">
-            <a:avLst>
-              <a:gd name="adj" fmla="val 8000"/>
-            </a:avLst>
-          </a:prstGeom>
-          <a:solidFill>
-            <a:srgbClr val="F2F4F8"/>
-          </a:solidFill>
-          <a:ln w="12700">
-            <a:solidFill>
-              <a:srgbClr val="C8D0DC"/>
-            </a:solidFill>
-          </a:ln>
-          <a:effectLst/>
-        </p:spPr>
-        <p:style>
-          <a:lnRef idx="1">
-            <a:schemeClr val="accent1"/>
-          </a:lnRef>
-          <a:fillRef idx="3">
-            <a:schemeClr val="accent1"/>
-          </a:fillRef>
-          <a:effectRef idx="2">
-            <a:schemeClr val="accent1"/>
-          </a:effectRef>
-          <a:fontRef idx="minor">
-            <a:schemeClr val="lt1"/>
-          </a:fontRef>
-        </p:style>
-        <p:txBody>
-          <a:bodyPr rtlCol="0" anchor="ctr"/>
-          <a:lstStyle/>
-          <a:p>
-            <a:pPr algn="ctr"/>
-          </a:p>
-        </p:txBody>
-      </p:sp>
-      <p:sp>
-        <p:nvSpPr>
-          <p:cNvPr id="16" name="Rectangle 15"/>
-          <p:cNvSpPr/>
-          <p:nvPr/>
-        </p:nvSpPr>
-        <p:spPr>
-          <a:xfrm>
-            <a:off x="720000" y="3326400"/>
-            <a:ext cx="79200" cy="756000"/>
-          </a:xfrm>
-          <a:prstGeom prst="rect">
-            <a:avLst/>
-          </a:prstGeom>
-          <a:solidFill>
-            <a:srgbClr val="2F6EBA"/>
-          </a:solidFill>
-          <a:ln>
-            <a:noFill/>
-          </a:ln>
-          <a:effectLst/>
-        </p:spPr>
-        <p:style>
-          <a:lnRef idx="1">
-            <a:schemeClr val="accent1"/>
-          </a:lnRef>
-          <a:fillRef idx="3">
-            <a:schemeClr val="accent1"/>
-          </a:fillRef>
-          <a:effectRef idx="2">
-            <a:schemeClr val="accent1"/>
-          </a:effectRef>
-          <a:fontRef idx="minor">
-            <a:schemeClr val="lt1"/>
-          </a:fontRef>
-        </p:style>
-        <p:txBody>
-          <a:bodyPr rtlCol="0" anchor="ctr"/>
-          <a:lstStyle/>
-          <a:p>
-            <a:pPr algn="ctr"/>
-          </a:p>
-        </p:txBody>
-      </p:sp>
-      <p:sp>
-        <p:nvSpPr>
-          <p:cNvPr id="17" name="TextBox 16"/>
-          <p:cNvSpPr txBox="1"/>
-          <p:nvPr/>
-        </p:nvSpPr>
-        <p:spPr>
-          <a:xfrm>
-            <a:off x="882000" y="3391200"/>
-            <a:ext cx="540000" cy="360000"/>
-          </a:xfrm>
-          <a:prstGeom prst="rect">
-            <a:avLst/>
-          </a:prstGeom>
-          <a:noFill/>
-        </p:spPr>
-        <p:txBody>
-          <a:bodyPr wrap="none">
-            <a:spAutoFit/>
-          </a:bodyPr>
-          <a:lstStyle/>
-          <a:p>
-            <a:pPr algn="l"/>
-            <a:r>
-              <a:rPr sz="1800" b="1">
-                <a:solidFill>
-                  <a:srgbClr val="2F6EBA"/>
-                </a:solidFill>
-                <a:latin typeface="Microsoft YaHei"/>
-              </a:rPr>
-              <a:t>03</a:t>
-            </a:r>
-          </a:p>
-        </p:txBody>
-      </p:sp>
-      <p:sp>
-        <p:nvSpPr>
-          <p:cNvPr id="18" name="TextBox 17"/>
-          <p:cNvSpPr txBox="1"/>
-          <p:nvPr/>
-        </p:nvSpPr>
-        <p:spPr>
-          <a:xfrm>
-            <a:off x="1296000" y="3477600"/>
-            <a:ext cx="5616000" cy="342000"/>
-          </a:xfrm>
-          <a:prstGeom prst="rect">
-            <a:avLst/>
-          </a:prstGeom>
-          <a:noFill/>
-        </p:spPr>
-        <p:txBody>
-          <a:bodyPr wrap="square">
-            <a:spAutoFit/>
-          </a:bodyPr>
-          <a:lstStyle/>
-          <a:p>
-            <a:pPr algn="l"/>
-            <a:r>
-              <a:rPr sz="1400" b="0">
-                <a:solidFill>
-                  <a:srgbClr val="222830"/>
-                </a:solidFill>
-                <a:latin typeface="Microsoft YaHei"/>
-              </a:rPr>
-              <a:t>长上下文只解决容量，RAG 只解决知识供给，均不解决经验沉淀/更新/淘汰</a:t>
-            </a:r>
-          </a:p>
-        </p:txBody>
-      </p:sp>
-      <p:sp>
-        <p:nvSpPr>
-          <p:cNvPr id="19" name="Rounded Rectangle 18"/>
-          <p:cNvSpPr/>
-          <p:nvPr/>
-        </p:nvSpPr>
-        <p:spPr>
-          <a:xfrm>
-            <a:off x="720000" y="4161600"/>
-            <a:ext cx="6408000" cy="756000"/>
-          </a:xfrm>
-          <a:prstGeom prst="roundRect">
-            <a:avLst>
-              <a:gd name="adj" fmla="val 8000"/>
-            </a:avLst>
-          </a:prstGeom>
-          <a:solidFill>
-            <a:srgbClr val="F2F4F8"/>
-          </a:solidFill>
-          <a:ln w="12700">
-            <a:solidFill>
-              <a:srgbClr val="C8D0DC"/>
-            </a:solidFill>
-          </a:ln>
-          <a:effectLst/>
-        </p:spPr>
-        <p:style>
-          <a:lnRef idx="1">
-            <a:schemeClr val="accent1"/>
-          </a:lnRef>
-          <a:fillRef idx="3">
-            <a:schemeClr val="accent1"/>
-          </a:fillRef>
-          <a:effectRef idx="2">
-            <a:schemeClr val="accent1"/>
-          </a:effectRef>
-          <a:fontRef idx="minor">
-            <a:schemeClr val="lt1"/>
-          </a:fontRef>
-        </p:style>
-        <p:txBody>
-          <a:bodyPr rtlCol="0" anchor="ctr"/>
-          <a:lstStyle/>
-          <a:p>
-            <a:pPr algn="ctr"/>
-          </a:p>
-        </p:txBody>
-      </p:sp>
-      <p:sp>
-        <p:nvSpPr>
-          <p:cNvPr id="20" name="Rectangle 19"/>
-          <p:cNvSpPr/>
-          <p:nvPr/>
-        </p:nvSpPr>
-        <p:spPr>
-          <a:xfrm>
-            <a:off x="720000" y="4161600"/>
-            <a:ext cx="79200" cy="756000"/>
-          </a:xfrm>
-          <a:prstGeom prst="rect">
-            <a:avLst/>
-          </a:prstGeom>
-          <a:solidFill>
-            <a:srgbClr val="2F6EBA"/>
-          </a:solidFill>
-          <a:ln>
-            <a:noFill/>
-          </a:ln>
-          <a:effectLst/>
-        </p:spPr>
-        <p:style>
-          <a:lnRef idx="1">
-            <a:schemeClr val="accent1"/>
-          </a:lnRef>
-          <a:fillRef idx="3">
-            <a:schemeClr val="accent1"/>
-          </a:fillRef>
-          <a:effectRef idx="2">
-            <a:schemeClr val="accent1"/>
-          </a:effectRef>
-          <a:fontRef idx="minor">
-            <a:schemeClr val="lt1"/>
-          </a:fontRef>
-        </p:style>
-        <p:txBody>
-          <a:bodyPr rtlCol="0" anchor="ctr"/>
-          <a:lstStyle/>
-          <a:p>
-            <a:pPr algn="ctr"/>
-          </a:p>
-        </p:txBody>
-      </p:sp>
-      <p:sp>
-        <p:nvSpPr>
-          <p:cNvPr id="21" name="TextBox 20"/>
-          <p:cNvSpPr txBox="1"/>
-          <p:nvPr/>
-        </p:nvSpPr>
-        <p:spPr>
-          <a:xfrm>
-            <a:off x="882000" y="4226400"/>
-            <a:ext cx="540000" cy="360000"/>
-          </a:xfrm>
-          <a:prstGeom prst="rect">
-            <a:avLst/>
-          </a:prstGeom>
-          <a:noFill/>
-        </p:spPr>
-        <p:txBody>
-          <a:bodyPr wrap="none">
-            <a:spAutoFit/>
-          </a:bodyPr>
-          <a:lstStyle/>
-          <a:p>
-            <a:pPr algn="l"/>
-            <a:r>
-              <a:rPr sz="1800" b="1">
-                <a:solidFill>
-                  <a:srgbClr val="2F6EBA"/>
-                </a:solidFill>
-                <a:latin typeface="Microsoft YaHei"/>
-              </a:rPr>
-              <a:t>04</a:t>
-            </a:r>
-          </a:p>
-        </p:txBody>
-      </p:sp>
-      <p:sp>
-        <p:nvSpPr>
-          <p:cNvPr id="22" name="TextBox 21"/>
-          <p:cNvSpPr txBox="1"/>
-          <p:nvPr/>
-        </p:nvSpPr>
-        <p:spPr>
-          <a:xfrm>
-            <a:off x="1296000" y="4215600"/>
-            <a:ext cx="5616000" cy="198000"/>
-          </a:xfrm>
-          <a:prstGeom prst="rect">
-            <a:avLst/>
-          </a:prstGeom>
-          <a:noFill/>
-        </p:spPr>
-        <p:txBody>
-          <a:bodyPr wrap="square">
-            <a:spAutoFit/>
-          </a:bodyPr>
-          <a:lstStyle/>
-          <a:p>
-            <a:pPr algn="l"/>
-            <a:r>
-              <a:rPr sz="1500" b="1">
-                <a:solidFill>
-                  <a:srgbClr val="1F3A68"/>
-                </a:solidFill>
-                <a:latin typeface="Microsoft YaHei"/>
-              </a:rPr>
-              <a:t>目标</a:t>
-            </a:r>
-          </a:p>
-        </p:txBody>
-      </p:sp>
-      <p:sp>
-        <p:nvSpPr>
-          <p:cNvPr id="23" name="TextBox 22"/>
-          <p:cNvSpPr txBox="1"/>
-          <p:nvPr/>
-        </p:nvSpPr>
-        <p:spPr>
-          <a:xfrm>
-            <a:off x="1296000" y="4420800"/>
-            <a:ext cx="5616000" cy="306000"/>
-          </a:xfrm>
-          <a:prstGeom prst="rect">
-            <a:avLst/>
-          </a:prstGeom>
-          <a:noFill/>
-        </p:spPr>
-        <p:txBody>
-          <a:bodyPr wrap="square">
-            <a:spAutoFit/>
-          </a:bodyPr>
-          <a:lstStyle/>
-          <a:p>
-            <a:pPr algn="l"/>
-            <a:r>
-              <a:rPr sz="1300" b="0">
-                <a:solidFill>
-                  <a:srgbClr val="555F6E"/>
-                </a:solidFill>
-                <a:latin typeface="Microsoft YaHei"/>
-              </a:rPr>
-              <a:t>在模型之外构建可读写、可演化、可审计的外部记忆系统</a:t>
-            </a:r>
-          </a:p>
-        </p:txBody>
-      </p:sp>
-      <p:sp>
-        <p:nvSpPr>
-          <p:cNvPr id="24" name="Rectangle 23"/>
-          <p:cNvSpPr/>
-          <p:nvPr/>
-        </p:nvSpPr>
-        <p:spPr>
-          <a:xfrm>
-            <a:off x="7703999" y="1655999"/>
-            <a:ext cx="3780000" cy="4104000"/>
-          </a:xfrm>
-          <a:prstGeom prst="rect">
-            <a:avLst/>
-          </a:prstGeom>
-          <a:solidFill>
-            <a:srgbClr val="F2F4F8"/>
-          </a:solidFill>
-          <a:ln w="15240">
-            <a:solidFill>
-              <a:srgbClr val="2F6EBA"/>
-            </a:solidFill>
-          </a:ln>
-          <a:effectLst/>
-        </p:spPr>
-        <p:style>
-          <a:lnRef idx="1">
-            <a:schemeClr val="accent1"/>
-          </a:lnRef>
-          <a:fillRef idx="3">
-            <a:schemeClr val="accent1"/>
-          </a:fillRef>
-          <a:effectRef idx="2">
-            <a:schemeClr val="accent1"/>
-          </a:effectRef>
-          <a:fontRef idx="minor">
-            <a:schemeClr val="lt1"/>
-          </a:fontRef>
-        </p:style>
-        <p:txBody>
-          <a:bodyPr rtlCol="0" anchor="ctr"/>
-          <a:lstStyle/>
-          <a:p>
-            <a:pPr algn="ctr"/>
-          </a:p>
-        </p:txBody>
-      </p:sp>
-      <p:sp>
-        <p:nvSpPr>
-          <p:cNvPr id="25" name="Rectangle 24"/>
-          <p:cNvSpPr/>
-          <p:nvPr/>
-        </p:nvSpPr>
-        <p:spPr>
-          <a:xfrm>
-            <a:off x="0" y="6606000"/>
-            <a:ext cx="12193200" cy="10800"/>
+            <a:off x="792000" y="2761199"/>
+            <a:ext cx="10620000" cy="10800"/>
           </a:xfrm>
           <a:prstGeom prst="rect">
             <a:avLst/>
@@ -25151,7 +24484,498 @@
       </p:sp>
       <p:sp>
         <p:nvSpPr>
-          <p:cNvPr id="26" name="TextBox 25"/>
+          <p:cNvPr id="10" name="TextBox 9"/>
+          <p:cNvSpPr txBox="1"/>
+          <p:nvPr/>
+        </p:nvSpPr>
+        <p:spPr>
+          <a:xfrm>
+            <a:off x="792000" y="2962799"/>
+            <a:ext cx="648000" cy="432000"/>
+          </a:xfrm>
+          <a:prstGeom prst="rect">
+            <a:avLst/>
+          </a:prstGeom>
+          <a:noFill/>
+        </p:spPr>
+        <p:txBody>
+          <a:bodyPr wrap="none">
+            <a:spAutoFit/>
+          </a:bodyPr>
+          <a:lstStyle/>
+          <a:p>
+            <a:pPr algn="l"/>
+            <a:r>
+              <a:rPr sz="2600" b="1">
+                <a:solidFill>
+                  <a:srgbClr val="2F6EBA"/>
+                </a:solidFill>
+                <a:latin typeface="Microsoft YaHei"/>
+              </a:rPr>
+              <a:t>02</a:t>
+            </a:r>
+          </a:p>
+        </p:txBody>
+      </p:sp>
+      <p:sp>
+        <p:nvSpPr>
+          <p:cNvPr id="11" name="TextBox 10"/>
+          <p:cNvSpPr txBox="1"/>
+          <p:nvPr/>
+        </p:nvSpPr>
+        <p:spPr>
+          <a:xfrm>
+            <a:off x="1512000" y="2933999"/>
+            <a:ext cx="9828000" cy="324000"/>
+          </a:xfrm>
+          <a:prstGeom prst="rect">
+            <a:avLst/>
+          </a:prstGeom>
+          <a:noFill/>
+        </p:spPr>
+        <p:txBody>
+          <a:bodyPr wrap="square">
+            <a:spAutoFit/>
+          </a:bodyPr>
+          <a:lstStyle/>
+          <a:p>
+            <a:pPr algn="l"/>
+            <a:r>
+              <a:rPr sz="2000" b="1">
+                <a:solidFill>
+                  <a:srgbClr val="1F3A68"/>
+                </a:solidFill>
+                <a:latin typeface="Microsoft YaHei"/>
+              </a:rPr>
+              <a:t>长上下文不够</a:t>
+            </a:r>
+          </a:p>
+        </p:txBody>
+      </p:sp>
+      <p:sp>
+        <p:nvSpPr>
+          <p:cNvPr id="12" name="TextBox 11"/>
+          <p:cNvSpPr txBox="1"/>
+          <p:nvPr/>
+        </p:nvSpPr>
+        <p:spPr>
+          <a:xfrm>
+            <a:off x="1512000" y="3240000"/>
+            <a:ext cx="9828000" cy="593999"/>
+          </a:xfrm>
+          <a:prstGeom prst="rect">
+            <a:avLst/>
+          </a:prstGeom>
+          <a:noFill/>
+        </p:spPr>
+        <p:txBody>
+          <a:bodyPr wrap="square">
+            <a:spAutoFit/>
+          </a:bodyPr>
+          <a:lstStyle/>
+          <a:p>
+            <a:pPr algn="l"/>
+            <a:r>
+              <a:rPr sz="1400" b="0">
+                <a:solidFill>
+                  <a:srgbClr val="555F6E"/>
+                </a:solidFill>
+                <a:latin typeface="Microsoft YaHei"/>
+              </a:rPr>
+              <a:t>扩展窗口只解决“当前提示词放得下”，窗口关闭后信息即失效；RAG 只解决外部知识供给，不解决经验如何沉淀、更新与淘汰。</a:t>
+            </a:r>
+          </a:p>
+        </p:txBody>
+      </p:sp>
+      <p:sp>
+        <p:nvSpPr>
+          <p:cNvPr id="13" name="Rectangle 12"/>
+          <p:cNvSpPr/>
+          <p:nvPr/>
+        </p:nvSpPr>
+        <p:spPr>
+          <a:xfrm>
+            <a:off x="792000" y="3895199"/>
+            <a:ext cx="10620000" cy="10800"/>
+          </a:xfrm>
+          <a:prstGeom prst="rect">
+            <a:avLst/>
+          </a:prstGeom>
+          <a:solidFill>
+            <a:srgbClr val="C8D0DC"/>
+          </a:solidFill>
+          <a:ln>
+            <a:noFill/>
+          </a:ln>
+          <a:effectLst/>
+        </p:spPr>
+        <p:style>
+          <a:lnRef idx="1">
+            <a:schemeClr val="accent1"/>
+          </a:lnRef>
+          <a:fillRef idx="3">
+            <a:schemeClr val="accent1"/>
+          </a:fillRef>
+          <a:effectRef idx="2">
+            <a:schemeClr val="accent1"/>
+          </a:effectRef>
+          <a:fontRef idx="minor">
+            <a:schemeClr val="lt1"/>
+          </a:fontRef>
+        </p:style>
+        <p:txBody>
+          <a:bodyPr rtlCol="0" anchor="ctr"/>
+          <a:lstStyle/>
+          <a:p>
+            <a:pPr algn="ctr"/>
+          </a:p>
+        </p:txBody>
+      </p:sp>
+      <p:sp>
+        <p:nvSpPr>
+          <p:cNvPr id="14" name="TextBox 13"/>
+          <p:cNvSpPr txBox="1"/>
+          <p:nvPr/>
+        </p:nvSpPr>
+        <p:spPr>
+          <a:xfrm>
+            <a:off x="792000" y="4096799"/>
+            <a:ext cx="648000" cy="432000"/>
+          </a:xfrm>
+          <a:prstGeom prst="rect">
+            <a:avLst/>
+          </a:prstGeom>
+          <a:noFill/>
+        </p:spPr>
+        <p:txBody>
+          <a:bodyPr wrap="none">
+            <a:spAutoFit/>
+          </a:bodyPr>
+          <a:lstStyle/>
+          <a:p>
+            <a:pPr algn="l"/>
+            <a:r>
+              <a:rPr sz="2600" b="1">
+                <a:solidFill>
+                  <a:srgbClr val="2F6EBA"/>
+                </a:solidFill>
+                <a:latin typeface="Microsoft YaHei"/>
+              </a:rPr>
+              <a:t>03</a:t>
+            </a:r>
+          </a:p>
+        </p:txBody>
+      </p:sp>
+      <p:sp>
+        <p:nvSpPr>
+          <p:cNvPr id="15" name="TextBox 14"/>
+          <p:cNvSpPr txBox="1"/>
+          <p:nvPr/>
+        </p:nvSpPr>
+        <p:spPr>
+          <a:xfrm>
+            <a:off x="1512000" y="4067999"/>
+            <a:ext cx="9828000" cy="324000"/>
+          </a:xfrm>
+          <a:prstGeom prst="rect">
+            <a:avLst/>
+          </a:prstGeom>
+          <a:noFill/>
+        </p:spPr>
+        <p:txBody>
+          <a:bodyPr wrap="square">
+            <a:spAutoFit/>
+          </a:bodyPr>
+          <a:lstStyle/>
+          <a:p>
+            <a:pPr algn="l"/>
+            <a:r>
+              <a:rPr sz="2000" b="1">
+                <a:solidFill>
+                  <a:srgbClr val="1F3A68"/>
+                </a:solidFill>
+                <a:latin typeface="Microsoft YaHei"/>
+              </a:rPr>
+              <a:t>模型内记忆代价高</a:t>
+            </a:r>
+          </a:p>
+        </p:txBody>
+      </p:sp>
+      <p:sp>
+        <p:nvSpPr>
+          <p:cNvPr id="16" name="TextBox 15"/>
+          <p:cNvSpPr txBox="1"/>
+          <p:nvPr/>
+        </p:nvSpPr>
+        <p:spPr>
+          <a:xfrm>
+            <a:off x="1512000" y="4373999"/>
+            <a:ext cx="9828000" cy="593999"/>
+          </a:xfrm>
+          <a:prstGeom prst="rect">
+            <a:avLst/>
+          </a:prstGeom>
+          <a:noFill/>
+        </p:spPr>
+        <p:txBody>
+          <a:bodyPr wrap="square">
+            <a:spAutoFit/>
+          </a:bodyPr>
+          <a:lstStyle/>
+          <a:p>
+            <a:pPr algn="l"/>
+            <a:r>
+              <a:rPr sz="1400" b="0">
+                <a:solidFill>
+                  <a:srgbClr val="555F6E"/>
+                </a:solidFill>
+                <a:latin typeface="Microsoft YaHei"/>
+              </a:rPr>
+              <a:t>通过微调或状态注入改变模型本身，成本高且无法审计；军事场景需要可回放、可解释的记忆操作。</a:t>
+            </a:r>
+          </a:p>
+        </p:txBody>
+      </p:sp>
+      <p:sp>
+        <p:nvSpPr>
+          <p:cNvPr id="17" name="Rectangle 16"/>
+          <p:cNvSpPr/>
+          <p:nvPr/>
+        </p:nvSpPr>
+        <p:spPr>
+          <a:xfrm>
+            <a:off x="792000" y="5029199"/>
+            <a:ext cx="10620000" cy="10800"/>
+          </a:xfrm>
+          <a:prstGeom prst="rect">
+            <a:avLst/>
+          </a:prstGeom>
+          <a:solidFill>
+            <a:srgbClr val="C8D0DC"/>
+          </a:solidFill>
+          <a:ln>
+            <a:noFill/>
+          </a:ln>
+          <a:effectLst/>
+        </p:spPr>
+        <p:style>
+          <a:lnRef idx="1">
+            <a:schemeClr val="accent1"/>
+          </a:lnRef>
+          <a:fillRef idx="3">
+            <a:schemeClr val="accent1"/>
+          </a:fillRef>
+          <a:effectRef idx="2">
+            <a:schemeClr val="accent1"/>
+          </a:effectRef>
+          <a:fontRef idx="minor">
+            <a:schemeClr val="lt1"/>
+          </a:fontRef>
+        </p:style>
+        <p:txBody>
+          <a:bodyPr rtlCol="0" anchor="ctr"/>
+          <a:lstStyle/>
+          <a:p>
+            <a:pPr algn="ctr"/>
+          </a:p>
+        </p:txBody>
+      </p:sp>
+      <p:sp>
+        <p:nvSpPr>
+          <p:cNvPr id="18" name="TextBox 17"/>
+          <p:cNvSpPr txBox="1"/>
+          <p:nvPr/>
+        </p:nvSpPr>
+        <p:spPr>
+          <a:xfrm>
+            <a:off x="792000" y="5230800"/>
+            <a:ext cx="648000" cy="432000"/>
+          </a:xfrm>
+          <a:prstGeom prst="rect">
+            <a:avLst/>
+          </a:prstGeom>
+          <a:noFill/>
+        </p:spPr>
+        <p:txBody>
+          <a:bodyPr wrap="none">
+            <a:spAutoFit/>
+          </a:bodyPr>
+          <a:lstStyle/>
+          <a:p>
+            <a:pPr algn="l"/>
+            <a:r>
+              <a:rPr sz="2600" b="1">
+                <a:solidFill>
+                  <a:srgbClr val="2F6EBA"/>
+                </a:solidFill>
+                <a:latin typeface="Microsoft YaHei"/>
+              </a:rPr>
+              <a:t>04</a:t>
+            </a:r>
+          </a:p>
+        </p:txBody>
+      </p:sp>
+      <p:sp>
+        <p:nvSpPr>
+          <p:cNvPr id="19" name="TextBox 18"/>
+          <p:cNvSpPr txBox="1"/>
+          <p:nvPr/>
+        </p:nvSpPr>
+        <p:spPr>
+          <a:xfrm>
+            <a:off x="1512000" y="5202000"/>
+            <a:ext cx="9828000" cy="324000"/>
+          </a:xfrm>
+          <a:prstGeom prst="rect">
+            <a:avLst/>
+          </a:prstGeom>
+          <a:noFill/>
+        </p:spPr>
+        <p:txBody>
+          <a:bodyPr wrap="square">
+            <a:spAutoFit/>
+          </a:bodyPr>
+          <a:lstStyle/>
+          <a:p>
+            <a:pPr algn="l"/>
+            <a:r>
+              <a:rPr sz="2000" b="1">
+                <a:solidFill>
+                  <a:srgbClr val="1F3A68"/>
+                </a:solidFill>
+                <a:latin typeface="Microsoft YaHei"/>
+              </a:rPr>
+              <a:t>目标定位</a:t>
+            </a:r>
+          </a:p>
+        </p:txBody>
+      </p:sp>
+      <p:sp>
+        <p:nvSpPr>
+          <p:cNvPr id="20" name="TextBox 19"/>
+          <p:cNvSpPr txBox="1"/>
+          <p:nvPr/>
+        </p:nvSpPr>
+        <p:spPr>
+          <a:xfrm>
+            <a:off x="1512000" y="5508000"/>
+            <a:ext cx="9828000" cy="593999"/>
+          </a:xfrm>
+          <a:prstGeom prst="rect">
+            <a:avLst/>
+          </a:prstGeom>
+          <a:noFill/>
+        </p:spPr>
+        <p:txBody>
+          <a:bodyPr wrap="square">
+            <a:spAutoFit/>
+          </a:bodyPr>
+          <a:lstStyle/>
+          <a:p>
+            <a:pPr algn="l"/>
+            <a:r>
+              <a:rPr sz="1400" b="0">
+                <a:solidFill>
+                  <a:srgbClr val="555F6E"/>
+                </a:solidFill>
+                <a:latin typeface="Microsoft YaHei"/>
+              </a:rPr>
+              <a:t>在模型之外构建可读写、可演化、可审计的外部记忆系统，以“写入-检索-更新-淘汰”为生命周期。</a:t>
+            </a:r>
+          </a:p>
+        </p:txBody>
+      </p:sp>
+      <p:sp>
+        <p:nvSpPr>
+          <p:cNvPr id="21" name="Rectangle 20"/>
+          <p:cNvSpPr/>
+          <p:nvPr/>
+        </p:nvSpPr>
+        <p:spPr>
+          <a:xfrm>
+            <a:off x="792000" y="6163199"/>
+            <a:ext cx="10620000" cy="10800"/>
+          </a:xfrm>
+          <a:prstGeom prst="rect">
+            <a:avLst/>
+          </a:prstGeom>
+          <a:solidFill>
+            <a:srgbClr val="C8D0DC"/>
+          </a:solidFill>
+          <a:ln>
+            <a:noFill/>
+          </a:ln>
+          <a:effectLst/>
+        </p:spPr>
+        <p:style>
+          <a:lnRef idx="1">
+            <a:schemeClr val="accent1"/>
+          </a:lnRef>
+          <a:fillRef idx="3">
+            <a:schemeClr val="accent1"/>
+          </a:fillRef>
+          <a:effectRef idx="2">
+            <a:schemeClr val="accent1"/>
+          </a:effectRef>
+          <a:fontRef idx="minor">
+            <a:schemeClr val="lt1"/>
+          </a:fontRef>
+        </p:style>
+        <p:txBody>
+          <a:bodyPr rtlCol="0" anchor="ctr"/>
+          <a:lstStyle/>
+          <a:p>
+            <a:pPr algn="ctr"/>
+          </a:p>
+        </p:txBody>
+      </p:sp>
+      <p:sp>
+        <p:nvSpPr>
+          <p:cNvPr id="22" name="Rectangle 21"/>
+          <p:cNvSpPr/>
+          <p:nvPr/>
+        </p:nvSpPr>
+        <p:spPr>
+          <a:xfrm>
+            <a:off x="0" y="6606000"/>
+            <a:ext cx="12193200" cy="10800"/>
+          </a:xfrm>
+          <a:prstGeom prst="rect">
+            <a:avLst/>
+          </a:prstGeom>
+          <a:solidFill>
+            <a:srgbClr val="C8D0DC"/>
+          </a:solidFill>
+          <a:ln>
+            <a:noFill/>
+          </a:ln>
+          <a:effectLst/>
+        </p:spPr>
+        <p:style>
+          <a:lnRef idx="1">
+            <a:schemeClr val="accent1"/>
+          </a:lnRef>
+          <a:fillRef idx="3">
+            <a:schemeClr val="accent1"/>
+          </a:fillRef>
+          <a:effectRef idx="2">
+            <a:schemeClr val="accent1"/>
+          </a:effectRef>
+          <a:fontRef idx="minor">
+            <a:schemeClr val="lt1"/>
+          </a:fontRef>
+        </p:style>
+        <p:txBody>
+          <a:bodyPr rtlCol="0" anchor="ctr"/>
+          <a:lstStyle/>
+          <a:p>
+            <a:pPr algn="ctr"/>
+          </a:p>
+        </p:txBody>
+      </p:sp>
+      <p:sp>
+        <p:nvSpPr>
+          <p:cNvPr id="23" name="TextBox 22"/>
           <p:cNvSpPr txBox="1"/>
           <p:nvPr/>
         </p:nvSpPr>
@@ -25186,7 +25010,7 @@
       </p:sp>
       <p:sp>
         <p:nvSpPr>
-          <p:cNvPr id="27" name="TextBox 26"/>
+          <p:cNvPr id="24" name="TextBox 23"/>
           <p:cNvSpPr txBox="1"/>
           <p:nvPr/>
         </p:nvSpPr>
@@ -25403,7 +25227,7 @@
         </p:nvSpPr>
         <p:spPr>
           <a:xfrm>
-            <a:off x="792000" y="1692000"/>
+            <a:off x="792000" y="1828800"/>
             <a:ext cx="648000" cy="432000"/>
           </a:xfrm>
           <a:prstGeom prst="rect">
@@ -25419,7 +25243,7 @@
           <a:p>
             <a:pPr algn="l"/>
             <a:r>
-              <a:rPr sz="2200" b="1">
+              <a:rPr sz="2400" b="1">
                 <a:solidFill>
                   <a:srgbClr val="2F6EBA"/>
                 </a:solidFill>
@@ -25438,8 +25262,8 @@
         </p:nvSpPr>
         <p:spPr>
           <a:xfrm>
-            <a:off x="1512000" y="1713600"/>
-            <a:ext cx="9828000" cy="216000"/>
+            <a:off x="1512000" y="1792799"/>
+            <a:ext cx="8568000" cy="288000"/>
           </a:xfrm>
           <a:prstGeom prst="rect">
             <a:avLst/>
@@ -25454,7 +25278,7 @@
           <a:p>
             <a:pPr algn="l"/>
             <a:r>
-              <a:rPr sz="1600" b="1">
+              <a:rPr sz="1800" b="1">
                 <a:solidFill>
                   <a:srgbClr val="1F3A68"/>
                 </a:solidFill>
@@ -25473,8 +25297,8 @@
         </p:nvSpPr>
         <p:spPr>
           <a:xfrm>
-            <a:off x="1512000" y="1951200"/>
-            <a:ext cx="9828000" cy="306000"/>
+            <a:off x="1512000" y="2070000"/>
+            <a:ext cx="8568000" cy="403199"/>
           </a:xfrm>
           <a:prstGeom prst="rect">
             <a:avLst/>
@@ -25489,13 +25313,13 @@
           <a:p>
             <a:pPr algn="l"/>
             <a:r>
-              <a:rPr sz="1250" b="0">
+              <a:rPr sz="1300" b="0">
                 <a:solidFill>
                   <a:srgbClr val="555F6E"/>
                 </a:solidFill>
                 <a:latin typeface="Microsoft YaHei"/>
               </a:rPr>
-              <a:t>场次间无状态传递，同样错误重复出现</a:t>
+              <a:t>场次间无状态传递；第一场在隘口遇伏，第二场可能仍未派先遣侦察，失败教训没有载体。</a:t>
             </a:r>
           </a:p>
         </p:txBody>
@@ -25508,8 +25332,54 @@
         </p:nvSpPr>
         <p:spPr>
           <a:xfrm>
-            <a:off x="792000" y="2178000"/>
-            <a:ext cx="10620000" cy="10800"/>
+            <a:off x="10260000" y="1891295"/>
+            <a:ext cx="1152000" cy="562463"/>
+          </a:xfrm>
+          <a:prstGeom prst="rect">
+            <a:avLst/>
+          </a:prstGeom>
+          <a:solidFill>
+            <a:srgbClr val="F2F4F8"/>
+          </a:solidFill>
+          <a:ln w="15240">
+            <a:solidFill>
+              <a:srgbClr val="2F6EBA"/>
+            </a:solidFill>
+          </a:ln>
+          <a:effectLst/>
+        </p:spPr>
+        <p:style>
+          <a:lnRef idx="1">
+            <a:schemeClr val="accent1"/>
+          </a:lnRef>
+          <a:fillRef idx="3">
+            <a:schemeClr val="accent1"/>
+          </a:fillRef>
+          <a:effectRef idx="2">
+            <a:schemeClr val="accent1"/>
+          </a:effectRef>
+          <a:fontRef idx="minor">
+            <a:schemeClr val="lt1"/>
+          </a:fontRef>
+        </p:style>
+        <p:txBody>
+          <a:bodyPr rtlCol="0" anchor="ctr"/>
+          <a:lstStyle/>
+          <a:p>
+            <a:pPr algn="ctr"/>
+          </a:p>
+        </p:txBody>
+      </p:sp>
+      <p:sp>
+        <p:nvSpPr>
+          <p:cNvPr id="10" name="Rectangle 9"/>
+          <p:cNvSpPr/>
+          <p:nvPr/>
+        </p:nvSpPr>
+        <p:spPr>
+          <a:xfrm>
+            <a:off x="792000" y="2545200"/>
+            <a:ext cx="10620000" cy="9000"/>
           </a:xfrm>
           <a:prstGeom prst="rect">
             <a:avLst/>
@@ -25546,13 +25416,13 @@
       </p:sp>
       <p:sp>
         <p:nvSpPr>
-          <p:cNvPr id="10" name="TextBox 9"/>
-          <p:cNvSpPr txBox="1"/>
-          <p:nvPr/>
-        </p:nvSpPr>
-        <p:spPr>
-          <a:xfrm>
-            <a:off x="792000" y="2250000"/>
+          <p:cNvPr id="11" name="TextBox 10"/>
+          <p:cNvSpPr txBox="1"/>
+          <p:nvPr/>
+        </p:nvSpPr>
+        <p:spPr>
+          <a:xfrm>
+            <a:off x="792000" y="2736000"/>
             <a:ext cx="648000" cy="432000"/>
           </a:xfrm>
           <a:prstGeom prst="rect">
@@ -25568,7 +25438,7 @@
           <a:p>
             <a:pPr algn="l"/>
             <a:r>
-              <a:rPr sz="2200" b="1">
+              <a:rPr sz="2400" b="1">
                 <a:solidFill>
                   <a:srgbClr val="2F6EBA"/>
                 </a:solidFill>
@@ -25581,14 +25451,14 @@
       </p:sp>
       <p:sp>
         <p:nvSpPr>
-          <p:cNvPr id="11" name="TextBox 10"/>
-          <p:cNvSpPr txBox="1"/>
-          <p:nvPr/>
-        </p:nvSpPr>
-        <p:spPr>
-          <a:xfrm>
-            <a:off x="1512000" y="2271600"/>
-            <a:ext cx="9828000" cy="216000"/>
+          <p:cNvPr id="12" name="TextBox 11"/>
+          <p:cNvSpPr txBox="1"/>
+          <p:nvPr/>
+        </p:nvSpPr>
+        <p:spPr>
+          <a:xfrm>
+            <a:off x="1512000" y="2699999"/>
+            <a:ext cx="8568000" cy="288000"/>
           </a:xfrm>
           <a:prstGeom prst="rect">
             <a:avLst/>
@@ -25603,7 +25473,7 @@
           <a:p>
             <a:pPr algn="l"/>
             <a:r>
-              <a:rPr sz="1600" b="1">
+              <a:rPr sz="1800" b="1">
                 <a:solidFill>
                   <a:srgbClr val="1F3A68"/>
                 </a:solidFill>
@@ -25616,14 +25486,14 @@
       </p:sp>
       <p:sp>
         <p:nvSpPr>
-          <p:cNvPr id="12" name="TextBox 11"/>
-          <p:cNvSpPr txBox="1"/>
-          <p:nvPr/>
-        </p:nvSpPr>
-        <p:spPr>
-          <a:xfrm>
-            <a:off x="1512000" y="2509200"/>
-            <a:ext cx="9828000" cy="306000"/>
+          <p:cNvPr id="13" name="TextBox 12"/>
+          <p:cNvSpPr txBox="1"/>
+          <p:nvPr/>
+        </p:nvSpPr>
+        <p:spPr>
+          <a:xfrm>
+            <a:off x="1512000" y="2977200"/>
+            <a:ext cx="8568000" cy="403199"/>
           </a:xfrm>
           <a:prstGeom prst="rect">
             <a:avLst/>
@@ -25638,27 +25508,73 @@
           <a:p>
             <a:pPr algn="l"/>
             <a:r>
-              <a:rPr sz="1250" b="0">
+              <a:rPr sz="1300" b="0">
                 <a:solidFill>
                   <a:srgbClr val="555F6E"/>
                 </a:solidFill>
                 <a:latin typeface="Microsoft YaHei"/>
               </a:rPr>
-              <a:t>粗暴截断可能丢失硬约束，规划违反约束</a:t>
-            </a:r>
-          </a:p>
-        </p:txBody>
-      </p:sp>
-      <p:sp>
-        <p:nvSpPr>
-          <p:cNvPr id="13" name="Rectangle 12"/>
+              <a:t>场内战报与硬约束同时涌入，粗暴截断可能把“禁止越境”等约束切掉，规划易合规出错。</a:t>
+            </a:r>
+          </a:p>
+        </p:txBody>
+      </p:sp>
+      <p:sp>
+        <p:nvSpPr>
+          <p:cNvPr id="14" name="Rectangle 13"/>
           <p:cNvSpPr/>
           <p:nvPr/>
         </p:nvSpPr>
         <p:spPr>
           <a:xfrm>
-            <a:off x="792000" y="2736000"/>
-            <a:ext cx="10620000" cy="10800"/>
+            <a:off x="10260000" y="2798495"/>
+            <a:ext cx="1152000" cy="562463"/>
+          </a:xfrm>
+          <a:prstGeom prst="rect">
+            <a:avLst/>
+          </a:prstGeom>
+          <a:solidFill>
+            <a:srgbClr val="F2F4F8"/>
+          </a:solidFill>
+          <a:ln w="15240">
+            <a:solidFill>
+              <a:srgbClr val="2F6EBA"/>
+            </a:solidFill>
+          </a:ln>
+          <a:effectLst/>
+        </p:spPr>
+        <p:style>
+          <a:lnRef idx="1">
+            <a:schemeClr val="accent1"/>
+          </a:lnRef>
+          <a:fillRef idx="3">
+            <a:schemeClr val="accent1"/>
+          </a:fillRef>
+          <a:effectRef idx="2">
+            <a:schemeClr val="accent1"/>
+          </a:effectRef>
+          <a:fontRef idx="minor">
+            <a:schemeClr val="lt1"/>
+          </a:fontRef>
+        </p:style>
+        <p:txBody>
+          <a:bodyPr rtlCol="0" anchor="ctr"/>
+          <a:lstStyle/>
+          <a:p>
+            <a:pPr algn="ctr"/>
+          </a:p>
+        </p:txBody>
+      </p:sp>
+      <p:sp>
+        <p:nvSpPr>
+          <p:cNvPr id="15" name="Rectangle 14"/>
+          <p:cNvSpPr/>
+          <p:nvPr/>
+        </p:nvSpPr>
+        <p:spPr>
+          <a:xfrm>
+            <a:off x="792000" y="3452400"/>
+            <a:ext cx="10620000" cy="9000"/>
           </a:xfrm>
           <a:prstGeom prst="rect">
             <a:avLst/>
@@ -25695,13 +25611,13 @@
       </p:sp>
       <p:sp>
         <p:nvSpPr>
-          <p:cNvPr id="14" name="TextBox 13"/>
-          <p:cNvSpPr txBox="1"/>
-          <p:nvPr/>
-        </p:nvSpPr>
-        <p:spPr>
-          <a:xfrm>
-            <a:off x="792000" y="2808000"/>
+          <p:cNvPr id="16" name="TextBox 15"/>
+          <p:cNvSpPr txBox="1"/>
+          <p:nvPr/>
+        </p:nvSpPr>
+        <p:spPr>
+          <a:xfrm>
+            <a:off x="792000" y="3643199"/>
             <a:ext cx="648000" cy="432000"/>
           </a:xfrm>
           <a:prstGeom prst="rect">
@@ -25717,7 +25633,7 @@
           <a:p>
             <a:pPr algn="l"/>
             <a:r>
-              <a:rPr sz="2200" b="1">
+              <a:rPr sz="2400" b="1">
                 <a:solidFill>
                   <a:srgbClr val="2F6EBA"/>
                 </a:solidFill>
@@ -25730,14 +25646,14 @@
       </p:sp>
       <p:sp>
         <p:nvSpPr>
-          <p:cNvPr id="15" name="TextBox 14"/>
-          <p:cNvSpPr txBox="1"/>
-          <p:nvPr/>
-        </p:nvSpPr>
-        <p:spPr>
-          <a:xfrm>
-            <a:off x="1512000" y="2829600"/>
-            <a:ext cx="9828000" cy="216000"/>
+          <p:cNvPr id="17" name="TextBox 16"/>
+          <p:cNvSpPr txBox="1"/>
+          <p:nvPr/>
+        </p:nvSpPr>
+        <p:spPr>
+          <a:xfrm>
+            <a:off x="1512000" y="3607200"/>
+            <a:ext cx="8568000" cy="288000"/>
           </a:xfrm>
           <a:prstGeom prst="rect">
             <a:avLst/>
@@ -25752,7 +25668,7 @@
           <a:p>
             <a:pPr algn="l"/>
             <a:r>
-              <a:rPr sz="1600" b="1">
+              <a:rPr sz="1800" b="1">
                 <a:solidFill>
                   <a:srgbClr val="1F3A68"/>
                 </a:solidFill>
@@ -25765,14 +25681,14 @@
       </p:sp>
       <p:sp>
         <p:nvSpPr>
-          <p:cNvPr id="16" name="TextBox 15"/>
-          <p:cNvSpPr txBox="1"/>
-          <p:nvPr/>
-        </p:nvSpPr>
-        <p:spPr>
-          <a:xfrm>
-            <a:off x="1512000" y="3067200"/>
-            <a:ext cx="9828000" cy="306000"/>
+          <p:cNvPr id="18" name="TextBox 17"/>
+          <p:cNvSpPr txBox="1"/>
+          <p:nvPr/>
+        </p:nvSpPr>
+        <p:spPr>
+          <a:xfrm>
+            <a:off x="1512000" y="3884399"/>
+            <a:ext cx="8568000" cy="403199"/>
           </a:xfrm>
           <a:prstGeom prst="rect">
             <a:avLst/>
@@ -25787,27 +25703,73 @@
           <a:p>
             <a:pPr algn="l"/>
             <a:r>
-              <a:rPr sz="1250" b="0">
+              <a:rPr sz="1300" b="0">
                 <a:solidFill>
                   <a:srgbClr val="555F6E"/>
                 </a:solidFill>
                 <a:latin typeface="Microsoft YaHei"/>
               </a:rPr>
-              <a:t>参数精确与经验语义同路，互相干扰</a:t>
-            </a:r>
-          </a:p>
-        </p:txBody>
-      </p:sp>
-      <p:sp>
-        <p:nvSpPr>
-          <p:cNvPr id="17" name="Rectangle 16"/>
+              <a:t>装备参数需要精确，经验教训需要语义泛化；同一路无法同时满足精确与召回。</a:t>
+            </a:r>
+          </a:p>
+        </p:txBody>
+      </p:sp>
+      <p:sp>
+        <p:nvSpPr>
+          <p:cNvPr id="19" name="Rectangle 18"/>
           <p:cNvSpPr/>
           <p:nvPr/>
         </p:nvSpPr>
         <p:spPr>
           <a:xfrm>
-            <a:off x="792000" y="3294000"/>
-            <a:ext cx="10620000" cy="10800"/>
+            <a:off x="10260000" y="3705696"/>
+            <a:ext cx="1152000" cy="562463"/>
+          </a:xfrm>
+          <a:prstGeom prst="rect">
+            <a:avLst/>
+          </a:prstGeom>
+          <a:solidFill>
+            <a:srgbClr val="F2F4F8"/>
+          </a:solidFill>
+          <a:ln w="15240">
+            <a:solidFill>
+              <a:srgbClr val="2F6EBA"/>
+            </a:solidFill>
+          </a:ln>
+          <a:effectLst/>
+        </p:spPr>
+        <p:style>
+          <a:lnRef idx="1">
+            <a:schemeClr val="accent1"/>
+          </a:lnRef>
+          <a:fillRef idx="3">
+            <a:schemeClr val="accent1"/>
+          </a:fillRef>
+          <a:effectRef idx="2">
+            <a:schemeClr val="accent1"/>
+          </a:effectRef>
+          <a:fontRef idx="minor">
+            <a:schemeClr val="lt1"/>
+          </a:fontRef>
+        </p:style>
+        <p:txBody>
+          <a:bodyPr rtlCol="0" anchor="ctr"/>
+          <a:lstStyle/>
+          <a:p>
+            <a:pPr algn="ctr"/>
+          </a:p>
+        </p:txBody>
+      </p:sp>
+      <p:sp>
+        <p:nvSpPr>
+          <p:cNvPr id="20" name="Rectangle 19"/>
+          <p:cNvSpPr/>
+          <p:nvPr/>
+        </p:nvSpPr>
+        <p:spPr>
+          <a:xfrm>
+            <a:off x="792000" y="4359600"/>
+            <a:ext cx="10620000" cy="9000"/>
           </a:xfrm>
           <a:prstGeom prst="rect">
             <a:avLst/>
@@ -25844,13 +25806,13 @@
       </p:sp>
       <p:sp>
         <p:nvSpPr>
-          <p:cNvPr id="18" name="TextBox 17"/>
-          <p:cNvSpPr txBox="1"/>
-          <p:nvPr/>
-        </p:nvSpPr>
-        <p:spPr>
-          <a:xfrm>
-            <a:off x="792000" y="3366000"/>
+          <p:cNvPr id="21" name="TextBox 20"/>
+          <p:cNvSpPr txBox="1"/>
+          <p:nvPr/>
+        </p:nvSpPr>
+        <p:spPr>
+          <a:xfrm>
+            <a:off x="792000" y="4550400"/>
             <a:ext cx="648000" cy="432000"/>
           </a:xfrm>
           <a:prstGeom prst="rect">
@@ -25866,7 +25828,7 @@
           <a:p>
             <a:pPr algn="l"/>
             <a:r>
-              <a:rPr sz="2200" b="1">
+              <a:rPr sz="2400" b="1">
                 <a:solidFill>
                   <a:srgbClr val="2F6EBA"/>
                 </a:solidFill>
@@ -25879,14 +25841,14 @@
       </p:sp>
       <p:sp>
         <p:nvSpPr>
-          <p:cNvPr id="19" name="TextBox 18"/>
-          <p:cNvSpPr txBox="1"/>
-          <p:nvPr/>
-        </p:nvSpPr>
-        <p:spPr>
-          <a:xfrm>
-            <a:off x="1512000" y="3387600"/>
-            <a:ext cx="9828000" cy="216000"/>
+          <p:cNvPr id="22" name="TextBox 21"/>
+          <p:cNvSpPr txBox="1"/>
+          <p:nvPr/>
+        </p:nvSpPr>
+        <p:spPr>
+          <a:xfrm>
+            <a:off x="1512000" y="4514400"/>
+            <a:ext cx="8568000" cy="288000"/>
           </a:xfrm>
           <a:prstGeom prst="rect">
             <a:avLst/>
@@ -25901,7 +25863,7 @@
           <a:p>
             <a:pPr algn="l"/>
             <a:r>
-              <a:rPr sz="1600" b="1">
+              <a:rPr sz="1800" b="1">
                 <a:solidFill>
                   <a:srgbClr val="1F3A68"/>
                 </a:solidFill>
@@ -25914,14 +25876,14 @@
       </p:sp>
       <p:sp>
         <p:nvSpPr>
-          <p:cNvPr id="20" name="TextBox 19"/>
-          <p:cNvSpPr txBox="1"/>
-          <p:nvPr/>
-        </p:nvSpPr>
-        <p:spPr>
-          <a:xfrm>
-            <a:off x="1512000" y="3625200"/>
-            <a:ext cx="9828000" cy="306000"/>
+          <p:cNvPr id="23" name="TextBox 22"/>
+          <p:cNvSpPr txBox="1"/>
+          <p:nvPr/>
+        </p:nvSpPr>
+        <p:spPr>
+          <a:xfrm>
+            <a:off x="1512000" y="4791600"/>
+            <a:ext cx="8568000" cy="403199"/>
           </a:xfrm>
           <a:prstGeom prst="rect">
             <a:avLst/>
@@ -25936,27 +25898,73 @@
           <a:p>
             <a:pPr algn="l"/>
             <a:r>
-              <a:rPr sz="1250" b="0">
+              <a:rPr sz="1300" b="0">
                 <a:solidFill>
                   <a:srgbClr val="555F6E"/>
                 </a:solidFill>
                 <a:latin typeface="Microsoft YaHei"/>
               </a:rPr>
-              <a:t>复盘无差别入库，长期库变成日志不可审计</a:t>
-            </a:r>
-          </a:p>
-        </p:txBody>
-      </p:sp>
-      <p:sp>
-        <p:nvSpPr>
-          <p:cNvPr id="21" name="Rectangle 20"/>
+              <a:t>复盘无差别入库让长期库积累流水账，信号被噪声淹没，且无法回答“这条为什么在库中”。</a:t>
+            </a:r>
+          </a:p>
+        </p:txBody>
+      </p:sp>
+      <p:sp>
+        <p:nvSpPr>
+          <p:cNvPr id="24" name="Rectangle 23"/>
           <p:cNvSpPr/>
           <p:nvPr/>
         </p:nvSpPr>
         <p:spPr>
           <a:xfrm>
-            <a:off x="792000" y="3851999"/>
-            <a:ext cx="10620000" cy="10800"/>
+            <a:off x="10260000" y="4612896"/>
+            <a:ext cx="1152000" cy="562463"/>
+          </a:xfrm>
+          <a:prstGeom prst="rect">
+            <a:avLst/>
+          </a:prstGeom>
+          <a:solidFill>
+            <a:srgbClr val="F2F4F8"/>
+          </a:solidFill>
+          <a:ln w="15240">
+            <a:solidFill>
+              <a:srgbClr val="2F6EBA"/>
+            </a:solidFill>
+          </a:ln>
+          <a:effectLst/>
+        </p:spPr>
+        <p:style>
+          <a:lnRef idx="1">
+            <a:schemeClr val="accent1"/>
+          </a:lnRef>
+          <a:fillRef idx="3">
+            <a:schemeClr val="accent1"/>
+          </a:fillRef>
+          <a:effectRef idx="2">
+            <a:schemeClr val="accent1"/>
+          </a:effectRef>
+          <a:fontRef idx="minor">
+            <a:schemeClr val="lt1"/>
+          </a:fontRef>
+        </p:style>
+        <p:txBody>
+          <a:bodyPr rtlCol="0" anchor="ctr"/>
+          <a:lstStyle/>
+          <a:p>
+            <a:pPr algn="ctr"/>
+          </a:p>
+        </p:txBody>
+      </p:sp>
+      <p:sp>
+        <p:nvSpPr>
+          <p:cNvPr id="25" name="Rectangle 24"/>
+          <p:cNvSpPr/>
+          <p:nvPr/>
+        </p:nvSpPr>
+        <p:spPr>
+          <a:xfrm>
+            <a:off x="792000" y="5266800"/>
+            <a:ext cx="10620000" cy="9000"/>
           </a:xfrm>
           <a:prstGeom prst="rect">
             <a:avLst/>
@@ -25993,13 +26001,13 @@
       </p:sp>
       <p:sp>
         <p:nvSpPr>
-          <p:cNvPr id="22" name="TextBox 21"/>
-          <p:cNvSpPr txBox="1"/>
-          <p:nvPr/>
-        </p:nvSpPr>
-        <p:spPr>
-          <a:xfrm>
-            <a:off x="792000" y="3924000"/>
+          <p:cNvPr id="26" name="TextBox 25"/>
+          <p:cNvSpPr txBox="1"/>
+          <p:nvPr/>
+        </p:nvSpPr>
+        <p:spPr>
+          <a:xfrm>
+            <a:off x="792000" y="5457599"/>
             <a:ext cx="648000" cy="432000"/>
           </a:xfrm>
           <a:prstGeom prst="rect">
@@ -26015,7 +26023,7 @@
           <a:p>
             <a:pPr algn="l"/>
             <a:r>
-              <a:rPr sz="2200" b="1">
+              <a:rPr sz="2400" b="1">
                 <a:solidFill>
                   <a:srgbClr val="2F6EBA"/>
                 </a:solidFill>
@@ -26028,14 +26036,14 @@
       </p:sp>
       <p:sp>
         <p:nvSpPr>
-          <p:cNvPr id="23" name="TextBox 22"/>
-          <p:cNvSpPr txBox="1"/>
-          <p:nvPr/>
-        </p:nvSpPr>
-        <p:spPr>
-          <a:xfrm>
-            <a:off x="1512000" y="3945600"/>
-            <a:ext cx="9828000" cy="216000"/>
+          <p:cNvPr id="27" name="TextBox 26"/>
+          <p:cNvSpPr txBox="1"/>
+          <p:nvPr/>
+        </p:nvSpPr>
+        <p:spPr>
+          <a:xfrm>
+            <a:off x="1512000" y="5421600"/>
+            <a:ext cx="8568000" cy="288000"/>
           </a:xfrm>
           <a:prstGeom prst="rect">
             <a:avLst/>
@@ -26050,7 +26058,7 @@
           <a:p>
             <a:pPr algn="l"/>
             <a:r>
-              <a:rPr sz="1600" b="1">
+              <a:rPr sz="1800" b="1">
                 <a:solidFill>
                   <a:srgbClr val="1F3A68"/>
                 </a:solidFill>
@@ -26063,14 +26071,14 @@
       </p:sp>
       <p:sp>
         <p:nvSpPr>
-          <p:cNvPr id="24" name="TextBox 23"/>
-          <p:cNvSpPr txBox="1"/>
-          <p:nvPr/>
-        </p:nvSpPr>
-        <p:spPr>
-          <a:xfrm>
-            <a:off x="1512000" y="4183200"/>
-            <a:ext cx="9828000" cy="306000"/>
+          <p:cNvPr id="28" name="TextBox 27"/>
+          <p:cNvSpPr txBox="1"/>
+          <p:nvPr/>
+        </p:nvSpPr>
+        <p:spPr>
+          <a:xfrm>
+            <a:off x="1512000" y="5698799"/>
+            <a:ext cx="8568000" cy="403199"/>
           </a:xfrm>
           <a:prstGeom prst="rect">
             <a:avLst/>
@@ -26085,27 +26093,73 @@
           <a:p>
             <a:pPr algn="l"/>
             <a:r>
-              <a:rPr sz="1250" b="0">
+              <a:rPr sz="1300" b="0">
                 <a:solidFill>
                   <a:srgbClr val="555F6E"/>
                 </a:solidFill>
                 <a:latin typeface="Microsoft YaHei"/>
               </a:rPr>
-              <a:t>直接用任务目标文本查询，语义信息量不足</a:t>
-            </a:r>
-          </a:p>
-        </p:txBody>
-      </p:sp>
-      <p:sp>
-        <p:nvSpPr>
-          <p:cNvPr id="25" name="Rectangle 24"/>
+              <a:t>直接用任务目标一句话查询信息量太薄，规划不同阶段需要的记忆类型不同。</a:t>
+            </a:r>
+          </a:p>
+        </p:txBody>
+      </p:sp>
+      <p:sp>
+        <p:nvSpPr>
+          <p:cNvPr id="29" name="Rectangle 28"/>
           <p:cNvSpPr/>
           <p:nvPr/>
         </p:nvSpPr>
         <p:spPr>
           <a:xfrm>
-            <a:off x="792000" y="4410000"/>
-            <a:ext cx="10620000" cy="10800"/>
+            <a:off x="10260000" y="5520096"/>
+            <a:ext cx="1152000" cy="562463"/>
+          </a:xfrm>
+          <a:prstGeom prst="rect">
+            <a:avLst/>
+          </a:prstGeom>
+          <a:solidFill>
+            <a:srgbClr val="F2F4F8"/>
+          </a:solidFill>
+          <a:ln w="15240">
+            <a:solidFill>
+              <a:srgbClr val="2F6EBA"/>
+            </a:solidFill>
+          </a:ln>
+          <a:effectLst/>
+        </p:spPr>
+        <p:style>
+          <a:lnRef idx="1">
+            <a:schemeClr val="accent1"/>
+          </a:lnRef>
+          <a:fillRef idx="3">
+            <a:schemeClr val="accent1"/>
+          </a:fillRef>
+          <a:effectRef idx="2">
+            <a:schemeClr val="accent1"/>
+          </a:effectRef>
+          <a:fontRef idx="minor">
+            <a:schemeClr val="lt1"/>
+          </a:fontRef>
+        </p:style>
+        <p:txBody>
+          <a:bodyPr rtlCol="0" anchor="ctr"/>
+          <a:lstStyle/>
+          <a:p>
+            <a:pPr algn="ctr"/>
+          </a:p>
+        </p:txBody>
+      </p:sp>
+      <p:sp>
+        <p:nvSpPr>
+          <p:cNvPr id="30" name="Rectangle 29"/>
+          <p:cNvSpPr/>
+          <p:nvPr/>
+        </p:nvSpPr>
+        <p:spPr>
+          <a:xfrm>
+            <a:off x="792000" y="6173999"/>
+            <a:ext cx="10620000" cy="9000"/>
           </a:xfrm>
           <a:prstGeom prst="rect">
             <a:avLst/>
@@ -26142,7 +26196,7 @@
       </p:sp>
       <p:sp>
         <p:nvSpPr>
-          <p:cNvPr id="26" name="Rectangle 25"/>
+          <p:cNvPr id="31" name="Rectangle 30"/>
           <p:cNvSpPr/>
           <p:nvPr/>
         </p:nvSpPr>
@@ -26186,7 +26240,7 @@
       </p:sp>
       <p:sp>
         <p:nvSpPr>
-          <p:cNvPr id="27" name="TextBox 26"/>
+          <p:cNvPr id="32" name="TextBox 31"/>
           <p:cNvSpPr txBox="1"/>
           <p:nvPr/>
         </p:nvSpPr>
@@ -26221,7 +26275,7 @@
       </p:sp>
       <p:sp>
         <p:nvSpPr>
-          <p:cNvPr id="28" name="TextBox 27"/>
+          <p:cNvPr id="33" name="TextBox 32"/>
           <p:cNvSpPr txBox="1"/>
           <p:nvPr/>
         </p:nvSpPr>
@@ -26432,14 +26486,62 @@
       </p:sp>
       <p:sp>
         <p:nvSpPr>
-          <p:cNvPr id="6" name="TextBox 5"/>
-          <p:cNvSpPr txBox="1"/>
-          <p:nvPr/>
-        </p:nvSpPr>
-        <p:spPr>
-          <a:xfrm>
-            <a:off x="792000" y="1692000"/>
-            <a:ext cx="648000" cy="432000"/>
+          <p:cNvPr id="6" name="Rounded Rectangle 5"/>
+          <p:cNvSpPr/>
+          <p:nvPr/>
+        </p:nvSpPr>
+        <p:spPr>
+          <a:xfrm>
+            <a:off x="792000" y="1814400"/>
+            <a:ext cx="1296000" cy="684000"/>
+          </a:xfrm>
+          <a:prstGeom prst="roundRect">
+            <a:avLst>
+              <a:gd name="adj" fmla="val 8000"/>
+            </a:avLst>
+          </a:prstGeom>
+          <a:solidFill>
+            <a:srgbClr val="E7EFF9"/>
+          </a:solidFill>
+          <a:ln w="12700">
+            <a:solidFill>
+              <a:srgbClr val="C8D0DC"/>
+            </a:solidFill>
+          </a:ln>
+          <a:effectLst/>
+        </p:spPr>
+        <p:style>
+          <a:lnRef idx="1">
+            <a:schemeClr val="accent1"/>
+          </a:lnRef>
+          <a:fillRef idx="3">
+            <a:schemeClr val="accent1"/>
+          </a:fillRef>
+          <a:effectRef idx="2">
+            <a:schemeClr val="accent1"/>
+          </a:effectRef>
+          <a:fontRef idx="minor">
+            <a:schemeClr val="lt1"/>
+          </a:fontRef>
+        </p:style>
+        <p:txBody>
+          <a:bodyPr rtlCol="0" anchor="ctr"/>
+          <a:lstStyle/>
+          <a:p>
+            <a:pPr algn="ctr"/>
+          </a:p>
+        </p:txBody>
+      </p:sp>
+      <p:sp>
+        <p:nvSpPr>
+          <p:cNvPr id="7" name="TextBox 6"/>
+          <p:cNvSpPr txBox="1"/>
+          <p:nvPr/>
+        </p:nvSpPr>
+        <p:spPr>
+          <a:xfrm>
+            <a:off x="864000" y="1936800"/>
+            <a:ext cx="1152000" cy="432000"/>
           </a:xfrm>
           <a:prstGeom prst="rect">
             <a:avLst/>
@@ -26452,29 +26554,64 @@
           </a:bodyPr>
           <a:lstStyle/>
           <a:p>
-            <a:pPr algn="l"/>
-            <a:r>
-              <a:rPr sz="2200" b="1">
+            <a:pPr algn="ctr"/>
+            <a:r>
+              <a:rPr sz="1800" b="1">
                 <a:solidFill>
                   <a:srgbClr val="2F6EBA"/>
                 </a:solidFill>
                 <a:latin typeface="Microsoft YaHei"/>
               </a:rPr>
-              <a:t>01</a:t>
-            </a:r>
-          </a:p>
-        </p:txBody>
-      </p:sp>
-      <p:sp>
-        <p:nvSpPr>
-          <p:cNvPr id="7" name="TextBox 6"/>
-          <p:cNvSpPr txBox="1"/>
-          <p:nvPr/>
-        </p:nvSpPr>
-        <p:spPr>
-          <a:xfrm>
-            <a:off x="1512000" y="1713600"/>
-            <a:ext cx="9828000" cy="216000"/>
+              <a:t>P1/P5</a:t>
+            </a:r>
+          </a:p>
+        </p:txBody>
+      </p:sp>
+      <p:sp>
+        <p:nvSpPr>
+          <p:cNvPr id="8" name="TextBox 7"/>
+          <p:cNvSpPr txBox="1"/>
+          <p:nvPr/>
+        </p:nvSpPr>
+        <p:spPr>
+          <a:xfrm>
+            <a:off x="2232000" y="1853999"/>
+            <a:ext cx="360000" cy="503999"/>
+          </a:xfrm>
+          <a:prstGeom prst="rect">
+            <a:avLst/>
+          </a:prstGeom>
+          <a:noFill/>
+        </p:spPr>
+        <p:txBody>
+          <a:bodyPr wrap="none">
+            <a:spAutoFit/>
+          </a:bodyPr>
+          <a:lstStyle/>
+          <a:p>
+            <a:pPr algn="l"/>
+            <a:r>
+              <a:rPr sz="2800" b="1">
+                <a:solidFill>
+                  <a:srgbClr val="2F6EBA"/>
+                </a:solidFill>
+                <a:latin typeface="Microsoft YaHei"/>
+              </a:rPr>
+              <a:t>→</a:t>
+            </a:r>
+          </a:p>
+        </p:txBody>
+      </p:sp>
+      <p:sp>
+        <p:nvSpPr>
+          <p:cNvPr id="9" name="TextBox 8"/>
+          <p:cNvSpPr txBox="1"/>
+          <p:nvPr/>
+        </p:nvSpPr>
+        <p:spPr>
+          <a:xfrm>
+            <a:off x="2664000" y="1782000"/>
+            <a:ext cx="7523999" cy="324000"/>
           </a:xfrm>
           <a:prstGeom prst="rect">
             <a:avLst/>
@@ -26489,7 +26626,7 @@
           <a:p>
             <a:pPr algn="l"/>
             <a:r>
-              <a:rPr sz="1600" b="1">
+              <a:rPr sz="1900" b="1">
                 <a:solidFill>
                   <a:srgbClr val="1F3A68"/>
                 </a:solidFill>
@@ -26502,14 +26639,14 @@
       </p:sp>
       <p:sp>
         <p:nvSpPr>
-          <p:cNvPr id="8" name="TextBox 7"/>
-          <p:cNvSpPr txBox="1"/>
-          <p:nvPr/>
-        </p:nvSpPr>
-        <p:spPr>
-          <a:xfrm>
-            <a:off x="1512000" y="1951200"/>
-            <a:ext cx="9828000" cy="306000"/>
+          <p:cNvPr id="10" name="TextBox 9"/>
+          <p:cNvSpPr txBox="1"/>
+          <p:nvPr/>
+        </p:nvSpPr>
+        <p:spPr>
+          <a:xfrm>
+            <a:off x="2664000" y="2095200"/>
+            <a:ext cx="7523999" cy="367199"/>
           </a:xfrm>
           <a:prstGeom prst="rect">
             <a:avLst/>
@@ -26524,27 +26661,73 @@
           <a:p>
             <a:pPr algn="l"/>
             <a:r>
-              <a:rPr sz="1250" b="0">
+              <a:rPr sz="1350" b="0">
                 <a:solidFill>
                   <a:srgbClr val="555F6E"/>
                 </a:solidFill>
                 <a:latin typeface="Microsoft YaHei"/>
               </a:rPr>
-              <a:t>事实/经验分库是否带来可测召回增益</a:t>
-            </a:r>
-          </a:p>
-        </p:txBody>
-      </p:sp>
-      <p:sp>
-        <p:nvSpPr>
-          <p:cNvPr id="9" name="Rectangle 8"/>
+              <a:t>事实/经验分库是否在固定用例集上带来可测召回增益？对应 G2 vs G3 消融。</a:t>
+            </a:r>
+          </a:p>
+        </p:txBody>
+      </p:sp>
+      <p:sp>
+        <p:nvSpPr>
+          <p:cNvPr id="11" name="Rectangle 10"/>
           <p:cNvSpPr/>
           <p:nvPr/>
         </p:nvSpPr>
         <p:spPr>
           <a:xfrm>
-            <a:off x="792000" y="2178000"/>
-            <a:ext cx="10620000" cy="10800"/>
+            <a:off x="10332000" y="1872000"/>
+            <a:ext cx="1080000" cy="544319"/>
+          </a:xfrm>
+          <a:prstGeom prst="rect">
+            <a:avLst/>
+          </a:prstGeom>
+          <a:solidFill>
+            <a:srgbClr val="F2F4F8"/>
+          </a:solidFill>
+          <a:ln w="15240">
+            <a:solidFill>
+              <a:srgbClr val="2F6EBA"/>
+            </a:solidFill>
+          </a:ln>
+          <a:effectLst/>
+        </p:spPr>
+        <p:style>
+          <a:lnRef idx="1">
+            <a:schemeClr val="accent1"/>
+          </a:lnRef>
+          <a:fillRef idx="3">
+            <a:schemeClr val="accent1"/>
+          </a:fillRef>
+          <a:effectRef idx="2">
+            <a:schemeClr val="accent1"/>
+          </a:effectRef>
+          <a:fontRef idx="minor">
+            <a:schemeClr val="lt1"/>
+          </a:fontRef>
+        </p:style>
+        <p:txBody>
+          <a:bodyPr rtlCol="0" anchor="ctr"/>
+          <a:lstStyle/>
+          <a:p>
+            <a:pPr algn="ctr"/>
+          </a:p>
+        </p:txBody>
+      </p:sp>
+      <p:sp>
+        <p:nvSpPr>
+          <p:cNvPr id="12" name="Rectangle 11"/>
+          <p:cNvSpPr/>
+          <p:nvPr/>
+        </p:nvSpPr>
+        <p:spPr>
+          <a:xfrm>
+            <a:off x="792000" y="2556000"/>
+            <a:ext cx="10620000" cy="9000"/>
           </a:xfrm>
           <a:prstGeom prst="rect">
             <a:avLst/>
@@ -26581,14 +26764,62 @@
       </p:sp>
       <p:sp>
         <p:nvSpPr>
-          <p:cNvPr id="10" name="TextBox 9"/>
-          <p:cNvSpPr txBox="1"/>
-          <p:nvPr/>
-        </p:nvSpPr>
-        <p:spPr>
-          <a:xfrm>
-            <a:off x="792000" y="2250000"/>
-            <a:ext cx="648000" cy="432000"/>
+          <p:cNvPr id="13" name="Rounded Rectangle 12"/>
+          <p:cNvSpPr/>
+          <p:nvPr/>
+        </p:nvSpPr>
+        <p:spPr>
+          <a:xfrm>
+            <a:off x="792000" y="2721600"/>
+            <a:ext cx="1296000" cy="684000"/>
+          </a:xfrm>
+          <a:prstGeom prst="roundRect">
+            <a:avLst>
+              <a:gd name="adj" fmla="val 8000"/>
+            </a:avLst>
+          </a:prstGeom>
+          <a:solidFill>
+            <a:srgbClr val="E7EFF9"/>
+          </a:solidFill>
+          <a:ln w="12700">
+            <a:solidFill>
+              <a:srgbClr val="C8D0DC"/>
+            </a:solidFill>
+          </a:ln>
+          <a:effectLst/>
+        </p:spPr>
+        <p:style>
+          <a:lnRef idx="1">
+            <a:schemeClr val="accent1"/>
+          </a:lnRef>
+          <a:fillRef idx="3">
+            <a:schemeClr val="accent1"/>
+          </a:fillRef>
+          <a:effectRef idx="2">
+            <a:schemeClr val="accent1"/>
+          </a:effectRef>
+          <a:fontRef idx="minor">
+            <a:schemeClr val="lt1"/>
+          </a:fontRef>
+        </p:style>
+        <p:txBody>
+          <a:bodyPr rtlCol="0" anchor="ctr"/>
+          <a:lstStyle/>
+          <a:p>
+            <a:pPr algn="ctr"/>
+          </a:p>
+        </p:txBody>
+      </p:sp>
+      <p:sp>
+        <p:nvSpPr>
+          <p:cNvPr id="14" name="TextBox 13"/>
+          <p:cNvSpPr txBox="1"/>
+          <p:nvPr/>
+        </p:nvSpPr>
+        <p:spPr>
+          <a:xfrm>
+            <a:off x="864000" y="2844000"/>
+            <a:ext cx="1152000" cy="432000"/>
           </a:xfrm>
           <a:prstGeom prst="rect">
             <a:avLst/>
@@ -26601,29 +26832,64 @@
           </a:bodyPr>
           <a:lstStyle/>
           <a:p>
-            <a:pPr algn="l"/>
-            <a:r>
-              <a:rPr sz="2200" b="1">
+            <a:pPr algn="ctr"/>
+            <a:r>
+              <a:rPr sz="1800" b="1">
                 <a:solidFill>
                   <a:srgbClr val="2F6EBA"/>
                 </a:solidFill>
                 <a:latin typeface="Microsoft YaHei"/>
               </a:rPr>
-              <a:t>02</a:t>
-            </a:r>
-          </a:p>
-        </p:txBody>
-      </p:sp>
-      <p:sp>
-        <p:nvSpPr>
-          <p:cNvPr id="11" name="TextBox 10"/>
-          <p:cNvSpPr txBox="1"/>
-          <p:nvPr/>
-        </p:nvSpPr>
-        <p:spPr>
-          <a:xfrm>
-            <a:off x="1512000" y="2271600"/>
-            <a:ext cx="9828000" cy="216000"/>
+              <a:t>P1</a:t>
+            </a:r>
+          </a:p>
+        </p:txBody>
+      </p:sp>
+      <p:sp>
+        <p:nvSpPr>
+          <p:cNvPr id="15" name="TextBox 14"/>
+          <p:cNvSpPr txBox="1"/>
+          <p:nvPr/>
+        </p:nvSpPr>
+        <p:spPr>
+          <a:xfrm>
+            <a:off x="2232000" y="2761199"/>
+            <a:ext cx="360000" cy="503999"/>
+          </a:xfrm>
+          <a:prstGeom prst="rect">
+            <a:avLst/>
+          </a:prstGeom>
+          <a:noFill/>
+        </p:spPr>
+        <p:txBody>
+          <a:bodyPr wrap="none">
+            <a:spAutoFit/>
+          </a:bodyPr>
+          <a:lstStyle/>
+          <a:p>
+            <a:pPr algn="l"/>
+            <a:r>
+              <a:rPr sz="2800" b="1">
+                <a:solidFill>
+                  <a:srgbClr val="2F6EBA"/>
+                </a:solidFill>
+                <a:latin typeface="Microsoft YaHei"/>
+              </a:rPr>
+              <a:t>→</a:t>
+            </a:r>
+          </a:p>
+        </p:txBody>
+      </p:sp>
+      <p:sp>
+        <p:nvSpPr>
+          <p:cNvPr id="16" name="TextBox 15"/>
+          <p:cNvSpPr txBox="1"/>
+          <p:nvPr/>
+        </p:nvSpPr>
+        <p:spPr>
+          <a:xfrm>
+            <a:off x="2664000" y="2689200"/>
+            <a:ext cx="7523999" cy="324000"/>
           </a:xfrm>
           <a:prstGeom prst="rect">
             <a:avLst/>
@@ -26638,7 +26904,7 @@
           <a:p>
             <a:pPr algn="l"/>
             <a:r>
-              <a:rPr sz="1600" b="1">
+              <a:rPr sz="1900" b="1">
                 <a:solidFill>
                   <a:srgbClr val="1F3A68"/>
                 </a:solidFill>
@@ -26651,14 +26917,14 @@
       </p:sp>
       <p:sp>
         <p:nvSpPr>
-          <p:cNvPr id="12" name="TextBox 11"/>
-          <p:cNvSpPr txBox="1"/>
-          <p:nvPr/>
-        </p:nvSpPr>
-        <p:spPr>
-          <a:xfrm>
-            <a:off x="1512000" y="2509200"/>
-            <a:ext cx="9828000" cy="306000"/>
+          <p:cNvPr id="17" name="TextBox 16"/>
+          <p:cNvSpPr txBox="1"/>
+          <p:nvPr/>
+        </p:nvSpPr>
+        <p:spPr>
+          <a:xfrm>
+            <a:off x="2664000" y="3002400"/>
+            <a:ext cx="7523999" cy="367199"/>
           </a:xfrm>
           <a:prstGeom prst="rect">
             <a:avLst/>
@@ -26673,27 +26939,73 @@
           <a:p>
             <a:pPr algn="l"/>
             <a:r>
-              <a:rPr sz="1250" b="0">
+              <a:rPr sz="1350" b="0">
                 <a:solidFill>
                   <a:srgbClr val="555F6E"/>
                 </a:solidFill>
                 <a:latin typeface="Microsoft YaHei"/>
               </a:rPr>
-              <a:t>第一场复盘能否被第二场召回</a:t>
-            </a:r>
-          </a:p>
-        </p:txBody>
-      </p:sp>
-      <p:sp>
-        <p:nvSpPr>
-          <p:cNvPr id="13" name="Rectangle 12"/>
+              <a:t>第一场复盘写入能否被第二场召回？处理组 0.833 vs 对照 0。</a:t>
+            </a:r>
+          </a:p>
+        </p:txBody>
+      </p:sp>
+      <p:sp>
+        <p:nvSpPr>
+          <p:cNvPr id="18" name="Rectangle 17"/>
           <p:cNvSpPr/>
           <p:nvPr/>
         </p:nvSpPr>
         <p:spPr>
           <a:xfrm>
-            <a:off x="792000" y="2736000"/>
-            <a:ext cx="10620000" cy="10800"/>
+            <a:off x="10332000" y="2779200"/>
+            <a:ext cx="1080000" cy="544319"/>
+          </a:xfrm>
+          <a:prstGeom prst="rect">
+            <a:avLst/>
+          </a:prstGeom>
+          <a:solidFill>
+            <a:srgbClr val="F2F4F8"/>
+          </a:solidFill>
+          <a:ln w="15240">
+            <a:solidFill>
+              <a:srgbClr val="2F6EBA"/>
+            </a:solidFill>
+          </a:ln>
+          <a:effectLst/>
+        </p:spPr>
+        <p:style>
+          <a:lnRef idx="1">
+            <a:schemeClr val="accent1"/>
+          </a:lnRef>
+          <a:fillRef idx="3">
+            <a:schemeClr val="accent1"/>
+          </a:fillRef>
+          <a:effectRef idx="2">
+            <a:schemeClr val="accent1"/>
+          </a:effectRef>
+          <a:fontRef idx="minor">
+            <a:schemeClr val="lt1"/>
+          </a:fontRef>
+        </p:style>
+        <p:txBody>
+          <a:bodyPr rtlCol="0" anchor="ctr"/>
+          <a:lstStyle/>
+          <a:p>
+            <a:pPr algn="ctr"/>
+          </a:p>
+        </p:txBody>
+      </p:sp>
+      <p:sp>
+        <p:nvSpPr>
+          <p:cNvPr id="19" name="Rectangle 18"/>
+          <p:cNvSpPr/>
+          <p:nvPr/>
+        </p:nvSpPr>
+        <p:spPr>
+          <a:xfrm>
+            <a:off x="792000" y="3463199"/>
+            <a:ext cx="10620000" cy="9000"/>
           </a:xfrm>
           <a:prstGeom prst="rect">
             <a:avLst/>
@@ -26730,14 +27042,62 @@
       </p:sp>
       <p:sp>
         <p:nvSpPr>
-          <p:cNvPr id="14" name="TextBox 13"/>
-          <p:cNvSpPr txBox="1"/>
-          <p:nvPr/>
-        </p:nvSpPr>
-        <p:spPr>
-          <a:xfrm>
-            <a:off x="792000" y="2808000"/>
-            <a:ext cx="648000" cy="432000"/>
+          <p:cNvPr id="20" name="Rounded Rectangle 19"/>
+          <p:cNvSpPr/>
+          <p:nvPr/>
+        </p:nvSpPr>
+        <p:spPr>
+          <a:xfrm>
+            <a:off x="792000" y="3628800"/>
+            <a:ext cx="1296000" cy="684000"/>
+          </a:xfrm>
+          <a:prstGeom prst="roundRect">
+            <a:avLst>
+              <a:gd name="adj" fmla="val 8000"/>
+            </a:avLst>
+          </a:prstGeom>
+          <a:solidFill>
+            <a:srgbClr val="E7EFF9"/>
+          </a:solidFill>
+          <a:ln w="12700">
+            <a:solidFill>
+              <a:srgbClr val="C8D0DC"/>
+            </a:solidFill>
+          </a:ln>
+          <a:effectLst/>
+        </p:spPr>
+        <p:style>
+          <a:lnRef idx="1">
+            <a:schemeClr val="accent1"/>
+          </a:lnRef>
+          <a:fillRef idx="3">
+            <a:schemeClr val="accent1"/>
+          </a:fillRef>
+          <a:effectRef idx="2">
+            <a:schemeClr val="accent1"/>
+          </a:effectRef>
+          <a:fontRef idx="minor">
+            <a:schemeClr val="lt1"/>
+          </a:fontRef>
+        </p:style>
+        <p:txBody>
+          <a:bodyPr rtlCol="0" anchor="ctr"/>
+          <a:lstStyle/>
+          <a:p>
+            <a:pPr algn="ctr"/>
+          </a:p>
+        </p:txBody>
+      </p:sp>
+      <p:sp>
+        <p:nvSpPr>
+          <p:cNvPr id="21" name="TextBox 20"/>
+          <p:cNvSpPr txBox="1"/>
+          <p:nvPr/>
+        </p:nvSpPr>
+        <p:spPr>
+          <a:xfrm>
+            <a:off x="864000" y="3751200"/>
+            <a:ext cx="1152000" cy="432000"/>
           </a:xfrm>
           <a:prstGeom prst="rect">
             <a:avLst/>
@@ -26750,29 +27110,64 @@
           </a:bodyPr>
           <a:lstStyle/>
           <a:p>
-            <a:pPr algn="l"/>
-            <a:r>
-              <a:rPr sz="2200" b="1">
+            <a:pPr algn="ctr"/>
+            <a:r>
+              <a:rPr sz="1800" b="1">
                 <a:solidFill>
                   <a:srgbClr val="2F6EBA"/>
                 </a:solidFill>
                 <a:latin typeface="Microsoft YaHei"/>
               </a:rPr>
-              <a:t>03</a:t>
-            </a:r>
-          </a:p>
-        </p:txBody>
-      </p:sp>
-      <p:sp>
-        <p:nvSpPr>
-          <p:cNvPr id="15" name="TextBox 14"/>
-          <p:cNvSpPr txBox="1"/>
-          <p:nvPr/>
-        </p:nvSpPr>
-        <p:spPr>
-          <a:xfrm>
-            <a:off x="1512000" y="2829600"/>
-            <a:ext cx="9828000" cy="216000"/>
+              <a:t>P3</a:t>
+            </a:r>
+          </a:p>
+        </p:txBody>
+      </p:sp>
+      <p:sp>
+        <p:nvSpPr>
+          <p:cNvPr id="22" name="TextBox 21"/>
+          <p:cNvSpPr txBox="1"/>
+          <p:nvPr/>
+        </p:nvSpPr>
+        <p:spPr>
+          <a:xfrm>
+            <a:off x="2232000" y="3668400"/>
+            <a:ext cx="360000" cy="503999"/>
+          </a:xfrm>
+          <a:prstGeom prst="rect">
+            <a:avLst/>
+          </a:prstGeom>
+          <a:noFill/>
+        </p:spPr>
+        <p:txBody>
+          <a:bodyPr wrap="none">
+            <a:spAutoFit/>
+          </a:bodyPr>
+          <a:lstStyle/>
+          <a:p>
+            <a:pPr algn="l"/>
+            <a:r>
+              <a:rPr sz="2800" b="1">
+                <a:solidFill>
+                  <a:srgbClr val="2F6EBA"/>
+                </a:solidFill>
+                <a:latin typeface="Microsoft YaHei"/>
+              </a:rPr>
+              <a:t>→</a:t>
+            </a:r>
+          </a:p>
+        </p:txBody>
+      </p:sp>
+      <p:sp>
+        <p:nvSpPr>
+          <p:cNvPr id="23" name="TextBox 22"/>
+          <p:cNvSpPr txBox="1"/>
+          <p:nvPr/>
+        </p:nvSpPr>
+        <p:spPr>
+          <a:xfrm>
+            <a:off x="2664000" y="3596400"/>
+            <a:ext cx="7523999" cy="324000"/>
           </a:xfrm>
           <a:prstGeom prst="rect">
             <a:avLst/>
@@ -26787,7 +27182,7 @@
           <a:p>
             <a:pPr algn="l"/>
             <a:r>
-              <a:rPr sz="1600" b="1">
+              <a:rPr sz="1900" b="1">
                 <a:solidFill>
                   <a:srgbClr val="1F3A68"/>
                 </a:solidFill>
@@ -26800,14 +27195,14 @@
       </p:sp>
       <p:sp>
         <p:nvSpPr>
-          <p:cNvPr id="16" name="TextBox 15"/>
-          <p:cNvSpPr txBox="1"/>
-          <p:nvPr/>
-        </p:nvSpPr>
-        <p:spPr>
-          <a:xfrm>
-            <a:off x="1512000" y="3067200"/>
-            <a:ext cx="9828000" cy="306000"/>
+          <p:cNvPr id="24" name="TextBox 23"/>
+          <p:cNvSpPr txBox="1"/>
+          <p:nvPr/>
+        </p:nvSpPr>
+        <p:spPr>
+          <a:xfrm>
+            <a:off x="2664000" y="3909600"/>
+            <a:ext cx="7523999" cy="367199"/>
           </a:xfrm>
           <a:prstGeom prst="rect">
             <a:avLst/>
@@ -26822,27 +27217,73 @@
           <a:p>
             <a:pPr algn="l"/>
             <a:r>
-              <a:rPr sz="1250" b="0">
+              <a:rPr sz="1350" b="0">
                 <a:solidFill>
                   <a:srgbClr val="555F6E"/>
                 </a:solidFill>
                 <a:latin typeface="Microsoft YaHei"/>
               </a:rPr>
-              <a:t>三路融合相对单路是否有增益</a:t>
-            </a:r>
-          </a:p>
-        </p:txBody>
-      </p:sp>
-      <p:sp>
-        <p:nvSpPr>
-          <p:cNvPr id="17" name="Rectangle 16"/>
+              <a:t>三路融合相对单路是否有增益？词袋下召回未胜出，排序/干扰压制更好。</a:t>
+            </a:r>
+          </a:p>
+        </p:txBody>
+      </p:sp>
+      <p:sp>
+        <p:nvSpPr>
+          <p:cNvPr id="25" name="Rectangle 24"/>
           <p:cNvSpPr/>
           <p:nvPr/>
         </p:nvSpPr>
         <p:spPr>
           <a:xfrm>
-            <a:off x="792000" y="3294000"/>
-            <a:ext cx="10620000" cy="10800"/>
+            <a:off x="10332000" y="3686400"/>
+            <a:ext cx="1080000" cy="544319"/>
+          </a:xfrm>
+          <a:prstGeom prst="rect">
+            <a:avLst/>
+          </a:prstGeom>
+          <a:solidFill>
+            <a:srgbClr val="F2F4F8"/>
+          </a:solidFill>
+          <a:ln w="15240">
+            <a:solidFill>
+              <a:srgbClr val="2F6EBA"/>
+            </a:solidFill>
+          </a:ln>
+          <a:effectLst/>
+        </p:spPr>
+        <p:style>
+          <a:lnRef idx="1">
+            <a:schemeClr val="accent1"/>
+          </a:lnRef>
+          <a:fillRef idx="3">
+            <a:schemeClr val="accent1"/>
+          </a:fillRef>
+          <a:effectRef idx="2">
+            <a:schemeClr val="accent1"/>
+          </a:effectRef>
+          <a:fontRef idx="minor">
+            <a:schemeClr val="lt1"/>
+          </a:fontRef>
+        </p:style>
+        <p:txBody>
+          <a:bodyPr rtlCol="0" anchor="ctr"/>
+          <a:lstStyle/>
+          <a:p>
+            <a:pPr algn="ctr"/>
+          </a:p>
+        </p:txBody>
+      </p:sp>
+      <p:sp>
+        <p:nvSpPr>
+          <p:cNvPr id="26" name="Rectangle 25"/>
+          <p:cNvSpPr/>
+          <p:nvPr/>
+        </p:nvSpPr>
+        <p:spPr>
+          <a:xfrm>
+            <a:off x="792000" y="4370400"/>
+            <a:ext cx="10620000" cy="9000"/>
           </a:xfrm>
           <a:prstGeom prst="rect">
             <a:avLst/>
@@ -26879,14 +27320,62 @@
       </p:sp>
       <p:sp>
         <p:nvSpPr>
-          <p:cNvPr id="18" name="TextBox 17"/>
-          <p:cNvSpPr txBox="1"/>
-          <p:nvPr/>
-        </p:nvSpPr>
-        <p:spPr>
-          <a:xfrm>
-            <a:off x="792000" y="3366000"/>
-            <a:ext cx="648000" cy="432000"/>
+          <p:cNvPr id="27" name="Rounded Rectangle 26"/>
+          <p:cNvSpPr/>
+          <p:nvPr/>
+        </p:nvSpPr>
+        <p:spPr>
+          <a:xfrm>
+            <a:off x="792000" y="4536000"/>
+            <a:ext cx="1296000" cy="684000"/>
+          </a:xfrm>
+          <a:prstGeom prst="roundRect">
+            <a:avLst>
+              <a:gd name="adj" fmla="val 8000"/>
+            </a:avLst>
+          </a:prstGeom>
+          <a:solidFill>
+            <a:srgbClr val="E7EFF9"/>
+          </a:solidFill>
+          <a:ln w="12700">
+            <a:solidFill>
+              <a:srgbClr val="C8D0DC"/>
+            </a:solidFill>
+          </a:ln>
+          <a:effectLst/>
+        </p:spPr>
+        <p:style>
+          <a:lnRef idx="1">
+            <a:schemeClr val="accent1"/>
+          </a:lnRef>
+          <a:fillRef idx="3">
+            <a:schemeClr val="accent1"/>
+          </a:fillRef>
+          <a:effectRef idx="2">
+            <a:schemeClr val="accent1"/>
+          </a:effectRef>
+          <a:fontRef idx="minor">
+            <a:schemeClr val="lt1"/>
+          </a:fontRef>
+        </p:style>
+        <p:txBody>
+          <a:bodyPr rtlCol="0" anchor="ctr"/>
+          <a:lstStyle/>
+          <a:p>
+            <a:pPr algn="ctr"/>
+          </a:p>
+        </p:txBody>
+      </p:sp>
+      <p:sp>
+        <p:nvSpPr>
+          <p:cNvPr id="28" name="TextBox 27"/>
+          <p:cNvSpPr txBox="1"/>
+          <p:nvPr/>
+        </p:nvSpPr>
+        <p:spPr>
+          <a:xfrm>
+            <a:off x="864000" y="4658400"/>
+            <a:ext cx="1152000" cy="432000"/>
           </a:xfrm>
           <a:prstGeom prst="rect">
             <a:avLst/>
@@ -26899,29 +27388,64 @@
           </a:bodyPr>
           <a:lstStyle/>
           <a:p>
-            <a:pPr algn="l"/>
-            <a:r>
-              <a:rPr sz="2200" b="1">
+            <a:pPr algn="ctr"/>
+            <a:r>
+              <a:rPr sz="1800" b="1">
                 <a:solidFill>
                   <a:srgbClr val="2F6EBA"/>
                 </a:solidFill>
                 <a:latin typeface="Microsoft YaHei"/>
               </a:rPr>
-              <a:t>04</a:t>
-            </a:r>
-          </a:p>
-        </p:txBody>
-      </p:sp>
-      <p:sp>
-        <p:nvSpPr>
-          <p:cNvPr id="19" name="TextBox 18"/>
-          <p:cNvSpPr txBox="1"/>
-          <p:nvPr/>
-        </p:nvSpPr>
-        <p:spPr>
-          <a:xfrm>
-            <a:off x="1512000" y="3387600"/>
-            <a:ext cx="9828000" cy="216000"/>
+              <a:t>P2/P4</a:t>
+            </a:r>
+          </a:p>
+        </p:txBody>
+      </p:sp>
+      <p:sp>
+        <p:nvSpPr>
+          <p:cNvPr id="29" name="TextBox 28"/>
+          <p:cNvSpPr txBox="1"/>
+          <p:nvPr/>
+        </p:nvSpPr>
+        <p:spPr>
+          <a:xfrm>
+            <a:off x="2232000" y="4575600"/>
+            <a:ext cx="360000" cy="503999"/>
+          </a:xfrm>
+          <a:prstGeom prst="rect">
+            <a:avLst/>
+          </a:prstGeom>
+          <a:noFill/>
+        </p:spPr>
+        <p:txBody>
+          <a:bodyPr wrap="none">
+            <a:spAutoFit/>
+          </a:bodyPr>
+          <a:lstStyle/>
+          <a:p>
+            <a:pPr algn="l"/>
+            <a:r>
+              <a:rPr sz="2800" b="1">
+                <a:solidFill>
+                  <a:srgbClr val="2F6EBA"/>
+                </a:solidFill>
+                <a:latin typeface="Microsoft YaHei"/>
+              </a:rPr>
+              <a:t>→</a:t>
+            </a:r>
+          </a:p>
+        </p:txBody>
+      </p:sp>
+      <p:sp>
+        <p:nvSpPr>
+          <p:cNvPr id="30" name="TextBox 29"/>
+          <p:cNvSpPr txBox="1"/>
+          <p:nvPr/>
+        </p:nvSpPr>
+        <p:spPr>
+          <a:xfrm>
+            <a:off x="2664000" y="4503600"/>
+            <a:ext cx="7523999" cy="324000"/>
           </a:xfrm>
           <a:prstGeom prst="rect">
             <a:avLst/>
@@ -26936,7 +27460,7 @@
           <a:p>
             <a:pPr algn="l"/>
             <a:r>
-              <a:rPr sz="1600" b="1">
+              <a:rPr sz="1900" b="1">
                 <a:solidFill>
                   <a:srgbClr val="1F3A68"/>
                 </a:solidFill>
@@ -26949,14 +27473,14 @@
       </p:sp>
       <p:sp>
         <p:nvSpPr>
-          <p:cNvPr id="20" name="TextBox 19"/>
-          <p:cNvSpPr txBox="1"/>
-          <p:nvPr/>
-        </p:nvSpPr>
-        <p:spPr>
-          <a:xfrm>
-            <a:off x="1512000" y="3625200"/>
-            <a:ext cx="9828000" cy="306000"/>
+          <p:cNvPr id="31" name="TextBox 30"/>
+          <p:cNvSpPr txBox="1"/>
+          <p:nvPr/>
+        </p:nvSpPr>
+        <p:spPr>
+          <a:xfrm>
+            <a:off x="2664000" y="4816800"/>
+            <a:ext cx="7523999" cy="367199"/>
           </a:xfrm>
           <a:prstGeom prst="rect">
             <a:avLst/>
@@ -26971,27 +27495,73 @@
           <a:p>
             <a:pPr algn="l"/>
             <a:r>
-              <a:rPr sz="1250" b="0">
+              <a:rPr sz="1350" b="0">
                 <a:solidFill>
                   <a:srgbClr val="555F6E"/>
                 </a:solidFill>
                 <a:latin typeface="Microsoft YaHei"/>
               </a:rPr>
-              <a:t>阈值能否滤噪、遗忘是否不误删</a:t>
-            </a:r>
-          </a:p>
-        </p:txBody>
-      </p:sp>
-      <p:sp>
-        <p:nvSpPr>
-          <p:cNvPr id="21" name="Rectangle 20"/>
+              <a:t>阈值能否滤除负例、遗忘是否不误删保护记忆？</a:t>
+            </a:r>
+          </a:p>
+        </p:txBody>
+      </p:sp>
+      <p:sp>
+        <p:nvSpPr>
+          <p:cNvPr id="32" name="Rectangle 31"/>
           <p:cNvSpPr/>
           <p:nvPr/>
         </p:nvSpPr>
         <p:spPr>
           <a:xfrm>
-            <a:off x="792000" y="3851999"/>
-            <a:ext cx="10620000" cy="10800"/>
+            <a:off x="10332000" y="4593600"/>
+            <a:ext cx="1080000" cy="544319"/>
+          </a:xfrm>
+          <a:prstGeom prst="rect">
+            <a:avLst/>
+          </a:prstGeom>
+          <a:solidFill>
+            <a:srgbClr val="F2F4F8"/>
+          </a:solidFill>
+          <a:ln w="15240">
+            <a:solidFill>
+              <a:srgbClr val="2F6EBA"/>
+            </a:solidFill>
+          </a:ln>
+          <a:effectLst/>
+        </p:spPr>
+        <p:style>
+          <a:lnRef idx="1">
+            <a:schemeClr val="accent1"/>
+          </a:lnRef>
+          <a:fillRef idx="3">
+            <a:schemeClr val="accent1"/>
+          </a:fillRef>
+          <a:effectRef idx="2">
+            <a:schemeClr val="accent1"/>
+          </a:effectRef>
+          <a:fontRef idx="minor">
+            <a:schemeClr val="lt1"/>
+          </a:fontRef>
+        </p:style>
+        <p:txBody>
+          <a:bodyPr rtlCol="0" anchor="ctr"/>
+          <a:lstStyle/>
+          <a:p>
+            <a:pPr algn="ctr"/>
+          </a:p>
+        </p:txBody>
+      </p:sp>
+      <p:sp>
+        <p:nvSpPr>
+          <p:cNvPr id="33" name="Rectangle 32"/>
+          <p:cNvSpPr/>
+          <p:nvPr/>
+        </p:nvSpPr>
+        <p:spPr>
+          <a:xfrm>
+            <a:off x="792000" y="5277599"/>
+            <a:ext cx="10620000" cy="9000"/>
           </a:xfrm>
           <a:prstGeom prst="rect">
             <a:avLst/>
@@ -27028,14 +27598,62 @@
       </p:sp>
       <p:sp>
         <p:nvSpPr>
-          <p:cNvPr id="22" name="TextBox 21"/>
-          <p:cNvSpPr txBox="1"/>
-          <p:nvPr/>
-        </p:nvSpPr>
-        <p:spPr>
-          <a:xfrm>
-            <a:off x="792000" y="3924000"/>
-            <a:ext cx="648000" cy="432000"/>
+          <p:cNvPr id="34" name="Rounded Rectangle 33"/>
+          <p:cNvSpPr/>
+          <p:nvPr/>
+        </p:nvSpPr>
+        <p:spPr>
+          <a:xfrm>
+            <a:off x="792000" y="5443200"/>
+            <a:ext cx="1296000" cy="684000"/>
+          </a:xfrm>
+          <a:prstGeom prst="roundRect">
+            <a:avLst>
+              <a:gd name="adj" fmla="val 8000"/>
+            </a:avLst>
+          </a:prstGeom>
+          <a:solidFill>
+            <a:srgbClr val="E7EFF9"/>
+          </a:solidFill>
+          <a:ln w="12700">
+            <a:solidFill>
+              <a:srgbClr val="C8D0DC"/>
+            </a:solidFill>
+          </a:ln>
+          <a:effectLst/>
+        </p:spPr>
+        <p:style>
+          <a:lnRef idx="1">
+            <a:schemeClr val="accent1"/>
+          </a:lnRef>
+          <a:fillRef idx="3">
+            <a:schemeClr val="accent1"/>
+          </a:fillRef>
+          <a:effectRef idx="2">
+            <a:schemeClr val="accent1"/>
+          </a:effectRef>
+          <a:fontRef idx="minor">
+            <a:schemeClr val="lt1"/>
+          </a:fontRef>
+        </p:style>
+        <p:txBody>
+          <a:bodyPr rtlCol="0" anchor="ctr"/>
+          <a:lstStyle/>
+          <a:p>
+            <a:pPr algn="ctr"/>
+          </a:p>
+        </p:txBody>
+      </p:sp>
+      <p:sp>
+        <p:nvSpPr>
+          <p:cNvPr id="35" name="TextBox 34"/>
+          <p:cNvSpPr txBox="1"/>
+          <p:nvPr/>
+        </p:nvSpPr>
+        <p:spPr>
+          <a:xfrm>
+            <a:off x="864000" y="5565600"/>
+            <a:ext cx="1152000" cy="432000"/>
           </a:xfrm>
           <a:prstGeom prst="rect">
             <a:avLst/>
@@ -27048,29 +27666,64 @@
           </a:bodyPr>
           <a:lstStyle/>
           <a:p>
-            <a:pPr algn="l"/>
-            <a:r>
-              <a:rPr sz="2200" b="1">
+            <a:pPr algn="ctr"/>
+            <a:r>
+              <a:rPr sz="1800" b="1">
                 <a:solidFill>
                   <a:srgbClr val="2F6EBA"/>
                 </a:solidFill>
                 <a:latin typeface="Microsoft YaHei"/>
               </a:rPr>
-              <a:t>05</a:t>
-            </a:r>
-          </a:p>
-        </p:txBody>
-      </p:sp>
-      <p:sp>
-        <p:nvSpPr>
-          <p:cNvPr id="23" name="TextBox 22"/>
-          <p:cNvSpPr txBox="1"/>
-          <p:nvPr/>
-        </p:nvSpPr>
-        <p:spPr>
-          <a:xfrm>
-            <a:off x="1512000" y="3945600"/>
-            <a:ext cx="9828000" cy="216000"/>
+              <a:t>P4</a:t>
+            </a:r>
+          </a:p>
+        </p:txBody>
+      </p:sp>
+      <p:sp>
+        <p:nvSpPr>
+          <p:cNvPr id="36" name="TextBox 35"/>
+          <p:cNvSpPr txBox="1"/>
+          <p:nvPr/>
+        </p:nvSpPr>
+        <p:spPr>
+          <a:xfrm>
+            <a:off x="2232000" y="5482799"/>
+            <a:ext cx="360000" cy="503999"/>
+          </a:xfrm>
+          <a:prstGeom prst="rect">
+            <a:avLst/>
+          </a:prstGeom>
+          <a:noFill/>
+        </p:spPr>
+        <p:txBody>
+          <a:bodyPr wrap="none">
+            <a:spAutoFit/>
+          </a:bodyPr>
+          <a:lstStyle/>
+          <a:p>
+            <a:pPr algn="l"/>
+            <a:r>
+              <a:rPr sz="2800" b="1">
+                <a:solidFill>
+                  <a:srgbClr val="2F6EBA"/>
+                </a:solidFill>
+                <a:latin typeface="Microsoft YaHei"/>
+              </a:rPr>
+              <a:t>→</a:t>
+            </a:r>
+          </a:p>
+        </p:txBody>
+      </p:sp>
+      <p:sp>
+        <p:nvSpPr>
+          <p:cNvPr id="37" name="TextBox 36"/>
+          <p:cNvSpPr txBox="1"/>
+          <p:nvPr/>
+        </p:nvSpPr>
+        <p:spPr>
+          <a:xfrm>
+            <a:off x="2664000" y="5410800"/>
+            <a:ext cx="7523999" cy="324000"/>
           </a:xfrm>
           <a:prstGeom prst="rect">
             <a:avLst/>
@@ -27085,7 +27738,7 @@
           <a:p>
             <a:pPr algn="l"/>
             <a:r>
-              <a:rPr sz="1600" b="1">
+              <a:rPr sz="1900" b="1">
                 <a:solidFill>
                   <a:srgbClr val="1F3A68"/>
                 </a:solidFill>
@@ -27098,14 +27751,14 @@
       </p:sp>
       <p:sp>
         <p:nvSpPr>
-          <p:cNvPr id="24" name="TextBox 23"/>
-          <p:cNvSpPr txBox="1"/>
-          <p:nvPr/>
-        </p:nvSpPr>
-        <p:spPr>
-          <a:xfrm>
-            <a:off x="1512000" y="4183200"/>
-            <a:ext cx="9828000" cy="306000"/>
+          <p:cNvPr id="38" name="TextBox 37"/>
+          <p:cNvSpPr txBox="1"/>
+          <p:nvPr/>
+        </p:nvSpPr>
+        <p:spPr>
+          <a:xfrm>
+            <a:off x="2664000" y="5723999"/>
+            <a:ext cx="7523999" cy="367199"/>
           </a:xfrm>
           <a:prstGeom prst="rect">
             <a:avLst/>
@@ -27120,27 +27773,73 @@
           <a:p>
             <a:pPr algn="l"/>
             <a:r>
-              <a:rPr sz="1250" b="0">
+              <a:rPr sz="1350" b="0">
                 <a:solidFill>
                   <a:srgbClr val="555F6E"/>
                 </a:solidFill>
                 <a:latin typeface="Microsoft YaHei"/>
               </a:rPr>
-              <a:t>DeepSeek 是否实际引用装载记忆</a:t>
-            </a:r>
-          </a:p>
-        </p:txBody>
-      </p:sp>
-      <p:sp>
-        <p:nvSpPr>
-          <p:cNvPr id="25" name="Rectangle 24"/>
+              <a:t>DeepSeek 是否实际引用装载记忆？T6 引用率 1.00。</a:t>
+            </a:r>
+          </a:p>
+        </p:txBody>
+      </p:sp>
+      <p:sp>
+        <p:nvSpPr>
+          <p:cNvPr id="39" name="Rectangle 38"/>
           <p:cNvSpPr/>
           <p:nvPr/>
         </p:nvSpPr>
         <p:spPr>
           <a:xfrm>
-            <a:off x="792000" y="4410000"/>
-            <a:ext cx="10620000" cy="10800"/>
+            <a:off x="10332000" y="5500800"/>
+            <a:ext cx="1080000" cy="544319"/>
+          </a:xfrm>
+          <a:prstGeom prst="rect">
+            <a:avLst/>
+          </a:prstGeom>
+          <a:solidFill>
+            <a:srgbClr val="F2F4F8"/>
+          </a:solidFill>
+          <a:ln w="15240">
+            <a:solidFill>
+              <a:srgbClr val="2F6EBA"/>
+            </a:solidFill>
+          </a:ln>
+          <a:effectLst/>
+        </p:spPr>
+        <p:style>
+          <a:lnRef idx="1">
+            <a:schemeClr val="accent1"/>
+          </a:lnRef>
+          <a:fillRef idx="3">
+            <a:schemeClr val="accent1"/>
+          </a:fillRef>
+          <a:effectRef idx="2">
+            <a:schemeClr val="accent1"/>
+          </a:effectRef>
+          <a:fontRef idx="minor">
+            <a:schemeClr val="lt1"/>
+          </a:fontRef>
+        </p:style>
+        <p:txBody>
+          <a:bodyPr rtlCol="0" anchor="ctr"/>
+          <a:lstStyle/>
+          <a:p>
+            <a:pPr algn="ctr"/>
+          </a:p>
+        </p:txBody>
+      </p:sp>
+      <p:sp>
+        <p:nvSpPr>
+          <p:cNvPr id="40" name="Rectangle 39"/>
+          <p:cNvSpPr/>
+          <p:nvPr/>
+        </p:nvSpPr>
+        <p:spPr>
+          <a:xfrm>
+            <a:off x="792000" y="6184800"/>
+            <a:ext cx="10620000" cy="9000"/>
           </a:xfrm>
           <a:prstGeom prst="rect">
             <a:avLst/>
@@ -27177,7 +27876,7 @@
       </p:sp>
       <p:sp>
         <p:nvSpPr>
-          <p:cNvPr id="26" name="Rectangle 25"/>
+          <p:cNvPr id="41" name="Rectangle 40"/>
           <p:cNvSpPr/>
           <p:nvPr/>
         </p:nvSpPr>
@@ -27221,7 +27920,7 @@
       </p:sp>
       <p:sp>
         <p:nvSpPr>
-          <p:cNvPr id="27" name="TextBox 26"/>
+          <p:cNvPr id="42" name="TextBox 41"/>
           <p:cNvSpPr txBox="1"/>
           <p:nvPr/>
         </p:nvSpPr>
@@ -27256,7 +27955,7 @@
       </p:sp>
       <p:sp>
         <p:nvSpPr>
-          <p:cNvPr id="28" name="TextBox 27"/>
+          <p:cNvPr id="43" name="TextBox 42"/>
           <p:cNvSpPr txBox="1"/>
           <p:nvPr/>
         </p:nvSpPr>
@@ -27657,7 +28356,7 @@
                 </a:solidFill>
                 <a:latin typeface="Microsoft YaHei"/>
               </a:rPr>
-              <a:t>把记忆组织成可演化结构，不止检索增强</a:t>
+              <a:t>把记忆从上下文窗口搬到独立系统，可写、可检索、可更新、可淘汰；短期管当前场次，长期管跨场次知识。</a:t>
             </a:r>
           </a:p>
         </p:txBody>
@@ -27854,7 +28553,7 @@
                 </a:solidFill>
                 <a:latin typeface="Microsoft YaHei"/>
               </a:rPr>
-              <a:t>短期→长期唯一写通道，三道门控</a:t>
+              <a:t>短期→长期只留一条写通道，即场次结束后的复盘；三道门控：复盘驱动、类别判定、语义查重，每次操作进审计日志。</a:t>
             </a:r>
           </a:p>
         </p:txBody>
@@ -28051,7 +28750,7 @@
                 </a:solidFill>
                 <a:latin typeface="Microsoft YaHei"/>
               </a:rPr>
-              <a:t>LLM 提候选，确定性代码执行写/合/忘/抽</a:t>
+              <a:t>LLM/规则只负责提候选，写入、合并、遗忘、抽象由确定性代码执行；保证“为什么删、从哪来”可审计。</a:t>
             </a:r>
           </a:p>
         </p:txBody>
@@ -28248,7 +28947,7 @@
                 </a:solidFill>
                 <a:latin typeface="Microsoft YaHei"/>
               </a:rPr>
-              <a:t>MDMP 七阶段生成查询，对口记忆加分</a:t>
+              <a:t>查询按 MDMP 七阶段生成，阶段匹配记忆加亲和分；复盘教训归因到阶段，让“方案拟制”优先看到历史战例。</a:t>
             </a:r>
           </a:p>
         </p:txBody>
@@ -28800,802 +29499,119 @@
       </p:sp>
       <p:sp>
         <p:nvSpPr>
-          <p:cNvPr id="6" name="Rounded Rectangle 5"/>
+          <p:cNvPr id="6" name="TextBox 5"/>
+          <p:cNvSpPr txBox="1"/>
+          <p:nvPr/>
+        </p:nvSpPr>
+        <p:spPr>
+          <a:xfrm>
+            <a:off x="792000" y="1828800"/>
+            <a:ext cx="648000" cy="432000"/>
+          </a:xfrm>
+          <a:prstGeom prst="rect">
+            <a:avLst/>
+          </a:prstGeom>
+          <a:noFill/>
+        </p:spPr>
+        <p:txBody>
+          <a:bodyPr wrap="none">
+            <a:spAutoFit/>
+          </a:bodyPr>
+          <a:lstStyle/>
+          <a:p>
+            <a:pPr algn="l"/>
+            <a:r>
+              <a:rPr sz="2600" b="1">
+                <a:solidFill>
+                  <a:srgbClr val="2F6EBA"/>
+                </a:solidFill>
+                <a:latin typeface="Microsoft YaHei"/>
+              </a:rPr>
+              <a:t>01</a:t>
+            </a:r>
+          </a:p>
+        </p:txBody>
+      </p:sp>
+      <p:sp>
+        <p:nvSpPr>
+          <p:cNvPr id="7" name="TextBox 6"/>
+          <p:cNvSpPr txBox="1"/>
+          <p:nvPr/>
+        </p:nvSpPr>
+        <p:spPr>
+          <a:xfrm>
+            <a:off x="1512000" y="1800000"/>
+            <a:ext cx="9828000" cy="324000"/>
+          </a:xfrm>
+          <a:prstGeom prst="rect">
+            <a:avLst/>
+          </a:prstGeom>
+          <a:noFill/>
+        </p:spPr>
+        <p:txBody>
+          <a:bodyPr wrap="square">
+            <a:spAutoFit/>
+          </a:bodyPr>
+          <a:lstStyle/>
+          <a:p>
+            <a:pPr algn="l"/>
+            <a:r>
+              <a:rPr sz="2000" b="1">
+                <a:solidFill>
+                  <a:srgbClr val="1F3A68"/>
+                </a:solidFill>
+                <a:latin typeface="Microsoft YaHei"/>
+              </a:rPr>
+              <a:t>综述框架（Zhang 2024）</a:t>
+            </a:r>
+          </a:p>
+        </p:txBody>
+      </p:sp>
+      <p:sp>
+        <p:nvSpPr>
+          <p:cNvPr id="8" name="TextBox 7"/>
+          <p:cNvSpPr txBox="1"/>
+          <p:nvPr/>
+        </p:nvSpPr>
+        <p:spPr>
+          <a:xfrm>
+            <a:off x="1512000" y="2106000"/>
+            <a:ext cx="9828000" cy="593999"/>
+          </a:xfrm>
+          <a:prstGeom prst="rect">
+            <a:avLst/>
+          </a:prstGeom>
+          <a:noFill/>
+        </p:spPr>
+        <p:txBody>
+          <a:bodyPr wrap="square">
+            <a:spAutoFit/>
+          </a:bodyPr>
+          <a:lstStyle/>
+          <a:p>
+            <a:pPr algn="l"/>
+            <a:r>
+              <a:rPr sz="1400" b="0">
+                <a:solidFill>
+                  <a:srgbClr val="555F6E"/>
+                </a:solidFill>
+                <a:latin typeface="Microsoft YaHei"/>
+              </a:rPr>
+              <a:t>把记忆工作归纳为“形式-操作-应用”三层；本文补齐“写、更新、遗忘”闭环并把每步做成可审计事件。</a:t>
+            </a:r>
+          </a:p>
+        </p:txBody>
+      </p:sp>
+      <p:sp>
+        <p:nvSpPr>
+          <p:cNvPr id="9" name="Rectangle 8"/>
           <p:cNvSpPr/>
           <p:nvPr/>
         </p:nvSpPr>
         <p:spPr>
           <a:xfrm>
-            <a:off x="720000" y="1655999"/>
-            <a:ext cx="10728000" cy="756000"/>
-          </a:xfrm>
-          <a:prstGeom prst="roundRect">
-            <a:avLst>
-              <a:gd name="adj" fmla="val 8000"/>
-            </a:avLst>
-          </a:prstGeom>
-          <a:solidFill>
-            <a:srgbClr val="F2F4F8"/>
-          </a:solidFill>
-          <a:ln w="12700">
-            <a:solidFill>
-              <a:srgbClr val="C8D0DC"/>
-            </a:solidFill>
-          </a:ln>
-          <a:effectLst/>
-        </p:spPr>
-        <p:style>
-          <a:lnRef idx="1">
-            <a:schemeClr val="accent1"/>
-          </a:lnRef>
-          <a:fillRef idx="3">
-            <a:schemeClr val="accent1"/>
-          </a:fillRef>
-          <a:effectRef idx="2">
-            <a:schemeClr val="accent1"/>
-          </a:effectRef>
-          <a:fontRef idx="minor">
-            <a:schemeClr val="lt1"/>
-          </a:fontRef>
-        </p:style>
-        <p:txBody>
-          <a:bodyPr rtlCol="0" anchor="ctr"/>
-          <a:lstStyle/>
-          <a:p>
-            <a:pPr algn="ctr"/>
-          </a:p>
-        </p:txBody>
-      </p:sp>
-      <p:sp>
-        <p:nvSpPr>
-          <p:cNvPr id="7" name="Rectangle 6"/>
-          <p:cNvSpPr/>
-          <p:nvPr/>
-        </p:nvSpPr>
-        <p:spPr>
-          <a:xfrm>
-            <a:off x="720000" y="1655999"/>
-            <a:ext cx="79200" cy="756000"/>
-          </a:xfrm>
-          <a:prstGeom prst="rect">
-            <a:avLst/>
-          </a:prstGeom>
-          <a:solidFill>
-            <a:srgbClr val="2F6EBA"/>
-          </a:solidFill>
-          <a:ln>
-            <a:noFill/>
-          </a:ln>
-          <a:effectLst/>
-        </p:spPr>
-        <p:style>
-          <a:lnRef idx="1">
-            <a:schemeClr val="accent1"/>
-          </a:lnRef>
-          <a:fillRef idx="3">
-            <a:schemeClr val="accent1"/>
-          </a:fillRef>
-          <a:effectRef idx="2">
-            <a:schemeClr val="accent1"/>
-          </a:effectRef>
-          <a:fontRef idx="minor">
-            <a:schemeClr val="lt1"/>
-          </a:fontRef>
-        </p:style>
-        <p:txBody>
-          <a:bodyPr rtlCol="0" anchor="ctr"/>
-          <a:lstStyle/>
-          <a:p>
-            <a:pPr algn="ctr"/>
-          </a:p>
-        </p:txBody>
-      </p:sp>
-      <p:sp>
-        <p:nvSpPr>
-          <p:cNvPr id="8" name="TextBox 7"/>
-          <p:cNvSpPr txBox="1"/>
-          <p:nvPr/>
-        </p:nvSpPr>
-        <p:spPr>
-          <a:xfrm>
-            <a:off x="882000" y="1720799"/>
-            <a:ext cx="540000" cy="360000"/>
-          </a:xfrm>
-          <a:prstGeom prst="rect">
-            <a:avLst/>
-          </a:prstGeom>
-          <a:noFill/>
-        </p:spPr>
-        <p:txBody>
-          <a:bodyPr wrap="none">
-            <a:spAutoFit/>
-          </a:bodyPr>
-          <a:lstStyle/>
-          <a:p>
-            <a:pPr algn="l"/>
-            <a:r>
-              <a:rPr sz="1800" b="1">
-                <a:solidFill>
-                  <a:srgbClr val="2F6EBA"/>
-                </a:solidFill>
-                <a:latin typeface="Microsoft YaHei"/>
-              </a:rPr>
-              <a:t>01</a:t>
-            </a:r>
-          </a:p>
-        </p:txBody>
-      </p:sp>
-      <p:sp>
-        <p:nvSpPr>
-          <p:cNvPr id="9" name="TextBox 8"/>
-          <p:cNvSpPr txBox="1"/>
-          <p:nvPr/>
-        </p:nvSpPr>
-        <p:spPr>
-          <a:xfrm>
-            <a:off x="1296000" y="1710000"/>
-            <a:ext cx="9936000" cy="198000"/>
-          </a:xfrm>
-          <a:prstGeom prst="rect">
-            <a:avLst/>
-          </a:prstGeom>
-          <a:noFill/>
-        </p:spPr>
-        <p:txBody>
-          <a:bodyPr wrap="square">
-            <a:spAutoFit/>
-          </a:bodyPr>
-          <a:lstStyle/>
-          <a:p>
-            <a:pPr algn="l"/>
-            <a:r>
-              <a:rPr sz="1500" b="1">
-                <a:solidFill>
-                  <a:srgbClr val="1F3A68"/>
-                </a:solidFill>
-                <a:latin typeface="Microsoft YaHei"/>
-              </a:rPr>
-              <a:t>综述框架（Zhang 2024）</a:t>
-            </a:r>
-          </a:p>
-        </p:txBody>
-      </p:sp>
-      <p:sp>
-        <p:nvSpPr>
-          <p:cNvPr id="10" name="TextBox 9"/>
-          <p:cNvSpPr txBox="1"/>
-          <p:nvPr/>
-        </p:nvSpPr>
-        <p:spPr>
-          <a:xfrm>
-            <a:off x="1296000" y="1915199"/>
-            <a:ext cx="9936000" cy="306000"/>
-          </a:xfrm>
-          <a:prstGeom prst="rect">
-            <a:avLst/>
-          </a:prstGeom>
-          <a:noFill/>
-        </p:spPr>
-        <p:txBody>
-          <a:bodyPr wrap="square">
-            <a:spAutoFit/>
-          </a:bodyPr>
-          <a:lstStyle/>
-          <a:p>
-            <a:pPr algn="l"/>
-            <a:r>
-              <a:rPr sz="1300" b="0">
-                <a:solidFill>
-                  <a:srgbClr val="555F6E"/>
-                </a:solidFill>
-                <a:latin typeface="Microsoft YaHei"/>
-              </a:rPr>
-              <a:t>记忆的‘形式-操作-应用’分层</a:t>
-            </a:r>
-          </a:p>
-        </p:txBody>
-      </p:sp>
-      <p:sp>
-        <p:nvSpPr>
-          <p:cNvPr id="11" name="Rounded Rectangle 10"/>
-          <p:cNvSpPr/>
-          <p:nvPr/>
-        </p:nvSpPr>
-        <p:spPr>
-          <a:xfrm>
-            <a:off x="720000" y="2491200"/>
-            <a:ext cx="10728000" cy="756000"/>
-          </a:xfrm>
-          <a:prstGeom prst="roundRect">
-            <a:avLst>
-              <a:gd name="adj" fmla="val 8000"/>
-            </a:avLst>
-          </a:prstGeom>
-          <a:solidFill>
-            <a:srgbClr val="F2F4F8"/>
-          </a:solidFill>
-          <a:ln w="12700">
-            <a:solidFill>
-              <a:srgbClr val="C8D0DC"/>
-            </a:solidFill>
-          </a:ln>
-          <a:effectLst/>
-        </p:spPr>
-        <p:style>
-          <a:lnRef idx="1">
-            <a:schemeClr val="accent1"/>
-          </a:lnRef>
-          <a:fillRef idx="3">
-            <a:schemeClr val="accent1"/>
-          </a:fillRef>
-          <a:effectRef idx="2">
-            <a:schemeClr val="accent1"/>
-          </a:effectRef>
-          <a:fontRef idx="minor">
-            <a:schemeClr val="lt1"/>
-          </a:fontRef>
-        </p:style>
-        <p:txBody>
-          <a:bodyPr rtlCol="0" anchor="ctr"/>
-          <a:lstStyle/>
-          <a:p>
-            <a:pPr algn="ctr"/>
-          </a:p>
-        </p:txBody>
-      </p:sp>
-      <p:sp>
-        <p:nvSpPr>
-          <p:cNvPr id="12" name="Rectangle 11"/>
-          <p:cNvSpPr/>
-          <p:nvPr/>
-        </p:nvSpPr>
-        <p:spPr>
-          <a:xfrm>
-            <a:off x="720000" y="2491200"/>
-            <a:ext cx="79200" cy="756000"/>
-          </a:xfrm>
-          <a:prstGeom prst="rect">
-            <a:avLst/>
-          </a:prstGeom>
-          <a:solidFill>
-            <a:srgbClr val="2F6EBA"/>
-          </a:solidFill>
-          <a:ln>
-            <a:noFill/>
-          </a:ln>
-          <a:effectLst/>
-        </p:spPr>
-        <p:style>
-          <a:lnRef idx="1">
-            <a:schemeClr val="accent1"/>
-          </a:lnRef>
-          <a:fillRef idx="3">
-            <a:schemeClr val="accent1"/>
-          </a:fillRef>
-          <a:effectRef idx="2">
-            <a:schemeClr val="accent1"/>
-          </a:effectRef>
-          <a:fontRef idx="minor">
-            <a:schemeClr val="lt1"/>
-          </a:fontRef>
-        </p:style>
-        <p:txBody>
-          <a:bodyPr rtlCol="0" anchor="ctr"/>
-          <a:lstStyle/>
-          <a:p>
-            <a:pPr algn="ctr"/>
-          </a:p>
-        </p:txBody>
-      </p:sp>
-      <p:sp>
-        <p:nvSpPr>
-          <p:cNvPr id="13" name="TextBox 12"/>
-          <p:cNvSpPr txBox="1"/>
-          <p:nvPr/>
-        </p:nvSpPr>
-        <p:spPr>
-          <a:xfrm>
-            <a:off x="882000" y="2556000"/>
-            <a:ext cx="540000" cy="360000"/>
-          </a:xfrm>
-          <a:prstGeom prst="rect">
-            <a:avLst/>
-          </a:prstGeom>
-          <a:noFill/>
-        </p:spPr>
-        <p:txBody>
-          <a:bodyPr wrap="none">
-            <a:spAutoFit/>
-          </a:bodyPr>
-          <a:lstStyle/>
-          <a:p>
-            <a:pPr algn="l"/>
-            <a:r>
-              <a:rPr sz="1800" b="1">
-                <a:solidFill>
-                  <a:srgbClr val="2F6EBA"/>
-                </a:solidFill>
-                <a:latin typeface="Microsoft YaHei"/>
-              </a:rPr>
-              <a:t>02</a:t>
-            </a:r>
-          </a:p>
-        </p:txBody>
-      </p:sp>
-      <p:sp>
-        <p:nvSpPr>
-          <p:cNvPr id="14" name="TextBox 13"/>
-          <p:cNvSpPr txBox="1"/>
-          <p:nvPr/>
-        </p:nvSpPr>
-        <p:spPr>
-          <a:xfrm>
-            <a:off x="1296000" y="2545200"/>
-            <a:ext cx="9936000" cy="198000"/>
-          </a:xfrm>
-          <a:prstGeom prst="rect">
-            <a:avLst/>
-          </a:prstGeom>
-          <a:noFill/>
-        </p:spPr>
-        <p:txBody>
-          <a:bodyPr wrap="square">
-            <a:spAutoFit/>
-          </a:bodyPr>
-          <a:lstStyle/>
-          <a:p>
-            <a:pPr algn="l"/>
-            <a:r>
-              <a:rPr sz="1500" b="1">
-                <a:solidFill>
-                  <a:srgbClr val="1F3A68"/>
-                </a:solidFill>
-                <a:latin typeface="Microsoft YaHei"/>
-              </a:rPr>
-              <a:t>MemGPT</a:t>
-            </a:r>
-          </a:p>
-        </p:txBody>
-      </p:sp>
-      <p:sp>
-        <p:nvSpPr>
-          <p:cNvPr id="15" name="TextBox 14"/>
-          <p:cNvSpPr txBox="1"/>
-          <p:nvPr/>
-        </p:nvSpPr>
-        <p:spPr>
-          <a:xfrm>
-            <a:off x="1296000" y="2750400"/>
-            <a:ext cx="9936000" cy="306000"/>
-          </a:xfrm>
-          <a:prstGeom prst="rect">
-            <a:avLst/>
-          </a:prstGeom>
-          <a:noFill/>
-        </p:spPr>
-        <p:txBody>
-          <a:bodyPr wrap="square">
-            <a:spAutoFit/>
-          </a:bodyPr>
-          <a:lstStyle/>
-          <a:p>
-            <a:pPr algn="l"/>
-            <a:r>
-              <a:rPr sz="1300" b="0">
-                <a:solidFill>
-                  <a:srgbClr val="555F6E"/>
-                </a:solidFill>
-                <a:latin typeface="Microsoft YaHei"/>
-              </a:rPr>
-              <a:t>主上下文+外部存档，本文改为确定性阈值换页</a:t>
-            </a:r>
-          </a:p>
-        </p:txBody>
-      </p:sp>
-      <p:sp>
-        <p:nvSpPr>
-          <p:cNvPr id="16" name="Rounded Rectangle 15"/>
-          <p:cNvSpPr/>
-          <p:nvPr/>
-        </p:nvSpPr>
-        <p:spPr>
-          <a:xfrm>
-            <a:off x="720000" y="3326400"/>
-            <a:ext cx="10728000" cy="756000"/>
-          </a:xfrm>
-          <a:prstGeom prst="roundRect">
-            <a:avLst>
-              <a:gd name="adj" fmla="val 8000"/>
-            </a:avLst>
-          </a:prstGeom>
-          <a:solidFill>
-            <a:srgbClr val="F2F4F8"/>
-          </a:solidFill>
-          <a:ln w="12700">
-            <a:solidFill>
-              <a:srgbClr val="C8D0DC"/>
-            </a:solidFill>
-          </a:ln>
-          <a:effectLst/>
-        </p:spPr>
-        <p:style>
-          <a:lnRef idx="1">
-            <a:schemeClr val="accent1"/>
-          </a:lnRef>
-          <a:fillRef idx="3">
-            <a:schemeClr val="accent1"/>
-          </a:fillRef>
-          <a:effectRef idx="2">
-            <a:schemeClr val="accent1"/>
-          </a:effectRef>
-          <a:fontRef idx="minor">
-            <a:schemeClr val="lt1"/>
-          </a:fontRef>
-        </p:style>
-        <p:txBody>
-          <a:bodyPr rtlCol="0" anchor="ctr"/>
-          <a:lstStyle/>
-          <a:p>
-            <a:pPr algn="ctr"/>
-          </a:p>
-        </p:txBody>
-      </p:sp>
-      <p:sp>
-        <p:nvSpPr>
-          <p:cNvPr id="17" name="Rectangle 16"/>
-          <p:cNvSpPr/>
-          <p:nvPr/>
-        </p:nvSpPr>
-        <p:spPr>
-          <a:xfrm>
-            <a:off x="720000" y="3326400"/>
-            <a:ext cx="79200" cy="756000"/>
-          </a:xfrm>
-          <a:prstGeom prst="rect">
-            <a:avLst/>
-          </a:prstGeom>
-          <a:solidFill>
-            <a:srgbClr val="2F6EBA"/>
-          </a:solidFill>
-          <a:ln>
-            <a:noFill/>
-          </a:ln>
-          <a:effectLst/>
-        </p:spPr>
-        <p:style>
-          <a:lnRef idx="1">
-            <a:schemeClr val="accent1"/>
-          </a:lnRef>
-          <a:fillRef idx="3">
-            <a:schemeClr val="accent1"/>
-          </a:fillRef>
-          <a:effectRef idx="2">
-            <a:schemeClr val="accent1"/>
-          </a:effectRef>
-          <a:fontRef idx="minor">
-            <a:schemeClr val="lt1"/>
-          </a:fontRef>
-        </p:style>
-        <p:txBody>
-          <a:bodyPr rtlCol="0" anchor="ctr"/>
-          <a:lstStyle/>
-          <a:p>
-            <a:pPr algn="ctr"/>
-          </a:p>
-        </p:txBody>
-      </p:sp>
-      <p:sp>
-        <p:nvSpPr>
-          <p:cNvPr id="18" name="TextBox 17"/>
-          <p:cNvSpPr txBox="1"/>
-          <p:nvPr/>
-        </p:nvSpPr>
-        <p:spPr>
-          <a:xfrm>
-            <a:off x="882000" y="3391200"/>
-            <a:ext cx="540000" cy="360000"/>
-          </a:xfrm>
-          <a:prstGeom prst="rect">
-            <a:avLst/>
-          </a:prstGeom>
-          <a:noFill/>
-        </p:spPr>
-        <p:txBody>
-          <a:bodyPr wrap="none">
-            <a:spAutoFit/>
-          </a:bodyPr>
-          <a:lstStyle/>
-          <a:p>
-            <a:pPr algn="l"/>
-            <a:r>
-              <a:rPr sz="1800" b="1">
-                <a:solidFill>
-                  <a:srgbClr val="2F6EBA"/>
-                </a:solidFill>
-                <a:latin typeface="Microsoft YaHei"/>
-              </a:rPr>
-              <a:t>03</a:t>
-            </a:r>
-          </a:p>
-        </p:txBody>
-      </p:sp>
-      <p:sp>
-        <p:nvSpPr>
-          <p:cNvPr id="19" name="TextBox 18"/>
-          <p:cNvSpPr txBox="1"/>
-          <p:nvPr/>
-        </p:nvSpPr>
-        <p:spPr>
-          <a:xfrm>
-            <a:off x="1296000" y="3380400"/>
-            <a:ext cx="9936000" cy="198000"/>
-          </a:xfrm>
-          <a:prstGeom prst="rect">
-            <a:avLst/>
-          </a:prstGeom>
-          <a:noFill/>
-        </p:spPr>
-        <p:txBody>
-          <a:bodyPr wrap="square">
-            <a:spAutoFit/>
-          </a:bodyPr>
-          <a:lstStyle/>
-          <a:p>
-            <a:pPr algn="l"/>
-            <a:r>
-              <a:rPr sz="1500" b="1">
-                <a:solidFill>
-                  <a:srgbClr val="1F3A68"/>
-                </a:solidFill>
-                <a:latin typeface="Microsoft YaHei"/>
-              </a:rPr>
-              <a:t>SCM</a:t>
-            </a:r>
-          </a:p>
-        </p:txBody>
-      </p:sp>
-      <p:sp>
-        <p:nvSpPr>
-          <p:cNvPr id="20" name="TextBox 19"/>
-          <p:cNvSpPr txBox="1"/>
-          <p:nvPr/>
-        </p:nvSpPr>
-        <p:spPr>
-          <a:xfrm>
-            <a:off x="1296000" y="3585600"/>
-            <a:ext cx="9936000" cy="306000"/>
-          </a:xfrm>
-          <a:prstGeom prst="rect">
-            <a:avLst/>
-          </a:prstGeom>
-          <a:noFill/>
-        </p:spPr>
-        <p:txBody>
-          <a:bodyPr wrap="square">
-            <a:spAutoFit/>
-          </a:bodyPr>
-          <a:lstStyle/>
-          <a:p>
-            <a:pPr algn="l"/>
-            <a:r>
-              <a:rPr sz="1300" b="0">
-                <a:solidFill>
-                  <a:srgbClr val="555F6E"/>
-                </a:solidFill>
-                <a:latin typeface="Microsoft YaHei"/>
-              </a:rPr>
-              <a:t>控制器显式决定读/写/归档，本文收敛为复盘晋升</a:t>
-            </a:r>
-          </a:p>
-        </p:txBody>
-      </p:sp>
-      <p:sp>
-        <p:nvSpPr>
-          <p:cNvPr id="21" name="Rounded Rectangle 20"/>
-          <p:cNvSpPr/>
-          <p:nvPr/>
-        </p:nvSpPr>
-        <p:spPr>
-          <a:xfrm>
-            <a:off x="720000" y="4161600"/>
-            <a:ext cx="10728000" cy="756000"/>
-          </a:xfrm>
-          <a:prstGeom prst="roundRect">
-            <a:avLst>
-              <a:gd name="adj" fmla="val 8000"/>
-            </a:avLst>
-          </a:prstGeom>
-          <a:solidFill>
-            <a:srgbClr val="F2F4F8"/>
-          </a:solidFill>
-          <a:ln w="12700">
-            <a:solidFill>
-              <a:srgbClr val="C8D0DC"/>
-            </a:solidFill>
-          </a:ln>
-          <a:effectLst/>
-        </p:spPr>
-        <p:style>
-          <a:lnRef idx="1">
-            <a:schemeClr val="accent1"/>
-          </a:lnRef>
-          <a:fillRef idx="3">
-            <a:schemeClr val="accent1"/>
-          </a:fillRef>
-          <a:effectRef idx="2">
-            <a:schemeClr val="accent1"/>
-          </a:effectRef>
-          <a:fontRef idx="minor">
-            <a:schemeClr val="lt1"/>
-          </a:fontRef>
-        </p:style>
-        <p:txBody>
-          <a:bodyPr rtlCol="0" anchor="ctr"/>
-          <a:lstStyle/>
-          <a:p>
-            <a:pPr algn="ctr"/>
-          </a:p>
-        </p:txBody>
-      </p:sp>
-      <p:sp>
-        <p:nvSpPr>
-          <p:cNvPr id="22" name="Rectangle 21"/>
-          <p:cNvSpPr/>
-          <p:nvPr/>
-        </p:nvSpPr>
-        <p:spPr>
-          <a:xfrm>
-            <a:off x="720000" y="4161600"/>
-            <a:ext cx="79200" cy="756000"/>
-          </a:xfrm>
-          <a:prstGeom prst="rect">
-            <a:avLst/>
-          </a:prstGeom>
-          <a:solidFill>
-            <a:srgbClr val="2F6EBA"/>
-          </a:solidFill>
-          <a:ln>
-            <a:noFill/>
-          </a:ln>
-          <a:effectLst/>
-        </p:spPr>
-        <p:style>
-          <a:lnRef idx="1">
-            <a:schemeClr val="accent1"/>
-          </a:lnRef>
-          <a:fillRef idx="3">
-            <a:schemeClr val="accent1"/>
-          </a:fillRef>
-          <a:effectRef idx="2">
-            <a:schemeClr val="accent1"/>
-          </a:effectRef>
-          <a:fontRef idx="minor">
-            <a:schemeClr val="lt1"/>
-          </a:fontRef>
-        </p:style>
-        <p:txBody>
-          <a:bodyPr rtlCol="0" anchor="ctr"/>
-          <a:lstStyle/>
-          <a:p>
-            <a:pPr algn="ctr"/>
-          </a:p>
-        </p:txBody>
-      </p:sp>
-      <p:sp>
-        <p:nvSpPr>
-          <p:cNvPr id="23" name="TextBox 22"/>
-          <p:cNvSpPr txBox="1"/>
-          <p:nvPr/>
-        </p:nvSpPr>
-        <p:spPr>
-          <a:xfrm>
-            <a:off x="882000" y="4226400"/>
-            <a:ext cx="540000" cy="360000"/>
-          </a:xfrm>
-          <a:prstGeom prst="rect">
-            <a:avLst/>
-          </a:prstGeom>
-          <a:noFill/>
-        </p:spPr>
-        <p:txBody>
-          <a:bodyPr wrap="none">
-            <a:spAutoFit/>
-          </a:bodyPr>
-          <a:lstStyle/>
-          <a:p>
-            <a:pPr algn="l"/>
-            <a:r>
-              <a:rPr sz="1800" b="1">
-                <a:solidFill>
-                  <a:srgbClr val="2F6EBA"/>
-                </a:solidFill>
-                <a:latin typeface="Microsoft YaHei"/>
-              </a:rPr>
-              <a:t>04</a:t>
-            </a:r>
-          </a:p>
-        </p:txBody>
-      </p:sp>
-      <p:sp>
-        <p:nvSpPr>
-          <p:cNvPr id="24" name="TextBox 23"/>
-          <p:cNvSpPr txBox="1"/>
-          <p:nvPr/>
-        </p:nvSpPr>
-        <p:spPr>
-          <a:xfrm>
-            <a:off x="1296000" y="4215600"/>
-            <a:ext cx="9936000" cy="198000"/>
-          </a:xfrm>
-          <a:prstGeom prst="rect">
-            <a:avLst/>
-          </a:prstGeom>
-          <a:noFill/>
-        </p:spPr>
-        <p:txBody>
-          <a:bodyPr wrap="square">
-            <a:spAutoFit/>
-          </a:bodyPr>
-          <a:lstStyle/>
-          <a:p>
-            <a:pPr algn="l"/>
-            <a:r>
-              <a:rPr sz="1500" b="1">
-                <a:solidFill>
-                  <a:srgbClr val="1F3A68"/>
-                </a:solidFill>
-                <a:latin typeface="Microsoft YaHei"/>
-              </a:rPr>
-              <a:t>LLMLingua/LongLLMLingua/ICAE</a:t>
-            </a:r>
-          </a:p>
-        </p:txBody>
-      </p:sp>
-      <p:sp>
-        <p:nvSpPr>
-          <p:cNvPr id="25" name="TextBox 24"/>
-          <p:cNvSpPr txBox="1"/>
-          <p:nvPr/>
-        </p:nvSpPr>
-        <p:spPr>
-          <a:xfrm>
-            <a:off x="1296000" y="4420800"/>
-            <a:ext cx="9936000" cy="306000"/>
-          </a:xfrm>
-          <a:prstGeom prst="rect">
-            <a:avLst/>
-          </a:prstGeom>
-          <a:noFill/>
-        </p:spPr>
-        <p:txBody>
-          <a:bodyPr wrap="square">
-            <a:spAutoFit/>
-          </a:bodyPr>
-          <a:lstStyle/>
-          <a:p>
-            <a:pPr algn="l"/>
-            <a:r>
-              <a:rPr sz="1300" b="0">
-                <a:solidFill>
-                  <a:srgbClr val="555F6E"/>
-                </a:solidFill>
-                <a:latin typeface="Microsoft YaHei"/>
-              </a:rPr>
-              <a:t>位置偏置与‘只压历史不压约束’</a:t>
-            </a:r>
-          </a:p>
-        </p:txBody>
-      </p:sp>
-      <p:sp>
-        <p:nvSpPr>
-          <p:cNvPr id="26" name="Rectangle 25"/>
-          <p:cNvSpPr/>
-          <p:nvPr/>
-        </p:nvSpPr>
-        <p:spPr>
-          <a:xfrm>
-            <a:off x="0" y="6606000"/>
-            <a:ext cx="12193200" cy="10800"/>
+            <a:off x="792000" y="2761199"/>
+            <a:ext cx="10620000" cy="10800"/>
           </a:xfrm>
           <a:prstGeom prst="rect">
             <a:avLst/>
@@ -29632,7 +29648,498 @@
       </p:sp>
       <p:sp>
         <p:nvSpPr>
-          <p:cNvPr id="27" name="TextBox 26"/>
+          <p:cNvPr id="10" name="TextBox 9"/>
+          <p:cNvSpPr txBox="1"/>
+          <p:nvPr/>
+        </p:nvSpPr>
+        <p:spPr>
+          <a:xfrm>
+            <a:off x="792000" y="2962799"/>
+            <a:ext cx="648000" cy="432000"/>
+          </a:xfrm>
+          <a:prstGeom prst="rect">
+            <a:avLst/>
+          </a:prstGeom>
+          <a:noFill/>
+        </p:spPr>
+        <p:txBody>
+          <a:bodyPr wrap="none">
+            <a:spAutoFit/>
+          </a:bodyPr>
+          <a:lstStyle/>
+          <a:p>
+            <a:pPr algn="l"/>
+            <a:r>
+              <a:rPr sz="2600" b="1">
+                <a:solidFill>
+                  <a:srgbClr val="2F6EBA"/>
+                </a:solidFill>
+                <a:latin typeface="Microsoft YaHei"/>
+              </a:rPr>
+              <a:t>02</a:t>
+            </a:r>
+          </a:p>
+        </p:txBody>
+      </p:sp>
+      <p:sp>
+        <p:nvSpPr>
+          <p:cNvPr id="11" name="TextBox 10"/>
+          <p:cNvSpPr txBox="1"/>
+          <p:nvPr/>
+        </p:nvSpPr>
+        <p:spPr>
+          <a:xfrm>
+            <a:off x="1512000" y="2933999"/>
+            <a:ext cx="9828000" cy="324000"/>
+          </a:xfrm>
+          <a:prstGeom prst="rect">
+            <a:avLst/>
+          </a:prstGeom>
+          <a:noFill/>
+        </p:spPr>
+        <p:txBody>
+          <a:bodyPr wrap="square">
+            <a:spAutoFit/>
+          </a:bodyPr>
+          <a:lstStyle/>
+          <a:p>
+            <a:pPr algn="l"/>
+            <a:r>
+              <a:rPr sz="2000" b="1">
+                <a:solidFill>
+                  <a:srgbClr val="1F3A68"/>
+                </a:solidFill>
+                <a:latin typeface="Microsoft YaHei"/>
+              </a:rPr>
+              <a:t>MemGPT 分层</a:t>
+            </a:r>
+          </a:p>
+        </p:txBody>
+      </p:sp>
+      <p:sp>
+        <p:nvSpPr>
+          <p:cNvPr id="12" name="TextBox 11"/>
+          <p:cNvSpPr txBox="1"/>
+          <p:nvPr/>
+        </p:nvSpPr>
+        <p:spPr>
+          <a:xfrm>
+            <a:off x="1512000" y="3240000"/>
+            <a:ext cx="9828000" cy="593999"/>
+          </a:xfrm>
+          <a:prstGeom prst="rect">
+            <a:avLst/>
+          </a:prstGeom>
+          <a:noFill/>
+        </p:spPr>
+        <p:txBody>
+          <a:bodyPr wrap="square">
+            <a:spAutoFit/>
+          </a:bodyPr>
+          <a:lstStyle/>
+          <a:p>
+            <a:pPr algn="l"/>
+            <a:r>
+              <a:rPr sz="1400" b="0">
+                <a:solidFill>
+                  <a:srgbClr val="555F6E"/>
+                </a:solidFill>
+                <a:latin typeface="Microsoft YaHei"/>
+              </a:rPr>
+              <a:t>主上下文+外部存档；本文采用分层，但改成确定性阈值换页（0.7预警/1.0压缩），保证可复现可消融。</a:t>
+            </a:r>
+          </a:p>
+        </p:txBody>
+      </p:sp>
+      <p:sp>
+        <p:nvSpPr>
+          <p:cNvPr id="13" name="Rectangle 12"/>
+          <p:cNvSpPr/>
+          <p:nvPr/>
+        </p:nvSpPr>
+        <p:spPr>
+          <a:xfrm>
+            <a:off x="792000" y="3895199"/>
+            <a:ext cx="10620000" cy="10800"/>
+          </a:xfrm>
+          <a:prstGeom prst="rect">
+            <a:avLst/>
+          </a:prstGeom>
+          <a:solidFill>
+            <a:srgbClr val="C8D0DC"/>
+          </a:solidFill>
+          <a:ln>
+            <a:noFill/>
+          </a:ln>
+          <a:effectLst/>
+        </p:spPr>
+        <p:style>
+          <a:lnRef idx="1">
+            <a:schemeClr val="accent1"/>
+          </a:lnRef>
+          <a:fillRef idx="3">
+            <a:schemeClr val="accent1"/>
+          </a:fillRef>
+          <a:effectRef idx="2">
+            <a:schemeClr val="accent1"/>
+          </a:effectRef>
+          <a:fontRef idx="minor">
+            <a:schemeClr val="lt1"/>
+          </a:fontRef>
+        </p:style>
+        <p:txBody>
+          <a:bodyPr rtlCol="0" anchor="ctr"/>
+          <a:lstStyle/>
+          <a:p>
+            <a:pPr algn="ctr"/>
+          </a:p>
+        </p:txBody>
+      </p:sp>
+      <p:sp>
+        <p:nvSpPr>
+          <p:cNvPr id="14" name="TextBox 13"/>
+          <p:cNvSpPr txBox="1"/>
+          <p:nvPr/>
+        </p:nvSpPr>
+        <p:spPr>
+          <a:xfrm>
+            <a:off x="792000" y="4096799"/>
+            <a:ext cx="648000" cy="432000"/>
+          </a:xfrm>
+          <a:prstGeom prst="rect">
+            <a:avLst/>
+          </a:prstGeom>
+          <a:noFill/>
+        </p:spPr>
+        <p:txBody>
+          <a:bodyPr wrap="none">
+            <a:spAutoFit/>
+          </a:bodyPr>
+          <a:lstStyle/>
+          <a:p>
+            <a:pPr algn="l"/>
+            <a:r>
+              <a:rPr sz="2600" b="1">
+                <a:solidFill>
+                  <a:srgbClr val="2F6EBA"/>
+                </a:solidFill>
+                <a:latin typeface="Microsoft YaHei"/>
+              </a:rPr>
+              <a:t>03</a:t>
+            </a:r>
+          </a:p>
+        </p:txBody>
+      </p:sp>
+      <p:sp>
+        <p:nvSpPr>
+          <p:cNvPr id="15" name="TextBox 14"/>
+          <p:cNvSpPr txBox="1"/>
+          <p:nvPr/>
+        </p:nvSpPr>
+        <p:spPr>
+          <a:xfrm>
+            <a:off x="1512000" y="4067999"/>
+            <a:ext cx="9828000" cy="324000"/>
+          </a:xfrm>
+          <a:prstGeom prst="rect">
+            <a:avLst/>
+          </a:prstGeom>
+          <a:noFill/>
+        </p:spPr>
+        <p:txBody>
+          <a:bodyPr wrap="square">
+            <a:spAutoFit/>
+          </a:bodyPr>
+          <a:lstStyle/>
+          <a:p>
+            <a:pPr algn="l"/>
+            <a:r>
+              <a:rPr sz="2000" b="1">
+                <a:solidFill>
+                  <a:srgbClr val="1F3A68"/>
+                </a:solidFill>
+                <a:latin typeface="Microsoft YaHei"/>
+              </a:rPr>
+              <a:t>SCM 控制器</a:t>
+            </a:r>
+          </a:p>
+        </p:txBody>
+      </p:sp>
+      <p:sp>
+        <p:nvSpPr>
+          <p:cNvPr id="16" name="TextBox 15"/>
+          <p:cNvSpPr txBox="1"/>
+          <p:nvPr/>
+        </p:nvSpPr>
+        <p:spPr>
+          <a:xfrm>
+            <a:off x="1512000" y="4373999"/>
+            <a:ext cx="9828000" cy="593999"/>
+          </a:xfrm>
+          <a:prstGeom prst="rect">
+            <a:avLst/>
+          </a:prstGeom>
+          <a:noFill/>
+        </p:spPr>
+        <p:txBody>
+          <a:bodyPr wrap="square">
+            <a:spAutoFit/>
+          </a:bodyPr>
+          <a:lstStyle/>
+          <a:p>
+            <a:pPr algn="l"/>
+            <a:r>
+              <a:rPr sz="1400" b="0">
+                <a:solidFill>
+                  <a:srgbClr val="555F6E"/>
+                </a:solidFill>
+                <a:latin typeface="Microsoft YaHei"/>
+              </a:rPr>
+              <a:t>显式决定何时读/写/归档；本文沿用“控制器唯一调度”，但把写长期库收窄为复盘晋升一条通道。</a:t>
+            </a:r>
+          </a:p>
+        </p:txBody>
+      </p:sp>
+      <p:sp>
+        <p:nvSpPr>
+          <p:cNvPr id="17" name="Rectangle 16"/>
+          <p:cNvSpPr/>
+          <p:nvPr/>
+        </p:nvSpPr>
+        <p:spPr>
+          <a:xfrm>
+            <a:off x="792000" y="5029199"/>
+            <a:ext cx="10620000" cy="10800"/>
+          </a:xfrm>
+          <a:prstGeom prst="rect">
+            <a:avLst/>
+          </a:prstGeom>
+          <a:solidFill>
+            <a:srgbClr val="C8D0DC"/>
+          </a:solidFill>
+          <a:ln>
+            <a:noFill/>
+          </a:ln>
+          <a:effectLst/>
+        </p:spPr>
+        <p:style>
+          <a:lnRef idx="1">
+            <a:schemeClr val="accent1"/>
+          </a:lnRef>
+          <a:fillRef idx="3">
+            <a:schemeClr val="accent1"/>
+          </a:fillRef>
+          <a:effectRef idx="2">
+            <a:schemeClr val="accent1"/>
+          </a:effectRef>
+          <a:fontRef idx="minor">
+            <a:schemeClr val="lt1"/>
+          </a:fontRef>
+        </p:style>
+        <p:txBody>
+          <a:bodyPr rtlCol="0" anchor="ctr"/>
+          <a:lstStyle/>
+          <a:p>
+            <a:pPr algn="ctr"/>
+          </a:p>
+        </p:txBody>
+      </p:sp>
+      <p:sp>
+        <p:nvSpPr>
+          <p:cNvPr id="18" name="TextBox 17"/>
+          <p:cNvSpPr txBox="1"/>
+          <p:nvPr/>
+        </p:nvSpPr>
+        <p:spPr>
+          <a:xfrm>
+            <a:off x="792000" y="5230800"/>
+            <a:ext cx="648000" cy="432000"/>
+          </a:xfrm>
+          <a:prstGeom prst="rect">
+            <a:avLst/>
+          </a:prstGeom>
+          <a:noFill/>
+        </p:spPr>
+        <p:txBody>
+          <a:bodyPr wrap="none">
+            <a:spAutoFit/>
+          </a:bodyPr>
+          <a:lstStyle/>
+          <a:p>
+            <a:pPr algn="l"/>
+            <a:r>
+              <a:rPr sz="2600" b="1">
+                <a:solidFill>
+                  <a:srgbClr val="2F6EBA"/>
+                </a:solidFill>
+                <a:latin typeface="Microsoft YaHei"/>
+              </a:rPr>
+              <a:t>04</a:t>
+            </a:r>
+          </a:p>
+        </p:txBody>
+      </p:sp>
+      <p:sp>
+        <p:nvSpPr>
+          <p:cNvPr id="19" name="TextBox 18"/>
+          <p:cNvSpPr txBox="1"/>
+          <p:nvPr/>
+        </p:nvSpPr>
+        <p:spPr>
+          <a:xfrm>
+            <a:off x="1512000" y="5202000"/>
+            <a:ext cx="9828000" cy="324000"/>
+          </a:xfrm>
+          <a:prstGeom prst="rect">
+            <a:avLst/>
+          </a:prstGeom>
+          <a:noFill/>
+        </p:spPr>
+        <p:txBody>
+          <a:bodyPr wrap="square">
+            <a:spAutoFit/>
+          </a:bodyPr>
+          <a:lstStyle/>
+          <a:p>
+            <a:pPr algn="l"/>
+            <a:r>
+              <a:rPr sz="2000" b="1">
+                <a:solidFill>
+                  <a:srgbClr val="1F3A68"/>
+                </a:solidFill>
+                <a:latin typeface="Microsoft YaHei"/>
+              </a:rPr>
+              <a:t>LLMLingua/ICAE 压缩</a:t>
+            </a:r>
+          </a:p>
+        </p:txBody>
+      </p:sp>
+      <p:sp>
+        <p:nvSpPr>
+          <p:cNvPr id="20" name="TextBox 19"/>
+          <p:cNvSpPr txBox="1"/>
+          <p:nvPr/>
+        </p:nvSpPr>
+        <p:spPr>
+          <a:xfrm>
+            <a:off x="1512000" y="5508000"/>
+            <a:ext cx="9828000" cy="593999"/>
+          </a:xfrm>
+          <a:prstGeom prst="rect">
+            <a:avLst/>
+          </a:prstGeom>
+          <a:noFill/>
+        </p:spPr>
+        <p:txBody>
+          <a:bodyPr wrap="square">
+            <a:spAutoFit/>
+          </a:bodyPr>
+          <a:lstStyle/>
+          <a:p>
+            <a:pPr algn="l"/>
+            <a:r>
+              <a:rPr sz="1400" b="0">
+                <a:solidFill>
+                  <a:srgbClr val="555F6E"/>
+                </a:solidFill>
+                <a:latin typeface="Microsoft YaHei"/>
+              </a:rPr>
+              <a:t>借用位置偏置与“只压历史不压约束”，压缩器本身留作后续扩展。</a:t>
+            </a:r>
+          </a:p>
+        </p:txBody>
+      </p:sp>
+      <p:sp>
+        <p:nvSpPr>
+          <p:cNvPr id="21" name="Rectangle 20"/>
+          <p:cNvSpPr/>
+          <p:nvPr/>
+        </p:nvSpPr>
+        <p:spPr>
+          <a:xfrm>
+            <a:off x="792000" y="6163199"/>
+            <a:ext cx="10620000" cy="10800"/>
+          </a:xfrm>
+          <a:prstGeom prst="rect">
+            <a:avLst/>
+          </a:prstGeom>
+          <a:solidFill>
+            <a:srgbClr val="C8D0DC"/>
+          </a:solidFill>
+          <a:ln>
+            <a:noFill/>
+          </a:ln>
+          <a:effectLst/>
+        </p:spPr>
+        <p:style>
+          <a:lnRef idx="1">
+            <a:schemeClr val="accent1"/>
+          </a:lnRef>
+          <a:fillRef idx="3">
+            <a:schemeClr val="accent1"/>
+          </a:fillRef>
+          <a:effectRef idx="2">
+            <a:schemeClr val="accent1"/>
+          </a:effectRef>
+          <a:fontRef idx="minor">
+            <a:schemeClr val="lt1"/>
+          </a:fontRef>
+        </p:style>
+        <p:txBody>
+          <a:bodyPr rtlCol="0" anchor="ctr"/>
+          <a:lstStyle/>
+          <a:p>
+            <a:pPr algn="ctr"/>
+          </a:p>
+        </p:txBody>
+      </p:sp>
+      <p:sp>
+        <p:nvSpPr>
+          <p:cNvPr id="22" name="Rectangle 21"/>
+          <p:cNvSpPr/>
+          <p:nvPr/>
+        </p:nvSpPr>
+        <p:spPr>
+          <a:xfrm>
+            <a:off x="0" y="6606000"/>
+            <a:ext cx="12193200" cy="10800"/>
+          </a:xfrm>
+          <a:prstGeom prst="rect">
+            <a:avLst/>
+          </a:prstGeom>
+          <a:solidFill>
+            <a:srgbClr val="C8D0DC"/>
+          </a:solidFill>
+          <a:ln>
+            <a:noFill/>
+          </a:ln>
+          <a:effectLst/>
+        </p:spPr>
+        <p:style>
+          <a:lnRef idx="1">
+            <a:schemeClr val="accent1"/>
+          </a:lnRef>
+          <a:fillRef idx="3">
+            <a:schemeClr val="accent1"/>
+          </a:fillRef>
+          <a:effectRef idx="2">
+            <a:schemeClr val="accent1"/>
+          </a:effectRef>
+          <a:fontRef idx="minor">
+            <a:schemeClr val="lt1"/>
+          </a:fontRef>
+        </p:style>
+        <p:txBody>
+          <a:bodyPr rtlCol="0" anchor="ctr"/>
+          <a:lstStyle/>
+          <a:p>
+            <a:pPr algn="ctr"/>
+          </a:p>
+        </p:txBody>
+      </p:sp>
+      <p:sp>
+        <p:nvSpPr>
+          <p:cNvPr id="23" name="TextBox 22"/>
           <p:cNvSpPr txBox="1"/>
           <p:nvPr/>
         </p:nvSpPr>
@@ -29667,7 +30174,7 @@
       </p:sp>
       <p:sp>
         <p:nvSpPr>
-          <p:cNvPr id="28" name="TextBox 27"/>
+          <p:cNvPr id="24" name="TextBox 23"/>
           <p:cNvSpPr txBox="1"/>
           <p:nvPr/>
         </p:nvSpPr>

--- a/汇报PPT/最终汇报成果.pptx
+++ b/汇报PPT/最终汇报成果.pptx
@@ -819,7 +819,7 @@
           <a:lstStyle/>
           <a:p>
             <a:r>
-              <a:t>【配图】本页右侧预留图位：放 docs/figures/fig1_architecture.png（系统架构图）。</a:t>
+              <a:t>【配图】本页右侧图位：放 docs/figures/fig1_architecture.png（系统架构图）。</a:t>
             </a:r>
           </a:p>
           <a:p>
@@ -1269,7 +1269,7 @@
           <a:lstStyle/>
           <a:p>
             <a:r>
-              <a:t>【配图】本页右侧预留图位：放 WebUI 截图（运行 python webui/server.py 后截取记忆详情抽屉、遗忘曲线、事件流）。</a:t>
+              <a:t>【配图】本页右侧图位：放 WebUI 截图（记忆详情抽屉/遗忘曲线/事件流）。</a:t>
             </a:r>
           </a:p>
           <a:p>
@@ -1649,7 +1649,7 @@
           </a:p>
           <a:p>
             <a:r>
-              <a:t>【讲稿】对负结果要诚实：词袋下混合召回无增益。</a:t>
+              <a:t>【讲稿】对负结果要诚实。</a:t>
             </a:r>
           </a:p>
         </p:txBody>
@@ -1869,7 +1869,7 @@
           <a:lstStyle/>
           <a:p>
             <a:r>
-              <a:t>【配图】本页右侧预留图位：放 docs/figures/fig2_campaign_trajectory.png 或智戎桥接架构示意图。</a:t>
+              <a:t>【配图】本页右侧图位：放 docs/figures/fig2_campaign_trajectory.png 或智戎桥接架构示意图。</a:t>
             </a:r>
           </a:p>
           <a:p>
@@ -9305,7 +9305,7 @@
                 </a:solidFill>
                 <a:latin typeface="Microsoft YaHei"/>
               </a:rPr>
-              <a:t>四层</a:t>
+              <a:t>四层架构</a:t>
             </a:r>
           </a:p>
         </p:txBody>
@@ -9340,7 +9340,7 @@
                 </a:solidFill>
                 <a:latin typeface="Microsoft YaHei"/>
               </a:rPr>
-              <a:t>模型层/能力层/跨切面/编排层</a:t>
+              <a:t>模型层统一数据对象，能力层分短期/长期/检索/进化，跨切面处理边界与阶段，编排层由控制器与管线调度。</a:t>
             </a:r>
           </a:p>
         </p:txBody>
@@ -9502,7 +9502,7 @@
                 </a:solidFill>
                 <a:latin typeface="Microsoft YaHei"/>
               </a:rPr>
-              <a:t>能力层四模块互不依赖</a:t>
+              <a:t>模块解耦</a:t>
             </a:r>
           </a:p>
         </p:txBody>
@@ -9537,7 +9537,7 @@
                 </a:solidFill>
                 <a:latin typeface="Microsoft YaHei"/>
               </a:rPr>
-              <a:t>短期、长期、检索、进化</a:t>
+              <a:t>四个能力层互不 import，只通过 schema 对象通信，为独立消融提供物理基础。</a:t>
             </a:r>
           </a:p>
         </p:txBody>
@@ -9699,7 +9699,7 @@
                 </a:solidFill>
                 <a:latin typeface="Microsoft YaHei"/>
               </a:rPr>
-              <a:t>两层之间唯一写通道</a:t>
+              <a:t>唯一写通道</a:t>
             </a:r>
           </a:p>
         </p:txBody>
@@ -9734,7 +9734,7 @@
                 </a:solidFill>
                 <a:latin typeface="Microsoft YaHei"/>
               </a:rPr>
-              <a:t>复盘晋升 + 三道边界门</a:t>
+              <a:t>短期→长期只经复盘晋升，经三道边界门，每次判定写入审计日志。</a:t>
             </a:r>
           </a:p>
         </p:txBody>
@@ -9931,7 +9931,7 @@
                 </a:solidFill>
                 <a:latin typeface="Microsoft YaHei"/>
               </a:rPr>
-              <a:t>依赖注入实现 G0-G6</a:t>
+              <a:t>通过依赖注入开关能力，G0-G6 固定用例集验证。</a:t>
             </a:r>
           </a:p>
         </p:txBody>
@@ -10394,7 +10394,7 @@
                 </a:solidFill>
                 <a:latin typeface="Microsoft YaHei"/>
               </a:rPr>
-              <a:t>槽位保存目标/约束/查询/消息；约束永不压缩</a:t>
+              <a:t>槽位保存目标/约束/查询/消息；约束永不压缩，保证规划合规</a:t>
             </a:r>
           </a:p>
         </p:txBody>
@@ -10521,7 +10521,7 @@
                 </a:solidFill>
                 <a:latin typeface="Microsoft YaHei"/>
               </a:rPr>
-              <a:t>FIFO 超阈值触发压缩，被驱逐消息进入归档</a:t>
+              <a:t>FIFO 超阈值触发递归摘要，被驱逐消息进入归档区供复盘晋升</a:t>
             </a:r>
           </a:p>
         </p:txBody>
@@ -10648,7 +10648,7 @@
                 </a:solidFill>
                 <a:latin typeface="Microsoft YaHei"/>
               </a:rPr>
-              <a:t>伪代码如下（memsys/short_term/working_memory.py）</a:t>
+              <a:t>渲染顺序刻意使用首尾位置偏置</a:t>
             </a:r>
           </a:p>
         </p:txBody>
@@ -10683,7 +10683,7 @@
                 </a:solidFill>
                 <a:latin typeface="Microsoft YaHei"/>
               </a:rPr>
-              <a:t/>
+              <a:t>关键信息放头部，近期消息放尾部</a:t>
             </a:r>
           </a:p>
         </p:txBody>
@@ -10837,7 +10837,7 @@
           <a:p>
             <a:pPr algn="l"/>
             <a:r>
-              <a:rPr sz="1200" b="0">
+              <a:rPr sz="1100" b="0">
                 <a:solidFill>
                   <a:srgbClr val="1F3A68"/>
                 </a:solidFill>
@@ -10849,19 +10849,19 @@
           <a:p>
             <a:pPr algn="l"/>
             <a:r>
-              <a:rPr sz="1200" b="0">
+              <a:rPr sz="1100" b="0">
                 <a:solidFill>
                   <a:srgbClr val="1F3A68"/>
                 </a:solidFill>
                 <a:latin typeface="Consolas"/>
               </a:rPr>
-              <a:t>    parts = [阶段, 目标, 约束]          # 头部：不可压缩</a:t>
-            </a:r>
-          </a:p>
-          <a:p>
-            <a:pPr algn="l"/>
-            <a:r>
-              <a:rPr sz="1200" b="0">
+              <a:t>    parts = [阶段, 目标, 约束]</a:t>
+            </a:r>
+          </a:p>
+          <a:p>
+            <a:pPr algn="l"/>
+            <a:r>
+              <a:rPr sz="1100" b="0">
                 <a:solidFill>
                   <a:srgbClr val="1F3A68"/>
                 </a:solidFill>
@@ -10873,31 +10873,31 @@
           <a:p>
             <a:pPr algn="l"/>
             <a:r>
-              <a:rPr sz="1200" b="0">
+              <a:rPr sz="1100" b="0">
                 <a:solidFill>
                   <a:srgbClr val="1F3A68"/>
                 </a:solidFill>
                 <a:latin typeface="Consolas"/>
               </a:rPr>
-              <a:t>        parts.append('【装载记忆】' + 逐条brief)</a:t>
-            </a:r>
-          </a:p>
-          <a:p>
-            <a:pPr algn="l"/>
-            <a:r>
-              <a:rPr sz="1200" b="0">
+              <a:t>        parts.append('【装载记忆】' + briefs)</a:t>
+            </a:r>
+          </a:p>
+          <a:p>
+            <a:pPr algn="l"/>
+            <a:r>
+              <a:rPr sz="1100" b="0">
                 <a:solidFill>
                   <a:srgbClr val="1F3A68"/>
                 </a:solidFill>
                 <a:latin typeface="Consolas"/>
               </a:rPr>
-              <a:t>    parts.append(查询列表)               # 审计</a:t>
-            </a:r>
-          </a:p>
-          <a:p>
-            <a:pPr algn="l"/>
-            <a:r>
-              <a:rPr sz="1200" b="0">
+              <a:t>    parts.append(查询列表)</a:t>
+            </a:r>
+          </a:p>
+          <a:p>
+            <a:pPr algn="l"/>
+            <a:r>
+              <a:rPr sz="1100" b="0">
                 <a:solidFill>
                   <a:srgbClr val="1F3A68"/>
                 </a:solidFill>
@@ -10909,7 +10909,7 @@
           <a:p>
             <a:pPr algn="l"/>
             <a:r>
-              <a:rPr sz="1200" b="0">
+              <a:rPr sz="1100" b="0">
                 <a:solidFill>
                   <a:srgbClr val="1F3A68"/>
                 </a:solidFill>
@@ -10921,7 +10921,7 @@
           <a:p>
             <a:pPr algn="l"/>
             <a:r>
-              <a:rPr sz="1200" b="0">
+              <a:rPr sz="1100" b="0">
                 <a:solidFill>
                   <a:srgbClr val="1F3A68"/>
                 </a:solidFill>
@@ -10933,7 +10933,7 @@
           <a:p>
             <a:pPr algn="l"/>
             <a:r>
-              <a:rPr sz="1200" b="0">
+              <a:rPr sz="1100" b="0">
                 <a:solidFill>
                   <a:srgbClr val="1F3A68"/>
                 </a:solidFill>
@@ -10945,7 +10945,7 @@
           <a:p>
             <a:pPr algn="l"/>
             <a:r>
-              <a:rPr sz="1200" b="0">
+              <a:rPr sz="1100" b="0">
                 <a:solidFill>
                   <a:srgbClr val="1F3A68"/>
                 </a:solidFill>
@@ -10957,25 +10957,25 @@
           <a:p>
             <a:pPr algn="l"/>
             <a:r>
-              <a:rPr sz="1200" b="0">
+              <a:rPr sz="1100" b="0">
                 <a:solidFill>
                   <a:srgbClr val="1F3A68"/>
                 </a:solidFill>
                 <a:latin typeface="Consolas"/>
               </a:rPr>
-              <a:t>    slot.summary = llm.summarize(old + evicted)</a:t>
-            </a:r>
-          </a:p>
-          <a:p>
-            <a:pPr algn="l"/>
-            <a:r>
-              <a:rPr sz="1200" b="0">
+              <a:t>    slot.summary = llm.summarize(旧摘要 + evicted)</a:t>
+            </a:r>
+          </a:p>
+          <a:p>
+            <a:pPr algn="l"/>
+            <a:r>
+              <a:rPr sz="1100" b="0">
                 <a:solidFill>
                   <a:srgbClr val="1F3A68"/>
                 </a:solidFill>
                 <a:latin typeface="Consolas"/>
               </a:rPr>
-              <a:t>    slot.archived.append(evicted)        # 归档不丢</a:t>
+              <a:t>    slot.archived.append(evicted)</a:t>
             </a:r>
           </a:p>
         </p:txBody>
@@ -11427,7 +11427,7 @@
                 </a:solidFill>
                 <a:latin typeface="Microsoft YaHei"/>
               </a:rPr>
-              <a:t>SQLite + 属性精确；经验库：向量语义召回</a:t>
+              <a:t>SQLite+属性精确；经验库：向量语义召回</a:t>
             </a:r>
           </a:p>
         </p:txBody>
@@ -11554,7 +11554,7 @@
                 </a:solidFill>
                 <a:latin typeface="Microsoft YaHei"/>
               </a:rPr>
-              <a:t>attrs 精确命中绕过 min_score（构造性相关）</a:t>
+              <a:t>attrs 精确命中绕过 min_score——查询方显式指定条件即构造性相关</a:t>
             </a:r>
           </a:p>
         </p:txBody>
@@ -11659,8 +11659,8 @@
         </p:nvSpPr>
         <p:spPr>
           <a:xfrm>
-            <a:off x="900000" y="2862000"/>
-            <a:ext cx="9936000" cy="198000"/>
+            <a:off x="900000" y="2959200"/>
+            <a:ext cx="9936000" cy="342000"/>
           </a:xfrm>
           <a:prstGeom prst="rect">
             <a:avLst/>
@@ -11675,55 +11675,20 @@
           <a:p>
             <a:pPr algn="l"/>
             <a:r>
-              <a:rPr sz="1500" b="1">
-                <a:solidFill>
-                  <a:srgbClr val="1F3A68"/>
-                </a:solidFill>
-                <a:latin typeface="Microsoft YaHei"/>
-              </a:rPr>
-              <a:t>接口示例</a:t>
-            </a:r>
-          </a:p>
-        </p:txBody>
-      </p:sp>
-      <p:sp>
-        <p:nvSpPr>
-          <p:cNvPr id="16" name="TextBox 15"/>
-          <p:cNvSpPr txBox="1"/>
-          <p:nvPr/>
-        </p:nvSpPr>
-        <p:spPr>
-          <a:xfrm>
-            <a:off x="900000" y="3067200"/>
-            <a:ext cx="9936000" cy="306000"/>
-          </a:xfrm>
-          <a:prstGeom prst="rect">
-            <a:avLst/>
-          </a:prstGeom>
-          <a:noFill/>
-        </p:spPr>
-        <p:txBody>
-          <a:bodyPr wrap="square">
-            <a:spAutoFit/>
-          </a:bodyPr>
-          <a:lstStyle/>
-          <a:p>
-            <a:pPr algn="l"/>
-            <a:r>
-              <a:rPr sz="1300" b="0">
-                <a:solidFill>
-                  <a:srgbClr val="555F6E"/>
-                </a:solidFill>
-                <a:latin typeface="Microsoft YaHei"/>
-              </a:rPr>
-              <a:t/>
-            </a:r>
-          </a:p>
-        </p:txBody>
-      </p:sp>
-      <p:sp>
-        <p:nvSpPr>
-          <p:cNvPr id="17" name="Rectangle 16"/>
+              <a:rPr sz="1400" b="0">
+                <a:solidFill>
+                  <a:srgbClr val="222830"/>
+                </a:solidFill>
+                <a:latin typeface="Microsoft YaHei"/>
+              </a:rPr>
+              <a:t>接口示例与融合策略如下</a:t>
+            </a:r>
+          </a:p>
+        </p:txBody>
+      </p:sp>
+      <p:sp>
+        <p:nvSpPr>
+          <p:cNvPr id="16" name="Rectangle 15"/>
           <p:cNvSpPr/>
           <p:nvPr/>
         </p:nvSpPr>
@@ -11767,7 +11732,7 @@
       </p:sp>
       <p:sp>
         <p:nvSpPr>
-          <p:cNvPr id="18" name="TextBox 17"/>
+          <p:cNvPr id="17" name="TextBox 16"/>
           <p:cNvSpPr txBox="1"/>
           <p:nvPr/>
         </p:nvSpPr>
@@ -11802,7 +11767,7 @@
       </p:sp>
       <p:sp>
         <p:nvSpPr>
-          <p:cNvPr id="19" name="Rectangle 18"/>
+          <p:cNvPr id="18" name="Rectangle 17"/>
           <p:cNvSpPr/>
           <p:nvPr/>
         </p:nvSpPr>
@@ -11848,7 +11813,7 @@
       </p:sp>
       <p:sp>
         <p:nvSpPr>
-          <p:cNvPr id="20" name="TextBox 19"/>
+          <p:cNvPr id="19" name="TextBox 18"/>
           <p:cNvSpPr txBox="1"/>
           <p:nvPr/>
         </p:nvSpPr>
@@ -11870,60 +11835,36 @@
           <a:p>
             <a:pPr algn="l"/>
             <a:r>
-              <a:rPr sz="1200" b="0">
+              <a:rPr sz="1100" b="0">
                 <a:solidFill>
                   <a:srgbClr val="1F3A68"/>
                 </a:solidFill>
                 <a:latin typeface="Consolas"/>
               </a:rPr>
-              <a:t># 事实精确：属性过滤</a:t>
-            </a:r>
-          </a:p>
-          <a:p>
-            <a:pPr algn="l"/>
-            <a:r>
-              <a:rPr sz="1200" b="0">
+              <a:t>hits_exact = factual.search_attrs({'装备': 'T-90'})</a:t>
+            </a:r>
+          </a:p>
+          <a:p>
+            <a:pPr algn="l"/>
+            <a:r>
+              <a:rPr sz="1100" b="0">
                 <a:solidFill>
                   <a:srgbClr val="1F3A68"/>
                 </a:solidFill>
                 <a:latin typeface="Consolas"/>
               </a:rPr>
-              <a:t>hits_exact = factual.search_attrs({'装备': 'T-90'})</a:t>
-            </a:r>
-          </a:p>
-          <a:p>
-            <a:pPr algn="l"/>
-            <a:r>
-              <a:rPr sz="1200" b="0">
+              <a:t>hits_sem = experiential.search('夜战侦察教训')</a:t>
+            </a:r>
+          </a:p>
+          <a:p>
+            <a:pPr algn="l"/>
+            <a:r>
+              <a:rPr sz="1100" b="0">
                 <a:solidFill>
                   <a:srgbClr val="1F3A68"/>
                 </a:solidFill>
                 <a:latin typeface="Consolas"/>
               </a:rPr>
-              <a:t># 经验语义：向量召回</a:t>
-            </a:r>
-          </a:p>
-          <a:p>
-            <a:pPr algn="l"/>
-            <a:r>
-              <a:rPr sz="1200" b="0">
-                <a:solidFill>
-                  <a:srgbClr val="1F3A68"/>
-                </a:solidFill>
-                <a:latin typeface="Consolas"/>
-              </a:rPr>
-              <a:t>hits_sem = experiential.search('夜战侦察教训')</a:t>
-            </a:r>
-          </a:p>
-          <a:p>
-            <a:pPr algn="l"/>
-            <a:r>
-              <a:rPr sz="1200" b="0">
-                <a:solidFill>
-                  <a:srgbClr val="1F3A68"/>
-                </a:solidFill>
-                <a:latin typeface="Consolas"/>
-              </a:rPr>
               <a:t># 融合时：attrs 命中即相关，不参与相似度阈值</a:t>
             </a:r>
           </a:p>
@@ -11931,7 +11872,7 @@
       </p:sp>
       <p:sp>
         <p:nvSpPr>
-          <p:cNvPr id="21" name="Rectangle 20"/>
+          <p:cNvPr id="20" name="Rectangle 19"/>
           <p:cNvSpPr/>
           <p:nvPr/>
         </p:nvSpPr>
@@ -11975,7 +11916,7 @@
       </p:sp>
       <p:sp>
         <p:nvSpPr>
-          <p:cNvPr id="22" name="TextBox 21"/>
+          <p:cNvPr id="21" name="TextBox 20"/>
           <p:cNvSpPr txBox="1"/>
           <p:nvPr/>
         </p:nvSpPr>
@@ -12010,7 +11951,7 @@
       </p:sp>
       <p:sp>
         <p:nvSpPr>
-          <p:cNvPr id="23" name="TextBox 22"/>
+          <p:cNvPr id="22" name="TextBox 21"/>
           <p:cNvSpPr txBox="1"/>
           <p:nvPr/>
         </p:nvSpPr>
@@ -12341,7 +12282,7 @@
                 </a:solidFill>
                 <a:latin typeface="Microsoft YaHei"/>
               </a:rPr>
-              <a:t>vector/BM25/SQL 三路；hybrid 加权累加，single 便于消融</a:t>
+              <a:t>vector/BM25/SQL 三路；hybrid 加权累加，single 供消融</a:t>
             </a:r>
           </a:p>
         </p:txBody>
@@ -12819,7 +12760,7 @@
           <a:p>
             <a:pPr algn="l"/>
             <a:r>
-              <a:rPr sz="1200" b="0">
+              <a:rPr sz="1100" b="0">
                 <a:solidFill>
                   <a:srgbClr val="1F3A68"/>
                 </a:solidFill>
@@ -12831,7 +12772,7 @@
           <a:p>
             <a:pPr algn="l"/>
             <a:r>
-              <a:rPr sz="1200" b="0">
+              <a:rPr sz="1100" b="0">
                 <a:solidFill>
                   <a:srgbClr val="1F3A68"/>
                 </a:solidFill>
@@ -12843,7 +12784,7 @@
           <a:p>
             <a:pPr algn="l"/>
             <a:r>
-              <a:rPr sz="1200" b="0">
+              <a:rPr sz="1100" b="0">
                 <a:solidFill>
                   <a:srgbClr val="1F3A68"/>
                 </a:solidFill>
@@ -12855,7 +12796,7 @@
           <a:p>
             <a:pPr algn="l"/>
             <a:r>
-              <a:rPr sz="1200" b="0">
+              <a:rPr sz="1100" b="0">
                 <a:solidFill>
                   <a:srgbClr val="1F3A68"/>
                 </a:solidFill>
@@ -12867,7 +12808,7 @@
           <a:p>
             <a:pPr algn="l"/>
             <a:r>
-              <a:rPr sz="1200" b="0">
+              <a:rPr sz="1100" b="0">
                 <a:solidFill>
                   <a:srgbClr val="1F3A68"/>
                 </a:solidFill>
@@ -12879,7 +12820,7 @@
           <a:p>
             <a:pPr algn="l"/>
             <a:r>
-              <a:rPr sz="1200" b="0">
+              <a:rPr sz="1100" b="0">
                 <a:solidFill>
                   <a:srgbClr val="1F3A68"/>
                 </a:solidFill>
@@ -12891,43 +12832,55 @@
           <a:p>
             <a:pPr algn="l"/>
             <a:r>
-              <a:rPr sz="1200" b="0">
+              <a:rPr sz="1100" b="0">
                 <a:solidFill>
                   <a:srgbClr val="1F3A68"/>
                 </a:solidFill>
                 <a:latin typeface="Consolas"/>
               </a:rPr>
-              <a:t>    fused = aggregate_by_id(pool, weights)  # 多路累加</a:t>
-            </a:r>
-          </a:p>
-          <a:p>
-            <a:pPr algn="l"/>
-            <a:r>
-              <a:rPr sz="1200" b="0">
+              <a:t>    fused = aggregate_by_id(pool, weights)</a:t>
+            </a:r>
+          </a:p>
+          <a:p>
+            <a:pPr algn="l"/>
+            <a:r>
+              <a:rPr sz="1100" b="0">
                 <a:solidFill>
                   <a:srgbClr val="1F3A68"/>
                 </a:solidFill>
                 <a:latin typeface="Consolas"/>
               </a:rPr>
-              <a:t>    if q.stage: fused = add_stage_bonus(fused, q.stage)</a:t>
-            </a:r>
-          </a:p>
-          <a:p>
-            <a:pPr algn="l"/>
-            <a:r>
-              <a:rPr sz="1200" b="0">
+              <a:t>    if q.stage:</a:t>
+            </a:r>
+          </a:p>
+          <a:p>
+            <a:pPr algn="l"/>
+            <a:r>
+              <a:rPr sz="1100" b="0">
                 <a:solidFill>
                   <a:srgbClr val="1F3A68"/>
                 </a:solidFill>
                 <a:latin typeface="Consolas"/>
               </a:rPr>
+              <a:t>        fused = add_stage_bonus(fused, q.stage)</a:t>
+            </a:r>
+          </a:p>
+          <a:p>
+            <a:pPr algn="l"/>
+            <a:r>
+              <a:rPr sz="1100" b="0">
+                <a:solidFill>
+                  <a:srgbClr val="1F3A68"/>
+                </a:solidFill>
+                <a:latin typeface="Consolas"/>
+              </a:rPr>
               <a:t>    ranked = [x for x in sorted(fused, reverse=True)</a:t>
             </a:r>
           </a:p>
           <a:p>
             <a:pPr algn="l"/>
             <a:r>
-              <a:rPr sz="1200" b="0">
+              <a:rPr sz="1100" b="0">
                 <a:solidFill>
                   <a:srgbClr val="1F3A68"/>
                 </a:solidFill>
@@ -12939,19 +12892,31 @@
           <a:p>
             <a:pPr algn="l"/>
             <a:r>
-              <a:rPr sz="1200" b="0">
+              <a:rPr sz="1100" b="0">
                 <a:solidFill>
                   <a:srgbClr val="1F3A68"/>
                 </a:solidFill>
                 <a:latin typeface="Consolas"/>
               </a:rPr>
-              <a:t>    for r in ranked: r.entry.mark_recalled()</a:t>
-            </a:r>
-          </a:p>
-          <a:p>
-            <a:pPr algn="l"/>
-            <a:r>
-              <a:rPr sz="1200" b="0">
+              <a:t>    for r in ranked:</a:t>
+            </a:r>
+          </a:p>
+          <a:p>
+            <a:pPr algn="l"/>
+            <a:r>
+              <a:rPr sz="1100" b="0">
+                <a:solidFill>
+                  <a:srgbClr val="1F3A68"/>
+                </a:solidFill>
+                <a:latin typeface="Consolas"/>
+              </a:rPr>
+              <a:t>        r.entry.mark_recalled()</a:t>
+            </a:r>
+          </a:p>
+          <a:p>
+            <a:pPr algn="l"/>
+            <a:r>
+              <a:rPr sz="1100" b="0">
                 <a:solidFill>
                   <a:srgbClr val="1F3A68"/>
                 </a:solidFill>
@@ -13409,7 +13374,7 @@
                 </a:solidFill>
                 <a:latin typeface="Microsoft YaHei"/>
               </a:rPr>
-              <a:t>LLM 提候选，确定性代码执行</a:t>
+              <a:t>LLM 提候选，确定性代码执行写/合/忘/抽</a:t>
             </a:r>
           </a:p>
         </p:txBody>
@@ -13676,8 +13641,8 @@
         </p:nvSpPr>
         <p:spPr>
           <a:xfrm>
-            <a:off x="900000" y="2862000"/>
-            <a:ext cx="9936000" cy="198000"/>
+            <a:off x="900000" y="2959200"/>
+            <a:ext cx="9936000" cy="342000"/>
           </a:xfrm>
           <a:prstGeom prst="rect">
             <a:avLst/>
@@ -13692,55 +13657,20 @@
           <a:p>
             <a:pPr algn="l"/>
             <a:r>
-              <a:rPr sz="1500" b="1">
-                <a:solidFill>
-                  <a:srgbClr val="1F3A68"/>
-                </a:solidFill>
-                <a:latin typeface="Microsoft YaHei"/>
-              </a:rPr>
-              <a:t>抽象</a:t>
-            </a:r>
-          </a:p>
-        </p:txBody>
-      </p:sp>
-      <p:sp>
-        <p:nvSpPr>
-          <p:cNvPr id="17" name="TextBox 16"/>
-          <p:cNvSpPr txBox="1"/>
-          <p:nvPr/>
-        </p:nvSpPr>
-        <p:spPr>
-          <a:xfrm>
-            <a:off x="900000" y="3067200"/>
-            <a:ext cx="9936000" cy="306000"/>
-          </a:xfrm>
-          <a:prstGeom prst="rect">
-            <a:avLst/>
-          </a:prstGeom>
-          <a:noFill/>
-        </p:spPr>
-        <p:txBody>
-          <a:bodyPr wrap="square">
-            <a:spAutoFit/>
-          </a:bodyPr>
-          <a:lstStyle/>
-          <a:p>
-            <a:pPr algn="l"/>
-            <a:r>
-              <a:rPr sz="1300" b="0">
-                <a:solidFill>
-                  <a:srgbClr val="555F6E"/>
-                </a:solidFill>
-                <a:latin typeface="Microsoft YaHei"/>
-              </a:rPr>
-              <a:t>≥2 条新经验 → 一条通用教训</a:t>
-            </a:r>
-          </a:p>
-        </p:txBody>
-      </p:sp>
-      <p:sp>
-        <p:nvSpPr>
-          <p:cNvPr id="18" name="Rectangle 17"/>
+              <a:rPr sz="1400" b="0">
+                <a:solidFill>
+                  <a:srgbClr val="222830"/>
+                </a:solidFill>
+                <a:latin typeface="Microsoft YaHei"/>
+              </a:rPr>
+              <a:t>同场新经验≥2 条触发抽象</a:t>
+            </a:r>
+          </a:p>
+        </p:txBody>
+      </p:sp>
+      <p:sp>
+        <p:nvSpPr>
+          <p:cNvPr id="17" name="Rectangle 16"/>
           <p:cNvSpPr/>
           <p:nvPr/>
         </p:nvSpPr>
@@ -13784,7 +13714,7 @@
       </p:sp>
       <p:sp>
         <p:nvSpPr>
-          <p:cNvPr id="19" name="TextBox 18"/>
+          <p:cNvPr id="18" name="TextBox 17"/>
           <p:cNvSpPr txBox="1"/>
           <p:nvPr/>
         </p:nvSpPr>
@@ -13819,7 +13749,7 @@
       </p:sp>
       <p:sp>
         <p:nvSpPr>
-          <p:cNvPr id="20" name="Rectangle 19"/>
+          <p:cNvPr id="19" name="Rectangle 18"/>
           <p:cNvSpPr/>
           <p:nvPr/>
         </p:nvSpPr>
@@ -13865,7 +13795,7 @@
       </p:sp>
       <p:sp>
         <p:nvSpPr>
-          <p:cNvPr id="21" name="TextBox 20"/>
+          <p:cNvPr id="20" name="TextBox 19"/>
           <p:cNvSpPr txBox="1"/>
           <p:nvPr/>
         </p:nvSpPr>
@@ -13887,7 +13817,7 @@
           <a:p>
             <a:pPr algn="l"/>
             <a:r>
-              <a:rPr sz="1200" b="0">
+              <a:rPr sz="1100" b="0">
                 <a:solidFill>
                   <a:srgbClr val="1F3A68"/>
                 </a:solidFill>
@@ -13899,7 +13829,7 @@
           <a:p>
             <a:pPr algn="l"/>
             <a:r>
-              <a:rPr sz="1200" b="0">
+              <a:rPr sz="1100" b="0">
                 <a:solidFill>
                   <a:srgbClr val="1F3A68"/>
                 </a:solidFill>
@@ -13911,7 +13841,7 @@
           <a:p>
             <a:pPr algn="l"/>
             <a:r>
-              <a:rPr sz="1200" b="0">
+              <a:rPr sz="1100" b="0">
                 <a:solidFill>
                   <a:srgbClr val="1F3A68"/>
                 </a:solidFill>
@@ -13923,43 +13853,67 @@
           <a:p>
             <a:pPr algn="l"/>
             <a:r>
-              <a:rPr sz="1200" b="0">
+              <a:rPr sz="1100" b="0">
                 <a:solidFill>
                   <a:srgbClr val="1F3A68"/>
                 </a:solidFill>
                 <a:latin typeface="Consolas"/>
               </a:rPr>
-              <a:t>        if not boundary.promote(op.content): continue</a:t>
-            </a:r>
-          </a:p>
-          <a:p>
-            <a:pPr algn="l"/>
-            <a:r>
-              <a:rPr sz="1200" b="0">
+              <a:t>        if not boundary.promote(op.content):</a:t>
+            </a:r>
+          </a:p>
+          <a:p>
+            <a:pPr algn="l"/>
+            <a:r>
+              <a:rPr sz="1100" b="0">
                 <a:solidFill>
                   <a:srgbClr val="1F3A68"/>
                 </a:solidFill>
                 <a:latin typeface="Consolas"/>
               </a:rPr>
-              <a:t>        if write(op) is None: skipped += 1</a:t>
-            </a:r>
-          </a:p>
-          <a:p>
-            <a:pPr algn="l"/>
-            <a:r>
-              <a:rPr sz="1200" b="0">
+              <a:t>            continue</a:t>
+            </a:r>
+          </a:p>
+          <a:p>
+            <a:pPr algn="l"/>
+            <a:r>
+              <a:rPr sz="1100" b="0">
                 <a:solidFill>
                   <a:srgbClr val="1F3A68"/>
                 </a:solidFill>
                 <a:latin typeface="Consolas"/>
               </a:rPr>
+              <a:t>        if write(op) is None:</a:t>
+            </a:r>
+          </a:p>
+          <a:p>
+            <a:pPr algn="l"/>
+            <a:r>
+              <a:rPr sz="1100" b="0">
+                <a:solidFill>
+                  <a:srgbClr val="1F3A68"/>
+                </a:solidFill>
+                <a:latin typeface="Consolas"/>
+              </a:rPr>
+              <a:t>            skipped += 1</a:t>
+            </a:r>
+          </a:p>
+          <a:p>
+            <a:pPr algn="l"/>
+            <a:r>
+              <a:rPr sz="1100" b="0">
+                <a:solidFill>
+                  <a:srgbClr val="1F3A68"/>
+                </a:solidFill>
+                <a:latin typeface="Consolas"/>
+              </a:rPr>
               <a:t>    merge_new_entries()</a:t>
             </a:r>
           </a:p>
           <a:p>
             <a:pPr algn="l"/>
             <a:r>
-              <a:rPr sz="1200" b="0">
+              <a:rPr sz="1100" b="0">
                 <a:solidFill>
                   <a:srgbClr val="1F3A68"/>
                 </a:solidFill>
@@ -13971,31 +13925,43 @@
           <a:p>
             <a:pPr algn="l"/>
             <a:r>
-              <a:rPr sz="1200" b="0">
+              <a:rPr sz="1100" b="0">
                 <a:solidFill>
                   <a:srgbClr val="1F3A68"/>
                 </a:solidFill>
                 <a:latin typeface="Consolas"/>
               </a:rPr>
-              <a:t>    if len(new_experiences) &gt;= 2: abstract()</a:t>
-            </a:r>
-          </a:p>
-          <a:p>
-            <a:pPr algn="l"/>
-            <a:r>
-              <a:rPr sz="1200" b="0">
+              <a:t>    if len(new_experiences) &gt;= 2:</a:t>
+            </a:r>
+          </a:p>
+          <a:p>
+            <a:pPr algn="l"/>
+            <a:r>
+              <a:rPr sz="1100" b="0">
                 <a:solidFill>
                   <a:srgbClr val="1F3A68"/>
                 </a:solidFill>
                 <a:latin typeface="Consolas"/>
               </a:rPr>
+              <a:t>        abstract()</a:t>
+            </a:r>
+          </a:p>
+          <a:p>
+            <a:pPr algn="l"/>
+            <a:r>
+              <a:rPr sz="1100" b="0">
+                <a:solidFill>
+                  <a:srgbClr val="1F3A68"/>
+                </a:solidFill>
+                <a:latin typeface="Consolas"/>
+              </a:rPr>
               <a:t/>
             </a:r>
           </a:p>
           <a:p>
             <a:pPr algn="l"/>
             <a:r>
-              <a:rPr sz="1200" b="0">
+              <a:rPr sz="1100" b="0">
                 <a:solidFill>
                   <a:srgbClr val="1F3A68"/>
                 </a:solidFill>
@@ -14007,32 +13973,44 @@
           <a:p>
             <a:pPr algn="l"/>
             <a:r>
-              <a:rPr sz="1200" b="0">
+              <a:rPr sz="1100" b="0">
                 <a:solidFill>
                   <a:srgbClr val="1F3A68"/>
                 </a:solidFill>
                 <a:latin typeface="Consolas"/>
               </a:rPr>
-              <a:t>R = math.exp(-t / max(S, 1e-6))</a:t>
-            </a:r>
-          </a:p>
-          <a:p>
-            <a:pPr algn="l"/>
-            <a:r>
-              <a:rPr sz="1200" b="0">
+              <a:t>R = exp(-t / max(S, 1e-6))</a:t>
+            </a:r>
+          </a:p>
+          <a:p>
+            <a:pPr algn="l"/>
+            <a:r>
+              <a:rPr sz="1100" b="0">
                 <a:solidFill>
                   <a:srgbClr val="1F3A68"/>
                 </a:solidFill>
                 <a:latin typeface="Consolas"/>
               </a:rPr>
-              <a:t># 命中强化：S += 1, t 重置</a:t>
-            </a:r>
-          </a:p>
-        </p:txBody>
-      </p:sp>
-      <p:sp>
-        <p:nvSpPr>
-          <p:cNvPr id="22" name="Rectangle 21"/>
+              <a:t># 命中强化</a:t>
+            </a:r>
+          </a:p>
+          <a:p>
+            <a:pPr algn="l"/>
+            <a:r>
+              <a:rPr sz="1100" b="0">
+                <a:solidFill>
+                  <a:srgbClr val="1F3A68"/>
+                </a:solidFill>
+                <a:latin typeface="Consolas"/>
+              </a:rPr>
+              <a:t>S += 1; t 重置</a:t>
+            </a:r>
+          </a:p>
+        </p:txBody>
+      </p:sp>
+      <p:sp>
+        <p:nvSpPr>
+          <p:cNvPr id="21" name="Rectangle 20"/>
           <p:cNvSpPr/>
           <p:nvPr/>
         </p:nvSpPr>
@@ -14076,7 +14054,7 @@
       </p:sp>
       <p:sp>
         <p:nvSpPr>
-          <p:cNvPr id="23" name="TextBox 22"/>
+          <p:cNvPr id="22" name="TextBox 21"/>
           <p:cNvSpPr txBox="1"/>
           <p:nvPr/>
         </p:nvSpPr>
@@ -14111,7 +14089,7 @@
       </p:sp>
       <p:sp>
         <p:nvSpPr>
-          <p:cNvPr id="24" name="TextBox 23"/>
+          <p:cNvPr id="23" name="TextBox 22"/>
           <p:cNvSpPr txBox="1"/>
           <p:nvPr/>
         </p:nvSpPr>
@@ -14322,697 +14300,119 @@
       </p:sp>
       <p:sp>
         <p:nvSpPr>
-          <p:cNvPr id="6" name="Rounded Rectangle 5"/>
+          <p:cNvPr id="6" name="TextBox 5"/>
+          <p:cNvSpPr txBox="1"/>
+          <p:nvPr/>
+        </p:nvSpPr>
+        <p:spPr>
+          <a:xfrm>
+            <a:off x="792000" y="1828800"/>
+            <a:ext cx="648000" cy="432000"/>
+          </a:xfrm>
+          <a:prstGeom prst="rect">
+            <a:avLst/>
+          </a:prstGeom>
+          <a:noFill/>
+        </p:spPr>
+        <p:txBody>
+          <a:bodyPr wrap="none">
+            <a:spAutoFit/>
+          </a:bodyPr>
+          <a:lstStyle/>
+          <a:p>
+            <a:pPr algn="l"/>
+            <a:r>
+              <a:rPr sz="2600" b="1">
+                <a:solidFill>
+                  <a:srgbClr val="2F6EBA"/>
+                </a:solidFill>
+                <a:latin typeface="Microsoft YaHei"/>
+              </a:rPr>
+              <a:t>01</a:t>
+            </a:r>
+          </a:p>
+        </p:txBody>
+      </p:sp>
+      <p:sp>
+        <p:nvSpPr>
+          <p:cNvPr id="7" name="TextBox 6"/>
+          <p:cNvSpPr txBox="1"/>
+          <p:nvPr/>
+        </p:nvSpPr>
+        <p:spPr>
+          <a:xfrm>
+            <a:off x="1512000" y="1800000"/>
+            <a:ext cx="9828000" cy="324000"/>
+          </a:xfrm>
+          <a:prstGeom prst="rect">
+            <a:avLst/>
+          </a:prstGeom>
+          <a:noFill/>
+        </p:spPr>
+        <p:txBody>
+          <a:bodyPr wrap="square">
+            <a:spAutoFit/>
+          </a:bodyPr>
+          <a:lstStyle/>
+          <a:p>
+            <a:pPr algn="l"/>
+            <a:r>
+              <a:rPr sz="2000" b="1">
+                <a:solidFill>
+                  <a:srgbClr val="1F3A68"/>
+                </a:solidFill>
+                <a:latin typeface="Microsoft YaHei"/>
+              </a:rPr>
+              <a:t>复盘驱动</a:t>
+            </a:r>
+          </a:p>
+        </p:txBody>
+      </p:sp>
+      <p:sp>
+        <p:nvSpPr>
+          <p:cNvPr id="8" name="TextBox 7"/>
+          <p:cNvSpPr txBox="1"/>
+          <p:nvPr/>
+        </p:nvSpPr>
+        <p:spPr>
+          <a:xfrm>
+            <a:off x="1512000" y="2106000"/>
+            <a:ext cx="9828000" cy="593999"/>
+          </a:xfrm>
+          <a:prstGeom prst="rect">
+            <a:avLst/>
+          </a:prstGeom>
+          <a:noFill/>
+        </p:spPr>
+        <p:txBody>
+          <a:bodyPr wrap="square">
+            <a:spAutoFit/>
+          </a:bodyPr>
+          <a:lstStyle/>
+          <a:p>
+            <a:pPr algn="l"/>
+            <a:r>
+              <a:rPr sz="1400" b="0">
+                <a:solidFill>
+                  <a:srgbClr val="555F6E"/>
+                </a:solidFill>
+                <a:latin typeface="Microsoft YaHei"/>
+              </a:rPr>
+              <a:t>只有场次复盘文本才能触发晋升，流水账被挡在门外</a:t>
+            </a:r>
+          </a:p>
+        </p:txBody>
+      </p:sp>
+      <p:sp>
+        <p:nvSpPr>
+          <p:cNvPr id="9" name="Rectangle 8"/>
           <p:cNvSpPr/>
           <p:nvPr/>
         </p:nvSpPr>
         <p:spPr>
           <a:xfrm>
-            <a:off x="720000" y="1655999"/>
-            <a:ext cx="10728000" cy="756000"/>
-          </a:xfrm>
-          <a:prstGeom prst="roundRect">
-            <a:avLst>
-              <a:gd name="adj" fmla="val 8000"/>
-            </a:avLst>
-          </a:prstGeom>
-          <a:solidFill>
-            <a:srgbClr val="F2F4F8"/>
-          </a:solidFill>
-          <a:ln w="12700">
-            <a:solidFill>
-              <a:srgbClr val="C8D0DC"/>
-            </a:solidFill>
-          </a:ln>
-          <a:effectLst/>
-        </p:spPr>
-        <p:style>
-          <a:lnRef idx="1">
-            <a:schemeClr val="accent1"/>
-          </a:lnRef>
-          <a:fillRef idx="3">
-            <a:schemeClr val="accent1"/>
-          </a:fillRef>
-          <a:effectRef idx="2">
-            <a:schemeClr val="accent1"/>
-          </a:effectRef>
-          <a:fontRef idx="minor">
-            <a:schemeClr val="lt1"/>
-          </a:fontRef>
-        </p:style>
-        <p:txBody>
-          <a:bodyPr rtlCol="0" anchor="ctr"/>
-          <a:lstStyle/>
-          <a:p>
-            <a:pPr algn="ctr"/>
-          </a:p>
-        </p:txBody>
-      </p:sp>
-      <p:sp>
-        <p:nvSpPr>
-          <p:cNvPr id="7" name="Rectangle 6"/>
-          <p:cNvSpPr/>
-          <p:nvPr/>
-        </p:nvSpPr>
-        <p:spPr>
-          <a:xfrm>
-            <a:off x="720000" y="1655999"/>
-            <a:ext cx="79200" cy="756000"/>
-          </a:xfrm>
-          <a:prstGeom prst="rect">
-            <a:avLst/>
-          </a:prstGeom>
-          <a:solidFill>
-            <a:srgbClr val="2F6EBA"/>
-          </a:solidFill>
-          <a:ln>
-            <a:noFill/>
-          </a:ln>
-          <a:effectLst/>
-        </p:spPr>
-        <p:style>
-          <a:lnRef idx="1">
-            <a:schemeClr val="accent1"/>
-          </a:lnRef>
-          <a:fillRef idx="3">
-            <a:schemeClr val="accent1"/>
-          </a:fillRef>
-          <a:effectRef idx="2">
-            <a:schemeClr val="accent1"/>
-          </a:effectRef>
-          <a:fontRef idx="minor">
-            <a:schemeClr val="lt1"/>
-          </a:fontRef>
-        </p:style>
-        <p:txBody>
-          <a:bodyPr rtlCol="0" anchor="ctr"/>
-          <a:lstStyle/>
-          <a:p>
-            <a:pPr algn="ctr"/>
-          </a:p>
-        </p:txBody>
-      </p:sp>
-      <p:sp>
-        <p:nvSpPr>
-          <p:cNvPr id="8" name="TextBox 7"/>
-          <p:cNvSpPr txBox="1"/>
-          <p:nvPr/>
-        </p:nvSpPr>
-        <p:spPr>
-          <a:xfrm>
-            <a:off x="882000" y="1720799"/>
-            <a:ext cx="540000" cy="360000"/>
-          </a:xfrm>
-          <a:prstGeom prst="rect">
-            <a:avLst/>
-          </a:prstGeom>
-          <a:noFill/>
-        </p:spPr>
-        <p:txBody>
-          <a:bodyPr wrap="none">
-            <a:spAutoFit/>
-          </a:bodyPr>
-          <a:lstStyle/>
-          <a:p>
-            <a:pPr algn="l"/>
-            <a:r>
-              <a:rPr sz="1800" b="1">
-                <a:solidFill>
-                  <a:srgbClr val="2F6EBA"/>
-                </a:solidFill>
-                <a:latin typeface="Microsoft YaHei"/>
-              </a:rPr>
-              <a:t>01</a:t>
-            </a:r>
-          </a:p>
-        </p:txBody>
-      </p:sp>
-      <p:sp>
-        <p:nvSpPr>
-          <p:cNvPr id="9" name="TextBox 8"/>
-          <p:cNvSpPr txBox="1"/>
-          <p:nvPr/>
-        </p:nvSpPr>
-        <p:spPr>
-          <a:xfrm>
-            <a:off x="1296000" y="1710000"/>
-            <a:ext cx="9936000" cy="198000"/>
-          </a:xfrm>
-          <a:prstGeom prst="rect">
-            <a:avLst/>
-          </a:prstGeom>
-          <a:noFill/>
-        </p:spPr>
-        <p:txBody>
-          <a:bodyPr wrap="square">
-            <a:spAutoFit/>
-          </a:bodyPr>
-          <a:lstStyle/>
-          <a:p>
-            <a:pPr algn="l"/>
-            <a:r>
-              <a:rPr sz="1500" b="1">
-                <a:solidFill>
-                  <a:srgbClr val="1F3A68"/>
-                </a:solidFill>
-                <a:latin typeface="Microsoft YaHei"/>
-              </a:rPr>
-              <a:t>复盘晋升经三道门</a:t>
-            </a:r>
-          </a:p>
-        </p:txBody>
-      </p:sp>
-      <p:sp>
-        <p:nvSpPr>
-          <p:cNvPr id="10" name="TextBox 9"/>
-          <p:cNvSpPr txBox="1"/>
-          <p:nvPr/>
-        </p:nvSpPr>
-        <p:spPr>
-          <a:xfrm>
-            <a:off x="1296000" y="1915199"/>
-            <a:ext cx="9936000" cy="306000"/>
-          </a:xfrm>
-          <a:prstGeom prst="rect">
-            <a:avLst/>
-          </a:prstGeom>
-          <a:noFill/>
-        </p:spPr>
-        <p:txBody>
-          <a:bodyPr wrap="square">
-            <a:spAutoFit/>
-          </a:bodyPr>
-          <a:lstStyle/>
-          <a:p>
-            <a:pPr algn="l"/>
-            <a:r>
-              <a:rPr sz="1300" b="0">
-                <a:solidFill>
-                  <a:srgbClr val="555F6E"/>
-                </a:solidFill>
-                <a:latin typeface="Microsoft YaHei"/>
-              </a:rPr>
-              <a:t>复盘驱动、类别判定、语义查重</a:t>
-            </a:r>
-          </a:p>
-        </p:txBody>
-      </p:sp>
-      <p:sp>
-        <p:nvSpPr>
-          <p:cNvPr id="11" name="Rounded Rectangle 10"/>
-          <p:cNvSpPr/>
-          <p:nvPr/>
-        </p:nvSpPr>
-        <p:spPr>
-          <a:xfrm>
-            <a:off x="720000" y="2491200"/>
-            <a:ext cx="10728000" cy="756000"/>
-          </a:xfrm>
-          <a:prstGeom prst="roundRect">
-            <a:avLst>
-              <a:gd name="adj" fmla="val 8000"/>
-            </a:avLst>
-          </a:prstGeom>
-          <a:solidFill>
-            <a:srgbClr val="F2F4F8"/>
-          </a:solidFill>
-          <a:ln w="12700">
-            <a:solidFill>
-              <a:srgbClr val="C8D0DC"/>
-            </a:solidFill>
-          </a:ln>
-          <a:effectLst/>
-        </p:spPr>
-        <p:style>
-          <a:lnRef idx="1">
-            <a:schemeClr val="accent1"/>
-          </a:lnRef>
-          <a:fillRef idx="3">
-            <a:schemeClr val="accent1"/>
-          </a:fillRef>
-          <a:effectRef idx="2">
-            <a:schemeClr val="accent1"/>
-          </a:effectRef>
-          <a:fontRef idx="minor">
-            <a:schemeClr val="lt1"/>
-          </a:fontRef>
-        </p:style>
-        <p:txBody>
-          <a:bodyPr rtlCol="0" anchor="ctr"/>
-          <a:lstStyle/>
-          <a:p>
-            <a:pPr algn="ctr"/>
-          </a:p>
-        </p:txBody>
-      </p:sp>
-      <p:sp>
-        <p:nvSpPr>
-          <p:cNvPr id="12" name="Rectangle 11"/>
-          <p:cNvSpPr/>
-          <p:nvPr/>
-        </p:nvSpPr>
-        <p:spPr>
-          <a:xfrm>
-            <a:off x="720000" y="2491200"/>
-            <a:ext cx="79200" cy="756000"/>
-          </a:xfrm>
-          <a:prstGeom prst="rect">
-            <a:avLst/>
-          </a:prstGeom>
-          <a:solidFill>
-            <a:srgbClr val="2F6EBA"/>
-          </a:solidFill>
-          <a:ln>
-            <a:noFill/>
-          </a:ln>
-          <a:effectLst/>
-        </p:spPr>
-        <p:style>
-          <a:lnRef idx="1">
-            <a:schemeClr val="accent1"/>
-          </a:lnRef>
-          <a:fillRef idx="3">
-            <a:schemeClr val="accent1"/>
-          </a:fillRef>
-          <a:effectRef idx="2">
-            <a:schemeClr val="accent1"/>
-          </a:effectRef>
-          <a:fontRef idx="minor">
-            <a:schemeClr val="lt1"/>
-          </a:fontRef>
-        </p:style>
-        <p:txBody>
-          <a:bodyPr rtlCol="0" anchor="ctr"/>
-          <a:lstStyle/>
-          <a:p>
-            <a:pPr algn="ctr"/>
-          </a:p>
-        </p:txBody>
-      </p:sp>
-      <p:sp>
-        <p:nvSpPr>
-          <p:cNvPr id="13" name="TextBox 12"/>
-          <p:cNvSpPr txBox="1"/>
-          <p:nvPr/>
-        </p:nvSpPr>
-        <p:spPr>
-          <a:xfrm>
-            <a:off x="882000" y="2556000"/>
-            <a:ext cx="540000" cy="360000"/>
-          </a:xfrm>
-          <a:prstGeom prst="rect">
-            <a:avLst/>
-          </a:prstGeom>
-          <a:noFill/>
-        </p:spPr>
-        <p:txBody>
-          <a:bodyPr wrap="none">
-            <a:spAutoFit/>
-          </a:bodyPr>
-          <a:lstStyle/>
-          <a:p>
-            <a:pPr algn="l"/>
-            <a:r>
-              <a:rPr sz="1800" b="1">
-                <a:solidFill>
-                  <a:srgbClr val="2F6EBA"/>
-                </a:solidFill>
-                <a:latin typeface="Microsoft YaHei"/>
-              </a:rPr>
-              <a:t>02</a:t>
-            </a:r>
-          </a:p>
-        </p:txBody>
-      </p:sp>
-      <p:sp>
-        <p:nvSpPr>
-          <p:cNvPr id="14" name="TextBox 13"/>
-          <p:cNvSpPr txBox="1"/>
-          <p:nvPr/>
-        </p:nvSpPr>
-        <p:spPr>
-          <a:xfrm>
-            <a:off x="1296000" y="2642400"/>
-            <a:ext cx="9936000" cy="342000"/>
-          </a:xfrm>
-          <a:prstGeom prst="rect">
-            <a:avLst/>
-          </a:prstGeom>
-          <a:noFill/>
-        </p:spPr>
-        <p:txBody>
-          <a:bodyPr wrap="square">
-            <a:spAutoFit/>
-          </a:bodyPr>
-          <a:lstStyle/>
-          <a:p>
-            <a:pPr algn="l"/>
-            <a:r>
-              <a:rPr sz="1400" b="0">
-                <a:solidFill>
-                  <a:srgbClr val="222830"/>
-                </a:solidFill>
-                <a:latin typeface="Microsoft YaHei"/>
-              </a:rPr>
-              <a:t>每次判定写入审计日志（boundary）</a:t>
-            </a:r>
-          </a:p>
-        </p:txBody>
-      </p:sp>
-      <p:sp>
-        <p:nvSpPr>
-          <p:cNvPr id="15" name="Rounded Rectangle 14"/>
-          <p:cNvSpPr/>
-          <p:nvPr/>
-        </p:nvSpPr>
-        <p:spPr>
-          <a:xfrm>
-            <a:off x="720000" y="3326400"/>
-            <a:ext cx="10728000" cy="756000"/>
-          </a:xfrm>
-          <a:prstGeom prst="roundRect">
-            <a:avLst>
-              <a:gd name="adj" fmla="val 8000"/>
-            </a:avLst>
-          </a:prstGeom>
-          <a:solidFill>
-            <a:srgbClr val="F2F4F8"/>
-          </a:solidFill>
-          <a:ln w="12700">
-            <a:solidFill>
-              <a:srgbClr val="C8D0DC"/>
-            </a:solidFill>
-          </a:ln>
-          <a:effectLst/>
-        </p:spPr>
-        <p:style>
-          <a:lnRef idx="1">
-            <a:schemeClr val="accent1"/>
-          </a:lnRef>
-          <a:fillRef idx="3">
-            <a:schemeClr val="accent1"/>
-          </a:fillRef>
-          <a:effectRef idx="2">
-            <a:schemeClr val="accent1"/>
-          </a:effectRef>
-          <a:fontRef idx="minor">
-            <a:schemeClr val="lt1"/>
-          </a:fontRef>
-        </p:style>
-        <p:txBody>
-          <a:bodyPr rtlCol="0" anchor="ctr"/>
-          <a:lstStyle/>
-          <a:p>
-            <a:pPr algn="ctr"/>
-          </a:p>
-        </p:txBody>
-      </p:sp>
-      <p:sp>
-        <p:nvSpPr>
-          <p:cNvPr id="16" name="Rectangle 15"/>
-          <p:cNvSpPr/>
-          <p:nvPr/>
-        </p:nvSpPr>
-        <p:spPr>
-          <a:xfrm>
-            <a:off x="720000" y="3326400"/>
-            <a:ext cx="79200" cy="756000"/>
-          </a:xfrm>
-          <a:prstGeom prst="rect">
-            <a:avLst/>
-          </a:prstGeom>
-          <a:solidFill>
-            <a:srgbClr val="2F6EBA"/>
-          </a:solidFill>
-          <a:ln>
-            <a:noFill/>
-          </a:ln>
-          <a:effectLst/>
-        </p:spPr>
-        <p:style>
-          <a:lnRef idx="1">
-            <a:schemeClr val="accent1"/>
-          </a:lnRef>
-          <a:fillRef idx="3">
-            <a:schemeClr val="accent1"/>
-          </a:fillRef>
-          <a:effectRef idx="2">
-            <a:schemeClr val="accent1"/>
-          </a:effectRef>
-          <a:fontRef idx="minor">
-            <a:schemeClr val="lt1"/>
-          </a:fontRef>
-        </p:style>
-        <p:txBody>
-          <a:bodyPr rtlCol="0" anchor="ctr"/>
-          <a:lstStyle/>
-          <a:p>
-            <a:pPr algn="ctr"/>
-          </a:p>
-        </p:txBody>
-      </p:sp>
-      <p:sp>
-        <p:nvSpPr>
-          <p:cNvPr id="17" name="TextBox 16"/>
-          <p:cNvSpPr txBox="1"/>
-          <p:nvPr/>
-        </p:nvSpPr>
-        <p:spPr>
-          <a:xfrm>
-            <a:off x="882000" y="3391200"/>
-            <a:ext cx="540000" cy="360000"/>
-          </a:xfrm>
-          <a:prstGeom prst="rect">
-            <a:avLst/>
-          </a:prstGeom>
-          <a:noFill/>
-        </p:spPr>
-        <p:txBody>
-          <a:bodyPr wrap="none">
-            <a:spAutoFit/>
-          </a:bodyPr>
-          <a:lstStyle/>
-          <a:p>
-            <a:pPr algn="l"/>
-            <a:r>
-              <a:rPr sz="1800" b="1">
-                <a:solidFill>
-                  <a:srgbClr val="2F6EBA"/>
-                </a:solidFill>
-                <a:latin typeface="Microsoft YaHei"/>
-              </a:rPr>
-              <a:t>03</a:t>
-            </a:r>
-          </a:p>
-        </p:txBody>
-      </p:sp>
-      <p:sp>
-        <p:nvSpPr>
-          <p:cNvPr id="18" name="TextBox 17"/>
-          <p:cNvSpPr txBox="1"/>
-          <p:nvPr/>
-        </p:nvSpPr>
-        <p:spPr>
-          <a:xfrm>
-            <a:off x="1296000" y="3477600"/>
-            <a:ext cx="9936000" cy="342000"/>
-          </a:xfrm>
-          <a:prstGeom prst="rect">
-            <a:avLst/>
-          </a:prstGeom>
-          <a:noFill/>
-        </p:spPr>
-        <p:txBody>
-          <a:bodyPr wrap="square">
-            <a:spAutoFit/>
-          </a:bodyPr>
-          <a:lstStyle/>
-          <a:p>
-            <a:pPr algn="l"/>
-            <a:r>
-              <a:rPr sz="1400" b="0">
-                <a:solidFill>
-                  <a:srgbClr val="222830"/>
-                </a:solidFill>
-                <a:latin typeface="Microsoft YaHei"/>
-              </a:rPr>
-              <a:t>查询按 MDMP 七阶段生成，阶段匹配记忆加亲和分</a:t>
-            </a:r>
-          </a:p>
-        </p:txBody>
-      </p:sp>
-      <p:sp>
-        <p:nvSpPr>
-          <p:cNvPr id="19" name="Rounded Rectangle 18"/>
-          <p:cNvSpPr/>
-          <p:nvPr/>
-        </p:nvSpPr>
-        <p:spPr>
-          <a:xfrm>
-            <a:off x="720000" y="4161600"/>
-            <a:ext cx="10728000" cy="756000"/>
-          </a:xfrm>
-          <a:prstGeom prst="roundRect">
-            <a:avLst>
-              <a:gd name="adj" fmla="val 8000"/>
-            </a:avLst>
-          </a:prstGeom>
-          <a:solidFill>
-            <a:srgbClr val="F2F4F8"/>
-          </a:solidFill>
-          <a:ln w="12700">
-            <a:solidFill>
-              <a:srgbClr val="C8D0DC"/>
-            </a:solidFill>
-          </a:ln>
-          <a:effectLst/>
-        </p:spPr>
-        <p:style>
-          <a:lnRef idx="1">
-            <a:schemeClr val="accent1"/>
-          </a:lnRef>
-          <a:fillRef idx="3">
-            <a:schemeClr val="accent1"/>
-          </a:fillRef>
-          <a:effectRef idx="2">
-            <a:schemeClr val="accent1"/>
-          </a:effectRef>
-          <a:fontRef idx="minor">
-            <a:schemeClr val="lt1"/>
-          </a:fontRef>
-        </p:style>
-        <p:txBody>
-          <a:bodyPr rtlCol="0" anchor="ctr"/>
-          <a:lstStyle/>
-          <a:p>
-            <a:pPr algn="ctr"/>
-          </a:p>
-        </p:txBody>
-      </p:sp>
-      <p:sp>
-        <p:nvSpPr>
-          <p:cNvPr id="20" name="Rectangle 19"/>
-          <p:cNvSpPr/>
-          <p:nvPr/>
-        </p:nvSpPr>
-        <p:spPr>
-          <a:xfrm>
-            <a:off x="720000" y="4161600"/>
-            <a:ext cx="79200" cy="756000"/>
-          </a:xfrm>
-          <a:prstGeom prst="rect">
-            <a:avLst/>
-          </a:prstGeom>
-          <a:solidFill>
-            <a:srgbClr val="2F6EBA"/>
-          </a:solidFill>
-          <a:ln>
-            <a:noFill/>
-          </a:ln>
-          <a:effectLst/>
-        </p:spPr>
-        <p:style>
-          <a:lnRef idx="1">
-            <a:schemeClr val="accent1"/>
-          </a:lnRef>
-          <a:fillRef idx="3">
-            <a:schemeClr val="accent1"/>
-          </a:fillRef>
-          <a:effectRef idx="2">
-            <a:schemeClr val="accent1"/>
-          </a:effectRef>
-          <a:fontRef idx="minor">
-            <a:schemeClr val="lt1"/>
-          </a:fontRef>
-        </p:style>
-        <p:txBody>
-          <a:bodyPr rtlCol="0" anchor="ctr"/>
-          <a:lstStyle/>
-          <a:p>
-            <a:pPr algn="ctr"/>
-          </a:p>
-        </p:txBody>
-      </p:sp>
-      <p:sp>
-        <p:nvSpPr>
-          <p:cNvPr id="21" name="TextBox 20"/>
-          <p:cNvSpPr txBox="1"/>
-          <p:nvPr/>
-        </p:nvSpPr>
-        <p:spPr>
-          <a:xfrm>
-            <a:off x="882000" y="4226400"/>
-            <a:ext cx="540000" cy="360000"/>
-          </a:xfrm>
-          <a:prstGeom prst="rect">
-            <a:avLst/>
-          </a:prstGeom>
-          <a:noFill/>
-        </p:spPr>
-        <p:txBody>
-          <a:bodyPr wrap="none">
-            <a:spAutoFit/>
-          </a:bodyPr>
-          <a:lstStyle/>
-          <a:p>
-            <a:pPr algn="l"/>
-            <a:r>
-              <a:rPr sz="1800" b="1">
-                <a:solidFill>
-                  <a:srgbClr val="2F6EBA"/>
-                </a:solidFill>
-                <a:latin typeface="Microsoft YaHei"/>
-              </a:rPr>
-              <a:t>04</a:t>
-            </a:r>
-          </a:p>
-        </p:txBody>
-      </p:sp>
-      <p:sp>
-        <p:nvSpPr>
-          <p:cNvPr id="22" name="TextBox 21"/>
-          <p:cNvSpPr txBox="1"/>
-          <p:nvPr/>
-        </p:nvSpPr>
-        <p:spPr>
-          <a:xfrm>
-            <a:off x="1296000" y="4312800"/>
-            <a:ext cx="9936000" cy="342000"/>
-          </a:xfrm>
-          <a:prstGeom prst="rect">
-            <a:avLst/>
-          </a:prstGeom>
-          <a:noFill/>
-        </p:spPr>
-        <p:txBody>
-          <a:bodyPr wrap="square">
-            <a:spAutoFit/>
-          </a:bodyPr>
-          <a:lstStyle/>
-          <a:p>
-            <a:pPr algn="l"/>
-            <a:r>
-              <a:rPr sz="1400" b="0">
-                <a:solidFill>
-                  <a:srgbClr val="222830"/>
-                </a:solidFill>
-                <a:latin typeface="Microsoft YaHei"/>
-              </a:rPr>
-              <a:t>复盘教训归因到阶段，供同阶段检索优先召回</a:t>
-            </a:r>
-          </a:p>
-        </p:txBody>
-      </p:sp>
-      <p:sp>
-        <p:nvSpPr>
-          <p:cNvPr id="23" name="Rectangle 22"/>
-          <p:cNvSpPr/>
-          <p:nvPr/>
-        </p:nvSpPr>
-        <p:spPr>
-          <a:xfrm>
-            <a:off x="0" y="6606000"/>
-            <a:ext cx="12193200" cy="10800"/>
+            <a:off x="792000" y="2761199"/>
+            <a:ext cx="10620000" cy="10800"/>
           </a:xfrm>
           <a:prstGeom prst="rect">
             <a:avLst/>
@@ -15049,7 +14449,498 @@
       </p:sp>
       <p:sp>
         <p:nvSpPr>
-          <p:cNvPr id="24" name="TextBox 23"/>
+          <p:cNvPr id="10" name="TextBox 9"/>
+          <p:cNvSpPr txBox="1"/>
+          <p:nvPr/>
+        </p:nvSpPr>
+        <p:spPr>
+          <a:xfrm>
+            <a:off x="792000" y="2962799"/>
+            <a:ext cx="648000" cy="432000"/>
+          </a:xfrm>
+          <a:prstGeom prst="rect">
+            <a:avLst/>
+          </a:prstGeom>
+          <a:noFill/>
+        </p:spPr>
+        <p:txBody>
+          <a:bodyPr wrap="none">
+            <a:spAutoFit/>
+          </a:bodyPr>
+          <a:lstStyle/>
+          <a:p>
+            <a:pPr algn="l"/>
+            <a:r>
+              <a:rPr sz="2600" b="1">
+                <a:solidFill>
+                  <a:srgbClr val="2F6EBA"/>
+                </a:solidFill>
+                <a:latin typeface="Microsoft YaHei"/>
+              </a:rPr>
+              <a:t>02</a:t>
+            </a:r>
+          </a:p>
+        </p:txBody>
+      </p:sp>
+      <p:sp>
+        <p:nvSpPr>
+          <p:cNvPr id="11" name="TextBox 10"/>
+          <p:cNvSpPr txBox="1"/>
+          <p:nvPr/>
+        </p:nvSpPr>
+        <p:spPr>
+          <a:xfrm>
+            <a:off x="1512000" y="2933999"/>
+            <a:ext cx="9828000" cy="324000"/>
+          </a:xfrm>
+          <a:prstGeom prst="rect">
+            <a:avLst/>
+          </a:prstGeom>
+          <a:noFill/>
+        </p:spPr>
+        <p:txBody>
+          <a:bodyPr wrap="square">
+            <a:spAutoFit/>
+          </a:bodyPr>
+          <a:lstStyle/>
+          <a:p>
+            <a:pPr algn="l"/>
+            <a:r>
+              <a:rPr sz="2000" b="1">
+                <a:solidFill>
+                  <a:srgbClr val="1F3A68"/>
+                </a:solidFill>
+                <a:latin typeface="Microsoft YaHei"/>
+              </a:rPr>
+              <a:t>类别判定</a:t>
+            </a:r>
+          </a:p>
+        </p:txBody>
+      </p:sp>
+      <p:sp>
+        <p:nvSpPr>
+          <p:cNvPr id="12" name="TextBox 11"/>
+          <p:cNvSpPr txBox="1"/>
+          <p:nvPr/>
+        </p:nvSpPr>
+        <p:spPr>
+          <a:xfrm>
+            <a:off x="1512000" y="3240000"/>
+            <a:ext cx="9828000" cy="593999"/>
+          </a:xfrm>
+          <a:prstGeom prst="rect">
+            <a:avLst/>
+          </a:prstGeom>
+          <a:noFill/>
+        </p:spPr>
+        <p:txBody>
+          <a:bodyPr wrap="square">
+            <a:spAutoFit/>
+          </a:bodyPr>
+          <a:lstStyle/>
+          <a:p>
+            <a:pPr algn="l"/>
+            <a:r>
+              <a:rPr sz="1400" b="0">
+                <a:solidFill>
+                  <a:srgbClr val="555F6E"/>
+                </a:solidFill>
+                <a:latin typeface="Microsoft YaHei"/>
+              </a:rPr>
+              <a:t>事实/经验分别进入对应存储，避免类型混乱</a:t>
+            </a:r>
+          </a:p>
+        </p:txBody>
+      </p:sp>
+      <p:sp>
+        <p:nvSpPr>
+          <p:cNvPr id="13" name="Rectangle 12"/>
+          <p:cNvSpPr/>
+          <p:nvPr/>
+        </p:nvSpPr>
+        <p:spPr>
+          <a:xfrm>
+            <a:off x="792000" y="3895199"/>
+            <a:ext cx="10620000" cy="10800"/>
+          </a:xfrm>
+          <a:prstGeom prst="rect">
+            <a:avLst/>
+          </a:prstGeom>
+          <a:solidFill>
+            <a:srgbClr val="C8D0DC"/>
+          </a:solidFill>
+          <a:ln>
+            <a:noFill/>
+          </a:ln>
+          <a:effectLst/>
+        </p:spPr>
+        <p:style>
+          <a:lnRef idx="1">
+            <a:schemeClr val="accent1"/>
+          </a:lnRef>
+          <a:fillRef idx="3">
+            <a:schemeClr val="accent1"/>
+          </a:fillRef>
+          <a:effectRef idx="2">
+            <a:schemeClr val="accent1"/>
+          </a:effectRef>
+          <a:fontRef idx="minor">
+            <a:schemeClr val="lt1"/>
+          </a:fontRef>
+        </p:style>
+        <p:txBody>
+          <a:bodyPr rtlCol="0" anchor="ctr"/>
+          <a:lstStyle/>
+          <a:p>
+            <a:pPr algn="ctr"/>
+          </a:p>
+        </p:txBody>
+      </p:sp>
+      <p:sp>
+        <p:nvSpPr>
+          <p:cNvPr id="14" name="TextBox 13"/>
+          <p:cNvSpPr txBox="1"/>
+          <p:nvPr/>
+        </p:nvSpPr>
+        <p:spPr>
+          <a:xfrm>
+            <a:off x="792000" y="4096799"/>
+            <a:ext cx="648000" cy="432000"/>
+          </a:xfrm>
+          <a:prstGeom prst="rect">
+            <a:avLst/>
+          </a:prstGeom>
+          <a:noFill/>
+        </p:spPr>
+        <p:txBody>
+          <a:bodyPr wrap="none">
+            <a:spAutoFit/>
+          </a:bodyPr>
+          <a:lstStyle/>
+          <a:p>
+            <a:pPr algn="l"/>
+            <a:r>
+              <a:rPr sz="2600" b="1">
+                <a:solidFill>
+                  <a:srgbClr val="2F6EBA"/>
+                </a:solidFill>
+                <a:latin typeface="Microsoft YaHei"/>
+              </a:rPr>
+              <a:t>03</a:t>
+            </a:r>
+          </a:p>
+        </p:txBody>
+      </p:sp>
+      <p:sp>
+        <p:nvSpPr>
+          <p:cNvPr id="15" name="TextBox 14"/>
+          <p:cNvSpPr txBox="1"/>
+          <p:nvPr/>
+        </p:nvSpPr>
+        <p:spPr>
+          <a:xfrm>
+            <a:off x="1512000" y="4067999"/>
+            <a:ext cx="9828000" cy="324000"/>
+          </a:xfrm>
+          <a:prstGeom prst="rect">
+            <a:avLst/>
+          </a:prstGeom>
+          <a:noFill/>
+        </p:spPr>
+        <p:txBody>
+          <a:bodyPr wrap="square">
+            <a:spAutoFit/>
+          </a:bodyPr>
+          <a:lstStyle/>
+          <a:p>
+            <a:pPr algn="l"/>
+            <a:r>
+              <a:rPr sz="2000" b="1">
+                <a:solidFill>
+                  <a:srgbClr val="1F3A68"/>
+                </a:solidFill>
+                <a:latin typeface="Microsoft YaHei"/>
+              </a:rPr>
+              <a:t>语义查重</a:t>
+            </a:r>
+          </a:p>
+        </p:txBody>
+      </p:sp>
+      <p:sp>
+        <p:nvSpPr>
+          <p:cNvPr id="16" name="TextBox 15"/>
+          <p:cNvSpPr txBox="1"/>
+          <p:nvPr/>
+        </p:nvSpPr>
+        <p:spPr>
+          <a:xfrm>
+            <a:off x="1512000" y="4373999"/>
+            <a:ext cx="9828000" cy="593999"/>
+          </a:xfrm>
+          <a:prstGeom prst="rect">
+            <a:avLst/>
+          </a:prstGeom>
+          <a:noFill/>
+        </p:spPr>
+        <p:txBody>
+          <a:bodyPr wrap="square">
+            <a:spAutoFit/>
+          </a:bodyPr>
+          <a:lstStyle/>
+          <a:p>
+            <a:pPr algn="l"/>
+            <a:r>
+              <a:rPr sz="1400" b="0">
+                <a:solidFill>
+                  <a:srgbClr val="555F6E"/>
+                </a:solidFill>
+                <a:latin typeface="Microsoft YaHei"/>
+              </a:rPr>
+              <a:t>写入前 θ 余弦去重，重复经验不重复入库；每次判定写审计日志</a:t>
+            </a:r>
+          </a:p>
+        </p:txBody>
+      </p:sp>
+      <p:sp>
+        <p:nvSpPr>
+          <p:cNvPr id="17" name="Rectangle 16"/>
+          <p:cNvSpPr/>
+          <p:nvPr/>
+        </p:nvSpPr>
+        <p:spPr>
+          <a:xfrm>
+            <a:off x="792000" y="5029199"/>
+            <a:ext cx="10620000" cy="10800"/>
+          </a:xfrm>
+          <a:prstGeom prst="rect">
+            <a:avLst/>
+          </a:prstGeom>
+          <a:solidFill>
+            <a:srgbClr val="C8D0DC"/>
+          </a:solidFill>
+          <a:ln>
+            <a:noFill/>
+          </a:ln>
+          <a:effectLst/>
+        </p:spPr>
+        <p:style>
+          <a:lnRef idx="1">
+            <a:schemeClr val="accent1"/>
+          </a:lnRef>
+          <a:fillRef idx="3">
+            <a:schemeClr val="accent1"/>
+          </a:fillRef>
+          <a:effectRef idx="2">
+            <a:schemeClr val="accent1"/>
+          </a:effectRef>
+          <a:fontRef idx="minor">
+            <a:schemeClr val="lt1"/>
+          </a:fontRef>
+        </p:style>
+        <p:txBody>
+          <a:bodyPr rtlCol="0" anchor="ctr"/>
+          <a:lstStyle/>
+          <a:p>
+            <a:pPr algn="ctr"/>
+          </a:p>
+        </p:txBody>
+      </p:sp>
+      <p:sp>
+        <p:nvSpPr>
+          <p:cNvPr id="18" name="TextBox 17"/>
+          <p:cNvSpPr txBox="1"/>
+          <p:nvPr/>
+        </p:nvSpPr>
+        <p:spPr>
+          <a:xfrm>
+            <a:off x="792000" y="5230800"/>
+            <a:ext cx="648000" cy="432000"/>
+          </a:xfrm>
+          <a:prstGeom prst="rect">
+            <a:avLst/>
+          </a:prstGeom>
+          <a:noFill/>
+        </p:spPr>
+        <p:txBody>
+          <a:bodyPr wrap="none">
+            <a:spAutoFit/>
+          </a:bodyPr>
+          <a:lstStyle/>
+          <a:p>
+            <a:pPr algn="l"/>
+            <a:r>
+              <a:rPr sz="2600" b="1">
+                <a:solidFill>
+                  <a:srgbClr val="2F6EBA"/>
+                </a:solidFill>
+                <a:latin typeface="Microsoft YaHei"/>
+              </a:rPr>
+              <a:t>04</a:t>
+            </a:r>
+          </a:p>
+        </p:txBody>
+      </p:sp>
+      <p:sp>
+        <p:nvSpPr>
+          <p:cNvPr id="19" name="TextBox 18"/>
+          <p:cNvSpPr txBox="1"/>
+          <p:nvPr/>
+        </p:nvSpPr>
+        <p:spPr>
+          <a:xfrm>
+            <a:off x="1512000" y="5202000"/>
+            <a:ext cx="9828000" cy="324000"/>
+          </a:xfrm>
+          <a:prstGeom prst="rect">
+            <a:avLst/>
+          </a:prstGeom>
+          <a:noFill/>
+        </p:spPr>
+        <p:txBody>
+          <a:bodyPr wrap="square">
+            <a:spAutoFit/>
+          </a:bodyPr>
+          <a:lstStyle/>
+          <a:p>
+            <a:pPr algn="l"/>
+            <a:r>
+              <a:rPr sz="2000" b="1">
+                <a:solidFill>
+                  <a:srgbClr val="1F3A68"/>
+                </a:solidFill>
+                <a:latin typeface="Microsoft YaHei"/>
+              </a:rPr>
+              <a:t>阶段感知</a:t>
+            </a:r>
+          </a:p>
+        </p:txBody>
+      </p:sp>
+      <p:sp>
+        <p:nvSpPr>
+          <p:cNvPr id="20" name="TextBox 19"/>
+          <p:cNvSpPr txBox="1"/>
+          <p:nvPr/>
+        </p:nvSpPr>
+        <p:spPr>
+          <a:xfrm>
+            <a:off x="1512000" y="5508000"/>
+            <a:ext cx="9828000" cy="593999"/>
+          </a:xfrm>
+          <a:prstGeom prst="rect">
+            <a:avLst/>
+          </a:prstGeom>
+          <a:noFill/>
+        </p:spPr>
+        <p:txBody>
+          <a:bodyPr wrap="square">
+            <a:spAutoFit/>
+          </a:bodyPr>
+          <a:lstStyle/>
+          <a:p>
+            <a:pPr algn="l"/>
+            <a:r>
+              <a:rPr sz="1400" b="0">
+                <a:solidFill>
+                  <a:srgbClr val="555F6E"/>
+                </a:solidFill>
+                <a:latin typeface="Microsoft YaHei"/>
+              </a:rPr>
+              <a:t>查询按 MDMP 七阶段生成，阶段匹配记忆加亲和分，复盘教训归因到阶段</a:t>
+            </a:r>
+          </a:p>
+        </p:txBody>
+      </p:sp>
+      <p:sp>
+        <p:nvSpPr>
+          <p:cNvPr id="21" name="Rectangle 20"/>
+          <p:cNvSpPr/>
+          <p:nvPr/>
+        </p:nvSpPr>
+        <p:spPr>
+          <a:xfrm>
+            <a:off x="792000" y="6163199"/>
+            <a:ext cx="10620000" cy="10800"/>
+          </a:xfrm>
+          <a:prstGeom prst="rect">
+            <a:avLst/>
+          </a:prstGeom>
+          <a:solidFill>
+            <a:srgbClr val="C8D0DC"/>
+          </a:solidFill>
+          <a:ln>
+            <a:noFill/>
+          </a:ln>
+          <a:effectLst/>
+        </p:spPr>
+        <p:style>
+          <a:lnRef idx="1">
+            <a:schemeClr val="accent1"/>
+          </a:lnRef>
+          <a:fillRef idx="3">
+            <a:schemeClr val="accent1"/>
+          </a:fillRef>
+          <a:effectRef idx="2">
+            <a:schemeClr val="accent1"/>
+          </a:effectRef>
+          <a:fontRef idx="minor">
+            <a:schemeClr val="lt1"/>
+          </a:fontRef>
+        </p:style>
+        <p:txBody>
+          <a:bodyPr rtlCol="0" anchor="ctr"/>
+          <a:lstStyle/>
+          <a:p>
+            <a:pPr algn="ctr"/>
+          </a:p>
+        </p:txBody>
+      </p:sp>
+      <p:sp>
+        <p:nvSpPr>
+          <p:cNvPr id="22" name="Rectangle 21"/>
+          <p:cNvSpPr/>
+          <p:nvPr/>
+        </p:nvSpPr>
+        <p:spPr>
+          <a:xfrm>
+            <a:off x="0" y="6606000"/>
+            <a:ext cx="12193200" cy="10800"/>
+          </a:xfrm>
+          <a:prstGeom prst="rect">
+            <a:avLst/>
+          </a:prstGeom>
+          <a:solidFill>
+            <a:srgbClr val="C8D0DC"/>
+          </a:solidFill>
+          <a:ln>
+            <a:noFill/>
+          </a:ln>
+          <a:effectLst/>
+        </p:spPr>
+        <p:style>
+          <a:lnRef idx="1">
+            <a:schemeClr val="accent1"/>
+          </a:lnRef>
+          <a:fillRef idx="3">
+            <a:schemeClr val="accent1"/>
+          </a:fillRef>
+          <a:effectRef idx="2">
+            <a:schemeClr val="accent1"/>
+          </a:effectRef>
+          <a:fontRef idx="minor">
+            <a:schemeClr val="lt1"/>
+          </a:fontRef>
+        </p:style>
+        <p:txBody>
+          <a:bodyPr rtlCol="0" anchor="ctr"/>
+          <a:lstStyle/>
+          <a:p>
+            <a:pPr algn="ctr"/>
+          </a:p>
+        </p:txBody>
+      </p:sp>
+      <p:sp>
+        <p:nvSpPr>
+          <p:cNvPr id="23" name="TextBox 22"/>
           <p:cNvSpPr txBox="1"/>
           <p:nvPr/>
         </p:nvSpPr>
@@ -15084,7 +14975,7 @@
       </p:sp>
       <p:sp>
         <p:nvSpPr>
-          <p:cNvPr id="25" name="TextBox 24"/>
+          <p:cNvPr id="24" name="TextBox 23"/>
           <p:cNvSpPr txBox="1"/>
           <p:nvPr/>
         </p:nvSpPr>
@@ -15428,8 +15319,8 @@
         </p:nvSpPr>
         <p:spPr>
           <a:xfrm>
-            <a:off x="1296000" y="1807199"/>
-            <a:ext cx="5616000" cy="342000"/>
+            <a:off x="1296000" y="1710000"/>
+            <a:ext cx="5616000" cy="198000"/>
           </a:xfrm>
           <a:prstGeom prst="rect">
             <a:avLst/>
@@ -15444,20 +15335,55 @@
           <a:p>
             <a:pPr algn="l"/>
             <a:r>
-              <a:rPr sz="1400" b="0">
-                <a:solidFill>
-                  <a:srgbClr val="222830"/>
-                </a:solidFill>
-                <a:latin typeface="Microsoft YaHei"/>
-              </a:rPr>
-              <a:t>后台 /api 与前端三栏；左右栏页签化，避免过长</a:t>
-            </a:r>
-          </a:p>
-        </p:txBody>
-      </p:sp>
-      <p:sp>
-        <p:nvSpPr>
-          <p:cNvPr id="10" name="Rounded Rectangle 9"/>
+              <a:rPr sz="1500" b="1">
+                <a:solidFill>
+                  <a:srgbClr val="1F3A68"/>
+                </a:solidFill>
+                <a:latin typeface="Microsoft YaHei"/>
+              </a:rPr>
+              <a:t>三栏页签化布局</a:t>
+            </a:r>
+          </a:p>
+        </p:txBody>
+      </p:sp>
+      <p:sp>
+        <p:nvSpPr>
+          <p:cNvPr id="10" name="TextBox 9"/>
+          <p:cNvSpPr txBox="1"/>
+          <p:nvPr/>
+        </p:nvSpPr>
+        <p:spPr>
+          <a:xfrm>
+            <a:off x="1296000" y="1915199"/>
+            <a:ext cx="5616000" cy="306000"/>
+          </a:xfrm>
+          <a:prstGeom prst="rect">
+            <a:avLst/>
+          </a:prstGeom>
+          <a:noFill/>
+        </p:spPr>
+        <p:txBody>
+          <a:bodyPr wrap="square">
+            <a:spAutoFit/>
+          </a:bodyPr>
+          <a:lstStyle/>
+          <a:p>
+            <a:pPr algn="l"/>
+            <a:r>
+              <a:rPr sz="1300" b="0">
+                <a:solidFill>
+                  <a:srgbClr val="555F6E"/>
+                </a:solidFill>
+                <a:latin typeface="Microsoft YaHei"/>
+              </a:rPr>
+              <a:t>左输入/中运行/右产出，长内容折叠为页签</a:t>
+            </a:r>
+          </a:p>
+        </p:txBody>
+      </p:sp>
+      <p:sp>
+        <p:nvSpPr>
+          <p:cNvPr id="11" name="Rounded Rectangle 10"/>
           <p:cNvSpPr/>
           <p:nvPr/>
         </p:nvSpPr>
@@ -15505,7 +15431,7 @@
       </p:sp>
       <p:sp>
         <p:nvSpPr>
-          <p:cNvPr id="11" name="Rectangle 10"/>
+          <p:cNvPr id="12" name="Rectangle 11"/>
           <p:cNvSpPr/>
           <p:nvPr/>
         </p:nvSpPr>
@@ -15549,7 +15475,7 @@
       </p:sp>
       <p:sp>
         <p:nvSpPr>
-          <p:cNvPr id="12" name="TextBox 11"/>
+          <p:cNvPr id="13" name="TextBox 12"/>
           <p:cNvSpPr txBox="1"/>
           <p:nvPr/>
         </p:nvSpPr>
@@ -15584,7 +15510,7 @@
       </p:sp>
       <p:sp>
         <p:nvSpPr>
-          <p:cNvPr id="13" name="TextBox 12"/>
+          <p:cNvPr id="14" name="TextBox 13"/>
           <p:cNvSpPr txBox="1"/>
           <p:nvPr/>
         </p:nvSpPr>
@@ -15619,7 +15545,7 @@
       </p:sp>
       <p:sp>
         <p:nvSpPr>
-          <p:cNvPr id="14" name="TextBox 13"/>
+          <p:cNvPr id="15" name="TextBox 14"/>
           <p:cNvSpPr txBox="1"/>
           <p:nvPr/>
         </p:nvSpPr>
@@ -15647,14 +15573,14 @@
                 </a:solidFill>
                 <a:latin typeface="Microsoft YaHei"/>
               </a:rPr>
-              <a:t>总览/单条历史/遗忘日志</a:t>
-            </a:r>
-          </a:p>
-        </p:txBody>
-      </p:sp>
-      <p:sp>
-        <p:nvSpPr>
-          <p:cNvPr id="15" name="Rounded Rectangle 14"/>
+              <a:t>总览/单条历史/遗忘日志，支持点击展开</a:t>
+            </a:r>
+          </a:p>
+        </p:txBody>
+      </p:sp>
+      <p:sp>
+        <p:nvSpPr>
+          <p:cNvPr id="16" name="Rounded Rectangle 15"/>
           <p:cNvSpPr/>
           <p:nvPr/>
         </p:nvSpPr>
@@ -15702,7 +15628,7 @@
       </p:sp>
       <p:sp>
         <p:nvSpPr>
-          <p:cNvPr id="16" name="Rectangle 15"/>
+          <p:cNvPr id="17" name="Rectangle 16"/>
           <p:cNvSpPr/>
           <p:nvPr/>
         </p:nvSpPr>
@@ -15746,7 +15672,7 @@
       </p:sp>
       <p:sp>
         <p:nvSpPr>
-          <p:cNvPr id="17" name="TextBox 16"/>
+          <p:cNvPr id="18" name="TextBox 17"/>
           <p:cNvSpPr txBox="1"/>
           <p:nvPr/>
         </p:nvSpPr>
@@ -15781,7 +15707,7 @@
       </p:sp>
       <p:sp>
         <p:nvSpPr>
-          <p:cNvPr id="18" name="TextBox 17"/>
+          <p:cNvPr id="19" name="TextBox 18"/>
           <p:cNvSpPr txBox="1"/>
           <p:nvPr/>
         </p:nvSpPr>
@@ -15816,7 +15742,7 @@
       </p:sp>
       <p:sp>
         <p:nvSpPr>
-          <p:cNvPr id="19" name="TextBox 18"/>
+          <p:cNvPr id="20" name="TextBox 19"/>
           <p:cNvSpPr txBox="1"/>
           <p:nvPr/>
         </p:nvSpPr>
@@ -15851,7 +15777,7 @@
       </p:sp>
       <p:sp>
         <p:nvSpPr>
-          <p:cNvPr id="20" name="Rounded Rectangle 19"/>
+          <p:cNvPr id="21" name="Rounded Rectangle 20"/>
           <p:cNvSpPr/>
           <p:nvPr/>
         </p:nvSpPr>
@@ -15899,7 +15825,7 @@
       </p:sp>
       <p:sp>
         <p:nvSpPr>
-          <p:cNvPr id="21" name="Rectangle 20"/>
+          <p:cNvPr id="22" name="Rectangle 21"/>
           <p:cNvSpPr/>
           <p:nvPr/>
         </p:nvSpPr>
@@ -15943,7 +15869,7 @@
       </p:sp>
       <p:sp>
         <p:nvSpPr>
-          <p:cNvPr id="22" name="TextBox 21"/>
+          <p:cNvPr id="23" name="TextBox 22"/>
           <p:cNvSpPr txBox="1"/>
           <p:nvPr/>
         </p:nvSpPr>
@@ -15978,7 +15904,7 @@
       </p:sp>
       <p:sp>
         <p:nvSpPr>
-          <p:cNvPr id="23" name="TextBox 22"/>
+          <p:cNvPr id="24" name="TextBox 23"/>
           <p:cNvSpPr txBox="1"/>
           <p:nvPr/>
         </p:nvSpPr>
@@ -16006,14 +15932,14 @@
                 </a:solidFill>
                 <a:latin typeface="Microsoft YaHei"/>
               </a:rPr>
-              <a:t>战役进度条、库健康度分布条、事件流点击展开</a:t>
-            </a:r>
-          </a:p>
-        </p:txBody>
-      </p:sp>
-      <p:sp>
-        <p:nvSpPr>
-          <p:cNvPr id="24" name="Rectangle 23"/>
+              <a:t>战役进度条、库健康度分布条、事件流点击展开详情</a:t>
+            </a:r>
+          </a:p>
+        </p:txBody>
+      </p:sp>
+      <p:sp>
+        <p:nvSpPr>
+          <p:cNvPr id="25" name="Rectangle 24"/>
           <p:cNvSpPr/>
           <p:nvPr/>
         </p:nvSpPr>
@@ -16059,7 +15985,7 @@
       </p:sp>
       <p:sp>
         <p:nvSpPr>
-          <p:cNvPr id="25" name="Rectangle 24"/>
+          <p:cNvPr id="26" name="Rectangle 25"/>
           <p:cNvSpPr/>
           <p:nvPr/>
         </p:nvSpPr>
@@ -16103,7 +16029,7 @@
       </p:sp>
       <p:sp>
         <p:nvSpPr>
-          <p:cNvPr id="26" name="TextBox 25"/>
+          <p:cNvPr id="27" name="TextBox 26"/>
           <p:cNvSpPr txBox="1"/>
           <p:nvPr/>
         </p:nvSpPr>
@@ -16138,7 +16064,7 @@
       </p:sp>
       <p:sp>
         <p:nvSpPr>
-          <p:cNvPr id="27" name="TextBox 26"/>
+          <p:cNvPr id="28" name="TextBox 27"/>
           <p:cNvSpPr txBox="1"/>
           <p:nvPr/>
         </p:nvSpPr>
@@ -17745,8 +17671,8 @@
         </p:nvSpPr>
         <p:spPr>
           <a:xfrm>
-            <a:off x="1512000" y="1771200"/>
-            <a:ext cx="9828000" cy="360000"/>
+            <a:off x="1512000" y="1713600"/>
+            <a:ext cx="9828000" cy="216000"/>
           </a:xfrm>
           <a:prstGeom prst="rect">
             <a:avLst/>
@@ -17761,20 +17687,55 @@
           <a:p>
             <a:pPr algn="l"/>
             <a:r>
-              <a:rPr sz="1400" b="0">
-                <a:solidFill>
-                  <a:srgbClr val="222830"/>
-                </a:solidFill>
-                <a:latin typeface="Microsoft YaHei"/>
-              </a:rPr>
-              <a:t>自建 50 条 8 类测试集（A-H），避免关键词共现</a:t>
-            </a:r>
-          </a:p>
-        </p:txBody>
-      </p:sp>
-      <p:sp>
-        <p:nvSpPr>
-          <p:cNvPr id="8" name="Rectangle 7"/>
+              <a:rPr sz="1600" b="1">
+                <a:solidFill>
+                  <a:srgbClr val="1F3A68"/>
+                </a:solidFill>
+                <a:latin typeface="Microsoft YaHei"/>
+              </a:rPr>
+              <a:t>测试集</a:t>
+            </a:r>
+          </a:p>
+        </p:txBody>
+      </p:sp>
+      <p:sp>
+        <p:nvSpPr>
+          <p:cNvPr id="8" name="TextBox 7"/>
+          <p:cNvSpPr txBox="1"/>
+          <p:nvPr/>
+        </p:nvSpPr>
+        <p:spPr>
+          <a:xfrm>
+            <a:off x="1512000" y="1951200"/>
+            <a:ext cx="9828000" cy="306000"/>
+          </a:xfrm>
+          <a:prstGeom prst="rect">
+            <a:avLst/>
+          </a:prstGeom>
+          <a:noFill/>
+        </p:spPr>
+        <p:txBody>
+          <a:bodyPr wrap="square">
+            <a:spAutoFit/>
+          </a:bodyPr>
+          <a:lstStyle/>
+          <a:p>
+            <a:pPr algn="l"/>
+            <a:r>
+              <a:rPr sz="1250" b="0">
+                <a:solidFill>
+                  <a:srgbClr val="555F6E"/>
+                </a:solidFill>
+                <a:latin typeface="Microsoft YaHei"/>
+              </a:rPr>
+              <a:t>自建 50 条 8 类（A-H），查询与答案刻意避免关键词共现</a:t>
+            </a:r>
+          </a:p>
+        </p:txBody>
+      </p:sp>
+      <p:sp>
+        <p:nvSpPr>
+          <p:cNvPr id="9" name="Rectangle 8"/>
           <p:cNvSpPr/>
           <p:nvPr/>
         </p:nvSpPr>
@@ -17818,7 +17779,7 @@
       </p:sp>
       <p:sp>
         <p:nvSpPr>
-          <p:cNvPr id="9" name="TextBox 8"/>
+          <p:cNvPr id="10" name="TextBox 9"/>
           <p:cNvSpPr txBox="1"/>
           <p:nvPr/>
         </p:nvSpPr>
@@ -17853,14 +17814,14 @@
       </p:sp>
       <p:sp>
         <p:nvSpPr>
-          <p:cNvPr id="10" name="TextBox 9"/>
-          <p:cNvSpPr txBox="1"/>
-          <p:nvPr/>
-        </p:nvSpPr>
-        <p:spPr>
-          <a:xfrm>
-            <a:off x="1512000" y="2329200"/>
-            <a:ext cx="9828000" cy="360000"/>
+          <p:cNvPr id="11" name="TextBox 10"/>
+          <p:cNvSpPr txBox="1"/>
+          <p:nvPr/>
+        </p:nvSpPr>
+        <p:spPr>
+          <a:xfrm>
+            <a:off x="1512000" y="2271600"/>
+            <a:ext cx="9828000" cy="216000"/>
           </a:xfrm>
           <a:prstGeom prst="rect">
             <a:avLst/>
@@ -17875,20 +17836,55 @@
           <a:p>
             <a:pPr algn="l"/>
             <a:r>
-              <a:rPr sz="1400" b="0">
-                <a:solidFill>
-                  <a:srgbClr val="222830"/>
-                </a:solidFill>
-                <a:latin typeface="Microsoft YaHei"/>
-              </a:rPr>
-              <a:t>固定用例集，依赖注入开关能力（G0-G6）</a:t>
-            </a:r>
-          </a:p>
-        </p:txBody>
-      </p:sp>
-      <p:sp>
-        <p:nvSpPr>
-          <p:cNvPr id="11" name="Rectangle 10"/>
+              <a:rPr sz="1600" b="1">
+                <a:solidFill>
+                  <a:srgbClr val="1F3A68"/>
+                </a:solidFill>
+                <a:latin typeface="Microsoft YaHei"/>
+              </a:rPr>
+              <a:t>对照组</a:t>
+            </a:r>
+          </a:p>
+        </p:txBody>
+      </p:sp>
+      <p:sp>
+        <p:nvSpPr>
+          <p:cNvPr id="12" name="TextBox 11"/>
+          <p:cNvSpPr txBox="1"/>
+          <p:nvPr/>
+        </p:nvSpPr>
+        <p:spPr>
+          <a:xfrm>
+            <a:off x="1512000" y="2509200"/>
+            <a:ext cx="9828000" cy="306000"/>
+          </a:xfrm>
+          <a:prstGeom prst="rect">
+            <a:avLst/>
+          </a:prstGeom>
+          <a:noFill/>
+        </p:spPr>
+        <p:txBody>
+          <a:bodyPr wrap="square">
+            <a:spAutoFit/>
+          </a:bodyPr>
+          <a:lstStyle/>
+          <a:p>
+            <a:pPr algn="l"/>
+            <a:r>
+              <a:rPr sz="1250" b="0">
+                <a:solidFill>
+                  <a:srgbClr val="555F6E"/>
+                </a:solidFill>
+                <a:latin typeface="Microsoft YaHei"/>
+              </a:rPr>
+              <a:t>固定用例集，通过依赖注入开关能力（G0-G6），不删减用例</a:t>
+            </a:r>
+          </a:p>
+        </p:txBody>
+      </p:sp>
+      <p:sp>
+        <p:nvSpPr>
+          <p:cNvPr id="13" name="Rectangle 12"/>
           <p:cNvSpPr/>
           <p:nvPr/>
         </p:nvSpPr>
@@ -17932,7 +17928,7 @@
       </p:sp>
       <p:sp>
         <p:nvSpPr>
-          <p:cNvPr id="12" name="TextBox 11"/>
+          <p:cNvPr id="14" name="TextBox 13"/>
           <p:cNvSpPr txBox="1"/>
           <p:nvPr/>
         </p:nvSpPr>
@@ -17967,7 +17963,7 @@
       </p:sp>
       <p:sp>
         <p:nvSpPr>
-          <p:cNvPr id="13" name="TextBox 12"/>
+          <p:cNvPr id="15" name="TextBox 14"/>
           <p:cNvSpPr txBox="1"/>
           <p:nvPr/>
         </p:nvSpPr>
@@ -17995,14 +17991,14 @@
                 </a:solidFill>
                 <a:latin typeface="Microsoft YaHei"/>
               </a:rPr>
-              <a:t>检索指标</a:t>
-            </a:r>
-          </a:p>
-        </p:txBody>
-      </p:sp>
-      <p:sp>
-        <p:nvSpPr>
-          <p:cNvPr id="14" name="TextBox 13"/>
+              <a:t>指标</a:t>
+            </a:r>
+          </a:p>
+        </p:txBody>
+      </p:sp>
+      <p:sp>
+        <p:nvSpPr>
+          <p:cNvPr id="16" name="TextBox 15"/>
           <p:cNvSpPr txBox="1"/>
           <p:nvPr/>
         </p:nvSpPr>
@@ -18030,14 +18026,14 @@
                 </a:solidFill>
                 <a:latin typeface="Microsoft YaHei"/>
               </a:rPr>
-              <a:t>hit@3/5、MRR、NDCG；任务层：引用/约束/噪声</a:t>
-            </a:r>
-          </a:p>
-        </p:txBody>
-      </p:sp>
-      <p:sp>
-        <p:nvSpPr>
-          <p:cNvPr id="15" name="Rectangle 14"/>
+              <a:t>检索层 hit@3/5、MRR、NDCG；任务层 引用率/约束满足/噪声污染</a:t>
+            </a:r>
+          </a:p>
+        </p:txBody>
+      </p:sp>
+      <p:sp>
+        <p:nvSpPr>
+          <p:cNvPr id="17" name="Rectangle 16"/>
           <p:cNvSpPr/>
           <p:nvPr/>
         </p:nvSpPr>
@@ -18081,7 +18077,7 @@
       </p:sp>
       <p:sp>
         <p:nvSpPr>
-          <p:cNvPr id="16" name="TextBox 15"/>
+          <p:cNvPr id="18" name="TextBox 17"/>
           <p:cNvSpPr txBox="1"/>
           <p:nvPr/>
         </p:nvSpPr>
@@ -18116,7 +18112,7 @@
       </p:sp>
       <p:sp>
         <p:nvSpPr>
-          <p:cNvPr id="17" name="TextBox 16"/>
+          <p:cNvPr id="19" name="TextBox 18"/>
           <p:cNvSpPr txBox="1"/>
           <p:nvPr/>
         </p:nvSpPr>
@@ -18151,7 +18147,7 @@
       </p:sp>
       <p:sp>
         <p:nvSpPr>
-          <p:cNvPr id="18" name="TextBox 17"/>
+          <p:cNvPr id="20" name="TextBox 19"/>
           <p:cNvSpPr txBox="1"/>
           <p:nvPr/>
         </p:nvSpPr>
@@ -18179,14 +18175,14 @@
                 </a:solidFill>
                 <a:latin typeface="Microsoft YaHei"/>
               </a:rPr>
-              <a:t>随机基线、bootstrap CI、配对置换检验</a:t>
-            </a:r>
-          </a:p>
-        </p:txBody>
-      </p:sp>
-      <p:sp>
-        <p:nvSpPr>
-          <p:cNvPr id="19" name="Rectangle 18"/>
+              <a:t>随机基线解析式、bootstrap CI、配对置换检验，种子固定 42</a:t>
+            </a:r>
+          </a:p>
+        </p:txBody>
+      </p:sp>
+      <p:sp>
+        <p:nvSpPr>
+          <p:cNvPr id="21" name="Rectangle 20"/>
           <p:cNvSpPr/>
           <p:nvPr/>
         </p:nvSpPr>
@@ -18230,7 +18226,7 @@
       </p:sp>
       <p:sp>
         <p:nvSpPr>
-          <p:cNvPr id="20" name="Rectangle 19"/>
+          <p:cNvPr id="22" name="Rectangle 21"/>
           <p:cNvSpPr/>
           <p:nvPr/>
         </p:nvSpPr>
@@ -18274,7 +18270,7 @@
       </p:sp>
       <p:sp>
         <p:nvSpPr>
-          <p:cNvPr id="21" name="TextBox 20"/>
+          <p:cNvPr id="23" name="TextBox 22"/>
           <p:cNvSpPr txBox="1"/>
           <p:nvPr/>
         </p:nvSpPr>
@@ -18309,7 +18305,7 @@
       </p:sp>
       <p:sp>
         <p:nvSpPr>
-          <p:cNvPr id="22" name="TextBox 21"/>
+          <p:cNvPr id="24" name="TextBox 23"/>
           <p:cNvSpPr txBox="1"/>
           <p:nvPr/>
         </p:nvSpPr>
@@ -19364,7 +19360,7 @@
                 </a:solidFill>
                 <a:latin typeface="Microsoft YaHei"/>
               </a:rPr>
-              <a:t>处理组 0.833 vs 对照 0，负控 0</a:t>
+              <a:t>处理组 0.833 vs 对照 0，负控 0；机制路径完整，但 n=6 样本有限</a:t>
             </a:r>
           </a:p>
         </p:txBody>
@@ -19456,8 +19452,8 @@
         </p:nvSpPr>
         <p:spPr>
           <a:xfrm>
-            <a:off x="1512000" y="2329200"/>
-            <a:ext cx="9828000" cy="360000"/>
+            <a:off x="1512000" y="2271600"/>
+            <a:ext cx="9828000" cy="216000"/>
           </a:xfrm>
           <a:prstGeom prst="rect">
             <a:avLst/>
@@ -19472,20 +19468,55 @@
           <a:p>
             <a:pPr algn="l"/>
             <a:r>
-              <a:rPr sz="1400" b="0">
-                <a:solidFill>
-                  <a:srgbClr val="222830"/>
-                </a:solidFill>
-                <a:latin typeface="Microsoft YaHei"/>
-              </a:rPr>
-              <a:t>p=0.059，样本有限 → 方向性证据</a:t>
-            </a:r>
-          </a:p>
-        </p:txBody>
-      </p:sp>
-      <p:sp>
-        <p:nvSpPr>
-          <p:cNvPr id="12" name="Rectangle 11"/>
+              <a:rPr sz="1600" b="1">
+                <a:solidFill>
+                  <a:srgbClr val="1F3A68"/>
+                </a:solidFill>
+                <a:latin typeface="Microsoft YaHei"/>
+              </a:rPr>
+              <a:t>p=0.059</a:t>
+            </a:r>
+          </a:p>
+        </p:txBody>
+      </p:sp>
+      <p:sp>
+        <p:nvSpPr>
+          <p:cNvPr id="12" name="TextBox 11"/>
+          <p:cNvSpPr txBox="1"/>
+          <p:nvPr/>
+        </p:nvSpPr>
+        <p:spPr>
+          <a:xfrm>
+            <a:off x="1512000" y="2509200"/>
+            <a:ext cx="9828000" cy="306000"/>
+          </a:xfrm>
+          <a:prstGeom prst="rect">
+            <a:avLst/>
+          </a:prstGeom>
+          <a:noFill/>
+        </p:spPr>
+        <p:txBody>
+          <a:bodyPr wrap="square">
+            <a:spAutoFit/>
+          </a:bodyPr>
+          <a:lstStyle/>
+          <a:p>
+            <a:pPr algn="l"/>
+            <a:r>
+              <a:rPr sz="1250" b="0">
+                <a:solidFill>
+                  <a:srgbClr val="555F6E"/>
+                </a:solidFill>
+                <a:latin typeface="Microsoft YaHei"/>
+              </a:rPr>
+              <a:t>方向性证据，需扩容到 20 条才能形成结论</a:t>
+            </a:r>
+          </a:p>
+        </p:txBody>
+      </p:sp>
+      <p:sp>
+        <p:nvSpPr>
+          <p:cNvPr id="13" name="Rectangle 12"/>
           <p:cNvSpPr/>
           <p:nvPr/>
         </p:nvSpPr>
@@ -19529,7 +19560,7 @@
       </p:sp>
       <p:sp>
         <p:nvSpPr>
-          <p:cNvPr id="13" name="TextBox 12"/>
+          <p:cNvPr id="14" name="TextBox 13"/>
           <p:cNvSpPr txBox="1"/>
           <p:nvPr/>
         </p:nvSpPr>
@@ -19564,7 +19595,7 @@
       </p:sp>
       <p:sp>
         <p:nvSpPr>
-          <p:cNvPr id="14" name="TextBox 13"/>
+          <p:cNvPr id="15" name="TextBox 14"/>
           <p:cNvSpPr txBox="1"/>
           <p:nvPr/>
         </p:nvSpPr>
@@ -19599,7 +19630,7 @@
       </p:sp>
       <p:sp>
         <p:nvSpPr>
-          <p:cNvPr id="15" name="TextBox 14"/>
+          <p:cNvPr id="16" name="TextBox 15"/>
           <p:cNvSpPr txBox="1"/>
           <p:nvPr/>
         </p:nvSpPr>
@@ -19627,14 +19658,14 @@
                 </a:solidFill>
                 <a:latin typeface="Microsoft YaHei"/>
               </a:rPr>
-              <a:t>hybrid 0.857 vs vector 0.929（词袋）</a:t>
-            </a:r>
-          </a:p>
-        </p:txBody>
-      </p:sp>
-      <p:sp>
-        <p:nvSpPr>
-          <p:cNvPr id="16" name="Rectangle 15"/>
+              <a:t>词袋下 hybrid 0.857 vs vector 0.929，召回未胜出</a:t>
+            </a:r>
+          </a:p>
+        </p:txBody>
+      </p:sp>
+      <p:sp>
+        <p:nvSpPr>
+          <p:cNvPr id="17" name="Rectangle 16"/>
           <p:cNvSpPr/>
           <p:nvPr/>
         </p:nvSpPr>
@@ -19678,7 +19709,7 @@
       </p:sp>
       <p:sp>
         <p:nvSpPr>
-          <p:cNvPr id="17" name="TextBox 16"/>
+          <p:cNvPr id="18" name="TextBox 17"/>
           <p:cNvSpPr txBox="1"/>
           <p:nvPr/>
         </p:nvSpPr>
@@ -19713,14 +19744,14 @@
       </p:sp>
       <p:sp>
         <p:nvSpPr>
-          <p:cNvPr id="18" name="TextBox 17"/>
-          <p:cNvSpPr txBox="1"/>
-          <p:nvPr/>
-        </p:nvSpPr>
-        <p:spPr>
-          <a:xfrm>
-            <a:off x="1512000" y="3445200"/>
-            <a:ext cx="9828000" cy="360000"/>
+          <p:cNvPr id="19" name="TextBox 18"/>
+          <p:cNvSpPr txBox="1"/>
+          <p:nvPr/>
+        </p:nvSpPr>
+        <p:spPr>
+          <a:xfrm>
+            <a:off x="1512000" y="3387600"/>
+            <a:ext cx="9828000" cy="216000"/>
           </a:xfrm>
           <a:prstGeom prst="rect">
             <a:avLst/>
@@ -19735,20 +19766,55 @@
           <a:p>
             <a:pPr algn="l"/>
             <a:r>
-              <a:rPr sz="1400" b="0">
-                <a:solidFill>
-                  <a:srgbClr val="222830"/>
-                </a:solidFill>
-                <a:latin typeface="Microsoft YaHei"/>
-              </a:rPr>
-              <a:t>但干扰压制 hybrid 1.0 &gt; 单路 ≤0.875</a:t>
-            </a:r>
-          </a:p>
-        </p:txBody>
-      </p:sp>
-      <p:sp>
-        <p:nvSpPr>
-          <p:cNvPr id="19" name="Rectangle 18"/>
+              <a:rPr sz="1600" b="1">
+                <a:solidFill>
+                  <a:srgbClr val="1F3A68"/>
+                </a:solidFill>
+                <a:latin typeface="Microsoft YaHei"/>
+              </a:rPr>
+              <a:t>干扰压制</a:t>
+            </a:r>
+          </a:p>
+        </p:txBody>
+      </p:sp>
+      <p:sp>
+        <p:nvSpPr>
+          <p:cNvPr id="20" name="TextBox 19"/>
+          <p:cNvSpPr txBox="1"/>
+          <p:nvPr/>
+        </p:nvSpPr>
+        <p:spPr>
+          <a:xfrm>
+            <a:off x="1512000" y="3625200"/>
+            <a:ext cx="9828000" cy="306000"/>
+          </a:xfrm>
+          <a:prstGeom prst="rect">
+            <a:avLst/>
+          </a:prstGeom>
+          <a:noFill/>
+        </p:spPr>
+        <p:txBody>
+          <a:bodyPr wrap="square">
+            <a:spAutoFit/>
+          </a:bodyPr>
+          <a:lstStyle/>
+          <a:p>
+            <a:pPr algn="l"/>
+            <a:r>
+              <a:rPr sz="1250" b="0">
+                <a:solidFill>
+                  <a:srgbClr val="555F6E"/>
+                </a:solidFill>
+                <a:latin typeface="Microsoft YaHei"/>
+              </a:rPr>
+              <a:t>hybrid 1.0 高于任一单路 ≤0.875，排序更好</a:t>
+            </a:r>
+          </a:p>
+        </p:txBody>
+      </p:sp>
+      <p:sp>
+        <p:nvSpPr>
+          <p:cNvPr id="21" name="Rectangle 20"/>
           <p:cNvSpPr/>
           <p:nvPr/>
         </p:nvSpPr>
@@ -19792,7 +19858,7 @@
       </p:sp>
       <p:sp>
         <p:nvSpPr>
-          <p:cNvPr id="20" name="TextBox 19"/>
+          <p:cNvPr id="22" name="TextBox 21"/>
           <p:cNvSpPr txBox="1"/>
           <p:nvPr/>
         </p:nvSpPr>
@@ -19827,7 +19893,7 @@
       </p:sp>
       <p:sp>
         <p:nvSpPr>
-          <p:cNvPr id="21" name="TextBox 20"/>
+          <p:cNvPr id="23" name="TextBox 22"/>
           <p:cNvSpPr txBox="1"/>
           <p:nvPr/>
         </p:nvSpPr>
@@ -19862,7 +19928,7 @@
       </p:sp>
       <p:sp>
         <p:nvSpPr>
-          <p:cNvPr id="22" name="TextBox 21"/>
+          <p:cNvPr id="24" name="TextBox 23"/>
           <p:cNvSpPr txBox="1"/>
           <p:nvPr/>
         </p:nvSpPr>
@@ -19890,14 +19956,14 @@
                 </a:solidFill>
                 <a:latin typeface="Microsoft YaHei"/>
               </a:rPr>
-              <a:t>混合价值在排序，真向量再定召回</a:t>
-            </a:r>
-          </a:p>
-        </p:txBody>
-      </p:sp>
-      <p:sp>
-        <p:nvSpPr>
-          <p:cNvPr id="23" name="Rectangle 22"/>
+              <a:t>混合价值在排序；真向量复测后再判定召回</a:t>
+            </a:r>
+          </a:p>
+        </p:txBody>
+      </p:sp>
+      <p:sp>
+        <p:nvSpPr>
+          <p:cNvPr id="25" name="Rectangle 24"/>
           <p:cNvSpPr/>
           <p:nvPr/>
         </p:nvSpPr>
@@ -19941,7 +20007,7 @@
       </p:sp>
       <p:sp>
         <p:nvSpPr>
-          <p:cNvPr id="24" name="Rectangle 23"/>
+          <p:cNvPr id="26" name="Rectangle 25"/>
           <p:cNvSpPr/>
           <p:nvPr/>
         </p:nvSpPr>
@@ -19985,7 +20051,7 @@
       </p:sp>
       <p:sp>
         <p:nvSpPr>
-          <p:cNvPr id="25" name="TextBox 24"/>
+          <p:cNvPr id="27" name="TextBox 26"/>
           <p:cNvSpPr txBox="1"/>
           <p:nvPr/>
         </p:nvSpPr>
@@ -20020,7 +20086,7 @@
       </p:sp>
       <p:sp>
         <p:nvSpPr>
-          <p:cNvPr id="26" name="TextBox 25"/>
+          <p:cNvPr id="28" name="TextBox 27"/>
           <p:cNvSpPr txBox="1"/>
           <p:nvPr/>
         </p:nvSpPr>
@@ -21619,7 +21685,7 @@
                 </a:solidFill>
                 <a:latin typeface="Microsoft YaHei"/>
               </a:rPr>
-              <a:t>AFSIM 数值/事件 → 复盘文本</a:t>
+              <a:t>AFSIM 数值/事件转复盘文本，失败补‘教训’</a:t>
             </a:r>
           </a:p>
         </p:txBody>
@@ -22013,7 +22079,7 @@
                 </a:solidFill>
                 <a:latin typeface="Microsoft YaHei"/>
               </a:rPr>
-              <a:t>领域巡检 + min_score 建议</a:t>
+              <a:t>领域巡检 + min_score 建议，等待真实数据</a:t>
             </a:r>
           </a:p>
         </p:txBody>
@@ -22356,964 +22422,119 @@
       </p:sp>
       <p:sp>
         <p:nvSpPr>
-          <p:cNvPr id="6" name="Rounded Rectangle 5"/>
+          <p:cNvPr id="6" name="TextBox 5"/>
+          <p:cNvSpPr txBox="1"/>
+          <p:nvPr/>
+        </p:nvSpPr>
+        <p:spPr>
+          <a:xfrm>
+            <a:off x="792000" y="1692000"/>
+            <a:ext cx="648000" cy="432000"/>
+          </a:xfrm>
+          <a:prstGeom prst="rect">
+            <a:avLst/>
+          </a:prstGeom>
+          <a:noFill/>
+        </p:spPr>
+        <p:txBody>
+          <a:bodyPr wrap="none">
+            <a:spAutoFit/>
+          </a:bodyPr>
+          <a:lstStyle/>
+          <a:p>
+            <a:pPr algn="l"/>
+            <a:r>
+              <a:rPr sz="2200" b="1">
+                <a:solidFill>
+                  <a:srgbClr val="2F6EBA"/>
+                </a:solidFill>
+                <a:latin typeface="Microsoft YaHei"/>
+              </a:rPr>
+              <a:t>01</a:t>
+            </a:r>
+          </a:p>
+        </p:txBody>
+      </p:sp>
+      <p:sp>
+        <p:nvSpPr>
+          <p:cNvPr id="7" name="TextBox 6"/>
+          <p:cNvSpPr txBox="1"/>
+          <p:nvPr/>
+        </p:nvSpPr>
+        <p:spPr>
+          <a:xfrm>
+            <a:off x="1512000" y="1713600"/>
+            <a:ext cx="9828000" cy="216000"/>
+          </a:xfrm>
+          <a:prstGeom prst="rect">
+            <a:avLst/>
+          </a:prstGeom>
+          <a:noFill/>
+        </p:spPr>
+        <p:txBody>
+          <a:bodyPr wrap="square">
+            <a:spAutoFit/>
+          </a:bodyPr>
+          <a:lstStyle/>
+          <a:p>
+            <a:pPr algn="l"/>
+            <a:r>
+              <a:rPr sz="1600" b="1">
+                <a:solidFill>
+                  <a:srgbClr val="1F3A68"/>
+                </a:solidFill>
+                <a:latin typeface="Microsoft YaHei"/>
+              </a:rPr>
+              <a:t>结论</a:t>
+            </a:r>
+          </a:p>
+        </p:txBody>
+      </p:sp>
+      <p:sp>
+        <p:nvSpPr>
+          <p:cNvPr id="8" name="TextBox 7"/>
+          <p:cNvSpPr txBox="1"/>
+          <p:nvPr/>
+        </p:nvSpPr>
+        <p:spPr>
+          <a:xfrm>
+            <a:off x="1512000" y="1951200"/>
+            <a:ext cx="9828000" cy="306000"/>
+          </a:xfrm>
+          <a:prstGeom prst="rect">
+            <a:avLst/>
+          </a:prstGeom>
+          <a:noFill/>
+        </p:spPr>
+        <p:txBody>
+          <a:bodyPr wrap="square">
+            <a:spAutoFit/>
+          </a:bodyPr>
+          <a:lstStyle/>
+          <a:p>
+            <a:pPr algn="l"/>
+            <a:r>
+              <a:rPr sz="1250" b="0">
+                <a:solidFill>
+                  <a:srgbClr val="555F6E"/>
+                </a:solidFill>
+                <a:latin typeface="Microsoft YaHei"/>
+              </a:rPr>
+              <a:t>分层与进化机制在词袋固定设置下有效，双库 p=0.0001</a:t>
+            </a:r>
+          </a:p>
+        </p:txBody>
+      </p:sp>
+      <p:sp>
+        <p:nvSpPr>
+          <p:cNvPr id="9" name="Rectangle 8"/>
           <p:cNvSpPr/>
           <p:nvPr/>
         </p:nvSpPr>
         <p:spPr>
           <a:xfrm>
-            <a:off x="720000" y="1655999"/>
-            <a:ext cx="10728000" cy="756000"/>
-          </a:xfrm>
-          <a:prstGeom prst="roundRect">
-            <a:avLst>
-              <a:gd name="adj" fmla="val 8000"/>
-            </a:avLst>
-          </a:prstGeom>
-          <a:solidFill>
-            <a:srgbClr val="F2F4F8"/>
-          </a:solidFill>
-          <a:ln w="12700">
-            <a:solidFill>
-              <a:srgbClr val="C8D0DC"/>
-            </a:solidFill>
-          </a:ln>
-          <a:effectLst/>
-        </p:spPr>
-        <p:style>
-          <a:lnRef idx="1">
-            <a:schemeClr val="accent1"/>
-          </a:lnRef>
-          <a:fillRef idx="3">
-            <a:schemeClr val="accent1"/>
-          </a:fillRef>
-          <a:effectRef idx="2">
-            <a:schemeClr val="accent1"/>
-          </a:effectRef>
-          <a:fontRef idx="minor">
-            <a:schemeClr val="lt1"/>
-          </a:fontRef>
-        </p:style>
-        <p:txBody>
-          <a:bodyPr rtlCol="0" anchor="ctr"/>
-          <a:lstStyle/>
-          <a:p>
-            <a:pPr algn="ctr"/>
-          </a:p>
-        </p:txBody>
-      </p:sp>
-      <p:sp>
-        <p:nvSpPr>
-          <p:cNvPr id="7" name="Rectangle 6"/>
-          <p:cNvSpPr/>
-          <p:nvPr/>
-        </p:nvSpPr>
-        <p:spPr>
-          <a:xfrm>
-            <a:off x="720000" y="1655999"/>
-            <a:ext cx="79200" cy="756000"/>
-          </a:xfrm>
-          <a:prstGeom prst="rect">
-            <a:avLst/>
-          </a:prstGeom>
-          <a:solidFill>
-            <a:srgbClr val="2F6EBA"/>
-          </a:solidFill>
-          <a:ln>
-            <a:noFill/>
-          </a:ln>
-          <a:effectLst/>
-        </p:spPr>
-        <p:style>
-          <a:lnRef idx="1">
-            <a:schemeClr val="accent1"/>
-          </a:lnRef>
-          <a:fillRef idx="3">
-            <a:schemeClr val="accent1"/>
-          </a:fillRef>
-          <a:effectRef idx="2">
-            <a:schemeClr val="accent1"/>
-          </a:effectRef>
-          <a:fontRef idx="minor">
-            <a:schemeClr val="lt1"/>
-          </a:fontRef>
-        </p:style>
-        <p:txBody>
-          <a:bodyPr rtlCol="0" anchor="ctr"/>
-          <a:lstStyle/>
-          <a:p>
-            <a:pPr algn="ctr"/>
-          </a:p>
-        </p:txBody>
-      </p:sp>
-      <p:sp>
-        <p:nvSpPr>
-          <p:cNvPr id="8" name="TextBox 7"/>
-          <p:cNvSpPr txBox="1"/>
-          <p:nvPr/>
-        </p:nvSpPr>
-        <p:spPr>
-          <a:xfrm>
-            <a:off x="882000" y="1720799"/>
-            <a:ext cx="540000" cy="360000"/>
-          </a:xfrm>
-          <a:prstGeom prst="rect">
-            <a:avLst/>
-          </a:prstGeom>
-          <a:noFill/>
-        </p:spPr>
-        <p:txBody>
-          <a:bodyPr wrap="none">
-            <a:spAutoFit/>
-          </a:bodyPr>
-          <a:lstStyle/>
-          <a:p>
-            <a:pPr algn="l"/>
-            <a:r>
-              <a:rPr sz="1800" b="1">
-                <a:solidFill>
-                  <a:srgbClr val="2F6EBA"/>
-                </a:solidFill>
-                <a:latin typeface="Microsoft YaHei"/>
-              </a:rPr>
-              <a:t>01</a:t>
-            </a:r>
-          </a:p>
-        </p:txBody>
-      </p:sp>
-      <p:sp>
-        <p:nvSpPr>
-          <p:cNvPr id="9" name="TextBox 8"/>
-          <p:cNvSpPr txBox="1"/>
-          <p:nvPr/>
-        </p:nvSpPr>
-        <p:spPr>
-          <a:xfrm>
-            <a:off x="1296000" y="1710000"/>
-            <a:ext cx="9936000" cy="198000"/>
-          </a:xfrm>
-          <a:prstGeom prst="rect">
-            <a:avLst/>
-          </a:prstGeom>
-          <a:noFill/>
-        </p:spPr>
-        <p:txBody>
-          <a:bodyPr wrap="square">
-            <a:spAutoFit/>
-          </a:bodyPr>
-          <a:lstStyle/>
-          <a:p>
-            <a:pPr algn="l"/>
-            <a:r>
-              <a:rPr sz="1500" b="1">
-                <a:solidFill>
-                  <a:srgbClr val="1F3A68"/>
-                </a:solidFill>
-                <a:latin typeface="Microsoft YaHei"/>
-              </a:rPr>
-              <a:t>结论</a:t>
-            </a:r>
-          </a:p>
-        </p:txBody>
-      </p:sp>
-      <p:sp>
-        <p:nvSpPr>
-          <p:cNvPr id="10" name="TextBox 9"/>
-          <p:cNvSpPr txBox="1"/>
-          <p:nvPr/>
-        </p:nvSpPr>
-        <p:spPr>
-          <a:xfrm>
-            <a:off x="1296000" y="1915199"/>
-            <a:ext cx="9936000" cy="306000"/>
-          </a:xfrm>
-          <a:prstGeom prst="rect">
-            <a:avLst/>
-          </a:prstGeom>
-          <a:noFill/>
-        </p:spPr>
-        <p:txBody>
-          <a:bodyPr wrap="square">
-            <a:spAutoFit/>
-          </a:bodyPr>
-          <a:lstStyle/>
-          <a:p>
-            <a:pPr algn="l"/>
-            <a:r>
-              <a:rPr sz="1300" b="0">
-                <a:solidFill>
-                  <a:srgbClr val="555F6E"/>
-                </a:solidFill>
-                <a:latin typeface="Microsoft YaHei"/>
-              </a:rPr>
-              <a:t>分层与进化机制在词袋固定设置下有效（p=0.0001）</a:t>
-            </a:r>
-          </a:p>
-        </p:txBody>
-      </p:sp>
-      <p:sp>
-        <p:nvSpPr>
-          <p:cNvPr id="11" name="Rounded Rectangle 10"/>
-          <p:cNvSpPr/>
-          <p:nvPr/>
-        </p:nvSpPr>
-        <p:spPr>
-          <a:xfrm>
-            <a:off x="720000" y="2491200"/>
-            <a:ext cx="10728000" cy="756000"/>
-          </a:xfrm>
-          <a:prstGeom prst="roundRect">
-            <a:avLst>
-              <a:gd name="adj" fmla="val 8000"/>
-            </a:avLst>
-          </a:prstGeom>
-          <a:solidFill>
-            <a:srgbClr val="F2F4F8"/>
-          </a:solidFill>
-          <a:ln w="12700">
-            <a:solidFill>
-              <a:srgbClr val="C8D0DC"/>
-            </a:solidFill>
-          </a:ln>
-          <a:effectLst/>
-        </p:spPr>
-        <p:style>
-          <a:lnRef idx="1">
-            <a:schemeClr val="accent1"/>
-          </a:lnRef>
-          <a:fillRef idx="3">
-            <a:schemeClr val="accent1"/>
-          </a:fillRef>
-          <a:effectRef idx="2">
-            <a:schemeClr val="accent1"/>
-          </a:effectRef>
-          <a:fontRef idx="minor">
-            <a:schemeClr val="lt1"/>
-          </a:fontRef>
-        </p:style>
-        <p:txBody>
-          <a:bodyPr rtlCol="0" anchor="ctr"/>
-          <a:lstStyle/>
-          <a:p>
-            <a:pPr algn="ctr"/>
-          </a:p>
-        </p:txBody>
-      </p:sp>
-      <p:sp>
-        <p:nvSpPr>
-          <p:cNvPr id="12" name="Rectangle 11"/>
-          <p:cNvSpPr/>
-          <p:nvPr/>
-        </p:nvSpPr>
-        <p:spPr>
-          <a:xfrm>
-            <a:off x="720000" y="2491200"/>
-            <a:ext cx="79200" cy="756000"/>
-          </a:xfrm>
-          <a:prstGeom prst="rect">
-            <a:avLst/>
-          </a:prstGeom>
-          <a:solidFill>
-            <a:srgbClr val="2F6EBA"/>
-          </a:solidFill>
-          <a:ln>
-            <a:noFill/>
-          </a:ln>
-          <a:effectLst/>
-        </p:spPr>
-        <p:style>
-          <a:lnRef idx="1">
-            <a:schemeClr val="accent1"/>
-          </a:lnRef>
-          <a:fillRef idx="3">
-            <a:schemeClr val="accent1"/>
-          </a:fillRef>
-          <a:effectRef idx="2">
-            <a:schemeClr val="accent1"/>
-          </a:effectRef>
-          <a:fontRef idx="minor">
-            <a:schemeClr val="lt1"/>
-          </a:fontRef>
-        </p:style>
-        <p:txBody>
-          <a:bodyPr rtlCol="0" anchor="ctr"/>
-          <a:lstStyle/>
-          <a:p>
-            <a:pPr algn="ctr"/>
-          </a:p>
-        </p:txBody>
-      </p:sp>
-      <p:sp>
-        <p:nvSpPr>
-          <p:cNvPr id="13" name="TextBox 12"/>
-          <p:cNvSpPr txBox="1"/>
-          <p:nvPr/>
-        </p:nvSpPr>
-        <p:spPr>
-          <a:xfrm>
-            <a:off x="882000" y="2556000"/>
-            <a:ext cx="540000" cy="360000"/>
-          </a:xfrm>
-          <a:prstGeom prst="rect">
-            <a:avLst/>
-          </a:prstGeom>
-          <a:noFill/>
-        </p:spPr>
-        <p:txBody>
-          <a:bodyPr wrap="none">
-            <a:spAutoFit/>
-          </a:bodyPr>
-          <a:lstStyle/>
-          <a:p>
-            <a:pPr algn="l"/>
-            <a:r>
-              <a:rPr sz="1800" b="1">
-                <a:solidFill>
-                  <a:srgbClr val="2F6EBA"/>
-                </a:solidFill>
-                <a:latin typeface="Microsoft YaHei"/>
-              </a:rPr>
-              <a:t>02</a:t>
-            </a:r>
-          </a:p>
-        </p:txBody>
-      </p:sp>
-      <p:sp>
-        <p:nvSpPr>
-          <p:cNvPr id="14" name="TextBox 13"/>
-          <p:cNvSpPr txBox="1"/>
-          <p:nvPr/>
-        </p:nvSpPr>
-        <p:spPr>
-          <a:xfrm>
-            <a:off x="1296000" y="2642400"/>
-            <a:ext cx="9936000" cy="342000"/>
-          </a:xfrm>
-          <a:prstGeom prst="rect">
-            <a:avLst/>
-          </a:prstGeom>
-          <a:noFill/>
-        </p:spPr>
-        <p:txBody>
-          <a:bodyPr wrap="square">
-            <a:spAutoFit/>
-          </a:bodyPr>
-          <a:lstStyle/>
-          <a:p>
-            <a:pPr algn="l"/>
-            <a:r>
-              <a:rPr sz="1400" b="0">
-                <a:solidFill>
-                  <a:srgbClr val="222830"/>
-                </a:solidFill>
-                <a:latin typeface="Microsoft YaHei"/>
-              </a:rPr>
-              <a:t>真实模型验证了检索-生成链路可用（引用率 1.00）</a:t>
-            </a:r>
-          </a:p>
-        </p:txBody>
-      </p:sp>
-      <p:sp>
-        <p:nvSpPr>
-          <p:cNvPr id="15" name="Rounded Rectangle 14"/>
-          <p:cNvSpPr/>
-          <p:nvPr/>
-        </p:nvSpPr>
-        <p:spPr>
-          <a:xfrm>
-            <a:off x="720000" y="3326400"/>
-            <a:ext cx="10728000" cy="756000"/>
-          </a:xfrm>
-          <a:prstGeom prst="roundRect">
-            <a:avLst>
-              <a:gd name="adj" fmla="val 8000"/>
-            </a:avLst>
-          </a:prstGeom>
-          <a:solidFill>
-            <a:srgbClr val="F2F4F8"/>
-          </a:solidFill>
-          <a:ln w="12700">
-            <a:solidFill>
-              <a:srgbClr val="C8D0DC"/>
-            </a:solidFill>
-          </a:ln>
-          <a:effectLst/>
-        </p:spPr>
-        <p:style>
-          <a:lnRef idx="1">
-            <a:schemeClr val="accent1"/>
-          </a:lnRef>
-          <a:fillRef idx="3">
-            <a:schemeClr val="accent1"/>
-          </a:fillRef>
-          <a:effectRef idx="2">
-            <a:schemeClr val="accent1"/>
-          </a:effectRef>
-          <a:fontRef idx="minor">
-            <a:schemeClr val="lt1"/>
-          </a:fontRef>
-        </p:style>
-        <p:txBody>
-          <a:bodyPr rtlCol="0" anchor="ctr"/>
-          <a:lstStyle/>
-          <a:p>
-            <a:pPr algn="ctr"/>
-          </a:p>
-        </p:txBody>
-      </p:sp>
-      <p:sp>
-        <p:nvSpPr>
-          <p:cNvPr id="16" name="Rectangle 15"/>
-          <p:cNvSpPr/>
-          <p:nvPr/>
-        </p:nvSpPr>
-        <p:spPr>
-          <a:xfrm>
-            <a:off x="720000" y="3326400"/>
-            <a:ext cx="79200" cy="756000"/>
-          </a:xfrm>
-          <a:prstGeom prst="rect">
-            <a:avLst/>
-          </a:prstGeom>
-          <a:solidFill>
-            <a:srgbClr val="2F6EBA"/>
-          </a:solidFill>
-          <a:ln>
-            <a:noFill/>
-          </a:ln>
-          <a:effectLst/>
-        </p:spPr>
-        <p:style>
-          <a:lnRef idx="1">
-            <a:schemeClr val="accent1"/>
-          </a:lnRef>
-          <a:fillRef idx="3">
-            <a:schemeClr val="accent1"/>
-          </a:fillRef>
-          <a:effectRef idx="2">
-            <a:schemeClr val="accent1"/>
-          </a:effectRef>
-          <a:fontRef idx="minor">
-            <a:schemeClr val="lt1"/>
-          </a:fontRef>
-        </p:style>
-        <p:txBody>
-          <a:bodyPr rtlCol="0" anchor="ctr"/>
-          <a:lstStyle/>
-          <a:p>
-            <a:pPr algn="ctr"/>
-          </a:p>
-        </p:txBody>
-      </p:sp>
-      <p:sp>
-        <p:nvSpPr>
-          <p:cNvPr id="17" name="TextBox 16"/>
-          <p:cNvSpPr txBox="1"/>
-          <p:nvPr/>
-        </p:nvSpPr>
-        <p:spPr>
-          <a:xfrm>
-            <a:off x="882000" y="3391200"/>
-            <a:ext cx="540000" cy="360000"/>
-          </a:xfrm>
-          <a:prstGeom prst="rect">
-            <a:avLst/>
-          </a:prstGeom>
-          <a:noFill/>
-        </p:spPr>
-        <p:txBody>
-          <a:bodyPr wrap="none">
-            <a:spAutoFit/>
-          </a:bodyPr>
-          <a:lstStyle/>
-          <a:p>
-            <a:pPr algn="l"/>
-            <a:r>
-              <a:rPr sz="1800" b="1">
-                <a:solidFill>
-                  <a:srgbClr val="2F6EBA"/>
-                </a:solidFill>
-                <a:latin typeface="Microsoft YaHei"/>
-              </a:rPr>
-              <a:t>03</a:t>
-            </a:r>
-          </a:p>
-        </p:txBody>
-      </p:sp>
-      <p:sp>
-        <p:nvSpPr>
-          <p:cNvPr id="18" name="TextBox 17"/>
-          <p:cNvSpPr txBox="1"/>
-          <p:nvPr/>
-        </p:nvSpPr>
-        <p:spPr>
-          <a:xfrm>
-            <a:off x="1296000" y="3380400"/>
-            <a:ext cx="9936000" cy="198000"/>
-          </a:xfrm>
-          <a:prstGeom prst="rect">
-            <a:avLst/>
-          </a:prstGeom>
-          <a:noFill/>
-        </p:spPr>
-        <p:txBody>
-          <a:bodyPr wrap="square">
-            <a:spAutoFit/>
-          </a:bodyPr>
-          <a:lstStyle/>
-          <a:p>
-            <a:pPr algn="l"/>
-            <a:r>
-              <a:rPr sz="1500" b="1">
-                <a:solidFill>
-                  <a:srgbClr val="1F3A68"/>
-                </a:solidFill>
-                <a:latin typeface="Microsoft YaHei"/>
-              </a:rPr>
-              <a:t>下一步</a:t>
-            </a:r>
-          </a:p>
-        </p:txBody>
-      </p:sp>
-      <p:sp>
-        <p:nvSpPr>
-          <p:cNvPr id="19" name="TextBox 18"/>
-          <p:cNvSpPr txBox="1"/>
-          <p:nvPr/>
-        </p:nvSpPr>
-        <p:spPr>
-          <a:xfrm>
-            <a:off x="1296000" y="3585600"/>
-            <a:ext cx="9936000" cy="306000"/>
-          </a:xfrm>
-          <a:prstGeom prst="rect">
-            <a:avLst/>
-          </a:prstGeom>
-          <a:noFill/>
-        </p:spPr>
-        <p:txBody>
-          <a:bodyPr wrap="square">
-            <a:spAutoFit/>
-          </a:bodyPr>
-          <a:lstStyle/>
-          <a:p>
-            <a:pPr algn="l"/>
-            <a:r>
-              <a:rPr sz="1300" b="0">
-                <a:solidFill>
-                  <a:srgbClr val="555F6E"/>
-                </a:solidFill>
-                <a:latin typeface="Microsoft YaHei"/>
-              </a:rPr>
-              <a:t>真向量重跑与重标定 min_score/θ</a:t>
-            </a:r>
-          </a:p>
-        </p:txBody>
-      </p:sp>
-      <p:sp>
-        <p:nvSpPr>
-          <p:cNvPr id="20" name="Rounded Rectangle 19"/>
-          <p:cNvSpPr/>
-          <p:nvPr/>
-        </p:nvSpPr>
-        <p:spPr>
-          <a:xfrm>
-            <a:off x="720000" y="4161600"/>
-            <a:ext cx="10728000" cy="756000"/>
-          </a:xfrm>
-          <a:prstGeom prst="roundRect">
-            <a:avLst>
-              <a:gd name="adj" fmla="val 8000"/>
-            </a:avLst>
-          </a:prstGeom>
-          <a:solidFill>
-            <a:srgbClr val="F2F4F8"/>
-          </a:solidFill>
-          <a:ln w="12700">
-            <a:solidFill>
-              <a:srgbClr val="C8D0DC"/>
-            </a:solidFill>
-          </a:ln>
-          <a:effectLst/>
-        </p:spPr>
-        <p:style>
-          <a:lnRef idx="1">
-            <a:schemeClr val="accent1"/>
-          </a:lnRef>
-          <a:fillRef idx="3">
-            <a:schemeClr val="accent1"/>
-          </a:fillRef>
-          <a:effectRef idx="2">
-            <a:schemeClr val="accent1"/>
-          </a:effectRef>
-          <a:fontRef idx="minor">
-            <a:schemeClr val="lt1"/>
-          </a:fontRef>
-        </p:style>
-        <p:txBody>
-          <a:bodyPr rtlCol="0" anchor="ctr"/>
-          <a:lstStyle/>
-          <a:p>
-            <a:pPr algn="ctr"/>
-          </a:p>
-        </p:txBody>
-      </p:sp>
-      <p:sp>
-        <p:nvSpPr>
-          <p:cNvPr id="21" name="Rectangle 20"/>
-          <p:cNvSpPr/>
-          <p:nvPr/>
-        </p:nvSpPr>
-        <p:spPr>
-          <a:xfrm>
-            <a:off x="720000" y="4161600"/>
-            <a:ext cx="79200" cy="756000"/>
-          </a:xfrm>
-          <a:prstGeom prst="rect">
-            <a:avLst/>
-          </a:prstGeom>
-          <a:solidFill>
-            <a:srgbClr val="2F6EBA"/>
-          </a:solidFill>
-          <a:ln>
-            <a:noFill/>
-          </a:ln>
-          <a:effectLst/>
-        </p:spPr>
-        <p:style>
-          <a:lnRef idx="1">
-            <a:schemeClr val="accent1"/>
-          </a:lnRef>
-          <a:fillRef idx="3">
-            <a:schemeClr val="accent1"/>
-          </a:fillRef>
-          <a:effectRef idx="2">
-            <a:schemeClr val="accent1"/>
-          </a:effectRef>
-          <a:fontRef idx="minor">
-            <a:schemeClr val="lt1"/>
-          </a:fontRef>
-        </p:style>
-        <p:txBody>
-          <a:bodyPr rtlCol="0" anchor="ctr"/>
-          <a:lstStyle/>
-          <a:p>
-            <a:pPr algn="ctr"/>
-          </a:p>
-        </p:txBody>
-      </p:sp>
-      <p:sp>
-        <p:nvSpPr>
-          <p:cNvPr id="22" name="TextBox 21"/>
-          <p:cNvSpPr txBox="1"/>
-          <p:nvPr/>
-        </p:nvSpPr>
-        <p:spPr>
-          <a:xfrm>
-            <a:off x="882000" y="4226400"/>
-            <a:ext cx="540000" cy="360000"/>
-          </a:xfrm>
-          <a:prstGeom prst="rect">
-            <a:avLst/>
-          </a:prstGeom>
-          <a:noFill/>
-        </p:spPr>
-        <p:txBody>
-          <a:bodyPr wrap="none">
-            <a:spAutoFit/>
-          </a:bodyPr>
-          <a:lstStyle/>
-          <a:p>
-            <a:pPr algn="l"/>
-            <a:r>
-              <a:rPr sz="1800" b="1">
-                <a:solidFill>
-                  <a:srgbClr val="2F6EBA"/>
-                </a:solidFill>
-                <a:latin typeface="Microsoft YaHei"/>
-              </a:rPr>
-              <a:t>04</a:t>
-            </a:r>
-          </a:p>
-        </p:txBody>
-      </p:sp>
-      <p:sp>
-        <p:nvSpPr>
-          <p:cNvPr id="23" name="TextBox 22"/>
-          <p:cNvSpPr txBox="1"/>
-          <p:nvPr/>
-        </p:nvSpPr>
-        <p:spPr>
-          <a:xfrm>
-            <a:off x="1296000" y="4215600"/>
-            <a:ext cx="9936000" cy="198000"/>
-          </a:xfrm>
-          <a:prstGeom prst="rect">
-            <a:avLst/>
-          </a:prstGeom>
-          <a:noFill/>
-        </p:spPr>
-        <p:txBody>
-          <a:bodyPr wrap="square">
-            <a:spAutoFit/>
-          </a:bodyPr>
-          <a:lstStyle/>
-          <a:p>
-            <a:pPr algn="l"/>
-            <a:r>
-              <a:rPr sz="1500" b="1">
-                <a:solidFill>
-                  <a:srgbClr val="1F3A68"/>
-                </a:solidFill>
-                <a:latin typeface="Microsoft YaHei"/>
-              </a:rPr>
-              <a:t>下一步</a:t>
-            </a:r>
-          </a:p>
-        </p:txBody>
-      </p:sp>
-      <p:sp>
-        <p:nvSpPr>
-          <p:cNvPr id="24" name="TextBox 23"/>
-          <p:cNvSpPr txBox="1"/>
-          <p:nvPr/>
-        </p:nvSpPr>
-        <p:spPr>
-          <a:xfrm>
-            <a:off x="1296000" y="4420800"/>
-            <a:ext cx="9936000" cy="306000"/>
-          </a:xfrm>
-          <a:prstGeom prst="rect">
-            <a:avLst/>
-          </a:prstGeom>
-          <a:noFill/>
-        </p:spPr>
-        <p:txBody>
-          <a:bodyPr wrap="square">
-            <a:spAutoFit/>
-          </a:bodyPr>
-          <a:lstStyle/>
-          <a:p>
-            <a:pPr algn="l"/>
-            <a:r>
-              <a:rPr sz="1300" b="0">
-                <a:solidFill>
-                  <a:srgbClr val="555F6E"/>
-                </a:solidFill>
-                <a:latin typeface="Microsoft YaHei"/>
-              </a:rPr>
-              <a:t>H 类扩至 20 条、知识锚定、冲突仲裁</a:t>
-            </a:r>
-          </a:p>
-        </p:txBody>
-      </p:sp>
-      <p:sp>
-        <p:nvSpPr>
-          <p:cNvPr id="25" name="Rounded Rectangle 24"/>
-          <p:cNvSpPr/>
-          <p:nvPr/>
-        </p:nvSpPr>
-        <p:spPr>
-          <a:xfrm>
-            <a:off x="720000" y="4996800"/>
-            <a:ext cx="10728000" cy="756000"/>
-          </a:xfrm>
-          <a:prstGeom prst="roundRect">
-            <a:avLst>
-              <a:gd name="adj" fmla="val 8000"/>
-            </a:avLst>
-          </a:prstGeom>
-          <a:solidFill>
-            <a:srgbClr val="F2F4F8"/>
-          </a:solidFill>
-          <a:ln w="12700">
-            <a:solidFill>
-              <a:srgbClr val="C8D0DC"/>
-            </a:solidFill>
-          </a:ln>
-          <a:effectLst/>
-        </p:spPr>
-        <p:style>
-          <a:lnRef idx="1">
-            <a:schemeClr val="accent1"/>
-          </a:lnRef>
-          <a:fillRef idx="3">
-            <a:schemeClr val="accent1"/>
-          </a:fillRef>
-          <a:effectRef idx="2">
-            <a:schemeClr val="accent1"/>
-          </a:effectRef>
-          <a:fontRef idx="minor">
-            <a:schemeClr val="lt1"/>
-          </a:fontRef>
-        </p:style>
-        <p:txBody>
-          <a:bodyPr rtlCol="0" anchor="ctr"/>
-          <a:lstStyle/>
-          <a:p>
-            <a:pPr algn="ctr"/>
-          </a:p>
-        </p:txBody>
-      </p:sp>
-      <p:sp>
-        <p:nvSpPr>
-          <p:cNvPr id="26" name="Rectangle 25"/>
-          <p:cNvSpPr/>
-          <p:nvPr/>
-        </p:nvSpPr>
-        <p:spPr>
-          <a:xfrm>
-            <a:off x="720000" y="4996800"/>
-            <a:ext cx="79200" cy="756000"/>
-          </a:xfrm>
-          <a:prstGeom prst="rect">
-            <a:avLst/>
-          </a:prstGeom>
-          <a:solidFill>
-            <a:srgbClr val="2F6EBA"/>
-          </a:solidFill>
-          <a:ln>
-            <a:noFill/>
-          </a:ln>
-          <a:effectLst/>
-        </p:spPr>
-        <p:style>
-          <a:lnRef idx="1">
-            <a:schemeClr val="accent1"/>
-          </a:lnRef>
-          <a:fillRef idx="3">
-            <a:schemeClr val="accent1"/>
-          </a:fillRef>
-          <a:effectRef idx="2">
-            <a:schemeClr val="accent1"/>
-          </a:effectRef>
-          <a:fontRef idx="minor">
-            <a:schemeClr val="lt1"/>
-          </a:fontRef>
-        </p:style>
-        <p:txBody>
-          <a:bodyPr rtlCol="0" anchor="ctr"/>
-          <a:lstStyle/>
-          <a:p>
-            <a:pPr algn="ctr"/>
-          </a:p>
-        </p:txBody>
-      </p:sp>
-      <p:sp>
-        <p:nvSpPr>
-          <p:cNvPr id="27" name="TextBox 26"/>
-          <p:cNvSpPr txBox="1"/>
-          <p:nvPr/>
-        </p:nvSpPr>
-        <p:spPr>
-          <a:xfrm>
-            <a:off x="882000" y="5061600"/>
-            <a:ext cx="540000" cy="360000"/>
-          </a:xfrm>
-          <a:prstGeom prst="rect">
-            <a:avLst/>
-          </a:prstGeom>
-          <a:noFill/>
-        </p:spPr>
-        <p:txBody>
-          <a:bodyPr wrap="none">
-            <a:spAutoFit/>
-          </a:bodyPr>
-          <a:lstStyle/>
-          <a:p>
-            <a:pPr algn="l"/>
-            <a:r>
-              <a:rPr sz="1800" b="1">
-                <a:solidFill>
-                  <a:srgbClr val="2F6EBA"/>
-                </a:solidFill>
-                <a:latin typeface="Microsoft YaHei"/>
-              </a:rPr>
-              <a:t>05</a:t>
-            </a:r>
-          </a:p>
-        </p:txBody>
-      </p:sp>
-      <p:sp>
-        <p:nvSpPr>
-          <p:cNvPr id="28" name="TextBox 27"/>
-          <p:cNvSpPr txBox="1"/>
-          <p:nvPr/>
-        </p:nvSpPr>
-        <p:spPr>
-          <a:xfrm>
-            <a:off x="1296000" y="5050800"/>
-            <a:ext cx="9936000" cy="198000"/>
-          </a:xfrm>
-          <a:prstGeom prst="rect">
-            <a:avLst/>
-          </a:prstGeom>
-          <a:noFill/>
-        </p:spPr>
-        <p:txBody>
-          <a:bodyPr wrap="square">
-            <a:spAutoFit/>
-          </a:bodyPr>
-          <a:lstStyle/>
-          <a:p>
-            <a:pPr algn="l"/>
-            <a:r>
-              <a:rPr sz="1500" b="1">
-                <a:solidFill>
-                  <a:srgbClr val="1F3A68"/>
-                </a:solidFill>
-                <a:latin typeface="Microsoft YaHei"/>
-              </a:rPr>
-              <a:t>下一步</a:t>
-            </a:r>
-          </a:p>
-        </p:txBody>
-      </p:sp>
-      <p:sp>
-        <p:nvSpPr>
-          <p:cNvPr id="29" name="TextBox 28"/>
-          <p:cNvSpPr txBox="1"/>
-          <p:nvPr/>
-        </p:nvSpPr>
-        <p:spPr>
-          <a:xfrm>
-            <a:off x="1296000" y="5256000"/>
-            <a:ext cx="9936000" cy="306000"/>
-          </a:xfrm>
-          <a:prstGeom prst="rect">
-            <a:avLst/>
-          </a:prstGeom>
-          <a:noFill/>
-        </p:spPr>
-        <p:txBody>
-          <a:bodyPr wrap="square">
-            <a:spAutoFit/>
-          </a:bodyPr>
-          <a:lstStyle/>
-          <a:p>
-            <a:pPr algn="l"/>
-            <a:r>
-              <a:rPr sz="1300" b="0">
-                <a:solidFill>
-                  <a:srgbClr val="555F6E"/>
-                </a:solidFill>
-                <a:latin typeface="Microsoft YaHei"/>
-              </a:rPr>
-              <a:t>智戎真实链路联调与领域巡检</a:t>
-            </a:r>
-          </a:p>
-        </p:txBody>
-      </p:sp>
-      <p:sp>
-        <p:nvSpPr>
-          <p:cNvPr id="30" name="Rectangle 29"/>
-          <p:cNvSpPr/>
-          <p:nvPr/>
-        </p:nvSpPr>
-        <p:spPr>
-          <a:xfrm>
-            <a:off x="0" y="6606000"/>
-            <a:ext cx="12193200" cy="10800"/>
+            <a:off x="792000" y="2178000"/>
+            <a:ext cx="10620000" cy="10800"/>
           </a:xfrm>
           <a:prstGeom prst="rect">
             <a:avLst/>
@@ -23350,7 +22571,612 @@
       </p:sp>
       <p:sp>
         <p:nvSpPr>
-          <p:cNvPr id="31" name="TextBox 30"/>
+          <p:cNvPr id="10" name="TextBox 9"/>
+          <p:cNvSpPr txBox="1"/>
+          <p:nvPr/>
+        </p:nvSpPr>
+        <p:spPr>
+          <a:xfrm>
+            <a:off x="792000" y="2250000"/>
+            <a:ext cx="648000" cy="432000"/>
+          </a:xfrm>
+          <a:prstGeom prst="rect">
+            <a:avLst/>
+          </a:prstGeom>
+          <a:noFill/>
+        </p:spPr>
+        <p:txBody>
+          <a:bodyPr wrap="none">
+            <a:spAutoFit/>
+          </a:bodyPr>
+          <a:lstStyle/>
+          <a:p>
+            <a:pPr algn="l"/>
+            <a:r>
+              <a:rPr sz="2200" b="1">
+                <a:solidFill>
+                  <a:srgbClr val="2F6EBA"/>
+                </a:solidFill>
+                <a:latin typeface="Microsoft YaHei"/>
+              </a:rPr>
+              <a:t>02</a:t>
+            </a:r>
+          </a:p>
+        </p:txBody>
+      </p:sp>
+      <p:sp>
+        <p:nvSpPr>
+          <p:cNvPr id="11" name="TextBox 10"/>
+          <p:cNvSpPr txBox="1"/>
+          <p:nvPr/>
+        </p:nvSpPr>
+        <p:spPr>
+          <a:xfrm>
+            <a:off x="1512000" y="2329200"/>
+            <a:ext cx="9828000" cy="360000"/>
+          </a:xfrm>
+          <a:prstGeom prst="rect">
+            <a:avLst/>
+          </a:prstGeom>
+          <a:noFill/>
+        </p:spPr>
+        <p:txBody>
+          <a:bodyPr wrap="square">
+            <a:spAutoFit/>
+          </a:bodyPr>
+          <a:lstStyle/>
+          <a:p>
+            <a:pPr algn="l"/>
+            <a:r>
+              <a:rPr sz="1400" b="0">
+                <a:solidFill>
+                  <a:srgbClr val="222830"/>
+                </a:solidFill>
+                <a:latin typeface="Microsoft YaHei"/>
+              </a:rPr>
+              <a:t>真模型验证了检索-生成链路可用，引用率 1.00（示范性）</a:t>
+            </a:r>
+          </a:p>
+        </p:txBody>
+      </p:sp>
+      <p:sp>
+        <p:nvSpPr>
+          <p:cNvPr id="12" name="Rectangle 11"/>
+          <p:cNvSpPr/>
+          <p:nvPr/>
+        </p:nvSpPr>
+        <p:spPr>
+          <a:xfrm>
+            <a:off x="792000" y="2736000"/>
+            <a:ext cx="10620000" cy="10800"/>
+          </a:xfrm>
+          <a:prstGeom prst="rect">
+            <a:avLst/>
+          </a:prstGeom>
+          <a:solidFill>
+            <a:srgbClr val="C8D0DC"/>
+          </a:solidFill>
+          <a:ln>
+            <a:noFill/>
+          </a:ln>
+          <a:effectLst/>
+        </p:spPr>
+        <p:style>
+          <a:lnRef idx="1">
+            <a:schemeClr val="accent1"/>
+          </a:lnRef>
+          <a:fillRef idx="3">
+            <a:schemeClr val="accent1"/>
+          </a:fillRef>
+          <a:effectRef idx="2">
+            <a:schemeClr val="accent1"/>
+          </a:effectRef>
+          <a:fontRef idx="minor">
+            <a:schemeClr val="lt1"/>
+          </a:fontRef>
+        </p:style>
+        <p:txBody>
+          <a:bodyPr rtlCol="0" anchor="ctr"/>
+          <a:lstStyle/>
+          <a:p>
+            <a:pPr algn="ctr"/>
+          </a:p>
+        </p:txBody>
+      </p:sp>
+      <p:sp>
+        <p:nvSpPr>
+          <p:cNvPr id="13" name="TextBox 12"/>
+          <p:cNvSpPr txBox="1"/>
+          <p:nvPr/>
+        </p:nvSpPr>
+        <p:spPr>
+          <a:xfrm>
+            <a:off x="792000" y="2808000"/>
+            <a:ext cx="648000" cy="432000"/>
+          </a:xfrm>
+          <a:prstGeom prst="rect">
+            <a:avLst/>
+          </a:prstGeom>
+          <a:noFill/>
+        </p:spPr>
+        <p:txBody>
+          <a:bodyPr wrap="none">
+            <a:spAutoFit/>
+          </a:bodyPr>
+          <a:lstStyle/>
+          <a:p>
+            <a:pPr algn="l"/>
+            <a:r>
+              <a:rPr sz="2200" b="1">
+                <a:solidFill>
+                  <a:srgbClr val="2F6EBA"/>
+                </a:solidFill>
+                <a:latin typeface="Microsoft YaHei"/>
+              </a:rPr>
+              <a:t>03</a:t>
+            </a:r>
+          </a:p>
+        </p:txBody>
+      </p:sp>
+      <p:sp>
+        <p:nvSpPr>
+          <p:cNvPr id="14" name="TextBox 13"/>
+          <p:cNvSpPr txBox="1"/>
+          <p:nvPr/>
+        </p:nvSpPr>
+        <p:spPr>
+          <a:xfrm>
+            <a:off x="1512000" y="2829600"/>
+            <a:ext cx="9828000" cy="216000"/>
+          </a:xfrm>
+          <a:prstGeom prst="rect">
+            <a:avLst/>
+          </a:prstGeom>
+          <a:noFill/>
+        </p:spPr>
+        <p:txBody>
+          <a:bodyPr wrap="square">
+            <a:spAutoFit/>
+          </a:bodyPr>
+          <a:lstStyle/>
+          <a:p>
+            <a:pPr algn="l"/>
+            <a:r>
+              <a:rPr sz="1600" b="1">
+                <a:solidFill>
+                  <a:srgbClr val="1F3A68"/>
+                </a:solidFill>
+                <a:latin typeface="Microsoft YaHei"/>
+              </a:rPr>
+              <a:t>下一步</a:t>
+            </a:r>
+          </a:p>
+        </p:txBody>
+      </p:sp>
+      <p:sp>
+        <p:nvSpPr>
+          <p:cNvPr id="15" name="TextBox 14"/>
+          <p:cNvSpPr txBox="1"/>
+          <p:nvPr/>
+        </p:nvSpPr>
+        <p:spPr>
+          <a:xfrm>
+            <a:off x="1512000" y="3067200"/>
+            <a:ext cx="9828000" cy="306000"/>
+          </a:xfrm>
+          <a:prstGeom prst="rect">
+            <a:avLst/>
+          </a:prstGeom>
+          <a:noFill/>
+        </p:spPr>
+        <p:txBody>
+          <a:bodyPr wrap="square">
+            <a:spAutoFit/>
+          </a:bodyPr>
+          <a:lstStyle/>
+          <a:p>
+            <a:pPr algn="l"/>
+            <a:r>
+              <a:rPr sz="1250" b="0">
+                <a:solidFill>
+                  <a:srgbClr val="555F6E"/>
+                </a:solidFill>
+                <a:latin typeface="Microsoft YaHei"/>
+              </a:rPr>
+              <a:t>真向量重跑与重标定 min_score/θ</a:t>
+            </a:r>
+          </a:p>
+        </p:txBody>
+      </p:sp>
+      <p:sp>
+        <p:nvSpPr>
+          <p:cNvPr id="16" name="Rectangle 15"/>
+          <p:cNvSpPr/>
+          <p:nvPr/>
+        </p:nvSpPr>
+        <p:spPr>
+          <a:xfrm>
+            <a:off x="792000" y="3294000"/>
+            <a:ext cx="10620000" cy="10800"/>
+          </a:xfrm>
+          <a:prstGeom prst="rect">
+            <a:avLst/>
+          </a:prstGeom>
+          <a:solidFill>
+            <a:srgbClr val="C8D0DC"/>
+          </a:solidFill>
+          <a:ln>
+            <a:noFill/>
+          </a:ln>
+          <a:effectLst/>
+        </p:spPr>
+        <p:style>
+          <a:lnRef idx="1">
+            <a:schemeClr val="accent1"/>
+          </a:lnRef>
+          <a:fillRef idx="3">
+            <a:schemeClr val="accent1"/>
+          </a:fillRef>
+          <a:effectRef idx="2">
+            <a:schemeClr val="accent1"/>
+          </a:effectRef>
+          <a:fontRef idx="minor">
+            <a:schemeClr val="lt1"/>
+          </a:fontRef>
+        </p:style>
+        <p:txBody>
+          <a:bodyPr rtlCol="0" anchor="ctr"/>
+          <a:lstStyle/>
+          <a:p>
+            <a:pPr algn="ctr"/>
+          </a:p>
+        </p:txBody>
+      </p:sp>
+      <p:sp>
+        <p:nvSpPr>
+          <p:cNvPr id="17" name="TextBox 16"/>
+          <p:cNvSpPr txBox="1"/>
+          <p:nvPr/>
+        </p:nvSpPr>
+        <p:spPr>
+          <a:xfrm>
+            <a:off x="792000" y="3366000"/>
+            <a:ext cx="648000" cy="432000"/>
+          </a:xfrm>
+          <a:prstGeom prst="rect">
+            <a:avLst/>
+          </a:prstGeom>
+          <a:noFill/>
+        </p:spPr>
+        <p:txBody>
+          <a:bodyPr wrap="none">
+            <a:spAutoFit/>
+          </a:bodyPr>
+          <a:lstStyle/>
+          <a:p>
+            <a:pPr algn="l"/>
+            <a:r>
+              <a:rPr sz="2200" b="1">
+                <a:solidFill>
+                  <a:srgbClr val="2F6EBA"/>
+                </a:solidFill>
+                <a:latin typeface="Microsoft YaHei"/>
+              </a:rPr>
+              <a:t>04</a:t>
+            </a:r>
+          </a:p>
+        </p:txBody>
+      </p:sp>
+      <p:sp>
+        <p:nvSpPr>
+          <p:cNvPr id="18" name="TextBox 17"/>
+          <p:cNvSpPr txBox="1"/>
+          <p:nvPr/>
+        </p:nvSpPr>
+        <p:spPr>
+          <a:xfrm>
+            <a:off x="1512000" y="3387600"/>
+            <a:ext cx="9828000" cy="216000"/>
+          </a:xfrm>
+          <a:prstGeom prst="rect">
+            <a:avLst/>
+          </a:prstGeom>
+          <a:noFill/>
+        </p:spPr>
+        <p:txBody>
+          <a:bodyPr wrap="square">
+            <a:spAutoFit/>
+          </a:bodyPr>
+          <a:lstStyle/>
+          <a:p>
+            <a:pPr algn="l"/>
+            <a:r>
+              <a:rPr sz="1600" b="1">
+                <a:solidFill>
+                  <a:srgbClr val="1F3A68"/>
+                </a:solidFill>
+                <a:latin typeface="Microsoft YaHei"/>
+              </a:rPr>
+              <a:t>下一步</a:t>
+            </a:r>
+          </a:p>
+        </p:txBody>
+      </p:sp>
+      <p:sp>
+        <p:nvSpPr>
+          <p:cNvPr id="19" name="TextBox 18"/>
+          <p:cNvSpPr txBox="1"/>
+          <p:nvPr/>
+        </p:nvSpPr>
+        <p:spPr>
+          <a:xfrm>
+            <a:off x="1512000" y="3625200"/>
+            <a:ext cx="9828000" cy="306000"/>
+          </a:xfrm>
+          <a:prstGeom prst="rect">
+            <a:avLst/>
+          </a:prstGeom>
+          <a:noFill/>
+        </p:spPr>
+        <p:txBody>
+          <a:bodyPr wrap="square">
+            <a:spAutoFit/>
+          </a:bodyPr>
+          <a:lstStyle/>
+          <a:p>
+            <a:pPr algn="l"/>
+            <a:r>
+              <a:rPr sz="1250" b="0">
+                <a:solidFill>
+                  <a:srgbClr val="555F6E"/>
+                </a:solidFill>
+                <a:latin typeface="Microsoft YaHei"/>
+              </a:rPr>
+              <a:t>H 类扩至 20 条、知识锚定、冲突仲裁</a:t>
+            </a:r>
+          </a:p>
+        </p:txBody>
+      </p:sp>
+      <p:sp>
+        <p:nvSpPr>
+          <p:cNvPr id="20" name="Rectangle 19"/>
+          <p:cNvSpPr/>
+          <p:nvPr/>
+        </p:nvSpPr>
+        <p:spPr>
+          <a:xfrm>
+            <a:off x="792000" y="3851999"/>
+            <a:ext cx="10620000" cy="10800"/>
+          </a:xfrm>
+          <a:prstGeom prst="rect">
+            <a:avLst/>
+          </a:prstGeom>
+          <a:solidFill>
+            <a:srgbClr val="C8D0DC"/>
+          </a:solidFill>
+          <a:ln>
+            <a:noFill/>
+          </a:ln>
+          <a:effectLst/>
+        </p:spPr>
+        <p:style>
+          <a:lnRef idx="1">
+            <a:schemeClr val="accent1"/>
+          </a:lnRef>
+          <a:fillRef idx="3">
+            <a:schemeClr val="accent1"/>
+          </a:fillRef>
+          <a:effectRef idx="2">
+            <a:schemeClr val="accent1"/>
+          </a:effectRef>
+          <a:fontRef idx="minor">
+            <a:schemeClr val="lt1"/>
+          </a:fontRef>
+        </p:style>
+        <p:txBody>
+          <a:bodyPr rtlCol="0" anchor="ctr"/>
+          <a:lstStyle/>
+          <a:p>
+            <a:pPr algn="ctr"/>
+          </a:p>
+        </p:txBody>
+      </p:sp>
+      <p:sp>
+        <p:nvSpPr>
+          <p:cNvPr id="21" name="TextBox 20"/>
+          <p:cNvSpPr txBox="1"/>
+          <p:nvPr/>
+        </p:nvSpPr>
+        <p:spPr>
+          <a:xfrm>
+            <a:off x="792000" y="3924000"/>
+            <a:ext cx="648000" cy="432000"/>
+          </a:xfrm>
+          <a:prstGeom prst="rect">
+            <a:avLst/>
+          </a:prstGeom>
+          <a:noFill/>
+        </p:spPr>
+        <p:txBody>
+          <a:bodyPr wrap="none">
+            <a:spAutoFit/>
+          </a:bodyPr>
+          <a:lstStyle/>
+          <a:p>
+            <a:pPr algn="l"/>
+            <a:r>
+              <a:rPr sz="2200" b="1">
+                <a:solidFill>
+                  <a:srgbClr val="2F6EBA"/>
+                </a:solidFill>
+                <a:latin typeface="Microsoft YaHei"/>
+              </a:rPr>
+              <a:t>05</a:t>
+            </a:r>
+          </a:p>
+        </p:txBody>
+      </p:sp>
+      <p:sp>
+        <p:nvSpPr>
+          <p:cNvPr id="22" name="TextBox 21"/>
+          <p:cNvSpPr txBox="1"/>
+          <p:nvPr/>
+        </p:nvSpPr>
+        <p:spPr>
+          <a:xfrm>
+            <a:off x="1512000" y="3945600"/>
+            <a:ext cx="9828000" cy="216000"/>
+          </a:xfrm>
+          <a:prstGeom prst="rect">
+            <a:avLst/>
+          </a:prstGeom>
+          <a:noFill/>
+        </p:spPr>
+        <p:txBody>
+          <a:bodyPr wrap="square">
+            <a:spAutoFit/>
+          </a:bodyPr>
+          <a:lstStyle/>
+          <a:p>
+            <a:pPr algn="l"/>
+            <a:r>
+              <a:rPr sz="1600" b="1">
+                <a:solidFill>
+                  <a:srgbClr val="1F3A68"/>
+                </a:solidFill>
+                <a:latin typeface="Microsoft YaHei"/>
+              </a:rPr>
+              <a:t>下一步</a:t>
+            </a:r>
+          </a:p>
+        </p:txBody>
+      </p:sp>
+      <p:sp>
+        <p:nvSpPr>
+          <p:cNvPr id="23" name="TextBox 22"/>
+          <p:cNvSpPr txBox="1"/>
+          <p:nvPr/>
+        </p:nvSpPr>
+        <p:spPr>
+          <a:xfrm>
+            <a:off x="1512000" y="4183200"/>
+            <a:ext cx="9828000" cy="306000"/>
+          </a:xfrm>
+          <a:prstGeom prst="rect">
+            <a:avLst/>
+          </a:prstGeom>
+          <a:noFill/>
+        </p:spPr>
+        <p:txBody>
+          <a:bodyPr wrap="square">
+            <a:spAutoFit/>
+          </a:bodyPr>
+          <a:lstStyle/>
+          <a:p>
+            <a:pPr algn="l"/>
+            <a:r>
+              <a:rPr sz="1250" b="0">
+                <a:solidFill>
+                  <a:srgbClr val="555F6E"/>
+                </a:solidFill>
+                <a:latin typeface="Microsoft YaHei"/>
+              </a:rPr>
+              <a:t>智戎真实链路联调与领域巡检</a:t>
+            </a:r>
+          </a:p>
+        </p:txBody>
+      </p:sp>
+      <p:sp>
+        <p:nvSpPr>
+          <p:cNvPr id="24" name="Rectangle 23"/>
+          <p:cNvSpPr/>
+          <p:nvPr/>
+        </p:nvSpPr>
+        <p:spPr>
+          <a:xfrm>
+            <a:off x="792000" y="4410000"/>
+            <a:ext cx="10620000" cy="10800"/>
+          </a:xfrm>
+          <a:prstGeom prst="rect">
+            <a:avLst/>
+          </a:prstGeom>
+          <a:solidFill>
+            <a:srgbClr val="C8D0DC"/>
+          </a:solidFill>
+          <a:ln>
+            <a:noFill/>
+          </a:ln>
+          <a:effectLst/>
+        </p:spPr>
+        <p:style>
+          <a:lnRef idx="1">
+            <a:schemeClr val="accent1"/>
+          </a:lnRef>
+          <a:fillRef idx="3">
+            <a:schemeClr val="accent1"/>
+          </a:fillRef>
+          <a:effectRef idx="2">
+            <a:schemeClr val="accent1"/>
+          </a:effectRef>
+          <a:fontRef idx="minor">
+            <a:schemeClr val="lt1"/>
+          </a:fontRef>
+        </p:style>
+        <p:txBody>
+          <a:bodyPr rtlCol="0" anchor="ctr"/>
+          <a:lstStyle/>
+          <a:p>
+            <a:pPr algn="ctr"/>
+          </a:p>
+        </p:txBody>
+      </p:sp>
+      <p:sp>
+        <p:nvSpPr>
+          <p:cNvPr id="25" name="Rectangle 24"/>
+          <p:cNvSpPr/>
+          <p:nvPr/>
+        </p:nvSpPr>
+        <p:spPr>
+          <a:xfrm>
+            <a:off x="0" y="6606000"/>
+            <a:ext cx="12193200" cy="10800"/>
+          </a:xfrm>
+          <a:prstGeom prst="rect">
+            <a:avLst/>
+          </a:prstGeom>
+          <a:solidFill>
+            <a:srgbClr val="C8D0DC"/>
+          </a:solidFill>
+          <a:ln>
+            <a:noFill/>
+          </a:ln>
+          <a:effectLst/>
+        </p:spPr>
+        <p:style>
+          <a:lnRef idx="1">
+            <a:schemeClr val="accent1"/>
+          </a:lnRef>
+          <a:fillRef idx="3">
+            <a:schemeClr val="accent1"/>
+          </a:fillRef>
+          <a:effectRef idx="2">
+            <a:schemeClr val="accent1"/>
+          </a:effectRef>
+          <a:fontRef idx="minor">
+            <a:schemeClr val="lt1"/>
+          </a:fontRef>
+        </p:style>
+        <p:txBody>
+          <a:bodyPr rtlCol="0" anchor="ctr"/>
+          <a:lstStyle/>
+          <a:p>
+            <a:pPr algn="ctr"/>
+          </a:p>
+        </p:txBody>
+      </p:sp>
+      <p:sp>
+        <p:nvSpPr>
+          <p:cNvPr id="26" name="TextBox 25"/>
           <p:cNvSpPr txBox="1"/>
           <p:nvPr/>
         </p:nvSpPr>
@@ -23385,7 +23211,7 @@
       </p:sp>
       <p:sp>
         <p:nvSpPr>
-          <p:cNvPr id="32" name="TextBox 31"/>
+          <p:cNvPr id="27" name="TextBox 26"/>
           <p:cNvSpPr txBox="1"/>
           <p:nvPr/>
         </p:nvSpPr>

--- a/汇报PPT/最终汇报成果.pptx
+++ b/汇报PPT/最终汇报成果.pptx
@@ -1499,7 +1499,7 @@
           </a:p>
           <a:p>
             <a:r>
-              <a:t>【讲稿】强调‘对照是开关能力而不是删用例’。</a:t>
+              <a:t>【讲稿】重点讲‘固定用例+开关能力’，说明每组怎么对比。</a:t>
             </a:r>
           </a:p>
         </p:txBody>
@@ -1574,7 +1574,7 @@
           </a:p>
           <a:p>
             <a:r>
-              <a:t>【讲稿】这是最硬的一条证据。</a:t>
+              <a:t>【讲稿】先讲实验设计，再给数字，最后讲分类别含义。</a:t>
             </a:r>
           </a:p>
         </p:txBody>
@@ -1649,7 +1649,7 @@
           </a:p>
           <a:p>
             <a:r>
-              <a:t>【讲稿】对负结果要诚实。</a:t>
+              <a:t>【讲稿】RQ2 强调机制完整但样本小；RQ3 强调负结果要诚实。</a:t>
             </a:r>
           </a:p>
         </p:txBody>
@@ -1724,7 +1724,7 @@
           </a:p>
           <a:p>
             <a:r>
-              <a:t>【讲稿】强调限定词，避免被当成最终结论。</a:t>
+              <a:t>【讲稿】把实验步骤和限定词都讲清楚。</a:t>
             </a:r>
           </a:p>
         </p:txBody>
@@ -6490,7 +6490,7 @@
         </p:nvSpPr>
         <p:spPr>
           <a:xfrm>
-            <a:off x="792000" y="2250000"/>
+            <a:off x="792000" y="2124000"/>
             <a:ext cx="648000" cy="432000"/>
           </a:xfrm>
           <a:prstGeom prst="rect">
@@ -6525,7 +6525,7 @@
         </p:nvSpPr>
         <p:spPr>
           <a:xfrm>
-            <a:off x="1512000" y="2271600"/>
+            <a:off x="1512000" y="2145600"/>
             <a:ext cx="9828000" cy="216000"/>
           </a:xfrm>
           <a:prstGeom prst="rect">
@@ -6560,7 +6560,7 @@
         </p:nvSpPr>
         <p:spPr>
           <a:xfrm>
-            <a:off x="1512000" y="2509200"/>
+            <a:off x="1512000" y="2383200"/>
             <a:ext cx="9828000" cy="306000"/>
           </a:xfrm>
           <a:prstGeom prst="rect">
@@ -6595,7 +6595,7 @@
         </p:nvSpPr>
         <p:spPr>
           <a:xfrm>
-            <a:off x="792000" y="2736000"/>
+            <a:off x="792000" y="2610000"/>
             <a:ext cx="10620000" cy="10800"/>
           </a:xfrm>
           <a:prstGeom prst="rect">
@@ -6639,7 +6639,7 @@
         </p:nvSpPr>
         <p:spPr>
           <a:xfrm>
-            <a:off x="792000" y="2808000"/>
+            <a:off x="792000" y="2556000"/>
             <a:ext cx="648000" cy="432000"/>
           </a:xfrm>
           <a:prstGeom prst="rect">
@@ -6674,7 +6674,7 @@
         </p:nvSpPr>
         <p:spPr>
           <a:xfrm>
-            <a:off x="1512000" y="2829600"/>
+            <a:off x="1512000" y="2577600"/>
             <a:ext cx="9828000" cy="216000"/>
           </a:xfrm>
           <a:prstGeom prst="rect">
@@ -6709,7 +6709,7 @@
         </p:nvSpPr>
         <p:spPr>
           <a:xfrm>
-            <a:off x="1512000" y="3067200"/>
+            <a:off x="1512000" y="2815200"/>
             <a:ext cx="9828000" cy="306000"/>
           </a:xfrm>
           <a:prstGeom prst="rect">
@@ -6744,7 +6744,7 @@
         </p:nvSpPr>
         <p:spPr>
           <a:xfrm>
-            <a:off x="792000" y="3294000"/>
+            <a:off x="792000" y="3042000"/>
             <a:ext cx="10620000" cy="10800"/>
           </a:xfrm>
           <a:prstGeom prst="rect">
@@ -6788,7 +6788,7 @@
         </p:nvSpPr>
         <p:spPr>
           <a:xfrm>
-            <a:off x="792000" y="3366000"/>
+            <a:off x="792000" y="2988000"/>
             <a:ext cx="648000" cy="432000"/>
           </a:xfrm>
           <a:prstGeom prst="rect">
@@ -6823,7 +6823,7 @@
         </p:nvSpPr>
         <p:spPr>
           <a:xfrm>
-            <a:off x="1512000" y="3387600"/>
+            <a:off x="1512000" y="3009600"/>
             <a:ext cx="9828000" cy="216000"/>
           </a:xfrm>
           <a:prstGeom prst="rect">
@@ -6858,7 +6858,7 @@
         </p:nvSpPr>
         <p:spPr>
           <a:xfrm>
-            <a:off x="1512000" y="3625200"/>
+            <a:off x="1512000" y="3247200"/>
             <a:ext cx="9828000" cy="306000"/>
           </a:xfrm>
           <a:prstGeom prst="rect">
@@ -6893,7 +6893,7 @@
         </p:nvSpPr>
         <p:spPr>
           <a:xfrm>
-            <a:off x="792000" y="3851999"/>
+            <a:off x="792000" y="3474000"/>
             <a:ext cx="10620000" cy="10800"/>
           </a:xfrm>
           <a:prstGeom prst="rect">
@@ -6937,7 +6937,7 @@
         </p:nvSpPr>
         <p:spPr>
           <a:xfrm>
-            <a:off x="792000" y="3924000"/>
+            <a:off x="792000" y="3420000"/>
             <a:ext cx="648000" cy="432000"/>
           </a:xfrm>
           <a:prstGeom prst="rect">
@@ -6972,7 +6972,7 @@
         </p:nvSpPr>
         <p:spPr>
           <a:xfrm>
-            <a:off x="1512000" y="3945600"/>
+            <a:off x="1512000" y="3441600"/>
             <a:ext cx="9828000" cy="216000"/>
           </a:xfrm>
           <a:prstGeom prst="rect">
@@ -7007,7 +7007,7 @@
         </p:nvSpPr>
         <p:spPr>
           <a:xfrm>
-            <a:off x="1512000" y="4183200"/>
+            <a:off x="1512000" y="3679200"/>
             <a:ext cx="9828000" cy="306000"/>
           </a:xfrm>
           <a:prstGeom prst="rect">
@@ -7042,7 +7042,7 @@
         </p:nvSpPr>
         <p:spPr>
           <a:xfrm>
-            <a:off x="792000" y="4410000"/>
+            <a:off x="792000" y="3906000"/>
             <a:ext cx="10620000" cy="10800"/>
           </a:xfrm>
           <a:prstGeom prst="rect">
@@ -7086,7 +7086,7 @@
         </p:nvSpPr>
         <p:spPr>
           <a:xfrm>
-            <a:off x="792000" y="4482000"/>
+            <a:off x="792000" y="3851999"/>
             <a:ext cx="648000" cy="432000"/>
           </a:xfrm>
           <a:prstGeom prst="rect">
@@ -7121,7 +7121,7 @@
         </p:nvSpPr>
         <p:spPr>
           <a:xfrm>
-            <a:off x="1512000" y="4503600"/>
+            <a:off x="1512000" y="3873600"/>
             <a:ext cx="9828000" cy="216000"/>
           </a:xfrm>
           <a:prstGeom prst="rect">
@@ -7156,7 +7156,7 @@
         </p:nvSpPr>
         <p:spPr>
           <a:xfrm>
-            <a:off x="1512000" y="4741200"/>
+            <a:off x="1512000" y="4111200"/>
             <a:ext cx="9828000" cy="306000"/>
           </a:xfrm>
           <a:prstGeom prst="rect">
@@ -7191,7 +7191,7 @@
         </p:nvSpPr>
         <p:spPr>
           <a:xfrm>
-            <a:off x="792000" y="4968000"/>
+            <a:off x="792000" y="4338000"/>
             <a:ext cx="10620000" cy="10800"/>
           </a:xfrm>
           <a:prstGeom prst="rect">
@@ -21220,7 +21220,7 @@
         </p:nvSpPr>
         <p:spPr>
           <a:xfrm>
-            <a:off x="792000" y="1692000"/>
+            <a:off x="792000" y="1828800"/>
             <a:ext cx="648000" cy="432000"/>
           </a:xfrm>
           <a:prstGeom prst="rect">
@@ -21236,7 +21236,7 @@
           <a:p>
             <a:pPr algn="l"/>
             <a:r>
-              <a:rPr sz="2200" b="1">
+              <a:rPr sz="2600" b="1">
                 <a:solidFill>
                   <a:srgbClr val="2F6EBA"/>
                 </a:solidFill>
@@ -21255,8 +21255,8 @@
         </p:nvSpPr>
         <p:spPr>
           <a:xfrm>
-            <a:off x="1512000" y="1713600"/>
-            <a:ext cx="9828000" cy="216000"/>
+            <a:off x="1512000" y="1800000"/>
+            <a:ext cx="9828000" cy="324000"/>
           </a:xfrm>
           <a:prstGeom prst="rect">
             <a:avLst/>
@@ -21271,13 +21271,13 @@
           <a:p>
             <a:pPr algn="l"/>
             <a:r>
-              <a:rPr sz="1600" b="1">
+              <a:rPr sz="2000" b="1">
                 <a:solidFill>
                   <a:srgbClr val="1F3A68"/>
                 </a:solidFill>
                 <a:latin typeface="Microsoft YaHei"/>
               </a:rPr>
-              <a:t>测试集</a:t>
+              <a:t>实验目标与 RQ 对应</a:t>
             </a:r>
           </a:p>
         </p:txBody>
@@ -21290,8 +21290,8 @@
         </p:nvSpPr>
         <p:spPr>
           <a:xfrm>
-            <a:off x="1512000" y="1951200"/>
-            <a:ext cx="9828000" cy="306000"/>
+            <a:off x="1512000" y="2106000"/>
+            <a:ext cx="9828000" cy="593999"/>
           </a:xfrm>
           <a:prstGeom prst="rect">
             <a:avLst/>
@@ -21306,13 +21306,13 @@
           <a:p>
             <a:pPr algn="l"/>
             <a:r>
-              <a:rPr sz="1250" b="0">
+              <a:rPr sz="1400" b="0">
                 <a:solidFill>
                   <a:srgbClr val="555F6E"/>
                 </a:solidFill>
                 <a:latin typeface="Microsoft YaHei"/>
               </a:rPr>
-              <a:t>自建 50 条 8 类（A-H），查询与答案刻意避免关键词共现</a:t>
+              <a:t>围绕 RQ1-RQ5 设计五组实验；每组独立 controller，避免跨组污染；固定 44 条检索用例，H 类 6 条单独跑跨场次流程。</a:t>
             </a:r>
           </a:p>
         </p:txBody>
@@ -21325,7 +21325,7 @@
         </p:nvSpPr>
         <p:spPr>
           <a:xfrm>
-            <a:off x="792000" y="2178000"/>
+            <a:off x="792000" y="2761199"/>
             <a:ext cx="10620000" cy="10800"/>
           </a:xfrm>
           <a:prstGeom prst="rect">
@@ -21369,7 +21369,7 @@
         </p:nvSpPr>
         <p:spPr>
           <a:xfrm>
-            <a:off x="792000" y="2250000"/>
+            <a:off x="792000" y="2962799"/>
             <a:ext cx="648000" cy="432000"/>
           </a:xfrm>
           <a:prstGeom prst="rect">
@@ -21385,7 +21385,7 @@
           <a:p>
             <a:pPr algn="l"/>
             <a:r>
-              <a:rPr sz="2200" b="1">
+              <a:rPr sz="2600" b="1">
                 <a:solidFill>
                   <a:srgbClr val="2F6EBA"/>
                 </a:solidFill>
@@ -21404,8 +21404,8 @@
         </p:nvSpPr>
         <p:spPr>
           <a:xfrm>
-            <a:off x="1512000" y="2271600"/>
-            <a:ext cx="9828000" cy="216000"/>
+            <a:off x="1512000" y="2933999"/>
+            <a:ext cx="9828000" cy="324000"/>
           </a:xfrm>
           <a:prstGeom prst="rect">
             <a:avLst/>
@@ -21420,13 +21420,13 @@
           <a:p>
             <a:pPr algn="l"/>
             <a:r>
-              <a:rPr sz="1600" b="1">
+              <a:rPr sz="2000" b="1">
                 <a:solidFill>
                   <a:srgbClr val="1F3A68"/>
                 </a:solidFill>
                 <a:latin typeface="Microsoft YaHei"/>
               </a:rPr>
-              <a:t>对照组</a:t>
+              <a:t>测试集构建</a:t>
             </a:r>
           </a:p>
         </p:txBody>
@@ -21439,8 +21439,8 @@
         </p:nvSpPr>
         <p:spPr>
           <a:xfrm>
-            <a:off x="1512000" y="2509200"/>
-            <a:ext cx="9828000" cy="306000"/>
+            <a:off x="1512000" y="3240000"/>
+            <a:ext cx="9828000" cy="593999"/>
           </a:xfrm>
           <a:prstGeom prst="rect">
             <a:avLst/>
@@ -21455,13 +21455,13 @@
           <a:p>
             <a:pPr algn="l"/>
             <a:r>
-              <a:rPr sz="1250" b="0">
+              <a:rPr sz="1400" b="0">
                 <a:solidFill>
                   <a:srgbClr val="555F6E"/>
                 </a:solidFill>
                 <a:latin typeface="Microsoft YaHei"/>
               </a:rPr>
-              <a:t>固定用例集，通过依赖注入开关能力（G0-G6），不删减用例</a:t>
+              <a:t>自建 50 条 8 类（A-H），覆盖属性/事实/经验/词法/负例/干扰/阶段/跨场次；查询与答案刻意避免关键词共现，负例只测噪声。</a:t>
             </a:r>
           </a:p>
         </p:txBody>
@@ -21474,7 +21474,7 @@
         </p:nvSpPr>
         <p:spPr>
           <a:xfrm>
-            <a:off x="792000" y="2736000"/>
+            <a:off x="792000" y="3895199"/>
             <a:ext cx="10620000" cy="10800"/>
           </a:xfrm>
           <a:prstGeom prst="rect">
@@ -21518,7 +21518,7 @@
         </p:nvSpPr>
         <p:spPr>
           <a:xfrm>
-            <a:off x="792000" y="2808000"/>
+            <a:off x="792000" y="4096799"/>
             <a:ext cx="648000" cy="432000"/>
           </a:xfrm>
           <a:prstGeom prst="rect">
@@ -21534,7 +21534,7 @@
           <a:p>
             <a:pPr algn="l"/>
             <a:r>
-              <a:rPr sz="2200" b="1">
+              <a:rPr sz="2600" b="1">
                 <a:solidFill>
                   <a:srgbClr val="2F6EBA"/>
                 </a:solidFill>
@@ -21553,8 +21553,8 @@
         </p:nvSpPr>
         <p:spPr>
           <a:xfrm>
-            <a:off x="1512000" y="2829600"/>
-            <a:ext cx="9828000" cy="216000"/>
+            <a:off x="1512000" y="4067999"/>
+            <a:ext cx="9828000" cy="324000"/>
           </a:xfrm>
           <a:prstGeom prst="rect">
             <a:avLst/>
@@ -21569,13 +21569,13 @@
           <a:p>
             <a:pPr algn="l"/>
             <a:r>
-              <a:rPr sz="1600" b="1">
+              <a:rPr sz="2000" b="1">
                 <a:solidFill>
                   <a:srgbClr val="1F3A68"/>
                 </a:solidFill>
                 <a:latin typeface="Microsoft YaHei"/>
               </a:rPr>
-              <a:t>指标</a:t>
+              <a:t>对照与开关</a:t>
             </a:r>
           </a:p>
         </p:txBody>
@@ -21588,8 +21588,8 @@
         </p:nvSpPr>
         <p:spPr>
           <a:xfrm>
-            <a:off x="1512000" y="3067200"/>
-            <a:ext cx="9828000" cy="306000"/>
+            <a:off x="1512000" y="4373999"/>
+            <a:ext cx="9828000" cy="593999"/>
           </a:xfrm>
           <a:prstGeom prst="rect">
             <a:avLst/>
@@ -21604,13 +21604,13 @@
           <a:p>
             <a:pPr algn="l"/>
             <a:r>
-              <a:rPr sz="1250" b="0">
+              <a:rPr sz="1400" b="0">
                 <a:solidFill>
                   <a:srgbClr val="555F6E"/>
                 </a:solidFill>
                 <a:latin typeface="Microsoft YaHei"/>
               </a:rPr>
-              <a:t>检索层 hit@3/5、MRR、NDCG；任务层 引用率/约束满足/噪声污染</a:t>
+              <a:t>G0-G6 通过依赖注入开关能力（空经验库/空检索器），不删减用例；跨场次 gold 在运行期解析，避免种子记忆被误当沉淀。</a:t>
             </a:r>
           </a:p>
         </p:txBody>
@@ -21623,7 +21623,7 @@
         </p:nvSpPr>
         <p:spPr>
           <a:xfrm>
-            <a:off x="792000" y="3294000"/>
+            <a:off x="792000" y="5029199"/>
             <a:ext cx="10620000" cy="10800"/>
           </a:xfrm>
           <a:prstGeom prst="rect">
@@ -21667,7 +21667,7 @@
         </p:nvSpPr>
         <p:spPr>
           <a:xfrm>
-            <a:off x="792000" y="3366000"/>
+            <a:off x="792000" y="5230800"/>
             <a:ext cx="648000" cy="432000"/>
           </a:xfrm>
           <a:prstGeom prst="rect">
@@ -21683,7 +21683,7 @@
           <a:p>
             <a:pPr algn="l"/>
             <a:r>
-              <a:rPr sz="2200" b="1">
+              <a:rPr sz="2600" b="1">
                 <a:solidFill>
                   <a:srgbClr val="2F6EBA"/>
                 </a:solidFill>
@@ -21702,8 +21702,8 @@
         </p:nvSpPr>
         <p:spPr>
           <a:xfrm>
-            <a:off x="1512000" y="3387600"/>
-            <a:ext cx="9828000" cy="216000"/>
+            <a:off x="1512000" y="5202000"/>
+            <a:ext cx="9828000" cy="324000"/>
           </a:xfrm>
           <a:prstGeom prst="rect">
             <a:avLst/>
@@ -21718,13 +21718,13 @@
           <a:p>
             <a:pPr algn="l"/>
             <a:r>
-              <a:rPr sz="1600" b="1">
+              <a:rPr sz="2000" b="1">
                 <a:solidFill>
                   <a:srgbClr val="1F3A68"/>
                 </a:solidFill>
                 <a:latin typeface="Microsoft YaHei"/>
               </a:rPr>
-              <a:t>统计</a:t>
+              <a:t>指标与统计</a:t>
             </a:r>
           </a:p>
         </p:txBody>
@@ -21737,8 +21737,8 @@
         </p:nvSpPr>
         <p:spPr>
           <a:xfrm>
-            <a:off x="1512000" y="3625200"/>
-            <a:ext cx="9828000" cy="306000"/>
+            <a:off x="1512000" y="5508000"/>
+            <a:ext cx="9828000" cy="593999"/>
           </a:xfrm>
           <a:prstGeom prst="rect">
             <a:avLst/>
@@ -21753,13 +21753,13 @@
           <a:p>
             <a:pPr algn="l"/>
             <a:r>
-              <a:rPr sz="1250" b="0">
+              <a:rPr sz="1400" b="0">
                 <a:solidFill>
                   <a:srgbClr val="555F6E"/>
                 </a:solidFill>
                 <a:latin typeface="Microsoft YaHei"/>
               </a:rPr>
-              <a:t>随机基线解析式、bootstrap CI、配对置换检验，种子固定 42</a:t>
+              <a:t>检索层 hit@3/5、MRR、NDCG；任务层 引用率/约束满足/噪声污染；统计用随机基线、bootstrap CI、配对置换检验，种子固定 42。</a:t>
             </a:r>
           </a:p>
         </p:txBody>
@@ -21772,7 +21772,7 @@
         </p:nvSpPr>
         <p:spPr>
           <a:xfrm>
-            <a:off x="792000" y="3851999"/>
+            <a:off x="792000" y="6163199"/>
             <a:ext cx="10620000" cy="10800"/>
           </a:xfrm>
           <a:prstGeom prst="rect">
@@ -22100,45 +22100,36 @@
       </p:sp>
       <p:sp>
         <p:nvSpPr>
-          <p:cNvPr id="6" name="Rectangle 5"/>
-          <p:cNvSpPr/>
-          <p:nvPr/>
-        </p:nvSpPr>
-        <p:spPr>
-          <a:xfrm>
-            <a:off x="720000" y="1728000"/>
-            <a:ext cx="2439000" cy="198000"/>
-          </a:xfrm>
-          <a:prstGeom prst="rect">
-            <a:avLst/>
-          </a:prstGeom>
-          <a:solidFill>
-            <a:srgbClr val="2F6EBA"/>
-          </a:solidFill>
-          <a:ln>
-            <a:noFill/>
-          </a:ln>
-          <a:effectLst/>
-        </p:spPr>
-        <p:style>
-          <a:lnRef idx="1">
-            <a:schemeClr val="accent1"/>
-          </a:lnRef>
-          <a:fillRef idx="3">
-            <a:schemeClr val="accent1"/>
-          </a:fillRef>
-          <a:effectRef idx="2">
-            <a:schemeClr val="accent1"/>
-          </a:effectRef>
-          <a:fontRef idx="minor">
-            <a:schemeClr val="lt1"/>
-          </a:fontRef>
-        </p:style>
-        <p:txBody>
-          <a:bodyPr rtlCol="0" anchor="ctr"/>
-          <a:lstStyle/>
-          <a:p>
-            <a:pPr algn="ctr"/>
+          <p:cNvPr id="6" name="TextBox 5"/>
+          <p:cNvSpPr txBox="1"/>
+          <p:nvPr/>
+        </p:nvSpPr>
+        <p:spPr>
+          <a:xfrm>
+            <a:off x="792000" y="1692000"/>
+            <a:ext cx="648000" cy="432000"/>
+          </a:xfrm>
+          <a:prstGeom prst="rect">
+            <a:avLst/>
+          </a:prstGeom>
+          <a:noFill/>
+        </p:spPr>
+        <p:txBody>
+          <a:bodyPr wrap="none">
+            <a:spAutoFit/>
+          </a:bodyPr>
+          <a:lstStyle/>
+          <a:p>
+            <a:pPr algn="l"/>
+            <a:r>
+              <a:rPr sz="2200" b="1">
+                <a:solidFill>
+                  <a:srgbClr val="2F6EBA"/>
+                </a:solidFill>
+                <a:latin typeface="Microsoft YaHei"/>
+              </a:rPr>
+              <a:t>01</a:t>
+            </a:r>
           </a:p>
         </p:txBody>
       </p:sp>
@@ -22150,8 +22141,8 @@
         </p:nvSpPr>
         <p:spPr>
           <a:xfrm>
-            <a:off x="720000" y="2070000"/>
-            <a:ext cx="2439000" cy="540000"/>
+            <a:off x="1512000" y="1713600"/>
+            <a:ext cx="9828000" cy="216000"/>
           </a:xfrm>
           <a:prstGeom prst="rect">
             <a:avLst/>
@@ -22164,15 +22155,15 @@
           </a:bodyPr>
           <a:lstStyle/>
           <a:p>
-            <a:pPr algn="ctr"/>
-            <a:r>
-              <a:rPr sz="2600" b="1">
+            <a:pPr algn="l"/>
+            <a:r>
+              <a:rPr sz="1600" b="1">
                 <a:solidFill>
                   <a:srgbClr val="1F3A68"/>
                 </a:solidFill>
                 <a:latin typeface="Microsoft YaHei"/>
               </a:rPr>
-              <a:t>0.636</a:t>
+              <a:t>实验设计</a:t>
             </a:r>
           </a:p>
         </p:txBody>
@@ -22185,8 +22176,8 @@
         </p:nvSpPr>
         <p:spPr>
           <a:xfrm>
-            <a:off x="827999" y="2646000"/>
-            <a:ext cx="2223000" cy="737999"/>
+            <a:off x="1512000" y="1951200"/>
+            <a:ext cx="9828000" cy="306000"/>
           </a:xfrm>
           <a:prstGeom prst="rect">
             <a:avLst/>
@@ -22199,7 +22190,7 @@
           </a:bodyPr>
           <a:lstStyle/>
           <a:p>
-            <a:pPr algn="ctr"/>
+            <a:pPr algn="l"/>
             <a:r>
               <a:rPr sz="1250" b="0">
                 <a:solidFill>
@@ -22207,7 +22198,7 @@
                 </a:solidFill>
                 <a:latin typeface="Microsoft YaHei"/>
               </a:rPr>
-              <a:t>G3 双库全开 hit@5（G2 为 0.341）</a:t>
+              <a:t>G2 仅事实库 vs G3 双库全开，44 条固定检索用例，通过依赖注入开关经验库</a:t>
             </a:r>
           </a:p>
         </p:txBody>
@@ -22220,350 +22211,8 @@
         </p:nvSpPr>
         <p:spPr>
           <a:xfrm>
-            <a:off x="3483000" y="1728000"/>
-            <a:ext cx="2439000" cy="198000"/>
-          </a:xfrm>
-          <a:prstGeom prst="rect">
-            <a:avLst/>
-          </a:prstGeom>
-          <a:solidFill>
-            <a:srgbClr val="2F6EBA"/>
-          </a:solidFill>
-          <a:ln>
-            <a:noFill/>
-          </a:ln>
-          <a:effectLst/>
-        </p:spPr>
-        <p:style>
-          <a:lnRef idx="1">
-            <a:schemeClr val="accent1"/>
-          </a:lnRef>
-          <a:fillRef idx="3">
-            <a:schemeClr val="accent1"/>
-          </a:fillRef>
-          <a:effectRef idx="2">
-            <a:schemeClr val="accent1"/>
-          </a:effectRef>
-          <a:fontRef idx="minor">
-            <a:schemeClr val="lt1"/>
-          </a:fontRef>
-        </p:style>
-        <p:txBody>
-          <a:bodyPr rtlCol="0" anchor="ctr"/>
-          <a:lstStyle/>
-          <a:p>
-            <a:pPr algn="ctr"/>
-          </a:p>
-        </p:txBody>
-      </p:sp>
-      <p:sp>
-        <p:nvSpPr>
-          <p:cNvPr id="10" name="TextBox 9"/>
-          <p:cNvSpPr txBox="1"/>
-          <p:nvPr/>
-        </p:nvSpPr>
-        <p:spPr>
-          <a:xfrm>
-            <a:off x="3483000" y="2070000"/>
-            <a:ext cx="2439000" cy="540000"/>
-          </a:xfrm>
-          <a:prstGeom prst="rect">
-            <a:avLst/>
-          </a:prstGeom>
-          <a:noFill/>
-        </p:spPr>
-        <p:txBody>
-          <a:bodyPr wrap="square">
-            <a:spAutoFit/>
-          </a:bodyPr>
-          <a:lstStyle/>
-          <a:p>
-            <a:pPr algn="ctr"/>
-            <a:r>
-              <a:rPr sz="2600" b="1">
-                <a:solidFill>
-                  <a:srgbClr val="1F3A68"/>
-                </a:solidFill>
-                <a:latin typeface="Microsoft YaHei"/>
-              </a:rPr>
-              <a:t>p=0.0001</a:t>
-            </a:r>
-          </a:p>
-        </p:txBody>
-      </p:sp>
-      <p:sp>
-        <p:nvSpPr>
-          <p:cNvPr id="11" name="TextBox 10"/>
-          <p:cNvSpPr txBox="1"/>
-          <p:nvPr/>
-        </p:nvSpPr>
-        <p:spPr>
-          <a:xfrm>
-            <a:off x="3591000" y="2646000"/>
-            <a:ext cx="2223000" cy="737999"/>
-          </a:xfrm>
-          <a:prstGeom prst="rect">
-            <a:avLst/>
-          </a:prstGeom>
-          <a:noFill/>
-        </p:spPr>
-        <p:txBody>
-          <a:bodyPr wrap="square">
-            <a:spAutoFit/>
-          </a:bodyPr>
-          <a:lstStyle/>
-          <a:p>
-            <a:pPr algn="ctr"/>
-            <a:r>
-              <a:rPr sz="1250" b="0">
-                <a:solidFill>
-                  <a:srgbClr val="555F6E"/>
-                </a:solidFill>
-                <a:latin typeface="Microsoft YaHei"/>
-              </a:rPr>
-              <a:t>配对置换检验，n=44</a:t>
-            </a:r>
-          </a:p>
-        </p:txBody>
-      </p:sp>
-      <p:sp>
-        <p:nvSpPr>
-          <p:cNvPr id="12" name="Rectangle 11"/>
-          <p:cNvSpPr/>
-          <p:nvPr/>
-        </p:nvSpPr>
-        <p:spPr>
-          <a:xfrm>
-            <a:off x="6246000" y="1728000"/>
-            <a:ext cx="2439000" cy="198000"/>
-          </a:xfrm>
-          <a:prstGeom prst="rect">
-            <a:avLst/>
-          </a:prstGeom>
-          <a:solidFill>
-            <a:srgbClr val="2F6EBA"/>
-          </a:solidFill>
-          <a:ln>
-            <a:noFill/>
-          </a:ln>
-          <a:effectLst/>
-        </p:spPr>
-        <p:style>
-          <a:lnRef idx="1">
-            <a:schemeClr val="accent1"/>
-          </a:lnRef>
-          <a:fillRef idx="3">
-            <a:schemeClr val="accent1"/>
-          </a:fillRef>
-          <a:effectRef idx="2">
-            <a:schemeClr val="accent1"/>
-          </a:effectRef>
-          <a:fontRef idx="minor">
-            <a:schemeClr val="lt1"/>
-          </a:fontRef>
-        </p:style>
-        <p:txBody>
-          <a:bodyPr rtlCol="0" anchor="ctr"/>
-          <a:lstStyle/>
-          <a:p>
-            <a:pPr algn="ctr"/>
-          </a:p>
-        </p:txBody>
-      </p:sp>
-      <p:sp>
-        <p:nvSpPr>
-          <p:cNvPr id="13" name="TextBox 12"/>
-          <p:cNvSpPr txBox="1"/>
-          <p:nvPr/>
-        </p:nvSpPr>
-        <p:spPr>
-          <a:xfrm>
-            <a:off x="6246000" y="2070000"/>
-            <a:ext cx="2439000" cy="540000"/>
-          </a:xfrm>
-          <a:prstGeom prst="rect">
-            <a:avLst/>
-          </a:prstGeom>
-          <a:noFill/>
-        </p:spPr>
-        <p:txBody>
-          <a:bodyPr wrap="square">
-            <a:spAutoFit/>
-          </a:bodyPr>
-          <a:lstStyle/>
-          <a:p>
-            <a:pPr algn="ctr"/>
-            <a:r>
-              <a:rPr sz="2600" b="1">
-                <a:solidFill>
-                  <a:srgbClr val="1F3A68"/>
-                </a:solidFill>
-                <a:latin typeface="Microsoft YaHei"/>
-              </a:rPr>
-              <a:t>0.357</a:t>
-            </a:r>
-          </a:p>
-        </p:txBody>
-      </p:sp>
-      <p:sp>
-        <p:nvSpPr>
-          <p:cNvPr id="14" name="TextBox 13"/>
-          <p:cNvSpPr txBox="1"/>
-          <p:nvPr/>
-        </p:nvSpPr>
-        <p:spPr>
-          <a:xfrm>
-            <a:off x="6354000" y="2646000"/>
-            <a:ext cx="2223000" cy="737999"/>
-          </a:xfrm>
-          <a:prstGeom prst="rect">
-            <a:avLst/>
-          </a:prstGeom>
-          <a:noFill/>
-        </p:spPr>
-        <p:txBody>
-          <a:bodyPr wrap="square">
-            <a:spAutoFit/>
-          </a:bodyPr>
-          <a:lstStyle/>
-          <a:p>
-            <a:pPr algn="ctr"/>
-            <a:r>
-              <a:rPr sz="1250" b="0">
-                <a:solidFill>
-                  <a:srgbClr val="555F6E"/>
-                </a:solidFill>
-                <a:latin typeface="Microsoft YaHei"/>
-              </a:rPr>
-              <a:t>随机基线</a:t>
-            </a:r>
-          </a:p>
-        </p:txBody>
-      </p:sp>
-      <p:sp>
-        <p:nvSpPr>
-          <p:cNvPr id="15" name="Rectangle 14"/>
-          <p:cNvSpPr/>
-          <p:nvPr/>
-        </p:nvSpPr>
-        <p:spPr>
-          <a:xfrm>
-            <a:off x="9009000" y="1728000"/>
-            <a:ext cx="2439000" cy="198000"/>
-          </a:xfrm>
-          <a:prstGeom prst="rect">
-            <a:avLst/>
-          </a:prstGeom>
-          <a:solidFill>
-            <a:srgbClr val="2F6EBA"/>
-          </a:solidFill>
-          <a:ln>
-            <a:noFill/>
-          </a:ln>
-          <a:effectLst/>
-        </p:spPr>
-        <p:style>
-          <a:lnRef idx="1">
-            <a:schemeClr val="accent1"/>
-          </a:lnRef>
-          <a:fillRef idx="3">
-            <a:schemeClr val="accent1"/>
-          </a:fillRef>
-          <a:effectRef idx="2">
-            <a:schemeClr val="accent1"/>
-          </a:effectRef>
-          <a:fontRef idx="minor">
-            <a:schemeClr val="lt1"/>
-          </a:fontRef>
-        </p:style>
-        <p:txBody>
-          <a:bodyPr rtlCol="0" anchor="ctr"/>
-          <a:lstStyle/>
-          <a:p>
-            <a:pPr algn="ctr"/>
-          </a:p>
-        </p:txBody>
-      </p:sp>
-      <p:sp>
-        <p:nvSpPr>
-          <p:cNvPr id="16" name="TextBox 15"/>
-          <p:cNvSpPr txBox="1"/>
-          <p:nvPr/>
-        </p:nvSpPr>
-        <p:spPr>
-          <a:xfrm>
-            <a:off x="9009000" y="2070000"/>
-            <a:ext cx="2439000" cy="540000"/>
-          </a:xfrm>
-          <a:prstGeom prst="rect">
-            <a:avLst/>
-          </a:prstGeom>
-          <a:noFill/>
-        </p:spPr>
-        <p:txBody>
-          <a:bodyPr wrap="square">
-            <a:spAutoFit/>
-          </a:bodyPr>
-          <a:lstStyle/>
-          <a:p>
-            <a:pPr algn="ctr"/>
-            <a:r>
-              <a:rPr sz="2600" b="1">
-                <a:solidFill>
-                  <a:srgbClr val="1F3A68"/>
-                </a:solidFill>
-                <a:latin typeface="Microsoft YaHei"/>
-              </a:rPr>
-              <a:t>0.625</a:t>
-            </a:r>
-          </a:p>
-        </p:txBody>
-      </p:sp>
-      <p:sp>
-        <p:nvSpPr>
-          <p:cNvPr id="17" name="TextBox 16"/>
-          <p:cNvSpPr txBox="1"/>
-          <p:nvPr/>
-        </p:nvSpPr>
-        <p:spPr>
-          <a:xfrm>
-            <a:off x="9117000" y="2646000"/>
-            <a:ext cx="2223000" cy="737999"/>
-          </a:xfrm>
-          <a:prstGeom prst="rect">
-            <a:avLst/>
-          </a:prstGeom>
-          <a:noFill/>
-        </p:spPr>
-        <p:txBody>
-          <a:bodyPr wrap="square">
-            <a:spAutoFit/>
-          </a:bodyPr>
-          <a:lstStyle/>
-          <a:p>
-            <a:pPr algn="ctr"/>
-            <a:r>
-              <a:rPr sz="1250" b="0">
-                <a:solidFill>
-                  <a:srgbClr val="555F6E"/>
-                </a:solidFill>
-                <a:latin typeface="Microsoft YaHei"/>
-              </a:rPr>
-              <a:t>C 类残余失分（词袋局限）</a:t>
-            </a:r>
-          </a:p>
-        </p:txBody>
-      </p:sp>
-      <p:sp>
-        <p:nvSpPr>
-          <p:cNvPr id="18" name="Rectangle 17"/>
-          <p:cNvSpPr/>
-          <p:nvPr/>
-        </p:nvSpPr>
-        <p:spPr>
-          <a:xfrm>
-            <a:off x="0" y="6606000"/>
-            <a:ext cx="12193200" cy="10800"/>
+            <a:off x="792000" y="2178000"/>
+            <a:ext cx="10620000" cy="10800"/>
           </a:xfrm>
           <a:prstGeom prst="rect">
             <a:avLst/>
@@ -22600,7 +22249,796 @@
       </p:sp>
       <p:sp>
         <p:nvSpPr>
+          <p:cNvPr id="10" name="TextBox 9"/>
+          <p:cNvSpPr txBox="1"/>
+          <p:nvPr/>
+        </p:nvSpPr>
+        <p:spPr>
+          <a:xfrm>
+            <a:off x="792000" y="2124000"/>
+            <a:ext cx="648000" cy="432000"/>
+          </a:xfrm>
+          <a:prstGeom prst="rect">
+            <a:avLst/>
+          </a:prstGeom>
+          <a:noFill/>
+        </p:spPr>
+        <p:txBody>
+          <a:bodyPr wrap="none">
+            <a:spAutoFit/>
+          </a:bodyPr>
+          <a:lstStyle/>
+          <a:p>
+            <a:pPr algn="l"/>
+            <a:r>
+              <a:rPr sz="2200" b="1">
+                <a:solidFill>
+                  <a:srgbClr val="2F6EBA"/>
+                </a:solidFill>
+                <a:latin typeface="Microsoft YaHei"/>
+              </a:rPr>
+              <a:t>02</a:t>
+            </a:r>
+          </a:p>
+        </p:txBody>
+      </p:sp>
+      <p:sp>
+        <p:nvSpPr>
+          <p:cNvPr id="11" name="TextBox 10"/>
+          <p:cNvSpPr txBox="1"/>
+          <p:nvPr/>
+        </p:nvSpPr>
+        <p:spPr>
+          <a:xfrm>
+            <a:off x="1512000" y="2145600"/>
+            <a:ext cx="9828000" cy="216000"/>
+          </a:xfrm>
+          <a:prstGeom prst="rect">
+            <a:avLst/>
+          </a:prstGeom>
+          <a:noFill/>
+        </p:spPr>
+        <p:txBody>
+          <a:bodyPr wrap="square">
+            <a:spAutoFit/>
+          </a:bodyPr>
+          <a:lstStyle/>
+          <a:p>
+            <a:pPr algn="l"/>
+            <a:r>
+              <a:rPr sz="1600" b="1">
+                <a:solidFill>
+                  <a:srgbClr val="1F3A68"/>
+                </a:solidFill>
+                <a:latin typeface="Microsoft YaHei"/>
+              </a:rPr>
+              <a:t>总体结果</a:t>
+            </a:r>
+          </a:p>
+        </p:txBody>
+      </p:sp>
+      <p:sp>
+        <p:nvSpPr>
+          <p:cNvPr id="12" name="TextBox 11"/>
+          <p:cNvSpPr txBox="1"/>
+          <p:nvPr/>
+        </p:nvSpPr>
+        <p:spPr>
+          <a:xfrm>
+            <a:off x="1512000" y="2383200"/>
+            <a:ext cx="9828000" cy="306000"/>
+          </a:xfrm>
+          <a:prstGeom prst="rect">
+            <a:avLst/>
+          </a:prstGeom>
+          <a:noFill/>
+        </p:spPr>
+        <p:txBody>
+          <a:bodyPr wrap="square">
+            <a:spAutoFit/>
+          </a:bodyPr>
+          <a:lstStyle/>
+          <a:p>
+            <a:pPr algn="l"/>
+            <a:r>
+              <a:rPr sz="1250" b="0">
+                <a:solidFill>
+                  <a:srgbClr val="555F6E"/>
+                </a:solidFill>
+                <a:latin typeface="Microsoft YaHei"/>
+              </a:rPr>
+              <a:t>G2 hit@5=0.341，G3=0.636，Δ=0.295，配对置换 p=0.0001</a:t>
+            </a:r>
+          </a:p>
+        </p:txBody>
+      </p:sp>
+      <p:sp>
+        <p:nvSpPr>
+          <p:cNvPr id="13" name="Rectangle 12"/>
+          <p:cNvSpPr/>
+          <p:nvPr/>
+        </p:nvSpPr>
+        <p:spPr>
+          <a:xfrm>
+            <a:off x="792000" y="2610000"/>
+            <a:ext cx="10620000" cy="10800"/>
+          </a:xfrm>
+          <a:prstGeom prst="rect">
+            <a:avLst/>
+          </a:prstGeom>
+          <a:solidFill>
+            <a:srgbClr val="C8D0DC"/>
+          </a:solidFill>
+          <a:ln>
+            <a:noFill/>
+          </a:ln>
+          <a:effectLst/>
+        </p:spPr>
+        <p:style>
+          <a:lnRef idx="1">
+            <a:schemeClr val="accent1"/>
+          </a:lnRef>
+          <a:fillRef idx="3">
+            <a:schemeClr val="accent1"/>
+          </a:fillRef>
+          <a:effectRef idx="2">
+            <a:schemeClr val="accent1"/>
+          </a:effectRef>
+          <a:fontRef idx="minor">
+            <a:schemeClr val="lt1"/>
+          </a:fontRef>
+        </p:style>
+        <p:txBody>
+          <a:bodyPr rtlCol="0" anchor="ctr"/>
+          <a:lstStyle/>
+          <a:p>
+            <a:pPr algn="ctr"/>
+          </a:p>
+        </p:txBody>
+      </p:sp>
+      <p:sp>
+        <p:nvSpPr>
+          <p:cNvPr id="14" name="TextBox 13"/>
+          <p:cNvSpPr txBox="1"/>
+          <p:nvPr/>
+        </p:nvSpPr>
+        <p:spPr>
+          <a:xfrm>
+            <a:off x="792000" y="2556000"/>
+            <a:ext cx="648000" cy="432000"/>
+          </a:xfrm>
+          <a:prstGeom prst="rect">
+            <a:avLst/>
+          </a:prstGeom>
+          <a:noFill/>
+        </p:spPr>
+        <p:txBody>
+          <a:bodyPr wrap="none">
+            <a:spAutoFit/>
+          </a:bodyPr>
+          <a:lstStyle/>
+          <a:p>
+            <a:pPr algn="l"/>
+            <a:r>
+              <a:rPr sz="2200" b="1">
+                <a:solidFill>
+                  <a:srgbClr val="2F6EBA"/>
+                </a:solidFill>
+                <a:latin typeface="Microsoft YaHei"/>
+              </a:rPr>
+              <a:t>03</a:t>
+            </a:r>
+          </a:p>
+        </p:txBody>
+      </p:sp>
+      <p:sp>
+        <p:nvSpPr>
+          <p:cNvPr id="15" name="TextBox 14"/>
+          <p:cNvSpPr txBox="1"/>
+          <p:nvPr/>
+        </p:nvSpPr>
+        <p:spPr>
+          <a:xfrm>
+            <a:off x="1512000" y="2577600"/>
+            <a:ext cx="9828000" cy="216000"/>
+          </a:xfrm>
+          <a:prstGeom prst="rect">
+            <a:avLst/>
+          </a:prstGeom>
+          <a:noFill/>
+        </p:spPr>
+        <p:txBody>
+          <a:bodyPr wrap="square">
+            <a:spAutoFit/>
+          </a:bodyPr>
+          <a:lstStyle/>
+          <a:p>
+            <a:pPr algn="l"/>
+            <a:r>
+              <a:rPr sz="1600" b="1">
+                <a:solidFill>
+                  <a:srgbClr val="1F3A68"/>
+                </a:solidFill>
+                <a:latin typeface="Microsoft YaHei"/>
+              </a:rPr>
+              <a:t>置信区间</a:t>
+            </a:r>
+          </a:p>
+        </p:txBody>
+      </p:sp>
+      <p:sp>
+        <p:nvSpPr>
+          <p:cNvPr id="16" name="TextBox 15"/>
+          <p:cNvSpPr txBox="1"/>
+          <p:nvPr/>
+        </p:nvSpPr>
+        <p:spPr>
+          <a:xfrm>
+            <a:off x="1512000" y="2815200"/>
+            <a:ext cx="9828000" cy="306000"/>
+          </a:xfrm>
+          <a:prstGeom prst="rect">
+            <a:avLst/>
+          </a:prstGeom>
+          <a:noFill/>
+        </p:spPr>
+        <p:txBody>
+          <a:bodyPr wrap="square">
+            <a:spAutoFit/>
+          </a:bodyPr>
+          <a:lstStyle/>
+          <a:p>
+            <a:pPr algn="l"/>
+            <a:r>
+              <a:rPr sz="1250" b="0">
+                <a:solidFill>
+                  <a:srgbClr val="555F6E"/>
+                </a:solidFill>
+                <a:latin typeface="Microsoft YaHei"/>
+              </a:rPr>
+              <a:t>G3 bootstrap 95% CI=[0.500, 0.773]，与 G2 CI=[0.205, 0.477] 不重叠</a:t>
+            </a:r>
+          </a:p>
+        </p:txBody>
+      </p:sp>
+      <p:sp>
+        <p:nvSpPr>
+          <p:cNvPr id="17" name="Rectangle 16"/>
+          <p:cNvSpPr/>
+          <p:nvPr/>
+        </p:nvSpPr>
+        <p:spPr>
+          <a:xfrm>
+            <a:off x="792000" y="3042000"/>
+            <a:ext cx="10620000" cy="10800"/>
+          </a:xfrm>
+          <a:prstGeom prst="rect">
+            <a:avLst/>
+          </a:prstGeom>
+          <a:solidFill>
+            <a:srgbClr val="C8D0DC"/>
+          </a:solidFill>
+          <a:ln>
+            <a:noFill/>
+          </a:ln>
+          <a:effectLst/>
+        </p:spPr>
+        <p:style>
+          <a:lnRef idx="1">
+            <a:schemeClr val="accent1"/>
+          </a:lnRef>
+          <a:fillRef idx="3">
+            <a:schemeClr val="accent1"/>
+          </a:fillRef>
+          <a:effectRef idx="2">
+            <a:schemeClr val="accent1"/>
+          </a:effectRef>
+          <a:fontRef idx="minor">
+            <a:schemeClr val="lt1"/>
+          </a:fontRef>
+        </p:style>
+        <p:txBody>
+          <a:bodyPr rtlCol="0" anchor="ctr"/>
+          <a:lstStyle/>
+          <a:p>
+            <a:pPr algn="ctr"/>
+          </a:p>
+        </p:txBody>
+      </p:sp>
+      <p:sp>
+        <p:nvSpPr>
+          <p:cNvPr id="18" name="TextBox 17"/>
+          <p:cNvSpPr txBox="1"/>
+          <p:nvPr/>
+        </p:nvSpPr>
+        <p:spPr>
+          <a:xfrm>
+            <a:off x="792000" y="2988000"/>
+            <a:ext cx="648000" cy="432000"/>
+          </a:xfrm>
+          <a:prstGeom prst="rect">
+            <a:avLst/>
+          </a:prstGeom>
+          <a:noFill/>
+        </p:spPr>
+        <p:txBody>
+          <a:bodyPr wrap="none">
+            <a:spAutoFit/>
+          </a:bodyPr>
+          <a:lstStyle/>
+          <a:p>
+            <a:pPr algn="l"/>
+            <a:r>
+              <a:rPr sz="2200" b="1">
+                <a:solidFill>
+                  <a:srgbClr val="2F6EBA"/>
+                </a:solidFill>
+                <a:latin typeface="Microsoft YaHei"/>
+              </a:rPr>
+              <a:t>04</a:t>
+            </a:r>
+          </a:p>
+        </p:txBody>
+      </p:sp>
+      <p:sp>
+        <p:nvSpPr>
           <p:cNvPr id="19" name="TextBox 18"/>
+          <p:cNvSpPr txBox="1"/>
+          <p:nvPr/>
+        </p:nvSpPr>
+        <p:spPr>
+          <a:xfrm>
+            <a:off x="1512000" y="3009600"/>
+            <a:ext cx="9828000" cy="216000"/>
+          </a:xfrm>
+          <a:prstGeom prst="rect">
+            <a:avLst/>
+          </a:prstGeom>
+          <a:noFill/>
+        </p:spPr>
+        <p:txBody>
+          <a:bodyPr wrap="square">
+            <a:spAutoFit/>
+          </a:bodyPr>
+          <a:lstStyle/>
+          <a:p>
+            <a:pPr algn="l"/>
+            <a:r>
+              <a:rPr sz="1600" b="1">
+                <a:solidFill>
+                  <a:srgbClr val="1F3A68"/>
+                </a:solidFill>
+                <a:latin typeface="Microsoft YaHei"/>
+              </a:rPr>
+              <a:t>分类别观察</a:t>
+            </a:r>
+          </a:p>
+        </p:txBody>
+      </p:sp>
+      <p:sp>
+        <p:nvSpPr>
+          <p:cNvPr id="20" name="TextBox 19"/>
+          <p:cNvSpPr txBox="1"/>
+          <p:nvPr/>
+        </p:nvSpPr>
+        <p:spPr>
+          <a:xfrm>
+            <a:off x="1512000" y="3247200"/>
+            <a:ext cx="9828000" cy="306000"/>
+          </a:xfrm>
+          <a:prstGeom prst="rect">
+            <a:avLst/>
+          </a:prstGeom>
+          <a:noFill/>
+        </p:spPr>
+        <p:txBody>
+          <a:bodyPr wrap="square">
+            <a:spAutoFit/>
+          </a:bodyPr>
+          <a:lstStyle/>
+          <a:p>
+            <a:pPr algn="l"/>
+            <a:r>
+              <a:rPr sz="1250" b="0">
+                <a:solidFill>
+                  <a:srgbClr val="555F6E"/>
+                </a:solidFill>
+                <a:latin typeface="Microsoft YaHei"/>
+              </a:rPr>
+              <a:t>增益全部来自经验类（C 0.625 / D 1.0 / G 1.0），事实类 A/B/F 不降</a:t>
+            </a:r>
+          </a:p>
+        </p:txBody>
+      </p:sp>
+      <p:sp>
+        <p:nvSpPr>
+          <p:cNvPr id="21" name="Rectangle 20"/>
+          <p:cNvSpPr/>
+          <p:nvPr/>
+        </p:nvSpPr>
+        <p:spPr>
+          <a:xfrm>
+            <a:off x="792000" y="3474000"/>
+            <a:ext cx="10620000" cy="10800"/>
+          </a:xfrm>
+          <a:prstGeom prst="rect">
+            <a:avLst/>
+          </a:prstGeom>
+          <a:solidFill>
+            <a:srgbClr val="C8D0DC"/>
+          </a:solidFill>
+          <a:ln>
+            <a:noFill/>
+          </a:ln>
+          <a:effectLst/>
+        </p:spPr>
+        <p:style>
+          <a:lnRef idx="1">
+            <a:schemeClr val="accent1"/>
+          </a:lnRef>
+          <a:fillRef idx="3">
+            <a:schemeClr val="accent1"/>
+          </a:fillRef>
+          <a:effectRef idx="2">
+            <a:schemeClr val="accent1"/>
+          </a:effectRef>
+          <a:fontRef idx="minor">
+            <a:schemeClr val="lt1"/>
+          </a:fontRef>
+        </p:style>
+        <p:txBody>
+          <a:bodyPr rtlCol="0" anchor="ctr"/>
+          <a:lstStyle/>
+          <a:p>
+            <a:pPr algn="ctr"/>
+          </a:p>
+        </p:txBody>
+      </p:sp>
+      <p:sp>
+        <p:nvSpPr>
+          <p:cNvPr id="22" name="TextBox 21"/>
+          <p:cNvSpPr txBox="1"/>
+          <p:nvPr/>
+        </p:nvSpPr>
+        <p:spPr>
+          <a:xfrm>
+            <a:off x="792000" y="3420000"/>
+            <a:ext cx="648000" cy="432000"/>
+          </a:xfrm>
+          <a:prstGeom prst="rect">
+            <a:avLst/>
+          </a:prstGeom>
+          <a:noFill/>
+        </p:spPr>
+        <p:txBody>
+          <a:bodyPr wrap="none">
+            <a:spAutoFit/>
+          </a:bodyPr>
+          <a:lstStyle/>
+          <a:p>
+            <a:pPr algn="l"/>
+            <a:r>
+              <a:rPr sz="2200" b="1">
+                <a:solidFill>
+                  <a:srgbClr val="2F6EBA"/>
+                </a:solidFill>
+                <a:latin typeface="Microsoft YaHei"/>
+              </a:rPr>
+              <a:t>05</a:t>
+            </a:r>
+          </a:p>
+        </p:txBody>
+      </p:sp>
+      <p:sp>
+        <p:nvSpPr>
+          <p:cNvPr id="23" name="TextBox 22"/>
+          <p:cNvSpPr txBox="1"/>
+          <p:nvPr/>
+        </p:nvSpPr>
+        <p:spPr>
+          <a:xfrm>
+            <a:off x="1512000" y="3441600"/>
+            <a:ext cx="9828000" cy="216000"/>
+          </a:xfrm>
+          <a:prstGeom prst="rect">
+            <a:avLst/>
+          </a:prstGeom>
+          <a:noFill/>
+        </p:spPr>
+        <p:txBody>
+          <a:bodyPr wrap="square">
+            <a:spAutoFit/>
+          </a:bodyPr>
+          <a:lstStyle/>
+          <a:p>
+            <a:pPr algn="l"/>
+            <a:r>
+              <a:rPr sz="1600" b="1">
+                <a:solidFill>
+                  <a:srgbClr val="1F3A68"/>
+                </a:solidFill>
+                <a:latin typeface="Microsoft YaHei"/>
+              </a:rPr>
+              <a:t>随机基线</a:t>
+            </a:r>
+          </a:p>
+        </p:txBody>
+      </p:sp>
+      <p:sp>
+        <p:nvSpPr>
+          <p:cNvPr id="24" name="TextBox 23"/>
+          <p:cNvSpPr txBox="1"/>
+          <p:nvPr/>
+        </p:nvSpPr>
+        <p:spPr>
+          <a:xfrm>
+            <a:off x="1512000" y="3679200"/>
+            <a:ext cx="9828000" cy="306000"/>
+          </a:xfrm>
+          <a:prstGeom prst="rect">
+            <a:avLst/>
+          </a:prstGeom>
+          <a:noFill/>
+        </p:spPr>
+        <p:txBody>
+          <a:bodyPr wrap="square">
+            <a:spAutoFit/>
+          </a:bodyPr>
+          <a:lstStyle/>
+          <a:p>
+            <a:pPr algn="l"/>
+            <a:r>
+              <a:rPr sz="1250" b="0">
+                <a:solidFill>
+                  <a:srgbClr val="555F6E"/>
+                </a:solidFill>
+                <a:latin typeface="Microsoft YaHei"/>
+              </a:rPr>
+              <a:t>0.357，G3 显著高于瞎猜，说明检索不是偶然</a:t>
+            </a:r>
+          </a:p>
+        </p:txBody>
+      </p:sp>
+      <p:sp>
+        <p:nvSpPr>
+          <p:cNvPr id="25" name="Rectangle 24"/>
+          <p:cNvSpPr/>
+          <p:nvPr/>
+        </p:nvSpPr>
+        <p:spPr>
+          <a:xfrm>
+            <a:off x="792000" y="3906000"/>
+            <a:ext cx="10620000" cy="10800"/>
+          </a:xfrm>
+          <a:prstGeom prst="rect">
+            <a:avLst/>
+          </a:prstGeom>
+          <a:solidFill>
+            <a:srgbClr val="C8D0DC"/>
+          </a:solidFill>
+          <a:ln>
+            <a:noFill/>
+          </a:ln>
+          <a:effectLst/>
+        </p:spPr>
+        <p:style>
+          <a:lnRef idx="1">
+            <a:schemeClr val="accent1"/>
+          </a:lnRef>
+          <a:fillRef idx="3">
+            <a:schemeClr val="accent1"/>
+          </a:fillRef>
+          <a:effectRef idx="2">
+            <a:schemeClr val="accent1"/>
+          </a:effectRef>
+          <a:fontRef idx="minor">
+            <a:schemeClr val="lt1"/>
+          </a:fontRef>
+        </p:style>
+        <p:txBody>
+          <a:bodyPr rtlCol="0" anchor="ctr"/>
+          <a:lstStyle/>
+          <a:p>
+            <a:pPr algn="ctr"/>
+          </a:p>
+        </p:txBody>
+      </p:sp>
+      <p:sp>
+        <p:nvSpPr>
+          <p:cNvPr id="26" name="TextBox 25"/>
+          <p:cNvSpPr txBox="1"/>
+          <p:nvPr/>
+        </p:nvSpPr>
+        <p:spPr>
+          <a:xfrm>
+            <a:off x="792000" y="3851999"/>
+            <a:ext cx="648000" cy="432000"/>
+          </a:xfrm>
+          <a:prstGeom prst="rect">
+            <a:avLst/>
+          </a:prstGeom>
+          <a:noFill/>
+        </p:spPr>
+        <p:txBody>
+          <a:bodyPr wrap="none">
+            <a:spAutoFit/>
+          </a:bodyPr>
+          <a:lstStyle/>
+          <a:p>
+            <a:pPr algn="l"/>
+            <a:r>
+              <a:rPr sz="2200" b="1">
+                <a:solidFill>
+                  <a:srgbClr val="2F6EBA"/>
+                </a:solidFill>
+                <a:latin typeface="Microsoft YaHei"/>
+              </a:rPr>
+              <a:t>06</a:t>
+            </a:r>
+          </a:p>
+        </p:txBody>
+      </p:sp>
+      <p:sp>
+        <p:nvSpPr>
+          <p:cNvPr id="27" name="TextBox 26"/>
+          <p:cNvSpPr txBox="1"/>
+          <p:nvPr/>
+        </p:nvSpPr>
+        <p:spPr>
+          <a:xfrm>
+            <a:off x="1512000" y="3873600"/>
+            <a:ext cx="9828000" cy="216000"/>
+          </a:xfrm>
+          <a:prstGeom prst="rect">
+            <a:avLst/>
+          </a:prstGeom>
+          <a:noFill/>
+        </p:spPr>
+        <p:txBody>
+          <a:bodyPr wrap="square">
+            <a:spAutoFit/>
+          </a:bodyPr>
+          <a:lstStyle/>
+          <a:p>
+            <a:pPr algn="l"/>
+            <a:r>
+              <a:rPr sz="1600" b="1">
+                <a:solidFill>
+                  <a:srgbClr val="1F3A68"/>
+                </a:solidFill>
+                <a:latin typeface="Microsoft YaHei"/>
+              </a:rPr>
+              <a:t>解读</a:t>
+            </a:r>
+          </a:p>
+        </p:txBody>
+      </p:sp>
+      <p:sp>
+        <p:nvSpPr>
+          <p:cNvPr id="28" name="TextBox 27"/>
+          <p:cNvSpPr txBox="1"/>
+          <p:nvPr/>
+        </p:nvSpPr>
+        <p:spPr>
+          <a:xfrm>
+            <a:off x="1512000" y="4111200"/>
+            <a:ext cx="9828000" cy="306000"/>
+          </a:xfrm>
+          <a:prstGeom prst="rect">
+            <a:avLst/>
+          </a:prstGeom>
+          <a:noFill/>
+        </p:spPr>
+        <p:txBody>
+          <a:bodyPr wrap="square">
+            <a:spAutoFit/>
+          </a:bodyPr>
+          <a:lstStyle/>
+          <a:p>
+            <a:pPr algn="l"/>
+            <a:r>
+              <a:rPr sz="1250" b="0">
+                <a:solidFill>
+                  <a:srgbClr val="555F6E"/>
+                </a:solidFill>
+                <a:latin typeface="Microsoft YaHei"/>
+              </a:rPr>
+              <a:t>分层不是冗余，经验库是经验查询的必要条件；残余失分在 C 类（词袋局限）</a:t>
+            </a:r>
+          </a:p>
+        </p:txBody>
+      </p:sp>
+      <p:sp>
+        <p:nvSpPr>
+          <p:cNvPr id="29" name="Rectangle 28"/>
+          <p:cNvSpPr/>
+          <p:nvPr/>
+        </p:nvSpPr>
+        <p:spPr>
+          <a:xfrm>
+            <a:off x="792000" y="4338000"/>
+            <a:ext cx="10620000" cy="10800"/>
+          </a:xfrm>
+          <a:prstGeom prst="rect">
+            <a:avLst/>
+          </a:prstGeom>
+          <a:solidFill>
+            <a:srgbClr val="C8D0DC"/>
+          </a:solidFill>
+          <a:ln>
+            <a:noFill/>
+          </a:ln>
+          <a:effectLst/>
+        </p:spPr>
+        <p:style>
+          <a:lnRef idx="1">
+            <a:schemeClr val="accent1"/>
+          </a:lnRef>
+          <a:fillRef idx="3">
+            <a:schemeClr val="accent1"/>
+          </a:fillRef>
+          <a:effectRef idx="2">
+            <a:schemeClr val="accent1"/>
+          </a:effectRef>
+          <a:fontRef idx="minor">
+            <a:schemeClr val="lt1"/>
+          </a:fontRef>
+        </p:style>
+        <p:txBody>
+          <a:bodyPr rtlCol="0" anchor="ctr"/>
+          <a:lstStyle/>
+          <a:p>
+            <a:pPr algn="ctr"/>
+          </a:p>
+        </p:txBody>
+      </p:sp>
+      <p:sp>
+        <p:nvSpPr>
+          <p:cNvPr id="30" name="Rectangle 29"/>
+          <p:cNvSpPr/>
+          <p:nvPr/>
+        </p:nvSpPr>
+        <p:spPr>
+          <a:xfrm>
+            <a:off x="0" y="6606000"/>
+            <a:ext cx="12193200" cy="10800"/>
+          </a:xfrm>
+          <a:prstGeom prst="rect">
+            <a:avLst/>
+          </a:prstGeom>
+          <a:solidFill>
+            <a:srgbClr val="C8D0DC"/>
+          </a:solidFill>
+          <a:ln>
+            <a:noFill/>
+          </a:ln>
+          <a:effectLst/>
+        </p:spPr>
+        <p:style>
+          <a:lnRef idx="1">
+            <a:schemeClr val="accent1"/>
+          </a:lnRef>
+          <a:fillRef idx="3">
+            <a:schemeClr val="accent1"/>
+          </a:fillRef>
+          <a:effectRef idx="2">
+            <a:schemeClr val="accent1"/>
+          </a:effectRef>
+          <a:fontRef idx="minor">
+            <a:schemeClr val="lt1"/>
+          </a:fontRef>
+        </p:style>
+        <p:txBody>
+          <a:bodyPr rtlCol="0" anchor="ctr"/>
+          <a:lstStyle/>
+          <a:p>
+            <a:pPr algn="ctr"/>
+          </a:p>
+        </p:txBody>
+      </p:sp>
+      <p:sp>
+        <p:nvSpPr>
+          <p:cNvPr id="31" name="TextBox 30"/>
           <p:cNvSpPr txBox="1"/>
           <p:nvPr/>
         </p:nvSpPr>
@@ -22635,7 +23073,7 @@
       </p:sp>
       <p:sp>
         <p:nvSpPr>
-          <p:cNvPr id="20" name="TextBox 19"/>
+          <p:cNvPr id="32" name="TextBox 31"/>
           <p:cNvSpPr txBox="1"/>
           <p:nvPr/>
         </p:nvSpPr>
@@ -22852,7 +23290,7 @@
         </p:nvSpPr>
         <p:spPr>
           <a:xfrm>
-            <a:off x="792000" y="1692000"/>
+            <a:off x="792000" y="1828800"/>
             <a:ext cx="648000" cy="432000"/>
           </a:xfrm>
           <a:prstGeom prst="rect">
@@ -22868,7 +23306,7 @@
           <a:p>
             <a:pPr algn="l"/>
             <a:r>
-              <a:rPr sz="2200" b="1">
+              <a:rPr sz="2600" b="1">
                 <a:solidFill>
                   <a:srgbClr val="2F6EBA"/>
                 </a:solidFill>
@@ -22887,8 +23325,8 @@
         </p:nvSpPr>
         <p:spPr>
           <a:xfrm>
-            <a:off x="1512000" y="1713600"/>
-            <a:ext cx="9828000" cy="216000"/>
+            <a:off x="1512000" y="1800000"/>
+            <a:ext cx="9828000" cy="324000"/>
           </a:xfrm>
           <a:prstGeom prst="rect">
             <a:avLst/>
@@ -22903,13 +23341,13 @@
           <a:p>
             <a:pPr algn="l"/>
             <a:r>
-              <a:rPr sz="1600" b="1">
+              <a:rPr sz="2000" b="1">
                 <a:solidFill>
                   <a:srgbClr val="1F3A68"/>
                 </a:solidFill>
                 <a:latin typeface="Microsoft YaHei"/>
               </a:rPr>
-              <a:t>跨场次</a:t>
+              <a:t>RQ2 实验设计</a:t>
             </a:r>
           </a:p>
         </p:txBody>
@@ -22922,8 +23360,8 @@
         </p:nvSpPr>
         <p:spPr>
           <a:xfrm>
-            <a:off x="1512000" y="1951200"/>
-            <a:ext cx="9828000" cy="306000"/>
+            <a:off x="1512000" y="2106000"/>
+            <a:ext cx="9828000" cy="593999"/>
           </a:xfrm>
           <a:prstGeom prst="rect">
             <a:avLst/>
@@ -22938,13 +23376,13 @@
           <a:p>
             <a:pPr algn="l"/>
             <a:r>
-              <a:rPr sz="1250" b="0">
+              <a:rPr sz="1400" b="0">
                 <a:solidFill>
                   <a:srgbClr val="555F6E"/>
                 </a:solidFill>
                 <a:latin typeface="Microsoft YaHei"/>
               </a:rPr>
-              <a:t>处理组 0.833 vs 对照 0，负控 0；机制路径完整，但 n=6 样本有限</a:t>
+              <a:t>第一场先跑复盘，把‘教训/经验’写入经验库；第二场用相关查询检索，gold 为运行期写入条目；对照不写第一场；另设负控（渡河教训 vs 巷战查询）。</a:t>
             </a:r>
           </a:p>
         </p:txBody>
@@ -22957,7 +23395,7 @@
         </p:nvSpPr>
         <p:spPr>
           <a:xfrm>
-            <a:off x="792000" y="2178000"/>
+            <a:off x="792000" y="2761199"/>
             <a:ext cx="10620000" cy="10800"/>
           </a:xfrm>
           <a:prstGeom prst="rect">
@@ -23001,7 +23439,7 @@
         </p:nvSpPr>
         <p:spPr>
           <a:xfrm>
-            <a:off x="792000" y="2250000"/>
+            <a:off x="792000" y="2962799"/>
             <a:ext cx="648000" cy="432000"/>
           </a:xfrm>
           <a:prstGeom prst="rect">
@@ -23017,7 +23455,7 @@
           <a:p>
             <a:pPr algn="l"/>
             <a:r>
-              <a:rPr sz="2200" b="1">
+              <a:rPr sz="2600" b="1">
                 <a:solidFill>
                   <a:srgbClr val="2F6EBA"/>
                 </a:solidFill>
@@ -23036,8 +23474,8 @@
         </p:nvSpPr>
         <p:spPr>
           <a:xfrm>
-            <a:off x="1512000" y="2271600"/>
-            <a:ext cx="9828000" cy="216000"/>
+            <a:off x="1512000" y="2933999"/>
+            <a:ext cx="9828000" cy="324000"/>
           </a:xfrm>
           <a:prstGeom prst="rect">
             <a:avLst/>
@@ -23052,13 +23490,13 @@
           <a:p>
             <a:pPr algn="l"/>
             <a:r>
-              <a:rPr sz="1600" b="1">
+              <a:rPr sz="2000" b="1">
                 <a:solidFill>
                   <a:srgbClr val="1F3A68"/>
                 </a:solidFill>
                 <a:latin typeface="Microsoft YaHei"/>
               </a:rPr>
-              <a:t>p=0.059</a:t>
+              <a:t>RQ2 结果与解释</a:t>
             </a:r>
           </a:p>
         </p:txBody>
@@ -23071,8 +23509,8 @@
         </p:nvSpPr>
         <p:spPr>
           <a:xfrm>
-            <a:off x="1512000" y="2509200"/>
-            <a:ext cx="9828000" cy="306000"/>
+            <a:off x="1512000" y="3240000"/>
+            <a:ext cx="9828000" cy="593999"/>
           </a:xfrm>
           <a:prstGeom prst="rect">
             <a:avLst/>
@@ -23087,13 +23525,13 @@
           <a:p>
             <a:pPr algn="l"/>
             <a:r>
-              <a:rPr sz="1250" b="0">
+              <a:rPr sz="1400" b="0">
                 <a:solidFill>
                   <a:srgbClr val="555F6E"/>
                 </a:solidFill>
                 <a:latin typeface="Microsoft YaHei"/>
               </a:rPr>
-              <a:t>方向性证据，需扩容到 20 条才能形成结论</a:t>
+              <a:t>处理组 hit@5=0.833、对照 0、负控 0；p=0.059 但 n=6 样本有限，只能算方向性证据——机制路径完整，需要扩容到 20 条再下结论。</a:t>
             </a:r>
           </a:p>
         </p:txBody>
@@ -23106,7 +23544,7 @@
         </p:nvSpPr>
         <p:spPr>
           <a:xfrm>
-            <a:off x="792000" y="2736000"/>
+            <a:off x="792000" y="3895199"/>
             <a:ext cx="10620000" cy="10800"/>
           </a:xfrm>
           <a:prstGeom prst="rect">
@@ -23150,7 +23588,7 @@
         </p:nvSpPr>
         <p:spPr>
           <a:xfrm>
-            <a:off x="792000" y="2808000"/>
+            <a:off x="792000" y="4096799"/>
             <a:ext cx="648000" cy="432000"/>
           </a:xfrm>
           <a:prstGeom prst="rect">
@@ -23166,7 +23604,7 @@
           <a:p>
             <a:pPr algn="l"/>
             <a:r>
-              <a:rPr sz="2200" b="1">
+              <a:rPr sz="2600" b="1">
                 <a:solidFill>
                   <a:srgbClr val="2F6EBA"/>
                 </a:solidFill>
@@ -23185,8 +23623,8 @@
         </p:nvSpPr>
         <p:spPr>
           <a:xfrm>
-            <a:off x="1512000" y="2829600"/>
-            <a:ext cx="9828000" cy="216000"/>
+            <a:off x="1512000" y="4067999"/>
+            <a:ext cx="9828000" cy="324000"/>
           </a:xfrm>
           <a:prstGeom prst="rect">
             <a:avLst/>
@@ -23201,13 +23639,13 @@
           <a:p>
             <a:pPr algn="l"/>
             <a:r>
-              <a:rPr sz="1600" b="1">
+              <a:rPr sz="2000" b="1">
                 <a:solidFill>
                   <a:srgbClr val="1F3A68"/>
                 </a:solidFill>
                 <a:latin typeface="Microsoft YaHei"/>
               </a:rPr>
-              <a:t>检索</a:t>
+              <a:t>RQ3 实验设计</a:t>
             </a:r>
           </a:p>
         </p:txBody>
@@ -23220,8 +23658,8 @@
         </p:nvSpPr>
         <p:spPr>
           <a:xfrm>
-            <a:off x="1512000" y="3067200"/>
-            <a:ext cx="9828000" cy="306000"/>
+            <a:off x="1512000" y="4373999"/>
+            <a:ext cx="9828000" cy="593999"/>
           </a:xfrm>
           <a:prstGeom prst="rect">
             <a:avLst/>
@@ -23236,13 +23674,13 @@
           <a:p>
             <a:pPr algn="l"/>
             <a:r>
-              <a:rPr sz="1250" b="0">
+              <a:rPr sz="1400" b="0">
                 <a:solidFill>
                   <a:srgbClr val="555F6E"/>
                 </a:solidFill>
                 <a:latin typeface="Microsoft YaHei"/>
               </a:rPr>
-              <a:t>词袋下 hybrid 0.857 vs vector 0.929，召回未胜出</a:t>
+              <a:t>同一批检索用例分别跑 hybrid 与 vector/bm25/sql 单路；权重变体（α.7 等）做敏感性；指标含 hit@5、MRR、干扰压制。</a:t>
             </a:r>
           </a:p>
         </p:txBody>
@@ -23255,7 +23693,7 @@
         </p:nvSpPr>
         <p:spPr>
           <a:xfrm>
-            <a:off x="792000" y="3294000"/>
+            <a:off x="792000" y="5029199"/>
             <a:ext cx="10620000" cy="10800"/>
           </a:xfrm>
           <a:prstGeom prst="rect">
@@ -23299,7 +23737,7 @@
         </p:nvSpPr>
         <p:spPr>
           <a:xfrm>
-            <a:off x="792000" y="3366000"/>
+            <a:off x="792000" y="5230800"/>
             <a:ext cx="648000" cy="432000"/>
           </a:xfrm>
           <a:prstGeom prst="rect">
@@ -23315,7 +23753,7 @@
           <a:p>
             <a:pPr algn="l"/>
             <a:r>
-              <a:rPr sz="2200" b="1">
+              <a:rPr sz="2600" b="1">
                 <a:solidFill>
                   <a:srgbClr val="2F6EBA"/>
                 </a:solidFill>
@@ -23334,8 +23772,8 @@
         </p:nvSpPr>
         <p:spPr>
           <a:xfrm>
-            <a:off x="1512000" y="3387600"/>
-            <a:ext cx="9828000" cy="216000"/>
+            <a:off x="1512000" y="5202000"/>
+            <a:ext cx="9828000" cy="324000"/>
           </a:xfrm>
           <a:prstGeom prst="rect">
             <a:avLst/>
@@ -23350,13 +23788,13 @@
           <a:p>
             <a:pPr algn="l"/>
             <a:r>
-              <a:rPr sz="1600" b="1">
+              <a:rPr sz="2000" b="1">
                 <a:solidFill>
                   <a:srgbClr val="1F3A68"/>
                 </a:solidFill>
                 <a:latin typeface="Microsoft YaHei"/>
               </a:rPr>
-              <a:t>干扰压制</a:t>
+              <a:t>RQ3 结果与解释</a:t>
             </a:r>
           </a:p>
         </p:txBody>
@@ -23369,8 +23807,8 @@
         </p:nvSpPr>
         <p:spPr>
           <a:xfrm>
-            <a:off x="1512000" y="3625200"/>
-            <a:ext cx="9828000" cy="306000"/>
+            <a:off x="1512000" y="5508000"/>
+            <a:ext cx="9828000" cy="593999"/>
           </a:xfrm>
           <a:prstGeom prst="rect">
             <a:avLst/>
@@ -23385,13 +23823,13 @@
           <a:p>
             <a:pPr algn="l"/>
             <a:r>
-              <a:rPr sz="1250" b="0">
+              <a:rPr sz="1400" b="0">
                 <a:solidFill>
                   <a:srgbClr val="555F6E"/>
                 </a:solidFill>
                 <a:latin typeface="Microsoft YaHei"/>
               </a:rPr>
-              <a:t>hybrid 1.0 高于任一单路 ≤0.875，排序更好</a:t>
+              <a:t>词袋下 hybrid 0.857 未超 vector 0.929；但干扰压制 1.0 优于单路 ≤0.875；结论：混合的价值在排序，召回增益需真向量复测。</a:t>
             </a:r>
           </a:p>
         </p:txBody>
@@ -23404,7 +23842,7 @@
         </p:nvSpPr>
         <p:spPr>
           <a:xfrm>
-            <a:off x="792000" y="3851999"/>
+            <a:off x="792000" y="6163199"/>
             <a:ext cx="10620000" cy="10800"/>
           </a:xfrm>
           <a:prstGeom prst="rect">
@@ -23442,119 +23880,14 @@
       </p:sp>
       <p:sp>
         <p:nvSpPr>
-          <p:cNvPr id="22" name="TextBox 21"/>
-          <p:cNvSpPr txBox="1"/>
-          <p:nvPr/>
-        </p:nvSpPr>
-        <p:spPr>
-          <a:xfrm>
-            <a:off x="792000" y="3924000"/>
-            <a:ext cx="648000" cy="432000"/>
-          </a:xfrm>
-          <a:prstGeom prst="rect">
-            <a:avLst/>
-          </a:prstGeom>
-          <a:noFill/>
-        </p:spPr>
-        <p:txBody>
-          <a:bodyPr wrap="none">
-            <a:spAutoFit/>
-          </a:bodyPr>
-          <a:lstStyle/>
-          <a:p>
-            <a:pPr algn="l"/>
-            <a:r>
-              <a:rPr sz="2200" b="1">
-                <a:solidFill>
-                  <a:srgbClr val="2F6EBA"/>
-                </a:solidFill>
-                <a:latin typeface="Microsoft YaHei"/>
-              </a:rPr>
-              <a:t>05</a:t>
-            </a:r>
-          </a:p>
-        </p:txBody>
-      </p:sp>
-      <p:sp>
-        <p:nvSpPr>
-          <p:cNvPr id="23" name="TextBox 22"/>
-          <p:cNvSpPr txBox="1"/>
-          <p:nvPr/>
-        </p:nvSpPr>
-        <p:spPr>
-          <a:xfrm>
-            <a:off x="1512000" y="3945600"/>
-            <a:ext cx="9828000" cy="216000"/>
-          </a:xfrm>
-          <a:prstGeom prst="rect">
-            <a:avLst/>
-          </a:prstGeom>
-          <a:noFill/>
-        </p:spPr>
-        <p:txBody>
-          <a:bodyPr wrap="square">
-            <a:spAutoFit/>
-          </a:bodyPr>
-          <a:lstStyle/>
-          <a:p>
-            <a:pPr algn="l"/>
-            <a:r>
-              <a:rPr sz="1600" b="1">
-                <a:solidFill>
-                  <a:srgbClr val="1F3A68"/>
-                </a:solidFill>
-                <a:latin typeface="Microsoft YaHei"/>
-              </a:rPr>
-              <a:t>结论</a:t>
-            </a:r>
-          </a:p>
-        </p:txBody>
-      </p:sp>
-      <p:sp>
-        <p:nvSpPr>
-          <p:cNvPr id="24" name="TextBox 23"/>
-          <p:cNvSpPr txBox="1"/>
-          <p:nvPr/>
-        </p:nvSpPr>
-        <p:spPr>
-          <a:xfrm>
-            <a:off x="1512000" y="4183200"/>
-            <a:ext cx="9828000" cy="306000"/>
-          </a:xfrm>
-          <a:prstGeom prst="rect">
-            <a:avLst/>
-          </a:prstGeom>
-          <a:noFill/>
-        </p:spPr>
-        <p:txBody>
-          <a:bodyPr wrap="square">
-            <a:spAutoFit/>
-          </a:bodyPr>
-          <a:lstStyle/>
-          <a:p>
-            <a:pPr algn="l"/>
-            <a:r>
-              <a:rPr sz="1250" b="0">
-                <a:solidFill>
-                  <a:srgbClr val="555F6E"/>
-                </a:solidFill>
-                <a:latin typeface="Microsoft YaHei"/>
-              </a:rPr>
-              <a:t>混合价值在排序；真向量复测后再判定召回</a:t>
-            </a:r>
-          </a:p>
-        </p:txBody>
-      </p:sp>
-      <p:sp>
-        <p:nvSpPr>
-          <p:cNvPr id="25" name="Rectangle 24"/>
+          <p:cNvPr id="22" name="Rectangle 21"/>
           <p:cNvSpPr/>
           <p:nvPr/>
         </p:nvSpPr>
         <p:spPr>
           <a:xfrm>
-            <a:off x="792000" y="4410000"/>
-            <a:ext cx="10620000" cy="10800"/>
+            <a:off x="0" y="6606000"/>
+            <a:ext cx="12193200" cy="10800"/>
           </a:xfrm>
           <a:prstGeom prst="rect">
             <a:avLst/>
@@ -23591,51 +23924,7 @@
       </p:sp>
       <p:sp>
         <p:nvSpPr>
-          <p:cNvPr id="26" name="Rectangle 25"/>
-          <p:cNvSpPr/>
-          <p:nvPr/>
-        </p:nvSpPr>
-        <p:spPr>
-          <a:xfrm>
-            <a:off x="0" y="6606000"/>
-            <a:ext cx="12193200" cy="10800"/>
-          </a:xfrm>
-          <a:prstGeom prst="rect">
-            <a:avLst/>
-          </a:prstGeom>
-          <a:solidFill>
-            <a:srgbClr val="C8D0DC"/>
-          </a:solidFill>
-          <a:ln>
-            <a:noFill/>
-          </a:ln>
-          <a:effectLst/>
-        </p:spPr>
-        <p:style>
-          <a:lnRef idx="1">
-            <a:schemeClr val="accent1"/>
-          </a:lnRef>
-          <a:fillRef idx="3">
-            <a:schemeClr val="accent1"/>
-          </a:fillRef>
-          <a:effectRef idx="2">
-            <a:schemeClr val="accent1"/>
-          </a:effectRef>
-          <a:fontRef idx="minor">
-            <a:schemeClr val="lt1"/>
-          </a:fontRef>
-        </p:style>
-        <p:txBody>
-          <a:bodyPr rtlCol="0" anchor="ctr"/>
-          <a:lstStyle/>
-          <a:p>
-            <a:pPr algn="ctr"/>
-          </a:p>
-        </p:txBody>
-      </p:sp>
-      <p:sp>
-        <p:nvSpPr>
-          <p:cNvPr id="27" name="TextBox 26"/>
+          <p:cNvPr id="23" name="TextBox 22"/>
           <p:cNvSpPr txBox="1"/>
           <p:nvPr/>
         </p:nvSpPr>
@@ -23670,7 +23959,7 @@
       </p:sp>
       <p:sp>
         <p:nvSpPr>
-          <p:cNvPr id="28" name="TextBox 27"/>
+          <p:cNvPr id="24" name="TextBox 23"/>
           <p:cNvSpPr txBox="1"/>
           <p:nvPr/>
         </p:nvSpPr>
@@ -23881,45 +24170,36 @@
       </p:sp>
       <p:sp>
         <p:nvSpPr>
-          <p:cNvPr id="6" name="Rectangle 5"/>
-          <p:cNvSpPr/>
-          <p:nvPr/>
-        </p:nvSpPr>
-        <p:spPr>
-          <a:xfrm>
-            <a:off x="720000" y="1728000"/>
-            <a:ext cx="2439000" cy="198000"/>
-          </a:xfrm>
-          <a:prstGeom prst="rect">
-            <a:avLst/>
-          </a:prstGeom>
-          <a:solidFill>
-            <a:srgbClr val="2F6EBA"/>
-          </a:solidFill>
-          <a:ln>
-            <a:noFill/>
-          </a:ln>
-          <a:effectLst/>
-        </p:spPr>
-        <p:style>
-          <a:lnRef idx="1">
-            <a:schemeClr val="accent1"/>
-          </a:lnRef>
-          <a:fillRef idx="3">
-            <a:schemeClr val="accent1"/>
-          </a:fillRef>
-          <a:effectRef idx="2">
-            <a:schemeClr val="accent1"/>
-          </a:effectRef>
-          <a:fontRef idx="minor">
-            <a:schemeClr val="lt1"/>
-          </a:fontRef>
-        </p:style>
-        <p:txBody>
-          <a:bodyPr rtlCol="0" anchor="ctr"/>
-          <a:lstStyle/>
-          <a:p>
-            <a:pPr algn="ctr"/>
+          <p:cNvPr id="6" name="TextBox 5"/>
+          <p:cNvSpPr txBox="1"/>
+          <p:nvPr/>
+        </p:nvSpPr>
+        <p:spPr>
+          <a:xfrm>
+            <a:off x="792000" y="1692000"/>
+            <a:ext cx="648000" cy="432000"/>
+          </a:xfrm>
+          <a:prstGeom prst="rect">
+            <a:avLst/>
+          </a:prstGeom>
+          <a:noFill/>
+        </p:spPr>
+        <p:txBody>
+          <a:bodyPr wrap="none">
+            <a:spAutoFit/>
+          </a:bodyPr>
+          <a:lstStyle/>
+          <a:p>
+            <a:pPr algn="l"/>
+            <a:r>
+              <a:rPr sz="2200" b="1">
+                <a:solidFill>
+                  <a:srgbClr val="2F6EBA"/>
+                </a:solidFill>
+                <a:latin typeface="Microsoft YaHei"/>
+              </a:rPr>
+              <a:t>01</a:t>
+            </a:r>
           </a:p>
         </p:txBody>
       </p:sp>
@@ -23931,8 +24211,8 @@
         </p:nvSpPr>
         <p:spPr>
           <a:xfrm>
-            <a:off x="720000" y="2070000"/>
-            <a:ext cx="2439000" cy="540000"/>
+            <a:off x="1512000" y="1713600"/>
+            <a:ext cx="9828000" cy="216000"/>
           </a:xfrm>
           <a:prstGeom prst="rect">
             <a:avLst/>
@@ -23945,15 +24225,15 @@
           </a:bodyPr>
           <a:lstStyle/>
           <a:p>
-            <a:pPr algn="ctr"/>
-            <a:r>
-              <a:rPr sz="2600" b="1">
+            <a:pPr algn="l"/>
+            <a:r>
+              <a:rPr sz="1600" b="1">
                 <a:solidFill>
                   <a:srgbClr val="1F3A68"/>
                 </a:solidFill>
                 <a:latin typeface="Microsoft YaHei"/>
               </a:rPr>
-              <a:t>0%</a:t>
+              <a:t>滤噪实验</a:t>
             </a:r>
           </a:p>
         </p:txBody>
@@ -23966,8 +24246,8 @@
         </p:nvSpPr>
         <p:spPr>
           <a:xfrm>
-            <a:off x="827999" y="2646000"/>
-            <a:ext cx="2223000" cy="737999"/>
+            <a:off x="1512000" y="1951200"/>
+            <a:ext cx="9828000" cy="306000"/>
           </a:xfrm>
           <a:prstGeom prst="rect">
             <a:avLst/>
@@ -23980,7 +24260,7 @@
           </a:bodyPr>
           <a:lstStyle/>
           <a:p>
-            <a:pPr algn="ctr"/>
+            <a:pPr algn="l"/>
             <a:r>
               <a:rPr sz="1250" b="0">
                 <a:solidFill>
@@ -23988,7 +24268,7 @@
                 </a:solidFill>
                 <a:latin typeface="Microsoft YaHei"/>
               </a:rPr>
-              <a:t>负例返回率（min_score=0.16）</a:t>
+              <a:t>E 噪声扫描 0.05/0.10/0.16/0.25，测负例返回率与正例 hit@5</a:t>
             </a:r>
           </a:p>
         </p:txBody>
@@ -24001,350 +24281,8 @@
         </p:nvSpPr>
         <p:spPr>
           <a:xfrm>
-            <a:off x="3483000" y="1728000"/>
-            <a:ext cx="2439000" cy="198000"/>
-          </a:xfrm>
-          <a:prstGeom prst="rect">
-            <a:avLst/>
-          </a:prstGeom>
-          <a:solidFill>
-            <a:srgbClr val="2F6EBA"/>
-          </a:solidFill>
-          <a:ln>
-            <a:noFill/>
-          </a:ln>
-          <a:effectLst/>
-        </p:spPr>
-        <p:style>
-          <a:lnRef idx="1">
-            <a:schemeClr val="accent1"/>
-          </a:lnRef>
-          <a:fillRef idx="3">
-            <a:schemeClr val="accent1"/>
-          </a:fillRef>
-          <a:effectRef idx="2">
-            <a:schemeClr val="accent1"/>
-          </a:effectRef>
-          <a:fontRef idx="minor">
-            <a:schemeClr val="lt1"/>
-          </a:fontRef>
-        </p:style>
-        <p:txBody>
-          <a:bodyPr rtlCol="0" anchor="ctr"/>
-          <a:lstStyle/>
-          <a:p>
-            <a:pPr algn="ctr"/>
-          </a:p>
-        </p:txBody>
-      </p:sp>
-      <p:sp>
-        <p:nvSpPr>
-          <p:cNvPr id="10" name="TextBox 9"/>
-          <p:cNvSpPr txBox="1"/>
-          <p:nvPr/>
-        </p:nvSpPr>
-        <p:spPr>
-          <a:xfrm>
-            <a:off x="3483000" y="2070000"/>
-            <a:ext cx="2439000" cy="540000"/>
-          </a:xfrm>
-          <a:prstGeom prst="rect">
-            <a:avLst/>
-          </a:prstGeom>
-          <a:noFill/>
-        </p:spPr>
-        <p:txBody>
-          <a:bodyPr wrap="square">
-            <a:spAutoFit/>
-          </a:bodyPr>
-          <a:lstStyle/>
-          <a:p>
-            <a:pPr algn="ctr"/>
-            <a:r>
-              <a:rPr sz="2600" b="1">
-                <a:solidFill>
-                  <a:srgbClr val="1F3A68"/>
-                </a:solidFill>
-                <a:latin typeface="Microsoft YaHei"/>
-              </a:rPr>
-              <a:t>0</a:t>
-            </a:r>
-          </a:p>
-        </p:txBody>
-      </p:sp>
-      <p:sp>
-        <p:nvSpPr>
-          <p:cNvPr id="11" name="TextBox 10"/>
-          <p:cNvSpPr txBox="1"/>
-          <p:nvPr/>
-        </p:nvSpPr>
-        <p:spPr>
-          <a:xfrm>
-            <a:off x="3591000" y="2646000"/>
-            <a:ext cx="2223000" cy="737999"/>
-          </a:xfrm>
-          <a:prstGeom prst="rect">
-            <a:avLst/>
-          </a:prstGeom>
-          <a:noFill/>
-        </p:spPr>
-        <p:txBody>
-          <a:bodyPr wrap="square">
-            <a:spAutoFit/>
-          </a:bodyPr>
-          <a:lstStyle/>
-          <a:p>
-            <a:pPr algn="ctr"/>
-            <a:r>
-              <a:rPr sz="1250" b="0">
-                <a:solidFill>
-                  <a:srgbClr val="555F6E"/>
-                </a:solidFill>
-                <a:latin typeface="Microsoft YaHei"/>
-              </a:rPr>
-              <a:t>遗忘误删，保护线有效</a:t>
-            </a:r>
-          </a:p>
-        </p:txBody>
-      </p:sp>
-      <p:sp>
-        <p:nvSpPr>
-          <p:cNvPr id="12" name="Rectangle 11"/>
-          <p:cNvSpPr/>
-          <p:nvPr/>
-        </p:nvSpPr>
-        <p:spPr>
-          <a:xfrm>
-            <a:off x="6246000" y="1728000"/>
-            <a:ext cx="2439000" cy="198000"/>
-          </a:xfrm>
-          <a:prstGeom prst="rect">
-            <a:avLst/>
-          </a:prstGeom>
-          <a:solidFill>
-            <a:srgbClr val="2F6EBA"/>
-          </a:solidFill>
-          <a:ln>
-            <a:noFill/>
-          </a:ln>
-          <a:effectLst/>
-        </p:spPr>
-        <p:style>
-          <a:lnRef idx="1">
-            <a:schemeClr val="accent1"/>
-          </a:lnRef>
-          <a:fillRef idx="3">
-            <a:schemeClr val="accent1"/>
-          </a:fillRef>
-          <a:effectRef idx="2">
-            <a:schemeClr val="accent1"/>
-          </a:effectRef>
-          <a:fontRef idx="minor">
-            <a:schemeClr val="lt1"/>
-          </a:fontRef>
-        </p:style>
-        <p:txBody>
-          <a:bodyPr rtlCol="0" anchor="ctr"/>
-          <a:lstStyle/>
-          <a:p>
-            <a:pPr algn="ctr"/>
-          </a:p>
-        </p:txBody>
-      </p:sp>
-      <p:sp>
-        <p:nvSpPr>
-          <p:cNvPr id="13" name="TextBox 12"/>
-          <p:cNvSpPr txBox="1"/>
-          <p:nvPr/>
-        </p:nvSpPr>
-        <p:spPr>
-          <a:xfrm>
-            <a:off x="6246000" y="2070000"/>
-            <a:ext cx="2439000" cy="540000"/>
-          </a:xfrm>
-          <a:prstGeom prst="rect">
-            <a:avLst/>
-          </a:prstGeom>
-          <a:noFill/>
-        </p:spPr>
-        <p:txBody>
-          <a:bodyPr wrap="square">
-            <a:spAutoFit/>
-          </a:bodyPr>
-          <a:lstStyle/>
-          <a:p>
-            <a:pPr algn="ctr"/>
-            <a:r>
-              <a:rPr sz="2600" b="1">
-                <a:solidFill>
-                  <a:srgbClr val="1F3A68"/>
-                </a:solidFill>
-                <a:latin typeface="Microsoft YaHei"/>
-              </a:rPr>
-              <a:t>1.00</a:t>
-            </a:r>
-          </a:p>
-        </p:txBody>
-      </p:sp>
-      <p:sp>
-        <p:nvSpPr>
-          <p:cNvPr id="14" name="TextBox 13"/>
-          <p:cNvSpPr txBox="1"/>
-          <p:nvPr/>
-        </p:nvSpPr>
-        <p:spPr>
-          <a:xfrm>
-            <a:off x="6354000" y="2646000"/>
-            <a:ext cx="2223000" cy="737999"/>
-          </a:xfrm>
-          <a:prstGeom prst="rect">
-            <a:avLst/>
-          </a:prstGeom>
-          <a:noFill/>
-        </p:spPr>
-        <p:txBody>
-          <a:bodyPr wrap="square">
-            <a:spAutoFit/>
-          </a:bodyPr>
-          <a:lstStyle/>
-          <a:p>
-            <a:pPr algn="ctr"/>
-            <a:r>
-              <a:rPr sz="1250" b="0">
-                <a:solidFill>
-                  <a:srgbClr val="555F6E"/>
-                </a:solidFill>
-                <a:latin typeface="Microsoft YaHei"/>
-              </a:rPr>
-              <a:t>DeepSeek 引用率（20/20）</a:t>
-            </a:r>
-          </a:p>
-        </p:txBody>
-      </p:sp>
-      <p:sp>
-        <p:nvSpPr>
-          <p:cNvPr id="15" name="Rectangle 14"/>
-          <p:cNvSpPr/>
-          <p:nvPr/>
-        </p:nvSpPr>
-        <p:spPr>
-          <a:xfrm>
-            <a:off x="9009000" y="1728000"/>
-            <a:ext cx="2439000" cy="198000"/>
-          </a:xfrm>
-          <a:prstGeom prst="rect">
-            <a:avLst/>
-          </a:prstGeom>
-          <a:solidFill>
-            <a:srgbClr val="2F6EBA"/>
-          </a:solidFill>
-          <a:ln>
-            <a:noFill/>
-          </a:ln>
-          <a:effectLst/>
-        </p:spPr>
-        <p:style>
-          <a:lnRef idx="1">
-            <a:schemeClr val="accent1"/>
-          </a:lnRef>
-          <a:fillRef idx="3">
-            <a:schemeClr val="accent1"/>
-          </a:fillRef>
-          <a:effectRef idx="2">
-            <a:schemeClr val="accent1"/>
-          </a:effectRef>
-          <a:fontRef idx="minor">
-            <a:schemeClr val="lt1"/>
-          </a:fontRef>
-        </p:style>
-        <p:txBody>
-          <a:bodyPr rtlCol="0" anchor="ctr"/>
-          <a:lstStyle/>
-          <a:p>
-            <a:pPr algn="ctr"/>
-          </a:p>
-        </p:txBody>
-      </p:sp>
-      <p:sp>
-        <p:nvSpPr>
-          <p:cNvPr id="16" name="TextBox 15"/>
-          <p:cNvSpPr txBox="1"/>
-          <p:nvPr/>
-        </p:nvSpPr>
-        <p:spPr>
-          <a:xfrm>
-            <a:off x="9009000" y="2070000"/>
-            <a:ext cx="2439000" cy="540000"/>
-          </a:xfrm>
-          <a:prstGeom prst="rect">
-            <a:avLst/>
-          </a:prstGeom>
-          <a:noFill/>
-        </p:spPr>
-        <p:txBody>
-          <a:bodyPr wrap="square">
-            <a:spAutoFit/>
-          </a:bodyPr>
-          <a:lstStyle/>
-          <a:p>
-            <a:pPr algn="ctr"/>
-            <a:r>
-              <a:rPr sz="2600" b="1">
-                <a:solidFill>
-                  <a:srgbClr val="1F3A68"/>
-                </a:solidFill>
-                <a:latin typeface="Microsoft YaHei"/>
-              </a:rPr>
-              <a:t>0.857</a:t>
-            </a:r>
-          </a:p>
-        </p:txBody>
-      </p:sp>
-      <p:sp>
-        <p:nvSpPr>
-          <p:cNvPr id="17" name="TextBox 16"/>
-          <p:cNvSpPr txBox="1"/>
-          <p:nvPr/>
-        </p:nvSpPr>
-        <p:spPr>
-          <a:xfrm>
-            <a:off x="9117000" y="2646000"/>
-            <a:ext cx="2223000" cy="737999"/>
-          </a:xfrm>
-          <a:prstGeom prst="rect">
-            <a:avLst/>
-          </a:prstGeom>
-          <a:noFill/>
-        </p:spPr>
-        <p:txBody>
-          <a:bodyPr wrap="square">
-            <a:spAutoFit/>
-          </a:bodyPr>
-          <a:lstStyle/>
-          <a:p>
-            <a:pPr algn="ctr"/>
-            <a:r>
-              <a:rPr sz="1250" b="0">
-                <a:solidFill>
-                  <a:srgbClr val="555F6E"/>
-                </a:solidFill>
-                <a:latin typeface="Microsoft YaHei"/>
-              </a:rPr>
-              <a:t>正例 hit@5 保持</a:t>
-            </a:r>
-          </a:p>
-        </p:txBody>
-      </p:sp>
-      <p:sp>
-        <p:nvSpPr>
-          <p:cNvPr id="18" name="Rectangle 17"/>
-          <p:cNvSpPr/>
-          <p:nvPr/>
-        </p:nvSpPr>
-        <p:spPr>
-          <a:xfrm>
-            <a:off x="0" y="6606000"/>
-            <a:ext cx="12193200" cy="10800"/>
+            <a:off x="792000" y="2178000"/>
+            <a:ext cx="10620000" cy="10800"/>
           </a:xfrm>
           <a:prstGeom prst="rect">
             <a:avLst/>
@@ -24381,7 +24319,796 @@
       </p:sp>
       <p:sp>
         <p:nvSpPr>
+          <p:cNvPr id="10" name="TextBox 9"/>
+          <p:cNvSpPr txBox="1"/>
+          <p:nvPr/>
+        </p:nvSpPr>
+        <p:spPr>
+          <a:xfrm>
+            <a:off x="792000" y="2124000"/>
+            <a:ext cx="648000" cy="432000"/>
+          </a:xfrm>
+          <a:prstGeom prst="rect">
+            <a:avLst/>
+          </a:prstGeom>
+          <a:noFill/>
+        </p:spPr>
+        <p:txBody>
+          <a:bodyPr wrap="none">
+            <a:spAutoFit/>
+          </a:bodyPr>
+          <a:lstStyle/>
+          <a:p>
+            <a:pPr algn="l"/>
+            <a:r>
+              <a:rPr sz="2200" b="1">
+                <a:solidFill>
+                  <a:srgbClr val="2F6EBA"/>
+                </a:solidFill>
+                <a:latin typeface="Microsoft YaHei"/>
+              </a:rPr>
+              <a:t>02</a:t>
+            </a:r>
+          </a:p>
+        </p:txBody>
+      </p:sp>
+      <p:sp>
+        <p:nvSpPr>
+          <p:cNvPr id="11" name="TextBox 10"/>
+          <p:cNvSpPr txBox="1"/>
+          <p:nvPr/>
+        </p:nvSpPr>
+        <p:spPr>
+          <a:xfrm>
+            <a:off x="1512000" y="2145600"/>
+            <a:ext cx="9828000" cy="216000"/>
+          </a:xfrm>
+          <a:prstGeom prst="rect">
+            <a:avLst/>
+          </a:prstGeom>
+          <a:noFill/>
+        </p:spPr>
+        <p:txBody>
+          <a:bodyPr wrap="square">
+            <a:spAutoFit/>
+          </a:bodyPr>
+          <a:lstStyle/>
+          <a:p>
+            <a:pPr algn="l"/>
+            <a:r>
+              <a:rPr sz="1600" b="1">
+                <a:solidFill>
+                  <a:srgbClr val="1F3A68"/>
+                </a:solidFill>
+                <a:latin typeface="Microsoft YaHei"/>
+              </a:rPr>
+              <a:t>滤噪结果</a:t>
+            </a:r>
+          </a:p>
+        </p:txBody>
+      </p:sp>
+      <p:sp>
+        <p:nvSpPr>
+          <p:cNvPr id="12" name="TextBox 11"/>
+          <p:cNvSpPr txBox="1"/>
+          <p:nvPr/>
+        </p:nvSpPr>
+        <p:spPr>
+          <a:xfrm>
+            <a:off x="1512000" y="2383200"/>
+            <a:ext cx="9828000" cy="306000"/>
+          </a:xfrm>
+          <a:prstGeom prst="rect">
+            <a:avLst/>
+          </a:prstGeom>
+          <a:noFill/>
+        </p:spPr>
+        <p:txBody>
+          <a:bodyPr wrap="square">
+            <a:spAutoFit/>
+          </a:bodyPr>
+          <a:lstStyle/>
+          <a:p>
+            <a:pPr algn="l"/>
+            <a:r>
+              <a:rPr sz="1250" b="0">
+                <a:solidFill>
+                  <a:srgbClr val="555F6E"/>
+                </a:solidFill>
+                <a:latin typeface="Microsoft YaHei"/>
+              </a:rPr>
+              <a:t>min_score=0.16 负例返回率 0%，正例 hit@5=0.857；0.25 继续损失正例但无额外滤噪收益</a:t>
+            </a:r>
+          </a:p>
+        </p:txBody>
+      </p:sp>
+      <p:sp>
+        <p:nvSpPr>
+          <p:cNvPr id="13" name="Rectangle 12"/>
+          <p:cNvSpPr/>
+          <p:nvPr/>
+        </p:nvSpPr>
+        <p:spPr>
+          <a:xfrm>
+            <a:off x="792000" y="2610000"/>
+            <a:ext cx="10620000" cy="10800"/>
+          </a:xfrm>
+          <a:prstGeom prst="rect">
+            <a:avLst/>
+          </a:prstGeom>
+          <a:solidFill>
+            <a:srgbClr val="C8D0DC"/>
+          </a:solidFill>
+          <a:ln>
+            <a:noFill/>
+          </a:ln>
+          <a:effectLst/>
+        </p:spPr>
+        <p:style>
+          <a:lnRef idx="1">
+            <a:schemeClr val="accent1"/>
+          </a:lnRef>
+          <a:fillRef idx="3">
+            <a:schemeClr val="accent1"/>
+          </a:fillRef>
+          <a:effectRef idx="2">
+            <a:schemeClr val="accent1"/>
+          </a:effectRef>
+          <a:fontRef idx="minor">
+            <a:schemeClr val="lt1"/>
+          </a:fontRef>
+        </p:style>
+        <p:txBody>
+          <a:bodyPr rtlCol="0" anchor="ctr"/>
+          <a:lstStyle/>
+          <a:p>
+            <a:pPr algn="ctr"/>
+          </a:p>
+        </p:txBody>
+      </p:sp>
+      <p:sp>
+        <p:nvSpPr>
+          <p:cNvPr id="14" name="TextBox 13"/>
+          <p:cNvSpPr txBox="1"/>
+          <p:nvPr/>
+        </p:nvSpPr>
+        <p:spPr>
+          <a:xfrm>
+            <a:off x="792000" y="2556000"/>
+            <a:ext cx="648000" cy="432000"/>
+          </a:xfrm>
+          <a:prstGeom prst="rect">
+            <a:avLst/>
+          </a:prstGeom>
+          <a:noFill/>
+        </p:spPr>
+        <p:txBody>
+          <a:bodyPr wrap="none">
+            <a:spAutoFit/>
+          </a:bodyPr>
+          <a:lstStyle/>
+          <a:p>
+            <a:pPr algn="l"/>
+            <a:r>
+              <a:rPr sz="2200" b="1">
+                <a:solidFill>
+                  <a:srgbClr val="2F6EBA"/>
+                </a:solidFill>
+                <a:latin typeface="Microsoft YaHei"/>
+              </a:rPr>
+              <a:t>03</a:t>
+            </a:r>
+          </a:p>
+        </p:txBody>
+      </p:sp>
+      <p:sp>
+        <p:nvSpPr>
+          <p:cNvPr id="15" name="TextBox 14"/>
+          <p:cNvSpPr txBox="1"/>
+          <p:nvPr/>
+        </p:nvSpPr>
+        <p:spPr>
+          <a:xfrm>
+            <a:off x="1512000" y="2577600"/>
+            <a:ext cx="9828000" cy="216000"/>
+          </a:xfrm>
+          <a:prstGeom prst="rect">
+            <a:avLst/>
+          </a:prstGeom>
+          <a:noFill/>
+        </p:spPr>
+        <p:txBody>
+          <a:bodyPr wrap="square">
+            <a:spAutoFit/>
+          </a:bodyPr>
+          <a:lstStyle/>
+          <a:p>
+            <a:pPr algn="l"/>
+            <a:r>
+              <a:rPr sz="1600" b="1">
+                <a:solidFill>
+                  <a:srgbClr val="1F3A68"/>
+                </a:solidFill>
+                <a:latin typeface="Microsoft YaHei"/>
+              </a:rPr>
+              <a:t>遗忘实验</a:t>
+            </a:r>
+          </a:p>
+        </p:txBody>
+      </p:sp>
+      <p:sp>
+        <p:nvSpPr>
+          <p:cNvPr id="16" name="TextBox 15"/>
+          <p:cNvSpPr txBox="1"/>
+          <p:nvPr/>
+        </p:nvSpPr>
+        <p:spPr>
+          <a:xfrm>
+            <a:off x="1512000" y="2815200"/>
+            <a:ext cx="9828000" cy="306000"/>
+          </a:xfrm>
+          <a:prstGeom prst="rect">
+            <a:avLst/>
+          </a:prstGeom>
+          <a:noFill/>
+        </p:spPr>
+        <p:txBody>
+          <a:bodyPr wrap="square">
+            <a:spAutoFit/>
+          </a:bodyPr>
+          <a:lstStyle/>
+          <a:p>
+            <a:pPr algn="l"/>
+            <a:r>
+              <a:rPr sz="1250" b="0">
+                <a:solidFill>
+                  <a:srgbClr val="555F6E"/>
+                </a:solidFill>
+                <a:latin typeface="Microsoft YaHei"/>
+              </a:rPr>
+              <a:t>合成老化 30 天后运行 forget；未保护删 10/10、保护 0、新写 0，误删 0</a:t>
+            </a:r>
+          </a:p>
+        </p:txBody>
+      </p:sp>
+      <p:sp>
+        <p:nvSpPr>
+          <p:cNvPr id="17" name="Rectangle 16"/>
+          <p:cNvSpPr/>
+          <p:nvPr/>
+        </p:nvSpPr>
+        <p:spPr>
+          <a:xfrm>
+            <a:off x="792000" y="3042000"/>
+            <a:ext cx="10620000" cy="10800"/>
+          </a:xfrm>
+          <a:prstGeom prst="rect">
+            <a:avLst/>
+          </a:prstGeom>
+          <a:solidFill>
+            <a:srgbClr val="C8D0DC"/>
+          </a:solidFill>
+          <a:ln>
+            <a:noFill/>
+          </a:ln>
+          <a:effectLst/>
+        </p:spPr>
+        <p:style>
+          <a:lnRef idx="1">
+            <a:schemeClr val="accent1"/>
+          </a:lnRef>
+          <a:fillRef idx="3">
+            <a:schemeClr val="accent1"/>
+          </a:fillRef>
+          <a:effectRef idx="2">
+            <a:schemeClr val="accent1"/>
+          </a:effectRef>
+          <a:fontRef idx="minor">
+            <a:schemeClr val="lt1"/>
+          </a:fontRef>
+        </p:style>
+        <p:txBody>
+          <a:bodyPr rtlCol="0" anchor="ctr"/>
+          <a:lstStyle/>
+          <a:p>
+            <a:pPr algn="ctr"/>
+          </a:p>
+        </p:txBody>
+      </p:sp>
+      <p:sp>
+        <p:nvSpPr>
+          <p:cNvPr id="18" name="TextBox 17"/>
+          <p:cNvSpPr txBox="1"/>
+          <p:nvPr/>
+        </p:nvSpPr>
+        <p:spPr>
+          <a:xfrm>
+            <a:off x="792000" y="2988000"/>
+            <a:ext cx="648000" cy="432000"/>
+          </a:xfrm>
+          <a:prstGeom prst="rect">
+            <a:avLst/>
+          </a:prstGeom>
+          <a:noFill/>
+        </p:spPr>
+        <p:txBody>
+          <a:bodyPr wrap="none">
+            <a:spAutoFit/>
+          </a:bodyPr>
+          <a:lstStyle/>
+          <a:p>
+            <a:pPr algn="l"/>
+            <a:r>
+              <a:rPr sz="2200" b="1">
+                <a:solidFill>
+                  <a:srgbClr val="2F6EBA"/>
+                </a:solidFill>
+                <a:latin typeface="Microsoft YaHei"/>
+              </a:rPr>
+              <a:t>04</a:t>
+            </a:r>
+          </a:p>
+        </p:txBody>
+      </p:sp>
+      <p:sp>
+        <p:nvSpPr>
           <p:cNvPr id="19" name="TextBox 18"/>
+          <p:cNvSpPr txBox="1"/>
+          <p:nvPr/>
+        </p:nvSpPr>
+        <p:spPr>
+          <a:xfrm>
+            <a:off x="1512000" y="3009600"/>
+            <a:ext cx="9828000" cy="216000"/>
+          </a:xfrm>
+          <a:prstGeom prst="rect">
+            <a:avLst/>
+          </a:prstGeom>
+          <a:noFill/>
+        </p:spPr>
+        <p:txBody>
+          <a:bodyPr wrap="square">
+            <a:spAutoFit/>
+          </a:bodyPr>
+          <a:lstStyle/>
+          <a:p>
+            <a:pPr algn="l"/>
+            <a:r>
+              <a:rPr sz="1600" b="1">
+                <a:solidFill>
+                  <a:srgbClr val="1F3A68"/>
+                </a:solidFill>
+                <a:latin typeface="Microsoft YaHei"/>
+              </a:rPr>
+              <a:t>遗忘解读</a:t>
+            </a:r>
+          </a:p>
+        </p:txBody>
+      </p:sp>
+      <p:sp>
+        <p:nvSpPr>
+          <p:cNvPr id="20" name="TextBox 19"/>
+          <p:cNvSpPr txBox="1"/>
+          <p:nvPr/>
+        </p:nvSpPr>
+        <p:spPr>
+          <a:xfrm>
+            <a:off x="1512000" y="3247200"/>
+            <a:ext cx="9828000" cy="306000"/>
+          </a:xfrm>
+          <a:prstGeom prst="rect">
+            <a:avLst/>
+          </a:prstGeom>
+          <a:noFill/>
+        </p:spPr>
+        <p:txBody>
+          <a:bodyPr wrap="square">
+            <a:spAutoFit/>
+          </a:bodyPr>
+          <a:lstStyle/>
+          <a:p>
+            <a:pPr algn="l"/>
+            <a:r>
+              <a:rPr sz="1250" b="0">
+                <a:solidFill>
+                  <a:srgbClr val="555F6E"/>
+                </a:solidFill>
+                <a:latin typeface="Microsoft YaHei"/>
+              </a:rPr>
+              <a:t>S×时间扫描显示命中强化 S+1 显著延长寿命；保护线按设计工作</a:t>
+            </a:r>
+          </a:p>
+        </p:txBody>
+      </p:sp>
+      <p:sp>
+        <p:nvSpPr>
+          <p:cNvPr id="21" name="Rectangle 20"/>
+          <p:cNvSpPr/>
+          <p:nvPr/>
+        </p:nvSpPr>
+        <p:spPr>
+          <a:xfrm>
+            <a:off x="792000" y="3474000"/>
+            <a:ext cx="10620000" cy="10800"/>
+          </a:xfrm>
+          <a:prstGeom prst="rect">
+            <a:avLst/>
+          </a:prstGeom>
+          <a:solidFill>
+            <a:srgbClr val="C8D0DC"/>
+          </a:solidFill>
+          <a:ln>
+            <a:noFill/>
+          </a:ln>
+          <a:effectLst/>
+        </p:spPr>
+        <p:style>
+          <a:lnRef idx="1">
+            <a:schemeClr val="accent1"/>
+          </a:lnRef>
+          <a:fillRef idx="3">
+            <a:schemeClr val="accent1"/>
+          </a:fillRef>
+          <a:effectRef idx="2">
+            <a:schemeClr val="accent1"/>
+          </a:effectRef>
+          <a:fontRef idx="minor">
+            <a:schemeClr val="lt1"/>
+          </a:fontRef>
+        </p:style>
+        <p:txBody>
+          <a:bodyPr rtlCol="0" anchor="ctr"/>
+          <a:lstStyle/>
+          <a:p>
+            <a:pPr algn="ctr"/>
+          </a:p>
+        </p:txBody>
+      </p:sp>
+      <p:sp>
+        <p:nvSpPr>
+          <p:cNvPr id="22" name="TextBox 21"/>
+          <p:cNvSpPr txBox="1"/>
+          <p:nvPr/>
+        </p:nvSpPr>
+        <p:spPr>
+          <a:xfrm>
+            <a:off x="792000" y="3420000"/>
+            <a:ext cx="648000" cy="432000"/>
+          </a:xfrm>
+          <a:prstGeom prst="rect">
+            <a:avLst/>
+          </a:prstGeom>
+          <a:noFill/>
+        </p:spPr>
+        <p:txBody>
+          <a:bodyPr wrap="none">
+            <a:spAutoFit/>
+          </a:bodyPr>
+          <a:lstStyle/>
+          <a:p>
+            <a:pPr algn="l"/>
+            <a:r>
+              <a:rPr sz="2200" b="1">
+                <a:solidFill>
+                  <a:srgbClr val="2F6EBA"/>
+                </a:solidFill>
+                <a:latin typeface="Microsoft YaHei"/>
+              </a:rPr>
+              <a:t>05</a:t>
+            </a:r>
+          </a:p>
+        </p:txBody>
+      </p:sp>
+      <p:sp>
+        <p:nvSpPr>
+          <p:cNvPr id="23" name="TextBox 22"/>
+          <p:cNvSpPr txBox="1"/>
+          <p:nvPr/>
+        </p:nvSpPr>
+        <p:spPr>
+          <a:xfrm>
+            <a:off x="1512000" y="3441600"/>
+            <a:ext cx="9828000" cy="216000"/>
+          </a:xfrm>
+          <a:prstGeom prst="rect">
+            <a:avLst/>
+          </a:prstGeom>
+          <a:noFill/>
+        </p:spPr>
+        <p:txBody>
+          <a:bodyPr wrap="square">
+            <a:spAutoFit/>
+          </a:bodyPr>
+          <a:lstStyle/>
+          <a:p>
+            <a:pPr algn="l"/>
+            <a:r>
+              <a:rPr sz="1600" b="1">
+                <a:solidFill>
+                  <a:srgbClr val="1F3A68"/>
+                </a:solidFill>
+                <a:latin typeface="Microsoft YaHei"/>
+              </a:rPr>
+              <a:t>RQ5 真模型</a:t>
+            </a:r>
+          </a:p>
+        </p:txBody>
+      </p:sp>
+      <p:sp>
+        <p:nvSpPr>
+          <p:cNvPr id="24" name="TextBox 23"/>
+          <p:cNvSpPr txBox="1"/>
+          <p:nvPr/>
+        </p:nvSpPr>
+        <p:spPr>
+          <a:xfrm>
+            <a:off x="1512000" y="3679200"/>
+            <a:ext cx="9828000" cy="306000"/>
+          </a:xfrm>
+          <a:prstGeom prst="rect">
+            <a:avLst/>
+          </a:prstGeom>
+          <a:noFill/>
+        </p:spPr>
+        <p:txBody>
+          <a:bodyPr wrap="square">
+            <a:spAutoFit/>
+          </a:bodyPr>
+          <a:lstStyle/>
+          <a:p>
+            <a:pPr algn="l"/>
+            <a:r>
+              <a:rPr sz="1250" b="0">
+                <a:solidFill>
+                  <a:srgbClr val="555F6E"/>
+                </a:solidFill>
+                <a:latin typeface="Microsoft YaHei"/>
+              </a:rPr>
+              <a:t>DeepSeek 20/20；T6 规划引用率 1.00、约束满足 1.00</a:t>
+            </a:r>
+          </a:p>
+        </p:txBody>
+      </p:sp>
+      <p:sp>
+        <p:nvSpPr>
+          <p:cNvPr id="25" name="Rectangle 24"/>
+          <p:cNvSpPr/>
+          <p:nvPr/>
+        </p:nvSpPr>
+        <p:spPr>
+          <a:xfrm>
+            <a:off x="792000" y="3906000"/>
+            <a:ext cx="10620000" cy="10800"/>
+          </a:xfrm>
+          <a:prstGeom prst="rect">
+            <a:avLst/>
+          </a:prstGeom>
+          <a:solidFill>
+            <a:srgbClr val="C8D0DC"/>
+          </a:solidFill>
+          <a:ln>
+            <a:noFill/>
+          </a:ln>
+          <a:effectLst/>
+        </p:spPr>
+        <p:style>
+          <a:lnRef idx="1">
+            <a:schemeClr val="accent1"/>
+          </a:lnRef>
+          <a:fillRef idx="3">
+            <a:schemeClr val="accent1"/>
+          </a:fillRef>
+          <a:effectRef idx="2">
+            <a:schemeClr val="accent1"/>
+          </a:effectRef>
+          <a:fontRef idx="minor">
+            <a:schemeClr val="lt1"/>
+          </a:fontRef>
+        </p:style>
+        <p:txBody>
+          <a:bodyPr rtlCol="0" anchor="ctr"/>
+          <a:lstStyle/>
+          <a:p>
+            <a:pPr algn="ctr"/>
+          </a:p>
+        </p:txBody>
+      </p:sp>
+      <p:sp>
+        <p:nvSpPr>
+          <p:cNvPr id="26" name="TextBox 25"/>
+          <p:cNvSpPr txBox="1"/>
+          <p:nvPr/>
+        </p:nvSpPr>
+        <p:spPr>
+          <a:xfrm>
+            <a:off x="792000" y="3851999"/>
+            <a:ext cx="648000" cy="432000"/>
+          </a:xfrm>
+          <a:prstGeom prst="rect">
+            <a:avLst/>
+          </a:prstGeom>
+          <a:noFill/>
+        </p:spPr>
+        <p:txBody>
+          <a:bodyPr wrap="none">
+            <a:spAutoFit/>
+          </a:bodyPr>
+          <a:lstStyle/>
+          <a:p>
+            <a:pPr algn="l"/>
+            <a:r>
+              <a:rPr sz="2200" b="1">
+                <a:solidFill>
+                  <a:srgbClr val="2F6EBA"/>
+                </a:solidFill>
+                <a:latin typeface="Microsoft YaHei"/>
+              </a:rPr>
+              <a:t>06</a:t>
+            </a:r>
+          </a:p>
+        </p:txBody>
+      </p:sp>
+      <p:sp>
+        <p:nvSpPr>
+          <p:cNvPr id="27" name="TextBox 26"/>
+          <p:cNvSpPr txBox="1"/>
+          <p:nvPr/>
+        </p:nvSpPr>
+        <p:spPr>
+          <a:xfrm>
+            <a:off x="1512000" y="3873600"/>
+            <a:ext cx="9828000" cy="216000"/>
+          </a:xfrm>
+          <a:prstGeom prst="rect">
+            <a:avLst/>
+          </a:prstGeom>
+          <a:noFill/>
+        </p:spPr>
+        <p:txBody>
+          <a:bodyPr wrap="square">
+            <a:spAutoFit/>
+          </a:bodyPr>
+          <a:lstStyle/>
+          <a:p>
+            <a:pPr algn="l"/>
+            <a:r>
+              <a:rPr sz="1600" b="1">
+                <a:solidFill>
+                  <a:srgbClr val="1F3A68"/>
+                </a:solidFill>
+                <a:latin typeface="Microsoft YaHei"/>
+              </a:rPr>
+              <a:t>限定</a:t>
+            </a:r>
+          </a:p>
+        </p:txBody>
+      </p:sp>
+      <p:sp>
+        <p:nvSpPr>
+          <p:cNvPr id="28" name="TextBox 27"/>
+          <p:cNvSpPr txBox="1"/>
+          <p:nvPr/>
+        </p:nvSpPr>
+        <p:spPr>
+          <a:xfrm>
+            <a:off x="1512000" y="4111200"/>
+            <a:ext cx="9828000" cy="306000"/>
+          </a:xfrm>
+          <a:prstGeom prst="rect">
+            <a:avLst/>
+          </a:prstGeom>
+          <a:noFill/>
+        </p:spPr>
+        <p:txBody>
+          <a:bodyPr wrap="square">
+            <a:spAutoFit/>
+          </a:bodyPr>
+          <a:lstStyle/>
+          <a:p>
+            <a:pPr algn="l"/>
+            <a:r>
+              <a:rPr sz="1250" b="0">
+                <a:solidFill>
+                  <a:srgbClr val="555F6E"/>
+                </a:solidFill>
+                <a:latin typeface="Microsoft YaHei"/>
+              </a:rPr>
+              <a:t>MockEmbedding 之上单次运行，结论为示范性证据，真向量需复测</a:t>
+            </a:r>
+          </a:p>
+        </p:txBody>
+      </p:sp>
+      <p:sp>
+        <p:nvSpPr>
+          <p:cNvPr id="29" name="Rectangle 28"/>
+          <p:cNvSpPr/>
+          <p:nvPr/>
+        </p:nvSpPr>
+        <p:spPr>
+          <a:xfrm>
+            <a:off x="792000" y="4338000"/>
+            <a:ext cx="10620000" cy="10800"/>
+          </a:xfrm>
+          <a:prstGeom prst="rect">
+            <a:avLst/>
+          </a:prstGeom>
+          <a:solidFill>
+            <a:srgbClr val="C8D0DC"/>
+          </a:solidFill>
+          <a:ln>
+            <a:noFill/>
+          </a:ln>
+          <a:effectLst/>
+        </p:spPr>
+        <p:style>
+          <a:lnRef idx="1">
+            <a:schemeClr val="accent1"/>
+          </a:lnRef>
+          <a:fillRef idx="3">
+            <a:schemeClr val="accent1"/>
+          </a:fillRef>
+          <a:effectRef idx="2">
+            <a:schemeClr val="accent1"/>
+          </a:effectRef>
+          <a:fontRef idx="minor">
+            <a:schemeClr val="lt1"/>
+          </a:fontRef>
+        </p:style>
+        <p:txBody>
+          <a:bodyPr rtlCol="0" anchor="ctr"/>
+          <a:lstStyle/>
+          <a:p>
+            <a:pPr algn="ctr"/>
+          </a:p>
+        </p:txBody>
+      </p:sp>
+      <p:sp>
+        <p:nvSpPr>
+          <p:cNvPr id="30" name="Rectangle 29"/>
+          <p:cNvSpPr/>
+          <p:nvPr/>
+        </p:nvSpPr>
+        <p:spPr>
+          <a:xfrm>
+            <a:off x="0" y="6606000"/>
+            <a:ext cx="12193200" cy="10800"/>
+          </a:xfrm>
+          <a:prstGeom prst="rect">
+            <a:avLst/>
+          </a:prstGeom>
+          <a:solidFill>
+            <a:srgbClr val="C8D0DC"/>
+          </a:solidFill>
+          <a:ln>
+            <a:noFill/>
+          </a:ln>
+          <a:effectLst/>
+        </p:spPr>
+        <p:style>
+          <a:lnRef idx="1">
+            <a:schemeClr val="accent1"/>
+          </a:lnRef>
+          <a:fillRef idx="3">
+            <a:schemeClr val="accent1"/>
+          </a:fillRef>
+          <a:effectRef idx="2">
+            <a:schemeClr val="accent1"/>
+          </a:effectRef>
+          <a:fontRef idx="minor">
+            <a:schemeClr val="lt1"/>
+          </a:fontRef>
+        </p:style>
+        <p:txBody>
+          <a:bodyPr rtlCol="0" anchor="ctr"/>
+          <a:lstStyle/>
+          <a:p>
+            <a:pPr algn="ctr"/>
+          </a:p>
+        </p:txBody>
+      </p:sp>
+      <p:sp>
+        <p:nvSpPr>
+          <p:cNvPr id="31" name="TextBox 30"/>
           <p:cNvSpPr txBox="1"/>
           <p:nvPr/>
         </p:nvSpPr>
@@ -24416,7 +25143,7 @@
       </p:sp>
       <p:sp>
         <p:nvSpPr>
-          <p:cNvPr id="20" name="TextBox 19"/>
+          <p:cNvPr id="32" name="TextBox 31"/>
           <p:cNvSpPr txBox="1"/>
           <p:nvPr/>
         </p:nvSpPr>

--- a/汇报PPT/最终汇报成果.pptx
+++ b/汇报PPT/最终汇报成果.pptx
@@ -1574,7 +1574,7 @@
           </a:p>
           <a:p>
             <a:r>
-              <a:t>【讲稿】先讲实验设计，再给数字，最后讲分类别含义。</a:t>
+              <a:t>【讲稿】先看四个大数字，再讲实验设计、CI、分类别、解读。</a:t>
             </a:r>
           </a:p>
         </p:txBody>
@@ -1724,7 +1724,7 @@
           </a:p>
           <a:p>
             <a:r>
-              <a:t>【讲稿】把实验步骤和限定词都讲清楚。</a:t>
+              <a:t>【讲稿】先给四个大数字，再补实验步骤与限定。</a:t>
             </a:r>
           </a:p>
         </p:txBody>
@@ -1949,7 +1949,7 @@
           </a:p>
           <a:p>
             <a:r>
-              <a:t>【讲稿】把‘方向性/示范性’讲清楚，再列行动项。</a:t>
+              <a:t>【讲稿】左栏讲两条核心结论，右栏讲四项下一步。</a:t>
             </a:r>
           </a:p>
         </p:txBody>
@@ -22100,36 +22100,45 @@
       </p:sp>
       <p:sp>
         <p:nvSpPr>
-          <p:cNvPr id="6" name="TextBox 5"/>
-          <p:cNvSpPr txBox="1"/>
-          <p:nvPr/>
-        </p:nvSpPr>
-        <p:spPr>
-          <a:xfrm>
-            <a:off x="792000" y="1692000"/>
-            <a:ext cx="648000" cy="432000"/>
-          </a:xfrm>
-          <a:prstGeom prst="rect">
-            <a:avLst/>
-          </a:prstGeom>
-          <a:noFill/>
-        </p:spPr>
-        <p:txBody>
-          <a:bodyPr wrap="none">
-            <a:spAutoFit/>
-          </a:bodyPr>
-          <a:lstStyle/>
-          <a:p>
-            <a:pPr algn="l"/>
-            <a:r>
-              <a:rPr sz="2200" b="1">
-                <a:solidFill>
-                  <a:srgbClr val="2F6EBA"/>
-                </a:solidFill>
-                <a:latin typeface="Microsoft YaHei"/>
-              </a:rPr>
-              <a:t>01</a:t>
-            </a:r>
+          <p:cNvPr id="6" name="Rectangle 5"/>
+          <p:cNvSpPr/>
+          <p:nvPr/>
+        </p:nvSpPr>
+        <p:spPr>
+          <a:xfrm>
+            <a:off x="792000" y="1728000"/>
+            <a:ext cx="2493000" cy="198000"/>
+          </a:xfrm>
+          <a:prstGeom prst="rect">
+            <a:avLst/>
+          </a:prstGeom>
+          <a:solidFill>
+            <a:srgbClr val="2F6EBA"/>
+          </a:solidFill>
+          <a:ln>
+            <a:noFill/>
+          </a:ln>
+          <a:effectLst/>
+        </p:spPr>
+        <p:style>
+          <a:lnRef idx="1">
+            <a:schemeClr val="accent1"/>
+          </a:lnRef>
+          <a:fillRef idx="3">
+            <a:schemeClr val="accent1"/>
+          </a:fillRef>
+          <a:effectRef idx="2">
+            <a:schemeClr val="accent1"/>
+          </a:effectRef>
+          <a:fontRef idx="minor">
+            <a:schemeClr val="lt1"/>
+          </a:fontRef>
+        </p:style>
+        <p:txBody>
+          <a:bodyPr rtlCol="0" anchor="ctr"/>
+          <a:lstStyle/>
+          <a:p>
+            <a:pPr algn="ctr"/>
           </a:p>
         </p:txBody>
       </p:sp>
@@ -22141,8 +22150,8 @@
         </p:nvSpPr>
         <p:spPr>
           <a:xfrm>
-            <a:off x="1512000" y="1713600"/>
-            <a:ext cx="9828000" cy="216000"/>
+            <a:off x="792000" y="2033999"/>
+            <a:ext cx="2493000" cy="540000"/>
           </a:xfrm>
           <a:prstGeom prst="rect">
             <a:avLst/>
@@ -22155,15 +22164,15 @@
           </a:bodyPr>
           <a:lstStyle/>
           <a:p>
-            <a:pPr algn="l"/>
-            <a:r>
-              <a:rPr sz="1600" b="1">
+            <a:pPr algn="ctr"/>
+            <a:r>
+              <a:rPr sz="3000" b="1">
                 <a:solidFill>
                   <a:srgbClr val="1F3A68"/>
                 </a:solidFill>
                 <a:latin typeface="Microsoft YaHei"/>
               </a:rPr>
-              <a:t>实验设计</a:t>
+              <a:t>0.636</a:t>
             </a:r>
           </a:p>
         </p:txBody>
@@ -22176,8 +22185,8 @@
         </p:nvSpPr>
         <p:spPr>
           <a:xfrm>
-            <a:off x="1512000" y="1951200"/>
-            <a:ext cx="9828000" cy="306000"/>
+            <a:off x="882000" y="2628000"/>
+            <a:ext cx="2313000" cy="576000"/>
           </a:xfrm>
           <a:prstGeom prst="rect">
             <a:avLst/>
@@ -22190,7 +22199,7 @@
           </a:bodyPr>
           <a:lstStyle/>
           <a:p>
-            <a:pPr algn="l"/>
+            <a:pPr algn="ctr"/>
             <a:r>
               <a:rPr sz="1250" b="0">
                 <a:solidFill>
@@ -22198,7 +22207,7 @@
                 </a:solidFill>
                 <a:latin typeface="Microsoft YaHei"/>
               </a:rPr>
-              <a:t>G2 仅事实库 vs G3 双库全开，44 条固定检索用例，通过依赖注入开关经验库</a:t>
+              <a:t>G3 双库全开 hit@5（G2 为 0.341）</a:t>
             </a:r>
           </a:p>
         </p:txBody>
@@ -22211,7 +22220,454 @@
         </p:nvSpPr>
         <p:spPr>
           <a:xfrm>
-            <a:off x="792000" y="2178000"/>
+            <a:off x="3501000" y="1728000"/>
+            <a:ext cx="2493000" cy="198000"/>
+          </a:xfrm>
+          <a:prstGeom prst="rect">
+            <a:avLst/>
+          </a:prstGeom>
+          <a:solidFill>
+            <a:srgbClr val="2F6EBA"/>
+          </a:solidFill>
+          <a:ln>
+            <a:noFill/>
+          </a:ln>
+          <a:effectLst/>
+        </p:spPr>
+        <p:style>
+          <a:lnRef idx="1">
+            <a:schemeClr val="accent1"/>
+          </a:lnRef>
+          <a:fillRef idx="3">
+            <a:schemeClr val="accent1"/>
+          </a:fillRef>
+          <a:effectRef idx="2">
+            <a:schemeClr val="accent1"/>
+          </a:effectRef>
+          <a:fontRef idx="minor">
+            <a:schemeClr val="lt1"/>
+          </a:fontRef>
+        </p:style>
+        <p:txBody>
+          <a:bodyPr rtlCol="0" anchor="ctr"/>
+          <a:lstStyle/>
+          <a:p>
+            <a:pPr algn="ctr"/>
+          </a:p>
+        </p:txBody>
+      </p:sp>
+      <p:sp>
+        <p:nvSpPr>
+          <p:cNvPr id="10" name="TextBox 9"/>
+          <p:cNvSpPr txBox="1"/>
+          <p:nvPr/>
+        </p:nvSpPr>
+        <p:spPr>
+          <a:xfrm>
+            <a:off x="3501000" y="2033999"/>
+            <a:ext cx="2493000" cy="540000"/>
+          </a:xfrm>
+          <a:prstGeom prst="rect">
+            <a:avLst/>
+          </a:prstGeom>
+          <a:noFill/>
+        </p:spPr>
+        <p:txBody>
+          <a:bodyPr wrap="square">
+            <a:spAutoFit/>
+          </a:bodyPr>
+          <a:lstStyle/>
+          <a:p>
+            <a:pPr algn="ctr"/>
+            <a:r>
+              <a:rPr sz="3000" b="1">
+                <a:solidFill>
+                  <a:srgbClr val="1F3A68"/>
+                </a:solidFill>
+                <a:latin typeface="Microsoft YaHei"/>
+              </a:rPr>
+              <a:t>p=0.0001</a:t>
+            </a:r>
+          </a:p>
+        </p:txBody>
+      </p:sp>
+      <p:sp>
+        <p:nvSpPr>
+          <p:cNvPr id="11" name="TextBox 10"/>
+          <p:cNvSpPr txBox="1"/>
+          <p:nvPr/>
+        </p:nvSpPr>
+        <p:spPr>
+          <a:xfrm>
+            <a:off x="3591000" y="2628000"/>
+            <a:ext cx="2313000" cy="576000"/>
+          </a:xfrm>
+          <a:prstGeom prst="rect">
+            <a:avLst/>
+          </a:prstGeom>
+          <a:noFill/>
+        </p:spPr>
+        <p:txBody>
+          <a:bodyPr wrap="square">
+            <a:spAutoFit/>
+          </a:bodyPr>
+          <a:lstStyle/>
+          <a:p>
+            <a:pPr algn="ctr"/>
+            <a:r>
+              <a:rPr sz="1250" b="0">
+                <a:solidFill>
+                  <a:srgbClr val="555F6E"/>
+                </a:solidFill>
+                <a:latin typeface="Microsoft YaHei"/>
+              </a:rPr>
+              <a:t>配对置换检验（n=44）</a:t>
+            </a:r>
+          </a:p>
+        </p:txBody>
+      </p:sp>
+      <p:sp>
+        <p:nvSpPr>
+          <p:cNvPr id="12" name="Rectangle 11"/>
+          <p:cNvSpPr/>
+          <p:nvPr/>
+        </p:nvSpPr>
+        <p:spPr>
+          <a:xfrm>
+            <a:off x="6210000" y="1728000"/>
+            <a:ext cx="2493000" cy="198000"/>
+          </a:xfrm>
+          <a:prstGeom prst="rect">
+            <a:avLst/>
+          </a:prstGeom>
+          <a:solidFill>
+            <a:srgbClr val="2F6EBA"/>
+          </a:solidFill>
+          <a:ln>
+            <a:noFill/>
+          </a:ln>
+          <a:effectLst/>
+        </p:spPr>
+        <p:style>
+          <a:lnRef idx="1">
+            <a:schemeClr val="accent1"/>
+          </a:lnRef>
+          <a:fillRef idx="3">
+            <a:schemeClr val="accent1"/>
+          </a:fillRef>
+          <a:effectRef idx="2">
+            <a:schemeClr val="accent1"/>
+          </a:effectRef>
+          <a:fontRef idx="minor">
+            <a:schemeClr val="lt1"/>
+          </a:fontRef>
+        </p:style>
+        <p:txBody>
+          <a:bodyPr rtlCol="0" anchor="ctr"/>
+          <a:lstStyle/>
+          <a:p>
+            <a:pPr algn="ctr"/>
+          </a:p>
+        </p:txBody>
+      </p:sp>
+      <p:sp>
+        <p:nvSpPr>
+          <p:cNvPr id="13" name="TextBox 12"/>
+          <p:cNvSpPr txBox="1"/>
+          <p:nvPr/>
+        </p:nvSpPr>
+        <p:spPr>
+          <a:xfrm>
+            <a:off x="6210000" y="2033999"/>
+            <a:ext cx="2493000" cy="540000"/>
+          </a:xfrm>
+          <a:prstGeom prst="rect">
+            <a:avLst/>
+          </a:prstGeom>
+          <a:noFill/>
+        </p:spPr>
+        <p:txBody>
+          <a:bodyPr wrap="square">
+            <a:spAutoFit/>
+          </a:bodyPr>
+          <a:lstStyle/>
+          <a:p>
+            <a:pPr algn="ctr"/>
+            <a:r>
+              <a:rPr sz="3000" b="1">
+                <a:solidFill>
+                  <a:srgbClr val="1F3A68"/>
+                </a:solidFill>
+                <a:latin typeface="Microsoft YaHei"/>
+              </a:rPr>
+              <a:t>0.357</a:t>
+            </a:r>
+          </a:p>
+        </p:txBody>
+      </p:sp>
+      <p:sp>
+        <p:nvSpPr>
+          <p:cNvPr id="14" name="TextBox 13"/>
+          <p:cNvSpPr txBox="1"/>
+          <p:nvPr/>
+        </p:nvSpPr>
+        <p:spPr>
+          <a:xfrm>
+            <a:off x="6300000" y="2628000"/>
+            <a:ext cx="2313000" cy="576000"/>
+          </a:xfrm>
+          <a:prstGeom prst="rect">
+            <a:avLst/>
+          </a:prstGeom>
+          <a:noFill/>
+        </p:spPr>
+        <p:txBody>
+          <a:bodyPr wrap="square">
+            <a:spAutoFit/>
+          </a:bodyPr>
+          <a:lstStyle/>
+          <a:p>
+            <a:pPr algn="ctr"/>
+            <a:r>
+              <a:rPr sz="1250" b="0">
+                <a:solidFill>
+                  <a:srgbClr val="555F6E"/>
+                </a:solidFill>
+                <a:latin typeface="Microsoft YaHei"/>
+              </a:rPr>
+              <a:t>随机基线</a:t>
+            </a:r>
+          </a:p>
+        </p:txBody>
+      </p:sp>
+      <p:sp>
+        <p:nvSpPr>
+          <p:cNvPr id="15" name="Rectangle 14"/>
+          <p:cNvSpPr/>
+          <p:nvPr/>
+        </p:nvSpPr>
+        <p:spPr>
+          <a:xfrm>
+            <a:off x="8919000" y="1728000"/>
+            <a:ext cx="2493000" cy="198000"/>
+          </a:xfrm>
+          <a:prstGeom prst="rect">
+            <a:avLst/>
+          </a:prstGeom>
+          <a:solidFill>
+            <a:srgbClr val="2F6EBA"/>
+          </a:solidFill>
+          <a:ln>
+            <a:noFill/>
+          </a:ln>
+          <a:effectLst/>
+        </p:spPr>
+        <p:style>
+          <a:lnRef idx="1">
+            <a:schemeClr val="accent1"/>
+          </a:lnRef>
+          <a:fillRef idx="3">
+            <a:schemeClr val="accent1"/>
+          </a:fillRef>
+          <a:effectRef idx="2">
+            <a:schemeClr val="accent1"/>
+          </a:effectRef>
+          <a:fontRef idx="minor">
+            <a:schemeClr val="lt1"/>
+          </a:fontRef>
+        </p:style>
+        <p:txBody>
+          <a:bodyPr rtlCol="0" anchor="ctr"/>
+          <a:lstStyle/>
+          <a:p>
+            <a:pPr algn="ctr"/>
+          </a:p>
+        </p:txBody>
+      </p:sp>
+      <p:sp>
+        <p:nvSpPr>
+          <p:cNvPr id="16" name="TextBox 15"/>
+          <p:cNvSpPr txBox="1"/>
+          <p:nvPr/>
+        </p:nvSpPr>
+        <p:spPr>
+          <a:xfrm>
+            <a:off x="8919000" y="2033999"/>
+            <a:ext cx="2493000" cy="540000"/>
+          </a:xfrm>
+          <a:prstGeom prst="rect">
+            <a:avLst/>
+          </a:prstGeom>
+          <a:noFill/>
+        </p:spPr>
+        <p:txBody>
+          <a:bodyPr wrap="square">
+            <a:spAutoFit/>
+          </a:bodyPr>
+          <a:lstStyle/>
+          <a:p>
+            <a:pPr algn="ctr"/>
+            <a:r>
+              <a:rPr sz="3000" b="1">
+                <a:solidFill>
+                  <a:srgbClr val="1F3A68"/>
+                </a:solidFill>
+                <a:latin typeface="Microsoft YaHei"/>
+              </a:rPr>
+              <a:t>0.625</a:t>
+            </a:r>
+          </a:p>
+        </p:txBody>
+      </p:sp>
+      <p:sp>
+        <p:nvSpPr>
+          <p:cNvPr id="17" name="TextBox 16"/>
+          <p:cNvSpPr txBox="1"/>
+          <p:nvPr/>
+        </p:nvSpPr>
+        <p:spPr>
+          <a:xfrm>
+            <a:off x="9009000" y="2628000"/>
+            <a:ext cx="2313000" cy="576000"/>
+          </a:xfrm>
+          <a:prstGeom prst="rect">
+            <a:avLst/>
+          </a:prstGeom>
+          <a:noFill/>
+        </p:spPr>
+        <p:txBody>
+          <a:bodyPr wrap="square">
+            <a:spAutoFit/>
+          </a:bodyPr>
+          <a:lstStyle/>
+          <a:p>
+            <a:pPr algn="ctr"/>
+            <a:r>
+              <a:rPr sz="1250" b="0">
+                <a:solidFill>
+                  <a:srgbClr val="555F6E"/>
+                </a:solidFill>
+                <a:latin typeface="Microsoft YaHei"/>
+              </a:rPr>
+              <a:t>C 类转述命中（词袋局限）</a:t>
+            </a:r>
+          </a:p>
+        </p:txBody>
+      </p:sp>
+      <p:sp>
+        <p:nvSpPr>
+          <p:cNvPr id="18" name="TextBox 17"/>
+          <p:cNvSpPr txBox="1"/>
+          <p:nvPr/>
+        </p:nvSpPr>
+        <p:spPr>
+          <a:xfrm>
+            <a:off x="792000" y="3592799"/>
+            <a:ext cx="648000" cy="432000"/>
+          </a:xfrm>
+          <a:prstGeom prst="rect">
+            <a:avLst/>
+          </a:prstGeom>
+          <a:noFill/>
+        </p:spPr>
+        <p:txBody>
+          <a:bodyPr wrap="none">
+            <a:spAutoFit/>
+          </a:bodyPr>
+          <a:lstStyle/>
+          <a:p>
+            <a:pPr algn="l"/>
+            <a:r>
+              <a:rPr sz="2600" b="1">
+                <a:solidFill>
+                  <a:srgbClr val="2F6EBA"/>
+                </a:solidFill>
+                <a:latin typeface="Microsoft YaHei"/>
+              </a:rPr>
+              <a:t>01</a:t>
+            </a:r>
+          </a:p>
+        </p:txBody>
+      </p:sp>
+      <p:sp>
+        <p:nvSpPr>
+          <p:cNvPr id="19" name="TextBox 18"/>
+          <p:cNvSpPr txBox="1"/>
+          <p:nvPr/>
+        </p:nvSpPr>
+        <p:spPr>
+          <a:xfrm>
+            <a:off x="1512000" y="3563999"/>
+            <a:ext cx="9828000" cy="324000"/>
+          </a:xfrm>
+          <a:prstGeom prst="rect">
+            <a:avLst/>
+          </a:prstGeom>
+          <a:noFill/>
+        </p:spPr>
+        <p:txBody>
+          <a:bodyPr wrap="square">
+            <a:spAutoFit/>
+          </a:bodyPr>
+          <a:lstStyle/>
+          <a:p>
+            <a:pPr algn="l"/>
+            <a:r>
+              <a:rPr sz="2000" b="1">
+                <a:solidFill>
+                  <a:srgbClr val="1F3A68"/>
+                </a:solidFill>
+                <a:latin typeface="Microsoft YaHei"/>
+              </a:rPr>
+              <a:t>实验设计</a:t>
+            </a:r>
+          </a:p>
+        </p:txBody>
+      </p:sp>
+      <p:sp>
+        <p:nvSpPr>
+          <p:cNvPr id="20" name="TextBox 19"/>
+          <p:cNvSpPr txBox="1"/>
+          <p:nvPr/>
+        </p:nvSpPr>
+        <p:spPr>
+          <a:xfrm>
+            <a:off x="1512000" y="3870000"/>
+            <a:ext cx="9828000" cy="419999"/>
+          </a:xfrm>
+          <a:prstGeom prst="rect">
+            <a:avLst/>
+          </a:prstGeom>
+          <a:noFill/>
+        </p:spPr>
+        <p:txBody>
+          <a:bodyPr wrap="square">
+            <a:spAutoFit/>
+          </a:bodyPr>
+          <a:lstStyle/>
+          <a:p>
+            <a:pPr algn="l"/>
+            <a:r>
+              <a:rPr sz="1400" b="0">
+                <a:solidFill>
+                  <a:srgbClr val="555F6E"/>
+                </a:solidFill>
+                <a:latin typeface="Microsoft YaHei"/>
+              </a:rPr>
+              <a:t>G2 仅事实库 vs G3 双库全开，44 条固定检索用例，依赖注入开关经验库</a:t>
+            </a:r>
+          </a:p>
+        </p:txBody>
+      </p:sp>
+      <p:sp>
+        <p:nvSpPr>
+          <p:cNvPr id="21" name="Rectangle 20"/>
+          <p:cNvSpPr/>
+          <p:nvPr/>
+        </p:nvSpPr>
+        <p:spPr>
+          <a:xfrm>
+            <a:off x="792000" y="4351200"/>
             <a:ext cx="10620000" cy="10800"/>
           </a:xfrm>
           <a:prstGeom prst="rect">
@@ -22249,13 +22705,13 @@
       </p:sp>
       <p:sp>
         <p:nvSpPr>
-          <p:cNvPr id="10" name="TextBox 9"/>
-          <p:cNvSpPr txBox="1"/>
-          <p:nvPr/>
-        </p:nvSpPr>
-        <p:spPr>
-          <a:xfrm>
-            <a:off x="792000" y="2124000"/>
+          <p:cNvPr id="22" name="TextBox 21"/>
+          <p:cNvSpPr txBox="1"/>
+          <p:nvPr/>
+        </p:nvSpPr>
+        <p:spPr>
+          <a:xfrm>
+            <a:off x="792000" y="4552799"/>
             <a:ext cx="648000" cy="432000"/>
           </a:xfrm>
           <a:prstGeom prst="rect">
@@ -22271,7 +22727,7 @@
           <a:p>
             <a:pPr algn="l"/>
             <a:r>
-              <a:rPr sz="2200" b="1">
+              <a:rPr sz="2600" b="1">
                 <a:solidFill>
                   <a:srgbClr val="2F6EBA"/>
                 </a:solidFill>
@@ -22284,14 +22740,14 @@
       </p:sp>
       <p:sp>
         <p:nvSpPr>
-          <p:cNvPr id="11" name="TextBox 10"/>
-          <p:cNvSpPr txBox="1"/>
-          <p:nvPr/>
-        </p:nvSpPr>
-        <p:spPr>
-          <a:xfrm>
-            <a:off x="1512000" y="2145600"/>
-            <a:ext cx="9828000" cy="216000"/>
+          <p:cNvPr id="23" name="TextBox 22"/>
+          <p:cNvSpPr txBox="1"/>
+          <p:nvPr/>
+        </p:nvSpPr>
+        <p:spPr>
+          <a:xfrm>
+            <a:off x="1512000" y="4523999"/>
+            <a:ext cx="9828000" cy="324000"/>
           </a:xfrm>
           <a:prstGeom prst="rect">
             <a:avLst/>
@@ -22306,27 +22762,27 @@
           <a:p>
             <a:pPr algn="l"/>
             <a:r>
-              <a:rPr sz="1600" b="1">
+              <a:rPr sz="2000" b="1">
                 <a:solidFill>
                   <a:srgbClr val="1F3A68"/>
                 </a:solidFill>
                 <a:latin typeface="Microsoft YaHei"/>
               </a:rPr>
-              <a:t>总体结果</a:t>
-            </a:r>
-          </a:p>
-        </p:txBody>
-      </p:sp>
-      <p:sp>
-        <p:nvSpPr>
-          <p:cNvPr id="12" name="TextBox 11"/>
-          <p:cNvSpPr txBox="1"/>
-          <p:nvPr/>
-        </p:nvSpPr>
-        <p:spPr>
-          <a:xfrm>
-            <a:off x="1512000" y="2383200"/>
-            <a:ext cx="9828000" cy="306000"/>
+              <a:t>置信区间与分类别</a:t>
+            </a:r>
+          </a:p>
+        </p:txBody>
+      </p:sp>
+      <p:sp>
+        <p:nvSpPr>
+          <p:cNvPr id="24" name="TextBox 23"/>
+          <p:cNvSpPr txBox="1"/>
+          <p:nvPr/>
+        </p:nvSpPr>
+        <p:spPr>
+          <a:xfrm>
+            <a:off x="1512000" y="4830000"/>
+            <a:ext cx="9828000" cy="419999"/>
           </a:xfrm>
           <a:prstGeom prst="rect">
             <a:avLst/>
@@ -22341,26 +22797,26 @@
           <a:p>
             <a:pPr algn="l"/>
             <a:r>
-              <a:rPr sz="1250" b="0">
+              <a:rPr sz="1400" b="0">
                 <a:solidFill>
                   <a:srgbClr val="555F6E"/>
                 </a:solidFill>
                 <a:latin typeface="Microsoft YaHei"/>
               </a:rPr>
-              <a:t>G2 hit@5=0.341，G3=0.636，Δ=0.295，配对置换 p=0.0001</a:t>
-            </a:r>
-          </a:p>
-        </p:txBody>
-      </p:sp>
-      <p:sp>
-        <p:nvSpPr>
-          <p:cNvPr id="13" name="Rectangle 12"/>
+              <a:t>G3 CI=[0.500,0.773] 与 G2 CI=[0.205,0.477] 不重叠；增益来自经验类，事实类不降</a:t>
+            </a:r>
+          </a:p>
+        </p:txBody>
+      </p:sp>
+      <p:sp>
+        <p:nvSpPr>
+          <p:cNvPr id="25" name="Rectangle 24"/>
           <p:cNvSpPr/>
           <p:nvPr/>
         </p:nvSpPr>
         <p:spPr>
           <a:xfrm>
-            <a:off x="792000" y="2610000"/>
+            <a:off x="792000" y="5311200"/>
             <a:ext cx="10620000" cy="10800"/>
           </a:xfrm>
           <a:prstGeom prst="rect">
@@ -22398,13 +22854,13 @@
       </p:sp>
       <p:sp>
         <p:nvSpPr>
-          <p:cNvPr id="14" name="TextBox 13"/>
-          <p:cNvSpPr txBox="1"/>
-          <p:nvPr/>
-        </p:nvSpPr>
-        <p:spPr>
-          <a:xfrm>
-            <a:off x="792000" y="2556000"/>
+          <p:cNvPr id="26" name="TextBox 25"/>
+          <p:cNvSpPr txBox="1"/>
+          <p:nvPr/>
+        </p:nvSpPr>
+        <p:spPr>
+          <a:xfrm>
+            <a:off x="792000" y="5512799"/>
             <a:ext cx="648000" cy="432000"/>
           </a:xfrm>
           <a:prstGeom prst="rect">
@@ -22420,7 +22876,7 @@
           <a:p>
             <a:pPr algn="l"/>
             <a:r>
-              <a:rPr sz="2200" b="1">
+              <a:rPr sz="2600" b="1">
                 <a:solidFill>
                   <a:srgbClr val="2F6EBA"/>
                 </a:solidFill>
@@ -22433,14 +22889,14 @@
       </p:sp>
       <p:sp>
         <p:nvSpPr>
-          <p:cNvPr id="15" name="TextBox 14"/>
-          <p:cNvSpPr txBox="1"/>
-          <p:nvPr/>
-        </p:nvSpPr>
-        <p:spPr>
-          <a:xfrm>
-            <a:off x="1512000" y="2577600"/>
-            <a:ext cx="9828000" cy="216000"/>
+          <p:cNvPr id="27" name="TextBox 26"/>
+          <p:cNvSpPr txBox="1"/>
+          <p:nvPr/>
+        </p:nvSpPr>
+        <p:spPr>
+          <a:xfrm>
+            <a:off x="1512000" y="5483999"/>
+            <a:ext cx="9828000" cy="324000"/>
           </a:xfrm>
           <a:prstGeom prst="rect">
             <a:avLst/>
@@ -22455,27 +22911,27 @@
           <a:p>
             <a:pPr algn="l"/>
             <a:r>
-              <a:rPr sz="1600" b="1">
+              <a:rPr sz="2000" b="1">
                 <a:solidFill>
                   <a:srgbClr val="1F3A68"/>
                 </a:solidFill>
                 <a:latin typeface="Microsoft YaHei"/>
               </a:rPr>
-              <a:t>置信区间</a:t>
-            </a:r>
-          </a:p>
-        </p:txBody>
-      </p:sp>
-      <p:sp>
-        <p:nvSpPr>
-          <p:cNvPr id="16" name="TextBox 15"/>
-          <p:cNvSpPr txBox="1"/>
-          <p:nvPr/>
-        </p:nvSpPr>
-        <p:spPr>
-          <a:xfrm>
-            <a:off x="1512000" y="2815200"/>
-            <a:ext cx="9828000" cy="306000"/>
+              <a:t>解读</a:t>
+            </a:r>
+          </a:p>
+        </p:txBody>
+      </p:sp>
+      <p:sp>
+        <p:nvSpPr>
+          <p:cNvPr id="28" name="TextBox 27"/>
+          <p:cNvSpPr txBox="1"/>
+          <p:nvPr/>
+        </p:nvSpPr>
+        <p:spPr>
+          <a:xfrm>
+            <a:off x="1512000" y="5790000"/>
+            <a:ext cx="9828000" cy="419999"/>
           </a:xfrm>
           <a:prstGeom prst="rect">
             <a:avLst/>
@@ -22490,460 +22946,13 @@
           <a:p>
             <a:pPr algn="l"/>
             <a:r>
-              <a:rPr sz="1250" b="0">
+              <a:rPr sz="1400" b="0">
                 <a:solidFill>
                   <a:srgbClr val="555F6E"/>
                 </a:solidFill>
                 <a:latin typeface="Microsoft YaHei"/>
               </a:rPr>
-              <a:t>G3 bootstrap 95% CI=[0.500, 0.773]，与 G2 CI=[0.205, 0.477] 不重叠</a:t>
-            </a:r>
-          </a:p>
-        </p:txBody>
-      </p:sp>
-      <p:sp>
-        <p:nvSpPr>
-          <p:cNvPr id="17" name="Rectangle 16"/>
-          <p:cNvSpPr/>
-          <p:nvPr/>
-        </p:nvSpPr>
-        <p:spPr>
-          <a:xfrm>
-            <a:off x="792000" y="3042000"/>
-            <a:ext cx="10620000" cy="10800"/>
-          </a:xfrm>
-          <a:prstGeom prst="rect">
-            <a:avLst/>
-          </a:prstGeom>
-          <a:solidFill>
-            <a:srgbClr val="C8D0DC"/>
-          </a:solidFill>
-          <a:ln>
-            <a:noFill/>
-          </a:ln>
-          <a:effectLst/>
-        </p:spPr>
-        <p:style>
-          <a:lnRef idx="1">
-            <a:schemeClr val="accent1"/>
-          </a:lnRef>
-          <a:fillRef idx="3">
-            <a:schemeClr val="accent1"/>
-          </a:fillRef>
-          <a:effectRef idx="2">
-            <a:schemeClr val="accent1"/>
-          </a:effectRef>
-          <a:fontRef idx="minor">
-            <a:schemeClr val="lt1"/>
-          </a:fontRef>
-        </p:style>
-        <p:txBody>
-          <a:bodyPr rtlCol="0" anchor="ctr"/>
-          <a:lstStyle/>
-          <a:p>
-            <a:pPr algn="ctr"/>
-          </a:p>
-        </p:txBody>
-      </p:sp>
-      <p:sp>
-        <p:nvSpPr>
-          <p:cNvPr id="18" name="TextBox 17"/>
-          <p:cNvSpPr txBox="1"/>
-          <p:nvPr/>
-        </p:nvSpPr>
-        <p:spPr>
-          <a:xfrm>
-            <a:off x="792000" y="2988000"/>
-            <a:ext cx="648000" cy="432000"/>
-          </a:xfrm>
-          <a:prstGeom prst="rect">
-            <a:avLst/>
-          </a:prstGeom>
-          <a:noFill/>
-        </p:spPr>
-        <p:txBody>
-          <a:bodyPr wrap="none">
-            <a:spAutoFit/>
-          </a:bodyPr>
-          <a:lstStyle/>
-          <a:p>
-            <a:pPr algn="l"/>
-            <a:r>
-              <a:rPr sz="2200" b="1">
-                <a:solidFill>
-                  <a:srgbClr val="2F6EBA"/>
-                </a:solidFill>
-                <a:latin typeface="Microsoft YaHei"/>
-              </a:rPr>
-              <a:t>04</a:t>
-            </a:r>
-          </a:p>
-        </p:txBody>
-      </p:sp>
-      <p:sp>
-        <p:nvSpPr>
-          <p:cNvPr id="19" name="TextBox 18"/>
-          <p:cNvSpPr txBox="1"/>
-          <p:nvPr/>
-        </p:nvSpPr>
-        <p:spPr>
-          <a:xfrm>
-            <a:off x="1512000" y="3009600"/>
-            <a:ext cx="9828000" cy="216000"/>
-          </a:xfrm>
-          <a:prstGeom prst="rect">
-            <a:avLst/>
-          </a:prstGeom>
-          <a:noFill/>
-        </p:spPr>
-        <p:txBody>
-          <a:bodyPr wrap="square">
-            <a:spAutoFit/>
-          </a:bodyPr>
-          <a:lstStyle/>
-          <a:p>
-            <a:pPr algn="l"/>
-            <a:r>
-              <a:rPr sz="1600" b="1">
-                <a:solidFill>
-                  <a:srgbClr val="1F3A68"/>
-                </a:solidFill>
-                <a:latin typeface="Microsoft YaHei"/>
-              </a:rPr>
-              <a:t>分类别观察</a:t>
-            </a:r>
-          </a:p>
-        </p:txBody>
-      </p:sp>
-      <p:sp>
-        <p:nvSpPr>
-          <p:cNvPr id="20" name="TextBox 19"/>
-          <p:cNvSpPr txBox="1"/>
-          <p:nvPr/>
-        </p:nvSpPr>
-        <p:spPr>
-          <a:xfrm>
-            <a:off x="1512000" y="3247200"/>
-            <a:ext cx="9828000" cy="306000"/>
-          </a:xfrm>
-          <a:prstGeom prst="rect">
-            <a:avLst/>
-          </a:prstGeom>
-          <a:noFill/>
-        </p:spPr>
-        <p:txBody>
-          <a:bodyPr wrap="square">
-            <a:spAutoFit/>
-          </a:bodyPr>
-          <a:lstStyle/>
-          <a:p>
-            <a:pPr algn="l"/>
-            <a:r>
-              <a:rPr sz="1250" b="0">
-                <a:solidFill>
-                  <a:srgbClr val="555F6E"/>
-                </a:solidFill>
-                <a:latin typeface="Microsoft YaHei"/>
-              </a:rPr>
-              <a:t>增益全部来自经验类（C 0.625 / D 1.0 / G 1.0），事实类 A/B/F 不降</a:t>
-            </a:r>
-          </a:p>
-        </p:txBody>
-      </p:sp>
-      <p:sp>
-        <p:nvSpPr>
-          <p:cNvPr id="21" name="Rectangle 20"/>
-          <p:cNvSpPr/>
-          <p:nvPr/>
-        </p:nvSpPr>
-        <p:spPr>
-          <a:xfrm>
-            <a:off x="792000" y="3474000"/>
-            <a:ext cx="10620000" cy="10800"/>
-          </a:xfrm>
-          <a:prstGeom prst="rect">
-            <a:avLst/>
-          </a:prstGeom>
-          <a:solidFill>
-            <a:srgbClr val="C8D0DC"/>
-          </a:solidFill>
-          <a:ln>
-            <a:noFill/>
-          </a:ln>
-          <a:effectLst/>
-        </p:spPr>
-        <p:style>
-          <a:lnRef idx="1">
-            <a:schemeClr val="accent1"/>
-          </a:lnRef>
-          <a:fillRef idx="3">
-            <a:schemeClr val="accent1"/>
-          </a:fillRef>
-          <a:effectRef idx="2">
-            <a:schemeClr val="accent1"/>
-          </a:effectRef>
-          <a:fontRef idx="minor">
-            <a:schemeClr val="lt1"/>
-          </a:fontRef>
-        </p:style>
-        <p:txBody>
-          <a:bodyPr rtlCol="0" anchor="ctr"/>
-          <a:lstStyle/>
-          <a:p>
-            <a:pPr algn="ctr"/>
-          </a:p>
-        </p:txBody>
-      </p:sp>
-      <p:sp>
-        <p:nvSpPr>
-          <p:cNvPr id="22" name="TextBox 21"/>
-          <p:cNvSpPr txBox="1"/>
-          <p:nvPr/>
-        </p:nvSpPr>
-        <p:spPr>
-          <a:xfrm>
-            <a:off x="792000" y="3420000"/>
-            <a:ext cx="648000" cy="432000"/>
-          </a:xfrm>
-          <a:prstGeom prst="rect">
-            <a:avLst/>
-          </a:prstGeom>
-          <a:noFill/>
-        </p:spPr>
-        <p:txBody>
-          <a:bodyPr wrap="none">
-            <a:spAutoFit/>
-          </a:bodyPr>
-          <a:lstStyle/>
-          <a:p>
-            <a:pPr algn="l"/>
-            <a:r>
-              <a:rPr sz="2200" b="1">
-                <a:solidFill>
-                  <a:srgbClr val="2F6EBA"/>
-                </a:solidFill>
-                <a:latin typeface="Microsoft YaHei"/>
-              </a:rPr>
-              <a:t>05</a:t>
-            </a:r>
-          </a:p>
-        </p:txBody>
-      </p:sp>
-      <p:sp>
-        <p:nvSpPr>
-          <p:cNvPr id="23" name="TextBox 22"/>
-          <p:cNvSpPr txBox="1"/>
-          <p:nvPr/>
-        </p:nvSpPr>
-        <p:spPr>
-          <a:xfrm>
-            <a:off x="1512000" y="3441600"/>
-            <a:ext cx="9828000" cy="216000"/>
-          </a:xfrm>
-          <a:prstGeom prst="rect">
-            <a:avLst/>
-          </a:prstGeom>
-          <a:noFill/>
-        </p:spPr>
-        <p:txBody>
-          <a:bodyPr wrap="square">
-            <a:spAutoFit/>
-          </a:bodyPr>
-          <a:lstStyle/>
-          <a:p>
-            <a:pPr algn="l"/>
-            <a:r>
-              <a:rPr sz="1600" b="1">
-                <a:solidFill>
-                  <a:srgbClr val="1F3A68"/>
-                </a:solidFill>
-                <a:latin typeface="Microsoft YaHei"/>
-              </a:rPr>
-              <a:t>随机基线</a:t>
-            </a:r>
-          </a:p>
-        </p:txBody>
-      </p:sp>
-      <p:sp>
-        <p:nvSpPr>
-          <p:cNvPr id="24" name="TextBox 23"/>
-          <p:cNvSpPr txBox="1"/>
-          <p:nvPr/>
-        </p:nvSpPr>
-        <p:spPr>
-          <a:xfrm>
-            <a:off x="1512000" y="3679200"/>
-            <a:ext cx="9828000" cy="306000"/>
-          </a:xfrm>
-          <a:prstGeom prst="rect">
-            <a:avLst/>
-          </a:prstGeom>
-          <a:noFill/>
-        </p:spPr>
-        <p:txBody>
-          <a:bodyPr wrap="square">
-            <a:spAutoFit/>
-          </a:bodyPr>
-          <a:lstStyle/>
-          <a:p>
-            <a:pPr algn="l"/>
-            <a:r>
-              <a:rPr sz="1250" b="0">
-                <a:solidFill>
-                  <a:srgbClr val="555F6E"/>
-                </a:solidFill>
-                <a:latin typeface="Microsoft YaHei"/>
-              </a:rPr>
-              <a:t>0.357，G3 显著高于瞎猜，说明检索不是偶然</a:t>
-            </a:r>
-          </a:p>
-        </p:txBody>
-      </p:sp>
-      <p:sp>
-        <p:nvSpPr>
-          <p:cNvPr id="25" name="Rectangle 24"/>
-          <p:cNvSpPr/>
-          <p:nvPr/>
-        </p:nvSpPr>
-        <p:spPr>
-          <a:xfrm>
-            <a:off x="792000" y="3906000"/>
-            <a:ext cx="10620000" cy="10800"/>
-          </a:xfrm>
-          <a:prstGeom prst="rect">
-            <a:avLst/>
-          </a:prstGeom>
-          <a:solidFill>
-            <a:srgbClr val="C8D0DC"/>
-          </a:solidFill>
-          <a:ln>
-            <a:noFill/>
-          </a:ln>
-          <a:effectLst/>
-        </p:spPr>
-        <p:style>
-          <a:lnRef idx="1">
-            <a:schemeClr val="accent1"/>
-          </a:lnRef>
-          <a:fillRef idx="3">
-            <a:schemeClr val="accent1"/>
-          </a:fillRef>
-          <a:effectRef idx="2">
-            <a:schemeClr val="accent1"/>
-          </a:effectRef>
-          <a:fontRef idx="minor">
-            <a:schemeClr val="lt1"/>
-          </a:fontRef>
-        </p:style>
-        <p:txBody>
-          <a:bodyPr rtlCol="0" anchor="ctr"/>
-          <a:lstStyle/>
-          <a:p>
-            <a:pPr algn="ctr"/>
-          </a:p>
-        </p:txBody>
-      </p:sp>
-      <p:sp>
-        <p:nvSpPr>
-          <p:cNvPr id="26" name="TextBox 25"/>
-          <p:cNvSpPr txBox="1"/>
-          <p:nvPr/>
-        </p:nvSpPr>
-        <p:spPr>
-          <a:xfrm>
-            <a:off x="792000" y="3851999"/>
-            <a:ext cx="648000" cy="432000"/>
-          </a:xfrm>
-          <a:prstGeom prst="rect">
-            <a:avLst/>
-          </a:prstGeom>
-          <a:noFill/>
-        </p:spPr>
-        <p:txBody>
-          <a:bodyPr wrap="none">
-            <a:spAutoFit/>
-          </a:bodyPr>
-          <a:lstStyle/>
-          <a:p>
-            <a:pPr algn="l"/>
-            <a:r>
-              <a:rPr sz="2200" b="1">
-                <a:solidFill>
-                  <a:srgbClr val="2F6EBA"/>
-                </a:solidFill>
-                <a:latin typeface="Microsoft YaHei"/>
-              </a:rPr>
-              <a:t>06</a:t>
-            </a:r>
-          </a:p>
-        </p:txBody>
-      </p:sp>
-      <p:sp>
-        <p:nvSpPr>
-          <p:cNvPr id="27" name="TextBox 26"/>
-          <p:cNvSpPr txBox="1"/>
-          <p:nvPr/>
-        </p:nvSpPr>
-        <p:spPr>
-          <a:xfrm>
-            <a:off x="1512000" y="3873600"/>
-            <a:ext cx="9828000" cy="216000"/>
-          </a:xfrm>
-          <a:prstGeom prst="rect">
-            <a:avLst/>
-          </a:prstGeom>
-          <a:noFill/>
-        </p:spPr>
-        <p:txBody>
-          <a:bodyPr wrap="square">
-            <a:spAutoFit/>
-          </a:bodyPr>
-          <a:lstStyle/>
-          <a:p>
-            <a:pPr algn="l"/>
-            <a:r>
-              <a:rPr sz="1600" b="1">
-                <a:solidFill>
-                  <a:srgbClr val="1F3A68"/>
-                </a:solidFill>
-                <a:latin typeface="Microsoft YaHei"/>
-              </a:rPr>
-              <a:t>解读</a:t>
-            </a:r>
-          </a:p>
-        </p:txBody>
-      </p:sp>
-      <p:sp>
-        <p:nvSpPr>
-          <p:cNvPr id="28" name="TextBox 27"/>
-          <p:cNvSpPr txBox="1"/>
-          <p:nvPr/>
-        </p:nvSpPr>
-        <p:spPr>
-          <a:xfrm>
-            <a:off x="1512000" y="4111200"/>
-            <a:ext cx="9828000" cy="306000"/>
-          </a:xfrm>
-          <a:prstGeom prst="rect">
-            <a:avLst/>
-          </a:prstGeom>
-          <a:noFill/>
-        </p:spPr>
-        <p:txBody>
-          <a:bodyPr wrap="square">
-            <a:spAutoFit/>
-          </a:bodyPr>
-          <a:lstStyle/>
-          <a:p>
-            <a:pPr algn="l"/>
-            <a:r>
-              <a:rPr sz="1250" b="0">
-                <a:solidFill>
-                  <a:srgbClr val="555F6E"/>
-                </a:solidFill>
-                <a:latin typeface="Microsoft YaHei"/>
-              </a:rPr>
-              <a:t>分层不是冗余，经验库是经验查询的必要条件；残余失分在 C 类（词袋局限）</a:t>
+              <a:t>分层不是冗余，经验库是经验查询的必要条件</a:t>
             </a:r>
           </a:p>
         </p:txBody>
@@ -22956,7 +22965,7 @@
         </p:nvSpPr>
         <p:spPr>
           <a:xfrm>
-            <a:off x="792000" y="4338000"/>
+            <a:off x="792000" y="6271199"/>
             <a:ext cx="10620000" cy="10800"/>
           </a:xfrm>
           <a:prstGeom prst="rect">
@@ -24170,36 +24179,45 @@
       </p:sp>
       <p:sp>
         <p:nvSpPr>
-          <p:cNvPr id="6" name="TextBox 5"/>
-          <p:cNvSpPr txBox="1"/>
-          <p:nvPr/>
-        </p:nvSpPr>
-        <p:spPr>
-          <a:xfrm>
-            <a:off x="792000" y="1692000"/>
-            <a:ext cx="648000" cy="432000"/>
-          </a:xfrm>
-          <a:prstGeom prst="rect">
-            <a:avLst/>
-          </a:prstGeom>
-          <a:noFill/>
-        </p:spPr>
-        <p:txBody>
-          <a:bodyPr wrap="none">
-            <a:spAutoFit/>
-          </a:bodyPr>
-          <a:lstStyle/>
-          <a:p>
-            <a:pPr algn="l"/>
-            <a:r>
-              <a:rPr sz="2200" b="1">
-                <a:solidFill>
-                  <a:srgbClr val="2F6EBA"/>
-                </a:solidFill>
-                <a:latin typeface="Microsoft YaHei"/>
-              </a:rPr>
-              <a:t>01</a:t>
-            </a:r>
+          <p:cNvPr id="6" name="Rectangle 5"/>
+          <p:cNvSpPr/>
+          <p:nvPr/>
+        </p:nvSpPr>
+        <p:spPr>
+          <a:xfrm>
+            <a:off x="792000" y="1728000"/>
+            <a:ext cx="2493000" cy="198000"/>
+          </a:xfrm>
+          <a:prstGeom prst="rect">
+            <a:avLst/>
+          </a:prstGeom>
+          <a:solidFill>
+            <a:srgbClr val="2F6EBA"/>
+          </a:solidFill>
+          <a:ln>
+            <a:noFill/>
+          </a:ln>
+          <a:effectLst/>
+        </p:spPr>
+        <p:style>
+          <a:lnRef idx="1">
+            <a:schemeClr val="accent1"/>
+          </a:lnRef>
+          <a:fillRef idx="3">
+            <a:schemeClr val="accent1"/>
+          </a:fillRef>
+          <a:effectRef idx="2">
+            <a:schemeClr val="accent1"/>
+          </a:effectRef>
+          <a:fontRef idx="minor">
+            <a:schemeClr val="lt1"/>
+          </a:fontRef>
+        </p:style>
+        <p:txBody>
+          <a:bodyPr rtlCol="0" anchor="ctr"/>
+          <a:lstStyle/>
+          <a:p>
+            <a:pPr algn="ctr"/>
           </a:p>
         </p:txBody>
       </p:sp>
@@ -24211,8 +24229,8 @@
         </p:nvSpPr>
         <p:spPr>
           <a:xfrm>
-            <a:off x="1512000" y="1713600"/>
-            <a:ext cx="9828000" cy="216000"/>
+            <a:off x="792000" y="2033999"/>
+            <a:ext cx="2493000" cy="540000"/>
           </a:xfrm>
           <a:prstGeom prst="rect">
             <a:avLst/>
@@ -24225,15 +24243,15 @@
           </a:bodyPr>
           <a:lstStyle/>
           <a:p>
-            <a:pPr algn="l"/>
-            <a:r>
-              <a:rPr sz="1600" b="1">
+            <a:pPr algn="ctr"/>
+            <a:r>
+              <a:rPr sz="3000" b="1">
                 <a:solidFill>
                   <a:srgbClr val="1F3A68"/>
                 </a:solidFill>
                 <a:latin typeface="Microsoft YaHei"/>
               </a:rPr>
-              <a:t>滤噪实验</a:t>
+              <a:t>0%</a:t>
             </a:r>
           </a:p>
         </p:txBody>
@@ -24246,8 +24264,8 @@
         </p:nvSpPr>
         <p:spPr>
           <a:xfrm>
-            <a:off x="1512000" y="1951200"/>
-            <a:ext cx="9828000" cy="306000"/>
+            <a:off x="882000" y="2628000"/>
+            <a:ext cx="2313000" cy="576000"/>
           </a:xfrm>
           <a:prstGeom prst="rect">
             <a:avLst/>
@@ -24260,7 +24278,7 @@
           </a:bodyPr>
           <a:lstStyle/>
           <a:p>
-            <a:pPr algn="l"/>
+            <a:pPr algn="ctr"/>
             <a:r>
               <a:rPr sz="1250" b="0">
                 <a:solidFill>
@@ -24268,7 +24286,7 @@
                 </a:solidFill>
                 <a:latin typeface="Microsoft YaHei"/>
               </a:rPr>
-              <a:t>E 噪声扫描 0.05/0.10/0.16/0.25，测负例返回率与正例 hit@5</a:t>
+              <a:t>负例返回率（min_score=0.16）</a:t>
             </a:r>
           </a:p>
         </p:txBody>
@@ -24281,7 +24299,454 @@
         </p:nvSpPr>
         <p:spPr>
           <a:xfrm>
-            <a:off x="792000" y="2178000"/>
+            <a:off x="3501000" y="1728000"/>
+            <a:ext cx="2493000" cy="198000"/>
+          </a:xfrm>
+          <a:prstGeom prst="rect">
+            <a:avLst/>
+          </a:prstGeom>
+          <a:solidFill>
+            <a:srgbClr val="2F6EBA"/>
+          </a:solidFill>
+          <a:ln>
+            <a:noFill/>
+          </a:ln>
+          <a:effectLst/>
+        </p:spPr>
+        <p:style>
+          <a:lnRef idx="1">
+            <a:schemeClr val="accent1"/>
+          </a:lnRef>
+          <a:fillRef idx="3">
+            <a:schemeClr val="accent1"/>
+          </a:fillRef>
+          <a:effectRef idx="2">
+            <a:schemeClr val="accent1"/>
+          </a:effectRef>
+          <a:fontRef idx="minor">
+            <a:schemeClr val="lt1"/>
+          </a:fontRef>
+        </p:style>
+        <p:txBody>
+          <a:bodyPr rtlCol="0" anchor="ctr"/>
+          <a:lstStyle/>
+          <a:p>
+            <a:pPr algn="ctr"/>
+          </a:p>
+        </p:txBody>
+      </p:sp>
+      <p:sp>
+        <p:nvSpPr>
+          <p:cNvPr id="10" name="TextBox 9"/>
+          <p:cNvSpPr txBox="1"/>
+          <p:nvPr/>
+        </p:nvSpPr>
+        <p:spPr>
+          <a:xfrm>
+            <a:off x="3501000" y="2033999"/>
+            <a:ext cx="2493000" cy="540000"/>
+          </a:xfrm>
+          <a:prstGeom prst="rect">
+            <a:avLst/>
+          </a:prstGeom>
+          <a:noFill/>
+        </p:spPr>
+        <p:txBody>
+          <a:bodyPr wrap="square">
+            <a:spAutoFit/>
+          </a:bodyPr>
+          <a:lstStyle/>
+          <a:p>
+            <a:pPr algn="ctr"/>
+            <a:r>
+              <a:rPr sz="3000" b="1">
+                <a:solidFill>
+                  <a:srgbClr val="1F3A68"/>
+                </a:solidFill>
+                <a:latin typeface="Microsoft YaHei"/>
+              </a:rPr>
+              <a:t>0</a:t>
+            </a:r>
+          </a:p>
+        </p:txBody>
+      </p:sp>
+      <p:sp>
+        <p:nvSpPr>
+          <p:cNvPr id="11" name="TextBox 10"/>
+          <p:cNvSpPr txBox="1"/>
+          <p:nvPr/>
+        </p:nvSpPr>
+        <p:spPr>
+          <a:xfrm>
+            <a:off x="3591000" y="2628000"/>
+            <a:ext cx="2313000" cy="576000"/>
+          </a:xfrm>
+          <a:prstGeom prst="rect">
+            <a:avLst/>
+          </a:prstGeom>
+          <a:noFill/>
+        </p:spPr>
+        <p:txBody>
+          <a:bodyPr wrap="square">
+            <a:spAutoFit/>
+          </a:bodyPr>
+          <a:lstStyle/>
+          <a:p>
+            <a:pPr algn="ctr"/>
+            <a:r>
+              <a:rPr sz="1250" b="0">
+                <a:solidFill>
+                  <a:srgbClr val="555F6E"/>
+                </a:solidFill>
+                <a:latin typeface="Microsoft YaHei"/>
+              </a:rPr>
+              <a:t>遗忘误删（保护线有效）</a:t>
+            </a:r>
+          </a:p>
+        </p:txBody>
+      </p:sp>
+      <p:sp>
+        <p:nvSpPr>
+          <p:cNvPr id="12" name="Rectangle 11"/>
+          <p:cNvSpPr/>
+          <p:nvPr/>
+        </p:nvSpPr>
+        <p:spPr>
+          <a:xfrm>
+            <a:off x="6210000" y="1728000"/>
+            <a:ext cx="2493000" cy="198000"/>
+          </a:xfrm>
+          <a:prstGeom prst="rect">
+            <a:avLst/>
+          </a:prstGeom>
+          <a:solidFill>
+            <a:srgbClr val="2F6EBA"/>
+          </a:solidFill>
+          <a:ln>
+            <a:noFill/>
+          </a:ln>
+          <a:effectLst/>
+        </p:spPr>
+        <p:style>
+          <a:lnRef idx="1">
+            <a:schemeClr val="accent1"/>
+          </a:lnRef>
+          <a:fillRef idx="3">
+            <a:schemeClr val="accent1"/>
+          </a:fillRef>
+          <a:effectRef idx="2">
+            <a:schemeClr val="accent1"/>
+          </a:effectRef>
+          <a:fontRef idx="minor">
+            <a:schemeClr val="lt1"/>
+          </a:fontRef>
+        </p:style>
+        <p:txBody>
+          <a:bodyPr rtlCol="0" anchor="ctr"/>
+          <a:lstStyle/>
+          <a:p>
+            <a:pPr algn="ctr"/>
+          </a:p>
+        </p:txBody>
+      </p:sp>
+      <p:sp>
+        <p:nvSpPr>
+          <p:cNvPr id="13" name="TextBox 12"/>
+          <p:cNvSpPr txBox="1"/>
+          <p:nvPr/>
+        </p:nvSpPr>
+        <p:spPr>
+          <a:xfrm>
+            <a:off x="6210000" y="2033999"/>
+            <a:ext cx="2493000" cy="540000"/>
+          </a:xfrm>
+          <a:prstGeom prst="rect">
+            <a:avLst/>
+          </a:prstGeom>
+          <a:noFill/>
+        </p:spPr>
+        <p:txBody>
+          <a:bodyPr wrap="square">
+            <a:spAutoFit/>
+          </a:bodyPr>
+          <a:lstStyle/>
+          <a:p>
+            <a:pPr algn="ctr"/>
+            <a:r>
+              <a:rPr sz="3000" b="1">
+                <a:solidFill>
+                  <a:srgbClr val="1F3A68"/>
+                </a:solidFill>
+                <a:latin typeface="Microsoft YaHei"/>
+              </a:rPr>
+              <a:t>1.00</a:t>
+            </a:r>
+          </a:p>
+        </p:txBody>
+      </p:sp>
+      <p:sp>
+        <p:nvSpPr>
+          <p:cNvPr id="14" name="TextBox 13"/>
+          <p:cNvSpPr txBox="1"/>
+          <p:nvPr/>
+        </p:nvSpPr>
+        <p:spPr>
+          <a:xfrm>
+            <a:off x="6300000" y="2628000"/>
+            <a:ext cx="2313000" cy="576000"/>
+          </a:xfrm>
+          <a:prstGeom prst="rect">
+            <a:avLst/>
+          </a:prstGeom>
+          <a:noFill/>
+        </p:spPr>
+        <p:txBody>
+          <a:bodyPr wrap="square">
+            <a:spAutoFit/>
+          </a:bodyPr>
+          <a:lstStyle/>
+          <a:p>
+            <a:pPr algn="ctr"/>
+            <a:r>
+              <a:rPr sz="1250" b="0">
+                <a:solidFill>
+                  <a:srgbClr val="555F6E"/>
+                </a:solidFill>
+                <a:latin typeface="Microsoft YaHei"/>
+              </a:rPr>
+              <a:t>DeepSeek 引用率（20/20）</a:t>
+            </a:r>
+          </a:p>
+        </p:txBody>
+      </p:sp>
+      <p:sp>
+        <p:nvSpPr>
+          <p:cNvPr id="15" name="Rectangle 14"/>
+          <p:cNvSpPr/>
+          <p:nvPr/>
+        </p:nvSpPr>
+        <p:spPr>
+          <a:xfrm>
+            <a:off x="8919000" y="1728000"/>
+            <a:ext cx="2493000" cy="198000"/>
+          </a:xfrm>
+          <a:prstGeom prst="rect">
+            <a:avLst/>
+          </a:prstGeom>
+          <a:solidFill>
+            <a:srgbClr val="2F6EBA"/>
+          </a:solidFill>
+          <a:ln>
+            <a:noFill/>
+          </a:ln>
+          <a:effectLst/>
+        </p:spPr>
+        <p:style>
+          <a:lnRef idx="1">
+            <a:schemeClr val="accent1"/>
+          </a:lnRef>
+          <a:fillRef idx="3">
+            <a:schemeClr val="accent1"/>
+          </a:fillRef>
+          <a:effectRef idx="2">
+            <a:schemeClr val="accent1"/>
+          </a:effectRef>
+          <a:fontRef idx="minor">
+            <a:schemeClr val="lt1"/>
+          </a:fontRef>
+        </p:style>
+        <p:txBody>
+          <a:bodyPr rtlCol="0" anchor="ctr"/>
+          <a:lstStyle/>
+          <a:p>
+            <a:pPr algn="ctr"/>
+          </a:p>
+        </p:txBody>
+      </p:sp>
+      <p:sp>
+        <p:nvSpPr>
+          <p:cNvPr id="16" name="TextBox 15"/>
+          <p:cNvSpPr txBox="1"/>
+          <p:nvPr/>
+        </p:nvSpPr>
+        <p:spPr>
+          <a:xfrm>
+            <a:off x="8919000" y="2033999"/>
+            <a:ext cx="2493000" cy="540000"/>
+          </a:xfrm>
+          <a:prstGeom prst="rect">
+            <a:avLst/>
+          </a:prstGeom>
+          <a:noFill/>
+        </p:spPr>
+        <p:txBody>
+          <a:bodyPr wrap="square">
+            <a:spAutoFit/>
+          </a:bodyPr>
+          <a:lstStyle/>
+          <a:p>
+            <a:pPr algn="ctr"/>
+            <a:r>
+              <a:rPr sz="3000" b="1">
+                <a:solidFill>
+                  <a:srgbClr val="1F3A68"/>
+                </a:solidFill>
+                <a:latin typeface="Microsoft YaHei"/>
+              </a:rPr>
+              <a:t>0.857</a:t>
+            </a:r>
+          </a:p>
+        </p:txBody>
+      </p:sp>
+      <p:sp>
+        <p:nvSpPr>
+          <p:cNvPr id="17" name="TextBox 16"/>
+          <p:cNvSpPr txBox="1"/>
+          <p:nvPr/>
+        </p:nvSpPr>
+        <p:spPr>
+          <a:xfrm>
+            <a:off x="9009000" y="2628000"/>
+            <a:ext cx="2313000" cy="576000"/>
+          </a:xfrm>
+          <a:prstGeom prst="rect">
+            <a:avLst/>
+          </a:prstGeom>
+          <a:noFill/>
+        </p:spPr>
+        <p:txBody>
+          <a:bodyPr wrap="square">
+            <a:spAutoFit/>
+          </a:bodyPr>
+          <a:lstStyle/>
+          <a:p>
+            <a:pPr algn="ctr"/>
+            <a:r>
+              <a:rPr sz="1250" b="0">
+                <a:solidFill>
+                  <a:srgbClr val="555F6E"/>
+                </a:solidFill>
+                <a:latin typeface="Microsoft YaHei"/>
+              </a:rPr>
+              <a:t>正例 hit@5 保持</a:t>
+            </a:r>
+          </a:p>
+        </p:txBody>
+      </p:sp>
+      <p:sp>
+        <p:nvSpPr>
+          <p:cNvPr id="18" name="TextBox 17"/>
+          <p:cNvSpPr txBox="1"/>
+          <p:nvPr/>
+        </p:nvSpPr>
+        <p:spPr>
+          <a:xfrm>
+            <a:off x="792000" y="3592799"/>
+            <a:ext cx="648000" cy="432000"/>
+          </a:xfrm>
+          <a:prstGeom prst="rect">
+            <a:avLst/>
+          </a:prstGeom>
+          <a:noFill/>
+        </p:spPr>
+        <p:txBody>
+          <a:bodyPr wrap="none">
+            <a:spAutoFit/>
+          </a:bodyPr>
+          <a:lstStyle/>
+          <a:p>
+            <a:pPr algn="l"/>
+            <a:r>
+              <a:rPr sz="2600" b="1">
+                <a:solidFill>
+                  <a:srgbClr val="2F6EBA"/>
+                </a:solidFill>
+                <a:latin typeface="Microsoft YaHei"/>
+              </a:rPr>
+              <a:t>01</a:t>
+            </a:r>
+          </a:p>
+        </p:txBody>
+      </p:sp>
+      <p:sp>
+        <p:nvSpPr>
+          <p:cNvPr id="19" name="TextBox 18"/>
+          <p:cNvSpPr txBox="1"/>
+          <p:nvPr/>
+        </p:nvSpPr>
+        <p:spPr>
+          <a:xfrm>
+            <a:off x="1512000" y="3563999"/>
+            <a:ext cx="9828000" cy="324000"/>
+          </a:xfrm>
+          <a:prstGeom prst="rect">
+            <a:avLst/>
+          </a:prstGeom>
+          <a:noFill/>
+        </p:spPr>
+        <p:txBody>
+          <a:bodyPr wrap="square">
+            <a:spAutoFit/>
+          </a:bodyPr>
+          <a:lstStyle/>
+          <a:p>
+            <a:pPr algn="l"/>
+            <a:r>
+              <a:rPr sz="2000" b="1">
+                <a:solidFill>
+                  <a:srgbClr val="1F3A68"/>
+                </a:solidFill>
+                <a:latin typeface="Microsoft YaHei"/>
+              </a:rPr>
+              <a:t>滤噪实验</a:t>
+            </a:r>
+          </a:p>
+        </p:txBody>
+      </p:sp>
+      <p:sp>
+        <p:nvSpPr>
+          <p:cNvPr id="20" name="TextBox 19"/>
+          <p:cNvSpPr txBox="1"/>
+          <p:nvPr/>
+        </p:nvSpPr>
+        <p:spPr>
+          <a:xfrm>
+            <a:off x="1512000" y="3870000"/>
+            <a:ext cx="9828000" cy="419999"/>
+          </a:xfrm>
+          <a:prstGeom prst="rect">
+            <a:avLst/>
+          </a:prstGeom>
+          <a:noFill/>
+        </p:spPr>
+        <p:txBody>
+          <a:bodyPr wrap="square">
+            <a:spAutoFit/>
+          </a:bodyPr>
+          <a:lstStyle/>
+          <a:p>
+            <a:pPr algn="l"/>
+            <a:r>
+              <a:rPr sz="1400" b="0">
+                <a:solidFill>
+                  <a:srgbClr val="555F6E"/>
+                </a:solidFill>
+                <a:latin typeface="Microsoft YaHei"/>
+              </a:rPr>
+              <a:t>E 扫描 0.05/0.10/0.16/0.25，0.16 为当前网格拐点</a:t>
+            </a:r>
+          </a:p>
+        </p:txBody>
+      </p:sp>
+      <p:sp>
+        <p:nvSpPr>
+          <p:cNvPr id="21" name="Rectangle 20"/>
+          <p:cNvSpPr/>
+          <p:nvPr/>
+        </p:nvSpPr>
+        <p:spPr>
+          <a:xfrm>
+            <a:off x="792000" y="4351200"/>
             <a:ext cx="10620000" cy="10800"/>
           </a:xfrm>
           <a:prstGeom prst="rect">
@@ -24319,13 +24784,13 @@
       </p:sp>
       <p:sp>
         <p:nvSpPr>
-          <p:cNvPr id="10" name="TextBox 9"/>
-          <p:cNvSpPr txBox="1"/>
-          <p:nvPr/>
-        </p:nvSpPr>
-        <p:spPr>
-          <a:xfrm>
-            <a:off x="792000" y="2124000"/>
+          <p:cNvPr id="22" name="TextBox 21"/>
+          <p:cNvSpPr txBox="1"/>
+          <p:nvPr/>
+        </p:nvSpPr>
+        <p:spPr>
+          <a:xfrm>
+            <a:off x="792000" y="4552799"/>
             <a:ext cx="648000" cy="432000"/>
           </a:xfrm>
           <a:prstGeom prst="rect">
@@ -24341,7 +24806,7 @@
           <a:p>
             <a:pPr algn="l"/>
             <a:r>
-              <a:rPr sz="2200" b="1">
+              <a:rPr sz="2600" b="1">
                 <a:solidFill>
                   <a:srgbClr val="2F6EBA"/>
                 </a:solidFill>
@@ -24354,14 +24819,14 @@
       </p:sp>
       <p:sp>
         <p:nvSpPr>
-          <p:cNvPr id="11" name="TextBox 10"/>
-          <p:cNvSpPr txBox="1"/>
-          <p:nvPr/>
-        </p:nvSpPr>
-        <p:spPr>
-          <a:xfrm>
-            <a:off x="1512000" y="2145600"/>
-            <a:ext cx="9828000" cy="216000"/>
+          <p:cNvPr id="23" name="TextBox 22"/>
+          <p:cNvSpPr txBox="1"/>
+          <p:nvPr/>
+        </p:nvSpPr>
+        <p:spPr>
+          <a:xfrm>
+            <a:off x="1512000" y="4523999"/>
+            <a:ext cx="9828000" cy="324000"/>
           </a:xfrm>
           <a:prstGeom prst="rect">
             <a:avLst/>
@@ -24376,27 +24841,27 @@
           <a:p>
             <a:pPr algn="l"/>
             <a:r>
-              <a:rPr sz="1600" b="1">
+              <a:rPr sz="2000" b="1">
                 <a:solidFill>
                   <a:srgbClr val="1F3A68"/>
                 </a:solidFill>
                 <a:latin typeface="Microsoft YaHei"/>
               </a:rPr>
-              <a:t>滤噪结果</a:t>
-            </a:r>
-          </a:p>
-        </p:txBody>
-      </p:sp>
-      <p:sp>
-        <p:nvSpPr>
-          <p:cNvPr id="12" name="TextBox 11"/>
-          <p:cNvSpPr txBox="1"/>
-          <p:nvPr/>
-        </p:nvSpPr>
-        <p:spPr>
-          <a:xfrm>
-            <a:off x="1512000" y="2383200"/>
-            <a:ext cx="9828000" cy="306000"/>
+              <a:t>遗忘实验</a:t>
+            </a:r>
+          </a:p>
+        </p:txBody>
+      </p:sp>
+      <p:sp>
+        <p:nvSpPr>
+          <p:cNvPr id="24" name="TextBox 23"/>
+          <p:cNvSpPr txBox="1"/>
+          <p:nvPr/>
+        </p:nvSpPr>
+        <p:spPr>
+          <a:xfrm>
+            <a:off x="1512000" y="4830000"/>
+            <a:ext cx="9828000" cy="419999"/>
           </a:xfrm>
           <a:prstGeom prst="rect">
             <a:avLst/>
@@ -24411,26 +24876,26 @@
           <a:p>
             <a:pPr algn="l"/>
             <a:r>
-              <a:rPr sz="1250" b="0">
+              <a:rPr sz="1400" b="0">
                 <a:solidFill>
                   <a:srgbClr val="555F6E"/>
                 </a:solidFill>
                 <a:latin typeface="Microsoft YaHei"/>
               </a:rPr>
-              <a:t>min_score=0.16 负例返回率 0%，正例 hit@5=0.857；0.25 继续损失正例但无额外滤噪收益</a:t>
-            </a:r>
-          </a:p>
-        </p:txBody>
-      </p:sp>
-      <p:sp>
-        <p:nvSpPr>
-          <p:cNvPr id="13" name="Rectangle 12"/>
+              <a:t>合成老化 30 天 forget，未保护删 10/10，保护/新写 0；S+1 显著延长寿命</a:t>
+            </a:r>
+          </a:p>
+        </p:txBody>
+      </p:sp>
+      <p:sp>
+        <p:nvSpPr>
+          <p:cNvPr id="25" name="Rectangle 24"/>
           <p:cNvSpPr/>
           <p:nvPr/>
         </p:nvSpPr>
         <p:spPr>
           <a:xfrm>
-            <a:off x="792000" y="2610000"/>
+            <a:off x="792000" y="5311200"/>
             <a:ext cx="10620000" cy="10800"/>
           </a:xfrm>
           <a:prstGeom prst="rect">
@@ -24468,13 +24933,13 @@
       </p:sp>
       <p:sp>
         <p:nvSpPr>
-          <p:cNvPr id="14" name="TextBox 13"/>
-          <p:cNvSpPr txBox="1"/>
-          <p:nvPr/>
-        </p:nvSpPr>
-        <p:spPr>
-          <a:xfrm>
-            <a:off x="792000" y="2556000"/>
+          <p:cNvPr id="26" name="TextBox 25"/>
+          <p:cNvSpPr txBox="1"/>
+          <p:nvPr/>
+        </p:nvSpPr>
+        <p:spPr>
+          <a:xfrm>
+            <a:off x="792000" y="5512799"/>
             <a:ext cx="648000" cy="432000"/>
           </a:xfrm>
           <a:prstGeom prst="rect">
@@ -24490,7 +24955,7 @@
           <a:p>
             <a:pPr algn="l"/>
             <a:r>
-              <a:rPr sz="2200" b="1">
+              <a:rPr sz="2600" b="1">
                 <a:solidFill>
                   <a:srgbClr val="2F6EBA"/>
                 </a:solidFill>
@@ -24503,14 +24968,14 @@
       </p:sp>
       <p:sp>
         <p:nvSpPr>
-          <p:cNvPr id="15" name="TextBox 14"/>
-          <p:cNvSpPr txBox="1"/>
-          <p:nvPr/>
-        </p:nvSpPr>
-        <p:spPr>
-          <a:xfrm>
-            <a:off x="1512000" y="2577600"/>
-            <a:ext cx="9828000" cy="216000"/>
+          <p:cNvPr id="27" name="TextBox 26"/>
+          <p:cNvSpPr txBox="1"/>
+          <p:nvPr/>
+        </p:nvSpPr>
+        <p:spPr>
+          <a:xfrm>
+            <a:off x="1512000" y="5483999"/>
+            <a:ext cx="9828000" cy="324000"/>
           </a:xfrm>
           <a:prstGeom prst="rect">
             <a:avLst/>
@@ -24525,27 +24990,27 @@
           <a:p>
             <a:pPr algn="l"/>
             <a:r>
-              <a:rPr sz="1600" b="1">
+              <a:rPr sz="2000" b="1">
                 <a:solidFill>
                   <a:srgbClr val="1F3A68"/>
                 </a:solidFill>
                 <a:latin typeface="Microsoft YaHei"/>
               </a:rPr>
-              <a:t>遗忘实验</a:t>
-            </a:r>
-          </a:p>
-        </p:txBody>
-      </p:sp>
-      <p:sp>
-        <p:nvSpPr>
-          <p:cNvPr id="16" name="TextBox 15"/>
-          <p:cNvSpPr txBox="1"/>
-          <p:nvPr/>
-        </p:nvSpPr>
-        <p:spPr>
-          <a:xfrm>
-            <a:off x="1512000" y="2815200"/>
-            <a:ext cx="9828000" cy="306000"/>
+              <a:t>真模型</a:t>
+            </a:r>
+          </a:p>
+        </p:txBody>
+      </p:sp>
+      <p:sp>
+        <p:nvSpPr>
+          <p:cNvPr id="28" name="TextBox 27"/>
+          <p:cNvSpPr txBox="1"/>
+          <p:nvPr/>
+        </p:nvSpPr>
+        <p:spPr>
+          <a:xfrm>
+            <a:off x="1512000" y="5790000"/>
+            <a:ext cx="9828000" cy="419999"/>
           </a:xfrm>
           <a:prstGeom prst="rect">
             <a:avLst/>
@@ -24560,460 +25025,13 @@
           <a:p>
             <a:pPr algn="l"/>
             <a:r>
-              <a:rPr sz="1250" b="0">
+              <a:rPr sz="1400" b="0">
                 <a:solidFill>
                   <a:srgbClr val="555F6E"/>
                 </a:solidFill>
                 <a:latin typeface="Microsoft YaHei"/>
               </a:rPr>
-              <a:t>合成老化 30 天后运行 forget；未保护删 10/10、保护 0、新写 0，误删 0</a:t>
-            </a:r>
-          </a:p>
-        </p:txBody>
-      </p:sp>
-      <p:sp>
-        <p:nvSpPr>
-          <p:cNvPr id="17" name="Rectangle 16"/>
-          <p:cNvSpPr/>
-          <p:nvPr/>
-        </p:nvSpPr>
-        <p:spPr>
-          <a:xfrm>
-            <a:off x="792000" y="3042000"/>
-            <a:ext cx="10620000" cy="10800"/>
-          </a:xfrm>
-          <a:prstGeom prst="rect">
-            <a:avLst/>
-          </a:prstGeom>
-          <a:solidFill>
-            <a:srgbClr val="C8D0DC"/>
-          </a:solidFill>
-          <a:ln>
-            <a:noFill/>
-          </a:ln>
-          <a:effectLst/>
-        </p:spPr>
-        <p:style>
-          <a:lnRef idx="1">
-            <a:schemeClr val="accent1"/>
-          </a:lnRef>
-          <a:fillRef idx="3">
-            <a:schemeClr val="accent1"/>
-          </a:fillRef>
-          <a:effectRef idx="2">
-            <a:schemeClr val="accent1"/>
-          </a:effectRef>
-          <a:fontRef idx="minor">
-            <a:schemeClr val="lt1"/>
-          </a:fontRef>
-        </p:style>
-        <p:txBody>
-          <a:bodyPr rtlCol="0" anchor="ctr"/>
-          <a:lstStyle/>
-          <a:p>
-            <a:pPr algn="ctr"/>
-          </a:p>
-        </p:txBody>
-      </p:sp>
-      <p:sp>
-        <p:nvSpPr>
-          <p:cNvPr id="18" name="TextBox 17"/>
-          <p:cNvSpPr txBox="1"/>
-          <p:nvPr/>
-        </p:nvSpPr>
-        <p:spPr>
-          <a:xfrm>
-            <a:off x="792000" y="2988000"/>
-            <a:ext cx="648000" cy="432000"/>
-          </a:xfrm>
-          <a:prstGeom prst="rect">
-            <a:avLst/>
-          </a:prstGeom>
-          <a:noFill/>
-        </p:spPr>
-        <p:txBody>
-          <a:bodyPr wrap="none">
-            <a:spAutoFit/>
-          </a:bodyPr>
-          <a:lstStyle/>
-          <a:p>
-            <a:pPr algn="l"/>
-            <a:r>
-              <a:rPr sz="2200" b="1">
-                <a:solidFill>
-                  <a:srgbClr val="2F6EBA"/>
-                </a:solidFill>
-                <a:latin typeface="Microsoft YaHei"/>
-              </a:rPr>
-              <a:t>04</a:t>
-            </a:r>
-          </a:p>
-        </p:txBody>
-      </p:sp>
-      <p:sp>
-        <p:nvSpPr>
-          <p:cNvPr id="19" name="TextBox 18"/>
-          <p:cNvSpPr txBox="1"/>
-          <p:nvPr/>
-        </p:nvSpPr>
-        <p:spPr>
-          <a:xfrm>
-            <a:off x="1512000" y="3009600"/>
-            <a:ext cx="9828000" cy="216000"/>
-          </a:xfrm>
-          <a:prstGeom prst="rect">
-            <a:avLst/>
-          </a:prstGeom>
-          <a:noFill/>
-        </p:spPr>
-        <p:txBody>
-          <a:bodyPr wrap="square">
-            <a:spAutoFit/>
-          </a:bodyPr>
-          <a:lstStyle/>
-          <a:p>
-            <a:pPr algn="l"/>
-            <a:r>
-              <a:rPr sz="1600" b="1">
-                <a:solidFill>
-                  <a:srgbClr val="1F3A68"/>
-                </a:solidFill>
-                <a:latin typeface="Microsoft YaHei"/>
-              </a:rPr>
-              <a:t>遗忘解读</a:t>
-            </a:r>
-          </a:p>
-        </p:txBody>
-      </p:sp>
-      <p:sp>
-        <p:nvSpPr>
-          <p:cNvPr id="20" name="TextBox 19"/>
-          <p:cNvSpPr txBox="1"/>
-          <p:nvPr/>
-        </p:nvSpPr>
-        <p:spPr>
-          <a:xfrm>
-            <a:off x="1512000" y="3247200"/>
-            <a:ext cx="9828000" cy="306000"/>
-          </a:xfrm>
-          <a:prstGeom prst="rect">
-            <a:avLst/>
-          </a:prstGeom>
-          <a:noFill/>
-        </p:spPr>
-        <p:txBody>
-          <a:bodyPr wrap="square">
-            <a:spAutoFit/>
-          </a:bodyPr>
-          <a:lstStyle/>
-          <a:p>
-            <a:pPr algn="l"/>
-            <a:r>
-              <a:rPr sz="1250" b="0">
-                <a:solidFill>
-                  <a:srgbClr val="555F6E"/>
-                </a:solidFill>
-                <a:latin typeface="Microsoft YaHei"/>
-              </a:rPr>
-              <a:t>S×时间扫描显示命中强化 S+1 显著延长寿命；保护线按设计工作</a:t>
-            </a:r>
-          </a:p>
-        </p:txBody>
-      </p:sp>
-      <p:sp>
-        <p:nvSpPr>
-          <p:cNvPr id="21" name="Rectangle 20"/>
-          <p:cNvSpPr/>
-          <p:nvPr/>
-        </p:nvSpPr>
-        <p:spPr>
-          <a:xfrm>
-            <a:off x="792000" y="3474000"/>
-            <a:ext cx="10620000" cy="10800"/>
-          </a:xfrm>
-          <a:prstGeom prst="rect">
-            <a:avLst/>
-          </a:prstGeom>
-          <a:solidFill>
-            <a:srgbClr val="C8D0DC"/>
-          </a:solidFill>
-          <a:ln>
-            <a:noFill/>
-          </a:ln>
-          <a:effectLst/>
-        </p:spPr>
-        <p:style>
-          <a:lnRef idx="1">
-            <a:schemeClr val="accent1"/>
-          </a:lnRef>
-          <a:fillRef idx="3">
-            <a:schemeClr val="accent1"/>
-          </a:fillRef>
-          <a:effectRef idx="2">
-            <a:schemeClr val="accent1"/>
-          </a:effectRef>
-          <a:fontRef idx="minor">
-            <a:schemeClr val="lt1"/>
-          </a:fontRef>
-        </p:style>
-        <p:txBody>
-          <a:bodyPr rtlCol="0" anchor="ctr"/>
-          <a:lstStyle/>
-          <a:p>
-            <a:pPr algn="ctr"/>
-          </a:p>
-        </p:txBody>
-      </p:sp>
-      <p:sp>
-        <p:nvSpPr>
-          <p:cNvPr id="22" name="TextBox 21"/>
-          <p:cNvSpPr txBox="1"/>
-          <p:nvPr/>
-        </p:nvSpPr>
-        <p:spPr>
-          <a:xfrm>
-            <a:off x="792000" y="3420000"/>
-            <a:ext cx="648000" cy="432000"/>
-          </a:xfrm>
-          <a:prstGeom prst="rect">
-            <a:avLst/>
-          </a:prstGeom>
-          <a:noFill/>
-        </p:spPr>
-        <p:txBody>
-          <a:bodyPr wrap="none">
-            <a:spAutoFit/>
-          </a:bodyPr>
-          <a:lstStyle/>
-          <a:p>
-            <a:pPr algn="l"/>
-            <a:r>
-              <a:rPr sz="2200" b="1">
-                <a:solidFill>
-                  <a:srgbClr val="2F6EBA"/>
-                </a:solidFill>
-                <a:latin typeface="Microsoft YaHei"/>
-              </a:rPr>
-              <a:t>05</a:t>
-            </a:r>
-          </a:p>
-        </p:txBody>
-      </p:sp>
-      <p:sp>
-        <p:nvSpPr>
-          <p:cNvPr id="23" name="TextBox 22"/>
-          <p:cNvSpPr txBox="1"/>
-          <p:nvPr/>
-        </p:nvSpPr>
-        <p:spPr>
-          <a:xfrm>
-            <a:off x="1512000" y="3441600"/>
-            <a:ext cx="9828000" cy="216000"/>
-          </a:xfrm>
-          <a:prstGeom prst="rect">
-            <a:avLst/>
-          </a:prstGeom>
-          <a:noFill/>
-        </p:spPr>
-        <p:txBody>
-          <a:bodyPr wrap="square">
-            <a:spAutoFit/>
-          </a:bodyPr>
-          <a:lstStyle/>
-          <a:p>
-            <a:pPr algn="l"/>
-            <a:r>
-              <a:rPr sz="1600" b="1">
-                <a:solidFill>
-                  <a:srgbClr val="1F3A68"/>
-                </a:solidFill>
-                <a:latin typeface="Microsoft YaHei"/>
-              </a:rPr>
-              <a:t>RQ5 真模型</a:t>
-            </a:r>
-          </a:p>
-        </p:txBody>
-      </p:sp>
-      <p:sp>
-        <p:nvSpPr>
-          <p:cNvPr id="24" name="TextBox 23"/>
-          <p:cNvSpPr txBox="1"/>
-          <p:nvPr/>
-        </p:nvSpPr>
-        <p:spPr>
-          <a:xfrm>
-            <a:off x="1512000" y="3679200"/>
-            <a:ext cx="9828000" cy="306000"/>
-          </a:xfrm>
-          <a:prstGeom prst="rect">
-            <a:avLst/>
-          </a:prstGeom>
-          <a:noFill/>
-        </p:spPr>
-        <p:txBody>
-          <a:bodyPr wrap="square">
-            <a:spAutoFit/>
-          </a:bodyPr>
-          <a:lstStyle/>
-          <a:p>
-            <a:pPr algn="l"/>
-            <a:r>
-              <a:rPr sz="1250" b="0">
-                <a:solidFill>
-                  <a:srgbClr val="555F6E"/>
-                </a:solidFill>
-                <a:latin typeface="Microsoft YaHei"/>
-              </a:rPr>
-              <a:t>DeepSeek 20/20；T6 规划引用率 1.00、约束满足 1.00</a:t>
-            </a:r>
-          </a:p>
-        </p:txBody>
-      </p:sp>
-      <p:sp>
-        <p:nvSpPr>
-          <p:cNvPr id="25" name="Rectangle 24"/>
-          <p:cNvSpPr/>
-          <p:nvPr/>
-        </p:nvSpPr>
-        <p:spPr>
-          <a:xfrm>
-            <a:off x="792000" y="3906000"/>
-            <a:ext cx="10620000" cy="10800"/>
-          </a:xfrm>
-          <a:prstGeom prst="rect">
-            <a:avLst/>
-          </a:prstGeom>
-          <a:solidFill>
-            <a:srgbClr val="C8D0DC"/>
-          </a:solidFill>
-          <a:ln>
-            <a:noFill/>
-          </a:ln>
-          <a:effectLst/>
-        </p:spPr>
-        <p:style>
-          <a:lnRef idx="1">
-            <a:schemeClr val="accent1"/>
-          </a:lnRef>
-          <a:fillRef idx="3">
-            <a:schemeClr val="accent1"/>
-          </a:fillRef>
-          <a:effectRef idx="2">
-            <a:schemeClr val="accent1"/>
-          </a:effectRef>
-          <a:fontRef idx="minor">
-            <a:schemeClr val="lt1"/>
-          </a:fontRef>
-        </p:style>
-        <p:txBody>
-          <a:bodyPr rtlCol="0" anchor="ctr"/>
-          <a:lstStyle/>
-          <a:p>
-            <a:pPr algn="ctr"/>
-          </a:p>
-        </p:txBody>
-      </p:sp>
-      <p:sp>
-        <p:nvSpPr>
-          <p:cNvPr id="26" name="TextBox 25"/>
-          <p:cNvSpPr txBox="1"/>
-          <p:nvPr/>
-        </p:nvSpPr>
-        <p:spPr>
-          <a:xfrm>
-            <a:off x="792000" y="3851999"/>
-            <a:ext cx="648000" cy="432000"/>
-          </a:xfrm>
-          <a:prstGeom prst="rect">
-            <a:avLst/>
-          </a:prstGeom>
-          <a:noFill/>
-        </p:spPr>
-        <p:txBody>
-          <a:bodyPr wrap="none">
-            <a:spAutoFit/>
-          </a:bodyPr>
-          <a:lstStyle/>
-          <a:p>
-            <a:pPr algn="l"/>
-            <a:r>
-              <a:rPr sz="2200" b="1">
-                <a:solidFill>
-                  <a:srgbClr val="2F6EBA"/>
-                </a:solidFill>
-                <a:latin typeface="Microsoft YaHei"/>
-              </a:rPr>
-              <a:t>06</a:t>
-            </a:r>
-          </a:p>
-        </p:txBody>
-      </p:sp>
-      <p:sp>
-        <p:nvSpPr>
-          <p:cNvPr id="27" name="TextBox 26"/>
-          <p:cNvSpPr txBox="1"/>
-          <p:nvPr/>
-        </p:nvSpPr>
-        <p:spPr>
-          <a:xfrm>
-            <a:off x="1512000" y="3873600"/>
-            <a:ext cx="9828000" cy="216000"/>
-          </a:xfrm>
-          <a:prstGeom prst="rect">
-            <a:avLst/>
-          </a:prstGeom>
-          <a:noFill/>
-        </p:spPr>
-        <p:txBody>
-          <a:bodyPr wrap="square">
-            <a:spAutoFit/>
-          </a:bodyPr>
-          <a:lstStyle/>
-          <a:p>
-            <a:pPr algn="l"/>
-            <a:r>
-              <a:rPr sz="1600" b="1">
-                <a:solidFill>
-                  <a:srgbClr val="1F3A68"/>
-                </a:solidFill>
-                <a:latin typeface="Microsoft YaHei"/>
-              </a:rPr>
-              <a:t>限定</a:t>
-            </a:r>
-          </a:p>
-        </p:txBody>
-      </p:sp>
-      <p:sp>
-        <p:nvSpPr>
-          <p:cNvPr id="28" name="TextBox 27"/>
-          <p:cNvSpPr txBox="1"/>
-          <p:nvPr/>
-        </p:nvSpPr>
-        <p:spPr>
-          <a:xfrm>
-            <a:off x="1512000" y="4111200"/>
-            <a:ext cx="9828000" cy="306000"/>
-          </a:xfrm>
-          <a:prstGeom prst="rect">
-            <a:avLst/>
-          </a:prstGeom>
-          <a:noFill/>
-        </p:spPr>
-        <p:txBody>
-          <a:bodyPr wrap="square">
-            <a:spAutoFit/>
-          </a:bodyPr>
-          <a:lstStyle/>
-          <a:p>
-            <a:pPr algn="l"/>
-            <a:r>
-              <a:rPr sz="1250" b="0">
-                <a:solidFill>
-                  <a:srgbClr val="555F6E"/>
-                </a:solidFill>
-                <a:latin typeface="Microsoft YaHei"/>
-              </a:rPr>
-              <a:t>MockEmbedding 之上单次运行，结论为示范性证据，真向量需复测</a:t>
+              <a:t>20/20 通过，T6 引用 1.00、约束 1.00；限定词袋/单次，示范性证据</a:t>
             </a:r>
           </a:p>
         </p:txBody>
@@ -25026,7 +25044,7 @@
         </p:nvSpPr>
         <p:spPr>
           <a:xfrm>
-            <a:off x="792000" y="4338000"/>
+            <a:off x="792000" y="6271199"/>
             <a:ext cx="10620000" cy="10800"/>
           </a:xfrm>
           <a:prstGeom prst="rect">
@@ -26541,14 +26559,93 @@
       </p:sp>
       <p:sp>
         <p:nvSpPr>
-          <p:cNvPr id="6" name="TextBox 5"/>
-          <p:cNvSpPr txBox="1"/>
-          <p:nvPr/>
-        </p:nvSpPr>
-        <p:spPr>
-          <a:xfrm>
-            <a:off x="792000" y="1692000"/>
-            <a:ext cx="648000" cy="432000"/>
+          <p:cNvPr id="6" name="Rectangle 5"/>
+          <p:cNvSpPr/>
+          <p:nvPr/>
+        </p:nvSpPr>
+        <p:spPr>
+          <a:xfrm>
+            <a:off x="792000" y="1728000"/>
+            <a:ext cx="4914000" cy="198000"/>
+          </a:xfrm>
+          <a:prstGeom prst="rect">
+            <a:avLst/>
+          </a:prstGeom>
+          <a:solidFill>
+            <a:srgbClr val="2F6EBA"/>
+          </a:solidFill>
+          <a:ln>
+            <a:noFill/>
+          </a:ln>
+          <a:effectLst/>
+        </p:spPr>
+        <p:style>
+          <a:lnRef idx="1">
+            <a:schemeClr val="accent1"/>
+          </a:lnRef>
+          <a:fillRef idx="3">
+            <a:schemeClr val="accent1"/>
+          </a:fillRef>
+          <a:effectRef idx="2">
+            <a:schemeClr val="accent1"/>
+          </a:effectRef>
+          <a:fontRef idx="minor">
+            <a:schemeClr val="lt1"/>
+          </a:fontRef>
+        </p:style>
+        <p:txBody>
+          <a:bodyPr rtlCol="0" anchor="ctr"/>
+          <a:lstStyle/>
+          <a:p>
+            <a:pPr algn="ctr"/>
+          </a:p>
+        </p:txBody>
+      </p:sp>
+      <p:sp>
+        <p:nvSpPr>
+          <p:cNvPr id="7" name="TextBox 6"/>
+          <p:cNvSpPr txBox="1"/>
+          <p:nvPr/>
+        </p:nvSpPr>
+        <p:spPr>
+          <a:xfrm>
+            <a:off x="900000" y="1735199"/>
+            <a:ext cx="2160000" cy="180000"/>
+          </a:xfrm>
+          <a:prstGeom prst="rect">
+            <a:avLst/>
+          </a:prstGeom>
+          <a:noFill/>
+        </p:spPr>
+        <p:txBody>
+          <a:bodyPr wrap="square">
+            <a:spAutoFit/>
+          </a:bodyPr>
+          <a:lstStyle/>
+          <a:p>
+            <a:pPr algn="l"/>
+            <a:r>
+              <a:rPr sz="1500" b="1">
+                <a:solidFill>
+                  <a:srgbClr val="FFFFFF"/>
+                </a:solidFill>
+                <a:latin typeface="Microsoft YaHei"/>
+              </a:rPr>
+              <a:t>结  论</a:t>
+            </a:r>
+          </a:p>
+        </p:txBody>
+      </p:sp>
+      <p:sp>
+        <p:nvSpPr>
+          <p:cNvPr id="8" name="TextBox 7"/>
+          <p:cNvSpPr txBox="1"/>
+          <p:nvPr/>
+        </p:nvSpPr>
+        <p:spPr>
+          <a:xfrm>
+            <a:off x="792000" y="2088000"/>
+            <a:ext cx="576000" cy="360000"/>
           </a:xfrm>
           <a:prstGeom prst="rect">
             <a:avLst/>
@@ -26563,7 +26660,7 @@
           <a:p>
             <a:pPr algn="l"/>
             <a:r>
-              <a:rPr sz="2200" b="1">
+              <a:rPr sz="1800" b="1">
                 <a:solidFill>
                   <a:srgbClr val="2F6EBA"/>
                 </a:solidFill>
@@ -26576,14 +26673,14 @@
       </p:sp>
       <p:sp>
         <p:nvSpPr>
-          <p:cNvPr id="7" name="TextBox 6"/>
-          <p:cNvSpPr txBox="1"/>
-          <p:nvPr/>
-        </p:nvSpPr>
-        <p:spPr>
-          <a:xfrm>
-            <a:off x="1512000" y="1713600"/>
-            <a:ext cx="9828000" cy="216000"/>
+          <p:cNvPr id="9" name="TextBox 8"/>
+          <p:cNvSpPr txBox="1"/>
+          <p:nvPr/>
+        </p:nvSpPr>
+        <p:spPr>
+          <a:xfrm>
+            <a:off x="1296000" y="2095199"/>
+            <a:ext cx="4338000" cy="216000"/>
           </a:xfrm>
           <a:prstGeom prst="rect">
             <a:avLst/>
@@ -26604,21 +26701,21 @@
                 </a:solidFill>
                 <a:latin typeface="Microsoft YaHei"/>
               </a:rPr>
-              <a:t>结论</a:t>
-            </a:r>
-          </a:p>
-        </p:txBody>
-      </p:sp>
-      <p:sp>
-        <p:nvSpPr>
-          <p:cNvPr id="8" name="TextBox 7"/>
-          <p:cNvSpPr txBox="1"/>
-          <p:nvPr/>
-        </p:nvSpPr>
-        <p:spPr>
-          <a:xfrm>
-            <a:off x="1512000" y="1951200"/>
-            <a:ext cx="9828000" cy="306000"/>
+              <a:t>分层有效</a:t>
+            </a:r>
+          </a:p>
+        </p:txBody>
+      </p:sp>
+      <p:sp>
+        <p:nvSpPr>
+          <p:cNvPr id="10" name="TextBox 9"/>
+          <p:cNvSpPr txBox="1"/>
+          <p:nvPr/>
+        </p:nvSpPr>
+        <p:spPr>
+          <a:xfrm>
+            <a:off x="1296000" y="2311200"/>
+            <a:ext cx="4338000" cy="1584000"/>
           </a:xfrm>
           <a:prstGeom prst="rect">
             <a:avLst/>
@@ -26633,27 +26730,666 @@
           <a:p>
             <a:pPr algn="l"/>
             <a:r>
+              <a:rPr sz="1300" b="0">
+                <a:solidFill>
+                  <a:srgbClr val="555F6E"/>
+                </a:solidFill>
+                <a:latin typeface="Microsoft YaHei"/>
+              </a:rPr>
+              <a:t>结构层结论在词袋固定设置下稳定，双库 p=0.0001</a:t>
+            </a:r>
+          </a:p>
+        </p:txBody>
+      </p:sp>
+      <p:sp>
+        <p:nvSpPr>
+          <p:cNvPr id="11" name="TextBox 10"/>
+          <p:cNvSpPr txBox="1"/>
+          <p:nvPr/>
+        </p:nvSpPr>
+        <p:spPr>
+          <a:xfrm>
+            <a:off x="792000" y="4103999"/>
+            <a:ext cx="576000" cy="360000"/>
+          </a:xfrm>
+          <a:prstGeom prst="rect">
+            <a:avLst/>
+          </a:prstGeom>
+          <a:noFill/>
+        </p:spPr>
+        <p:txBody>
+          <a:bodyPr wrap="none">
+            <a:spAutoFit/>
+          </a:bodyPr>
+          <a:lstStyle/>
+          <a:p>
+            <a:pPr algn="l"/>
+            <a:r>
+              <a:rPr sz="1800" b="1">
+                <a:solidFill>
+                  <a:srgbClr val="2F6EBA"/>
+                </a:solidFill>
+                <a:latin typeface="Microsoft YaHei"/>
+              </a:rPr>
+              <a:t>02</a:t>
+            </a:r>
+          </a:p>
+        </p:txBody>
+      </p:sp>
+      <p:sp>
+        <p:nvSpPr>
+          <p:cNvPr id="12" name="TextBox 11"/>
+          <p:cNvSpPr txBox="1"/>
+          <p:nvPr/>
+        </p:nvSpPr>
+        <p:spPr>
+          <a:xfrm>
+            <a:off x="1296000" y="4111199"/>
+            <a:ext cx="4338000" cy="216000"/>
+          </a:xfrm>
+          <a:prstGeom prst="rect">
+            <a:avLst/>
+          </a:prstGeom>
+          <a:noFill/>
+        </p:spPr>
+        <p:txBody>
+          <a:bodyPr wrap="square">
+            <a:spAutoFit/>
+          </a:bodyPr>
+          <a:lstStyle/>
+          <a:p>
+            <a:pPr algn="l"/>
+            <a:r>
+              <a:rPr sz="1600" b="1">
+                <a:solidFill>
+                  <a:srgbClr val="1F3A68"/>
+                </a:solidFill>
+                <a:latin typeface="Microsoft YaHei"/>
+              </a:rPr>
+              <a:t>真模型可用</a:t>
+            </a:r>
+          </a:p>
+        </p:txBody>
+      </p:sp>
+      <p:sp>
+        <p:nvSpPr>
+          <p:cNvPr id="13" name="TextBox 12"/>
+          <p:cNvSpPr txBox="1"/>
+          <p:nvPr/>
+        </p:nvSpPr>
+        <p:spPr>
+          <a:xfrm>
+            <a:off x="1296000" y="4327199"/>
+            <a:ext cx="4338000" cy="1584000"/>
+          </a:xfrm>
+          <a:prstGeom prst="rect">
+            <a:avLst/>
+          </a:prstGeom>
+          <a:noFill/>
+        </p:spPr>
+        <p:txBody>
+          <a:bodyPr wrap="square">
+            <a:spAutoFit/>
+          </a:bodyPr>
+          <a:lstStyle/>
+          <a:p>
+            <a:pPr algn="l"/>
+            <a:r>
+              <a:rPr sz="1300" b="0">
+                <a:solidFill>
+                  <a:srgbClr val="555F6E"/>
+                </a:solidFill>
+                <a:latin typeface="Microsoft YaHei"/>
+              </a:rPr>
+              <a:t>DeepSeek 引用率 1.00，检索-生成链路打通</a:t>
+            </a:r>
+          </a:p>
+        </p:txBody>
+      </p:sp>
+      <p:sp>
+        <p:nvSpPr>
+          <p:cNvPr id="14" name="Rectangle 13"/>
+          <p:cNvSpPr/>
+          <p:nvPr/>
+        </p:nvSpPr>
+        <p:spPr>
+          <a:xfrm>
+            <a:off x="6138000" y="1728000"/>
+            <a:ext cx="4914000" cy="198000"/>
+          </a:xfrm>
+          <a:prstGeom prst="rect">
+            <a:avLst/>
+          </a:prstGeom>
+          <a:solidFill>
+            <a:srgbClr val="1F3A68"/>
+          </a:solidFill>
+          <a:ln>
+            <a:noFill/>
+          </a:ln>
+          <a:effectLst/>
+        </p:spPr>
+        <p:style>
+          <a:lnRef idx="1">
+            <a:schemeClr val="accent1"/>
+          </a:lnRef>
+          <a:fillRef idx="3">
+            <a:schemeClr val="accent1"/>
+          </a:fillRef>
+          <a:effectRef idx="2">
+            <a:schemeClr val="accent1"/>
+          </a:effectRef>
+          <a:fontRef idx="minor">
+            <a:schemeClr val="lt1"/>
+          </a:fontRef>
+        </p:style>
+        <p:txBody>
+          <a:bodyPr rtlCol="0" anchor="ctr"/>
+          <a:lstStyle/>
+          <a:p>
+            <a:pPr algn="ctr"/>
+          </a:p>
+        </p:txBody>
+      </p:sp>
+      <p:sp>
+        <p:nvSpPr>
+          <p:cNvPr id="15" name="TextBox 14"/>
+          <p:cNvSpPr txBox="1"/>
+          <p:nvPr/>
+        </p:nvSpPr>
+        <p:spPr>
+          <a:xfrm>
+            <a:off x="6246000" y="1735199"/>
+            <a:ext cx="2160000" cy="180000"/>
+          </a:xfrm>
+          <a:prstGeom prst="rect">
+            <a:avLst/>
+          </a:prstGeom>
+          <a:noFill/>
+        </p:spPr>
+        <p:txBody>
+          <a:bodyPr wrap="square">
+            <a:spAutoFit/>
+          </a:bodyPr>
+          <a:lstStyle/>
+          <a:p>
+            <a:pPr algn="l"/>
+            <a:r>
+              <a:rPr sz="1500" b="1">
+                <a:solidFill>
+                  <a:srgbClr val="FFFFFF"/>
+                </a:solidFill>
+                <a:latin typeface="Microsoft YaHei"/>
+              </a:rPr>
+              <a:t>下一步</a:t>
+            </a:r>
+          </a:p>
+        </p:txBody>
+      </p:sp>
+      <p:sp>
+        <p:nvSpPr>
+          <p:cNvPr id="16" name="TextBox 15"/>
+          <p:cNvSpPr txBox="1"/>
+          <p:nvPr/>
+        </p:nvSpPr>
+        <p:spPr>
+          <a:xfrm>
+            <a:off x="6138000" y="2088000"/>
+            <a:ext cx="576000" cy="360000"/>
+          </a:xfrm>
+          <a:prstGeom prst="rect">
+            <a:avLst/>
+          </a:prstGeom>
+          <a:noFill/>
+        </p:spPr>
+        <p:txBody>
+          <a:bodyPr wrap="none">
+            <a:spAutoFit/>
+          </a:bodyPr>
+          <a:lstStyle/>
+          <a:p>
+            <a:pPr algn="l"/>
+            <a:r>
+              <a:rPr sz="1800" b="1">
+                <a:solidFill>
+                  <a:srgbClr val="1F3A68"/>
+                </a:solidFill>
+                <a:latin typeface="Microsoft YaHei"/>
+              </a:rPr>
+              <a:t>01</a:t>
+            </a:r>
+          </a:p>
+        </p:txBody>
+      </p:sp>
+      <p:sp>
+        <p:nvSpPr>
+          <p:cNvPr id="17" name="TextBox 16"/>
+          <p:cNvSpPr txBox="1"/>
+          <p:nvPr/>
+        </p:nvSpPr>
+        <p:spPr>
+          <a:xfrm>
+            <a:off x="6642000" y="2095199"/>
+            <a:ext cx="4338000" cy="216000"/>
+          </a:xfrm>
+          <a:prstGeom prst="rect">
+            <a:avLst/>
+          </a:prstGeom>
+          <a:noFill/>
+        </p:spPr>
+        <p:txBody>
+          <a:bodyPr wrap="square">
+            <a:spAutoFit/>
+          </a:bodyPr>
+          <a:lstStyle/>
+          <a:p>
+            <a:pPr algn="l"/>
+            <a:r>
+              <a:rPr sz="1500" b="1">
+                <a:solidFill>
+                  <a:srgbClr val="2F6EBA"/>
+                </a:solidFill>
+                <a:latin typeface="Microsoft YaHei"/>
+              </a:rPr>
+              <a:t>真向量复测</a:t>
+            </a:r>
+          </a:p>
+        </p:txBody>
+      </p:sp>
+      <p:sp>
+        <p:nvSpPr>
+          <p:cNvPr id="18" name="TextBox 17"/>
+          <p:cNvSpPr txBox="1"/>
+          <p:nvPr/>
+        </p:nvSpPr>
+        <p:spPr>
+          <a:xfrm>
+            <a:off x="6642000" y="2311200"/>
+            <a:ext cx="4338000" cy="1224000"/>
+          </a:xfrm>
+          <a:prstGeom prst="rect">
+            <a:avLst/>
+          </a:prstGeom>
+          <a:noFill/>
+        </p:spPr>
+        <p:txBody>
+          <a:bodyPr wrap="square">
+            <a:spAutoFit/>
+          </a:bodyPr>
+          <a:lstStyle/>
+          <a:p>
+            <a:pPr algn="l"/>
+            <a:r>
               <a:rPr sz="1250" b="0">
                 <a:solidFill>
                   <a:srgbClr val="555F6E"/>
                 </a:solidFill>
                 <a:latin typeface="Microsoft YaHei"/>
               </a:rPr>
-              <a:t>分层与进化机制在词袋固定设置下有效，双库 p=0.0001</a:t>
-            </a:r>
-          </a:p>
-        </p:txBody>
-      </p:sp>
-      <p:sp>
-        <p:nvSpPr>
-          <p:cNvPr id="9" name="Rectangle 8"/>
+              <a:t>重跑消融并重标定 min_score/θ</a:t>
+            </a:r>
+          </a:p>
+        </p:txBody>
+      </p:sp>
+      <p:sp>
+        <p:nvSpPr>
+          <p:cNvPr id="19" name="TextBox 18"/>
+          <p:cNvSpPr txBox="1"/>
+          <p:nvPr/>
+        </p:nvSpPr>
+        <p:spPr>
+          <a:xfrm>
+            <a:off x="6138000" y="3240000"/>
+            <a:ext cx="576000" cy="360000"/>
+          </a:xfrm>
+          <a:prstGeom prst="rect">
+            <a:avLst/>
+          </a:prstGeom>
+          <a:noFill/>
+        </p:spPr>
+        <p:txBody>
+          <a:bodyPr wrap="none">
+            <a:spAutoFit/>
+          </a:bodyPr>
+          <a:lstStyle/>
+          <a:p>
+            <a:pPr algn="l"/>
+            <a:r>
+              <a:rPr sz="1800" b="1">
+                <a:solidFill>
+                  <a:srgbClr val="1F3A68"/>
+                </a:solidFill>
+                <a:latin typeface="Microsoft YaHei"/>
+              </a:rPr>
+              <a:t>02</a:t>
+            </a:r>
+          </a:p>
+        </p:txBody>
+      </p:sp>
+      <p:sp>
+        <p:nvSpPr>
+          <p:cNvPr id="20" name="TextBox 19"/>
+          <p:cNvSpPr txBox="1"/>
+          <p:nvPr/>
+        </p:nvSpPr>
+        <p:spPr>
+          <a:xfrm>
+            <a:off x="6642000" y="3247200"/>
+            <a:ext cx="4338000" cy="216000"/>
+          </a:xfrm>
+          <a:prstGeom prst="rect">
+            <a:avLst/>
+          </a:prstGeom>
+          <a:noFill/>
+        </p:spPr>
+        <p:txBody>
+          <a:bodyPr wrap="square">
+            <a:spAutoFit/>
+          </a:bodyPr>
+          <a:lstStyle/>
+          <a:p>
+            <a:pPr algn="l"/>
+            <a:r>
+              <a:rPr sz="1500" b="1">
+                <a:solidFill>
+                  <a:srgbClr val="2F6EBA"/>
+                </a:solidFill>
+                <a:latin typeface="Microsoft YaHei"/>
+              </a:rPr>
+              <a:t>数据扩容</a:t>
+            </a:r>
+          </a:p>
+        </p:txBody>
+      </p:sp>
+      <p:sp>
+        <p:nvSpPr>
+          <p:cNvPr id="21" name="TextBox 20"/>
+          <p:cNvSpPr txBox="1"/>
+          <p:nvPr/>
+        </p:nvSpPr>
+        <p:spPr>
+          <a:xfrm>
+            <a:off x="6642000" y="3463199"/>
+            <a:ext cx="4338000" cy="1224000"/>
+          </a:xfrm>
+          <a:prstGeom prst="rect">
+            <a:avLst/>
+          </a:prstGeom>
+          <a:noFill/>
+        </p:spPr>
+        <p:txBody>
+          <a:bodyPr wrap="square">
+            <a:spAutoFit/>
+          </a:bodyPr>
+          <a:lstStyle/>
+          <a:p>
+            <a:pPr algn="l"/>
+            <a:r>
+              <a:rPr sz="1250" b="0">
+                <a:solidFill>
+                  <a:srgbClr val="555F6E"/>
+                </a:solidFill>
+                <a:latin typeface="Microsoft YaHei"/>
+              </a:rPr>
+              <a:t>H 类扩至 20 条，让 p 值有意义</a:t>
+            </a:r>
+          </a:p>
+        </p:txBody>
+      </p:sp>
+      <p:sp>
+        <p:nvSpPr>
+          <p:cNvPr id="22" name="TextBox 21"/>
+          <p:cNvSpPr txBox="1"/>
+          <p:nvPr/>
+        </p:nvSpPr>
+        <p:spPr>
+          <a:xfrm>
+            <a:off x="6138000" y="4392000"/>
+            <a:ext cx="576000" cy="360000"/>
+          </a:xfrm>
+          <a:prstGeom prst="rect">
+            <a:avLst/>
+          </a:prstGeom>
+          <a:noFill/>
+        </p:spPr>
+        <p:txBody>
+          <a:bodyPr wrap="none">
+            <a:spAutoFit/>
+          </a:bodyPr>
+          <a:lstStyle/>
+          <a:p>
+            <a:pPr algn="l"/>
+            <a:r>
+              <a:rPr sz="1800" b="1">
+                <a:solidFill>
+                  <a:srgbClr val="1F3A68"/>
+                </a:solidFill>
+                <a:latin typeface="Microsoft YaHei"/>
+              </a:rPr>
+              <a:t>03</a:t>
+            </a:r>
+          </a:p>
+        </p:txBody>
+      </p:sp>
+      <p:sp>
+        <p:nvSpPr>
+          <p:cNvPr id="23" name="TextBox 22"/>
+          <p:cNvSpPr txBox="1"/>
+          <p:nvPr/>
+        </p:nvSpPr>
+        <p:spPr>
+          <a:xfrm>
+            <a:off x="6642000" y="4399200"/>
+            <a:ext cx="4338000" cy="216000"/>
+          </a:xfrm>
+          <a:prstGeom prst="rect">
+            <a:avLst/>
+          </a:prstGeom>
+          <a:noFill/>
+        </p:spPr>
+        <p:txBody>
+          <a:bodyPr wrap="square">
+            <a:spAutoFit/>
+          </a:bodyPr>
+          <a:lstStyle/>
+          <a:p>
+            <a:pPr algn="l"/>
+            <a:r>
+              <a:rPr sz="1500" b="1">
+                <a:solidFill>
+                  <a:srgbClr val="2F6EBA"/>
+                </a:solidFill>
+                <a:latin typeface="Microsoft YaHei"/>
+              </a:rPr>
+              <a:t>机制补全</a:t>
+            </a:r>
+          </a:p>
+        </p:txBody>
+      </p:sp>
+      <p:sp>
+        <p:nvSpPr>
+          <p:cNvPr id="24" name="TextBox 23"/>
+          <p:cNvSpPr txBox="1"/>
+          <p:nvPr/>
+        </p:nvSpPr>
+        <p:spPr>
+          <a:xfrm>
+            <a:off x="6642000" y="4615199"/>
+            <a:ext cx="4338000" cy="1224000"/>
+          </a:xfrm>
+          <a:prstGeom prst="rect">
+            <a:avLst/>
+          </a:prstGeom>
+          <a:noFill/>
+        </p:spPr>
+        <p:txBody>
+          <a:bodyPr wrap="square">
+            <a:spAutoFit/>
+          </a:bodyPr>
+          <a:lstStyle/>
+          <a:p>
+            <a:pPr algn="l"/>
+            <a:r>
+              <a:rPr sz="1250" b="0">
+                <a:solidFill>
+                  <a:srgbClr val="555F6E"/>
+                </a:solidFill>
+                <a:latin typeface="Microsoft YaHei"/>
+              </a:rPr>
+              <a:t>知识锚定、冲突仲裁、软删除</a:t>
+            </a:r>
+          </a:p>
+        </p:txBody>
+      </p:sp>
+      <p:sp>
+        <p:nvSpPr>
+          <p:cNvPr id="25" name="TextBox 24"/>
+          <p:cNvSpPr txBox="1"/>
+          <p:nvPr/>
+        </p:nvSpPr>
+        <p:spPr>
+          <a:xfrm>
+            <a:off x="6138000" y="5543999"/>
+            <a:ext cx="576000" cy="360000"/>
+          </a:xfrm>
+          <a:prstGeom prst="rect">
+            <a:avLst/>
+          </a:prstGeom>
+          <a:noFill/>
+        </p:spPr>
+        <p:txBody>
+          <a:bodyPr wrap="none">
+            <a:spAutoFit/>
+          </a:bodyPr>
+          <a:lstStyle/>
+          <a:p>
+            <a:pPr algn="l"/>
+            <a:r>
+              <a:rPr sz="1800" b="1">
+                <a:solidFill>
+                  <a:srgbClr val="1F3A68"/>
+                </a:solidFill>
+                <a:latin typeface="Microsoft YaHei"/>
+              </a:rPr>
+              <a:t>04</a:t>
+            </a:r>
+          </a:p>
+        </p:txBody>
+      </p:sp>
+      <p:sp>
+        <p:nvSpPr>
+          <p:cNvPr id="26" name="TextBox 25"/>
+          <p:cNvSpPr txBox="1"/>
+          <p:nvPr/>
+        </p:nvSpPr>
+        <p:spPr>
+          <a:xfrm>
+            <a:off x="6642000" y="5551199"/>
+            <a:ext cx="4338000" cy="216000"/>
+          </a:xfrm>
+          <a:prstGeom prst="rect">
+            <a:avLst/>
+          </a:prstGeom>
+          <a:noFill/>
+        </p:spPr>
+        <p:txBody>
+          <a:bodyPr wrap="square">
+            <a:spAutoFit/>
+          </a:bodyPr>
+          <a:lstStyle/>
+          <a:p>
+            <a:pPr algn="l"/>
+            <a:r>
+              <a:rPr sz="1500" b="1">
+                <a:solidFill>
+                  <a:srgbClr val="2F6EBA"/>
+                </a:solidFill>
+                <a:latin typeface="Microsoft YaHei"/>
+              </a:rPr>
+              <a:t>智戎联调</a:t>
+            </a:r>
+          </a:p>
+        </p:txBody>
+      </p:sp>
+      <p:sp>
+        <p:nvSpPr>
+          <p:cNvPr id="27" name="TextBox 26"/>
+          <p:cNvSpPr txBox="1"/>
+          <p:nvPr/>
+        </p:nvSpPr>
+        <p:spPr>
+          <a:xfrm>
+            <a:off x="6642000" y="5767200"/>
+            <a:ext cx="4338000" cy="1224000"/>
+          </a:xfrm>
+          <a:prstGeom prst="rect">
+            <a:avLst/>
+          </a:prstGeom>
+          <a:noFill/>
+        </p:spPr>
+        <p:txBody>
+          <a:bodyPr wrap="square">
+            <a:spAutoFit/>
+          </a:bodyPr>
+          <a:lstStyle/>
+          <a:p>
+            <a:pPr algn="l"/>
+            <a:r>
+              <a:rPr sz="1250" b="0">
+                <a:solidFill>
+                  <a:srgbClr val="555F6E"/>
+                </a:solidFill>
+                <a:latin typeface="Microsoft YaHei"/>
+              </a:rPr>
+              <a:t>真实链路与领域巡检</a:t>
+            </a:r>
+          </a:p>
+        </p:txBody>
+      </p:sp>
+      <p:sp>
+        <p:nvSpPr>
+          <p:cNvPr id="28" name="TextBox 27"/>
+          <p:cNvSpPr txBox="1"/>
+          <p:nvPr/>
+        </p:nvSpPr>
+        <p:spPr>
+          <a:xfrm>
+            <a:off x="6066000" y="1771200"/>
+            <a:ext cx="360000" cy="288000"/>
+          </a:xfrm>
+          <a:prstGeom prst="rect">
+            <a:avLst/>
+          </a:prstGeom>
+          <a:noFill/>
+        </p:spPr>
+        <p:txBody>
+          <a:bodyPr wrap="none">
+            <a:spAutoFit/>
+          </a:bodyPr>
+          <a:lstStyle/>
+          <a:p>
+            <a:pPr algn="l"/>
+            <a:r>
+              <a:rPr sz="1800" b="1">
+                <a:solidFill>
+                  <a:srgbClr val="2F6EBA"/>
+                </a:solidFill>
+                <a:latin typeface="Microsoft YaHei"/>
+              </a:rPr>
+              <a:t>→</a:t>
+            </a:r>
+          </a:p>
+        </p:txBody>
+      </p:sp>
+      <p:sp>
+        <p:nvSpPr>
+          <p:cNvPr id="29" name="Rectangle 28"/>
           <p:cNvSpPr/>
           <p:nvPr/>
         </p:nvSpPr>
         <p:spPr>
           <a:xfrm>
-            <a:off x="792000" y="2178000"/>
-            <a:ext cx="10620000" cy="10800"/>
+            <a:off x="0" y="6606000"/>
+            <a:ext cx="12193200" cy="10800"/>
           </a:xfrm>
           <a:prstGeom prst="rect">
             <a:avLst/>
@@ -26690,612 +27426,7 @@
       </p:sp>
       <p:sp>
         <p:nvSpPr>
-          <p:cNvPr id="10" name="TextBox 9"/>
-          <p:cNvSpPr txBox="1"/>
-          <p:nvPr/>
-        </p:nvSpPr>
-        <p:spPr>
-          <a:xfrm>
-            <a:off x="792000" y="2250000"/>
-            <a:ext cx="648000" cy="432000"/>
-          </a:xfrm>
-          <a:prstGeom prst="rect">
-            <a:avLst/>
-          </a:prstGeom>
-          <a:noFill/>
-        </p:spPr>
-        <p:txBody>
-          <a:bodyPr wrap="none">
-            <a:spAutoFit/>
-          </a:bodyPr>
-          <a:lstStyle/>
-          <a:p>
-            <a:pPr algn="l"/>
-            <a:r>
-              <a:rPr sz="2200" b="1">
-                <a:solidFill>
-                  <a:srgbClr val="2F6EBA"/>
-                </a:solidFill>
-                <a:latin typeface="Microsoft YaHei"/>
-              </a:rPr>
-              <a:t>02</a:t>
-            </a:r>
-          </a:p>
-        </p:txBody>
-      </p:sp>
-      <p:sp>
-        <p:nvSpPr>
-          <p:cNvPr id="11" name="TextBox 10"/>
-          <p:cNvSpPr txBox="1"/>
-          <p:nvPr/>
-        </p:nvSpPr>
-        <p:spPr>
-          <a:xfrm>
-            <a:off x="1512000" y="2329200"/>
-            <a:ext cx="9828000" cy="360000"/>
-          </a:xfrm>
-          <a:prstGeom prst="rect">
-            <a:avLst/>
-          </a:prstGeom>
-          <a:noFill/>
-        </p:spPr>
-        <p:txBody>
-          <a:bodyPr wrap="square">
-            <a:spAutoFit/>
-          </a:bodyPr>
-          <a:lstStyle/>
-          <a:p>
-            <a:pPr algn="l"/>
-            <a:r>
-              <a:rPr sz="1400" b="0">
-                <a:solidFill>
-                  <a:srgbClr val="222830"/>
-                </a:solidFill>
-                <a:latin typeface="Microsoft YaHei"/>
-              </a:rPr>
-              <a:t>真模型验证了检索-生成链路可用，引用率 1.00（示范性）</a:t>
-            </a:r>
-          </a:p>
-        </p:txBody>
-      </p:sp>
-      <p:sp>
-        <p:nvSpPr>
-          <p:cNvPr id="12" name="Rectangle 11"/>
-          <p:cNvSpPr/>
-          <p:nvPr/>
-        </p:nvSpPr>
-        <p:spPr>
-          <a:xfrm>
-            <a:off x="792000" y="2736000"/>
-            <a:ext cx="10620000" cy="10800"/>
-          </a:xfrm>
-          <a:prstGeom prst="rect">
-            <a:avLst/>
-          </a:prstGeom>
-          <a:solidFill>
-            <a:srgbClr val="C8D0DC"/>
-          </a:solidFill>
-          <a:ln>
-            <a:noFill/>
-          </a:ln>
-          <a:effectLst/>
-        </p:spPr>
-        <p:style>
-          <a:lnRef idx="1">
-            <a:schemeClr val="accent1"/>
-          </a:lnRef>
-          <a:fillRef idx="3">
-            <a:schemeClr val="accent1"/>
-          </a:fillRef>
-          <a:effectRef idx="2">
-            <a:schemeClr val="accent1"/>
-          </a:effectRef>
-          <a:fontRef idx="minor">
-            <a:schemeClr val="lt1"/>
-          </a:fontRef>
-        </p:style>
-        <p:txBody>
-          <a:bodyPr rtlCol="0" anchor="ctr"/>
-          <a:lstStyle/>
-          <a:p>
-            <a:pPr algn="ctr"/>
-          </a:p>
-        </p:txBody>
-      </p:sp>
-      <p:sp>
-        <p:nvSpPr>
-          <p:cNvPr id="13" name="TextBox 12"/>
-          <p:cNvSpPr txBox="1"/>
-          <p:nvPr/>
-        </p:nvSpPr>
-        <p:spPr>
-          <a:xfrm>
-            <a:off x="792000" y="2808000"/>
-            <a:ext cx="648000" cy="432000"/>
-          </a:xfrm>
-          <a:prstGeom prst="rect">
-            <a:avLst/>
-          </a:prstGeom>
-          <a:noFill/>
-        </p:spPr>
-        <p:txBody>
-          <a:bodyPr wrap="none">
-            <a:spAutoFit/>
-          </a:bodyPr>
-          <a:lstStyle/>
-          <a:p>
-            <a:pPr algn="l"/>
-            <a:r>
-              <a:rPr sz="2200" b="1">
-                <a:solidFill>
-                  <a:srgbClr val="2F6EBA"/>
-                </a:solidFill>
-                <a:latin typeface="Microsoft YaHei"/>
-              </a:rPr>
-              <a:t>03</a:t>
-            </a:r>
-          </a:p>
-        </p:txBody>
-      </p:sp>
-      <p:sp>
-        <p:nvSpPr>
-          <p:cNvPr id="14" name="TextBox 13"/>
-          <p:cNvSpPr txBox="1"/>
-          <p:nvPr/>
-        </p:nvSpPr>
-        <p:spPr>
-          <a:xfrm>
-            <a:off x="1512000" y="2829600"/>
-            <a:ext cx="9828000" cy="216000"/>
-          </a:xfrm>
-          <a:prstGeom prst="rect">
-            <a:avLst/>
-          </a:prstGeom>
-          <a:noFill/>
-        </p:spPr>
-        <p:txBody>
-          <a:bodyPr wrap="square">
-            <a:spAutoFit/>
-          </a:bodyPr>
-          <a:lstStyle/>
-          <a:p>
-            <a:pPr algn="l"/>
-            <a:r>
-              <a:rPr sz="1600" b="1">
-                <a:solidFill>
-                  <a:srgbClr val="1F3A68"/>
-                </a:solidFill>
-                <a:latin typeface="Microsoft YaHei"/>
-              </a:rPr>
-              <a:t>下一步</a:t>
-            </a:r>
-          </a:p>
-        </p:txBody>
-      </p:sp>
-      <p:sp>
-        <p:nvSpPr>
-          <p:cNvPr id="15" name="TextBox 14"/>
-          <p:cNvSpPr txBox="1"/>
-          <p:nvPr/>
-        </p:nvSpPr>
-        <p:spPr>
-          <a:xfrm>
-            <a:off x="1512000" y="3067200"/>
-            <a:ext cx="9828000" cy="306000"/>
-          </a:xfrm>
-          <a:prstGeom prst="rect">
-            <a:avLst/>
-          </a:prstGeom>
-          <a:noFill/>
-        </p:spPr>
-        <p:txBody>
-          <a:bodyPr wrap="square">
-            <a:spAutoFit/>
-          </a:bodyPr>
-          <a:lstStyle/>
-          <a:p>
-            <a:pPr algn="l"/>
-            <a:r>
-              <a:rPr sz="1250" b="0">
-                <a:solidFill>
-                  <a:srgbClr val="555F6E"/>
-                </a:solidFill>
-                <a:latin typeface="Microsoft YaHei"/>
-              </a:rPr>
-              <a:t>真向量重跑与重标定 min_score/θ</a:t>
-            </a:r>
-          </a:p>
-        </p:txBody>
-      </p:sp>
-      <p:sp>
-        <p:nvSpPr>
-          <p:cNvPr id="16" name="Rectangle 15"/>
-          <p:cNvSpPr/>
-          <p:nvPr/>
-        </p:nvSpPr>
-        <p:spPr>
-          <a:xfrm>
-            <a:off x="792000" y="3294000"/>
-            <a:ext cx="10620000" cy="10800"/>
-          </a:xfrm>
-          <a:prstGeom prst="rect">
-            <a:avLst/>
-          </a:prstGeom>
-          <a:solidFill>
-            <a:srgbClr val="C8D0DC"/>
-          </a:solidFill>
-          <a:ln>
-            <a:noFill/>
-          </a:ln>
-          <a:effectLst/>
-        </p:spPr>
-        <p:style>
-          <a:lnRef idx="1">
-            <a:schemeClr val="accent1"/>
-          </a:lnRef>
-          <a:fillRef idx="3">
-            <a:schemeClr val="accent1"/>
-          </a:fillRef>
-          <a:effectRef idx="2">
-            <a:schemeClr val="accent1"/>
-          </a:effectRef>
-          <a:fontRef idx="minor">
-            <a:schemeClr val="lt1"/>
-          </a:fontRef>
-        </p:style>
-        <p:txBody>
-          <a:bodyPr rtlCol="0" anchor="ctr"/>
-          <a:lstStyle/>
-          <a:p>
-            <a:pPr algn="ctr"/>
-          </a:p>
-        </p:txBody>
-      </p:sp>
-      <p:sp>
-        <p:nvSpPr>
-          <p:cNvPr id="17" name="TextBox 16"/>
-          <p:cNvSpPr txBox="1"/>
-          <p:nvPr/>
-        </p:nvSpPr>
-        <p:spPr>
-          <a:xfrm>
-            <a:off x="792000" y="3366000"/>
-            <a:ext cx="648000" cy="432000"/>
-          </a:xfrm>
-          <a:prstGeom prst="rect">
-            <a:avLst/>
-          </a:prstGeom>
-          <a:noFill/>
-        </p:spPr>
-        <p:txBody>
-          <a:bodyPr wrap="none">
-            <a:spAutoFit/>
-          </a:bodyPr>
-          <a:lstStyle/>
-          <a:p>
-            <a:pPr algn="l"/>
-            <a:r>
-              <a:rPr sz="2200" b="1">
-                <a:solidFill>
-                  <a:srgbClr val="2F6EBA"/>
-                </a:solidFill>
-                <a:latin typeface="Microsoft YaHei"/>
-              </a:rPr>
-              <a:t>04</a:t>
-            </a:r>
-          </a:p>
-        </p:txBody>
-      </p:sp>
-      <p:sp>
-        <p:nvSpPr>
-          <p:cNvPr id="18" name="TextBox 17"/>
-          <p:cNvSpPr txBox="1"/>
-          <p:nvPr/>
-        </p:nvSpPr>
-        <p:spPr>
-          <a:xfrm>
-            <a:off x="1512000" y="3387600"/>
-            <a:ext cx="9828000" cy="216000"/>
-          </a:xfrm>
-          <a:prstGeom prst="rect">
-            <a:avLst/>
-          </a:prstGeom>
-          <a:noFill/>
-        </p:spPr>
-        <p:txBody>
-          <a:bodyPr wrap="square">
-            <a:spAutoFit/>
-          </a:bodyPr>
-          <a:lstStyle/>
-          <a:p>
-            <a:pPr algn="l"/>
-            <a:r>
-              <a:rPr sz="1600" b="1">
-                <a:solidFill>
-                  <a:srgbClr val="1F3A68"/>
-                </a:solidFill>
-                <a:latin typeface="Microsoft YaHei"/>
-              </a:rPr>
-              <a:t>下一步</a:t>
-            </a:r>
-          </a:p>
-        </p:txBody>
-      </p:sp>
-      <p:sp>
-        <p:nvSpPr>
-          <p:cNvPr id="19" name="TextBox 18"/>
-          <p:cNvSpPr txBox="1"/>
-          <p:nvPr/>
-        </p:nvSpPr>
-        <p:spPr>
-          <a:xfrm>
-            <a:off x="1512000" y="3625200"/>
-            <a:ext cx="9828000" cy="306000"/>
-          </a:xfrm>
-          <a:prstGeom prst="rect">
-            <a:avLst/>
-          </a:prstGeom>
-          <a:noFill/>
-        </p:spPr>
-        <p:txBody>
-          <a:bodyPr wrap="square">
-            <a:spAutoFit/>
-          </a:bodyPr>
-          <a:lstStyle/>
-          <a:p>
-            <a:pPr algn="l"/>
-            <a:r>
-              <a:rPr sz="1250" b="0">
-                <a:solidFill>
-                  <a:srgbClr val="555F6E"/>
-                </a:solidFill>
-                <a:latin typeface="Microsoft YaHei"/>
-              </a:rPr>
-              <a:t>H 类扩至 20 条、知识锚定、冲突仲裁</a:t>
-            </a:r>
-          </a:p>
-        </p:txBody>
-      </p:sp>
-      <p:sp>
-        <p:nvSpPr>
-          <p:cNvPr id="20" name="Rectangle 19"/>
-          <p:cNvSpPr/>
-          <p:nvPr/>
-        </p:nvSpPr>
-        <p:spPr>
-          <a:xfrm>
-            <a:off x="792000" y="3851999"/>
-            <a:ext cx="10620000" cy="10800"/>
-          </a:xfrm>
-          <a:prstGeom prst="rect">
-            <a:avLst/>
-          </a:prstGeom>
-          <a:solidFill>
-            <a:srgbClr val="C8D0DC"/>
-          </a:solidFill>
-          <a:ln>
-            <a:noFill/>
-          </a:ln>
-          <a:effectLst/>
-        </p:spPr>
-        <p:style>
-          <a:lnRef idx="1">
-            <a:schemeClr val="accent1"/>
-          </a:lnRef>
-          <a:fillRef idx="3">
-            <a:schemeClr val="accent1"/>
-          </a:fillRef>
-          <a:effectRef idx="2">
-            <a:schemeClr val="accent1"/>
-          </a:effectRef>
-          <a:fontRef idx="minor">
-            <a:schemeClr val="lt1"/>
-          </a:fontRef>
-        </p:style>
-        <p:txBody>
-          <a:bodyPr rtlCol="0" anchor="ctr"/>
-          <a:lstStyle/>
-          <a:p>
-            <a:pPr algn="ctr"/>
-          </a:p>
-        </p:txBody>
-      </p:sp>
-      <p:sp>
-        <p:nvSpPr>
-          <p:cNvPr id="21" name="TextBox 20"/>
-          <p:cNvSpPr txBox="1"/>
-          <p:nvPr/>
-        </p:nvSpPr>
-        <p:spPr>
-          <a:xfrm>
-            <a:off x="792000" y="3924000"/>
-            <a:ext cx="648000" cy="432000"/>
-          </a:xfrm>
-          <a:prstGeom prst="rect">
-            <a:avLst/>
-          </a:prstGeom>
-          <a:noFill/>
-        </p:spPr>
-        <p:txBody>
-          <a:bodyPr wrap="none">
-            <a:spAutoFit/>
-          </a:bodyPr>
-          <a:lstStyle/>
-          <a:p>
-            <a:pPr algn="l"/>
-            <a:r>
-              <a:rPr sz="2200" b="1">
-                <a:solidFill>
-                  <a:srgbClr val="2F6EBA"/>
-                </a:solidFill>
-                <a:latin typeface="Microsoft YaHei"/>
-              </a:rPr>
-              <a:t>05</a:t>
-            </a:r>
-          </a:p>
-        </p:txBody>
-      </p:sp>
-      <p:sp>
-        <p:nvSpPr>
-          <p:cNvPr id="22" name="TextBox 21"/>
-          <p:cNvSpPr txBox="1"/>
-          <p:nvPr/>
-        </p:nvSpPr>
-        <p:spPr>
-          <a:xfrm>
-            <a:off x="1512000" y="3945600"/>
-            <a:ext cx="9828000" cy="216000"/>
-          </a:xfrm>
-          <a:prstGeom prst="rect">
-            <a:avLst/>
-          </a:prstGeom>
-          <a:noFill/>
-        </p:spPr>
-        <p:txBody>
-          <a:bodyPr wrap="square">
-            <a:spAutoFit/>
-          </a:bodyPr>
-          <a:lstStyle/>
-          <a:p>
-            <a:pPr algn="l"/>
-            <a:r>
-              <a:rPr sz="1600" b="1">
-                <a:solidFill>
-                  <a:srgbClr val="1F3A68"/>
-                </a:solidFill>
-                <a:latin typeface="Microsoft YaHei"/>
-              </a:rPr>
-              <a:t>下一步</a:t>
-            </a:r>
-          </a:p>
-        </p:txBody>
-      </p:sp>
-      <p:sp>
-        <p:nvSpPr>
-          <p:cNvPr id="23" name="TextBox 22"/>
-          <p:cNvSpPr txBox="1"/>
-          <p:nvPr/>
-        </p:nvSpPr>
-        <p:spPr>
-          <a:xfrm>
-            <a:off x="1512000" y="4183200"/>
-            <a:ext cx="9828000" cy="306000"/>
-          </a:xfrm>
-          <a:prstGeom prst="rect">
-            <a:avLst/>
-          </a:prstGeom>
-          <a:noFill/>
-        </p:spPr>
-        <p:txBody>
-          <a:bodyPr wrap="square">
-            <a:spAutoFit/>
-          </a:bodyPr>
-          <a:lstStyle/>
-          <a:p>
-            <a:pPr algn="l"/>
-            <a:r>
-              <a:rPr sz="1250" b="0">
-                <a:solidFill>
-                  <a:srgbClr val="555F6E"/>
-                </a:solidFill>
-                <a:latin typeface="Microsoft YaHei"/>
-              </a:rPr>
-              <a:t>智戎真实链路联调与领域巡检</a:t>
-            </a:r>
-          </a:p>
-        </p:txBody>
-      </p:sp>
-      <p:sp>
-        <p:nvSpPr>
-          <p:cNvPr id="24" name="Rectangle 23"/>
-          <p:cNvSpPr/>
-          <p:nvPr/>
-        </p:nvSpPr>
-        <p:spPr>
-          <a:xfrm>
-            <a:off x="792000" y="4410000"/>
-            <a:ext cx="10620000" cy="10800"/>
-          </a:xfrm>
-          <a:prstGeom prst="rect">
-            <a:avLst/>
-          </a:prstGeom>
-          <a:solidFill>
-            <a:srgbClr val="C8D0DC"/>
-          </a:solidFill>
-          <a:ln>
-            <a:noFill/>
-          </a:ln>
-          <a:effectLst/>
-        </p:spPr>
-        <p:style>
-          <a:lnRef idx="1">
-            <a:schemeClr val="accent1"/>
-          </a:lnRef>
-          <a:fillRef idx="3">
-            <a:schemeClr val="accent1"/>
-          </a:fillRef>
-          <a:effectRef idx="2">
-            <a:schemeClr val="accent1"/>
-          </a:effectRef>
-          <a:fontRef idx="minor">
-            <a:schemeClr val="lt1"/>
-          </a:fontRef>
-        </p:style>
-        <p:txBody>
-          <a:bodyPr rtlCol="0" anchor="ctr"/>
-          <a:lstStyle/>
-          <a:p>
-            <a:pPr algn="ctr"/>
-          </a:p>
-        </p:txBody>
-      </p:sp>
-      <p:sp>
-        <p:nvSpPr>
-          <p:cNvPr id="25" name="Rectangle 24"/>
-          <p:cNvSpPr/>
-          <p:nvPr/>
-        </p:nvSpPr>
-        <p:spPr>
-          <a:xfrm>
-            <a:off x="0" y="6606000"/>
-            <a:ext cx="12193200" cy="10800"/>
-          </a:xfrm>
-          <a:prstGeom prst="rect">
-            <a:avLst/>
-          </a:prstGeom>
-          <a:solidFill>
-            <a:srgbClr val="C8D0DC"/>
-          </a:solidFill>
-          <a:ln>
-            <a:noFill/>
-          </a:ln>
-          <a:effectLst/>
-        </p:spPr>
-        <p:style>
-          <a:lnRef idx="1">
-            <a:schemeClr val="accent1"/>
-          </a:lnRef>
-          <a:fillRef idx="3">
-            <a:schemeClr val="accent1"/>
-          </a:fillRef>
-          <a:effectRef idx="2">
-            <a:schemeClr val="accent1"/>
-          </a:effectRef>
-          <a:fontRef idx="minor">
-            <a:schemeClr val="lt1"/>
-          </a:fontRef>
-        </p:style>
-        <p:txBody>
-          <a:bodyPr rtlCol="0" anchor="ctr"/>
-          <a:lstStyle/>
-          <a:p>
-            <a:pPr algn="ctr"/>
-          </a:p>
-        </p:txBody>
-      </p:sp>
-      <p:sp>
-        <p:nvSpPr>
-          <p:cNvPr id="26" name="TextBox 25"/>
+          <p:cNvPr id="30" name="TextBox 29"/>
           <p:cNvSpPr txBox="1"/>
           <p:nvPr/>
         </p:nvSpPr>
@@ -27330,7 +27461,7 @@
       </p:sp>
       <p:sp>
         <p:nvSpPr>
-          <p:cNvPr id="27" name="TextBox 26"/>
+          <p:cNvPr id="31" name="TextBox 30"/>
           <p:cNvSpPr txBox="1"/>
           <p:nvPr/>
         </p:nvSpPr>

--- a/汇报PPT/最终汇报成果.pptx
+++ b/汇报PPT/最终汇报成果.pptx
@@ -529,12 +529,12 @@
           <a:lstStyle/>
           <a:p>
             <a:r>
-              <a:t>【配图】可放校徽（可选）。</a:t>
-            </a:r>
-          </a:p>
-          <a:p>
-            <a:r>
-              <a:t>【讲稿】开场1分钟：课题目标、单位、小组分工。</a:t>
+              <a:t>【配图】无需配图；可放校徽（可选）。</a:t>
+            </a:r>
+          </a:p>
+          <a:p>
+            <a:r>
+              <a:t>【讲稿】各位老师好，我们小组汇报的课题是《面向作战规划智能体的可进化外部记忆系统》。系统面向场次制规划任务，目标是在模型之外建立可读写、可演化、可审计的记忆。汇报分五个部分：问题与思路、相关工作与启发、系统设计与实现、实验设计与验证、智戎接入与总结展望。</a:t>
             </a:r>
           </a:p>
         </p:txBody>
@@ -604,7 +604,12 @@
           <a:lstStyle/>
           <a:p>
             <a:r>
-              <a:t>【讲稿】说明检索与存储不是凭空设计。</a:t>
+              <a:t>【配图】可复用 fig1_architecture.png，或新画“双库+三路检索示意”。</a:t>
+            </a:r>
+          </a:p>
+          <a:p>
+            <a:r>
+              <a:t>【讲稿】长期存储与检索上，ChatDB 的数据库即符号记忆让我们保留属性精确过滤；ExpeL 的经验库+向量召回让我们保留经验语义；Reflexion 的语言反思、MemoryBank 的遗忘曲线、Zep 的溯源字段、MIRIX/TiM 的多路检索分别对应我们的经验表示、遗忘保护线、溯源和路由设计。</a:t>
             </a:r>
           </a:p>
         </p:txBody>
@@ -674,7 +679,12 @@
           <a:lstStyle/>
           <a:p>
             <a:r>
-              <a:t>【讲稿】强调机制都有原型，差异在组合与军事场景限定。</a:t>
+              <a:t>【配图】可复用 fig3_code_layers.png，或新画“写/合/忘/抽四操作图”。</a:t>
+            </a:r>
+          </a:p>
+          <a:p>
+            <a:r>
+              <a:t>【讲稿】记忆进化上，PREMem 的相似度去重、StructMem 的跨事件整合、MemSkill 的操作类型化、Mem-α 的建议-执行分离，分别启发了我们的写入查重、抽象、MemoryOp 枚举和整体架构。差异在组合方式与军事场景限定：保护线、精确命中绕过阈值、阶段化供给。</a:t>
             </a:r>
           </a:p>
         </p:txBody>
@@ -744,12 +754,12 @@
           <a:lstStyle/>
           <a:p>
             <a:r>
-              <a:t>【配图】可放 docs/figures/fig1_architecture.png 作背景。</a:t>
-            </a:r>
-          </a:p>
-          <a:p>
-            <a:r>
-              <a:t>【讲稿】进入核心章节。</a:t>
+              <a:t>【配图】背景可用 docs/figures/fig1_architecture.png。</a:t>
+            </a:r>
+          </a:p>
+          <a:p>
+            <a:r>
+              <a:t>【讲稿】第三章进入系统设计与实现，先看总体架构，再看短期、长期、检索、进化的具体代码。</a:t>
             </a:r>
           </a:p>
         </p:txBody>
@@ -819,12 +829,12 @@
           <a:lstStyle/>
           <a:p>
             <a:r>
-              <a:t>【配图】本页右侧图位：放 docs/figures/fig1_architecture.png（系统架构图）。</a:t>
-            </a:r>
-          </a:p>
-          <a:p>
-            <a:r>
-              <a:t>【讲稿】讲清分层与‘可独立消融’。</a:t>
+              <a:t>【配图】右侧已插入 docs/figures/fig1_architecture.png（系统架构图）。</a:t>
+            </a:r>
+          </a:p>
+          <a:p>
+            <a:r>
+              <a:t>【讲稿】系统分四层：模型层统一数据对象，能力层分短期/长期/检索/进化，跨切面负责边界与阶段，编排层由控制器和管线调度。四能力层互不 import，只通过 schema 对象通信，因此可以独立开关做消融。短期到长期只经复盘晋升，并有三道边界门和审计日志。</a:t>
             </a:r>
           </a:p>
         </p:txBody>
@@ -894,12 +904,12 @@
           <a:lstStyle/>
           <a:p>
             <a:r>
-              <a:t>【配图】无。</a:t>
-            </a:r>
-          </a:p>
-          <a:p>
-            <a:r>
-              <a:t>【讲稿】讲清‘首尾关键、约束不压缩、归档可复盘’。</a:t>
+              <a:t>【配图】可复用 fig4_session_sequence.png，或新画“FIFO+递归摘要示意”。</a:t>
+            </a:r>
+          </a:p>
+          <a:p>
+            <a:r>
+              <a:t>【讲稿】短期工作记忆用槽位保存目标、约束、查询和消息，约束永不压缩。FIFO 超阈值时把最旧消息移出，递归生成摘要，原文进入归档供复盘。渲染顺序刻意使用首尾位置偏置：关键信息放头部、近期消息放尾部。</a:t>
             </a:r>
           </a:p>
         </p:txBody>
@@ -969,12 +979,12 @@
           <a:lstStyle/>
           <a:p>
             <a:r>
-              <a:t>【配图】无。</a:t>
-            </a:r>
-          </a:p>
-          <a:p>
-            <a:r>
-              <a:t>【讲稿】用 T-90 vs M1A2 的例子说明为什么必须分库。</a:t>
+              <a:t>【配图】可复用 fig3_code_layers.png，或新画“双库接口+融合示意”。</a:t>
+            </a:r>
+          </a:p>
+          <a:p>
+            <a:r>
+              <a:t>【讲稿】长期记忆分事实库和经验库：事实库用 SQLite 和属性精确过滤，经验库用向量语义召回。属性精确命中绕过 min_score，因为查询方显式指定条件时命中即相关。这样参数查询不会被相似度阈值卡住，经验查询也能跨措辞召回。</a:t>
             </a:r>
           </a:p>
         </p:txBody>
@@ -1044,12 +1054,12 @@
           <a:lstStyle/>
           <a:p>
             <a:r>
-              <a:t>【配图】无。</a:t>
-            </a:r>
-          </a:p>
-          <a:p>
-            <a:r>
-              <a:t>【讲稿】重点讲归一化与‘命中强化只做一次’。</a:t>
+              <a:t>【配图】可新画“三路融合示意”（vector/BM25/SQL → 归一化 → 加权融合）。</a:t>
+            </a:r>
+          </a:p>
+          <a:p>
+            <a:r>
+              <a:t>【讲稿】检索层把 vector、BM25、SQL 三路放在一起：hybrid 模式三路加权累加，single 模式只走一路供消融。归一化时向量取余弦、BM25 用查询自匹配作上界、SQL 恒为 1；然后叠加阶段亲和、过滤 min_score，对最终结果只做一次命中强化，避免同一记忆被强化多次。</a:t>
             </a:r>
           </a:p>
         </p:txBody>
@@ -1119,12 +1129,12 @@
           <a:lstStyle/>
           <a:p>
             <a:r>
-              <a:t>【配图】无。</a:t>
-            </a:r>
-          </a:p>
-          <a:p>
-            <a:r>
-              <a:t>【讲稿】讲清‘为什么建议与执行分离’——可审计。</a:t>
+              <a:t>【配图】建议放 docs/figures/report_fig6_forgetting_curve.png（遗忘曲线）。</a:t>
+            </a:r>
+          </a:p>
+          <a:p>
+            <a:r>
+              <a:t>【讲稿】进化采用建议-执行分离：LLM 从复盘中提候选，确定性代码执行写入、合并、遗忘、抽象。遗忘用艾宾浩斯公式 R=e^{-t/S}，命中一次 S 加一并重置时间；importance≥2 的记忆受保护。这样既保证记忆会淘汰，也保证失败教训不会被误删。</a:t>
             </a:r>
           </a:p>
         </p:txBody>
@@ -1194,12 +1204,12 @@
           <a:lstStyle/>
           <a:p>
             <a:r>
-              <a:t>【配图】无。</a:t>
-            </a:r>
-          </a:p>
-          <a:p>
-            <a:r>
-              <a:t>【讲稿】澄清‘什么能进长期库、什么时候检索什么’。</a:t>
+              <a:t>【配图】可新画“三闸门 + 阶段漏斗示意”。</a:t>
+            </a:r>
+          </a:p>
+          <a:p>
+            <a:r>
+              <a:t>【讲稿】短期内容进入长期库必须过三道门：复盘驱动、类别判定、语义查重，每次判定写入审计日志。阶段感知则把查询按 MDMP 七阶段生成，阶段匹配的记忆加亲和分，复盘教训按阶段归因，让后续同阶段优先召回。</a:t>
             </a:r>
           </a:p>
         </p:txBody>
@@ -1269,12 +1279,12 @@
           <a:lstStyle/>
           <a:p>
             <a:r>
-              <a:t>【配图】本页右侧图位：放 WebUI 截图（记忆详情抽屉/遗忘曲线/事件流）。</a:t>
-            </a:r>
-          </a:p>
-          <a:p>
-            <a:r>
-              <a:t>【讲稿】展示可视化如何帮助理解系统。</a:t>
+              <a:t>【配图】右侧已插入 docs/figures/report_fig9_webui_ui.png（WebUI 界面）。</a:t>
+            </a:r>
+          </a:p>
+          <a:p>
+            <a:r>
+              <a:t>【讲稿】WebUI 用三栏页签化布局：左输入、中运行、右产出，长内容折叠为页签。记忆详情抽屉展示总览、单条历史和遗忘日志；遗忘曲线把 R=e^{-t/S} 和“立即召回 S+1”放在一起对比；还有战役进度条、库健康度分布条和可展开的事件流。</a:t>
             </a:r>
           </a:p>
         </p:txBody>
@@ -1344,12 +1354,12 @@
           <a:lstStyle/>
           <a:p>
             <a:r>
-              <a:t>【配图】无。</a:t>
-            </a:r>
-          </a:p>
-          <a:p>
-            <a:r>
-              <a:t>【讲稿】按五部分走，重点在系统设计与实验验证。</a:t>
+              <a:t>【配图】无需配图。</a:t>
+            </a:r>
+          </a:p>
+          <a:p>
+            <a:r>
+              <a:t>【讲稿】汇报主线是五步：先讲清问题，再说明我们从已有工作里借鉴了什么，然后给出系统设计与代码实现，接着用消融和真模型验证，最后讲智戎接入与下一步。重点在第 3、4 部分。</a:t>
             </a:r>
           </a:p>
         </p:txBody>
@@ -1419,12 +1429,12 @@
           <a:lstStyle/>
           <a:p>
             <a:r>
-              <a:t>【配图】可放消融图（docs/17 配图脚本生成）作背景。</a:t>
-            </a:r>
-          </a:p>
-          <a:p>
-            <a:r>
-              <a:t>【讲稿】进入数据章节，先声明词袋环境。</a:t>
+              <a:t>【配图】背景可用 docs/figures/report_fig4_ablation_category.png。</a:t>
+            </a:r>
+          </a:p>
+          <a:p>
+            <a:r>
+              <a:t>【讲稿】第四章是实验设计与验证，先讲数据集和协议，再按 RQ 给结果。</a:t>
             </a:r>
           </a:p>
         </p:txBody>
@@ -1494,12 +1504,12 @@
           <a:lstStyle/>
           <a:p>
             <a:r>
-              <a:t>【配图】无。</a:t>
-            </a:r>
-          </a:p>
-          <a:p>
-            <a:r>
-              <a:t>【讲稿】重点讲‘固定用例+开关能力’，说明每组怎么对比。</a:t>
+              <a:t>【配图】建议放 docs/figures/report_fig3_testset_structure.png（测试集结构）。</a:t>
+            </a:r>
+          </a:p>
+          <a:p>
+            <a:r>
+              <a:t>【讲稿】实验用的测试集是自建 50 条 8 类，查询与答案刻意避免关键词共现。所有组在固定用例集上跑，通过依赖注入开关能力，而不是删减用例；跨场次 gold 在运行期解析。指标分检索层和任务层，统计用随机基线、bootstrap 置信区间和配对置换检验，种子固定 42。</a:t>
             </a:r>
           </a:p>
         </p:txBody>
@@ -1569,12 +1579,12 @@
           <a:lstStyle/>
           <a:p>
             <a:r>
-              <a:t>【配图】建议放消融柱状图（docs/17 配图脚本：G2 vs G3 分类别 hit@5）。</a:t>
-            </a:r>
-          </a:p>
-          <a:p>
-            <a:r>
-              <a:t>【讲稿】先看四个大数字，再讲实验设计、CI、分类别、解读。</a:t>
+              <a:t>【配图】建议放 docs/figures/report_fig4_ablation_category.png（消融分类别 hit@5）。</a:t>
+            </a:r>
+          </a:p>
+          <a:p>
+            <a:r>
+              <a:t>【讲稿】RQ1 实验是 G2 仅事实库对 G3 双库全开，同为 44 条固定用例。结果 G2 hit@5=0.341，G3=0.636，Δ=0.295，配对置换 p=0.0001，两组置信区间不重叠。分类别看，增益全部来自经验类，事实类没有下降，说明双库分层不是冗余，经验库是经验查询的必要条件。</a:t>
             </a:r>
           </a:p>
         </p:txBody>
@@ -1644,12 +1654,12 @@
           <a:lstStyle/>
           <a:p>
             <a:r>
-              <a:t>【配图】可放跨场次 WebUI 截图（第二场命中带‘往场沉淀’）或表格。</a:t>
-            </a:r>
-          </a:p>
-          <a:p>
-            <a:r>
-              <a:t>【讲稿】RQ2 强调机制完整但样本小；RQ3 强调负结果要诚实。</a:t>
+              <a:t>【配图】建议放 docs/figures/report_fig7_cross_session.png（跨场次复用）。</a:t>
+            </a:r>
+          </a:p>
+          <a:p>
+            <a:r>
+              <a:t>【讲稿】RQ2 的做法是第一场先跑复盘写入经验，第二场用相关查询检索，gold 为运行期写入条目，对照不写第一场，另设负控。处理组 hit@5=0.833、对照 0、负控 0，机制路径完整；但样本只有 6 条，p=0.059，只能算方向性证据。RQ3 比较 hybrid 与单路：词袋下 hybrid 召回未胜出，但干扰压制更好，说明混合价值在排序，需真向量复测。</a:t>
             </a:r>
           </a:p>
         </p:txBody>
@@ -1719,12 +1729,12 @@
           <a:lstStyle/>
           <a:p>
             <a:r>
-              <a:t>【配图】可放遗忘曲线（WebUI 截图）或 DeepSeek 输出截图。</a:t>
-            </a:r>
-          </a:p>
-          <a:p>
-            <a:r>
-              <a:t>【讲稿】先给四个大数字，再补实验步骤与限定。</a:t>
+              <a:t>【配图】建议组合使用 docs/figures/report_fig5_min_score_curve.png、report_fig6_forgetting_curve.png、report_fig8_deepseek_output.png。</a:t>
+            </a:r>
+          </a:p>
+          <a:p>
+            <a:r>
+              <a:t>【讲稿】RQ4 包含两个实验：滤噪扫描 min_score 的四个取值，0.16 时负例返回率归零、正例 hit@5=0.857；遗忘实验把时间戳回拨 30 天后运行 forget，未保护删 10/10，保护和新写入删 0，误删为 0。RQ5 用 DeepSeek 验证 20 项全过，T6 规划引用率 1.00、约束满足 1.00。需要强调这些都在 MockEmbedding 之上且为单次运行，属于示范性证据。</a:t>
             </a:r>
           </a:p>
         </p:txBody>
@@ -1794,12 +1804,12 @@
           <a:lstStyle/>
           <a:p>
             <a:r>
-              <a:t>【配图】可放 docs/figures/fig2_campaign_trajectory.png 作背景。</a:t>
-            </a:r>
-          </a:p>
-          <a:p>
-            <a:r>
-              <a:t>【讲稿】从‘能不能用’讲到‘怎么接’。</a:t>
+              <a:t>【配图】背景可用 docs/figures/fig2_campaign_trajectory.png。</a:t>
+            </a:r>
+          </a:p>
+          <a:p>
+            <a:r>
+              <a:t>【讲稿】第五章讲智戎接入与总结展望。</a:t>
             </a:r>
           </a:p>
         </p:txBody>
@@ -1869,12 +1879,12 @@
           <a:lstStyle/>
           <a:p>
             <a:r>
-              <a:t>【配图】本页右侧图位：放 docs/figures/fig2_campaign_trajectory.png 或智戎桥接架构示意图。</a:t>
-            </a:r>
-          </a:p>
-          <a:p>
-            <a:r>
-              <a:t>【讲稿】强调 P1（无结束信号）已有适配方案。</a:t>
+              <a:t>【配图】右侧已插入 docs/figures/fig2_campaign_trajectory.png（多轮战役轨迹/事件流）。</a:t>
+            </a:r>
+          </a:p>
+          <a:p>
+            <a:r>
+              <a:t>【讲稿】智戎平台可能没有“场次结束”和“复盘文本”，所以我们做了 P0 适配：hook_evolve 不依赖场次结束，可以随时触发进化；结构化反馈把 AFSIM 的数值和事件转成复盘文本；normalize_task 把结构化任务转成 goal/constraints/queries；domain_check 用于真实数据的领域巡检和阈值建议。</a:t>
             </a:r>
           </a:p>
         </p:txBody>
@@ -1944,12 +1954,12 @@
           <a:lstStyle/>
           <a:p>
             <a:r>
-              <a:t>【配图】无。</a:t>
-            </a:r>
-          </a:p>
-          <a:p>
-            <a:r>
-              <a:t>【讲稿】左栏讲两条核心结论，右栏讲四项下一步。</a:t>
+              <a:t>【配图】无需配图；可放 fig1_architecture 缩略图。</a:t>
+            </a:r>
+          </a:p>
+          <a:p>
+            <a:r>
+              <a:t>【讲稿】总结两条结论：分层与进化机制在词袋固定设置下有效，双库 p=0.0001；真模型验证了检索-生成链路可用，引用率 1.00。下一步四件事：真向量重跑并重标定、H 类扩到 20 条、补知识锚定和冲突仲裁、接入智戎真实链路。</a:t>
             </a:r>
           </a:p>
         </p:txBody>
@@ -2024,7 +2034,7 @@
           </a:p>
           <a:p>
             <a:r>
-              <a:t>【讲稿】感谢，进入提问。</a:t>
+              <a:t>【讲稿】我的汇报到此结束，感谢各位老师，欢迎提问。</a:t>
             </a:r>
           </a:p>
         </p:txBody>
@@ -2094,12 +2104,12 @@
           <a:lstStyle/>
           <a:p>
             <a:r>
-              <a:t>【配图】可放 docs/figures/fig2_campaign_trajectory.png 作背景。</a:t>
-            </a:r>
-          </a:p>
-          <a:p>
-            <a:r>
-              <a:t>【讲稿】先讲‘为什么需要外部记忆’。</a:t>
+              <a:t>【配图】背景可用 docs/figures/fig2_campaign_trajectory.png（多轮战役轨迹）。</a:t>
+            </a:r>
+          </a:p>
+          <a:p>
+            <a:r>
+              <a:t>【讲稿】第一章先界定问题：为什么场次制规划需要外部记忆。</a:t>
             </a:r>
           </a:p>
         </p:txBody>
@@ -2169,7 +2179,12 @@
           <a:lstStyle/>
           <a:p>
             <a:r>
-              <a:t>【讲稿】用“同一夜间进攻任务，第一场隘口遇伏，第二场大概率再吃亏”开场。</a:t>
+              <a:t>【配图】建议放 docs/figures/fig4_session_sequence.png（单场任务数据流/时序）。</a:t>
+            </a:r>
+          </a:p>
+          <a:p>
+            <a:r>
+              <a:t>【讲稿】作战规划智能体按场次接任务：目标→查询→检索→规划→推演→复盘→下一场。模型权重与上下文都不保留跨场次状态，所以同类错误会反复出现。长上下文只解决容量，RAG 只解决知识供给，都不解决经验沉淀、更新与淘汰。因此我们要在模型之外构建可读写、可演化、可审计的外部记忆系统。</a:t>
             </a:r>
           </a:p>
         </p:txBody>
@@ -2239,7 +2254,12 @@
           <a:lstStyle/>
           <a:p>
             <a:r>
-              <a:t>【讲稿】P1-P4 来自初始拆解，P5 来自导师反馈；每行右侧为示意图占位。</a:t>
+              <a:t>【配图】每行右侧小图建议：P1 用 fig4_session_sequence；P2 用 fig3_code_layers；P3 新画“双库分离示意”；P4 新画“库噪声累积示意”；P5 新画“阶段查询示意”。</a:t>
+            </a:r>
+          </a:p>
+          <a:p>
+            <a:r>
+              <a:t>【讲稿】我们把问题拆成五个失败模式：P1 经验不积累；P2 上下文超限导致硬约束丢失；P3 参数精确查询与经验语义查询混用单路；P4 复盘无差别入库让库变日志；P5 直接用目标文本查询信息量太薄。这五个问题分别对应后面的设计取舍。</a:t>
             </a:r>
           </a:p>
         </p:txBody>
@@ -2309,7 +2329,12 @@
           <a:lstStyle/>
           <a:p>
             <a:r>
-              <a:t>【讲稿】强调 RQ 是从失败模式引申而来，实验章节逐一回答。</a:t>
+              <a:t>【配图】可复用 fig4_session_sequence 或新画“P→RQ 映射图”。</a:t>
+            </a:r>
+          </a:p>
+          <a:p>
+            <a:r>
+              <a:t>【讲稿】由五个失败模式引申出五个研究问题：RQ1 双库贡献、RQ2 跨场次复用、RQ3 检索策略、RQ4 滤噪与遗忘、RQ5 真实模型。每个 RQ 都对应可量化的实验，后面实验章节会逐一回答。</a:t>
             </a:r>
           </a:p>
         </p:txBody>
@@ -2379,7 +2404,12 @@
           <a:lstStyle/>
           <a:p>
             <a:r>
-              <a:t>【讲稿】四句话说清系统设计哲学。</a:t>
+              <a:t>【配图】可新画“四原则关系图”（外部系统、复盘晋升、建议-执行分离、阶段感知）。</a:t>
+            </a:r>
+          </a:p>
+          <a:p>
+            <a:r>
+              <a:t>【讲稿】总体思路四句话：把记忆做成可演化的外部系统；短期到长期只留复盘晋升一条写通道；LLM 只提候选、确定性代码执行写合忘抽；查询按 MDMP 阶段生成并给对口记忆加分。这四点分别回应前面的失败模式。</a:t>
             </a:r>
           </a:p>
         </p:txBody>
@@ -2449,12 +2479,12 @@
           <a:lstStyle/>
           <a:p>
             <a:r>
-              <a:t>【配图】可放 docs/figures/fig1_architecture.png 作背景。</a:t>
-            </a:r>
-          </a:p>
-          <a:p>
-            <a:r>
-              <a:t>【讲稿】说明借鉴什么、不采用什么。</a:t>
+              <a:t>【配图】背景可用 docs/figures/fig3_code_layers.png（代码分层）。</a:t>
+            </a:r>
+          </a:p>
+          <a:p>
+            <a:r>
+              <a:t>【讲稿】第二章梳理相关工作，说明我们借鉴了什么、不采用什么。</a:t>
             </a:r>
           </a:p>
         </p:txBody>
@@ -2524,7 +2554,12 @@
           <a:lstStyle/>
           <a:p>
             <a:r>
-              <a:t>【讲稿】每条讲“借鉴什么、为什么不完整照搬”。</a:t>
+              <a:t>【配图】可复用 fig4_session_sequence，或新画“分层上下文示意”。</a:t>
+            </a:r>
+          </a:p>
+          <a:p>
+            <a:r>
+              <a:t>【讲稿】上下文管理上，综述给出“形式-操作-应用”框架；MemGPT 提出主上下文+外部存档，我们采用分层但把换页改成确定性阈值，保证可复现；SCM 强调控制器决定读写归档，我们沿用但把写长期库收窄为复盘晋升；LLMLingua/ICAE 的压缩我们只借用位置偏置和“只压历史不压约束”。</a:t>
             </a:r>
           </a:p>
         </p:txBody>
@@ -9744,9 +9779,33 @@
           </a:p>
         </p:txBody>
       </p:sp>
-      <p:sp>
-        <p:nvSpPr>
-          <p:cNvPr id="22" name="Rectangle 21"/>
+      <p:pic>
+        <p:nvPicPr>
+          <p:cNvPr id="22" name="Picture 21" descr="fig1_architecture.png"/>
+          <p:cNvPicPr>
+            <a:picLocks noChangeAspect="1"/>
+          </p:cNvPicPr>
+          <p:nvPr/>
+        </p:nvPicPr>
+        <p:blipFill>
+          <a:blip r:embed="rId2"/>
+          <a:stretch>
+            <a:fillRect/>
+          </a:stretch>
+        </p:blipFill>
+        <p:spPr>
+          <a:xfrm>
+            <a:off x="7632000" y="2201594"/>
+            <a:ext cx="3924000" cy="3552810"/>
+          </a:xfrm>
+          <a:prstGeom prst="rect">
+            <a:avLst/>
+          </a:prstGeom>
+        </p:spPr>
+      </p:pic>
+      <p:sp>
+        <p:nvSpPr>
+          <p:cNvPr id="23" name="Rectangle 22"/>
           <p:cNvSpPr/>
           <p:nvPr/>
         </p:nvSpPr>
@@ -9758,9 +9817,7 @@
           <a:prstGeom prst="rect">
             <a:avLst/>
           </a:prstGeom>
-          <a:solidFill>
-            <a:srgbClr val="F2F4F8"/>
-          </a:solidFill>
+          <a:noFill/>
           <a:ln w="15240">
             <a:solidFill>
               <a:srgbClr val="2F6EBA"/>
@@ -9792,7 +9849,7 @@
       </p:sp>
       <p:sp>
         <p:nvSpPr>
-          <p:cNvPr id="23" name="Rectangle 22"/>
+          <p:cNvPr id="24" name="Rectangle 23"/>
           <p:cNvSpPr/>
           <p:nvPr/>
         </p:nvSpPr>
@@ -9836,7 +9893,7 @@
       </p:sp>
       <p:sp>
         <p:nvSpPr>
-          <p:cNvPr id="24" name="TextBox 23"/>
+          <p:cNvPr id="25" name="TextBox 24"/>
           <p:cNvSpPr txBox="1"/>
           <p:nvPr/>
         </p:nvSpPr>
@@ -9871,7 +9928,7 @@
       </p:sp>
       <p:sp>
         <p:nvSpPr>
-          <p:cNvPr id="25" name="TextBox 24"/>
+          <p:cNvPr id="26" name="TextBox 25"/>
           <p:cNvSpPr txBox="1"/>
           <p:nvPr/>
         </p:nvSpPr>
@@ -19521,9 +19578,33 @@
           </a:p>
         </p:txBody>
       </p:sp>
-      <p:sp>
-        <p:nvSpPr>
-          <p:cNvPr id="22" name="Rectangle 21"/>
+      <p:pic>
+        <p:nvPicPr>
+          <p:cNvPr id="22" name="Picture 21" descr="report_fig9_webui_ui.png"/>
+          <p:cNvPicPr>
+            <a:picLocks noChangeAspect="1"/>
+          </p:cNvPicPr>
+          <p:nvPr/>
+        </p:nvPicPr>
+        <p:blipFill>
+          <a:blip r:embed="rId2"/>
+          <a:stretch>
+            <a:fillRect/>
+          </a:stretch>
+        </p:blipFill>
+        <p:spPr>
+          <a:xfrm>
+            <a:off x="7632000" y="2848363"/>
+            <a:ext cx="3924000" cy="2259272"/>
+          </a:xfrm>
+          <a:prstGeom prst="rect">
+            <a:avLst/>
+          </a:prstGeom>
+        </p:spPr>
+      </p:pic>
+      <p:sp>
+        <p:nvSpPr>
+          <p:cNvPr id="23" name="Rectangle 22"/>
           <p:cNvSpPr/>
           <p:nvPr/>
         </p:nvSpPr>
@@ -19535,9 +19616,7 @@
           <a:prstGeom prst="rect">
             <a:avLst/>
           </a:prstGeom>
-          <a:solidFill>
-            <a:srgbClr val="F2F4F8"/>
-          </a:solidFill>
+          <a:noFill/>
           <a:ln w="15240">
             <a:solidFill>
               <a:srgbClr val="2F6EBA"/>
@@ -19569,7 +19648,7 @@
       </p:sp>
       <p:sp>
         <p:nvSpPr>
-          <p:cNvPr id="23" name="Rectangle 22"/>
+          <p:cNvPr id="24" name="Rectangle 23"/>
           <p:cNvSpPr/>
           <p:nvPr/>
         </p:nvSpPr>
@@ -19613,7 +19692,7 @@
       </p:sp>
       <p:sp>
         <p:nvSpPr>
-          <p:cNvPr id="24" name="TextBox 23"/>
+          <p:cNvPr id="25" name="TextBox 24"/>
           <p:cNvSpPr txBox="1"/>
           <p:nvPr/>
         </p:nvSpPr>
@@ -19648,7 +19727,7 @@
       </p:sp>
       <p:sp>
         <p:nvSpPr>
-          <p:cNvPr id="25" name="TextBox 24"/>
+          <p:cNvPr id="26" name="TextBox 25"/>
           <p:cNvSpPr txBox="1"/>
           <p:nvPr/>
         </p:nvSpPr>
@@ -26221,9 +26300,33 @@
           </a:p>
         </p:txBody>
       </p:sp>
-      <p:sp>
-        <p:nvSpPr>
-          <p:cNvPr id="22" name="Rectangle 21"/>
+      <p:pic>
+        <p:nvPicPr>
+          <p:cNvPr id="22" name="Picture 21" descr="fig2_campaign_trajectory.png"/>
+          <p:cNvPicPr>
+            <a:picLocks noChangeAspect="1"/>
+          </p:cNvPicPr>
+          <p:nvPr/>
+        </p:nvPicPr>
+        <p:blipFill>
+          <a:blip r:embed="rId2"/>
+          <a:stretch>
+            <a:fillRect/>
+          </a:stretch>
+        </p:blipFill>
+        <p:spPr>
+          <a:xfrm>
+            <a:off x="7632000" y="2784891"/>
+            <a:ext cx="3924000" cy="2386216"/>
+          </a:xfrm>
+          <a:prstGeom prst="rect">
+            <a:avLst/>
+          </a:prstGeom>
+        </p:spPr>
+      </p:pic>
+      <p:sp>
+        <p:nvSpPr>
+          <p:cNvPr id="23" name="Rectangle 22"/>
           <p:cNvSpPr/>
           <p:nvPr/>
         </p:nvSpPr>
@@ -26235,9 +26338,7 @@
           <a:prstGeom prst="rect">
             <a:avLst/>
           </a:prstGeom>
-          <a:solidFill>
-            <a:srgbClr val="F2F4F8"/>
-          </a:solidFill>
+          <a:noFill/>
           <a:ln w="15240">
             <a:solidFill>
               <a:srgbClr val="2F6EBA"/>
@@ -26269,7 +26370,7 @@
       </p:sp>
       <p:sp>
         <p:nvSpPr>
-          <p:cNvPr id="23" name="Rectangle 22"/>
+          <p:cNvPr id="24" name="Rectangle 23"/>
           <p:cNvSpPr/>
           <p:nvPr/>
         </p:nvSpPr>
@@ -26313,7 +26414,7 @@
       </p:sp>
       <p:sp>
         <p:nvSpPr>
-          <p:cNvPr id="24" name="TextBox 23"/>
+          <p:cNvPr id="25" name="TextBox 24"/>
           <p:cNvSpPr txBox="1"/>
           <p:nvPr/>
         </p:nvSpPr>
@@ -26348,7 +26449,7 @@
       </p:sp>
       <p:sp>
         <p:nvSpPr>
-          <p:cNvPr id="25" name="TextBox 24"/>
+          <p:cNvPr id="26" name="TextBox 25"/>
           <p:cNvSpPr txBox="1"/>
           <p:nvPr/>
         </p:nvSpPr>

--- a/汇报PPT/最终汇报成果.pptx
+++ b/汇报PPT/最终汇报成果.pptx
@@ -529,7 +529,7 @@
           <a:lstStyle/>
           <a:p>
             <a:r>
-              <a:t>【配图】无需配图；可放校徽（可选）。</a:t>
+              <a:t>【配图】封面可放校徽（可选）；无需其他图。</a:t>
             </a:r>
           </a:p>
           <a:p>
@@ -604,7 +604,7 @@
           <a:lstStyle/>
           <a:p>
             <a:r>
-              <a:t>【配图】可复用 fig1_architecture.png，或新画“双库+三路检索示意”。</a:t>
+              <a:t>【配图】建议插入 docs/figures/ppt/ppt_dual_store.svg（事实库/经验库 + 三路读取）。</a:t>
             </a:r>
           </a:p>
           <a:p>
@@ -679,7 +679,7 @@
           <a:lstStyle/>
           <a:p>
             <a:r>
-              <a:t>【配图】可复用 fig3_code_layers.png，或新画“写/合/忘/抽四操作图”。</a:t>
+              <a:t>【配图】建议插入 docs/figures/ppt/ppt_evolution_ops.svg（写入/合并/遗忘/抽象四操作）。</a:t>
             </a:r>
           </a:p>
           <a:p>
@@ -754,7 +754,7 @@
           <a:lstStyle/>
           <a:p>
             <a:r>
-              <a:t>【配图】背景可用 docs/figures/fig1_architecture.png。</a:t>
+              <a:t>【配图】章首主视觉可用 docs/figures/ppt/ppt_architecture.svg。</a:t>
             </a:r>
           </a:p>
           <a:p>
@@ -829,7 +829,7 @@
           <a:lstStyle/>
           <a:p>
             <a:r>
-              <a:t>【配图】右侧已插入 docs/figures/fig1_architecture.png（系统架构图）。</a:t>
+              <a:t>【配图】右侧大图位 10.9×12.9cm，放 docs/figures/ppt/ppt_architecture.svg（PPT 已插入同名 PNG）。</a:t>
             </a:r>
           </a:p>
           <a:p>
@@ -904,7 +904,7 @@
           <a:lstStyle/>
           <a:p>
             <a:r>
-              <a:t>【配图】可复用 fig4_session_sequence.png，或新画“FIFO+递归摘要示意”。</a:t>
+              <a:t>【配图】建议插入 docs/figures/ppt/ppt_fifo_summary.svg（FIFO→递归摘要→归档）。</a:t>
             </a:r>
           </a:p>
           <a:p>
@@ -979,7 +979,7 @@
           <a:lstStyle/>
           <a:p>
             <a:r>
-              <a:t>【配图】可复用 fig3_code_layers.png，或新画“双库接口+融合示意”。</a:t>
+              <a:t>【配图】建议插入 docs/figures/ppt/ppt_dual_store.svg（双库接口与三路读取）。</a:t>
             </a:r>
           </a:p>
           <a:p>
@@ -1054,7 +1054,7 @@
           <a:lstStyle/>
           <a:p>
             <a:r>
-              <a:t>【配图】可新画“三路融合示意”（vector/BM25/SQL → 归一化 → 加权融合）。</a:t>
+              <a:t>【配图】建议插入 docs/figures/ppt/ppt_hybrid_retrieval.svg（三路融合/归一/阶段亲和）。</a:t>
             </a:r>
           </a:p>
           <a:p>
@@ -1129,7 +1129,7 @@
           <a:lstStyle/>
           <a:p>
             <a:r>
-              <a:t>【配图】建议放 docs/figures/report_fig6_forgetting_curve.png（遗忘曲线）。</a:t>
+              <a:t>【配图】建议插入 docs/figures/ppt/ppt_forgetting_curve.svg（R=e^{-t/S} 与 S+1）。</a:t>
             </a:r>
           </a:p>
           <a:p>
@@ -1204,7 +1204,7 @@
           <a:lstStyle/>
           <a:p>
             <a:r>
-              <a:t>【配图】可新画“三闸门 + 阶段漏斗示意”。</a:t>
+              <a:t>【配图】建议插入 docs/figures/ppt/ppt_boundary_stages.svg（复盘驱动→类别门→查重→阶段）。</a:t>
             </a:r>
           </a:p>
           <a:p>
@@ -1279,7 +1279,7 @@
           <a:lstStyle/>
           <a:p>
             <a:r>
-              <a:t>【配图】右侧已插入 docs/figures/report_fig9_webui_ui.png（WebUI 界面）。</a:t>
+              <a:t>【配图】右侧大图位 10.9×12.9cm，放 docs/figures/ppt/ppt_webui.svg（PPT 已插入同名 PNG）：三栏/抽屉/遗忘曲线。</a:t>
             </a:r>
           </a:p>
           <a:p>
@@ -1354,7 +1354,7 @@
           <a:lstStyle/>
           <a:p>
             <a:r>
-              <a:t>【配图】无需配图。</a:t>
+              <a:t>【配图】无。</a:t>
             </a:r>
           </a:p>
           <a:p>
@@ -1429,7 +1429,7 @@
           <a:lstStyle/>
           <a:p>
             <a:r>
-              <a:t>【配图】背景可用 docs/figures/report_fig4_ablation_category.png。</a:t>
+              <a:t>【配图】章首主视觉可用 docs/figures/ppt/ppt_ablation.svg。</a:t>
             </a:r>
           </a:p>
           <a:p>
@@ -1504,7 +1504,7 @@
           <a:lstStyle/>
           <a:p>
             <a:r>
-              <a:t>【配图】建议放 docs/figures/report_fig3_testset_structure.png（测试集结构）。</a:t>
+              <a:t>【配图】建议插入 docs/figures/ppt/ppt_testset.svg（50 条 8 类结构）。</a:t>
             </a:r>
           </a:p>
           <a:p>
@@ -1579,7 +1579,7 @@
           <a:lstStyle/>
           <a:p>
             <a:r>
-              <a:t>【配图】建议放 docs/figures/report_fig4_ablation_category.png（消融分类别 hit@5）。</a:t>
+              <a:t>【配图】建议插入 docs/figures/ppt/ppt_ablation.svg（G2/G3 柱状 + 随机基线）。</a:t>
             </a:r>
           </a:p>
           <a:p>
@@ -1654,7 +1654,7 @@
           <a:lstStyle/>
           <a:p>
             <a:r>
-              <a:t>【配图】建议放 docs/figures/report_fig7_cross_session.png（跨场次复用）。</a:t>
+              <a:t>【配图】建议插入 docs/figures/ppt/ppt_cross_session.svg（第一场复盘→第二场召回）。</a:t>
             </a:r>
           </a:p>
           <a:p>
@@ -1729,7 +1729,7 @@
           <a:lstStyle/>
           <a:p>
             <a:r>
-              <a:t>【配图】建议组合使用 docs/figures/report_fig5_min_score_curve.png、report_fig6_forgetting_curve.png、report_fig8_deepseek_output.png。</a:t>
+              <a:t>【配图】建议组合插入 docs/figures/ppt/ppt_min_score.svg、ppt_forgetting_curve.svg、ppt_deepseek.svg（三选一或上下组合）。</a:t>
             </a:r>
           </a:p>
           <a:p>
@@ -1804,7 +1804,7 @@
           <a:lstStyle/>
           <a:p>
             <a:r>
-              <a:t>【配图】背景可用 docs/figures/fig2_campaign_trajectory.png。</a:t>
+              <a:t>【配图】章首主视觉可用 docs/figures/ppt/ppt_zhirong.svg。</a:t>
             </a:r>
           </a:p>
           <a:p>
@@ -1879,7 +1879,7 @@
           <a:lstStyle/>
           <a:p>
             <a:r>
-              <a:t>【配图】右侧已插入 docs/figures/fig2_campaign_trajectory.png（多轮战役轨迹/事件流）。</a:t>
+              <a:t>【配图】右侧大图位 10.9×12.9cm，放 docs/figures/ppt/ppt_zhirong.svg（PPT 已插入同名 PNG）：三挂接点→事件驱动。</a:t>
             </a:r>
           </a:p>
           <a:p>
@@ -1954,7 +1954,7 @@
           <a:lstStyle/>
           <a:p>
             <a:r>
-              <a:t>【配图】无需配图；可放 fig1_architecture 缩略图。</a:t>
+              <a:t>【配图】建议插入 docs/figures/ppt/ppt_roadmap.svg（下一步四步路线）。</a:t>
             </a:r>
           </a:p>
           <a:p>
@@ -2029,7 +2029,7 @@
           <a:lstStyle/>
           <a:p>
             <a:r>
-              <a:t>【配图】可放校徽（可选）。</a:t>
+              <a:t>【配图】感谢页可放校徽（可选）。</a:t>
             </a:r>
           </a:p>
           <a:p>
@@ -2104,7 +2104,7 @@
           <a:lstStyle/>
           <a:p>
             <a:r>
-              <a:t>【配图】背景可用 docs/figures/fig2_campaign_trajectory.png（多轮战役轨迹）。</a:t>
+              <a:t>【配图】章首主视觉可用 docs/figures/ppt/ppt_session_cycle.svg（竖版 900×1060）。</a:t>
             </a:r>
           </a:p>
           <a:p>
@@ -2179,7 +2179,7 @@
           <a:lstStyle/>
           <a:p>
             <a:r>
-              <a:t>【配图】建议放 docs/figures/fig4_session_sequence.png（单场任务数据流/时序）。</a:t>
+              <a:t>【配图】右侧大图位 10.9×12.9cm，放 docs/figures/ppt/ppt_session_cycle.svg（PPT 已插入同名 PNG）：场次循环 + 状态不跨场次。</a:t>
             </a:r>
           </a:p>
           <a:p>
@@ -2254,7 +2254,7 @@
           <a:lstStyle/>
           <a:p>
             <a:r>
-              <a:t>【配图】每行右侧小图建议：P1 用 fig4_session_sequence；P2 用 fig3_code_layers；P3 新画“双库分离示意”；P4 新画“库噪声累积示意”；P5 新画“阶段查询示意”。</a:t>
+              <a:t>【配图】每行右侧小图位 3.2×2.0cm，依次放 docs/figures/ppt/ppt_p1.svg ~ ppt_p5.svg（PPT 已插入同名 PNG）。</a:t>
             </a:r>
           </a:p>
           <a:p>
@@ -2329,7 +2329,7 @@
           <a:lstStyle/>
           <a:p>
             <a:r>
-              <a:t>【配图】可复用 fig4_session_sequence 或新画“P→RQ 映射图”。</a:t>
+              <a:t>【配图】每行右侧小图位，依次放 docs/figures/ppt/ppt_rq1.svg ~ ppt_rq5.svg（PPT 已插入同名 PNG），体现 P→RQ 映射。</a:t>
             </a:r>
           </a:p>
           <a:p>
@@ -2404,7 +2404,7 @@
           <a:lstStyle/>
           <a:p>
             <a:r>
-              <a:t>【配图】可新画“四原则关系图”（外部系统、复盘晋升、建议-执行分离、阶段感知）。</a:t>
+              <a:t>【配图】建议把 docs/figures/ppt/ppt_four_principles.svg（1000×560）放在 2×2 卡片旁或做成半页图。</a:t>
             </a:r>
           </a:p>
           <a:p>
@@ -2479,7 +2479,7 @@
           <a:lstStyle/>
           <a:p>
             <a:r>
-              <a:t>【配图】背景可用 docs/figures/fig3_code_layers.png（代码分层）。</a:t>
+              <a:t>【配图】章首主视觉可用 docs/figures/ppt/ppt_architecture.svg。</a:t>
             </a:r>
           </a:p>
           <a:p>
@@ -2554,7 +2554,7 @@
           <a:lstStyle/>
           <a:p>
             <a:r>
-              <a:t>【配图】可复用 fig4_session_sequence，或新画“分层上下文示意”。</a:t>
+              <a:t>【配图】建议插入 docs/figures/ppt/ppt_context_layers.svg（常驻关键区/装载记忆/滚动消息三层）。</a:t>
             </a:r>
           </a:p>
           <a:p>
@@ -9781,7 +9781,7 @@
       </p:sp>
       <p:pic>
         <p:nvPicPr>
-          <p:cNvPr id="22" name="Picture 21" descr="fig1_architecture.png"/>
+          <p:cNvPr id="22" name="Picture 21" descr="ppt_architecture.png"/>
           <p:cNvPicPr>
             <a:picLocks noChangeAspect="1"/>
           </p:cNvPicPr>
@@ -9795,8 +9795,8 @@
         </p:blipFill>
         <p:spPr>
           <a:xfrm>
-            <a:off x="7632000" y="2201594"/>
-            <a:ext cx="3924000" cy="3552810"/>
+            <a:off x="7632000" y="1667199"/>
+            <a:ext cx="3924000" cy="4621600"/>
           </a:xfrm>
           <a:prstGeom prst="rect">
             <a:avLst/>
@@ -19580,7 +19580,7 @@
       </p:sp>
       <p:pic>
         <p:nvPicPr>
-          <p:cNvPr id="22" name="Picture 21" descr="report_fig9_webui_ui.png"/>
+          <p:cNvPr id="22" name="Picture 21" descr="ppt_webui.png"/>
           <p:cNvPicPr>
             <a:picLocks noChangeAspect="1"/>
           </p:cNvPicPr>
@@ -19594,8 +19594,8 @@
         </p:blipFill>
         <p:spPr>
           <a:xfrm>
-            <a:off x="7632000" y="2848363"/>
-            <a:ext cx="3924000" cy="2259272"/>
+            <a:off x="7632000" y="1667199"/>
+            <a:ext cx="3924000" cy="4621600"/>
           </a:xfrm>
           <a:prstGeom prst="rect">
             <a:avLst/>
@@ -26302,7 +26302,7 @@
       </p:sp>
       <p:pic>
         <p:nvPicPr>
-          <p:cNvPr id="22" name="Picture 21" descr="fig2_campaign_trajectory.png"/>
+          <p:cNvPr id="22" name="Picture 21" descr="ppt_zhirong.png"/>
           <p:cNvPicPr>
             <a:picLocks noChangeAspect="1"/>
           </p:cNvPicPr>
@@ -26316,8 +26316,8 @@
         </p:blipFill>
         <p:spPr>
           <a:xfrm>
-            <a:off x="7632000" y="2784891"/>
-            <a:ext cx="3924000" cy="2386216"/>
+            <a:off x="7632000" y="1667199"/>
+            <a:ext cx="3924000" cy="4621600"/>
           </a:xfrm>
           <a:prstGeom prst="rect">
             <a:avLst/>
@@ -28518,7 +28518,7 @@
         </p:nvSpPr>
         <p:spPr>
           <a:xfrm>
-            <a:off x="792000" y="1828800"/>
+            <a:off x="792000" y="1756800"/>
             <a:ext cx="648000" cy="432000"/>
           </a:xfrm>
           <a:prstGeom prst="rect">
@@ -28553,8 +28553,8 @@
         </p:nvSpPr>
         <p:spPr>
           <a:xfrm>
-            <a:off x="1512000" y="1800000"/>
-            <a:ext cx="9828000" cy="324000"/>
+            <a:off x="1512000" y="1728000"/>
+            <a:ext cx="5256000" cy="324000"/>
           </a:xfrm>
           <a:prstGeom prst="rect">
             <a:avLst/>
@@ -28588,8 +28588,8 @@
         </p:nvSpPr>
         <p:spPr>
           <a:xfrm>
-            <a:off x="1512000" y="2106000"/>
-            <a:ext cx="9828000" cy="593999"/>
+            <a:off x="1512000" y="2033999"/>
+            <a:ext cx="5256000" cy="630000"/>
           </a:xfrm>
           <a:prstGeom prst="rect">
             <a:avLst/>
@@ -28623,8 +28623,8 @@
         </p:nvSpPr>
         <p:spPr>
           <a:xfrm>
-            <a:off x="792000" y="2761199"/>
-            <a:ext cx="10620000" cy="10800"/>
+            <a:off x="792000" y="2725200"/>
+            <a:ext cx="6048000" cy="10800"/>
           </a:xfrm>
           <a:prstGeom prst="rect">
             <a:avLst/>
@@ -28667,7 +28667,7 @@
         </p:nvSpPr>
         <p:spPr>
           <a:xfrm>
-            <a:off x="792000" y="2962799"/>
+            <a:off x="792000" y="2926799"/>
             <a:ext cx="648000" cy="432000"/>
           </a:xfrm>
           <a:prstGeom prst="rect">
@@ -28702,8 +28702,8 @@
         </p:nvSpPr>
         <p:spPr>
           <a:xfrm>
-            <a:off x="1512000" y="2933999"/>
-            <a:ext cx="9828000" cy="324000"/>
+            <a:off x="1512000" y="2897999"/>
+            <a:ext cx="5256000" cy="324000"/>
           </a:xfrm>
           <a:prstGeom prst="rect">
             <a:avLst/>
@@ -28737,8 +28737,8 @@
         </p:nvSpPr>
         <p:spPr>
           <a:xfrm>
-            <a:off x="1512000" y="3240000"/>
-            <a:ext cx="9828000" cy="593999"/>
+            <a:off x="1512000" y="3204000"/>
+            <a:ext cx="5256000" cy="630000"/>
           </a:xfrm>
           <a:prstGeom prst="rect">
             <a:avLst/>
@@ -28772,8 +28772,8 @@
         </p:nvSpPr>
         <p:spPr>
           <a:xfrm>
-            <a:off x="792000" y="3895199"/>
-            <a:ext cx="10620000" cy="10800"/>
+            <a:off x="792000" y="3895200"/>
+            <a:ext cx="6048000" cy="10800"/>
           </a:xfrm>
           <a:prstGeom prst="rect">
             <a:avLst/>
@@ -28816,7 +28816,7 @@
         </p:nvSpPr>
         <p:spPr>
           <a:xfrm>
-            <a:off x="792000" y="4096799"/>
+            <a:off x="792000" y="4096800"/>
             <a:ext cx="648000" cy="432000"/>
           </a:xfrm>
           <a:prstGeom prst="rect">
@@ -28851,8 +28851,8 @@
         </p:nvSpPr>
         <p:spPr>
           <a:xfrm>
-            <a:off x="1512000" y="4067999"/>
-            <a:ext cx="9828000" cy="324000"/>
+            <a:off x="1512000" y="4068000"/>
+            <a:ext cx="5256000" cy="324000"/>
           </a:xfrm>
           <a:prstGeom prst="rect">
             <a:avLst/>
@@ -28886,8 +28886,8 @@
         </p:nvSpPr>
         <p:spPr>
           <a:xfrm>
-            <a:off x="1512000" y="4373999"/>
-            <a:ext cx="9828000" cy="593999"/>
+            <a:off x="1512000" y="4374000"/>
+            <a:ext cx="5256000" cy="630000"/>
           </a:xfrm>
           <a:prstGeom prst="rect">
             <a:avLst/>
@@ -28921,8 +28921,8 @@
         </p:nvSpPr>
         <p:spPr>
           <a:xfrm>
-            <a:off x="792000" y="5029199"/>
-            <a:ext cx="10620000" cy="10800"/>
+            <a:off x="792000" y="5065200"/>
+            <a:ext cx="6048000" cy="10800"/>
           </a:xfrm>
           <a:prstGeom prst="rect">
             <a:avLst/>
@@ -28965,7 +28965,7 @@
         </p:nvSpPr>
         <p:spPr>
           <a:xfrm>
-            <a:off x="792000" y="5230800"/>
+            <a:off x="792000" y="5266800"/>
             <a:ext cx="648000" cy="432000"/>
           </a:xfrm>
           <a:prstGeom prst="rect">
@@ -29000,8 +29000,8 @@
         </p:nvSpPr>
         <p:spPr>
           <a:xfrm>
-            <a:off x="1512000" y="5202000"/>
-            <a:ext cx="9828000" cy="324000"/>
+            <a:off x="1512000" y="5238000"/>
+            <a:ext cx="5256000" cy="324000"/>
           </a:xfrm>
           <a:prstGeom prst="rect">
             <a:avLst/>
@@ -29035,8 +29035,8 @@
         </p:nvSpPr>
         <p:spPr>
           <a:xfrm>
-            <a:off x="1512000" y="5508000"/>
-            <a:ext cx="9828000" cy="593999"/>
+            <a:off x="1512000" y="5544000"/>
+            <a:ext cx="5256000" cy="630000"/>
           </a:xfrm>
           <a:prstGeom prst="rect">
             <a:avLst/>
@@ -29070,8 +29070,8 @@
         </p:nvSpPr>
         <p:spPr>
           <a:xfrm>
-            <a:off x="792000" y="6163199"/>
-            <a:ext cx="10620000" cy="10800"/>
+            <a:off x="792000" y="6235200"/>
+            <a:ext cx="6048000" cy="10800"/>
           </a:xfrm>
           <a:prstGeom prst="rect">
             <a:avLst/>
@@ -29106,9 +29106,77 @@
           </a:p>
         </p:txBody>
       </p:sp>
-      <p:sp>
-        <p:nvSpPr>
-          <p:cNvPr id="22" name="Rectangle 21"/>
+      <p:pic>
+        <p:nvPicPr>
+          <p:cNvPr id="22" name="Picture 21" descr="ppt_session_cycle.png"/>
+          <p:cNvPicPr>
+            <a:picLocks noChangeAspect="1"/>
+          </p:cNvPicPr>
+          <p:nvPr/>
+        </p:nvPicPr>
+        <p:blipFill>
+          <a:blip r:embed="rId2"/>
+          <a:stretch>
+            <a:fillRect/>
+          </a:stretch>
+        </p:blipFill>
+        <p:spPr>
+          <a:xfrm>
+            <a:off x="7632000" y="1667199"/>
+            <a:ext cx="3924000" cy="4621600"/>
+          </a:xfrm>
+          <a:prstGeom prst="rect">
+            <a:avLst/>
+          </a:prstGeom>
+        </p:spPr>
+      </p:pic>
+      <p:sp>
+        <p:nvSpPr>
+          <p:cNvPr id="23" name="Rectangle 22"/>
+          <p:cNvSpPr/>
+          <p:nvPr/>
+        </p:nvSpPr>
+        <p:spPr>
+          <a:xfrm>
+            <a:off x="7632000" y="1655999"/>
+            <a:ext cx="3924000" cy="4644000"/>
+          </a:xfrm>
+          <a:prstGeom prst="rect">
+            <a:avLst/>
+          </a:prstGeom>
+          <a:noFill/>
+          <a:ln w="15240">
+            <a:solidFill>
+              <a:srgbClr val="2F6EBA"/>
+            </a:solidFill>
+          </a:ln>
+          <a:effectLst/>
+        </p:spPr>
+        <p:style>
+          <a:lnRef idx="1">
+            <a:schemeClr val="accent1"/>
+          </a:lnRef>
+          <a:fillRef idx="3">
+            <a:schemeClr val="accent1"/>
+          </a:fillRef>
+          <a:effectRef idx="2">
+            <a:schemeClr val="accent1"/>
+          </a:effectRef>
+          <a:fontRef idx="minor">
+            <a:schemeClr val="lt1"/>
+          </a:fontRef>
+        </p:style>
+        <p:txBody>
+          <a:bodyPr rtlCol="0" anchor="ctr"/>
+          <a:lstStyle/>
+          <a:p>
+            <a:pPr algn="ctr"/>
+          </a:p>
+        </p:txBody>
+      </p:sp>
+      <p:sp>
+        <p:nvSpPr>
+          <p:cNvPr id="24" name="Rectangle 23"/>
           <p:cNvSpPr/>
           <p:nvPr/>
         </p:nvSpPr>
@@ -29152,7 +29220,7 @@
       </p:sp>
       <p:sp>
         <p:nvSpPr>
-          <p:cNvPr id="23" name="TextBox 22"/>
+          <p:cNvPr id="25" name="TextBox 24"/>
           <p:cNvSpPr txBox="1"/>
           <p:nvPr/>
         </p:nvSpPr>
@@ -29187,7 +29255,7 @@
       </p:sp>
       <p:sp>
         <p:nvSpPr>
-          <p:cNvPr id="24" name="TextBox 23"/>
+          <p:cNvPr id="26" name="TextBox 25"/>
           <p:cNvSpPr txBox="1"/>
           <p:nvPr/>
         </p:nvSpPr>
@@ -29501,9 +29569,33 @@
           </a:p>
         </p:txBody>
       </p:sp>
-      <p:sp>
-        <p:nvSpPr>
-          <p:cNvPr id="9" name="Rectangle 8"/>
+      <p:pic>
+        <p:nvPicPr>
+          <p:cNvPr id="9" name="Picture 8" descr="ppt_p1.png"/>
+          <p:cNvPicPr>
+            <a:picLocks noChangeAspect="1"/>
+          </p:cNvPicPr>
+          <p:nvPr/>
+        </p:nvPicPr>
+        <p:blipFill>
+          <a:blip r:embed="rId2"/>
+          <a:stretch>
+            <a:fillRect/>
+          </a:stretch>
+        </p:blipFill>
+        <p:spPr>
+          <a:xfrm>
+            <a:off x="10336032" y="1891295"/>
+            <a:ext cx="999936" cy="562463"/>
+          </a:xfrm>
+          <a:prstGeom prst="rect">
+            <a:avLst/>
+          </a:prstGeom>
+        </p:spPr>
+      </p:pic>
+      <p:sp>
+        <p:nvSpPr>
+          <p:cNvPr id="10" name="Rectangle 9"/>
           <p:cNvSpPr/>
           <p:nvPr/>
         </p:nvSpPr>
@@ -29515,9 +29607,7 @@
           <a:prstGeom prst="rect">
             <a:avLst/>
           </a:prstGeom>
-          <a:solidFill>
-            <a:srgbClr val="F2F4F8"/>
-          </a:solidFill>
+          <a:noFill/>
           <a:ln w="15240">
             <a:solidFill>
               <a:srgbClr val="2F6EBA"/>
@@ -29549,7 +29639,7 @@
       </p:sp>
       <p:sp>
         <p:nvSpPr>
-          <p:cNvPr id="10" name="Rectangle 9"/>
+          <p:cNvPr id="11" name="Rectangle 10"/>
           <p:cNvSpPr/>
           <p:nvPr/>
         </p:nvSpPr>
@@ -29593,7 +29683,7 @@
       </p:sp>
       <p:sp>
         <p:nvSpPr>
-          <p:cNvPr id="11" name="TextBox 10"/>
+          <p:cNvPr id="12" name="TextBox 11"/>
           <p:cNvSpPr txBox="1"/>
           <p:nvPr/>
         </p:nvSpPr>
@@ -29628,7 +29718,7 @@
       </p:sp>
       <p:sp>
         <p:nvSpPr>
-          <p:cNvPr id="12" name="TextBox 11"/>
+          <p:cNvPr id="13" name="TextBox 12"/>
           <p:cNvSpPr txBox="1"/>
           <p:nvPr/>
         </p:nvSpPr>
@@ -29663,7 +29753,7 @@
       </p:sp>
       <p:sp>
         <p:nvSpPr>
-          <p:cNvPr id="13" name="TextBox 12"/>
+          <p:cNvPr id="14" name="TextBox 13"/>
           <p:cNvSpPr txBox="1"/>
           <p:nvPr/>
         </p:nvSpPr>
@@ -29696,9 +29786,33 @@
           </a:p>
         </p:txBody>
       </p:sp>
-      <p:sp>
-        <p:nvSpPr>
-          <p:cNvPr id="14" name="Rectangle 13"/>
+      <p:pic>
+        <p:nvPicPr>
+          <p:cNvPr id="15" name="Picture 14" descr="ppt_p2.png"/>
+          <p:cNvPicPr>
+            <a:picLocks noChangeAspect="1"/>
+          </p:cNvPicPr>
+          <p:nvPr/>
+        </p:nvPicPr>
+        <p:blipFill>
+          <a:blip r:embed="rId3"/>
+          <a:stretch>
+            <a:fillRect/>
+          </a:stretch>
+        </p:blipFill>
+        <p:spPr>
+          <a:xfrm>
+            <a:off x="10336032" y="2798495"/>
+            <a:ext cx="999936" cy="562463"/>
+          </a:xfrm>
+          <a:prstGeom prst="rect">
+            <a:avLst/>
+          </a:prstGeom>
+        </p:spPr>
+      </p:pic>
+      <p:sp>
+        <p:nvSpPr>
+          <p:cNvPr id="16" name="Rectangle 15"/>
           <p:cNvSpPr/>
           <p:nvPr/>
         </p:nvSpPr>
@@ -29710,9 +29824,7 @@
           <a:prstGeom prst="rect">
             <a:avLst/>
           </a:prstGeom>
-          <a:solidFill>
-            <a:srgbClr val="F2F4F8"/>
-          </a:solidFill>
+          <a:noFill/>
           <a:ln w="15240">
             <a:solidFill>
               <a:srgbClr val="2F6EBA"/>
@@ -29744,7 +29856,7 @@
       </p:sp>
       <p:sp>
         <p:nvSpPr>
-          <p:cNvPr id="15" name="Rectangle 14"/>
+          <p:cNvPr id="17" name="Rectangle 16"/>
           <p:cNvSpPr/>
           <p:nvPr/>
         </p:nvSpPr>
@@ -29788,7 +29900,7 @@
       </p:sp>
       <p:sp>
         <p:nvSpPr>
-          <p:cNvPr id="16" name="TextBox 15"/>
+          <p:cNvPr id="18" name="TextBox 17"/>
           <p:cNvSpPr txBox="1"/>
           <p:nvPr/>
         </p:nvSpPr>
@@ -29823,7 +29935,7 @@
       </p:sp>
       <p:sp>
         <p:nvSpPr>
-          <p:cNvPr id="17" name="TextBox 16"/>
+          <p:cNvPr id="19" name="TextBox 18"/>
           <p:cNvSpPr txBox="1"/>
           <p:nvPr/>
         </p:nvSpPr>
@@ -29858,7 +29970,7 @@
       </p:sp>
       <p:sp>
         <p:nvSpPr>
-          <p:cNvPr id="18" name="TextBox 17"/>
+          <p:cNvPr id="20" name="TextBox 19"/>
           <p:cNvSpPr txBox="1"/>
           <p:nvPr/>
         </p:nvSpPr>
@@ -29891,9 +30003,33 @@
           </a:p>
         </p:txBody>
       </p:sp>
-      <p:sp>
-        <p:nvSpPr>
-          <p:cNvPr id="19" name="Rectangle 18"/>
+      <p:pic>
+        <p:nvPicPr>
+          <p:cNvPr id="21" name="Picture 20" descr="ppt_p3.png"/>
+          <p:cNvPicPr>
+            <a:picLocks noChangeAspect="1"/>
+          </p:cNvPicPr>
+          <p:nvPr/>
+        </p:nvPicPr>
+        <p:blipFill>
+          <a:blip r:embed="rId4"/>
+          <a:stretch>
+            <a:fillRect/>
+          </a:stretch>
+        </p:blipFill>
+        <p:spPr>
+          <a:xfrm>
+            <a:off x="10336032" y="3705696"/>
+            <a:ext cx="999936" cy="562463"/>
+          </a:xfrm>
+          <a:prstGeom prst="rect">
+            <a:avLst/>
+          </a:prstGeom>
+        </p:spPr>
+      </p:pic>
+      <p:sp>
+        <p:nvSpPr>
+          <p:cNvPr id="22" name="Rectangle 21"/>
           <p:cNvSpPr/>
           <p:nvPr/>
         </p:nvSpPr>
@@ -29905,9 +30041,7 @@
           <a:prstGeom prst="rect">
             <a:avLst/>
           </a:prstGeom>
-          <a:solidFill>
-            <a:srgbClr val="F2F4F8"/>
-          </a:solidFill>
+          <a:noFill/>
           <a:ln w="15240">
             <a:solidFill>
               <a:srgbClr val="2F6EBA"/>
@@ -29939,7 +30073,7 @@
       </p:sp>
       <p:sp>
         <p:nvSpPr>
-          <p:cNvPr id="20" name="Rectangle 19"/>
+          <p:cNvPr id="23" name="Rectangle 22"/>
           <p:cNvSpPr/>
           <p:nvPr/>
         </p:nvSpPr>
@@ -29983,7 +30117,7 @@
       </p:sp>
       <p:sp>
         <p:nvSpPr>
-          <p:cNvPr id="21" name="TextBox 20"/>
+          <p:cNvPr id="24" name="TextBox 23"/>
           <p:cNvSpPr txBox="1"/>
           <p:nvPr/>
         </p:nvSpPr>
@@ -30018,7 +30152,7 @@
       </p:sp>
       <p:sp>
         <p:nvSpPr>
-          <p:cNvPr id="22" name="TextBox 21"/>
+          <p:cNvPr id="25" name="TextBox 24"/>
           <p:cNvSpPr txBox="1"/>
           <p:nvPr/>
         </p:nvSpPr>
@@ -30053,7 +30187,7 @@
       </p:sp>
       <p:sp>
         <p:nvSpPr>
-          <p:cNvPr id="23" name="TextBox 22"/>
+          <p:cNvPr id="26" name="TextBox 25"/>
           <p:cNvSpPr txBox="1"/>
           <p:nvPr/>
         </p:nvSpPr>
@@ -30086,9 +30220,33 @@
           </a:p>
         </p:txBody>
       </p:sp>
-      <p:sp>
-        <p:nvSpPr>
-          <p:cNvPr id="24" name="Rectangle 23"/>
+      <p:pic>
+        <p:nvPicPr>
+          <p:cNvPr id="27" name="Picture 26" descr="ppt_p4.png"/>
+          <p:cNvPicPr>
+            <a:picLocks noChangeAspect="1"/>
+          </p:cNvPicPr>
+          <p:nvPr/>
+        </p:nvPicPr>
+        <p:blipFill>
+          <a:blip r:embed="rId5"/>
+          <a:stretch>
+            <a:fillRect/>
+          </a:stretch>
+        </p:blipFill>
+        <p:spPr>
+          <a:xfrm>
+            <a:off x="10336032" y="4612896"/>
+            <a:ext cx="999936" cy="562463"/>
+          </a:xfrm>
+          <a:prstGeom prst="rect">
+            <a:avLst/>
+          </a:prstGeom>
+        </p:spPr>
+      </p:pic>
+      <p:sp>
+        <p:nvSpPr>
+          <p:cNvPr id="28" name="Rectangle 27"/>
           <p:cNvSpPr/>
           <p:nvPr/>
         </p:nvSpPr>
@@ -30100,9 +30258,7 @@
           <a:prstGeom prst="rect">
             <a:avLst/>
           </a:prstGeom>
-          <a:solidFill>
-            <a:srgbClr val="F2F4F8"/>
-          </a:solidFill>
+          <a:noFill/>
           <a:ln w="15240">
             <a:solidFill>
               <a:srgbClr val="2F6EBA"/>
@@ -30134,7 +30290,7 @@
       </p:sp>
       <p:sp>
         <p:nvSpPr>
-          <p:cNvPr id="25" name="Rectangle 24"/>
+          <p:cNvPr id="29" name="Rectangle 28"/>
           <p:cNvSpPr/>
           <p:nvPr/>
         </p:nvSpPr>
@@ -30178,7 +30334,7 @@
       </p:sp>
       <p:sp>
         <p:nvSpPr>
-          <p:cNvPr id="26" name="TextBox 25"/>
+          <p:cNvPr id="30" name="TextBox 29"/>
           <p:cNvSpPr txBox="1"/>
           <p:nvPr/>
         </p:nvSpPr>
@@ -30213,7 +30369,7 @@
       </p:sp>
       <p:sp>
         <p:nvSpPr>
-          <p:cNvPr id="27" name="TextBox 26"/>
+          <p:cNvPr id="31" name="TextBox 30"/>
           <p:cNvSpPr txBox="1"/>
           <p:nvPr/>
         </p:nvSpPr>
@@ -30248,7 +30404,7 @@
       </p:sp>
       <p:sp>
         <p:nvSpPr>
-          <p:cNvPr id="28" name="TextBox 27"/>
+          <p:cNvPr id="32" name="TextBox 31"/>
           <p:cNvSpPr txBox="1"/>
           <p:nvPr/>
         </p:nvSpPr>
@@ -30281,9 +30437,33 @@
           </a:p>
         </p:txBody>
       </p:sp>
-      <p:sp>
-        <p:nvSpPr>
-          <p:cNvPr id="29" name="Rectangle 28"/>
+      <p:pic>
+        <p:nvPicPr>
+          <p:cNvPr id="33" name="Picture 32" descr="ppt_p5.png"/>
+          <p:cNvPicPr>
+            <a:picLocks noChangeAspect="1"/>
+          </p:cNvPicPr>
+          <p:nvPr/>
+        </p:nvPicPr>
+        <p:blipFill>
+          <a:blip r:embed="rId6"/>
+          <a:stretch>
+            <a:fillRect/>
+          </a:stretch>
+        </p:blipFill>
+        <p:spPr>
+          <a:xfrm>
+            <a:off x="10336032" y="5520096"/>
+            <a:ext cx="999936" cy="562463"/>
+          </a:xfrm>
+          <a:prstGeom prst="rect">
+            <a:avLst/>
+          </a:prstGeom>
+        </p:spPr>
+      </p:pic>
+      <p:sp>
+        <p:nvSpPr>
+          <p:cNvPr id="34" name="Rectangle 33"/>
           <p:cNvSpPr/>
           <p:nvPr/>
         </p:nvSpPr>
@@ -30295,9 +30475,7 @@
           <a:prstGeom prst="rect">
             <a:avLst/>
           </a:prstGeom>
-          <a:solidFill>
-            <a:srgbClr val="F2F4F8"/>
-          </a:solidFill>
+          <a:noFill/>
           <a:ln w="15240">
             <a:solidFill>
               <a:srgbClr val="2F6EBA"/>
@@ -30329,7 +30507,7 @@
       </p:sp>
       <p:sp>
         <p:nvSpPr>
-          <p:cNvPr id="30" name="Rectangle 29"/>
+          <p:cNvPr id="35" name="Rectangle 34"/>
           <p:cNvSpPr/>
           <p:nvPr/>
         </p:nvSpPr>
@@ -30373,7 +30551,7 @@
       </p:sp>
       <p:sp>
         <p:nvSpPr>
-          <p:cNvPr id="31" name="Rectangle 30"/>
+          <p:cNvPr id="36" name="Rectangle 35"/>
           <p:cNvSpPr/>
           <p:nvPr/>
         </p:nvSpPr>
@@ -30417,7 +30595,7 @@
       </p:sp>
       <p:sp>
         <p:nvSpPr>
-          <p:cNvPr id="32" name="TextBox 31"/>
+          <p:cNvPr id="37" name="TextBox 36"/>
           <p:cNvSpPr txBox="1"/>
           <p:nvPr/>
         </p:nvSpPr>
@@ -30452,7 +30630,7 @@
       </p:sp>
       <p:sp>
         <p:nvSpPr>
-          <p:cNvPr id="33" name="TextBox 32"/>
+          <p:cNvPr id="38" name="TextBox 37"/>
           <p:cNvSpPr txBox="1"/>
           <p:nvPr/>
         </p:nvSpPr>
@@ -30849,9 +31027,33 @@
           </a:p>
         </p:txBody>
       </p:sp>
-      <p:sp>
-        <p:nvSpPr>
-          <p:cNvPr id="11" name="Rectangle 10"/>
+      <p:pic>
+        <p:nvPicPr>
+          <p:cNvPr id="11" name="Picture 10" descr="ppt_rq1.png"/>
+          <p:cNvPicPr>
+            <a:picLocks noChangeAspect="1"/>
+          </p:cNvPicPr>
+          <p:nvPr/>
+        </p:nvPicPr>
+        <p:blipFill>
+          <a:blip r:embed="rId2"/>
+          <a:stretch>
+            <a:fillRect/>
+          </a:stretch>
+        </p:blipFill>
+        <p:spPr>
+          <a:xfrm>
+            <a:off x="10388160" y="1872000"/>
+            <a:ext cx="967680" cy="544319"/>
+          </a:xfrm>
+          <a:prstGeom prst="rect">
+            <a:avLst/>
+          </a:prstGeom>
+        </p:spPr>
+      </p:pic>
+      <p:sp>
+        <p:nvSpPr>
+          <p:cNvPr id="12" name="Rectangle 11"/>
           <p:cNvSpPr/>
           <p:nvPr/>
         </p:nvSpPr>
@@ -30863,9 +31065,7 @@
           <a:prstGeom prst="rect">
             <a:avLst/>
           </a:prstGeom>
-          <a:solidFill>
-            <a:srgbClr val="F2F4F8"/>
-          </a:solidFill>
+          <a:noFill/>
           <a:ln w="15240">
             <a:solidFill>
               <a:srgbClr val="2F6EBA"/>
@@ -30897,7 +31097,7 @@
       </p:sp>
       <p:sp>
         <p:nvSpPr>
-          <p:cNvPr id="12" name="Rectangle 11"/>
+          <p:cNvPr id="13" name="Rectangle 12"/>
           <p:cNvSpPr/>
           <p:nvPr/>
         </p:nvSpPr>
@@ -30941,7 +31141,7 @@
       </p:sp>
       <p:sp>
         <p:nvSpPr>
-          <p:cNvPr id="13" name="Rounded Rectangle 12"/>
+          <p:cNvPr id="14" name="Rounded Rectangle 13"/>
           <p:cNvSpPr/>
           <p:nvPr/>
         </p:nvSpPr>
@@ -30989,7 +31189,7 @@
       </p:sp>
       <p:sp>
         <p:nvSpPr>
-          <p:cNvPr id="14" name="TextBox 13"/>
+          <p:cNvPr id="15" name="TextBox 14"/>
           <p:cNvSpPr txBox="1"/>
           <p:nvPr/>
         </p:nvSpPr>
@@ -31024,7 +31224,7 @@
       </p:sp>
       <p:sp>
         <p:nvSpPr>
-          <p:cNvPr id="15" name="TextBox 14"/>
+          <p:cNvPr id="16" name="TextBox 15"/>
           <p:cNvSpPr txBox="1"/>
           <p:nvPr/>
         </p:nvSpPr>
@@ -31059,7 +31259,7 @@
       </p:sp>
       <p:sp>
         <p:nvSpPr>
-          <p:cNvPr id="16" name="TextBox 15"/>
+          <p:cNvPr id="17" name="TextBox 16"/>
           <p:cNvSpPr txBox="1"/>
           <p:nvPr/>
         </p:nvSpPr>
@@ -31094,7 +31294,7 @@
       </p:sp>
       <p:sp>
         <p:nvSpPr>
-          <p:cNvPr id="17" name="TextBox 16"/>
+          <p:cNvPr id="18" name="TextBox 17"/>
           <p:cNvSpPr txBox="1"/>
           <p:nvPr/>
         </p:nvSpPr>
@@ -31127,9 +31327,33 @@
           </a:p>
         </p:txBody>
       </p:sp>
-      <p:sp>
-        <p:nvSpPr>
-          <p:cNvPr id="18" name="Rectangle 17"/>
+      <p:pic>
+        <p:nvPicPr>
+          <p:cNvPr id="19" name="Picture 18" descr="ppt_rq2.png"/>
+          <p:cNvPicPr>
+            <a:picLocks noChangeAspect="1"/>
+          </p:cNvPicPr>
+          <p:nvPr/>
+        </p:nvPicPr>
+        <p:blipFill>
+          <a:blip r:embed="rId3"/>
+          <a:stretch>
+            <a:fillRect/>
+          </a:stretch>
+        </p:blipFill>
+        <p:spPr>
+          <a:xfrm>
+            <a:off x="10388160" y="2779200"/>
+            <a:ext cx="967680" cy="544319"/>
+          </a:xfrm>
+          <a:prstGeom prst="rect">
+            <a:avLst/>
+          </a:prstGeom>
+        </p:spPr>
+      </p:pic>
+      <p:sp>
+        <p:nvSpPr>
+          <p:cNvPr id="20" name="Rectangle 19"/>
           <p:cNvSpPr/>
           <p:nvPr/>
         </p:nvSpPr>
@@ -31141,9 +31365,7 @@
           <a:prstGeom prst="rect">
             <a:avLst/>
           </a:prstGeom>
-          <a:solidFill>
-            <a:srgbClr val="F2F4F8"/>
-          </a:solidFill>
+          <a:noFill/>
           <a:ln w="15240">
             <a:solidFill>
               <a:srgbClr val="2F6EBA"/>
@@ -31175,7 +31397,7 @@
       </p:sp>
       <p:sp>
         <p:nvSpPr>
-          <p:cNvPr id="19" name="Rectangle 18"/>
+          <p:cNvPr id="21" name="Rectangle 20"/>
           <p:cNvSpPr/>
           <p:nvPr/>
         </p:nvSpPr>
@@ -31219,7 +31441,7 @@
       </p:sp>
       <p:sp>
         <p:nvSpPr>
-          <p:cNvPr id="20" name="Rounded Rectangle 19"/>
+          <p:cNvPr id="22" name="Rounded Rectangle 21"/>
           <p:cNvSpPr/>
           <p:nvPr/>
         </p:nvSpPr>
@@ -31267,7 +31489,7 @@
       </p:sp>
       <p:sp>
         <p:nvSpPr>
-          <p:cNvPr id="21" name="TextBox 20"/>
+          <p:cNvPr id="23" name="TextBox 22"/>
           <p:cNvSpPr txBox="1"/>
           <p:nvPr/>
         </p:nvSpPr>
@@ -31302,7 +31524,7 @@
       </p:sp>
       <p:sp>
         <p:nvSpPr>
-          <p:cNvPr id="22" name="TextBox 21"/>
+          <p:cNvPr id="24" name="TextBox 23"/>
           <p:cNvSpPr txBox="1"/>
           <p:nvPr/>
         </p:nvSpPr>
@@ -31337,7 +31559,7 @@
       </p:sp>
       <p:sp>
         <p:nvSpPr>
-          <p:cNvPr id="23" name="TextBox 22"/>
+          <p:cNvPr id="25" name="TextBox 24"/>
           <p:cNvSpPr txBox="1"/>
           <p:nvPr/>
         </p:nvSpPr>
@@ -31372,7 +31594,7 @@
       </p:sp>
       <p:sp>
         <p:nvSpPr>
-          <p:cNvPr id="24" name="TextBox 23"/>
+          <p:cNvPr id="26" name="TextBox 25"/>
           <p:cNvSpPr txBox="1"/>
           <p:nvPr/>
         </p:nvSpPr>
@@ -31405,9 +31627,33 @@
           </a:p>
         </p:txBody>
       </p:sp>
-      <p:sp>
-        <p:nvSpPr>
-          <p:cNvPr id="25" name="Rectangle 24"/>
+      <p:pic>
+        <p:nvPicPr>
+          <p:cNvPr id="27" name="Picture 26" descr="ppt_rq3.png"/>
+          <p:cNvPicPr>
+            <a:picLocks noChangeAspect="1"/>
+          </p:cNvPicPr>
+          <p:nvPr/>
+        </p:nvPicPr>
+        <p:blipFill>
+          <a:blip r:embed="rId4"/>
+          <a:stretch>
+            <a:fillRect/>
+          </a:stretch>
+        </p:blipFill>
+        <p:spPr>
+          <a:xfrm>
+            <a:off x="10388160" y="3686400"/>
+            <a:ext cx="967680" cy="544319"/>
+          </a:xfrm>
+          <a:prstGeom prst="rect">
+            <a:avLst/>
+          </a:prstGeom>
+        </p:spPr>
+      </p:pic>
+      <p:sp>
+        <p:nvSpPr>
+          <p:cNvPr id="28" name="Rectangle 27"/>
           <p:cNvSpPr/>
           <p:nvPr/>
         </p:nvSpPr>
@@ -31419,9 +31665,7 @@
           <a:prstGeom prst="rect">
             <a:avLst/>
           </a:prstGeom>
-          <a:solidFill>
-            <a:srgbClr val="F2F4F8"/>
-          </a:solidFill>
+          <a:noFill/>
           <a:ln w="15240">
             <a:solidFill>
               <a:srgbClr val="2F6EBA"/>
@@ -31453,7 +31697,7 @@
       </p:sp>
       <p:sp>
         <p:nvSpPr>
-          <p:cNvPr id="26" name="Rectangle 25"/>
+          <p:cNvPr id="29" name="Rectangle 28"/>
           <p:cNvSpPr/>
           <p:nvPr/>
         </p:nvSpPr>
@@ -31497,7 +31741,7 @@
       </p:sp>
       <p:sp>
         <p:nvSpPr>
-          <p:cNvPr id="27" name="Rounded Rectangle 26"/>
+          <p:cNvPr id="30" name="Rounded Rectangle 29"/>
           <p:cNvSpPr/>
           <p:nvPr/>
         </p:nvSpPr>
@@ -31545,7 +31789,7 @@
       </p:sp>
       <p:sp>
         <p:nvSpPr>
-          <p:cNvPr id="28" name="TextBox 27"/>
+          <p:cNvPr id="31" name="TextBox 30"/>
           <p:cNvSpPr txBox="1"/>
           <p:nvPr/>
         </p:nvSpPr>
@@ -31580,7 +31824,7 @@
       </p:sp>
       <p:sp>
         <p:nvSpPr>
-          <p:cNvPr id="29" name="TextBox 28"/>
+          <p:cNvPr id="32" name="TextBox 31"/>
           <p:cNvSpPr txBox="1"/>
           <p:nvPr/>
         </p:nvSpPr>
@@ -31615,7 +31859,7 @@
       </p:sp>
       <p:sp>
         <p:nvSpPr>
-          <p:cNvPr id="30" name="TextBox 29"/>
+          <p:cNvPr id="33" name="TextBox 32"/>
           <p:cNvSpPr txBox="1"/>
           <p:nvPr/>
         </p:nvSpPr>
@@ -31650,7 +31894,7 @@
       </p:sp>
       <p:sp>
         <p:nvSpPr>
-          <p:cNvPr id="31" name="TextBox 30"/>
+          <p:cNvPr id="34" name="TextBox 33"/>
           <p:cNvSpPr txBox="1"/>
           <p:nvPr/>
         </p:nvSpPr>
@@ -31683,9 +31927,33 @@
           </a:p>
         </p:txBody>
       </p:sp>
-      <p:sp>
-        <p:nvSpPr>
-          <p:cNvPr id="32" name="Rectangle 31"/>
+      <p:pic>
+        <p:nvPicPr>
+          <p:cNvPr id="35" name="Picture 34" descr="ppt_rq4.png"/>
+          <p:cNvPicPr>
+            <a:picLocks noChangeAspect="1"/>
+          </p:cNvPicPr>
+          <p:nvPr/>
+        </p:nvPicPr>
+        <p:blipFill>
+          <a:blip r:embed="rId5"/>
+          <a:stretch>
+            <a:fillRect/>
+          </a:stretch>
+        </p:blipFill>
+        <p:spPr>
+          <a:xfrm>
+            <a:off x="10388160" y="4593600"/>
+            <a:ext cx="967680" cy="544319"/>
+          </a:xfrm>
+          <a:prstGeom prst="rect">
+            <a:avLst/>
+          </a:prstGeom>
+        </p:spPr>
+      </p:pic>
+      <p:sp>
+        <p:nvSpPr>
+          <p:cNvPr id="36" name="Rectangle 35"/>
           <p:cNvSpPr/>
           <p:nvPr/>
         </p:nvSpPr>
@@ -31697,9 +31965,7 @@
           <a:prstGeom prst="rect">
             <a:avLst/>
           </a:prstGeom>
-          <a:solidFill>
-            <a:srgbClr val="F2F4F8"/>
-          </a:solidFill>
+          <a:noFill/>
           <a:ln w="15240">
             <a:solidFill>
               <a:srgbClr val="2F6EBA"/>
@@ -31731,7 +31997,7 @@
       </p:sp>
       <p:sp>
         <p:nvSpPr>
-          <p:cNvPr id="33" name="Rectangle 32"/>
+          <p:cNvPr id="37" name="Rectangle 36"/>
           <p:cNvSpPr/>
           <p:nvPr/>
         </p:nvSpPr>
@@ -31775,7 +32041,7 @@
       </p:sp>
       <p:sp>
         <p:nvSpPr>
-          <p:cNvPr id="34" name="Rounded Rectangle 33"/>
+          <p:cNvPr id="38" name="Rounded Rectangle 37"/>
           <p:cNvSpPr/>
           <p:nvPr/>
         </p:nvSpPr>
@@ -31823,7 +32089,7 @@
       </p:sp>
       <p:sp>
         <p:nvSpPr>
-          <p:cNvPr id="35" name="TextBox 34"/>
+          <p:cNvPr id="39" name="TextBox 38"/>
           <p:cNvSpPr txBox="1"/>
           <p:nvPr/>
         </p:nvSpPr>
@@ -31858,7 +32124,7 @@
       </p:sp>
       <p:sp>
         <p:nvSpPr>
-          <p:cNvPr id="36" name="TextBox 35"/>
+          <p:cNvPr id="40" name="TextBox 39"/>
           <p:cNvSpPr txBox="1"/>
           <p:nvPr/>
         </p:nvSpPr>
@@ -31893,7 +32159,7 @@
       </p:sp>
       <p:sp>
         <p:nvSpPr>
-          <p:cNvPr id="37" name="TextBox 36"/>
+          <p:cNvPr id="41" name="TextBox 40"/>
           <p:cNvSpPr txBox="1"/>
           <p:nvPr/>
         </p:nvSpPr>
@@ -31928,7 +32194,7 @@
       </p:sp>
       <p:sp>
         <p:nvSpPr>
-          <p:cNvPr id="38" name="TextBox 37"/>
+          <p:cNvPr id="42" name="TextBox 41"/>
           <p:cNvSpPr txBox="1"/>
           <p:nvPr/>
         </p:nvSpPr>
@@ -31961,9 +32227,33 @@
           </a:p>
         </p:txBody>
       </p:sp>
-      <p:sp>
-        <p:nvSpPr>
-          <p:cNvPr id="39" name="Rectangle 38"/>
+      <p:pic>
+        <p:nvPicPr>
+          <p:cNvPr id="43" name="Picture 42" descr="ppt_rq5.png"/>
+          <p:cNvPicPr>
+            <a:picLocks noChangeAspect="1"/>
+          </p:cNvPicPr>
+          <p:nvPr/>
+        </p:nvPicPr>
+        <p:blipFill>
+          <a:blip r:embed="rId6"/>
+          <a:stretch>
+            <a:fillRect/>
+          </a:stretch>
+        </p:blipFill>
+        <p:spPr>
+          <a:xfrm>
+            <a:off x="10388160" y="5500800"/>
+            <a:ext cx="967680" cy="544319"/>
+          </a:xfrm>
+          <a:prstGeom prst="rect">
+            <a:avLst/>
+          </a:prstGeom>
+        </p:spPr>
+      </p:pic>
+      <p:sp>
+        <p:nvSpPr>
+          <p:cNvPr id="44" name="Rectangle 43"/>
           <p:cNvSpPr/>
           <p:nvPr/>
         </p:nvSpPr>
@@ -31975,9 +32265,7 @@
           <a:prstGeom prst="rect">
             <a:avLst/>
           </a:prstGeom>
-          <a:solidFill>
-            <a:srgbClr val="F2F4F8"/>
-          </a:solidFill>
+          <a:noFill/>
           <a:ln w="15240">
             <a:solidFill>
               <a:srgbClr val="2F6EBA"/>
@@ -32009,7 +32297,7 @@
       </p:sp>
       <p:sp>
         <p:nvSpPr>
-          <p:cNvPr id="40" name="Rectangle 39"/>
+          <p:cNvPr id="45" name="Rectangle 44"/>
           <p:cNvSpPr/>
           <p:nvPr/>
         </p:nvSpPr>
@@ -32053,7 +32341,7 @@
       </p:sp>
       <p:sp>
         <p:nvSpPr>
-          <p:cNvPr id="41" name="Rectangle 40"/>
+          <p:cNvPr id="46" name="Rectangle 45"/>
           <p:cNvSpPr/>
           <p:nvPr/>
         </p:nvSpPr>
@@ -32097,7 +32385,7 @@
       </p:sp>
       <p:sp>
         <p:nvSpPr>
-          <p:cNvPr id="42" name="TextBox 41"/>
+          <p:cNvPr id="47" name="TextBox 46"/>
           <p:cNvSpPr txBox="1"/>
           <p:nvPr/>
         </p:nvSpPr>
@@ -32132,7 +32420,7 @@
       </p:sp>
       <p:sp>
         <p:nvSpPr>
-          <p:cNvPr id="43" name="TextBox 42"/>
+          <p:cNvPr id="48" name="TextBox 47"/>
           <p:cNvSpPr txBox="1"/>
           <p:nvPr/>
         </p:nvSpPr>

--- a/汇报PPT/最终汇报成果.pptx
+++ b/汇报PPT/最终汇报成果.pptx
@@ -29508,7 +29508,7 @@
         <p:spPr>
           <a:xfrm>
             <a:off x="1512000" y="1792799"/>
-            <a:ext cx="8568000" cy="288000"/>
+            <a:ext cx="7560000" cy="288000"/>
           </a:xfrm>
           <a:prstGeom prst="rect">
             <a:avLst/>
@@ -29543,7 +29543,7 @@
         <p:spPr>
           <a:xfrm>
             <a:off x="1512000" y="2070000"/>
-            <a:ext cx="8568000" cy="403199"/>
+            <a:ext cx="7560000" cy="403199"/>
           </a:xfrm>
           <a:prstGeom prst="rect">
             <a:avLst/>
@@ -29585,8 +29585,8 @@
         </p:blipFill>
         <p:spPr>
           <a:xfrm>
-            <a:off x="10336032" y="1891295"/>
-            <a:ext cx="999936" cy="562463"/>
+            <a:off x="9488304" y="1891295"/>
+            <a:ext cx="1687391" cy="562463"/>
           </a:xfrm>
           <a:prstGeom prst="rect">
             <a:avLst/>
@@ -29601,8 +29601,8 @@
         </p:nvSpPr>
         <p:spPr>
           <a:xfrm>
-            <a:off x="10260000" y="1891295"/>
-            <a:ext cx="1152000" cy="562463"/>
+            <a:off x="9252000" y="1891295"/>
+            <a:ext cx="2160000" cy="562463"/>
           </a:xfrm>
           <a:prstGeom prst="rect">
             <a:avLst/>
@@ -29725,7 +29725,7 @@
         <p:spPr>
           <a:xfrm>
             <a:off x="1512000" y="2699999"/>
-            <a:ext cx="8568000" cy="288000"/>
+            <a:ext cx="7560000" cy="288000"/>
           </a:xfrm>
           <a:prstGeom prst="rect">
             <a:avLst/>
@@ -29760,7 +29760,7 @@
         <p:spPr>
           <a:xfrm>
             <a:off x="1512000" y="2977200"/>
-            <a:ext cx="8568000" cy="403199"/>
+            <a:ext cx="7560000" cy="403199"/>
           </a:xfrm>
           <a:prstGeom prst="rect">
             <a:avLst/>
@@ -29802,8 +29802,8 @@
         </p:blipFill>
         <p:spPr>
           <a:xfrm>
-            <a:off x="10336032" y="2798495"/>
-            <a:ext cx="999936" cy="562463"/>
+            <a:off x="9488304" y="2798495"/>
+            <a:ext cx="1687391" cy="562463"/>
           </a:xfrm>
           <a:prstGeom prst="rect">
             <a:avLst/>
@@ -29818,8 +29818,8 @@
         </p:nvSpPr>
         <p:spPr>
           <a:xfrm>
-            <a:off x="10260000" y="2798495"/>
-            <a:ext cx="1152000" cy="562463"/>
+            <a:off x="9252000" y="2798495"/>
+            <a:ext cx="2160000" cy="562463"/>
           </a:xfrm>
           <a:prstGeom prst="rect">
             <a:avLst/>
@@ -29942,7 +29942,7 @@
         <p:spPr>
           <a:xfrm>
             <a:off x="1512000" y="3607200"/>
-            <a:ext cx="8568000" cy="288000"/>
+            <a:ext cx="7560000" cy="288000"/>
           </a:xfrm>
           <a:prstGeom prst="rect">
             <a:avLst/>
@@ -29977,7 +29977,7 @@
         <p:spPr>
           <a:xfrm>
             <a:off x="1512000" y="3884399"/>
-            <a:ext cx="8568000" cy="403199"/>
+            <a:ext cx="7560000" cy="403199"/>
           </a:xfrm>
           <a:prstGeom prst="rect">
             <a:avLst/>
@@ -30019,8 +30019,8 @@
         </p:blipFill>
         <p:spPr>
           <a:xfrm>
-            <a:off x="10336032" y="3705696"/>
-            <a:ext cx="999936" cy="562463"/>
+            <a:off x="9488304" y="3705696"/>
+            <a:ext cx="1687391" cy="562463"/>
           </a:xfrm>
           <a:prstGeom prst="rect">
             <a:avLst/>
@@ -30035,8 +30035,8 @@
         </p:nvSpPr>
         <p:spPr>
           <a:xfrm>
-            <a:off x="10260000" y="3705696"/>
-            <a:ext cx="1152000" cy="562463"/>
+            <a:off x="9252000" y="3705696"/>
+            <a:ext cx="2160000" cy="562463"/>
           </a:xfrm>
           <a:prstGeom prst="rect">
             <a:avLst/>
@@ -30159,7 +30159,7 @@
         <p:spPr>
           <a:xfrm>
             <a:off x="1512000" y="4514400"/>
-            <a:ext cx="8568000" cy="288000"/>
+            <a:ext cx="7560000" cy="288000"/>
           </a:xfrm>
           <a:prstGeom prst="rect">
             <a:avLst/>
@@ -30194,7 +30194,7 @@
         <p:spPr>
           <a:xfrm>
             <a:off x="1512000" y="4791600"/>
-            <a:ext cx="8568000" cy="403199"/>
+            <a:ext cx="7560000" cy="403199"/>
           </a:xfrm>
           <a:prstGeom prst="rect">
             <a:avLst/>
@@ -30236,8 +30236,8 @@
         </p:blipFill>
         <p:spPr>
           <a:xfrm>
-            <a:off x="10336032" y="4612896"/>
-            <a:ext cx="999936" cy="562463"/>
+            <a:off x="9488304" y="4612896"/>
+            <a:ext cx="1687391" cy="562463"/>
           </a:xfrm>
           <a:prstGeom prst="rect">
             <a:avLst/>
@@ -30252,8 +30252,8 @@
         </p:nvSpPr>
         <p:spPr>
           <a:xfrm>
-            <a:off x="10260000" y="4612896"/>
-            <a:ext cx="1152000" cy="562463"/>
+            <a:off x="9252000" y="4612896"/>
+            <a:ext cx="2160000" cy="562463"/>
           </a:xfrm>
           <a:prstGeom prst="rect">
             <a:avLst/>
@@ -30376,7 +30376,7 @@
         <p:spPr>
           <a:xfrm>
             <a:off x="1512000" y="5421600"/>
-            <a:ext cx="8568000" cy="288000"/>
+            <a:ext cx="7560000" cy="288000"/>
           </a:xfrm>
           <a:prstGeom prst="rect">
             <a:avLst/>
@@ -30411,7 +30411,7 @@
         <p:spPr>
           <a:xfrm>
             <a:off x="1512000" y="5698799"/>
-            <a:ext cx="8568000" cy="403199"/>
+            <a:ext cx="7560000" cy="403199"/>
           </a:xfrm>
           <a:prstGeom prst="rect">
             <a:avLst/>
@@ -30453,8 +30453,8 @@
         </p:blipFill>
         <p:spPr>
           <a:xfrm>
-            <a:off x="10336032" y="5520096"/>
-            <a:ext cx="999936" cy="562463"/>
+            <a:off x="9488304" y="5520096"/>
+            <a:ext cx="1687391" cy="562463"/>
           </a:xfrm>
           <a:prstGeom prst="rect">
             <a:avLst/>
@@ -30469,8 +30469,8 @@
         </p:nvSpPr>
         <p:spPr>
           <a:xfrm>
-            <a:off x="10260000" y="5520096"/>
-            <a:ext cx="1152000" cy="562463"/>
+            <a:off x="9252000" y="5520096"/>
+            <a:ext cx="2160000" cy="562463"/>
           </a:xfrm>
           <a:prstGeom prst="rect">
             <a:avLst/>
@@ -30966,7 +30966,7 @@
         <p:spPr>
           <a:xfrm>
             <a:off x="2664000" y="1782000"/>
-            <a:ext cx="7523999" cy="324000"/>
+            <a:ext cx="6443999" cy="324000"/>
           </a:xfrm>
           <a:prstGeom prst="rect">
             <a:avLst/>
@@ -31001,7 +31001,7 @@
         <p:spPr>
           <a:xfrm>
             <a:off x="2664000" y="2095200"/>
-            <a:ext cx="7523999" cy="367199"/>
+            <a:ext cx="6443999" cy="367199"/>
           </a:xfrm>
           <a:prstGeom prst="rect">
             <a:avLst/>
@@ -31043,8 +31043,8 @@
         </p:blipFill>
         <p:spPr>
           <a:xfrm>
-            <a:off x="10388160" y="1872000"/>
-            <a:ext cx="967680" cy="544319"/>
+            <a:off x="9515520" y="1872000"/>
+            <a:ext cx="1632959" cy="544319"/>
           </a:xfrm>
           <a:prstGeom prst="rect">
             <a:avLst/>
@@ -31059,8 +31059,8 @@
         </p:nvSpPr>
         <p:spPr>
           <a:xfrm>
-            <a:off x="10332000" y="1872000"/>
-            <a:ext cx="1080000" cy="544319"/>
+            <a:off x="9252000" y="1872000"/>
+            <a:ext cx="2160000" cy="544319"/>
           </a:xfrm>
           <a:prstGeom prst="rect">
             <a:avLst/>
@@ -31266,7 +31266,7 @@
         <p:spPr>
           <a:xfrm>
             <a:off x="2664000" y="2689200"/>
-            <a:ext cx="7523999" cy="324000"/>
+            <a:ext cx="6443999" cy="324000"/>
           </a:xfrm>
           <a:prstGeom prst="rect">
             <a:avLst/>
@@ -31301,7 +31301,7 @@
         <p:spPr>
           <a:xfrm>
             <a:off x="2664000" y="3002400"/>
-            <a:ext cx="7523999" cy="367199"/>
+            <a:ext cx="6443999" cy="367199"/>
           </a:xfrm>
           <a:prstGeom prst="rect">
             <a:avLst/>
@@ -31343,8 +31343,8 @@
         </p:blipFill>
         <p:spPr>
           <a:xfrm>
-            <a:off x="10388160" y="2779200"/>
-            <a:ext cx="967680" cy="544319"/>
+            <a:off x="9515520" y="2779200"/>
+            <a:ext cx="1632959" cy="544319"/>
           </a:xfrm>
           <a:prstGeom prst="rect">
             <a:avLst/>
@@ -31359,8 +31359,8 @@
         </p:nvSpPr>
         <p:spPr>
           <a:xfrm>
-            <a:off x="10332000" y="2779200"/>
-            <a:ext cx="1080000" cy="544319"/>
+            <a:off x="9252000" y="2779200"/>
+            <a:ext cx="2160000" cy="544319"/>
           </a:xfrm>
           <a:prstGeom prst="rect">
             <a:avLst/>
@@ -31566,7 +31566,7 @@
         <p:spPr>
           <a:xfrm>
             <a:off x="2664000" y="3596400"/>
-            <a:ext cx="7523999" cy="324000"/>
+            <a:ext cx="6443999" cy="324000"/>
           </a:xfrm>
           <a:prstGeom prst="rect">
             <a:avLst/>
@@ -31601,7 +31601,7 @@
         <p:spPr>
           <a:xfrm>
             <a:off x="2664000" y="3909600"/>
-            <a:ext cx="7523999" cy="367199"/>
+            <a:ext cx="6443999" cy="367199"/>
           </a:xfrm>
           <a:prstGeom prst="rect">
             <a:avLst/>
@@ -31643,8 +31643,8 @@
         </p:blipFill>
         <p:spPr>
           <a:xfrm>
-            <a:off x="10388160" y="3686400"/>
-            <a:ext cx="967680" cy="544319"/>
+            <a:off x="9515520" y="3686400"/>
+            <a:ext cx="1632959" cy="544319"/>
           </a:xfrm>
           <a:prstGeom prst="rect">
             <a:avLst/>
@@ -31659,8 +31659,8 @@
         </p:nvSpPr>
         <p:spPr>
           <a:xfrm>
-            <a:off x="10332000" y="3686400"/>
-            <a:ext cx="1080000" cy="544319"/>
+            <a:off x="9252000" y="3686400"/>
+            <a:ext cx="2160000" cy="544319"/>
           </a:xfrm>
           <a:prstGeom prst="rect">
             <a:avLst/>
@@ -31866,7 +31866,7 @@
         <p:spPr>
           <a:xfrm>
             <a:off x="2664000" y="4503600"/>
-            <a:ext cx="7523999" cy="324000"/>
+            <a:ext cx="6443999" cy="324000"/>
           </a:xfrm>
           <a:prstGeom prst="rect">
             <a:avLst/>
@@ -31901,7 +31901,7 @@
         <p:spPr>
           <a:xfrm>
             <a:off x="2664000" y="4816800"/>
-            <a:ext cx="7523999" cy="367199"/>
+            <a:ext cx="6443999" cy="367199"/>
           </a:xfrm>
           <a:prstGeom prst="rect">
             <a:avLst/>
@@ -31943,8 +31943,8 @@
         </p:blipFill>
         <p:spPr>
           <a:xfrm>
-            <a:off x="10388160" y="4593600"/>
-            <a:ext cx="967680" cy="544319"/>
+            <a:off x="9515520" y="4593600"/>
+            <a:ext cx="1632959" cy="544319"/>
           </a:xfrm>
           <a:prstGeom prst="rect">
             <a:avLst/>
@@ -31959,8 +31959,8 @@
         </p:nvSpPr>
         <p:spPr>
           <a:xfrm>
-            <a:off x="10332000" y="4593600"/>
-            <a:ext cx="1080000" cy="544319"/>
+            <a:off x="9252000" y="4593600"/>
+            <a:ext cx="2160000" cy="544319"/>
           </a:xfrm>
           <a:prstGeom prst="rect">
             <a:avLst/>
@@ -32166,7 +32166,7 @@
         <p:spPr>
           <a:xfrm>
             <a:off x="2664000" y="5410800"/>
-            <a:ext cx="7523999" cy="324000"/>
+            <a:ext cx="6443999" cy="324000"/>
           </a:xfrm>
           <a:prstGeom prst="rect">
             <a:avLst/>
@@ -32201,7 +32201,7 @@
         <p:spPr>
           <a:xfrm>
             <a:off x="2664000" y="5723999"/>
-            <a:ext cx="7523999" cy="367199"/>
+            <a:ext cx="6443999" cy="367199"/>
           </a:xfrm>
           <a:prstGeom prst="rect">
             <a:avLst/>
@@ -32243,8 +32243,8 @@
         </p:blipFill>
         <p:spPr>
           <a:xfrm>
-            <a:off x="10388160" y="5500800"/>
-            <a:ext cx="967680" cy="544319"/>
+            <a:off x="9515520" y="5500800"/>
+            <a:ext cx="1632959" cy="544319"/>
           </a:xfrm>
           <a:prstGeom prst="rect">
             <a:avLst/>
@@ -32259,8 +32259,8 @@
         </p:nvSpPr>
         <p:spPr>
           <a:xfrm>
-            <a:off x="10332000" y="5500800"/>
-            <a:ext cx="1080000" cy="544319"/>
+            <a:off x="9252000" y="5500800"/>
+            <a:ext cx="2160000" cy="544319"/>
           </a:xfrm>
           <a:prstGeom prst="rect">
             <a:avLst/>

--- a/汇报PPT/最终汇报成果.pptx
+++ b/汇报PPT/最终汇报成果.pptx
@@ -4,37 +4,40 @@
   <p:sldMasterIdLst>
     <p:sldMasterId id="2147483648" r:id="rId1"/>
   </p:sldMasterIdLst>
+  <p:notesMasterIdLst>
+    <p:notesMasterId r:id="rId30"/>
+  </p:notesMasterIdLst>
   <p:sldIdLst>
-    <p:sldId id="256" r:id="rId7"/>
-    <p:sldId id="257" r:id="rId9"/>
-    <p:sldId id="258" r:id="rId10"/>
-    <p:sldId id="259" r:id="rId11"/>
-    <p:sldId id="260" r:id="rId12"/>
-    <p:sldId id="261" r:id="rId13"/>
-    <p:sldId id="262" r:id="rId14"/>
-    <p:sldId id="263" r:id="rId15"/>
-    <p:sldId id="264" r:id="rId16"/>
-    <p:sldId id="265" r:id="rId17"/>
-    <p:sldId id="266" r:id="rId18"/>
-    <p:sldId id="267" r:id="rId19"/>
-    <p:sldId id="268" r:id="rId20"/>
-    <p:sldId id="269" r:id="rId21"/>
-    <p:sldId id="270" r:id="rId22"/>
-    <p:sldId id="271" r:id="rId23"/>
-    <p:sldId id="272" r:id="rId24"/>
-    <p:sldId id="273" r:id="rId25"/>
-    <p:sldId id="274" r:id="rId26"/>
-    <p:sldId id="275" r:id="rId27"/>
-    <p:sldId id="276" r:id="rId28"/>
-    <p:sldId id="277" r:id="rId29"/>
-    <p:sldId id="278" r:id="rId30"/>
-    <p:sldId id="279" r:id="rId31"/>
-    <p:sldId id="280" r:id="rId32"/>
-    <p:sldId id="281" r:id="rId33"/>
-    <p:sldId id="282" r:id="rId34"/>
-    <p:sldId id="283" r:id="rId35"/>
+    <p:sldId id="256" r:id="rId2"/>
+    <p:sldId id="257" r:id="rId3"/>
+    <p:sldId id="258" r:id="rId4"/>
+    <p:sldId id="259" r:id="rId5"/>
+    <p:sldId id="260" r:id="rId6"/>
+    <p:sldId id="261" r:id="rId7"/>
+    <p:sldId id="262" r:id="rId8"/>
+    <p:sldId id="263" r:id="rId9"/>
+    <p:sldId id="264" r:id="rId10"/>
+    <p:sldId id="265" r:id="rId11"/>
+    <p:sldId id="266" r:id="rId12"/>
+    <p:sldId id="267" r:id="rId13"/>
+    <p:sldId id="268" r:id="rId14"/>
+    <p:sldId id="269" r:id="rId15"/>
+    <p:sldId id="270" r:id="rId16"/>
+    <p:sldId id="271" r:id="rId17"/>
+    <p:sldId id="272" r:id="rId18"/>
+    <p:sldId id="273" r:id="rId19"/>
+    <p:sldId id="274" r:id="rId20"/>
+    <p:sldId id="275" r:id="rId21"/>
+    <p:sldId id="276" r:id="rId22"/>
+    <p:sldId id="277" r:id="rId23"/>
+    <p:sldId id="278" r:id="rId24"/>
+    <p:sldId id="279" r:id="rId25"/>
+    <p:sldId id="280" r:id="rId26"/>
+    <p:sldId id="281" r:id="rId27"/>
+    <p:sldId id="282" r:id="rId28"/>
+    <p:sldId id="283" r:id="rId29"/>
   </p:sldIdLst>
-  <p:sldSz cx="12193200" cy="6858000" type="screen4x3"/>
+  <p:sldSz cx="12193588" cy="6858000"/>
   <p:notesSz cx="6858000" cy="9144000"/>
   <p:defaultTextStyle>
     <a:defPPr>
@@ -131,11 +134,27 @@
       </a:defRPr>
     </a:lvl9pPr>
   </p:defaultTextStyle>
+  <p:extLst>
+    <p:ext uri="{EFAFB233-063F-42B5-8137-9DF3F51BA10A}">
+      <p15:sldGuideLst xmlns:p15="http://schemas.microsoft.com/office/powerpoint/2012/main">
+        <p15:guide id="1" orient="horz" pos="2160">
+          <p15:clr>
+            <a:srgbClr val="A4A3A4"/>
+          </p15:clr>
+        </p15:guide>
+        <p15:guide id="2" pos="2880">
+          <p15:clr>
+            <a:srgbClr val="A4A3A4"/>
+          </p15:clr>
+        </p15:guide>
+      </p15:sldGuideLst>
+    </p:ext>
+  </p:extLst>
 </p:presentation>
 </file>
 
 <file path=ppt/notesMasters/notesMaster1.xml><?xml version="1.0" encoding="utf-8"?>
-<p:notesMaster xmlns:a="http://schemas.openxmlformats.org/drawingml/2006/main" xmlns:p="http://schemas.openxmlformats.org/presentationml/2006/main" xmlns:r="http://schemas.openxmlformats.org/officeDocument/2006/relationships">
+<p:notesMaster xmlns:a="http://schemas.openxmlformats.org/drawingml/2006/main" xmlns:r="http://schemas.openxmlformats.org/officeDocument/2006/relationships" xmlns:p="http://schemas.openxmlformats.org/presentationml/2006/main">
   <p:cSld>
     <p:bg>
       <p:bgRef idx="1001">
@@ -156,241 +175,16 @@
           <a:chExt cx="0" cy="0"/>
         </a:xfrm>
       </p:grpSpPr>
-      <p:sp>
-        <p:nvSpPr>
-          <p:cNvPr id="2" name="Header Placeholder 1"/>
-          <p:cNvSpPr>
-            <a:spLocks noGrp="1"/>
-          </p:cNvSpPr>
-          <p:nvPr>
-            <p:ph type="hdr" sz="quarter"/>
-          </p:nvPr>
-        </p:nvSpPr>
-        <p:spPr>
-          <a:xfrm>
-            <a:off x="0" y="0"/>
-            <a:ext cx="2971800" cy="457200"/>
-          </a:xfrm>
-          <a:prstGeom prst="rect">
-            <a:avLst/>
-          </a:prstGeom>
-        </p:spPr>
-        <p:txBody>
-          <a:bodyPr vert="horz" lIns="91440" tIns="45720" rIns="91440" bIns="45720" rtlCol="0"/>
-          <a:lstStyle>
-            <a:lvl1pPr algn="l">
-              <a:defRPr sz="1200"/>
-            </a:lvl1pPr>
-          </a:lstStyle>
-          <a:p>
-            <a:endParaRPr lang="en-US"/>
-          </a:p>
-        </p:txBody>
-      </p:sp>
-      <p:sp>
-        <p:nvSpPr>
-          <p:cNvPr id="3" name="Date Placeholder 2"/>
-          <p:cNvSpPr>
-            <a:spLocks noGrp="1"/>
-          </p:cNvSpPr>
-          <p:nvPr>
-            <p:ph type="dt" idx="1"/>
-          </p:nvPr>
-        </p:nvSpPr>
-        <p:spPr>
-          <a:xfrm>
-            <a:off x="3884613" y="0"/>
-            <a:ext cx="2971800" cy="457200"/>
-          </a:xfrm>
-          <a:prstGeom prst="rect">
-            <a:avLst/>
-          </a:prstGeom>
-        </p:spPr>
-        <p:txBody>
-          <a:bodyPr vert="horz" lIns="91440" tIns="45720" rIns="91440" bIns="45720" rtlCol="0"/>
-          <a:lstStyle>
-            <a:lvl1pPr algn="r">
-              <a:defRPr sz="1200"/>
-            </a:lvl1pPr>
-          </a:lstStyle>
-          <a:p>
-            <a:fld id="{0F89C1C7-3DCD-1040-A9CF-14679D8B5DDD}" type="datetimeFigureOut">
-              <a:rPr lang="en-US" smtClean="0"/>
-              <a:t>10/17/16</a:t>
-            </a:fld>
-            <a:endParaRPr lang="en-US"/>
-          </a:p>
-        </p:txBody>
-      </p:sp>
-      <p:sp>
-        <p:nvSpPr>
-          <p:cNvPr id="4" name="Slide Image Placeholder 3"/>
-          <p:cNvSpPr>
-            <a:spLocks noGrp="1" noRot="1" noChangeAspect="1"/>
-          </p:cNvSpPr>
-          <p:nvPr>
-            <p:ph type="sldImg" idx="2"/>
-          </p:nvPr>
-        </p:nvSpPr>
-        <p:spPr>
-          <a:xfrm>
-            <a:off x="1143000" y="685800"/>
-            <a:ext cx="4572000" cy="3429000"/>
-          </a:xfrm>
-          <a:prstGeom prst="rect">
-            <a:avLst/>
-          </a:prstGeom>
-          <a:noFill/>
-          <a:ln w="12700">
-            <a:solidFill>
-              <a:prstClr val="black"/>
-            </a:solidFill>
-          </a:ln>
-        </p:spPr>
-        <p:txBody>
-          <a:bodyPr vert="horz" lIns="91440" tIns="45720" rIns="91440" bIns="45720" rtlCol="0" anchor="ctr"/>
-          <a:lstStyle/>
-          <a:p>
-            <a:endParaRPr lang="en-US"/>
-          </a:p>
-        </p:txBody>
-      </p:sp>
-      <p:sp>
-        <p:nvSpPr>
-          <p:cNvPr id="5" name="Notes Placeholder 4"/>
-          <p:cNvSpPr>
-            <a:spLocks noGrp="1"/>
-          </p:cNvSpPr>
-          <p:nvPr>
-            <p:ph type="body" sz="quarter" idx="3"/>
-          </p:nvPr>
-        </p:nvSpPr>
-        <p:spPr>
-          <a:xfrm>
-            <a:off x="685800" y="4343400"/>
-            <a:ext cx="5486400" cy="4114800"/>
-          </a:xfrm>
-          <a:prstGeom prst="rect">
-            <a:avLst/>
-          </a:prstGeom>
-        </p:spPr>
-        <p:txBody>
-          <a:bodyPr vert="horz" lIns="91440" tIns="45720" rIns="91440" bIns="45720" rtlCol="0"/>
-          <a:lstStyle/>
-          <a:p>
-            <a:pPr lvl="0"/>
-            <a:r>
-              <a:rPr lang="en-US" smtClean="0"/>
-              <a:t>Click to edit Master text styles</a:t>
-            </a:r>
-          </a:p>
-          <a:p>
-            <a:pPr lvl="1"/>
-            <a:r>
-              <a:rPr lang="en-US" smtClean="0"/>
-              <a:t>Second level</a:t>
-            </a:r>
-          </a:p>
-          <a:p>
-            <a:pPr lvl="2"/>
-            <a:r>
-              <a:rPr lang="en-US" smtClean="0"/>
-              <a:t>Third level</a:t>
-            </a:r>
-          </a:p>
-          <a:p>
-            <a:pPr lvl="3"/>
-            <a:r>
-              <a:rPr lang="en-US" smtClean="0"/>
-              <a:t>Fourth level</a:t>
-            </a:r>
-          </a:p>
-          <a:p>
-            <a:pPr lvl="4"/>
-            <a:r>
-              <a:rPr lang="en-US" smtClean="0"/>
-              <a:t>Fifth level</a:t>
-            </a:r>
-            <a:endParaRPr lang="en-US"/>
-          </a:p>
-        </p:txBody>
-      </p:sp>
-      <p:sp>
-        <p:nvSpPr>
-          <p:cNvPr id="6" name="Footer Placeholder 5"/>
-          <p:cNvSpPr>
-            <a:spLocks noGrp="1"/>
-          </p:cNvSpPr>
-          <p:nvPr>
-            <p:ph type="ftr" sz="quarter" idx="4"/>
-          </p:nvPr>
-        </p:nvSpPr>
-        <p:spPr>
-          <a:xfrm>
-            <a:off x="0" y="8685213"/>
-            <a:ext cx="2971800" cy="457200"/>
-          </a:xfrm>
-          <a:prstGeom prst="rect">
-            <a:avLst/>
-          </a:prstGeom>
-        </p:spPr>
-        <p:txBody>
-          <a:bodyPr vert="horz" lIns="91440" tIns="45720" rIns="91440" bIns="45720" rtlCol="0" anchor="b"/>
-          <a:lstStyle>
-            <a:lvl1pPr algn="l">
-              <a:defRPr sz="1200"/>
-            </a:lvl1pPr>
-          </a:lstStyle>
-          <a:p>
-            <a:endParaRPr lang="en-US"/>
-          </a:p>
-        </p:txBody>
-      </p:sp>
-      <p:sp>
-        <p:nvSpPr>
-          <p:cNvPr id="7" name="Slide Number Placeholder 6"/>
-          <p:cNvSpPr>
-            <a:spLocks noGrp="1"/>
-          </p:cNvSpPr>
-          <p:nvPr>
-            <p:ph type="sldNum" sz="quarter" idx="5"/>
-          </p:nvPr>
-        </p:nvSpPr>
-        <p:spPr>
-          <a:xfrm>
-            <a:off x="3884613" y="8685213"/>
-            <a:ext cx="2971800" cy="457200"/>
-          </a:xfrm>
-          <a:prstGeom prst="rect">
-            <a:avLst/>
-          </a:prstGeom>
-        </p:spPr>
-        <p:txBody>
-          <a:bodyPr vert="horz" lIns="91440" tIns="45720" rIns="91440" bIns="45720" rtlCol="0" anchor="b"/>
-          <a:lstStyle>
-            <a:lvl1pPr algn="r">
-              <a:defRPr sz="1200"/>
-            </a:lvl1pPr>
-          </a:lstStyle>
-          <a:p>
-            <a:fld id="{BB5E49A5-4136-284D-997B-48E1D791AD67}" type="slidenum">
-              <a:rPr lang="en-US" smtClean="0"/>
-              <a:t>‹#›</a:t>
-            </a:fld>
-            <a:endParaRPr lang="en-US"/>
-          </a:p>
-        </p:txBody>
-      </p:sp>
     </p:spTree>
     <p:extLst>
       <p:ext uri="{BB962C8B-B14F-4D97-AF65-F5344CB8AC3E}">
-        <p14:creationId xmlns:p14="http://schemas.microsoft.com/office/powerpoint/2010/main" val="2623252185"/>
+        <p14:creationId xmlns:p14="http://schemas.microsoft.com/office/powerpoint/2010/main" val="1686975420"/>
       </p:ext>
     </p:extLst>
   </p:cSld>
   <p:clrMap bg1="lt1" tx1="dk1" bg2="lt2" tx2="dk2" accent1="accent1" accent2="accent2" accent3="accent3" accent4="accent4" accent5="accent5" accent6="accent6" hlink="hlink" folHlink="folHlink"/>
   <p:notesStyle>
-    <a:lvl1pPr marL="0" algn="l" defTabSz="457200" rtl="0" eaLnBrk="1" latinLnBrk="0" hangingPunct="1">
+    <a:lvl1pPr marL="0" algn="l" defTabSz="914400" rtl="0" eaLnBrk="1" latinLnBrk="0" hangingPunct="1">
       <a:defRPr sz="1200" kern="1200">
         <a:solidFill>
           <a:schemeClr val="tx1"/>
@@ -400,7 +194,7 @@
         <a:cs typeface="+mn-cs"/>
       </a:defRPr>
     </a:lvl1pPr>
-    <a:lvl2pPr marL="457200" algn="l" defTabSz="457200" rtl="0" eaLnBrk="1" latinLnBrk="0" hangingPunct="1">
+    <a:lvl2pPr marL="457200" algn="l" defTabSz="914400" rtl="0" eaLnBrk="1" latinLnBrk="0" hangingPunct="1">
       <a:defRPr sz="1200" kern="1200">
         <a:solidFill>
           <a:schemeClr val="tx1"/>
@@ -410,7 +204,7 @@
         <a:cs typeface="+mn-cs"/>
       </a:defRPr>
     </a:lvl2pPr>
-    <a:lvl3pPr marL="914400" algn="l" defTabSz="457200" rtl="0" eaLnBrk="1" latinLnBrk="0" hangingPunct="1">
+    <a:lvl3pPr marL="914400" algn="l" defTabSz="914400" rtl="0" eaLnBrk="1" latinLnBrk="0" hangingPunct="1">
       <a:defRPr sz="1200" kern="1200">
         <a:solidFill>
           <a:schemeClr val="tx1"/>
@@ -420,7 +214,7 @@
         <a:cs typeface="+mn-cs"/>
       </a:defRPr>
     </a:lvl3pPr>
-    <a:lvl4pPr marL="1371600" algn="l" defTabSz="457200" rtl="0" eaLnBrk="1" latinLnBrk="0" hangingPunct="1">
+    <a:lvl4pPr marL="1371600" algn="l" defTabSz="914400" rtl="0" eaLnBrk="1" latinLnBrk="0" hangingPunct="1">
       <a:defRPr sz="1200" kern="1200">
         <a:solidFill>
           <a:schemeClr val="tx1"/>
@@ -430,7 +224,7 @@
         <a:cs typeface="+mn-cs"/>
       </a:defRPr>
     </a:lvl4pPr>
-    <a:lvl5pPr marL="1828800" algn="l" defTabSz="457200" rtl="0" eaLnBrk="1" latinLnBrk="0" hangingPunct="1">
+    <a:lvl5pPr marL="1828800" algn="l" defTabSz="914400" rtl="0" eaLnBrk="1" latinLnBrk="0" hangingPunct="1">
       <a:defRPr sz="1200" kern="1200">
         <a:solidFill>
           <a:schemeClr val="tx1"/>
@@ -440,7 +234,7 @@
         <a:cs typeface="+mn-cs"/>
       </a:defRPr>
     </a:lvl5pPr>
-    <a:lvl6pPr marL="2286000" algn="l" defTabSz="457200" rtl="0" eaLnBrk="1" latinLnBrk="0" hangingPunct="1">
+    <a:lvl6pPr marL="2286000" algn="l" defTabSz="914400" rtl="0" eaLnBrk="1" latinLnBrk="0" hangingPunct="1">
       <a:defRPr sz="1200" kern="1200">
         <a:solidFill>
           <a:schemeClr val="tx1"/>
@@ -450,7 +244,7 @@
         <a:cs typeface="+mn-cs"/>
       </a:defRPr>
     </a:lvl6pPr>
-    <a:lvl7pPr marL="2743200" algn="l" defTabSz="457200" rtl="0" eaLnBrk="1" latinLnBrk="0" hangingPunct="1">
+    <a:lvl7pPr marL="2743200" algn="l" defTabSz="914400" rtl="0" eaLnBrk="1" latinLnBrk="0" hangingPunct="1">
       <a:defRPr sz="1200" kern="1200">
         <a:solidFill>
           <a:schemeClr val="tx1"/>
@@ -460,7 +254,7 @@
         <a:cs typeface="+mn-cs"/>
       </a:defRPr>
     </a:lvl7pPr>
-    <a:lvl8pPr marL="3200400" algn="l" defTabSz="457200" rtl="0" eaLnBrk="1" latinLnBrk="0" hangingPunct="1">
+    <a:lvl8pPr marL="3200400" algn="l" defTabSz="914400" rtl="0" eaLnBrk="1" latinLnBrk="0" hangingPunct="1">
       <a:defRPr sz="1200" kern="1200">
         <a:solidFill>
           <a:schemeClr val="tx1"/>
@@ -470,7 +264,7 @@
         <a:cs typeface="+mn-cs"/>
       </a:defRPr>
     </a:lvl8pPr>
-    <a:lvl9pPr marL="3657600" algn="l" defTabSz="457200" rtl="0" eaLnBrk="1" latinLnBrk="0" hangingPunct="1">
+    <a:lvl9pPr marL="3657600" algn="l" defTabSz="914400" rtl="0" eaLnBrk="1" latinLnBrk="0" hangingPunct="1">
       <a:defRPr sz="1200" kern="1200">
         <a:solidFill>
           <a:schemeClr val="tx1"/>
@@ -485,7 +279,7 @@
 </file>
 
 <file path=ppt/notesSlides/notesSlide1.xml><?xml version="1.0" encoding="utf-8"?>
-<p:notes xmlns:a="http://schemas.openxmlformats.org/drawingml/2006/main" xmlns:p="http://schemas.openxmlformats.org/presentationml/2006/main" xmlns:r="http://schemas.openxmlformats.org/officeDocument/2006/relationships">
+<p:notes xmlns:a="http://schemas.openxmlformats.org/drawingml/2006/main" xmlns:r="http://schemas.openxmlformats.org/officeDocument/2006/relationships" xmlns:p="http://schemas.openxmlformats.org/presentationml/2006/main">
   <p:cSld>
     <p:spTree>
       <p:nvGrpSpPr>
@@ -505,7 +299,7 @@
         <p:nvSpPr>
           <p:cNvPr id="2" name="Slide Image Placeholder 1"/>
           <p:cNvSpPr>
-            <a:spLocks noGrp="1"/>
+            <a:spLocks noGrp="1" noRot="1" noChangeAspect="1"/>
           </p:cNvSpPr>
           <p:nvPr>
             <p:ph type="sldImg" idx="2"/>
@@ -520,7 +314,7 @@
             <a:spLocks noGrp="1"/>
           </p:cNvSpPr>
           <p:nvPr>
-            <p:ph type="body" idx="3" sz="quarter"/>
+            <p:ph type="body" sz="quarter" idx="3"/>
           </p:nvPr>
         </p:nvSpPr>
         <p:spPr/>
@@ -546,7 +340,7 @@
             <a:spLocks noGrp="1"/>
           </p:cNvSpPr>
           <p:nvPr>
-            <p:ph type="sldNum" idx="5" sz="quarter"/>
+            <p:ph type="sldNum" sz="quarter" idx="5"/>
           </p:nvPr>
         </p:nvSpPr>
         <p:spPr/>
@@ -560,7 +354,7 @@
 </file>
 
 <file path=ppt/notesSlides/notesSlide10.xml><?xml version="1.0" encoding="utf-8"?>
-<p:notes xmlns:a="http://schemas.openxmlformats.org/drawingml/2006/main" xmlns:p="http://schemas.openxmlformats.org/presentationml/2006/main" xmlns:r="http://schemas.openxmlformats.org/officeDocument/2006/relationships">
+<p:notes xmlns:a="http://schemas.openxmlformats.org/drawingml/2006/main" xmlns:r="http://schemas.openxmlformats.org/officeDocument/2006/relationships" xmlns:p="http://schemas.openxmlformats.org/presentationml/2006/main">
   <p:cSld>
     <p:spTree>
       <p:nvGrpSpPr>
@@ -580,7 +374,7 @@
         <p:nvSpPr>
           <p:cNvPr id="2" name="Slide Image Placeholder 1"/>
           <p:cNvSpPr>
-            <a:spLocks noGrp="1"/>
+            <a:spLocks noGrp="1" noRot="1" noChangeAspect="1"/>
           </p:cNvSpPr>
           <p:nvPr>
             <p:ph type="sldImg" idx="2"/>
@@ -595,7 +389,7 @@
             <a:spLocks noGrp="1"/>
           </p:cNvSpPr>
           <p:nvPr>
-            <p:ph type="body" idx="3" sz="quarter"/>
+            <p:ph type="body" sz="quarter" idx="3"/>
           </p:nvPr>
         </p:nvSpPr>
         <p:spPr/>
@@ -621,7 +415,7 @@
             <a:spLocks noGrp="1"/>
           </p:cNvSpPr>
           <p:nvPr>
-            <p:ph type="sldNum" idx="5" sz="quarter"/>
+            <p:ph type="sldNum" sz="quarter" idx="5"/>
           </p:nvPr>
         </p:nvSpPr>
         <p:spPr/>
@@ -635,7 +429,7 @@
 </file>
 
 <file path=ppt/notesSlides/notesSlide11.xml><?xml version="1.0" encoding="utf-8"?>
-<p:notes xmlns:a="http://schemas.openxmlformats.org/drawingml/2006/main" xmlns:p="http://schemas.openxmlformats.org/presentationml/2006/main" xmlns:r="http://schemas.openxmlformats.org/officeDocument/2006/relationships">
+<p:notes xmlns:a="http://schemas.openxmlformats.org/drawingml/2006/main" xmlns:r="http://schemas.openxmlformats.org/officeDocument/2006/relationships" xmlns:p="http://schemas.openxmlformats.org/presentationml/2006/main">
   <p:cSld>
     <p:spTree>
       <p:nvGrpSpPr>
@@ -655,7 +449,7 @@
         <p:nvSpPr>
           <p:cNvPr id="2" name="Slide Image Placeholder 1"/>
           <p:cNvSpPr>
-            <a:spLocks noGrp="1"/>
+            <a:spLocks noGrp="1" noRot="1" noChangeAspect="1"/>
           </p:cNvSpPr>
           <p:nvPr>
             <p:ph type="sldImg" idx="2"/>
@@ -670,7 +464,7 @@
             <a:spLocks noGrp="1"/>
           </p:cNvSpPr>
           <p:nvPr>
-            <p:ph type="body" idx="3" sz="quarter"/>
+            <p:ph type="body" sz="quarter" idx="3"/>
           </p:nvPr>
         </p:nvSpPr>
         <p:spPr/>
@@ -696,7 +490,7 @@
             <a:spLocks noGrp="1"/>
           </p:cNvSpPr>
           <p:nvPr>
-            <p:ph type="sldNum" idx="5" sz="quarter"/>
+            <p:ph type="sldNum" sz="quarter" idx="5"/>
           </p:nvPr>
         </p:nvSpPr>
         <p:spPr/>
@@ -710,7 +504,7 @@
 </file>
 
 <file path=ppt/notesSlides/notesSlide12.xml><?xml version="1.0" encoding="utf-8"?>
-<p:notes xmlns:a="http://schemas.openxmlformats.org/drawingml/2006/main" xmlns:p="http://schemas.openxmlformats.org/presentationml/2006/main" xmlns:r="http://schemas.openxmlformats.org/officeDocument/2006/relationships">
+<p:notes xmlns:a="http://schemas.openxmlformats.org/drawingml/2006/main" xmlns:r="http://schemas.openxmlformats.org/officeDocument/2006/relationships" xmlns:p="http://schemas.openxmlformats.org/presentationml/2006/main">
   <p:cSld>
     <p:spTree>
       <p:nvGrpSpPr>
@@ -730,7 +524,7 @@
         <p:nvSpPr>
           <p:cNvPr id="2" name="Slide Image Placeholder 1"/>
           <p:cNvSpPr>
-            <a:spLocks noGrp="1"/>
+            <a:spLocks noGrp="1" noRot="1" noChangeAspect="1"/>
           </p:cNvSpPr>
           <p:nvPr>
             <p:ph type="sldImg" idx="2"/>
@@ -745,7 +539,7 @@
             <a:spLocks noGrp="1"/>
           </p:cNvSpPr>
           <p:nvPr>
-            <p:ph type="body" idx="3" sz="quarter"/>
+            <p:ph type="body" sz="quarter" idx="3"/>
           </p:nvPr>
         </p:nvSpPr>
         <p:spPr/>
@@ -771,7 +565,7 @@
             <a:spLocks noGrp="1"/>
           </p:cNvSpPr>
           <p:nvPr>
-            <p:ph type="sldNum" idx="5" sz="quarter"/>
+            <p:ph type="sldNum" sz="quarter" idx="5"/>
           </p:nvPr>
         </p:nvSpPr>
         <p:spPr/>
@@ -785,7 +579,7 @@
 </file>
 
 <file path=ppt/notesSlides/notesSlide13.xml><?xml version="1.0" encoding="utf-8"?>
-<p:notes xmlns:a="http://schemas.openxmlformats.org/drawingml/2006/main" xmlns:p="http://schemas.openxmlformats.org/presentationml/2006/main" xmlns:r="http://schemas.openxmlformats.org/officeDocument/2006/relationships">
+<p:notes xmlns:a="http://schemas.openxmlformats.org/drawingml/2006/main" xmlns:r="http://schemas.openxmlformats.org/officeDocument/2006/relationships" xmlns:p="http://schemas.openxmlformats.org/presentationml/2006/main">
   <p:cSld>
     <p:spTree>
       <p:nvGrpSpPr>
@@ -805,7 +599,7 @@
         <p:nvSpPr>
           <p:cNvPr id="2" name="Slide Image Placeholder 1"/>
           <p:cNvSpPr>
-            <a:spLocks noGrp="1"/>
+            <a:spLocks noGrp="1" noRot="1" noChangeAspect="1"/>
           </p:cNvSpPr>
           <p:nvPr>
             <p:ph type="sldImg" idx="2"/>
@@ -820,7 +614,7 @@
             <a:spLocks noGrp="1"/>
           </p:cNvSpPr>
           <p:nvPr>
-            <p:ph type="body" idx="3" sz="quarter"/>
+            <p:ph type="body" sz="quarter" idx="3"/>
           </p:nvPr>
         </p:nvSpPr>
         <p:spPr/>
@@ -846,7 +640,7 @@
             <a:spLocks noGrp="1"/>
           </p:cNvSpPr>
           <p:nvPr>
-            <p:ph type="sldNum" idx="5" sz="quarter"/>
+            <p:ph type="sldNum" sz="quarter" idx="5"/>
           </p:nvPr>
         </p:nvSpPr>
         <p:spPr/>
@@ -860,7 +654,7 @@
 </file>
 
 <file path=ppt/notesSlides/notesSlide14.xml><?xml version="1.0" encoding="utf-8"?>
-<p:notes xmlns:a="http://schemas.openxmlformats.org/drawingml/2006/main" xmlns:p="http://schemas.openxmlformats.org/presentationml/2006/main" xmlns:r="http://schemas.openxmlformats.org/officeDocument/2006/relationships">
+<p:notes xmlns:a="http://schemas.openxmlformats.org/drawingml/2006/main" xmlns:r="http://schemas.openxmlformats.org/officeDocument/2006/relationships" xmlns:p="http://schemas.openxmlformats.org/presentationml/2006/main">
   <p:cSld>
     <p:spTree>
       <p:nvGrpSpPr>
@@ -880,7 +674,7 @@
         <p:nvSpPr>
           <p:cNvPr id="2" name="Slide Image Placeholder 1"/>
           <p:cNvSpPr>
-            <a:spLocks noGrp="1"/>
+            <a:spLocks noGrp="1" noRot="1" noChangeAspect="1"/>
           </p:cNvSpPr>
           <p:nvPr>
             <p:ph type="sldImg" idx="2"/>
@@ -895,7 +689,7 @@
             <a:spLocks noGrp="1"/>
           </p:cNvSpPr>
           <p:nvPr>
-            <p:ph type="body" idx="3" sz="quarter"/>
+            <p:ph type="body" sz="quarter" idx="3"/>
           </p:nvPr>
         </p:nvSpPr>
         <p:spPr/>
@@ -921,7 +715,7 @@
             <a:spLocks noGrp="1"/>
           </p:cNvSpPr>
           <p:nvPr>
-            <p:ph type="sldNum" idx="5" sz="quarter"/>
+            <p:ph type="sldNum" sz="quarter" idx="5"/>
           </p:nvPr>
         </p:nvSpPr>
         <p:spPr/>
@@ -935,7 +729,7 @@
 </file>
 
 <file path=ppt/notesSlides/notesSlide15.xml><?xml version="1.0" encoding="utf-8"?>
-<p:notes xmlns:a="http://schemas.openxmlformats.org/drawingml/2006/main" xmlns:p="http://schemas.openxmlformats.org/presentationml/2006/main" xmlns:r="http://schemas.openxmlformats.org/officeDocument/2006/relationships">
+<p:notes xmlns:a="http://schemas.openxmlformats.org/drawingml/2006/main" xmlns:r="http://schemas.openxmlformats.org/officeDocument/2006/relationships" xmlns:p="http://schemas.openxmlformats.org/presentationml/2006/main">
   <p:cSld>
     <p:spTree>
       <p:nvGrpSpPr>
@@ -955,7 +749,7 @@
         <p:nvSpPr>
           <p:cNvPr id="2" name="Slide Image Placeholder 1"/>
           <p:cNvSpPr>
-            <a:spLocks noGrp="1"/>
+            <a:spLocks noGrp="1" noRot="1" noChangeAspect="1"/>
           </p:cNvSpPr>
           <p:nvPr>
             <p:ph type="sldImg" idx="2"/>
@@ -970,7 +764,7 @@
             <a:spLocks noGrp="1"/>
           </p:cNvSpPr>
           <p:nvPr>
-            <p:ph type="body" idx="3" sz="quarter"/>
+            <p:ph type="body" sz="quarter" idx="3"/>
           </p:nvPr>
         </p:nvSpPr>
         <p:spPr/>
@@ -996,7 +790,7 @@
             <a:spLocks noGrp="1"/>
           </p:cNvSpPr>
           <p:nvPr>
-            <p:ph type="sldNum" idx="5" sz="quarter"/>
+            <p:ph type="sldNum" sz="quarter" idx="5"/>
           </p:nvPr>
         </p:nvSpPr>
         <p:spPr/>
@@ -1010,7 +804,7 @@
 </file>
 
 <file path=ppt/notesSlides/notesSlide16.xml><?xml version="1.0" encoding="utf-8"?>
-<p:notes xmlns:a="http://schemas.openxmlformats.org/drawingml/2006/main" xmlns:p="http://schemas.openxmlformats.org/presentationml/2006/main" xmlns:r="http://schemas.openxmlformats.org/officeDocument/2006/relationships">
+<p:notes xmlns:a="http://schemas.openxmlformats.org/drawingml/2006/main" xmlns:r="http://schemas.openxmlformats.org/officeDocument/2006/relationships" xmlns:p="http://schemas.openxmlformats.org/presentationml/2006/main">
   <p:cSld>
     <p:spTree>
       <p:nvGrpSpPr>
@@ -1030,7 +824,7 @@
         <p:nvSpPr>
           <p:cNvPr id="2" name="Slide Image Placeholder 1"/>
           <p:cNvSpPr>
-            <a:spLocks noGrp="1"/>
+            <a:spLocks noGrp="1" noRot="1" noChangeAspect="1"/>
           </p:cNvSpPr>
           <p:nvPr>
             <p:ph type="sldImg" idx="2"/>
@@ -1045,7 +839,7 @@
             <a:spLocks noGrp="1"/>
           </p:cNvSpPr>
           <p:nvPr>
-            <p:ph type="body" idx="3" sz="quarter"/>
+            <p:ph type="body" sz="quarter" idx="3"/>
           </p:nvPr>
         </p:nvSpPr>
         <p:spPr/>
@@ -1071,7 +865,7 @@
             <a:spLocks noGrp="1"/>
           </p:cNvSpPr>
           <p:nvPr>
-            <p:ph type="sldNum" idx="5" sz="quarter"/>
+            <p:ph type="sldNum" sz="quarter" idx="5"/>
           </p:nvPr>
         </p:nvSpPr>
         <p:spPr/>
@@ -1085,7 +879,7 @@
 </file>
 
 <file path=ppt/notesSlides/notesSlide17.xml><?xml version="1.0" encoding="utf-8"?>
-<p:notes xmlns:a="http://schemas.openxmlformats.org/drawingml/2006/main" xmlns:p="http://schemas.openxmlformats.org/presentationml/2006/main" xmlns:r="http://schemas.openxmlformats.org/officeDocument/2006/relationships">
+<p:notes xmlns:a="http://schemas.openxmlformats.org/drawingml/2006/main" xmlns:r="http://schemas.openxmlformats.org/officeDocument/2006/relationships" xmlns:p="http://schemas.openxmlformats.org/presentationml/2006/main">
   <p:cSld>
     <p:spTree>
       <p:nvGrpSpPr>
@@ -1105,7 +899,7 @@
         <p:nvSpPr>
           <p:cNvPr id="2" name="Slide Image Placeholder 1"/>
           <p:cNvSpPr>
-            <a:spLocks noGrp="1"/>
+            <a:spLocks noGrp="1" noRot="1" noChangeAspect="1"/>
           </p:cNvSpPr>
           <p:nvPr>
             <p:ph type="sldImg" idx="2"/>
@@ -1120,7 +914,7 @@
             <a:spLocks noGrp="1"/>
           </p:cNvSpPr>
           <p:nvPr>
-            <p:ph type="body" idx="3" sz="quarter"/>
+            <p:ph type="body" sz="quarter" idx="3"/>
           </p:nvPr>
         </p:nvSpPr>
         <p:spPr/>
@@ -1146,7 +940,7 @@
             <a:spLocks noGrp="1"/>
           </p:cNvSpPr>
           <p:nvPr>
-            <p:ph type="sldNum" idx="5" sz="quarter"/>
+            <p:ph type="sldNum" sz="quarter" idx="5"/>
           </p:nvPr>
         </p:nvSpPr>
         <p:spPr/>
@@ -1160,7 +954,7 @@
 </file>
 
 <file path=ppt/notesSlides/notesSlide18.xml><?xml version="1.0" encoding="utf-8"?>
-<p:notes xmlns:a="http://schemas.openxmlformats.org/drawingml/2006/main" xmlns:p="http://schemas.openxmlformats.org/presentationml/2006/main" xmlns:r="http://schemas.openxmlformats.org/officeDocument/2006/relationships">
+<p:notes xmlns:a="http://schemas.openxmlformats.org/drawingml/2006/main" xmlns:r="http://schemas.openxmlformats.org/officeDocument/2006/relationships" xmlns:p="http://schemas.openxmlformats.org/presentationml/2006/main">
   <p:cSld>
     <p:spTree>
       <p:nvGrpSpPr>
@@ -1180,7 +974,7 @@
         <p:nvSpPr>
           <p:cNvPr id="2" name="Slide Image Placeholder 1"/>
           <p:cNvSpPr>
-            <a:spLocks noGrp="1"/>
+            <a:spLocks noGrp="1" noRot="1" noChangeAspect="1"/>
           </p:cNvSpPr>
           <p:nvPr>
             <p:ph type="sldImg" idx="2"/>
@@ -1195,7 +989,7 @@
             <a:spLocks noGrp="1"/>
           </p:cNvSpPr>
           <p:nvPr>
-            <p:ph type="body" idx="3" sz="quarter"/>
+            <p:ph type="body" sz="quarter" idx="3"/>
           </p:nvPr>
         </p:nvSpPr>
         <p:spPr/>
@@ -1221,7 +1015,7 @@
             <a:spLocks noGrp="1"/>
           </p:cNvSpPr>
           <p:nvPr>
-            <p:ph type="sldNum" idx="5" sz="quarter"/>
+            <p:ph type="sldNum" sz="quarter" idx="5"/>
           </p:nvPr>
         </p:nvSpPr>
         <p:spPr/>
@@ -1235,7 +1029,7 @@
 </file>
 
 <file path=ppt/notesSlides/notesSlide19.xml><?xml version="1.0" encoding="utf-8"?>
-<p:notes xmlns:a="http://schemas.openxmlformats.org/drawingml/2006/main" xmlns:p="http://schemas.openxmlformats.org/presentationml/2006/main" xmlns:r="http://schemas.openxmlformats.org/officeDocument/2006/relationships">
+<p:notes xmlns:a="http://schemas.openxmlformats.org/drawingml/2006/main" xmlns:r="http://schemas.openxmlformats.org/officeDocument/2006/relationships" xmlns:p="http://schemas.openxmlformats.org/presentationml/2006/main">
   <p:cSld>
     <p:spTree>
       <p:nvGrpSpPr>
@@ -1255,7 +1049,7 @@
         <p:nvSpPr>
           <p:cNvPr id="2" name="Slide Image Placeholder 1"/>
           <p:cNvSpPr>
-            <a:spLocks noGrp="1"/>
+            <a:spLocks noGrp="1" noRot="1" noChangeAspect="1"/>
           </p:cNvSpPr>
           <p:nvPr>
             <p:ph type="sldImg" idx="2"/>
@@ -1270,7 +1064,7 @@
             <a:spLocks noGrp="1"/>
           </p:cNvSpPr>
           <p:nvPr>
-            <p:ph type="body" idx="3" sz="quarter"/>
+            <p:ph type="body" sz="quarter" idx="3"/>
           </p:nvPr>
         </p:nvSpPr>
         <p:spPr/>
@@ -1296,7 +1090,7 @@
             <a:spLocks noGrp="1"/>
           </p:cNvSpPr>
           <p:nvPr>
-            <p:ph type="sldNum" idx="5" sz="quarter"/>
+            <p:ph type="sldNum" sz="quarter" idx="5"/>
           </p:nvPr>
         </p:nvSpPr>
         <p:spPr/>
@@ -1310,7 +1104,7 @@
 </file>
 
 <file path=ppt/notesSlides/notesSlide2.xml><?xml version="1.0" encoding="utf-8"?>
-<p:notes xmlns:a="http://schemas.openxmlformats.org/drawingml/2006/main" xmlns:p="http://schemas.openxmlformats.org/presentationml/2006/main" xmlns:r="http://schemas.openxmlformats.org/officeDocument/2006/relationships">
+<p:notes xmlns:a="http://schemas.openxmlformats.org/drawingml/2006/main" xmlns:r="http://schemas.openxmlformats.org/officeDocument/2006/relationships" xmlns:p="http://schemas.openxmlformats.org/presentationml/2006/main">
   <p:cSld>
     <p:spTree>
       <p:nvGrpSpPr>
@@ -1330,7 +1124,7 @@
         <p:nvSpPr>
           <p:cNvPr id="2" name="Slide Image Placeholder 1"/>
           <p:cNvSpPr>
-            <a:spLocks noGrp="1"/>
+            <a:spLocks noGrp="1" noRot="1" noChangeAspect="1"/>
           </p:cNvSpPr>
           <p:nvPr>
             <p:ph type="sldImg" idx="2"/>
@@ -1345,7 +1139,7 @@
             <a:spLocks noGrp="1"/>
           </p:cNvSpPr>
           <p:nvPr>
-            <p:ph type="body" idx="3" sz="quarter"/>
+            <p:ph type="body" sz="quarter" idx="3"/>
           </p:nvPr>
         </p:nvSpPr>
         <p:spPr/>
@@ -1371,7 +1165,7 @@
             <a:spLocks noGrp="1"/>
           </p:cNvSpPr>
           <p:nvPr>
-            <p:ph type="sldNum" idx="5" sz="quarter"/>
+            <p:ph type="sldNum" sz="quarter" idx="5"/>
           </p:nvPr>
         </p:nvSpPr>
         <p:spPr/>
@@ -1385,7 +1179,7 @@
 </file>
 
 <file path=ppt/notesSlides/notesSlide20.xml><?xml version="1.0" encoding="utf-8"?>
-<p:notes xmlns:a="http://schemas.openxmlformats.org/drawingml/2006/main" xmlns:p="http://schemas.openxmlformats.org/presentationml/2006/main" xmlns:r="http://schemas.openxmlformats.org/officeDocument/2006/relationships">
+<p:notes xmlns:a="http://schemas.openxmlformats.org/drawingml/2006/main" xmlns:r="http://schemas.openxmlformats.org/officeDocument/2006/relationships" xmlns:p="http://schemas.openxmlformats.org/presentationml/2006/main">
   <p:cSld>
     <p:spTree>
       <p:nvGrpSpPr>
@@ -1405,7 +1199,7 @@
         <p:nvSpPr>
           <p:cNvPr id="2" name="Slide Image Placeholder 1"/>
           <p:cNvSpPr>
-            <a:spLocks noGrp="1"/>
+            <a:spLocks noGrp="1" noRot="1" noChangeAspect="1"/>
           </p:cNvSpPr>
           <p:nvPr>
             <p:ph type="sldImg" idx="2"/>
@@ -1420,7 +1214,7 @@
             <a:spLocks noGrp="1"/>
           </p:cNvSpPr>
           <p:nvPr>
-            <p:ph type="body" idx="3" sz="quarter"/>
+            <p:ph type="body" sz="quarter" idx="3"/>
           </p:nvPr>
         </p:nvSpPr>
         <p:spPr/>
@@ -1446,7 +1240,7 @@
             <a:spLocks noGrp="1"/>
           </p:cNvSpPr>
           <p:nvPr>
-            <p:ph type="sldNum" idx="5" sz="quarter"/>
+            <p:ph type="sldNum" sz="quarter" idx="5"/>
           </p:nvPr>
         </p:nvSpPr>
         <p:spPr/>
@@ -1460,7 +1254,7 @@
 </file>
 
 <file path=ppt/notesSlides/notesSlide21.xml><?xml version="1.0" encoding="utf-8"?>
-<p:notes xmlns:a="http://schemas.openxmlformats.org/drawingml/2006/main" xmlns:p="http://schemas.openxmlformats.org/presentationml/2006/main" xmlns:r="http://schemas.openxmlformats.org/officeDocument/2006/relationships">
+<p:notes xmlns:a="http://schemas.openxmlformats.org/drawingml/2006/main" xmlns:r="http://schemas.openxmlformats.org/officeDocument/2006/relationships" xmlns:p="http://schemas.openxmlformats.org/presentationml/2006/main">
   <p:cSld>
     <p:spTree>
       <p:nvGrpSpPr>
@@ -1480,7 +1274,7 @@
         <p:nvSpPr>
           <p:cNvPr id="2" name="Slide Image Placeholder 1"/>
           <p:cNvSpPr>
-            <a:spLocks noGrp="1"/>
+            <a:spLocks noGrp="1" noRot="1" noChangeAspect="1"/>
           </p:cNvSpPr>
           <p:nvPr>
             <p:ph type="sldImg" idx="2"/>
@@ -1495,7 +1289,7 @@
             <a:spLocks noGrp="1"/>
           </p:cNvSpPr>
           <p:nvPr>
-            <p:ph type="body" idx="3" sz="quarter"/>
+            <p:ph type="body" sz="quarter" idx="3"/>
           </p:nvPr>
         </p:nvSpPr>
         <p:spPr/>
@@ -1521,7 +1315,7 @@
             <a:spLocks noGrp="1"/>
           </p:cNvSpPr>
           <p:nvPr>
-            <p:ph type="sldNum" idx="5" sz="quarter"/>
+            <p:ph type="sldNum" sz="quarter" idx="5"/>
           </p:nvPr>
         </p:nvSpPr>
         <p:spPr/>
@@ -1535,7 +1329,7 @@
 </file>
 
 <file path=ppt/notesSlides/notesSlide22.xml><?xml version="1.0" encoding="utf-8"?>
-<p:notes xmlns:a="http://schemas.openxmlformats.org/drawingml/2006/main" xmlns:p="http://schemas.openxmlformats.org/presentationml/2006/main" xmlns:r="http://schemas.openxmlformats.org/officeDocument/2006/relationships">
+<p:notes xmlns:a="http://schemas.openxmlformats.org/drawingml/2006/main" xmlns:r="http://schemas.openxmlformats.org/officeDocument/2006/relationships" xmlns:p="http://schemas.openxmlformats.org/presentationml/2006/main">
   <p:cSld>
     <p:spTree>
       <p:nvGrpSpPr>
@@ -1555,7 +1349,7 @@
         <p:nvSpPr>
           <p:cNvPr id="2" name="Slide Image Placeholder 1"/>
           <p:cNvSpPr>
-            <a:spLocks noGrp="1"/>
+            <a:spLocks noGrp="1" noRot="1" noChangeAspect="1"/>
           </p:cNvSpPr>
           <p:nvPr>
             <p:ph type="sldImg" idx="2"/>
@@ -1570,7 +1364,7 @@
             <a:spLocks noGrp="1"/>
           </p:cNvSpPr>
           <p:nvPr>
-            <p:ph type="body" idx="3" sz="quarter"/>
+            <p:ph type="body" sz="quarter" idx="3"/>
           </p:nvPr>
         </p:nvSpPr>
         <p:spPr/>
@@ -1596,7 +1390,7 @@
             <a:spLocks noGrp="1"/>
           </p:cNvSpPr>
           <p:nvPr>
-            <p:ph type="sldNum" idx="5" sz="quarter"/>
+            <p:ph type="sldNum" sz="quarter" idx="5"/>
           </p:nvPr>
         </p:nvSpPr>
         <p:spPr/>
@@ -1610,7 +1404,7 @@
 </file>
 
 <file path=ppt/notesSlides/notesSlide23.xml><?xml version="1.0" encoding="utf-8"?>
-<p:notes xmlns:a="http://schemas.openxmlformats.org/drawingml/2006/main" xmlns:p="http://schemas.openxmlformats.org/presentationml/2006/main" xmlns:r="http://schemas.openxmlformats.org/officeDocument/2006/relationships">
+<p:notes xmlns:a="http://schemas.openxmlformats.org/drawingml/2006/main" xmlns:r="http://schemas.openxmlformats.org/officeDocument/2006/relationships" xmlns:p="http://schemas.openxmlformats.org/presentationml/2006/main">
   <p:cSld>
     <p:spTree>
       <p:nvGrpSpPr>
@@ -1630,7 +1424,7 @@
         <p:nvSpPr>
           <p:cNvPr id="2" name="Slide Image Placeholder 1"/>
           <p:cNvSpPr>
-            <a:spLocks noGrp="1"/>
+            <a:spLocks noGrp="1" noRot="1" noChangeAspect="1"/>
           </p:cNvSpPr>
           <p:nvPr>
             <p:ph type="sldImg" idx="2"/>
@@ -1645,7 +1439,7 @@
             <a:spLocks noGrp="1"/>
           </p:cNvSpPr>
           <p:nvPr>
-            <p:ph type="body" idx="3" sz="quarter"/>
+            <p:ph type="body" sz="quarter" idx="3"/>
           </p:nvPr>
         </p:nvSpPr>
         <p:spPr/>
@@ -1671,7 +1465,7 @@
             <a:spLocks noGrp="1"/>
           </p:cNvSpPr>
           <p:nvPr>
-            <p:ph type="sldNum" idx="5" sz="quarter"/>
+            <p:ph type="sldNum" sz="quarter" idx="5"/>
           </p:nvPr>
         </p:nvSpPr>
         <p:spPr/>
@@ -1685,7 +1479,7 @@
 </file>
 
 <file path=ppt/notesSlides/notesSlide24.xml><?xml version="1.0" encoding="utf-8"?>
-<p:notes xmlns:a="http://schemas.openxmlformats.org/drawingml/2006/main" xmlns:p="http://schemas.openxmlformats.org/presentationml/2006/main" xmlns:r="http://schemas.openxmlformats.org/officeDocument/2006/relationships">
+<p:notes xmlns:a="http://schemas.openxmlformats.org/drawingml/2006/main" xmlns:r="http://schemas.openxmlformats.org/officeDocument/2006/relationships" xmlns:p="http://schemas.openxmlformats.org/presentationml/2006/main">
   <p:cSld>
     <p:spTree>
       <p:nvGrpSpPr>
@@ -1705,7 +1499,7 @@
         <p:nvSpPr>
           <p:cNvPr id="2" name="Slide Image Placeholder 1"/>
           <p:cNvSpPr>
-            <a:spLocks noGrp="1"/>
+            <a:spLocks noGrp="1" noRot="1" noChangeAspect="1"/>
           </p:cNvSpPr>
           <p:nvPr>
             <p:ph type="sldImg" idx="2"/>
@@ -1720,7 +1514,7 @@
             <a:spLocks noGrp="1"/>
           </p:cNvSpPr>
           <p:nvPr>
-            <p:ph type="body" idx="3" sz="quarter"/>
+            <p:ph type="body" sz="quarter" idx="3"/>
           </p:nvPr>
         </p:nvSpPr>
         <p:spPr/>
@@ -1746,7 +1540,7 @@
             <a:spLocks noGrp="1"/>
           </p:cNvSpPr>
           <p:nvPr>
-            <p:ph type="sldNum" idx="5" sz="quarter"/>
+            <p:ph type="sldNum" sz="quarter" idx="5"/>
           </p:nvPr>
         </p:nvSpPr>
         <p:spPr/>
@@ -1760,7 +1554,7 @@
 </file>
 
 <file path=ppt/notesSlides/notesSlide25.xml><?xml version="1.0" encoding="utf-8"?>
-<p:notes xmlns:a="http://schemas.openxmlformats.org/drawingml/2006/main" xmlns:p="http://schemas.openxmlformats.org/presentationml/2006/main" xmlns:r="http://schemas.openxmlformats.org/officeDocument/2006/relationships">
+<p:notes xmlns:a="http://schemas.openxmlformats.org/drawingml/2006/main" xmlns:r="http://schemas.openxmlformats.org/officeDocument/2006/relationships" xmlns:p="http://schemas.openxmlformats.org/presentationml/2006/main">
   <p:cSld>
     <p:spTree>
       <p:nvGrpSpPr>
@@ -1780,7 +1574,7 @@
         <p:nvSpPr>
           <p:cNvPr id="2" name="Slide Image Placeholder 1"/>
           <p:cNvSpPr>
-            <a:spLocks noGrp="1"/>
+            <a:spLocks noGrp="1" noRot="1" noChangeAspect="1"/>
           </p:cNvSpPr>
           <p:nvPr>
             <p:ph type="sldImg" idx="2"/>
@@ -1795,7 +1589,7 @@
             <a:spLocks noGrp="1"/>
           </p:cNvSpPr>
           <p:nvPr>
-            <p:ph type="body" idx="3" sz="quarter"/>
+            <p:ph type="body" sz="quarter" idx="3"/>
           </p:nvPr>
         </p:nvSpPr>
         <p:spPr/>
@@ -1821,7 +1615,7 @@
             <a:spLocks noGrp="1"/>
           </p:cNvSpPr>
           <p:nvPr>
-            <p:ph type="sldNum" idx="5" sz="quarter"/>
+            <p:ph type="sldNum" sz="quarter" idx="5"/>
           </p:nvPr>
         </p:nvSpPr>
         <p:spPr/>
@@ -1835,7 +1629,7 @@
 </file>
 
 <file path=ppt/notesSlides/notesSlide26.xml><?xml version="1.0" encoding="utf-8"?>
-<p:notes xmlns:a="http://schemas.openxmlformats.org/drawingml/2006/main" xmlns:p="http://schemas.openxmlformats.org/presentationml/2006/main" xmlns:r="http://schemas.openxmlformats.org/officeDocument/2006/relationships">
+<p:notes xmlns:a="http://schemas.openxmlformats.org/drawingml/2006/main" xmlns:r="http://schemas.openxmlformats.org/officeDocument/2006/relationships" xmlns:p="http://schemas.openxmlformats.org/presentationml/2006/main">
   <p:cSld>
     <p:spTree>
       <p:nvGrpSpPr>
@@ -1855,7 +1649,7 @@
         <p:nvSpPr>
           <p:cNvPr id="2" name="Slide Image Placeholder 1"/>
           <p:cNvSpPr>
-            <a:spLocks noGrp="1"/>
+            <a:spLocks noGrp="1" noRot="1" noChangeAspect="1"/>
           </p:cNvSpPr>
           <p:nvPr>
             <p:ph type="sldImg" idx="2"/>
@@ -1870,7 +1664,7 @@
             <a:spLocks noGrp="1"/>
           </p:cNvSpPr>
           <p:nvPr>
-            <p:ph type="body" idx="3" sz="quarter"/>
+            <p:ph type="body" sz="quarter" idx="3"/>
           </p:nvPr>
         </p:nvSpPr>
         <p:spPr/>
@@ -1896,7 +1690,7 @@
             <a:spLocks noGrp="1"/>
           </p:cNvSpPr>
           <p:nvPr>
-            <p:ph type="sldNum" idx="5" sz="quarter"/>
+            <p:ph type="sldNum" sz="quarter" idx="5"/>
           </p:nvPr>
         </p:nvSpPr>
         <p:spPr/>
@@ -1910,7 +1704,7 @@
 </file>
 
 <file path=ppt/notesSlides/notesSlide27.xml><?xml version="1.0" encoding="utf-8"?>
-<p:notes xmlns:a="http://schemas.openxmlformats.org/drawingml/2006/main" xmlns:p="http://schemas.openxmlformats.org/presentationml/2006/main" xmlns:r="http://schemas.openxmlformats.org/officeDocument/2006/relationships">
+<p:notes xmlns:a="http://schemas.openxmlformats.org/drawingml/2006/main" xmlns:r="http://schemas.openxmlformats.org/officeDocument/2006/relationships" xmlns:p="http://schemas.openxmlformats.org/presentationml/2006/main">
   <p:cSld>
     <p:spTree>
       <p:nvGrpSpPr>
@@ -1930,7 +1724,7 @@
         <p:nvSpPr>
           <p:cNvPr id="2" name="Slide Image Placeholder 1"/>
           <p:cNvSpPr>
-            <a:spLocks noGrp="1"/>
+            <a:spLocks noGrp="1" noRot="1" noChangeAspect="1"/>
           </p:cNvSpPr>
           <p:nvPr>
             <p:ph type="sldImg" idx="2"/>
@@ -1945,7 +1739,7 @@
             <a:spLocks noGrp="1"/>
           </p:cNvSpPr>
           <p:nvPr>
-            <p:ph type="body" idx="3" sz="quarter"/>
+            <p:ph type="body" sz="quarter" idx="3"/>
           </p:nvPr>
         </p:nvSpPr>
         <p:spPr/>
@@ -1971,7 +1765,7 @@
             <a:spLocks noGrp="1"/>
           </p:cNvSpPr>
           <p:nvPr>
-            <p:ph type="sldNum" idx="5" sz="quarter"/>
+            <p:ph type="sldNum" sz="quarter" idx="5"/>
           </p:nvPr>
         </p:nvSpPr>
         <p:spPr/>
@@ -1985,7 +1779,7 @@
 </file>
 
 <file path=ppt/notesSlides/notesSlide28.xml><?xml version="1.0" encoding="utf-8"?>
-<p:notes xmlns:a="http://schemas.openxmlformats.org/drawingml/2006/main" xmlns:p="http://schemas.openxmlformats.org/presentationml/2006/main" xmlns:r="http://schemas.openxmlformats.org/officeDocument/2006/relationships">
+<p:notes xmlns:a="http://schemas.openxmlformats.org/drawingml/2006/main" xmlns:r="http://schemas.openxmlformats.org/officeDocument/2006/relationships" xmlns:p="http://schemas.openxmlformats.org/presentationml/2006/main">
   <p:cSld>
     <p:spTree>
       <p:nvGrpSpPr>
@@ -2005,7 +1799,7 @@
         <p:nvSpPr>
           <p:cNvPr id="2" name="Slide Image Placeholder 1"/>
           <p:cNvSpPr>
-            <a:spLocks noGrp="1"/>
+            <a:spLocks noGrp="1" noRot="1" noChangeAspect="1"/>
           </p:cNvSpPr>
           <p:nvPr>
             <p:ph type="sldImg" idx="2"/>
@@ -2020,7 +1814,7 @@
             <a:spLocks noGrp="1"/>
           </p:cNvSpPr>
           <p:nvPr>
-            <p:ph type="body" idx="3" sz="quarter"/>
+            <p:ph type="body" sz="quarter" idx="3"/>
           </p:nvPr>
         </p:nvSpPr>
         <p:spPr/>
@@ -2046,7 +1840,7 @@
             <a:spLocks noGrp="1"/>
           </p:cNvSpPr>
           <p:nvPr>
-            <p:ph type="sldNum" idx="5" sz="quarter"/>
+            <p:ph type="sldNum" sz="quarter" idx="5"/>
           </p:nvPr>
         </p:nvSpPr>
         <p:spPr/>
@@ -2060,7 +1854,7 @@
 </file>
 
 <file path=ppt/notesSlides/notesSlide3.xml><?xml version="1.0" encoding="utf-8"?>
-<p:notes xmlns:a="http://schemas.openxmlformats.org/drawingml/2006/main" xmlns:p="http://schemas.openxmlformats.org/presentationml/2006/main" xmlns:r="http://schemas.openxmlformats.org/officeDocument/2006/relationships">
+<p:notes xmlns:a="http://schemas.openxmlformats.org/drawingml/2006/main" xmlns:r="http://schemas.openxmlformats.org/officeDocument/2006/relationships" xmlns:p="http://schemas.openxmlformats.org/presentationml/2006/main">
   <p:cSld>
     <p:spTree>
       <p:nvGrpSpPr>
@@ -2080,7 +1874,7 @@
         <p:nvSpPr>
           <p:cNvPr id="2" name="Slide Image Placeholder 1"/>
           <p:cNvSpPr>
-            <a:spLocks noGrp="1"/>
+            <a:spLocks noGrp="1" noRot="1" noChangeAspect="1"/>
           </p:cNvSpPr>
           <p:nvPr>
             <p:ph type="sldImg" idx="2"/>
@@ -2095,7 +1889,7 @@
             <a:spLocks noGrp="1"/>
           </p:cNvSpPr>
           <p:nvPr>
-            <p:ph type="body" idx="3" sz="quarter"/>
+            <p:ph type="body" sz="quarter" idx="3"/>
           </p:nvPr>
         </p:nvSpPr>
         <p:spPr/>
@@ -2121,7 +1915,7 @@
             <a:spLocks noGrp="1"/>
           </p:cNvSpPr>
           <p:nvPr>
-            <p:ph type="sldNum" idx="5" sz="quarter"/>
+            <p:ph type="sldNum" sz="quarter" idx="5"/>
           </p:nvPr>
         </p:nvSpPr>
         <p:spPr/>
@@ -2135,7 +1929,7 @@
 </file>
 
 <file path=ppt/notesSlides/notesSlide4.xml><?xml version="1.0" encoding="utf-8"?>
-<p:notes xmlns:a="http://schemas.openxmlformats.org/drawingml/2006/main" xmlns:p="http://schemas.openxmlformats.org/presentationml/2006/main" xmlns:r="http://schemas.openxmlformats.org/officeDocument/2006/relationships">
+<p:notes xmlns:a="http://schemas.openxmlformats.org/drawingml/2006/main" xmlns:r="http://schemas.openxmlformats.org/officeDocument/2006/relationships" xmlns:p="http://schemas.openxmlformats.org/presentationml/2006/main">
   <p:cSld>
     <p:spTree>
       <p:nvGrpSpPr>
@@ -2155,7 +1949,7 @@
         <p:nvSpPr>
           <p:cNvPr id="2" name="Slide Image Placeholder 1"/>
           <p:cNvSpPr>
-            <a:spLocks noGrp="1"/>
+            <a:spLocks noGrp="1" noRot="1" noChangeAspect="1"/>
           </p:cNvSpPr>
           <p:nvPr>
             <p:ph type="sldImg" idx="2"/>
@@ -2170,7 +1964,7 @@
             <a:spLocks noGrp="1"/>
           </p:cNvSpPr>
           <p:nvPr>
-            <p:ph type="body" idx="3" sz="quarter"/>
+            <p:ph type="body" sz="quarter" idx="3"/>
           </p:nvPr>
         </p:nvSpPr>
         <p:spPr/>
@@ -2196,7 +1990,7 @@
             <a:spLocks noGrp="1"/>
           </p:cNvSpPr>
           <p:nvPr>
-            <p:ph type="sldNum" idx="5" sz="quarter"/>
+            <p:ph type="sldNum" sz="quarter" idx="5"/>
           </p:nvPr>
         </p:nvSpPr>
         <p:spPr/>
@@ -2210,7 +2004,7 @@
 </file>
 
 <file path=ppt/notesSlides/notesSlide5.xml><?xml version="1.0" encoding="utf-8"?>
-<p:notes xmlns:a="http://schemas.openxmlformats.org/drawingml/2006/main" xmlns:p="http://schemas.openxmlformats.org/presentationml/2006/main" xmlns:r="http://schemas.openxmlformats.org/officeDocument/2006/relationships">
+<p:notes xmlns:a="http://schemas.openxmlformats.org/drawingml/2006/main" xmlns:r="http://schemas.openxmlformats.org/officeDocument/2006/relationships" xmlns:p="http://schemas.openxmlformats.org/presentationml/2006/main">
   <p:cSld>
     <p:spTree>
       <p:nvGrpSpPr>
@@ -2230,7 +2024,7 @@
         <p:nvSpPr>
           <p:cNvPr id="2" name="Slide Image Placeholder 1"/>
           <p:cNvSpPr>
-            <a:spLocks noGrp="1"/>
+            <a:spLocks noGrp="1" noRot="1" noChangeAspect="1"/>
           </p:cNvSpPr>
           <p:nvPr>
             <p:ph type="sldImg" idx="2"/>
@@ -2245,7 +2039,7 @@
             <a:spLocks noGrp="1"/>
           </p:cNvSpPr>
           <p:nvPr>
-            <p:ph type="body" idx="3" sz="quarter"/>
+            <p:ph type="body" sz="quarter" idx="3"/>
           </p:nvPr>
         </p:nvSpPr>
         <p:spPr/>
@@ -2271,7 +2065,7 @@
             <a:spLocks noGrp="1"/>
           </p:cNvSpPr>
           <p:nvPr>
-            <p:ph type="sldNum" idx="5" sz="quarter"/>
+            <p:ph type="sldNum" sz="quarter" idx="5"/>
           </p:nvPr>
         </p:nvSpPr>
         <p:spPr/>
@@ -2285,7 +2079,7 @@
 </file>
 
 <file path=ppt/notesSlides/notesSlide6.xml><?xml version="1.0" encoding="utf-8"?>
-<p:notes xmlns:a="http://schemas.openxmlformats.org/drawingml/2006/main" xmlns:p="http://schemas.openxmlformats.org/presentationml/2006/main" xmlns:r="http://schemas.openxmlformats.org/officeDocument/2006/relationships">
+<p:notes xmlns:a="http://schemas.openxmlformats.org/drawingml/2006/main" xmlns:r="http://schemas.openxmlformats.org/officeDocument/2006/relationships" xmlns:p="http://schemas.openxmlformats.org/presentationml/2006/main">
   <p:cSld>
     <p:spTree>
       <p:nvGrpSpPr>
@@ -2305,7 +2099,7 @@
         <p:nvSpPr>
           <p:cNvPr id="2" name="Slide Image Placeholder 1"/>
           <p:cNvSpPr>
-            <a:spLocks noGrp="1"/>
+            <a:spLocks noGrp="1" noRot="1" noChangeAspect="1"/>
           </p:cNvSpPr>
           <p:nvPr>
             <p:ph type="sldImg" idx="2"/>
@@ -2320,7 +2114,7 @@
             <a:spLocks noGrp="1"/>
           </p:cNvSpPr>
           <p:nvPr>
-            <p:ph type="body" idx="3" sz="quarter"/>
+            <p:ph type="body" sz="quarter" idx="3"/>
           </p:nvPr>
         </p:nvSpPr>
         <p:spPr/>
@@ -2346,7 +2140,7 @@
             <a:spLocks noGrp="1"/>
           </p:cNvSpPr>
           <p:nvPr>
-            <p:ph type="sldNum" idx="5" sz="quarter"/>
+            <p:ph type="sldNum" sz="quarter" idx="5"/>
           </p:nvPr>
         </p:nvSpPr>
         <p:spPr/>
@@ -2360,7 +2154,7 @@
 </file>
 
 <file path=ppt/notesSlides/notesSlide7.xml><?xml version="1.0" encoding="utf-8"?>
-<p:notes xmlns:a="http://schemas.openxmlformats.org/drawingml/2006/main" xmlns:p="http://schemas.openxmlformats.org/presentationml/2006/main" xmlns:r="http://schemas.openxmlformats.org/officeDocument/2006/relationships">
+<p:notes xmlns:a="http://schemas.openxmlformats.org/drawingml/2006/main" xmlns:r="http://schemas.openxmlformats.org/officeDocument/2006/relationships" xmlns:p="http://schemas.openxmlformats.org/presentationml/2006/main">
   <p:cSld>
     <p:spTree>
       <p:nvGrpSpPr>
@@ -2380,7 +2174,7 @@
         <p:nvSpPr>
           <p:cNvPr id="2" name="Slide Image Placeholder 1"/>
           <p:cNvSpPr>
-            <a:spLocks noGrp="1"/>
+            <a:spLocks noGrp="1" noRot="1" noChangeAspect="1"/>
           </p:cNvSpPr>
           <p:nvPr>
             <p:ph type="sldImg" idx="2"/>
@@ -2395,7 +2189,7 @@
             <a:spLocks noGrp="1"/>
           </p:cNvSpPr>
           <p:nvPr>
-            <p:ph type="body" idx="3" sz="quarter"/>
+            <p:ph type="body" sz="quarter" idx="3"/>
           </p:nvPr>
         </p:nvSpPr>
         <p:spPr/>
@@ -2421,7 +2215,7 @@
             <a:spLocks noGrp="1"/>
           </p:cNvSpPr>
           <p:nvPr>
-            <p:ph type="sldNum" idx="5" sz="quarter"/>
+            <p:ph type="sldNum" sz="quarter" idx="5"/>
           </p:nvPr>
         </p:nvSpPr>
         <p:spPr/>
@@ -2435,7 +2229,7 @@
 </file>
 
 <file path=ppt/notesSlides/notesSlide8.xml><?xml version="1.0" encoding="utf-8"?>
-<p:notes xmlns:a="http://schemas.openxmlformats.org/drawingml/2006/main" xmlns:p="http://schemas.openxmlformats.org/presentationml/2006/main" xmlns:r="http://schemas.openxmlformats.org/officeDocument/2006/relationships">
+<p:notes xmlns:a="http://schemas.openxmlformats.org/drawingml/2006/main" xmlns:r="http://schemas.openxmlformats.org/officeDocument/2006/relationships" xmlns:p="http://schemas.openxmlformats.org/presentationml/2006/main">
   <p:cSld>
     <p:spTree>
       <p:nvGrpSpPr>
@@ -2455,7 +2249,7 @@
         <p:nvSpPr>
           <p:cNvPr id="2" name="Slide Image Placeholder 1"/>
           <p:cNvSpPr>
-            <a:spLocks noGrp="1"/>
+            <a:spLocks noGrp="1" noRot="1" noChangeAspect="1"/>
           </p:cNvSpPr>
           <p:nvPr>
             <p:ph type="sldImg" idx="2"/>
@@ -2470,7 +2264,7 @@
             <a:spLocks noGrp="1"/>
           </p:cNvSpPr>
           <p:nvPr>
-            <p:ph type="body" idx="3" sz="quarter"/>
+            <p:ph type="body" sz="quarter" idx="3"/>
           </p:nvPr>
         </p:nvSpPr>
         <p:spPr/>
@@ -2496,7 +2290,7 @@
             <a:spLocks noGrp="1"/>
           </p:cNvSpPr>
           <p:nvPr>
-            <p:ph type="sldNum" idx="5" sz="quarter"/>
+            <p:ph type="sldNum" sz="quarter" idx="5"/>
           </p:nvPr>
         </p:nvSpPr>
         <p:spPr/>
@@ -2510,7 +2304,7 @@
 </file>
 
 <file path=ppt/notesSlides/notesSlide9.xml><?xml version="1.0" encoding="utf-8"?>
-<p:notes xmlns:a="http://schemas.openxmlformats.org/drawingml/2006/main" xmlns:p="http://schemas.openxmlformats.org/presentationml/2006/main" xmlns:r="http://schemas.openxmlformats.org/officeDocument/2006/relationships">
+<p:notes xmlns:a="http://schemas.openxmlformats.org/drawingml/2006/main" xmlns:r="http://schemas.openxmlformats.org/officeDocument/2006/relationships" xmlns:p="http://schemas.openxmlformats.org/presentationml/2006/main">
   <p:cSld>
     <p:spTree>
       <p:nvGrpSpPr>
@@ -2530,7 +2324,7 @@
         <p:nvSpPr>
           <p:cNvPr id="2" name="Slide Image Placeholder 1"/>
           <p:cNvSpPr>
-            <a:spLocks noGrp="1"/>
+            <a:spLocks noGrp="1" noRot="1" noChangeAspect="1"/>
           </p:cNvSpPr>
           <p:nvPr>
             <p:ph type="sldImg" idx="2"/>
@@ -2545,7 +2339,7 @@
             <a:spLocks noGrp="1"/>
           </p:cNvSpPr>
           <p:nvPr>
-            <p:ph type="body" idx="3" sz="quarter"/>
+            <p:ph type="body" sz="quarter" idx="3"/>
           </p:nvPr>
         </p:nvSpPr>
         <p:spPr/>
@@ -2571,7 +2365,7 @@
             <a:spLocks noGrp="1"/>
           </p:cNvSpPr>
           <p:nvPr>
-            <p:ph type="sldNum" idx="5" sz="quarter"/>
+            <p:ph type="sldNum" sz="quarter" idx="5"/>
           </p:nvPr>
         </p:nvSpPr>
         <p:spPr/>
@@ -2622,10 +2416,9 @@
           <a:lstStyle/>
           <a:p>
             <a:r>
-              <a:rPr lang="en-US" smtClean="0"/>
+              <a:rPr lang="en-US"/>
               <a:t>Click to edit Master title style</a:t>
             </a:r>
-            <a:endParaRPr lang="en-US"/>
           </a:p>
         </p:txBody>
       </p:sp>
@@ -2741,10 +2534,9 @@
           </a:lstStyle>
           <a:p>
             <a:r>
-              <a:rPr lang="en-US" smtClean="0"/>
+              <a:rPr lang="en-US"/>
               <a:t>Click to edit Master subtitle style</a:t>
             </a:r>
-            <a:endParaRPr lang="en-US"/>
           </a:p>
         </p:txBody>
       </p:sp>
@@ -2765,7 +2557,7 @@
           <a:p>
             <a:fld id="{5BCAD085-E8A6-8845-BD4E-CB4CCA059FC4}" type="datetimeFigureOut">
               <a:rPr lang="en-US" smtClean="0"/>
-              <a:t>1/27/13</a:t>
+              <a:t>9/19/2026</a:t>
             </a:fld>
             <a:endParaRPr lang="en-US"/>
           </a:p>
@@ -2859,10 +2651,9 @@
           <a:lstStyle/>
           <a:p>
             <a:r>
-              <a:rPr lang="en-US" smtClean="0"/>
+              <a:rPr lang="en-US"/>
               <a:t>Click to edit Master title style</a:t>
             </a:r>
-            <a:endParaRPr lang="en-US"/>
           </a:p>
         </p:txBody>
       </p:sp>
@@ -2883,38 +2674,37 @@
           <a:p>
             <a:pPr lvl="0"/>
             <a:r>
-              <a:rPr lang="en-US" smtClean="0"/>
+              <a:rPr lang="en-US"/>
               <a:t>Click to edit Master text styles</a:t>
             </a:r>
           </a:p>
           <a:p>
             <a:pPr lvl="1"/>
             <a:r>
-              <a:rPr lang="en-US" smtClean="0"/>
+              <a:rPr lang="en-US"/>
               <a:t>Second level</a:t>
             </a:r>
           </a:p>
           <a:p>
             <a:pPr lvl="2"/>
             <a:r>
-              <a:rPr lang="en-US" smtClean="0"/>
+              <a:rPr lang="en-US"/>
               <a:t>Third level</a:t>
             </a:r>
           </a:p>
           <a:p>
             <a:pPr lvl="3"/>
             <a:r>
-              <a:rPr lang="en-US" smtClean="0"/>
+              <a:rPr lang="en-US"/>
               <a:t>Fourth level</a:t>
             </a:r>
           </a:p>
           <a:p>
             <a:pPr lvl="4"/>
             <a:r>
-              <a:rPr lang="en-US" smtClean="0"/>
+              <a:rPr lang="en-US"/>
               <a:t>Fifth level</a:t>
             </a:r>
-            <a:endParaRPr lang="en-US"/>
           </a:p>
         </p:txBody>
       </p:sp>
@@ -2935,7 +2725,7 @@
           <a:p>
             <a:fld id="{5BCAD085-E8A6-8845-BD4E-CB4CCA059FC4}" type="datetimeFigureOut">
               <a:rPr lang="en-US" smtClean="0"/>
-              <a:t>1/27/13</a:t>
+              <a:t>9/19/2026</a:t>
             </a:fld>
             <a:endParaRPr lang="en-US"/>
           </a:p>
@@ -3034,10 +2824,9 @@
           <a:lstStyle/>
           <a:p>
             <a:r>
-              <a:rPr lang="en-US" smtClean="0"/>
+              <a:rPr lang="en-US"/>
               <a:t>Click to edit Master title style</a:t>
             </a:r>
-            <a:endParaRPr lang="en-US"/>
           </a:p>
         </p:txBody>
       </p:sp>
@@ -3063,38 +2852,37 @@
           <a:p>
             <a:pPr lvl="0"/>
             <a:r>
-              <a:rPr lang="en-US" smtClean="0"/>
+              <a:rPr lang="en-US"/>
               <a:t>Click to edit Master text styles</a:t>
             </a:r>
           </a:p>
           <a:p>
             <a:pPr lvl="1"/>
             <a:r>
-              <a:rPr lang="en-US" smtClean="0"/>
+              <a:rPr lang="en-US"/>
               <a:t>Second level</a:t>
             </a:r>
           </a:p>
           <a:p>
             <a:pPr lvl="2"/>
             <a:r>
-              <a:rPr lang="en-US" smtClean="0"/>
+              <a:rPr lang="en-US"/>
               <a:t>Third level</a:t>
             </a:r>
           </a:p>
           <a:p>
             <a:pPr lvl="3"/>
             <a:r>
-              <a:rPr lang="en-US" smtClean="0"/>
+              <a:rPr lang="en-US"/>
               <a:t>Fourth level</a:t>
             </a:r>
           </a:p>
           <a:p>
             <a:pPr lvl="4"/>
             <a:r>
-              <a:rPr lang="en-US" smtClean="0"/>
+              <a:rPr lang="en-US"/>
               <a:t>Fifth level</a:t>
             </a:r>
-            <a:endParaRPr lang="en-US"/>
           </a:p>
         </p:txBody>
       </p:sp>
@@ -3115,7 +2903,7 @@
           <a:p>
             <a:fld id="{5BCAD085-E8A6-8845-BD4E-CB4CCA059FC4}" type="datetimeFigureOut">
               <a:rPr lang="en-US" smtClean="0"/>
-              <a:t>1/27/13</a:t>
+              <a:t>9/19/2026</a:t>
             </a:fld>
             <a:endParaRPr lang="en-US"/>
           </a:p>
@@ -3209,10 +2997,9 @@
           <a:lstStyle/>
           <a:p>
             <a:r>
-              <a:rPr lang="en-US" smtClean="0"/>
+              <a:rPr lang="en-US"/>
               <a:t>Click to edit Master title style</a:t>
             </a:r>
-            <a:endParaRPr lang="en-US"/>
           </a:p>
         </p:txBody>
       </p:sp>
@@ -3233,38 +3020,37 @@
           <a:p>
             <a:pPr lvl="0"/>
             <a:r>
-              <a:rPr lang="en-US" smtClean="0"/>
+              <a:rPr lang="en-US"/>
               <a:t>Click to edit Master text styles</a:t>
             </a:r>
           </a:p>
           <a:p>
             <a:pPr lvl="1"/>
             <a:r>
-              <a:rPr lang="en-US" smtClean="0"/>
+              <a:rPr lang="en-US"/>
               <a:t>Second level</a:t>
             </a:r>
           </a:p>
           <a:p>
             <a:pPr lvl="2"/>
             <a:r>
-              <a:rPr lang="en-US" smtClean="0"/>
+              <a:rPr lang="en-US"/>
               <a:t>Third level</a:t>
             </a:r>
           </a:p>
           <a:p>
             <a:pPr lvl="3"/>
             <a:r>
-              <a:rPr lang="en-US" smtClean="0"/>
+              <a:rPr lang="en-US"/>
               <a:t>Fourth level</a:t>
             </a:r>
           </a:p>
           <a:p>
             <a:pPr lvl="4"/>
             <a:r>
-              <a:rPr lang="en-US" smtClean="0"/>
+              <a:rPr lang="en-US"/>
               <a:t>Fifth level</a:t>
             </a:r>
-            <a:endParaRPr lang="en-US"/>
           </a:p>
         </p:txBody>
       </p:sp>
@@ -3285,7 +3071,7 @@
           <a:p>
             <a:fld id="{5BCAD085-E8A6-8845-BD4E-CB4CCA059FC4}" type="datetimeFigureOut">
               <a:rPr lang="en-US" smtClean="0"/>
-              <a:t>1/27/13</a:t>
+              <a:t>9/19/2026</a:t>
             </a:fld>
             <a:endParaRPr lang="en-US"/>
           </a:p>
@@ -3388,10 +3174,9 @@
           </a:lstStyle>
           <a:p>
             <a:r>
-              <a:rPr lang="en-US" smtClean="0"/>
+              <a:rPr lang="en-US"/>
               <a:t>Click to edit Master title style</a:t>
             </a:r>
-            <a:endParaRPr lang="en-US"/>
           </a:p>
         </p:txBody>
       </p:sp>
@@ -3508,7 +3293,7 @@
           <a:p>
             <a:pPr lvl="0"/>
             <a:r>
-              <a:rPr lang="en-US" smtClean="0"/>
+              <a:rPr lang="en-US"/>
               <a:t>Click to edit Master text styles</a:t>
             </a:r>
           </a:p>
@@ -3531,7 +3316,7 @@
           <a:p>
             <a:fld id="{5BCAD085-E8A6-8845-BD4E-CB4CCA059FC4}" type="datetimeFigureOut">
               <a:rPr lang="en-US" smtClean="0"/>
-              <a:t>1/27/13</a:t>
+              <a:t>9/19/2026</a:t>
             </a:fld>
             <a:endParaRPr lang="en-US"/>
           </a:p>
@@ -3625,10 +3410,9 @@
           <a:lstStyle/>
           <a:p>
             <a:r>
-              <a:rPr lang="en-US" smtClean="0"/>
+              <a:rPr lang="en-US"/>
               <a:t>Click to edit Master title style</a:t>
             </a:r>
-            <a:endParaRPr lang="en-US"/>
           </a:p>
         </p:txBody>
       </p:sp>
@@ -3682,38 +3466,37 @@
           <a:p>
             <a:pPr lvl="0"/>
             <a:r>
-              <a:rPr lang="en-US" smtClean="0"/>
+              <a:rPr lang="en-US"/>
               <a:t>Click to edit Master text styles</a:t>
             </a:r>
           </a:p>
           <a:p>
             <a:pPr lvl="1"/>
             <a:r>
-              <a:rPr lang="en-US" smtClean="0"/>
+              <a:rPr lang="en-US"/>
               <a:t>Second level</a:t>
             </a:r>
           </a:p>
           <a:p>
             <a:pPr lvl="2"/>
             <a:r>
-              <a:rPr lang="en-US" smtClean="0"/>
+              <a:rPr lang="en-US"/>
               <a:t>Third level</a:t>
             </a:r>
           </a:p>
           <a:p>
             <a:pPr lvl="3"/>
             <a:r>
-              <a:rPr lang="en-US" smtClean="0"/>
+              <a:rPr lang="en-US"/>
               <a:t>Fourth level</a:t>
             </a:r>
           </a:p>
           <a:p>
             <a:pPr lvl="4"/>
             <a:r>
-              <a:rPr lang="en-US" smtClean="0"/>
+              <a:rPr lang="en-US"/>
               <a:t>Fifth level</a:t>
             </a:r>
-            <a:endParaRPr lang="en-US"/>
           </a:p>
         </p:txBody>
       </p:sp>
@@ -3767,38 +3550,37 @@
           <a:p>
             <a:pPr lvl="0"/>
             <a:r>
-              <a:rPr lang="en-US" smtClean="0"/>
+              <a:rPr lang="en-US"/>
               <a:t>Click to edit Master text styles</a:t>
             </a:r>
           </a:p>
           <a:p>
             <a:pPr lvl="1"/>
             <a:r>
-              <a:rPr lang="en-US" smtClean="0"/>
+              <a:rPr lang="en-US"/>
               <a:t>Second level</a:t>
             </a:r>
           </a:p>
           <a:p>
             <a:pPr lvl="2"/>
             <a:r>
-              <a:rPr lang="en-US" smtClean="0"/>
+              <a:rPr lang="en-US"/>
               <a:t>Third level</a:t>
             </a:r>
           </a:p>
           <a:p>
             <a:pPr lvl="3"/>
             <a:r>
-              <a:rPr lang="en-US" smtClean="0"/>
+              <a:rPr lang="en-US"/>
               <a:t>Fourth level</a:t>
             </a:r>
           </a:p>
           <a:p>
             <a:pPr lvl="4"/>
             <a:r>
-              <a:rPr lang="en-US" smtClean="0"/>
+              <a:rPr lang="en-US"/>
               <a:t>Fifth level</a:t>
             </a:r>
-            <a:endParaRPr lang="en-US"/>
           </a:p>
         </p:txBody>
       </p:sp>
@@ -3819,7 +3601,7 @@
           <a:p>
             <a:fld id="{5BCAD085-E8A6-8845-BD4E-CB4CCA059FC4}" type="datetimeFigureOut">
               <a:rPr lang="en-US" smtClean="0"/>
-              <a:t>1/27/13</a:t>
+              <a:t>9/19/2026</a:t>
             </a:fld>
             <a:endParaRPr lang="en-US"/>
           </a:p>
@@ -3917,10 +3699,9 @@
           </a:lstStyle>
           <a:p>
             <a:r>
-              <a:rPr lang="en-US" smtClean="0"/>
+              <a:rPr lang="en-US"/>
               <a:t>Click to edit Master title style</a:t>
             </a:r>
-            <a:endParaRPr lang="en-US"/>
           </a:p>
         </p:txBody>
       </p:sp>
@@ -3983,7 +3764,7 @@
           <a:p>
             <a:pPr lvl="0"/>
             <a:r>
-              <a:rPr lang="en-US" smtClean="0"/>
+              <a:rPr lang="en-US"/>
               <a:t>Click to edit Master text styles</a:t>
             </a:r>
           </a:p>
@@ -4039,38 +3820,37 @@
           <a:p>
             <a:pPr lvl="0"/>
             <a:r>
-              <a:rPr lang="en-US" smtClean="0"/>
+              <a:rPr lang="en-US"/>
               <a:t>Click to edit Master text styles</a:t>
             </a:r>
           </a:p>
           <a:p>
             <a:pPr lvl="1"/>
             <a:r>
-              <a:rPr lang="en-US" smtClean="0"/>
+              <a:rPr lang="en-US"/>
               <a:t>Second level</a:t>
             </a:r>
           </a:p>
           <a:p>
             <a:pPr lvl="2"/>
             <a:r>
-              <a:rPr lang="en-US" smtClean="0"/>
+              <a:rPr lang="en-US"/>
               <a:t>Third level</a:t>
             </a:r>
           </a:p>
           <a:p>
             <a:pPr lvl="3"/>
             <a:r>
-              <a:rPr lang="en-US" smtClean="0"/>
+              <a:rPr lang="en-US"/>
               <a:t>Fourth level</a:t>
             </a:r>
           </a:p>
           <a:p>
             <a:pPr lvl="4"/>
             <a:r>
-              <a:rPr lang="en-US" smtClean="0"/>
+              <a:rPr lang="en-US"/>
               <a:t>Fifth level</a:t>
             </a:r>
-            <a:endParaRPr lang="en-US"/>
           </a:p>
         </p:txBody>
       </p:sp>
@@ -4133,7 +3913,7 @@
           <a:p>
             <a:pPr lvl="0"/>
             <a:r>
-              <a:rPr lang="en-US" smtClean="0"/>
+              <a:rPr lang="en-US"/>
               <a:t>Click to edit Master text styles</a:t>
             </a:r>
           </a:p>
@@ -4189,38 +3969,37 @@
           <a:p>
             <a:pPr lvl="0"/>
             <a:r>
-              <a:rPr lang="en-US" smtClean="0"/>
+              <a:rPr lang="en-US"/>
               <a:t>Click to edit Master text styles</a:t>
             </a:r>
           </a:p>
           <a:p>
             <a:pPr lvl="1"/>
             <a:r>
-              <a:rPr lang="en-US" smtClean="0"/>
+              <a:rPr lang="en-US"/>
               <a:t>Second level</a:t>
             </a:r>
           </a:p>
           <a:p>
             <a:pPr lvl="2"/>
             <a:r>
-              <a:rPr lang="en-US" smtClean="0"/>
+              <a:rPr lang="en-US"/>
               <a:t>Third level</a:t>
             </a:r>
           </a:p>
           <a:p>
             <a:pPr lvl="3"/>
             <a:r>
-              <a:rPr lang="en-US" smtClean="0"/>
+              <a:rPr lang="en-US"/>
               <a:t>Fourth level</a:t>
             </a:r>
           </a:p>
           <a:p>
             <a:pPr lvl="4"/>
             <a:r>
-              <a:rPr lang="en-US" smtClean="0"/>
+              <a:rPr lang="en-US"/>
               <a:t>Fifth level</a:t>
             </a:r>
-            <a:endParaRPr lang="en-US"/>
           </a:p>
         </p:txBody>
       </p:sp>
@@ -4241,7 +4020,7 @@
           <a:p>
             <a:fld id="{5BCAD085-E8A6-8845-BD4E-CB4CCA059FC4}" type="datetimeFigureOut">
               <a:rPr lang="en-US" smtClean="0"/>
-              <a:t>1/27/13</a:t>
+              <a:t>9/19/2026</a:t>
             </a:fld>
             <a:endParaRPr lang="en-US"/>
           </a:p>
@@ -4335,10 +4114,9 @@
           <a:lstStyle/>
           <a:p>
             <a:r>
-              <a:rPr lang="en-US" smtClean="0"/>
+              <a:rPr lang="en-US"/>
               <a:t>Click to edit Master title style</a:t>
             </a:r>
-            <a:endParaRPr lang="en-US"/>
           </a:p>
         </p:txBody>
       </p:sp>
@@ -4359,7 +4137,7 @@
           <a:p>
             <a:fld id="{5BCAD085-E8A6-8845-BD4E-CB4CCA059FC4}" type="datetimeFigureOut">
               <a:rPr lang="en-US" smtClean="0"/>
-              <a:t>1/27/13</a:t>
+              <a:t>9/19/2026</a:t>
             </a:fld>
             <a:endParaRPr lang="en-US"/>
           </a:p>
@@ -4454,7 +4232,7 @@
           <a:p>
             <a:fld id="{5BCAD085-E8A6-8845-BD4E-CB4CCA059FC4}" type="datetimeFigureOut">
               <a:rPr lang="en-US" smtClean="0"/>
-              <a:t>1/27/13</a:t>
+              <a:t>9/19/2026</a:t>
             </a:fld>
             <a:endParaRPr lang="en-US"/>
           </a:p>
@@ -4557,10 +4335,9 @@
           </a:lstStyle>
           <a:p>
             <a:r>
-              <a:rPr lang="en-US" smtClean="0"/>
+              <a:rPr lang="en-US"/>
               <a:t>Click to edit Master title style</a:t>
             </a:r>
-            <a:endParaRPr lang="en-US"/>
           </a:p>
         </p:txBody>
       </p:sp>
@@ -4614,38 +4391,37 @@
           <a:p>
             <a:pPr lvl="0"/>
             <a:r>
-              <a:rPr lang="en-US" smtClean="0"/>
+              <a:rPr lang="en-US"/>
               <a:t>Click to edit Master text styles</a:t>
             </a:r>
           </a:p>
           <a:p>
             <a:pPr lvl="1"/>
             <a:r>
-              <a:rPr lang="en-US" smtClean="0"/>
+              <a:rPr lang="en-US"/>
               <a:t>Second level</a:t>
             </a:r>
           </a:p>
           <a:p>
             <a:pPr lvl="2"/>
             <a:r>
-              <a:rPr lang="en-US" smtClean="0"/>
+              <a:rPr lang="en-US"/>
               <a:t>Third level</a:t>
             </a:r>
           </a:p>
           <a:p>
             <a:pPr lvl="3"/>
             <a:r>
-              <a:rPr lang="en-US" smtClean="0"/>
+              <a:rPr lang="en-US"/>
               <a:t>Fourth level</a:t>
             </a:r>
           </a:p>
           <a:p>
             <a:pPr lvl="4"/>
             <a:r>
-              <a:rPr lang="en-US" smtClean="0"/>
+              <a:rPr lang="en-US"/>
               <a:t>Fifth level</a:t>
             </a:r>
-            <a:endParaRPr lang="en-US"/>
           </a:p>
         </p:txBody>
       </p:sp>
@@ -4708,7 +4484,7 @@
           <a:p>
             <a:pPr lvl="0"/>
             <a:r>
-              <a:rPr lang="en-US" smtClean="0"/>
+              <a:rPr lang="en-US"/>
               <a:t>Click to edit Master text styles</a:t>
             </a:r>
           </a:p>
@@ -4731,7 +4507,7 @@
           <a:p>
             <a:fld id="{5BCAD085-E8A6-8845-BD4E-CB4CCA059FC4}" type="datetimeFigureOut">
               <a:rPr lang="en-US" smtClean="0"/>
-              <a:t>1/27/13</a:t>
+              <a:t>9/19/2026</a:t>
             </a:fld>
             <a:endParaRPr lang="en-US"/>
           </a:p>
@@ -4834,10 +4610,9 @@
           </a:lstStyle>
           <a:p>
             <a:r>
-              <a:rPr lang="en-US" smtClean="0"/>
+              <a:rPr lang="en-US"/>
               <a:t>Click to edit Master title style</a:t>
             </a:r>
-            <a:endParaRPr lang="en-US"/>
           </a:p>
         </p:txBody>
       </p:sp>
@@ -4961,7 +4736,7 @@
           <a:p>
             <a:pPr lvl="0"/>
             <a:r>
-              <a:rPr lang="en-US" smtClean="0"/>
+              <a:rPr lang="en-US"/>
               <a:t>Click to edit Master text styles</a:t>
             </a:r>
           </a:p>
@@ -4984,7 +4759,7 @@
           <a:p>
             <a:fld id="{5BCAD085-E8A6-8845-BD4E-CB4CCA059FC4}" type="datetimeFigureOut">
               <a:rPr lang="en-US" smtClean="0"/>
-              <a:t>1/27/13</a:t>
+              <a:t>9/19/2026</a:t>
             </a:fld>
             <a:endParaRPr lang="en-US"/>
           </a:p>
@@ -5093,10 +4868,9 @@
           <a:lstStyle/>
           <a:p>
             <a:r>
-              <a:rPr lang="en-US" smtClean="0"/>
+              <a:rPr lang="en-US"/>
               <a:t>Click to edit Master title style</a:t>
             </a:r>
-            <a:endParaRPr lang="en-US"/>
           </a:p>
         </p:txBody>
       </p:sp>
@@ -5127,38 +4901,37 @@
           <a:p>
             <a:pPr lvl="0"/>
             <a:r>
-              <a:rPr lang="en-US" smtClean="0"/>
+              <a:rPr lang="en-US"/>
               <a:t>Click to edit Master text styles</a:t>
             </a:r>
           </a:p>
           <a:p>
             <a:pPr lvl="1"/>
             <a:r>
-              <a:rPr lang="en-US" smtClean="0"/>
+              <a:rPr lang="en-US"/>
               <a:t>Second level</a:t>
             </a:r>
           </a:p>
           <a:p>
             <a:pPr lvl="2"/>
             <a:r>
-              <a:rPr lang="en-US" smtClean="0"/>
+              <a:rPr lang="en-US"/>
               <a:t>Third level</a:t>
             </a:r>
           </a:p>
           <a:p>
             <a:pPr lvl="3"/>
             <a:r>
-              <a:rPr lang="en-US" smtClean="0"/>
+              <a:rPr lang="en-US"/>
               <a:t>Fourth level</a:t>
             </a:r>
           </a:p>
           <a:p>
             <a:pPr lvl="4"/>
             <a:r>
-              <a:rPr lang="en-US" smtClean="0"/>
+              <a:rPr lang="en-US"/>
               <a:t>Fifth level</a:t>
             </a:r>
-            <a:endParaRPr lang="en-US"/>
           </a:p>
         </p:txBody>
       </p:sp>
@@ -5197,7 +4970,7 @@
           <a:p>
             <a:fld id="{5BCAD085-E8A6-8845-BD4E-CB4CCA059FC4}" type="datetimeFigureOut">
               <a:rPr lang="en-US" smtClean="0"/>
-              <a:t>1/27/13</a:t>
+              <a:t>9/19/2026</a:t>
             </a:fld>
             <a:endParaRPr lang="en-US"/>
           </a:p>
@@ -5556,7 +5329,7 @@
 </file>
 
 <file path=ppt/slides/slide1.xml><?xml version="1.0" encoding="utf-8"?>
-<p:sld xmlns:a="http://schemas.openxmlformats.org/drawingml/2006/main" xmlns:p="http://schemas.openxmlformats.org/presentationml/2006/main" xmlns:r="http://schemas.openxmlformats.org/officeDocument/2006/relationships">
+<p:sld xmlns:a="http://schemas.openxmlformats.org/drawingml/2006/main" xmlns:r="http://schemas.openxmlformats.org/officeDocument/2006/relationships" xmlns:p="http://schemas.openxmlformats.org/presentationml/2006/main">
   <p:cSld>
     <p:spTree>
       <p:nvGrpSpPr>
@@ -5564,7 +5337,14 @@
         <p:cNvGrpSpPr/>
         <p:nvPr/>
       </p:nvGrpSpPr>
-      <p:grpSpPr/>
+      <p:grpSpPr>
+        <a:xfrm>
+          <a:off x="0" y="0"/>
+          <a:ext cx="0" cy="0"/>
+          <a:chOff x="0" y="0"/>
+          <a:chExt cx="0" cy="0"/>
+        </a:xfrm>
+      </p:grpSpPr>
       <p:sp>
         <p:nvSpPr>
           <p:cNvPr id="2" name="Rectangle 1"/>
@@ -5606,6 +5386,7 @@
           <a:lstStyle/>
           <a:p>
             <a:pPr algn="ctr"/>
+            <a:endParaRPr/>
           </a:p>
         </p:txBody>
       </p:sp>
@@ -5650,6 +5431,7 @@
           <a:lstStyle/>
           <a:p>
             <a:pPr algn="ctr"/>
+            <a:endParaRPr/>
           </a:p>
         </p:txBody>
       </p:sp>
@@ -5694,6 +5476,7 @@
           <a:lstStyle/>
           <a:p>
             <a:pPr algn="ctr"/>
+            <a:endParaRPr/>
           </a:p>
         </p:txBody>
       </p:sp>
@@ -5738,6 +5521,7 @@
           <a:lstStyle/>
           <a:p>
             <a:pPr algn="ctr"/>
+            <a:endParaRPr/>
           </a:p>
         </p:txBody>
       </p:sp>
@@ -5782,6 +5566,7 @@
           <a:lstStyle/>
           <a:p>
             <a:pPr algn="ctr"/>
+            <a:endParaRPr/>
           </a:p>
         </p:txBody>
       </p:sp>
@@ -5826,6 +5611,7 @@
           <a:lstStyle/>
           <a:p>
             <a:pPr algn="ctr"/>
+            <a:endParaRPr/>
           </a:p>
         </p:txBody>
       </p:sp>
@@ -5870,6 +5656,7 @@
           <a:lstStyle/>
           <a:p>
             <a:pPr algn="ctr"/>
+            <a:endParaRPr/>
           </a:p>
         </p:txBody>
       </p:sp>
@@ -5914,6 +5701,7 @@
           <a:lstStyle/>
           <a:p>
             <a:pPr algn="ctr"/>
+            <a:endParaRPr/>
           </a:p>
         </p:txBody>
       </p:sp>
@@ -5958,6 +5746,7 @@
           <a:lstStyle/>
           <a:p>
             <a:pPr algn="ctr"/>
+            <a:endParaRPr/>
           </a:p>
         </p:txBody>
       </p:sp>
@@ -6002,6 +5791,7 @@
           <a:lstStyle/>
           <a:p>
             <a:pPr algn="ctr"/>
+            <a:endParaRPr/>
           </a:p>
         </p:txBody>
       </p:sp>
@@ -6192,6 +5982,42 @@
           </a:p>
         </p:txBody>
       </p:sp>
+      <p:pic>
+        <p:nvPicPr>
+          <p:cNvPr id="18" name="图片 17">
+            <a:extLst>
+              <a:ext uri="{FF2B5EF4-FFF2-40B4-BE49-F238E27FC236}">
+                <a16:creationId xmlns:a16="http://schemas.microsoft.com/office/drawing/2014/main" id="{42CA52FC-FEDD-192D-001D-929C2B967AE4}"/>
+              </a:ext>
+            </a:extLst>
+          </p:cNvPr>
+          <p:cNvPicPr>
+            <a:picLocks noChangeAspect="1"/>
+          </p:cNvPicPr>
+          <p:nvPr/>
+        </p:nvPicPr>
+        <p:blipFill>
+          <a:blip r:embed="rId3" cstate="print">
+            <a:extLst>
+              <a:ext uri="{28A0092B-C50C-407E-A947-70E740481C1C}">
+                <a14:useLocalDpi xmlns:a14="http://schemas.microsoft.com/office/drawing/2010/main" val="0"/>
+              </a:ext>
+            </a:extLst>
+          </a:blip>
+          <a:stretch>
+            <a:fillRect/>
+          </a:stretch>
+        </p:blipFill>
+        <p:spPr>
+          <a:xfrm>
+            <a:off x="10024317" y="781553"/>
+            <a:ext cx="1458542" cy="1162447"/>
+          </a:xfrm>
+          <a:prstGeom prst="rect">
+            <a:avLst/>
+          </a:prstGeom>
+        </p:spPr>
+      </p:pic>
     </p:spTree>
   </p:cSld>
   <p:clrMapOvr>
@@ -6201,7 +6027,7 @@
 </file>
 
 <file path=ppt/slides/slide10.xml><?xml version="1.0" encoding="utf-8"?>
-<p:sld xmlns:a="http://schemas.openxmlformats.org/drawingml/2006/main" xmlns:p="http://schemas.openxmlformats.org/presentationml/2006/main" xmlns:r="http://schemas.openxmlformats.org/officeDocument/2006/relationships">
+<p:sld xmlns:a="http://schemas.openxmlformats.org/drawingml/2006/main" xmlns:r="http://schemas.openxmlformats.org/officeDocument/2006/relationships" xmlns:p="http://schemas.openxmlformats.org/presentationml/2006/main">
   <p:cSld>
     <p:spTree>
       <p:nvGrpSpPr>
@@ -6209,7 +6035,14 @@
         <p:cNvGrpSpPr/>
         <p:nvPr/>
       </p:nvGrpSpPr>
-      <p:grpSpPr/>
+      <p:grpSpPr>
+        <a:xfrm>
+          <a:off x="0" y="0"/>
+          <a:ext cx="0" cy="0"/>
+          <a:chOff x="0" y="0"/>
+          <a:chExt cx="0" cy="0"/>
+        </a:xfrm>
+      </p:grpSpPr>
       <p:sp>
         <p:nvSpPr>
           <p:cNvPr id="2" name="TextBox 1"/>
@@ -6286,6 +6119,7 @@
           <a:lstStyle/>
           <a:p>
             <a:pPr algn="ctr"/>
+            <a:endParaRPr/>
           </a:p>
         </p:txBody>
       </p:sp>
@@ -6365,6 +6199,7 @@
           <a:lstStyle/>
           <a:p>
             <a:pPr algn="ctr"/>
+            <a:endParaRPr/>
           </a:p>
         </p:txBody>
       </p:sp>
@@ -6514,6 +6349,7 @@
           <a:lstStyle/>
           <a:p>
             <a:pPr algn="ctr"/>
+            <a:endParaRPr/>
           </a:p>
         </p:txBody>
       </p:sp>
@@ -6663,6 +6499,7 @@
           <a:lstStyle/>
           <a:p>
             <a:pPr algn="ctr"/>
+            <a:endParaRPr/>
           </a:p>
         </p:txBody>
       </p:sp>
@@ -6812,6 +6649,7 @@
           <a:lstStyle/>
           <a:p>
             <a:pPr algn="ctr"/>
+            <a:endParaRPr/>
           </a:p>
         </p:txBody>
       </p:sp>
@@ -6961,6 +6799,7 @@
           <a:lstStyle/>
           <a:p>
             <a:pPr algn="ctr"/>
+            <a:endParaRPr/>
           </a:p>
         </p:txBody>
       </p:sp>
@@ -7110,6 +6949,7 @@
           <a:lstStyle/>
           <a:p>
             <a:pPr algn="ctr"/>
+            <a:endParaRPr/>
           </a:p>
         </p:txBody>
       </p:sp>
@@ -7259,6 +7099,7 @@
           <a:lstStyle/>
           <a:p>
             <a:pPr algn="ctr"/>
+            <a:endParaRPr/>
           </a:p>
         </p:txBody>
       </p:sp>
@@ -7303,6 +7144,7 @@
           <a:lstStyle/>
           <a:p>
             <a:pPr algn="ctr"/>
+            <a:endParaRPr/>
           </a:p>
         </p:txBody>
       </p:sp>
@@ -7385,7 +7227,7 @@
 </file>
 
 <file path=ppt/slides/slide11.xml><?xml version="1.0" encoding="utf-8"?>
-<p:sld xmlns:a="http://schemas.openxmlformats.org/drawingml/2006/main" xmlns:p="http://schemas.openxmlformats.org/presentationml/2006/main" xmlns:r="http://schemas.openxmlformats.org/officeDocument/2006/relationships">
+<p:sld xmlns:a="http://schemas.openxmlformats.org/drawingml/2006/main" xmlns:r="http://schemas.openxmlformats.org/officeDocument/2006/relationships" xmlns:p="http://schemas.openxmlformats.org/presentationml/2006/main">
   <p:cSld>
     <p:spTree>
       <p:nvGrpSpPr>
@@ -7393,7 +7235,14 @@
         <p:cNvGrpSpPr/>
         <p:nvPr/>
       </p:nvGrpSpPr>
-      <p:grpSpPr/>
+      <p:grpSpPr>
+        <a:xfrm>
+          <a:off x="0" y="0"/>
+          <a:ext cx="0" cy="0"/>
+          <a:chOff x="0" y="0"/>
+          <a:chExt cx="0" cy="0"/>
+        </a:xfrm>
+      </p:grpSpPr>
       <p:sp>
         <p:nvSpPr>
           <p:cNvPr id="2" name="TextBox 1"/>
@@ -7470,6 +7319,7 @@
           <a:lstStyle/>
           <a:p>
             <a:pPr algn="ctr"/>
+            <a:endParaRPr/>
           </a:p>
         </p:txBody>
       </p:sp>
@@ -7549,6 +7399,7 @@
           <a:lstStyle/>
           <a:p>
             <a:pPr algn="ctr"/>
+            <a:endParaRPr/>
           </a:p>
         </p:txBody>
       </p:sp>
@@ -7593,6 +7444,7 @@
           <a:lstStyle/>
           <a:p>
             <a:pPr algn="ctr"/>
+            <a:endParaRPr/>
           </a:p>
         </p:txBody>
       </p:sp>
@@ -8092,6 +7944,7 @@
           <a:lstStyle/>
           <a:p>
             <a:pPr algn="ctr"/>
+            <a:endParaRPr/>
           </a:p>
         </p:txBody>
       </p:sp>
@@ -8136,6 +7989,7 @@
           <a:lstStyle/>
           <a:p>
             <a:pPr algn="ctr"/>
+            <a:endParaRPr/>
           </a:p>
         </p:txBody>
       </p:sp>
@@ -8635,6 +8489,7 @@
           <a:lstStyle/>
           <a:p>
             <a:pPr algn="ctr"/>
+            <a:endParaRPr/>
           </a:p>
         </p:txBody>
       </p:sp>
@@ -8679,6 +8534,7 @@
           <a:lstStyle/>
           <a:p>
             <a:pPr algn="ctr"/>
+            <a:endParaRPr/>
           </a:p>
         </p:txBody>
       </p:sp>
@@ -8761,7 +8617,7 @@
 </file>
 
 <file path=ppt/slides/slide12.xml><?xml version="1.0" encoding="utf-8"?>
-<p:sld xmlns:a="http://schemas.openxmlformats.org/drawingml/2006/main" xmlns:p="http://schemas.openxmlformats.org/presentationml/2006/main" xmlns:r="http://schemas.openxmlformats.org/officeDocument/2006/relationships">
+<p:sld xmlns:a="http://schemas.openxmlformats.org/drawingml/2006/main" xmlns:r="http://schemas.openxmlformats.org/officeDocument/2006/relationships" xmlns:p="http://schemas.openxmlformats.org/presentationml/2006/main">
   <p:cSld>
     <p:spTree>
       <p:nvGrpSpPr>
@@ -8769,7 +8625,14 @@
         <p:cNvGrpSpPr/>
         <p:nvPr/>
       </p:nvGrpSpPr>
-      <p:grpSpPr/>
+      <p:grpSpPr>
+        <a:xfrm>
+          <a:off x="0" y="0"/>
+          <a:ext cx="0" cy="0"/>
+          <a:chOff x="0" y="0"/>
+          <a:chExt cx="0" cy="0"/>
+        </a:xfrm>
+      </p:grpSpPr>
       <p:sp>
         <p:nvSpPr>
           <p:cNvPr id="2" name="Rectangle 1"/>
@@ -8811,6 +8674,7 @@
           <a:lstStyle/>
           <a:p>
             <a:pPr algn="ctr"/>
+            <a:endParaRPr/>
           </a:p>
         </p:txBody>
       </p:sp>
@@ -8855,6 +8719,7 @@
           <a:lstStyle/>
           <a:p>
             <a:pPr algn="ctr"/>
+            <a:endParaRPr/>
           </a:p>
         </p:txBody>
       </p:sp>
@@ -8934,6 +8799,7 @@
           <a:lstStyle/>
           <a:p>
             <a:pPr algn="ctr"/>
+            <a:endParaRPr/>
           </a:p>
         </p:txBody>
       </p:sp>
@@ -9016,7 +8882,7 @@
 </file>
 
 <file path=ppt/slides/slide13.xml><?xml version="1.0" encoding="utf-8"?>
-<p:sld xmlns:a="http://schemas.openxmlformats.org/drawingml/2006/main" xmlns:p="http://schemas.openxmlformats.org/presentationml/2006/main" xmlns:r="http://schemas.openxmlformats.org/officeDocument/2006/relationships">
+<p:sld xmlns:a="http://schemas.openxmlformats.org/drawingml/2006/main" xmlns:r="http://schemas.openxmlformats.org/officeDocument/2006/relationships" xmlns:p="http://schemas.openxmlformats.org/presentationml/2006/main">
   <p:cSld>
     <p:spTree>
       <p:nvGrpSpPr>
@@ -9024,7 +8890,14 @@
         <p:cNvGrpSpPr/>
         <p:nvPr/>
       </p:nvGrpSpPr>
-      <p:grpSpPr/>
+      <p:grpSpPr>
+        <a:xfrm>
+          <a:off x="0" y="0"/>
+          <a:ext cx="0" cy="0"/>
+          <a:chOff x="0" y="0"/>
+          <a:chExt cx="0" cy="0"/>
+        </a:xfrm>
+      </p:grpSpPr>
       <p:sp>
         <p:nvSpPr>
           <p:cNvPr id="2" name="TextBox 1"/>
@@ -9101,6 +8974,7 @@
           <a:lstStyle/>
           <a:p>
             <a:pPr algn="ctr"/>
+            <a:endParaRPr/>
           </a:p>
         </p:txBody>
       </p:sp>
@@ -9180,6 +9054,7 @@
           <a:lstStyle/>
           <a:p>
             <a:pPr algn="ctr"/>
+            <a:endParaRPr/>
           </a:p>
         </p:txBody>
       </p:sp>
@@ -9329,6 +9204,7 @@
           <a:lstStyle/>
           <a:p>
             <a:pPr algn="ctr"/>
+            <a:endParaRPr/>
           </a:p>
         </p:txBody>
       </p:sp>
@@ -9478,6 +9354,7 @@
           <a:lstStyle/>
           <a:p>
             <a:pPr algn="ctr"/>
+            <a:endParaRPr/>
           </a:p>
         </p:txBody>
       </p:sp>
@@ -9627,6 +9504,7 @@
           <a:lstStyle/>
           <a:p>
             <a:pPr algn="ctr"/>
+            <a:endParaRPr/>
           </a:p>
         </p:txBody>
       </p:sp>
@@ -9776,6 +9654,7 @@
           <a:lstStyle/>
           <a:p>
             <a:pPr algn="ctr"/>
+            <a:endParaRPr/>
           </a:p>
         </p:txBody>
       </p:sp>
@@ -9788,7 +9667,7 @@
           <p:nvPr/>
         </p:nvPicPr>
         <p:blipFill>
-          <a:blip r:embed="rId2"/>
+          <a:blip r:embed="rId3"/>
           <a:stretch>
             <a:fillRect/>
           </a:stretch>
@@ -9844,6 +9723,7 @@
           <a:lstStyle/>
           <a:p>
             <a:pPr algn="ctr"/>
+            <a:endParaRPr/>
           </a:p>
         </p:txBody>
       </p:sp>
@@ -9888,6 +9768,7 @@
           <a:lstStyle/>
           <a:p>
             <a:pPr algn="ctr"/>
+            <a:endParaRPr/>
           </a:p>
         </p:txBody>
       </p:sp>
@@ -9970,7 +9851,7 @@
 </file>
 
 <file path=ppt/slides/slide14.xml><?xml version="1.0" encoding="utf-8"?>
-<p:sld xmlns:a="http://schemas.openxmlformats.org/drawingml/2006/main" xmlns:p="http://schemas.openxmlformats.org/presentationml/2006/main" xmlns:r="http://schemas.openxmlformats.org/officeDocument/2006/relationships">
+<p:sld xmlns:a="http://schemas.openxmlformats.org/drawingml/2006/main" xmlns:r="http://schemas.openxmlformats.org/officeDocument/2006/relationships" xmlns:p="http://schemas.openxmlformats.org/presentationml/2006/main">
   <p:cSld>
     <p:spTree>
       <p:nvGrpSpPr>
@@ -9978,7 +9859,14 @@
         <p:cNvGrpSpPr/>
         <p:nvPr/>
       </p:nvGrpSpPr>
-      <p:grpSpPr/>
+      <p:grpSpPr>
+        <a:xfrm>
+          <a:off x="0" y="0"/>
+          <a:ext cx="0" cy="0"/>
+          <a:chOff x="0" y="0"/>
+          <a:chExt cx="0" cy="0"/>
+        </a:xfrm>
+      </p:grpSpPr>
       <p:sp>
         <p:nvSpPr>
           <p:cNvPr id="2" name="TextBox 1"/>
@@ -10055,6 +9943,7 @@
           <a:lstStyle/>
           <a:p>
             <a:pPr algn="ctr"/>
+            <a:endParaRPr/>
           </a:p>
         </p:txBody>
       </p:sp>
@@ -10134,6 +10023,7 @@
           <a:lstStyle/>
           <a:p>
             <a:pPr algn="ctr"/>
+            <a:endParaRPr/>
           </a:p>
         </p:txBody>
       </p:sp>
@@ -10195,15 +10085,7 @@
           <a:lstStyle/>
           <a:p>
             <a:pPr algn="l"/>
-            <a:r>
-              <a:rPr sz="2000" b="1">
-                <a:solidFill>
-                  <a:srgbClr val="1F3A68"/>
-                </a:solidFill>
-                <a:latin typeface="Microsoft YaHei"/>
-              </a:rPr>
-              <a:t/>
-            </a:r>
+            <a:endParaRPr/>
           </a:p>
         </p:txBody>
       </p:sp>
@@ -10283,6 +10165,7 @@
           <a:lstStyle/>
           <a:p>
             <a:pPr algn="ctr"/>
+            <a:endParaRPr/>
           </a:p>
         </p:txBody>
       </p:sp>
@@ -10344,15 +10227,7 @@
           <a:lstStyle/>
           <a:p>
             <a:pPr algn="l"/>
-            <a:r>
-              <a:rPr sz="2000" b="1">
-                <a:solidFill>
-                  <a:srgbClr val="1F3A68"/>
-                </a:solidFill>
-                <a:latin typeface="Microsoft YaHei"/>
-              </a:rPr>
-              <a:t/>
-            </a:r>
+            <a:endParaRPr/>
           </a:p>
         </p:txBody>
       </p:sp>
@@ -10432,6 +10307,7 @@
           <a:lstStyle/>
           <a:p>
             <a:pPr algn="ctr"/>
+            <a:endParaRPr/>
           </a:p>
         </p:txBody>
       </p:sp>
@@ -10581,6 +10457,7 @@
           <a:lstStyle/>
           <a:p>
             <a:pPr algn="ctr"/>
+            <a:endParaRPr/>
           </a:p>
         </p:txBody>
       </p:sp>
@@ -10625,6 +10502,7 @@
           <a:lstStyle/>
           <a:p>
             <a:pPr algn="ctr"/>
+            <a:endParaRPr/>
           </a:p>
         </p:txBody>
       </p:sp>
@@ -10706,6 +10584,7 @@
           <a:lstStyle/>
           <a:p>
             <a:pPr algn="ctr"/>
+            <a:endParaRPr/>
           </a:p>
         </p:txBody>
       </p:sp>
@@ -10770,34 +10649,7 @@
                 </a:solidFill>
                 <a:latin typeface="Consolas"/>
               </a:rPr>
-              <a:t>(</a:t>
-            </a:r>
-            <a:r>
-              <a:rPr sz="1100">
-                <a:solidFill>
-                  <a:srgbClr val="303030"/>
-                </a:solidFill>
-                <a:latin typeface="Consolas"/>
-              </a:rPr>
-              <a:t>slot</a:t>
-            </a:r>
-            <a:r>
-              <a:rPr sz="1100">
-                <a:solidFill>
-                  <a:srgbClr val="303030"/>
-                </a:solidFill>
-                <a:latin typeface="Consolas"/>
-              </a:rPr>
-              <a:t>)</a:t>
-            </a:r>
-            <a:r>
-              <a:rPr sz="1100">
-                <a:solidFill>
-                  <a:srgbClr val="303030"/>
-                </a:solidFill>
-                <a:latin typeface="Consolas"/>
-              </a:rPr>
-              <a:t>:</a:t>
+              <a:t>(slot):</a:t>
             </a:r>
           </a:p>
           <a:p>
@@ -10813,124 +10665,7 @@
                 </a:solidFill>
                 <a:latin typeface="Consolas"/>
               </a:rPr>
-              <a:t>    </a:t>
-            </a:r>
-            <a:r>
-              <a:rPr sz="1100">
-                <a:solidFill>
-                  <a:srgbClr val="303030"/>
-                </a:solidFill>
-                <a:latin typeface="Consolas"/>
-              </a:rPr>
-              <a:t>parts</a:t>
-            </a:r>
-            <a:r>
-              <a:rPr sz="1100">
-                <a:solidFill>
-                  <a:srgbClr val="303030"/>
-                </a:solidFill>
-                <a:latin typeface="Consolas"/>
-              </a:rPr>
-              <a:t> </a:t>
-            </a:r>
-            <a:r>
-              <a:rPr sz="1100">
-                <a:solidFill>
-                  <a:srgbClr val="303030"/>
-                </a:solidFill>
-                <a:latin typeface="Consolas"/>
-              </a:rPr>
-              <a:t>=</a:t>
-            </a:r>
-            <a:r>
-              <a:rPr sz="1100">
-                <a:solidFill>
-                  <a:srgbClr val="303030"/>
-                </a:solidFill>
-                <a:latin typeface="Consolas"/>
-              </a:rPr>
-              <a:t> </a:t>
-            </a:r>
-            <a:r>
-              <a:rPr sz="1100">
-                <a:solidFill>
-                  <a:srgbClr val="303030"/>
-                </a:solidFill>
-                <a:latin typeface="Consolas"/>
-              </a:rPr>
-              <a:t>[</a:t>
-            </a:r>
-            <a:r>
-              <a:rPr sz="1100">
-                <a:solidFill>
-                  <a:srgbClr val="303030"/>
-                </a:solidFill>
-                <a:latin typeface="Consolas"/>
-              </a:rPr>
-              <a:t>阶段</a:t>
-            </a:r>
-            <a:r>
-              <a:rPr sz="1100">
-                <a:solidFill>
-                  <a:srgbClr val="303030"/>
-                </a:solidFill>
-                <a:latin typeface="Consolas"/>
-              </a:rPr>
-              <a:t>,</a:t>
-            </a:r>
-            <a:r>
-              <a:rPr sz="1100">
-                <a:solidFill>
-                  <a:srgbClr val="303030"/>
-                </a:solidFill>
-                <a:latin typeface="Consolas"/>
-              </a:rPr>
-              <a:t> </a:t>
-            </a:r>
-            <a:r>
-              <a:rPr sz="1100">
-                <a:solidFill>
-                  <a:srgbClr val="303030"/>
-                </a:solidFill>
-                <a:latin typeface="Consolas"/>
-              </a:rPr>
-              <a:t>目标</a:t>
-            </a:r>
-            <a:r>
-              <a:rPr sz="1100">
-                <a:solidFill>
-                  <a:srgbClr val="303030"/>
-                </a:solidFill>
-                <a:latin typeface="Consolas"/>
-              </a:rPr>
-              <a:t>,</a:t>
-            </a:r>
-            <a:r>
-              <a:rPr sz="1100">
-                <a:solidFill>
-                  <a:srgbClr val="303030"/>
-                </a:solidFill>
-                <a:latin typeface="Consolas"/>
-              </a:rPr>
-              <a:t> </a:t>
-            </a:r>
-            <a:r>
-              <a:rPr sz="1100">
-                <a:solidFill>
-                  <a:srgbClr val="303030"/>
-                </a:solidFill>
-                <a:latin typeface="Consolas"/>
-              </a:rPr>
-              <a:t>约束</a:t>
-            </a:r>
-            <a:r>
-              <a:rPr sz="1100">
-                <a:solidFill>
-                  <a:srgbClr val="303030"/>
-                </a:solidFill>
-                <a:latin typeface="Consolas"/>
-              </a:rPr>
-              <a:t>]</a:t>
+              <a:t>    parts = [阶段, 目标, 约束]</a:t>
             </a:r>
           </a:p>
           <a:p>
@@ -10964,43 +10699,7 @@
                 </a:solidFill>
                 <a:latin typeface="Consolas"/>
               </a:rPr>
-              <a:t> </a:t>
-            </a:r>
-            <a:r>
-              <a:rPr sz="1100">
-                <a:solidFill>
-                  <a:srgbClr val="303030"/>
-                </a:solidFill>
-                <a:latin typeface="Consolas"/>
-              </a:rPr>
-              <a:t>slot</a:t>
-            </a:r>
-            <a:r>
-              <a:rPr sz="1100">
-                <a:solidFill>
-                  <a:srgbClr val="303030"/>
-                </a:solidFill>
-                <a:latin typeface="Consolas"/>
-              </a:rPr>
-              <a:t>.</a:t>
-            </a:r>
-            <a:r>
-              <a:rPr sz="1100">
-                <a:solidFill>
-                  <a:srgbClr val="303030"/>
-                </a:solidFill>
-                <a:latin typeface="Consolas"/>
-              </a:rPr>
-              <a:t>loaded_briefs</a:t>
-            </a:r>
-            <a:r>
-              <a:rPr sz="1100">
-                <a:solidFill>
-                  <a:srgbClr val="303030"/>
-                </a:solidFill>
-                <a:latin typeface="Consolas"/>
-              </a:rPr>
-              <a:t>:</a:t>
+              <a:t> slot.loaded_briefs:</a:t>
             </a:r>
           </a:p>
           <a:p>
@@ -11016,7 +10715,16 @@
                 </a:solidFill>
                 <a:latin typeface="Consolas"/>
               </a:rPr>
-              <a:t>        </a:t>
+              <a:t>        parts.</a:t>
+            </a:r>
+            <a:r>
+              <a:rPr sz="1100" b="1">
+                <a:solidFill>
+                  <a:srgbClr val="2F6EBA"/>
+                </a:solidFill>
+                <a:latin typeface="Consolas"/>
+              </a:rPr>
+              <a:t>append</a:t>
             </a:r>
             <a:r>
               <a:rPr sz="1100">
@@ -11025,88 +10733,25 @@
                 </a:solidFill>
                 <a:latin typeface="Consolas"/>
               </a:rPr>
-              <a:t>parts</a:t>
+              <a:t>(</a:t>
             </a:r>
             <a:r>
               <a:rPr sz="1100">
                 <a:solidFill>
+                  <a:srgbClr val="C0504D"/>
+                </a:solidFill>
+                <a:latin typeface="Consolas"/>
+              </a:rPr>
+              <a:t>'【装载记忆】'</a:t>
+            </a:r>
+            <a:r>
+              <a:rPr sz="1100">
+                <a:solidFill>
                   <a:srgbClr val="303030"/>
                 </a:solidFill>
                 <a:latin typeface="Consolas"/>
               </a:rPr>
-              <a:t>.</a:t>
-            </a:r>
-            <a:r>
-              <a:rPr sz="1100" b="1">
-                <a:solidFill>
-                  <a:srgbClr val="2F6EBA"/>
-                </a:solidFill>
-                <a:latin typeface="Consolas"/>
-              </a:rPr>
-              <a:t>append</a:t>
-            </a:r>
-            <a:r>
-              <a:rPr sz="1100">
-                <a:solidFill>
-                  <a:srgbClr val="303030"/>
-                </a:solidFill>
-                <a:latin typeface="Consolas"/>
-              </a:rPr>
-              <a:t>(</a:t>
-            </a:r>
-            <a:r>
-              <a:rPr sz="1100">
-                <a:solidFill>
-                  <a:srgbClr val="C0504D"/>
-                </a:solidFill>
-                <a:latin typeface="Consolas"/>
-              </a:rPr>
-              <a:t>'【装载记忆】'</a:t>
-            </a:r>
-            <a:r>
-              <a:rPr sz="1100">
-                <a:solidFill>
-                  <a:srgbClr val="303030"/>
-                </a:solidFill>
-                <a:latin typeface="Consolas"/>
-              </a:rPr>
-              <a:t> </a:t>
-            </a:r>
-            <a:r>
-              <a:rPr sz="1100">
-                <a:solidFill>
-                  <a:srgbClr val="303030"/>
-                </a:solidFill>
-                <a:latin typeface="Consolas"/>
-              </a:rPr>
-              <a:t>+</a:t>
-            </a:r>
-            <a:r>
-              <a:rPr sz="1100">
-                <a:solidFill>
-                  <a:srgbClr val="303030"/>
-                </a:solidFill>
-                <a:latin typeface="Consolas"/>
-              </a:rPr>
-              <a:t> </a:t>
-            </a:r>
-            <a:r>
-              <a:rPr sz="1100">
-                <a:solidFill>
-                  <a:srgbClr val="303030"/>
-                </a:solidFill>
-                <a:latin typeface="Consolas"/>
-              </a:rPr>
-              <a:t>briefs</a:t>
-            </a:r>
-            <a:r>
-              <a:rPr sz="1100">
-                <a:solidFill>
-                  <a:srgbClr val="303030"/>
-                </a:solidFill>
-                <a:latin typeface="Consolas"/>
-              </a:rPr>
-              <a:t>)</a:t>
+              <a:t> + briefs)</a:t>
             </a:r>
           </a:p>
           <a:p>
@@ -11122,7 +10767,16 @@
                 </a:solidFill>
                 <a:latin typeface="Consolas"/>
               </a:rPr>
-              <a:t>    </a:t>
+              <a:t>    parts.</a:t>
+            </a:r>
+            <a:r>
+              <a:rPr sz="1100" b="1">
+                <a:solidFill>
+                  <a:srgbClr val="2F6EBA"/>
+                </a:solidFill>
+                <a:latin typeface="Consolas"/>
+              </a:rPr>
+              <a:t>append</a:t>
             </a:r>
             <a:r>
               <a:rPr sz="1100">
@@ -11131,52 +10785,7 @@
                 </a:solidFill>
                 <a:latin typeface="Consolas"/>
               </a:rPr>
-              <a:t>parts</a:t>
-            </a:r>
-            <a:r>
-              <a:rPr sz="1100">
-                <a:solidFill>
-                  <a:srgbClr val="303030"/>
-                </a:solidFill>
-                <a:latin typeface="Consolas"/>
-              </a:rPr>
-              <a:t>.</a:t>
-            </a:r>
-            <a:r>
-              <a:rPr sz="1100" b="1">
-                <a:solidFill>
-                  <a:srgbClr val="2F6EBA"/>
-                </a:solidFill>
-                <a:latin typeface="Consolas"/>
-              </a:rPr>
-              <a:t>append</a:t>
-            </a:r>
-            <a:r>
-              <a:rPr sz="1100">
-                <a:solidFill>
-                  <a:srgbClr val="303030"/>
-                </a:solidFill>
-                <a:latin typeface="Consolas"/>
-              </a:rPr>
-              <a:t>(</a:t>
-            </a:r>
-            <a:r>
-              <a:rPr sz="1100">
-                <a:solidFill>
-                  <a:srgbClr val="303030"/>
-                </a:solidFill>
-                <a:latin typeface="Consolas"/>
-              </a:rPr>
-              <a:t>查询列表</a:t>
-            </a:r>
-            <a:r>
-              <a:rPr sz="1100">
-                <a:solidFill>
-                  <a:srgbClr val="303030"/>
-                </a:solidFill>
-                <a:latin typeface="Consolas"/>
-              </a:rPr>
-              <a:t>)</a:t>
+              <a:t>(查询列表)</a:t>
             </a:r>
           </a:p>
           <a:p>
@@ -11192,7 +10801,16 @@
                 </a:solidFill>
                 <a:latin typeface="Consolas"/>
               </a:rPr>
-              <a:t>    </a:t>
+              <a:t>    parts.</a:t>
+            </a:r>
+            <a:r>
+              <a:rPr sz="1100" b="1">
+                <a:solidFill>
+                  <a:srgbClr val="2F6EBA"/>
+                </a:solidFill>
+                <a:latin typeface="Consolas"/>
+              </a:rPr>
+              <a:t>append</a:t>
             </a:r>
             <a:r>
               <a:rPr sz="1100">
@@ -11201,97 +10819,25 @@
                 </a:solidFill>
                 <a:latin typeface="Consolas"/>
               </a:rPr>
-              <a:t>parts</a:t>
+              <a:t>(最新消息[-</a:t>
             </a:r>
             <a:r>
               <a:rPr sz="1100">
                 <a:solidFill>
+                  <a:srgbClr val="7B4FA6"/>
+                </a:solidFill>
+                <a:latin typeface="Consolas"/>
+              </a:rPr>
+              <a:t>20</a:t>
+            </a:r>
+            <a:r>
+              <a:rPr sz="1100">
+                <a:solidFill>
                   <a:srgbClr val="303030"/>
                 </a:solidFill>
                 <a:latin typeface="Consolas"/>
               </a:rPr>
-              <a:t>.</a:t>
-            </a:r>
-            <a:r>
-              <a:rPr sz="1100" b="1">
-                <a:solidFill>
-                  <a:srgbClr val="2F6EBA"/>
-                </a:solidFill>
-                <a:latin typeface="Consolas"/>
-              </a:rPr>
-              <a:t>append</a:t>
-            </a:r>
-            <a:r>
-              <a:rPr sz="1100">
-                <a:solidFill>
-                  <a:srgbClr val="303030"/>
-                </a:solidFill>
-                <a:latin typeface="Consolas"/>
-              </a:rPr>
-              <a:t>(</a:t>
-            </a:r>
-            <a:r>
-              <a:rPr sz="1100">
-                <a:solidFill>
-                  <a:srgbClr val="303030"/>
-                </a:solidFill>
-                <a:latin typeface="Consolas"/>
-              </a:rPr>
-              <a:t>最新消息</a:t>
-            </a:r>
-            <a:r>
-              <a:rPr sz="1100">
-                <a:solidFill>
-                  <a:srgbClr val="303030"/>
-                </a:solidFill>
-                <a:latin typeface="Consolas"/>
-              </a:rPr>
-              <a:t>[</a:t>
-            </a:r>
-            <a:r>
-              <a:rPr sz="1100">
-                <a:solidFill>
-                  <a:srgbClr val="303030"/>
-                </a:solidFill>
-                <a:latin typeface="Consolas"/>
-              </a:rPr>
-              <a:t>-</a:t>
-            </a:r>
-            <a:r>
-              <a:rPr sz="1100">
-                <a:solidFill>
-                  <a:srgbClr val="7B4FA6"/>
-                </a:solidFill>
-                <a:latin typeface="Consolas"/>
-              </a:rPr>
-              <a:t>20</a:t>
-            </a:r>
-            <a:r>
-              <a:rPr sz="1100">
-                <a:solidFill>
-                  <a:srgbClr val="303030"/>
-                </a:solidFill>
-                <a:latin typeface="Consolas"/>
-              </a:rPr>
-              <a:t>:</a:t>
-            </a:r>
-            <a:r>
-              <a:rPr sz="1100">
-                <a:solidFill>
-                  <a:srgbClr val="303030"/>
-                </a:solidFill>
-                <a:latin typeface="Consolas"/>
-              </a:rPr>
-              <a:t>]</a:t>
-            </a:r>
-            <a:r>
-              <a:rPr sz="1100">
-                <a:solidFill>
-                  <a:srgbClr val="303030"/>
-                </a:solidFill>
-                <a:latin typeface="Consolas"/>
-              </a:rPr>
-              <a:t>)</a:t>
+              <a:t>:])</a:t>
             </a:r>
           </a:p>
           <a:p>
@@ -11361,25 +10907,7 @@
                 </a:solidFill>
                 <a:latin typeface="Consolas"/>
               </a:rPr>
-              <a:t>(</a:t>
-            </a:r>
-            <a:r>
-              <a:rPr sz="1100">
-                <a:solidFill>
-                  <a:srgbClr val="303030"/>
-                </a:solidFill>
-                <a:latin typeface="Consolas"/>
-              </a:rPr>
-              <a:t>parts</a:t>
-            </a:r>
-            <a:r>
-              <a:rPr sz="1100">
-                <a:solidFill>
-                  <a:srgbClr val="303030"/>
-                </a:solidFill>
-                <a:latin typeface="Consolas"/>
-              </a:rPr>
-              <a:t>)</a:t>
+              <a:t>(parts)</a:t>
             </a:r>
           </a:p>
           <a:p>
@@ -11388,6 +10916,12 @@
                 <a:spcPts val="200"/>
               </a:spcAft>
             </a:pPr>
+            <a:endParaRPr sz="1100">
+              <a:solidFill>
+                <a:srgbClr val="303030"/>
+              </a:solidFill>
+              <a:latin typeface="Consolas"/>
+            </a:endParaRPr>
           </a:p>
           <a:p>
             <a:pPr>
@@ -11429,61 +10963,7 @@
                 </a:solidFill>
                 <a:latin typeface="Consolas"/>
               </a:rPr>
-              <a:t>(</a:t>
-            </a:r>
-            <a:r>
-              <a:rPr sz="1100">
-                <a:solidFill>
-                  <a:srgbClr val="303030"/>
-                </a:solidFill>
-                <a:latin typeface="Consolas"/>
-              </a:rPr>
-              <a:t>slot</a:t>
-            </a:r>
-            <a:r>
-              <a:rPr sz="1100">
-                <a:solidFill>
-                  <a:srgbClr val="303030"/>
-                </a:solidFill>
-                <a:latin typeface="Consolas"/>
-              </a:rPr>
-              <a:t>,</a:t>
-            </a:r>
-            <a:r>
-              <a:rPr sz="1100">
-                <a:solidFill>
-                  <a:srgbClr val="303030"/>
-                </a:solidFill>
-                <a:latin typeface="Consolas"/>
-              </a:rPr>
-              <a:t> </a:t>
-            </a:r>
-            <a:r>
-              <a:rPr sz="1100">
-                <a:solidFill>
-                  <a:srgbClr val="303030"/>
-                </a:solidFill>
-                <a:latin typeface="Consolas"/>
-              </a:rPr>
-              <a:t>llm</a:t>
-            </a:r>
-            <a:r>
-              <a:rPr sz="1100">
-                <a:solidFill>
-                  <a:srgbClr val="303030"/>
-                </a:solidFill>
-                <a:latin typeface="Consolas"/>
-              </a:rPr>
-              <a:t>)</a:t>
-            </a:r>
-            <a:r>
-              <a:rPr sz="1100">
-                <a:solidFill>
-                  <a:srgbClr val="303030"/>
-                </a:solidFill>
-                <a:latin typeface="Consolas"/>
-              </a:rPr>
-              <a:t>:</a:t>
+              <a:t>(slot, llm):</a:t>
             </a:r>
           </a:p>
           <a:p>
@@ -11499,7 +10979,16 @@
                 </a:solidFill>
                 <a:latin typeface="Consolas"/>
               </a:rPr>
-              <a:t>    </a:t>
+              <a:t>    evicted = slot.fifo.</a:t>
+            </a:r>
+            <a:r>
+              <a:rPr sz="1100" b="1">
+                <a:solidFill>
+                  <a:srgbClr val="2F6EBA"/>
+                </a:solidFill>
+                <a:latin typeface="Consolas"/>
+              </a:rPr>
+              <a:t>pop</a:t>
             </a:r>
             <a:r>
               <a:rPr sz="1100">
@@ -11508,106 +10997,7 @@
                 </a:solidFill>
                 <a:latin typeface="Consolas"/>
               </a:rPr>
-              <a:t>evicted</a:t>
-            </a:r>
-            <a:r>
-              <a:rPr sz="1100">
-                <a:solidFill>
-                  <a:srgbClr val="303030"/>
-                </a:solidFill>
-                <a:latin typeface="Consolas"/>
-              </a:rPr>
-              <a:t> </a:t>
-            </a:r>
-            <a:r>
-              <a:rPr sz="1100">
-                <a:solidFill>
-                  <a:srgbClr val="303030"/>
-                </a:solidFill>
-                <a:latin typeface="Consolas"/>
-              </a:rPr>
-              <a:t>=</a:t>
-            </a:r>
-            <a:r>
-              <a:rPr sz="1100">
-                <a:solidFill>
-                  <a:srgbClr val="303030"/>
-                </a:solidFill>
-                <a:latin typeface="Consolas"/>
-              </a:rPr>
-              <a:t> </a:t>
-            </a:r>
-            <a:r>
-              <a:rPr sz="1100">
-                <a:solidFill>
-                  <a:srgbClr val="303030"/>
-                </a:solidFill>
-                <a:latin typeface="Consolas"/>
-              </a:rPr>
-              <a:t>slot</a:t>
-            </a:r>
-            <a:r>
-              <a:rPr sz="1100">
-                <a:solidFill>
-                  <a:srgbClr val="303030"/>
-                </a:solidFill>
-                <a:latin typeface="Consolas"/>
-              </a:rPr>
-              <a:t>.</a:t>
-            </a:r>
-            <a:r>
-              <a:rPr sz="1100">
-                <a:solidFill>
-                  <a:srgbClr val="303030"/>
-                </a:solidFill>
-                <a:latin typeface="Consolas"/>
-              </a:rPr>
-              <a:t>fifo</a:t>
-            </a:r>
-            <a:r>
-              <a:rPr sz="1100">
-                <a:solidFill>
-                  <a:srgbClr val="303030"/>
-                </a:solidFill>
-                <a:latin typeface="Consolas"/>
-              </a:rPr>
-              <a:t>.</a:t>
-            </a:r>
-            <a:r>
-              <a:rPr sz="1100" b="1">
-                <a:solidFill>
-                  <a:srgbClr val="2F6EBA"/>
-                </a:solidFill>
-                <a:latin typeface="Consolas"/>
-              </a:rPr>
-              <a:t>pop</a:t>
-            </a:r>
-            <a:r>
-              <a:rPr sz="1100">
-                <a:solidFill>
-                  <a:srgbClr val="303030"/>
-                </a:solidFill>
-                <a:latin typeface="Consolas"/>
-              </a:rPr>
-              <a:t>(</a:t>
-            </a:r>
-            <a:r>
-              <a:rPr sz="1100">
-                <a:solidFill>
-                  <a:srgbClr val="303030"/>
-                </a:solidFill>
-                <a:latin typeface="Consolas"/>
-              </a:rPr>
-              <a:t>前半</a:t>
-            </a:r>
-            <a:r>
-              <a:rPr sz="1100">
-                <a:solidFill>
-                  <a:srgbClr val="303030"/>
-                </a:solidFill>
-                <a:latin typeface="Consolas"/>
-              </a:rPr>
-              <a:t>)</a:t>
+              <a:t>(前半)</a:t>
             </a:r>
           </a:p>
           <a:p>
@@ -11623,7 +11013,16 @@
                 </a:solidFill>
                 <a:latin typeface="Consolas"/>
               </a:rPr>
-              <a:t>    </a:t>
+              <a:t>    slot.summary = llm.</a:t>
+            </a:r>
+            <a:r>
+              <a:rPr sz="1100" b="1">
+                <a:solidFill>
+                  <a:srgbClr val="2F6EBA"/>
+                </a:solidFill>
+                <a:latin typeface="Consolas"/>
+              </a:rPr>
+              <a:t>summarize</a:t>
             </a:r>
             <a:r>
               <a:rPr sz="1100">
@@ -11632,142 +11031,7 @@
                 </a:solidFill>
                 <a:latin typeface="Consolas"/>
               </a:rPr>
-              <a:t>slot</a:t>
-            </a:r>
-            <a:r>
-              <a:rPr sz="1100">
-                <a:solidFill>
-                  <a:srgbClr val="303030"/>
-                </a:solidFill>
-                <a:latin typeface="Consolas"/>
-              </a:rPr>
-              <a:t>.</a:t>
-            </a:r>
-            <a:r>
-              <a:rPr sz="1100">
-                <a:solidFill>
-                  <a:srgbClr val="303030"/>
-                </a:solidFill>
-                <a:latin typeface="Consolas"/>
-              </a:rPr>
-              <a:t>summary</a:t>
-            </a:r>
-            <a:r>
-              <a:rPr sz="1100">
-                <a:solidFill>
-                  <a:srgbClr val="303030"/>
-                </a:solidFill>
-                <a:latin typeface="Consolas"/>
-              </a:rPr>
-              <a:t> </a:t>
-            </a:r>
-            <a:r>
-              <a:rPr sz="1100">
-                <a:solidFill>
-                  <a:srgbClr val="303030"/>
-                </a:solidFill>
-                <a:latin typeface="Consolas"/>
-              </a:rPr>
-              <a:t>=</a:t>
-            </a:r>
-            <a:r>
-              <a:rPr sz="1100">
-                <a:solidFill>
-                  <a:srgbClr val="303030"/>
-                </a:solidFill>
-                <a:latin typeface="Consolas"/>
-              </a:rPr>
-              <a:t> </a:t>
-            </a:r>
-            <a:r>
-              <a:rPr sz="1100">
-                <a:solidFill>
-                  <a:srgbClr val="303030"/>
-                </a:solidFill>
-                <a:latin typeface="Consolas"/>
-              </a:rPr>
-              <a:t>llm</a:t>
-            </a:r>
-            <a:r>
-              <a:rPr sz="1100">
-                <a:solidFill>
-                  <a:srgbClr val="303030"/>
-                </a:solidFill>
-                <a:latin typeface="Consolas"/>
-              </a:rPr>
-              <a:t>.</a:t>
-            </a:r>
-            <a:r>
-              <a:rPr sz="1100" b="1">
-                <a:solidFill>
-                  <a:srgbClr val="2F6EBA"/>
-                </a:solidFill>
-                <a:latin typeface="Consolas"/>
-              </a:rPr>
-              <a:t>summarize</a:t>
-            </a:r>
-            <a:r>
-              <a:rPr sz="1100">
-                <a:solidFill>
-                  <a:srgbClr val="303030"/>
-                </a:solidFill>
-                <a:latin typeface="Consolas"/>
-              </a:rPr>
-              <a:t>(</a:t>
-            </a:r>
-            <a:r>
-              <a:rPr sz="1100">
-                <a:solidFill>
-                  <a:srgbClr val="303030"/>
-                </a:solidFill>
-                <a:latin typeface="Consolas"/>
-              </a:rPr>
-              <a:t>旧摘要</a:t>
-            </a:r>
-            <a:r>
-              <a:rPr sz="1100">
-                <a:solidFill>
-                  <a:srgbClr val="303030"/>
-                </a:solidFill>
-                <a:latin typeface="Consolas"/>
-              </a:rPr>
-              <a:t> </a:t>
-            </a:r>
-            <a:r>
-              <a:rPr sz="1100">
-                <a:solidFill>
-                  <a:srgbClr val="303030"/>
-                </a:solidFill>
-                <a:latin typeface="Consolas"/>
-              </a:rPr>
-              <a:t>+</a:t>
-            </a:r>
-            <a:r>
-              <a:rPr sz="1100">
-                <a:solidFill>
-                  <a:srgbClr val="303030"/>
-                </a:solidFill>
-                <a:latin typeface="Consolas"/>
-              </a:rPr>
-              <a:t> </a:t>
-            </a:r>
-            <a:r>
-              <a:rPr sz="1100">
-                <a:solidFill>
-                  <a:srgbClr val="303030"/>
-                </a:solidFill>
-                <a:latin typeface="Consolas"/>
-              </a:rPr>
-              <a:t>evicted</a:t>
-            </a:r>
-            <a:r>
-              <a:rPr sz="1100">
-                <a:solidFill>
-                  <a:srgbClr val="303030"/>
-                </a:solidFill>
-                <a:latin typeface="Consolas"/>
-              </a:rPr>
-              <a:t>)</a:t>
+              <a:t>(旧摘要 + evicted)</a:t>
             </a:r>
           </a:p>
           <a:p>
@@ -11783,7 +11047,16 @@
                 </a:solidFill>
                 <a:latin typeface="Consolas"/>
               </a:rPr>
-              <a:t>    </a:t>
+              <a:t>    slot.archived.</a:t>
+            </a:r>
+            <a:r>
+              <a:rPr sz="1100" b="1">
+                <a:solidFill>
+                  <a:srgbClr val="2F6EBA"/>
+                </a:solidFill>
+                <a:latin typeface="Consolas"/>
+              </a:rPr>
+              <a:t>append</a:t>
             </a:r>
             <a:r>
               <a:rPr sz="1100">
@@ -11792,70 +11065,7 @@
                 </a:solidFill>
                 <a:latin typeface="Consolas"/>
               </a:rPr>
-              <a:t>slot</a:t>
-            </a:r>
-            <a:r>
-              <a:rPr sz="1100">
-                <a:solidFill>
-                  <a:srgbClr val="303030"/>
-                </a:solidFill>
-                <a:latin typeface="Consolas"/>
-              </a:rPr>
-              <a:t>.</a:t>
-            </a:r>
-            <a:r>
-              <a:rPr sz="1100">
-                <a:solidFill>
-                  <a:srgbClr val="303030"/>
-                </a:solidFill>
-                <a:latin typeface="Consolas"/>
-              </a:rPr>
-              <a:t>archived</a:t>
-            </a:r>
-            <a:r>
-              <a:rPr sz="1100">
-                <a:solidFill>
-                  <a:srgbClr val="303030"/>
-                </a:solidFill>
-                <a:latin typeface="Consolas"/>
-              </a:rPr>
-              <a:t>.</a:t>
-            </a:r>
-            <a:r>
-              <a:rPr sz="1100" b="1">
-                <a:solidFill>
-                  <a:srgbClr val="2F6EBA"/>
-                </a:solidFill>
-                <a:latin typeface="Consolas"/>
-              </a:rPr>
-              <a:t>append</a:t>
-            </a:r>
-            <a:r>
-              <a:rPr sz="1100">
-                <a:solidFill>
-                  <a:srgbClr val="303030"/>
-                </a:solidFill>
-                <a:latin typeface="Consolas"/>
-              </a:rPr>
-              <a:t>(</a:t>
-            </a:r>
-            <a:r>
-              <a:rPr sz="1100">
-                <a:solidFill>
-                  <a:srgbClr val="303030"/>
-                </a:solidFill>
-                <a:latin typeface="Consolas"/>
-              </a:rPr>
-              <a:t>evicted</a:t>
-            </a:r>
-            <a:r>
-              <a:rPr sz="1100">
-                <a:solidFill>
-                  <a:srgbClr val="303030"/>
-                </a:solidFill>
-                <a:latin typeface="Consolas"/>
-              </a:rPr>
-              <a:t>)</a:t>
+              <a:t>(evicted)</a:t>
             </a:r>
           </a:p>
         </p:txBody>
@@ -11901,6 +11111,7 @@
           <a:lstStyle/>
           <a:p>
             <a:pPr algn="ctr"/>
+            <a:endParaRPr/>
           </a:p>
         </p:txBody>
       </p:sp>
@@ -11983,7 +11194,7 @@
 </file>
 
 <file path=ppt/slides/slide15.xml><?xml version="1.0" encoding="utf-8"?>
-<p:sld xmlns:a="http://schemas.openxmlformats.org/drawingml/2006/main" xmlns:p="http://schemas.openxmlformats.org/presentationml/2006/main" xmlns:r="http://schemas.openxmlformats.org/officeDocument/2006/relationships">
+<p:sld xmlns:a="http://schemas.openxmlformats.org/drawingml/2006/main" xmlns:r="http://schemas.openxmlformats.org/officeDocument/2006/relationships" xmlns:p="http://schemas.openxmlformats.org/presentationml/2006/main">
   <p:cSld>
     <p:spTree>
       <p:nvGrpSpPr>
@@ -11991,7 +11202,14 @@
         <p:cNvGrpSpPr/>
         <p:nvPr/>
       </p:nvGrpSpPr>
-      <p:grpSpPr/>
+      <p:grpSpPr>
+        <a:xfrm>
+          <a:off x="0" y="0"/>
+          <a:ext cx="0" cy="0"/>
+          <a:chOff x="0" y="0"/>
+          <a:chExt cx="0" cy="0"/>
+        </a:xfrm>
+      </p:grpSpPr>
       <p:sp>
         <p:nvSpPr>
           <p:cNvPr id="2" name="TextBox 1"/>
@@ -12068,6 +11286,7 @@
           <a:lstStyle/>
           <a:p>
             <a:pPr algn="ctr"/>
+            <a:endParaRPr/>
           </a:p>
         </p:txBody>
       </p:sp>
@@ -12147,6 +11366,7 @@
           <a:lstStyle/>
           <a:p>
             <a:pPr algn="ctr"/>
+            <a:endParaRPr/>
           </a:p>
         </p:txBody>
       </p:sp>
@@ -12296,6 +11516,7 @@
           <a:lstStyle/>
           <a:p>
             <a:pPr algn="ctr"/>
+            <a:endParaRPr/>
           </a:p>
         </p:txBody>
       </p:sp>
@@ -12357,15 +11578,7 @@
           <a:lstStyle/>
           <a:p>
             <a:pPr algn="l"/>
-            <a:r>
-              <a:rPr sz="2000" b="1">
-                <a:solidFill>
-                  <a:srgbClr val="1F3A68"/>
-                </a:solidFill>
-                <a:latin typeface="Microsoft YaHei"/>
-              </a:rPr>
-              <a:t/>
-            </a:r>
+            <a:endParaRPr/>
           </a:p>
         </p:txBody>
       </p:sp>
@@ -12445,6 +11658,7 @@
           <a:lstStyle/>
           <a:p>
             <a:pPr algn="ctr"/>
+            <a:endParaRPr/>
           </a:p>
         </p:txBody>
       </p:sp>
@@ -12506,15 +11720,7 @@
           <a:lstStyle/>
           <a:p>
             <a:pPr algn="l"/>
-            <a:r>
-              <a:rPr sz="2000" b="1">
-                <a:solidFill>
-                  <a:srgbClr val="1F3A68"/>
-                </a:solidFill>
-                <a:latin typeface="Microsoft YaHei"/>
-              </a:rPr>
-              <a:t/>
-            </a:r>
+            <a:endParaRPr/>
           </a:p>
         </p:txBody>
       </p:sp>
@@ -12594,6 +11800,7 @@
           <a:lstStyle/>
           <a:p>
             <a:pPr algn="ctr"/>
+            <a:endParaRPr/>
           </a:p>
         </p:txBody>
       </p:sp>
@@ -12638,6 +11845,7 @@
           <a:lstStyle/>
           <a:p>
             <a:pPr algn="ctr"/>
+            <a:endParaRPr/>
           </a:p>
         </p:txBody>
       </p:sp>
@@ -12719,6 +11927,7 @@
           <a:lstStyle/>
           <a:p>
             <a:pPr algn="ctr"/>
+            <a:endParaRPr/>
           </a:p>
         </p:txBody>
       </p:sp>
@@ -12756,7 +11965,16 @@
                 </a:solidFill>
                 <a:latin typeface="Consolas"/>
               </a:rPr>
-              <a:t>hits_exact</a:t>
+              <a:t>hits_exact = factual.</a:t>
+            </a:r>
+            <a:r>
+              <a:rPr sz="1100" b="1">
+                <a:solidFill>
+                  <a:srgbClr val="2F6EBA"/>
+                </a:solidFill>
+                <a:latin typeface="Consolas"/>
+              </a:rPr>
+              <a:t>search_attrs</a:t>
             </a:r>
             <a:r>
               <a:rPr sz="1100">
@@ -12765,124 +11983,43 @@
                 </a:solidFill>
                 <a:latin typeface="Consolas"/>
               </a:rPr>
-              <a:t> </a:t>
+              <a:t>({</a:t>
             </a:r>
             <a:r>
               <a:rPr sz="1100">
                 <a:solidFill>
+                  <a:srgbClr val="C0504D"/>
+                </a:solidFill>
+                <a:latin typeface="Consolas"/>
+              </a:rPr>
+              <a:t>'装备'</a:t>
+            </a:r>
+            <a:r>
+              <a:rPr sz="1100">
+                <a:solidFill>
                   <a:srgbClr val="303030"/>
                 </a:solidFill>
                 <a:latin typeface="Consolas"/>
               </a:rPr>
-              <a:t>=</a:t>
+              <a:t>: </a:t>
             </a:r>
             <a:r>
               <a:rPr sz="1100">
                 <a:solidFill>
+                  <a:srgbClr val="C0504D"/>
+                </a:solidFill>
+                <a:latin typeface="Consolas"/>
+              </a:rPr>
+              <a:t>'T-90'</a:t>
+            </a:r>
+            <a:r>
+              <a:rPr sz="1100">
+                <a:solidFill>
                   <a:srgbClr val="303030"/>
                 </a:solidFill>
                 <a:latin typeface="Consolas"/>
               </a:rPr>
-              <a:t> </a:t>
-            </a:r>
-            <a:r>
-              <a:rPr sz="1100">
-                <a:solidFill>
-                  <a:srgbClr val="303030"/>
-                </a:solidFill>
-                <a:latin typeface="Consolas"/>
-              </a:rPr>
-              <a:t>factual</a:t>
-            </a:r>
-            <a:r>
-              <a:rPr sz="1100">
-                <a:solidFill>
-                  <a:srgbClr val="303030"/>
-                </a:solidFill>
-                <a:latin typeface="Consolas"/>
-              </a:rPr>
-              <a:t>.</a:t>
-            </a:r>
-            <a:r>
-              <a:rPr sz="1100" b="1">
-                <a:solidFill>
-                  <a:srgbClr val="2F6EBA"/>
-                </a:solidFill>
-                <a:latin typeface="Consolas"/>
-              </a:rPr>
-              <a:t>search_attrs</a:t>
-            </a:r>
-            <a:r>
-              <a:rPr sz="1100">
-                <a:solidFill>
-                  <a:srgbClr val="303030"/>
-                </a:solidFill>
-                <a:latin typeface="Consolas"/>
-              </a:rPr>
-              <a:t>(</a:t>
-            </a:r>
-            <a:r>
-              <a:rPr sz="1100">
-                <a:solidFill>
-                  <a:srgbClr val="303030"/>
-                </a:solidFill>
-                <a:latin typeface="Consolas"/>
-              </a:rPr>
-              <a:t>{</a:t>
-            </a:r>
-            <a:r>
-              <a:rPr sz="1100">
-                <a:solidFill>
-                  <a:srgbClr val="C0504D"/>
-                </a:solidFill>
-                <a:latin typeface="Consolas"/>
-              </a:rPr>
-              <a:t>'装备'</a:t>
-            </a:r>
-            <a:r>
-              <a:rPr sz="1100">
-                <a:solidFill>
-                  <a:srgbClr val="303030"/>
-                </a:solidFill>
-                <a:latin typeface="Consolas"/>
-              </a:rPr>
-              <a:t>:</a:t>
-            </a:r>
-            <a:r>
-              <a:rPr sz="1100">
-                <a:solidFill>
-                  <a:srgbClr val="303030"/>
-                </a:solidFill>
-                <a:latin typeface="Consolas"/>
-              </a:rPr>
-              <a:t> </a:t>
-            </a:r>
-            <a:r>
-              <a:rPr sz="1100">
-                <a:solidFill>
-                  <a:srgbClr val="C0504D"/>
-                </a:solidFill>
-                <a:latin typeface="Consolas"/>
-              </a:rPr>
-              <a:t>'T-90'</a:t>
-            </a:r>
-            <a:r>
-              <a:rPr sz="1100">
-                <a:solidFill>
-                  <a:srgbClr val="303030"/>
-                </a:solidFill>
-                <a:latin typeface="Consolas"/>
-              </a:rPr>
-              <a:t>}</a:t>
-            </a:r>
-            <a:r>
-              <a:rPr sz="1100">
-                <a:solidFill>
-                  <a:srgbClr val="303030"/>
-                </a:solidFill>
-                <a:latin typeface="Consolas"/>
-              </a:rPr>
-              <a:t>)</a:t>
+              <a:t>})</a:t>
             </a:r>
           </a:p>
           <a:p>
@@ -12898,52 +12035,7 @@
                 </a:solidFill>
                 <a:latin typeface="Consolas"/>
               </a:rPr>
-              <a:t>hits_sem</a:t>
-            </a:r>
-            <a:r>
-              <a:rPr sz="1100">
-                <a:solidFill>
-                  <a:srgbClr val="303030"/>
-                </a:solidFill>
-                <a:latin typeface="Consolas"/>
-              </a:rPr>
-              <a:t> </a:t>
-            </a:r>
-            <a:r>
-              <a:rPr sz="1100">
-                <a:solidFill>
-                  <a:srgbClr val="303030"/>
-                </a:solidFill>
-                <a:latin typeface="Consolas"/>
-              </a:rPr>
-              <a:t>=</a:t>
-            </a:r>
-            <a:r>
-              <a:rPr sz="1100">
-                <a:solidFill>
-                  <a:srgbClr val="303030"/>
-                </a:solidFill>
-                <a:latin typeface="Consolas"/>
-              </a:rPr>
-              <a:t> </a:t>
-            </a:r>
-            <a:r>
-              <a:rPr sz="1100">
-                <a:solidFill>
-                  <a:srgbClr val="303030"/>
-                </a:solidFill>
-                <a:latin typeface="Consolas"/>
-              </a:rPr>
-              <a:t>experiential</a:t>
-            </a:r>
-            <a:r>
-              <a:rPr sz="1100">
-                <a:solidFill>
-                  <a:srgbClr val="303030"/>
-                </a:solidFill>
-                <a:latin typeface="Consolas"/>
-              </a:rPr>
-              <a:t>.</a:t>
+              <a:t>hits_sem = experiential.</a:t>
             </a:r>
             <a:r>
               <a:rPr sz="1100" b="1">
@@ -13041,6 +12133,7 @@
           <a:lstStyle/>
           <a:p>
             <a:pPr algn="ctr"/>
+            <a:endParaRPr/>
           </a:p>
         </p:txBody>
       </p:sp>
@@ -13123,7 +12216,7 @@
 </file>
 
 <file path=ppt/slides/slide16.xml><?xml version="1.0" encoding="utf-8"?>
-<p:sld xmlns:a="http://schemas.openxmlformats.org/drawingml/2006/main" xmlns:p="http://schemas.openxmlformats.org/presentationml/2006/main" xmlns:r="http://schemas.openxmlformats.org/officeDocument/2006/relationships">
+<p:sld xmlns:a="http://schemas.openxmlformats.org/drawingml/2006/main" xmlns:r="http://schemas.openxmlformats.org/officeDocument/2006/relationships" xmlns:p="http://schemas.openxmlformats.org/presentationml/2006/main">
   <p:cSld>
     <p:spTree>
       <p:nvGrpSpPr>
@@ -13131,7 +12224,14 @@
         <p:cNvGrpSpPr/>
         <p:nvPr/>
       </p:nvGrpSpPr>
-      <p:grpSpPr/>
+      <p:grpSpPr>
+        <a:xfrm>
+          <a:off x="0" y="0"/>
+          <a:ext cx="0" cy="0"/>
+          <a:chOff x="0" y="0"/>
+          <a:chExt cx="0" cy="0"/>
+        </a:xfrm>
+      </p:grpSpPr>
       <p:sp>
         <p:nvSpPr>
           <p:cNvPr id="2" name="TextBox 1"/>
@@ -13208,6 +12308,7 @@
           <a:lstStyle/>
           <a:p>
             <a:pPr algn="ctr"/>
+            <a:endParaRPr/>
           </a:p>
         </p:txBody>
       </p:sp>
@@ -13287,6 +12388,7 @@
           <a:lstStyle/>
           <a:p>
             <a:pPr algn="ctr"/>
+            <a:endParaRPr/>
           </a:p>
         </p:txBody>
       </p:sp>
@@ -13348,15 +12450,7 @@
           <a:lstStyle/>
           <a:p>
             <a:pPr algn="l"/>
-            <a:r>
-              <a:rPr sz="2000" b="1">
-                <a:solidFill>
-                  <a:srgbClr val="1F3A68"/>
-                </a:solidFill>
-                <a:latin typeface="Microsoft YaHei"/>
-              </a:rPr>
-              <a:t/>
-            </a:r>
+            <a:endParaRPr/>
           </a:p>
         </p:txBody>
       </p:sp>
@@ -13436,6 +12530,7 @@
           <a:lstStyle/>
           <a:p>
             <a:pPr algn="ctr"/>
+            <a:endParaRPr/>
           </a:p>
         </p:txBody>
       </p:sp>
@@ -13585,6 +12680,7 @@
           <a:lstStyle/>
           <a:p>
             <a:pPr algn="ctr"/>
+            <a:endParaRPr/>
           </a:p>
         </p:txBody>
       </p:sp>
@@ -13734,6 +12830,7 @@
           <a:lstStyle/>
           <a:p>
             <a:pPr algn="ctr"/>
+            <a:endParaRPr/>
           </a:p>
         </p:txBody>
       </p:sp>
@@ -13778,6 +12875,7 @@
           <a:lstStyle/>
           <a:p>
             <a:pPr algn="ctr"/>
+            <a:endParaRPr/>
           </a:p>
         </p:txBody>
       </p:sp>
@@ -13859,6 +12957,7 @@
           <a:lstStyle/>
           <a:p>
             <a:pPr algn="ctr"/>
+            <a:endParaRPr/>
           </a:p>
         </p:txBody>
       </p:sp>
@@ -13923,124 +13022,43 @@
                 </a:solidFill>
                 <a:latin typeface="Consolas"/>
               </a:rPr>
-              <a:t>(</a:t>
+              <a:t>(q, mode=</a:t>
             </a:r>
             <a:r>
               <a:rPr sz="1100">
                 <a:solidFill>
+                  <a:srgbClr val="C0504D"/>
+                </a:solidFill>
+                <a:latin typeface="Consolas"/>
+              </a:rPr>
+              <a:t>'hybrid'</a:t>
+            </a:r>
+            <a:r>
+              <a:rPr sz="1100">
+                <a:solidFill>
                   <a:srgbClr val="303030"/>
                 </a:solidFill>
                 <a:latin typeface="Consolas"/>
               </a:rPr>
-              <a:t>q</a:t>
+              <a:t>, top_k=</a:t>
             </a:r>
             <a:r>
               <a:rPr sz="1100">
                 <a:solidFill>
+                  <a:srgbClr val="7B4FA6"/>
+                </a:solidFill>
+                <a:latin typeface="Consolas"/>
+              </a:rPr>
+              <a:t>5</a:t>
+            </a:r>
+            <a:r>
+              <a:rPr sz="1100">
+                <a:solidFill>
                   <a:srgbClr val="303030"/>
                 </a:solidFill>
                 <a:latin typeface="Consolas"/>
               </a:rPr>
-              <a:t>,</a:t>
-            </a:r>
-            <a:r>
-              <a:rPr sz="1100">
-                <a:solidFill>
-                  <a:srgbClr val="303030"/>
-                </a:solidFill>
-                <a:latin typeface="Consolas"/>
-              </a:rPr>
-              <a:t> </a:t>
-            </a:r>
-            <a:r>
-              <a:rPr sz="1100">
-                <a:solidFill>
-                  <a:srgbClr val="303030"/>
-                </a:solidFill>
-                <a:latin typeface="Consolas"/>
-              </a:rPr>
-              <a:t>mode</a:t>
-            </a:r>
-            <a:r>
-              <a:rPr sz="1100">
-                <a:solidFill>
-                  <a:srgbClr val="303030"/>
-                </a:solidFill>
-                <a:latin typeface="Consolas"/>
-              </a:rPr>
-              <a:t>=</a:t>
-            </a:r>
-            <a:r>
-              <a:rPr sz="1100">
-                <a:solidFill>
-                  <a:srgbClr val="C0504D"/>
-                </a:solidFill>
-                <a:latin typeface="Consolas"/>
-              </a:rPr>
-              <a:t>'hybrid'</a:t>
-            </a:r>
-            <a:r>
-              <a:rPr sz="1100">
-                <a:solidFill>
-                  <a:srgbClr val="303030"/>
-                </a:solidFill>
-                <a:latin typeface="Consolas"/>
-              </a:rPr>
-              <a:t>,</a:t>
-            </a:r>
-            <a:r>
-              <a:rPr sz="1100">
-                <a:solidFill>
-                  <a:srgbClr val="303030"/>
-                </a:solidFill>
-                <a:latin typeface="Consolas"/>
-              </a:rPr>
-              <a:t> </a:t>
-            </a:r>
-            <a:r>
-              <a:rPr sz="1100">
-                <a:solidFill>
-                  <a:srgbClr val="303030"/>
-                </a:solidFill>
-                <a:latin typeface="Consolas"/>
-              </a:rPr>
-              <a:t>top_k</a:t>
-            </a:r>
-            <a:r>
-              <a:rPr sz="1100">
-                <a:solidFill>
-                  <a:srgbClr val="303030"/>
-                </a:solidFill>
-                <a:latin typeface="Consolas"/>
-              </a:rPr>
-              <a:t>=</a:t>
-            </a:r>
-            <a:r>
-              <a:rPr sz="1100">
-                <a:solidFill>
-                  <a:srgbClr val="7B4FA6"/>
-                </a:solidFill>
-                <a:latin typeface="Consolas"/>
-              </a:rPr>
-              <a:t>5</a:t>
-            </a:r>
-            <a:r>
-              <a:rPr sz="1100">
-                <a:solidFill>
-                  <a:srgbClr val="303030"/>
-                </a:solidFill>
-                <a:latin typeface="Consolas"/>
-              </a:rPr>
-              <a:t>)</a:t>
-            </a:r>
-            <a:r>
-              <a:rPr sz="1100">
-                <a:solidFill>
-                  <a:srgbClr val="303030"/>
-                </a:solidFill>
-                <a:latin typeface="Consolas"/>
-              </a:rPr>
-              <a:t>:</a:t>
+              <a:t>):</a:t>
             </a:r>
           </a:p>
           <a:p>
@@ -14056,7 +13074,16 @@
                 </a:solidFill>
                 <a:latin typeface="Consolas"/>
               </a:rPr>
-              <a:t>    </a:t>
+              <a:t>    pool = [</a:t>
+            </a:r>
+            <a:r>
+              <a:rPr sz="1100" b="1">
+                <a:solidFill>
+                  <a:srgbClr val="2F6EBA"/>
+                </a:solidFill>
+                <a:latin typeface="Consolas"/>
+              </a:rPr>
+              <a:t>route</a:t>
             </a:r>
             <a:r>
               <a:rPr sz="1100">
@@ -14065,133 +13092,7 @@
                 </a:solidFill>
                 <a:latin typeface="Consolas"/>
               </a:rPr>
-              <a:t>pool</a:t>
-            </a:r>
-            <a:r>
-              <a:rPr sz="1100">
-                <a:solidFill>
-                  <a:srgbClr val="303030"/>
-                </a:solidFill>
-                <a:latin typeface="Consolas"/>
-              </a:rPr>
-              <a:t> </a:t>
-            </a:r>
-            <a:r>
-              <a:rPr sz="1100">
-                <a:solidFill>
-                  <a:srgbClr val="303030"/>
-                </a:solidFill>
-                <a:latin typeface="Consolas"/>
-              </a:rPr>
-              <a:t>=</a:t>
-            </a:r>
-            <a:r>
-              <a:rPr sz="1100">
-                <a:solidFill>
-                  <a:srgbClr val="303030"/>
-                </a:solidFill>
-                <a:latin typeface="Consolas"/>
-              </a:rPr>
-              <a:t> </a:t>
-            </a:r>
-            <a:r>
-              <a:rPr sz="1100">
-                <a:solidFill>
-                  <a:srgbClr val="303030"/>
-                </a:solidFill>
-                <a:latin typeface="Consolas"/>
-              </a:rPr>
-              <a:t>[</a:t>
-            </a:r>
-            <a:r>
-              <a:rPr sz="1100" b="1">
-                <a:solidFill>
-                  <a:srgbClr val="2F6EBA"/>
-                </a:solidFill>
-                <a:latin typeface="Consolas"/>
-              </a:rPr>
-              <a:t>route</a:t>
-            </a:r>
-            <a:r>
-              <a:rPr sz="1100">
-                <a:solidFill>
-                  <a:srgbClr val="303030"/>
-                </a:solidFill>
-                <a:latin typeface="Consolas"/>
-              </a:rPr>
-              <a:t>(</a:t>
-            </a:r>
-            <a:r>
-              <a:rPr sz="1100">
-                <a:solidFill>
-                  <a:srgbClr val="303030"/>
-                </a:solidFill>
-                <a:latin typeface="Consolas"/>
-              </a:rPr>
-              <a:t>q</a:t>
-            </a:r>
-            <a:r>
-              <a:rPr sz="1100">
-                <a:solidFill>
-                  <a:srgbClr val="303030"/>
-                </a:solidFill>
-                <a:latin typeface="Consolas"/>
-              </a:rPr>
-              <a:t>,</a:t>
-            </a:r>
-            <a:r>
-              <a:rPr sz="1100">
-                <a:solidFill>
-                  <a:srgbClr val="303030"/>
-                </a:solidFill>
-                <a:latin typeface="Consolas"/>
-              </a:rPr>
-              <a:t> </a:t>
-            </a:r>
-            <a:r>
-              <a:rPr sz="1100">
-                <a:solidFill>
-                  <a:srgbClr val="303030"/>
-                </a:solidFill>
-                <a:latin typeface="Consolas"/>
-              </a:rPr>
-              <a:t>q</a:t>
-            </a:r>
-            <a:r>
-              <a:rPr sz="1100">
-                <a:solidFill>
-                  <a:srgbClr val="303030"/>
-                </a:solidFill>
-                <a:latin typeface="Consolas"/>
-              </a:rPr>
-              <a:t>.</a:t>
-            </a:r>
-            <a:r>
-              <a:rPr sz="1100">
-                <a:solidFill>
-                  <a:srgbClr val="303030"/>
-                </a:solidFill>
-                <a:latin typeface="Consolas"/>
-              </a:rPr>
-              <a:t>route</a:t>
-            </a:r>
-            <a:r>
-              <a:rPr sz="1100">
-                <a:solidFill>
-                  <a:srgbClr val="303030"/>
-                </a:solidFill>
-                <a:latin typeface="Consolas"/>
-              </a:rPr>
-              <a:t>)</a:t>
-            </a:r>
-            <a:r>
-              <a:rPr sz="1100">
-                <a:solidFill>
-                  <a:srgbClr val="303030"/>
-                </a:solidFill>
-                <a:latin typeface="Consolas"/>
-              </a:rPr>
-              <a:t>]</a:t>
+              <a:t>(q, q.route)]</a:t>
             </a:r>
           </a:p>
           <a:p>
@@ -14225,52 +13126,7 @@
                 </a:solidFill>
                 <a:latin typeface="Consolas"/>
               </a:rPr>
-              <a:t> </a:t>
-            </a:r>
-            <a:r>
-              <a:rPr sz="1100">
-                <a:solidFill>
-                  <a:srgbClr val="303030"/>
-                </a:solidFill>
-                <a:latin typeface="Consolas"/>
-              </a:rPr>
-              <a:t>mode</a:t>
-            </a:r>
-            <a:r>
-              <a:rPr sz="1100">
-                <a:solidFill>
-                  <a:srgbClr val="303030"/>
-                </a:solidFill>
-                <a:latin typeface="Consolas"/>
-              </a:rPr>
-              <a:t> </a:t>
-            </a:r>
-            <a:r>
-              <a:rPr sz="1100">
-                <a:solidFill>
-                  <a:srgbClr val="303030"/>
-                </a:solidFill>
-                <a:latin typeface="Consolas"/>
-              </a:rPr>
-              <a:t>=</a:t>
-            </a:r>
-            <a:r>
-              <a:rPr sz="1100">
-                <a:solidFill>
-                  <a:srgbClr val="303030"/>
-                </a:solidFill>
-                <a:latin typeface="Consolas"/>
-              </a:rPr>
-              <a:t>=</a:t>
-            </a:r>
-            <a:r>
-              <a:rPr sz="1100">
-                <a:solidFill>
-                  <a:srgbClr val="303030"/>
-                </a:solidFill>
-                <a:latin typeface="Consolas"/>
-              </a:rPr>
-              <a:t> </a:t>
+              <a:t> mode == </a:t>
             </a:r>
             <a:r>
               <a:rPr sz="1100">
@@ -14304,7 +13160,16 @@
                 </a:solidFill>
                 <a:latin typeface="Consolas"/>
               </a:rPr>
-              <a:t>        </a:t>
+              <a:t>        pool += [</a:t>
+            </a:r>
+            <a:r>
+              <a:rPr sz="1100" b="1">
+                <a:solidFill>
+                  <a:srgbClr val="2F6EBA"/>
+                </a:solidFill>
+                <a:latin typeface="Consolas"/>
+              </a:rPr>
+              <a:t>route</a:t>
             </a:r>
             <a:r>
               <a:rPr sz="1100">
@@ -14313,7 +13178,16 @@
                 </a:solidFill>
                 <a:latin typeface="Consolas"/>
               </a:rPr>
-              <a:t>pool</a:t>
+              <a:t>(q, alt) </a:t>
+            </a:r>
+            <a:r>
+              <a:rPr sz="1100" b="1">
+                <a:solidFill>
+                  <a:srgbClr val="1F3A68"/>
+                </a:solidFill>
+                <a:latin typeface="Consolas"/>
+              </a:rPr>
+              <a:t>for</a:t>
             </a:r>
             <a:r>
               <a:rPr sz="1100">
@@ -14322,7 +13196,16 @@
                 </a:solidFill>
                 <a:latin typeface="Consolas"/>
               </a:rPr>
-              <a:t> </a:t>
+              <a:t> alt </a:t>
+            </a:r>
+            <a:r>
+              <a:rPr sz="1100" b="1">
+                <a:solidFill>
+                  <a:srgbClr val="1F3A68"/>
+                </a:solidFill>
+                <a:latin typeface="Consolas"/>
+              </a:rPr>
+              <a:t>in</a:t>
             </a:r>
             <a:r>
               <a:rPr sz="1100">
@@ -14331,169 +13214,7 @@
                 </a:solidFill>
                 <a:latin typeface="Consolas"/>
               </a:rPr>
-              <a:t>+</a:t>
-            </a:r>
-            <a:r>
-              <a:rPr sz="1100">
-                <a:solidFill>
-                  <a:srgbClr val="303030"/>
-                </a:solidFill>
-                <a:latin typeface="Consolas"/>
-              </a:rPr>
-              <a:t>=</a:t>
-            </a:r>
-            <a:r>
-              <a:rPr sz="1100">
-                <a:solidFill>
-                  <a:srgbClr val="303030"/>
-                </a:solidFill>
-                <a:latin typeface="Consolas"/>
-              </a:rPr>
-              <a:t> </a:t>
-            </a:r>
-            <a:r>
-              <a:rPr sz="1100">
-                <a:solidFill>
-                  <a:srgbClr val="303030"/>
-                </a:solidFill>
-                <a:latin typeface="Consolas"/>
-              </a:rPr>
-              <a:t>[</a:t>
-            </a:r>
-            <a:r>
-              <a:rPr sz="1100" b="1">
-                <a:solidFill>
-                  <a:srgbClr val="2F6EBA"/>
-                </a:solidFill>
-                <a:latin typeface="Consolas"/>
-              </a:rPr>
-              <a:t>route</a:t>
-            </a:r>
-            <a:r>
-              <a:rPr sz="1100">
-                <a:solidFill>
-                  <a:srgbClr val="303030"/>
-                </a:solidFill>
-                <a:latin typeface="Consolas"/>
-              </a:rPr>
-              <a:t>(</a:t>
-            </a:r>
-            <a:r>
-              <a:rPr sz="1100">
-                <a:solidFill>
-                  <a:srgbClr val="303030"/>
-                </a:solidFill>
-                <a:latin typeface="Consolas"/>
-              </a:rPr>
-              <a:t>q</a:t>
-            </a:r>
-            <a:r>
-              <a:rPr sz="1100">
-                <a:solidFill>
-                  <a:srgbClr val="303030"/>
-                </a:solidFill>
-                <a:latin typeface="Consolas"/>
-              </a:rPr>
-              <a:t>,</a:t>
-            </a:r>
-            <a:r>
-              <a:rPr sz="1100">
-                <a:solidFill>
-                  <a:srgbClr val="303030"/>
-                </a:solidFill>
-                <a:latin typeface="Consolas"/>
-              </a:rPr>
-              <a:t> </a:t>
-            </a:r>
-            <a:r>
-              <a:rPr sz="1100">
-                <a:solidFill>
-                  <a:srgbClr val="303030"/>
-                </a:solidFill>
-                <a:latin typeface="Consolas"/>
-              </a:rPr>
-              <a:t>alt</a:t>
-            </a:r>
-            <a:r>
-              <a:rPr sz="1100">
-                <a:solidFill>
-                  <a:srgbClr val="303030"/>
-                </a:solidFill>
-                <a:latin typeface="Consolas"/>
-              </a:rPr>
-              <a:t>)</a:t>
-            </a:r>
-            <a:r>
-              <a:rPr sz="1100">
-                <a:solidFill>
-                  <a:srgbClr val="303030"/>
-                </a:solidFill>
-                <a:latin typeface="Consolas"/>
-              </a:rPr>
-              <a:t> </a:t>
-            </a:r>
-            <a:r>
-              <a:rPr sz="1100" b="1">
-                <a:solidFill>
-                  <a:srgbClr val="1F3A68"/>
-                </a:solidFill>
-                <a:latin typeface="Consolas"/>
-              </a:rPr>
-              <a:t>for</a:t>
-            </a:r>
-            <a:r>
-              <a:rPr sz="1100">
-                <a:solidFill>
-                  <a:srgbClr val="303030"/>
-                </a:solidFill>
-                <a:latin typeface="Consolas"/>
-              </a:rPr>
-              <a:t> </a:t>
-            </a:r>
-            <a:r>
-              <a:rPr sz="1100">
-                <a:solidFill>
-                  <a:srgbClr val="303030"/>
-                </a:solidFill>
-                <a:latin typeface="Consolas"/>
-              </a:rPr>
-              <a:t>alt</a:t>
-            </a:r>
-            <a:r>
-              <a:rPr sz="1100">
-                <a:solidFill>
-                  <a:srgbClr val="303030"/>
-                </a:solidFill>
-                <a:latin typeface="Consolas"/>
-              </a:rPr>
-              <a:t> </a:t>
-            </a:r>
-            <a:r>
-              <a:rPr sz="1100" b="1">
-                <a:solidFill>
-                  <a:srgbClr val="1F3A68"/>
-                </a:solidFill>
-                <a:latin typeface="Consolas"/>
-              </a:rPr>
-              <a:t>in</a:t>
-            </a:r>
-            <a:r>
-              <a:rPr sz="1100">
-                <a:solidFill>
-                  <a:srgbClr val="303030"/>
-                </a:solidFill>
-                <a:latin typeface="Consolas"/>
-              </a:rPr>
-              <a:t> </a:t>
-            </a:r>
-            <a:r>
-              <a:rPr sz="1100">
-                <a:solidFill>
-                  <a:srgbClr val="303030"/>
-                </a:solidFill>
-                <a:latin typeface="Consolas"/>
-              </a:rPr>
-              <a:t>routes</a:t>
+              <a:t> routes</a:t>
             </a:r>
           </a:p>
           <a:p>
@@ -14527,88 +13248,7 @@
                 </a:solidFill>
                 <a:latin typeface="Consolas"/>
               </a:rPr>
-              <a:t> </a:t>
-            </a:r>
-            <a:r>
-              <a:rPr sz="1100">
-                <a:solidFill>
-                  <a:srgbClr val="303030"/>
-                </a:solidFill>
-                <a:latin typeface="Consolas"/>
-              </a:rPr>
-              <a:t>alt</a:t>
-            </a:r>
-            <a:r>
-              <a:rPr sz="1100">
-                <a:solidFill>
-                  <a:srgbClr val="303030"/>
-                </a:solidFill>
-                <a:latin typeface="Consolas"/>
-              </a:rPr>
-              <a:t> </a:t>
-            </a:r>
-            <a:r>
-              <a:rPr sz="1100">
-                <a:solidFill>
-                  <a:srgbClr val="303030"/>
-                </a:solidFill>
-                <a:latin typeface="Consolas"/>
-              </a:rPr>
-              <a:t>!</a:t>
-            </a:r>
-            <a:r>
-              <a:rPr sz="1100">
-                <a:solidFill>
-                  <a:srgbClr val="303030"/>
-                </a:solidFill>
-                <a:latin typeface="Consolas"/>
-              </a:rPr>
-              <a:t>=</a:t>
-            </a:r>
-            <a:r>
-              <a:rPr sz="1100">
-                <a:solidFill>
-                  <a:srgbClr val="303030"/>
-                </a:solidFill>
-                <a:latin typeface="Consolas"/>
-              </a:rPr>
-              <a:t> </a:t>
-            </a:r>
-            <a:r>
-              <a:rPr sz="1100">
-                <a:solidFill>
-                  <a:srgbClr val="303030"/>
-                </a:solidFill>
-                <a:latin typeface="Consolas"/>
-              </a:rPr>
-              <a:t>q</a:t>
-            </a:r>
-            <a:r>
-              <a:rPr sz="1100">
-                <a:solidFill>
-                  <a:srgbClr val="303030"/>
-                </a:solidFill>
-                <a:latin typeface="Consolas"/>
-              </a:rPr>
-              <a:t>.</a:t>
-            </a:r>
-            <a:r>
-              <a:rPr sz="1100">
-                <a:solidFill>
-                  <a:srgbClr val="303030"/>
-                </a:solidFill>
-                <a:latin typeface="Consolas"/>
-              </a:rPr>
-              <a:t>route</a:t>
-            </a:r>
-            <a:r>
-              <a:rPr sz="1100">
-                <a:solidFill>
-                  <a:srgbClr val="303030"/>
-                </a:solidFill>
-                <a:latin typeface="Consolas"/>
-              </a:rPr>
-              <a:t>]</a:t>
+              <a:t> alt != q.route]</a:t>
             </a:r>
           </a:p>
           <a:p>
@@ -14624,7 +13264,16 @@
                 </a:solidFill>
                 <a:latin typeface="Consolas"/>
               </a:rPr>
-              <a:t>    </a:t>
+              <a:t>    pool = [</a:t>
+            </a:r>
+            <a:r>
+              <a:rPr sz="1100" b="1">
+                <a:solidFill>
+                  <a:srgbClr val="2F6EBA"/>
+                </a:solidFill>
+                <a:latin typeface="Consolas"/>
+              </a:rPr>
+              <a:t>normalize</a:t>
             </a:r>
             <a:r>
               <a:rPr sz="1100">
@@ -14633,7 +13282,16 @@
                 </a:solidFill>
                 <a:latin typeface="Consolas"/>
               </a:rPr>
-              <a:t>pool</a:t>
+              <a:t>(r) </a:t>
+            </a:r>
+            <a:r>
+              <a:rPr sz="1100" b="1">
+                <a:solidFill>
+                  <a:srgbClr val="1F3A68"/>
+                </a:solidFill>
+                <a:latin typeface="Consolas"/>
+              </a:rPr>
+              <a:t>for</a:t>
             </a:r>
             <a:r>
               <a:rPr sz="1100">
@@ -14642,7 +13300,16 @@
                 </a:solidFill>
                 <a:latin typeface="Consolas"/>
               </a:rPr>
-              <a:t> </a:t>
+              <a:t> r </a:t>
+            </a:r>
+            <a:r>
+              <a:rPr sz="1100" b="1">
+                <a:solidFill>
+                  <a:srgbClr val="1F3A68"/>
+                </a:solidFill>
+                <a:latin typeface="Consolas"/>
+              </a:rPr>
+              <a:t>in</a:t>
             </a:r>
             <a:r>
               <a:rPr sz="1100">
@@ -14651,142 +13318,7 @@
                 </a:solidFill>
                 <a:latin typeface="Consolas"/>
               </a:rPr>
-              <a:t>=</a:t>
-            </a:r>
-            <a:r>
-              <a:rPr sz="1100">
-                <a:solidFill>
-                  <a:srgbClr val="303030"/>
-                </a:solidFill>
-                <a:latin typeface="Consolas"/>
-              </a:rPr>
-              <a:t> </a:t>
-            </a:r>
-            <a:r>
-              <a:rPr sz="1100">
-                <a:solidFill>
-                  <a:srgbClr val="303030"/>
-                </a:solidFill>
-                <a:latin typeface="Consolas"/>
-              </a:rPr>
-              <a:t>[</a:t>
-            </a:r>
-            <a:r>
-              <a:rPr sz="1100" b="1">
-                <a:solidFill>
-                  <a:srgbClr val="2F6EBA"/>
-                </a:solidFill>
-                <a:latin typeface="Consolas"/>
-              </a:rPr>
-              <a:t>normalize</a:t>
-            </a:r>
-            <a:r>
-              <a:rPr sz="1100">
-                <a:solidFill>
-                  <a:srgbClr val="303030"/>
-                </a:solidFill>
-                <a:latin typeface="Consolas"/>
-              </a:rPr>
-              <a:t>(</a:t>
-            </a:r>
-            <a:r>
-              <a:rPr sz="1100">
-                <a:solidFill>
-                  <a:srgbClr val="303030"/>
-                </a:solidFill>
-                <a:latin typeface="Consolas"/>
-              </a:rPr>
-              <a:t>r</a:t>
-            </a:r>
-            <a:r>
-              <a:rPr sz="1100">
-                <a:solidFill>
-                  <a:srgbClr val="303030"/>
-                </a:solidFill>
-                <a:latin typeface="Consolas"/>
-              </a:rPr>
-              <a:t>)</a:t>
-            </a:r>
-            <a:r>
-              <a:rPr sz="1100">
-                <a:solidFill>
-                  <a:srgbClr val="303030"/>
-                </a:solidFill>
-                <a:latin typeface="Consolas"/>
-              </a:rPr>
-              <a:t> </a:t>
-            </a:r>
-            <a:r>
-              <a:rPr sz="1100" b="1">
-                <a:solidFill>
-                  <a:srgbClr val="1F3A68"/>
-                </a:solidFill>
-                <a:latin typeface="Consolas"/>
-              </a:rPr>
-              <a:t>for</a:t>
-            </a:r>
-            <a:r>
-              <a:rPr sz="1100">
-                <a:solidFill>
-                  <a:srgbClr val="303030"/>
-                </a:solidFill>
-                <a:latin typeface="Consolas"/>
-              </a:rPr>
-              <a:t> </a:t>
-            </a:r>
-            <a:r>
-              <a:rPr sz="1100">
-                <a:solidFill>
-                  <a:srgbClr val="303030"/>
-                </a:solidFill>
-                <a:latin typeface="Consolas"/>
-              </a:rPr>
-              <a:t>r</a:t>
-            </a:r>
-            <a:r>
-              <a:rPr sz="1100">
-                <a:solidFill>
-                  <a:srgbClr val="303030"/>
-                </a:solidFill>
-                <a:latin typeface="Consolas"/>
-              </a:rPr>
-              <a:t> </a:t>
-            </a:r>
-            <a:r>
-              <a:rPr sz="1100" b="1">
-                <a:solidFill>
-                  <a:srgbClr val="1F3A68"/>
-                </a:solidFill>
-                <a:latin typeface="Consolas"/>
-              </a:rPr>
-              <a:t>in</a:t>
-            </a:r>
-            <a:r>
-              <a:rPr sz="1100">
-                <a:solidFill>
-                  <a:srgbClr val="303030"/>
-                </a:solidFill>
-                <a:latin typeface="Consolas"/>
-              </a:rPr>
-              <a:t> </a:t>
-            </a:r>
-            <a:r>
-              <a:rPr sz="1100">
-                <a:solidFill>
-                  <a:srgbClr val="303030"/>
-                </a:solidFill>
-                <a:latin typeface="Consolas"/>
-              </a:rPr>
-              <a:t>pool</a:t>
-            </a:r>
-            <a:r>
-              <a:rPr sz="1100">
-                <a:solidFill>
-                  <a:srgbClr val="303030"/>
-                </a:solidFill>
-                <a:latin typeface="Consolas"/>
-              </a:rPr>
-              <a:t>]</a:t>
+              <a:t> pool]</a:t>
             </a:r>
           </a:p>
           <a:p>
@@ -14802,7 +13334,16 @@
                 </a:solidFill>
                 <a:latin typeface="Consolas"/>
               </a:rPr>
-              <a:t>    </a:t>
+              <a:t>    fused = </a:t>
+            </a:r>
+            <a:r>
+              <a:rPr sz="1100" b="1">
+                <a:solidFill>
+                  <a:srgbClr val="2F6EBA"/>
+                </a:solidFill>
+                <a:latin typeface="Consolas"/>
+              </a:rPr>
+              <a:t>aggregate_by_id</a:t>
             </a:r>
             <a:r>
               <a:rPr sz="1100">
@@ -14811,97 +13352,7 @@
                 </a:solidFill>
                 <a:latin typeface="Consolas"/>
               </a:rPr>
-              <a:t>fused</a:t>
-            </a:r>
-            <a:r>
-              <a:rPr sz="1100">
-                <a:solidFill>
-                  <a:srgbClr val="303030"/>
-                </a:solidFill>
-                <a:latin typeface="Consolas"/>
-              </a:rPr>
-              <a:t> </a:t>
-            </a:r>
-            <a:r>
-              <a:rPr sz="1100">
-                <a:solidFill>
-                  <a:srgbClr val="303030"/>
-                </a:solidFill>
-                <a:latin typeface="Consolas"/>
-              </a:rPr>
-              <a:t>=</a:t>
-            </a:r>
-            <a:r>
-              <a:rPr sz="1100">
-                <a:solidFill>
-                  <a:srgbClr val="303030"/>
-                </a:solidFill>
-                <a:latin typeface="Consolas"/>
-              </a:rPr>
-              <a:t> </a:t>
-            </a:r>
-            <a:r>
-              <a:rPr sz="1100" b="1">
-                <a:solidFill>
-                  <a:srgbClr val="2F6EBA"/>
-                </a:solidFill>
-                <a:latin typeface="Consolas"/>
-              </a:rPr>
-              <a:t>aggregate_by_id</a:t>
-            </a:r>
-            <a:r>
-              <a:rPr sz="1100">
-                <a:solidFill>
-                  <a:srgbClr val="303030"/>
-                </a:solidFill>
-                <a:latin typeface="Consolas"/>
-              </a:rPr>
-              <a:t>(</a:t>
-            </a:r>
-            <a:r>
-              <a:rPr sz="1100">
-                <a:solidFill>
-                  <a:srgbClr val="303030"/>
-                </a:solidFill>
-                <a:latin typeface="Consolas"/>
-              </a:rPr>
-              <a:t>pool</a:t>
-            </a:r>
-            <a:r>
-              <a:rPr sz="1100">
-                <a:solidFill>
-                  <a:srgbClr val="303030"/>
-                </a:solidFill>
-                <a:latin typeface="Consolas"/>
-              </a:rPr>
-              <a:t>,</a:t>
-            </a:r>
-            <a:r>
-              <a:rPr sz="1100">
-                <a:solidFill>
-                  <a:srgbClr val="303030"/>
-                </a:solidFill>
-                <a:latin typeface="Consolas"/>
-              </a:rPr>
-              <a:t> </a:t>
-            </a:r>
-            <a:r>
-              <a:rPr sz="1100">
-                <a:solidFill>
-                  <a:srgbClr val="303030"/>
-                </a:solidFill>
-                <a:latin typeface="Consolas"/>
-              </a:rPr>
-              <a:t>weights</a:t>
-            </a:r>
-            <a:r>
-              <a:rPr sz="1100">
-                <a:solidFill>
-                  <a:srgbClr val="303030"/>
-                </a:solidFill>
-                <a:latin typeface="Consolas"/>
-              </a:rPr>
-              <a:t>)</a:t>
+              <a:t>(pool, weights)</a:t>
             </a:r>
           </a:p>
           <a:p>
@@ -14935,43 +13386,7 @@
                 </a:solidFill>
                 <a:latin typeface="Consolas"/>
               </a:rPr>
-              <a:t> </a:t>
-            </a:r>
-            <a:r>
-              <a:rPr sz="1100">
-                <a:solidFill>
-                  <a:srgbClr val="303030"/>
-                </a:solidFill>
-                <a:latin typeface="Consolas"/>
-              </a:rPr>
-              <a:t>q</a:t>
-            </a:r>
-            <a:r>
-              <a:rPr sz="1100">
-                <a:solidFill>
-                  <a:srgbClr val="303030"/>
-                </a:solidFill>
-                <a:latin typeface="Consolas"/>
-              </a:rPr>
-              <a:t>.</a:t>
-            </a:r>
-            <a:r>
-              <a:rPr sz="1100">
-                <a:solidFill>
-                  <a:srgbClr val="303030"/>
-                </a:solidFill>
-                <a:latin typeface="Consolas"/>
-              </a:rPr>
-              <a:t>stage</a:t>
-            </a:r>
-            <a:r>
-              <a:rPr sz="1100">
-                <a:solidFill>
-                  <a:srgbClr val="303030"/>
-                </a:solidFill>
-                <a:latin typeface="Consolas"/>
-              </a:rPr>
-              <a:t>:</a:t>
+              <a:t> q.stage:</a:t>
             </a:r>
           </a:p>
           <a:p>
@@ -14987,7 +13402,16 @@
                 </a:solidFill>
                 <a:latin typeface="Consolas"/>
               </a:rPr>
-              <a:t>        </a:t>
+              <a:t>        fused = </a:t>
+            </a:r>
+            <a:r>
+              <a:rPr sz="1100" b="1">
+                <a:solidFill>
+                  <a:srgbClr val="2F6EBA"/>
+                </a:solidFill>
+                <a:latin typeface="Consolas"/>
+              </a:rPr>
+              <a:t>add_stage_bonus</a:t>
             </a:r>
             <a:r>
               <a:rPr sz="1100">
@@ -14996,115 +13420,7 @@
                 </a:solidFill>
                 <a:latin typeface="Consolas"/>
               </a:rPr>
-              <a:t>fused</a:t>
-            </a:r>
-            <a:r>
-              <a:rPr sz="1100">
-                <a:solidFill>
-                  <a:srgbClr val="303030"/>
-                </a:solidFill>
-                <a:latin typeface="Consolas"/>
-              </a:rPr>
-              <a:t> </a:t>
-            </a:r>
-            <a:r>
-              <a:rPr sz="1100">
-                <a:solidFill>
-                  <a:srgbClr val="303030"/>
-                </a:solidFill>
-                <a:latin typeface="Consolas"/>
-              </a:rPr>
-              <a:t>=</a:t>
-            </a:r>
-            <a:r>
-              <a:rPr sz="1100">
-                <a:solidFill>
-                  <a:srgbClr val="303030"/>
-                </a:solidFill>
-                <a:latin typeface="Consolas"/>
-              </a:rPr>
-              <a:t> </a:t>
-            </a:r>
-            <a:r>
-              <a:rPr sz="1100" b="1">
-                <a:solidFill>
-                  <a:srgbClr val="2F6EBA"/>
-                </a:solidFill>
-                <a:latin typeface="Consolas"/>
-              </a:rPr>
-              <a:t>add_stage_bonus</a:t>
-            </a:r>
-            <a:r>
-              <a:rPr sz="1100">
-                <a:solidFill>
-                  <a:srgbClr val="303030"/>
-                </a:solidFill>
-                <a:latin typeface="Consolas"/>
-              </a:rPr>
-              <a:t>(</a:t>
-            </a:r>
-            <a:r>
-              <a:rPr sz="1100">
-                <a:solidFill>
-                  <a:srgbClr val="303030"/>
-                </a:solidFill>
-                <a:latin typeface="Consolas"/>
-              </a:rPr>
-              <a:t>fused</a:t>
-            </a:r>
-            <a:r>
-              <a:rPr sz="1100">
-                <a:solidFill>
-                  <a:srgbClr val="303030"/>
-                </a:solidFill>
-                <a:latin typeface="Consolas"/>
-              </a:rPr>
-              <a:t>,</a:t>
-            </a:r>
-            <a:r>
-              <a:rPr sz="1100">
-                <a:solidFill>
-                  <a:srgbClr val="303030"/>
-                </a:solidFill>
-                <a:latin typeface="Consolas"/>
-              </a:rPr>
-              <a:t> </a:t>
-            </a:r>
-            <a:r>
-              <a:rPr sz="1100">
-                <a:solidFill>
-                  <a:srgbClr val="303030"/>
-                </a:solidFill>
-                <a:latin typeface="Consolas"/>
-              </a:rPr>
-              <a:t>q</a:t>
-            </a:r>
-            <a:r>
-              <a:rPr sz="1100">
-                <a:solidFill>
-                  <a:srgbClr val="303030"/>
-                </a:solidFill>
-                <a:latin typeface="Consolas"/>
-              </a:rPr>
-              <a:t>.</a:t>
-            </a:r>
-            <a:r>
-              <a:rPr sz="1100">
-                <a:solidFill>
-                  <a:srgbClr val="303030"/>
-                </a:solidFill>
-                <a:latin typeface="Consolas"/>
-              </a:rPr>
-              <a:t>stage</a:t>
-            </a:r>
-            <a:r>
-              <a:rPr sz="1100">
-                <a:solidFill>
-                  <a:srgbClr val="303030"/>
-                </a:solidFill>
-                <a:latin typeface="Consolas"/>
-              </a:rPr>
-              <a:t>)</a:t>
+              <a:t>(fused, q.stage)</a:t>
             </a:r>
           </a:p>
           <a:p>
@@ -15120,7 +13436,16 @@
                 </a:solidFill>
                 <a:latin typeface="Consolas"/>
               </a:rPr>
-              <a:t>    </a:t>
+              <a:t>    ranked = [x </a:t>
+            </a:r>
+            <a:r>
+              <a:rPr sz="1100" b="1">
+                <a:solidFill>
+                  <a:srgbClr val="1F3A68"/>
+                </a:solidFill>
+                <a:latin typeface="Consolas"/>
+              </a:rPr>
+              <a:t>for</a:t>
             </a:r>
             <a:r>
               <a:rPr sz="1100">
@@ -15129,7 +13454,16 @@
                 </a:solidFill>
                 <a:latin typeface="Consolas"/>
               </a:rPr>
-              <a:t>ranked</a:t>
+              <a:t> x </a:t>
+            </a:r>
+            <a:r>
+              <a:rPr sz="1100" b="1">
+                <a:solidFill>
+                  <a:srgbClr val="1F3A68"/>
+                </a:solidFill>
+                <a:latin typeface="Consolas"/>
+              </a:rPr>
+              <a:t>in</a:t>
             </a:r>
             <a:r>
               <a:rPr sz="1100">
@@ -15141,166 +13475,22 @@
               <a:t> </a:t>
             </a:r>
             <a:r>
+              <a:rPr sz="1100" b="1">
+                <a:solidFill>
+                  <a:srgbClr val="2F6EBA"/>
+                </a:solidFill>
+                <a:latin typeface="Consolas"/>
+              </a:rPr>
+              <a:t>sorted</a:t>
+            </a:r>
+            <a:r>
               <a:rPr sz="1100">
                 <a:solidFill>
                   <a:srgbClr val="303030"/>
                 </a:solidFill>
                 <a:latin typeface="Consolas"/>
               </a:rPr>
-              <a:t>=</a:t>
-            </a:r>
-            <a:r>
-              <a:rPr sz="1100">
-                <a:solidFill>
-                  <a:srgbClr val="303030"/>
-                </a:solidFill>
-                <a:latin typeface="Consolas"/>
-              </a:rPr>
-              <a:t> </a:t>
-            </a:r>
-            <a:r>
-              <a:rPr sz="1100">
-                <a:solidFill>
-                  <a:srgbClr val="303030"/>
-                </a:solidFill>
-                <a:latin typeface="Consolas"/>
-              </a:rPr>
-              <a:t>[</a:t>
-            </a:r>
-            <a:r>
-              <a:rPr sz="1100">
-                <a:solidFill>
-                  <a:srgbClr val="303030"/>
-                </a:solidFill>
-                <a:latin typeface="Consolas"/>
-              </a:rPr>
-              <a:t>x</a:t>
-            </a:r>
-            <a:r>
-              <a:rPr sz="1100">
-                <a:solidFill>
-                  <a:srgbClr val="303030"/>
-                </a:solidFill>
-                <a:latin typeface="Consolas"/>
-              </a:rPr>
-              <a:t> </a:t>
-            </a:r>
-            <a:r>
-              <a:rPr sz="1100" b="1">
-                <a:solidFill>
-                  <a:srgbClr val="1F3A68"/>
-                </a:solidFill>
-                <a:latin typeface="Consolas"/>
-              </a:rPr>
-              <a:t>for</a:t>
-            </a:r>
-            <a:r>
-              <a:rPr sz="1100">
-                <a:solidFill>
-                  <a:srgbClr val="303030"/>
-                </a:solidFill>
-                <a:latin typeface="Consolas"/>
-              </a:rPr>
-              <a:t> </a:t>
-            </a:r>
-            <a:r>
-              <a:rPr sz="1100">
-                <a:solidFill>
-                  <a:srgbClr val="303030"/>
-                </a:solidFill>
-                <a:latin typeface="Consolas"/>
-              </a:rPr>
-              <a:t>x</a:t>
-            </a:r>
-            <a:r>
-              <a:rPr sz="1100">
-                <a:solidFill>
-                  <a:srgbClr val="303030"/>
-                </a:solidFill>
-                <a:latin typeface="Consolas"/>
-              </a:rPr>
-              <a:t> </a:t>
-            </a:r>
-            <a:r>
-              <a:rPr sz="1100" b="1">
-                <a:solidFill>
-                  <a:srgbClr val="1F3A68"/>
-                </a:solidFill>
-                <a:latin typeface="Consolas"/>
-              </a:rPr>
-              <a:t>in</a:t>
-            </a:r>
-            <a:r>
-              <a:rPr sz="1100">
-                <a:solidFill>
-                  <a:srgbClr val="303030"/>
-                </a:solidFill>
-                <a:latin typeface="Consolas"/>
-              </a:rPr>
-              <a:t> </a:t>
-            </a:r>
-            <a:r>
-              <a:rPr sz="1100" b="1">
-                <a:solidFill>
-                  <a:srgbClr val="2F6EBA"/>
-                </a:solidFill>
-                <a:latin typeface="Consolas"/>
-              </a:rPr>
-              <a:t>sorted</a:t>
-            </a:r>
-            <a:r>
-              <a:rPr sz="1100">
-                <a:solidFill>
-                  <a:srgbClr val="303030"/>
-                </a:solidFill>
-                <a:latin typeface="Consolas"/>
-              </a:rPr>
-              <a:t>(</a:t>
-            </a:r>
-            <a:r>
-              <a:rPr sz="1100">
-                <a:solidFill>
-                  <a:srgbClr val="303030"/>
-                </a:solidFill>
-                <a:latin typeface="Consolas"/>
-              </a:rPr>
-              <a:t>fused</a:t>
-            </a:r>
-            <a:r>
-              <a:rPr sz="1100">
-                <a:solidFill>
-                  <a:srgbClr val="303030"/>
-                </a:solidFill>
-                <a:latin typeface="Consolas"/>
-              </a:rPr>
-              <a:t>,</a:t>
-            </a:r>
-            <a:r>
-              <a:rPr sz="1100">
-                <a:solidFill>
-                  <a:srgbClr val="303030"/>
-                </a:solidFill>
-                <a:latin typeface="Consolas"/>
-              </a:rPr>
-              <a:t> </a:t>
-            </a:r>
-            <a:r>
-              <a:rPr sz="1100">
-                <a:solidFill>
-                  <a:srgbClr val="303030"/>
-                </a:solidFill>
-                <a:latin typeface="Consolas"/>
-              </a:rPr>
-              <a:t>reverse</a:t>
-            </a:r>
-            <a:r>
-              <a:rPr sz="1100">
-                <a:solidFill>
-                  <a:srgbClr val="303030"/>
-                </a:solidFill>
-                <a:latin typeface="Consolas"/>
-              </a:rPr>
-              <a:t>=</a:t>
+              <a:t>(fused, reverse=</a:t>
             </a:r>
             <a:r>
               <a:rPr sz="1100" b="1">
@@ -15352,124 +13542,7 @@
                 </a:solidFill>
                 <a:latin typeface="Consolas"/>
               </a:rPr>
-              <a:t> </a:t>
-            </a:r>
-            <a:r>
-              <a:rPr sz="1100">
-                <a:solidFill>
-                  <a:srgbClr val="303030"/>
-                </a:solidFill>
-                <a:latin typeface="Consolas"/>
-              </a:rPr>
-              <a:t>x</a:t>
-            </a:r>
-            <a:r>
-              <a:rPr sz="1100">
-                <a:solidFill>
-                  <a:srgbClr val="303030"/>
-                </a:solidFill>
-                <a:latin typeface="Consolas"/>
-              </a:rPr>
-              <a:t>.</a:t>
-            </a:r>
-            <a:r>
-              <a:rPr sz="1100">
-                <a:solidFill>
-                  <a:srgbClr val="303030"/>
-                </a:solidFill>
-                <a:latin typeface="Consolas"/>
-              </a:rPr>
-              <a:t>score</a:t>
-            </a:r>
-            <a:r>
-              <a:rPr sz="1100">
-                <a:solidFill>
-                  <a:srgbClr val="303030"/>
-                </a:solidFill>
-                <a:latin typeface="Consolas"/>
-              </a:rPr>
-              <a:t> </a:t>
-            </a:r>
-            <a:r>
-              <a:rPr sz="1100">
-                <a:solidFill>
-                  <a:srgbClr val="303030"/>
-                </a:solidFill>
-                <a:latin typeface="Consolas"/>
-              </a:rPr>
-              <a:t>&gt;</a:t>
-            </a:r>
-            <a:r>
-              <a:rPr sz="1100">
-                <a:solidFill>
-                  <a:srgbClr val="303030"/>
-                </a:solidFill>
-                <a:latin typeface="Consolas"/>
-              </a:rPr>
-              <a:t>=</a:t>
-            </a:r>
-            <a:r>
-              <a:rPr sz="1100">
-                <a:solidFill>
-                  <a:srgbClr val="303030"/>
-                </a:solidFill>
-                <a:latin typeface="Consolas"/>
-              </a:rPr>
-              <a:t> </a:t>
-            </a:r>
-            <a:r>
-              <a:rPr sz="1100">
-                <a:solidFill>
-                  <a:srgbClr val="303030"/>
-                </a:solidFill>
-                <a:latin typeface="Consolas"/>
-              </a:rPr>
-              <a:t>min_score</a:t>
-            </a:r>
-            <a:r>
-              <a:rPr sz="1100">
-                <a:solidFill>
-                  <a:srgbClr val="303030"/>
-                </a:solidFill>
-                <a:latin typeface="Consolas"/>
-              </a:rPr>
-              <a:t>]</a:t>
-            </a:r>
-            <a:r>
-              <a:rPr sz="1100">
-                <a:solidFill>
-                  <a:srgbClr val="303030"/>
-                </a:solidFill>
-                <a:latin typeface="Consolas"/>
-              </a:rPr>
-              <a:t>[</a:t>
-            </a:r>
-            <a:r>
-              <a:rPr sz="1100">
-                <a:solidFill>
-                  <a:srgbClr val="303030"/>
-                </a:solidFill>
-                <a:latin typeface="Consolas"/>
-              </a:rPr>
-              <a:t>:</a:t>
-            </a:r>
-            <a:r>
-              <a:rPr sz="1100">
-                <a:solidFill>
-                  <a:srgbClr val="303030"/>
-                </a:solidFill>
-                <a:latin typeface="Consolas"/>
-              </a:rPr>
-              <a:t>top_k</a:t>
-            </a:r>
-            <a:r>
-              <a:rPr sz="1100">
-                <a:solidFill>
-                  <a:srgbClr val="303030"/>
-                </a:solidFill>
-                <a:latin typeface="Consolas"/>
-              </a:rPr>
-              <a:t>]</a:t>
+              <a:t> x.score &gt;= min_score][:top_k]</a:t>
             </a:r>
           </a:p>
           <a:p>
@@ -15503,7 +13576,16 @@
                 </a:solidFill>
                 <a:latin typeface="Consolas"/>
               </a:rPr>
-              <a:t> </a:t>
+              <a:t> r </a:t>
+            </a:r>
+            <a:r>
+              <a:rPr sz="1100" b="1">
+                <a:solidFill>
+                  <a:srgbClr val="1F3A68"/>
+                </a:solidFill>
+                <a:latin typeface="Consolas"/>
+              </a:rPr>
+              <a:t>in</a:t>
             </a:r>
             <a:r>
               <a:rPr sz="1100">
@@ -15512,52 +13594,7 @@
                 </a:solidFill>
                 <a:latin typeface="Consolas"/>
               </a:rPr>
-              <a:t>r</a:t>
-            </a:r>
-            <a:r>
-              <a:rPr sz="1100">
-                <a:solidFill>
-                  <a:srgbClr val="303030"/>
-                </a:solidFill>
-                <a:latin typeface="Consolas"/>
-              </a:rPr>
-              <a:t> </a:t>
-            </a:r>
-            <a:r>
-              <a:rPr sz="1100" b="1">
-                <a:solidFill>
-                  <a:srgbClr val="1F3A68"/>
-                </a:solidFill>
-                <a:latin typeface="Consolas"/>
-              </a:rPr>
-              <a:t>in</a:t>
-            </a:r>
-            <a:r>
-              <a:rPr sz="1100">
-                <a:solidFill>
-                  <a:srgbClr val="303030"/>
-                </a:solidFill>
-                <a:latin typeface="Consolas"/>
-              </a:rPr>
-              <a:t> </a:t>
-            </a:r>
-            <a:r>
-              <a:rPr sz="1100">
-                <a:solidFill>
-                  <a:srgbClr val="303030"/>
-                </a:solidFill>
-                <a:latin typeface="Consolas"/>
-              </a:rPr>
-              <a:t>ranked</a:t>
-            </a:r>
-            <a:r>
-              <a:rPr sz="1100">
-                <a:solidFill>
-                  <a:srgbClr val="303030"/>
-                </a:solidFill>
-                <a:latin typeface="Consolas"/>
-              </a:rPr>
-              <a:t>:</a:t>
+              <a:t> ranked:</a:t>
             </a:r>
           </a:p>
           <a:p>
@@ -15573,7 +13610,16 @@
                 </a:solidFill>
                 <a:latin typeface="Consolas"/>
               </a:rPr>
-              <a:t>        </a:t>
+              <a:t>        r.entry.</a:t>
+            </a:r>
+            <a:r>
+              <a:rPr sz="1100" b="1">
+                <a:solidFill>
+                  <a:srgbClr val="2F6EBA"/>
+                </a:solidFill>
+                <a:latin typeface="Consolas"/>
+              </a:rPr>
+              <a:t>mark_recalled</a:t>
             </a:r>
             <a:r>
               <a:rPr sz="1100">
@@ -15582,61 +13628,7 @@
                 </a:solidFill>
                 <a:latin typeface="Consolas"/>
               </a:rPr>
-              <a:t>r</a:t>
-            </a:r>
-            <a:r>
-              <a:rPr sz="1100">
-                <a:solidFill>
-                  <a:srgbClr val="303030"/>
-                </a:solidFill>
-                <a:latin typeface="Consolas"/>
-              </a:rPr>
-              <a:t>.</a:t>
-            </a:r>
-            <a:r>
-              <a:rPr sz="1100">
-                <a:solidFill>
-                  <a:srgbClr val="303030"/>
-                </a:solidFill>
-                <a:latin typeface="Consolas"/>
-              </a:rPr>
-              <a:t>entry</a:t>
-            </a:r>
-            <a:r>
-              <a:rPr sz="1100">
-                <a:solidFill>
-                  <a:srgbClr val="303030"/>
-                </a:solidFill>
-                <a:latin typeface="Consolas"/>
-              </a:rPr>
-              <a:t>.</a:t>
-            </a:r>
-            <a:r>
-              <a:rPr sz="1100" b="1">
-                <a:solidFill>
-                  <a:srgbClr val="2F6EBA"/>
-                </a:solidFill>
-                <a:latin typeface="Consolas"/>
-              </a:rPr>
-              <a:t>mark_recalled</a:t>
-            </a:r>
-            <a:r>
-              <a:rPr sz="1100">
-                <a:solidFill>
-                  <a:srgbClr val="303030"/>
-                </a:solidFill>
-                <a:latin typeface="Consolas"/>
-              </a:rPr>
-              <a:t>(</a:t>
-            </a:r>
-            <a:r>
-              <a:rPr sz="1100">
-                <a:solidFill>
-                  <a:srgbClr val="303030"/>
-                </a:solidFill>
-                <a:latin typeface="Consolas"/>
-              </a:rPr>
-              <a:t>)</a:t>
+              <a:t>()</a:t>
             </a:r>
           </a:p>
           <a:p>
@@ -15670,16 +13662,7 @@
                 </a:solidFill>
                 <a:latin typeface="Consolas"/>
               </a:rPr>
-              <a:t> </a:t>
-            </a:r>
-            <a:r>
-              <a:rPr sz="1100">
-                <a:solidFill>
-                  <a:srgbClr val="303030"/>
-                </a:solidFill>
-                <a:latin typeface="Consolas"/>
-              </a:rPr>
-              <a:t>ranked</a:t>
+              <a:t> ranked</a:t>
             </a:r>
           </a:p>
         </p:txBody>
@@ -15725,6 +13708,7 @@
           <a:lstStyle/>
           <a:p>
             <a:pPr algn="ctr"/>
+            <a:endParaRPr/>
           </a:p>
         </p:txBody>
       </p:sp>
@@ -15807,7 +13791,7 @@
 </file>
 
 <file path=ppt/slides/slide17.xml><?xml version="1.0" encoding="utf-8"?>
-<p:sld xmlns:a="http://schemas.openxmlformats.org/drawingml/2006/main" xmlns:p="http://schemas.openxmlformats.org/presentationml/2006/main" xmlns:r="http://schemas.openxmlformats.org/officeDocument/2006/relationships">
+<p:sld xmlns:a="http://schemas.openxmlformats.org/drawingml/2006/main" xmlns:r="http://schemas.openxmlformats.org/officeDocument/2006/relationships" xmlns:p="http://schemas.openxmlformats.org/presentationml/2006/main">
   <p:cSld>
     <p:spTree>
       <p:nvGrpSpPr>
@@ -15815,7 +13799,14 @@
         <p:cNvGrpSpPr/>
         <p:nvPr/>
       </p:nvGrpSpPr>
-      <p:grpSpPr/>
+      <p:grpSpPr>
+        <a:xfrm>
+          <a:off x="0" y="0"/>
+          <a:ext cx="0" cy="0"/>
+          <a:chOff x="0" y="0"/>
+          <a:chExt cx="0" cy="0"/>
+        </a:xfrm>
+      </p:grpSpPr>
       <p:sp>
         <p:nvSpPr>
           <p:cNvPr id="2" name="TextBox 1"/>
@@ -15892,6 +13883,7 @@
           <a:lstStyle/>
           <a:p>
             <a:pPr algn="ctr"/>
+            <a:endParaRPr/>
           </a:p>
         </p:txBody>
       </p:sp>
@@ -15971,6 +13963,7 @@
           <a:lstStyle/>
           <a:p>
             <a:pPr algn="ctr"/>
+            <a:endParaRPr/>
           </a:p>
         </p:txBody>
       </p:sp>
@@ -16120,6 +14113,7 @@
           <a:lstStyle/>
           <a:p>
             <a:pPr algn="ctr"/>
+            <a:endParaRPr/>
           </a:p>
         </p:txBody>
       </p:sp>
@@ -16269,6 +14263,7 @@
           <a:lstStyle/>
           <a:p>
             <a:pPr algn="ctr"/>
+            <a:endParaRPr/>
           </a:p>
         </p:txBody>
       </p:sp>
@@ -16330,15 +14325,7 @@
           <a:lstStyle/>
           <a:p>
             <a:pPr algn="l"/>
-            <a:r>
-              <a:rPr sz="2000" b="1">
-                <a:solidFill>
-                  <a:srgbClr val="1F3A68"/>
-                </a:solidFill>
-                <a:latin typeface="Microsoft YaHei"/>
-              </a:rPr>
-              <a:t/>
-            </a:r>
+            <a:endParaRPr/>
           </a:p>
         </p:txBody>
       </p:sp>
@@ -16418,6 +14405,7 @@
           <a:lstStyle/>
           <a:p>
             <a:pPr algn="ctr"/>
+            <a:endParaRPr/>
           </a:p>
         </p:txBody>
       </p:sp>
@@ -16462,6 +14450,7 @@
           <a:lstStyle/>
           <a:p>
             <a:pPr algn="ctr"/>
+            <a:endParaRPr/>
           </a:p>
         </p:txBody>
       </p:sp>
@@ -16543,6 +14532,7 @@
           <a:lstStyle/>
           <a:p>
             <a:pPr algn="ctr"/>
+            <a:endParaRPr/>
           </a:p>
         </p:txBody>
       </p:sp>
@@ -16607,61 +14597,7 @@
                 </a:solidFill>
                 <a:latin typeface="Consolas"/>
               </a:rPr>
-              <a:t>(</a:t>
-            </a:r>
-            <a:r>
-              <a:rPr sz="1100">
-                <a:solidFill>
-                  <a:srgbClr val="303030"/>
-                </a:solidFill>
-                <a:latin typeface="Consolas"/>
-              </a:rPr>
-              <a:t>review</a:t>
-            </a:r>
-            <a:r>
-              <a:rPr sz="1100">
-                <a:solidFill>
-                  <a:srgbClr val="303030"/>
-                </a:solidFill>
-                <a:latin typeface="Consolas"/>
-              </a:rPr>
-              <a:t>,</a:t>
-            </a:r>
-            <a:r>
-              <a:rPr sz="1100">
-                <a:solidFill>
-                  <a:srgbClr val="303030"/>
-                </a:solidFill>
-                <a:latin typeface="Consolas"/>
-              </a:rPr>
-              <a:t> </a:t>
-            </a:r>
-            <a:r>
-              <a:rPr sz="1100">
-                <a:solidFill>
-                  <a:srgbClr val="303030"/>
-                </a:solidFill>
-                <a:latin typeface="Consolas"/>
-              </a:rPr>
-              <a:t>session_id</a:t>
-            </a:r>
-            <a:r>
-              <a:rPr sz="1100">
-                <a:solidFill>
-                  <a:srgbClr val="303030"/>
-                </a:solidFill>
-                <a:latin typeface="Consolas"/>
-              </a:rPr>
-              <a:t>)</a:t>
-            </a:r>
-            <a:r>
-              <a:rPr sz="1100">
-                <a:solidFill>
-                  <a:srgbClr val="303030"/>
-                </a:solidFill>
-                <a:latin typeface="Consolas"/>
-              </a:rPr>
-              <a:t>:</a:t>
+              <a:t>(review, session_id):</a:t>
             </a:r>
           </a:p>
           <a:p>
@@ -16677,7 +14613,16 @@
                 </a:solidFill>
                 <a:latin typeface="Consolas"/>
               </a:rPr>
-              <a:t>    </a:t>
+              <a:t>    ops = llm.</a:t>
+            </a:r>
+            <a:r>
+              <a:rPr sz="1100" b="1">
+                <a:solidFill>
+                  <a:srgbClr val="2F6EBA"/>
+                </a:solidFill>
+                <a:latin typeface="Consolas"/>
+              </a:rPr>
+              <a:t>extract_memory_ops</a:t>
             </a:r>
             <a:r>
               <a:rPr sz="1100">
@@ -16686,88 +14631,7 @@
                 </a:solidFill>
                 <a:latin typeface="Consolas"/>
               </a:rPr>
-              <a:t>ops</a:t>
-            </a:r>
-            <a:r>
-              <a:rPr sz="1100">
-                <a:solidFill>
-                  <a:srgbClr val="303030"/>
-                </a:solidFill>
-                <a:latin typeface="Consolas"/>
-              </a:rPr>
-              <a:t> </a:t>
-            </a:r>
-            <a:r>
-              <a:rPr sz="1100">
-                <a:solidFill>
-                  <a:srgbClr val="303030"/>
-                </a:solidFill>
-                <a:latin typeface="Consolas"/>
-              </a:rPr>
-              <a:t>=</a:t>
-            </a:r>
-            <a:r>
-              <a:rPr sz="1100">
-                <a:solidFill>
-                  <a:srgbClr val="303030"/>
-                </a:solidFill>
-                <a:latin typeface="Consolas"/>
-              </a:rPr>
-              <a:t> </a:t>
-            </a:r>
-            <a:r>
-              <a:rPr sz="1100">
-                <a:solidFill>
-                  <a:srgbClr val="303030"/>
-                </a:solidFill>
-                <a:latin typeface="Consolas"/>
-              </a:rPr>
-              <a:t>llm</a:t>
-            </a:r>
-            <a:r>
-              <a:rPr sz="1100">
-                <a:solidFill>
-                  <a:srgbClr val="303030"/>
-                </a:solidFill>
-                <a:latin typeface="Consolas"/>
-              </a:rPr>
-              <a:t>.</a:t>
-            </a:r>
-            <a:r>
-              <a:rPr sz="1100" b="1">
-                <a:solidFill>
-                  <a:srgbClr val="2F6EBA"/>
-                </a:solidFill>
-                <a:latin typeface="Consolas"/>
-              </a:rPr>
-              <a:t>extract_memory_ops</a:t>
-            </a:r>
-            <a:r>
-              <a:rPr sz="1100">
-                <a:solidFill>
-                  <a:srgbClr val="303030"/>
-                </a:solidFill>
-                <a:latin typeface="Consolas"/>
-              </a:rPr>
-              <a:t>(</a:t>
-            </a:r>
-            <a:r>
-              <a:rPr sz="1100">
-                <a:solidFill>
-                  <a:srgbClr val="303030"/>
-                </a:solidFill>
-                <a:latin typeface="Consolas"/>
-              </a:rPr>
-              <a:t>review</a:t>
-            </a:r>
-            <a:r>
-              <a:rPr sz="1100">
-                <a:solidFill>
-                  <a:srgbClr val="303030"/>
-                </a:solidFill>
-                <a:latin typeface="Consolas"/>
-              </a:rPr>
-              <a:t>)</a:t>
+              <a:t>(review)</a:t>
             </a:r>
           </a:p>
           <a:p>
@@ -16801,7 +14665,16 @@
                 </a:solidFill>
                 <a:latin typeface="Consolas"/>
               </a:rPr>
-              <a:t> </a:t>
+              <a:t> op </a:t>
+            </a:r>
+            <a:r>
+              <a:rPr sz="1100" b="1">
+                <a:solidFill>
+                  <a:srgbClr val="1F3A68"/>
+                </a:solidFill>
+                <a:latin typeface="Consolas"/>
+              </a:rPr>
+              <a:t>in</a:t>
             </a:r>
             <a:r>
               <a:rPr sz="1100">
@@ -16810,52 +14683,7 @@
                 </a:solidFill>
                 <a:latin typeface="Consolas"/>
               </a:rPr>
-              <a:t>op</a:t>
-            </a:r>
-            <a:r>
-              <a:rPr sz="1100">
-                <a:solidFill>
-                  <a:srgbClr val="303030"/>
-                </a:solidFill>
-                <a:latin typeface="Consolas"/>
-              </a:rPr>
-              <a:t> </a:t>
-            </a:r>
-            <a:r>
-              <a:rPr sz="1100" b="1">
-                <a:solidFill>
-                  <a:srgbClr val="1F3A68"/>
-                </a:solidFill>
-                <a:latin typeface="Consolas"/>
-              </a:rPr>
-              <a:t>in</a:t>
-            </a:r>
-            <a:r>
-              <a:rPr sz="1100">
-                <a:solidFill>
-                  <a:srgbClr val="303030"/>
-                </a:solidFill>
-                <a:latin typeface="Consolas"/>
-              </a:rPr>
-              <a:t> </a:t>
-            </a:r>
-            <a:r>
-              <a:rPr sz="1100">
-                <a:solidFill>
-                  <a:srgbClr val="303030"/>
-                </a:solidFill>
-                <a:latin typeface="Consolas"/>
-              </a:rPr>
-              <a:t>ops</a:t>
-            </a:r>
-            <a:r>
-              <a:rPr sz="1100">
-                <a:solidFill>
-                  <a:srgbClr val="303030"/>
-                </a:solidFill>
-                <a:latin typeface="Consolas"/>
-              </a:rPr>
-              <a:t>:</a:t>
+              <a:t> ops:</a:t>
             </a:r>
           </a:p>
           <a:p>
@@ -16907,7 +14735,16 @@
                 </a:solidFill>
                 <a:latin typeface="Consolas"/>
               </a:rPr>
-              <a:t> </a:t>
+              <a:t> boundary.</a:t>
+            </a:r>
+            <a:r>
+              <a:rPr sz="1100" b="1">
+                <a:solidFill>
+                  <a:srgbClr val="2F6EBA"/>
+                </a:solidFill>
+                <a:latin typeface="Consolas"/>
+              </a:rPr>
+              <a:t>promote</a:t>
             </a:r>
             <a:r>
               <a:rPr sz="1100">
@@ -16916,79 +14753,7 @@
                 </a:solidFill>
                 <a:latin typeface="Consolas"/>
               </a:rPr>
-              <a:t>boundary</a:t>
-            </a:r>
-            <a:r>
-              <a:rPr sz="1100">
-                <a:solidFill>
-                  <a:srgbClr val="303030"/>
-                </a:solidFill>
-                <a:latin typeface="Consolas"/>
-              </a:rPr>
-              <a:t>.</a:t>
-            </a:r>
-            <a:r>
-              <a:rPr sz="1100" b="1">
-                <a:solidFill>
-                  <a:srgbClr val="2F6EBA"/>
-                </a:solidFill>
-                <a:latin typeface="Consolas"/>
-              </a:rPr>
-              <a:t>promote</a:t>
-            </a:r>
-            <a:r>
-              <a:rPr sz="1100">
-                <a:solidFill>
-                  <a:srgbClr val="303030"/>
-                </a:solidFill>
-                <a:latin typeface="Consolas"/>
-              </a:rPr>
-              <a:t>(</a:t>
-            </a:r>
-            <a:r>
-              <a:rPr sz="1100">
-                <a:solidFill>
-                  <a:srgbClr val="303030"/>
-                </a:solidFill>
-                <a:latin typeface="Consolas"/>
-              </a:rPr>
-              <a:t>op</a:t>
-            </a:r>
-            <a:r>
-              <a:rPr sz="1100">
-                <a:solidFill>
-                  <a:srgbClr val="303030"/>
-                </a:solidFill>
-                <a:latin typeface="Consolas"/>
-              </a:rPr>
-              <a:t>.</a:t>
-            </a:r>
-            <a:r>
-              <a:rPr sz="1100">
-                <a:solidFill>
-                  <a:srgbClr val="303030"/>
-                </a:solidFill>
-                <a:latin typeface="Consolas"/>
-              </a:rPr>
-              <a:t>content</a:t>
-            </a:r>
-            <a:r>
-              <a:rPr sz="1100">
-                <a:solidFill>
-                  <a:srgbClr val="303030"/>
-                </a:solidFill>
-                <a:latin typeface="Consolas"/>
-              </a:rPr>
-              <a:t>)</a:t>
-            </a:r>
-            <a:r>
-              <a:rPr sz="1100">
-                <a:solidFill>
-                  <a:srgbClr val="303030"/>
-                </a:solidFill>
-                <a:latin typeface="Consolas"/>
-              </a:rPr>
-              <a:t>:</a:t>
+              <a:t>(op.content):</a:t>
             </a:r>
           </a:p>
           <a:p>
@@ -17065,52 +14830,7 @@
                 </a:solidFill>
                 <a:latin typeface="Consolas"/>
               </a:rPr>
-              <a:t>(</a:t>
-            </a:r>
-            <a:r>
-              <a:rPr sz="1100">
-                <a:solidFill>
-                  <a:srgbClr val="303030"/>
-                </a:solidFill>
-                <a:latin typeface="Consolas"/>
-              </a:rPr>
-              <a:t>op</a:t>
-            </a:r>
-            <a:r>
-              <a:rPr sz="1100">
-                <a:solidFill>
-                  <a:srgbClr val="303030"/>
-                </a:solidFill>
-                <a:latin typeface="Consolas"/>
-              </a:rPr>
-              <a:t>)</a:t>
-            </a:r>
-            <a:r>
-              <a:rPr sz="1100">
-                <a:solidFill>
-                  <a:srgbClr val="303030"/>
-                </a:solidFill>
-                <a:latin typeface="Consolas"/>
-              </a:rPr>
-              <a:t> </a:t>
-            </a:r>
-            <a:r>
-              <a:rPr sz="1100">
-                <a:solidFill>
-                  <a:srgbClr val="303030"/>
-                </a:solidFill>
-                <a:latin typeface="Consolas"/>
-              </a:rPr>
-              <a:t>is</a:t>
-            </a:r>
-            <a:r>
-              <a:rPr sz="1100">
-                <a:solidFill>
-                  <a:srgbClr val="303030"/>
-                </a:solidFill>
-                <a:latin typeface="Consolas"/>
-              </a:rPr>
-              <a:t> </a:t>
+              <a:t>(op) is </a:t>
             </a:r>
             <a:r>
               <a:rPr sz="1100" b="1">
@@ -17144,52 +14864,7 @@
                 </a:solidFill>
                 <a:latin typeface="Consolas"/>
               </a:rPr>
-              <a:t>            </a:t>
-            </a:r>
-            <a:r>
-              <a:rPr sz="1100">
-                <a:solidFill>
-                  <a:srgbClr val="303030"/>
-                </a:solidFill>
-                <a:latin typeface="Consolas"/>
-              </a:rPr>
-              <a:t>skipped</a:t>
-            </a:r>
-            <a:r>
-              <a:rPr sz="1100">
-                <a:solidFill>
-                  <a:srgbClr val="303030"/>
-                </a:solidFill>
-                <a:latin typeface="Consolas"/>
-              </a:rPr>
-              <a:t> </a:t>
-            </a:r>
-            <a:r>
-              <a:rPr sz="1100">
-                <a:solidFill>
-                  <a:srgbClr val="303030"/>
-                </a:solidFill>
-                <a:latin typeface="Consolas"/>
-              </a:rPr>
-              <a:t>+</a:t>
-            </a:r>
-            <a:r>
-              <a:rPr sz="1100">
-                <a:solidFill>
-                  <a:srgbClr val="303030"/>
-                </a:solidFill>
-                <a:latin typeface="Consolas"/>
-              </a:rPr>
-              <a:t>=</a:t>
-            </a:r>
-            <a:r>
-              <a:rPr sz="1100">
-                <a:solidFill>
-                  <a:srgbClr val="303030"/>
-                </a:solidFill>
-                <a:latin typeface="Consolas"/>
-              </a:rPr>
-              <a:t> </a:t>
+              <a:t>            skipped += </a:t>
             </a:r>
             <a:r>
               <a:rPr sz="1100">
@@ -17232,16 +14907,7 @@
                 </a:solidFill>
                 <a:latin typeface="Consolas"/>
               </a:rPr>
-              <a:t>(</a:t>
-            </a:r>
-            <a:r>
-              <a:rPr sz="1100">
-                <a:solidFill>
-                  <a:srgbClr val="303030"/>
-                </a:solidFill>
-                <a:latin typeface="Consolas"/>
-              </a:rPr>
-              <a:t>)</a:t>
+              <a:t>()</a:t>
             </a:r>
           </a:p>
           <a:p>
@@ -17275,16 +14941,7 @@
                 </a:solidFill>
                 <a:latin typeface="Consolas"/>
               </a:rPr>
-              <a:t>(</a:t>
-            </a:r>
-            <a:r>
-              <a:rPr sz="1100">
-                <a:solidFill>
-                  <a:srgbClr val="303030"/>
-                </a:solidFill>
-                <a:latin typeface="Consolas"/>
-              </a:rPr>
-              <a:t>)</a:t>
+              <a:t>()</a:t>
             </a:r>
           </a:p>
           <a:p>
@@ -17336,61 +14993,7 @@
                 </a:solidFill>
                 <a:latin typeface="Consolas"/>
               </a:rPr>
-              <a:t>(</a:t>
-            </a:r>
-            <a:r>
-              <a:rPr sz="1100">
-                <a:solidFill>
-                  <a:srgbClr val="303030"/>
-                </a:solidFill>
-                <a:latin typeface="Consolas"/>
-              </a:rPr>
-              <a:t>new_experiences</a:t>
-            </a:r>
-            <a:r>
-              <a:rPr sz="1100">
-                <a:solidFill>
-                  <a:srgbClr val="303030"/>
-                </a:solidFill>
-                <a:latin typeface="Consolas"/>
-              </a:rPr>
-              <a:t>)</a:t>
-            </a:r>
-            <a:r>
-              <a:rPr sz="1100">
-                <a:solidFill>
-                  <a:srgbClr val="303030"/>
-                </a:solidFill>
-                <a:latin typeface="Consolas"/>
-              </a:rPr>
-              <a:t> </a:t>
-            </a:r>
-            <a:r>
-              <a:rPr sz="1100">
-                <a:solidFill>
-                  <a:srgbClr val="303030"/>
-                </a:solidFill>
-                <a:latin typeface="Consolas"/>
-              </a:rPr>
-              <a:t>&gt;</a:t>
-            </a:r>
-            <a:r>
-              <a:rPr sz="1100">
-                <a:solidFill>
-                  <a:srgbClr val="303030"/>
-                </a:solidFill>
-                <a:latin typeface="Consolas"/>
-              </a:rPr>
-              <a:t>=</a:t>
-            </a:r>
-            <a:r>
-              <a:rPr sz="1100">
-                <a:solidFill>
-                  <a:srgbClr val="303030"/>
-                </a:solidFill>
-                <a:latin typeface="Consolas"/>
-              </a:rPr>
-              <a:t> </a:t>
+              <a:t>(new_experiences) &gt;= </a:t>
             </a:r>
             <a:r>
               <a:rPr sz="1100">
@@ -17442,16 +15045,7 @@
                 </a:solidFill>
                 <a:latin typeface="Consolas"/>
               </a:rPr>
-              <a:t>(</a:t>
-            </a:r>
-            <a:r>
-              <a:rPr sz="1100">
-                <a:solidFill>
-                  <a:srgbClr val="303030"/>
-                </a:solidFill>
-                <a:latin typeface="Consolas"/>
-              </a:rPr>
-              <a:t>)</a:t>
+              <a:t>()</a:t>
             </a:r>
           </a:p>
           <a:p>
@@ -17460,6 +15054,12 @@
                 <a:spcPts val="200"/>
               </a:spcAft>
             </a:pPr>
+            <a:endParaRPr sz="1100">
+              <a:solidFill>
+                <a:srgbClr val="303030"/>
+              </a:solidFill>
+              <a:latin typeface="Consolas"/>
+            </a:endParaRPr>
           </a:p>
           <a:p>
             <a:pPr>
@@ -17490,7 +15090,16 @@
                 </a:solidFill>
                 <a:latin typeface="Consolas"/>
               </a:rPr>
-              <a:t>R</a:t>
+              <a:t>R = </a:t>
+            </a:r>
+            <a:r>
+              <a:rPr sz="1100" b="1">
+                <a:solidFill>
+                  <a:srgbClr val="2F6EBA"/>
+                </a:solidFill>
+                <a:latin typeface="Consolas"/>
+              </a:rPr>
+              <a:t>exp</a:t>
             </a:r>
             <a:r>
               <a:rPr sz="1100">
@@ -17499,7 +15108,16 @@
                 </a:solidFill>
                 <a:latin typeface="Consolas"/>
               </a:rPr>
-              <a:t> </a:t>
+              <a:t>(-t / </a:t>
+            </a:r>
+            <a:r>
+              <a:rPr sz="1100" b="1">
+                <a:solidFill>
+                  <a:srgbClr val="2F6EBA"/>
+                </a:solidFill>
+                <a:latin typeface="Consolas"/>
+              </a:rPr>
+              <a:t>max</a:t>
             </a:r>
             <a:r>
               <a:rPr sz="1100">
@@ -17508,25 +15126,34 @@
                 </a:solidFill>
                 <a:latin typeface="Consolas"/>
               </a:rPr>
-              <a:t>=</a:t>
+              <a:t>(S, </a:t>
             </a:r>
             <a:r>
               <a:rPr sz="1100">
                 <a:solidFill>
+                  <a:srgbClr val="7B4FA6"/>
+                </a:solidFill>
+                <a:latin typeface="Consolas"/>
+              </a:rPr>
+              <a:t>1</a:t>
+            </a:r>
+            <a:r>
+              <a:rPr sz="1100">
+                <a:solidFill>
                   <a:srgbClr val="303030"/>
                 </a:solidFill>
                 <a:latin typeface="Consolas"/>
               </a:rPr>
-              <a:t> </a:t>
-            </a:r>
-            <a:r>
-              <a:rPr sz="1100" b="1">
-                <a:solidFill>
-                  <a:srgbClr val="2F6EBA"/>
+              <a:t>e-</a:t>
+            </a:r>
+            <a:r>
+              <a:rPr sz="1100">
+                <a:solidFill>
+                  <a:srgbClr val="7B4FA6"/>
                 </a:solidFill>
                 <a:latin typeface="Consolas"/>
               </a:rPr>
-              <a:t>exp</a:t>
+              <a:t>6</a:t>
             </a:r>
             <a:r>
               <a:rPr sz="1100">
@@ -17535,151 +15162,7 @@
                 </a:solidFill>
                 <a:latin typeface="Consolas"/>
               </a:rPr>
-              <a:t>(</a:t>
-            </a:r>
-            <a:r>
-              <a:rPr sz="1100">
-                <a:solidFill>
-                  <a:srgbClr val="303030"/>
-                </a:solidFill>
-                <a:latin typeface="Consolas"/>
-              </a:rPr>
-              <a:t>-</a:t>
-            </a:r>
-            <a:r>
-              <a:rPr sz="1100">
-                <a:solidFill>
-                  <a:srgbClr val="303030"/>
-                </a:solidFill>
-                <a:latin typeface="Consolas"/>
-              </a:rPr>
-              <a:t>t</a:t>
-            </a:r>
-            <a:r>
-              <a:rPr sz="1100">
-                <a:solidFill>
-                  <a:srgbClr val="303030"/>
-                </a:solidFill>
-                <a:latin typeface="Consolas"/>
-              </a:rPr>
-              <a:t> </a:t>
-            </a:r>
-            <a:r>
-              <a:rPr sz="1100">
-                <a:solidFill>
-                  <a:srgbClr val="303030"/>
-                </a:solidFill>
-                <a:latin typeface="Consolas"/>
-              </a:rPr>
-              <a:t>/</a:t>
-            </a:r>
-            <a:r>
-              <a:rPr sz="1100">
-                <a:solidFill>
-                  <a:srgbClr val="303030"/>
-                </a:solidFill>
-                <a:latin typeface="Consolas"/>
-              </a:rPr>
-              <a:t> </a:t>
-            </a:r>
-            <a:r>
-              <a:rPr sz="1100" b="1">
-                <a:solidFill>
-                  <a:srgbClr val="2F6EBA"/>
-                </a:solidFill>
-                <a:latin typeface="Consolas"/>
-              </a:rPr>
-              <a:t>max</a:t>
-            </a:r>
-            <a:r>
-              <a:rPr sz="1100">
-                <a:solidFill>
-                  <a:srgbClr val="303030"/>
-                </a:solidFill>
-                <a:latin typeface="Consolas"/>
-              </a:rPr>
-              <a:t>(</a:t>
-            </a:r>
-            <a:r>
-              <a:rPr sz="1100">
-                <a:solidFill>
-                  <a:srgbClr val="303030"/>
-                </a:solidFill>
-                <a:latin typeface="Consolas"/>
-              </a:rPr>
-              <a:t>S</a:t>
-            </a:r>
-            <a:r>
-              <a:rPr sz="1100">
-                <a:solidFill>
-                  <a:srgbClr val="303030"/>
-                </a:solidFill>
-                <a:latin typeface="Consolas"/>
-              </a:rPr>
-              <a:t>,</a:t>
-            </a:r>
-            <a:r>
-              <a:rPr sz="1100">
-                <a:solidFill>
-                  <a:srgbClr val="303030"/>
-                </a:solidFill>
-                <a:latin typeface="Consolas"/>
-              </a:rPr>
-              <a:t> </a:t>
-            </a:r>
-            <a:r>
-              <a:rPr sz="1100">
-                <a:solidFill>
-                  <a:srgbClr val="7B4FA6"/>
-                </a:solidFill>
-                <a:latin typeface="Consolas"/>
-              </a:rPr>
-              <a:t>1</a:t>
-            </a:r>
-            <a:r>
-              <a:rPr sz="1100">
-                <a:solidFill>
-                  <a:srgbClr val="303030"/>
-                </a:solidFill>
-                <a:latin typeface="Consolas"/>
-              </a:rPr>
-              <a:t>e</a:t>
-            </a:r>
-            <a:r>
-              <a:rPr sz="1100">
-                <a:solidFill>
-                  <a:srgbClr val="303030"/>
-                </a:solidFill>
-                <a:latin typeface="Consolas"/>
-              </a:rPr>
-              <a:t>-</a:t>
-            </a:r>
-            <a:r>
-              <a:rPr sz="1100">
-                <a:solidFill>
-                  <a:srgbClr val="7B4FA6"/>
-                </a:solidFill>
-                <a:latin typeface="Consolas"/>
-              </a:rPr>
-              <a:t>6</a:t>
-            </a:r>
-            <a:r>
-              <a:rPr sz="1100">
-                <a:solidFill>
-                  <a:srgbClr val="303030"/>
-                </a:solidFill>
-                <a:latin typeface="Consolas"/>
-              </a:rPr>
-              <a:t>)</a:t>
-            </a:r>
-            <a:r>
-              <a:rPr sz="1100">
-                <a:solidFill>
-                  <a:srgbClr val="303030"/>
-                </a:solidFill>
-                <a:latin typeface="Consolas"/>
-              </a:rPr>
-              <a:t>)</a:t>
+              <a:t>))</a:t>
             </a:r>
           </a:p>
           <a:p>
@@ -17711,97 +15194,25 @@
                 </a:solidFill>
                 <a:latin typeface="Consolas"/>
               </a:rPr>
-              <a:t>S</a:t>
+              <a:t>S += </a:t>
             </a:r>
             <a:r>
               <a:rPr sz="1100">
                 <a:solidFill>
+                  <a:srgbClr val="7B4FA6"/>
+                </a:solidFill>
+                <a:latin typeface="Consolas"/>
+              </a:rPr>
+              <a:t>1</a:t>
+            </a:r>
+            <a:r>
+              <a:rPr sz="1100">
+                <a:solidFill>
                   <a:srgbClr val="303030"/>
                 </a:solidFill>
                 <a:latin typeface="Consolas"/>
               </a:rPr>
-              <a:t> </a:t>
-            </a:r>
-            <a:r>
-              <a:rPr sz="1100">
-                <a:solidFill>
-                  <a:srgbClr val="303030"/>
-                </a:solidFill>
-                <a:latin typeface="Consolas"/>
-              </a:rPr>
-              <a:t>+</a:t>
-            </a:r>
-            <a:r>
-              <a:rPr sz="1100">
-                <a:solidFill>
-                  <a:srgbClr val="303030"/>
-                </a:solidFill>
-                <a:latin typeface="Consolas"/>
-              </a:rPr>
-              <a:t>=</a:t>
-            </a:r>
-            <a:r>
-              <a:rPr sz="1100">
-                <a:solidFill>
-                  <a:srgbClr val="303030"/>
-                </a:solidFill>
-                <a:latin typeface="Consolas"/>
-              </a:rPr>
-              <a:t> </a:t>
-            </a:r>
-            <a:r>
-              <a:rPr sz="1100">
-                <a:solidFill>
-                  <a:srgbClr val="7B4FA6"/>
-                </a:solidFill>
-                <a:latin typeface="Consolas"/>
-              </a:rPr>
-              <a:t>1</a:t>
-            </a:r>
-            <a:r>
-              <a:rPr sz="1100">
-                <a:solidFill>
-                  <a:srgbClr val="303030"/>
-                </a:solidFill>
-                <a:latin typeface="Consolas"/>
-              </a:rPr>
-              <a:t>;</a:t>
-            </a:r>
-            <a:r>
-              <a:rPr sz="1100">
-                <a:solidFill>
-                  <a:srgbClr val="303030"/>
-                </a:solidFill>
-                <a:latin typeface="Consolas"/>
-              </a:rPr>
-              <a:t> </a:t>
-            </a:r>
-            <a:r>
-              <a:rPr sz="1100">
-                <a:solidFill>
-                  <a:srgbClr val="303030"/>
-                </a:solidFill>
-                <a:latin typeface="Consolas"/>
-              </a:rPr>
-              <a:t>t</a:t>
-            </a:r>
-            <a:r>
-              <a:rPr sz="1100">
-                <a:solidFill>
-                  <a:srgbClr val="303030"/>
-                </a:solidFill>
-                <a:latin typeface="Consolas"/>
-              </a:rPr>
-              <a:t> </a:t>
-            </a:r>
-            <a:r>
-              <a:rPr sz="1100">
-                <a:solidFill>
-                  <a:srgbClr val="303030"/>
-                </a:solidFill>
-                <a:latin typeface="Consolas"/>
-              </a:rPr>
-              <a:t>重置</a:t>
+              <a:t>; t 重置</a:t>
             </a:r>
           </a:p>
         </p:txBody>
@@ -17847,6 +15258,7 @@
           <a:lstStyle/>
           <a:p>
             <a:pPr algn="ctr"/>
+            <a:endParaRPr/>
           </a:p>
         </p:txBody>
       </p:sp>
@@ -17929,7 +15341,7 @@
 </file>
 
 <file path=ppt/slides/slide18.xml><?xml version="1.0" encoding="utf-8"?>
-<p:sld xmlns:a="http://schemas.openxmlformats.org/drawingml/2006/main" xmlns:p="http://schemas.openxmlformats.org/presentationml/2006/main" xmlns:r="http://schemas.openxmlformats.org/officeDocument/2006/relationships">
+<p:sld xmlns:a="http://schemas.openxmlformats.org/drawingml/2006/main" xmlns:r="http://schemas.openxmlformats.org/officeDocument/2006/relationships" xmlns:p="http://schemas.openxmlformats.org/presentationml/2006/main">
   <p:cSld>
     <p:spTree>
       <p:nvGrpSpPr>
@@ -17937,7 +15349,14 @@
         <p:cNvGrpSpPr/>
         <p:nvPr/>
       </p:nvGrpSpPr>
-      <p:grpSpPr/>
+      <p:grpSpPr>
+        <a:xfrm>
+          <a:off x="0" y="0"/>
+          <a:ext cx="0" cy="0"/>
+          <a:chOff x="0" y="0"/>
+          <a:chExt cx="0" cy="0"/>
+        </a:xfrm>
+      </p:grpSpPr>
       <p:sp>
         <p:nvSpPr>
           <p:cNvPr id="2" name="TextBox 1"/>
@@ -18014,6 +15433,7 @@
           <a:lstStyle/>
           <a:p>
             <a:pPr algn="ctr"/>
+            <a:endParaRPr/>
           </a:p>
         </p:txBody>
       </p:sp>
@@ -18093,6 +15513,7 @@
           <a:lstStyle/>
           <a:p>
             <a:pPr algn="ctr"/>
+            <a:endParaRPr/>
           </a:p>
         </p:txBody>
       </p:sp>
@@ -18242,6 +15663,7 @@
           <a:lstStyle/>
           <a:p>
             <a:pPr algn="ctr"/>
+            <a:endParaRPr/>
           </a:p>
         </p:txBody>
       </p:sp>
@@ -18391,6 +15813,7 @@
           <a:lstStyle/>
           <a:p>
             <a:pPr algn="ctr"/>
+            <a:endParaRPr/>
           </a:p>
         </p:txBody>
       </p:sp>
@@ -18540,6 +15963,7 @@
           <a:lstStyle/>
           <a:p>
             <a:pPr algn="ctr"/>
+            <a:endParaRPr/>
           </a:p>
         </p:txBody>
       </p:sp>
@@ -18689,6 +16113,7 @@
           <a:lstStyle/>
           <a:p>
             <a:pPr algn="ctr"/>
+            <a:endParaRPr/>
           </a:p>
         </p:txBody>
       </p:sp>
@@ -18733,6 +16158,7 @@
           <a:lstStyle/>
           <a:p>
             <a:pPr algn="ctr"/>
+            <a:endParaRPr/>
           </a:p>
         </p:txBody>
       </p:sp>
@@ -18815,7 +16241,7 @@
 </file>
 
 <file path=ppt/slides/slide19.xml><?xml version="1.0" encoding="utf-8"?>
-<p:sld xmlns:a="http://schemas.openxmlformats.org/drawingml/2006/main" xmlns:p="http://schemas.openxmlformats.org/presentationml/2006/main" xmlns:r="http://schemas.openxmlformats.org/officeDocument/2006/relationships">
+<p:sld xmlns:a="http://schemas.openxmlformats.org/drawingml/2006/main" xmlns:r="http://schemas.openxmlformats.org/officeDocument/2006/relationships" xmlns:p="http://schemas.openxmlformats.org/presentationml/2006/main">
   <p:cSld>
     <p:spTree>
       <p:nvGrpSpPr>
@@ -18823,7 +16249,14 @@
         <p:cNvGrpSpPr/>
         <p:nvPr/>
       </p:nvGrpSpPr>
-      <p:grpSpPr/>
+      <p:grpSpPr>
+        <a:xfrm>
+          <a:off x="0" y="0"/>
+          <a:ext cx="0" cy="0"/>
+          <a:chOff x="0" y="0"/>
+          <a:chExt cx="0" cy="0"/>
+        </a:xfrm>
+      </p:grpSpPr>
       <p:sp>
         <p:nvSpPr>
           <p:cNvPr id="2" name="TextBox 1"/>
@@ -18900,6 +16333,7 @@
           <a:lstStyle/>
           <a:p>
             <a:pPr algn="ctr"/>
+            <a:endParaRPr/>
           </a:p>
         </p:txBody>
       </p:sp>
@@ -18979,6 +16413,7 @@
           <a:lstStyle/>
           <a:p>
             <a:pPr algn="ctr"/>
+            <a:endParaRPr/>
           </a:p>
         </p:txBody>
       </p:sp>
@@ -19128,6 +16563,7 @@
           <a:lstStyle/>
           <a:p>
             <a:pPr algn="ctr"/>
+            <a:endParaRPr/>
           </a:p>
         </p:txBody>
       </p:sp>
@@ -19277,6 +16713,7 @@
           <a:lstStyle/>
           <a:p>
             <a:pPr algn="ctr"/>
+            <a:endParaRPr/>
           </a:p>
         </p:txBody>
       </p:sp>
@@ -19426,6 +16863,7 @@
           <a:lstStyle/>
           <a:p>
             <a:pPr algn="ctr"/>
+            <a:endParaRPr/>
           </a:p>
         </p:txBody>
       </p:sp>
@@ -19487,15 +16925,7 @@
           <a:lstStyle/>
           <a:p>
             <a:pPr algn="l"/>
-            <a:r>
-              <a:rPr sz="2000" b="1">
-                <a:solidFill>
-                  <a:srgbClr val="1F3A68"/>
-                </a:solidFill>
-                <a:latin typeface="Microsoft YaHei"/>
-              </a:rPr>
-              <a:t/>
-            </a:r>
+            <a:endParaRPr/>
           </a:p>
         </p:txBody>
       </p:sp>
@@ -19575,6 +17005,7 @@
           <a:lstStyle/>
           <a:p>
             <a:pPr algn="ctr"/>
+            <a:endParaRPr/>
           </a:p>
         </p:txBody>
       </p:sp>
@@ -19587,7 +17018,7 @@
           <p:nvPr/>
         </p:nvPicPr>
         <p:blipFill>
-          <a:blip r:embed="rId2"/>
+          <a:blip r:embed="rId3"/>
           <a:stretch>
             <a:fillRect/>
           </a:stretch>
@@ -19643,6 +17074,7 @@
           <a:lstStyle/>
           <a:p>
             <a:pPr algn="ctr"/>
+            <a:endParaRPr/>
           </a:p>
         </p:txBody>
       </p:sp>
@@ -19687,6 +17119,7 @@
           <a:lstStyle/>
           <a:p>
             <a:pPr algn="ctr"/>
+            <a:endParaRPr/>
           </a:p>
         </p:txBody>
       </p:sp>
@@ -19769,7 +17202,7 @@
 </file>
 
 <file path=ppt/slides/slide2.xml><?xml version="1.0" encoding="utf-8"?>
-<p:sld xmlns:a="http://schemas.openxmlformats.org/drawingml/2006/main" xmlns:p="http://schemas.openxmlformats.org/presentationml/2006/main" xmlns:r="http://schemas.openxmlformats.org/officeDocument/2006/relationships">
+<p:sld xmlns:a="http://schemas.openxmlformats.org/drawingml/2006/main" xmlns:r="http://schemas.openxmlformats.org/officeDocument/2006/relationships" xmlns:p="http://schemas.openxmlformats.org/presentationml/2006/main">
   <p:cSld>
     <p:spTree>
       <p:nvGrpSpPr>
@@ -19777,7 +17210,14 @@
         <p:cNvGrpSpPr/>
         <p:nvPr/>
       </p:nvGrpSpPr>
-      <p:grpSpPr/>
+      <p:grpSpPr>
+        <a:xfrm>
+          <a:off x="0" y="0"/>
+          <a:ext cx="0" cy="0"/>
+          <a:chOff x="0" y="0"/>
+          <a:chExt cx="0" cy="0"/>
+        </a:xfrm>
+      </p:grpSpPr>
       <p:sp>
         <p:nvSpPr>
           <p:cNvPr id="2" name="TextBox 1"/>
@@ -19854,6 +17294,7 @@
           <a:lstStyle/>
           <a:p>
             <a:pPr algn="ctr"/>
+            <a:endParaRPr/>
           </a:p>
         </p:txBody>
       </p:sp>
@@ -19933,6 +17374,7 @@
           <a:lstStyle/>
           <a:p>
             <a:pPr algn="ctr"/>
+            <a:endParaRPr/>
           </a:p>
         </p:txBody>
       </p:sp>
@@ -19981,6 +17423,7 @@
           <a:lstStyle/>
           <a:p>
             <a:pPr algn="ctr"/>
+            <a:endParaRPr/>
           </a:p>
         </p:txBody>
       </p:sp>
@@ -20025,6 +17468,7 @@
           <a:lstStyle/>
           <a:p>
             <a:pPr algn="ctr"/>
+            <a:endParaRPr/>
           </a:p>
         </p:txBody>
       </p:sp>
@@ -20036,8 +17480,8 @@
         </p:nvSpPr>
         <p:spPr>
           <a:xfrm>
-            <a:off x="1159200" y="1771200"/>
-            <a:ext cx="503999" cy="432000"/>
+            <a:off x="1080000" y="1800000"/>
+            <a:ext cx="619199" cy="432000"/>
           </a:xfrm>
           <a:prstGeom prst="rect">
             <a:avLst/>
@@ -20052,13 +17496,22 @@
           <a:p>
             <a:pPr algn="ctr"/>
             <a:r>
+              <a:rPr lang="en-US" altLang="zh-CN" sz="2200" b="1">
+                <a:solidFill>
+                  <a:srgbClr val="FFFFFF"/>
+                </a:solidFill>
+                <a:latin typeface="Microsoft YaHei"/>
+              </a:rPr>
+              <a:t>0</a:t>
+            </a:r>
+            <a:r>
               <a:rPr sz="2200" b="1">
                 <a:solidFill>
                   <a:srgbClr val="FFFFFF"/>
                 </a:solidFill>
                 <a:latin typeface="Microsoft YaHei"/>
               </a:rPr>
-              <a:t>01</a:t>
+              <a:t>1</a:t>
             </a:r>
           </a:p>
         </p:txBody>
@@ -20071,8 +17524,8 @@
         </p:nvSpPr>
         <p:spPr>
           <a:xfrm>
-            <a:off x="1872000" y="1835999"/>
-            <a:ext cx="8280000" cy="432000"/>
+            <a:off x="1742399" y="1759534"/>
+            <a:ext cx="8280000" cy="461665"/>
           </a:xfrm>
           <a:prstGeom prst="rect">
             <a:avLst/>
@@ -20093,7 +17546,7 @@
                 </a:solidFill>
                 <a:latin typeface="Microsoft YaHei"/>
               </a:rPr>
-              <a:t>01 问题与思路</a:t>
+              <a:t>问题与思路</a:t>
             </a:r>
           </a:p>
         </p:txBody>
@@ -20143,6 +17596,7 @@
           <a:lstStyle/>
           <a:p>
             <a:pPr algn="ctr"/>
+            <a:endParaRPr/>
           </a:p>
         </p:txBody>
       </p:sp>
@@ -20187,6 +17641,7 @@
           <a:lstStyle/>
           <a:p>
             <a:pPr algn="ctr"/>
+            <a:endParaRPr/>
           </a:p>
         </p:txBody>
       </p:sp>
@@ -20198,8 +17653,8 @@
         </p:nvSpPr>
         <p:spPr>
           <a:xfrm>
-            <a:off x="1159200" y="2617200"/>
-            <a:ext cx="503999" cy="432000"/>
+            <a:off x="1080000" y="2646000"/>
+            <a:ext cx="619199" cy="432000"/>
           </a:xfrm>
           <a:prstGeom prst="rect">
             <a:avLst/>
@@ -20214,13 +17669,22 @@
           <a:p>
             <a:pPr algn="ctr"/>
             <a:r>
+              <a:rPr lang="en-US" sz="2200" b="1">
+                <a:solidFill>
+                  <a:srgbClr val="FFFFFF"/>
+                </a:solidFill>
+                <a:latin typeface="Microsoft YaHei"/>
+              </a:rPr>
+              <a:t>0</a:t>
+            </a:r>
+            <a:r>
               <a:rPr sz="2200" b="1">
                 <a:solidFill>
                   <a:srgbClr val="FFFFFF"/>
                 </a:solidFill>
                 <a:latin typeface="Microsoft YaHei"/>
               </a:rPr>
-              <a:t>02</a:t>
+              <a:t>2</a:t>
             </a:r>
           </a:p>
         </p:txBody>
@@ -20233,8 +17697,8 @@
         </p:nvSpPr>
         <p:spPr>
           <a:xfrm>
-            <a:off x="1872000" y="2681999"/>
-            <a:ext cx="8280000" cy="432000"/>
+            <a:off x="1742399" y="2605534"/>
+            <a:ext cx="8280000" cy="461665"/>
           </a:xfrm>
           <a:prstGeom prst="rect">
             <a:avLst/>
@@ -20255,7 +17719,7 @@
                 </a:solidFill>
                 <a:latin typeface="Microsoft YaHei"/>
               </a:rPr>
-              <a:t>02 相关工作与启发</a:t>
+              <a:t>相关工作与启发</a:t>
             </a:r>
           </a:p>
         </p:txBody>
@@ -20305,6 +17769,7 @@
           <a:lstStyle/>
           <a:p>
             <a:pPr algn="ctr"/>
+            <a:endParaRPr/>
           </a:p>
         </p:txBody>
       </p:sp>
@@ -20349,6 +17814,7 @@
           <a:lstStyle/>
           <a:p>
             <a:pPr algn="ctr"/>
+            <a:endParaRPr/>
           </a:p>
         </p:txBody>
       </p:sp>
@@ -20360,8 +17826,8 @@
         </p:nvSpPr>
         <p:spPr>
           <a:xfrm>
-            <a:off x="1159200" y="3463200"/>
-            <a:ext cx="503999" cy="432000"/>
+            <a:off x="1080000" y="3492000"/>
+            <a:ext cx="619199" cy="432000"/>
           </a:xfrm>
           <a:prstGeom prst="rect">
             <a:avLst/>
@@ -20376,13 +17842,22 @@
           <a:p>
             <a:pPr algn="ctr"/>
             <a:r>
+              <a:rPr lang="en-US" altLang="zh-CN" sz="2200" b="1">
+                <a:solidFill>
+                  <a:srgbClr val="FFFFFF"/>
+                </a:solidFill>
+                <a:latin typeface="Microsoft YaHei"/>
+              </a:rPr>
+              <a:t>0</a:t>
+            </a:r>
+            <a:r>
               <a:rPr sz="2200" b="1">
                 <a:solidFill>
                   <a:srgbClr val="FFFFFF"/>
                 </a:solidFill>
                 <a:latin typeface="Microsoft YaHei"/>
               </a:rPr>
-              <a:t>03</a:t>
+              <a:t>3</a:t>
             </a:r>
           </a:p>
         </p:txBody>
@@ -20395,8 +17870,8 @@
         </p:nvSpPr>
         <p:spPr>
           <a:xfrm>
-            <a:off x="1872000" y="3528000"/>
-            <a:ext cx="8280000" cy="432000"/>
+            <a:off x="1742399" y="3451535"/>
+            <a:ext cx="8280000" cy="461665"/>
           </a:xfrm>
           <a:prstGeom prst="rect">
             <a:avLst/>
@@ -20417,7 +17892,7 @@
                 </a:solidFill>
                 <a:latin typeface="Microsoft YaHei"/>
               </a:rPr>
-              <a:t>03 系统设计与实现</a:t>
+              <a:t>系统设计与实现</a:t>
             </a:r>
           </a:p>
         </p:txBody>
@@ -20467,6 +17942,7 @@
           <a:lstStyle/>
           <a:p>
             <a:pPr algn="ctr"/>
+            <a:endParaRPr/>
           </a:p>
         </p:txBody>
       </p:sp>
@@ -20511,6 +17987,7 @@
           <a:lstStyle/>
           <a:p>
             <a:pPr algn="ctr"/>
+            <a:endParaRPr/>
           </a:p>
         </p:txBody>
       </p:sp>
@@ -20522,8 +17999,8 @@
         </p:nvSpPr>
         <p:spPr>
           <a:xfrm>
-            <a:off x="1159200" y="4309200"/>
-            <a:ext cx="503999" cy="432000"/>
+            <a:off x="1080000" y="4338000"/>
+            <a:ext cx="619199" cy="432000"/>
           </a:xfrm>
           <a:prstGeom prst="rect">
             <a:avLst/>
@@ -20538,13 +18015,22 @@
           <a:p>
             <a:pPr algn="ctr"/>
             <a:r>
+              <a:rPr lang="en-US" altLang="zh-CN" sz="2200" b="1">
+                <a:solidFill>
+                  <a:srgbClr val="FFFFFF"/>
+                </a:solidFill>
+                <a:latin typeface="Microsoft YaHei"/>
+              </a:rPr>
+              <a:t>0</a:t>
+            </a:r>
+            <a:r>
               <a:rPr sz="2200" b="1">
                 <a:solidFill>
                   <a:srgbClr val="FFFFFF"/>
                 </a:solidFill>
                 <a:latin typeface="Microsoft YaHei"/>
               </a:rPr>
-              <a:t>04</a:t>
+              <a:t>4</a:t>
             </a:r>
           </a:p>
         </p:txBody>
@@ -20557,8 +18043,8 @@
         </p:nvSpPr>
         <p:spPr>
           <a:xfrm>
-            <a:off x="1872000" y="4374000"/>
-            <a:ext cx="8280000" cy="432000"/>
+            <a:off x="1742399" y="4297535"/>
+            <a:ext cx="8280000" cy="461665"/>
           </a:xfrm>
           <a:prstGeom prst="rect">
             <a:avLst/>
@@ -20579,7 +18065,7 @@
                 </a:solidFill>
                 <a:latin typeface="Microsoft YaHei"/>
               </a:rPr>
-              <a:t>04 实验设计与验证</a:t>
+              <a:t>实验设计与验证</a:t>
             </a:r>
           </a:p>
         </p:txBody>
@@ -20629,6 +18115,7 @@
           <a:lstStyle/>
           <a:p>
             <a:pPr algn="ctr"/>
+            <a:endParaRPr/>
           </a:p>
         </p:txBody>
       </p:sp>
@@ -20673,6 +18160,7 @@
           <a:lstStyle/>
           <a:p>
             <a:pPr algn="ctr"/>
+            <a:endParaRPr/>
           </a:p>
         </p:txBody>
       </p:sp>
@@ -20684,8 +18172,8 @@
         </p:nvSpPr>
         <p:spPr>
           <a:xfrm>
-            <a:off x="1159200" y="5155200"/>
-            <a:ext cx="503999" cy="432000"/>
+            <a:off x="1080000" y="5184000"/>
+            <a:ext cx="619199" cy="432000"/>
           </a:xfrm>
           <a:prstGeom prst="rect">
             <a:avLst/>
@@ -20719,8 +18207,8 @@
         </p:nvSpPr>
         <p:spPr>
           <a:xfrm>
-            <a:off x="1872000" y="5220000"/>
-            <a:ext cx="8280000" cy="432000"/>
+            <a:off x="1742399" y="5143535"/>
+            <a:ext cx="8280000" cy="461665"/>
           </a:xfrm>
           <a:prstGeom prst="rect">
             <a:avLst/>
@@ -20741,7 +18229,7 @@
                 </a:solidFill>
                 <a:latin typeface="Microsoft YaHei"/>
               </a:rPr>
-              <a:t>05 智戎接入与总结展望</a:t>
+              <a:t>智戎接入与总结展望</a:t>
             </a:r>
           </a:p>
         </p:txBody>
@@ -20787,6 +18275,7 @@
           <a:lstStyle/>
           <a:p>
             <a:pPr algn="ctr"/>
+            <a:endParaRPr/>
           </a:p>
         </p:txBody>
       </p:sp>
@@ -20869,7 +18358,7 @@
 </file>
 
 <file path=ppt/slides/slide20.xml><?xml version="1.0" encoding="utf-8"?>
-<p:sld xmlns:a="http://schemas.openxmlformats.org/drawingml/2006/main" xmlns:p="http://schemas.openxmlformats.org/presentationml/2006/main" xmlns:r="http://schemas.openxmlformats.org/officeDocument/2006/relationships">
+<p:sld xmlns:a="http://schemas.openxmlformats.org/drawingml/2006/main" xmlns:r="http://schemas.openxmlformats.org/officeDocument/2006/relationships" xmlns:p="http://schemas.openxmlformats.org/presentationml/2006/main">
   <p:cSld>
     <p:spTree>
       <p:nvGrpSpPr>
@@ -20877,7 +18366,14 @@
         <p:cNvGrpSpPr/>
         <p:nvPr/>
       </p:nvGrpSpPr>
-      <p:grpSpPr/>
+      <p:grpSpPr>
+        <a:xfrm>
+          <a:off x="0" y="0"/>
+          <a:ext cx="0" cy="0"/>
+          <a:chOff x="0" y="0"/>
+          <a:chExt cx="0" cy="0"/>
+        </a:xfrm>
+      </p:grpSpPr>
       <p:sp>
         <p:nvSpPr>
           <p:cNvPr id="2" name="Rectangle 1"/>
@@ -20919,6 +18415,7 @@
           <a:lstStyle/>
           <a:p>
             <a:pPr algn="ctr"/>
+            <a:endParaRPr/>
           </a:p>
         </p:txBody>
       </p:sp>
@@ -20963,6 +18460,7 @@
           <a:lstStyle/>
           <a:p>
             <a:pPr algn="ctr"/>
+            <a:endParaRPr/>
           </a:p>
         </p:txBody>
       </p:sp>
@@ -21042,6 +18540,7 @@
           <a:lstStyle/>
           <a:p>
             <a:pPr algn="ctr"/>
+            <a:endParaRPr/>
           </a:p>
         </p:txBody>
       </p:sp>
@@ -21124,7 +18623,7 @@
 </file>
 
 <file path=ppt/slides/slide21.xml><?xml version="1.0" encoding="utf-8"?>
-<p:sld xmlns:a="http://schemas.openxmlformats.org/drawingml/2006/main" xmlns:p="http://schemas.openxmlformats.org/presentationml/2006/main" xmlns:r="http://schemas.openxmlformats.org/officeDocument/2006/relationships">
+<p:sld xmlns:a="http://schemas.openxmlformats.org/drawingml/2006/main" xmlns:r="http://schemas.openxmlformats.org/officeDocument/2006/relationships" xmlns:p="http://schemas.openxmlformats.org/presentationml/2006/main">
   <p:cSld>
     <p:spTree>
       <p:nvGrpSpPr>
@@ -21132,7 +18631,14 @@
         <p:cNvGrpSpPr/>
         <p:nvPr/>
       </p:nvGrpSpPr>
-      <p:grpSpPr/>
+      <p:grpSpPr>
+        <a:xfrm>
+          <a:off x="0" y="0"/>
+          <a:ext cx="0" cy="0"/>
+          <a:chOff x="0" y="0"/>
+          <a:chExt cx="0" cy="0"/>
+        </a:xfrm>
+      </p:grpSpPr>
       <p:sp>
         <p:nvSpPr>
           <p:cNvPr id="2" name="TextBox 1"/>
@@ -21209,6 +18715,7 @@
           <a:lstStyle/>
           <a:p>
             <a:pPr algn="ctr"/>
+            <a:endParaRPr/>
           </a:p>
         </p:txBody>
       </p:sp>
@@ -21288,6 +18795,7 @@
           <a:lstStyle/>
           <a:p>
             <a:pPr algn="ctr"/>
+            <a:endParaRPr/>
           </a:p>
         </p:txBody>
       </p:sp>
@@ -21437,6 +18945,7 @@
           <a:lstStyle/>
           <a:p>
             <a:pPr algn="ctr"/>
+            <a:endParaRPr/>
           </a:p>
         </p:txBody>
       </p:sp>
@@ -21586,6 +19095,7 @@
           <a:lstStyle/>
           <a:p>
             <a:pPr algn="ctr"/>
+            <a:endParaRPr/>
           </a:p>
         </p:txBody>
       </p:sp>
@@ -21735,6 +19245,7 @@
           <a:lstStyle/>
           <a:p>
             <a:pPr algn="ctr"/>
+            <a:endParaRPr/>
           </a:p>
         </p:txBody>
       </p:sp>
@@ -21884,6 +19395,7 @@
           <a:lstStyle/>
           <a:p>
             <a:pPr algn="ctr"/>
+            <a:endParaRPr/>
           </a:p>
         </p:txBody>
       </p:sp>
@@ -21928,6 +19440,7 @@
           <a:lstStyle/>
           <a:p>
             <a:pPr algn="ctr"/>
+            <a:endParaRPr/>
           </a:p>
         </p:txBody>
       </p:sp>
@@ -22010,7 +19523,7 @@
 </file>
 
 <file path=ppt/slides/slide22.xml><?xml version="1.0" encoding="utf-8"?>
-<p:sld xmlns:a="http://schemas.openxmlformats.org/drawingml/2006/main" xmlns:p="http://schemas.openxmlformats.org/presentationml/2006/main" xmlns:r="http://schemas.openxmlformats.org/officeDocument/2006/relationships">
+<p:sld xmlns:a="http://schemas.openxmlformats.org/drawingml/2006/main" xmlns:r="http://schemas.openxmlformats.org/officeDocument/2006/relationships" xmlns:p="http://schemas.openxmlformats.org/presentationml/2006/main">
   <p:cSld>
     <p:spTree>
       <p:nvGrpSpPr>
@@ -22018,7 +19531,14 @@
         <p:cNvGrpSpPr/>
         <p:nvPr/>
       </p:nvGrpSpPr>
-      <p:grpSpPr/>
+      <p:grpSpPr>
+        <a:xfrm>
+          <a:off x="0" y="0"/>
+          <a:ext cx="0" cy="0"/>
+          <a:chOff x="0" y="0"/>
+          <a:chExt cx="0" cy="0"/>
+        </a:xfrm>
+      </p:grpSpPr>
       <p:sp>
         <p:nvSpPr>
           <p:cNvPr id="2" name="TextBox 1"/>
@@ -22095,6 +19615,7 @@
           <a:lstStyle/>
           <a:p>
             <a:pPr algn="ctr"/>
+            <a:endParaRPr/>
           </a:p>
         </p:txBody>
       </p:sp>
@@ -22174,6 +19695,7 @@
           <a:lstStyle/>
           <a:p>
             <a:pPr algn="ctr"/>
+            <a:endParaRPr/>
           </a:p>
         </p:txBody>
       </p:sp>
@@ -22218,6 +19740,7 @@
           <a:lstStyle/>
           <a:p>
             <a:pPr algn="ctr"/>
+            <a:endParaRPr/>
           </a:p>
         </p:txBody>
       </p:sp>
@@ -22332,6 +19855,7 @@
           <a:lstStyle/>
           <a:p>
             <a:pPr algn="ctr"/>
+            <a:endParaRPr/>
           </a:p>
         </p:txBody>
       </p:sp>
@@ -22446,6 +19970,7 @@
           <a:lstStyle/>
           <a:p>
             <a:pPr algn="ctr"/>
+            <a:endParaRPr/>
           </a:p>
         </p:txBody>
       </p:sp>
@@ -22560,6 +20085,7 @@
           <a:lstStyle/>
           <a:p>
             <a:pPr algn="ctr"/>
+            <a:endParaRPr/>
           </a:p>
         </p:txBody>
       </p:sp>
@@ -22779,6 +20305,7 @@
           <a:lstStyle/>
           <a:p>
             <a:pPr algn="ctr"/>
+            <a:endParaRPr/>
           </a:p>
         </p:txBody>
       </p:sp>
@@ -22928,6 +20455,7 @@
           <a:lstStyle/>
           <a:p>
             <a:pPr algn="ctr"/>
+            <a:endParaRPr/>
           </a:p>
         </p:txBody>
       </p:sp>
@@ -23077,6 +20605,7 @@
           <a:lstStyle/>
           <a:p>
             <a:pPr algn="ctr"/>
+            <a:endParaRPr/>
           </a:p>
         </p:txBody>
       </p:sp>
@@ -23121,6 +20650,7 @@
           <a:lstStyle/>
           <a:p>
             <a:pPr algn="ctr"/>
+            <a:endParaRPr/>
           </a:p>
         </p:txBody>
       </p:sp>
@@ -23203,7 +20733,7 @@
 </file>
 
 <file path=ppt/slides/slide23.xml><?xml version="1.0" encoding="utf-8"?>
-<p:sld xmlns:a="http://schemas.openxmlformats.org/drawingml/2006/main" xmlns:p="http://schemas.openxmlformats.org/presentationml/2006/main" xmlns:r="http://schemas.openxmlformats.org/officeDocument/2006/relationships">
+<p:sld xmlns:a="http://schemas.openxmlformats.org/drawingml/2006/main" xmlns:r="http://schemas.openxmlformats.org/officeDocument/2006/relationships" xmlns:p="http://schemas.openxmlformats.org/presentationml/2006/main">
   <p:cSld>
     <p:spTree>
       <p:nvGrpSpPr>
@@ -23211,7 +20741,14 @@
         <p:cNvGrpSpPr/>
         <p:nvPr/>
       </p:nvGrpSpPr>
-      <p:grpSpPr/>
+      <p:grpSpPr>
+        <a:xfrm>
+          <a:off x="0" y="0"/>
+          <a:ext cx="0" cy="0"/>
+          <a:chOff x="0" y="0"/>
+          <a:chExt cx="0" cy="0"/>
+        </a:xfrm>
+      </p:grpSpPr>
       <p:sp>
         <p:nvSpPr>
           <p:cNvPr id="2" name="TextBox 1"/>
@@ -23288,6 +20825,7 @@
           <a:lstStyle/>
           <a:p>
             <a:pPr algn="ctr"/>
+            <a:endParaRPr/>
           </a:p>
         </p:txBody>
       </p:sp>
@@ -23367,6 +20905,7 @@
           <a:lstStyle/>
           <a:p>
             <a:pPr algn="ctr"/>
+            <a:endParaRPr/>
           </a:p>
         </p:txBody>
       </p:sp>
@@ -23516,6 +21055,7 @@
           <a:lstStyle/>
           <a:p>
             <a:pPr algn="ctr"/>
+            <a:endParaRPr/>
           </a:p>
         </p:txBody>
       </p:sp>
@@ -23665,6 +21205,7 @@
           <a:lstStyle/>
           <a:p>
             <a:pPr algn="ctr"/>
+            <a:endParaRPr/>
           </a:p>
         </p:txBody>
       </p:sp>
@@ -23814,6 +21355,7 @@
           <a:lstStyle/>
           <a:p>
             <a:pPr algn="ctr"/>
+            <a:endParaRPr/>
           </a:p>
         </p:txBody>
       </p:sp>
@@ -23963,6 +21505,7 @@
           <a:lstStyle/>
           <a:p>
             <a:pPr algn="ctr"/>
+            <a:endParaRPr/>
           </a:p>
         </p:txBody>
       </p:sp>
@@ -24007,6 +21550,7 @@
           <a:lstStyle/>
           <a:p>
             <a:pPr algn="ctr"/>
+            <a:endParaRPr/>
           </a:p>
         </p:txBody>
       </p:sp>
@@ -24089,7 +21633,7 @@
 </file>
 
 <file path=ppt/slides/slide24.xml><?xml version="1.0" encoding="utf-8"?>
-<p:sld xmlns:a="http://schemas.openxmlformats.org/drawingml/2006/main" xmlns:p="http://schemas.openxmlformats.org/presentationml/2006/main" xmlns:r="http://schemas.openxmlformats.org/officeDocument/2006/relationships">
+<p:sld xmlns:a="http://schemas.openxmlformats.org/drawingml/2006/main" xmlns:r="http://schemas.openxmlformats.org/officeDocument/2006/relationships" xmlns:p="http://schemas.openxmlformats.org/presentationml/2006/main">
   <p:cSld>
     <p:spTree>
       <p:nvGrpSpPr>
@@ -24097,7 +21641,14 @@
         <p:cNvGrpSpPr/>
         <p:nvPr/>
       </p:nvGrpSpPr>
-      <p:grpSpPr/>
+      <p:grpSpPr>
+        <a:xfrm>
+          <a:off x="0" y="0"/>
+          <a:ext cx="0" cy="0"/>
+          <a:chOff x="0" y="0"/>
+          <a:chExt cx="0" cy="0"/>
+        </a:xfrm>
+      </p:grpSpPr>
       <p:sp>
         <p:nvSpPr>
           <p:cNvPr id="2" name="TextBox 1"/>
@@ -24174,6 +21725,7 @@
           <a:lstStyle/>
           <a:p>
             <a:pPr algn="ctr"/>
+            <a:endParaRPr/>
           </a:p>
         </p:txBody>
       </p:sp>
@@ -24253,6 +21805,7 @@
           <a:lstStyle/>
           <a:p>
             <a:pPr algn="ctr"/>
+            <a:endParaRPr/>
           </a:p>
         </p:txBody>
       </p:sp>
@@ -24297,6 +21850,7 @@
           <a:lstStyle/>
           <a:p>
             <a:pPr algn="ctr"/>
+            <a:endParaRPr/>
           </a:p>
         </p:txBody>
       </p:sp>
@@ -24411,6 +21965,7 @@
           <a:lstStyle/>
           <a:p>
             <a:pPr algn="ctr"/>
+            <a:endParaRPr/>
           </a:p>
         </p:txBody>
       </p:sp>
@@ -24525,6 +22080,7 @@
           <a:lstStyle/>
           <a:p>
             <a:pPr algn="ctr"/>
+            <a:endParaRPr/>
           </a:p>
         </p:txBody>
       </p:sp>
@@ -24639,6 +22195,7 @@
           <a:lstStyle/>
           <a:p>
             <a:pPr algn="ctr"/>
+            <a:endParaRPr/>
           </a:p>
         </p:txBody>
       </p:sp>
@@ -24858,6 +22415,7 @@
           <a:lstStyle/>
           <a:p>
             <a:pPr algn="ctr"/>
+            <a:endParaRPr/>
           </a:p>
         </p:txBody>
       </p:sp>
@@ -25007,6 +22565,7 @@
           <a:lstStyle/>
           <a:p>
             <a:pPr algn="ctr"/>
+            <a:endParaRPr/>
           </a:p>
         </p:txBody>
       </p:sp>
@@ -25156,6 +22715,7 @@
           <a:lstStyle/>
           <a:p>
             <a:pPr algn="ctr"/>
+            <a:endParaRPr/>
           </a:p>
         </p:txBody>
       </p:sp>
@@ -25200,6 +22760,7 @@
           <a:lstStyle/>
           <a:p>
             <a:pPr algn="ctr"/>
+            <a:endParaRPr/>
           </a:p>
         </p:txBody>
       </p:sp>
@@ -25282,7 +22843,7 @@
 </file>
 
 <file path=ppt/slides/slide25.xml><?xml version="1.0" encoding="utf-8"?>
-<p:sld xmlns:a="http://schemas.openxmlformats.org/drawingml/2006/main" xmlns:p="http://schemas.openxmlformats.org/presentationml/2006/main" xmlns:r="http://schemas.openxmlformats.org/officeDocument/2006/relationships">
+<p:sld xmlns:a="http://schemas.openxmlformats.org/drawingml/2006/main" xmlns:r="http://schemas.openxmlformats.org/officeDocument/2006/relationships" xmlns:p="http://schemas.openxmlformats.org/presentationml/2006/main">
   <p:cSld>
     <p:spTree>
       <p:nvGrpSpPr>
@@ -25290,7 +22851,14 @@
         <p:cNvGrpSpPr/>
         <p:nvPr/>
       </p:nvGrpSpPr>
-      <p:grpSpPr/>
+      <p:grpSpPr>
+        <a:xfrm>
+          <a:off x="0" y="0"/>
+          <a:ext cx="0" cy="0"/>
+          <a:chOff x="0" y="0"/>
+          <a:chExt cx="0" cy="0"/>
+        </a:xfrm>
+      </p:grpSpPr>
       <p:sp>
         <p:nvSpPr>
           <p:cNvPr id="2" name="Rectangle 1"/>
@@ -25332,6 +22900,7 @@
           <a:lstStyle/>
           <a:p>
             <a:pPr algn="ctr"/>
+            <a:endParaRPr/>
           </a:p>
         </p:txBody>
       </p:sp>
@@ -25376,6 +22945,7 @@
           <a:lstStyle/>
           <a:p>
             <a:pPr algn="ctr"/>
+            <a:endParaRPr/>
           </a:p>
         </p:txBody>
       </p:sp>
@@ -25455,6 +23025,7 @@
           <a:lstStyle/>
           <a:p>
             <a:pPr algn="ctr"/>
+            <a:endParaRPr/>
           </a:p>
         </p:txBody>
       </p:sp>
@@ -25537,7 +23108,7 @@
 </file>
 
 <file path=ppt/slides/slide26.xml><?xml version="1.0" encoding="utf-8"?>
-<p:sld xmlns:a="http://schemas.openxmlformats.org/drawingml/2006/main" xmlns:p="http://schemas.openxmlformats.org/presentationml/2006/main" xmlns:r="http://schemas.openxmlformats.org/officeDocument/2006/relationships">
+<p:sld xmlns:a="http://schemas.openxmlformats.org/drawingml/2006/main" xmlns:r="http://schemas.openxmlformats.org/officeDocument/2006/relationships" xmlns:p="http://schemas.openxmlformats.org/presentationml/2006/main">
   <p:cSld>
     <p:spTree>
       <p:nvGrpSpPr>
@@ -25545,7 +23116,14 @@
         <p:cNvGrpSpPr/>
         <p:nvPr/>
       </p:nvGrpSpPr>
-      <p:grpSpPr/>
+      <p:grpSpPr>
+        <a:xfrm>
+          <a:off x="0" y="0"/>
+          <a:ext cx="0" cy="0"/>
+          <a:chOff x="0" y="0"/>
+          <a:chExt cx="0" cy="0"/>
+        </a:xfrm>
+      </p:grpSpPr>
       <p:sp>
         <p:nvSpPr>
           <p:cNvPr id="2" name="TextBox 1"/>
@@ -25622,6 +23200,7 @@
           <a:lstStyle/>
           <a:p>
             <a:pPr algn="ctr"/>
+            <a:endParaRPr/>
           </a:p>
         </p:txBody>
       </p:sp>
@@ -25701,6 +23280,7 @@
           <a:lstStyle/>
           <a:p>
             <a:pPr algn="ctr"/>
+            <a:endParaRPr/>
           </a:p>
         </p:txBody>
       </p:sp>
@@ -25850,6 +23430,7 @@
           <a:lstStyle/>
           <a:p>
             <a:pPr algn="ctr"/>
+            <a:endParaRPr/>
           </a:p>
         </p:txBody>
       </p:sp>
@@ -25999,6 +23580,7 @@
           <a:lstStyle/>
           <a:p>
             <a:pPr algn="ctr"/>
+            <a:endParaRPr/>
           </a:p>
         </p:txBody>
       </p:sp>
@@ -26148,6 +23730,7 @@
           <a:lstStyle/>
           <a:p>
             <a:pPr algn="ctr"/>
+            <a:endParaRPr/>
           </a:p>
         </p:txBody>
       </p:sp>
@@ -26297,6 +23880,7 @@
           <a:lstStyle/>
           <a:p>
             <a:pPr algn="ctr"/>
+            <a:endParaRPr/>
           </a:p>
         </p:txBody>
       </p:sp>
@@ -26309,7 +23893,7 @@
           <p:nvPr/>
         </p:nvPicPr>
         <p:blipFill>
-          <a:blip r:embed="rId2"/>
+          <a:blip r:embed="rId3"/>
           <a:stretch>
             <a:fillRect/>
           </a:stretch>
@@ -26365,6 +23949,7 @@
           <a:lstStyle/>
           <a:p>
             <a:pPr algn="ctr"/>
+            <a:endParaRPr/>
           </a:p>
         </p:txBody>
       </p:sp>
@@ -26409,6 +23994,7 @@
           <a:lstStyle/>
           <a:p>
             <a:pPr algn="ctr"/>
+            <a:endParaRPr/>
           </a:p>
         </p:txBody>
       </p:sp>
@@ -26491,7 +24077,7 @@
 </file>
 
 <file path=ppt/slides/slide27.xml><?xml version="1.0" encoding="utf-8"?>
-<p:sld xmlns:a="http://schemas.openxmlformats.org/drawingml/2006/main" xmlns:p="http://schemas.openxmlformats.org/presentationml/2006/main" xmlns:r="http://schemas.openxmlformats.org/officeDocument/2006/relationships">
+<p:sld xmlns:a="http://schemas.openxmlformats.org/drawingml/2006/main" xmlns:r="http://schemas.openxmlformats.org/officeDocument/2006/relationships" xmlns:p="http://schemas.openxmlformats.org/presentationml/2006/main">
   <p:cSld>
     <p:spTree>
       <p:nvGrpSpPr>
@@ -26499,7 +24085,14 @@
         <p:cNvGrpSpPr/>
         <p:nvPr/>
       </p:nvGrpSpPr>
-      <p:grpSpPr/>
+      <p:grpSpPr>
+        <a:xfrm>
+          <a:off x="0" y="0"/>
+          <a:ext cx="0" cy="0"/>
+          <a:chOff x="0" y="0"/>
+          <a:chExt cx="0" cy="0"/>
+        </a:xfrm>
+      </p:grpSpPr>
       <p:sp>
         <p:nvSpPr>
           <p:cNvPr id="2" name="TextBox 1"/>
@@ -26576,6 +24169,7 @@
           <a:lstStyle/>
           <a:p>
             <a:pPr algn="ctr"/>
+            <a:endParaRPr/>
           </a:p>
         </p:txBody>
       </p:sp>
@@ -26655,6 +24249,7 @@
           <a:lstStyle/>
           <a:p>
             <a:pPr algn="ctr"/>
+            <a:endParaRPr/>
           </a:p>
         </p:txBody>
       </p:sp>
@@ -26699,6 +24294,7 @@
           <a:lstStyle/>
           <a:p>
             <a:pPr algn="ctr"/>
+            <a:endParaRPr/>
           </a:p>
         </p:txBody>
       </p:sp>
@@ -26988,6 +24584,7 @@
           <a:lstStyle/>
           <a:p>
             <a:pPr algn="ctr"/>
+            <a:endParaRPr/>
           </a:p>
         </p:txBody>
       </p:sp>
@@ -27522,6 +25119,7 @@
           <a:lstStyle/>
           <a:p>
             <a:pPr algn="ctr"/>
+            <a:endParaRPr/>
           </a:p>
         </p:txBody>
       </p:sp>
@@ -27604,7 +25202,7 @@
 </file>
 
 <file path=ppt/slides/slide28.xml><?xml version="1.0" encoding="utf-8"?>
-<p:sld xmlns:a="http://schemas.openxmlformats.org/drawingml/2006/main" xmlns:p="http://schemas.openxmlformats.org/presentationml/2006/main" xmlns:r="http://schemas.openxmlformats.org/officeDocument/2006/relationships">
+<p:sld xmlns:a="http://schemas.openxmlformats.org/drawingml/2006/main" xmlns:r="http://schemas.openxmlformats.org/officeDocument/2006/relationships" xmlns:p="http://schemas.openxmlformats.org/presentationml/2006/main">
   <p:cSld>
     <p:spTree>
       <p:nvGrpSpPr>
@@ -27612,7 +25210,14 @@
         <p:cNvGrpSpPr/>
         <p:nvPr/>
       </p:nvGrpSpPr>
-      <p:grpSpPr/>
+      <p:grpSpPr>
+        <a:xfrm>
+          <a:off x="0" y="0"/>
+          <a:ext cx="0" cy="0"/>
+          <a:chOff x="0" y="0"/>
+          <a:chExt cx="0" cy="0"/>
+        </a:xfrm>
+      </p:grpSpPr>
       <p:sp>
         <p:nvSpPr>
           <p:cNvPr id="2" name="Rectangle 1"/>
@@ -27654,6 +25259,7 @@
           <a:lstStyle/>
           <a:p>
             <a:pPr algn="ctr"/>
+            <a:endParaRPr/>
           </a:p>
         </p:txBody>
       </p:sp>
@@ -27698,6 +25304,7 @@
           <a:lstStyle/>
           <a:p>
             <a:pPr algn="ctr"/>
+            <a:endParaRPr/>
           </a:p>
         </p:txBody>
       </p:sp>
@@ -27742,6 +25349,7 @@
           <a:lstStyle/>
           <a:p>
             <a:pPr algn="ctr"/>
+            <a:endParaRPr/>
           </a:p>
         </p:txBody>
       </p:sp>
@@ -27786,6 +25394,7 @@
           <a:lstStyle/>
           <a:p>
             <a:pPr algn="ctr"/>
+            <a:endParaRPr/>
           </a:p>
         </p:txBody>
       </p:sp>
@@ -27830,6 +25439,7 @@
           <a:lstStyle/>
           <a:p>
             <a:pPr algn="ctr"/>
+            <a:endParaRPr/>
           </a:p>
         </p:txBody>
       </p:sp>
@@ -27874,6 +25484,7 @@
           <a:lstStyle/>
           <a:p>
             <a:pPr algn="ctr"/>
+            <a:endParaRPr/>
           </a:p>
         </p:txBody>
       </p:sp>
@@ -27918,6 +25529,7 @@
           <a:lstStyle/>
           <a:p>
             <a:pPr algn="ctr"/>
+            <a:endParaRPr/>
           </a:p>
         </p:txBody>
       </p:sp>
@@ -27962,6 +25574,7 @@
           <a:lstStyle/>
           <a:p>
             <a:pPr algn="ctr"/>
+            <a:endParaRPr/>
           </a:p>
         </p:txBody>
       </p:sp>
@@ -28006,6 +25619,7 @@
           <a:lstStyle/>
           <a:p>
             <a:pPr algn="ctr"/>
+            <a:endParaRPr/>
           </a:p>
         </p:txBody>
       </p:sp>
@@ -28088,7 +25702,7 @@
 </file>
 
 <file path=ppt/slides/slide3.xml><?xml version="1.0" encoding="utf-8"?>
-<p:sld xmlns:a="http://schemas.openxmlformats.org/drawingml/2006/main" xmlns:p="http://schemas.openxmlformats.org/presentationml/2006/main" xmlns:r="http://schemas.openxmlformats.org/officeDocument/2006/relationships">
+<p:sld xmlns:a="http://schemas.openxmlformats.org/drawingml/2006/main" xmlns:r="http://schemas.openxmlformats.org/officeDocument/2006/relationships" xmlns:p="http://schemas.openxmlformats.org/presentationml/2006/main">
   <p:cSld>
     <p:spTree>
       <p:nvGrpSpPr>
@@ -28096,7 +25710,14 @@
         <p:cNvGrpSpPr/>
         <p:nvPr/>
       </p:nvGrpSpPr>
-      <p:grpSpPr/>
+      <p:grpSpPr>
+        <a:xfrm>
+          <a:off x="0" y="0"/>
+          <a:ext cx="0" cy="0"/>
+          <a:chOff x="0" y="0"/>
+          <a:chExt cx="0" cy="0"/>
+        </a:xfrm>
+      </p:grpSpPr>
       <p:sp>
         <p:nvSpPr>
           <p:cNvPr id="2" name="Rectangle 1"/>
@@ -28138,6 +25759,7 @@
           <a:lstStyle/>
           <a:p>
             <a:pPr algn="ctr"/>
+            <a:endParaRPr/>
           </a:p>
         </p:txBody>
       </p:sp>
@@ -28182,6 +25804,7 @@
           <a:lstStyle/>
           <a:p>
             <a:pPr algn="ctr"/>
+            <a:endParaRPr/>
           </a:p>
         </p:txBody>
       </p:sp>
@@ -28261,6 +25884,7 @@
           <a:lstStyle/>
           <a:p>
             <a:pPr algn="ctr"/>
+            <a:endParaRPr/>
           </a:p>
         </p:txBody>
       </p:sp>
@@ -28343,7 +25967,7 @@
 </file>
 
 <file path=ppt/slides/slide4.xml><?xml version="1.0" encoding="utf-8"?>
-<p:sld xmlns:a="http://schemas.openxmlformats.org/drawingml/2006/main" xmlns:p="http://schemas.openxmlformats.org/presentationml/2006/main" xmlns:r="http://schemas.openxmlformats.org/officeDocument/2006/relationships">
+<p:sld xmlns:a="http://schemas.openxmlformats.org/drawingml/2006/main" xmlns:r="http://schemas.openxmlformats.org/officeDocument/2006/relationships" xmlns:p="http://schemas.openxmlformats.org/presentationml/2006/main">
   <p:cSld>
     <p:spTree>
       <p:nvGrpSpPr>
@@ -28351,7 +25975,14 @@
         <p:cNvGrpSpPr/>
         <p:nvPr/>
       </p:nvGrpSpPr>
-      <p:grpSpPr/>
+      <p:grpSpPr>
+        <a:xfrm>
+          <a:off x="0" y="0"/>
+          <a:ext cx="0" cy="0"/>
+          <a:chOff x="0" y="0"/>
+          <a:chExt cx="0" cy="0"/>
+        </a:xfrm>
+      </p:grpSpPr>
       <p:sp>
         <p:nvSpPr>
           <p:cNvPr id="2" name="TextBox 1"/>
@@ -28428,6 +26059,7 @@
           <a:lstStyle/>
           <a:p>
             <a:pPr algn="ctr"/>
+            <a:endParaRPr/>
           </a:p>
         </p:txBody>
       </p:sp>
@@ -28507,6 +26139,7 @@
           <a:lstStyle/>
           <a:p>
             <a:pPr algn="ctr"/>
+            <a:endParaRPr/>
           </a:p>
         </p:txBody>
       </p:sp>
@@ -28656,6 +26289,7 @@
           <a:lstStyle/>
           <a:p>
             <a:pPr algn="ctr"/>
+            <a:endParaRPr/>
           </a:p>
         </p:txBody>
       </p:sp>
@@ -28805,6 +26439,7 @@
           <a:lstStyle/>
           <a:p>
             <a:pPr algn="ctr"/>
+            <a:endParaRPr/>
           </a:p>
         </p:txBody>
       </p:sp>
@@ -28954,6 +26589,7 @@
           <a:lstStyle/>
           <a:p>
             <a:pPr algn="ctr"/>
+            <a:endParaRPr/>
           </a:p>
         </p:txBody>
       </p:sp>
@@ -29103,6 +26739,7 @@
           <a:lstStyle/>
           <a:p>
             <a:pPr algn="ctr"/>
+            <a:endParaRPr/>
           </a:p>
         </p:txBody>
       </p:sp>
@@ -29115,7 +26752,7 @@
           <p:nvPr/>
         </p:nvPicPr>
         <p:blipFill>
-          <a:blip r:embed="rId2"/>
+          <a:blip r:embed="rId3"/>
           <a:stretch>
             <a:fillRect/>
           </a:stretch>
@@ -29171,6 +26808,7 @@
           <a:lstStyle/>
           <a:p>
             <a:pPr algn="ctr"/>
+            <a:endParaRPr/>
           </a:p>
         </p:txBody>
       </p:sp>
@@ -29215,6 +26853,7 @@
           <a:lstStyle/>
           <a:p>
             <a:pPr algn="ctr"/>
+            <a:endParaRPr/>
           </a:p>
         </p:txBody>
       </p:sp>
@@ -29297,7 +26936,7 @@
 </file>
 
 <file path=ppt/slides/slide5.xml><?xml version="1.0" encoding="utf-8"?>
-<p:sld xmlns:a="http://schemas.openxmlformats.org/drawingml/2006/main" xmlns:p="http://schemas.openxmlformats.org/presentationml/2006/main" xmlns:r="http://schemas.openxmlformats.org/officeDocument/2006/relationships">
+<p:sld xmlns:a="http://schemas.openxmlformats.org/drawingml/2006/main" xmlns:r="http://schemas.openxmlformats.org/officeDocument/2006/relationships" xmlns:p="http://schemas.openxmlformats.org/presentationml/2006/main">
   <p:cSld>
     <p:spTree>
       <p:nvGrpSpPr>
@@ -29305,7 +26944,14 @@
         <p:cNvGrpSpPr/>
         <p:nvPr/>
       </p:nvGrpSpPr>
-      <p:grpSpPr/>
+      <p:grpSpPr>
+        <a:xfrm>
+          <a:off x="0" y="0"/>
+          <a:ext cx="0" cy="0"/>
+          <a:chOff x="0" y="0"/>
+          <a:chExt cx="0" cy="0"/>
+        </a:xfrm>
+      </p:grpSpPr>
       <p:sp>
         <p:nvSpPr>
           <p:cNvPr id="2" name="TextBox 1"/>
@@ -29382,6 +27028,7 @@
           <a:lstStyle/>
           <a:p>
             <a:pPr algn="ctr"/>
+            <a:endParaRPr/>
           </a:p>
         </p:txBody>
       </p:sp>
@@ -29461,6 +27108,7 @@
           <a:lstStyle/>
           <a:p>
             <a:pPr algn="ctr"/>
+            <a:endParaRPr/>
           </a:p>
         </p:txBody>
       </p:sp>
@@ -29578,7 +27226,7 @@
           <p:nvPr/>
         </p:nvPicPr>
         <p:blipFill>
-          <a:blip r:embed="rId2"/>
+          <a:blip r:embed="rId3"/>
           <a:stretch>
             <a:fillRect/>
           </a:stretch>
@@ -29634,6 +27282,7 @@
           <a:lstStyle/>
           <a:p>
             <a:pPr algn="ctr"/>
+            <a:endParaRPr/>
           </a:p>
         </p:txBody>
       </p:sp>
@@ -29678,6 +27327,7 @@
           <a:lstStyle/>
           <a:p>
             <a:pPr algn="ctr"/>
+            <a:endParaRPr/>
           </a:p>
         </p:txBody>
       </p:sp>
@@ -29795,7 +27445,7 @@
           <p:nvPr/>
         </p:nvPicPr>
         <p:blipFill>
-          <a:blip r:embed="rId3"/>
+          <a:blip r:embed="rId4"/>
           <a:stretch>
             <a:fillRect/>
           </a:stretch>
@@ -29851,6 +27501,7 @@
           <a:lstStyle/>
           <a:p>
             <a:pPr algn="ctr"/>
+            <a:endParaRPr/>
           </a:p>
         </p:txBody>
       </p:sp>
@@ -29895,6 +27546,7 @@
           <a:lstStyle/>
           <a:p>
             <a:pPr algn="ctr"/>
+            <a:endParaRPr/>
           </a:p>
         </p:txBody>
       </p:sp>
@@ -30012,7 +27664,7 @@
           <p:nvPr/>
         </p:nvPicPr>
         <p:blipFill>
-          <a:blip r:embed="rId4"/>
+          <a:blip r:embed="rId5"/>
           <a:stretch>
             <a:fillRect/>
           </a:stretch>
@@ -30068,6 +27720,7 @@
           <a:lstStyle/>
           <a:p>
             <a:pPr algn="ctr"/>
+            <a:endParaRPr/>
           </a:p>
         </p:txBody>
       </p:sp>
@@ -30112,6 +27765,7 @@
           <a:lstStyle/>
           <a:p>
             <a:pPr algn="ctr"/>
+            <a:endParaRPr/>
           </a:p>
         </p:txBody>
       </p:sp>
@@ -30229,7 +27883,7 @@
           <p:nvPr/>
         </p:nvPicPr>
         <p:blipFill>
-          <a:blip r:embed="rId5"/>
+          <a:blip r:embed="rId6"/>
           <a:stretch>
             <a:fillRect/>
           </a:stretch>
@@ -30285,6 +27939,7 @@
           <a:lstStyle/>
           <a:p>
             <a:pPr algn="ctr"/>
+            <a:endParaRPr/>
           </a:p>
         </p:txBody>
       </p:sp>
@@ -30329,6 +27984,7 @@
           <a:lstStyle/>
           <a:p>
             <a:pPr algn="ctr"/>
+            <a:endParaRPr/>
           </a:p>
         </p:txBody>
       </p:sp>
@@ -30446,7 +28102,7 @@
           <p:nvPr/>
         </p:nvPicPr>
         <p:blipFill>
-          <a:blip r:embed="rId6"/>
+          <a:blip r:embed="rId7"/>
           <a:stretch>
             <a:fillRect/>
           </a:stretch>
@@ -30502,6 +28158,7 @@
           <a:lstStyle/>
           <a:p>
             <a:pPr algn="ctr"/>
+            <a:endParaRPr/>
           </a:p>
         </p:txBody>
       </p:sp>
@@ -30546,6 +28203,7 @@
           <a:lstStyle/>
           <a:p>
             <a:pPr algn="ctr"/>
+            <a:endParaRPr/>
           </a:p>
         </p:txBody>
       </p:sp>
@@ -30590,6 +28248,7 @@
           <a:lstStyle/>
           <a:p>
             <a:pPr algn="ctr"/>
+            <a:endParaRPr/>
           </a:p>
         </p:txBody>
       </p:sp>
@@ -30672,7 +28331,7 @@
 </file>
 
 <file path=ppt/slides/slide6.xml><?xml version="1.0" encoding="utf-8"?>
-<p:sld xmlns:a="http://schemas.openxmlformats.org/drawingml/2006/main" xmlns:p="http://schemas.openxmlformats.org/presentationml/2006/main" xmlns:r="http://schemas.openxmlformats.org/officeDocument/2006/relationships">
+<p:sld xmlns:a="http://schemas.openxmlformats.org/drawingml/2006/main" xmlns:r="http://schemas.openxmlformats.org/officeDocument/2006/relationships" xmlns:p="http://schemas.openxmlformats.org/presentationml/2006/main">
   <p:cSld>
     <p:spTree>
       <p:nvGrpSpPr>
@@ -30680,7 +28339,14 @@
         <p:cNvGrpSpPr/>
         <p:nvPr/>
       </p:nvGrpSpPr>
-      <p:grpSpPr/>
+      <p:grpSpPr>
+        <a:xfrm>
+          <a:off x="0" y="0"/>
+          <a:ext cx="0" cy="0"/>
+          <a:chOff x="0" y="0"/>
+          <a:chExt cx="0" cy="0"/>
+        </a:xfrm>
+      </p:grpSpPr>
       <p:sp>
         <p:nvSpPr>
           <p:cNvPr id="2" name="TextBox 1"/>
@@ -30757,6 +28423,7 @@
           <a:lstStyle/>
           <a:p>
             <a:pPr algn="ctr"/>
+            <a:endParaRPr/>
           </a:p>
         </p:txBody>
       </p:sp>
@@ -30836,6 +28503,7 @@
           <a:lstStyle/>
           <a:p>
             <a:pPr algn="ctr"/>
+            <a:endParaRPr/>
           </a:p>
         </p:txBody>
       </p:sp>
@@ -30884,6 +28552,7 @@
           <a:lstStyle/>
           <a:p>
             <a:pPr algn="ctr"/>
+            <a:endParaRPr/>
           </a:p>
         </p:txBody>
       </p:sp>
@@ -31036,7 +28705,7 @@
           <p:nvPr/>
         </p:nvPicPr>
         <p:blipFill>
-          <a:blip r:embed="rId2"/>
+          <a:blip r:embed="rId3"/>
           <a:stretch>
             <a:fillRect/>
           </a:stretch>
@@ -31092,6 +28761,7 @@
           <a:lstStyle/>
           <a:p>
             <a:pPr algn="ctr"/>
+            <a:endParaRPr/>
           </a:p>
         </p:txBody>
       </p:sp>
@@ -31136,6 +28806,7 @@
           <a:lstStyle/>
           <a:p>
             <a:pPr algn="ctr"/>
+            <a:endParaRPr/>
           </a:p>
         </p:txBody>
       </p:sp>
@@ -31184,6 +28855,7 @@
           <a:lstStyle/>
           <a:p>
             <a:pPr algn="ctr"/>
+            <a:endParaRPr/>
           </a:p>
         </p:txBody>
       </p:sp>
@@ -31336,7 +29008,7 @@
           <p:nvPr/>
         </p:nvPicPr>
         <p:blipFill>
-          <a:blip r:embed="rId3"/>
+          <a:blip r:embed="rId4"/>
           <a:stretch>
             <a:fillRect/>
           </a:stretch>
@@ -31392,6 +29064,7 @@
           <a:lstStyle/>
           <a:p>
             <a:pPr algn="ctr"/>
+            <a:endParaRPr/>
           </a:p>
         </p:txBody>
       </p:sp>
@@ -31436,6 +29109,7 @@
           <a:lstStyle/>
           <a:p>
             <a:pPr algn="ctr"/>
+            <a:endParaRPr/>
           </a:p>
         </p:txBody>
       </p:sp>
@@ -31484,6 +29158,7 @@
           <a:lstStyle/>
           <a:p>
             <a:pPr algn="ctr"/>
+            <a:endParaRPr/>
           </a:p>
         </p:txBody>
       </p:sp>
@@ -31636,7 +29311,7 @@
           <p:nvPr/>
         </p:nvPicPr>
         <p:blipFill>
-          <a:blip r:embed="rId4"/>
+          <a:blip r:embed="rId5"/>
           <a:stretch>
             <a:fillRect/>
           </a:stretch>
@@ -31692,6 +29367,7 @@
           <a:lstStyle/>
           <a:p>
             <a:pPr algn="ctr"/>
+            <a:endParaRPr/>
           </a:p>
         </p:txBody>
       </p:sp>
@@ -31736,6 +29412,7 @@
           <a:lstStyle/>
           <a:p>
             <a:pPr algn="ctr"/>
+            <a:endParaRPr/>
           </a:p>
         </p:txBody>
       </p:sp>
@@ -31784,6 +29461,7 @@
           <a:lstStyle/>
           <a:p>
             <a:pPr algn="ctr"/>
+            <a:endParaRPr/>
           </a:p>
         </p:txBody>
       </p:sp>
@@ -31936,7 +29614,7 @@
           <p:nvPr/>
         </p:nvPicPr>
         <p:blipFill>
-          <a:blip r:embed="rId5"/>
+          <a:blip r:embed="rId6"/>
           <a:stretch>
             <a:fillRect/>
           </a:stretch>
@@ -31992,6 +29670,7 @@
           <a:lstStyle/>
           <a:p>
             <a:pPr algn="ctr"/>
+            <a:endParaRPr/>
           </a:p>
         </p:txBody>
       </p:sp>
@@ -32036,6 +29715,7 @@
           <a:lstStyle/>
           <a:p>
             <a:pPr algn="ctr"/>
+            <a:endParaRPr/>
           </a:p>
         </p:txBody>
       </p:sp>
@@ -32084,6 +29764,7 @@
           <a:lstStyle/>
           <a:p>
             <a:pPr algn="ctr"/>
+            <a:endParaRPr/>
           </a:p>
         </p:txBody>
       </p:sp>
@@ -32236,7 +29917,7 @@
           <p:nvPr/>
         </p:nvPicPr>
         <p:blipFill>
-          <a:blip r:embed="rId6"/>
+          <a:blip r:embed="rId7"/>
           <a:stretch>
             <a:fillRect/>
           </a:stretch>
@@ -32292,6 +29973,7 @@
           <a:lstStyle/>
           <a:p>
             <a:pPr algn="ctr"/>
+            <a:endParaRPr/>
           </a:p>
         </p:txBody>
       </p:sp>
@@ -32336,6 +30018,7 @@
           <a:lstStyle/>
           <a:p>
             <a:pPr algn="ctr"/>
+            <a:endParaRPr/>
           </a:p>
         </p:txBody>
       </p:sp>
@@ -32380,6 +30063,7 @@
           <a:lstStyle/>
           <a:p>
             <a:pPr algn="ctr"/>
+            <a:endParaRPr/>
           </a:p>
         </p:txBody>
       </p:sp>
@@ -32462,7 +30146,7 @@
 </file>
 
 <file path=ppt/slides/slide7.xml><?xml version="1.0" encoding="utf-8"?>
-<p:sld xmlns:a="http://schemas.openxmlformats.org/drawingml/2006/main" xmlns:p="http://schemas.openxmlformats.org/presentationml/2006/main" xmlns:r="http://schemas.openxmlformats.org/officeDocument/2006/relationships">
+<p:sld xmlns:a="http://schemas.openxmlformats.org/drawingml/2006/main" xmlns:r="http://schemas.openxmlformats.org/officeDocument/2006/relationships" xmlns:p="http://schemas.openxmlformats.org/presentationml/2006/main">
   <p:cSld>
     <p:spTree>
       <p:nvGrpSpPr>
@@ -32470,7 +30154,14 @@
         <p:cNvGrpSpPr/>
         <p:nvPr/>
       </p:nvGrpSpPr>
-      <p:grpSpPr/>
+      <p:grpSpPr>
+        <a:xfrm>
+          <a:off x="0" y="0"/>
+          <a:ext cx="0" cy="0"/>
+          <a:chOff x="0" y="0"/>
+          <a:chExt cx="0" cy="0"/>
+        </a:xfrm>
+      </p:grpSpPr>
       <p:sp>
         <p:nvSpPr>
           <p:cNvPr id="2" name="TextBox 1"/>
@@ -32547,6 +30238,7 @@
           <a:lstStyle/>
           <a:p>
             <a:pPr algn="ctr"/>
+            <a:endParaRPr/>
           </a:p>
         </p:txBody>
       </p:sp>
@@ -32626,6 +30318,7 @@
           <a:lstStyle/>
           <a:p>
             <a:pPr algn="ctr"/>
+            <a:endParaRPr/>
           </a:p>
         </p:txBody>
       </p:sp>
@@ -32674,6 +30367,7 @@
           <a:lstStyle/>
           <a:p>
             <a:pPr algn="ctr"/>
+            <a:endParaRPr/>
           </a:p>
         </p:txBody>
       </p:sp>
@@ -32718,6 +30412,7 @@
           <a:lstStyle/>
           <a:p>
             <a:pPr algn="ctr"/>
+            <a:endParaRPr/>
           </a:p>
         </p:txBody>
       </p:sp>
@@ -32871,6 +30566,7 @@
           <a:lstStyle/>
           <a:p>
             <a:pPr algn="ctr"/>
+            <a:endParaRPr/>
           </a:p>
         </p:txBody>
       </p:sp>
@@ -32915,6 +30611,7 @@
           <a:lstStyle/>
           <a:p>
             <a:pPr algn="ctr"/>
+            <a:endParaRPr/>
           </a:p>
         </p:txBody>
       </p:sp>
@@ -33068,6 +30765,7 @@
           <a:lstStyle/>
           <a:p>
             <a:pPr algn="ctr"/>
+            <a:endParaRPr/>
           </a:p>
         </p:txBody>
       </p:sp>
@@ -33112,6 +30810,7 @@
           <a:lstStyle/>
           <a:p>
             <a:pPr algn="ctr"/>
+            <a:endParaRPr/>
           </a:p>
         </p:txBody>
       </p:sp>
@@ -33265,6 +30964,7 @@
           <a:lstStyle/>
           <a:p>
             <a:pPr algn="ctr"/>
+            <a:endParaRPr/>
           </a:p>
         </p:txBody>
       </p:sp>
@@ -33309,6 +31009,7 @@
           <a:lstStyle/>
           <a:p>
             <a:pPr algn="ctr"/>
+            <a:endParaRPr/>
           </a:p>
         </p:txBody>
       </p:sp>
@@ -33458,6 +31159,7 @@
           <a:lstStyle/>
           <a:p>
             <a:pPr algn="ctr"/>
+            <a:endParaRPr/>
           </a:p>
         </p:txBody>
       </p:sp>
@@ -33540,7 +31242,7 @@
 </file>
 
 <file path=ppt/slides/slide8.xml><?xml version="1.0" encoding="utf-8"?>
-<p:sld xmlns:a="http://schemas.openxmlformats.org/drawingml/2006/main" xmlns:p="http://schemas.openxmlformats.org/presentationml/2006/main" xmlns:r="http://schemas.openxmlformats.org/officeDocument/2006/relationships">
+<p:sld xmlns:a="http://schemas.openxmlformats.org/drawingml/2006/main" xmlns:r="http://schemas.openxmlformats.org/officeDocument/2006/relationships" xmlns:p="http://schemas.openxmlformats.org/presentationml/2006/main">
   <p:cSld>
     <p:spTree>
       <p:nvGrpSpPr>
@@ -33548,7 +31250,14 @@
         <p:cNvGrpSpPr/>
         <p:nvPr/>
       </p:nvGrpSpPr>
-      <p:grpSpPr/>
+      <p:grpSpPr>
+        <a:xfrm>
+          <a:off x="0" y="0"/>
+          <a:ext cx="0" cy="0"/>
+          <a:chOff x="0" y="0"/>
+          <a:chExt cx="0" cy="0"/>
+        </a:xfrm>
+      </p:grpSpPr>
       <p:sp>
         <p:nvSpPr>
           <p:cNvPr id="2" name="Rectangle 1"/>
@@ -33590,6 +31299,7 @@
           <a:lstStyle/>
           <a:p>
             <a:pPr algn="ctr"/>
+            <a:endParaRPr/>
           </a:p>
         </p:txBody>
       </p:sp>
@@ -33634,6 +31344,7 @@
           <a:lstStyle/>
           <a:p>
             <a:pPr algn="ctr"/>
+            <a:endParaRPr/>
           </a:p>
         </p:txBody>
       </p:sp>
@@ -33713,6 +31424,7 @@
           <a:lstStyle/>
           <a:p>
             <a:pPr algn="ctr"/>
+            <a:endParaRPr/>
           </a:p>
         </p:txBody>
       </p:sp>
@@ -33795,7 +31507,7 @@
 </file>
 
 <file path=ppt/slides/slide9.xml><?xml version="1.0" encoding="utf-8"?>
-<p:sld xmlns:a="http://schemas.openxmlformats.org/drawingml/2006/main" xmlns:p="http://schemas.openxmlformats.org/presentationml/2006/main" xmlns:r="http://schemas.openxmlformats.org/officeDocument/2006/relationships">
+<p:sld xmlns:a="http://schemas.openxmlformats.org/drawingml/2006/main" xmlns:r="http://schemas.openxmlformats.org/officeDocument/2006/relationships" xmlns:p="http://schemas.openxmlformats.org/presentationml/2006/main">
   <p:cSld>
     <p:spTree>
       <p:nvGrpSpPr>
@@ -33803,7 +31515,14 @@
         <p:cNvGrpSpPr/>
         <p:nvPr/>
       </p:nvGrpSpPr>
-      <p:grpSpPr/>
+      <p:grpSpPr>
+        <a:xfrm>
+          <a:off x="0" y="0"/>
+          <a:ext cx="0" cy="0"/>
+          <a:chOff x="0" y="0"/>
+          <a:chExt cx="0" cy="0"/>
+        </a:xfrm>
+      </p:grpSpPr>
       <p:sp>
         <p:nvSpPr>
           <p:cNvPr id="2" name="TextBox 1"/>
@@ -33880,6 +31599,7 @@
           <a:lstStyle/>
           <a:p>
             <a:pPr algn="ctr"/>
+            <a:endParaRPr/>
           </a:p>
         </p:txBody>
       </p:sp>
@@ -33959,6 +31679,7 @@
           <a:lstStyle/>
           <a:p>
             <a:pPr algn="ctr"/>
+            <a:endParaRPr/>
           </a:p>
         </p:txBody>
       </p:sp>
@@ -34108,6 +31829,7 @@
           <a:lstStyle/>
           <a:p>
             <a:pPr algn="ctr"/>
+            <a:endParaRPr/>
           </a:p>
         </p:txBody>
       </p:sp>
@@ -34257,6 +31979,7 @@
           <a:lstStyle/>
           <a:p>
             <a:pPr algn="ctr"/>
+            <a:endParaRPr/>
           </a:p>
         </p:txBody>
       </p:sp>
@@ -34406,6 +32129,7 @@
           <a:lstStyle/>
           <a:p>
             <a:pPr algn="ctr"/>
+            <a:endParaRPr/>
           </a:p>
         </p:txBody>
       </p:sp>
@@ -34555,6 +32279,7 @@
           <a:lstStyle/>
           <a:p>
             <a:pPr algn="ctr"/>
+            <a:endParaRPr/>
           </a:p>
         </p:txBody>
       </p:sp>
@@ -34599,6 +32324,7 @@
           <a:lstStyle/>
           <a:p>
             <a:pPr algn="ctr"/>
+            <a:endParaRPr/>
           </a:p>
         </p:txBody>
       </p:sp>
@@ -35001,7 +32727,7 @@
 </file>
 
 <file path=ppt/theme/theme2.xml><?xml version="1.0" encoding="utf-8"?>
-<a:theme xmlns:a="http://schemas.openxmlformats.org/drawingml/2006/main" name="Office Theme">
+<a:theme xmlns:a="http://schemas.openxmlformats.org/drawingml/2006/main" name="Office 主题​​">
   <a:themeElements>
     <a:clrScheme name="Office">
       <a:dk1>
@@ -35011,44 +32737,44 @@
         <a:sysClr val="window" lastClr="FFFFFF"/>
       </a:lt1>
       <a:dk2>
-        <a:srgbClr val="1F497D"/>
+        <a:srgbClr val="0E2841"/>
       </a:dk2>
       <a:lt2>
-        <a:srgbClr val="EEECE1"/>
+        <a:srgbClr val="E8E8E8"/>
       </a:lt2>
       <a:accent1>
-        <a:srgbClr val="4F81BD"/>
+        <a:srgbClr val="156082"/>
       </a:accent1>
       <a:accent2>
-        <a:srgbClr val="C0504D"/>
+        <a:srgbClr val="E97132"/>
       </a:accent2>
       <a:accent3>
-        <a:srgbClr val="9BBB59"/>
+        <a:srgbClr val="196B24"/>
       </a:accent3>
       <a:accent4>
-        <a:srgbClr val="8064A2"/>
+        <a:srgbClr val="0F9ED5"/>
       </a:accent4>
       <a:accent5>
-        <a:srgbClr val="4BACC6"/>
+        <a:srgbClr val="A02B93"/>
       </a:accent5>
       <a:accent6>
-        <a:srgbClr val="F79646"/>
+        <a:srgbClr val="4EA72E"/>
       </a:accent6>
       <a:hlink>
-        <a:srgbClr val="0000FF"/>
+        <a:srgbClr val="467886"/>
       </a:hlink>
       <a:folHlink>
-        <a:srgbClr val="800080"/>
+        <a:srgbClr val="96607D"/>
       </a:folHlink>
     </a:clrScheme>
     <a:fontScheme name="Office">
       <a:majorFont>
-        <a:latin typeface="Calibri"/>
+        <a:latin typeface="等线 Light" panose="02110004020202020204"/>
         <a:ea typeface=""/>
         <a:cs typeface=""/>
-        <a:font script="Jpan" typeface="ＭＳ Ｐゴシック"/>
+        <a:font script="Jpan" typeface="游ゴシック Light"/>
         <a:font script="Hang" typeface="맑은 고딕"/>
-        <a:font script="Hans" typeface="宋体"/>
+        <a:font script="Hans" typeface="等线 Light"/>
         <a:font script="Hant" typeface="新細明體"/>
         <a:font script="Arab" typeface="Times New Roman"/>
         <a:font script="Hebr" typeface="Times New Roman"/>
@@ -35076,14 +32802,31 @@
         <a:font script="Viet" typeface="Times New Roman"/>
         <a:font script="Uigh" typeface="Microsoft Uighur"/>
         <a:font script="Geor" typeface="Sylfaen"/>
+        <a:font script="Armn" typeface="Arial"/>
+        <a:font script="Bugi" typeface="Leelawadee UI"/>
+        <a:font script="Bopo" typeface="Microsoft JhengHei"/>
+        <a:font script="Java" typeface="Javanese Text"/>
+        <a:font script="Lisu" typeface="Segoe UI"/>
+        <a:font script="Mymr" typeface="Myanmar Text"/>
+        <a:font script="Nkoo" typeface="Ebrima"/>
+        <a:font script="Olck" typeface="Nirmala UI"/>
+        <a:font script="Osma" typeface="Ebrima"/>
+        <a:font script="Phag" typeface="Phagspa"/>
+        <a:font script="Syrn" typeface="Estrangelo Edessa"/>
+        <a:font script="Syrj" typeface="Estrangelo Edessa"/>
+        <a:font script="Syre" typeface="Estrangelo Edessa"/>
+        <a:font script="Sora" typeface="Nirmala UI"/>
+        <a:font script="Tale" typeface="Microsoft Tai Le"/>
+        <a:font script="Talu" typeface="Microsoft New Tai Lue"/>
+        <a:font script="Tfng" typeface="Ebrima"/>
       </a:majorFont>
       <a:minorFont>
-        <a:latin typeface="Calibri"/>
+        <a:latin typeface="等线" panose="02110004020202020204"/>
         <a:ea typeface=""/>
         <a:cs typeface=""/>
-        <a:font script="Jpan" typeface="ＭＳ Ｐゴシック"/>
+        <a:font script="Jpan" typeface="游ゴシック"/>
         <a:font script="Hang" typeface="맑은 고딕"/>
-        <a:font script="Hans" typeface="宋体"/>
+        <a:font script="Hans" typeface="等线"/>
         <a:font script="Hant" typeface="新細明體"/>
         <a:font script="Arab" typeface="Arial"/>
         <a:font script="Hebr" typeface="Arial"/>
@@ -35111,6 +32854,23 @@
         <a:font script="Viet" typeface="Arial"/>
         <a:font script="Uigh" typeface="Microsoft Uighur"/>
         <a:font script="Geor" typeface="Sylfaen"/>
+        <a:font script="Armn" typeface="Arial"/>
+        <a:font script="Bugi" typeface="Leelawadee UI"/>
+        <a:font script="Bopo" typeface="Microsoft JhengHei"/>
+        <a:font script="Java" typeface="Javanese Text"/>
+        <a:font script="Lisu" typeface="Segoe UI"/>
+        <a:font script="Mymr" typeface="Myanmar Text"/>
+        <a:font script="Nkoo" typeface="Ebrima"/>
+        <a:font script="Olck" typeface="Nirmala UI"/>
+        <a:font script="Osma" typeface="Ebrima"/>
+        <a:font script="Phag" typeface="Phagspa"/>
+        <a:font script="Syrn" typeface="Estrangelo Edessa"/>
+        <a:font script="Syrj" typeface="Estrangelo Edessa"/>
+        <a:font script="Syre" typeface="Estrangelo Edessa"/>
+        <a:font script="Sora" typeface="Nirmala UI"/>
+        <a:font script="Tale" typeface="Microsoft Tai Le"/>
+        <a:font script="Talu" typeface="Microsoft New Tai Lue"/>
+        <a:font script="Tfng" typeface="Ebrima"/>
       </a:minorFont>
     </a:fontScheme>
     <a:fmtScheme name="Office">
@@ -35122,180 +32882,136 @@
           <a:gsLst>
             <a:gs pos="0">
               <a:schemeClr val="phClr">
-                <a:tint val="50000"/>
-                <a:satMod val="300000"/>
+                <a:lumMod val="110000"/>
+                <a:satMod val="105000"/>
+                <a:tint val="67000"/>
               </a:schemeClr>
             </a:gs>
-            <a:gs pos="35000">
+            <a:gs pos="50000">
               <a:schemeClr val="phClr">
-                <a:tint val="37000"/>
-                <a:satMod val="300000"/>
+                <a:lumMod val="105000"/>
+                <a:satMod val="103000"/>
+                <a:tint val="73000"/>
               </a:schemeClr>
             </a:gs>
             <a:gs pos="100000">
               <a:schemeClr val="phClr">
-                <a:tint val="15000"/>
-                <a:satMod val="350000"/>
+                <a:lumMod val="105000"/>
+                <a:satMod val="109000"/>
+                <a:tint val="81000"/>
               </a:schemeClr>
             </a:gs>
           </a:gsLst>
-          <a:lin ang="16200000" scaled="1"/>
+          <a:lin ang="5400000" scaled="0"/>
         </a:gradFill>
         <a:gradFill rotWithShape="1">
           <a:gsLst>
             <a:gs pos="0">
               <a:schemeClr val="phClr">
-                <a:tint val="100000"/>
+                <a:satMod val="103000"/>
+                <a:lumMod val="102000"/>
+                <a:tint val="94000"/>
+              </a:schemeClr>
+            </a:gs>
+            <a:gs pos="50000">
+              <a:schemeClr val="phClr">
+                <a:satMod val="110000"/>
+                <a:lumMod val="100000"/>
                 <a:shade val="100000"/>
-                <a:satMod val="130000"/>
               </a:schemeClr>
             </a:gs>
             <a:gs pos="100000">
               <a:schemeClr val="phClr">
-                <a:tint val="50000"/>
-                <a:shade val="100000"/>
-                <a:satMod val="350000"/>
+                <a:lumMod val="99000"/>
+                <a:satMod val="120000"/>
+                <a:shade val="78000"/>
               </a:schemeClr>
             </a:gs>
           </a:gsLst>
-          <a:lin ang="16200000" scaled="0"/>
+          <a:lin ang="5400000" scaled="0"/>
         </a:gradFill>
       </a:fillStyleLst>
       <a:lnStyleLst>
-        <a:ln w="9525" cap="flat" cmpd="sng" algn="ctr">
+        <a:ln w="12700" cap="flat" cmpd="sng" algn="ctr">
           <a:solidFill>
-            <a:schemeClr val="phClr">
-              <a:shade val="95000"/>
-              <a:satMod val="105000"/>
-            </a:schemeClr>
+            <a:schemeClr val="phClr"/>
           </a:solidFill>
           <a:prstDash val="solid"/>
+          <a:miter lim="800000"/>
+        </a:ln>
+        <a:ln w="19050" cap="flat" cmpd="sng" algn="ctr">
+          <a:solidFill>
+            <a:schemeClr val="phClr"/>
+          </a:solidFill>
+          <a:prstDash val="solid"/>
+          <a:miter lim="800000"/>
         </a:ln>
         <a:ln w="25400" cap="flat" cmpd="sng" algn="ctr">
           <a:solidFill>
             <a:schemeClr val="phClr"/>
           </a:solidFill>
           <a:prstDash val="solid"/>
-        </a:ln>
-        <a:ln w="38100" cap="flat" cmpd="sng" algn="ctr">
-          <a:solidFill>
-            <a:schemeClr val="phClr"/>
-          </a:solidFill>
-          <a:prstDash val="solid"/>
+          <a:miter lim="800000"/>
         </a:ln>
       </a:lnStyleLst>
       <a:effectStyleLst>
         <a:effectStyle>
+          <a:effectLst/>
+        </a:effectStyle>
+        <a:effectStyle>
+          <a:effectLst/>
+        </a:effectStyle>
+        <a:effectStyle>
           <a:effectLst>
-            <a:outerShdw blurRad="40000" dist="20000" dir="5400000" rotWithShape="0">
+            <a:outerShdw blurRad="57150" dist="19050" dir="5400000" algn="ctr" rotWithShape="0">
               <a:srgbClr val="000000">
-                <a:alpha val="38000"/>
+                <a:alpha val="63000"/>
               </a:srgbClr>
             </a:outerShdw>
           </a:effectLst>
-        </a:effectStyle>
-        <a:effectStyle>
-          <a:effectLst>
-            <a:outerShdw blurRad="40000" dist="23000" dir="5400000" rotWithShape="0">
-              <a:srgbClr val="000000">
-                <a:alpha val="35000"/>
-              </a:srgbClr>
-            </a:outerShdw>
-          </a:effectLst>
-        </a:effectStyle>
-        <a:effectStyle>
-          <a:effectLst>
-            <a:outerShdw blurRad="40000" dist="23000" dir="5400000" rotWithShape="0">
-              <a:srgbClr val="000000">
-                <a:alpha val="35000"/>
-              </a:srgbClr>
-            </a:outerShdw>
-          </a:effectLst>
-          <a:scene3d>
-            <a:camera prst="orthographicFront">
-              <a:rot lat="0" lon="0" rev="0"/>
-            </a:camera>
-            <a:lightRig rig="threePt" dir="t">
-              <a:rot lat="0" lon="0" rev="1200000"/>
-            </a:lightRig>
-          </a:scene3d>
-          <a:sp3d>
-            <a:bevelT w="63500" h="25400"/>
-          </a:sp3d>
         </a:effectStyle>
       </a:effectStyleLst>
       <a:bgFillStyleLst>
         <a:solidFill>
           <a:schemeClr val="phClr"/>
         </a:solidFill>
+        <a:solidFill>
+          <a:schemeClr val="phClr">
+            <a:tint val="95000"/>
+            <a:satMod val="170000"/>
+          </a:schemeClr>
+        </a:solidFill>
         <a:gradFill rotWithShape="1">
           <a:gsLst>
             <a:gs pos="0">
               <a:schemeClr val="phClr">
-                <a:tint val="40000"/>
-                <a:satMod val="350000"/>
+                <a:tint val="93000"/>
+                <a:satMod val="150000"/>
+                <a:shade val="98000"/>
+                <a:lumMod val="102000"/>
               </a:schemeClr>
             </a:gs>
-            <a:gs pos="40000">
+            <a:gs pos="50000">
               <a:schemeClr val="phClr">
-                <a:tint val="45000"/>
-                <a:shade val="99000"/>
-                <a:satMod val="350000"/>
+                <a:tint val="98000"/>
+                <a:satMod val="130000"/>
+                <a:shade val="90000"/>
+                <a:lumMod val="103000"/>
               </a:schemeClr>
             </a:gs>
             <a:gs pos="100000">
               <a:schemeClr val="phClr">
-                <a:shade val="20000"/>
-                <a:satMod val="255000"/>
+                <a:shade val="63000"/>
+                <a:satMod val="120000"/>
               </a:schemeClr>
             </a:gs>
           </a:gsLst>
-          <a:path path="circle">
-            <a:fillToRect l="50000" t="-80000" r="50000" b="180000"/>
-          </a:path>
-        </a:gradFill>
-        <a:gradFill rotWithShape="1">
-          <a:gsLst>
-            <a:gs pos="0">
-              <a:schemeClr val="phClr">
-                <a:tint val="80000"/>
-                <a:satMod val="300000"/>
-              </a:schemeClr>
-            </a:gs>
-            <a:gs pos="100000">
-              <a:schemeClr val="phClr">
-                <a:shade val="30000"/>
-                <a:satMod val="200000"/>
-              </a:schemeClr>
-            </a:gs>
-          </a:gsLst>
-          <a:path path="circle">
-            <a:fillToRect l="50000" t="50000" r="50000" b="50000"/>
-          </a:path>
+          <a:lin ang="5400000" scaled="0"/>
         </a:gradFill>
       </a:bgFillStyleLst>
     </a:fmtScheme>
   </a:themeElements>
   <a:objectDefaults>
-    <a:spDef>
-      <a:spPr/>
-      <a:bodyPr/>
-      <a:lstStyle/>
-      <a:style>
-        <a:lnRef idx="1">
-          <a:schemeClr val="accent1"/>
-        </a:lnRef>
-        <a:fillRef idx="3">
-          <a:schemeClr val="accent1"/>
-        </a:fillRef>
-        <a:effectRef idx="2">
-          <a:schemeClr val="accent1"/>
-        </a:effectRef>
-        <a:fontRef idx="minor">
-          <a:schemeClr val="lt1"/>
-        </a:fontRef>
-      </a:style>
-    </a:spDef>
     <a:lnDef>
       <a:spPr/>
       <a:bodyPr/>
@@ -35317,5 +33033,10 @@
     </a:lnDef>
   </a:objectDefaults>
   <a:extraClrSchemeLst/>
+  <a:extLst>
+    <a:ext uri="{05A4C25C-085E-4340-85A3-A5531E510DB2}">
+      <thm15:themeFamily xmlns:thm15="http://schemas.microsoft.com/office/thememl/2012/main" name="Office Theme" id="{2E142A2C-CD16-42D6-873A-C26D2A0506FA}" vid="{1BDDFF52-6CD6-40A5-AB3C-68EB2F1E4D0A}"/>
+    </a:ext>
+  </a:extLst>
 </a:theme>
 </file>
--- a/汇报PPT/最终汇报成果.pptx
+++ b/汇报PPT/最终汇报成果.pptx
@@ -4,40 +4,37 @@
   <p:sldMasterIdLst>
     <p:sldMasterId id="2147483648" r:id="rId1"/>
   </p:sldMasterIdLst>
-  <p:notesMasterIdLst>
-    <p:notesMasterId r:id="rId30"/>
-  </p:notesMasterIdLst>
   <p:sldIdLst>
-    <p:sldId id="256" r:id="rId2"/>
-    <p:sldId id="257" r:id="rId3"/>
-    <p:sldId id="258" r:id="rId4"/>
-    <p:sldId id="259" r:id="rId5"/>
-    <p:sldId id="260" r:id="rId6"/>
-    <p:sldId id="261" r:id="rId7"/>
-    <p:sldId id="262" r:id="rId8"/>
-    <p:sldId id="263" r:id="rId9"/>
-    <p:sldId id="264" r:id="rId10"/>
-    <p:sldId id="265" r:id="rId11"/>
-    <p:sldId id="266" r:id="rId12"/>
-    <p:sldId id="267" r:id="rId13"/>
-    <p:sldId id="268" r:id="rId14"/>
-    <p:sldId id="269" r:id="rId15"/>
-    <p:sldId id="270" r:id="rId16"/>
-    <p:sldId id="271" r:id="rId17"/>
-    <p:sldId id="272" r:id="rId18"/>
-    <p:sldId id="273" r:id="rId19"/>
-    <p:sldId id="274" r:id="rId20"/>
-    <p:sldId id="275" r:id="rId21"/>
-    <p:sldId id="276" r:id="rId22"/>
-    <p:sldId id="277" r:id="rId23"/>
-    <p:sldId id="278" r:id="rId24"/>
-    <p:sldId id="279" r:id="rId25"/>
-    <p:sldId id="280" r:id="rId26"/>
-    <p:sldId id="281" r:id="rId27"/>
-    <p:sldId id="282" r:id="rId28"/>
-    <p:sldId id="283" r:id="rId29"/>
+    <p:sldId id="256" r:id="rId7"/>
+    <p:sldId id="257" r:id="rId9"/>
+    <p:sldId id="258" r:id="rId10"/>
+    <p:sldId id="259" r:id="rId11"/>
+    <p:sldId id="260" r:id="rId12"/>
+    <p:sldId id="261" r:id="rId13"/>
+    <p:sldId id="262" r:id="rId14"/>
+    <p:sldId id="263" r:id="rId15"/>
+    <p:sldId id="264" r:id="rId16"/>
+    <p:sldId id="265" r:id="rId17"/>
+    <p:sldId id="266" r:id="rId18"/>
+    <p:sldId id="267" r:id="rId19"/>
+    <p:sldId id="268" r:id="rId20"/>
+    <p:sldId id="269" r:id="rId21"/>
+    <p:sldId id="270" r:id="rId22"/>
+    <p:sldId id="271" r:id="rId23"/>
+    <p:sldId id="272" r:id="rId24"/>
+    <p:sldId id="273" r:id="rId25"/>
+    <p:sldId id="274" r:id="rId26"/>
+    <p:sldId id="275" r:id="rId27"/>
+    <p:sldId id="276" r:id="rId28"/>
+    <p:sldId id="277" r:id="rId29"/>
+    <p:sldId id="278" r:id="rId30"/>
+    <p:sldId id="279" r:id="rId31"/>
+    <p:sldId id="280" r:id="rId32"/>
+    <p:sldId id="281" r:id="rId33"/>
+    <p:sldId id="282" r:id="rId34"/>
+    <p:sldId id="283" r:id="rId35"/>
   </p:sldIdLst>
-  <p:sldSz cx="12193588" cy="6858000"/>
+  <p:sldSz cx="12193200" cy="6858000" type="screen4x3"/>
   <p:notesSz cx="6858000" cy="9144000"/>
   <p:defaultTextStyle>
     <a:defPPr>
@@ -134,27 +131,11 @@
       </a:defRPr>
     </a:lvl9pPr>
   </p:defaultTextStyle>
-  <p:extLst>
-    <p:ext uri="{EFAFB233-063F-42B5-8137-9DF3F51BA10A}">
-      <p15:sldGuideLst xmlns:p15="http://schemas.microsoft.com/office/powerpoint/2012/main">
-        <p15:guide id="1" orient="horz" pos="2160">
-          <p15:clr>
-            <a:srgbClr val="A4A3A4"/>
-          </p15:clr>
-        </p15:guide>
-        <p15:guide id="2" pos="2880">
-          <p15:clr>
-            <a:srgbClr val="A4A3A4"/>
-          </p15:clr>
-        </p15:guide>
-      </p15:sldGuideLst>
-    </p:ext>
-  </p:extLst>
 </p:presentation>
 </file>
 
 <file path=ppt/notesMasters/notesMaster1.xml><?xml version="1.0" encoding="utf-8"?>
-<p:notesMaster xmlns:a="http://schemas.openxmlformats.org/drawingml/2006/main" xmlns:r="http://schemas.openxmlformats.org/officeDocument/2006/relationships" xmlns:p="http://schemas.openxmlformats.org/presentationml/2006/main">
+<p:notesMaster xmlns:a="http://schemas.openxmlformats.org/drawingml/2006/main" xmlns:p="http://schemas.openxmlformats.org/presentationml/2006/main" xmlns:r="http://schemas.openxmlformats.org/officeDocument/2006/relationships">
   <p:cSld>
     <p:bg>
       <p:bgRef idx="1001">
@@ -175,16 +156,241 @@
           <a:chExt cx="0" cy="0"/>
         </a:xfrm>
       </p:grpSpPr>
+      <p:sp>
+        <p:nvSpPr>
+          <p:cNvPr id="2" name="Header Placeholder 1"/>
+          <p:cNvSpPr>
+            <a:spLocks noGrp="1"/>
+          </p:cNvSpPr>
+          <p:nvPr>
+            <p:ph type="hdr" sz="quarter"/>
+          </p:nvPr>
+        </p:nvSpPr>
+        <p:spPr>
+          <a:xfrm>
+            <a:off x="0" y="0"/>
+            <a:ext cx="2971800" cy="457200"/>
+          </a:xfrm>
+          <a:prstGeom prst="rect">
+            <a:avLst/>
+          </a:prstGeom>
+        </p:spPr>
+        <p:txBody>
+          <a:bodyPr vert="horz" lIns="91440" tIns="45720" rIns="91440" bIns="45720" rtlCol="0"/>
+          <a:lstStyle>
+            <a:lvl1pPr algn="l">
+              <a:defRPr sz="1200"/>
+            </a:lvl1pPr>
+          </a:lstStyle>
+          <a:p>
+            <a:endParaRPr lang="en-US"/>
+          </a:p>
+        </p:txBody>
+      </p:sp>
+      <p:sp>
+        <p:nvSpPr>
+          <p:cNvPr id="3" name="Date Placeholder 2"/>
+          <p:cNvSpPr>
+            <a:spLocks noGrp="1"/>
+          </p:cNvSpPr>
+          <p:nvPr>
+            <p:ph type="dt" idx="1"/>
+          </p:nvPr>
+        </p:nvSpPr>
+        <p:spPr>
+          <a:xfrm>
+            <a:off x="3884613" y="0"/>
+            <a:ext cx="2971800" cy="457200"/>
+          </a:xfrm>
+          <a:prstGeom prst="rect">
+            <a:avLst/>
+          </a:prstGeom>
+        </p:spPr>
+        <p:txBody>
+          <a:bodyPr vert="horz" lIns="91440" tIns="45720" rIns="91440" bIns="45720" rtlCol="0"/>
+          <a:lstStyle>
+            <a:lvl1pPr algn="r">
+              <a:defRPr sz="1200"/>
+            </a:lvl1pPr>
+          </a:lstStyle>
+          <a:p>
+            <a:fld id="{0F89C1C7-3DCD-1040-A9CF-14679D8B5DDD}" type="datetimeFigureOut">
+              <a:rPr lang="en-US" smtClean="0"/>
+              <a:t>10/17/16</a:t>
+            </a:fld>
+            <a:endParaRPr lang="en-US"/>
+          </a:p>
+        </p:txBody>
+      </p:sp>
+      <p:sp>
+        <p:nvSpPr>
+          <p:cNvPr id="4" name="Slide Image Placeholder 3"/>
+          <p:cNvSpPr>
+            <a:spLocks noGrp="1" noRot="1" noChangeAspect="1"/>
+          </p:cNvSpPr>
+          <p:nvPr>
+            <p:ph type="sldImg" idx="2"/>
+          </p:nvPr>
+        </p:nvSpPr>
+        <p:spPr>
+          <a:xfrm>
+            <a:off x="1143000" y="685800"/>
+            <a:ext cx="4572000" cy="3429000"/>
+          </a:xfrm>
+          <a:prstGeom prst="rect">
+            <a:avLst/>
+          </a:prstGeom>
+          <a:noFill/>
+          <a:ln w="12700">
+            <a:solidFill>
+              <a:prstClr val="black"/>
+            </a:solidFill>
+          </a:ln>
+        </p:spPr>
+        <p:txBody>
+          <a:bodyPr vert="horz" lIns="91440" tIns="45720" rIns="91440" bIns="45720" rtlCol="0" anchor="ctr"/>
+          <a:lstStyle/>
+          <a:p>
+            <a:endParaRPr lang="en-US"/>
+          </a:p>
+        </p:txBody>
+      </p:sp>
+      <p:sp>
+        <p:nvSpPr>
+          <p:cNvPr id="5" name="Notes Placeholder 4"/>
+          <p:cNvSpPr>
+            <a:spLocks noGrp="1"/>
+          </p:cNvSpPr>
+          <p:nvPr>
+            <p:ph type="body" sz="quarter" idx="3"/>
+          </p:nvPr>
+        </p:nvSpPr>
+        <p:spPr>
+          <a:xfrm>
+            <a:off x="685800" y="4343400"/>
+            <a:ext cx="5486400" cy="4114800"/>
+          </a:xfrm>
+          <a:prstGeom prst="rect">
+            <a:avLst/>
+          </a:prstGeom>
+        </p:spPr>
+        <p:txBody>
+          <a:bodyPr vert="horz" lIns="91440" tIns="45720" rIns="91440" bIns="45720" rtlCol="0"/>
+          <a:lstStyle/>
+          <a:p>
+            <a:pPr lvl="0"/>
+            <a:r>
+              <a:rPr lang="en-US" smtClean="0"/>
+              <a:t>Click to edit Master text styles</a:t>
+            </a:r>
+          </a:p>
+          <a:p>
+            <a:pPr lvl="1"/>
+            <a:r>
+              <a:rPr lang="en-US" smtClean="0"/>
+              <a:t>Second level</a:t>
+            </a:r>
+          </a:p>
+          <a:p>
+            <a:pPr lvl="2"/>
+            <a:r>
+              <a:rPr lang="en-US" smtClean="0"/>
+              <a:t>Third level</a:t>
+            </a:r>
+          </a:p>
+          <a:p>
+            <a:pPr lvl="3"/>
+            <a:r>
+              <a:rPr lang="en-US" smtClean="0"/>
+              <a:t>Fourth level</a:t>
+            </a:r>
+          </a:p>
+          <a:p>
+            <a:pPr lvl="4"/>
+            <a:r>
+              <a:rPr lang="en-US" smtClean="0"/>
+              <a:t>Fifth level</a:t>
+            </a:r>
+            <a:endParaRPr lang="en-US"/>
+          </a:p>
+        </p:txBody>
+      </p:sp>
+      <p:sp>
+        <p:nvSpPr>
+          <p:cNvPr id="6" name="Footer Placeholder 5"/>
+          <p:cNvSpPr>
+            <a:spLocks noGrp="1"/>
+          </p:cNvSpPr>
+          <p:nvPr>
+            <p:ph type="ftr" sz="quarter" idx="4"/>
+          </p:nvPr>
+        </p:nvSpPr>
+        <p:spPr>
+          <a:xfrm>
+            <a:off x="0" y="8685213"/>
+            <a:ext cx="2971800" cy="457200"/>
+          </a:xfrm>
+          <a:prstGeom prst="rect">
+            <a:avLst/>
+          </a:prstGeom>
+        </p:spPr>
+        <p:txBody>
+          <a:bodyPr vert="horz" lIns="91440" tIns="45720" rIns="91440" bIns="45720" rtlCol="0" anchor="b"/>
+          <a:lstStyle>
+            <a:lvl1pPr algn="l">
+              <a:defRPr sz="1200"/>
+            </a:lvl1pPr>
+          </a:lstStyle>
+          <a:p>
+            <a:endParaRPr lang="en-US"/>
+          </a:p>
+        </p:txBody>
+      </p:sp>
+      <p:sp>
+        <p:nvSpPr>
+          <p:cNvPr id="7" name="Slide Number Placeholder 6"/>
+          <p:cNvSpPr>
+            <a:spLocks noGrp="1"/>
+          </p:cNvSpPr>
+          <p:nvPr>
+            <p:ph type="sldNum" sz="quarter" idx="5"/>
+          </p:nvPr>
+        </p:nvSpPr>
+        <p:spPr>
+          <a:xfrm>
+            <a:off x="3884613" y="8685213"/>
+            <a:ext cx="2971800" cy="457200"/>
+          </a:xfrm>
+          <a:prstGeom prst="rect">
+            <a:avLst/>
+          </a:prstGeom>
+        </p:spPr>
+        <p:txBody>
+          <a:bodyPr vert="horz" lIns="91440" tIns="45720" rIns="91440" bIns="45720" rtlCol="0" anchor="b"/>
+          <a:lstStyle>
+            <a:lvl1pPr algn="r">
+              <a:defRPr sz="1200"/>
+            </a:lvl1pPr>
+          </a:lstStyle>
+          <a:p>
+            <a:fld id="{BB5E49A5-4136-284D-997B-48E1D791AD67}" type="slidenum">
+              <a:rPr lang="en-US" smtClean="0"/>
+              <a:t>‹#›</a:t>
+            </a:fld>
+            <a:endParaRPr lang="en-US"/>
+          </a:p>
+        </p:txBody>
+      </p:sp>
     </p:spTree>
     <p:extLst>
       <p:ext uri="{BB962C8B-B14F-4D97-AF65-F5344CB8AC3E}">
-        <p14:creationId xmlns:p14="http://schemas.microsoft.com/office/powerpoint/2010/main" val="1686975420"/>
+        <p14:creationId xmlns:p14="http://schemas.microsoft.com/office/powerpoint/2010/main" val="2623252185"/>
       </p:ext>
     </p:extLst>
   </p:cSld>
   <p:clrMap bg1="lt1" tx1="dk1" bg2="lt2" tx2="dk2" accent1="accent1" accent2="accent2" accent3="accent3" accent4="accent4" accent5="accent5" accent6="accent6" hlink="hlink" folHlink="folHlink"/>
   <p:notesStyle>
-    <a:lvl1pPr marL="0" algn="l" defTabSz="914400" rtl="0" eaLnBrk="1" latinLnBrk="0" hangingPunct="1">
+    <a:lvl1pPr marL="0" algn="l" defTabSz="457200" rtl="0" eaLnBrk="1" latinLnBrk="0" hangingPunct="1">
       <a:defRPr sz="1200" kern="1200">
         <a:solidFill>
           <a:schemeClr val="tx1"/>
@@ -194,7 +400,7 @@
         <a:cs typeface="+mn-cs"/>
       </a:defRPr>
     </a:lvl1pPr>
-    <a:lvl2pPr marL="457200" algn="l" defTabSz="914400" rtl="0" eaLnBrk="1" latinLnBrk="0" hangingPunct="1">
+    <a:lvl2pPr marL="457200" algn="l" defTabSz="457200" rtl="0" eaLnBrk="1" latinLnBrk="0" hangingPunct="1">
       <a:defRPr sz="1200" kern="1200">
         <a:solidFill>
           <a:schemeClr val="tx1"/>
@@ -204,7 +410,7 @@
         <a:cs typeface="+mn-cs"/>
       </a:defRPr>
     </a:lvl2pPr>
-    <a:lvl3pPr marL="914400" algn="l" defTabSz="914400" rtl="0" eaLnBrk="1" latinLnBrk="0" hangingPunct="1">
+    <a:lvl3pPr marL="914400" algn="l" defTabSz="457200" rtl="0" eaLnBrk="1" latinLnBrk="0" hangingPunct="1">
       <a:defRPr sz="1200" kern="1200">
         <a:solidFill>
           <a:schemeClr val="tx1"/>
@@ -214,7 +420,7 @@
         <a:cs typeface="+mn-cs"/>
       </a:defRPr>
     </a:lvl3pPr>
-    <a:lvl4pPr marL="1371600" algn="l" defTabSz="914400" rtl="0" eaLnBrk="1" latinLnBrk="0" hangingPunct="1">
+    <a:lvl4pPr marL="1371600" algn="l" defTabSz="457200" rtl="0" eaLnBrk="1" latinLnBrk="0" hangingPunct="1">
       <a:defRPr sz="1200" kern="1200">
         <a:solidFill>
           <a:schemeClr val="tx1"/>
@@ -224,7 +430,7 @@
         <a:cs typeface="+mn-cs"/>
       </a:defRPr>
     </a:lvl4pPr>
-    <a:lvl5pPr marL="1828800" algn="l" defTabSz="914400" rtl="0" eaLnBrk="1" latinLnBrk="0" hangingPunct="1">
+    <a:lvl5pPr marL="1828800" algn="l" defTabSz="457200" rtl="0" eaLnBrk="1" latinLnBrk="0" hangingPunct="1">
       <a:defRPr sz="1200" kern="1200">
         <a:solidFill>
           <a:schemeClr val="tx1"/>
@@ -234,7 +440,7 @@
         <a:cs typeface="+mn-cs"/>
       </a:defRPr>
     </a:lvl5pPr>
-    <a:lvl6pPr marL="2286000" algn="l" defTabSz="914400" rtl="0" eaLnBrk="1" latinLnBrk="0" hangingPunct="1">
+    <a:lvl6pPr marL="2286000" algn="l" defTabSz="457200" rtl="0" eaLnBrk="1" latinLnBrk="0" hangingPunct="1">
       <a:defRPr sz="1200" kern="1200">
         <a:solidFill>
           <a:schemeClr val="tx1"/>
@@ -244,7 +450,7 @@
         <a:cs typeface="+mn-cs"/>
       </a:defRPr>
     </a:lvl6pPr>
-    <a:lvl7pPr marL="2743200" algn="l" defTabSz="914400" rtl="0" eaLnBrk="1" latinLnBrk="0" hangingPunct="1">
+    <a:lvl7pPr marL="2743200" algn="l" defTabSz="457200" rtl="0" eaLnBrk="1" latinLnBrk="0" hangingPunct="1">
       <a:defRPr sz="1200" kern="1200">
         <a:solidFill>
           <a:schemeClr val="tx1"/>
@@ -254,7 +460,7 @@
         <a:cs typeface="+mn-cs"/>
       </a:defRPr>
     </a:lvl7pPr>
-    <a:lvl8pPr marL="3200400" algn="l" defTabSz="914400" rtl="0" eaLnBrk="1" latinLnBrk="0" hangingPunct="1">
+    <a:lvl8pPr marL="3200400" algn="l" defTabSz="457200" rtl="0" eaLnBrk="1" latinLnBrk="0" hangingPunct="1">
       <a:defRPr sz="1200" kern="1200">
         <a:solidFill>
           <a:schemeClr val="tx1"/>
@@ -264,7 +470,7 @@
         <a:cs typeface="+mn-cs"/>
       </a:defRPr>
     </a:lvl8pPr>
-    <a:lvl9pPr marL="3657600" algn="l" defTabSz="914400" rtl="0" eaLnBrk="1" latinLnBrk="0" hangingPunct="1">
+    <a:lvl9pPr marL="3657600" algn="l" defTabSz="457200" rtl="0" eaLnBrk="1" latinLnBrk="0" hangingPunct="1">
       <a:defRPr sz="1200" kern="1200">
         <a:solidFill>
           <a:schemeClr val="tx1"/>
@@ -279,7 +485,7 @@
 </file>
 
 <file path=ppt/notesSlides/notesSlide1.xml><?xml version="1.0" encoding="utf-8"?>
-<p:notes xmlns:a="http://schemas.openxmlformats.org/drawingml/2006/main" xmlns:r="http://schemas.openxmlformats.org/officeDocument/2006/relationships" xmlns:p="http://schemas.openxmlformats.org/presentationml/2006/main">
+<p:notes xmlns:a="http://schemas.openxmlformats.org/drawingml/2006/main" xmlns:p="http://schemas.openxmlformats.org/presentationml/2006/main" xmlns:r="http://schemas.openxmlformats.org/officeDocument/2006/relationships">
   <p:cSld>
     <p:spTree>
       <p:nvGrpSpPr>
@@ -299,7 +505,7 @@
         <p:nvSpPr>
           <p:cNvPr id="2" name="Slide Image Placeholder 1"/>
           <p:cNvSpPr>
-            <a:spLocks noGrp="1" noRot="1" noChangeAspect="1"/>
+            <a:spLocks noGrp="1"/>
           </p:cNvSpPr>
           <p:nvPr>
             <p:ph type="sldImg" idx="2"/>
@@ -314,7 +520,7 @@
             <a:spLocks noGrp="1"/>
           </p:cNvSpPr>
           <p:nvPr>
-            <p:ph type="body" sz="quarter" idx="3"/>
+            <p:ph type="body" idx="3" sz="quarter"/>
           </p:nvPr>
         </p:nvSpPr>
         <p:spPr/>
@@ -340,7 +546,7 @@
             <a:spLocks noGrp="1"/>
           </p:cNvSpPr>
           <p:nvPr>
-            <p:ph type="sldNum" sz="quarter" idx="5"/>
+            <p:ph type="sldNum" idx="5" sz="quarter"/>
           </p:nvPr>
         </p:nvSpPr>
         <p:spPr/>
@@ -354,7 +560,7 @@
 </file>
 
 <file path=ppt/notesSlides/notesSlide10.xml><?xml version="1.0" encoding="utf-8"?>
-<p:notes xmlns:a="http://schemas.openxmlformats.org/drawingml/2006/main" xmlns:r="http://schemas.openxmlformats.org/officeDocument/2006/relationships" xmlns:p="http://schemas.openxmlformats.org/presentationml/2006/main">
+<p:notes xmlns:a="http://schemas.openxmlformats.org/drawingml/2006/main" xmlns:p="http://schemas.openxmlformats.org/presentationml/2006/main" xmlns:r="http://schemas.openxmlformats.org/officeDocument/2006/relationships">
   <p:cSld>
     <p:spTree>
       <p:nvGrpSpPr>
@@ -374,7 +580,7 @@
         <p:nvSpPr>
           <p:cNvPr id="2" name="Slide Image Placeholder 1"/>
           <p:cNvSpPr>
-            <a:spLocks noGrp="1" noRot="1" noChangeAspect="1"/>
+            <a:spLocks noGrp="1"/>
           </p:cNvSpPr>
           <p:nvPr>
             <p:ph type="sldImg" idx="2"/>
@@ -389,7 +595,7 @@
             <a:spLocks noGrp="1"/>
           </p:cNvSpPr>
           <p:nvPr>
-            <p:ph type="body" sz="quarter" idx="3"/>
+            <p:ph type="body" idx="3" sz="quarter"/>
           </p:nvPr>
         </p:nvSpPr>
         <p:spPr/>
@@ -415,7 +621,7 @@
             <a:spLocks noGrp="1"/>
           </p:cNvSpPr>
           <p:nvPr>
-            <p:ph type="sldNum" sz="quarter" idx="5"/>
+            <p:ph type="sldNum" idx="5" sz="quarter"/>
           </p:nvPr>
         </p:nvSpPr>
         <p:spPr/>
@@ -429,7 +635,7 @@
 </file>
 
 <file path=ppt/notesSlides/notesSlide11.xml><?xml version="1.0" encoding="utf-8"?>
-<p:notes xmlns:a="http://schemas.openxmlformats.org/drawingml/2006/main" xmlns:r="http://schemas.openxmlformats.org/officeDocument/2006/relationships" xmlns:p="http://schemas.openxmlformats.org/presentationml/2006/main">
+<p:notes xmlns:a="http://schemas.openxmlformats.org/drawingml/2006/main" xmlns:p="http://schemas.openxmlformats.org/presentationml/2006/main" xmlns:r="http://schemas.openxmlformats.org/officeDocument/2006/relationships">
   <p:cSld>
     <p:spTree>
       <p:nvGrpSpPr>
@@ -449,7 +655,7 @@
         <p:nvSpPr>
           <p:cNvPr id="2" name="Slide Image Placeholder 1"/>
           <p:cNvSpPr>
-            <a:spLocks noGrp="1" noRot="1" noChangeAspect="1"/>
+            <a:spLocks noGrp="1"/>
           </p:cNvSpPr>
           <p:nvPr>
             <p:ph type="sldImg" idx="2"/>
@@ -464,7 +670,7 @@
             <a:spLocks noGrp="1"/>
           </p:cNvSpPr>
           <p:nvPr>
-            <p:ph type="body" sz="quarter" idx="3"/>
+            <p:ph type="body" idx="3" sz="quarter"/>
           </p:nvPr>
         </p:nvSpPr>
         <p:spPr/>
@@ -490,7 +696,7 @@
             <a:spLocks noGrp="1"/>
           </p:cNvSpPr>
           <p:nvPr>
-            <p:ph type="sldNum" sz="quarter" idx="5"/>
+            <p:ph type="sldNum" idx="5" sz="quarter"/>
           </p:nvPr>
         </p:nvSpPr>
         <p:spPr/>
@@ -504,7 +710,7 @@
 </file>
 
 <file path=ppt/notesSlides/notesSlide12.xml><?xml version="1.0" encoding="utf-8"?>
-<p:notes xmlns:a="http://schemas.openxmlformats.org/drawingml/2006/main" xmlns:r="http://schemas.openxmlformats.org/officeDocument/2006/relationships" xmlns:p="http://schemas.openxmlformats.org/presentationml/2006/main">
+<p:notes xmlns:a="http://schemas.openxmlformats.org/drawingml/2006/main" xmlns:p="http://schemas.openxmlformats.org/presentationml/2006/main" xmlns:r="http://schemas.openxmlformats.org/officeDocument/2006/relationships">
   <p:cSld>
     <p:spTree>
       <p:nvGrpSpPr>
@@ -524,7 +730,7 @@
         <p:nvSpPr>
           <p:cNvPr id="2" name="Slide Image Placeholder 1"/>
           <p:cNvSpPr>
-            <a:spLocks noGrp="1" noRot="1" noChangeAspect="1"/>
+            <a:spLocks noGrp="1"/>
           </p:cNvSpPr>
           <p:nvPr>
             <p:ph type="sldImg" idx="2"/>
@@ -539,7 +745,7 @@
             <a:spLocks noGrp="1"/>
           </p:cNvSpPr>
           <p:nvPr>
-            <p:ph type="body" sz="quarter" idx="3"/>
+            <p:ph type="body" idx="3" sz="quarter"/>
           </p:nvPr>
         </p:nvSpPr>
         <p:spPr/>
@@ -565,7 +771,7 @@
             <a:spLocks noGrp="1"/>
           </p:cNvSpPr>
           <p:nvPr>
-            <p:ph type="sldNum" sz="quarter" idx="5"/>
+            <p:ph type="sldNum" idx="5" sz="quarter"/>
           </p:nvPr>
         </p:nvSpPr>
         <p:spPr/>
@@ -579,7 +785,7 @@
 </file>
 
 <file path=ppt/notesSlides/notesSlide13.xml><?xml version="1.0" encoding="utf-8"?>
-<p:notes xmlns:a="http://schemas.openxmlformats.org/drawingml/2006/main" xmlns:r="http://schemas.openxmlformats.org/officeDocument/2006/relationships" xmlns:p="http://schemas.openxmlformats.org/presentationml/2006/main">
+<p:notes xmlns:a="http://schemas.openxmlformats.org/drawingml/2006/main" xmlns:p="http://schemas.openxmlformats.org/presentationml/2006/main" xmlns:r="http://schemas.openxmlformats.org/officeDocument/2006/relationships">
   <p:cSld>
     <p:spTree>
       <p:nvGrpSpPr>
@@ -599,7 +805,7 @@
         <p:nvSpPr>
           <p:cNvPr id="2" name="Slide Image Placeholder 1"/>
           <p:cNvSpPr>
-            <a:spLocks noGrp="1" noRot="1" noChangeAspect="1"/>
+            <a:spLocks noGrp="1"/>
           </p:cNvSpPr>
           <p:nvPr>
             <p:ph type="sldImg" idx="2"/>
@@ -614,7 +820,7 @@
             <a:spLocks noGrp="1"/>
           </p:cNvSpPr>
           <p:nvPr>
-            <p:ph type="body" sz="quarter" idx="3"/>
+            <p:ph type="body" idx="3" sz="quarter"/>
           </p:nvPr>
         </p:nvSpPr>
         <p:spPr/>
@@ -640,7 +846,7 @@
             <a:spLocks noGrp="1"/>
           </p:cNvSpPr>
           <p:nvPr>
-            <p:ph type="sldNum" sz="quarter" idx="5"/>
+            <p:ph type="sldNum" idx="5" sz="quarter"/>
           </p:nvPr>
         </p:nvSpPr>
         <p:spPr/>
@@ -654,7 +860,7 @@
 </file>
 
 <file path=ppt/notesSlides/notesSlide14.xml><?xml version="1.0" encoding="utf-8"?>
-<p:notes xmlns:a="http://schemas.openxmlformats.org/drawingml/2006/main" xmlns:r="http://schemas.openxmlformats.org/officeDocument/2006/relationships" xmlns:p="http://schemas.openxmlformats.org/presentationml/2006/main">
+<p:notes xmlns:a="http://schemas.openxmlformats.org/drawingml/2006/main" xmlns:p="http://schemas.openxmlformats.org/presentationml/2006/main" xmlns:r="http://schemas.openxmlformats.org/officeDocument/2006/relationships">
   <p:cSld>
     <p:spTree>
       <p:nvGrpSpPr>
@@ -674,7 +880,7 @@
         <p:nvSpPr>
           <p:cNvPr id="2" name="Slide Image Placeholder 1"/>
           <p:cNvSpPr>
-            <a:spLocks noGrp="1" noRot="1" noChangeAspect="1"/>
+            <a:spLocks noGrp="1"/>
           </p:cNvSpPr>
           <p:nvPr>
             <p:ph type="sldImg" idx="2"/>
@@ -689,7 +895,7 @@
             <a:spLocks noGrp="1"/>
           </p:cNvSpPr>
           <p:nvPr>
-            <p:ph type="body" sz="quarter" idx="3"/>
+            <p:ph type="body" idx="3" sz="quarter"/>
           </p:nvPr>
         </p:nvSpPr>
         <p:spPr/>
@@ -715,7 +921,7 @@
             <a:spLocks noGrp="1"/>
           </p:cNvSpPr>
           <p:nvPr>
-            <p:ph type="sldNum" sz="quarter" idx="5"/>
+            <p:ph type="sldNum" idx="5" sz="quarter"/>
           </p:nvPr>
         </p:nvSpPr>
         <p:spPr/>
@@ -729,7 +935,7 @@
 </file>
 
 <file path=ppt/notesSlides/notesSlide15.xml><?xml version="1.0" encoding="utf-8"?>
-<p:notes xmlns:a="http://schemas.openxmlformats.org/drawingml/2006/main" xmlns:r="http://schemas.openxmlformats.org/officeDocument/2006/relationships" xmlns:p="http://schemas.openxmlformats.org/presentationml/2006/main">
+<p:notes xmlns:a="http://schemas.openxmlformats.org/drawingml/2006/main" xmlns:p="http://schemas.openxmlformats.org/presentationml/2006/main" xmlns:r="http://schemas.openxmlformats.org/officeDocument/2006/relationships">
   <p:cSld>
     <p:spTree>
       <p:nvGrpSpPr>
@@ -749,7 +955,7 @@
         <p:nvSpPr>
           <p:cNvPr id="2" name="Slide Image Placeholder 1"/>
           <p:cNvSpPr>
-            <a:spLocks noGrp="1" noRot="1" noChangeAspect="1"/>
+            <a:spLocks noGrp="1"/>
           </p:cNvSpPr>
           <p:nvPr>
             <p:ph type="sldImg" idx="2"/>
@@ -764,7 +970,7 @@
             <a:spLocks noGrp="1"/>
           </p:cNvSpPr>
           <p:nvPr>
-            <p:ph type="body" sz="quarter" idx="3"/>
+            <p:ph type="body" idx="3" sz="quarter"/>
           </p:nvPr>
         </p:nvSpPr>
         <p:spPr/>
@@ -790,7 +996,7 @@
             <a:spLocks noGrp="1"/>
           </p:cNvSpPr>
           <p:nvPr>
-            <p:ph type="sldNum" sz="quarter" idx="5"/>
+            <p:ph type="sldNum" idx="5" sz="quarter"/>
           </p:nvPr>
         </p:nvSpPr>
         <p:spPr/>
@@ -804,7 +1010,7 @@
 </file>
 
 <file path=ppt/notesSlides/notesSlide16.xml><?xml version="1.0" encoding="utf-8"?>
-<p:notes xmlns:a="http://schemas.openxmlformats.org/drawingml/2006/main" xmlns:r="http://schemas.openxmlformats.org/officeDocument/2006/relationships" xmlns:p="http://schemas.openxmlformats.org/presentationml/2006/main">
+<p:notes xmlns:a="http://schemas.openxmlformats.org/drawingml/2006/main" xmlns:p="http://schemas.openxmlformats.org/presentationml/2006/main" xmlns:r="http://schemas.openxmlformats.org/officeDocument/2006/relationships">
   <p:cSld>
     <p:spTree>
       <p:nvGrpSpPr>
@@ -824,7 +1030,7 @@
         <p:nvSpPr>
           <p:cNvPr id="2" name="Slide Image Placeholder 1"/>
           <p:cNvSpPr>
-            <a:spLocks noGrp="1" noRot="1" noChangeAspect="1"/>
+            <a:spLocks noGrp="1"/>
           </p:cNvSpPr>
           <p:nvPr>
             <p:ph type="sldImg" idx="2"/>
@@ -839,7 +1045,7 @@
             <a:spLocks noGrp="1"/>
           </p:cNvSpPr>
           <p:nvPr>
-            <p:ph type="body" sz="quarter" idx="3"/>
+            <p:ph type="body" idx="3" sz="quarter"/>
           </p:nvPr>
         </p:nvSpPr>
         <p:spPr/>
@@ -865,7 +1071,7 @@
             <a:spLocks noGrp="1"/>
           </p:cNvSpPr>
           <p:nvPr>
-            <p:ph type="sldNum" sz="quarter" idx="5"/>
+            <p:ph type="sldNum" idx="5" sz="quarter"/>
           </p:nvPr>
         </p:nvSpPr>
         <p:spPr/>
@@ -879,7 +1085,7 @@
 </file>
 
 <file path=ppt/notesSlides/notesSlide17.xml><?xml version="1.0" encoding="utf-8"?>
-<p:notes xmlns:a="http://schemas.openxmlformats.org/drawingml/2006/main" xmlns:r="http://schemas.openxmlformats.org/officeDocument/2006/relationships" xmlns:p="http://schemas.openxmlformats.org/presentationml/2006/main">
+<p:notes xmlns:a="http://schemas.openxmlformats.org/drawingml/2006/main" xmlns:p="http://schemas.openxmlformats.org/presentationml/2006/main" xmlns:r="http://schemas.openxmlformats.org/officeDocument/2006/relationships">
   <p:cSld>
     <p:spTree>
       <p:nvGrpSpPr>
@@ -899,7 +1105,7 @@
         <p:nvSpPr>
           <p:cNvPr id="2" name="Slide Image Placeholder 1"/>
           <p:cNvSpPr>
-            <a:spLocks noGrp="1" noRot="1" noChangeAspect="1"/>
+            <a:spLocks noGrp="1"/>
           </p:cNvSpPr>
           <p:nvPr>
             <p:ph type="sldImg" idx="2"/>
@@ -914,7 +1120,7 @@
             <a:spLocks noGrp="1"/>
           </p:cNvSpPr>
           <p:nvPr>
-            <p:ph type="body" sz="quarter" idx="3"/>
+            <p:ph type="body" idx="3" sz="quarter"/>
           </p:nvPr>
         </p:nvSpPr>
         <p:spPr/>
@@ -940,7 +1146,7 @@
             <a:spLocks noGrp="1"/>
           </p:cNvSpPr>
           <p:nvPr>
-            <p:ph type="sldNum" sz="quarter" idx="5"/>
+            <p:ph type="sldNum" idx="5" sz="quarter"/>
           </p:nvPr>
         </p:nvSpPr>
         <p:spPr/>
@@ -954,7 +1160,7 @@
 </file>
 
 <file path=ppt/notesSlides/notesSlide18.xml><?xml version="1.0" encoding="utf-8"?>
-<p:notes xmlns:a="http://schemas.openxmlformats.org/drawingml/2006/main" xmlns:r="http://schemas.openxmlformats.org/officeDocument/2006/relationships" xmlns:p="http://schemas.openxmlformats.org/presentationml/2006/main">
+<p:notes xmlns:a="http://schemas.openxmlformats.org/drawingml/2006/main" xmlns:p="http://schemas.openxmlformats.org/presentationml/2006/main" xmlns:r="http://schemas.openxmlformats.org/officeDocument/2006/relationships">
   <p:cSld>
     <p:spTree>
       <p:nvGrpSpPr>
@@ -974,7 +1180,7 @@
         <p:nvSpPr>
           <p:cNvPr id="2" name="Slide Image Placeholder 1"/>
           <p:cNvSpPr>
-            <a:spLocks noGrp="1" noRot="1" noChangeAspect="1"/>
+            <a:spLocks noGrp="1"/>
           </p:cNvSpPr>
           <p:nvPr>
             <p:ph type="sldImg" idx="2"/>
@@ -989,7 +1195,7 @@
             <a:spLocks noGrp="1"/>
           </p:cNvSpPr>
           <p:nvPr>
-            <p:ph type="body" sz="quarter" idx="3"/>
+            <p:ph type="body" idx="3" sz="quarter"/>
           </p:nvPr>
         </p:nvSpPr>
         <p:spPr/>
@@ -1015,7 +1221,7 @@
             <a:spLocks noGrp="1"/>
           </p:cNvSpPr>
           <p:nvPr>
-            <p:ph type="sldNum" sz="quarter" idx="5"/>
+            <p:ph type="sldNum" idx="5" sz="quarter"/>
           </p:nvPr>
         </p:nvSpPr>
         <p:spPr/>
@@ -1029,7 +1235,7 @@
 </file>
 
 <file path=ppt/notesSlides/notesSlide19.xml><?xml version="1.0" encoding="utf-8"?>
-<p:notes xmlns:a="http://schemas.openxmlformats.org/drawingml/2006/main" xmlns:r="http://schemas.openxmlformats.org/officeDocument/2006/relationships" xmlns:p="http://schemas.openxmlformats.org/presentationml/2006/main">
+<p:notes xmlns:a="http://schemas.openxmlformats.org/drawingml/2006/main" xmlns:p="http://schemas.openxmlformats.org/presentationml/2006/main" xmlns:r="http://schemas.openxmlformats.org/officeDocument/2006/relationships">
   <p:cSld>
     <p:spTree>
       <p:nvGrpSpPr>
@@ -1049,7 +1255,7 @@
         <p:nvSpPr>
           <p:cNvPr id="2" name="Slide Image Placeholder 1"/>
           <p:cNvSpPr>
-            <a:spLocks noGrp="1" noRot="1" noChangeAspect="1"/>
+            <a:spLocks noGrp="1"/>
           </p:cNvSpPr>
           <p:nvPr>
             <p:ph type="sldImg" idx="2"/>
@@ -1064,7 +1270,7 @@
             <a:spLocks noGrp="1"/>
           </p:cNvSpPr>
           <p:nvPr>
-            <p:ph type="body" sz="quarter" idx="3"/>
+            <p:ph type="body" idx="3" sz="quarter"/>
           </p:nvPr>
         </p:nvSpPr>
         <p:spPr/>
@@ -1090,7 +1296,7 @@
             <a:spLocks noGrp="1"/>
           </p:cNvSpPr>
           <p:nvPr>
-            <p:ph type="sldNum" sz="quarter" idx="5"/>
+            <p:ph type="sldNum" idx="5" sz="quarter"/>
           </p:nvPr>
         </p:nvSpPr>
         <p:spPr/>
@@ -1104,7 +1310,7 @@
 </file>
 
 <file path=ppt/notesSlides/notesSlide2.xml><?xml version="1.0" encoding="utf-8"?>
-<p:notes xmlns:a="http://schemas.openxmlformats.org/drawingml/2006/main" xmlns:r="http://schemas.openxmlformats.org/officeDocument/2006/relationships" xmlns:p="http://schemas.openxmlformats.org/presentationml/2006/main">
+<p:notes xmlns:a="http://schemas.openxmlformats.org/drawingml/2006/main" xmlns:p="http://schemas.openxmlformats.org/presentationml/2006/main" xmlns:r="http://schemas.openxmlformats.org/officeDocument/2006/relationships">
   <p:cSld>
     <p:spTree>
       <p:nvGrpSpPr>
@@ -1124,7 +1330,7 @@
         <p:nvSpPr>
           <p:cNvPr id="2" name="Slide Image Placeholder 1"/>
           <p:cNvSpPr>
-            <a:spLocks noGrp="1" noRot="1" noChangeAspect="1"/>
+            <a:spLocks noGrp="1"/>
           </p:cNvSpPr>
           <p:nvPr>
             <p:ph type="sldImg" idx="2"/>
@@ -1139,7 +1345,7 @@
             <a:spLocks noGrp="1"/>
           </p:cNvSpPr>
           <p:nvPr>
-            <p:ph type="body" sz="quarter" idx="3"/>
+            <p:ph type="body" idx="3" sz="quarter"/>
           </p:nvPr>
         </p:nvSpPr>
         <p:spPr/>
@@ -1165,7 +1371,7 @@
             <a:spLocks noGrp="1"/>
           </p:cNvSpPr>
           <p:nvPr>
-            <p:ph type="sldNum" sz="quarter" idx="5"/>
+            <p:ph type="sldNum" idx="5" sz="quarter"/>
           </p:nvPr>
         </p:nvSpPr>
         <p:spPr/>
@@ -1179,7 +1385,7 @@
 </file>
 
 <file path=ppt/notesSlides/notesSlide20.xml><?xml version="1.0" encoding="utf-8"?>
-<p:notes xmlns:a="http://schemas.openxmlformats.org/drawingml/2006/main" xmlns:r="http://schemas.openxmlformats.org/officeDocument/2006/relationships" xmlns:p="http://schemas.openxmlformats.org/presentationml/2006/main">
+<p:notes xmlns:a="http://schemas.openxmlformats.org/drawingml/2006/main" xmlns:p="http://schemas.openxmlformats.org/presentationml/2006/main" xmlns:r="http://schemas.openxmlformats.org/officeDocument/2006/relationships">
   <p:cSld>
     <p:spTree>
       <p:nvGrpSpPr>
@@ -1199,7 +1405,7 @@
         <p:nvSpPr>
           <p:cNvPr id="2" name="Slide Image Placeholder 1"/>
           <p:cNvSpPr>
-            <a:spLocks noGrp="1" noRot="1" noChangeAspect="1"/>
+            <a:spLocks noGrp="1"/>
           </p:cNvSpPr>
           <p:nvPr>
             <p:ph type="sldImg" idx="2"/>
@@ -1214,7 +1420,7 @@
             <a:spLocks noGrp="1"/>
           </p:cNvSpPr>
           <p:nvPr>
-            <p:ph type="body" sz="quarter" idx="3"/>
+            <p:ph type="body" idx="3" sz="quarter"/>
           </p:nvPr>
         </p:nvSpPr>
         <p:spPr/>
@@ -1240,7 +1446,7 @@
             <a:spLocks noGrp="1"/>
           </p:cNvSpPr>
           <p:nvPr>
-            <p:ph type="sldNum" sz="quarter" idx="5"/>
+            <p:ph type="sldNum" idx="5" sz="quarter"/>
           </p:nvPr>
         </p:nvSpPr>
         <p:spPr/>
@@ -1254,7 +1460,7 @@
 </file>
 
 <file path=ppt/notesSlides/notesSlide21.xml><?xml version="1.0" encoding="utf-8"?>
-<p:notes xmlns:a="http://schemas.openxmlformats.org/drawingml/2006/main" xmlns:r="http://schemas.openxmlformats.org/officeDocument/2006/relationships" xmlns:p="http://schemas.openxmlformats.org/presentationml/2006/main">
+<p:notes xmlns:a="http://schemas.openxmlformats.org/drawingml/2006/main" xmlns:p="http://schemas.openxmlformats.org/presentationml/2006/main" xmlns:r="http://schemas.openxmlformats.org/officeDocument/2006/relationships">
   <p:cSld>
     <p:spTree>
       <p:nvGrpSpPr>
@@ -1274,7 +1480,7 @@
         <p:nvSpPr>
           <p:cNvPr id="2" name="Slide Image Placeholder 1"/>
           <p:cNvSpPr>
-            <a:spLocks noGrp="1" noRot="1" noChangeAspect="1"/>
+            <a:spLocks noGrp="1"/>
           </p:cNvSpPr>
           <p:nvPr>
             <p:ph type="sldImg" idx="2"/>
@@ -1289,7 +1495,7 @@
             <a:spLocks noGrp="1"/>
           </p:cNvSpPr>
           <p:nvPr>
-            <p:ph type="body" sz="quarter" idx="3"/>
+            <p:ph type="body" idx="3" sz="quarter"/>
           </p:nvPr>
         </p:nvSpPr>
         <p:spPr/>
@@ -1315,7 +1521,7 @@
             <a:spLocks noGrp="1"/>
           </p:cNvSpPr>
           <p:nvPr>
-            <p:ph type="sldNum" sz="quarter" idx="5"/>
+            <p:ph type="sldNum" idx="5" sz="quarter"/>
           </p:nvPr>
         </p:nvSpPr>
         <p:spPr/>
@@ -1329,7 +1535,7 @@
 </file>
 
 <file path=ppt/notesSlides/notesSlide22.xml><?xml version="1.0" encoding="utf-8"?>
-<p:notes xmlns:a="http://schemas.openxmlformats.org/drawingml/2006/main" xmlns:r="http://schemas.openxmlformats.org/officeDocument/2006/relationships" xmlns:p="http://schemas.openxmlformats.org/presentationml/2006/main">
+<p:notes xmlns:a="http://schemas.openxmlformats.org/drawingml/2006/main" xmlns:p="http://schemas.openxmlformats.org/presentationml/2006/main" xmlns:r="http://schemas.openxmlformats.org/officeDocument/2006/relationships">
   <p:cSld>
     <p:spTree>
       <p:nvGrpSpPr>
@@ -1349,7 +1555,7 @@
         <p:nvSpPr>
           <p:cNvPr id="2" name="Slide Image Placeholder 1"/>
           <p:cNvSpPr>
-            <a:spLocks noGrp="1" noRot="1" noChangeAspect="1"/>
+            <a:spLocks noGrp="1"/>
           </p:cNvSpPr>
           <p:nvPr>
             <p:ph type="sldImg" idx="2"/>
@@ -1364,7 +1570,7 @@
             <a:spLocks noGrp="1"/>
           </p:cNvSpPr>
           <p:nvPr>
-            <p:ph type="body" sz="quarter" idx="3"/>
+            <p:ph type="body" idx="3" sz="quarter"/>
           </p:nvPr>
         </p:nvSpPr>
         <p:spPr/>
@@ -1390,7 +1596,7 @@
             <a:spLocks noGrp="1"/>
           </p:cNvSpPr>
           <p:nvPr>
-            <p:ph type="sldNum" sz="quarter" idx="5"/>
+            <p:ph type="sldNum" idx="5" sz="quarter"/>
           </p:nvPr>
         </p:nvSpPr>
         <p:spPr/>
@@ -1404,7 +1610,7 @@
 </file>
 
 <file path=ppt/notesSlides/notesSlide23.xml><?xml version="1.0" encoding="utf-8"?>
-<p:notes xmlns:a="http://schemas.openxmlformats.org/drawingml/2006/main" xmlns:r="http://schemas.openxmlformats.org/officeDocument/2006/relationships" xmlns:p="http://schemas.openxmlformats.org/presentationml/2006/main">
+<p:notes xmlns:a="http://schemas.openxmlformats.org/drawingml/2006/main" xmlns:p="http://schemas.openxmlformats.org/presentationml/2006/main" xmlns:r="http://schemas.openxmlformats.org/officeDocument/2006/relationships">
   <p:cSld>
     <p:spTree>
       <p:nvGrpSpPr>
@@ -1424,7 +1630,7 @@
         <p:nvSpPr>
           <p:cNvPr id="2" name="Slide Image Placeholder 1"/>
           <p:cNvSpPr>
-            <a:spLocks noGrp="1" noRot="1" noChangeAspect="1"/>
+            <a:spLocks noGrp="1"/>
           </p:cNvSpPr>
           <p:nvPr>
             <p:ph type="sldImg" idx="2"/>
@@ -1439,7 +1645,7 @@
             <a:spLocks noGrp="1"/>
           </p:cNvSpPr>
           <p:nvPr>
-            <p:ph type="body" sz="quarter" idx="3"/>
+            <p:ph type="body" idx="3" sz="quarter"/>
           </p:nvPr>
         </p:nvSpPr>
         <p:spPr/>
@@ -1465,7 +1671,7 @@
             <a:spLocks noGrp="1"/>
           </p:cNvSpPr>
           <p:nvPr>
-            <p:ph type="sldNum" sz="quarter" idx="5"/>
+            <p:ph type="sldNum" idx="5" sz="quarter"/>
           </p:nvPr>
         </p:nvSpPr>
         <p:spPr/>
@@ -1479,7 +1685,7 @@
 </file>
 
 <file path=ppt/notesSlides/notesSlide24.xml><?xml version="1.0" encoding="utf-8"?>
-<p:notes xmlns:a="http://schemas.openxmlformats.org/drawingml/2006/main" xmlns:r="http://schemas.openxmlformats.org/officeDocument/2006/relationships" xmlns:p="http://schemas.openxmlformats.org/presentationml/2006/main">
+<p:notes xmlns:a="http://schemas.openxmlformats.org/drawingml/2006/main" xmlns:p="http://schemas.openxmlformats.org/presentationml/2006/main" xmlns:r="http://schemas.openxmlformats.org/officeDocument/2006/relationships">
   <p:cSld>
     <p:spTree>
       <p:nvGrpSpPr>
@@ -1499,7 +1705,7 @@
         <p:nvSpPr>
           <p:cNvPr id="2" name="Slide Image Placeholder 1"/>
           <p:cNvSpPr>
-            <a:spLocks noGrp="1" noRot="1" noChangeAspect="1"/>
+            <a:spLocks noGrp="1"/>
           </p:cNvSpPr>
           <p:nvPr>
             <p:ph type="sldImg" idx="2"/>
@@ -1514,7 +1720,7 @@
             <a:spLocks noGrp="1"/>
           </p:cNvSpPr>
           <p:nvPr>
-            <p:ph type="body" sz="quarter" idx="3"/>
+            <p:ph type="body" idx="3" sz="quarter"/>
           </p:nvPr>
         </p:nvSpPr>
         <p:spPr/>
@@ -1540,7 +1746,7 @@
             <a:spLocks noGrp="1"/>
           </p:cNvSpPr>
           <p:nvPr>
-            <p:ph type="sldNum" sz="quarter" idx="5"/>
+            <p:ph type="sldNum" idx="5" sz="quarter"/>
           </p:nvPr>
         </p:nvSpPr>
         <p:spPr/>
@@ -1554,7 +1760,7 @@
 </file>
 
 <file path=ppt/notesSlides/notesSlide25.xml><?xml version="1.0" encoding="utf-8"?>
-<p:notes xmlns:a="http://schemas.openxmlformats.org/drawingml/2006/main" xmlns:r="http://schemas.openxmlformats.org/officeDocument/2006/relationships" xmlns:p="http://schemas.openxmlformats.org/presentationml/2006/main">
+<p:notes xmlns:a="http://schemas.openxmlformats.org/drawingml/2006/main" xmlns:p="http://schemas.openxmlformats.org/presentationml/2006/main" xmlns:r="http://schemas.openxmlformats.org/officeDocument/2006/relationships">
   <p:cSld>
     <p:spTree>
       <p:nvGrpSpPr>
@@ -1574,7 +1780,7 @@
         <p:nvSpPr>
           <p:cNvPr id="2" name="Slide Image Placeholder 1"/>
           <p:cNvSpPr>
-            <a:spLocks noGrp="1" noRot="1" noChangeAspect="1"/>
+            <a:spLocks noGrp="1"/>
           </p:cNvSpPr>
           <p:nvPr>
             <p:ph type="sldImg" idx="2"/>
@@ -1589,7 +1795,7 @@
             <a:spLocks noGrp="1"/>
           </p:cNvSpPr>
           <p:nvPr>
-            <p:ph type="body" sz="quarter" idx="3"/>
+            <p:ph type="body" idx="3" sz="quarter"/>
           </p:nvPr>
         </p:nvSpPr>
         <p:spPr/>
@@ -1615,7 +1821,7 @@
             <a:spLocks noGrp="1"/>
           </p:cNvSpPr>
           <p:nvPr>
-            <p:ph type="sldNum" sz="quarter" idx="5"/>
+            <p:ph type="sldNum" idx="5" sz="quarter"/>
           </p:nvPr>
         </p:nvSpPr>
         <p:spPr/>
@@ -1629,7 +1835,7 @@
 </file>
 
 <file path=ppt/notesSlides/notesSlide26.xml><?xml version="1.0" encoding="utf-8"?>
-<p:notes xmlns:a="http://schemas.openxmlformats.org/drawingml/2006/main" xmlns:r="http://schemas.openxmlformats.org/officeDocument/2006/relationships" xmlns:p="http://schemas.openxmlformats.org/presentationml/2006/main">
+<p:notes xmlns:a="http://schemas.openxmlformats.org/drawingml/2006/main" xmlns:p="http://schemas.openxmlformats.org/presentationml/2006/main" xmlns:r="http://schemas.openxmlformats.org/officeDocument/2006/relationships">
   <p:cSld>
     <p:spTree>
       <p:nvGrpSpPr>
@@ -1649,7 +1855,7 @@
         <p:nvSpPr>
           <p:cNvPr id="2" name="Slide Image Placeholder 1"/>
           <p:cNvSpPr>
-            <a:spLocks noGrp="1" noRot="1" noChangeAspect="1"/>
+            <a:spLocks noGrp="1"/>
           </p:cNvSpPr>
           <p:nvPr>
             <p:ph type="sldImg" idx="2"/>
@@ -1664,7 +1870,7 @@
             <a:spLocks noGrp="1"/>
           </p:cNvSpPr>
           <p:nvPr>
-            <p:ph type="body" sz="quarter" idx="3"/>
+            <p:ph type="body" idx="3" sz="quarter"/>
           </p:nvPr>
         </p:nvSpPr>
         <p:spPr/>
@@ -1690,7 +1896,7 @@
             <a:spLocks noGrp="1"/>
           </p:cNvSpPr>
           <p:nvPr>
-            <p:ph type="sldNum" sz="quarter" idx="5"/>
+            <p:ph type="sldNum" idx="5" sz="quarter"/>
           </p:nvPr>
         </p:nvSpPr>
         <p:spPr/>
@@ -1704,7 +1910,7 @@
 </file>
 
 <file path=ppt/notesSlides/notesSlide27.xml><?xml version="1.0" encoding="utf-8"?>
-<p:notes xmlns:a="http://schemas.openxmlformats.org/drawingml/2006/main" xmlns:r="http://schemas.openxmlformats.org/officeDocument/2006/relationships" xmlns:p="http://schemas.openxmlformats.org/presentationml/2006/main">
+<p:notes xmlns:a="http://schemas.openxmlformats.org/drawingml/2006/main" xmlns:p="http://schemas.openxmlformats.org/presentationml/2006/main" xmlns:r="http://schemas.openxmlformats.org/officeDocument/2006/relationships">
   <p:cSld>
     <p:spTree>
       <p:nvGrpSpPr>
@@ -1724,7 +1930,7 @@
         <p:nvSpPr>
           <p:cNvPr id="2" name="Slide Image Placeholder 1"/>
           <p:cNvSpPr>
-            <a:spLocks noGrp="1" noRot="1" noChangeAspect="1"/>
+            <a:spLocks noGrp="1"/>
           </p:cNvSpPr>
           <p:nvPr>
             <p:ph type="sldImg" idx="2"/>
@@ -1739,7 +1945,7 @@
             <a:spLocks noGrp="1"/>
           </p:cNvSpPr>
           <p:nvPr>
-            <p:ph type="body" sz="quarter" idx="3"/>
+            <p:ph type="body" idx="3" sz="quarter"/>
           </p:nvPr>
         </p:nvSpPr>
         <p:spPr/>
@@ -1765,7 +1971,7 @@
             <a:spLocks noGrp="1"/>
           </p:cNvSpPr>
           <p:nvPr>
-            <p:ph type="sldNum" sz="quarter" idx="5"/>
+            <p:ph type="sldNum" idx="5" sz="quarter"/>
           </p:nvPr>
         </p:nvSpPr>
         <p:spPr/>
@@ -1779,7 +1985,7 @@
 </file>
 
 <file path=ppt/notesSlides/notesSlide28.xml><?xml version="1.0" encoding="utf-8"?>
-<p:notes xmlns:a="http://schemas.openxmlformats.org/drawingml/2006/main" xmlns:r="http://schemas.openxmlformats.org/officeDocument/2006/relationships" xmlns:p="http://schemas.openxmlformats.org/presentationml/2006/main">
+<p:notes xmlns:a="http://schemas.openxmlformats.org/drawingml/2006/main" xmlns:p="http://schemas.openxmlformats.org/presentationml/2006/main" xmlns:r="http://schemas.openxmlformats.org/officeDocument/2006/relationships">
   <p:cSld>
     <p:spTree>
       <p:nvGrpSpPr>
@@ -1799,7 +2005,7 @@
         <p:nvSpPr>
           <p:cNvPr id="2" name="Slide Image Placeholder 1"/>
           <p:cNvSpPr>
-            <a:spLocks noGrp="1" noRot="1" noChangeAspect="1"/>
+            <a:spLocks noGrp="1"/>
           </p:cNvSpPr>
           <p:nvPr>
             <p:ph type="sldImg" idx="2"/>
@@ -1814,7 +2020,7 @@
             <a:spLocks noGrp="1"/>
           </p:cNvSpPr>
           <p:nvPr>
-            <p:ph type="body" sz="quarter" idx="3"/>
+            <p:ph type="body" idx="3" sz="quarter"/>
           </p:nvPr>
         </p:nvSpPr>
         <p:spPr/>
@@ -1840,7 +2046,7 @@
             <a:spLocks noGrp="1"/>
           </p:cNvSpPr>
           <p:nvPr>
-            <p:ph type="sldNum" sz="quarter" idx="5"/>
+            <p:ph type="sldNum" idx="5" sz="quarter"/>
           </p:nvPr>
         </p:nvSpPr>
         <p:spPr/>
@@ -1854,7 +2060,7 @@
 </file>
 
 <file path=ppt/notesSlides/notesSlide3.xml><?xml version="1.0" encoding="utf-8"?>
-<p:notes xmlns:a="http://schemas.openxmlformats.org/drawingml/2006/main" xmlns:r="http://schemas.openxmlformats.org/officeDocument/2006/relationships" xmlns:p="http://schemas.openxmlformats.org/presentationml/2006/main">
+<p:notes xmlns:a="http://schemas.openxmlformats.org/drawingml/2006/main" xmlns:p="http://schemas.openxmlformats.org/presentationml/2006/main" xmlns:r="http://schemas.openxmlformats.org/officeDocument/2006/relationships">
   <p:cSld>
     <p:spTree>
       <p:nvGrpSpPr>
@@ -1874,7 +2080,7 @@
         <p:nvSpPr>
           <p:cNvPr id="2" name="Slide Image Placeholder 1"/>
           <p:cNvSpPr>
-            <a:spLocks noGrp="1" noRot="1" noChangeAspect="1"/>
+            <a:spLocks noGrp="1"/>
           </p:cNvSpPr>
           <p:nvPr>
             <p:ph type="sldImg" idx="2"/>
@@ -1889,7 +2095,7 @@
             <a:spLocks noGrp="1"/>
           </p:cNvSpPr>
           <p:nvPr>
-            <p:ph type="body" sz="quarter" idx="3"/>
+            <p:ph type="body" idx="3" sz="quarter"/>
           </p:nvPr>
         </p:nvSpPr>
         <p:spPr/>
@@ -1915,7 +2121,7 @@
             <a:spLocks noGrp="1"/>
           </p:cNvSpPr>
           <p:nvPr>
-            <p:ph type="sldNum" sz="quarter" idx="5"/>
+            <p:ph type="sldNum" idx="5" sz="quarter"/>
           </p:nvPr>
         </p:nvSpPr>
         <p:spPr/>
@@ -1929,7 +2135,7 @@
 </file>
 
 <file path=ppt/notesSlides/notesSlide4.xml><?xml version="1.0" encoding="utf-8"?>
-<p:notes xmlns:a="http://schemas.openxmlformats.org/drawingml/2006/main" xmlns:r="http://schemas.openxmlformats.org/officeDocument/2006/relationships" xmlns:p="http://schemas.openxmlformats.org/presentationml/2006/main">
+<p:notes xmlns:a="http://schemas.openxmlformats.org/drawingml/2006/main" xmlns:p="http://schemas.openxmlformats.org/presentationml/2006/main" xmlns:r="http://schemas.openxmlformats.org/officeDocument/2006/relationships">
   <p:cSld>
     <p:spTree>
       <p:nvGrpSpPr>
@@ -1949,7 +2155,7 @@
         <p:nvSpPr>
           <p:cNvPr id="2" name="Slide Image Placeholder 1"/>
           <p:cNvSpPr>
-            <a:spLocks noGrp="1" noRot="1" noChangeAspect="1"/>
+            <a:spLocks noGrp="1"/>
           </p:cNvSpPr>
           <p:nvPr>
             <p:ph type="sldImg" idx="2"/>
@@ -1964,7 +2170,7 @@
             <a:spLocks noGrp="1"/>
           </p:cNvSpPr>
           <p:nvPr>
-            <p:ph type="body" sz="quarter" idx="3"/>
+            <p:ph type="body" idx="3" sz="quarter"/>
           </p:nvPr>
         </p:nvSpPr>
         <p:spPr/>
@@ -1990,7 +2196,7 @@
             <a:spLocks noGrp="1"/>
           </p:cNvSpPr>
           <p:nvPr>
-            <p:ph type="sldNum" sz="quarter" idx="5"/>
+            <p:ph type="sldNum" idx="5" sz="quarter"/>
           </p:nvPr>
         </p:nvSpPr>
         <p:spPr/>
@@ -2004,7 +2210,7 @@
 </file>
 
 <file path=ppt/notesSlides/notesSlide5.xml><?xml version="1.0" encoding="utf-8"?>
-<p:notes xmlns:a="http://schemas.openxmlformats.org/drawingml/2006/main" xmlns:r="http://schemas.openxmlformats.org/officeDocument/2006/relationships" xmlns:p="http://schemas.openxmlformats.org/presentationml/2006/main">
+<p:notes xmlns:a="http://schemas.openxmlformats.org/drawingml/2006/main" xmlns:p="http://schemas.openxmlformats.org/presentationml/2006/main" xmlns:r="http://schemas.openxmlformats.org/officeDocument/2006/relationships">
   <p:cSld>
     <p:spTree>
       <p:nvGrpSpPr>
@@ -2024,7 +2230,7 @@
         <p:nvSpPr>
           <p:cNvPr id="2" name="Slide Image Placeholder 1"/>
           <p:cNvSpPr>
-            <a:spLocks noGrp="1" noRot="1" noChangeAspect="1"/>
+            <a:spLocks noGrp="1"/>
           </p:cNvSpPr>
           <p:nvPr>
             <p:ph type="sldImg" idx="2"/>
@@ -2039,7 +2245,7 @@
             <a:spLocks noGrp="1"/>
           </p:cNvSpPr>
           <p:nvPr>
-            <p:ph type="body" sz="quarter" idx="3"/>
+            <p:ph type="body" idx="3" sz="quarter"/>
           </p:nvPr>
         </p:nvSpPr>
         <p:spPr/>
@@ -2065,7 +2271,7 @@
             <a:spLocks noGrp="1"/>
           </p:cNvSpPr>
           <p:nvPr>
-            <p:ph type="sldNum" sz="quarter" idx="5"/>
+            <p:ph type="sldNum" idx="5" sz="quarter"/>
           </p:nvPr>
         </p:nvSpPr>
         <p:spPr/>
@@ -2079,7 +2285,7 @@
 </file>
 
 <file path=ppt/notesSlides/notesSlide6.xml><?xml version="1.0" encoding="utf-8"?>
-<p:notes xmlns:a="http://schemas.openxmlformats.org/drawingml/2006/main" xmlns:r="http://schemas.openxmlformats.org/officeDocument/2006/relationships" xmlns:p="http://schemas.openxmlformats.org/presentationml/2006/main">
+<p:notes xmlns:a="http://schemas.openxmlformats.org/drawingml/2006/main" xmlns:p="http://schemas.openxmlformats.org/presentationml/2006/main" xmlns:r="http://schemas.openxmlformats.org/officeDocument/2006/relationships">
   <p:cSld>
     <p:spTree>
       <p:nvGrpSpPr>
@@ -2099,7 +2305,7 @@
         <p:nvSpPr>
           <p:cNvPr id="2" name="Slide Image Placeholder 1"/>
           <p:cNvSpPr>
-            <a:spLocks noGrp="1" noRot="1" noChangeAspect="1"/>
+            <a:spLocks noGrp="1"/>
           </p:cNvSpPr>
           <p:nvPr>
             <p:ph type="sldImg" idx="2"/>
@@ -2114,7 +2320,7 @@
             <a:spLocks noGrp="1"/>
           </p:cNvSpPr>
           <p:nvPr>
-            <p:ph type="body" sz="quarter" idx="3"/>
+            <p:ph type="body" idx="3" sz="quarter"/>
           </p:nvPr>
         </p:nvSpPr>
         <p:spPr/>
@@ -2140,7 +2346,7 @@
             <a:spLocks noGrp="1"/>
           </p:cNvSpPr>
           <p:nvPr>
-            <p:ph type="sldNum" sz="quarter" idx="5"/>
+            <p:ph type="sldNum" idx="5" sz="quarter"/>
           </p:nvPr>
         </p:nvSpPr>
         <p:spPr/>
@@ -2154,7 +2360,7 @@
 </file>
 
 <file path=ppt/notesSlides/notesSlide7.xml><?xml version="1.0" encoding="utf-8"?>
-<p:notes xmlns:a="http://schemas.openxmlformats.org/drawingml/2006/main" xmlns:r="http://schemas.openxmlformats.org/officeDocument/2006/relationships" xmlns:p="http://schemas.openxmlformats.org/presentationml/2006/main">
+<p:notes xmlns:a="http://schemas.openxmlformats.org/drawingml/2006/main" xmlns:p="http://schemas.openxmlformats.org/presentationml/2006/main" xmlns:r="http://schemas.openxmlformats.org/officeDocument/2006/relationships">
   <p:cSld>
     <p:spTree>
       <p:nvGrpSpPr>
@@ -2174,7 +2380,7 @@
         <p:nvSpPr>
           <p:cNvPr id="2" name="Slide Image Placeholder 1"/>
           <p:cNvSpPr>
-            <a:spLocks noGrp="1" noRot="1" noChangeAspect="1"/>
+            <a:spLocks noGrp="1"/>
           </p:cNvSpPr>
           <p:nvPr>
             <p:ph type="sldImg" idx="2"/>
@@ -2189,7 +2395,7 @@
             <a:spLocks noGrp="1"/>
           </p:cNvSpPr>
           <p:nvPr>
-            <p:ph type="body" sz="quarter" idx="3"/>
+            <p:ph type="body" idx="3" sz="quarter"/>
           </p:nvPr>
         </p:nvSpPr>
         <p:spPr/>
@@ -2215,7 +2421,7 @@
             <a:spLocks noGrp="1"/>
           </p:cNvSpPr>
           <p:nvPr>
-            <p:ph type="sldNum" sz="quarter" idx="5"/>
+            <p:ph type="sldNum" idx="5" sz="quarter"/>
           </p:nvPr>
         </p:nvSpPr>
         <p:spPr/>
@@ -2229,7 +2435,7 @@
 </file>
 
 <file path=ppt/notesSlides/notesSlide8.xml><?xml version="1.0" encoding="utf-8"?>
-<p:notes xmlns:a="http://schemas.openxmlformats.org/drawingml/2006/main" xmlns:r="http://schemas.openxmlformats.org/officeDocument/2006/relationships" xmlns:p="http://schemas.openxmlformats.org/presentationml/2006/main">
+<p:notes xmlns:a="http://schemas.openxmlformats.org/drawingml/2006/main" xmlns:p="http://schemas.openxmlformats.org/presentationml/2006/main" xmlns:r="http://schemas.openxmlformats.org/officeDocument/2006/relationships">
   <p:cSld>
     <p:spTree>
       <p:nvGrpSpPr>
@@ -2249,7 +2455,7 @@
         <p:nvSpPr>
           <p:cNvPr id="2" name="Slide Image Placeholder 1"/>
           <p:cNvSpPr>
-            <a:spLocks noGrp="1" noRot="1" noChangeAspect="1"/>
+            <a:spLocks noGrp="1"/>
           </p:cNvSpPr>
           <p:nvPr>
             <p:ph type="sldImg" idx="2"/>
@@ -2264,7 +2470,7 @@
             <a:spLocks noGrp="1"/>
           </p:cNvSpPr>
           <p:nvPr>
-            <p:ph type="body" sz="quarter" idx="3"/>
+            <p:ph type="body" idx="3" sz="quarter"/>
           </p:nvPr>
         </p:nvSpPr>
         <p:spPr/>
@@ -2290,7 +2496,7 @@
             <a:spLocks noGrp="1"/>
           </p:cNvSpPr>
           <p:nvPr>
-            <p:ph type="sldNum" sz="quarter" idx="5"/>
+            <p:ph type="sldNum" idx="5" sz="quarter"/>
           </p:nvPr>
         </p:nvSpPr>
         <p:spPr/>
@@ -2304,7 +2510,7 @@
 </file>
 
 <file path=ppt/notesSlides/notesSlide9.xml><?xml version="1.0" encoding="utf-8"?>
-<p:notes xmlns:a="http://schemas.openxmlformats.org/drawingml/2006/main" xmlns:r="http://schemas.openxmlformats.org/officeDocument/2006/relationships" xmlns:p="http://schemas.openxmlformats.org/presentationml/2006/main">
+<p:notes xmlns:a="http://schemas.openxmlformats.org/drawingml/2006/main" xmlns:p="http://schemas.openxmlformats.org/presentationml/2006/main" xmlns:r="http://schemas.openxmlformats.org/officeDocument/2006/relationships">
   <p:cSld>
     <p:spTree>
       <p:nvGrpSpPr>
@@ -2324,7 +2530,7 @@
         <p:nvSpPr>
           <p:cNvPr id="2" name="Slide Image Placeholder 1"/>
           <p:cNvSpPr>
-            <a:spLocks noGrp="1" noRot="1" noChangeAspect="1"/>
+            <a:spLocks noGrp="1"/>
           </p:cNvSpPr>
           <p:nvPr>
             <p:ph type="sldImg" idx="2"/>
@@ -2339,7 +2545,7 @@
             <a:spLocks noGrp="1"/>
           </p:cNvSpPr>
           <p:nvPr>
-            <p:ph type="body" sz="quarter" idx="3"/>
+            <p:ph type="body" idx="3" sz="quarter"/>
           </p:nvPr>
         </p:nvSpPr>
         <p:spPr/>
@@ -2365,7 +2571,7 @@
             <a:spLocks noGrp="1"/>
           </p:cNvSpPr>
           <p:nvPr>
-            <p:ph type="sldNum" sz="quarter" idx="5"/>
+            <p:ph type="sldNum" idx="5" sz="quarter"/>
           </p:nvPr>
         </p:nvSpPr>
         <p:spPr/>
@@ -2416,9 +2622,10 @@
           <a:lstStyle/>
           <a:p>
             <a:r>
-              <a:rPr lang="en-US"/>
+              <a:rPr lang="en-US" smtClean="0"/>
               <a:t>Click to edit Master title style</a:t>
             </a:r>
+            <a:endParaRPr lang="en-US"/>
           </a:p>
         </p:txBody>
       </p:sp>
@@ -2534,9 +2741,10 @@
           </a:lstStyle>
           <a:p>
             <a:r>
-              <a:rPr lang="en-US"/>
+              <a:rPr lang="en-US" smtClean="0"/>
               <a:t>Click to edit Master subtitle style</a:t>
             </a:r>
+            <a:endParaRPr lang="en-US"/>
           </a:p>
         </p:txBody>
       </p:sp>
@@ -2557,7 +2765,7 @@
           <a:p>
             <a:fld id="{5BCAD085-E8A6-8845-BD4E-CB4CCA059FC4}" type="datetimeFigureOut">
               <a:rPr lang="en-US" smtClean="0"/>
-              <a:t>9/19/2026</a:t>
+              <a:t>1/27/13</a:t>
             </a:fld>
             <a:endParaRPr lang="en-US"/>
           </a:p>
@@ -2651,9 +2859,10 @@
           <a:lstStyle/>
           <a:p>
             <a:r>
-              <a:rPr lang="en-US"/>
+              <a:rPr lang="en-US" smtClean="0"/>
               <a:t>Click to edit Master title style</a:t>
             </a:r>
+            <a:endParaRPr lang="en-US"/>
           </a:p>
         </p:txBody>
       </p:sp>
@@ -2674,37 +2883,38 @@
           <a:p>
             <a:pPr lvl="0"/>
             <a:r>
-              <a:rPr lang="en-US"/>
+              <a:rPr lang="en-US" smtClean="0"/>
               <a:t>Click to edit Master text styles</a:t>
             </a:r>
           </a:p>
           <a:p>
             <a:pPr lvl="1"/>
             <a:r>
-              <a:rPr lang="en-US"/>
+              <a:rPr lang="en-US" smtClean="0"/>
               <a:t>Second level</a:t>
             </a:r>
           </a:p>
           <a:p>
             <a:pPr lvl="2"/>
             <a:r>
-              <a:rPr lang="en-US"/>
+              <a:rPr lang="en-US" smtClean="0"/>
               <a:t>Third level</a:t>
             </a:r>
           </a:p>
           <a:p>
             <a:pPr lvl="3"/>
             <a:r>
-              <a:rPr lang="en-US"/>
+              <a:rPr lang="en-US" smtClean="0"/>
               <a:t>Fourth level</a:t>
             </a:r>
           </a:p>
           <a:p>
             <a:pPr lvl="4"/>
             <a:r>
-              <a:rPr lang="en-US"/>
+              <a:rPr lang="en-US" smtClean="0"/>
               <a:t>Fifth level</a:t>
             </a:r>
+            <a:endParaRPr lang="en-US"/>
           </a:p>
         </p:txBody>
       </p:sp>
@@ -2725,7 +2935,7 @@
           <a:p>
             <a:fld id="{5BCAD085-E8A6-8845-BD4E-CB4CCA059FC4}" type="datetimeFigureOut">
               <a:rPr lang="en-US" smtClean="0"/>
-              <a:t>9/19/2026</a:t>
+              <a:t>1/27/13</a:t>
             </a:fld>
             <a:endParaRPr lang="en-US"/>
           </a:p>
@@ -2824,9 +3034,10 @@
           <a:lstStyle/>
           <a:p>
             <a:r>
-              <a:rPr lang="en-US"/>
+              <a:rPr lang="en-US" smtClean="0"/>
               <a:t>Click to edit Master title style</a:t>
             </a:r>
+            <a:endParaRPr lang="en-US"/>
           </a:p>
         </p:txBody>
       </p:sp>
@@ -2852,37 +3063,38 @@
           <a:p>
             <a:pPr lvl="0"/>
             <a:r>
-              <a:rPr lang="en-US"/>
+              <a:rPr lang="en-US" smtClean="0"/>
               <a:t>Click to edit Master text styles</a:t>
             </a:r>
           </a:p>
           <a:p>
             <a:pPr lvl="1"/>
             <a:r>
-              <a:rPr lang="en-US"/>
+              <a:rPr lang="en-US" smtClean="0"/>
               <a:t>Second level</a:t>
             </a:r>
           </a:p>
           <a:p>
             <a:pPr lvl="2"/>
             <a:r>
-              <a:rPr lang="en-US"/>
+              <a:rPr lang="en-US" smtClean="0"/>
               <a:t>Third level</a:t>
             </a:r>
           </a:p>
           <a:p>
             <a:pPr lvl="3"/>
             <a:r>
-              <a:rPr lang="en-US"/>
+              <a:rPr lang="en-US" smtClean="0"/>
               <a:t>Fourth level</a:t>
             </a:r>
           </a:p>
           <a:p>
             <a:pPr lvl="4"/>
             <a:r>
-              <a:rPr lang="en-US"/>
+              <a:rPr lang="en-US" smtClean="0"/>
               <a:t>Fifth level</a:t>
             </a:r>
+            <a:endParaRPr lang="en-US"/>
           </a:p>
         </p:txBody>
       </p:sp>
@@ -2903,7 +3115,7 @@
           <a:p>
             <a:fld id="{5BCAD085-E8A6-8845-BD4E-CB4CCA059FC4}" type="datetimeFigureOut">
               <a:rPr lang="en-US" smtClean="0"/>
-              <a:t>9/19/2026</a:t>
+              <a:t>1/27/13</a:t>
             </a:fld>
             <a:endParaRPr lang="en-US"/>
           </a:p>
@@ -2997,9 +3209,10 @@
           <a:lstStyle/>
           <a:p>
             <a:r>
-              <a:rPr lang="en-US"/>
+              <a:rPr lang="en-US" smtClean="0"/>
               <a:t>Click to edit Master title style</a:t>
             </a:r>
+            <a:endParaRPr lang="en-US"/>
           </a:p>
         </p:txBody>
       </p:sp>
@@ -3020,37 +3233,38 @@
           <a:p>
             <a:pPr lvl="0"/>
             <a:r>
-              <a:rPr lang="en-US"/>
+              <a:rPr lang="en-US" smtClean="0"/>
               <a:t>Click to edit Master text styles</a:t>
             </a:r>
           </a:p>
           <a:p>
             <a:pPr lvl="1"/>
             <a:r>
-              <a:rPr lang="en-US"/>
+              <a:rPr lang="en-US" smtClean="0"/>
               <a:t>Second level</a:t>
             </a:r>
           </a:p>
           <a:p>
             <a:pPr lvl="2"/>
             <a:r>
-              <a:rPr lang="en-US"/>
+              <a:rPr lang="en-US" smtClean="0"/>
               <a:t>Third level</a:t>
             </a:r>
           </a:p>
           <a:p>
             <a:pPr lvl="3"/>
             <a:r>
-              <a:rPr lang="en-US"/>
+              <a:rPr lang="en-US" smtClean="0"/>
               <a:t>Fourth level</a:t>
             </a:r>
           </a:p>
           <a:p>
             <a:pPr lvl="4"/>
             <a:r>
-              <a:rPr lang="en-US"/>
+              <a:rPr lang="en-US" smtClean="0"/>
               <a:t>Fifth level</a:t>
             </a:r>
+            <a:endParaRPr lang="en-US"/>
           </a:p>
         </p:txBody>
       </p:sp>
@@ -3071,7 +3285,7 @@
           <a:p>
             <a:fld id="{5BCAD085-E8A6-8845-BD4E-CB4CCA059FC4}" type="datetimeFigureOut">
               <a:rPr lang="en-US" smtClean="0"/>
-              <a:t>9/19/2026</a:t>
+              <a:t>1/27/13</a:t>
             </a:fld>
             <a:endParaRPr lang="en-US"/>
           </a:p>
@@ -3174,9 +3388,10 @@
           </a:lstStyle>
           <a:p>
             <a:r>
-              <a:rPr lang="en-US"/>
+              <a:rPr lang="en-US" smtClean="0"/>
               <a:t>Click to edit Master title style</a:t>
             </a:r>
+            <a:endParaRPr lang="en-US"/>
           </a:p>
         </p:txBody>
       </p:sp>
@@ -3293,7 +3508,7 @@
           <a:p>
             <a:pPr lvl="0"/>
             <a:r>
-              <a:rPr lang="en-US"/>
+              <a:rPr lang="en-US" smtClean="0"/>
               <a:t>Click to edit Master text styles</a:t>
             </a:r>
           </a:p>
@@ -3316,7 +3531,7 @@
           <a:p>
             <a:fld id="{5BCAD085-E8A6-8845-BD4E-CB4CCA059FC4}" type="datetimeFigureOut">
               <a:rPr lang="en-US" smtClean="0"/>
-              <a:t>9/19/2026</a:t>
+              <a:t>1/27/13</a:t>
             </a:fld>
             <a:endParaRPr lang="en-US"/>
           </a:p>
@@ -3410,9 +3625,10 @@
           <a:lstStyle/>
           <a:p>
             <a:r>
-              <a:rPr lang="en-US"/>
+              <a:rPr lang="en-US" smtClean="0"/>
               <a:t>Click to edit Master title style</a:t>
             </a:r>
+            <a:endParaRPr lang="en-US"/>
           </a:p>
         </p:txBody>
       </p:sp>
@@ -3466,37 +3682,38 @@
           <a:p>
             <a:pPr lvl="0"/>
             <a:r>
-              <a:rPr lang="en-US"/>
+              <a:rPr lang="en-US" smtClean="0"/>
               <a:t>Click to edit Master text styles</a:t>
             </a:r>
           </a:p>
           <a:p>
             <a:pPr lvl="1"/>
             <a:r>
-              <a:rPr lang="en-US"/>
+              <a:rPr lang="en-US" smtClean="0"/>
               <a:t>Second level</a:t>
             </a:r>
           </a:p>
           <a:p>
             <a:pPr lvl="2"/>
             <a:r>
-              <a:rPr lang="en-US"/>
+              <a:rPr lang="en-US" smtClean="0"/>
               <a:t>Third level</a:t>
             </a:r>
           </a:p>
           <a:p>
             <a:pPr lvl="3"/>
             <a:r>
-              <a:rPr lang="en-US"/>
+              <a:rPr lang="en-US" smtClean="0"/>
               <a:t>Fourth level</a:t>
             </a:r>
           </a:p>
           <a:p>
             <a:pPr lvl="4"/>
             <a:r>
-              <a:rPr lang="en-US"/>
+              <a:rPr lang="en-US" smtClean="0"/>
               <a:t>Fifth level</a:t>
             </a:r>
+            <a:endParaRPr lang="en-US"/>
           </a:p>
         </p:txBody>
       </p:sp>
@@ -3550,37 +3767,38 @@
           <a:p>
             <a:pPr lvl="0"/>
             <a:r>
-              <a:rPr lang="en-US"/>
+              <a:rPr lang="en-US" smtClean="0"/>
               <a:t>Click to edit Master text styles</a:t>
             </a:r>
           </a:p>
           <a:p>
             <a:pPr lvl="1"/>
             <a:r>
-              <a:rPr lang="en-US"/>
+              <a:rPr lang="en-US" smtClean="0"/>
               <a:t>Second level</a:t>
             </a:r>
           </a:p>
           <a:p>
             <a:pPr lvl="2"/>
             <a:r>
-              <a:rPr lang="en-US"/>
+              <a:rPr lang="en-US" smtClean="0"/>
               <a:t>Third level</a:t>
             </a:r>
           </a:p>
           <a:p>
             <a:pPr lvl="3"/>
             <a:r>
-              <a:rPr lang="en-US"/>
+              <a:rPr lang="en-US" smtClean="0"/>
               <a:t>Fourth level</a:t>
             </a:r>
           </a:p>
           <a:p>
             <a:pPr lvl="4"/>
             <a:r>
-              <a:rPr lang="en-US"/>
+              <a:rPr lang="en-US" smtClean="0"/>
               <a:t>Fifth level</a:t>
             </a:r>
+            <a:endParaRPr lang="en-US"/>
           </a:p>
         </p:txBody>
       </p:sp>
@@ -3601,7 +3819,7 @@
           <a:p>
             <a:fld id="{5BCAD085-E8A6-8845-BD4E-CB4CCA059FC4}" type="datetimeFigureOut">
               <a:rPr lang="en-US" smtClean="0"/>
-              <a:t>9/19/2026</a:t>
+              <a:t>1/27/13</a:t>
             </a:fld>
             <a:endParaRPr lang="en-US"/>
           </a:p>
@@ -3699,9 +3917,10 @@
           </a:lstStyle>
           <a:p>
             <a:r>
-              <a:rPr lang="en-US"/>
+              <a:rPr lang="en-US" smtClean="0"/>
               <a:t>Click to edit Master title style</a:t>
             </a:r>
+            <a:endParaRPr lang="en-US"/>
           </a:p>
         </p:txBody>
       </p:sp>
@@ -3764,7 +3983,7 @@
           <a:p>
             <a:pPr lvl="0"/>
             <a:r>
-              <a:rPr lang="en-US"/>
+              <a:rPr lang="en-US" smtClean="0"/>
               <a:t>Click to edit Master text styles</a:t>
             </a:r>
           </a:p>
@@ -3820,37 +4039,38 @@
           <a:p>
             <a:pPr lvl="0"/>
             <a:r>
-              <a:rPr lang="en-US"/>
+              <a:rPr lang="en-US" smtClean="0"/>
               <a:t>Click to edit Master text styles</a:t>
             </a:r>
           </a:p>
           <a:p>
             <a:pPr lvl="1"/>
             <a:r>
-              <a:rPr lang="en-US"/>
+              <a:rPr lang="en-US" smtClean="0"/>
               <a:t>Second level</a:t>
             </a:r>
           </a:p>
           <a:p>
             <a:pPr lvl="2"/>
             <a:r>
-              <a:rPr lang="en-US"/>
+              <a:rPr lang="en-US" smtClean="0"/>
               <a:t>Third level</a:t>
             </a:r>
           </a:p>
           <a:p>
             <a:pPr lvl="3"/>
             <a:r>
-              <a:rPr lang="en-US"/>
+              <a:rPr lang="en-US" smtClean="0"/>
               <a:t>Fourth level</a:t>
             </a:r>
           </a:p>
           <a:p>
             <a:pPr lvl="4"/>
             <a:r>
-              <a:rPr lang="en-US"/>
+              <a:rPr lang="en-US" smtClean="0"/>
               <a:t>Fifth level</a:t>
             </a:r>
+            <a:endParaRPr lang="en-US"/>
           </a:p>
         </p:txBody>
       </p:sp>
@@ -3913,7 +4133,7 @@
           <a:p>
             <a:pPr lvl="0"/>
             <a:r>
-              <a:rPr lang="en-US"/>
+              <a:rPr lang="en-US" smtClean="0"/>
               <a:t>Click to edit Master text styles</a:t>
             </a:r>
           </a:p>
@@ -3969,37 +4189,38 @@
           <a:p>
             <a:pPr lvl="0"/>
             <a:r>
-              <a:rPr lang="en-US"/>
+              <a:rPr lang="en-US" smtClean="0"/>
               <a:t>Click to edit Master text styles</a:t>
             </a:r>
           </a:p>
           <a:p>
             <a:pPr lvl="1"/>
             <a:r>
-              <a:rPr lang="en-US"/>
+              <a:rPr lang="en-US" smtClean="0"/>
               <a:t>Second level</a:t>
             </a:r>
           </a:p>
           <a:p>
             <a:pPr lvl="2"/>
             <a:r>
-              <a:rPr lang="en-US"/>
+              <a:rPr lang="en-US" smtClean="0"/>
               <a:t>Third level</a:t>
             </a:r>
           </a:p>
           <a:p>
             <a:pPr lvl="3"/>
             <a:r>
-              <a:rPr lang="en-US"/>
+              <a:rPr lang="en-US" smtClean="0"/>
               <a:t>Fourth level</a:t>
             </a:r>
           </a:p>
           <a:p>
             <a:pPr lvl="4"/>
             <a:r>
-              <a:rPr lang="en-US"/>
+              <a:rPr lang="en-US" smtClean="0"/>
               <a:t>Fifth level</a:t>
             </a:r>
+            <a:endParaRPr lang="en-US"/>
           </a:p>
         </p:txBody>
       </p:sp>
@@ -4020,7 +4241,7 @@
           <a:p>
             <a:fld id="{5BCAD085-E8A6-8845-BD4E-CB4CCA059FC4}" type="datetimeFigureOut">
               <a:rPr lang="en-US" smtClean="0"/>
-              <a:t>9/19/2026</a:t>
+              <a:t>1/27/13</a:t>
             </a:fld>
             <a:endParaRPr lang="en-US"/>
           </a:p>
@@ -4114,9 +4335,10 @@
           <a:lstStyle/>
           <a:p>
             <a:r>
-              <a:rPr lang="en-US"/>
+              <a:rPr lang="en-US" smtClean="0"/>
               <a:t>Click to edit Master title style</a:t>
             </a:r>
+            <a:endParaRPr lang="en-US"/>
           </a:p>
         </p:txBody>
       </p:sp>
@@ -4137,7 +4359,7 @@
           <a:p>
             <a:fld id="{5BCAD085-E8A6-8845-BD4E-CB4CCA059FC4}" type="datetimeFigureOut">
               <a:rPr lang="en-US" smtClean="0"/>
-              <a:t>9/19/2026</a:t>
+              <a:t>1/27/13</a:t>
             </a:fld>
             <a:endParaRPr lang="en-US"/>
           </a:p>
@@ -4232,7 +4454,7 @@
           <a:p>
             <a:fld id="{5BCAD085-E8A6-8845-BD4E-CB4CCA059FC4}" type="datetimeFigureOut">
               <a:rPr lang="en-US" smtClean="0"/>
-              <a:t>9/19/2026</a:t>
+              <a:t>1/27/13</a:t>
             </a:fld>
             <a:endParaRPr lang="en-US"/>
           </a:p>
@@ -4335,9 +4557,10 @@
           </a:lstStyle>
           <a:p>
             <a:r>
-              <a:rPr lang="en-US"/>
+              <a:rPr lang="en-US" smtClean="0"/>
               <a:t>Click to edit Master title style</a:t>
             </a:r>
+            <a:endParaRPr lang="en-US"/>
           </a:p>
         </p:txBody>
       </p:sp>
@@ -4391,37 +4614,38 @@
           <a:p>
             <a:pPr lvl="0"/>
             <a:r>
-              <a:rPr lang="en-US"/>
+              <a:rPr lang="en-US" smtClean="0"/>
               <a:t>Click to edit Master text styles</a:t>
             </a:r>
           </a:p>
           <a:p>
             <a:pPr lvl="1"/>
             <a:r>
-              <a:rPr lang="en-US"/>
+              <a:rPr lang="en-US" smtClean="0"/>
               <a:t>Second level</a:t>
             </a:r>
           </a:p>
           <a:p>
             <a:pPr lvl="2"/>
             <a:r>
-              <a:rPr lang="en-US"/>
+              <a:rPr lang="en-US" smtClean="0"/>
               <a:t>Third level</a:t>
             </a:r>
           </a:p>
           <a:p>
             <a:pPr lvl="3"/>
             <a:r>
-              <a:rPr lang="en-US"/>
+              <a:rPr lang="en-US" smtClean="0"/>
               <a:t>Fourth level</a:t>
             </a:r>
           </a:p>
           <a:p>
             <a:pPr lvl="4"/>
             <a:r>
-              <a:rPr lang="en-US"/>
+              <a:rPr lang="en-US" smtClean="0"/>
               <a:t>Fifth level</a:t>
             </a:r>
+            <a:endParaRPr lang="en-US"/>
           </a:p>
         </p:txBody>
       </p:sp>
@@ -4484,7 +4708,7 @@
           <a:p>
             <a:pPr lvl="0"/>
             <a:r>
-              <a:rPr lang="en-US"/>
+              <a:rPr lang="en-US" smtClean="0"/>
               <a:t>Click to edit Master text styles</a:t>
             </a:r>
           </a:p>
@@ -4507,7 +4731,7 @@
           <a:p>
             <a:fld id="{5BCAD085-E8A6-8845-BD4E-CB4CCA059FC4}" type="datetimeFigureOut">
               <a:rPr lang="en-US" smtClean="0"/>
-              <a:t>9/19/2026</a:t>
+              <a:t>1/27/13</a:t>
             </a:fld>
             <a:endParaRPr lang="en-US"/>
           </a:p>
@@ -4610,9 +4834,10 @@
           </a:lstStyle>
           <a:p>
             <a:r>
-              <a:rPr lang="en-US"/>
+              <a:rPr lang="en-US" smtClean="0"/>
               <a:t>Click to edit Master title style</a:t>
             </a:r>
+            <a:endParaRPr lang="en-US"/>
           </a:p>
         </p:txBody>
       </p:sp>
@@ -4736,7 +4961,7 @@
           <a:p>
             <a:pPr lvl="0"/>
             <a:r>
-              <a:rPr lang="en-US"/>
+              <a:rPr lang="en-US" smtClean="0"/>
               <a:t>Click to edit Master text styles</a:t>
             </a:r>
           </a:p>
@@ -4759,7 +4984,7 @@
           <a:p>
             <a:fld id="{5BCAD085-E8A6-8845-BD4E-CB4CCA059FC4}" type="datetimeFigureOut">
               <a:rPr lang="en-US" smtClean="0"/>
-              <a:t>9/19/2026</a:t>
+              <a:t>1/27/13</a:t>
             </a:fld>
             <a:endParaRPr lang="en-US"/>
           </a:p>
@@ -4868,9 +5093,10 @@
           <a:lstStyle/>
           <a:p>
             <a:r>
-              <a:rPr lang="en-US"/>
+              <a:rPr lang="en-US" smtClean="0"/>
               <a:t>Click to edit Master title style</a:t>
             </a:r>
+            <a:endParaRPr lang="en-US"/>
           </a:p>
         </p:txBody>
       </p:sp>
@@ -4901,37 +5127,38 @@
           <a:p>
             <a:pPr lvl="0"/>
             <a:r>
-              <a:rPr lang="en-US"/>
+              <a:rPr lang="en-US" smtClean="0"/>
               <a:t>Click to edit Master text styles</a:t>
             </a:r>
           </a:p>
           <a:p>
             <a:pPr lvl="1"/>
             <a:r>
-              <a:rPr lang="en-US"/>
+              <a:rPr lang="en-US" smtClean="0"/>
               <a:t>Second level</a:t>
             </a:r>
           </a:p>
           <a:p>
             <a:pPr lvl="2"/>
             <a:r>
-              <a:rPr lang="en-US"/>
+              <a:rPr lang="en-US" smtClean="0"/>
               <a:t>Third level</a:t>
             </a:r>
           </a:p>
           <a:p>
             <a:pPr lvl="3"/>
             <a:r>
-              <a:rPr lang="en-US"/>
+              <a:rPr lang="en-US" smtClean="0"/>
               <a:t>Fourth level</a:t>
             </a:r>
           </a:p>
           <a:p>
             <a:pPr lvl="4"/>
             <a:r>
-              <a:rPr lang="en-US"/>
+              <a:rPr lang="en-US" smtClean="0"/>
               <a:t>Fifth level</a:t>
             </a:r>
+            <a:endParaRPr lang="en-US"/>
           </a:p>
         </p:txBody>
       </p:sp>
@@ -4970,7 +5197,7 @@
           <a:p>
             <a:fld id="{5BCAD085-E8A6-8845-BD4E-CB4CCA059FC4}" type="datetimeFigureOut">
               <a:rPr lang="en-US" smtClean="0"/>
-              <a:t>9/19/2026</a:t>
+              <a:t>1/27/13</a:t>
             </a:fld>
             <a:endParaRPr lang="en-US"/>
           </a:p>
@@ -5329,7 +5556,7 @@
 </file>
 
 <file path=ppt/slides/slide1.xml><?xml version="1.0" encoding="utf-8"?>
-<p:sld xmlns:a="http://schemas.openxmlformats.org/drawingml/2006/main" xmlns:r="http://schemas.openxmlformats.org/officeDocument/2006/relationships" xmlns:p="http://schemas.openxmlformats.org/presentationml/2006/main">
+<p:sld xmlns:a="http://schemas.openxmlformats.org/drawingml/2006/main" xmlns:p="http://schemas.openxmlformats.org/presentationml/2006/main" xmlns:r="http://schemas.openxmlformats.org/officeDocument/2006/relationships">
   <p:cSld>
     <p:spTree>
       <p:nvGrpSpPr>
@@ -5337,14 +5564,7 @@
         <p:cNvGrpSpPr/>
         <p:nvPr/>
       </p:nvGrpSpPr>
-      <p:grpSpPr>
-        <a:xfrm>
-          <a:off x="0" y="0"/>
-          <a:ext cx="0" cy="0"/>
-          <a:chOff x="0" y="0"/>
-          <a:chExt cx="0" cy="0"/>
-        </a:xfrm>
-      </p:grpSpPr>
+      <p:grpSpPr/>
       <p:sp>
         <p:nvSpPr>
           <p:cNvPr id="2" name="Rectangle 1"/>
@@ -5386,7 +5606,6 @@
           <a:lstStyle/>
           <a:p>
             <a:pPr algn="ctr"/>
-            <a:endParaRPr/>
           </a:p>
         </p:txBody>
       </p:sp>
@@ -5431,7 +5650,6 @@
           <a:lstStyle/>
           <a:p>
             <a:pPr algn="ctr"/>
-            <a:endParaRPr/>
           </a:p>
         </p:txBody>
       </p:sp>
@@ -5476,7 +5694,6 @@
           <a:lstStyle/>
           <a:p>
             <a:pPr algn="ctr"/>
-            <a:endParaRPr/>
           </a:p>
         </p:txBody>
       </p:sp>
@@ -5521,7 +5738,6 @@
           <a:lstStyle/>
           <a:p>
             <a:pPr algn="ctr"/>
-            <a:endParaRPr/>
           </a:p>
         </p:txBody>
       </p:sp>
@@ -5566,7 +5782,6 @@
           <a:lstStyle/>
           <a:p>
             <a:pPr algn="ctr"/>
-            <a:endParaRPr/>
           </a:p>
         </p:txBody>
       </p:sp>
@@ -5611,7 +5826,6 @@
           <a:lstStyle/>
           <a:p>
             <a:pPr algn="ctr"/>
-            <a:endParaRPr/>
           </a:p>
         </p:txBody>
       </p:sp>
@@ -5656,7 +5870,6 @@
           <a:lstStyle/>
           <a:p>
             <a:pPr algn="ctr"/>
-            <a:endParaRPr/>
           </a:p>
         </p:txBody>
       </p:sp>
@@ -5701,7 +5914,6 @@
           <a:lstStyle/>
           <a:p>
             <a:pPr algn="ctr"/>
-            <a:endParaRPr/>
           </a:p>
         </p:txBody>
       </p:sp>
@@ -5746,7 +5958,6 @@
           <a:lstStyle/>
           <a:p>
             <a:pPr algn="ctr"/>
-            <a:endParaRPr/>
           </a:p>
         </p:txBody>
       </p:sp>
@@ -5791,7 +6002,6 @@
           <a:lstStyle/>
           <a:p>
             <a:pPr algn="ctr"/>
-            <a:endParaRPr/>
           </a:p>
         </p:txBody>
       </p:sp>
@@ -5982,42 +6192,6 @@
           </a:p>
         </p:txBody>
       </p:sp>
-      <p:pic>
-        <p:nvPicPr>
-          <p:cNvPr id="18" name="图片 17">
-            <a:extLst>
-              <a:ext uri="{FF2B5EF4-FFF2-40B4-BE49-F238E27FC236}">
-                <a16:creationId xmlns:a16="http://schemas.microsoft.com/office/drawing/2014/main" id="{42CA52FC-FEDD-192D-001D-929C2B967AE4}"/>
-              </a:ext>
-            </a:extLst>
-          </p:cNvPr>
-          <p:cNvPicPr>
-            <a:picLocks noChangeAspect="1"/>
-          </p:cNvPicPr>
-          <p:nvPr/>
-        </p:nvPicPr>
-        <p:blipFill>
-          <a:blip r:embed="rId3" cstate="print">
-            <a:extLst>
-              <a:ext uri="{28A0092B-C50C-407E-A947-70E740481C1C}">
-                <a14:useLocalDpi xmlns:a14="http://schemas.microsoft.com/office/drawing/2010/main" val="0"/>
-              </a:ext>
-            </a:extLst>
-          </a:blip>
-          <a:stretch>
-            <a:fillRect/>
-          </a:stretch>
-        </p:blipFill>
-        <p:spPr>
-          <a:xfrm>
-            <a:off x="10024317" y="781553"/>
-            <a:ext cx="1458542" cy="1162447"/>
-          </a:xfrm>
-          <a:prstGeom prst="rect">
-            <a:avLst/>
-          </a:prstGeom>
-        </p:spPr>
-      </p:pic>
     </p:spTree>
   </p:cSld>
   <p:clrMapOvr>
@@ -6027,7 +6201,7 @@
 </file>
 
 <file path=ppt/slides/slide10.xml><?xml version="1.0" encoding="utf-8"?>
-<p:sld xmlns:a="http://schemas.openxmlformats.org/drawingml/2006/main" xmlns:r="http://schemas.openxmlformats.org/officeDocument/2006/relationships" xmlns:p="http://schemas.openxmlformats.org/presentationml/2006/main">
+<p:sld xmlns:a="http://schemas.openxmlformats.org/drawingml/2006/main" xmlns:p="http://schemas.openxmlformats.org/presentationml/2006/main" xmlns:r="http://schemas.openxmlformats.org/officeDocument/2006/relationships">
   <p:cSld>
     <p:spTree>
       <p:nvGrpSpPr>
@@ -6035,14 +6209,7 @@
         <p:cNvGrpSpPr/>
         <p:nvPr/>
       </p:nvGrpSpPr>
-      <p:grpSpPr>
-        <a:xfrm>
-          <a:off x="0" y="0"/>
-          <a:ext cx="0" cy="0"/>
-          <a:chOff x="0" y="0"/>
-          <a:chExt cx="0" cy="0"/>
-        </a:xfrm>
-      </p:grpSpPr>
+      <p:grpSpPr/>
       <p:sp>
         <p:nvSpPr>
           <p:cNvPr id="2" name="TextBox 1"/>
@@ -6119,7 +6286,6 @@
           <a:lstStyle/>
           <a:p>
             <a:pPr algn="ctr"/>
-            <a:endParaRPr/>
           </a:p>
         </p:txBody>
       </p:sp>
@@ -6199,7 +6365,6 @@
           <a:lstStyle/>
           <a:p>
             <a:pPr algn="ctr"/>
-            <a:endParaRPr/>
           </a:p>
         </p:txBody>
       </p:sp>
@@ -6349,7 +6514,6 @@
           <a:lstStyle/>
           <a:p>
             <a:pPr algn="ctr"/>
-            <a:endParaRPr/>
           </a:p>
         </p:txBody>
       </p:sp>
@@ -6499,7 +6663,6 @@
           <a:lstStyle/>
           <a:p>
             <a:pPr algn="ctr"/>
-            <a:endParaRPr/>
           </a:p>
         </p:txBody>
       </p:sp>
@@ -6649,7 +6812,6 @@
           <a:lstStyle/>
           <a:p>
             <a:pPr algn="ctr"/>
-            <a:endParaRPr/>
           </a:p>
         </p:txBody>
       </p:sp>
@@ -6799,7 +6961,6 @@
           <a:lstStyle/>
           <a:p>
             <a:pPr algn="ctr"/>
-            <a:endParaRPr/>
           </a:p>
         </p:txBody>
       </p:sp>
@@ -6949,7 +7110,6 @@
           <a:lstStyle/>
           <a:p>
             <a:pPr algn="ctr"/>
-            <a:endParaRPr/>
           </a:p>
         </p:txBody>
       </p:sp>
@@ -7099,7 +7259,6 @@
           <a:lstStyle/>
           <a:p>
             <a:pPr algn="ctr"/>
-            <a:endParaRPr/>
           </a:p>
         </p:txBody>
       </p:sp>
@@ -7144,7 +7303,6 @@
           <a:lstStyle/>
           <a:p>
             <a:pPr algn="ctr"/>
-            <a:endParaRPr/>
           </a:p>
         </p:txBody>
       </p:sp>
@@ -7227,7 +7385,7 @@
 </file>
 
 <file path=ppt/slides/slide11.xml><?xml version="1.0" encoding="utf-8"?>
-<p:sld xmlns:a="http://schemas.openxmlformats.org/drawingml/2006/main" xmlns:r="http://schemas.openxmlformats.org/officeDocument/2006/relationships" xmlns:p="http://schemas.openxmlformats.org/presentationml/2006/main">
+<p:sld xmlns:a="http://schemas.openxmlformats.org/drawingml/2006/main" xmlns:p="http://schemas.openxmlformats.org/presentationml/2006/main" xmlns:r="http://schemas.openxmlformats.org/officeDocument/2006/relationships">
   <p:cSld>
     <p:spTree>
       <p:nvGrpSpPr>
@@ -7235,14 +7393,7 @@
         <p:cNvGrpSpPr/>
         <p:nvPr/>
       </p:nvGrpSpPr>
-      <p:grpSpPr>
-        <a:xfrm>
-          <a:off x="0" y="0"/>
-          <a:ext cx="0" cy="0"/>
-          <a:chOff x="0" y="0"/>
-          <a:chExt cx="0" cy="0"/>
-        </a:xfrm>
-      </p:grpSpPr>
+      <p:grpSpPr/>
       <p:sp>
         <p:nvSpPr>
           <p:cNvPr id="2" name="TextBox 1"/>
@@ -7319,7 +7470,6 @@
           <a:lstStyle/>
           <a:p>
             <a:pPr algn="ctr"/>
-            <a:endParaRPr/>
           </a:p>
         </p:txBody>
       </p:sp>
@@ -7399,7 +7549,6 @@
           <a:lstStyle/>
           <a:p>
             <a:pPr algn="ctr"/>
-            <a:endParaRPr/>
           </a:p>
         </p:txBody>
       </p:sp>
@@ -7444,7 +7593,6 @@
           <a:lstStyle/>
           <a:p>
             <a:pPr algn="ctr"/>
-            <a:endParaRPr/>
           </a:p>
         </p:txBody>
       </p:sp>
@@ -7944,7 +8092,6 @@
           <a:lstStyle/>
           <a:p>
             <a:pPr algn="ctr"/>
-            <a:endParaRPr/>
           </a:p>
         </p:txBody>
       </p:sp>
@@ -7989,7 +8136,6 @@
           <a:lstStyle/>
           <a:p>
             <a:pPr algn="ctr"/>
-            <a:endParaRPr/>
           </a:p>
         </p:txBody>
       </p:sp>
@@ -8489,7 +8635,6 @@
           <a:lstStyle/>
           <a:p>
             <a:pPr algn="ctr"/>
-            <a:endParaRPr/>
           </a:p>
         </p:txBody>
       </p:sp>
@@ -8534,7 +8679,6 @@
           <a:lstStyle/>
           <a:p>
             <a:pPr algn="ctr"/>
-            <a:endParaRPr/>
           </a:p>
         </p:txBody>
       </p:sp>
@@ -8617,7 +8761,7 @@
 </file>
 
 <file path=ppt/slides/slide12.xml><?xml version="1.0" encoding="utf-8"?>
-<p:sld xmlns:a="http://schemas.openxmlformats.org/drawingml/2006/main" xmlns:r="http://schemas.openxmlformats.org/officeDocument/2006/relationships" xmlns:p="http://schemas.openxmlformats.org/presentationml/2006/main">
+<p:sld xmlns:a="http://schemas.openxmlformats.org/drawingml/2006/main" xmlns:p="http://schemas.openxmlformats.org/presentationml/2006/main" xmlns:r="http://schemas.openxmlformats.org/officeDocument/2006/relationships">
   <p:cSld>
     <p:spTree>
       <p:nvGrpSpPr>
@@ -8625,14 +8769,7 @@
         <p:cNvGrpSpPr/>
         <p:nvPr/>
       </p:nvGrpSpPr>
-      <p:grpSpPr>
-        <a:xfrm>
-          <a:off x="0" y="0"/>
-          <a:ext cx="0" cy="0"/>
-          <a:chOff x="0" y="0"/>
-          <a:chExt cx="0" cy="0"/>
-        </a:xfrm>
-      </p:grpSpPr>
+      <p:grpSpPr/>
       <p:sp>
         <p:nvSpPr>
           <p:cNvPr id="2" name="Rectangle 1"/>
@@ -8674,7 +8811,6 @@
           <a:lstStyle/>
           <a:p>
             <a:pPr algn="ctr"/>
-            <a:endParaRPr/>
           </a:p>
         </p:txBody>
       </p:sp>
@@ -8719,7 +8855,6 @@
           <a:lstStyle/>
           <a:p>
             <a:pPr algn="ctr"/>
-            <a:endParaRPr/>
           </a:p>
         </p:txBody>
       </p:sp>
@@ -8799,7 +8934,6 @@
           <a:lstStyle/>
           <a:p>
             <a:pPr algn="ctr"/>
-            <a:endParaRPr/>
           </a:p>
         </p:txBody>
       </p:sp>
@@ -8882,7 +9016,7 @@
 </file>
 
 <file path=ppt/slides/slide13.xml><?xml version="1.0" encoding="utf-8"?>
-<p:sld xmlns:a="http://schemas.openxmlformats.org/drawingml/2006/main" xmlns:r="http://schemas.openxmlformats.org/officeDocument/2006/relationships" xmlns:p="http://schemas.openxmlformats.org/presentationml/2006/main">
+<p:sld xmlns:a="http://schemas.openxmlformats.org/drawingml/2006/main" xmlns:p="http://schemas.openxmlformats.org/presentationml/2006/main" xmlns:r="http://schemas.openxmlformats.org/officeDocument/2006/relationships">
   <p:cSld>
     <p:spTree>
       <p:nvGrpSpPr>
@@ -8890,14 +9024,7 @@
         <p:cNvGrpSpPr/>
         <p:nvPr/>
       </p:nvGrpSpPr>
-      <p:grpSpPr>
-        <a:xfrm>
-          <a:off x="0" y="0"/>
-          <a:ext cx="0" cy="0"/>
-          <a:chOff x="0" y="0"/>
-          <a:chExt cx="0" cy="0"/>
-        </a:xfrm>
-      </p:grpSpPr>
+      <p:grpSpPr/>
       <p:sp>
         <p:nvSpPr>
           <p:cNvPr id="2" name="TextBox 1"/>
@@ -8974,7 +9101,6 @@
           <a:lstStyle/>
           <a:p>
             <a:pPr algn="ctr"/>
-            <a:endParaRPr/>
           </a:p>
         </p:txBody>
       </p:sp>
@@ -9054,7 +9180,6 @@
           <a:lstStyle/>
           <a:p>
             <a:pPr algn="ctr"/>
-            <a:endParaRPr/>
           </a:p>
         </p:txBody>
       </p:sp>
@@ -9204,7 +9329,6 @@
           <a:lstStyle/>
           <a:p>
             <a:pPr algn="ctr"/>
-            <a:endParaRPr/>
           </a:p>
         </p:txBody>
       </p:sp>
@@ -9354,7 +9478,6 @@
           <a:lstStyle/>
           <a:p>
             <a:pPr algn="ctr"/>
-            <a:endParaRPr/>
           </a:p>
         </p:txBody>
       </p:sp>
@@ -9504,7 +9627,6 @@
           <a:lstStyle/>
           <a:p>
             <a:pPr algn="ctr"/>
-            <a:endParaRPr/>
           </a:p>
         </p:txBody>
       </p:sp>
@@ -9654,7 +9776,6 @@
           <a:lstStyle/>
           <a:p>
             <a:pPr algn="ctr"/>
-            <a:endParaRPr/>
           </a:p>
         </p:txBody>
       </p:sp>
@@ -9667,7 +9788,7 @@
           <p:nvPr/>
         </p:nvPicPr>
         <p:blipFill>
-          <a:blip r:embed="rId3"/>
+          <a:blip r:embed="rId2"/>
           <a:stretch>
             <a:fillRect/>
           </a:stretch>
@@ -9723,7 +9844,6 @@
           <a:lstStyle/>
           <a:p>
             <a:pPr algn="ctr"/>
-            <a:endParaRPr/>
           </a:p>
         </p:txBody>
       </p:sp>
@@ -9768,7 +9888,6 @@
           <a:lstStyle/>
           <a:p>
             <a:pPr algn="ctr"/>
-            <a:endParaRPr/>
           </a:p>
         </p:txBody>
       </p:sp>
@@ -9851,7 +9970,7 @@
 </file>
 
 <file path=ppt/slides/slide14.xml><?xml version="1.0" encoding="utf-8"?>
-<p:sld xmlns:a="http://schemas.openxmlformats.org/drawingml/2006/main" xmlns:r="http://schemas.openxmlformats.org/officeDocument/2006/relationships" xmlns:p="http://schemas.openxmlformats.org/presentationml/2006/main">
+<p:sld xmlns:a="http://schemas.openxmlformats.org/drawingml/2006/main" xmlns:p="http://schemas.openxmlformats.org/presentationml/2006/main" xmlns:r="http://schemas.openxmlformats.org/officeDocument/2006/relationships">
   <p:cSld>
     <p:spTree>
       <p:nvGrpSpPr>
@@ -9859,14 +9978,7 @@
         <p:cNvGrpSpPr/>
         <p:nvPr/>
       </p:nvGrpSpPr>
-      <p:grpSpPr>
-        <a:xfrm>
-          <a:off x="0" y="0"/>
-          <a:ext cx="0" cy="0"/>
-          <a:chOff x="0" y="0"/>
-          <a:chExt cx="0" cy="0"/>
-        </a:xfrm>
-      </p:grpSpPr>
+      <p:grpSpPr/>
       <p:sp>
         <p:nvSpPr>
           <p:cNvPr id="2" name="TextBox 1"/>
@@ -9943,7 +10055,6 @@
           <a:lstStyle/>
           <a:p>
             <a:pPr algn="ctr"/>
-            <a:endParaRPr/>
           </a:p>
         </p:txBody>
       </p:sp>
@@ -10023,7 +10134,6 @@
           <a:lstStyle/>
           <a:p>
             <a:pPr algn="ctr"/>
-            <a:endParaRPr/>
           </a:p>
         </p:txBody>
       </p:sp>
@@ -10085,7 +10195,15 @@
           <a:lstStyle/>
           <a:p>
             <a:pPr algn="l"/>
-            <a:endParaRPr/>
+            <a:r>
+              <a:rPr sz="2000" b="1">
+                <a:solidFill>
+                  <a:srgbClr val="1F3A68"/>
+                </a:solidFill>
+                <a:latin typeface="Microsoft YaHei"/>
+              </a:rPr>
+              <a:t/>
+            </a:r>
           </a:p>
         </p:txBody>
       </p:sp>
@@ -10165,7 +10283,6 @@
           <a:lstStyle/>
           <a:p>
             <a:pPr algn="ctr"/>
-            <a:endParaRPr/>
           </a:p>
         </p:txBody>
       </p:sp>
@@ -10227,7 +10344,15 @@
           <a:lstStyle/>
           <a:p>
             <a:pPr algn="l"/>
-            <a:endParaRPr/>
+            <a:r>
+              <a:rPr sz="2000" b="1">
+                <a:solidFill>
+                  <a:srgbClr val="1F3A68"/>
+                </a:solidFill>
+                <a:latin typeface="Microsoft YaHei"/>
+              </a:rPr>
+              <a:t/>
+            </a:r>
           </a:p>
         </p:txBody>
       </p:sp>
@@ -10307,7 +10432,6 @@
           <a:lstStyle/>
           <a:p>
             <a:pPr algn="ctr"/>
-            <a:endParaRPr/>
           </a:p>
         </p:txBody>
       </p:sp>
@@ -10457,7 +10581,6 @@
           <a:lstStyle/>
           <a:p>
             <a:pPr algn="ctr"/>
-            <a:endParaRPr/>
           </a:p>
         </p:txBody>
       </p:sp>
@@ -10502,7 +10625,6 @@
           <a:lstStyle/>
           <a:p>
             <a:pPr algn="ctr"/>
-            <a:endParaRPr/>
           </a:p>
         </p:txBody>
       </p:sp>
@@ -10584,7 +10706,6 @@
           <a:lstStyle/>
           <a:p>
             <a:pPr algn="ctr"/>
-            <a:endParaRPr/>
           </a:p>
         </p:txBody>
       </p:sp>
@@ -10649,7 +10770,34 @@
                 </a:solidFill>
                 <a:latin typeface="Consolas"/>
               </a:rPr>
-              <a:t>(slot):</a:t>
+              <a:t>(</a:t>
+            </a:r>
+            <a:r>
+              <a:rPr sz="1100">
+                <a:solidFill>
+                  <a:srgbClr val="303030"/>
+                </a:solidFill>
+                <a:latin typeface="Consolas"/>
+              </a:rPr>
+              <a:t>slot</a:t>
+            </a:r>
+            <a:r>
+              <a:rPr sz="1100">
+                <a:solidFill>
+                  <a:srgbClr val="303030"/>
+                </a:solidFill>
+                <a:latin typeface="Consolas"/>
+              </a:rPr>
+              <a:t>)</a:t>
+            </a:r>
+            <a:r>
+              <a:rPr sz="1100">
+                <a:solidFill>
+                  <a:srgbClr val="303030"/>
+                </a:solidFill>
+                <a:latin typeface="Consolas"/>
+              </a:rPr>
+              <a:t>:</a:t>
             </a:r>
           </a:p>
           <a:p>
@@ -10665,7 +10813,124 @@
                 </a:solidFill>
                 <a:latin typeface="Consolas"/>
               </a:rPr>
-              <a:t>    parts = [阶段, 目标, 约束]</a:t>
+              <a:t>    </a:t>
+            </a:r>
+            <a:r>
+              <a:rPr sz="1100">
+                <a:solidFill>
+                  <a:srgbClr val="303030"/>
+                </a:solidFill>
+                <a:latin typeface="Consolas"/>
+              </a:rPr>
+              <a:t>parts</a:t>
+            </a:r>
+            <a:r>
+              <a:rPr sz="1100">
+                <a:solidFill>
+                  <a:srgbClr val="303030"/>
+                </a:solidFill>
+                <a:latin typeface="Consolas"/>
+              </a:rPr>
+              <a:t> </a:t>
+            </a:r>
+            <a:r>
+              <a:rPr sz="1100">
+                <a:solidFill>
+                  <a:srgbClr val="303030"/>
+                </a:solidFill>
+                <a:latin typeface="Consolas"/>
+              </a:rPr>
+              <a:t>=</a:t>
+            </a:r>
+            <a:r>
+              <a:rPr sz="1100">
+                <a:solidFill>
+                  <a:srgbClr val="303030"/>
+                </a:solidFill>
+                <a:latin typeface="Consolas"/>
+              </a:rPr>
+              <a:t> </a:t>
+            </a:r>
+            <a:r>
+              <a:rPr sz="1100">
+                <a:solidFill>
+                  <a:srgbClr val="303030"/>
+                </a:solidFill>
+                <a:latin typeface="Consolas"/>
+              </a:rPr>
+              <a:t>[</a:t>
+            </a:r>
+            <a:r>
+              <a:rPr sz="1100">
+                <a:solidFill>
+                  <a:srgbClr val="303030"/>
+                </a:solidFill>
+                <a:latin typeface="Consolas"/>
+              </a:rPr>
+              <a:t>阶段</a:t>
+            </a:r>
+            <a:r>
+              <a:rPr sz="1100">
+                <a:solidFill>
+                  <a:srgbClr val="303030"/>
+                </a:solidFill>
+                <a:latin typeface="Consolas"/>
+              </a:rPr>
+              <a:t>,</a:t>
+            </a:r>
+            <a:r>
+              <a:rPr sz="1100">
+                <a:solidFill>
+                  <a:srgbClr val="303030"/>
+                </a:solidFill>
+                <a:latin typeface="Consolas"/>
+              </a:rPr>
+              <a:t> </a:t>
+            </a:r>
+            <a:r>
+              <a:rPr sz="1100">
+                <a:solidFill>
+                  <a:srgbClr val="303030"/>
+                </a:solidFill>
+                <a:latin typeface="Consolas"/>
+              </a:rPr>
+              <a:t>目标</a:t>
+            </a:r>
+            <a:r>
+              <a:rPr sz="1100">
+                <a:solidFill>
+                  <a:srgbClr val="303030"/>
+                </a:solidFill>
+                <a:latin typeface="Consolas"/>
+              </a:rPr>
+              <a:t>,</a:t>
+            </a:r>
+            <a:r>
+              <a:rPr sz="1100">
+                <a:solidFill>
+                  <a:srgbClr val="303030"/>
+                </a:solidFill>
+                <a:latin typeface="Consolas"/>
+              </a:rPr>
+              <a:t> </a:t>
+            </a:r>
+            <a:r>
+              <a:rPr sz="1100">
+                <a:solidFill>
+                  <a:srgbClr val="303030"/>
+                </a:solidFill>
+                <a:latin typeface="Consolas"/>
+              </a:rPr>
+              <a:t>约束</a:t>
+            </a:r>
+            <a:r>
+              <a:rPr sz="1100">
+                <a:solidFill>
+                  <a:srgbClr val="303030"/>
+                </a:solidFill>
+                <a:latin typeface="Consolas"/>
+              </a:rPr>
+              <a:t>]</a:t>
             </a:r>
           </a:p>
           <a:p>
@@ -10699,7 +10964,43 @@
                 </a:solidFill>
                 <a:latin typeface="Consolas"/>
               </a:rPr>
-              <a:t> slot.loaded_briefs:</a:t>
+              <a:t> </a:t>
+            </a:r>
+            <a:r>
+              <a:rPr sz="1100">
+                <a:solidFill>
+                  <a:srgbClr val="303030"/>
+                </a:solidFill>
+                <a:latin typeface="Consolas"/>
+              </a:rPr>
+              <a:t>slot</a:t>
+            </a:r>
+            <a:r>
+              <a:rPr sz="1100">
+                <a:solidFill>
+                  <a:srgbClr val="303030"/>
+                </a:solidFill>
+                <a:latin typeface="Consolas"/>
+              </a:rPr>
+              <a:t>.</a:t>
+            </a:r>
+            <a:r>
+              <a:rPr sz="1100">
+                <a:solidFill>
+                  <a:srgbClr val="303030"/>
+                </a:solidFill>
+                <a:latin typeface="Consolas"/>
+              </a:rPr>
+              <a:t>loaded_briefs</a:t>
+            </a:r>
+            <a:r>
+              <a:rPr sz="1100">
+                <a:solidFill>
+                  <a:srgbClr val="303030"/>
+                </a:solidFill>
+                <a:latin typeface="Consolas"/>
+              </a:rPr>
+              <a:t>:</a:t>
             </a:r>
           </a:p>
           <a:p>
@@ -10715,7 +11016,25 @@
                 </a:solidFill>
                 <a:latin typeface="Consolas"/>
               </a:rPr>
-              <a:t>        parts.</a:t>
+              <a:t>        </a:t>
+            </a:r>
+            <a:r>
+              <a:rPr sz="1100">
+                <a:solidFill>
+                  <a:srgbClr val="303030"/>
+                </a:solidFill>
+                <a:latin typeface="Consolas"/>
+              </a:rPr>
+              <a:t>parts</a:t>
+            </a:r>
+            <a:r>
+              <a:rPr sz="1100">
+                <a:solidFill>
+                  <a:srgbClr val="303030"/>
+                </a:solidFill>
+                <a:latin typeface="Consolas"/>
+              </a:rPr>
+              <a:t>.</a:t>
             </a:r>
             <a:r>
               <a:rPr sz="1100" b="1">
@@ -10751,7 +11070,43 @@
                 </a:solidFill>
                 <a:latin typeface="Consolas"/>
               </a:rPr>
-              <a:t> + briefs)</a:t>
+              <a:t> </a:t>
+            </a:r>
+            <a:r>
+              <a:rPr sz="1100">
+                <a:solidFill>
+                  <a:srgbClr val="303030"/>
+                </a:solidFill>
+                <a:latin typeface="Consolas"/>
+              </a:rPr>
+              <a:t>+</a:t>
+            </a:r>
+            <a:r>
+              <a:rPr sz="1100">
+                <a:solidFill>
+                  <a:srgbClr val="303030"/>
+                </a:solidFill>
+                <a:latin typeface="Consolas"/>
+              </a:rPr>
+              <a:t> </a:t>
+            </a:r>
+            <a:r>
+              <a:rPr sz="1100">
+                <a:solidFill>
+                  <a:srgbClr val="303030"/>
+                </a:solidFill>
+                <a:latin typeface="Consolas"/>
+              </a:rPr>
+              <a:t>briefs</a:t>
+            </a:r>
+            <a:r>
+              <a:rPr sz="1100">
+                <a:solidFill>
+                  <a:srgbClr val="303030"/>
+                </a:solidFill>
+                <a:latin typeface="Consolas"/>
+              </a:rPr>
+              <a:t>)</a:t>
             </a:r>
           </a:p>
           <a:p>
@@ -10767,7 +11122,25 @@
                 </a:solidFill>
                 <a:latin typeface="Consolas"/>
               </a:rPr>
-              <a:t>    parts.</a:t>
+              <a:t>    </a:t>
+            </a:r>
+            <a:r>
+              <a:rPr sz="1100">
+                <a:solidFill>
+                  <a:srgbClr val="303030"/>
+                </a:solidFill>
+                <a:latin typeface="Consolas"/>
+              </a:rPr>
+              <a:t>parts</a:t>
+            </a:r>
+            <a:r>
+              <a:rPr sz="1100">
+                <a:solidFill>
+                  <a:srgbClr val="303030"/>
+                </a:solidFill>
+                <a:latin typeface="Consolas"/>
+              </a:rPr>
+              <a:t>.</a:t>
             </a:r>
             <a:r>
               <a:rPr sz="1100" b="1">
@@ -10785,7 +11158,25 @@
                 </a:solidFill>
                 <a:latin typeface="Consolas"/>
               </a:rPr>
-              <a:t>(查询列表)</a:t>
+              <a:t>(</a:t>
+            </a:r>
+            <a:r>
+              <a:rPr sz="1100">
+                <a:solidFill>
+                  <a:srgbClr val="303030"/>
+                </a:solidFill>
+                <a:latin typeface="Consolas"/>
+              </a:rPr>
+              <a:t>查询列表</a:t>
+            </a:r>
+            <a:r>
+              <a:rPr sz="1100">
+                <a:solidFill>
+                  <a:srgbClr val="303030"/>
+                </a:solidFill>
+                <a:latin typeface="Consolas"/>
+              </a:rPr>
+              <a:t>)</a:t>
             </a:r>
           </a:p>
           <a:p>
@@ -10801,7 +11192,25 @@
                 </a:solidFill>
                 <a:latin typeface="Consolas"/>
               </a:rPr>
-              <a:t>    parts.</a:t>
+              <a:t>    </a:t>
+            </a:r>
+            <a:r>
+              <a:rPr sz="1100">
+                <a:solidFill>
+                  <a:srgbClr val="303030"/>
+                </a:solidFill>
+                <a:latin typeface="Consolas"/>
+              </a:rPr>
+              <a:t>parts</a:t>
+            </a:r>
+            <a:r>
+              <a:rPr sz="1100">
+                <a:solidFill>
+                  <a:srgbClr val="303030"/>
+                </a:solidFill>
+                <a:latin typeface="Consolas"/>
+              </a:rPr>
+              <a:t>.</a:t>
             </a:r>
             <a:r>
               <a:rPr sz="1100" b="1">
@@ -10819,7 +11228,34 @@
                 </a:solidFill>
                 <a:latin typeface="Consolas"/>
               </a:rPr>
-              <a:t>(最新消息[-</a:t>
+              <a:t>(</a:t>
+            </a:r>
+            <a:r>
+              <a:rPr sz="1100">
+                <a:solidFill>
+                  <a:srgbClr val="303030"/>
+                </a:solidFill>
+                <a:latin typeface="Consolas"/>
+              </a:rPr>
+              <a:t>最新消息</a:t>
+            </a:r>
+            <a:r>
+              <a:rPr sz="1100">
+                <a:solidFill>
+                  <a:srgbClr val="303030"/>
+                </a:solidFill>
+                <a:latin typeface="Consolas"/>
+              </a:rPr>
+              <a:t>[</a:t>
+            </a:r>
+            <a:r>
+              <a:rPr sz="1100">
+                <a:solidFill>
+                  <a:srgbClr val="303030"/>
+                </a:solidFill>
+                <a:latin typeface="Consolas"/>
+              </a:rPr>
+              <a:t>-</a:t>
             </a:r>
             <a:r>
               <a:rPr sz="1100">
@@ -10837,7 +11273,25 @@
                 </a:solidFill>
                 <a:latin typeface="Consolas"/>
               </a:rPr>
-              <a:t>:])</a:t>
+              <a:t>:</a:t>
+            </a:r>
+            <a:r>
+              <a:rPr sz="1100">
+                <a:solidFill>
+                  <a:srgbClr val="303030"/>
+                </a:solidFill>
+                <a:latin typeface="Consolas"/>
+              </a:rPr>
+              <a:t>]</a:t>
+            </a:r>
+            <a:r>
+              <a:rPr sz="1100">
+                <a:solidFill>
+                  <a:srgbClr val="303030"/>
+                </a:solidFill>
+                <a:latin typeface="Consolas"/>
+              </a:rPr>
+              <a:t>)</a:t>
             </a:r>
           </a:p>
           <a:p>
@@ -10907,7 +11361,25 @@
                 </a:solidFill>
                 <a:latin typeface="Consolas"/>
               </a:rPr>
-              <a:t>(parts)</a:t>
+              <a:t>(</a:t>
+            </a:r>
+            <a:r>
+              <a:rPr sz="1100">
+                <a:solidFill>
+                  <a:srgbClr val="303030"/>
+                </a:solidFill>
+                <a:latin typeface="Consolas"/>
+              </a:rPr>
+              <a:t>parts</a:t>
+            </a:r>
+            <a:r>
+              <a:rPr sz="1100">
+                <a:solidFill>
+                  <a:srgbClr val="303030"/>
+                </a:solidFill>
+                <a:latin typeface="Consolas"/>
+              </a:rPr>
+              <a:t>)</a:t>
             </a:r>
           </a:p>
           <a:p>
@@ -10916,12 +11388,6 @@
                 <a:spcPts val="200"/>
               </a:spcAft>
             </a:pPr>
-            <a:endParaRPr sz="1100">
-              <a:solidFill>
-                <a:srgbClr val="303030"/>
-              </a:solidFill>
-              <a:latin typeface="Consolas"/>
-            </a:endParaRPr>
           </a:p>
           <a:p>
             <a:pPr>
@@ -10963,7 +11429,61 @@
                 </a:solidFill>
                 <a:latin typeface="Consolas"/>
               </a:rPr>
-              <a:t>(slot, llm):</a:t>
+              <a:t>(</a:t>
+            </a:r>
+            <a:r>
+              <a:rPr sz="1100">
+                <a:solidFill>
+                  <a:srgbClr val="303030"/>
+                </a:solidFill>
+                <a:latin typeface="Consolas"/>
+              </a:rPr>
+              <a:t>slot</a:t>
+            </a:r>
+            <a:r>
+              <a:rPr sz="1100">
+                <a:solidFill>
+                  <a:srgbClr val="303030"/>
+                </a:solidFill>
+                <a:latin typeface="Consolas"/>
+              </a:rPr>
+              <a:t>,</a:t>
+            </a:r>
+            <a:r>
+              <a:rPr sz="1100">
+                <a:solidFill>
+                  <a:srgbClr val="303030"/>
+                </a:solidFill>
+                <a:latin typeface="Consolas"/>
+              </a:rPr>
+              <a:t> </a:t>
+            </a:r>
+            <a:r>
+              <a:rPr sz="1100">
+                <a:solidFill>
+                  <a:srgbClr val="303030"/>
+                </a:solidFill>
+                <a:latin typeface="Consolas"/>
+              </a:rPr>
+              <a:t>llm</a:t>
+            </a:r>
+            <a:r>
+              <a:rPr sz="1100">
+                <a:solidFill>
+                  <a:srgbClr val="303030"/>
+                </a:solidFill>
+                <a:latin typeface="Consolas"/>
+              </a:rPr>
+              <a:t>)</a:t>
+            </a:r>
+            <a:r>
+              <a:rPr sz="1100">
+                <a:solidFill>
+                  <a:srgbClr val="303030"/>
+                </a:solidFill>
+                <a:latin typeface="Consolas"/>
+              </a:rPr>
+              <a:t>:</a:t>
             </a:r>
           </a:p>
           <a:p>
@@ -10979,7 +11499,79 @@
                 </a:solidFill>
                 <a:latin typeface="Consolas"/>
               </a:rPr>
-              <a:t>    evicted = slot.fifo.</a:t>
+              <a:t>    </a:t>
+            </a:r>
+            <a:r>
+              <a:rPr sz="1100">
+                <a:solidFill>
+                  <a:srgbClr val="303030"/>
+                </a:solidFill>
+                <a:latin typeface="Consolas"/>
+              </a:rPr>
+              <a:t>evicted</a:t>
+            </a:r>
+            <a:r>
+              <a:rPr sz="1100">
+                <a:solidFill>
+                  <a:srgbClr val="303030"/>
+                </a:solidFill>
+                <a:latin typeface="Consolas"/>
+              </a:rPr>
+              <a:t> </a:t>
+            </a:r>
+            <a:r>
+              <a:rPr sz="1100">
+                <a:solidFill>
+                  <a:srgbClr val="303030"/>
+                </a:solidFill>
+                <a:latin typeface="Consolas"/>
+              </a:rPr>
+              <a:t>=</a:t>
+            </a:r>
+            <a:r>
+              <a:rPr sz="1100">
+                <a:solidFill>
+                  <a:srgbClr val="303030"/>
+                </a:solidFill>
+                <a:latin typeface="Consolas"/>
+              </a:rPr>
+              <a:t> </a:t>
+            </a:r>
+            <a:r>
+              <a:rPr sz="1100">
+                <a:solidFill>
+                  <a:srgbClr val="303030"/>
+                </a:solidFill>
+                <a:latin typeface="Consolas"/>
+              </a:rPr>
+              <a:t>slot</a:t>
+            </a:r>
+            <a:r>
+              <a:rPr sz="1100">
+                <a:solidFill>
+                  <a:srgbClr val="303030"/>
+                </a:solidFill>
+                <a:latin typeface="Consolas"/>
+              </a:rPr>
+              <a:t>.</a:t>
+            </a:r>
+            <a:r>
+              <a:rPr sz="1100">
+                <a:solidFill>
+                  <a:srgbClr val="303030"/>
+                </a:solidFill>
+                <a:latin typeface="Consolas"/>
+              </a:rPr>
+              <a:t>fifo</a:t>
+            </a:r>
+            <a:r>
+              <a:rPr sz="1100">
+                <a:solidFill>
+                  <a:srgbClr val="303030"/>
+                </a:solidFill>
+                <a:latin typeface="Consolas"/>
+              </a:rPr>
+              <a:t>.</a:t>
             </a:r>
             <a:r>
               <a:rPr sz="1100" b="1">
@@ -10997,7 +11589,25 @@
                 </a:solidFill>
                 <a:latin typeface="Consolas"/>
               </a:rPr>
-              <a:t>(前半)</a:t>
+              <a:t>(</a:t>
+            </a:r>
+            <a:r>
+              <a:rPr sz="1100">
+                <a:solidFill>
+                  <a:srgbClr val="303030"/>
+                </a:solidFill>
+                <a:latin typeface="Consolas"/>
+              </a:rPr>
+              <a:t>前半</a:t>
+            </a:r>
+            <a:r>
+              <a:rPr sz="1100">
+                <a:solidFill>
+                  <a:srgbClr val="303030"/>
+                </a:solidFill>
+                <a:latin typeface="Consolas"/>
+              </a:rPr>
+              <a:t>)</a:t>
             </a:r>
           </a:p>
           <a:p>
@@ -11013,7 +11623,79 @@
                 </a:solidFill>
                 <a:latin typeface="Consolas"/>
               </a:rPr>
-              <a:t>    slot.summary = llm.</a:t>
+              <a:t>    </a:t>
+            </a:r>
+            <a:r>
+              <a:rPr sz="1100">
+                <a:solidFill>
+                  <a:srgbClr val="303030"/>
+                </a:solidFill>
+                <a:latin typeface="Consolas"/>
+              </a:rPr>
+              <a:t>slot</a:t>
+            </a:r>
+            <a:r>
+              <a:rPr sz="1100">
+                <a:solidFill>
+                  <a:srgbClr val="303030"/>
+                </a:solidFill>
+                <a:latin typeface="Consolas"/>
+              </a:rPr>
+              <a:t>.</a:t>
+            </a:r>
+            <a:r>
+              <a:rPr sz="1100">
+                <a:solidFill>
+                  <a:srgbClr val="303030"/>
+                </a:solidFill>
+                <a:latin typeface="Consolas"/>
+              </a:rPr>
+              <a:t>summary</a:t>
+            </a:r>
+            <a:r>
+              <a:rPr sz="1100">
+                <a:solidFill>
+                  <a:srgbClr val="303030"/>
+                </a:solidFill>
+                <a:latin typeface="Consolas"/>
+              </a:rPr>
+              <a:t> </a:t>
+            </a:r>
+            <a:r>
+              <a:rPr sz="1100">
+                <a:solidFill>
+                  <a:srgbClr val="303030"/>
+                </a:solidFill>
+                <a:latin typeface="Consolas"/>
+              </a:rPr>
+              <a:t>=</a:t>
+            </a:r>
+            <a:r>
+              <a:rPr sz="1100">
+                <a:solidFill>
+                  <a:srgbClr val="303030"/>
+                </a:solidFill>
+                <a:latin typeface="Consolas"/>
+              </a:rPr>
+              <a:t> </a:t>
+            </a:r>
+            <a:r>
+              <a:rPr sz="1100">
+                <a:solidFill>
+                  <a:srgbClr val="303030"/>
+                </a:solidFill>
+                <a:latin typeface="Consolas"/>
+              </a:rPr>
+              <a:t>llm</a:t>
+            </a:r>
+            <a:r>
+              <a:rPr sz="1100">
+                <a:solidFill>
+                  <a:srgbClr val="303030"/>
+                </a:solidFill>
+                <a:latin typeface="Consolas"/>
+              </a:rPr>
+              <a:t>.</a:t>
             </a:r>
             <a:r>
               <a:rPr sz="1100" b="1">
@@ -11031,7 +11713,61 @@
                 </a:solidFill>
                 <a:latin typeface="Consolas"/>
               </a:rPr>
-              <a:t>(旧摘要 + evicted)</a:t>
+              <a:t>(</a:t>
+            </a:r>
+            <a:r>
+              <a:rPr sz="1100">
+                <a:solidFill>
+                  <a:srgbClr val="303030"/>
+                </a:solidFill>
+                <a:latin typeface="Consolas"/>
+              </a:rPr>
+              <a:t>旧摘要</a:t>
+            </a:r>
+            <a:r>
+              <a:rPr sz="1100">
+                <a:solidFill>
+                  <a:srgbClr val="303030"/>
+                </a:solidFill>
+                <a:latin typeface="Consolas"/>
+              </a:rPr>
+              <a:t> </a:t>
+            </a:r>
+            <a:r>
+              <a:rPr sz="1100">
+                <a:solidFill>
+                  <a:srgbClr val="303030"/>
+                </a:solidFill>
+                <a:latin typeface="Consolas"/>
+              </a:rPr>
+              <a:t>+</a:t>
+            </a:r>
+            <a:r>
+              <a:rPr sz="1100">
+                <a:solidFill>
+                  <a:srgbClr val="303030"/>
+                </a:solidFill>
+                <a:latin typeface="Consolas"/>
+              </a:rPr>
+              <a:t> </a:t>
+            </a:r>
+            <a:r>
+              <a:rPr sz="1100">
+                <a:solidFill>
+                  <a:srgbClr val="303030"/>
+                </a:solidFill>
+                <a:latin typeface="Consolas"/>
+              </a:rPr>
+              <a:t>evicted</a:t>
+            </a:r>
+            <a:r>
+              <a:rPr sz="1100">
+                <a:solidFill>
+                  <a:srgbClr val="303030"/>
+                </a:solidFill>
+                <a:latin typeface="Consolas"/>
+              </a:rPr>
+              <a:t>)</a:t>
             </a:r>
           </a:p>
           <a:p>
@@ -11047,7 +11783,43 @@
                 </a:solidFill>
                 <a:latin typeface="Consolas"/>
               </a:rPr>
-              <a:t>    slot.archived.</a:t>
+              <a:t>    </a:t>
+            </a:r>
+            <a:r>
+              <a:rPr sz="1100">
+                <a:solidFill>
+                  <a:srgbClr val="303030"/>
+                </a:solidFill>
+                <a:latin typeface="Consolas"/>
+              </a:rPr>
+              <a:t>slot</a:t>
+            </a:r>
+            <a:r>
+              <a:rPr sz="1100">
+                <a:solidFill>
+                  <a:srgbClr val="303030"/>
+                </a:solidFill>
+                <a:latin typeface="Consolas"/>
+              </a:rPr>
+              <a:t>.</a:t>
+            </a:r>
+            <a:r>
+              <a:rPr sz="1100">
+                <a:solidFill>
+                  <a:srgbClr val="303030"/>
+                </a:solidFill>
+                <a:latin typeface="Consolas"/>
+              </a:rPr>
+              <a:t>archived</a:t>
+            </a:r>
+            <a:r>
+              <a:rPr sz="1100">
+                <a:solidFill>
+                  <a:srgbClr val="303030"/>
+                </a:solidFill>
+                <a:latin typeface="Consolas"/>
+              </a:rPr>
+              <a:t>.</a:t>
             </a:r>
             <a:r>
               <a:rPr sz="1100" b="1">
@@ -11065,7 +11837,25 @@
                 </a:solidFill>
                 <a:latin typeface="Consolas"/>
               </a:rPr>
-              <a:t>(evicted)</a:t>
+              <a:t>(</a:t>
+            </a:r>
+            <a:r>
+              <a:rPr sz="1100">
+                <a:solidFill>
+                  <a:srgbClr val="303030"/>
+                </a:solidFill>
+                <a:latin typeface="Consolas"/>
+              </a:rPr>
+              <a:t>evicted</a:t>
+            </a:r>
+            <a:r>
+              <a:rPr sz="1100">
+                <a:solidFill>
+                  <a:srgbClr val="303030"/>
+                </a:solidFill>
+                <a:latin typeface="Consolas"/>
+              </a:rPr>
+              <a:t>)</a:t>
             </a:r>
           </a:p>
         </p:txBody>
@@ -11111,7 +11901,6 @@
           <a:lstStyle/>
           <a:p>
             <a:pPr algn="ctr"/>
-            <a:endParaRPr/>
           </a:p>
         </p:txBody>
       </p:sp>
@@ -11194,7 +11983,7 @@
 </file>
 
 <file path=ppt/slides/slide15.xml><?xml version="1.0" encoding="utf-8"?>
-<p:sld xmlns:a="http://schemas.openxmlformats.org/drawingml/2006/main" xmlns:r="http://schemas.openxmlformats.org/officeDocument/2006/relationships" xmlns:p="http://schemas.openxmlformats.org/presentationml/2006/main">
+<p:sld xmlns:a="http://schemas.openxmlformats.org/drawingml/2006/main" xmlns:p="http://schemas.openxmlformats.org/presentationml/2006/main" xmlns:r="http://schemas.openxmlformats.org/officeDocument/2006/relationships">
   <p:cSld>
     <p:spTree>
       <p:nvGrpSpPr>
@@ -11202,14 +11991,7 @@
         <p:cNvGrpSpPr/>
         <p:nvPr/>
       </p:nvGrpSpPr>
-      <p:grpSpPr>
-        <a:xfrm>
-          <a:off x="0" y="0"/>
-          <a:ext cx="0" cy="0"/>
-          <a:chOff x="0" y="0"/>
-          <a:chExt cx="0" cy="0"/>
-        </a:xfrm>
-      </p:grpSpPr>
+      <p:grpSpPr/>
       <p:sp>
         <p:nvSpPr>
           <p:cNvPr id="2" name="TextBox 1"/>
@@ -11286,7 +12068,6 @@
           <a:lstStyle/>
           <a:p>
             <a:pPr algn="ctr"/>
-            <a:endParaRPr/>
           </a:p>
         </p:txBody>
       </p:sp>
@@ -11366,7 +12147,6 @@
           <a:lstStyle/>
           <a:p>
             <a:pPr algn="ctr"/>
-            <a:endParaRPr/>
           </a:p>
         </p:txBody>
       </p:sp>
@@ -11516,7 +12296,6 @@
           <a:lstStyle/>
           <a:p>
             <a:pPr algn="ctr"/>
-            <a:endParaRPr/>
           </a:p>
         </p:txBody>
       </p:sp>
@@ -11578,7 +12357,15 @@
           <a:lstStyle/>
           <a:p>
             <a:pPr algn="l"/>
-            <a:endParaRPr/>
+            <a:r>
+              <a:rPr sz="2000" b="1">
+                <a:solidFill>
+                  <a:srgbClr val="1F3A68"/>
+                </a:solidFill>
+                <a:latin typeface="Microsoft YaHei"/>
+              </a:rPr>
+              <a:t/>
+            </a:r>
           </a:p>
         </p:txBody>
       </p:sp>
@@ -11658,7 +12445,6 @@
           <a:lstStyle/>
           <a:p>
             <a:pPr algn="ctr"/>
-            <a:endParaRPr/>
           </a:p>
         </p:txBody>
       </p:sp>
@@ -11720,7 +12506,15 @@
           <a:lstStyle/>
           <a:p>
             <a:pPr algn="l"/>
-            <a:endParaRPr/>
+            <a:r>
+              <a:rPr sz="2000" b="1">
+                <a:solidFill>
+                  <a:srgbClr val="1F3A68"/>
+                </a:solidFill>
+                <a:latin typeface="Microsoft YaHei"/>
+              </a:rPr>
+              <a:t/>
+            </a:r>
           </a:p>
         </p:txBody>
       </p:sp>
@@ -11800,7 +12594,6 @@
           <a:lstStyle/>
           <a:p>
             <a:pPr algn="ctr"/>
-            <a:endParaRPr/>
           </a:p>
         </p:txBody>
       </p:sp>
@@ -11845,7 +12638,6 @@
           <a:lstStyle/>
           <a:p>
             <a:pPr algn="ctr"/>
-            <a:endParaRPr/>
           </a:p>
         </p:txBody>
       </p:sp>
@@ -11927,7 +12719,6 @@
           <a:lstStyle/>
           <a:p>
             <a:pPr algn="ctr"/>
-            <a:endParaRPr/>
           </a:p>
         </p:txBody>
       </p:sp>
@@ -11965,7 +12756,52 @@
                 </a:solidFill>
                 <a:latin typeface="Consolas"/>
               </a:rPr>
-              <a:t>hits_exact = factual.</a:t>
+              <a:t>hits_exact</a:t>
+            </a:r>
+            <a:r>
+              <a:rPr sz="1100">
+                <a:solidFill>
+                  <a:srgbClr val="303030"/>
+                </a:solidFill>
+                <a:latin typeface="Consolas"/>
+              </a:rPr>
+              <a:t> </a:t>
+            </a:r>
+            <a:r>
+              <a:rPr sz="1100">
+                <a:solidFill>
+                  <a:srgbClr val="303030"/>
+                </a:solidFill>
+                <a:latin typeface="Consolas"/>
+              </a:rPr>
+              <a:t>=</a:t>
+            </a:r>
+            <a:r>
+              <a:rPr sz="1100">
+                <a:solidFill>
+                  <a:srgbClr val="303030"/>
+                </a:solidFill>
+                <a:latin typeface="Consolas"/>
+              </a:rPr>
+              <a:t> </a:t>
+            </a:r>
+            <a:r>
+              <a:rPr sz="1100">
+                <a:solidFill>
+                  <a:srgbClr val="303030"/>
+                </a:solidFill>
+                <a:latin typeface="Consolas"/>
+              </a:rPr>
+              <a:t>factual</a:t>
+            </a:r>
+            <a:r>
+              <a:rPr sz="1100">
+                <a:solidFill>
+                  <a:srgbClr val="303030"/>
+                </a:solidFill>
+                <a:latin typeface="Consolas"/>
+              </a:rPr>
+              <a:t>.</a:t>
             </a:r>
             <a:r>
               <a:rPr sz="1100" b="1">
@@ -11983,7 +12819,16 @@
                 </a:solidFill>
                 <a:latin typeface="Consolas"/>
               </a:rPr>
-              <a:t>({</a:t>
+              <a:t>(</a:t>
+            </a:r>
+            <a:r>
+              <a:rPr sz="1100">
+                <a:solidFill>
+                  <a:srgbClr val="303030"/>
+                </a:solidFill>
+                <a:latin typeface="Consolas"/>
+              </a:rPr>
+              <a:t>{</a:t>
             </a:r>
             <a:r>
               <a:rPr sz="1100">
@@ -12001,7 +12846,16 @@
                 </a:solidFill>
                 <a:latin typeface="Consolas"/>
               </a:rPr>
-              <a:t>: </a:t>
+              <a:t>:</a:t>
+            </a:r>
+            <a:r>
+              <a:rPr sz="1100">
+                <a:solidFill>
+                  <a:srgbClr val="303030"/>
+                </a:solidFill>
+                <a:latin typeface="Consolas"/>
+              </a:rPr>
+              <a:t> </a:t>
             </a:r>
             <a:r>
               <a:rPr sz="1100">
@@ -12019,7 +12873,16 @@
                 </a:solidFill>
                 <a:latin typeface="Consolas"/>
               </a:rPr>
-              <a:t>})</a:t>
+              <a:t>}</a:t>
+            </a:r>
+            <a:r>
+              <a:rPr sz="1100">
+                <a:solidFill>
+                  <a:srgbClr val="303030"/>
+                </a:solidFill>
+                <a:latin typeface="Consolas"/>
+              </a:rPr>
+              <a:t>)</a:t>
             </a:r>
           </a:p>
           <a:p>
@@ -12035,7 +12898,52 @@
                 </a:solidFill>
                 <a:latin typeface="Consolas"/>
               </a:rPr>
-              <a:t>hits_sem = experiential.</a:t>
+              <a:t>hits_sem</a:t>
+            </a:r>
+            <a:r>
+              <a:rPr sz="1100">
+                <a:solidFill>
+                  <a:srgbClr val="303030"/>
+                </a:solidFill>
+                <a:latin typeface="Consolas"/>
+              </a:rPr>
+              <a:t> </a:t>
+            </a:r>
+            <a:r>
+              <a:rPr sz="1100">
+                <a:solidFill>
+                  <a:srgbClr val="303030"/>
+                </a:solidFill>
+                <a:latin typeface="Consolas"/>
+              </a:rPr>
+              <a:t>=</a:t>
+            </a:r>
+            <a:r>
+              <a:rPr sz="1100">
+                <a:solidFill>
+                  <a:srgbClr val="303030"/>
+                </a:solidFill>
+                <a:latin typeface="Consolas"/>
+              </a:rPr>
+              <a:t> </a:t>
+            </a:r>
+            <a:r>
+              <a:rPr sz="1100">
+                <a:solidFill>
+                  <a:srgbClr val="303030"/>
+                </a:solidFill>
+                <a:latin typeface="Consolas"/>
+              </a:rPr>
+              <a:t>experiential</a:t>
+            </a:r>
+            <a:r>
+              <a:rPr sz="1100">
+                <a:solidFill>
+                  <a:srgbClr val="303030"/>
+                </a:solidFill>
+                <a:latin typeface="Consolas"/>
+              </a:rPr>
+              <a:t>.</a:t>
             </a:r>
             <a:r>
               <a:rPr sz="1100" b="1">
@@ -12133,7 +13041,6 @@
           <a:lstStyle/>
           <a:p>
             <a:pPr algn="ctr"/>
-            <a:endParaRPr/>
           </a:p>
         </p:txBody>
       </p:sp>
@@ -12216,7 +13123,7 @@
 </file>
 
 <file path=ppt/slides/slide16.xml><?xml version="1.0" encoding="utf-8"?>
-<p:sld xmlns:a="http://schemas.openxmlformats.org/drawingml/2006/main" xmlns:r="http://schemas.openxmlformats.org/officeDocument/2006/relationships" xmlns:p="http://schemas.openxmlformats.org/presentationml/2006/main">
+<p:sld xmlns:a="http://schemas.openxmlformats.org/drawingml/2006/main" xmlns:p="http://schemas.openxmlformats.org/presentationml/2006/main" xmlns:r="http://schemas.openxmlformats.org/officeDocument/2006/relationships">
   <p:cSld>
     <p:spTree>
       <p:nvGrpSpPr>
@@ -12224,14 +13131,7 @@
         <p:cNvGrpSpPr/>
         <p:nvPr/>
       </p:nvGrpSpPr>
-      <p:grpSpPr>
-        <a:xfrm>
-          <a:off x="0" y="0"/>
-          <a:ext cx="0" cy="0"/>
-          <a:chOff x="0" y="0"/>
-          <a:chExt cx="0" cy="0"/>
-        </a:xfrm>
-      </p:grpSpPr>
+      <p:grpSpPr/>
       <p:sp>
         <p:nvSpPr>
           <p:cNvPr id="2" name="TextBox 1"/>
@@ -12308,7 +13208,6 @@
           <a:lstStyle/>
           <a:p>
             <a:pPr algn="ctr"/>
-            <a:endParaRPr/>
           </a:p>
         </p:txBody>
       </p:sp>
@@ -12388,7 +13287,6 @@
           <a:lstStyle/>
           <a:p>
             <a:pPr algn="ctr"/>
-            <a:endParaRPr/>
           </a:p>
         </p:txBody>
       </p:sp>
@@ -12450,7 +13348,15 @@
           <a:lstStyle/>
           <a:p>
             <a:pPr algn="l"/>
-            <a:endParaRPr/>
+            <a:r>
+              <a:rPr sz="2000" b="1">
+                <a:solidFill>
+                  <a:srgbClr val="1F3A68"/>
+                </a:solidFill>
+                <a:latin typeface="Microsoft YaHei"/>
+              </a:rPr>
+              <a:t/>
+            </a:r>
           </a:p>
         </p:txBody>
       </p:sp>
@@ -12530,7 +13436,6 @@
           <a:lstStyle/>
           <a:p>
             <a:pPr algn="ctr"/>
-            <a:endParaRPr/>
           </a:p>
         </p:txBody>
       </p:sp>
@@ -12680,7 +13585,6 @@
           <a:lstStyle/>
           <a:p>
             <a:pPr algn="ctr"/>
-            <a:endParaRPr/>
           </a:p>
         </p:txBody>
       </p:sp>
@@ -12830,7 +13734,6 @@
           <a:lstStyle/>
           <a:p>
             <a:pPr algn="ctr"/>
-            <a:endParaRPr/>
           </a:p>
         </p:txBody>
       </p:sp>
@@ -12875,7 +13778,6 @@
           <a:lstStyle/>
           <a:p>
             <a:pPr algn="ctr"/>
-            <a:endParaRPr/>
           </a:p>
         </p:txBody>
       </p:sp>
@@ -12957,7 +13859,6 @@
           <a:lstStyle/>
           <a:p>
             <a:pPr algn="ctr"/>
-            <a:endParaRPr/>
           </a:p>
         </p:txBody>
       </p:sp>
@@ -13022,7 +13923,52 @@
                 </a:solidFill>
                 <a:latin typeface="Consolas"/>
               </a:rPr>
-              <a:t>(q, mode=</a:t>
+              <a:t>(</a:t>
+            </a:r>
+            <a:r>
+              <a:rPr sz="1100">
+                <a:solidFill>
+                  <a:srgbClr val="303030"/>
+                </a:solidFill>
+                <a:latin typeface="Consolas"/>
+              </a:rPr>
+              <a:t>q</a:t>
+            </a:r>
+            <a:r>
+              <a:rPr sz="1100">
+                <a:solidFill>
+                  <a:srgbClr val="303030"/>
+                </a:solidFill>
+                <a:latin typeface="Consolas"/>
+              </a:rPr>
+              <a:t>,</a:t>
+            </a:r>
+            <a:r>
+              <a:rPr sz="1100">
+                <a:solidFill>
+                  <a:srgbClr val="303030"/>
+                </a:solidFill>
+                <a:latin typeface="Consolas"/>
+              </a:rPr>
+              <a:t> </a:t>
+            </a:r>
+            <a:r>
+              <a:rPr sz="1100">
+                <a:solidFill>
+                  <a:srgbClr val="303030"/>
+                </a:solidFill>
+                <a:latin typeface="Consolas"/>
+              </a:rPr>
+              <a:t>mode</a:t>
+            </a:r>
+            <a:r>
+              <a:rPr sz="1100">
+                <a:solidFill>
+                  <a:srgbClr val="303030"/>
+                </a:solidFill>
+                <a:latin typeface="Consolas"/>
+              </a:rPr>
+              <a:t>=</a:t>
             </a:r>
             <a:r>
               <a:rPr sz="1100">
@@ -13040,7 +13986,34 @@
                 </a:solidFill>
                 <a:latin typeface="Consolas"/>
               </a:rPr>
-              <a:t>, top_k=</a:t>
+              <a:t>,</a:t>
+            </a:r>
+            <a:r>
+              <a:rPr sz="1100">
+                <a:solidFill>
+                  <a:srgbClr val="303030"/>
+                </a:solidFill>
+                <a:latin typeface="Consolas"/>
+              </a:rPr>
+              <a:t> </a:t>
+            </a:r>
+            <a:r>
+              <a:rPr sz="1100">
+                <a:solidFill>
+                  <a:srgbClr val="303030"/>
+                </a:solidFill>
+                <a:latin typeface="Consolas"/>
+              </a:rPr>
+              <a:t>top_k</a:t>
+            </a:r>
+            <a:r>
+              <a:rPr sz="1100">
+                <a:solidFill>
+                  <a:srgbClr val="303030"/>
+                </a:solidFill>
+                <a:latin typeface="Consolas"/>
+              </a:rPr>
+              <a:t>=</a:t>
             </a:r>
             <a:r>
               <a:rPr sz="1100">
@@ -13058,7 +14031,16 @@
                 </a:solidFill>
                 <a:latin typeface="Consolas"/>
               </a:rPr>
-              <a:t>):</a:t>
+              <a:t>)</a:t>
+            </a:r>
+            <a:r>
+              <a:rPr sz="1100">
+                <a:solidFill>
+                  <a:srgbClr val="303030"/>
+                </a:solidFill>
+                <a:latin typeface="Consolas"/>
+              </a:rPr>
+              <a:t>:</a:t>
             </a:r>
           </a:p>
           <a:p>
@@ -13074,7 +14056,52 @@
                 </a:solidFill>
                 <a:latin typeface="Consolas"/>
               </a:rPr>
-              <a:t>    pool = [</a:t>
+              <a:t>    </a:t>
+            </a:r>
+            <a:r>
+              <a:rPr sz="1100">
+                <a:solidFill>
+                  <a:srgbClr val="303030"/>
+                </a:solidFill>
+                <a:latin typeface="Consolas"/>
+              </a:rPr>
+              <a:t>pool</a:t>
+            </a:r>
+            <a:r>
+              <a:rPr sz="1100">
+                <a:solidFill>
+                  <a:srgbClr val="303030"/>
+                </a:solidFill>
+                <a:latin typeface="Consolas"/>
+              </a:rPr>
+              <a:t> </a:t>
+            </a:r>
+            <a:r>
+              <a:rPr sz="1100">
+                <a:solidFill>
+                  <a:srgbClr val="303030"/>
+                </a:solidFill>
+                <a:latin typeface="Consolas"/>
+              </a:rPr>
+              <a:t>=</a:t>
+            </a:r>
+            <a:r>
+              <a:rPr sz="1100">
+                <a:solidFill>
+                  <a:srgbClr val="303030"/>
+                </a:solidFill>
+                <a:latin typeface="Consolas"/>
+              </a:rPr>
+              <a:t> </a:t>
+            </a:r>
+            <a:r>
+              <a:rPr sz="1100">
+                <a:solidFill>
+                  <a:srgbClr val="303030"/>
+                </a:solidFill>
+                <a:latin typeface="Consolas"/>
+              </a:rPr>
+              <a:t>[</a:t>
             </a:r>
             <a:r>
               <a:rPr sz="1100" b="1">
@@ -13092,7 +14119,79 @@
                 </a:solidFill>
                 <a:latin typeface="Consolas"/>
               </a:rPr>
-              <a:t>(q, q.route)]</a:t>
+              <a:t>(</a:t>
+            </a:r>
+            <a:r>
+              <a:rPr sz="1100">
+                <a:solidFill>
+                  <a:srgbClr val="303030"/>
+                </a:solidFill>
+                <a:latin typeface="Consolas"/>
+              </a:rPr>
+              <a:t>q</a:t>
+            </a:r>
+            <a:r>
+              <a:rPr sz="1100">
+                <a:solidFill>
+                  <a:srgbClr val="303030"/>
+                </a:solidFill>
+                <a:latin typeface="Consolas"/>
+              </a:rPr>
+              <a:t>,</a:t>
+            </a:r>
+            <a:r>
+              <a:rPr sz="1100">
+                <a:solidFill>
+                  <a:srgbClr val="303030"/>
+                </a:solidFill>
+                <a:latin typeface="Consolas"/>
+              </a:rPr>
+              <a:t> </a:t>
+            </a:r>
+            <a:r>
+              <a:rPr sz="1100">
+                <a:solidFill>
+                  <a:srgbClr val="303030"/>
+                </a:solidFill>
+                <a:latin typeface="Consolas"/>
+              </a:rPr>
+              <a:t>q</a:t>
+            </a:r>
+            <a:r>
+              <a:rPr sz="1100">
+                <a:solidFill>
+                  <a:srgbClr val="303030"/>
+                </a:solidFill>
+                <a:latin typeface="Consolas"/>
+              </a:rPr>
+              <a:t>.</a:t>
+            </a:r>
+            <a:r>
+              <a:rPr sz="1100">
+                <a:solidFill>
+                  <a:srgbClr val="303030"/>
+                </a:solidFill>
+                <a:latin typeface="Consolas"/>
+              </a:rPr>
+              <a:t>route</a:t>
+            </a:r>
+            <a:r>
+              <a:rPr sz="1100">
+                <a:solidFill>
+                  <a:srgbClr val="303030"/>
+                </a:solidFill>
+                <a:latin typeface="Consolas"/>
+              </a:rPr>
+              <a:t>)</a:t>
+            </a:r>
+            <a:r>
+              <a:rPr sz="1100">
+                <a:solidFill>
+                  <a:srgbClr val="303030"/>
+                </a:solidFill>
+                <a:latin typeface="Consolas"/>
+              </a:rPr>
+              <a:t>]</a:t>
             </a:r>
           </a:p>
           <a:p>
@@ -13126,7 +14225,52 @@
                 </a:solidFill>
                 <a:latin typeface="Consolas"/>
               </a:rPr>
-              <a:t> mode == </a:t>
+              <a:t> </a:t>
+            </a:r>
+            <a:r>
+              <a:rPr sz="1100">
+                <a:solidFill>
+                  <a:srgbClr val="303030"/>
+                </a:solidFill>
+                <a:latin typeface="Consolas"/>
+              </a:rPr>
+              <a:t>mode</a:t>
+            </a:r>
+            <a:r>
+              <a:rPr sz="1100">
+                <a:solidFill>
+                  <a:srgbClr val="303030"/>
+                </a:solidFill>
+                <a:latin typeface="Consolas"/>
+              </a:rPr>
+              <a:t> </a:t>
+            </a:r>
+            <a:r>
+              <a:rPr sz="1100">
+                <a:solidFill>
+                  <a:srgbClr val="303030"/>
+                </a:solidFill>
+                <a:latin typeface="Consolas"/>
+              </a:rPr>
+              <a:t>=</a:t>
+            </a:r>
+            <a:r>
+              <a:rPr sz="1100">
+                <a:solidFill>
+                  <a:srgbClr val="303030"/>
+                </a:solidFill>
+                <a:latin typeface="Consolas"/>
+              </a:rPr>
+              <a:t>=</a:t>
+            </a:r>
+            <a:r>
+              <a:rPr sz="1100">
+                <a:solidFill>
+                  <a:srgbClr val="303030"/>
+                </a:solidFill>
+                <a:latin typeface="Consolas"/>
+              </a:rPr>
+              <a:t> </a:t>
             </a:r>
             <a:r>
               <a:rPr sz="1100">
@@ -13160,7 +14304,61 @@
                 </a:solidFill>
                 <a:latin typeface="Consolas"/>
               </a:rPr>
-              <a:t>        pool += [</a:t>
+              <a:t>        </a:t>
+            </a:r>
+            <a:r>
+              <a:rPr sz="1100">
+                <a:solidFill>
+                  <a:srgbClr val="303030"/>
+                </a:solidFill>
+                <a:latin typeface="Consolas"/>
+              </a:rPr>
+              <a:t>pool</a:t>
+            </a:r>
+            <a:r>
+              <a:rPr sz="1100">
+                <a:solidFill>
+                  <a:srgbClr val="303030"/>
+                </a:solidFill>
+                <a:latin typeface="Consolas"/>
+              </a:rPr>
+              <a:t> </a:t>
+            </a:r>
+            <a:r>
+              <a:rPr sz="1100">
+                <a:solidFill>
+                  <a:srgbClr val="303030"/>
+                </a:solidFill>
+                <a:latin typeface="Consolas"/>
+              </a:rPr>
+              <a:t>+</a:t>
+            </a:r>
+            <a:r>
+              <a:rPr sz="1100">
+                <a:solidFill>
+                  <a:srgbClr val="303030"/>
+                </a:solidFill>
+                <a:latin typeface="Consolas"/>
+              </a:rPr>
+              <a:t>=</a:t>
+            </a:r>
+            <a:r>
+              <a:rPr sz="1100">
+                <a:solidFill>
+                  <a:srgbClr val="303030"/>
+                </a:solidFill>
+                <a:latin typeface="Consolas"/>
+              </a:rPr>
+              <a:t> </a:t>
+            </a:r>
+            <a:r>
+              <a:rPr sz="1100">
+                <a:solidFill>
+                  <a:srgbClr val="303030"/>
+                </a:solidFill>
+                <a:latin typeface="Consolas"/>
+              </a:rPr>
+              <a:t>[</a:t>
             </a:r>
             <a:r>
               <a:rPr sz="1100" b="1">
@@ -13178,7 +14376,61 @@
                 </a:solidFill>
                 <a:latin typeface="Consolas"/>
               </a:rPr>
-              <a:t>(q, alt) </a:t>
+              <a:t>(</a:t>
+            </a:r>
+            <a:r>
+              <a:rPr sz="1100">
+                <a:solidFill>
+                  <a:srgbClr val="303030"/>
+                </a:solidFill>
+                <a:latin typeface="Consolas"/>
+              </a:rPr>
+              <a:t>q</a:t>
+            </a:r>
+            <a:r>
+              <a:rPr sz="1100">
+                <a:solidFill>
+                  <a:srgbClr val="303030"/>
+                </a:solidFill>
+                <a:latin typeface="Consolas"/>
+              </a:rPr>
+              <a:t>,</a:t>
+            </a:r>
+            <a:r>
+              <a:rPr sz="1100">
+                <a:solidFill>
+                  <a:srgbClr val="303030"/>
+                </a:solidFill>
+                <a:latin typeface="Consolas"/>
+              </a:rPr>
+              <a:t> </a:t>
+            </a:r>
+            <a:r>
+              <a:rPr sz="1100">
+                <a:solidFill>
+                  <a:srgbClr val="303030"/>
+                </a:solidFill>
+                <a:latin typeface="Consolas"/>
+              </a:rPr>
+              <a:t>alt</a:t>
+            </a:r>
+            <a:r>
+              <a:rPr sz="1100">
+                <a:solidFill>
+                  <a:srgbClr val="303030"/>
+                </a:solidFill>
+                <a:latin typeface="Consolas"/>
+              </a:rPr>
+              <a:t>)</a:t>
+            </a:r>
+            <a:r>
+              <a:rPr sz="1100">
+                <a:solidFill>
+                  <a:srgbClr val="303030"/>
+                </a:solidFill>
+                <a:latin typeface="Consolas"/>
+              </a:rPr>
+              <a:t> </a:t>
             </a:r>
             <a:r>
               <a:rPr sz="1100" b="1">
@@ -13196,7 +14448,25 @@
                 </a:solidFill>
                 <a:latin typeface="Consolas"/>
               </a:rPr>
-              <a:t> alt </a:t>
+              <a:t> </a:t>
+            </a:r>
+            <a:r>
+              <a:rPr sz="1100">
+                <a:solidFill>
+                  <a:srgbClr val="303030"/>
+                </a:solidFill>
+                <a:latin typeface="Consolas"/>
+              </a:rPr>
+              <a:t>alt</a:t>
+            </a:r>
+            <a:r>
+              <a:rPr sz="1100">
+                <a:solidFill>
+                  <a:srgbClr val="303030"/>
+                </a:solidFill>
+                <a:latin typeface="Consolas"/>
+              </a:rPr>
+              <a:t> </a:t>
             </a:r>
             <a:r>
               <a:rPr sz="1100" b="1">
@@ -13214,7 +14484,16 @@
                 </a:solidFill>
                 <a:latin typeface="Consolas"/>
               </a:rPr>
-              <a:t> routes</a:t>
+              <a:t> </a:t>
+            </a:r>
+            <a:r>
+              <a:rPr sz="1100">
+                <a:solidFill>
+                  <a:srgbClr val="303030"/>
+                </a:solidFill>
+                <a:latin typeface="Consolas"/>
+              </a:rPr>
+              <a:t>routes</a:t>
             </a:r>
           </a:p>
           <a:p>
@@ -13248,7 +14527,88 @@
                 </a:solidFill>
                 <a:latin typeface="Consolas"/>
               </a:rPr>
-              <a:t> alt != q.route]</a:t>
+              <a:t> </a:t>
+            </a:r>
+            <a:r>
+              <a:rPr sz="1100">
+                <a:solidFill>
+                  <a:srgbClr val="303030"/>
+                </a:solidFill>
+                <a:latin typeface="Consolas"/>
+              </a:rPr>
+              <a:t>alt</a:t>
+            </a:r>
+            <a:r>
+              <a:rPr sz="1100">
+                <a:solidFill>
+                  <a:srgbClr val="303030"/>
+                </a:solidFill>
+                <a:latin typeface="Consolas"/>
+              </a:rPr>
+              <a:t> </a:t>
+            </a:r>
+            <a:r>
+              <a:rPr sz="1100">
+                <a:solidFill>
+                  <a:srgbClr val="303030"/>
+                </a:solidFill>
+                <a:latin typeface="Consolas"/>
+              </a:rPr>
+              <a:t>!</a:t>
+            </a:r>
+            <a:r>
+              <a:rPr sz="1100">
+                <a:solidFill>
+                  <a:srgbClr val="303030"/>
+                </a:solidFill>
+                <a:latin typeface="Consolas"/>
+              </a:rPr>
+              <a:t>=</a:t>
+            </a:r>
+            <a:r>
+              <a:rPr sz="1100">
+                <a:solidFill>
+                  <a:srgbClr val="303030"/>
+                </a:solidFill>
+                <a:latin typeface="Consolas"/>
+              </a:rPr>
+              <a:t> </a:t>
+            </a:r>
+            <a:r>
+              <a:rPr sz="1100">
+                <a:solidFill>
+                  <a:srgbClr val="303030"/>
+                </a:solidFill>
+                <a:latin typeface="Consolas"/>
+              </a:rPr>
+              <a:t>q</a:t>
+            </a:r>
+            <a:r>
+              <a:rPr sz="1100">
+                <a:solidFill>
+                  <a:srgbClr val="303030"/>
+                </a:solidFill>
+                <a:latin typeface="Consolas"/>
+              </a:rPr>
+              <a:t>.</a:t>
+            </a:r>
+            <a:r>
+              <a:rPr sz="1100">
+                <a:solidFill>
+                  <a:srgbClr val="303030"/>
+                </a:solidFill>
+                <a:latin typeface="Consolas"/>
+              </a:rPr>
+              <a:t>route</a:t>
+            </a:r>
+            <a:r>
+              <a:rPr sz="1100">
+                <a:solidFill>
+                  <a:srgbClr val="303030"/>
+                </a:solidFill>
+                <a:latin typeface="Consolas"/>
+              </a:rPr>
+              <a:t>]</a:t>
             </a:r>
           </a:p>
           <a:p>
@@ -13264,7 +14624,52 @@
                 </a:solidFill>
                 <a:latin typeface="Consolas"/>
               </a:rPr>
-              <a:t>    pool = [</a:t>
+              <a:t>    </a:t>
+            </a:r>
+            <a:r>
+              <a:rPr sz="1100">
+                <a:solidFill>
+                  <a:srgbClr val="303030"/>
+                </a:solidFill>
+                <a:latin typeface="Consolas"/>
+              </a:rPr>
+              <a:t>pool</a:t>
+            </a:r>
+            <a:r>
+              <a:rPr sz="1100">
+                <a:solidFill>
+                  <a:srgbClr val="303030"/>
+                </a:solidFill>
+                <a:latin typeface="Consolas"/>
+              </a:rPr>
+              <a:t> </a:t>
+            </a:r>
+            <a:r>
+              <a:rPr sz="1100">
+                <a:solidFill>
+                  <a:srgbClr val="303030"/>
+                </a:solidFill>
+                <a:latin typeface="Consolas"/>
+              </a:rPr>
+              <a:t>=</a:t>
+            </a:r>
+            <a:r>
+              <a:rPr sz="1100">
+                <a:solidFill>
+                  <a:srgbClr val="303030"/>
+                </a:solidFill>
+                <a:latin typeface="Consolas"/>
+              </a:rPr>
+              <a:t> </a:t>
+            </a:r>
+            <a:r>
+              <a:rPr sz="1100">
+                <a:solidFill>
+                  <a:srgbClr val="303030"/>
+                </a:solidFill>
+                <a:latin typeface="Consolas"/>
+              </a:rPr>
+              <a:t>[</a:t>
             </a:r>
             <a:r>
               <a:rPr sz="1100" b="1">
@@ -13282,7 +14687,34 @@
                 </a:solidFill>
                 <a:latin typeface="Consolas"/>
               </a:rPr>
-              <a:t>(r) </a:t>
+              <a:t>(</a:t>
+            </a:r>
+            <a:r>
+              <a:rPr sz="1100">
+                <a:solidFill>
+                  <a:srgbClr val="303030"/>
+                </a:solidFill>
+                <a:latin typeface="Consolas"/>
+              </a:rPr>
+              <a:t>r</a:t>
+            </a:r>
+            <a:r>
+              <a:rPr sz="1100">
+                <a:solidFill>
+                  <a:srgbClr val="303030"/>
+                </a:solidFill>
+                <a:latin typeface="Consolas"/>
+              </a:rPr>
+              <a:t>)</a:t>
+            </a:r>
+            <a:r>
+              <a:rPr sz="1100">
+                <a:solidFill>
+                  <a:srgbClr val="303030"/>
+                </a:solidFill>
+                <a:latin typeface="Consolas"/>
+              </a:rPr>
+              <a:t> </a:t>
             </a:r>
             <a:r>
               <a:rPr sz="1100" b="1">
@@ -13300,7 +14732,25 @@
                 </a:solidFill>
                 <a:latin typeface="Consolas"/>
               </a:rPr>
-              <a:t> r </a:t>
+              <a:t> </a:t>
+            </a:r>
+            <a:r>
+              <a:rPr sz="1100">
+                <a:solidFill>
+                  <a:srgbClr val="303030"/>
+                </a:solidFill>
+                <a:latin typeface="Consolas"/>
+              </a:rPr>
+              <a:t>r</a:t>
+            </a:r>
+            <a:r>
+              <a:rPr sz="1100">
+                <a:solidFill>
+                  <a:srgbClr val="303030"/>
+                </a:solidFill>
+                <a:latin typeface="Consolas"/>
+              </a:rPr>
+              <a:t> </a:t>
             </a:r>
             <a:r>
               <a:rPr sz="1100" b="1">
@@ -13318,7 +14768,25 @@
                 </a:solidFill>
                 <a:latin typeface="Consolas"/>
               </a:rPr>
-              <a:t> pool]</a:t>
+              <a:t> </a:t>
+            </a:r>
+            <a:r>
+              <a:rPr sz="1100">
+                <a:solidFill>
+                  <a:srgbClr val="303030"/>
+                </a:solidFill>
+                <a:latin typeface="Consolas"/>
+              </a:rPr>
+              <a:t>pool</a:t>
+            </a:r>
+            <a:r>
+              <a:rPr sz="1100">
+                <a:solidFill>
+                  <a:srgbClr val="303030"/>
+                </a:solidFill>
+                <a:latin typeface="Consolas"/>
+              </a:rPr>
+              <a:t>]</a:t>
             </a:r>
           </a:p>
           <a:p>
@@ -13334,7 +14802,43 @@
                 </a:solidFill>
                 <a:latin typeface="Consolas"/>
               </a:rPr>
-              <a:t>    fused = </a:t>
+              <a:t>    </a:t>
+            </a:r>
+            <a:r>
+              <a:rPr sz="1100">
+                <a:solidFill>
+                  <a:srgbClr val="303030"/>
+                </a:solidFill>
+                <a:latin typeface="Consolas"/>
+              </a:rPr>
+              <a:t>fused</a:t>
+            </a:r>
+            <a:r>
+              <a:rPr sz="1100">
+                <a:solidFill>
+                  <a:srgbClr val="303030"/>
+                </a:solidFill>
+                <a:latin typeface="Consolas"/>
+              </a:rPr>
+              <a:t> </a:t>
+            </a:r>
+            <a:r>
+              <a:rPr sz="1100">
+                <a:solidFill>
+                  <a:srgbClr val="303030"/>
+                </a:solidFill>
+                <a:latin typeface="Consolas"/>
+              </a:rPr>
+              <a:t>=</a:t>
+            </a:r>
+            <a:r>
+              <a:rPr sz="1100">
+                <a:solidFill>
+                  <a:srgbClr val="303030"/>
+                </a:solidFill>
+                <a:latin typeface="Consolas"/>
+              </a:rPr>
+              <a:t> </a:t>
             </a:r>
             <a:r>
               <a:rPr sz="1100" b="1">
@@ -13352,7 +14856,52 @@
                 </a:solidFill>
                 <a:latin typeface="Consolas"/>
               </a:rPr>
-              <a:t>(pool, weights)</a:t>
+              <a:t>(</a:t>
+            </a:r>
+            <a:r>
+              <a:rPr sz="1100">
+                <a:solidFill>
+                  <a:srgbClr val="303030"/>
+                </a:solidFill>
+                <a:latin typeface="Consolas"/>
+              </a:rPr>
+              <a:t>pool</a:t>
+            </a:r>
+            <a:r>
+              <a:rPr sz="1100">
+                <a:solidFill>
+                  <a:srgbClr val="303030"/>
+                </a:solidFill>
+                <a:latin typeface="Consolas"/>
+              </a:rPr>
+              <a:t>,</a:t>
+            </a:r>
+            <a:r>
+              <a:rPr sz="1100">
+                <a:solidFill>
+                  <a:srgbClr val="303030"/>
+                </a:solidFill>
+                <a:latin typeface="Consolas"/>
+              </a:rPr>
+              <a:t> </a:t>
+            </a:r>
+            <a:r>
+              <a:rPr sz="1100">
+                <a:solidFill>
+                  <a:srgbClr val="303030"/>
+                </a:solidFill>
+                <a:latin typeface="Consolas"/>
+              </a:rPr>
+              <a:t>weights</a:t>
+            </a:r>
+            <a:r>
+              <a:rPr sz="1100">
+                <a:solidFill>
+                  <a:srgbClr val="303030"/>
+                </a:solidFill>
+                <a:latin typeface="Consolas"/>
+              </a:rPr>
+              <a:t>)</a:t>
             </a:r>
           </a:p>
           <a:p>
@@ -13386,7 +14935,43 @@
                 </a:solidFill>
                 <a:latin typeface="Consolas"/>
               </a:rPr>
-              <a:t> q.stage:</a:t>
+              <a:t> </a:t>
+            </a:r>
+            <a:r>
+              <a:rPr sz="1100">
+                <a:solidFill>
+                  <a:srgbClr val="303030"/>
+                </a:solidFill>
+                <a:latin typeface="Consolas"/>
+              </a:rPr>
+              <a:t>q</a:t>
+            </a:r>
+            <a:r>
+              <a:rPr sz="1100">
+                <a:solidFill>
+                  <a:srgbClr val="303030"/>
+                </a:solidFill>
+                <a:latin typeface="Consolas"/>
+              </a:rPr>
+              <a:t>.</a:t>
+            </a:r>
+            <a:r>
+              <a:rPr sz="1100">
+                <a:solidFill>
+                  <a:srgbClr val="303030"/>
+                </a:solidFill>
+                <a:latin typeface="Consolas"/>
+              </a:rPr>
+              <a:t>stage</a:t>
+            </a:r>
+            <a:r>
+              <a:rPr sz="1100">
+                <a:solidFill>
+                  <a:srgbClr val="303030"/>
+                </a:solidFill>
+                <a:latin typeface="Consolas"/>
+              </a:rPr>
+              <a:t>:</a:t>
             </a:r>
           </a:p>
           <a:p>
@@ -13402,7 +14987,43 @@
                 </a:solidFill>
                 <a:latin typeface="Consolas"/>
               </a:rPr>
-              <a:t>        fused = </a:t>
+              <a:t>        </a:t>
+            </a:r>
+            <a:r>
+              <a:rPr sz="1100">
+                <a:solidFill>
+                  <a:srgbClr val="303030"/>
+                </a:solidFill>
+                <a:latin typeface="Consolas"/>
+              </a:rPr>
+              <a:t>fused</a:t>
+            </a:r>
+            <a:r>
+              <a:rPr sz="1100">
+                <a:solidFill>
+                  <a:srgbClr val="303030"/>
+                </a:solidFill>
+                <a:latin typeface="Consolas"/>
+              </a:rPr>
+              <a:t> </a:t>
+            </a:r>
+            <a:r>
+              <a:rPr sz="1100">
+                <a:solidFill>
+                  <a:srgbClr val="303030"/>
+                </a:solidFill>
+                <a:latin typeface="Consolas"/>
+              </a:rPr>
+              <a:t>=</a:t>
+            </a:r>
+            <a:r>
+              <a:rPr sz="1100">
+                <a:solidFill>
+                  <a:srgbClr val="303030"/>
+                </a:solidFill>
+                <a:latin typeface="Consolas"/>
+              </a:rPr>
+              <a:t> </a:t>
             </a:r>
             <a:r>
               <a:rPr sz="1100" b="1">
@@ -13420,7 +15041,70 @@
                 </a:solidFill>
                 <a:latin typeface="Consolas"/>
               </a:rPr>
-              <a:t>(fused, q.stage)</a:t>
+              <a:t>(</a:t>
+            </a:r>
+            <a:r>
+              <a:rPr sz="1100">
+                <a:solidFill>
+                  <a:srgbClr val="303030"/>
+                </a:solidFill>
+                <a:latin typeface="Consolas"/>
+              </a:rPr>
+              <a:t>fused</a:t>
+            </a:r>
+            <a:r>
+              <a:rPr sz="1100">
+                <a:solidFill>
+                  <a:srgbClr val="303030"/>
+                </a:solidFill>
+                <a:latin typeface="Consolas"/>
+              </a:rPr>
+              <a:t>,</a:t>
+            </a:r>
+            <a:r>
+              <a:rPr sz="1100">
+                <a:solidFill>
+                  <a:srgbClr val="303030"/>
+                </a:solidFill>
+                <a:latin typeface="Consolas"/>
+              </a:rPr>
+              <a:t> </a:t>
+            </a:r>
+            <a:r>
+              <a:rPr sz="1100">
+                <a:solidFill>
+                  <a:srgbClr val="303030"/>
+                </a:solidFill>
+                <a:latin typeface="Consolas"/>
+              </a:rPr>
+              <a:t>q</a:t>
+            </a:r>
+            <a:r>
+              <a:rPr sz="1100">
+                <a:solidFill>
+                  <a:srgbClr val="303030"/>
+                </a:solidFill>
+                <a:latin typeface="Consolas"/>
+              </a:rPr>
+              <a:t>.</a:t>
+            </a:r>
+            <a:r>
+              <a:rPr sz="1100">
+                <a:solidFill>
+                  <a:srgbClr val="303030"/>
+                </a:solidFill>
+                <a:latin typeface="Consolas"/>
+              </a:rPr>
+              <a:t>stage</a:t>
+            </a:r>
+            <a:r>
+              <a:rPr sz="1100">
+                <a:solidFill>
+                  <a:srgbClr val="303030"/>
+                </a:solidFill>
+                <a:latin typeface="Consolas"/>
+              </a:rPr>
+              <a:t>)</a:t>
             </a:r>
           </a:p>
           <a:p>
@@ -13436,7 +15120,70 @@
                 </a:solidFill>
                 <a:latin typeface="Consolas"/>
               </a:rPr>
-              <a:t>    ranked = [x </a:t>
+              <a:t>    </a:t>
+            </a:r>
+            <a:r>
+              <a:rPr sz="1100">
+                <a:solidFill>
+                  <a:srgbClr val="303030"/>
+                </a:solidFill>
+                <a:latin typeface="Consolas"/>
+              </a:rPr>
+              <a:t>ranked</a:t>
+            </a:r>
+            <a:r>
+              <a:rPr sz="1100">
+                <a:solidFill>
+                  <a:srgbClr val="303030"/>
+                </a:solidFill>
+                <a:latin typeface="Consolas"/>
+              </a:rPr>
+              <a:t> </a:t>
+            </a:r>
+            <a:r>
+              <a:rPr sz="1100">
+                <a:solidFill>
+                  <a:srgbClr val="303030"/>
+                </a:solidFill>
+                <a:latin typeface="Consolas"/>
+              </a:rPr>
+              <a:t>=</a:t>
+            </a:r>
+            <a:r>
+              <a:rPr sz="1100">
+                <a:solidFill>
+                  <a:srgbClr val="303030"/>
+                </a:solidFill>
+                <a:latin typeface="Consolas"/>
+              </a:rPr>
+              <a:t> </a:t>
+            </a:r>
+            <a:r>
+              <a:rPr sz="1100">
+                <a:solidFill>
+                  <a:srgbClr val="303030"/>
+                </a:solidFill>
+                <a:latin typeface="Consolas"/>
+              </a:rPr>
+              <a:t>[</a:t>
+            </a:r>
+            <a:r>
+              <a:rPr sz="1100">
+                <a:solidFill>
+                  <a:srgbClr val="303030"/>
+                </a:solidFill>
+                <a:latin typeface="Consolas"/>
+              </a:rPr>
+              <a:t>x</a:t>
+            </a:r>
+            <a:r>
+              <a:rPr sz="1100">
+                <a:solidFill>
+                  <a:srgbClr val="303030"/>
+                </a:solidFill>
+                <a:latin typeface="Consolas"/>
+              </a:rPr>
+              <a:t> </a:t>
             </a:r>
             <a:r>
               <a:rPr sz="1100" b="1">
@@ -13454,7 +15201,25 @@
                 </a:solidFill>
                 <a:latin typeface="Consolas"/>
               </a:rPr>
-              <a:t> x </a:t>
+              <a:t> </a:t>
+            </a:r>
+            <a:r>
+              <a:rPr sz="1100">
+                <a:solidFill>
+                  <a:srgbClr val="303030"/>
+                </a:solidFill>
+                <a:latin typeface="Consolas"/>
+              </a:rPr>
+              <a:t>x</a:t>
+            </a:r>
+            <a:r>
+              <a:rPr sz="1100">
+                <a:solidFill>
+                  <a:srgbClr val="303030"/>
+                </a:solidFill>
+                <a:latin typeface="Consolas"/>
+              </a:rPr>
+              <a:t> </a:t>
             </a:r>
             <a:r>
               <a:rPr sz="1100" b="1">
@@ -13490,7 +15255,52 @@
                 </a:solidFill>
                 <a:latin typeface="Consolas"/>
               </a:rPr>
-              <a:t>(fused, reverse=</a:t>
+              <a:t>(</a:t>
+            </a:r>
+            <a:r>
+              <a:rPr sz="1100">
+                <a:solidFill>
+                  <a:srgbClr val="303030"/>
+                </a:solidFill>
+                <a:latin typeface="Consolas"/>
+              </a:rPr>
+              <a:t>fused</a:t>
+            </a:r>
+            <a:r>
+              <a:rPr sz="1100">
+                <a:solidFill>
+                  <a:srgbClr val="303030"/>
+                </a:solidFill>
+                <a:latin typeface="Consolas"/>
+              </a:rPr>
+              <a:t>,</a:t>
+            </a:r>
+            <a:r>
+              <a:rPr sz="1100">
+                <a:solidFill>
+                  <a:srgbClr val="303030"/>
+                </a:solidFill>
+                <a:latin typeface="Consolas"/>
+              </a:rPr>
+              <a:t> </a:t>
+            </a:r>
+            <a:r>
+              <a:rPr sz="1100">
+                <a:solidFill>
+                  <a:srgbClr val="303030"/>
+                </a:solidFill>
+                <a:latin typeface="Consolas"/>
+              </a:rPr>
+              <a:t>reverse</a:t>
+            </a:r>
+            <a:r>
+              <a:rPr sz="1100">
+                <a:solidFill>
+                  <a:srgbClr val="303030"/>
+                </a:solidFill>
+                <a:latin typeface="Consolas"/>
+              </a:rPr>
+              <a:t>=</a:t>
             </a:r>
             <a:r>
               <a:rPr sz="1100" b="1">
@@ -13542,7 +15352,124 @@
                 </a:solidFill>
                 <a:latin typeface="Consolas"/>
               </a:rPr>
-              <a:t> x.score &gt;= min_score][:top_k]</a:t>
+              <a:t> </a:t>
+            </a:r>
+            <a:r>
+              <a:rPr sz="1100">
+                <a:solidFill>
+                  <a:srgbClr val="303030"/>
+                </a:solidFill>
+                <a:latin typeface="Consolas"/>
+              </a:rPr>
+              <a:t>x</a:t>
+            </a:r>
+            <a:r>
+              <a:rPr sz="1100">
+                <a:solidFill>
+                  <a:srgbClr val="303030"/>
+                </a:solidFill>
+                <a:latin typeface="Consolas"/>
+              </a:rPr>
+              <a:t>.</a:t>
+            </a:r>
+            <a:r>
+              <a:rPr sz="1100">
+                <a:solidFill>
+                  <a:srgbClr val="303030"/>
+                </a:solidFill>
+                <a:latin typeface="Consolas"/>
+              </a:rPr>
+              <a:t>score</a:t>
+            </a:r>
+            <a:r>
+              <a:rPr sz="1100">
+                <a:solidFill>
+                  <a:srgbClr val="303030"/>
+                </a:solidFill>
+                <a:latin typeface="Consolas"/>
+              </a:rPr>
+              <a:t> </a:t>
+            </a:r>
+            <a:r>
+              <a:rPr sz="1100">
+                <a:solidFill>
+                  <a:srgbClr val="303030"/>
+                </a:solidFill>
+                <a:latin typeface="Consolas"/>
+              </a:rPr>
+              <a:t>&gt;</a:t>
+            </a:r>
+            <a:r>
+              <a:rPr sz="1100">
+                <a:solidFill>
+                  <a:srgbClr val="303030"/>
+                </a:solidFill>
+                <a:latin typeface="Consolas"/>
+              </a:rPr>
+              <a:t>=</a:t>
+            </a:r>
+            <a:r>
+              <a:rPr sz="1100">
+                <a:solidFill>
+                  <a:srgbClr val="303030"/>
+                </a:solidFill>
+                <a:latin typeface="Consolas"/>
+              </a:rPr>
+              <a:t> </a:t>
+            </a:r>
+            <a:r>
+              <a:rPr sz="1100">
+                <a:solidFill>
+                  <a:srgbClr val="303030"/>
+                </a:solidFill>
+                <a:latin typeface="Consolas"/>
+              </a:rPr>
+              <a:t>min_score</a:t>
+            </a:r>
+            <a:r>
+              <a:rPr sz="1100">
+                <a:solidFill>
+                  <a:srgbClr val="303030"/>
+                </a:solidFill>
+                <a:latin typeface="Consolas"/>
+              </a:rPr>
+              <a:t>]</a:t>
+            </a:r>
+            <a:r>
+              <a:rPr sz="1100">
+                <a:solidFill>
+                  <a:srgbClr val="303030"/>
+                </a:solidFill>
+                <a:latin typeface="Consolas"/>
+              </a:rPr>
+              <a:t>[</a:t>
+            </a:r>
+            <a:r>
+              <a:rPr sz="1100">
+                <a:solidFill>
+                  <a:srgbClr val="303030"/>
+                </a:solidFill>
+                <a:latin typeface="Consolas"/>
+              </a:rPr>
+              <a:t>:</a:t>
+            </a:r>
+            <a:r>
+              <a:rPr sz="1100">
+                <a:solidFill>
+                  <a:srgbClr val="303030"/>
+                </a:solidFill>
+                <a:latin typeface="Consolas"/>
+              </a:rPr>
+              <a:t>top_k</a:t>
+            </a:r>
+            <a:r>
+              <a:rPr sz="1100">
+                <a:solidFill>
+                  <a:srgbClr val="303030"/>
+                </a:solidFill>
+                <a:latin typeface="Consolas"/>
+              </a:rPr>
+              <a:t>]</a:t>
             </a:r>
           </a:p>
           <a:p>
@@ -13576,7 +15503,25 @@
                 </a:solidFill>
                 <a:latin typeface="Consolas"/>
               </a:rPr>
-              <a:t> r </a:t>
+              <a:t> </a:t>
+            </a:r>
+            <a:r>
+              <a:rPr sz="1100">
+                <a:solidFill>
+                  <a:srgbClr val="303030"/>
+                </a:solidFill>
+                <a:latin typeface="Consolas"/>
+              </a:rPr>
+              <a:t>r</a:t>
+            </a:r>
+            <a:r>
+              <a:rPr sz="1100">
+                <a:solidFill>
+                  <a:srgbClr val="303030"/>
+                </a:solidFill>
+                <a:latin typeface="Consolas"/>
+              </a:rPr>
+              <a:t> </a:t>
             </a:r>
             <a:r>
               <a:rPr sz="1100" b="1">
@@ -13594,7 +15539,25 @@
                 </a:solidFill>
                 <a:latin typeface="Consolas"/>
               </a:rPr>
-              <a:t> ranked:</a:t>
+              <a:t> </a:t>
+            </a:r>
+            <a:r>
+              <a:rPr sz="1100">
+                <a:solidFill>
+                  <a:srgbClr val="303030"/>
+                </a:solidFill>
+                <a:latin typeface="Consolas"/>
+              </a:rPr>
+              <a:t>ranked</a:t>
+            </a:r>
+            <a:r>
+              <a:rPr sz="1100">
+                <a:solidFill>
+                  <a:srgbClr val="303030"/>
+                </a:solidFill>
+                <a:latin typeface="Consolas"/>
+              </a:rPr>
+              <a:t>:</a:t>
             </a:r>
           </a:p>
           <a:p>
@@ -13610,7 +15573,43 @@
                 </a:solidFill>
                 <a:latin typeface="Consolas"/>
               </a:rPr>
-              <a:t>        r.entry.</a:t>
+              <a:t>        </a:t>
+            </a:r>
+            <a:r>
+              <a:rPr sz="1100">
+                <a:solidFill>
+                  <a:srgbClr val="303030"/>
+                </a:solidFill>
+                <a:latin typeface="Consolas"/>
+              </a:rPr>
+              <a:t>r</a:t>
+            </a:r>
+            <a:r>
+              <a:rPr sz="1100">
+                <a:solidFill>
+                  <a:srgbClr val="303030"/>
+                </a:solidFill>
+                <a:latin typeface="Consolas"/>
+              </a:rPr>
+              <a:t>.</a:t>
+            </a:r>
+            <a:r>
+              <a:rPr sz="1100">
+                <a:solidFill>
+                  <a:srgbClr val="303030"/>
+                </a:solidFill>
+                <a:latin typeface="Consolas"/>
+              </a:rPr>
+              <a:t>entry</a:t>
+            </a:r>
+            <a:r>
+              <a:rPr sz="1100">
+                <a:solidFill>
+                  <a:srgbClr val="303030"/>
+                </a:solidFill>
+                <a:latin typeface="Consolas"/>
+              </a:rPr>
+              <a:t>.</a:t>
             </a:r>
             <a:r>
               <a:rPr sz="1100" b="1">
@@ -13628,7 +15627,16 @@
                 </a:solidFill>
                 <a:latin typeface="Consolas"/>
               </a:rPr>
-              <a:t>()</a:t>
+              <a:t>(</a:t>
+            </a:r>
+            <a:r>
+              <a:rPr sz="1100">
+                <a:solidFill>
+                  <a:srgbClr val="303030"/>
+                </a:solidFill>
+                <a:latin typeface="Consolas"/>
+              </a:rPr>
+              <a:t>)</a:t>
             </a:r>
           </a:p>
           <a:p>
@@ -13662,7 +15670,16 @@
                 </a:solidFill>
                 <a:latin typeface="Consolas"/>
               </a:rPr>
-              <a:t> ranked</a:t>
+              <a:t> </a:t>
+            </a:r>
+            <a:r>
+              <a:rPr sz="1100">
+                <a:solidFill>
+                  <a:srgbClr val="303030"/>
+                </a:solidFill>
+                <a:latin typeface="Consolas"/>
+              </a:rPr>
+              <a:t>ranked</a:t>
             </a:r>
           </a:p>
         </p:txBody>
@@ -13708,7 +15725,6 @@
           <a:lstStyle/>
           <a:p>
             <a:pPr algn="ctr"/>
-            <a:endParaRPr/>
           </a:p>
         </p:txBody>
       </p:sp>
@@ -13791,7 +15807,7 @@
 </file>
 
 <file path=ppt/slides/slide17.xml><?xml version="1.0" encoding="utf-8"?>
-<p:sld xmlns:a="http://schemas.openxmlformats.org/drawingml/2006/main" xmlns:r="http://schemas.openxmlformats.org/officeDocument/2006/relationships" xmlns:p="http://schemas.openxmlformats.org/presentationml/2006/main">
+<p:sld xmlns:a="http://schemas.openxmlformats.org/drawingml/2006/main" xmlns:p="http://schemas.openxmlformats.org/presentationml/2006/main" xmlns:r="http://schemas.openxmlformats.org/officeDocument/2006/relationships">
   <p:cSld>
     <p:spTree>
       <p:nvGrpSpPr>
@@ -13799,14 +15815,7 @@
         <p:cNvGrpSpPr/>
         <p:nvPr/>
       </p:nvGrpSpPr>
-      <p:grpSpPr>
-        <a:xfrm>
-          <a:off x="0" y="0"/>
-          <a:ext cx="0" cy="0"/>
-          <a:chOff x="0" y="0"/>
-          <a:chExt cx="0" cy="0"/>
-        </a:xfrm>
-      </p:grpSpPr>
+      <p:grpSpPr/>
       <p:sp>
         <p:nvSpPr>
           <p:cNvPr id="2" name="TextBox 1"/>
@@ -13883,7 +15892,6 @@
           <a:lstStyle/>
           <a:p>
             <a:pPr algn="ctr"/>
-            <a:endParaRPr/>
           </a:p>
         </p:txBody>
       </p:sp>
@@ -13963,7 +15971,6 @@
           <a:lstStyle/>
           <a:p>
             <a:pPr algn="ctr"/>
-            <a:endParaRPr/>
           </a:p>
         </p:txBody>
       </p:sp>
@@ -14113,7 +16120,6 @@
           <a:lstStyle/>
           <a:p>
             <a:pPr algn="ctr"/>
-            <a:endParaRPr/>
           </a:p>
         </p:txBody>
       </p:sp>
@@ -14263,7 +16269,6 @@
           <a:lstStyle/>
           <a:p>
             <a:pPr algn="ctr"/>
-            <a:endParaRPr/>
           </a:p>
         </p:txBody>
       </p:sp>
@@ -14325,7 +16330,15 @@
           <a:lstStyle/>
           <a:p>
             <a:pPr algn="l"/>
-            <a:endParaRPr/>
+            <a:r>
+              <a:rPr sz="2000" b="1">
+                <a:solidFill>
+                  <a:srgbClr val="1F3A68"/>
+                </a:solidFill>
+                <a:latin typeface="Microsoft YaHei"/>
+              </a:rPr>
+              <a:t/>
+            </a:r>
           </a:p>
         </p:txBody>
       </p:sp>
@@ -14405,7 +16418,6 @@
           <a:lstStyle/>
           <a:p>
             <a:pPr algn="ctr"/>
-            <a:endParaRPr/>
           </a:p>
         </p:txBody>
       </p:sp>
@@ -14450,7 +16462,6 @@
           <a:lstStyle/>
           <a:p>
             <a:pPr algn="ctr"/>
-            <a:endParaRPr/>
           </a:p>
         </p:txBody>
       </p:sp>
@@ -14532,7 +16543,6 @@
           <a:lstStyle/>
           <a:p>
             <a:pPr algn="ctr"/>
-            <a:endParaRPr/>
           </a:p>
         </p:txBody>
       </p:sp>
@@ -14597,7 +16607,61 @@
                 </a:solidFill>
                 <a:latin typeface="Consolas"/>
               </a:rPr>
-              <a:t>(review, session_id):</a:t>
+              <a:t>(</a:t>
+            </a:r>
+            <a:r>
+              <a:rPr sz="1100">
+                <a:solidFill>
+                  <a:srgbClr val="303030"/>
+                </a:solidFill>
+                <a:latin typeface="Consolas"/>
+              </a:rPr>
+              <a:t>review</a:t>
+            </a:r>
+            <a:r>
+              <a:rPr sz="1100">
+                <a:solidFill>
+                  <a:srgbClr val="303030"/>
+                </a:solidFill>
+                <a:latin typeface="Consolas"/>
+              </a:rPr>
+              <a:t>,</a:t>
+            </a:r>
+            <a:r>
+              <a:rPr sz="1100">
+                <a:solidFill>
+                  <a:srgbClr val="303030"/>
+                </a:solidFill>
+                <a:latin typeface="Consolas"/>
+              </a:rPr>
+              <a:t> </a:t>
+            </a:r>
+            <a:r>
+              <a:rPr sz="1100">
+                <a:solidFill>
+                  <a:srgbClr val="303030"/>
+                </a:solidFill>
+                <a:latin typeface="Consolas"/>
+              </a:rPr>
+              <a:t>session_id</a:t>
+            </a:r>
+            <a:r>
+              <a:rPr sz="1100">
+                <a:solidFill>
+                  <a:srgbClr val="303030"/>
+                </a:solidFill>
+                <a:latin typeface="Consolas"/>
+              </a:rPr>
+              <a:t>)</a:t>
+            </a:r>
+            <a:r>
+              <a:rPr sz="1100">
+                <a:solidFill>
+                  <a:srgbClr val="303030"/>
+                </a:solidFill>
+                <a:latin typeface="Consolas"/>
+              </a:rPr>
+              <a:t>:</a:t>
             </a:r>
           </a:p>
           <a:p>
@@ -14613,7 +16677,61 @@
                 </a:solidFill>
                 <a:latin typeface="Consolas"/>
               </a:rPr>
-              <a:t>    ops = llm.</a:t>
+              <a:t>    </a:t>
+            </a:r>
+            <a:r>
+              <a:rPr sz="1100">
+                <a:solidFill>
+                  <a:srgbClr val="303030"/>
+                </a:solidFill>
+                <a:latin typeface="Consolas"/>
+              </a:rPr>
+              <a:t>ops</a:t>
+            </a:r>
+            <a:r>
+              <a:rPr sz="1100">
+                <a:solidFill>
+                  <a:srgbClr val="303030"/>
+                </a:solidFill>
+                <a:latin typeface="Consolas"/>
+              </a:rPr>
+              <a:t> </a:t>
+            </a:r>
+            <a:r>
+              <a:rPr sz="1100">
+                <a:solidFill>
+                  <a:srgbClr val="303030"/>
+                </a:solidFill>
+                <a:latin typeface="Consolas"/>
+              </a:rPr>
+              <a:t>=</a:t>
+            </a:r>
+            <a:r>
+              <a:rPr sz="1100">
+                <a:solidFill>
+                  <a:srgbClr val="303030"/>
+                </a:solidFill>
+                <a:latin typeface="Consolas"/>
+              </a:rPr>
+              <a:t> </a:t>
+            </a:r>
+            <a:r>
+              <a:rPr sz="1100">
+                <a:solidFill>
+                  <a:srgbClr val="303030"/>
+                </a:solidFill>
+                <a:latin typeface="Consolas"/>
+              </a:rPr>
+              <a:t>llm</a:t>
+            </a:r>
+            <a:r>
+              <a:rPr sz="1100">
+                <a:solidFill>
+                  <a:srgbClr val="303030"/>
+                </a:solidFill>
+                <a:latin typeface="Consolas"/>
+              </a:rPr>
+              <a:t>.</a:t>
             </a:r>
             <a:r>
               <a:rPr sz="1100" b="1">
@@ -14631,7 +16749,25 @@
                 </a:solidFill>
                 <a:latin typeface="Consolas"/>
               </a:rPr>
-              <a:t>(review)</a:t>
+              <a:t>(</a:t>
+            </a:r>
+            <a:r>
+              <a:rPr sz="1100">
+                <a:solidFill>
+                  <a:srgbClr val="303030"/>
+                </a:solidFill>
+                <a:latin typeface="Consolas"/>
+              </a:rPr>
+              <a:t>review</a:t>
+            </a:r>
+            <a:r>
+              <a:rPr sz="1100">
+                <a:solidFill>
+                  <a:srgbClr val="303030"/>
+                </a:solidFill>
+                <a:latin typeface="Consolas"/>
+              </a:rPr>
+              <a:t>)</a:t>
             </a:r>
           </a:p>
           <a:p>
@@ -14665,7 +16801,25 @@
                 </a:solidFill>
                 <a:latin typeface="Consolas"/>
               </a:rPr>
-              <a:t> op </a:t>
+              <a:t> </a:t>
+            </a:r>
+            <a:r>
+              <a:rPr sz="1100">
+                <a:solidFill>
+                  <a:srgbClr val="303030"/>
+                </a:solidFill>
+                <a:latin typeface="Consolas"/>
+              </a:rPr>
+              <a:t>op</a:t>
+            </a:r>
+            <a:r>
+              <a:rPr sz="1100">
+                <a:solidFill>
+                  <a:srgbClr val="303030"/>
+                </a:solidFill>
+                <a:latin typeface="Consolas"/>
+              </a:rPr>
+              <a:t> </a:t>
             </a:r>
             <a:r>
               <a:rPr sz="1100" b="1">
@@ -14683,7 +16837,25 @@
                 </a:solidFill>
                 <a:latin typeface="Consolas"/>
               </a:rPr>
-              <a:t> ops:</a:t>
+              <a:t> </a:t>
+            </a:r>
+            <a:r>
+              <a:rPr sz="1100">
+                <a:solidFill>
+                  <a:srgbClr val="303030"/>
+                </a:solidFill>
+                <a:latin typeface="Consolas"/>
+              </a:rPr>
+              <a:t>ops</a:t>
+            </a:r>
+            <a:r>
+              <a:rPr sz="1100">
+                <a:solidFill>
+                  <a:srgbClr val="303030"/>
+                </a:solidFill>
+                <a:latin typeface="Consolas"/>
+              </a:rPr>
+              <a:t>:</a:t>
             </a:r>
           </a:p>
           <a:p>
@@ -14735,7 +16907,25 @@
                 </a:solidFill>
                 <a:latin typeface="Consolas"/>
               </a:rPr>
-              <a:t> boundary.</a:t>
+              <a:t> </a:t>
+            </a:r>
+            <a:r>
+              <a:rPr sz="1100">
+                <a:solidFill>
+                  <a:srgbClr val="303030"/>
+                </a:solidFill>
+                <a:latin typeface="Consolas"/>
+              </a:rPr>
+              <a:t>boundary</a:t>
+            </a:r>
+            <a:r>
+              <a:rPr sz="1100">
+                <a:solidFill>
+                  <a:srgbClr val="303030"/>
+                </a:solidFill>
+                <a:latin typeface="Consolas"/>
+              </a:rPr>
+              <a:t>.</a:t>
             </a:r>
             <a:r>
               <a:rPr sz="1100" b="1">
@@ -14753,7 +16943,52 @@
                 </a:solidFill>
                 <a:latin typeface="Consolas"/>
               </a:rPr>
-              <a:t>(op.content):</a:t>
+              <a:t>(</a:t>
+            </a:r>
+            <a:r>
+              <a:rPr sz="1100">
+                <a:solidFill>
+                  <a:srgbClr val="303030"/>
+                </a:solidFill>
+                <a:latin typeface="Consolas"/>
+              </a:rPr>
+              <a:t>op</a:t>
+            </a:r>
+            <a:r>
+              <a:rPr sz="1100">
+                <a:solidFill>
+                  <a:srgbClr val="303030"/>
+                </a:solidFill>
+                <a:latin typeface="Consolas"/>
+              </a:rPr>
+              <a:t>.</a:t>
+            </a:r>
+            <a:r>
+              <a:rPr sz="1100">
+                <a:solidFill>
+                  <a:srgbClr val="303030"/>
+                </a:solidFill>
+                <a:latin typeface="Consolas"/>
+              </a:rPr>
+              <a:t>content</a:t>
+            </a:r>
+            <a:r>
+              <a:rPr sz="1100">
+                <a:solidFill>
+                  <a:srgbClr val="303030"/>
+                </a:solidFill>
+                <a:latin typeface="Consolas"/>
+              </a:rPr>
+              <a:t>)</a:t>
+            </a:r>
+            <a:r>
+              <a:rPr sz="1100">
+                <a:solidFill>
+                  <a:srgbClr val="303030"/>
+                </a:solidFill>
+                <a:latin typeface="Consolas"/>
+              </a:rPr>
+              <a:t>:</a:t>
             </a:r>
           </a:p>
           <a:p>
@@ -14830,7 +17065,52 @@
                 </a:solidFill>
                 <a:latin typeface="Consolas"/>
               </a:rPr>
-              <a:t>(op) is </a:t>
+              <a:t>(</a:t>
+            </a:r>
+            <a:r>
+              <a:rPr sz="1100">
+                <a:solidFill>
+                  <a:srgbClr val="303030"/>
+                </a:solidFill>
+                <a:latin typeface="Consolas"/>
+              </a:rPr>
+              <a:t>op</a:t>
+            </a:r>
+            <a:r>
+              <a:rPr sz="1100">
+                <a:solidFill>
+                  <a:srgbClr val="303030"/>
+                </a:solidFill>
+                <a:latin typeface="Consolas"/>
+              </a:rPr>
+              <a:t>)</a:t>
+            </a:r>
+            <a:r>
+              <a:rPr sz="1100">
+                <a:solidFill>
+                  <a:srgbClr val="303030"/>
+                </a:solidFill>
+                <a:latin typeface="Consolas"/>
+              </a:rPr>
+              <a:t> </a:t>
+            </a:r>
+            <a:r>
+              <a:rPr sz="1100">
+                <a:solidFill>
+                  <a:srgbClr val="303030"/>
+                </a:solidFill>
+                <a:latin typeface="Consolas"/>
+              </a:rPr>
+              <a:t>is</a:t>
+            </a:r>
+            <a:r>
+              <a:rPr sz="1100">
+                <a:solidFill>
+                  <a:srgbClr val="303030"/>
+                </a:solidFill>
+                <a:latin typeface="Consolas"/>
+              </a:rPr>
+              <a:t> </a:t>
             </a:r>
             <a:r>
               <a:rPr sz="1100" b="1">
@@ -14864,7 +17144,52 @@
                 </a:solidFill>
                 <a:latin typeface="Consolas"/>
               </a:rPr>
-              <a:t>            skipped += </a:t>
+              <a:t>            </a:t>
+            </a:r>
+            <a:r>
+              <a:rPr sz="1100">
+                <a:solidFill>
+                  <a:srgbClr val="303030"/>
+                </a:solidFill>
+                <a:latin typeface="Consolas"/>
+              </a:rPr>
+              <a:t>skipped</a:t>
+            </a:r>
+            <a:r>
+              <a:rPr sz="1100">
+                <a:solidFill>
+                  <a:srgbClr val="303030"/>
+                </a:solidFill>
+                <a:latin typeface="Consolas"/>
+              </a:rPr>
+              <a:t> </a:t>
+            </a:r>
+            <a:r>
+              <a:rPr sz="1100">
+                <a:solidFill>
+                  <a:srgbClr val="303030"/>
+                </a:solidFill>
+                <a:latin typeface="Consolas"/>
+              </a:rPr>
+              <a:t>+</a:t>
+            </a:r>
+            <a:r>
+              <a:rPr sz="1100">
+                <a:solidFill>
+                  <a:srgbClr val="303030"/>
+                </a:solidFill>
+                <a:latin typeface="Consolas"/>
+              </a:rPr>
+              <a:t>=</a:t>
+            </a:r>
+            <a:r>
+              <a:rPr sz="1100">
+                <a:solidFill>
+                  <a:srgbClr val="303030"/>
+                </a:solidFill>
+                <a:latin typeface="Consolas"/>
+              </a:rPr>
+              <a:t> </a:t>
             </a:r>
             <a:r>
               <a:rPr sz="1100">
@@ -14907,7 +17232,16 @@
                 </a:solidFill>
                 <a:latin typeface="Consolas"/>
               </a:rPr>
-              <a:t>()</a:t>
+              <a:t>(</a:t>
+            </a:r>
+            <a:r>
+              <a:rPr sz="1100">
+                <a:solidFill>
+                  <a:srgbClr val="303030"/>
+                </a:solidFill>
+                <a:latin typeface="Consolas"/>
+              </a:rPr>
+              <a:t>)</a:t>
             </a:r>
           </a:p>
           <a:p>
@@ -14941,7 +17275,16 @@
                 </a:solidFill>
                 <a:latin typeface="Consolas"/>
               </a:rPr>
-              <a:t>()</a:t>
+              <a:t>(</a:t>
+            </a:r>
+            <a:r>
+              <a:rPr sz="1100">
+                <a:solidFill>
+                  <a:srgbClr val="303030"/>
+                </a:solidFill>
+                <a:latin typeface="Consolas"/>
+              </a:rPr>
+              <a:t>)</a:t>
             </a:r>
           </a:p>
           <a:p>
@@ -14993,7 +17336,61 @@
                 </a:solidFill>
                 <a:latin typeface="Consolas"/>
               </a:rPr>
-              <a:t>(new_experiences) &gt;= </a:t>
+              <a:t>(</a:t>
+            </a:r>
+            <a:r>
+              <a:rPr sz="1100">
+                <a:solidFill>
+                  <a:srgbClr val="303030"/>
+                </a:solidFill>
+                <a:latin typeface="Consolas"/>
+              </a:rPr>
+              <a:t>new_experiences</a:t>
+            </a:r>
+            <a:r>
+              <a:rPr sz="1100">
+                <a:solidFill>
+                  <a:srgbClr val="303030"/>
+                </a:solidFill>
+                <a:latin typeface="Consolas"/>
+              </a:rPr>
+              <a:t>)</a:t>
+            </a:r>
+            <a:r>
+              <a:rPr sz="1100">
+                <a:solidFill>
+                  <a:srgbClr val="303030"/>
+                </a:solidFill>
+                <a:latin typeface="Consolas"/>
+              </a:rPr>
+              <a:t> </a:t>
+            </a:r>
+            <a:r>
+              <a:rPr sz="1100">
+                <a:solidFill>
+                  <a:srgbClr val="303030"/>
+                </a:solidFill>
+                <a:latin typeface="Consolas"/>
+              </a:rPr>
+              <a:t>&gt;</a:t>
+            </a:r>
+            <a:r>
+              <a:rPr sz="1100">
+                <a:solidFill>
+                  <a:srgbClr val="303030"/>
+                </a:solidFill>
+                <a:latin typeface="Consolas"/>
+              </a:rPr>
+              <a:t>=</a:t>
+            </a:r>
+            <a:r>
+              <a:rPr sz="1100">
+                <a:solidFill>
+                  <a:srgbClr val="303030"/>
+                </a:solidFill>
+                <a:latin typeface="Consolas"/>
+              </a:rPr>
+              <a:t> </a:t>
             </a:r>
             <a:r>
               <a:rPr sz="1100">
@@ -15045,7 +17442,16 @@
                 </a:solidFill>
                 <a:latin typeface="Consolas"/>
               </a:rPr>
-              <a:t>()</a:t>
+              <a:t>(</a:t>
+            </a:r>
+            <a:r>
+              <a:rPr sz="1100">
+                <a:solidFill>
+                  <a:srgbClr val="303030"/>
+                </a:solidFill>
+                <a:latin typeface="Consolas"/>
+              </a:rPr>
+              <a:t>)</a:t>
             </a:r>
           </a:p>
           <a:p>
@@ -15054,12 +17460,6 @@
                 <a:spcPts val="200"/>
               </a:spcAft>
             </a:pPr>
-            <a:endParaRPr sz="1100">
-              <a:solidFill>
-                <a:srgbClr val="303030"/>
-              </a:solidFill>
-              <a:latin typeface="Consolas"/>
-            </a:endParaRPr>
           </a:p>
           <a:p>
             <a:pPr>
@@ -15090,7 +17490,34 @@
                 </a:solidFill>
                 <a:latin typeface="Consolas"/>
               </a:rPr>
-              <a:t>R = </a:t>
+              <a:t>R</a:t>
+            </a:r>
+            <a:r>
+              <a:rPr sz="1100">
+                <a:solidFill>
+                  <a:srgbClr val="303030"/>
+                </a:solidFill>
+                <a:latin typeface="Consolas"/>
+              </a:rPr>
+              <a:t> </a:t>
+            </a:r>
+            <a:r>
+              <a:rPr sz="1100">
+                <a:solidFill>
+                  <a:srgbClr val="303030"/>
+                </a:solidFill>
+                <a:latin typeface="Consolas"/>
+              </a:rPr>
+              <a:t>=</a:t>
+            </a:r>
+            <a:r>
+              <a:rPr sz="1100">
+                <a:solidFill>
+                  <a:srgbClr val="303030"/>
+                </a:solidFill>
+                <a:latin typeface="Consolas"/>
+              </a:rPr>
+              <a:t> </a:t>
             </a:r>
             <a:r>
               <a:rPr sz="1100" b="1">
@@ -15108,7 +17535,52 @@
                 </a:solidFill>
                 <a:latin typeface="Consolas"/>
               </a:rPr>
-              <a:t>(-t / </a:t>
+              <a:t>(</a:t>
+            </a:r>
+            <a:r>
+              <a:rPr sz="1100">
+                <a:solidFill>
+                  <a:srgbClr val="303030"/>
+                </a:solidFill>
+                <a:latin typeface="Consolas"/>
+              </a:rPr>
+              <a:t>-</a:t>
+            </a:r>
+            <a:r>
+              <a:rPr sz="1100">
+                <a:solidFill>
+                  <a:srgbClr val="303030"/>
+                </a:solidFill>
+                <a:latin typeface="Consolas"/>
+              </a:rPr>
+              <a:t>t</a:t>
+            </a:r>
+            <a:r>
+              <a:rPr sz="1100">
+                <a:solidFill>
+                  <a:srgbClr val="303030"/>
+                </a:solidFill>
+                <a:latin typeface="Consolas"/>
+              </a:rPr>
+              <a:t> </a:t>
+            </a:r>
+            <a:r>
+              <a:rPr sz="1100">
+                <a:solidFill>
+                  <a:srgbClr val="303030"/>
+                </a:solidFill>
+                <a:latin typeface="Consolas"/>
+              </a:rPr>
+              <a:t>/</a:t>
+            </a:r>
+            <a:r>
+              <a:rPr sz="1100">
+                <a:solidFill>
+                  <a:srgbClr val="303030"/>
+                </a:solidFill>
+                <a:latin typeface="Consolas"/>
+              </a:rPr>
+              <a:t> </a:t>
             </a:r>
             <a:r>
               <a:rPr sz="1100" b="1">
@@ -15126,7 +17598,34 @@
                 </a:solidFill>
                 <a:latin typeface="Consolas"/>
               </a:rPr>
-              <a:t>(S, </a:t>
+              <a:t>(</a:t>
+            </a:r>
+            <a:r>
+              <a:rPr sz="1100">
+                <a:solidFill>
+                  <a:srgbClr val="303030"/>
+                </a:solidFill>
+                <a:latin typeface="Consolas"/>
+              </a:rPr>
+              <a:t>S</a:t>
+            </a:r>
+            <a:r>
+              <a:rPr sz="1100">
+                <a:solidFill>
+                  <a:srgbClr val="303030"/>
+                </a:solidFill>
+                <a:latin typeface="Consolas"/>
+              </a:rPr>
+              <a:t>,</a:t>
+            </a:r>
+            <a:r>
+              <a:rPr sz="1100">
+                <a:solidFill>
+                  <a:srgbClr val="303030"/>
+                </a:solidFill>
+                <a:latin typeface="Consolas"/>
+              </a:rPr>
+              <a:t> </a:t>
             </a:r>
             <a:r>
               <a:rPr sz="1100">
@@ -15144,7 +17643,16 @@
                 </a:solidFill>
                 <a:latin typeface="Consolas"/>
               </a:rPr>
-              <a:t>e-</a:t>
+              <a:t>e</a:t>
+            </a:r>
+            <a:r>
+              <a:rPr sz="1100">
+                <a:solidFill>
+                  <a:srgbClr val="303030"/>
+                </a:solidFill>
+                <a:latin typeface="Consolas"/>
+              </a:rPr>
+              <a:t>-</a:t>
             </a:r>
             <a:r>
               <a:rPr sz="1100">
@@ -15162,7 +17670,16 @@
                 </a:solidFill>
                 <a:latin typeface="Consolas"/>
               </a:rPr>
-              <a:t>))</a:t>
+              <a:t>)</a:t>
+            </a:r>
+            <a:r>
+              <a:rPr sz="1100">
+                <a:solidFill>
+                  <a:srgbClr val="303030"/>
+                </a:solidFill>
+                <a:latin typeface="Consolas"/>
+              </a:rPr>
+              <a:t>)</a:t>
             </a:r>
           </a:p>
           <a:p>
@@ -15194,7 +17711,43 @@
                 </a:solidFill>
                 <a:latin typeface="Consolas"/>
               </a:rPr>
-              <a:t>S += </a:t>
+              <a:t>S</a:t>
+            </a:r>
+            <a:r>
+              <a:rPr sz="1100">
+                <a:solidFill>
+                  <a:srgbClr val="303030"/>
+                </a:solidFill>
+                <a:latin typeface="Consolas"/>
+              </a:rPr>
+              <a:t> </a:t>
+            </a:r>
+            <a:r>
+              <a:rPr sz="1100">
+                <a:solidFill>
+                  <a:srgbClr val="303030"/>
+                </a:solidFill>
+                <a:latin typeface="Consolas"/>
+              </a:rPr>
+              <a:t>+</a:t>
+            </a:r>
+            <a:r>
+              <a:rPr sz="1100">
+                <a:solidFill>
+                  <a:srgbClr val="303030"/>
+                </a:solidFill>
+                <a:latin typeface="Consolas"/>
+              </a:rPr>
+              <a:t>=</a:t>
+            </a:r>
+            <a:r>
+              <a:rPr sz="1100">
+                <a:solidFill>
+                  <a:srgbClr val="303030"/>
+                </a:solidFill>
+                <a:latin typeface="Consolas"/>
+              </a:rPr>
+              <a:t> </a:t>
             </a:r>
             <a:r>
               <a:rPr sz="1100">
@@ -15212,7 +17765,43 @@
                 </a:solidFill>
                 <a:latin typeface="Consolas"/>
               </a:rPr>
-              <a:t>; t 重置</a:t>
+              <a:t>;</a:t>
+            </a:r>
+            <a:r>
+              <a:rPr sz="1100">
+                <a:solidFill>
+                  <a:srgbClr val="303030"/>
+                </a:solidFill>
+                <a:latin typeface="Consolas"/>
+              </a:rPr>
+              <a:t> </a:t>
+            </a:r>
+            <a:r>
+              <a:rPr sz="1100">
+                <a:solidFill>
+                  <a:srgbClr val="303030"/>
+                </a:solidFill>
+                <a:latin typeface="Consolas"/>
+              </a:rPr>
+              <a:t>t</a:t>
+            </a:r>
+            <a:r>
+              <a:rPr sz="1100">
+                <a:solidFill>
+                  <a:srgbClr val="303030"/>
+                </a:solidFill>
+                <a:latin typeface="Consolas"/>
+              </a:rPr>
+              <a:t> </a:t>
+            </a:r>
+            <a:r>
+              <a:rPr sz="1100">
+                <a:solidFill>
+                  <a:srgbClr val="303030"/>
+                </a:solidFill>
+                <a:latin typeface="Consolas"/>
+              </a:rPr>
+              <a:t>重置</a:t>
             </a:r>
           </a:p>
         </p:txBody>
@@ -15258,7 +17847,6 @@
           <a:lstStyle/>
           <a:p>
             <a:pPr algn="ctr"/>
-            <a:endParaRPr/>
           </a:p>
         </p:txBody>
       </p:sp>
@@ -15341,7 +17929,7 @@
 </file>
 
 <file path=ppt/slides/slide18.xml><?xml version="1.0" encoding="utf-8"?>
-<p:sld xmlns:a="http://schemas.openxmlformats.org/drawingml/2006/main" xmlns:r="http://schemas.openxmlformats.org/officeDocument/2006/relationships" xmlns:p="http://schemas.openxmlformats.org/presentationml/2006/main">
+<p:sld xmlns:a="http://schemas.openxmlformats.org/drawingml/2006/main" xmlns:p="http://schemas.openxmlformats.org/presentationml/2006/main" xmlns:r="http://schemas.openxmlformats.org/officeDocument/2006/relationships">
   <p:cSld>
     <p:spTree>
       <p:nvGrpSpPr>
@@ -15349,14 +17937,7 @@
         <p:cNvGrpSpPr/>
         <p:nvPr/>
       </p:nvGrpSpPr>
-      <p:grpSpPr>
-        <a:xfrm>
-          <a:off x="0" y="0"/>
-          <a:ext cx="0" cy="0"/>
-          <a:chOff x="0" y="0"/>
-          <a:chExt cx="0" cy="0"/>
-        </a:xfrm>
-      </p:grpSpPr>
+      <p:grpSpPr/>
       <p:sp>
         <p:nvSpPr>
           <p:cNvPr id="2" name="TextBox 1"/>
@@ -15433,7 +18014,6 @@
           <a:lstStyle/>
           <a:p>
             <a:pPr algn="ctr"/>
-            <a:endParaRPr/>
           </a:p>
         </p:txBody>
       </p:sp>
@@ -15513,7 +18093,6 @@
           <a:lstStyle/>
           <a:p>
             <a:pPr algn="ctr"/>
-            <a:endParaRPr/>
           </a:p>
         </p:txBody>
       </p:sp>
@@ -15663,7 +18242,6 @@
           <a:lstStyle/>
           <a:p>
             <a:pPr algn="ctr"/>
-            <a:endParaRPr/>
           </a:p>
         </p:txBody>
       </p:sp>
@@ -15813,7 +18391,6 @@
           <a:lstStyle/>
           <a:p>
             <a:pPr algn="ctr"/>
-            <a:endParaRPr/>
           </a:p>
         </p:txBody>
       </p:sp>
@@ -15963,7 +18540,6 @@
           <a:lstStyle/>
           <a:p>
             <a:pPr algn="ctr"/>
-            <a:endParaRPr/>
           </a:p>
         </p:txBody>
       </p:sp>
@@ -16113,7 +18689,6 @@
           <a:lstStyle/>
           <a:p>
             <a:pPr algn="ctr"/>
-            <a:endParaRPr/>
           </a:p>
         </p:txBody>
       </p:sp>
@@ -16158,7 +18733,6 @@
           <a:lstStyle/>
           <a:p>
             <a:pPr algn="ctr"/>
-            <a:endParaRPr/>
           </a:p>
         </p:txBody>
       </p:sp>
@@ -16241,7 +18815,7 @@
 </file>
 
 <file path=ppt/slides/slide19.xml><?xml version="1.0" encoding="utf-8"?>
-<p:sld xmlns:a="http://schemas.openxmlformats.org/drawingml/2006/main" xmlns:r="http://schemas.openxmlformats.org/officeDocument/2006/relationships" xmlns:p="http://schemas.openxmlformats.org/presentationml/2006/main">
+<p:sld xmlns:a="http://schemas.openxmlformats.org/drawingml/2006/main" xmlns:p="http://schemas.openxmlformats.org/presentationml/2006/main" xmlns:r="http://schemas.openxmlformats.org/officeDocument/2006/relationships">
   <p:cSld>
     <p:spTree>
       <p:nvGrpSpPr>
@@ -16249,14 +18823,7 @@
         <p:cNvGrpSpPr/>
         <p:nvPr/>
       </p:nvGrpSpPr>
-      <p:grpSpPr>
-        <a:xfrm>
-          <a:off x="0" y="0"/>
-          <a:ext cx="0" cy="0"/>
-          <a:chOff x="0" y="0"/>
-          <a:chExt cx="0" cy="0"/>
-        </a:xfrm>
-      </p:grpSpPr>
+      <p:grpSpPr/>
       <p:sp>
         <p:nvSpPr>
           <p:cNvPr id="2" name="TextBox 1"/>
@@ -16333,7 +18900,6 @@
           <a:lstStyle/>
           <a:p>
             <a:pPr algn="ctr"/>
-            <a:endParaRPr/>
           </a:p>
         </p:txBody>
       </p:sp>
@@ -16413,7 +18979,6 @@
           <a:lstStyle/>
           <a:p>
             <a:pPr algn="ctr"/>
-            <a:endParaRPr/>
           </a:p>
         </p:txBody>
       </p:sp>
@@ -16563,7 +19128,6 @@
           <a:lstStyle/>
           <a:p>
             <a:pPr algn="ctr"/>
-            <a:endParaRPr/>
           </a:p>
         </p:txBody>
       </p:sp>
@@ -16713,7 +19277,6 @@
           <a:lstStyle/>
           <a:p>
             <a:pPr algn="ctr"/>
-            <a:endParaRPr/>
           </a:p>
         </p:txBody>
       </p:sp>
@@ -16863,7 +19426,6 @@
           <a:lstStyle/>
           <a:p>
             <a:pPr algn="ctr"/>
-            <a:endParaRPr/>
           </a:p>
         </p:txBody>
       </p:sp>
@@ -16925,7 +19487,15 @@
           <a:lstStyle/>
           <a:p>
             <a:pPr algn="l"/>
-            <a:endParaRPr/>
+            <a:r>
+              <a:rPr sz="2000" b="1">
+                <a:solidFill>
+                  <a:srgbClr val="1F3A68"/>
+                </a:solidFill>
+                <a:latin typeface="Microsoft YaHei"/>
+              </a:rPr>
+              <a:t/>
+            </a:r>
           </a:p>
         </p:txBody>
       </p:sp>
@@ -17005,7 +19575,6 @@
           <a:lstStyle/>
           <a:p>
             <a:pPr algn="ctr"/>
-            <a:endParaRPr/>
           </a:p>
         </p:txBody>
       </p:sp>
@@ -17018,7 +19587,7 @@
           <p:nvPr/>
         </p:nvPicPr>
         <p:blipFill>
-          <a:blip r:embed="rId3"/>
+          <a:blip r:embed="rId2"/>
           <a:stretch>
             <a:fillRect/>
           </a:stretch>
@@ -17074,7 +19643,6 @@
           <a:lstStyle/>
           <a:p>
             <a:pPr algn="ctr"/>
-            <a:endParaRPr/>
           </a:p>
         </p:txBody>
       </p:sp>
@@ -17119,7 +19687,6 @@
           <a:lstStyle/>
           <a:p>
             <a:pPr algn="ctr"/>
-            <a:endParaRPr/>
           </a:p>
         </p:txBody>
       </p:sp>
@@ -17202,7 +19769,7 @@
 </file>
 
 <file path=ppt/slides/slide2.xml><?xml version="1.0" encoding="utf-8"?>
-<p:sld xmlns:a="http://schemas.openxmlformats.org/drawingml/2006/main" xmlns:r="http://schemas.openxmlformats.org/officeDocument/2006/relationships" xmlns:p="http://schemas.openxmlformats.org/presentationml/2006/main">
+<p:sld xmlns:a="http://schemas.openxmlformats.org/drawingml/2006/main" xmlns:p="http://schemas.openxmlformats.org/presentationml/2006/main" xmlns:r="http://schemas.openxmlformats.org/officeDocument/2006/relationships">
   <p:cSld>
     <p:spTree>
       <p:nvGrpSpPr>
@@ -17210,14 +19777,7 @@
         <p:cNvGrpSpPr/>
         <p:nvPr/>
       </p:nvGrpSpPr>
-      <p:grpSpPr>
-        <a:xfrm>
-          <a:off x="0" y="0"/>
-          <a:ext cx="0" cy="0"/>
-          <a:chOff x="0" y="0"/>
-          <a:chExt cx="0" cy="0"/>
-        </a:xfrm>
-      </p:grpSpPr>
+      <p:grpSpPr/>
       <p:sp>
         <p:nvSpPr>
           <p:cNvPr id="2" name="TextBox 1"/>
@@ -17294,7 +19854,6 @@
           <a:lstStyle/>
           <a:p>
             <a:pPr algn="ctr"/>
-            <a:endParaRPr/>
           </a:p>
         </p:txBody>
       </p:sp>
@@ -17374,7 +19933,6 @@
           <a:lstStyle/>
           <a:p>
             <a:pPr algn="ctr"/>
-            <a:endParaRPr/>
           </a:p>
         </p:txBody>
       </p:sp>
@@ -17423,7 +19981,6 @@
           <a:lstStyle/>
           <a:p>
             <a:pPr algn="ctr"/>
-            <a:endParaRPr/>
           </a:p>
         </p:txBody>
       </p:sp>
@@ -17468,7 +20025,6 @@
           <a:lstStyle/>
           <a:p>
             <a:pPr algn="ctr"/>
-            <a:endParaRPr/>
           </a:p>
         </p:txBody>
       </p:sp>
@@ -17480,8 +20036,8 @@
         </p:nvSpPr>
         <p:spPr>
           <a:xfrm>
-            <a:off x="1080000" y="1800000"/>
-            <a:ext cx="619199" cy="432000"/>
+            <a:off x="1159200" y="1771200"/>
+            <a:ext cx="503999" cy="432000"/>
           </a:xfrm>
           <a:prstGeom prst="rect">
             <a:avLst/>
@@ -17496,22 +20052,13 @@
           <a:p>
             <a:pPr algn="ctr"/>
             <a:r>
-              <a:rPr lang="en-US" altLang="zh-CN" sz="2200" b="1">
+              <a:rPr sz="2200" b="1">
                 <a:solidFill>
                   <a:srgbClr val="FFFFFF"/>
                 </a:solidFill>
                 <a:latin typeface="Microsoft YaHei"/>
               </a:rPr>
-              <a:t>0</a:t>
-            </a:r>
-            <a:r>
-              <a:rPr sz="2200" b="1">
-                <a:solidFill>
-                  <a:srgbClr val="FFFFFF"/>
-                </a:solidFill>
-                <a:latin typeface="Microsoft YaHei"/>
-              </a:rPr>
-              <a:t>1</a:t>
+              <a:t>01</a:t>
             </a:r>
           </a:p>
         </p:txBody>
@@ -17524,8 +20071,8 @@
         </p:nvSpPr>
         <p:spPr>
           <a:xfrm>
-            <a:off x="1742399" y="1759534"/>
-            <a:ext cx="8280000" cy="461665"/>
+            <a:off x="1872000" y="1835999"/>
+            <a:ext cx="8280000" cy="432000"/>
           </a:xfrm>
           <a:prstGeom prst="rect">
             <a:avLst/>
@@ -17546,7 +20093,7 @@
                 </a:solidFill>
                 <a:latin typeface="Microsoft YaHei"/>
               </a:rPr>
-              <a:t>问题与思路</a:t>
+              <a:t>01 问题与思路</a:t>
             </a:r>
           </a:p>
         </p:txBody>
@@ -17596,7 +20143,6 @@
           <a:lstStyle/>
           <a:p>
             <a:pPr algn="ctr"/>
-            <a:endParaRPr/>
           </a:p>
         </p:txBody>
       </p:sp>
@@ -17641,7 +20187,6 @@
           <a:lstStyle/>
           <a:p>
             <a:pPr algn="ctr"/>
-            <a:endParaRPr/>
           </a:p>
         </p:txBody>
       </p:sp>
@@ -17653,8 +20198,8 @@
         </p:nvSpPr>
         <p:spPr>
           <a:xfrm>
-            <a:off x="1080000" y="2646000"/>
-            <a:ext cx="619199" cy="432000"/>
+            <a:off x="1159200" y="2617200"/>
+            <a:ext cx="503999" cy="432000"/>
           </a:xfrm>
           <a:prstGeom prst="rect">
             <a:avLst/>
@@ -17669,22 +20214,13 @@
           <a:p>
             <a:pPr algn="ctr"/>
             <a:r>
-              <a:rPr lang="en-US" sz="2200" b="1">
+              <a:rPr sz="2200" b="1">
                 <a:solidFill>
                   <a:srgbClr val="FFFFFF"/>
                 </a:solidFill>
                 <a:latin typeface="Microsoft YaHei"/>
               </a:rPr>
-              <a:t>0</a:t>
-            </a:r>
-            <a:r>
-              <a:rPr sz="2200" b="1">
-                <a:solidFill>
-                  <a:srgbClr val="FFFFFF"/>
-                </a:solidFill>
-                <a:latin typeface="Microsoft YaHei"/>
-              </a:rPr>
-              <a:t>2</a:t>
+              <a:t>02</a:t>
             </a:r>
           </a:p>
         </p:txBody>
@@ -17697,8 +20233,8 @@
         </p:nvSpPr>
         <p:spPr>
           <a:xfrm>
-            <a:off x="1742399" y="2605534"/>
-            <a:ext cx="8280000" cy="461665"/>
+            <a:off x="1872000" y="2681999"/>
+            <a:ext cx="8280000" cy="432000"/>
           </a:xfrm>
           <a:prstGeom prst="rect">
             <a:avLst/>
@@ -17719,7 +20255,7 @@
                 </a:solidFill>
                 <a:latin typeface="Microsoft YaHei"/>
               </a:rPr>
-              <a:t>相关工作与启发</a:t>
+              <a:t>02 相关工作与启发</a:t>
             </a:r>
           </a:p>
         </p:txBody>
@@ -17769,7 +20305,6 @@
           <a:lstStyle/>
           <a:p>
             <a:pPr algn="ctr"/>
-            <a:endParaRPr/>
           </a:p>
         </p:txBody>
       </p:sp>
@@ -17814,7 +20349,6 @@
           <a:lstStyle/>
           <a:p>
             <a:pPr algn="ctr"/>
-            <a:endParaRPr/>
           </a:p>
         </p:txBody>
       </p:sp>
@@ -17826,8 +20360,8 @@
         </p:nvSpPr>
         <p:spPr>
           <a:xfrm>
-            <a:off x="1080000" y="3492000"/>
-            <a:ext cx="619199" cy="432000"/>
+            <a:off x="1159200" y="3463200"/>
+            <a:ext cx="503999" cy="432000"/>
           </a:xfrm>
           <a:prstGeom prst="rect">
             <a:avLst/>
@@ -17842,22 +20376,13 @@
           <a:p>
             <a:pPr algn="ctr"/>
             <a:r>
-              <a:rPr lang="en-US" altLang="zh-CN" sz="2200" b="1">
+              <a:rPr sz="2200" b="1">
                 <a:solidFill>
                   <a:srgbClr val="FFFFFF"/>
                 </a:solidFill>
                 <a:latin typeface="Microsoft YaHei"/>
               </a:rPr>
-              <a:t>0</a:t>
-            </a:r>
-            <a:r>
-              <a:rPr sz="2200" b="1">
-                <a:solidFill>
-                  <a:srgbClr val="FFFFFF"/>
-                </a:solidFill>
-                <a:latin typeface="Microsoft YaHei"/>
-              </a:rPr>
-              <a:t>3</a:t>
+              <a:t>03</a:t>
             </a:r>
           </a:p>
         </p:txBody>
@@ -17870,8 +20395,8 @@
         </p:nvSpPr>
         <p:spPr>
           <a:xfrm>
-            <a:off x="1742399" y="3451535"/>
-            <a:ext cx="8280000" cy="461665"/>
+            <a:off x="1872000" y="3528000"/>
+            <a:ext cx="8280000" cy="432000"/>
           </a:xfrm>
           <a:prstGeom prst="rect">
             <a:avLst/>
@@ -17892,7 +20417,7 @@
                 </a:solidFill>
                 <a:latin typeface="Microsoft YaHei"/>
               </a:rPr>
-              <a:t>系统设计与实现</a:t>
+              <a:t>03 系统设计与实现</a:t>
             </a:r>
           </a:p>
         </p:txBody>
@@ -17942,7 +20467,6 @@
           <a:lstStyle/>
           <a:p>
             <a:pPr algn="ctr"/>
-            <a:endParaRPr/>
           </a:p>
         </p:txBody>
       </p:sp>
@@ -17987,7 +20511,6 @@
           <a:lstStyle/>
           <a:p>
             <a:pPr algn="ctr"/>
-            <a:endParaRPr/>
           </a:p>
         </p:txBody>
       </p:sp>
@@ -17999,8 +20522,8 @@
         </p:nvSpPr>
         <p:spPr>
           <a:xfrm>
-            <a:off x="1080000" y="4338000"/>
-            <a:ext cx="619199" cy="432000"/>
+            <a:off x="1159200" y="4309200"/>
+            <a:ext cx="503999" cy="432000"/>
           </a:xfrm>
           <a:prstGeom prst="rect">
             <a:avLst/>
@@ -18015,22 +20538,13 @@
           <a:p>
             <a:pPr algn="ctr"/>
             <a:r>
-              <a:rPr lang="en-US" altLang="zh-CN" sz="2200" b="1">
+              <a:rPr sz="2200" b="1">
                 <a:solidFill>
                   <a:srgbClr val="FFFFFF"/>
                 </a:solidFill>
                 <a:latin typeface="Microsoft YaHei"/>
               </a:rPr>
-              <a:t>0</a:t>
-            </a:r>
-            <a:r>
-              <a:rPr sz="2200" b="1">
-                <a:solidFill>
-                  <a:srgbClr val="FFFFFF"/>
-                </a:solidFill>
-                <a:latin typeface="Microsoft YaHei"/>
-              </a:rPr>
-              <a:t>4</a:t>
+              <a:t>04</a:t>
             </a:r>
           </a:p>
         </p:txBody>
@@ -18043,8 +20557,8 @@
         </p:nvSpPr>
         <p:spPr>
           <a:xfrm>
-            <a:off x="1742399" y="4297535"/>
-            <a:ext cx="8280000" cy="461665"/>
+            <a:off x="1872000" y="4374000"/>
+            <a:ext cx="8280000" cy="432000"/>
           </a:xfrm>
           <a:prstGeom prst="rect">
             <a:avLst/>
@@ -18065,7 +20579,7 @@
                 </a:solidFill>
                 <a:latin typeface="Microsoft YaHei"/>
               </a:rPr>
-              <a:t>实验设计与验证</a:t>
+              <a:t>04 实验设计与验证</a:t>
             </a:r>
           </a:p>
         </p:txBody>
@@ -18115,7 +20629,6 @@
           <a:lstStyle/>
           <a:p>
             <a:pPr algn="ctr"/>
-            <a:endParaRPr/>
           </a:p>
         </p:txBody>
       </p:sp>
@@ -18160,7 +20673,6 @@
           <a:lstStyle/>
           <a:p>
             <a:pPr algn="ctr"/>
-            <a:endParaRPr/>
           </a:p>
         </p:txBody>
       </p:sp>
@@ -18172,8 +20684,8 @@
         </p:nvSpPr>
         <p:spPr>
           <a:xfrm>
-            <a:off x="1080000" y="5184000"/>
-            <a:ext cx="619199" cy="432000"/>
+            <a:off x="1159200" y="5155200"/>
+            <a:ext cx="503999" cy="432000"/>
           </a:xfrm>
           <a:prstGeom prst="rect">
             <a:avLst/>
@@ -18207,8 +20719,8 @@
         </p:nvSpPr>
         <p:spPr>
           <a:xfrm>
-            <a:off x="1742399" y="5143535"/>
-            <a:ext cx="8280000" cy="461665"/>
+            <a:off x="1872000" y="5220000"/>
+            <a:ext cx="8280000" cy="432000"/>
           </a:xfrm>
           <a:prstGeom prst="rect">
             <a:avLst/>
@@ -18229,7 +20741,7 @@
                 </a:solidFill>
                 <a:latin typeface="Microsoft YaHei"/>
               </a:rPr>
-              <a:t>智戎接入与总结展望</a:t>
+              <a:t>05 智戎接入与总结展望</a:t>
             </a:r>
           </a:p>
         </p:txBody>
@@ -18275,7 +20787,6 @@
           <a:lstStyle/>
           <a:p>
             <a:pPr algn="ctr"/>
-            <a:endParaRPr/>
           </a:p>
         </p:txBody>
       </p:sp>
@@ -18358,7 +20869,7 @@
 </file>
 
 <file path=ppt/slides/slide20.xml><?xml version="1.0" encoding="utf-8"?>
-<p:sld xmlns:a="http://schemas.openxmlformats.org/drawingml/2006/main" xmlns:r="http://schemas.openxmlformats.org/officeDocument/2006/relationships" xmlns:p="http://schemas.openxmlformats.org/presentationml/2006/main">
+<p:sld xmlns:a="http://schemas.openxmlformats.org/drawingml/2006/main" xmlns:p="http://schemas.openxmlformats.org/presentationml/2006/main" xmlns:r="http://schemas.openxmlformats.org/officeDocument/2006/relationships">
   <p:cSld>
     <p:spTree>
       <p:nvGrpSpPr>
@@ -18366,14 +20877,7 @@
         <p:cNvGrpSpPr/>
         <p:nvPr/>
       </p:nvGrpSpPr>
-      <p:grpSpPr>
-        <a:xfrm>
-          <a:off x="0" y="0"/>
-          <a:ext cx="0" cy="0"/>
-          <a:chOff x="0" y="0"/>
-          <a:chExt cx="0" cy="0"/>
-        </a:xfrm>
-      </p:grpSpPr>
+      <p:grpSpPr/>
       <p:sp>
         <p:nvSpPr>
           <p:cNvPr id="2" name="Rectangle 1"/>
@@ -18415,7 +20919,6 @@
           <a:lstStyle/>
           <a:p>
             <a:pPr algn="ctr"/>
-            <a:endParaRPr/>
           </a:p>
         </p:txBody>
       </p:sp>
@@ -18460,7 +20963,6 @@
           <a:lstStyle/>
           <a:p>
             <a:pPr algn="ctr"/>
-            <a:endParaRPr/>
           </a:p>
         </p:txBody>
       </p:sp>
@@ -18540,7 +21042,6 @@
           <a:lstStyle/>
           <a:p>
             <a:pPr algn="ctr"/>
-            <a:endParaRPr/>
           </a:p>
         </p:txBody>
       </p:sp>
@@ -18623,7 +21124,7 @@
 </file>
 
 <file path=ppt/slides/slide21.xml><?xml version="1.0" encoding="utf-8"?>
-<p:sld xmlns:a="http://schemas.openxmlformats.org/drawingml/2006/main" xmlns:r="http://schemas.openxmlformats.org/officeDocument/2006/relationships" xmlns:p="http://schemas.openxmlformats.org/presentationml/2006/main">
+<p:sld xmlns:a="http://schemas.openxmlformats.org/drawingml/2006/main" xmlns:p="http://schemas.openxmlformats.org/presentationml/2006/main" xmlns:r="http://schemas.openxmlformats.org/officeDocument/2006/relationships">
   <p:cSld>
     <p:spTree>
       <p:nvGrpSpPr>
@@ -18631,14 +21132,7 @@
         <p:cNvGrpSpPr/>
         <p:nvPr/>
       </p:nvGrpSpPr>
-      <p:grpSpPr>
-        <a:xfrm>
-          <a:off x="0" y="0"/>
-          <a:ext cx="0" cy="0"/>
-          <a:chOff x="0" y="0"/>
-          <a:chExt cx="0" cy="0"/>
-        </a:xfrm>
-      </p:grpSpPr>
+      <p:grpSpPr/>
       <p:sp>
         <p:nvSpPr>
           <p:cNvPr id="2" name="TextBox 1"/>
@@ -18715,7 +21209,6 @@
           <a:lstStyle/>
           <a:p>
             <a:pPr algn="ctr"/>
-            <a:endParaRPr/>
           </a:p>
         </p:txBody>
       </p:sp>
@@ -18795,7 +21288,6 @@
           <a:lstStyle/>
           <a:p>
             <a:pPr algn="ctr"/>
-            <a:endParaRPr/>
           </a:p>
         </p:txBody>
       </p:sp>
@@ -18945,7 +21437,6 @@
           <a:lstStyle/>
           <a:p>
             <a:pPr algn="ctr"/>
-            <a:endParaRPr/>
           </a:p>
         </p:txBody>
       </p:sp>
@@ -19095,7 +21586,6 @@
           <a:lstStyle/>
           <a:p>
             <a:pPr algn="ctr"/>
-            <a:endParaRPr/>
           </a:p>
         </p:txBody>
       </p:sp>
@@ -19245,7 +21735,6 @@
           <a:lstStyle/>
           <a:p>
             <a:pPr algn="ctr"/>
-            <a:endParaRPr/>
           </a:p>
         </p:txBody>
       </p:sp>
@@ -19395,7 +21884,6 @@
           <a:lstStyle/>
           <a:p>
             <a:pPr algn="ctr"/>
-            <a:endParaRPr/>
           </a:p>
         </p:txBody>
       </p:sp>
@@ -19440,7 +21928,6 @@
           <a:lstStyle/>
           <a:p>
             <a:pPr algn="ctr"/>
-            <a:endParaRPr/>
           </a:p>
         </p:txBody>
       </p:sp>
@@ -19523,7 +22010,7 @@
 </file>
 
 <file path=ppt/slides/slide22.xml><?xml version="1.0" encoding="utf-8"?>
-<p:sld xmlns:a="http://schemas.openxmlformats.org/drawingml/2006/main" xmlns:r="http://schemas.openxmlformats.org/officeDocument/2006/relationships" xmlns:p="http://schemas.openxmlformats.org/presentationml/2006/main">
+<p:sld xmlns:a="http://schemas.openxmlformats.org/drawingml/2006/main" xmlns:p="http://schemas.openxmlformats.org/presentationml/2006/main" xmlns:r="http://schemas.openxmlformats.org/officeDocument/2006/relationships">
   <p:cSld>
     <p:spTree>
       <p:nvGrpSpPr>
@@ -19531,14 +22018,7 @@
         <p:cNvGrpSpPr/>
         <p:nvPr/>
       </p:nvGrpSpPr>
-      <p:grpSpPr>
-        <a:xfrm>
-          <a:off x="0" y="0"/>
-          <a:ext cx="0" cy="0"/>
-          <a:chOff x="0" y="0"/>
-          <a:chExt cx="0" cy="0"/>
-        </a:xfrm>
-      </p:grpSpPr>
+      <p:grpSpPr/>
       <p:sp>
         <p:nvSpPr>
           <p:cNvPr id="2" name="TextBox 1"/>
@@ -19615,7 +22095,6 @@
           <a:lstStyle/>
           <a:p>
             <a:pPr algn="ctr"/>
-            <a:endParaRPr/>
           </a:p>
         </p:txBody>
       </p:sp>
@@ -19695,7 +22174,6 @@
           <a:lstStyle/>
           <a:p>
             <a:pPr algn="ctr"/>
-            <a:endParaRPr/>
           </a:p>
         </p:txBody>
       </p:sp>
@@ -19740,7 +22218,6 @@
           <a:lstStyle/>
           <a:p>
             <a:pPr algn="ctr"/>
-            <a:endParaRPr/>
           </a:p>
         </p:txBody>
       </p:sp>
@@ -19855,7 +22332,6 @@
           <a:lstStyle/>
           <a:p>
             <a:pPr algn="ctr"/>
-            <a:endParaRPr/>
           </a:p>
         </p:txBody>
       </p:sp>
@@ -19970,7 +22446,6 @@
           <a:lstStyle/>
           <a:p>
             <a:pPr algn="ctr"/>
-            <a:endParaRPr/>
           </a:p>
         </p:txBody>
       </p:sp>
@@ -20085,7 +22560,6 @@
           <a:lstStyle/>
           <a:p>
             <a:pPr algn="ctr"/>
-            <a:endParaRPr/>
           </a:p>
         </p:txBody>
       </p:sp>
@@ -20305,7 +22779,6 @@
           <a:lstStyle/>
           <a:p>
             <a:pPr algn="ctr"/>
-            <a:endParaRPr/>
           </a:p>
         </p:txBody>
       </p:sp>
@@ -20455,7 +22928,6 @@
           <a:lstStyle/>
           <a:p>
             <a:pPr algn="ctr"/>
-            <a:endParaRPr/>
           </a:p>
         </p:txBody>
       </p:sp>
@@ -20605,7 +23077,6 @@
           <a:lstStyle/>
           <a:p>
             <a:pPr algn="ctr"/>
-            <a:endParaRPr/>
           </a:p>
         </p:txBody>
       </p:sp>
@@ -20650,7 +23121,6 @@
           <a:lstStyle/>
           <a:p>
             <a:pPr algn="ctr"/>
-            <a:endParaRPr/>
           </a:p>
         </p:txBody>
       </p:sp>
@@ -20733,7 +23203,7 @@
 </file>
 
 <file path=ppt/slides/slide23.xml><?xml version="1.0" encoding="utf-8"?>
-<p:sld xmlns:a="http://schemas.openxmlformats.org/drawingml/2006/main" xmlns:r="http://schemas.openxmlformats.org/officeDocument/2006/relationships" xmlns:p="http://schemas.openxmlformats.org/presentationml/2006/main">
+<p:sld xmlns:a="http://schemas.openxmlformats.org/drawingml/2006/main" xmlns:p="http://schemas.openxmlformats.org/presentationml/2006/main" xmlns:r="http://schemas.openxmlformats.org/officeDocument/2006/relationships">
   <p:cSld>
     <p:spTree>
       <p:nvGrpSpPr>
@@ -20741,14 +23211,7 @@
         <p:cNvGrpSpPr/>
         <p:nvPr/>
       </p:nvGrpSpPr>
-      <p:grpSpPr>
-        <a:xfrm>
-          <a:off x="0" y="0"/>
-          <a:ext cx="0" cy="0"/>
-          <a:chOff x="0" y="0"/>
-          <a:chExt cx="0" cy="0"/>
-        </a:xfrm>
-      </p:grpSpPr>
+      <p:grpSpPr/>
       <p:sp>
         <p:nvSpPr>
           <p:cNvPr id="2" name="TextBox 1"/>
@@ -20825,7 +23288,6 @@
           <a:lstStyle/>
           <a:p>
             <a:pPr algn="ctr"/>
-            <a:endParaRPr/>
           </a:p>
         </p:txBody>
       </p:sp>
@@ -20905,7 +23367,6 @@
           <a:lstStyle/>
           <a:p>
             <a:pPr algn="ctr"/>
-            <a:endParaRPr/>
           </a:p>
         </p:txBody>
       </p:sp>
@@ -21055,7 +23516,6 @@
           <a:lstStyle/>
           <a:p>
             <a:pPr algn="ctr"/>
-            <a:endParaRPr/>
           </a:p>
         </p:txBody>
       </p:sp>
@@ -21205,7 +23665,6 @@
           <a:lstStyle/>
           <a:p>
             <a:pPr algn="ctr"/>
-            <a:endParaRPr/>
           </a:p>
         </p:txBody>
       </p:sp>
@@ -21355,7 +23814,6 @@
           <a:lstStyle/>
           <a:p>
             <a:pPr algn="ctr"/>
-            <a:endParaRPr/>
           </a:p>
         </p:txBody>
       </p:sp>
@@ -21505,7 +23963,6 @@
           <a:lstStyle/>
           <a:p>
             <a:pPr algn="ctr"/>
-            <a:endParaRPr/>
           </a:p>
         </p:txBody>
       </p:sp>
@@ -21550,7 +24007,6 @@
           <a:lstStyle/>
           <a:p>
             <a:pPr algn="ctr"/>
-            <a:endParaRPr/>
           </a:p>
         </p:txBody>
       </p:sp>
@@ -21633,7 +24089,7 @@
 </file>
 
 <file path=ppt/slides/slide24.xml><?xml version="1.0" encoding="utf-8"?>
-<p:sld xmlns:a="http://schemas.openxmlformats.org/drawingml/2006/main" xmlns:r="http://schemas.openxmlformats.org/officeDocument/2006/relationships" xmlns:p="http://schemas.openxmlformats.org/presentationml/2006/main">
+<p:sld xmlns:a="http://schemas.openxmlformats.org/drawingml/2006/main" xmlns:p="http://schemas.openxmlformats.org/presentationml/2006/main" xmlns:r="http://schemas.openxmlformats.org/officeDocument/2006/relationships">
   <p:cSld>
     <p:spTree>
       <p:nvGrpSpPr>
@@ -21641,14 +24097,7 @@
         <p:cNvGrpSpPr/>
         <p:nvPr/>
       </p:nvGrpSpPr>
-      <p:grpSpPr>
-        <a:xfrm>
-          <a:off x="0" y="0"/>
-          <a:ext cx="0" cy="0"/>
-          <a:chOff x="0" y="0"/>
-          <a:chExt cx="0" cy="0"/>
-        </a:xfrm>
-      </p:grpSpPr>
+      <p:grpSpPr/>
       <p:sp>
         <p:nvSpPr>
           <p:cNvPr id="2" name="TextBox 1"/>
@@ -21725,7 +24174,6 @@
           <a:lstStyle/>
           <a:p>
             <a:pPr algn="ctr"/>
-            <a:endParaRPr/>
           </a:p>
         </p:txBody>
       </p:sp>
@@ -21805,7 +24253,6 @@
           <a:lstStyle/>
           <a:p>
             <a:pPr algn="ctr"/>
-            <a:endParaRPr/>
           </a:p>
         </p:txBody>
       </p:sp>
@@ -21850,7 +24297,6 @@
           <a:lstStyle/>
           <a:p>
             <a:pPr algn="ctr"/>
-            <a:endParaRPr/>
           </a:p>
         </p:txBody>
       </p:sp>
@@ -21965,7 +24411,6 @@
           <a:lstStyle/>
           <a:p>
             <a:pPr algn="ctr"/>
-            <a:endParaRPr/>
           </a:p>
         </p:txBody>
       </p:sp>
@@ -22080,7 +24525,6 @@
           <a:lstStyle/>
           <a:p>
             <a:pPr algn="ctr"/>
-            <a:endParaRPr/>
           </a:p>
         </p:txBody>
       </p:sp>
@@ -22195,7 +24639,6 @@
           <a:lstStyle/>
           <a:p>
             <a:pPr algn="ctr"/>
-            <a:endParaRPr/>
           </a:p>
         </p:txBody>
       </p:sp>
@@ -22415,7 +24858,6 @@
           <a:lstStyle/>
           <a:p>
             <a:pPr algn="ctr"/>
-            <a:endParaRPr/>
           </a:p>
         </p:txBody>
       </p:sp>
@@ -22565,7 +25007,6 @@
           <a:lstStyle/>
           <a:p>
             <a:pPr algn="ctr"/>
-            <a:endParaRPr/>
           </a:p>
         </p:txBody>
       </p:sp>
@@ -22715,7 +25156,6 @@
           <a:lstStyle/>
           <a:p>
             <a:pPr algn="ctr"/>
-            <a:endParaRPr/>
           </a:p>
         </p:txBody>
       </p:sp>
@@ -22760,7 +25200,6 @@
           <a:lstStyle/>
           <a:p>
             <a:pPr algn="ctr"/>
-            <a:endParaRPr/>
           </a:p>
         </p:txBody>
       </p:sp>
@@ -22843,7 +25282,7 @@
 </file>
 
 <file path=ppt/slides/slide25.xml><?xml version="1.0" encoding="utf-8"?>
-<p:sld xmlns:a="http://schemas.openxmlformats.org/drawingml/2006/main" xmlns:r="http://schemas.openxmlformats.org/officeDocument/2006/relationships" xmlns:p="http://schemas.openxmlformats.org/presentationml/2006/main">
+<p:sld xmlns:a="http://schemas.openxmlformats.org/drawingml/2006/main" xmlns:p="http://schemas.openxmlformats.org/presentationml/2006/main" xmlns:r="http://schemas.openxmlformats.org/officeDocument/2006/relationships">
   <p:cSld>
     <p:spTree>
       <p:nvGrpSpPr>
@@ -22851,14 +25290,7 @@
         <p:cNvGrpSpPr/>
         <p:nvPr/>
       </p:nvGrpSpPr>
-      <p:grpSpPr>
-        <a:xfrm>
-          <a:off x="0" y="0"/>
-          <a:ext cx="0" cy="0"/>
-          <a:chOff x="0" y="0"/>
-          <a:chExt cx="0" cy="0"/>
-        </a:xfrm>
-      </p:grpSpPr>
+      <p:grpSpPr/>
       <p:sp>
         <p:nvSpPr>
           <p:cNvPr id="2" name="Rectangle 1"/>
@@ -22900,7 +25332,6 @@
           <a:lstStyle/>
           <a:p>
             <a:pPr algn="ctr"/>
-            <a:endParaRPr/>
           </a:p>
         </p:txBody>
       </p:sp>
@@ -22945,7 +25376,6 @@
           <a:lstStyle/>
           <a:p>
             <a:pPr algn="ctr"/>
-            <a:endParaRPr/>
           </a:p>
         </p:txBody>
       </p:sp>
@@ -23025,7 +25455,6 @@
           <a:lstStyle/>
           <a:p>
             <a:pPr algn="ctr"/>
-            <a:endParaRPr/>
           </a:p>
         </p:txBody>
       </p:sp>
@@ -23108,7 +25537,7 @@
 </file>
 
 <file path=ppt/slides/slide26.xml><?xml version="1.0" encoding="utf-8"?>
-<p:sld xmlns:a="http://schemas.openxmlformats.org/drawingml/2006/main" xmlns:r="http://schemas.openxmlformats.org/officeDocument/2006/relationships" xmlns:p="http://schemas.openxmlformats.org/presentationml/2006/main">
+<p:sld xmlns:a="http://schemas.openxmlformats.org/drawingml/2006/main" xmlns:p="http://schemas.openxmlformats.org/presentationml/2006/main" xmlns:r="http://schemas.openxmlformats.org/officeDocument/2006/relationships">
   <p:cSld>
     <p:spTree>
       <p:nvGrpSpPr>
@@ -23116,14 +25545,7 @@
         <p:cNvGrpSpPr/>
         <p:nvPr/>
       </p:nvGrpSpPr>
-      <p:grpSpPr>
-        <a:xfrm>
-          <a:off x="0" y="0"/>
-          <a:ext cx="0" cy="0"/>
-          <a:chOff x="0" y="0"/>
-          <a:chExt cx="0" cy="0"/>
-        </a:xfrm>
-      </p:grpSpPr>
+      <p:grpSpPr/>
       <p:sp>
         <p:nvSpPr>
           <p:cNvPr id="2" name="TextBox 1"/>
@@ -23200,7 +25622,6 @@
           <a:lstStyle/>
           <a:p>
             <a:pPr algn="ctr"/>
-            <a:endParaRPr/>
           </a:p>
         </p:txBody>
       </p:sp>
@@ -23280,7 +25701,6 @@
           <a:lstStyle/>
           <a:p>
             <a:pPr algn="ctr"/>
-            <a:endParaRPr/>
           </a:p>
         </p:txBody>
       </p:sp>
@@ -23430,7 +25850,6 @@
           <a:lstStyle/>
           <a:p>
             <a:pPr algn="ctr"/>
-            <a:endParaRPr/>
           </a:p>
         </p:txBody>
       </p:sp>
@@ -23580,7 +25999,6 @@
           <a:lstStyle/>
           <a:p>
             <a:pPr algn="ctr"/>
-            <a:endParaRPr/>
           </a:p>
         </p:txBody>
       </p:sp>
@@ -23730,7 +26148,6 @@
           <a:lstStyle/>
           <a:p>
             <a:pPr algn="ctr"/>
-            <a:endParaRPr/>
           </a:p>
         </p:txBody>
       </p:sp>
@@ -23880,7 +26297,6 @@
           <a:lstStyle/>
           <a:p>
             <a:pPr algn="ctr"/>
-            <a:endParaRPr/>
           </a:p>
         </p:txBody>
       </p:sp>
@@ -23893,7 +26309,7 @@
           <p:nvPr/>
         </p:nvPicPr>
         <p:blipFill>
-          <a:blip r:embed="rId3"/>
+          <a:blip r:embed="rId2"/>
           <a:stretch>
             <a:fillRect/>
           </a:stretch>
@@ -23949,7 +26365,6 @@
           <a:lstStyle/>
           <a:p>
             <a:pPr algn="ctr"/>
-            <a:endParaRPr/>
           </a:p>
         </p:txBody>
       </p:sp>
@@ -23994,7 +26409,6 @@
           <a:lstStyle/>
           <a:p>
             <a:pPr algn="ctr"/>
-            <a:endParaRPr/>
           </a:p>
         </p:txBody>
       </p:sp>
@@ -24077,7 +26491,7 @@
 </file>
 
 <file path=ppt/slides/slide27.xml><?xml version="1.0" encoding="utf-8"?>
-<p:sld xmlns:a="http://schemas.openxmlformats.org/drawingml/2006/main" xmlns:r="http://schemas.openxmlformats.org/officeDocument/2006/relationships" xmlns:p="http://schemas.openxmlformats.org/presentationml/2006/main">
+<p:sld xmlns:a="http://schemas.openxmlformats.org/drawingml/2006/main" xmlns:p="http://schemas.openxmlformats.org/presentationml/2006/main" xmlns:r="http://schemas.openxmlformats.org/officeDocument/2006/relationships">
   <p:cSld>
     <p:spTree>
       <p:nvGrpSpPr>
@@ -24085,14 +26499,7 @@
         <p:cNvGrpSpPr/>
         <p:nvPr/>
       </p:nvGrpSpPr>
-      <p:grpSpPr>
-        <a:xfrm>
-          <a:off x="0" y="0"/>
-          <a:ext cx="0" cy="0"/>
-          <a:chOff x="0" y="0"/>
-          <a:chExt cx="0" cy="0"/>
-        </a:xfrm>
-      </p:grpSpPr>
+      <p:grpSpPr/>
       <p:sp>
         <p:nvSpPr>
           <p:cNvPr id="2" name="TextBox 1"/>
@@ -24169,7 +26576,6 @@
           <a:lstStyle/>
           <a:p>
             <a:pPr algn="ctr"/>
-            <a:endParaRPr/>
           </a:p>
         </p:txBody>
       </p:sp>
@@ -24249,7 +26655,6 @@
           <a:lstStyle/>
           <a:p>
             <a:pPr algn="ctr"/>
-            <a:endParaRPr/>
           </a:p>
         </p:txBody>
       </p:sp>
@@ -24294,7 +26699,6 @@
           <a:lstStyle/>
           <a:p>
             <a:pPr algn="ctr"/>
-            <a:endParaRPr/>
           </a:p>
         </p:txBody>
       </p:sp>
@@ -24584,7 +26988,6 @@
           <a:lstStyle/>
           <a:p>
             <a:pPr algn="ctr"/>
-            <a:endParaRPr/>
           </a:p>
         </p:txBody>
       </p:sp>
@@ -25119,7 +27522,6 @@
           <a:lstStyle/>
           <a:p>
             <a:pPr algn="ctr"/>
-            <a:endParaRPr/>
           </a:p>
         </p:txBody>
       </p:sp>
@@ -25202,7 +27604,7 @@
 </file>
 
 <file path=ppt/slides/slide28.xml><?xml version="1.0" encoding="utf-8"?>
-<p:sld xmlns:a="http://schemas.openxmlformats.org/drawingml/2006/main" xmlns:r="http://schemas.openxmlformats.org/officeDocument/2006/relationships" xmlns:p="http://schemas.openxmlformats.org/presentationml/2006/main">
+<p:sld xmlns:a="http://schemas.openxmlformats.org/drawingml/2006/main" xmlns:p="http://schemas.openxmlformats.org/presentationml/2006/main" xmlns:r="http://schemas.openxmlformats.org/officeDocument/2006/relationships">
   <p:cSld>
     <p:spTree>
       <p:nvGrpSpPr>
@@ -25210,14 +27612,7 @@
         <p:cNvGrpSpPr/>
         <p:nvPr/>
       </p:nvGrpSpPr>
-      <p:grpSpPr>
-        <a:xfrm>
-          <a:off x="0" y="0"/>
-          <a:ext cx="0" cy="0"/>
-          <a:chOff x="0" y="0"/>
-          <a:chExt cx="0" cy="0"/>
-        </a:xfrm>
-      </p:grpSpPr>
+      <p:grpSpPr/>
       <p:sp>
         <p:nvSpPr>
           <p:cNvPr id="2" name="Rectangle 1"/>
@@ -25259,7 +27654,6 @@
           <a:lstStyle/>
           <a:p>
             <a:pPr algn="ctr"/>
-            <a:endParaRPr/>
           </a:p>
         </p:txBody>
       </p:sp>
@@ -25304,7 +27698,6 @@
           <a:lstStyle/>
           <a:p>
             <a:pPr algn="ctr"/>
-            <a:endParaRPr/>
           </a:p>
         </p:txBody>
       </p:sp>
@@ -25349,7 +27742,6 @@
           <a:lstStyle/>
           <a:p>
             <a:pPr algn="ctr"/>
-            <a:endParaRPr/>
           </a:p>
         </p:txBody>
       </p:sp>
@@ -25394,7 +27786,6 @@
           <a:lstStyle/>
           <a:p>
             <a:pPr algn="ctr"/>
-            <a:endParaRPr/>
           </a:p>
         </p:txBody>
       </p:sp>
@@ -25439,7 +27830,6 @@
           <a:lstStyle/>
           <a:p>
             <a:pPr algn="ctr"/>
-            <a:endParaRPr/>
           </a:p>
         </p:txBody>
       </p:sp>
@@ -25484,7 +27874,6 @@
           <a:lstStyle/>
           <a:p>
             <a:pPr algn="ctr"/>
-            <a:endParaRPr/>
           </a:p>
         </p:txBody>
       </p:sp>
@@ -25529,7 +27918,6 @@
           <a:lstStyle/>
           <a:p>
             <a:pPr algn="ctr"/>
-            <a:endParaRPr/>
           </a:p>
         </p:txBody>
       </p:sp>
@@ -25574,7 +27962,6 @@
           <a:lstStyle/>
           <a:p>
             <a:pPr algn="ctr"/>
-            <a:endParaRPr/>
           </a:p>
         </p:txBody>
       </p:sp>
@@ -25619,7 +28006,6 @@
           <a:lstStyle/>
           <a:p>
             <a:pPr algn="ctr"/>
-            <a:endParaRPr/>
           </a:p>
         </p:txBody>
       </p:sp>
@@ -25702,7 +28088,7 @@
 </file>
 
 <file path=ppt/slides/slide3.xml><?xml version="1.0" encoding="utf-8"?>
-<p:sld xmlns:a="http://schemas.openxmlformats.org/drawingml/2006/main" xmlns:r="http://schemas.openxmlformats.org/officeDocument/2006/relationships" xmlns:p="http://schemas.openxmlformats.org/presentationml/2006/main">
+<p:sld xmlns:a="http://schemas.openxmlformats.org/drawingml/2006/main" xmlns:p="http://schemas.openxmlformats.org/presentationml/2006/main" xmlns:r="http://schemas.openxmlformats.org/officeDocument/2006/relationships">
   <p:cSld>
     <p:spTree>
       <p:nvGrpSpPr>
@@ -25710,14 +28096,7 @@
         <p:cNvGrpSpPr/>
         <p:nvPr/>
       </p:nvGrpSpPr>
-      <p:grpSpPr>
-        <a:xfrm>
-          <a:off x="0" y="0"/>
-          <a:ext cx="0" cy="0"/>
-          <a:chOff x="0" y="0"/>
-          <a:chExt cx="0" cy="0"/>
-        </a:xfrm>
-      </p:grpSpPr>
+      <p:grpSpPr/>
       <p:sp>
         <p:nvSpPr>
           <p:cNvPr id="2" name="Rectangle 1"/>
@@ -25759,7 +28138,6 @@
           <a:lstStyle/>
           <a:p>
             <a:pPr algn="ctr"/>
-            <a:endParaRPr/>
           </a:p>
         </p:txBody>
       </p:sp>
@@ -25804,7 +28182,6 @@
           <a:lstStyle/>
           <a:p>
             <a:pPr algn="ctr"/>
-            <a:endParaRPr/>
           </a:p>
         </p:txBody>
       </p:sp>
@@ -25884,7 +28261,6 @@
           <a:lstStyle/>
           <a:p>
             <a:pPr algn="ctr"/>
-            <a:endParaRPr/>
           </a:p>
         </p:txBody>
       </p:sp>
@@ -25967,7 +28343,7 @@
 </file>
 
 <file path=ppt/slides/slide4.xml><?xml version="1.0" encoding="utf-8"?>
-<p:sld xmlns:a="http://schemas.openxmlformats.org/drawingml/2006/main" xmlns:r="http://schemas.openxmlformats.org/officeDocument/2006/relationships" xmlns:p="http://schemas.openxmlformats.org/presentationml/2006/main">
+<p:sld xmlns:a="http://schemas.openxmlformats.org/drawingml/2006/main" xmlns:p="http://schemas.openxmlformats.org/presentationml/2006/main" xmlns:r="http://schemas.openxmlformats.org/officeDocument/2006/relationships">
   <p:cSld>
     <p:spTree>
       <p:nvGrpSpPr>
@@ -25975,14 +28351,7 @@
         <p:cNvGrpSpPr/>
         <p:nvPr/>
       </p:nvGrpSpPr>
-      <p:grpSpPr>
-        <a:xfrm>
-          <a:off x="0" y="0"/>
-          <a:ext cx="0" cy="0"/>
-          <a:chOff x="0" y="0"/>
-          <a:chExt cx="0" cy="0"/>
-        </a:xfrm>
-      </p:grpSpPr>
+      <p:grpSpPr/>
       <p:sp>
         <p:nvSpPr>
           <p:cNvPr id="2" name="TextBox 1"/>
@@ -26059,7 +28428,6 @@
           <a:lstStyle/>
           <a:p>
             <a:pPr algn="ctr"/>
-            <a:endParaRPr/>
           </a:p>
         </p:txBody>
       </p:sp>
@@ -26139,7 +28507,6 @@
           <a:lstStyle/>
           <a:p>
             <a:pPr algn="ctr"/>
-            <a:endParaRPr/>
           </a:p>
         </p:txBody>
       </p:sp>
@@ -26289,7 +28656,6 @@
           <a:lstStyle/>
           <a:p>
             <a:pPr algn="ctr"/>
-            <a:endParaRPr/>
           </a:p>
         </p:txBody>
       </p:sp>
@@ -26439,7 +28805,6 @@
           <a:lstStyle/>
           <a:p>
             <a:pPr algn="ctr"/>
-            <a:endParaRPr/>
           </a:p>
         </p:txBody>
       </p:sp>
@@ -26589,7 +28954,6 @@
           <a:lstStyle/>
           <a:p>
             <a:pPr algn="ctr"/>
-            <a:endParaRPr/>
           </a:p>
         </p:txBody>
       </p:sp>
@@ -26739,7 +29103,6 @@
           <a:lstStyle/>
           <a:p>
             <a:pPr algn="ctr"/>
-            <a:endParaRPr/>
           </a:p>
         </p:txBody>
       </p:sp>
@@ -26752,7 +29115,7 @@
           <p:nvPr/>
         </p:nvPicPr>
         <p:blipFill>
-          <a:blip r:embed="rId3"/>
+          <a:blip r:embed="rId2"/>
           <a:stretch>
             <a:fillRect/>
           </a:stretch>
@@ -26808,7 +29171,6 @@
           <a:lstStyle/>
           <a:p>
             <a:pPr algn="ctr"/>
-            <a:endParaRPr/>
           </a:p>
         </p:txBody>
       </p:sp>
@@ -26853,7 +29215,6 @@
           <a:lstStyle/>
           <a:p>
             <a:pPr algn="ctr"/>
-            <a:endParaRPr/>
           </a:p>
         </p:txBody>
       </p:sp>
@@ -26936,7 +29297,7 @@
 </file>
 
 <file path=ppt/slides/slide5.xml><?xml version="1.0" encoding="utf-8"?>
-<p:sld xmlns:a="http://schemas.openxmlformats.org/drawingml/2006/main" xmlns:r="http://schemas.openxmlformats.org/officeDocument/2006/relationships" xmlns:p="http://schemas.openxmlformats.org/presentationml/2006/main">
+<p:sld xmlns:a="http://schemas.openxmlformats.org/drawingml/2006/main" xmlns:p="http://schemas.openxmlformats.org/presentationml/2006/main" xmlns:r="http://schemas.openxmlformats.org/officeDocument/2006/relationships">
   <p:cSld>
     <p:spTree>
       <p:nvGrpSpPr>
@@ -26944,14 +29305,7 @@
         <p:cNvGrpSpPr/>
         <p:nvPr/>
       </p:nvGrpSpPr>
-      <p:grpSpPr>
-        <a:xfrm>
-          <a:off x="0" y="0"/>
-          <a:ext cx="0" cy="0"/>
-          <a:chOff x="0" y="0"/>
-          <a:chExt cx="0" cy="0"/>
-        </a:xfrm>
-      </p:grpSpPr>
+      <p:grpSpPr/>
       <p:sp>
         <p:nvSpPr>
           <p:cNvPr id="2" name="TextBox 1"/>
@@ -27028,7 +29382,6 @@
           <a:lstStyle/>
           <a:p>
             <a:pPr algn="ctr"/>
-            <a:endParaRPr/>
           </a:p>
         </p:txBody>
       </p:sp>
@@ -27108,7 +29461,6 @@
           <a:lstStyle/>
           <a:p>
             <a:pPr algn="ctr"/>
-            <a:endParaRPr/>
           </a:p>
         </p:txBody>
       </p:sp>
@@ -27220,6 +29572,223 @@
       <p:pic>
         <p:nvPicPr>
           <p:cNvPr id="9" name="Picture 8" descr="ppt_p1.png"/>
+          <p:cNvPicPr>
+            <a:picLocks noChangeAspect="1"/>
+          </p:cNvPicPr>
+          <p:nvPr/>
+        </p:nvPicPr>
+        <p:blipFill>
+          <a:blip r:embed="rId2"/>
+          <a:stretch>
+            <a:fillRect/>
+          </a:stretch>
+        </p:blipFill>
+        <p:spPr>
+          <a:xfrm>
+            <a:off x="9488304" y="1891295"/>
+            <a:ext cx="1687391" cy="562463"/>
+          </a:xfrm>
+          <a:prstGeom prst="rect">
+            <a:avLst/>
+          </a:prstGeom>
+        </p:spPr>
+      </p:pic>
+      <p:sp>
+        <p:nvSpPr>
+          <p:cNvPr id="10" name="Rectangle 9"/>
+          <p:cNvSpPr/>
+          <p:nvPr/>
+        </p:nvSpPr>
+        <p:spPr>
+          <a:xfrm>
+            <a:off x="9252000" y="1891295"/>
+            <a:ext cx="2160000" cy="562463"/>
+          </a:xfrm>
+          <a:prstGeom prst="rect">
+            <a:avLst/>
+          </a:prstGeom>
+          <a:noFill/>
+          <a:ln w="15240">
+            <a:solidFill>
+              <a:srgbClr val="2F6EBA"/>
+            </a:solidFill>
+          </a:ln>
+          <a:effectLst/>
+        </p:spPr>
+        <p:style>
+          <a:lnRef idx="1">
+            <a:schemeClr val="accent1"/>
+          </a:lnRef>
+          <a:fillRef idx="3">
+            <a:schemeClr val="accent1"/>
+          </a:fillRef>
+          <a:effectRef idx="2">
+            <a:schemeClr val="accent1"/>
+          </a:effectRef>
+          <a:fontRef idx="minor">
+            <a:schemeClr val="lt1"/>
+          </a:fontRef>
+        </p:style>
+        <p:txBody>
+          <a:bodyPr rtlCol="0" anchor="ctr"/>
+          <a:lstStyle/>
+          <a:p>
+            <a:pPr algn="ctr"/>
+          </a:p>
+        </p:txBody>
+      </p:sp>
+      <p:sp>
+        <p:nvSpPr>
+          <p:cNvPr id="11" name="Rectangle 10"/>
+          <p:cNvSpPr/>
+          <p:nvPr/>
+        </p:nvSpPr>
+        <p:spPr>
+          <a:xfrm>
+            <a:off x="792000" y="2545200"/>
+            <a:ext cx="10620000" cy="9000"/>
+          </a:xfrm>
+          <a:prstGeom prst="rect">
+            <a:avLst/>
+          </a:prstGeom>
+          <a:solidFill>
+            <a:srgbClr val="C8D0DC"/>
+          </a:solidFill>
+          <a:ln>
+            <a:noFill/>
+          </a:ln>
+          <a:effectLst/>
+        </p:spPr>
+        <p:style>
+          <a:lnRef idx="1">
+            <a:schemeClr val="accent1"/>
+          </a:lnRef>
+          <a:fillRef idx="3">
+            <a:schemeClr val="accent1"/>
+          </a:fillRef>
+          <a:effectRef idx="2">
+            <a:schemeClr val="accent1"/>
+          </a:effectRef>
+          <a:fontRef idx="minor">
+            <a:schemeClr val="lt1"/>
+          </a:fontRef>
+        </p:style>
+        <p:txBody>
+          <a:bodyPr rtlCol="0" anchor="ctr"/>
+          <a:lstStyle/>
+          <a:p>
+            <a:pPr algn="ctr"/>
+          </a:p>
+        </p:txBody>
+      </p:sp>
+      <p:sp>
+        <p:nvSpPr>
+          <p:cNvPr id="12" name="TextBox 11"/>
+          <p:cNvSpPr txBox="1"/>
+          <p:nvPr/>
+        </p:nvSpPr>
+        <p:spPr>
+          <a:xfrm>
+            <a:off x="792000" y="2736000"/>
+            <a:ext cx="648000" cy="432000"/>
+          </a:xfrm>
+          <a:prstGeom prst="rect">
+            <a:avLst/>
+          </a:prstGeom>
+          <a:noFill/>
+        </p:spPr>
+        <p:txBody>
+          <a:bodyPr wrap="none">
+            <a:spAutoFit/>
+          </a:bodyPr>
+          <a:lstStyle/>
+          <a:p>
+            <a:pPr algn="l"/>
+            <a:r>
+              <a:rPr sz="2400" b="1">
+                <a:solidFill>
+                  <a:srgbClr val="2F6EBA"/>
+                </a:solidFill>
+                <a:latin typeface="Microsoft YaHei"/>
+              </a:rPr>
+              <a:t>02</a:t>
+            </a:r>
+          </a:p>
+        </p:txBody>
+      </p:sp>
+      <p:sp>
+        <p:nvSpPr>
+          <p:cNvPr id="13" name="TextBox 12"/>
+          <p:cNvSpPr txBox="1"/>
+          <p:nvPr/>
+        </p:nvSpPr>
+        <p:spPr>
+          <a:xfrm>
+            <a:off x="1512000" y="2699999"/>
+            <a:ext cx="7560000" cy="288000"/>
+          </a:xfrm>
+          <a:prstGeom prst="rect">
+            <a:avLst/>
+          </a:prstGeom>
+          <a:noFill/>
+        </p:spPr>
+        <p:txBody>
+          <a:bodyPr wrap="square">
+            <a:spAutoFit/>
+          </a:bodyPr>
+          <a:lstStyle/>
+          <a:p>
+            <a:pPr algn="l"/>
+            <a:r>
+              <a:rPr sz="1800" b="1">
+                <a:solidFill>
+                  <a:srgbClr val="1F3A68"/>
+                </a:solidFill>
+                <a:latin typeface="Microsoft YaHei"/>
+              </a:rPr>
+              <a:t>P2 上下文超限</a:t>
+            </a:r>
+          </a:p>
+        </p:txBody>
+      </p:sp>
+      <p:sp>
+        <p:nvSpPr>
+          <p:cNvPr id="14" name="TextBox 13"/>
+          <p:cNvSpPr txBox="1"/>
+          <p:nvPr/>
+        </p:nvSpPr>
+        <p:spPr>
+          <a:xfrm>
+            <a:off x="1512000" y="2977200"/>
+            <a:ext cx="7560000" cy="403199"/>
+          </a:xfrm>
+          <a:prstGeom prst="rect">
+            <a:avLst/>
+          </a:prstGeom>
+          <a:noFill/>
+        </p:spPr>
+        <p:txBody>
+          <a:bodyPr wrap="square">
+            <a:spAutoFit/>
+          </a:bodyPr>
+          <a:lstStyle/>
+          <a:p>
+            <a:pPr algn="l"/>
+            <a:r>
+              <a:rPr sz="1300" b="0">
+                <a:solidFill>
+                  <a:srgbClr val="555F6E"/>
+                </a:solidFill>
+                <a:latin typeface="Microsoft YaHei"/>
+              </a:rPr>
+              <a:t>场内战报与硬约束同时涌入，粗暴截断可能把“禁止越境”等约束切掉，规划易合规出错。</a:t>
+            </a:r>
+          </a:p>
+        </p:txBody>
+      </p:sp>
+      <p:pic>
+        <p:nvPicPr>
+          <p:cNvPr id="15" name="Picture 14" descr="ppt_p2.png"/>
           <p:cNvPicPr>
             <a:picLocks noChangeAspect="1"/>
           </p:cNvPicPr>
@@ -27233,7 +29802,7 @@
         </p:blipFill>
         <p:spPr>
           <a:xfrm>
-            <a:off x="9488304" y="1891295"/>
+            <a:off x="9488304" y="2798495"/>
             <a:ext cx="1687391" cy="562463"/>
           </a:xfrm>
           <a:prstGeom prst="rect">
@@ -27243,13 +29812,13 @@
       </p:pic>
       <p:sp>
         <p:nvSpPr>
-          <p:cNvPr id="10" name="Rectangle 9"/>
+          <p:cNvPr id="16" name="Rectangle 15"/>
           <p:cNvSpPr/>
           <p:nvPr/>
         </p:nvSpPr>
         <p:spPr>
           <a:xfrm>
-            <a:off x="9252000" y="1891295"/>
+            <a:off x="9252000" y="2798495"/>
             <a:ext cx="2160000" cy="562463"/>
           </a:xfrm>
           <a:prstGeom prst="rect">
@@ -27282,19 +29851,18 @@
           <a:lstStyle/>
           <a:p>
             <a:pPr algn="ctr"/>
-            <a:endParaRPr/>
-          </a:p>
-        </p:txBody>
-      </p:sp>
-      <p:sp>
-        <p:nvSpPr>
-          <p:cNvPr id="11" name="Rectangle 10"/>
+          </a:p>
+        </p:txBody>
+      </p:sp>
+      <p:sp>
+        <p:nvSpPr>
+          <p:cNvPr id="17" name="Rectangle 16"/>
           <p:cNvSpPr/>
           <p:nvPr/>
         </p:nvSpPr>
         <p:spPr>
           <a:xfrm>
-            <a:off x="792000" y="2545200"/>
+            <a:off x="792000" y="3452400"/>
             <a:ext cx="10620000" cy="9000"/>
           </a:xfrm>
           <a:prstGeom prst="rect">
@@ -27327,19 +29895,18 @@
           <a:lstStyle/>
           <a:p>
             <a:pPr algn="ctr"/>
-            <a:endParaRPr/>
-          </a:p>
-        </p:txBody>
-      </p:sp>
-      <p:sp>
-        <p:nvSpPr>
-          <p:cNvPr id="12" name="TextBox 11"/>
-          <p:cNvSpPr txBox="1"/>
-          <p:nvPr/>
-        </p:nvSpPr>
-        <p:spPr>
-          <a:xfrm>
-            <a:off x="792000" y="2736000"/>
+          </a:p>
+        </p:txBody>
+      </p:sp>
+      <p:sp>
+        <p:nvSpPr>
+          <p:cNvPr id="18" name="TextBox 17"/>
+          <p:cNvSpPr txBox="1"/>
+          <p:nvPr/>
+        </p:nvSpPr>
+        <p:spPr>
+          <a:xfrm>
+            <a:off x="792000" y="3643199"/>
             <a:ext cx="648000" cy="432000"/>
           </a:xfrm>
           <a:prstGeom prst="rect">
@@ -27361,20 +29928,20 @@
                 </a:solidFill>
                 <a:latin typeface="Microsoft YaHei"/>
               </a:rPr>
-              <a:t>02</a:t>
-            </a:r>
-          </a:p>
-        </p:txBody>
-      </p:sp>
-      <p:sp>
-        <p:nvSpPr>
-          <p:cNvPr id="13" name="TextBox 12"/>
-          <p:cNvSpPr txBox="1"/>
-          <p:nvPr/>
-        </p:nvSpPr>
-        <p:spPr>
-          <a:xfrm>
-            <a:off x="1512000" y="2699999"/>
+              <a:t>03</a:t>
+            </a:r>
+          </a:p>
+        </p:txBody>
+      </p:sp>
+      <p:sp>
+        <p:nvSpPr>
+          <p:cNvPr id="19" name="TextBox 18"/>
+          <p:cNvSpPr txBox="1"/>
+          <p:nvPr/>
+        </p:nvSpPr>
+        <p:spPr>
+          <a:xfrm>
+            <a:off x="1512000" y="3607200"/>
             <a:ext cx="7560000" cy="288000"/>
           </a:xfrm>
           <a:prstGeom prst="rect">
@@ -27396,20 +29963,20 @@
                 </a:solidFill>
                 <a:latin typeface="Microsoft YaHei"/>
               </a:rPr>
-              <a:t>P2 上下文超限</a:t>
-            </a:r>
-          </a:p>
-        </p:txBody>
-      </p:sp>
-      <p:sp>
-        <p:nvSpPr>
-          <p:cNvPr id="14" name="TextBox 13"/>
-          <p:cNvSpPr txBox="1"/>
-          <p:nvPr/>
-        </p:nvSpPr>
-        <p:spPr>
-          <a:xfrm>
-            <a:off x="1512000" y="2977200"/>
+              <a:t>P3 查询口径混杂</a:t>
+            </a:r>
+          </a:p>
+        </p:txBody>
+      </p:sp>
+      <p:sp>
+        <p:nvSpPr>
+          <p:cNvPr id="20" name="TextBox 19"/>
+          <p:cNvSpPr txBox="1"/>
+          <p:nvPr/>
+        </p:nvSpPr>
+        <p:spPr>
+          <a:xfrm>
+            <a:off x="1512000" y="3884399"/>
             <a:ext cx="7560000" cy="403199"/>
           </a:xfrm>
           <a:prstGeom prst="rect">
@@ -27431,14 +29998,14 @@
                 </a:solidFill>
                 <a:latin typeface="Microsoft YaHei"/>
               </a:rPr>
-              <a:t>场内战报与硬约束同时涌入，粗暴截断可能把“禁止越境”等约束切掉，规划易合规出错。</a:t>
+              <a:t>装备参数需要精确，经验教训需要语义泛化；同一路无法同时满足精确与召回。</a:t>
             </a:r>
           </a:p>
         </p:txBody>
       </p:sp>
       <p:pic>
         <p:nvPicPr>
-          <p:cNvPr id="15" name="Picture 14" descr="ppt_p2.png"/>
+          <p:cNvPr id="21" name="Picture 20" descr="ppt_p3.png"/>
           <p:cNvPicPr>
             <a:picLocks noChangeAspect="1"/>
           </p:cNvPicPr>
@@ -27452,7 +30019,7 @@
         </p:blipFill>
         <p:spPr>
           <a:xfrm>
-            <a:off x="9488304" y="2798495"/>
+            <a:off x="9488304" y="3705696"/>
             <a:ext cx="1687391" cy="562463"/>
           </a:xfrm>
           <a:prstGeom prst="rect">
@@ -27462,13 +30029,13 @@
       </p:pic>
       <p:sp>
         <p:nvSpPr>
-          <p:cNvPr id="16" name="Rectangle 15"/>
+          <p:cNvPr id="22" name="Rectangle 21"/>
           <p:cNvSpPr/>
           <p:nvPr/>
         </p:nvSpPr>
         <p:spPr>
           <a:xfrm>
-            <a:off x="9252000" y="2798495"/>
+            <a:off x="9252000" y="3705696"/>
             <a:ext cx="2160000" cy="562463"/>
           </a:xfrm>
           <a:prstGeom prst="rect">
@@ -27501,19 +30068,18 @@
           <a:lstStyle/>
           <a:p>
             <a:pPr algn="ctr"/>
-            <a:endParaRPr/>
-          </a:p>
-        </p:txBody>
-      </p:sp>
-      <p:sp>
-        <p:nvSpPr>
-          <p:cNvPr id="17" name="Rectangle 16"/>
+          </a:p>
+        </p:txBody>
+      </p:sp>
+      <p:sp>
+        <p:nvSpPr>
+          <p:cNvPr id="23" name="Rectangle 22"/>
           <p:cNvSpPr/>
           <p:nvPr/>
         </p:nvSpPr>
         <p:spPr>
           <a:xfrm>
-            <a:off x="792000" y="3452400"/>
+            <a:off x="792000" y="4359600"/>
             <a:ext cx="10620000" cy="9000"/>
           </a:xfrm>
           <a:prstGeom prst="rect">
@@ -27546,19 +30112,18 @@
           <a:lstStyle/>
           <a:p>
             <a:pPr algn="ctr"/>
-            <a:endParaRPr/>
-          </a:p>
-        </p:txBody>
-      </p:sp>
-      <p:sp>
-        <p:nvSpPr>
-          <p:cNvPr id="18" name="TextBox 17"/>
-          <p:cNvSpPr txBox="1"/>
-          <p:nvPr/>
-        </p:nvSpPr>
-        <p:spPr>
-          <a:xfrm>
-            <a:off x="792000" y="3643199"/>
+          </a:p>
+        </p:txBody>
+      </p:sp>
+      <p:sp>
+        <p:nvSpPr>
+          <p:cNvPr id="24" name="TextBox 23"/>
+          <p:cNvSpPr txBox="1"/>
+          <p:nvPr/>
+        </p:nvSpPr>
+        <p:spPr>
+          <a:xfrm>
+            <a:off x="792000" y="4550400"/>
             <a:ext cx="648000" cy="432000"/>
           </a:xfrm>
           <a:prstGeom prst="rect">
@@ -27580,20 +30145,20 @@
                 </a:solidFill>
                 <a:latin typeface="Microsoft YaHei"/>
               </a:rPr>
-              <a:t>03</a:t>
-            </a:r>
-          </a:p>
-        </p:txBody>
-      </p:sp>
-      <p:sp>
-        <p:nvSpPr>
-          <p:cNvPr id="19" name="TextBox 18"/>
-          <p:cNvSpPr txBox="1"/>
-          <p:nvPr/>
-        </p:nvSpPr>
-        <p:spPr>
-          <a:xfrm>
-            <a:off x="1512000" y="3607200"/>
+              <a:t>04</a:t>
+            </a:r>
+          </a:p>
+        </p:txBody>
+      </p:sp>
+      <p:sp>
+        <p:nvSpPr>
+          <p:cNvPr id="25" name="TextBox 24"/>
+          <p:cNvSpPr txBox="1"/>
+          <p:nvPr/>
+        </p:nvSpPr>
+        <p:spPr>
+          <a:xfrm>
+            <a:off x="1512000" y="4514400"/>
             <a:ext cx="7560000" cy="288000"/>
           </a:xfrm>
           <a:prstGeom prst="rect">
@@ -27615,20 +30180,20 @@
                 </a:solidFill>
                 <a:latin typeface="Microsoft YaHei"/>
               </a:rPr>
-              <a:t>P3 查询口径混杂</a:t>
-            </a:r>
-          </a:p>
-        </p:txBody>
-      </p:sp>
-      <p:sp>
-        <p:nvSpPr>
-          <p:cNvPr id="20" name="TextBox 19"/>
-          <p:cNvSpPr txBox="1"/>
-          <p:nvPr/>
-        </p:nvSpPr>
-        <p:spPr>
-          <a:xfrm>
-            <a:off x="1512000" y="3884399"/>
+              <a:t>P4 库噪声</a:t>
+            </a:r>
+          </a:p>
+        </p:txBody>
+      </p:sp>
+      <p:sp>
+        <p:nvSpPr>
+          <p:cNvPr id="26" name="TextBox 25"/>
+          <p:cNvSpPr txBox="1"/>
+          <p:nvPr/>
+        </p:nvSpPr>
+        <p:spPr>
+          <a:xfrm>
+            <a:off x="1512000" y="4791600"/>
             <a:ext cx="7560000" cy="403199"/>
           </a:xfrm>
           <a:prstGeom prst="rect">
@@ -27650,14 +30215,14 @@
                 </a:solidFill>
                 <a:latin typeface="Microsoft YaHei"/>
               </a:rPr>
-              <a:t>装备参数需要精确，经验教训需要语义泛化；同一路无法同时满足精确与召回。</a:t>
+              <a:t>复盘无差别入库让长期库积累流水账，信号被噪声淹没，且无法回答“这条为什么在库中”。</a:t>
             </a:r>
           </a:p>
         </p:txBody>
       </p:sp>
       <p:pic>
         <p:nvPicPr>
-          <p:cNvPr id="21" name="Picture 20" descr="ppt_p3.png"/>
+          <p:cNvPr id="27" name="Picture 26" descr="ppt_p4.png"/>
           <p:cNvPicPr>
             <a:picLocks noChangeAspect="1"/>
           </p:cNvPicPr>
@@ -27671,7 +30236,7 @@
         </p:blipFill>
         <p:spPr>
           <a:xfrm>
-            <a:off x="9488304" y="3705696"/>
+            <a:off x="9488304" y="4612896"/>
             <a:ext cx="1687391" cy="562463"/>
           </a:xfrm>
           <a:prstGeom prst="rect">
@@ -27681,13 +30246,13 @@
       </p:pic>
       <p:sp>
         <p:nvSpPr>
-          <p:cNvPr id="22" name="Rectangle 21"/>
+          <p:cNvPr id="28" name="Rectangle 27"/>
           <p:cNvSpPr/>
           <p:nvPr/>
         </p:nvSpPr>
         <p:spPr>
           <a:xfrm>
-            <a:off x="9252000" y="3705696"/>
+            <a:off x="9252000" y="4612896"/>
             <a:ext cx="2160000" cy="562463"/>
           </a:xfrm>
           <a:prstGeom prst="rect">
@@ -27720,19 +30285,18 @@
           <a:lstStyle/>
           <a:p>
             <a:pPr algn="ctr"/>
-            <a:endParaRPr/>
-          </a:p>
-        </p:txBody>
-      </p:sp>
-      <p:sp>
-        <p:nvSpPr>
-          <p:cNvPr id="23" name="Rectangle 22"/>
+          </a:p>
+        </p:txBody>
+      </p:sp>
+      <p:sp>
+        <p:nvSpPr>
+          <p:cNvPr id="29" name="Rectangle 28"/>
           <p:cNvSpPr/>
           <p:nvPr/>
         </p:nvSpPr>
         <p:spPr>
           <a:xfrm>
-            <a:off x="792000" y="4359600"/>
+            <a:off x="792000" y="5266800"/>
             <a:ext cx="10620000" cy="9000"/>
           </a:xfrm>
           <a:prstGeom prst="rect">
@@ -27765,19 +30329,18 @@
           <a:lstStyle/>
           <a:p>
             <a:pPr algn="ctr"/>
-            <a:endParaRPr/>
-          </a:p>
-        </p:txBody>
-      </p:sp>
-      <p:sp>
-        <p:nvSpPr>
-          <p:cNvPr id="24" name="TextBox 23"/>
-          <p:cNvSpPr txBox="1"/>
-          <p:nvPr/>
-        </p:nvSpPr>
-        <p:spPr>
-          <a:xfrm>
-            <a:off x="792000" y="4550400"/>
+          </a:p>
+        </p:txBody>
+      </p:sp>
+      <p:sp>
+        <p:nvSpPr>
+          <p:cNvPr id="30" name="TextBox 29"/>
+          <p:cNvSpPr txBox="1"/>
+          <p:nvPr/>
+        </p:nvSpPr>
+        <p:spPr>
+          <a:xfrm>
+            <a:off x="792000" y="5457599"/>
             <a:ext cx="648000" cy="432000"/>
           </a:xfrm>
           <a:prstGeom prst="rect">
@@ -27799,20 +30362,20 @@
                 </a:solidFill>
                 <a:latin typeface="Microsoft YaHei"/>
               </a:rPr>
-              <a:t>04</a:t>
-            </a:r>
-          </a:p>
-        </p:txBody>
-      </p:sp>
-      <p:sp>
-        <p:nvSpPr>
-          <p:cNvPr id="25" name="TextBox 24"/>
-          <p:cNvSpPr txBox="1"/>
-          <p:nvPr/>
-        </p:nvSpPr>
-        <p:spPr>
-          <a:xfrm>
-            <a:off x="1512000" y="4514400"/>
+              <a:t>05</a:t>
+            </a:r>
+          </a:p>
+        </p:txBody>
+      </p:sp>
+      <p:sp>
+        <p:nvSpPr>
+          <p:cNvPr id="31" name="TextBox 30"/>
+          <p:cNvSpPr txBox="1"/>
+          <p:nvPr/>
+        </p:nvSpPr>
+        <p:spPr>
+          <a:xfrm>
+            <a:off x="1512000" y="5421600"/>
             <a:ext cx="7560000" cy="288000"/>
           </a:xfrm>
           <a:prstGeom prst="rect">
@@ -27834,20 +30397,20 @@
                 </a:solidFill>
                 <a:latin typeface="Microsoft YaHei"/>
               </a:rPr>
-              <a:t>P4 库噪声</a:t>
-            </a:r>
-          </a:p>
-        </p:txBody>
-      </p:sp>
-      <p:sp>
-        <p:nvSpPr>
-          <p:cNvPr id="26" name="TextBox 25"/>
-          <p:cNvSpPr txBox="1"/>
-          <p:nvPr/>
-        </p:nvSpPr>
-        <p:spPr>
-          <a:xfrm>
-            <a:off x="1512000" y="4791600"/>
+              <a:t>P5 目标检索弱</a:t>
+            </a:r>
+          </a:p>
+        </p:txBody>
+      </p:sp>
+      <p:sp>
+        <p:nvSpPr>
+          <p:cNvPr id="32" name="TextBox 31"/>
+          <p:cNvSpPr txBox="1"/>
+          <p:nvPr/>
+        </p:nvSpPr>
+        <p:spPr>
+          <a:xfrm>
+            <a:off x="1512000" y="5698799"/>
             <a:ext cx="7560000" cy="403199"/>
           </a:xfrm>
           <a:prstGeom prst="rect">
@@ -27869,14 +30432,14 @@
                 </a:solidFill>
                 <a:latin typeface="Microsoft YaHei"/>
               </a:rPr>
-              <a:t>复盘无差别入库让长期库积累流水账，信号被噪声淹没，且无法回答“这条为什么在库中”。</a:t>
+              <a:t>直接用任务目标一句话查询信息量太薄，规划不同阶段需要的记忆类型不同。</a:t>
             </a:r>
           </a:p>
         </p:txBody>
       </p:sp>
       <p:pic>
         <p:nvPicPr>
-          <p:cNvPr id="27" name="Picture 26" descr="ppt_p4.png"/>
+          <p:cNvPr id="33" name="Picture 32" descr="ppt_p5.png"/>
           <p:cNvPicPr>
             <a:picLocks noChangeAspect="1"/>
           </p:cNvPicPr>
@@ -27890,7 +30453,7 @@
         </p:blipFill>
         <p:spPr>
           <a:xfrm>
-            <a:off x="9488304" y="4612896"/>
+            <a:off x="9488304" y="5520096"/>
             <a:ext cx="1687391" cy="562463"/>
           </a:xfrm>
           <a:prstGeom prst="rect">
@@ -27900,13 +30463,13 @@
       </p:pic>
       <p:sp>
         <p:nvSpPr>
-          <p:cNvPr id="28" name="Rectangle 27"/>
+          <p:cNvPr id="34" name="Rectangle 33"/>
           <p:cNvSpPr/>
           <p:nvPr/>
         </p:nvSpPr>
         <p:spPr>
           <a:xfrm>
-            <a:off x="9252000" y="4612896"/>
+            <a:off x="9252000" y="5520096"/>
             <a:ext cx="2160000" cy="562463"/>
           </a:xfrm>
           <a:prstGeom prst="rect">
@@ -27939,19 +30502,18 @@
           <a:lstStyle/>
           <a:p>
             <a:pPr algn="ctr"/>
-            <a:endParaRPr/>
-          </a:p>
-        </p:txBody>
-      </p:sp>
-      <p:sp>
-        <p:nvSpPr>
-          <p:cNvPr id="29" name="Rectangle 28"/>
+          </a:p>
+        </p:txBody>
+      </p:sp>
+      <p:sp>
+        <p:nvSpPr>
+          <p:cNvPr id="35" name="Rectangle 34"/>
           <p:cNvSpPr/>
           <p:nvPr/>
         </p:nvSpPr>
         <p:spPr>
           <a:xfrm>
-            <a:off x="792000" y="5266800"/>
+            <a:off x="792000" y="6173999"/>
             <a:ext cx="10620000" cy="9000"/>
           </a:xfrm>
           <a:prstGeom prst="rect">
@@ -27984,194 +30546,19 @@
           <a:lstStyle/>
           <a:p>
             <a:pPr algn="ctr"/>
-            <a:endParaRPr/>
-          </a:p>
-        </p:txBody>
-      </p:sp>
-      <p:sp>
-        <p:nvSpPr>
-          <p:cNvPr id="30" name="TextBox 29"/>
-          <p:cNvSpPr txBox="1"/>
-          <p:nvPr/>
-        </p:nvSpPr>
-        <p:spPr>
-          <a:xfrm>
-            <a:off x="792000" y="5457599"/>
-            <a:ext cx="648000" cy="432000"/>
-          </a:xfrm>
-          <a:prstGeom prst="rect">
-            <a:avLst/>
-          </a:prstGeom>
-          <a:noFill/>
-        </p:spPr>
-        <p:txBody>
-          <a:bodyPr wrap="none">
-            <a:spAutoFit/>
-          </a:bodyPr>
-          <a:lstStyle/>
-          <a:p>
-            <a:pPr algn="l"/>
-            <a:r>
-              <a:rPr sz="2400" b="1">
-                <a:solidFill>
-                  <a:srgbClr val="2F6EBA"/>
-                </a:solidFill>
-                <a:latin typeface="Microsoft YaHei"/>
-              </a:rPr>
-              <a:t>05</a:t>
-            </a:r>
-          </a:p>
-        </p:txBody>
-      </p:sp>
-      <p:sp>
-        <p:nvSpPr>
-          <p:cNvPr id="31" name="TextBox 30"/>
-          <p:cNvSpPr txBox="1"/>
-          <p:nvPr/>
-        </p:nvSpPr>
-        <p:spPr>
-          <a:xfrm>
-            <a:off x="1512000" y="5421600"/>
-            <a:ext cx="7560000" cy="288000"/>
-          </a:xfrm>
-          <a:prstGeom prst="rect">
-            <a:avLst/>
-          </a:prstGeom>
-          <a:noFill/>
-        </p:spPr>
-        <p:txBody>
-          <a:bodyPr wrap="square">
-            <a:spAutoFit/>
-          </a:bodyPr>
-          <a:lstStyle/>
-          <a:p>
-            <a:pPr algn="l"/>
-            <a:r>
-              <a:rPr sz="1800" b="1">
-                <a:solidFill>
-                  <a:srgbClr val="1F3A68"/>
-                </a:solidFill>
-                <a:latin typeface="Microsoft YaHei"/>
-              </a:rPr>
-              <a:t>P5 目标检索弱</a:t>
-            </a:r>
-          </a:p>
-        </p:txBody>
-      </p:sp>
-      <p:sp>
-        <p:nvSpPr>
-          <p:cNvPr id="32" name="TextBox 31"/>
-          <p:cNvSpPr txBox="1"/>
-          <p:nvPr/>
-        </p:nvSpPr>
-        <p:spPr>
-          <a:xfrm>
-            <a:off x="1512000" y="5698799"/>
-            <a:ext cx="7560000" cy="403199"/>
-          </a:xfrm>
-          <a:prstGeom prst="rect">
-            <a:avLst/>
-          </a:prstGeom>
-          <a:noFill/>
-        </p:spPr>
-        <p:txBody>
-          <a:bodyPr wrap="square">
-            <a:spAutoFit/>
-          </a:bodyPr>
-          <a:lstStyle/>
-          <a:p>
-            <a:pPr algn="l"/>
-            <a:r>
-              <a:rPr sz="1300" b="0">
-                <a:solidFill>
-                  <a:srgbClr val="555F6E"/>
-                </a:solidFill>
-                <a:latin typeface="Microsoft YaHei"/>
-              </a:rPr>
-              <a:t>直接用任务目标一句话查询信息量太薄，规划不同阶段需要的记忆类型不同。</a:t>
-            </a:r>
-          </a:p>
-        </p:txBody>
-      </p:sp>
-      <p:pic>
-        <p:nvPicPr>
-          <p:cNvPr id="33" name="Picture 32" descr="ppt_p5.png"/>
-          <p:cNvPicPr>
-            <a:picLocks noChangeAspect="1"/>
-          </p:cNvPicPr>
-          <p:nvPr/>
-        </p:nvPicPr>
-        <p:blipFill>
-          <a:blip r:embed="rId7"/>
-          <a:stretch>
-            <a:fillRect/>
-          </a:stretch>
-        </p:blipFill>
-        <p:spPr>
-          <a:xfrm>
-            <a:off x="9488304" y="5520096"/>
-            <a:ext cx="1687391" cy="562463"/>
-          </a:xfrm>
-          <a:prstGeom prst="rect">
-            <a:avLst/>
-          </a:prstGeom>
-        </p:spPr>
-      </p:pic>
-      <p:sp>
-        <p:nvSpPr>
-          <p:cNvPr id="34" name="Rectangle 33"/>
+          </a:p>
+        </p:txBody>
+      </p:sp>
+      <p:sp>
+        <p:nvSpPr>
+          <p:cNvPr id="36" name="Rectangle 35"/>
           <p:cNvSpPr/>
           <p:nvPr/>
         </p:nvSpPr>
         <p:spPr>
           <a:xfrm>
-            <a:off x="9252000" y="5520096"/>
-            <a:ext cx="2160000" cy="562463"/>
-          </a:xfrm>
-          <a:prstGeom prst="rect">
-            <a:avLst/>
-          </a:prstGeom>
-          <a:noFill/>
-          <a:ln w="15240">
-            <a:solidFill>
-              <a:srgbClr val="2F6EBA"/>
-            </a:solidFill>
-          </a:ln>
-          <a:effectLst/>
-        </p:spPr>
-        <p:style>
-          <a:lnRef idx="1">
-            <a:schemeClr val="accent1"/>
-          </a:lnRef>
-          <a:fillRef idx="3">
-            <a:schemeClr val="accent1"/>
-          </a:fillRef>
-          <a:effectRef idx="2">
-            <a:schemeClr val="accent1"/>
-          </a:effectRef>
-          <a:fontRef idx="minor">
-            <a:schemeClr val="lt1"/>
-          </a:fontRef>
-        </p:style>
-        <p:txBody>
-          <a:bodyPr rtlCol="0" anchor="ctr"/>
-          <a:lstStyle/>
-          <a:p>
-            <a:pPr algn="ctr"/>
-            <a:endParaRPr/>
-          </a:p>
-        </p:txBody>
-      </p:sp>
-      <p:sp>
-        <p:nvSpPr>
-          <p:cNvPr id="35" name="Rectangle 34"/>
-          <p:cNvSpPr/>
-          <p:nvPr/>
-        </p:nvSpPr>
-        <p:spPr>
-          <a:xfrm>
-            <a:off x="792000" y="6173999"/>
-            <a:ext cx="10620000" cy="9000"/>
+            <a:off x="0" y="6606000"/>
+            <a:ext cx="12193200" cy="10800"/>
           </a:xfrm>
           <a:prstGeom prst="rect">
             <a:avLst/>
@@ -28203,52 +30590,6 @@
           <a:lstStyle/>
           <a:p>
             <a:pPr algn="ctr"/>
-            <a:endParaRPr/>
-          </a:p>
-        </p:txBody>
-      </p:sp>
-      <p:sp>
-        <p:nvSpPr>
-          <p:cNvPr id="36" name="Rectangle 35"/>
-          <p:cNvSpPr/>
-          <p:nvPr/>
-        </p:nvSpPr>
-        <p:spPr>
-          <a:xfrm>
-            <a:off x="0" y="6606000"/>
-            <a:ext cx="12193200" cy="10800"/>
-          </a:xfrm>
-          <a:prstGeom prst="rect">
-            <a:avLst/>
-          </a:prstGeom>
-          <a:solidFill>
-            <a:srgbClr val="C8D0DC"/>
-          </a:solidFill>
-          <a:ln>
-            <a:noFill/>
-          </a:ln>
-          <a:effectLst/>
-        </p:spPr>
-        <p:style>
-          <a:lnRef idx="1">
-            <a:schemeClr val="accent1"/>
-          </a:lnRef>
-          <a:fillRef idx="3">
-            <a:schemeClr val="accent1"/>
-          </a:fillRef>
-          <a:effectRef idx="2">
-            <a:schemeClr val="accent1"/>
-          </a:effectRef>
-          <a:fontRef idx="minor">
-            <a:schemeClr val="lt1"/>
-          </a:fontRef>
-        </p:style>
-        <p:txBody>
-          <a:bodyPr rtlCol="0" anchor="ctr"/>
-          <a:lstStyle/>
-          <a:p>
-            <a:pPr algn="ctr"/>
-            <a:endParaRPr/>
           </a:p>
         </p:txBody>
       </p:sp>
@@ -28331,7 +30672,7 @@
 </file>
 
 <file path=ppt/slides/slide6.xml><?xml version="1.0" encoding="utf-8"?>
-<p:sld xmlns:a="http://schemas.openxmlformats.org/drawingml/2006/main" xmlns:r="http://schemas.openxmlformats.org/officeDocument/2006/relationships" xmlns:p="http://schemas.openxmlformats.org/presentationml/2006/main">
+<p:sld xmlns:a="http://schemas.openxmlformats.org/drawingml/2006/main" xmlns:p="http://schemas.openxmlformats.org/presentationml/2006/main" xmlns:r="http://schemas.openxmlformats.org/officeDocument/2006/relationships">
   <p:cSld>
     <p:spTree>
       <p:nvGrpSpPr>
@@ -28339,14 +30680,7 @@
         <p:cNvGrpSpPr/>
         <p:nvPr/>
       </p:nvGrpSpPr>
-      <p:grpSpPr>
-        <a:xfrm>
-          <a:off x="0" y="0"/>
-          <a:ext cx="0" cy="0"/>
-          <a:chOff x="0" y="0"/>
-          <a:chExt cx="0" cy="0"/>
-        </a:xfrm>
-      </p:grpSpPr>
+      <p:grpSpPr/>
       <p:sp>
         <p:nvSpPr>
           <p:cNvPr id="2" name="TextBox 1"/>
@@ -28423,7 +30757,6 @@
           <a:lstStyle/>
           <a:p>
             <a:pPr algn="ctr"/>
-            <a:endParaRPr/>
           </a:p>
         </p:txBody>
       </p:sp>
@@ -28503,7 +30836,6 @@
           <a:lstStyle/>
           <a:p>
             <a:pPr algn="ctr"/>
-            <a:endParaRPr/>
           </a:p>
         </p:txBody>
       </p:sp>
@@ -28552,7 +30884,6 @@
           <a:lstStyle/>
           <a:p>
             <a:pPr algn="ctr"/>
-            <a:endParaRPr/>
           </a:p>
         </p:txBody>
       </p:sp>
@@ -28705,7 +31036,7 @@
           <p:nvPr/>
         </p:nvPicPr>
         <p:blipFill>
-          <a:blip r:embed="rId3"/>
+          <a:blip r:embed="rId2"/>
           <a:stretch>
             <a:fillRect/>
           </a:stretch>
@@ -28761,7 +31092,6 @@
           <a:lstStyle/>
           <a:p>
             <a:pPr algn="ctr"/>
-            <a:endParaRPr/>
           </a:p>
         </p:txBody>
       </p:sp>
@@ -28806,7 +31136,6 @@
           <a:lstStyle/>
           <a:p>
             <a:pPr algn="ctr"/>
-            <a:endParaRPr/>
           </a:p>
         </p:txBody>
       </p:sp>
@@ -28855,7 +31184,6 @@
           <a:lstStyle/>
           <a:p>
             <a:pPr algn="ctr"/>
-            <a:endParaRPr/>
           </a:p>
         </p:txBody>
       </p:sp>
@@ -29008,7 +31336,7 @@
           <p:nvPr/>
         </p:nvPicPr>
         <p:blipFill>
-          <a:blip r:embed="rId4"/>
+          <a:blip r:embed="rId3"/>
           <a:stretch>
             <a:fillRect/>
           </a:stretch>
@@ -29064,7 +31392,6 @@
           <a:lstStyle/>
           <a:p>
             <a:pPr algn="ctr"/>
-            <a:endParaRPr/>
           </a:p>
         </p:txBody>
       </p:sp>
@@ -29109,7 +31436,6 @@
           <a:lstStyle/>
           <a:p>
             <a:pPr algn="ctr"/>
-            <a:endParaRPr/>
           </a:p>
         </p:txBody>
       </p:sp>
@@ -29158,7 +31484,6 @@
           <a:lstStyle/>
           <a:p>
             <a:pPr algn="ctr"/>
-            <a:endParaRPr/>
           </a:p>
         </p:txBody>
       </p:sp>
@@ -29311,7 +31636,7 @@
           <p:nvPr/>
         </p:nvPicPr>
         <p:blipFill>
-          <a:blip r:embed="rId5"/>
+          <a:blip r:embed="rId4"/>
           <a:stretch>
             <a:fillRect/>
           </a:stretch>
@@ -29367,7 +31692,6 @@
           <a:lstStyle/>
           <a:p>
             <a:pPr algn="ctr"/>
-            <a:endParaRPr/>
           </a:p>
         </p:txBody>
       </p:sp>
@@ -29412,7 +31736,6 @@
           <a:lstStyle/>
           <a:p>
             <a:pPr algn="ctr"/>
-            <a:endParaRPr/>
           </a:p>
         </p:txBody>
       </p:sp>
@@ -29461,7 +31784,6 @@
           <a:lstStyle/>
           <a:p>
             <a:pPr algn="ctr"/>
-            <a:endParaRPr/>
           </a:p>
         </p:txBody>
       </p:sp>
@@ -29614,7 +31936,7 @@
           <p:nvPr/>
         </p:nvPicPr>
         <p:blipFill>
-          <a:blip r:embed="rId6"/>
+          <a:blip r:embed="rId5"/>
           <a:stretch>
             <a:fillRect/>
           </a:stretch>
@@ -29670,7 +31992,6 @@
           <a:lstStyle/>
           <a:p>
             <a:pPr algn="ctr"/>
-            <a:endParaRPr/>
           </a:p>
         </p:txBody>
       </p:sp>
@@ -29715,7 +32036,6 @@
           <a:lstStyle/>
           <a:p>
             <a:pPr algn="ctr"/>
-            <a:endParaRPr/>
           </a:p>
         </p:txBody>
       </p:sp>
@@ -29764,7 +32084,6 @@
           <a:lstStyle/>
           <a:p>
             <a:pPr algn="ctr"/>
-            <a:endParaRPr/>
           </a:p>
         </p:txBody>
       </p:sp>
@@ -29917,7 +32236,7 @@
           <p:nvPr/>
         </p:nvPicPr>
         <p:blipFill>
-          <a:blip r:embed="rId7"/>
+          <a:blip r:embed="rId6"/>
           <a:stretch>
             <a:fillRect/>
           </a:stretch>
@@ -29973,7 +32292,6 @@
           <a:lstStyle/>
           <a:p>
             <a:pPr algn="ctr"/>
-            <a:endParaRPr/>
           </a:p>
         </p:txBody>
       </p:sp>
@@ -30018,7 +32336,6 @@
           <a:lstStyle/>
           <a:p>
             <a:pPr algn="ctr"/>
-            <a:endParaRPr/>
           </a:p>
         </p:txBody>
       </p:sp>
@@ -30063,7 +32380,6 @@
           <a:lstStyle/>
           <a:p>
             <a:pPr algn="ctr"/>
-            <a:endParaRPr/>
           </a:p>
         </p:txBody>
       </p:sp>
@@ -30146,7 +32462,7 @@
 </file>
 
 <file path=ppt/slides/slide7.xml><?xml version="1.0" encoding="utf-8"?>
-<p:sld xmlns:a="http://schemas.openxmlformats.org/drawingml/2006/main" xmlns:r="http://schemas.openxmlformats.org/officeDocument/2006/relationships" xmlns:p="http://schemas.openxmlformats.org/presentationml/2006/main">
+<p:sld xmlns:a="http://schemas.openxmlformats.org/drawingml/2006/main" xmlns:p="http://schemas.openxmlformats.org/presentationml/2006/main" xmlns:r="http://schemas.openxmlformats.org/officeDocument/2006/relationships">
   <p:cSld>
     <p:spTree>
       <p:nvGrpSpPr>
@@ -30154,14 +32470,7 @@
         <p:cNvGrpSpPr/>
         <p:nvPr/>
       </p:nvGrpSpPr>
-      <p:grpSpPr>
-        <a:xfrm>
-          <a:off x="0" y="0"/>
-          <a:ext cx="0" cy="0"/>
-          <a:chOff x="0" y="0"/>
-          <a:chExt cx="0" cy="0"/>
-        </a:xfrm>
-      </p:grpSpPr>
+      <p:grpSpPr/>
       <p:sp>
         <p:nvSpPr>
           <p:cNvPr id="2" name="TextBox 1"/>
@@ -30238,7 +32547,6 @@
           <a:lstStyle/>
           <a:p>
             <a:pPr algn="ctr"/>
-            <a:endParaRPr/>
           </a:p>
         </p:txBody>
       </p:sp>
@@ -30318,7 +32626,6 @@
           <a:lstStyle/>
           <a:p>
             <a:pPr algn="ctr"/>
-            <a:endParaRPr/>
           </a:p>
         </p:txBody>
       </p:sp>
@@ -30367,7 +32674,6 @@
           <a:lstStyle/>
           <a:p>
             <a:pPr algn="ctr"/>
-            <a:endParaRPr/>
           </a:p>
         </p:txBody>
       </p:sp>
@@ -30412,7 +32718,6 @@
           <a:lstStyle/>
           <a:p>
             <a:pPr algn="ctr"/>
-            <a:endParaRPr/>
           </a:p>
         </p:txBody>
       </p:sp>
@@ -30566,7 +32871,6 @@
           <a:lstStyle/>
           <a:p>
             <a:pPr algn="ctr"/>
-            <a:endParaRPr/>
           </a:p>
         </p:txBody>
       </p:sp>
@@ -30611,7 +32915,6 @@
           <a:lstStyle/>
           <a:p>
             <a:pPr algn="ctr"/>
-            <a:endParaRPr/>
           </a:p>
         </p:txBody>
       </p:sp>
@@ -30765,7 +33068,6 @@
           <a:lstStyle/>
           <a:p>
             <a:pPr algn="ctr"/>
-            <a:endParaRPr/>
           </a:p>
         </p:txBody>
       </p:sp>
@@ -30810,7 +33112,6 @@
           <a:lstStyle/>
           <a:p>
             <a:pPr algn="ctr"/>
-            <a:endParaRPr/>
           </a:p>
         </p:txBody>
       </p:sp>
@@ -30964,7 +33265,6 @@
           <a:lstStyle/>
           <a:p>
             <a:pPr algn="ctr"/>
-            <a:endParaRPr/>
           </a:p>
         </p:txBody>
       </p:sp>
@@ -31009,7 +33309,6 @@
           <a:lstStyle/>
           <a:p>
             <a:pPr algn="ctr"/>
-            <a:endParaRPr/>
           </a:p>
         </p:txBody>
       </p:sp>
@@ -31159,7 +33458,6 @@
           <a:lstStyle/>
           <a:p>
             <a:pPr algn="ctr"/>
-            <a:endParaRPr/>
           </a:p>
         </p:txBody>
       </p:sp>
@@ -31242,7 +33540,7 @@
 </file>
 
 <file path=ppt/slides/slide8.xml><?xml version="1.0" encoding="utf-8"?>
-<p:sld xmlns:a="http://schemas.openxmlformats.org/drawingml/2006/main" xmlns:r="http://schemas.openxmlformats.org/officeDocument/2006/relationships" xmlns:p="http://schemas.openxmlformats.org/presentationml/2006/main">
+<p:sld xmlns:a="http://schemas.openxmlformats.org/drawingml/2006/main" xmlns:p="http://schemas.openxmlformats.org/presentationml/2006/main" xmlns:r="http://schemas.openxmlformats.org/officeDocument/2006/relationships">
   <p:cSld>
     <p:spTree>
       <p:nvGrpSpPr>
@@ -31250,14 +33548,7 @@
         <p:cNvGrpSpPr/>
         <p:nvPr/>
       </p:nvGrpSpPr>
-      <p:grpSpPr>
-        <a:xfrm>
-          <a:off x="0" y="0"/>
-          <a:ext cx="0" cy="0"/>
-          <a:chOff x="0" y="0"/>
-          <a:chExt cx="0" cy="0"/>
-        </a:xfrm>
-      </p:grpSpPr>
+      <p:grpSpPr/>
       <p:sp>
         <p:nvSpPr>
           <p:cNvPr id="2" name="Rectangle 1"/>
@@ -31299,7 +33590,6 @@
           <a:lstStyle/>
           <a:p>
             <a:pPr algn="ctr"/>
-            <a:endParaRPr/>
           </a:p>
         </p:txBody>
       </p:sp>
@@ -31344,7 +33634,6 @@
           <a:lstStyle/>
           <a:p>
             <a:pPr algn="ctr"/>
-            <a:endParaRPr/>
           </a:p>
         </p:txBody>
       </p:sp>
@@ -31424,7 +33713,6 @@
           <a:lstStyle/>
           <a:p>
             <a:pPr algn="ctr"/>
-            <a:endParaRPr/>
           </a:p>
         </p:txBody>
       </p:sp>
@@ -31507,7 +33795,7 @@
 </file>
 
 <file path=ppt/slides/slide9.xml><?xml version="1.0" encoding="utf-8"?>
-<p:sld xmlns:a="http://schemas.openxmlformats.org/drawingml/2006/main" xmlns:r="http://schemas.openxmlformats.org/officeDocument/2006/relationships" xmlns:p="http://schemas.openxmlformats.org/presentationml/2006/main">
+<p:sld xmlns:a="http://schemas.openxmlformats.org/drawingml/2006/main" xmlns:p="http://schemas.openxmlformats.org/presentationml/2006/main" xmlns:r="http://schemas.openxmlformats.org/officeDocument/2006/relationships">
   <p:cSld>
     <p:spTree>
       <p:nvGrpSpPr>
@@ -31515,14 +33803,7 @@
         <p:cNvGrpSpPr/>
         <p:nvPr/>
       </p:nvGrpSpPr>
-      <p:grpSpPr>
-        <a:xfrm>
-          <a:off x="0" y="0"/>
-          <a:ext cx="0" cy="0"/>
-          <a:chOff x="0" y="0"/>
-          <a:chExt cx="0" cy="0"/>
-        </a:xfrm>
-      </p:grpSpPr>
+      <p:grpSpPr/>
       <p:sp>
         <p:nvSpPr>
           <p:cNvPr id="2" name="TextBox 1"/>
@@ -31599,7 +33880,6 @@
           <a:lstStyle/>
           <a:p>
             <a:pPr algn="ctr"/>
-            <a:endParaRPr/>
           </a:p>
         </p:txBody>
       </p:sp>
@@ -31679,7 +33959,6 @@
           <a:lstStyle/>
           <a:p>
             <a:pPr algn="ctr"/>
-            <a:endParaRPr/>
           </a:p>
         </p:txBody>
       </p:sp>
@@ -31829,7 +34108,6 @@
           <a:lstStyle/>
           <a:p>
             <a:pPr algn="ctr"/>
-            <a:endParaRPr/>
           </a:p>
         </p:txBody>
       </p:sp>
@@ -31979,7 +34257,6 @@
           <a:lstStyle/>
           <a:p>
             <a:pPr algn="ctr"/>
-            <a:endParaRPr/>
           </a:p>
         </p:txBody>
       </p:sp>
@@ -32129,7 +34406,6 @@
           <a:lstStyle/>
           <a:p>
             <a:pPr algn="ctr"/>
-            <a:endParaRPr/>
           </a:p>
         </p:txBody>
       </p:sp>
@@ -32279,7 +34555,6 @@
           <a:lstStyle/>
           <a:p>
             <a:pPr algn="ctr"/>
-            <a:endParaRPr/>
           </a:p>
         </p:txBody>
       </p:sp>
@@ -32324,7 +34599,6 @@
           <a:lstStyle/>
           <a:p>
             <a:pPr algn="ctr"/>
-            <a:endParaRPr/>
           </a:p>
         </p:txBody>
       </p:sp>
@@ -32727,7 +35001,7 @@
 </file>
 
 <file path=ppt/theme/theme2.xml><?xml version="1.0" encoding="utf-8"?>
-<a:theme xmlns:a="http://schemas.openxmlformats.org/drawingml/2006/main" name="Office 主题​​">
+<a:theme xmlns:a="http://schemas.openxmlformats.org/drawingml/2006/main" name="Office Theme">
   <a:themeElements>
     <a:clrScheme name="Office">
       <a:dk1>
@@ -32737,44 +35011,44 @@
         <a:sysClr val="window" lastClr="FFFFFF"/>
       </a:lt1>
       <a:dk2>
-        <a:srgbClr val="0E2841"/>
+        <a:srgbClr val="1F497D"/>
       </a:dk2>
       <a:lt2>
-        <a:srgbClr val="E8E8E8"/>
+        <a:srgbClr val="EEECE1"/>
       </a:lt2>
       <a:accent1>
-        <a:srgbClr val="156082"/>
+        <a:srgbClr val="4F81BD"/>
       </a:accent1>
       <a:accent2>
-        <a:srgbClr val="E97132"/>
+        <a:srgbClr val="C0504D"/>
       </a:accent2>
       <a:accent3>
-        <a:srgbClr val="196B24"/>
+        <a:srgbClr val="9BBB59"/>
       </a:accent3>
       <a:accent4>
-        <a:srgbClr val="0F9ED5"/>
+        <a:srgbClr val="8064A2"/>
       </a:accent4>
       <a:accent5>
-        <a:srgbClr val="A02B93"/>
+        <a:srgbClr val="4BACC6"/>
       </a:accent5>
       <a:accent6>
-        <a:srgbClr val="4EA72E"/>
+        <a:srgbClr val="F79646"/>
       </a:accent6>
       <a:hlink>
-        <a:srgbClr val="467886"/>
+        <a:srgbClr val="0000FF"/>
       </a:hlink>
       <a:folHlink>
-        <a:srgbClr val="96607D"/>
+        <a:srgbClr val="800080"/>
       </a:folHlink>
     </a:clrScheme>
     <a:fontScheme name="Office">
       <a:majorFont>
-        <a:latin typeface="等线 Light" panose="02110004020202020204"/>
+        <a:latin typeface="Calibri"/>
         <a:ea typeface=""/>
         <a:cs typeface=""/>
-        <a:font script="Jpan" typeface="游ゴシック Light"/>
+        <a:font script="Jpan" typeface="ＭＳ Ｐゴシック"/>
         <a:font script="Hang" typeface="맑은 고딕"/>
-        <a:font script="Hans" typeface="等线 Light"/>
+        <a:font script="Hans" typeface="宋体"/>
         <a:font script="Hant" typeface="新細明體"/>
         <a:font script="Arab" typeface="Times New Roman"/>
         <a:font script="Hebr" typeface="Times New Roman"/>
@@ -32802,31 +35076,14 @@
         <a:font script="Viet" typeface="Times New Roman"/>
         <a:font script="Uigh" typeface="Microsoft Uighur"/>
         <a:font script="Geor" typeface="Sylfaen"/>
-        <a:font script="Armn" typeface="Arial"/>
-        <a:font script="Bugi" typeface="Leelawadee UI"/>
-        <a:font script="Bopo" typeface="Microsoft JhengHei"/>
-        <a:font script="Java" typeface="Javanese Text"/>
-        <a:font script="Lisu" typeface="Segoe UI"/>
-        <a:font script="Mymr" typeface="Myanmar Text"/>
-        <a:font script="Nkoo" typeface="Ebrima"/>
-        <a:font script="Olck" typeface="Nirmala UI"/>
-        <a:font script="Osma" typeface="Ebrima"/>
-        <a:font script="Phag" typeface="Phagspa"/>
-        <a:font script="Syrn" typeface="Estrangelo Edessa"/>
-        <a:font script="Syrj" typeface="Estrangelo Edessa"/>
-        <a:font script="Syre" typeface="Estrangelo Edessa"/>
-        <a:font script="Sora" typeface="Nirmala UI"/>
-        <a:font script="Tale" typeface="Microsoft Tai Le"/>
-        <a:font script="Talu" typeface="Microsoft New Tai Lue"/>
-        <a:font script="Tfng" typeface="Ebrima"/>
       </a:majorFont>
       <a:minorFont>
-        <a:latin typeface="等线" panose="02110004020202020204"/>
+        <a:latin typeface="Calibri"/>
         <a:ea typeface=""/>
         <a:cs typeface=""/>
-        <a:font script="Jpan" typeface="游ゴシック"/>
+        <a:font script="Jpan" typeface="ＭＳ Ｐゴシック"/>
         <a:font script="Hang" typeface="맑은 고딕"/>
-        <a:font script="Hans" typeface="等线"/>
+        <a:font script="Hans" typeface="宋体"/>
         <a:font script="Hant" typeface="新細明體"/>
         <a:font script="Arab" typeface="Arial"/>
         <a:font script="Hebr" typeface="Arial"/>
@@ -32854,23 +35111,6 @@
         <a:font script="Viet" typeface="Arial"/>
         <a:font script="Uigh" typeface="Microsoft Uighur"/>
         <a:font script="Geor" typeface="Sylfaen"/>
-        <a:font script="Armn" typeface="Arial"/>
-        <a:font script="Bugi" typeface="Leelawadee UI"/>
-        <a:font script="Bopo" typeface="Microsoft JhengHei"/>
-        <a:font script="Java" typeface="Javanese Text"/>
-        <a:font script="Lisu" typeface="Segoe UI"/>
-        <a:font script="Mymr" typeface="Myanmar Text"/>
-        <a:font script="Nkoo" typeface="Ebrima"/>
-        <a:font script="Olck" typeface="Nirmala UI"/>
-        <a:font script="Osma" typeface="Ebrima"/>
-        <a:font script="Phag" typeface="Phagspa"/>
-        <a:font script="Syrn" typeface="Estrangelo Edessa"/>
-        <a:font script="Syrj" typeface="Estrangelo Edessa"/>
-        <a:font script="Syre" typeface="Estrangelo Edessa"/>
-        <a:font script="Sora" typeface="Nirmala UI"/>
-        <a:font script="Tale" typeface="Microsoft Tai Le"/>
-        <a:font script="Talu" typeface="Microsoft New Tai Lue"/>
-        <a:font script="Tfng" typeface="Ebrima"/>
       </a:minorFont>
     </a:fontScheme>
     <a:fmtScheme name="Office">
@@ -32882,136 +35122,180 @@
           <a:gsLst>
             <a:gs pos="0">
               <a:schemeClr val="phClr">
-                <a:lumMod val="110000"/>
-                <a:satMod val="105000"/>
-                <a:tint val="67000"/>
+                <a:tint val="50000"/>
+                <a:satMod val="300000"/>
               </a:schemeClr>
             </a:gs>
-            <a:gs pos="50000">
+            <a:gs pos="35000">
               <a:schemeClr val="phClr">
-                <a:lumMod val="105000"/>
-                <a:satMod val="103000"/>
-                <a:tint val="73000"/>
+                <a:tint val="37000"/>
+                <a:satMod val="300000"/>
               </a:schemeClr>
             </a:gs>
             <a:gs pos="100000">
               <a:schemeClr val="phClr">
-                <a:lumMod val="105000"/>
-                <a:satMod val="109000"/>
-                <a:tint val="81000"/>
+                <a:tint val="15000"/>
+                <a:satMod val="350000"/>
               </a:schemeClr>
             </a:gs>
           </a:gsLst>
-          <a:lin ang="5400000" scaled="0"/>
+          <a:lin ang="16200000" scaled="1"/>
         </a:gradFill>
         <a:gradFill rotWithShape="1">
           <a:gsLst>
             <a:gs pos="0">
               <a:schemeClr val="phClr">
-                <a:satMod val="103000"/>
-                <a:lumMod val="102000"/>
-                <a:tint val="94000"/>
-              </a:schemeClr>
-            </a:gs>
-            <a:gs pos="50000">
-              <a:schemeClr val="phClr">
-                <a:satMod val="110000"/>
-                <a:lumMod val="100000"/>
+                <a:tint val="100000"/>
                 <a:shade val="100000"/>
+                <a:satMod val="130000"/>
               </a:schemeClr>
             </a:gs>
             <a:gs pos="100000">
               <a:schemeClr val="phClr">
-                <a:lumMod val="99000"/>
-                <a:satMod val="120000"/>
-                <a:shade val="78000"/>
+                <a:tint val="50000"/>
+                <a:shade val="100000"/>
+                <a:satMod val="350000"/>
               </a:schemeClr>
             </a:gs>
           </a:gsLst>
-          <a:lin ang="5400000" scaled="0"/>
+          <a:lin ang="16200000" scaled="0"/>
         </a:gradFill>
       </a:fillStyleLst>
       <a:lnStyleLst>
-        <a:ln w="12700" cap="flat" cmpd="sng" algn="ctr">
+        <a:ln w="9525" cap="flat" cmpd="sng" algn="ctr">
           <a:solidFill>
-            <a:schemeClr val="phClr"/>
+            <a:schemeClr val="phClr">
+              <a:shade val="95000"/>
+              <a:satMod val="105000"/>
+            </a:schemeClr>
           </a:solidFill>
           <a:prstDash val="solid"/>
-          <a:miter lim="800000"/>
-        </a:ln>
-        <a:ln w="19050" cap="flat" cmpd="sng" algn="ctr">
-          <a:solidFill>
-            <a:schemeClr val="phClr"/>
-          </a:solidFill>
-          <a:prstDash val="solid"/>
-          <a:miter lim="800000"/>
         </a:ln>
         <a:ln w="25400" cap="flat" cmpd="sng" algn="ctr">
           <a:solidFill>
             <a:schemeClr val="phClr"/>
           </a:solidFill>
           <a:prstDash val="solid"/>
-          <a:miter lim="800000"/>
+        </a:ln>
+        <a:ln w="38100" cap="flat" cmpd="sng" algn="ctr">
+          <a:solidFill>
+            <a:schemeClr val="phClr"/>
+          </a:solidFill>
+          <a:prstDash val="solid"/>
         </a:ln>
       </a:lnStyleLst>
       <a:effectStyleLst>
         <a:effectStyle>
-          <a:effectLst/>
-        </a:effectStyle>
-        <a:effectStyle>
-          <a:effectLst/>
+          <a:effectLst>
+            <a:outerShdw blurRad="40000" dist="20000" dir="5400000" rotWithShape="0">
+              <a:srgbClr val="000000">
+                <a:alpha val="38000"/>
+              </a:srgbClr>
+            </a:outerShdw>
+          </a:effectLst>
         </a:effectStyle>
         <a:effectStyle>
           <a:effectLst>
-            <a:outerShdw blurRad="57150" dist="19050" dir="5400000" algn="ctr" rotWithShape="0">
+            <a:outerShdw blurRad="40000" dist="23000" dir="5400000" rotWithShape="0">
               <a:srgbClr val="000000">
-                <a:alpha val="63000"/>
+                <a:alpha val="35000"/>
               </a:srgbClr>
             </a:outerShdw>
           </a:effectLst>
+        </a:effectStyle>
+        <a:effectStyle>
+          <a:effectLst>
+            <a:outerShdw blurRad="40000" dist="23000" dir="5400000" rotWithShape="0">
+              <a:srgbClr val="000000">
+                <a:alpha val="35000"/>
+              </a:srgbClr>
+            </a:outerShdw>
+          </a:effectLst>
+          <a:scene3d>
+            <a:camera prst="orthographicFront">
+              <a:rot lat="0" lon="0" rev="0"/>
+            </a:camera>
+            <a:lightRig rig="threePt" dir="t">
+              <a:rot lat="0" lon="0" rev="1200000"/>
+            </a:lightRig>
+          </a:scene3d>
+          <a:sp3d>
+            <a:bevelT w="63500" h="25400"/>
+          </a:sp3d>
         </a:effectStyle>
       </a:effectStyleLst>
       <a:bgFillStyleLst>
         <a:solidFill>
           <a:schemeClr val="phClr"/>
         </a:solidFill>
-        <a:solidFill>
-          <a:schemeClr val="phClr">
-            <a:tint val="95000"/>
-            <a:satMod val="170000"/>
-          </a:schemeClr>
-        </a:solidFill>
         <a:gradFill rotWithShape="1">
           <a:gsLst>
             <a:gs pos="0">
               <a:schemeClr val="phClr">
-                <a:tint val="93000"/>
-                <a:satMod val="150000"/>
-                <a:shade val="98000"/>
-                <a:lumMod val="102000"/>
+                <a:tint val="40000"/>
+                <a:satMod val="350000"/>
               </a:schemeClr>
             </a:gs>
-            <a:gs pos="50000">
+            <a:gs pos="40000">
               <a:schemeClr val="phClr">
-                <a:tint val="98000"/>
-                <a:satMod val="130000"/>
-                <a:shade val="90000"/>
-                <a:lumMod val="103000"/>
+                <a:tint val="45000"/>
+                <a:shade val="99000"/>
+                <a:satMod val="350000"/>
               </a:schemeClr>
             </a:gs>
             <a:gs pos="100000">
               <a:schemeClr val="phClr">
-                <a:shade val="63000"/>
-                <a:satMod val="120000"/>
+                <a:shade val="20000"/>
+                <a:satMod val="255000"/>
               </a:schemeClr>
             </a:gs>
           </a:gsLst>
-          <a:lin ang="5400000" scaled="0"/>
+          <a:path path="circle">
+            <a:fillToRect l="50000" t="-80000" r="50000" b="180000"/>
+          </a:path>
+        </a:gradFill>
+        <a:gradFill rotWithShape="1">
+          <a:gsLst>
+            <a:gs pos="0">
+              <a:schemeClr val="phClr">
+                <a:tint val="80000"/>
+                <a:satMod val="300000"/>
+              </a:schemeClr>
+            </a:gs>
+            <a:gs pos="100000">
+              <a:schemeClr val="phClr">
+                <a:shade val="30000"/>
+                <a:satMod val="200000"/>
+              </a:schemeClr>
+            </a:gs>
+          </a:gsLst>
+          <a:path path="circle">
+            <a:fillToRect l="50000" t="50000" r="50000" b="50000"/>
+          </a:path>
         </a:gradFill>
       </a:bgFillStyleLst>
     </a:fmtScheme>
   </a:themeElements>
   <a:objectDefaults>
+    <a:spDef>
+      <a:spPr/>
+      <a:bodyPr/>
+      <a:lstStyle/>
+      <a:style>
+        <a:lnRef idx="1">
+          <a:schemeClr val="accent1"/>
+        </a:lnRef>
+        <a:fillRef idx="3">
+          <a:schemeClr val="accent1"/>
+        </a:fillRef>
+        <a:effectRef idx="2">
+          <a:schemeClr val="accent1"/>
+        </a:effectRef>
+        <a:fontRef idx="minor">
+          <a:schemeClr val="lt1"/>
+        </a:fontRef>
+      </a:style>
+    </a:spDef>
     <a:lnDef>
       <a:spPr/>
       <a:bodyPr/>
@@ -33033,10 +35317,5 @@
     </a:lnDef>
   </a:objectDefaults>
   <a:extraClrSchemeLst/>
-  <a:extLst>
-    <a:ext uri="{05A4C25C-085E-4340-85A3-A5531E510DB2}">
-      <thm15:themeFamily xmlns:thm15="http://schemas.microsoft.com/office/thememl/2012/main" name="Office Theme" id="{2E142A2C-CD16-42D6-873A-C26D2A0506FA}" vid="{1BDDFF52-6CD6-40A5-AB3C-68EB2F1E4D0A}"/>
-    </a:ext>
-  </a:extLst>
 </a:theme>
 </file>
--- a/汇报PPT/最终汇报成果.pptx
+++ b/汇报PPT/最终汇报成果.pptx
@@ -20093,7 +20093,7 @@
                 </a:solidFill>
                 <a:latin typeface="Microsoft YaHei"/>
               </a:rPr>
-              <a:t>01 问题与思路</a:t>
+              <a:t>问题与思路</a:t>
             </a:r>
           </a:p>
         </p:txBody>
@@ -20255,7 +20255,7 @@
                 </a:solidFill>
                 <a:latin typeface="Microsoft YaHei"/>
               </a:rPr>
-              <a:t>02 相关工作与启发</a:t>
+              <a:t>相关工作与启发</a:t>
             </a:r>
           </a:p>
         </p:txBody>
@@ -20417,7 +20417,7 @@
                 </a:solidFill>
                 <a:latin typeface="Microsoft YaHei"/>
               </a:rPr>
-              <a:t>03 系统设计与实现</a:t>
+              <a:t>系统设计与实现</a:t>
             </a:r>
           </a:p>
         </p:txBody>
@@ -20579,7 +20579,7 @@
                 </a:solidFill>
                 <a:latin typeface="Microsoft YaHei"/>
               </a:rPr>
-              <a:t>04 实验设计与验证</a:t>
+              <a:t>实验设计与验证</a:t>
             </a:r>
           </a:p>
         </p:txBody>
@@ -20741,7 +20741,7 @@
                 </a:solidFill>
                 <a:latin typeface="Microsoft YaHei"/>
               </a:rPr>
-              <a:t>05 智戎接入与总结展望</a:t>
+              <a:t>智戎接入与总结展望</a:t>
             </a:r>
           </a:p>
         </p:txBody>

--- a/汇报PPT/最终汇报成果.pptx
+++ b/汇报PPT/最终汇报成果.pptx
@@ -6226,7 +6226,7 @@
         </p:nvSpPr>
         <p:spPr>
           <a:xfrm>
-            <a:off x="792000" y="1692000"/>
+            <a:off x="792000" y="1792800"/>
             <a:ext cx="648000" cy="432000"/>
           </a:xfrm>
           <a:prstGeom prst="rect">
@@ -6242,7 +6242,7 @@
           <a:p>
             <a:pPr algn="l"/>
             <a:r>
-              <a:rPr sz="2200" b="1">
+              <a:rPr sz="2600" b="1">
                 <a:solidFill>
                   <a:srgbClr val="2F6EBA"/>
                 </a:solidFill>
@@ -6261,8 +6261,8 @@
         </p:nvSpPr>
         <p:spPr>
           <a:xfrm>
-            <a:off x="1512000" y="1713600"/>
-            <a:ext cx="9828000" cy="216000"/>
+            <a:off x="1512000" y="1756800"/>
+            <a:ext cx="9828000" cy="288000"/>
           </a:xfrm>
           <a:prstGeom prst="rect">
             <a:avLst/>
@@ -6277,13 +6277,13 @@
           <a:p>
             <a:pPr algn="l"/>
             <a:r>
-              <a:rPr sz="1600" b="1">
+              <a:rPr sz="2000" b="1">
                 <a:solidFill>
                   <a:srgbClr val="1F3A68"/>
                 </a:solidFill>
                 <a:latin typeface="Microsoft YaHei"/>
               </a:rPr>
-              <a:t>ChatDB</a:t>
+              <a:t>ChatDB 符号记忆</a:t>
             </a:r>
           </a:p>
         </p:txBody>
@@ -6296,8 +6296,8 @@
         </p:nvSpPr>
         <p:spPr>
           <a:xfrm>
-            <a:off x="1512000" y="1951200"/>
-            <a:ext cx="9828000" cy="306000"/>
+            <a:off x="1512000" y="2059200"/>
+            <a:ext cx="9828000" cy="324000"/>
           </a:xfrm>
           <a:prstGeom prst="rect">
             <a:avLst/>
@@ -6312,13 +6312,13 @@
           <a:p>
             <a:pPr algn="l"/>
             <a:r>
-              <a:rPr sz="1250" b="0">
+              <a:rPr sz="1300" b="0">
                 <a:solidFill>
                   <a:srgbClr val="555F6E"/>
                 </a:solidFill>
                 <a:latin typeface="Microsoft YaHei"/>
               </a:rPr>
-              <a:t>数据库即符号记忆 → 只保留属性精确过滤，不实现全量 NL→SQL。</a:t>
+              <a:t>把数据库当作符号记忆；本文只保留属性精确过滤，不实现完整 NL→SQL。</a:t>
             </a:r>
           </a:p>
         </p:txBody>
@@ -6331,7 +6331,7 @@
         </p:nvSpPr>
         <p:spPr>
           <a:xfrm>
-            <a:off x="792000" y="2178000"/>
+            <a:off x="792000" y="2365200"/>
             <a:ext cx="10620000" cy="10800"/>
           </a:xfrm>
           <a:prstGeom prst="rect">
@@ -6376,7 +6376,7 @@
         </p:nvSpPr>
         <p:spPr>
           <a:xfrm>
-            <a:off x="792000" y="2124000"/>
+            <a:off x="792000" y="2566800"/>
             <a:ext cx="648000" cy="432000"/>
           </a:xfrm>
           <a:prstGeom prst="rect">
@@ -6392,7 +6392,7 @@
           <a:p>
             <a:pPr algn="l"/>
             <a:r>
-              <a:rPr sz="2200" b="1">
+              <a:rPr sz="2600" b="1">
                 <a:solidFill>
                   <a:srgbClr val="2F6EBA"/>
                 </a:solidFill>
@@ -6411,8 +6411,8 @@
         </p:nvSpPr>
         <p:spPr>
           <a:xfrm>
-            <a:off x="1512000" y="2145600"/>
-            <a:ext cx="9828000" cy="216000"/>
+            <a:off x="1512000" y="2530800"/>
+            <a:ext cx="9828000" cy="288000"/>
           </a:xfrm>
           <a:prstGeom prst="rect">
             <a:avLst/>
@@ -6427,13 +6427,13 @@
           <a:p>
             <a:pPr algn="l"/>
             <a:r>
-              <a:rPr sz="1600" b="1">
+              <a:rPr sz="2000" b="1">
                 <a:solidFill>
                   <a:srgbClr val="1F3A68"/>
                 </a:solidFill>
                 <a:latin typeface="Microsoft YaHei"/>
               </a:rPr>
-              <a:t>ExpeL</a:t>
+              <a:t>ExpeL 经验库</a:t>
             </a:r>
           </a:p>
         </p:txBody>
@@ -6446,8 +6446,8 @@
         </p:nvSpPr>
         <p:spPr>
           <a:xfrm>
-            <a:off x="1512000" y="2383200"/>
-            <a:ext cx="9828000" cy="306000"/>
+            <a:off x="1512000" y="2833200"/>
+            <a:ext cx="9828000" cy="324000"/>
           </a:xfrm>
           <a:prstGeom prst="rect">
             <a:avLst/>
@@ -6462,13 +6462,13 @@
           <a:p>
             <a:pPr algn="l"/>
             <a:r>
-              <a:rPr sz="1250" b="0">
+              <a:rPr sz="1300" b="0">
                 <a:solidFill>
                   <a:srgbClr val="555F6E"/>
                 </a:solidFill>
                 <a:latin typeface="Microsoft YaHei"/>
               </a:rPr>
-              <a:t>经验库+向量召回 → 补齐重要性加权与 SQLite 持久化。</a:t>
+              <a:t>从轨迹抽取经验并以向量召回；本文补充重要性加权与 SQLite 持久化。</a:t>
             </a:r>
           </a:p>
         </p:txBody>
@@ -6481,7 +6481,7 @@
         </p:nvSpPr>
         <p:spPr>
           <a:xfrm>
-            <a:off x="792000" y="2610000"/>
+            <a:off x="792000" y="3139200"/>
             <a:ext cx="10620000" cy="10800"/>
           </a:xfrm>
           <a:prstGeom prst="rect">
@@ -6526,7 +6526,7 @@
         </p:nvSpPr>
         <p:spPr>
           <a:xfrm>
-            <a:off x="792000" y="2556000"/>
+            <a:off x="792000" y="3340800"/>
             <a:ext cx="648000" cy="432000"/>
           </a:xfrm>
           <a:prstGeom prst="rect">
@@ -6542,7 +6542,7 @@
           <a:p>
             <a:pPr algn="l"/>
             <a:r>
-              <a:rPr sz="2200" b="1">
+              <a:rPr sz="2600" b="1">
                 <a:solidFill>
                   <a:srgbClr val="2F6EBA"/>
                 </a:solidFill>
@@ -6561,8 +6561,8 @@
         </p:nvSpPr>
         <p:spPr>
           <a:xfrm>
-            <a:off x="1512000" y="2577600"/>
-            <a:ext cx="9828000" cy="216000"/>
+            <a:off x="1512000" y="3304800"/>
+            <a:ext cx="9828000" cy="288000"/>
           </a:xfrm>
           <a:prstGeom prst="rect">
             <a:avLst/>
@@ -6577,13 +6577,13 @@
           <a:p>
             <a:pPr algn="l"/>
             <a:r>
-              <a:rPr sz="1600" b="1">
+              <a:rPr sz="2000" b="1">
                 <a:solidFill>
                   <a:srgbClr val="1F3A68"/>
                 </a:solidFill>
                 <a:latin typeface="Microsoft YaHei"/>
               </a:rPr>
-              <a:t>Reflexion</a:t>
+              <a:t>Reflexion 语言反思</a:t>
             </a:r>
           </a:p>
         </p:txBody>
@@ -6596,8 +6596,8 @@
         </p:nvSpPr>
         <p:spPr>
           <a:xfrm>
-            <a:off x="1512000" y="2815200"/>
-            <a:ext cx="9828000" cy="306000"/>
+            <a:off x="1512000" y="3607200"/>
+            <a:ext cx="9828000" cy="324000"/>
           </a:xfrm>
           <a:prstGeom prst="rect">
             <a:avLst/>
@@ -6612,13 +6612,13 @@
           <a:p>
             <a:pPr algn="l"/>
             <a:r>
-              <a:rPr sz="1250" b="0">
+              <a:rPr sz="1300" b="0">
                 <a:solidFill>
                   <a:srgbClr val="555F6E"/>
                 </a:solidFill>
                 <a:latin typeface="Microsoft YaHei"/>
               </a:rPr>
-              <a:t>语言反思 → 采用语言形式经验，不采用在线强化。</a:t>
+              <a:t>用语言反思记录失败原因；采用语言形式经验，不采用在线强化。</a:t>
             </a:r>
           </a:p>
         </p:txBody>
@@ -6631,7 +6631,7 @@
         </p:nvSpPr>
         <p:spPr>
           <a:xfrm>
-            <a:off x="792000" y="3042000"/>
+            <a:off x="792000" y="3913200"/>
             <a:ext cx="10620000" cy="10800"/>
           </a:xfrm>
           <a:prstGeom prst="rect">
@@ -6676,7 +6676,7 @@
         </p:nvSpPr>
         <p:spPr>
           <a:xfrm>
-            <a:off x="792000" y="2988000"/>
+            <a:off x="792000" y="4114800"/>
             <a:ext cx="648000" cy="432000"/>
           </a:xfrm>
           <a:prstGeom prst="rect">
@@ -6692,7 +6692,7 @@
           <a:p>
             <a:pPr algn="l"/>
             <a:r>
-              <a:rPr sz="2200" b="1">
+              <a:rPr sz="2600" b="1">
                 <a:solidFill>
                   <a:srgbClr val="2F6EBA"/>
                 </a:solidFill>
@@ -6711,8 +6711,8 @@
         </p:nvSpPr>
         <p:spPr>
           <a:xfrm>
-            <a:off x="1512000" y="3009600"/>
-            <a:ext cx="9828000" cy="216000"/>
+            <a:off x="1512000" y="4078800"/>
+            <a:ext cx="9828000" cy="288000"/>
           </a:xfrm>
           <a:prstGeom prst="rect">
             <a:avLst/>
@@ -6727,13 +6727,13 @@
           <a:p>
             <a:pPr algn="l"/>
             <a:r>
-              <a:rPr sz="1600" b="1">
+              <a:rPr sz="2000" b="1">
                 <a:solidFill>
                   <a:srgbClr val="1F3A68"/>
                 </a:solidFill>
                 <a:latin typeface="Microsoft YaHei"/>
               </a:rPr>
-              <a:t>MemoryBank</a:t>
+              <a:t>MemoryBank 遗忘</a:t>
             </a:r>
           </a:p>
         </p:txBody>
@@ -6746,8 +6746,8 @@
         </p:nvSpPr>
         <p:spPr>
           <a:xfrm>
-            <a:off x="1512000" y="3247200"/>
-            <a:ext cx="9828000" cy="306000"/>
+            <a:off x="1512000" y="4381200"/>
+            <a:ext cx="9828000" cy="324000"/>
           </a:xfrm>
           <a:prstGeom prst="rect">
             <a:avLst/>
@@ -6762,13 +6762,13 @@
           <a:p>
             <a:pPr algn="l"/>
             <a:r>
-              <a:rPr sz="1250" b="0">
+              <a:rPr sz="1300" b="0">
                 <a:solidFill>
                   <a:srgbClr val="555F6E"/>
                 </a:solidFill>
                 <a:latin typeface="Microsoft YaHei"/>
               </a:rPr>
-              <a:t>艾宾浩斯遗忘+召唤强化 → 增加 importance≥2 保护线。</a:t>
+              <a:t>艾宾浩斯遗忘与召唤强化；本文增加 importance≥2 保护线。</a:t>
             </a:r>
           </a:p>
         </p:txBody>
@@ -6781,7 +6781,7 @@
         </p:nvSpPr>
         <p:spPr>
           <a:xfrm>
-            <a:off x="792000" y="3474000"/>
+            <a:off x="792000" y="4687200"/>
             <a:ext cx="10620000" cy="10800"/>
           </a:xfrm>
           <a:prstGeom prst="rect">
@@ -6826,7 +6826,7 @@
         </p:nvSpPr>
         <p:spPr>
           <a:xfrm>
-            <a:off x="792000" y="3420000"/>
+            <a:off x="792000" y="4888800"/>
             <a:ext cx="648000" cy="432000"/>
           </a:xfrm>
           <a:prstGeom prst="rect">
@@ -6842,7 +6842,7 @@
           <a:p>
             <a:pPr algn="l"/>
             <a:r>
-              <a:rPr sz="2200" b="1">
+              <a:rPr sz="2600" b="1">
                 <a:solidFill>
                   <a:srgbClr val="2F6EBA"/>
                 </a:solidFill>
@@ -6861,8 +6861,8 @@
         </p:nvSpPr>
         <p:spPr>
           <a:xfrm>
-            <a:off x="1512000" y="3441600"/>
-            <a:ext cx="9828000" cy="216000"/>
+            <a:off x="1512000" y="4852800"/>
+            <a:ext cx="9828000" cy="288000"/>
           </a:xfrm>
           <a:prstGeom prst="rect">
             <a:avLst/>
@@ -6877,13 +6877,13 @@
           <a:p>
             <a:pPr algn="l"/>
             <a:r>
-              <a:rPr sz="1600" b="1">
+              <a:rPr sz="2000" b="1">
                 <a:solidFill>
                   <a:srgbClr val="1F3A68"/>
                 </a:solidFill>
                 <a:latin typeface="Microsoft YaHei"/>
               </a:rPr>
-              <a:t>Zep</a:t>
+              <a:t>Zep 溯源</a:t>
             </a:r>
           </a:p>
         </p:txBody>
@@ -6896,8 +6896,8 @@
         </p:nvSpPr>
         <p:spPr>
           <a:xfrm>
-            <a:off x="1512000" y="3679200"/>
-            <a:ext cx="9828000" cy="306000"/>
+            <a:off x="1512000" y="5155200"/>
+            <a:ext cx="9828000" cy="324000"/>
           </a:xfrm>
           <a:prstGeom prst="rect">
             <a:avLst/>
@@ -6912,13 +6912,13 @@
           <a:p>
             <a:pPr algn="l"/>
             <a:r>
-              <a:rPr sz="1250" b="0">
+              <a:rPr sz="1300" b="0">
                 <a:solidFill>
                   <a:srgbClr val="555F6E"/>
                 </a:solidFill>
                 <a:latin typeface="Microsoft YaHei"/>
               </a:rPr>
-              <a:t>时序知识图谱+溯源 → 采用溯源字段，不采用图存储。</a:t>
+              <a:t>时序知识图谱强调时间与溯源；采用溯源字段，不采用图存储。</a:t>
             </a:r>
           </a:p>
         </p:txBody>
@@ -6931,7 +6931,7 @@
         </p:nvSpPr>
         <p:spPr>
           <a:xfrm>
-            <a:off x="792000" y="3906000"/>
+            <a:off x="792000" y="5461200"/>
             <a:ext cx="10620000" cy="10800"/>
           </a:xfrm>
           <a:prstGeom prst="rect">
@@ -6976,7 +6976,7 @@
         </p:nvSpPr>
         <p:spPr>
           <a:xfrm>
-            <a:off x="792000" y="3851999"/>
+            <a:off x="792000" y="5662800"/>
             <a:ext cx="648000" cy="432000"/>
           </a:xfrm>
           <a:prstGeom prst="rect">
@@ -6992,7 +6992,7 @@
           <a:p>
             <a:pPr algn="l"/>
             <a:r>
-              <a:rPr sz="2200" b="1">
+              <a:rPr sz="2600" b="1">
                 <a:solidFill>
                   <a:srgbClr val="2F6EBA"/>
                 </a:solidFill>
@@ -7011,8 +7011,8 @@
         </p:nvSpPr>
         <p:spPr>
           <a:xfrm>
-            <a:off x="1512000" y="3873600"/>
-            <a:ext cx="9828000" cy="216000"/>
+            <a:off x="1512000" y="5626800"/>
+            <a:ext cx="9828000" cy="288000"/>
           </a:xfrm>
           <a:prstGeom prst="rect">
             <a:avLst/>
@@ -7027,13 +7027,13 @@
           <a:p>
             <a:pPr algn="l"/>
             <a:r>
-              <a:rPr sz="1600" b="1">
+              <a:rPr sz="2000" b="1">
                 <a:solidFill>
                   <a:srgbClr val="1F3A68"/>
                 </a:solidFill>
                 <a:latin typeface="Microsoft YaHei"/>
               </a:rPr>
-              <a:t>MIRIX/TiM</a:t>
+              <a:t>MIRIX / TiM 多路</a:t>
             </a:r>
           </a:p>
         </p:txBody>
@@ -7046,8 +7046,8 @@
         </p:nvSpPr>
         <p:spPr>
           <a:xfrm>
-            <a:off x="1512000" y="4111200"/>
-            <a:ext cx="9828000" cy="306000"/>
+            <a:off x="1512000" y="5929200"/>
+            <a:ext cx="9828000" cy="324000"/>
           </a:xfrm>
           <a:prstGeom prst="rect">
             <a:avLst/>
@@ -7062,13 +7062,13 @@
           <a:p>
             <a:pPr algn="l"/>
             <a:r>
-              <a:rPr sz="1250" b="0">
+              <a:rPr sz="1300" b="0">
                 <a:solidFill>
                   <a:srgbClr val="555F6E"/>
                 </a:solidFill>
                 <a:latin typeface="Microsoft YaHei"/>
               </a:rPr>
-              <a:t>多路策略与显式检索计划 → 压缩为三路融合。</a:t>
+              <a:t>多策略主动检索与显式检索计划；本文压缩为三路混合检索。</a:t>
             </a:r>
           </a:p>
         </p:txBody>
@@ -7081,7 +7081,7 @@
         </p:nvSpPr>
         <p:spPr>
           <a:xfrm>
-            <a:off x="792000" y="4338000"/>
+            <a:off x="792000" y="6235200"/>
             <a:ext cx="10620000" cy="10800"/>
           </a:xfrm>
           <a:prstGeom prst="rect">

--- a/汇报PPT/最终汇报成果.pptx
+++ b/汇报PPT/最终汇报成果.pptx
@@ -7487,7 +7487,7 @@
           <a:p>
             <a:pPr algn="l"/>
             <a:r>
-              <a:rPr sz="1500" b="1">
+              <a:rPr sz="1600" b="1">
                 <a:solidFill>
                   <a:srgbClr val="1F3A68"/>
                 </a:solidFill>
@@ -7506,7 +7506,7 @@
         </p:nvSpPr>
         <p:spPr>
           <a:xfrm>
-            <a:off x="792000" y="2167200"/>
+            <a:off x="792000" y="2149200"/>
             <a:ext cx="251999" cy="251999"/>
           </a:xfrm>
           <a:prstGeom prst="rect">
@@ -7541,8 +7541,8 @@
         </p:nvSpPr>
         <p:spPr>
           <a:xfrm>
-            <a:off x="1080000" y="2167200"/>
-            <a:ext cx="4878000" cy="216000"/>
+            <a:off x="1080000" y="2149200"/>
+            <a:ext cx="4878000" cy="251999"/>
           </a:xfrm>
           <a:prstGeom prst="rect">
             <a:avLst/>
@@ -7557,7 +7557,7 @@
           <a:p>
             <a:pPr algn="l"/>
             <a:r>
-              <a:rPr sz="1250" b="1">
+              <a:rPr sz="1400" b="1">
                 <a:solidFill>
                   <a:srgbClr val="1F3A68"/>
                 </a:solidFill>
@@ -7576,8 +7576,8 @@
         </p:nvSpPr>
         <p:spPr>
           <a:xfrm>
-            <a:off x="1080000" y="2376000"/>
-            <a:ext cx="4878000" cy="288000"/>
+            <a:off x="1080000" y="2394000"/>
+            <a:ext cx="4878000" cy="715500"/>
           </a:xfrm>
           <a:prstGeom prst="rect">
             <a:avLst/>
@@ -7592,13 +7592,13 @@
           <a:p>
             <a:pPr algn="l"/>
             <a:r>
-              <a:rPr sz="1150" b="0">
+              <a:rPr sz="1200" b="0">
                 <a:solidFill>
                   <a:srgbClr val="555F6E"/>
                 </a:solidFill>
                 <a:latin typeface="Microsoft YaHei"/>
               </a:rPr>
-              <a:t>θ 相似度去重 → 写入前查重</a:t>
+              <a:t>写入前用相似度 θ 去重，降低记忆冗余；本文将其作为写入查重的核心。</a:t>
             </a:r>
           </a:p>
         </p:txBody>
@@ -7611,7 +7611,7 @@
         </p:nvSpPr>
         <p:spPr>
           <a:xfrm>
-            <a:off x="792000" y="2797200"/>
+            <a:off x="792000" y="3170700"/>
             <a:ext cx="251999" cy="251999"/>
           </a:xfrm>
           <a:prstGeom prst="rect">
@@ -7646,8 +7646,8 @@
         </p:nvSpPr>
         <p:spPr>
           <a:xfrm>
-            <a:off x="1080000" y="2797200"/>
-            <a:ext cx="4878000" cy="216000"/>
+            <a:off x="1080000" y="3170700"/>
+            <a:ext cx="4878000" cy="251999"/>
           </a:xfrm>
           <a:prstGeom prst="rect">
             <a:avLst/>
@@ -7662,7 +7662,7 @@
           <a:p>
             <a:pPr algn="l"/>
             <a:r>
-              <a:rPr sz="1250" b="1">
+              <a:rPr sz="1400" b="1">
                 <a:solidFill>
                   <a:srgbClr val="1F3A68"/>
                 </a:solidFill>
@@ -7681,8 +7681,8 @@
         </p:nvSpPr>
         <p:spPr>
           <a:xfrm>
-            <a:off x="1080000" y="3006000"/>
-            <a:ext cx="4878000" cy="288000"/>
+            <a:off x="1080000" y="3415500"/>
+            <a:ext cx="4878000" cy="715500"/>
           </a:xfrm>
           <a:prstGeom prst="rect">
             <a:avLst/>
@@ -7697,13 +7697,13 @@
           <a:p>
             <a:pPr algn="l"/>
             <a:r>
-              <a:rPr sz="1150" b="0">
+              <a:rPr sz="1200" b="0">
                 <a:solidFill>
                   <a:srgbClr val="555F6E"/>
                 </a:solidFill>
                 <a:latin typeface="Microsoft YaHei"/>
               </a:rPr>
-              <a:t>跨事件整合 → “抽象”操作</a:t>
+              <a:t>事件级绑定与跨事件整合；本文演化为“抽象”操作，多条经验合成通用教训。</a:t>
             </a:r>
           </a:p>
         </p:txBody>
@@ -7716,7 +7716,7 @@
         </p:nvSpPr>
         <p:spPr>
           <a:xfrm>
-            <a:off x="792000" y="3427200"/>
+            <a:off x="792000" y="4192200"/>
             <a:ext cx="251999" cy="251999"/>
           </a:xfrm>
           <a:prstGeom prst="rect">
@@ -7751,8 +7751,8 @@
         </p:nvSpPr>
         <p:spPr>
           <a:xfrm>
-            <a:off x="1080000" y="3427200"/>
-            <a:ext cx="4878000" cy="216000"/>
+            <a:off x="1080000" y="4192200"/>
+            <a:ext cx="4878000" cy="251999"/>
           </a:xfrm>
           <a:prstGeom prst="rect">
             <a:avLst/>
@@ -7767,7 +7767,7 @@
           <a:p>
             <a:pPr algn="l"/>
             <a:r>
-              <a:rPr sz="1250" b="1">
+              <a:rPr sz="1400" b="1">
                 <a:solidFill>
                   <a:srgbClr val="1F3A68"/>
                 </a:solidFill>
@@ -7786,8 +7786,8 @@
         </p:nvSpPr>
         <p:spPr>
           <a:xfrm>
-            <a:off x="1080000" y="3636000"/>
-            <a:ext cx="4878000" cy="288000"/>
+            <a:off x="1080000" y="4437000"/>
+            <a:ext cx="4878000" cy="715500"/>
           </a:xfrm>
           <a:prstGeom prst="rect">
             <a:avLst/>
@@ -7802,13 +7802,13 @@
           <a:p>
             <a:pPr algn="l"/>
             <a:r>
-              <a:rPr sz="1150" b="0">
+              <a:rPr sz="1200" b="0">
                 <a:solidFill>
                   <a:srgbClr val="555F6E"/>
                 </a:solidFill>
                 <a:latin typeface="Microsoft YaHei"/>
               </a:rPr>
-              <a:t>操作类型化 → MemoryOp 枚举</a:t>
+              <a:t>INSERT/UPDATE/DELETE/SKIP 操作类型化；本文采用 MemoryOp 枚举与 op_history。</a:t>
             </a:r>
           </a:p>
         </p:txBody>
@@ -7821,7 +7821,7 @@
         </p:nvSpPr>
         <p:spPr>
           <a:xfrm>
-            <a:off x="792000" y="4057200"/>
+            <a:off x="792000" y="5213700"/>
             <a:ext cx="251999" cy="251999"/>
           </a:xfrm>
           <a:prstGeom prst="rect">
@@ -7856,8 +7856,8 @@
         </p:nvSpPr>
         <p:spPr>
           <a:xfrm>
-            <a:off x="1080000" y="4057200"/>
-            <a:ext cx="4878000" cy="216000"/>
+            <a:off x="1080000" y="5213700"/>
+            <a:ext cx="4878000" cy="251999"/>
           </a:xfrm>
           <a:prstGeom prst="rect">
             <a:avLst/>
@@ -7872,7 +7872,7 @@
           <a:p>
             <a:pPr algn="l"/>
             <a:r>
-              <a:rPr sz="1250" b="1">
+              <a:rPr sz="1400" b="1">
                 <a:solidFill>
                   <a:srgbClr val="1F3A68"/>
                 </a:solidFill>
@@ -7891,8 +7891,8 @@
         </p:nvSpPr>
         <p:spPr>
           <a:xfrm>
-            <a:off x="1080000" y="4266000"/>
-            <a:ext cx="4878000" cy="288000"/>
+            <a:off x="1080000" y="5458500"/>
+            <a:ext cx="4878000" cy="715500"/>
           </a:xfrm>
           <a:prstGeom prst="rect">
             <a:avLst/>
@@ -7907,13 +7907,13 @@
           <a:p>
             <a:pPr algn="l"/>
             <a:r>
-              <a:rPr sz="1150" b="0">
+              <a:rPr sz="1200" b="0">
                 <a:solidFill>
                   <a:srgbClr val="555F6E"/>
                 </a:solidFill>
                 <a:latin typeface="Microsoft YaHei"/>
               </a:rPr>
-              <a:t>建议-执行分离 → 核心架构</a:t>
+              <a:t>建议-执行分离；本文由 LLM 提候选、确定性代码执行写/合/忘/抽。</a:t>
             </a:r>
           </a:p>
         </p:txBody>
@@ -7926,7 +7926,7 @@
         </p:nvSpPr>
         <p:spPr>
           <a:xfrm>
-            <a:off x="792000" y="4716000"/>
+            <a:off x="792000" y="6318000"/>
             <a:ext cx="5310000" cy="7200"/>
           </a:xfrm>
           <a:prstGeom prst="rect">
@@ -8032,7 +8032,7 @@
           <a:p>
             <a:pPr algn="l"/>
             <a:r>
-              <a:rPr sz="1500" b="1">
+              <a:rPr sz="1600" b="1">
                 <a:solidFill>
                   <a:srgbClr val="1F3A68"/>
                 </a:solidFill>
@@ -8051,7 +8051,7 @@
         </p:nvSpPr>
         <p:spPr>
           <a:xfrm>
-            <a:off x="6678000" y="2167200"/>
+            <a:off x="6678000" y="2149200"/>
             <a:ext cx="251999" cy="251999"/>
           </a:xfrm>
           <a:prstGeom prst="rect">
@@ -8086,8 +8086,8 @@
         </p:nvSpPr>
         <p:spPr>
           <a:xfrm>
-            <a:off x="6966000" y="2167200"/>
-            <a:ext cx="4878000" cy="216000"/>
+            <a:off x="6966000" y="2149200"/>
+            <a:ext cx="4878000" cy="251999"/>
           </a:xfrm>
           <a:prstGeom prst="rect">
             <a:avLst/>
@@ -8102,7 +8102,7 @@
           <a:p>
             <a:pPr algn="l"/>
             <a:r>
-              <a:rPr sz="1250" b="1">
+              <a:rPr sz="1400" b="1">
                 <a:solidFill>
                   <a:srgbClr val="1F3A68"/>
                 </a:solidFill>
@@ -8121,8 +8121,8 @@
         </p:nvSpPr>
         <p:spPr>
           <a:xfrm>
-            <a:off x="6966000" y="2376000"/>
-            <a:ext cx="4878000" cy="288000"/>
+            <a:off x="6966000" y="2394000"/>
+            <a:ext cx="4878000" cy="715500"/>
           </a:xfrm>
           <a:prstGeom prst="rect">
             <a:avLst/>
@@ -8137,13 +8137,13 @@
           <a:p>
             <a:pPr algn="l"/>
             <a:r>
-              <a:rPr sz="1150" b="0">
+              <a:rPr sz="1200" b="0">
                 <a:solidFill>
                   <a:srgbClr val="555F6E"/>
                 </a:solidFill>
                 <a:latin typeface="Microsoft YaHei"/>
               </a:rPr>
-              <a:t>50 条量级收益不明显</a:t>
+              <a:t>50 条量级下收益不明显，保留成对比较的启发式，避免过度工程。</a:t>
             </a:r>
           </a:p>
         </p:txBody>
@@ -8156,7 +8156,7 @@
         </p:nvSpPr>
         <p:spPr>
           <a:xfrm>
-            <a:off x="6678000" y="2797200"/>
+            <a:off x="6678000" y="3170700"/>
             <a:ext cx="251999" cy="251999"/>
           </a:xfrm>
           <a:prstGeom prst="rect">
@@ -8191,8 +8191,8 @@
         </p:nvSpPr>
         <p:spPr>
           <a:xfrm>
-            <a:off x="6966000" y="2797200"/>
-            <a:ext cx="4878000" cy="216000"/>
+            <a:off x="6966000" y="3170700"/>
+            <a:ext cx="4878000" cy="251999"/>
           </a:xfrm>
           <a:prstGeom prst="rect">
             <a:avLst/>
@@ -8207,7 +8207,7 @@
           <a:p>
             <a:pPr algn="l"/>
             <a:r>
-              <a:rPr sz="1250" b="1">
+              <a:rPr sz="1400" b="1">
                 <a:solidFill>
                   <a:srgbClr val="1F3A68"/>
                 </a:solidFill>
@@ -8226,8 +8226,8 @@
         </p:nvSpPr>
         <p:spPr>
           <a:xfrm>
-            <a:off x="6966000" y="3006000"/>
-            <a:ext cx="4878000" cy="288000"/>
+            <a:off x="6966000" y="3415500"/>
+            <a:ext cx="4878000" cy="715500"/>
           </a:xfrm>
           <a:prstGeom prst="rect">
             <a:avLst/>
@@ -8242,13 +8242,13 @@
           <a:p>
             <a:pPr algn="l"/>
             <a:r>
-              <a:rPr sz="1150" b="0">
+              <a:rPr sz="1200" b="0">
                 <a:solidFill>
                   <a:srgbClr val="555F6E"/>
                 </a:solidFill>
                 <a:latin typeface="Microsoft YaHei"/>
               </a:rPr>
-              <a:t>战场奖励信号不稳定</a:t>
+              <a:t>战场奖励信号不稳定，执行保持确定性、可审计，不引入在线更新。</a:t>
             </a:r>
           </a:p>
         </p:txBody>
@@ -8261,7 +8261,7 @@
         </p:nvSpPr>
         <p:spPr>
           <a:xfrm>
-            <a:off x="6678000" y="3427200"/>
+            <a:off x="6678000" y="4192200"/>
             <a:ext cx="251999" cy="251999"/>
           </a:xfrm>
           <a:prstGeom prst="rect">
@@ -8296,8 +8296,8 @@
         </p:nvSpPr>
         <p:spPr>
           <a:xfrm>
-            <a:off x="6966000" y="3427200"/>
-            <a:ext cx="4878000" cy="216000"/>
+            <a:off x="6966000" y="4192200"/>
+            <a:ext cx="4878000" cy="251999"/>
           </a:xfrm>
           <a:prstGeom prst="rect">
             <a:avLst/>
@@ -8312,7 +8312,7 @@
           <a:p>
             <a:pPr algn="l"/>
             <a:r>
-              <a:rPr sz="1250" b="1">
+              <a:rPr sz="1400" b="1">
                 <a:solidFill>
                   <a:srgbClr val="1F3A68"/>
                 </a:solidFill>
@@ -8331,8 +8331,8 @@
         </p:nvSpPr>
         <p:spPr>
           <a:xfrm>
-            <a:off x="6966000" y="3636000"/>
-            <a:ext cx="4878000" cy="288000"/>
+            <a:off x="6966000" y="4437000"/>
+            <a:ext cx="4878000" cy="715500"/>
           </a:xfrm>
           <a:prstGeom prst="rect">
             <a:avLst/>
@@ -8347,13 +8347,13 @@
           <a:p>
             <a:pPr algn="l"/>
             <a:r>
-              <a:rPr sz="1150" b="0">
+              <a:rPr sz="1200" b="0">
                 <a:solidFill>
                   <a:srgbClr val="555F6E"/>
                 </a:solidFill>
                 <a:latin typeface="Microsoft YaHei"/>
               </a:rPr>
-              <a:t>构建纠错成本高</a:t>
+              <a:t>构建与纠错成本高，仅保留来源/时间/场次等溯源字段支撑审计。</a:t>
             </a:r>
           </a:p>
         </p:txBody>
@@ -8366,7 +8366,7 @@
         </p:nvSpPr>
         <p:spPr>
           <a:xfrm>
-            <a:off x="6678000" y="4057200"/>
+            <a:off x="6678000" y="5213700"/>
             <a:ext cx="251999" cy="251999"/>
           </a:xfrm>
           <a:prstGeom prst="rect">
@@ -8401,8 +8401,8 @@
         </p:nvSpPr>
         <p:spPr>
           <a:xfrm>
-            <a:off x="6966000" y="4057200"/>
-            <a:ext cx="4878000" cy="216000"/>
+            <a:off x="6966000" y="5213700"/>
+            <a:ext cx="4878000" cy="251999"/>
           </a:xfrm>
           <a:prstGeom prst="rect">
             <a:avLst/>
@@ -8417,13 +8417,13 @@
           <a:p>
             <a:pPr algn="l"/>
             <a:r>
-              <a:rPr sz="1250" b="1">
+              <a:rPr sz="1400" b="1">
                 <a:solidFill>
                   <a:srgbClr val="1F3A68"/>
                 </a:solidFill>
                 <a:latin typeface="Microsoft YaHei"/>
               </a:rPr>
-              <a:t>领域化</a:t>
+              <a:t>领域化改动</a:t>
             </a:r>
           </a:p>
         </p:txBody>
@@ -8436,8 +8436,8 @@
         </p:nvSpPr>
         <p:spPr>
           <a:xfrm>
-            <a:off x="6966000" y="4266000"/>
-            <a:ext cx="4878000" cy="288000"/>
+            <a:off x="6966000" y="5458500"/>
+            <a:ext cx="4878000" cy="715500"/>
           </a:xfrm>
           <a:prstGeom prst="rect">
             <a:avLst/>
@@ -8452,13 +8452,13 @@
           <a:p>
             <a:pPr algn="l"/>
             <a:r>
-              <a:rPr sz="1150" b="0">
+              <a:rPr sz="1200" b="0">
                 <a:solidFill>
                   <a:srgbClr val="555F6E"/>
                 </a:solidFill>
                 <a:latin typeface="Microsoft YaHei"/>
               </a:rPr>
-              <a:t>保护线、精确绕过阈值、阶段供给</a:t>
+              <a:t>importance≥2 保护线、attrs 精确命中绕过阈值、MDMP 阶段化供给。</a:t>
             </a:r>
           </a:p>
         </p:txBody>
@@ -8471,7 +8471,7 @@
         </p:nvSpPr>
         <p:spPr>
           <a:xfrm>
-            <a:off x="6678000" y="4716000"/>
+            <a:off x="6678000" y="6318000"/>
             <a:ext cx="5310000" cy="7200"/>
           </a:xfrm>
           <a:prstGeom prst="rect">

--- a/汇报PPT/最终汇报成果.pptx
+++ b/汇报PPT/最终汇报成果.pptx
@@ -7542,7 +7542,7 @@
         <p:spPr>
           <a:xfrm>
             <a:off x="1080000" y="2149200"/>
-            <a:ext cx="4878000" cy="251999"/>
+            <a:ext cx="4878000" cy="369332"/>
           </a:xfrm>
           <a:prstGeom prst="rect">
             <a:avLst/>
@@ -7557,7 +7557,7 @@
           <a:p>
             <a:pPr algn="l"/>
             <a:r>
-              <a:rPr sz="1400" b="1">
+              <a:rPr b="1">
                 <a:solidFill>
                   <a:srgbClr val="1F3A68"/>
                 </a:solidFill>
@@ -7576,8 +7576,8 @@
         </p:nvSpPr>
         <p:spPr>
           <a:xfrm>
-            <a:off x="1080000" y="2394000"/>
-            <a:ext cx="4878000" cy="715500"/>
+            <a:off x="1080000" y="2470400"/>
+            <a:ext cx="4878000" cy="523220"/>
           </a:xfrm>
           <a:prstGeom prst="rect">
             <a:avLst/>
@@ -7592,7 +7592,7 @@
           <a:p>
             <a:pPr algn="l"/>
             <a:r>
-              <a:rPr sz="1200" b="0">
+              <a:rPr sz="1400" b="0">
                 <a:solidFill>
                   <a:srgbClr val="555F6E"/>
                 </a:solidFill>
@@ -7647,7 +7647,7 @@
         <p:spPr>
           <a:xfrm>
             <a:off x="1080000" y="3170700"/>
-            <a:ext cx="4878000" cy="251999"/>
+            <a:ext cx="4878000" cy="369332"/>
           </a:xfrm>
           <a:prstGeom prst="rect">
             <a:avLst/>
@@ -7662,7 +7662,7 @@
           <a:p>
             <a:pPr algn="l"/>
             <a:r>
-              <a:rPr sz="1400" b="1">
+              <a:rPr b="1">
                 <a:solidFill>
                   <a:srgbClr val="1F3A68"/>
                 </a:solidFill>
@@ -7681,8 +7681,8 @@
         </p:nvSpPr>
         <p:spPr>
           <a:xfrm>
-            <a:off x="1080000" y="3415500"/>
-            <a:ext cx="4878000" cy="715500"/>
+            <a:off x="1080000" y="3491900"/>
+            <a:ext cx="4878000" cy="523220"/>
           </a:xfrm>
           <a:prstGeom prst="rect">
             <a:avLst/>
@@ -7697,7 +7697,7 @@
           <a:p>
             <a:pPr algn="l"/>
             <a:r>
-              <a:rPr sz="1200" b="0">
+              <a:rPr sz="1400" b="0">
                 <a:solidFill>
                   <a:srgbClr val="555F6E"/>
                 </a:solidFill>
@@ -7752,7 +7752,7 @@
         <p:spPr>
           <a:xfrm>
             <a:off x="1080000" y="4192200"/>
-            <a:ext cx="4878000" cy="251999"/>
+            <a:ext cx="4878000" cy="369332"/>
           </a:xfrm>
           <a:prstGeom prst="rect">
             <a:avLst/>
@@ -7767,7 +7767,7 @@
           <a:p>
             <a:pPr algn="l"/>
             <a:r>
-              <a:rPr sz="1400" b="1">
+              <a:rPr b="1">
                 <a:solidFill>
                   <a:srgbClr val="1F3A68"/>
                 </a:solidFill>
@@ -7786,8 +7786,8 @@
         </p:nvSpPr>
         <p:spPr>
           <a:xfrm>
-            <a:off x="1080000" y="4437000"/>
-            <a:ext cx="4878000" cy="715500"/>
+            <a:off x="1080000" y="4513400"/>
+            <a:ext cx="4878000" cy="523220"/>
           </a:xfrm>
           <a:prstGeom prst="rect">
             <a:avLst/>
@@ -7802,7 +7802,7 @@
           <a:p>
             <a:pPr algn="l"/>
             <a:r>
-              <a:rPr sz="1200" b="0">
+              <a:rPr sz="1400" b="0">
                 <a:solidFill>
                   <a:srgbClr val="555F6E"/>
                 </a:solidFill>
@@ -7857,7 +7857,7 @@
         <p:spPr>
           <a:xfrm>
             <a:off x="1080000" y="5213700"/>
-            <a:ext cx="4878000" cy="251999"/>
+            <a:ext cx="4878000" cy="369332"/>
           </a:xfrm>
           <a:prstGeom prst="rect">
             <a:avLst/>
@@ -7872,7 +7872,7 @@
           <a:p>
             <a:pPr algn="l"/>
             <a:r>
-              <a:rPr sz="1400" b="1">
+              <a:rPr b="1">
                 <a:solidFill>
                   <a:srgbClr val="1F3A68"/>
                 </a:solidFill>
@@ -7891,8 +7891,8 @@
         </p:nvSpPr>
         <p:spPr>
           <a:xfrm>
-            <a:off x="1080000" y="5458500"/>
-            <a:ext cx="4878000" cy="715500"/>
+            <a:off x="1080000" y="5534900"/>
+            <a:ext cx="4878000" cy="523220"/>
           </a:xfrm>
           <a:prstGeom prst="rect">
             <a:avLst/>
@@ -7907,7 +7907,7 @@
           <a:p>
             <a:pPr algn="l"/>
             <a:r>
-              <a:rPr sz="1200" b="0">
+              <a:rPr sz="1400" b="0">
                 <a:solidFill>
                   <a:srgbClr val="555F6E"/>
                 </a:solidFill>
@@ -8087,7 +8087,7 @@
         <p:spPr>
           <a:xfrm>
             <a:off x="6966000" y="2149200"/>
-            <a:ext cx="4878000" cy="251999"/>
+            <a:ext cx="4878000" cy="369332"/>
           </a:xfrm>
           <a:prstGeom prst="rect">
             <a:avLst/>
@@ -8102,7 +8102,7 @@
           <a:p>
             <a:pPr algn="l"/>
             <a:r>
-              <a:rPr sz="1400" b="1">
+              <a:rPr b="1">
                 <a:solidFill>
                   <a:srgbClr val="1F3A68"/>
                 </a:solidFill>
@@ -8121,8 +8121,8 @@
         </p:nvSpPr>
         <p:spPr>
           <a:xfrm>
-            <a:off x="6966000" y="2394000"/>
-            <a:ext cx="4878000" cy="715500"/>
+            <a:off x="6966000" y="2470400"/>
+            <a:ext cx="4878000" cy="523220"/>
           </a:xfrm>
           <a:prstGeom prst="rect">
             <a:avLst/>
@@ -8137,7 +8137,7 @@
           <a:p>
             <a:pPr algn="l"/>
             <a:r>
-              <a:rPr sz="1200" b="0">
+              <a:rPr sz="1400" b="0">
                 <a:solidFill>
                   <a:srgbClr val="555F6E"/>
                 </a:solidFill>
@@ -8192,7 +8192,7 @@
         <p:spPr>
           <a:xfrm>
             <a:off x="6966000" y="3170700"/>
-            <a:ext cx="4878000" cy="251999"/>
+            <a:ext cx="4878000" cy="369332"/>
           </a:xfrm>
           <a:prstGeom prst="rect">
             <a:avLst/>
@@ -8207,7 +8207,7 @@
           <a:p>
             <a:pPr algn="l"/>
             <a:r>
-              <a:rPr sz="1400" b="1">
+              <a:rPr b="1">
                 <a:solidFill>
                   <a:srgbClr val="1F3A68"/>
                 </a:solidFill>
@@ -8226,8 +8226,8 @@
         </p:nvSpPr>
         <p:spPr>
           <a:xfrm>
-            <a:off x="6966000" y="3415500"/>
-            <a:ext cx="4878000" cy="715500"/>
+            <a:off x="6966000" y="3491900"/>
+            <a:ext cx="4878000" cy="523220"/>
           </a:xfrm>
           <a:prstGeom prst="rect">
             <a:avLst/>
@@ -8242,7 +8242,7 @@
           <a:p>
             <a:pPr algn="l"/>
             <a:r>
-              <a:rPr sz="1200" b="0">
+              <a:rPr sz="1400" b="0">
                 <a:solidFill>
                   <a:srgbClr val="555F6E"/>
                 </a:solidFill>
@@ -8297,7 +8297,7 @@
         <p:spPr>
           <a:xfrm>
             <a:off x="6966000" y="4192200"/>
-            <a:ext cx="4878000" cy="251999"/>
+            <a:ext cx="4878000" cy="369332"/>
           </a:xfrm>
           <a:prstGeom prst="rect">
             <a:avLst/>
@@ -8312,7 +8312,7 @@
           <a:p>
             <a:pPr algn="l"/>
             <a:r>
-              <a:rPr sz="1400" b="1">
+              <a:rPr b="1">
                 <a:solidFill>
                   <a:srgbClr val="1F3A68"/>
                 </a:solidFill>
@@ -8331,8 +8331,8 @@
         </p:nvSpPr>
         <p:spPr>
           <a:xfrm>
-            <a:off x="6966000" y="4437000"/>
-            <a:ext cx="4878000" cy="715500"/>
+            <a:off x="6966000" y="4513400"/>
+            <a:ext cx="4878000" cy="523220"/>
           </a:xfrm>
           <a:prstGeom prst="rect">
             <a:avLst/>
@@ -8347,7 +8347,7 @@
           <a:p>
             <a:pPr algn="l"/>
             <a:r>
-              <a:rPr sz="1200" b="0">
+              <a:rPr sz="1400" b="0">
                 <a:solidFill>
                   <a:srgbClr val="555F6E"/>
                 </a:solidFill>
@@ -8402,7 +8402,7 @@
         <p:spPr>
           <a:xfrm>
             <a:off x="6966000" y="5213700"/>
-            <a:ext cx="4878000" cy="251999"/>
+            <a:ext cx="4878000" cy="369332"/>
           </a:xfrm>
           <a:prstGeom prst="rect">
             <a:avLst/>
@@ -8417,7 +8417,7 @@
           <a:p>
             <a:pPr algn="l"/>
             <a:r>
-              <a:rPr sz="1400" b="1">
+              <a:rPr b="1">
                 <a:solidFill>
                   <a:srgbClr val="1F3A68"/>
                 </a:solidFill>
@@ -8436,8 +8436,8 @@
         </p:nvSpPr>
         <p:spPr>
           <a:xfrm>
-            <a:off x="6966000" y="5458500"/>
-            <a:ext cx="4878000" cy="715500"/>
+            <a:off x="6966000" y="5534900"/>
+            <a:ext cx="4878000" cy="523220"/>
           </a:xfrm>
           <a:prstGeom prst="rect">
             <a:avLst/>
@@ -8452,7 +8452,7 @@
           <a:p>
             <a:pPr algn="l"/>
             <a:r>
-              <a:rPr sz="1200" b="0">
+              <a:rPr sz="1400" b="0">
                 <a:solidFill>
                   <a:srgbClr val="555F6E"/>
                 </a:solidFill>
@@ -9081,7 +9081,7 @@
         </p:nvSpPr>
         <p:spPr>
           <a:xfrm>
-            <a:off x="792000" y="1756800"/>
+            <a:off x="792000" y="1749599"/>
             <a:ext cx="648000" cy="432000"/>
           </a:xfrm>
           <a:prstGeom prst="rect">
@@ -9152,7 +9152,7 @@
         <p:spPr>
           <a:xfrm>
             <a:off x="1512000" y="2033999"/>
-            <a:ext cx="5256000" cy="630000"/>
+            <a:ext cx="5256000" cy="719999"/>
           </a:xfrm>
           <a:prstGeom prst="rect">
             <a:avLst/>
@@ -9173,7 +9173,7 @@
                 </a:solidFill>
                 <a:latin typeface="Microsoft YaHei"/>
               </a:rPr>
-              <a:t>模型层统一数据对象，能力层分短期/长期/检索/进化，跨切面处理边界与阶段，编排层由控制器与管线调度。</a:t>
+              <a:t>模型层统一数据对象；能力层分短期/长期/检索/进化；跨切面处理边界与阶段；编排层由控制器与管线调度。</a:t>
             </a:r>
           </a:p>
         </p:txBody>
@@ -9231,7 +9231,7 @@
         </p:nvSpPr>
         <p:spPr>
           <a:xfrm>
-            <a:off x="792000" y="2926799"/>
+            <a:off x="792000" y="2883600"/>
             <a:ext cx="648000" cy="432000"/>
           </a:xfrm>
           <a:prstGeom prst="rect">
@@ -9266,7 +9266,7 @@
         </p:nvSpPr>
         <p:spPr>
           <a:xfrm>
-            <a:off x="1512000" y="2897999"/>
+            <a:off x="1512000" y="2861999"/>
             <a:ext cx="5256000" cy="324000"/>
           </a:xfrm>
           <a:prstGeom prst="rect">
@@ -9301,8 +9301,8 @@
         </p:nvSpPr>
         <p:spPr>
           <a:xfrm>
-            <a:off x="1512000" y="3204000"/>
-            <a:ext cx="5256000" cy="630000"/>
+            <a:off x="1512000" y="3167999"/>
+            <a:ext cx="5256000" cy="719999"/>
           </a:xfrm>
           <a:prstGeom prst="rect">
             <a:avLst/>
@@ -9323,7 +9323,7 @@
                 </a:solidFill>
                 <a:latin typeface="Microsoft YaHei"/>
               </a:rPr>
-              <a:t>四个能力层互不 import，只通过 schema 对象通信，为独立消融提供物理基础。</a:t>
+              <a:t>四个能力层互不 import，只通过 schema 对象通信；因此可独立开关做消融，组间互不污染。</a:t>
             </a:r>
           </a:p>
         </p:txBody>
@@ -9381,7 +9381,7 @@
         </p:nvSpPr>
         <p:spPr>
           <a:xfrm>
-            <a:off x="792000" y="4096800"/>
+            <a:off x="792000" y="4017599"/>
             <a:ext cx="648000" cy="432000"/>
           </a:xfrm>
           <a:prstGeom prst="rect">
@@ -9416,7 +9416,7 @@
         </p:nvSpPr>
         <p:spPr>
           <a:xfrm>
-            <a:off x="1512000" y="4068000"/>
+            <a:off x="1512000" y="3995999"/>
             <a:ext cx="5256000" cy="324000"/>
           </a:xfrm>
           <a:prstGeom prst="rect">
@@ -9451,8 +9451,8 @@
         </p:nvSpPr>
         <p:spPr>
           <a:xfrm>
-            <a:off x="1512000" y="4374000"/>
-            <a:ext cx="5256000" cy="630000"/>
+            <a:off x="1512000" y="4301999"/>
+            <a:ext cx="5256000" cy="719999"/>
           </a:xfrm>
           <a:prstGeom prst="rect">
             <a:avLst/>
@@ -9473,7 +9473,7 @@
                 </a:solidFill>
                 <a:latin typeface="Microsoft YaHei"/>
               </a:rPr>
-              <a:t>短期→长期只经复盘晋升，经三道边界门，每次判定写入审计日志。</a:t>
+              <a:t>短期→长期只经复盘晋升，经复盘驱动、类别判定、语义查重三道门；每次判定写入审计日志。</a:t>
             </a:r>
           </a:p>
         </p:txBody>
@@ -9531,7 +9531,7 @@
         </p:nvSpPr>
         <p:spPr>
           <a:xfrm>
-            <a:off x="792000" y="5266800"/>
+            <a:off x="792000" y="5151600"/>
             <a:ext cx="648000" cy="432000"/>
           </a:xfrm>
           <a:prstGeom prst="rect">
@@ -9566,7 +9566,7 @@
         </p:nvSpPr>
         <p:spPr>
           <a:xfrm>
-            <a:off x="1512000" y="5238000"/>
+            <a:off x="1512000" y="5130000"/>
             <a:ext cx="5256000" cy="324000"/>
           </a:xfrm>
           <a:prstGeom prst="rect">
@@ -9601,8 +9601,8 @@
         </p:nvSpPr>
         <p:spPr>
           <a:xfrm>
-            <a:off x="1512000" y="5544000"/>
-            <a:ext cx="5256000" cy="630000"/>
+            <a:off x="1512000" y="5436000"/>
+            <a:ext cx="5256000" cy="719999"/>
           </a:xfrm>
           <a:prstGeom prst="rect">
             <a:avLst/>
@@ -9623,7 +9623,7 @@
                 </a:solidFill>
                 <a:latin typeface="Microsoft YaHei"/>
               </a:rPr>
-              <a:t>通过依赖注入开关能力，G0-G6 固定用例集验证。</a:t>
+              <a:t>通过依赖注入开关能力（空经验库/空检索器），G0-G6 在固定用例集上对比，保证可复现。</a:t>
             </a:r>
           </a:p>
         </p:txBody>
@@ -9673,75 +9673,6 @@
           </a:p>
         </p:txBody>
       </p:sp>
-      <p:pic>
-        <p:nvPicPr>
-          <p:cNvPr id="22" name="Picture 21" descr="ppt_architecture.png"/>
-          <p:cNvPicPr>
-            <a:picLocks noChangeAspect="1"/>
-          </p:cNvPicPr>
-          <p:nvPr/>
-        </p:nvPicPr>
-        <p:blipFill>
-          <a:blip r:embed="rId3"/>
-          <a:stretch>
-            <a:fillRect/>
-          </a:stretch>
-        </p:blipFill>
-        <p:spPr>
-          <a:xfrm>
-            <a:off x="7632000" y="1667199"/>
-            <a:ext cx="3924000" cy="4621600"/>
-          </a:xfrm>
-          <a:prstGeom prst="rect">
-            <a:avLst/>
-          </a:prstGeom>
-        </p:spPr>
-      </p:pic>
-      <p:sp>
-        <p:nvSpPr>
-          <p:cNvPr id="23" name="Rectangle 22"/>
-          <p:cNvSpPr/>
-          <p:nvPr/>
-        </p:nvSpPr>
-        <p:spPr>
-          <a:xfrm>
-            <a:off x="7632000" y="1655999"/>
-            <a:ext cx="3924000" cy="4644000"/>
-          </a:xfrm>
-          <a:prstGeom prst="rect">
-            <a:avLst/>
-          </a:prstGeom>
-          <a:noFill/>
-          <a:ln w="15240">
-            <a:solidFill>
-              <a:srgbClr val="2F6EBA"/>
-            </a:solidFill>
-          </a:ln>
-          <a:effectLst/>
-        </p:spPr>
-        <p:style>
-          <a:lnRef idx="1">
-            <a:schemeClr val="accent1"/>
-          </a:lnRef>
-          <a:fillRef idx="3">
-            <a:schemeClr val="accent1"/>
-          </a:fillRef>
-          <a:effectRef idx="2">
-            <a:schemeClr val="accent1"/>
-          </a:effectRef>
-          <a:fontRef idx="minor">
-            <a:schemeClr val="lt1"/>
-          </a:fontRef>
-        </p:style>
-        <p:txBody>
-          <a:bodyPr rtlCol="0" anchor="ctr"/>
-          <a:lstStyle/>
-          <a:p>
-            <a:pPr algn="ctr"/>
-            <a:endParaRPr/>
-          </a:p>
-        </p:txBody>
-      </p:sp>
       <p:sp>
         <p:nvSpPr>
           <p:cNvPr id="24" name="Rectangle 23"/>
@@ -9822,41 +9753,42 @@
           </a:p>
         </p:txBody>
       </p:sp>
-      <p:sp>
-        <p:nvSpPr>
-          <p:cNvPr id="26" name="TextBox 25"/>
-          <p:cNvSpPr txBox="1"/>
-          <p:nvPr/>
-        </p:nvSpPr>
-        <p:spPr>
-          <a:xfrm>
-            <a:off x="10260000" y="6660000"/>
-            <a:ext cx="1440000" cy="180000"/>
-          </a:xfrm>
-          <a:prstGeom prst="rect">
-            <a:avLst/>
-          </a:prstGeom>
-          <a:noFill/>
-        </p:spPr>
-        <p:txBody>
-          <a:bodyPr wrap="square">
-            <a:spAutoFit/>
-          </a:bodyPr>
-          <a:lstStyle/>
-          <a:p>
-            <a:pPr algn="r"/>
-            <a:r>
-              <a:rPr sz="1000" b="0">
-                <a:solidFill>
-                  <a:srgbClr val="555F6E"/>
-                </a:solidFill>
-                <a:latin typeface="Microsoft YaHei"/>
-              </a:rPr>
-              <a:t>13 / 28</a:t>
-            </a:r>
-          </a:p>
-        </p:txBody>
-      </p:sp>
+      <p:pic>
+        <p:nvPicPr>
+          <p:cNvPr id="34" name="图形 33">
+            <a:extLst>
+              <a:ext uri="{FF2B5EF4-FFF2-40B4-BE49-F238E27FC236}">
+                <a16:creationId xmlns:a16="http://schemas.microsoft.com/office/drawing/2014/main" id="{90DCFC05-5BA9-64FB-B306-C1339DD7E0A7}"/>
+              </a:ext>
+            </a:extLst>
+          </p:cNvPr>
+          <p:cNvPicPr>
+            <a:picLocks noChangeAspect="1"/>
+          </p:cNvPicPr>
+          <p:nvPr/>
+        </p:nvPicPr>
+        <p:blipFill>
+          <a:blip>
+            <a:extLst>
+              <a:ext uri="{96DAC541-7B7A-43D3-8B79-37D633B846F1}">
+                <asvg:svgBlip xmlns:asvg="http://schemas.microsoft.com/office/drawing/2016/SVG/main" r:embed="rId3"/>
+              </a:ext>
+            </a:extLst>
+          </a:blip>
+          <a:stretch>
+            <a:fillRect/>
+          </a:stretch>
+        </p:blipFill>
+        <p:spPr>
+          <a:xfrm>
+            <a:off x="6629234" y="1752996"/>
+            <a:ext cx="5795369" cy="4464000"/>
+          </a:xfrm>
+          <a:prstGeom prst="rect">
+            <a:avLst/>
+          </a:prstGeom>
+        </p:spPr>
+      </p:pic>
     </p:spTree>
   </p:cSld>
   <p:clrMapOvr>
@@ -10050,7 +9982,7 @@
         </p:nvSpPr>
         <p:spPr>
           <a:xfrm>
-            <a:off x="792000" y="1756800"/>
+            <a:off x="792000" y="1749599"/>
             <a:ext cx="648000" cy="432000"/>
           </a:xfrm>
           <a:prstGeom prst="rect">
@@ -10112,8 +10044,8 @@
         </p:nvSpPr>
         <p:spPr>
           <a:xfrm>
-            <a:off x="1512000" y="2033999"/>
-            <a:ext cx="3600000" cy="1020000"/>
+            <a:off x="1512000" y="2052000"/>
+            <a:ext cx="3600000" cy="1079999"/>
           </a:xfrm>
           <a:prstGeom prst="rect">
             <a:avLst/>
@@ -10134,7 +10066,7 @@
                 </a:solidFill>
                 <a:latin typeface="Microsoft YaHei"/>
               </a:rPr>
-              <a:t>槽位保存目标/约束/查询/消息；约束永不压缩，保证规划合规</a:t>
+              <a:t>槽位保存目标、约束、查询与滚动消息；约束字段永不压缩，保证规划合规，容量达阈值才触发压缩。</a:t>
             </a:r>
           </a:p>
         </p:txBody>
@@ -10192,7 +10124,7 @@
         </p:nvSpPr>
         <p:spPr>
           <a:xfrm>
-            <a:off x="792000" y="3316800"/>
+            <a:off x="792000" y="3261600"/>
             <a:ext cx="648000" cy="432000"/>
           </a:xfrm>
           <a:prstGeom prst="rect">
@@ -10254,8 +10186,8 @@
         </p:nvSpPr>
         <p:spPr>
           <a:xfrm>
-            <a:off x="1512000" y="3594000"/>
-            <a:ext cx="3600000" cy="1020000"/>
+            <a:off x="1512000" y="3564000"/>
+            <a:ext cx="3600000" cy="1079999"/>
           </a:xfrm>
           <a:prstGeom prst="rect">
             <a:avLst/>
@@ -10276,7 +10208,7 @@
                 </a:solidFill>
                 <a:latin typeface="Microsoft YaHei"/>
               </a:rPr>
-              <a:t>FIFO 超阈值触发递归摘要，被驱逐消息进入归档区供复盘晋升</a:t>
+              <a:t>FIFO 超阈值时驱逐最旧消息，把旧摘要与新消息递归成新摘要；原文进入归档区，供复盘晋升使用。</a:t>
             </a:r>
           </a:p>
         </p:txBody>
@@ -10334,7 +10266,7 @@
         </p:nvSpPr>
         <p:spPr>
           <a:xfrm>
-            <a:off x="792000" y="4876800"/>
+            <a:off x="792000" y="4773600"/>
             <a:ext cx="648000" cy="432000"/>
           </a:xfrm>
           <a:prstGeom prst="rect">
@@ -10369,7 +10301,7 @@
         </p:nvSpPr>
         <p:spPr>
           <a:xfrm>
-            <a:off x="1512000" y="4848000"/>
+            <a:off x="1512000" y="4752000"/>
             <a:ext cx="3600000" cy="324000"/>
           </a:xfrm>
           <a:prstGeom prst="rect">
@@ -10391,7 +10323,7 @@
                 </a:solidFill>
                 <a:latin typeface="Microsoft YaHei"/>
               </a:rPr>
-              <a:t>渲染顺序刻意使用首尾位置偏置</a:t>
+              <a:t>渲染顺序</a:t>
             </a:r>
           </a:p>
         </p:txBody>
@@ -10404,8 +10336,8 @@
         </p:nvSpPr>
         <p:spPr>
           <a:xfrm>
-            <a:off x="1512000" y="5154000"/>
-            <a:ext cx="3600000" cy="1020000"/>
+            <a:off x="1512000" y="5076000"/>
+            <a:ext cx="3600000" cy="1079999"/>
           </a:xfrm>
           <a:prstGeom prst="rect">
             <a:avLst/>
@@ -10426,7 +10358,7 @@
                 </a:solidFill>
                 <a:latin typeface="Microsoft YaHei"/>
               </a:rPr>
-              <a:t>关键信息放头部，近期消息放尾部</a:t>
+              <a:t>渲染刻意使用首尾位置偏置：关键信息放头部、近期消息放尾部，并把装载记忆段显式放入 prompt。</a:t>
             </a:r>
           </a:p>
         </p:txBody>
@@ -10529,7 +10461,7 @@
         </p:nvSpPr>
         <p:spPr>
           <a:xfrm>
-            <a:off x="5724000" y="1684800"/>
+            <a:off x="5724000" y="1643400"/>
             <a:ext cx="3600000" cy="198000"/>
           </a:xfrm>
           <a:prstGeom prst="rect">
@@ -11196,6 +11128,74 @@
                 <a:latin typeface="Microsoft YaHei"/>
               </a:rPr>
               <a:t>14 / 28</a:t>
+            </a:r>
+          </a:p>
+        </p:txBody>
+      </p:sp>
+      <p:sp>
+        <p:nvSpPr>
+          <p:cNvPr id="25" name="TextBox 24"/>
+          <p:cNvSpPr txBox="1"/>
+          <p:nvPr/>
+        </p:nvSpPr>
+        <p:spPr>
+          <a:xfrm>
+            <a:off x="1512000" y="1728000"/>
+            <a:ext cx="3600000" cy="324000"/>
+          </a:xfrm>
+          <a:prstGeom prst="rect">
+            <a:avLst/>
+          </a:prstGeom>
+          <a:noFill/>
+        </p:spPr>
+        <p:txBody>
+          <a:bodyPr wrap="square">
+            <a:spAutoFit/>
+          </a:bodyPr>
+          <a:lstStyle/>
+          <a:p>
+            <a:r>
+              <a:rPr sz="2000" b="1">
+                <a:solidFill>
+                  <a:srgbClr val="1F3A68"/>
+                </a:solidFill>
+                <a:latin typeface="Microsoft YaHei"/>
+              </a:rPr>
+              <a:t>槽位与约束</a:t>
+            </a:r>
+          </a:p>
+        </p:txBody>
+      </p:sp>
+      <p:sp>
+        <p:nvSpPr>
+          <p:cNvPr id="26" name="TextBox 25"/>
+          <p:cNvSpPr txBox="1"/>
+          <p:nvPr/>
+        </p:nvSpPr>
+        <p:spPr>
+          <a:xfrm>
+            <a:off x="1512000" y="3240000"/>
+            <a:ext cx="3600000" cy="324000"/>
+          </a:xfrm>
+          <a:prstGeom prst="rect">
+            <a:avLst/>
+          </a:prstGeom>
+          <a:noFill/>
+        </p:spPr>
+        <p:txBody>
+          <a:bodyPr wrap="square">
+            <a:spAutoFit/>
+          </a:bodyPr>
+          <a:lstStyle/>
+          <a:p>
+            <a:r>
+              <a:rPr sz="2000" b="1">
+                <a:solidFill>
+                  <a:srgbClr val="1F3A68"/>
+                </a:solidFill>
+                <a:latin typeface="Microsoft YaHei"/>
+              </a:rPr>
+              <a:t>FIFO 与递归摘要</a:t>
             </a:r>
           </a:p>
         </p:txBody>
@@ -11393,7 +11393,7 @@
         </p:nvSpPr>
         <p:spPr>
           <a:xfrm>
-            <a:off x="792000" y="1756800"/>
+            <a:off x="792000" y="1749599"/>
             <a:ext cx="648000" cy="432000"/>
           </a:xfrm>
           <a:prstGeom prst="rect">
@@ -11450,7 +11450,7 @@
                 </a:solidFill>
                 <a:latin typeface="Microsoft YaHei"/>
               </a:rPr>
-              <a:t>事实库</a:t>
+              <a:t>双库分治</a:t>
             </a:r>
           </a:p>
         </p:txBody>
@@ -11463,8 +11463,8 @@
         </p:nvSpPr>
         <p:spPr>
           <a:xfrm>
-            <a:off x="1512000" y="2033999"/>
-            <a:ext cx="3600000" cy="1020000"/>
+            <a:off x="1512000" y="2052000"/>
+            <a:ext cx="3600000" cy="1079999"/>
           </a:xfrm>
           <a:prstGeom prst="rect">
             <a:avLst/>
@@ -11485,7 +11485,7 @@
                 </a:solidFill>
                 <a:latin typeface="Microsoft YaHei"/>
               </a:rPr>
-              <a:t>SQLite+属性精确；经验库：向量语义召回</a:t>
+              <a:t>事实库用 SQLite 存参数、条令、地形，走属性精确；经验库用向量存教训、对策，走语义召回。</a:t>
             </a:r>
           </a:p>
         </p:txBody>
@@ -11543,7 +11543,7 @@
         </p:nvSpPr>
         <p:spPr>
           <a:xfrm>
-            <a:off x="792000" y="3316800"/>
+            <a:off x="792000" y="3261600"/>
             <a:ext cx="648000" cy="432000"/>
           </a:xfrm>
           <a:prstGeom prst="rect">
@@ -11605,8 +11605,8 @@
         </p:nvSpPr>
         <p:spPr>
           <a:xfrm>
-            <a:off x="1512000" y="3594000"/>
-            <a:ext cx="3600000" cy="1020000"/>
+            <a:off x="1512000" y="3564000"/>
+            <a:ext cx="3600000" cy="1079999"/>
           </a:xfrm>
           <a:prstGeom prst="rect">
             <a:avLst/>
@@ -11627,7 +11627,7 @@
                 </a:solidFill>
                 <a:latin typeface="Microsoft YaHei"/>
               </a:rPr>
-              <a:t>attrs 精确命中绕过 min_score——查询方显式指定条件即构造性相关</a:t>
+              <a:t>attrs 精确命中绕过 min_score——查询方显式指定条件即构造性相关，不应被相似度阈值否决。</a:t>
             </a:r>
           </a:p>
         </p:txBody>
@@ -11685,7 +11685,7 @@
         </p:nvSpPr>
         <p:spPr>
           <a:xfrm>
-            <a:off x="792000" y="4876800"/>
+            <a:off x="792000" y="4773600"/>
             <a:ext cx="648000" cy="432000"/>
           </a:xfrm>
           <a:prstGeom prst="rect">
@@ -11747,8 +11747,8 @@
         </p:nvSpPr>
         <p:spPr>
           <a:xfrm>
-            <a:off x="1512000" y="5154000"/>
-            <a:ext cx="3600000" cy="1020000"/>
+            <a:off x="1512000" y="5076000"/>
+            <a:ext cx="3600000" cy="1079999"/>
           </a:xfrm>
           <a:prstGeom prst="rect">
             <a:avLst/>
@@ -11769,7 +11769,7 @@
                 </a:solidFill>
                 <a:latin typeface="Microsoft YaHei"/>
               </a:rPr>
-              <a:t>接口示例与融合策略如下</a:t>
+              <a:t>事实走精确、经验走向量；融合阶段按记忆类型先验加权，并保留来源、时间、场次等溯源字段。</a:t>
             </a:r>
           </a:p>
         </p:txBody>
@@ -11861,41 +11861,6 @@
           <a:p>
             <a:pPr algn="ctr"/>
             <a:endParaRPr/>
-          </a:p>
-        </p:txBody>
-      </p:sp>
-      <p:sp>
-        <p:nvSpPr>
-          <p:cNvPr id="19" name="TextBox 18"/>
-          <p:cNvSpPr txBox="1"/>
-          <p:nvPr/>
-        </p:nvSpPr>
-        <p:spPr>
-          <a:xfrm>
-            <a:off x="5724000" y="1684800"/>
-            <a:ext cx="3600000" cy="198000"/>
-          </a:xfrm>
-          <a:prstGeom prst="rect">
-            <a:avLst/>
-          </a:prstGeom>
-          <a:noFill/>
-        </p:spPr>
-        <p:txBody>
-          <a:bodyPr wrap="square">
-            <a:spAutoFit/>
-          </a:bodyPr>
-          <a:lstStyle/>
-          <a:p>
-            <a:pPr algn="l"/>
-            <a:r>
-              <a:rPr sz="1300" b="1">
-                <a:solidFill>
-                  <a:srgbClr val="FFFFFF"/>
-                </a:solidFill>
-                <a:latin typeface="Microsoft YaHei"/>
-              </a:rPr>
-              <a:t>代码 / 伪代码</a:t>
-            </a:r>
           </a:p>
         </p:txBody>
       </p:sp>
@@ -12218,6 +12183,115 @@
                 <a:latin typeface="Microsoft YaHei"/>
               </a:rPr>
               <a:t>15 / 28</a:t>
+            </a:r>
+          </a:p>
+        </p:txBody>
+      </p:sp>
+      <p:sp>
+        <p:nvSpPr>
+          <p:cNvPr id="26" name="TextBox 18">
+            <a:extLst>
+              <a:ext uri="{FF2B5EF4-FFF2-40B4-BE49-F238E27FC236}">
+                <a16:creationId xmlns:a16="http://schemas.microsoft.com/office/drawing/2014/main" id="{3110CDCA-B3BA-22D5-D1F1-FD5C173BE085}"/>
+              </a:ext>
+            </a:extLst>
+          </p:cNvPr>
+          <p:cNvSpPr txBox="1"/>
+          <p:nvPr/>
+        </p:nvSpPr>
+        <p:spPr>
+          <a:xfrm>
+            <a:off x="5724000" y="1643400"/>
+            <a:ext cx="3600000" cy="198000"/>
+          </a:xfrm>
+          <a:prstGeom prst="rect">
+            <a:avLst/>
+          </a:prstGeom>
+          <a:noFill/>
+        </p:spPr>
+        <p:txBody>
+          <a:bodyPr wrap="square">
+            <a:spAutoFit/>
+          </a:bodyPr>
+          <a:lstStyle/>
+          <a:p>
+            <a:pPr algn="l"/>
+            <a:r>
+              <a:rPr sz="1300" b="1">
+                <a:solidFill>
+                  <a:srgbClr val="FFFFFF"/>
+                </a:solidFill>
+                <a:latin typeface="Microsoft YaHei"/>
+              </a:rPr>
+              <a:t>代码 / 伪代码</a:t>
+            </a:r>
+          </a:p>
+        </p:txBody>
+      </p:sp>
+      <p:sp>
+        <p:nvSpPr>
+          <p:cNvPr id="27" name="TextBox 26"/>
+          <p:cNvSpPr txBox="1"/>
+          <p:nvPr/>
+        </p:nvSpPr>
+        <p:spPr>
+          <a:xfrm>
+            <a:off x="1512000" y="3240000"/>
+            <a:ext cx="3600000" cy="324000"/>
+          </a:xfrm>
+          <a:prstGeom prst="rect">
+            <a:avLst/>
+          </a:prstGeom>
+          <a:noFill/>
+        </p:spPr>
+        <p:txBody>
+          <a:bodyPr wrap="square">
+            <a:spAutoFit/>
+          </a:bodyPr>
+          <a:lstStyle/>
+          <a:p>
+            <a:r>
+              <a:rPr sz="2000" b="1">
+                <a:solidFill>
+                  <a:srgbClr val="1F3A68"/>
+                </a:solidFill>
+                <a:latin typeface="Microsoft YaHei"/>
+              </a:rPr>
+              <a:t>属性精确</a:t>
+            </a:r>
+          </a:p>
+        </p:txBody>
+      </p:sp>
+      <p:sp>
+        <p:nvSpPr>
+          <p:cNvPr id="28" name="TextBox 27"/>
+          <p:cNvSpPr txBox="1"/>
+          <p:nvPr/>
+        </p:nvSpPr>
+        <p:spPr>
+          <a:xfrm>
+            <a:off x="1512000" y="4752000"/>
+            <a:ext cx="3600000" cy="324000"/>
+          </a:xfrm>
+          <a:prstGeom prst="rect">
+            <a:avLst/>
+          </a:prstGeom>
+          <a:noFill/>
+        </p:spPr>
+        <p:txBody>
+          <a:bodyPr wrap="square">
+            <a:spAutoFit/>
+          </a:bodyPr>
+          <a:lstStyle/>
+          <a:p>
+            <a:r>
+              <a:rPr sz="2000" b="1">
+                <a:solidFill>
+                  <a:srgbClr val="1F3A68"/>
+                </a:solidFill>
+                <a:latin typeface="Microsoft YaHei"/>
+              </a:rPr>
+              <a:t>接口与融合</a:t>
             </a:r>
           </a:p>
         </p:txBody>
@@ -12415,7 +12489,7 @@
         </p:nvSpPr>
         <p:spPr>
           <a:xfrm>
-            <a:off x="792000" y="1756800"/>
+            <a:off x="792000" y="1749599"/>
             <a:ext cx="648000" cy="432000"/>
           </a:xfrm>
           <a:prstGeom prst="rect">
@@ -12477,8 +12551,8 @@
         </p:nvSpPr>
         <p:spPr>
           <a:xfrm>
-            <a:off x="1512000" y="2033999"/>
-            <a:ext cx="3600000" cy="1020000"/>
+            <a:off x="1512000" y="2052000"/>
+            <a:ext cx="3600000" cy="1079999"/>
           </a:xfrm>
           <a:prstGeom prst="rect">
             <a:avLst/>
@@ -12499,7 +12573,7 @@
                 </a:solidFill>
                 <a:latin typeface="Microsoft YaHei"/>
               </a:rPr>
-              <a:t>vector/BM25/SQL 三路；hybrid 加权累加，single 供消融</a:t>
+              <a:t>vector 语义、BM25 词法、SQL 属性精确三路并行；hybrid 加权累加，single 只走一路供消融。</a:t>
             </a:r>
           </a:p>
         </p:txBody>
@@ -12557,7 +12631,7 @@
         </p:nvSpPr>
         <p:spPr>
           <a:xfrm>
-            <a:off x="792000" y="3316800"/>
+            <a:off x="792000" y="3261600"/>
             <a:ext cx="648000" cy="432000"/>
           </a:xfrm>
           <a:prstGeom prst="rect">
@@ -12592,7 +12666,7 @@
         </p:nvSpPr>
         <p:spPr>
           <a:xfrm>
-            <a:off x="1512000" y="3288000"/>
+            <a:off x="1512000" y="3240000"/>
             <a:ext cx="3600000" cy="324000"/>
           </a:xfrm>
           <a:prstGeom prst="rect">
@@ -12627,8 +12701,8 @@
         </p:nvSpPr>
         <p:spPr>
           <a:xfrm>
-            <a:off x="1512000" y="3594000"/>
-            <a:ext cx="3600000" cy="1020000"/>
+            <a:off x="1512000" y="3564000"/>
+            <a:ext cx="3600000" cy="1079999"/>
           </a:xfrm>
           <a:prstGeom prst="rect">
             <a:avLst/>
@@ -12649,7 +12723,7 @@
                 </a:solidFill>
                 <a:latin typeface="Microsoft YaHei"/>
               </a:rPr>
-              <a:t>向量余弦、BM25 查询自匹配上界、SQL 恒 1</a:t>
+              <a:t>向量取余弦并裁剪非负；BM25 用查询自匹配作上界，避免单字巧合被放大；SQL 属性路恒为 1。</a:t>
             </a:r>
           </a:p>
         </p:txBody>
@@ -12707,7 +12781,7 @@
         </p:nvSpPr>
         <p:spPr>
           <a:xfrm>
-            <a:off x="792000" y="4876800"/>
+            <a:off x="792000" y="4773600"/>
             <a:ext cx="648000" cy="432000"/>
           </a:xfrm>
           <a:prstGeom prst="rect">
@@ -12742,7 +12816,7 @@
         </p:nvSpPr>
         <p:spPr>
           <a:xfrm>
-            <a:off x="1512000" y="4848000"/>
+            <a:off x="1512000" y="4752000"/>
             <a:ext cx="3600000" cy="324000"/>
           </a:xfrm>
           <a:prstGeom prst="rect">
@@ -12764,7 +12838,7 @@
                 </a:solidFill>
                 <a:latin typeface="Microsoft YaHei"/>
               </a:rPr>
-              <a:t>公式</a:t>
+              <a:t>融合公式</a:t>
             </a:r>
           </a:p>
         </p:txBody>
@@ -12777,8 +12851,8 @@
         </p:nvSpPr>
         <p:spPr>
           <a:xfrm>
-            <a:off x="1512000" y="5154000"/>
-            <a:ext cx="3600000" cy="1020000"/>
+            <a:off x="1512000" y="5076000"/>
+            <a:ext cx="3600000" cy="1079999"/>
           </a:xfrm>
           <a:prstGeom prst="rect">
             <a:avLst/>
@@ -12799,7 +12873,7 @@
                 </a:solidFill>
                 <a:latin typeface="Microsoft YaHei"/>
               </a:rPr>
-              <a:t>s_hybrid = Σ w_r·n_r(id)</a:t>
+              <a:t>融合分 s=Σ w_r·n_r(id)；阶段匹配加亲和分，过滤 min_score 后对最终命中只强化一次。</a:t>
             </a:r>
           </a:p>
         </p:txBody>
@@ -13793,6 +13867,40 @@
                 <a:latin typeface="Microsoft YaHei"/>
               </a:rPr>
               <a:t>16 / 28</a:t>
+            </a:r>
+          </a:p>
+        </p:txBody>
+      </p:sp>
+      <p:sp>
+        <p:nvSpPr>
+          <p:cNvPr id="25" name="TextBox 24"/>
+          <p:cNvSpPr txBox="1"/>
+          <p:nvPr/>
+        </p:nvSpPr>
+        <p:spPr>
+          <a:xfrm>
+            <a:off x="1512000" y="1728000"/>
+            <a:ext cx="3600000" cy="324000"/>
+          </a:xfrm>
+          <a:prstGeom prst="rect">
+            <a:avLst/>
+          </a:prstGeom>
+          <a:noFill/>
+        </p:spPr>
+        <p:txBody>
+          <a:bodyPr wrap="square">
+            <a:spAutoFit/>
+          </a:bodyPr>
+          <a:lstStyle/>
+          <a:p>
+            <a:r>
+              <a:rPr sz="2000" b="1">
+                <a:solidFill>
+                  <a:srgbClr val="1F3A68"/>
+                </a:solidFill>
+                <a:latin typeface="Microsoft YaHei"/>
+              </a:rPr>
+              <a:t>三路检索</a:t>
             </a:r>
           </a:p>
         </p:txBody>
@@ -13990,7 +14098,7 @@
         </p:nvSpPr>
         <p:spPr>
           <a:xfrm>
-            <a:off x="792000" y="1756800"/>
+            <a:off x="792000" y="1749599"/>
             <a:ext cx="648000" cy="432000"/>
           </a:xfrm>
           <a:prstGeom prst="rect">
@@ -14060,8 +14168,8 @@
         </p:nvSpPr>
         <p:spPr>
           <a:xfrm>
-            <a:off x="1512000" y="2033999"/>
-            <a:ext cx="3600000" cy="1020000"/>
+            <a:off x="1512000" y="2052000"/>
+            <a:ext cx="3600000" cy="1079999"/>
           </a:xfrm>
           <a:prstGeom prst="rect">
             <a:avLst/>
@@ -14082,7 +14190,7 @@
                 </a:solidFill>
                 <a:latin typeface="Microsoft YaHei"/>
               </a:rPr>
-              <a:t>LLM 提候选，确定性代码执行写/合/忘/抽</a:t>
+              <a:t>LLM 从复盘中提取候选；写入、合并、遗忘、抽象由确定性代码执行，保证可回放、可审计。</a:t>
             </a:r>
           </a:p>
         </p:txBody>
@@ -14140,7 +14248,7 @@
         </p:nvSpPr>
         <p:spPr>
           <a:xfrm>
-            <a:off x="792000" y="3316800"/>
+            <a:off x="792000" y="3261600"/>
             <a:ext cx="648000" cy="432000"/>
           </a:xfrm>
           <a:prstGeom prst="rect">
@@ -14175,7 +14283,7 @@
         </p:nvSpPr>
         <p:spPr>
           <a:xfrm>
-            <a:off x="1512000" y="3288000"/>
+            <a:off x="1512000" y="3240000"/>
             <a:ext cx="3600000" cy="324000"/>
           </a:xfrm>
           <a:prstGeom prst="rect">
@@ -14210,8 +14318,8 @@
         </p:nvSpPr>
         <p:spPr>
           <a:xfrm>
-            <a:off x="1512000" y="3594000"/>
-            <a:ext cx="3600000" cy="1020000"/>
+            <a:off x="1512000" y="3564000"/>
+            <a:ext cx="3600000" cy="1079999"/>
           </a:xfrm>
           <a:prstGeom prst="rect">
             <a:avLst/>
@@ -14232,7 +14340,7 @@
                 </a:solidFill>
                 <a:latin typeface="Microsoft YaHei"/>
               </a:rPr>
-              <a:t>R=e^{-t/S}，命中 S+1；importance≥2 保护</a:t>
+              <a:t>遗忘 R=e^{-t/S}；命中一次 S+1 并重置时间；importance≥2 受保护，失败教训不会被误删。</a:t>
             </a:r>
           </a:p>
         </p:txBody>
@@ -14290,7 +14398,7 @@
         </p:nvSpPr>
         <p:spPr>
           <a:xfrm>
-            <a:off x="792000" y="4876800"/>
+            <a:off x="792000" y="4773600"/>
             <a:ext cx="648000" cy="432000"/>
           </a:xfrm>
           <a:prstGeom prst="rect">
@@ -14352,8 +14460,8 @@
         </p:nvSpPr>
         <p:spPr>
           <a:xfrm>
-            <a:off x="1512000" y="5154000"/>
-            <a:ext cx="3600000" cy="1020000"/>
+            <a:off x="1512000" y="5076000"/>
+            <a:ext cx="3600000" cy="1079999"/>
           </a:xfrm>
           <a:prstGeom prst="rect">
             <a:avLst/>
@@ -14374,7 +14482,7 @@
                 </a:solidFill>
                 <a:latin typeface="Microsoft YaHei"/>
               </a:rPr>
-              <a:t>同场新经验≥2 条触发抽象</a:t>
+              <a:t>同场新经验≥2 条触发抽象，合成一条通用教训；相似新条目合并并记录 merged_from。</a:t>
             </a:r>
           </a:p>
         </p:txBody>
@@ -15343,6 +15451,40 @@
                 <a:latin typeface="Microsoft YaHei"/>
               </a:rPr>
               <a:t>17 / 28</a:t>
+            </a:r>
+          </a:p>
+        </p:txBody>
+      </p:sp>
+      <p:sp>
+        <p:nvSpPr>
+          <p:cNvPr id="25" name="TextBox 24"/>
+          <p:cNvSpPr txBox="1"/>
+          <p:nvPr/>
+        </p:nvSpPr>
+        <p:spPr>
+          <a:xfrm>
+            <a:off x="1512000" y="4752000"/>
+            <a:ext cx="3600000" cy="324000"/>
+          </a:xfrm>
+          <a:prstGeom prst="rect">
+            <a:avLst/>
+          </a:prstGeom>
+          <a:noFill/>
+        </p:spPr>
+        <p:txBody>
+          <a:bodyPr wrap="square">
+            <a:spAutoFit/>
+          </a:bodyPr>
+          <a:lstStyle/>
+          <a:p>
+            <a:r>
+              <a:rPr sz="2000" b="1">
+                <a:solidFill>
+                  <a:srgbClr val="1F3A68"/>
+                </a:solidFill>
+                <a:latin typeface="Microsoft YaHei"/>
+              </a:rPr>
+              <a:t>抽象与合并</a:t>
             </a:r>
           </a:p>
         </p:txBody>
@@ -15540,7 +15682,7 @@
         </p:nvSpPr>
         <p:spPr>
           <a:xfrm>
-            <a:off x="792000" y="1828800"/>
+            <a:off x="792000" y="1749599"/>
             <a:ext cx="648000" cy="432000"/>
           </a:xfrm>
           <a:prstGeom prst="rect">
@@ -15575,7 +15717,7 @@
         </p:nvSpPr>
         <p:spPr>
           <a:xfrm>
-            <a:off x="1512000" y="1800000"/>
+            <a:off x="1512000" y="1728000"/>
             <a:ext cx="9828000" cy="324000"/>
           </a:xfrm>
           <a:prstGeom prst="rect">
@@ -15610,8 +15752,8 @@
         </p:nvSpPr>
         <p:spPr>
           <a:xfrm>
-            <a:off x="1512000" y="2106000"/>
-            <a:ext cx="9828000" cy="593999"/>
+            <a:off x="1512000" y="2033999"/>
+            <a:ext cx="9828000" cy="719999"/>
           </a:xfrm>
           <a:prstGeom prst="rect">
             <a:avLst/>
@@ -15632,7 +15774,7 @@
                 </a:solidFill>
                 <a:latin typeface="Microsoft YaHei"/>
               </a:rPr>
-              <a:t>只有场次复盘文本才能触发晋升，流水账被挡在门外</a:t>
+              <a:t>只有场次复盘文本才能触发晋升；场次流水账被挡在门外，避免长期库退化成日志。</a:t>
             </a:r>
           </a:p>
         </p:txBody>
@@ -15690,7 +15832,7 @@
         </p:nvSpPr>
         <p:spPr>
           <a:xfrm>
-            <a:off x="792000" y="2962799"/>
+            <a:off x="792000" y="2883600"/>
             <a:ext cx="648000" cy="432000"/>
           </a:xfrm>
           <a:prstGeom prst="rect">
@@ -15725,7 +15867,7 @@
         </p:nvSpPr>
         <p:spPr>
           <a:xfrm>
-            <a:off x="1512000" y="2933999"/>
+            <a:off x="1512000" y="2861999"/>
             <a:ext cx="9828000" cy="324000"/>
           </a:xfrm>
           <a:prstGeom prst="rect">
@@ -15760,8 +15902,8 @@
         </p:nvSpPr>
         <p:spPr>
           <a:xfrm>
-            <a:off x="1512000" y="3240000"/>
-            <a:ext cx="9828000" cy="593999"/>
+            <a:off x="1512000" y="3167999"/>
+            <a:ext cx="9828000" cy="719999"/>
           </a:xfrm>
           <a:prstGeom prst="rect">
             <a:avLst/>
@@ -15782,7 +15924,7 @@
                 </a:solidFill>
                 <a:latin typeface="Microsoft YaHei"/>
               </a:rPr>
-              <a:t>事实/经验分别进入对应存储，避免类型混乱</a:t>
+              <a:t>事实与经验分别进入对应存储；类型混乱会导致检索口径失真，因此必须先完成分类。</a:t>
             </a:r>
           </a:p>
         </p:txBody>
@@ -15840,7 +15982,7 @@
         </p:nvSpPr>
         <p:spPr>
           <a:xfrm>
-            <a:off x="792000" y="4096799"/>
+            <a:off x="792000" y="4017599"/>
             <a:ext cx="648000" cy="432000"/>
           </a:xfrm>
           <a:prstGeom prst="rect">
@@ -15875,7 +16017,7 @@
         </p:nvSpPr>
         <p:spPr>
           <a:xfrm>
-            <a:off x="1512000" y="4067999"/>
+            <a:off x="1512000" y="3995999"/>
             <a:ext cx="9828000" cy="324000"/>
           </a:xfrm>
           <a:prstGeom prst="rect">
@@ -15910,8 +16052,8 @@
         </p:nvSpPr>
         <p:spPr>
           <a:xfrm>
-            <a:off x="1512000" y="4373999"/>
-            <a:ext cx="9828000" cy="593999"/>
+            <a:off x="1512000" y="4301999"/>
+            <a:ext cx="9828000" cy="719999"/>
           </a:xfrm>
           <a:prstGeom prst="rect">
             <a:avLst/>
@@ -15932,7 +16074,7 @@
                 </a:solidFill>
                 <a:latin typeface="Microsoft YaHei"/>
               </a:rPr>
-              <a:t>写入前 θ 余弦去重，重复经验不重复入库；每次判定写审计日志</a:t>
+              <a:t>写入前用 θ 余弦去重，重复经验不重复入库；每次放行或拒绝都写入审计日志。</a:t>
             </a:r>
           </a:p>
         </p:txBody>
@@ -15990,7 +16132,7 @@
         </p:nvSpPr>
         <p:spPr>
           <a:xfrm>
-            <a:off x="792000" y="5230800"/>
+            <a:off x="792000" y="5151600"/>
             <a:ext cx="648000" cy="432000"/>
           </a:xfrm>
           <a:prstGeom prst="rect">
@@ -16025,7 +16167,7 @@
         </p:nvSpPr>
         <p:spPr>
           <a:xfrm>
-            <a:off x="1512000" y="5202000"/>
+            <a:off x="1512000" y="5130000"/>
             <a:ext cx="9828000" cy="324000"/>
           </a:xfrm>
           <a:prstGeom prst="rect">
@@ -16060,8 +16202,8 @@
         </p:nvSpPr>
         <p:spPr>
           <a:xfrm>
-            <a:off x="1512000" y="5508000"/>
-            <a:ext cx="9828000" cy="593999"/>
+            <a:off x="1512000" y="5436000"/>
+            <a:ext cx="9828000" cy="719999"/>
           </a:xfrm>
           <a:prstGeom prst="rect">
             <a:avLst/>
@@ -16082,7 +16224,7 @@
                 </a:solidFill>
                 <a:latin typeface="Microsoft YaHei"/>
               </a:rPr>
-              <a:t>查询按 MDMP 七阶段生成，阶段匹配记忆加亲和分，复盘教训归因到阶段</a:t>
+              <a:t>查询按 MDMP 七阶段生成；阶段匹配记忆加亲和分，复盘教训按阶段归因，供后续同阶段优先召回。</a:t>
             </a:r>
           </a:p>
         </p:txBody>
@@ -16440,7 +16582,7 @@
         </p:nvSpPr>
         <p:spPr>
           <a:xfrm>
-            <a:off x="792000" y="1756800"/>
+            <a:off x="792000" y="1749599"/>
             <a:ext cx="648000" cy="432000"/>
           </a:xfrm>
           <a:prstGeom prst="rect">
@@ -16511,7 +16653,7 @@
         <p:spPr>
           <a:xfrm>
             <a:off x="1512000" y="2033999"/>
-            <a:ext cx="5256000" cy="630000"/>
+            <a:ext cx="5256000" cy="719999"/>
           </a:xfrm>
           <a:prstGeom prst="rect">
             <a:avLst/>
@@ -16532,7 +16674,7 @@
                 </a:solidFill>
                 <a:latin typeface="Microsoft YaHei"/>
               </a:rPr>
-              <a:t>左输入/中运行/右产出，长内容折叠为页签</a:t>
+              <a:t>左输入、中运行、右产出三栏；长内容折叠为页签，避免三栏纵向过长。</a:t>
             </a:r>
           </a:p>
         </p:txBody>
@@ -16590,7 +16732,7 @@
         </p:nvSpPr>
         <p:spPr>
           <a:xfrm>
-            <a:off x="792000" y="2926799"/>
+            <a:off x="792000" y="2883600"/>
             <a:ext cx="648000" cy="432000"/>
           </a:xfrm>
           <a:prstGeom prst="rect">
@@ -16625,7 +16767,7 @@
         </p:nvSpPr>
         <p:spPr>
           <a:xfrm>
-            <a:off x="1512000" y="2897999"/>
+            <a:off x="1512000" y="2861999"/>
             <a:ext cx="5256000" cy="324000"/>
           </a:xfrm>
           <a:prstGeom prst="rect">
@@ -16660,8 +16802,8 @@
         </p:nvSpPr>
         <p:spPr>
           <a:xfrm>
-            <a:off x="1512000" y="3204000"/>
-            <a:ext cx="5256000" cy="630000"/>
+            <a:off x="1512000" y="3167999"/>
+            <a:ext cx="5256000" cy="719999"/>
           </a:xfrm>
           <a:prstGeom prst="rect">
             <a:avLst/>
@@ -16682,7 +16824,7 @@
                 </a:solidFill>
                 <a:latin typeface="Microsoft YaHei"/>
               </a:rPr>
-              <a:t>总览/单条历史/遗忘日志，支持点击展开</a:t>
+              <a:t>抽屉展示总览、单条历史（op_history/merged_from）与遗忘日志；点击记忆即可展开。</a:t>
             </a:r>
           </a:p>
         </p:txBody>
@@ -16740,7 +16882,7 @@
         </p:nvSpPr>
         <p:spPr>
           <a:xfrm>
-            <a:off x="792000" y="4096800"/>
+            <a:off x="792000" y="4017599"/>
             <a:ext cx="648000" cy="432000"/>
           </a:xfrm>
           <a:prstGeom prst="rect">
@@ -16775,7 +16917,7 @@
         </p:nvSpPr>
         <p:spPr>
           <a:xfrm>
-            <a:off x="1512000" y="4068000"/>
+            <a:off x="1512000" y="3995999"/>
             <a:ext cx="5256000" cy="324000"/>
           </a:xfrm>
           <a:prstGeom prst="rect">
@@ -16810,8 +16952,8 @@
         </p:nvSpPr>
         <p:spPr>
           <a:xfrm>
-            <a:off x="1512000" y="4374000"/>
-            <a:ext cx="5256000" cy="630000"/>
+            <a:off x="1512000" y="4301999"/>
+            <a:ext cx="5256000" cy="719999"/>
           </a:xfrm>
           <a:prstGeom prst="rect">
             <a:avLst/>
@@ -16832,7 +16974,7 @@
                 </a:solidFill>
                 <a:latin typeface="Microsoft YaHei"/>
               </a:rPr>
-              <a:t>R=e^{-t/S} 与‘立即召回 S+1’对比</a:t>
+              <a:t>遗忘曲线把 R=e^{-t/S} 与“立即召回 S+1”放在同一张图对比，直观看到强化效果。</a:t>
             </a:r>
           </a:p>
         </p:txBody>
@@ -16890,7 +17032,7 @@
         </p:nvSpPr>
         <p:spPr>
           <a:xfrm>
-            <a:off x="792000" y="5266800"/>
+            <a:off x="792000" y="5151600"/>
             <a:ext cx="648000" cy="432000"/>
           </a:xfrm>
           <a:prstGeom prst="rect">
@@ -16952,8 +17094,8 @@
         </p:nvSpPr>
         <p:spPr>
           <a:xfrm>
-            <a:off x="1512000" y="5544000"/>
-            <a:ext cx="5256000" cy="630000"/>
+            <a:off x="1512000" y="5436000"/>
+            <a:ext cx="5256000" cy="719999"/>
           </a:xfrm>
           <a:prstGeom prst="rect">
             <a:avLst/>
@@ -16974,7 +17116,7 @@
                 </a:solidFill>
                 <a:latin typeface="Microsoft YaHei"/>
               </a:rPr>
-              <a:t>战役进度条、库健康度分布条、事件流点击展开详情</a:t>
+              <a:t>战役进度条、库健康度分布条、事件流点击展开；配合“模拟老化+遗忘”按钮演示遗忘。</a:t>
             </a:r>
           </a:p>
         </p:txBody>
@@ -17204,6 +17346,40 @@
                 <a:latin typeface="Microsoft YaHei"/>
               </a:rPr>
               <a:t>19 / 28</a:t>
+            </a:r>
+          </a:p>
+        </p:txBody>
+      </p:sp>
+      <p:sp>
+        <p:nvSpPr>
+          <p:cNvPr id="27" name="TextBox 26"/>
+          <p:cNvSpPr txBox="1"/>
+          <p:nvPr/>
+        </p:nvSpPr>
+        <p:spPr>
+          <a:xfrm>
+            <a:off x="1512000" y="5130000"/>
+            <a:ext cx="5256000" cy="324000"/>
+          </a:xfrm>
+          <a:prstGeom prst="rect">
+            <a:avLst/>
+          </a:prstGeom>
+          <a:noFill/>
+        </p:spPr>
+        <p:txBody>
+          <a:bodyPr wrap="square">
+            <a:spAutoFit/>
+          </a:bodyPr>
+          <a:lstStyle/>
+          <a:p>
+            <a:r>
+              <a:rPr sz="2000" b="1">
+                <a:solidFill>
+                  <a:srgbClr val="1F3A68"/>
+                </a:solidFill>
+                <a:latin typeface="Microsoft YaHei"/>
+              </a:rPr>
+              <a:t>可视化组件</a:t>
             </a:r>
           </a:p>
         </p:txBody>

--- a/汇报PPT/最终汇报成果.pptx
+++ b/汇报PPT/最终汇报成果.pptx
@@ -16653,7 +16653,7 @@
         <p:spPr>
           <a:xfrm>
             <a:off x="1512000" y="2033999"/>
-            <a:ext cx="5256000" cy="719999"/>
+            <a:ext cx="2757346" cy="738664"/>
           </a:xfrm>
           <a:prstGeom prst="rect">
             <a:avLst/>
@@ -16803,7 +16803,7 @@
         <p:spPr>
           <a:xfrm>
             <a:off x="1512000" y="3167999"/>
-            <a:ext cx="5256000" cy="719999"/>
+            <a:ext cx="2757346" cy="738664"/>
           </a:xfrm>
           <a:prstGeom prst="rect">
             <a:avLst/>
@@ -16953,7 +16953,7 @@
         <p:spPr>
           <a:xfrm>
             <a:off x="1512000" y="4301999"/>
-            <a:ext cx="5256000" cy="719999"/>
+            <a:ext cx="2757346" cy="738664"/>
           </a:xfrm>
           <a:prstGeom prst="rect">
             <a:avLst/>
@@ -17166,9 +17166,164 @@
           </a:p>
         </p:txBody>
       </p:sp>
+      <p:sp>
+        <p:nvSpPr>
+          <p:cNvPr id="24" name="Rectangle 23"/>
+          <p:cNvSpPr/>
+          <p:nvPr/>
+        </p:nvSpPr>
+        <p:spPr>
+          <a:xfrm>
+            <a:off x="0" y="6606000"/>
+            <a:ext cx="12193200" cy="10800"/>
+          </a:xfrm>
+          <a:prstGeom prst="rect">
+            <a:avLst/>
+          </a:prstGeom>
+          <a:solidFill>
+            <a:srgbClr val="C8D0DC"/>
+          </a:solidFill>
+          <a:ln>
+            <a:noFill/>
+          </a:ln>
+          <a:effectLst/>
+        </p:spPr>
+        <p:style>
+          <a:lnRef idx="1">
+            <a:schemeClr val="accent1"/>
+          </a:lnRef>
+          <a:fillRef idx="3">
+            <a:schemeClr val="accent1"/>
+          </a:fillRef>
+          <a:effectRef idx="2">
+            <a:schemeClr val="accent1"/>
+          </a:effectRef>
+          <a:fontRef idx="minor">
+            <a:schemeClr val="lt1"/>
+          </a:fontRef>
+        </p:style>
+        <p:txBody>
+          <a:bodyPr rtlCol="0" anchor="ctr"/>
+          <a:lstStyle/>
+          <a:p>
+            <a:pPr algn="ctr"/>
+            <a:endParaRPr/>
+          </a:p>
+        </p:txBody>
+      </p:sp>
+      <p:sp>
+        <p:nvSpPr>
+          <p:cNvPr id="25" name="TextBox 24"/>
+          <p:cNvSpPr txBox="1"/>
+          <p:nvPr/>
+        </p:nvSpPr>
+        <p:spPr>
+          <a:xfrm>
+            <a:off x="648000" y="6660000"/>
+            <a:ext cx="6120000" cy="180000"/>
+          </a:xfrm>
+          <a:prstGeom prst="rect">
+            <a:avLst/>
+          </a:prstGeom>
+          <a:noFill/>
+        </p:spPr>
+        <p:txBody>
+          <a:bodyPr wrap="square">
+            <a:spAutoFit/>
+          </a:bodyPr>
+          <a:lstStyle/>
+          <a:p>
+            <a:pPr algn="l"/>
+            <a:r>
+              <a:rPr sz="1000" b="0">
+                <a:solidFill>
+                  <a:srgbClr val="555F6E"/>
+                </a:solidFill>
+                <a:latin typeface="Microsoft YaHei"/>
+              </a:rPr>
+              <a:t>国防科技大学 · 长短期记忆系统</a:t>
+            </a:r>
+          </a:p>
+        </p:txBody>
+      </p:sp>
+      <p:sp>
+        <p:nvSpPr>
+          <p:cNvPr id="26" name="TextBox 25"/>
+          <p:cNvSpPr txBox="1"/>
+          <p:nvPr/>
+        </p:nvSpPr>
+        <p:spPr>
+          <a:xfrm>
+            <a:off x="10260000" y="6660000"/>
+            <a:ext cx="1440000" cy="180000"/>
+          </a:xfrm>
+          <a:prstGeom prst="rect">
+            <a:avLst/>
+          </a:prstGeom>
+          <a:noFill/>
+        </p:spPr>
+        <p:txBody>
+          <a:bodyPr wrap="square">
+            <a:spAutoFit/>
+          </a:bodyPr>
+          <a:lstStyle/>
+          <a:p>
+            <a:pPr algn="r"/>
+            <a:r>
+              <a:rPr sz="1000" b="0">
+                <a:solidFill>
+                  <a:srgbClr val="555F6E"/>
+                </a:solidFill>
+                <a:latin typeface="Microsoft YaHei"/>
+              </a:rPr>
+              <a:t>19 / 28</a:t>
+            </a:r>
+          </a:p>
+        </p:txBody>
+      </p:sp>
+      <p:sp>
+        <p:nvSpPr>
+          <p:cNvPr id="27" name="TextBox 26"/>
+          <p:cNvSpPr txBox="1"/>
+          <p:nvPr/>
+        </p:nvSpPr>
+        <p:spPr>
+          <a:xfrm>
+            <a:off x="1512000" y="5130000"/>
+            <a:ext cx="5256000" cy="324000"/>
+          </a:xfrm>
+          <a:prstGeom prst="rect">
+            <a:avLst/>
+          </a:prstGeom>
+          <a:noFill/>
+        </p:spPr>
+        <p:txBody>
+          <a:bodyPr wrap="square">
+            <a:spAutoFit/>
+          </a:bodyPr>
+          <a:lstStyle/>
+          <a:p>
+            <a:r>
+              <a:rPr sz="2000" b="1">
+                <a:solidFill>
+                  <a:srgbClr val="1F3A68"/>
+                </a:solidFill>
+                <a:latin typeface="Microsoft YaHei"/>
+              </a:rPr>
+              <a:t>可视化组件</a:t>
+            </a:r>
+          </a:p>
+        </p:txBody>
+      </p:sp>
       <p:pic>
         <p:nvPicPr>
-          <p:cNvPr id="22" name="Picture 21" descr="ppt_webui.png"/>
+          <p:cNvPr id="29" name="图片 28">
+            <a:extLst>
+              <a:ext uri="{FF2B5EF4-FFF2-40B4-BE49-F238E27FC236}">
+                <a16:creationId xmlns:a16="http://schemas.microsoft.com/office/drawing/2014/main" id="{B4FDF22E-FCD0-C2D2-9CFB-88ED04291570}"/>
+              </a:ext>
+            </a:extLst>
+          </p:cNvPr>
           <p:cNvPicPr>
             <a:picLocks noChangeAspect="1"/>
           </p:cNvPicPr>
@@ -17182,208 +17337,14 @@
         </p:blipFill>
         <p:spPr>
           <a:xfrm>
-            <a:off x="7632000" y="1667199"/>
-            <a:ext cx="3924000" cy="4621600"/>
+            <a:off x="4471221" y="1570994"/>
+            <a:ext cx="7293173" cy="3883006"/>
           </a:xfrm>
           <a:prstGeom prst="rect">
             <a:avLst/>
           </a:prstGeom>
         </p:spPr>
       </p:pic>
-      <p:sp>
-        <p:nvSpPr>
-          <p:cNvPr id="23" name="Rectangle 22"/>
-          <p:cNvSpPr/>
-          <p:nvPr/>
-        </p:nvSpPr>
-        <p:spPr>
-          <a:xfrm>
-            <a:off x="7632000" y="1655999"/>
-            <a:ext cx="3924000" cy="4644000"/>
-          </a:xfrm>
-          <a:prstGeom prst="rect">
-            <a:avLst/>
-          </a:prstGeom>
-          <a:noFill/>
-          <a:ln w="15240">
-            <a:solidFill>
-              <a:srgbClr val="2F6EBA"/>
-            </a:solidFill>
-          </a:ln>
-          <a:effectLst/>
-        </p:spPr>
-        <p:style>
-          <a:lnRef idx="1">
-            <a:schemeClr val="accent1"/>
-          </a:lnRef>
-          <a:fillRef idx="3">
-            <a:schemeClr val="accent1"/>
-          </a:fillRef>
-          <a:effectRef idx="2">
-            <a:schemeClr val="accent1"/>
-          </a:effectRef>
-          <a:fontRef idx="minor">
-            <a:schemeClr val="lt1"/>
-          </a:fontRef>
-        </p:style>
-        <p:txBody>
-          <a:bodyPr rtlCol="0" anchor="ctr"/>
-          <a:lstStyle/>
-          <a:p>
-            <a:pPr algn="ctr"/>
-            <a:endParaRPr/>
-          </a:p>
-        </p:txBody>
-      </p:sp>
-      <p:sp>
-        <p:nvSpPr>
-          <p:cNvPr id="24" name="Rectangle 23"/>
-          <p:cNvSpPr/>
-          <p:nvPr/>
-        </p:nvSpPr>
-        <p:spPr>
-          <a:xfrm>
-            <a:off x="0" y="6606000"/>
-            <a:ext cx="12193200" cy="10800"/>
-          </a:xfrm>
-          <a:prstGeom prst="rect">
-            <a:avLst/>
-          </a:prstGeom>
-          <a:solidFill>
-            <a:srgbClr val="C8D0DC"/>
-          </a:solidFill>
-          <a:ln>
-            <a:noFill/>
-          </a:ln>
-          <a:effectLst/>
-        </p:spPr>
-        <p:style>
-          <a:lnRef idx="1">
-            <a:schemeClr val="accent1"/>
-          </a:lnRef>
-          <a:fillRef idx="3">
-            <a:schemeClr val="accent1"/>
-          </a:fillRef>
-          <a:effectRef idx="2">
-            <a:schemeClr val="accent1"/>
-          </a:effectRef>
-          <a:fontRef idx="minor">
-            <a:schemeClr val="lt1"/>
-          </a:fontRef>
-        </p:style>
-        <p:txBody>
-          <a:bodyPr rtlCol="0" anchor="ctr"/>
-          <a:lstStyle/>
-          <a:p>
-            <a:pPr algn="ctr"/>
-            <a:endParaRPr/>
-          </a:p>
-        </p:txBody>
-      </p:sp>
-      <p:sp>
-        <p:nvSpPr>
-          <p:cNvPr id="25" name="TextBox 24"/>
-          <p:cNvSpPr txBox="1"/>
-          <p:nvPr/>
-        </p:nvSpPr>
-        <p:spPr>
-          <a:xfrm>
-            <a:off x="648000" y="6660000"/>
-            <a:ext cx="6120000" cy="180000"/>
-          </a:xfrm>
-          <a:prstGeom prst="rect">
-            <a:avLst/>
-          </a:prstGeom>
-          <a:noFill/>
-        </p:spPr>
-        <p:txBody>
-          <a:bodyPr wrap="square">
-            <a:spAutoFit/>
-          </a:bodyPr>
-          <a:lstStyle/>
-          <a:p>
-            <a:pPr algn="l"/>
-            <a:r>
-              <a:rPr sz="1000" b="0">
-                <a:solidFill>
-                  <a:srgbClr val="555F6E"/>
-                </a:solidFill>
-                <a:latin typeface="Microsoft YaHei"/>
-              </a:rPr>
-              <a:t>国防科技大学 · 长短期记忆系统</a:t>
-            </a:r>
-          </a:p>
-        </p:txBody>
-      </p:sp>
-      <p:sp>
-        <p:nvSpPr>
-          <p:cNvPr id="26" name="TextBox 25"/>
-          <p:cNvSpPr txBox="1"/>
-          <p:nvPr/>
-        </p:nvSpPr>
-        <p:spPr>
-          <a:xfrm>
-            <a:off x="10260000" y="6660000"/>
-            <a:ext cx="1440000" cy="180000"/>
-          </a:xfrm>
-          <a:prstGeom prst="rect">
-            <a:avLst/>
-          </a:prstGeom>
-          <a:noFill/>
-        </p:spPr>
-        <p:txBody>
-          <a:bodyPr wrap="square">
-            <a:spAutoFit/>
-          </a:bodyPr>
-          <a:lstStyle/>
-          <a:p>
-            <a:pPr algn="r"/>
-            <a:r>
-              <a:rPr sz="1000" b="0">
-                <a:solidFill>
-                  <a:srgbClr val="555F6E"/>
-                </a:solidFill>
-                <a:latin typeface="Microsoft YaHei"/>
-              </a:rPr>
-              <a:t>19 / 28</a:t>
-            </a:r>
-          </a:p>
-        </p:txBody>
-      </p:sp>
-      <p:sp>
-        <p:nvSpPr>
-          <p:cNvPr id="27" name="TextBox 26"/>
-          <p:cNvSpPr txBox="1"/>
-          <p:nvPr/>
-        </p:nvSpPr>
-        <p:spPr>
-          <a:xfrm>
-            <a:off x="1512000" y="5130000"/>
-            <a:ext cx="5256000" cy="324000"/>
-          </a:xfrm>
-          <a:prstGeom prst="rect">
-            <a:avLst/>
-          </a:prstGeom>
-          <a:noFill/>
-        </p:spPr>
-        <p:txBody>
-          <a:bodyPr wrap="square">
-            <a:spAutoFit/>
-          </a:bodyPr>
-          <a:lstStyle/>
-          <a:p>
-            <a:r>
-              <a:rPr sz="2000" b="1">
-                <a:solidFill>
-                  <a:srgbClr val="1F3A68"/>
-                </a:solidFill>
-                <a:latin typeface="Microsoft YaHei"/>
-              </a:rPr>
-              <a:t>可视化组件</a:t>
-            </a:r>
-          </a:p>
-        </p:txBody>
-      </p:sp>
     </p:spTree>
   </p:cSld>
   <p:clrMapOvr>
@@ -23518,7 +23479,7 @@
         <p:spPr>
           <a:xfrm>
             <a:off x="1512000" y="2033999"/>
-            <a:ext cx="5256000" cy="630000"/>
+            <a:ext cx="5256000" cy="827999"/>
           </a:xfrm>
           <a:prstGeom prst="rect">
             <a:avLst/>
@@ -23539,7 +23500,7 @@
                 </a:solidFill>
                 <a:latin typeface="Microsoft YaHei"/>
               </a:rPr>
-              <a:t>不依赖‘场次结束’，可随时触发进化</a:t>
+              <a:t>不依赖‘场次结束’，可随时触发进化；对应智戎可能没有明确复盘点的情况。</a:t>
             </a:r>
           </a:p>
         </p:txBody>
@@ -23668,7 +23629,7 @@
         <p:spPr>
           <a:xfrm>
             <a:off x="1512000" y="3204000"/>
-            <a:ext cx="5256000" cy="630000"/>
+            <a:ext cx="5256000" cy="827999"/>
           </a:xfrm>
           <a:prstGeom prst="rect">
             <a:avLst/>
@@ -23689,7 +23650,7 @@
                 </a:solidFill>
                 <a:latin typeface="Microsoft YaHei"/>
               </a:rPr>
-              <a:t>AFSIM 数值/事件转复盘文本，失败补‘教训’</a:t>
+              <a:t>AFSIM 数值/事件转复盘文本，失败补‘教训’、成功补‘经验’，让结构化结果也能进化。</a:t>
             </a:r>
           </a:p>
         </p:txBody>
@@ -23818,7 +23779,7 @@
         <p:spPr>
           <a:xfrm>
             <a:off x="1512000" y="4374000"/>
-            <a:ext cx="5256000" cy="630000"/>
+            <a:ext cx="5256000" cy="827999"/>
           </a:xfrm>
           <a:prstGeom prst="rect">
             <a:avLst/>
@@ -23839,7 +23800,7 @@
                 </a:solidFill>
                 <a:latin typeface="Microsoft YaHei"/>
               </a:rPr>
-              <a:t>结构化任务 → goal/constraints/queries</a:t>
+              <a:t>结构化任务 → goal/constraints/queries；支持字段别名，无查询时用阶段模板兜底。</a:t>
             </a:r>
           </a:p>
         </p:txBody>
@@ -23968,7 +23929,7 @@
         <p:spPr>
           <a:xfrm>
             <a:off x="1512000" y="5544000"/>
-            <a:ext cx="5256000" cy="630000"/>
+            <a:ext cx="5256000" cy="827999"/>
           </a:xfrm>
           <a:prstGeom prst="rect">
             <a:avLst/>
@@ -23989,7 +23950,7 @@
                 </a:solidFill>
                 <a:latin typeface="Microsoft YaHei"/>
               </a:rPr>
-              <a:t>领域巡检 + min_score 建议，等待真实数据</a:t>
+              <a:t>领域巡检 + min_score 建议；接入真实数据前用它检查词表覆盖与阈值。</a:t>
             </a:r>
           </a:p>
         </p:txBody>
@@ -24567,7 +24528,7 @@
         <p:spPr>
           <a:xfrm>
             <a:off x="1296000" y="2311200"/>
-            <a:ext cx="4338000" cy="1584000"/>
+            <a:ext cx="4338000" cy="900000"/>
           </a:xfrm>
           <a:prstGeom prst="rect">
             <a:avLst/>
@@ -24588,7 +24549,7 @@
                 </a:solidFill>
                 <a:latin typeface="Microsoft YaHei"/>
               </a:rPr>
-              <a:t>结构层结论在词袋固定设置下稳定，双库 p=0.0001</a:t>
+              <a:t>结构层结论在词袋固定设置下稳定：双库贡献 p=0.0001，跨场次 0.83 对 0。</a:t>
             </a:r>
           </a:p>
         </p:txBody>
@@ -24601,7 +24562,7 @@
         </p:nvSpPr>
         <p:spPr>
           <a:xfrm>
-            <a:off x="792000" y="4103999"/>
+            <a:off x="792000" y="3491999"/>
             <a:ext cx="576000" cy="360000"/>
           </a:xfrm>
           <a:prstGeom prst="rect">
@@ -24636,7 +24597,7 @@
         </p:nvSpPr>
         <p:spPr>
           <a:xfrm>
-            <a:off x="1296000" y="4111199"/>
+            <a:off x="1296000" y="3499199"/>
             <a:ext cx="4338000" cy="216000"/>
           </a:xfrm>
           <a:prstGeom prst="rect">
@@ -24671,8 +24632,8 @@
         </p:nvSpPr>
         <p:spPr>
           <a:xfrm>
-            <a:off x="1296000" y="4327199"/>
-            <a:ext cx="4338000" cy="1584000"/>
+            <a:off x="1296000" y="3715199"/>
+            <a:ext cx="4338000" cy="900000"/>
           </a:xfrm>
           <a:prstGeom prst="rect">
             <a:avLst/>
@@ -24693,7 +24654,7 @@
                 </a:solidFill>
                 <a:latin typeface="Microsoft YaHei"/>
               </a:rPr>
-              <a:t>DeepSeek 引用率 1.00，检索-生成链路打通</a:t>
+              <a:t>DeepSeek 引用率 1.00，检索-生成链路打通；规划输出确实使用了装载记忆。</a:t>
             </a:r>
           </a:p>
         </p:txBody>
@@ -24857,7 +24818,7 @@
         <p:spPr>
           <a:xfrm>
             <a:off x="6642000" y="2311200"/>
-            <a:ext cx="4338000" cy="1224000"/>
+            <a:ext cx="4338000" cy="720000"/>
           </a:xfrm>
           <a:prstGeom prst="rect">
             <a:avLst/>
@@ -24878,7 +24839,7 @@
                 </a:solidFill>
                 <a:latin typeface="Microsoft YaHei"/>
               </a:rPr>
-              <a:t>重跑消融并重标定 min_score/θ</a:t>
+              <a:t>重跑消融并在真实向量下重标定 min_score/θ。</a:t>
             </a:r>
           </a:p>
         </p:txBody>
@@ -24891,7 +24852,7 @@
         </p:nvSpPr>
         <p:spPr>
           <a:xfrm>
-            <a:off x="6138000" y="3240000"/>
+            <a:off x="6138000" y="3168000"/>
             <a:ext cx="576000" cy="360000"/>
           </a:xfrm>
           <a:prstGeom prst="rect">
@@ -24926,7 +24887,7 @@
         </p:nvSpPr>
         <p:spPr>
           <a:xfrm>
-            <a:off x="6642000" y="3247200"/>
+            <a:off x="6642000" y="3175200"/>
             <a:ext cx="4338000" cy="216000"/>
           </a:xfrm>
           <a:prstGeom prst="rect">
@@ -24961,8 +24922,8 @@
         </p:nvSpPr>
         <p:spPr>
           <a:xfrm>
-            <a:off x="6642000" y="3463199"/>
-            <a:ext cx="4338000" cy="1224000"/>
+            <a:off x="6642000" y="3391200"/>
+            <a:ext cx="4338000" cy="720000"/>
           </a:xfrm>
           <a:prstGeom prst="rect">
             <a:avLst/>
@@ -24983,7 +24944,7 @@
                 </a:solidFill>
                 <a:latin typeface="Microsoft YaHei"/>
               </a:rPr>
-              <a:t>H 类扩至 20 条，让 p 值有意义</a:t>
+              <a:t>H 类扩至 20 条，让跨场次 p 值具备统计意义。</a:t>
             </a:r>
           </a:p>
         </p:txBody>
@@ -24996,7 +24957,7 @@
         </p:nvSpPr>
         <p:spPr>
           <a:xfrm>
-            <a:off x="6138000" y="4392000"/>
+            <a:off x="6138000" y="4248000"/>
             <a:ext cx="576000" cy="360000"/>
           </a:xfrm>
           <a:prstGeom prst="rect">
@@ -25031,7 +24992,7 @@
         </p:nvSpPr>
         <p:spPr>
           <a:xfrm>
-            <a:off x="6642000" y="4399200"/>
+            <a:off x="6642000" y="4255200"/>
             <a:ext cx="4338000" cy="216000"/>
           </a:xfrm>
           <a:prstGeom prst="rect">
@@ -25066,8 +25027,8 @@
         </p:nvSpPr>
         <p:spPr>
           <a:xfrm>
-            <a:off x="6642000" y="4615199"/>
-            <a:ext cx="4338000" cy="1224000"/>
+            <a:off x="6642000" y="4471200"/>
+            <a:ext cx="4338000" cy="720000"/>
           </a:xfrm>
           <a:prstGeom prst="rect">
             <a:avLst/>
@@ -25088,7 +25049,7 @@
                 </a:solidFill>
                 <a:latin typeface="Microsoft YaHei"/>
               </a:rPr>
-              <a:t>知识锚定、冲突仲裁、软删除</a:t>
+              <a:t>知识锚定校验、经验冲突仲裁、遗忘软删除。</a:t>
             </a:r>
           </a:p>
         </p:txBody>
@@ -25101,7 +25062,7 @@
         </p:nvSpPr>
         <p:spPr>
           <a:xfrm>
-            <a:off x="6138000" y="5543999"/>
+            <a:off x="6138000" y="5328000"/>
             <a:ext cx="576000" cy="360000"/>
           </a:xfrm>
           <a:prstGeom prst="rect">
@@ -25136,7 +25097,7 @@
         </p:nvSpPr>
         <p:spPr>
           <a:xfrm>
-            <a:off x="6642000" y="5551199"/>
+            <a:off x="6642000" y="5335200"/>
             <a:ext cx="4338000" cy="216000"/>
           </a:xfrm>
           <a:prstGeom prst="rect">
@@ -25171,8 +25132,8 @@
         </p:nvSpPr>
         <p:spPr>
           <a:xfrm>
-            <a:off x="6642000" y="5767200"/>
-            <a:ext cx="4338000" cy="1224000"/>
+            <a:off x="6642000" y="5551200"/>
+            <a:ext cx="4338000" cy="720000"/>
           </a:xfrm>
           <a:prstGeom prst="rect">
             <a:avLst/>
@@ -25193,7 +25154,7 @@
                 </a:solidFill>
                 <a:latin typeface="Microsoft YaHei"/>
               </a:rPr>
-              <a:t>真实链路与领域巡检</a:t>
+              <a:t>接入真实链路，运行领域巡检与端到端联调。</a:t>
             </a:r>
           </a:p>
         </p:txBody>
@@ -25344,6 +25305,108 @@
                 <a:latin typeface="Microsoft YaHei"/>
               </a:rPr>
               <a:t>27 / 28</a:t>
+            </a:r>
+          </a:p>
+        </p:txBody>
+      </p:sp>
+      <p:sp>
+        <p:nvSpPr>
+          <p:cNvPr id="32" name="TextBox 31"/>
+          <p:cNvSpPr txBox="1"/>
+          <p:nvPr/>
+        </p:nvSpPr>
+        <p:spPr>
+          <a:xfrm>
+            <a:off x="792000" y="4896000"/>
+            <a:ext cx="576000" cy="360000"/>
+          </a:xfrm>
+          <a:prstGeom prst="rect">
+            <a:avLst/>
+          </a:prstGeom>
+          <a:noFill/>
+        </p:spPr>
+        <p:txBody>
+          <a:bodyPr wrap="square">
+            <a:spAutoFit/>
+          </a:bodyPr>
+          <a:lstStyle/>
+          <a:p>
+            <a:r>
+              <a:rPr sz="1800" b="1">
+                <a:solidFill>
+                  <a:srgbClr val="2F6EBA"/>
+                </a:solidFill>
+                <a:latin typeface="Microsoft YaHei"/>
+              </a:rPr>
+              <a:t>03</a:t>
+            </a:r>
+          </a:p>
+        </p:txBody>
+      </p:sp>
+      <p:sp>
+        <p:nvSpPr>
+          <p:cNvPr id="33" name="TextBox 32"/>
+          <p:cNvSpPr txBox="1"/>
+          <p:nvPr/>
+        </p:nvSpPr>
+        <p:spPr>
+          <a:xfrm>
+            <a:off x="1296000" y="4903200"/>
+            <a:ext cx="4338000" cy="216000"/>
+          </a:xfrm>
+          <a:prstGeom prst="rect">
+            <a:avLst/>
+          </a:prstGeom>
+          <a:noFill/>
+        </p:spPr>
+        <p:txBody>
+          <a:bodyPr wrap="square">
+            <a:spAutoFit/>
+          </a:bodyPr>
+          <a:lstStyle/>
+          <a:p>
+            <a:r>
+              <a:rPr sz="1600" b="1">
+                <a:solidFill>
+                  <a:srgbClr val="1F3A68"/>
+                </a:solidFill>
+                <a:latin typeface="Microsoft YaHei"/>
+              </a:rPr>
+              <a:t>工程可交付</a:t>
+            </a:r>
+          </a:p>
+        </p:txBody>
+      </p:sp>
+      <p:sp>
+        <p:nvSpPr>
+          <p:cNvPr id="34" name="TextBox 33"/>
+          <p:cNvSpPr txBox="1"/>
+          <p:nvPr/>
+        </p:nvSpPr>
+        <p:spPr>
+          <a:xfrm>
+            <a:off x="1296000" y="5119200"/>
+            <a:ext cx="4338000" cy="900000"/>
+          </a:xfrm>
+          <a:prstGeom prst="rect">
+            <a:avLst/>
+          </a:prstGeom>
+          <a:noFill/>
+        </p:spPr>
+        <p:txBody>
+          <a:bodyPr wrap="square">
+            <a:spAutoFit/>
+          </a:bodyPr>
+          <a:lstStyle/>
+          <a:p>
+            <a:r>
+              <a:rPr sz="1300" b="0">
+                <a:solidFill>
+                  <a:srgbClr val="555F6E"/>
+                </a:solidFill>
+                <a:latin typeface="Microsoft YaHei"/>
+              </a:rPr>
+              <a:t>WebUI 66/66 自检通过，智戎 P0 适配与自检 5/5 已落地。</a:t>
             </a:r>
           </a:p>
         </p:txBody>
